--- a/倉管Agent_專案簡報.pptx
+++ b/倉管Agent_專案簡報.pptx
@@ -712,7 +712,7 @@
               <a:rPr sz="1200">
                 <a:latin typeface="Microsoft JhengHei"/>
               </a:rPr>
-              <a:t>封面。定位：這是晶片團隊的軟體成果——一個能展示邊緣 AI 落地的真實應用。一句話說清楚產品：自然語言問倉管、一秒回答、跑在便宜的樹莓派上。三個數字：270M 是模型只有 2.7 億參數（業界主流 3B-8B 的零頭）、35 輪是品質收斂的迭代次數、100% 是回歸測試通過率。底線一句話點出硬體路線圖：現在純 CPU、下一步接自研晶片加速。</a:t>
+              <a:t>封面。定位：這是晶片團隊的軟體成果——一個能展示邊緣 AI 落地的真實應用。一句話說清楚產品：自然語言問倉管、一秒回答、跑在便宜的樹莓派上。三個數字：270M 是模型只有 2.7 億參數（業界主流 3B-8B 的零頭）、42 輪是品質收斂的迭代次數、100% 是回歸測試通過率。底線一句話點出硬體路線圖：現在純 CPU、下一步接自研晶片加速。</a:t>
             </a:r>
           </a:p>
         </p:txBody>
@@ -1953,7 +1953,7 @@
               <a:rPr sz="1200">
                 <a:latin typeface="Microsoft JhengHei"/>
               </a:rPr>
-              <a:t>FastText 是 Facebook 開源的輕量文字分類技術：詞向量平均＋線性分類器，沒有生成、沒有推理，所以毫秒級、確定性（同句同答案）。重點澄清：FastText 出廠不帶任何分類類別——官方只有語言辨識模型和詞向量，意圖分類一定要自備語料從零訓練；我們的 14 類直接對應倉管工具名，訓練語料跟 LLM 微調同源（5,849 筆），所以 clf 和 LLM 判斷口徑一致。分工哲學：clf 管「做什麼」（路由），270M 管「參數是什麼」（抽取）——路由要穩定用分類器，抽取要泛化用 LLM，各用其長。高信心（conf≥0.8）且不需參數的功能直接跳過 LLM，是「一秒回答」的主要來源。</a:t>
+              <a:t>FastText 是 Facebook 開源的輕量文字分類技術：詞向量平均＋線性分類器，沒有生成、沒有推理，所以毫秒級、確定性（同句同答案）。重點澄清：FastText 出廠不帶任何分類類別——官方只有語言辨識模型和詞向量，意圖分類一定要自備語料從零訓練；我們的 14 類直接對應倉管工具名，訓練語料跟 LLM 微調同源（5,849 筆），所以 clf 和 LLM 判斷口徑一致。分工哲學：clf 管「做什麼」（路由），270M 管「參數是什麼」（抽取）——路由要穩定用分類器，抽取要泛化用 LLM，各用其長。高信心（conf≥0.8）且不需參數的功能直接跳過 LLM，是「一秒回答」的主要來源。彩蛋（可講）：這顆分類器曾因 fasttext×numpy2 不相容在展示機上靜默死亡三週，期間 42 輪、六套回歸照樣雙平台 100%——LLM+校正層獨自扛住，正是縱深防禦的實證；修復後展示機過半問題毫秒級回答、路由徽章首次亮起。</a:t>
             </a:r>
           </a:p>
         </p:txBody>
@@ -5368,7 +5368,7 @@
                 </a:solidFill>
                 <a:latin typeface="Arial"/>
               </a:rPr>
-              <a:t>35 輪</a:t>
+              <a:t>42 輪</a:t>
             </a:r>
           </a:p>
         </p:txBody>
@@ -7389,7 +7389,7 @@
                 </a:solidFill>
                 <a:latin typeface="Arial"/>
               </a:rPr>
-              <a:t>865 句</a:t>
+              <a:t>882 句</a:t>
             </a:r>
           </a:p>
         </p:txBody>
@@ -10678,7 +10678,7 @@
                 </a:solidFill>
                 <a:latin typeface="Microsoft JhengHei"/>
               </a:rPr>
-              <a:t>35+ 輪迭代，守衛庫從 138 句長到 865 句</a:t>
+              <a:t>42 輪迭代，守衛庫從 138 句長到 882 句</a:t>
             </a:r>
           </a:p>
         </p:txBody>
@@ -11017,7 +11017,7 @@
                 </a:solidFill>
                 <a:latin typeface="Microsoft JhengHei"/>
               </a:rPr>
-              <a:t>每修一個 bug 就存一句守衛 → 865 句形成防護網，任何改動只要跑回歸就知道有沒有踩壞舊功能</a:t>
+              <a:t>每修一個 bug 就存一句守衛 → 882 句形成防護網，任何改動只要跑回歸就知道有沒有踩壞舊功能</a:t>
             </a:r>
           </a:p>
         </p:txBody>

--- a/倉管Agent_專案簡報.pptx
+++ b/倉管Agent_專案簡報.pptx
@@ -23,6 +23,9 @@
     <p:sldId id="271" r:id="rId23"/>
     <p:sldId id="272" r:id="rId24"/>
     <p:sldId id="273" r:id="rId25"/>
+    <p:sldId id="274" r:id="rId26"/>
+    <p:sldId id="275" r:id="rId27"/>
+    <p:sldId id="276" r:id="rId28"/>
   </p:sldIdLst>
   <p:sldSz cx="12188952" cy="6858000" type="screen4x3"/>
   <p:notesSz cx="6858000" cy="9144000"/>
@@ -175,9 +178,9 @@
           </c:spPr>
           <c:cat>
             <c:strRef>
-              <c:f>Sheet1!$A$2:$A$5</c:f>
+              <c:f>Sheet1!$A$2:$A$6</c:f>
               <c:strCache>
-                <c:ptCount val="4"/>
+                <c:ptCount val="5"/>
                 <c:pt idx="0">
                   <c:v>初期</c:v>
                 </c:pt>
@@ -193,15 +196,19 @@
                   <c:v>多輪
 全枚舉</c:v>
                 </c:pt>
+                <c:pt idx="4">
+                  <c:v>語音 POC
+真人聲</c:v>
+                </c:pt>
               </c:strCache>
             </c:strRef>
           </c:cat>
           <c:val>
             <c:numRef>
-              <c:f>Sheet1!$B$2:$B$5</c:f>
+              <c:f>Sheet1!$B$2:$B$6</c:f>
               <c:numCache>
                 <c:formatCode>General</c:formatCode>
-                <c:ptCount val="4"/>
+                <c:ptCount val="5"/>
                 <c:pt idx="0">
                   <c:v>138</c:v>
                 </c:pt>
@@ -212,7 +219,10 @@
                   <c:v>855</c:v>
                 </c:pt>
                 <c:pt idx="3">
-                  <c:v>866</c:v>
+                  <c:v>978</c:v>
+                </c:pt>
+                <c:pt idx="4">
+                  <c:v>1122</c:v>
                 </c:pt>
               </c:numCache>
             </c:numRef>
@@ -712,7 +722,7 @@
               <a:rPr sz="1200">
                 <a:latin typeface="Microsoft JhengHei"/>
               </a:rPr>
-              <a:t>封面。定位：這是晶片團隊的軟體成果——一個能展示邊緣 AI 落地的真實應用。一句話說清楚產品：自然語言問倉管、一秒回答、跑在便宜的樹莓派上。三個數字：270M 是模型只有 2.7 億參數（業界主流 3B-8B 的零頭）、42 輪是品質收斂的迭代次數、100% 是回歸測試通過率。底線一句話點出硬體路線圖：現在純 CPU、下一步接自研晶片加速。</a:t>
+              <a:t>封面。定位：這是晶片團隊的軟體成果——一個能展示邊緣 AI 落地的真實應用。一句話說清楚產品：自然語言問倉管、一秒回答、跑在便宜的樹莓派上。三個數字：270M 是模型只有 2.7 億參數（業界主流 3B-8B 的零頭）、100+ 輪是品質收斂的迭代次數、100% 是回歸測試通過率。底線一句話點出硬體路線圖：現在純 CPU、下一步接自研晶片加速。</a:t>
             </a:r>
           </a:p>
         </p:txBody>
@@ -1369,7 +1379,80 @@
               <a:rPr sz="1200">
                 <a:latin typeface="Microsoft JhengHei"/>
               </a:rPr>
-              <a:t>總結三張卡：價值、技術、品質。收尾一句下一步。整份簡報的主軸——用最小的模型、最便宜的硬體，做到可以用數字證明的品質。</a:t>
+              <a:t>語音 POC 全鏈架構（2026-07 新增）。核心設計：語音只是新入口，倉管後端完全不動。前端 Siri 式點一下自動結束；Fun-ASR-Nano 在 RPi5 純 CPU 離線辨識（展場無網路也能跑）；OpenCC 轉繁 + 同音修正層清理 ASR 錯字；最後交回既有倉管 WS。同音修正層刻意只掛 /api/asr 出口——打字訪客零影響、守衛零風險。</a:t>
+            </a:r>
+          </a:p>
+        </p:txBody>
+      </p:sp>
+      <p:sp>
+        <p:nvSpPr>
+          <p:cNvPr id="4" name="Slide Number Placeholder 3"/>
+          <p:cNvSpPr>
+            <a:spLocks noGrp="1"/>
+          </p:cNvSpPr>
+          <p:nvPr>
+            <p:ph type="sldNum" idx="5" sz="quarter"/>
+          </p:nvPr>
+        </p:nvSpPr>
+        <p:spPr/>
+      </p:sp>
+    </p:spTree>
+  </p:cSld>
+  <p:clrMapOvr>
+    <a:masterClrMapping/>
+  </p:clrMapOvr>
+</p:notes>
+</file>
+
+<file path=ppt/notesSlides/notesSlide19.xml><?xml version="1.0" encoding="utf-8"?>
+<p:notes xmlns:a="http://schemas.openxmlformats.org/drawingml/2006/main" xmlns:p="http://schemas.openxmlformats.org/presentationml/2006/main" xmlns:r="http://schemas.openxmlformats.org/officeDocument/2006/relationships">
+  <p:cSld>
+    <p:spTree>
+      <p:nvGrpSpPr>
+        <p:cNvPr id="1" name=""/>
+        <p:cNvGrpSpPr/>
+        <p:nvPr/>
+      </p:nvGrpSpPr>
+      <p:grpSpPr>
+        <a:xfrm>
+          <a:off x="0" y="0"/>
+          <a:ext cx="0" cy="0"/>
+          <a:chOff x="0" y="0"/>
+          <a:chExt cx="0" cy="0"/>
+        </a:xfrm>
+      </p:grpSpPr>
+      <p:sp>
+        <p:nvSpPr>
+          <p:cNvPr id="2" name="Slide Image Placeholder 1"/>
+          <p:cNvSpPr>
+            <a:spLocks noGrp="1"/>
+          </p:cNvSpPr>
+          <p:nvPr>
+            <p:ph type="sldImg" idx="2"/>
+          </p:nvPr>
+        </p:nvSpPr>
+        <p:spPr/>
+      </p:sp>
+      <p:sp>
+        <p:nvSpPr>
+          <p:cNvPr id="3" name="Notes Placeholder 2"/>
+          <p:cNvSpPr>
+            <a:spLocks noGrp="1"/>
+          </p:cNvSpPr>
+          <p:nvPr>
+            <p:ph type="body" idx="3" sz="quarter"/>
+          </p:nvPr>
+        </p:nvSpPr>
+        <p:spPr/>
+        <p:txBody>
+          <a:bodyPr/>
+          <a:lstStyle/>
+          <a:p>
+            <a:r>
+              <a:rPr sz="1200">
+                <a:latin typeface="Microsoft JhengHei"/>
+              </a:rPr>
+              <a:t>★語音展場可行性的量化證據。三環境通過率 78/77/73%——關鍵訊息是「噪音幾乎不影響」（light −1%、heavy −5%）。方法上的巧思：真人只念一次、存下錄音，之後自動混噪重測，念一次測三種環境、對比公平。三大發現：噪音不是問題、音量才是關鍵變數、失敗幾乎全是 ASR 模型極限（訪客重講可解）。最終結論：現有硬體（webcam + 270M）＋正常音量就夠展場用，不用花錢升級。</a:t>
             </a:r>
           </a:p>
         </p:txBody>
@@ -1467,6 +1550,152 @@
 </p:notes>
 </file>
 
+<file path=ppt/notesSlides/notesSlide20.xml><?xml version="1.0" encoding="utf-8"?>
+<p:notes xmlns:a="http://schemas.openxmlformats.org/drawingml/2006/main" xmlns:p="http://schemas.openxmlformats.org/presentationml/2006/main" xmlns:r="http://schemas.openxmlformats.org/officeDocument/2006/relationships">
+  <p:cSld>
+    <p:spTree>
+      <p:nvGrpSpPr>
+        <p:cNvPr id="1" name=""/>
+        <p:cNvGrpSpPr/>
+        <p:nvPr/>
+      </p:nvGrpSpPr>
+      <p:grpSpPr>
+        <a:xfrm>
+          <a:off x="0" y="0"/>
+          <a:ext cx="0" cy="0"/>
+          <a:chOff x="0" y="0"/>
+          <a:chExt cx="0" cy="0"/>
+        </a:xfrm>
+      </p:grpSpPr>
+      <p:sp>
+        <p:nvSpPr>
+          <p:cNvPr id="2" name="Slide Image Placeholder 1"/>
+          <p:cNvSpPr>
+            <a:spLocks noGrp="1"/>
+          </p:cNvSpPr>
+          <p:nvPr>
+            <p:ph type="sldImg" idx="2"/>
+          </p:nvPr>
+        </p:nvSpPr>
+        <p:spPr/>
+      </p:sp>
+      <p:sp>
+        <p:nvSpPr>
+          <p:cNvPr id="3" name="Notes Placeholder 2"/>
+          <p:cNvSpPr>
+            <a:spLocks noGrp="1"/>
+          </p:cNvSpPr>
+          <p:nvPr>
+            <p:ph type="body" idx="3" sz="quarter"/>
+          </p:nvPr>
+        </p:nvSpPr>
+        <p:spPr/>
+        <p:txBody>
+          <a:bodyPr/>
+          <a:lstStyle/>
+          <a:p>
+            <a:r>
+              <a:rPr sz="1200">
+                <a:latin typeface="Microsoft JhengHei"/>
+              </a:rPr>
+              <a:t>語音容錯的兩層設計，都是真人聲實測一句句磨出來的。左＝發音容錯層：ASR 錯字多是「同音但字形差很遠」（滑鼠→華數），字形比對救不到、轉拼音就中；還做了捲舌音節還原（ㄕ/ㄗ 不分）。門檻 0.82 是實測調出來的——太低會把「衛生棉」誤配成「衛生紙」。右＝語音同音修正：只掛 ASR 出口，所以打字訪客完全不受影響、守衛零風險。關鍵原則：每條規則都有守衛把關，改規則前跑護欄測試。</a:t>
+            </a:r>
+          </a:p>
+        </p:txBody>
+      </p:sp>
+      <p:sp>
+        <p:nvSpPr>
+          <p:cNvPr id="4" name="Slide Number Placeholder 3"/>
+          <p:cNvSpPr>
+            <a:spLocks noGrp="1"/>
+          </p:cNvSpPr>
+          <p:nvPr>
+            <p:ph type="sldNum" idx="5" sz="quarter"/>
+          </p:nvPr>
+        </p:nvSpPr>
+        <p:spPr/>
+      </p:sp>
+    </p:spTree>
+  </p:cSld>
+  <p:clrMapOvr>
+    <a:masterClrMapping/>
+  </p:clrMapOvr>
+</p:notes>
+</file>
+
+<file path=ppt/notesSlides/notesSlide21.xml><?xml version="1.0" encoding="utf-8"?>
+<p:notes xmlns:a="http://schemas.openxmlformats.org/drawingml/2006/main" xmlns:p="http://schemas.openxmlformats.org/presentationml/2006/main" xmlns:r="http://schemas.openxmlformats.org/officeDocument/2006/relationships">
+  <p:cSld>
+    <p:spTree>
+      <p:nvGrpSpPr>
+        <p:cNvPr id="1" name=""/>
+        <p:cNvGrpSpPr/>
+        <p:nvPr/>
+      </p:nvGrpSpPr>
+      <p:grpSpPr>
+        <a:xfrm>
+          <a:off x="0" y="0"/>
+          <a:ext cx="0" cy="0"/>
+          <a:chOff x="0" y="0"/>
+          <a:chExt cx="0" cy="0"/>
+        </a:xfrm>
+      </p:grpSpPr>
+      <p:sp>
+        <p:nvSpPr>
+          <p:cNvPr id="2" name="Slide Image Placeholder 1"/>
+          <p:cNvSpPr>
+            <a:spLocks noGrp="1"/>
+          </p:cNvSpPr>
+          <p:nvPr>
+            <p:ph type="sldImg" idx="2"/>
+          </p:nvPr>
+        </p:nvSpPr>
+        <p:spPr/>
+      </p:sp>
+      <p:sp>
+        <p:nvSpPr>
+          <p:cNvPr id="3" name="Notes Placeholder 2"/>
+          <p:cNvSpPr>
+            <a:spLocks noGrp="1"/>
+          </p:cNvSpPr>
+          <p:nvPr>
+            <p:ph type="body" idx="3" sz="quarter"/>
+          </p:nvPr>
+        </p:nvSpPr>
+        <p:spPr/>
+        <p:txBody>
+          <a:bodyPr/>
+          <a:lstStyle/>
+          <a:p>
+            <a:r>
+              <a:rPr sz="1200">
+                <a:latin typeface="Microsoft JhengHei"/>
+              </a:rPr>
+              <a:t>總結三張卡：價值、技術、品質。收尾一句下一步。整份簡報的主軸——用最小的模型、最便宜的硬體，做到可以用數字證明的品質。</a:t>
+            </a:r>
+          </a:p>
+        </p:txBody>
+      </p:sp>
+      <p:sp>
+        <p:nvSpPr>
+          <p:cNvPr id="4" name="Slide Number Placeholder 3"/>
+          <p:cNvSpPr>
+            <a:spLocks noGrp="1"/>
+          </p:cNvSpPr>
+          <p:nvPr>
+            <p:ph type="sldNum" idx="5" sz="quarter"/>
+          </p:nvPr>
+        </p:nvSpPr>
+        <p:spPr/>
+      </p:sp>
+    </p:spTree>
+  </p:cSld>
+  <p:clrMapOvr>
+    <a:masterClrMapping/>
+  </p:clrMapOvr>
+</p:notes>
+</file>
+
 <file path=ppt/notesSlides/notesSlide3.xml><?xml version="1.0" encoding="utf-8"?>
 <p:notes xmlns:a="http://schemas.openxmlformats.org/drawingml/2006/main" xmlns:p="http://schemas.openxmlformats.org/presentationml/2006/main" xmlns:r="http://schemas.openxmlformats.org/officeDocument/2006/relationships">
   <p:cSld>
@@ -1953,7 +2182,7 @@
               <a:rPr sz="1200">
                 <a:latin typeface="Microsoft JhengHei"/>
               </a:rPr>
-              <a:t>FastText 是 Facebook 開源的輕量文字分類技術：詞向量平均＋線性分類器，沒有生成、沒有推理，所以毫秒級、確定性（同句同答案）。重點澄清：FastText 出廠不帶任何分類類別——官方只有語言辨識模型和詞向量，意圖分類一定要自備語料從零訓練；我們的 14 類直接對應倉管工具名，訓練語料跟 LLM 微調同源（5,849 筆），所以 clf 和 LLM 判斷口徑一致。分工哲學：clf 管「做什麼」（路由），270M 管「參數是什麼」（抽取）——路由要穩定用分類器，抽取要泛化用 LLM，各用其長。高信心（conf≥0.8）且不需參數的功能直接跳過 LLM，是「一秒回答」的主要來源。彩蛋（可講）：這顆分類器曾因 fasttext×numpy2 不相容在展示機上靜默死亡三週，期間 42 輪、六套回歸照樣雙平台 100%——LLM+校正層獨自扛住，正是縱深防禦的實證；修復後展示機過半問題毫秒級回答、路由徽章首次亮起。</a:t>
+              <a:t>FastText 是 Facebook 開源的輕量文字分類技術：詞向量平均＋線性分類器，沒有生成、沒有推理，所以毫秒級、確定性（同句同答案）。重點澄清：FastText 出廠不帶任何分類類別——官方只有語言辨識模型和詞向量，意圖分類一定要自備語料從零訓練；我們的 14 類直接對應倉管工具名，訓練語料跟 LLM 微調同源（5,849 筆），所以 clf 和 LLM 判斷口徑一致。分工哲學：clf 管「做什麼」（路由），270M 管「參數是什麼」（抽取）——路由要穩定用分類器，抽取要泛化用 LLM，各用其長。高信心（conf≥0.8）且不需參數的功能直接跳過 LLM，是「一秒回答」的主要來源。彩蛋（可講）：這顆分類器曾因 fasttext×numpy2 不相容在展示機上靜默死亡三週，期間 100+ 輪、六套回歸照樣雙平台 100%——LLM+校正層獨自扛住，正是縱深防禦的實證；修復後展示機過半問題毫秒級回答、路由徽章首次亮起。</a:t>
             </a:r>
           </a:p>
         </p:txBody>
@@ -5368,7 +5597,7 @@
                 </a:solidFill>
                 <a:latin typeface="Arial"/>
               </a:rPr>
-              <a:t>42 輪</a:t>
+              <a:t>100+ 輪</a:t>
             </a:r>
           </a:p>
         </p:txBody>
@@ -7389,7 +7618,7 @@
                 </a:solidFill>
                 <a:latin typeface="Arial"/>
               </a:rPr>
-              <a:t>882 句</a:t>
+              <a:t>1122 句</a:t>
             </a:r>
           </a:p>
         </p:txBody>
@@ -10678,7 +10907,7 @@
                 </a:solidFill>
                 <a:latin typeface="Microsoft JhengHei"/>
               </a:rPr>
-              <a:t>42 輪迭代，守衛庫從 138 句長到 882 句</a:t>
+              <a:t>100+ 輪迭代，守衛庫從 138 句長到 1122 句</a:t>
             </a:r>
           </a:p>
         </p:txBody>
@@ -13620,20 +13849,139 @@
       <p:grpSpPr/>
       <p:sp>
         <p:nvSpPr>
-          <p:cNvPr id="2" name="Rectangle 1"/>
+          <p:cNvPr id="2" name="TextBox 1"/>
+          <p:cNvSpPr txBox="1"/>
+          <p:nvPr/>
+        </p:nvSpPr>
+        <p:spPr>
+          <a:xfrm>
+            <a:off x="667512" y="310896"/>
+            <a:ext cx="10789920" cy="274320"/>
+          </a:xfrm>
+          <a:prstGeom prst="rect">
+            <a:avLst/>
+          </a:prstGeom>
+          <a:noFill/>
+        </p:spPr>
+        <p:txBody>
+          <a:bodyPr wrap="square" lIns="0" rIns="0" tIns="0" bIns="0" anchor="t">
+            <a:spAutoFit/>
+          </a:bodyPr>
+          <a:lstStyle/>
+          <a:p>
+            <a:pPr algn="l">
+              <a:lnSpc>
+                <a:spcPct val="115000"/>
+              </a:lnSpc>
+            </a:pPr>
+            <a:r>
+              <a:rPr sz="1250" b="1">
+                <a:solidFill>
+                  <a:srgbClr val="00C49A"/>
+                </a:solidFill>
+                <a:latin typeface="Arial"/>
+              </a:rPr>
+              <a:t>VOICE POC · 全離線語音輸入</a:t>
+            </a:r>
+          </a:p>
+        </p:txBody>
+      </p:sp>
+      <p:sp>
+        <p:nvSpPr>
+          <p:cNvPr id="3" name="TextBox 2"/>
+          <p:cNvSpPr txBox="1"/>
+          <p:nvPr/>
+        </p:nvSpPr>
+        <p:spPr>
+          <a:xfrm>
+            <a:off x="667512" y="585216"/>
+            <a:ext cx="10789920" cy="566928"/>
+          </a:xfrm>
+          <a:prstGeom prst="rect">
+            <a:avLst/>
+          </a:prstGeom>
+          <a:noFill/>
+        </p:spPr>
+        <p:txBody>
+          <a:bodyPr wrap="square" lIns="0" rIns="0" tIns="0" bIns="0" anchor="t">
+            <a:spAutoFit/>
+          </a:bodyPr>
+          <a:lstStyle/>
+          <a:p>
+            <a:pPr algn="l">
+              <a:lnSpc>
+                <a:spcPct val="115000"/>
+              </a:lnSpc>
+            </a:pPr>
+            <a:r>
+              <a:rPr sz="2700" b="1">
+                <a:solidFill>
+                  <a:srgbClr val="1A1A2E"/>
+                </a:solidFill>
+                <a:latin typeface="Microsoft JhengHei"/>
+              </a:rPr>
+              <a:t>訪客用「講的」查倉管，ASR 全程跑在樹莓派</a:t>
+            </a:r>
+          </a:p>
+        </p:txBody>
+      </p:sp>
+      <p:sp>
+        <p:nvSpPr>
+          <p:cNvPr id="4" name="TextBox 3"/>
+          <p:cNvSpPr txBox="1"/>
+          <p:nvPr/>
+        </p:nvSpPr>
+        <p:spPr>
+          <a:xfrm>
+            <a:off x="667512" y="1298448"/>
+            <a:ext cx="10789920" cy="365760"/>
+          </a:xfrm>
+          <a:prstGeom prst="rect">
+            <a:avLst/>
+          </a:prstGeom>
+          <a:noFill/>
+        </p:spPr>
+        <p:txBody>
+          <a:bodyPr wrap="square" lIns="0" rIns="0" tIns="0" bIns="0" anchor="t">
+            <a:spAutoFit/>
+          </a:bodyPr>
+          <a:lstStyle/>
+          <a:p>
+            <a:pPr algn="l">
+              <a:lnSpc>
+                <a:spcPct val="115000"/>
+              </a:lnSpc>
+            </a:pPr>
+            <a:r>
+              <a:rPr sz="1350" b="0">
+                <a:solidFill>
+                  <a:srgbClr val="555555"/>
+                </a:solidFill>
+                <a:latin typeface="Microsoft JhengHei"/>
+              </a:rPr>
+              <a:t>打字對展場訪客不夠自然——加一層離線語音輸入，同一套倉管後端不動，語音只是新入口。</a:t>
+            </a:r>
+          </a:p>
+        </p:txBody>
+      </p:sp>
+      <p:sp>
+        <p:nvSpPr>
+          <p:cNvPr id="5" name="Rounded Rectangle 4"/>
           <p:cNvSpPr/>
           <p:nvPr/>
         </p:nvSpPr>
         <p:spPr>
           <a:xfrm>
-            <a:off x="0" y="0"/>
-            <a:ext cx="12188952" cy="6858000"/>
-          </a:xfrm>
-          <a:prstGeom prst="rect">
-            <a:avLst/>
+            <a:off x="667512" y="1874519"/>
+            <a:ext cx="10853928" cy="694944"/>
+          </a:xfrm>
+          <a:prstGeom prst="roundRect">
+            <a:avLst>
+              <a:gd name="adj" fmla="val 8000"/>
+            </a:avLst>
           </a:prstGeom>
           <a:solidFill>
-            <a:srgbClr val="1A1A2E"/>
+            <a:srgbClr val="F4F6F8"/>
           </a:solidFill>
           <a:ln>
             <a:noFill/>
@@ -13664,16 +14012,16 @@
       </p:sp>
       <p:sp>
         <p:nvSpPr>
-          <p:cNvPr id="3" name="Rectangle 2"/>
+          <p:cNvPr id="6" name="Oval 5"/>
           <p:cNvSpPr/>
           <p:nvPr/>
         </p:nvSpPr>
         <p:spPr>
           <a:xfrm>
-            <a:off x="0" y="0"/>
-            <a:ext cx="12188952" cy="128016"/>
-          </a:xfrm>
-          <a:prstGeom prst="rect">
+            <a:off x="923544" y="1993391"/>
+            <a:ext cx="457200" cy="457200"/>
+          </a:xfrm>
+          <a:prstGeom prst="ellipse">
             <a:avLst/>
           </a:prstGeom>
           <a:solidFill>
@@ -13708,97 +14056,475 @@
       </p:sp>
       <p:sp>
         <p:nvSpPr>
-          <p:cNvPr id="4" name="TextBox 3"/>
-          <p:cNvSpPr txBox="1"/>
-          <p:nvPr/>
-        </p:nvSpPr>
-        <p:spPr>
-          <a:xfrm>
-            <a:off x="667512" y="640080"/>
-            <a:ext cx="10789920" cy="320040"/>
-          </a:xfrm>
-          <a:prstGeom prst="rect">
-            <a:avLst/>
-          </a:prstGeom>
-          <a:noFill/>
-        </p:spPr>
-        <p:txBody>
-          <a:bodyPr wrap="square" lIns="0" rIns="0" tIns="0" bIns="0" anchor="t">
-            <a:spAutoFit/>
-          </a:bodyPr>
-          <a:lstStyle/>
-          <a:p>
-            <a:pPr algn="l">
-              <a:lnSpc>
-                <a:spcPct val="115000"/>
-              </a:lnSpc>
-            </a:pPr>
-            <a:r>
-              <a:rPr sz="1300" b="1">
+          <p:cNvPr id="7" name="TextBox 6"/>
+          <p:cNvSpPr txBox="1"/>
+          <p:nvPr/>
+        </p:nvSpPr>
+        <p:spPr>
+          <a:xfrm>
+            <a:off x="923544" y="1975103"/>
+            <a:ext cx="457200" cy="457200"/>
+          </a:xfrm>
+          <a:prstGeom prst="rect">
+            <a:avLst/>
+          </a:prstGeom>
+          <a:noFill/>
+        </p:spPr>
+        <p:txBody>
+          <a:bodyPr wrap="square" lIns="0" rIns="0" tIns="0" bIns="0" anchor="ctr">
+            <a:spAutoFit/>
+          </a:bodyPr>
+          <a:lstStyle/>
+          <a:p>
+            <a:pPr algn="ctr">
+              <a:lnSpc>
+                <a:spcPct val="115000"/>
+              </a:lnSpc>
+            </a:pPr>
+            <a:r>
+              <a:rPr sz="1500" b="1">
+                <a:solidFill>
+                  <a:srgbClr val="FFFFFF"/>
+                </a:solidFill>
+                <a:latin typeface="Microsoft JhengHei"/>
+              </a:rPr>
+              <a:t>🎙️</a:t>
+            </a:r>
+          </a:p>
+        </p:txBody>
+      </p:sp>
+      <p:sp>
+        <p:nvSpPr>
+          <p:cNvPr id="8" name="TextBox 7"/>
+          <p:cNvSpPr txBox="1"/>
+          <p:nvPr/>
+        </p:nvSpPr>
+        <p:spPr>
+          <a:xfrm>
+            <a:off x="1627632" y="1929383"/>
+            <a:ext cx="2743200" cy="585216"/>
+          </a:xfrm>
+          <a:prstGeom prst="rect">
+            <a:avLst/>
+          </a:prstGeom>
+          <a:noFill/>
+        </p:spPr>
+        <p:txBody>
+          <a:bodyPr wrap="square" lIns="0" rIns="0" tIns="0" bIns="0" anchor="ctr">
+            <a:spAutoFit/>
+          </a:bodyPr>
+          <a:lstStyle/>
+          <a:p>
+            <a:pPr algn="l">
+              <a:lnSpc>
+                <a:spcPct val="115000"/>
+              </a:lnSpc>
+            </a:pPr>
+            <a:r>
+              <a:rPr sz="1500" b="1">
                 <a:solidFill>
                   <a:srgbClr val="00C49A"/>
                 </a:solidFill>
-                <a:latin typeface="Arial"/>
-              </a:rPr>
-              <a:t>SUMMARY</a:t>
-            </a:r>
-          </a:p>
-        </p:txBody>
-      </p:sp>
-      <p:sp>
-        <p:nvSpPr>
-          <p:cNvPr id="5" name="TextBox 4"/>
-          <p:cNvSpPr txBox="1"/>
-          <p:nvPr/>
-        </p:nvSpPr>
-        <p:spPr>
-          <a:xfrm>
-            <a:off x="667512" y="1051560"/>
-            <a:ext cx="10789920" cy="640080"/>
-          </a:xfrm>
-          <a:prstGeom prst="rect">
-            <a:avLst/>
-          </a:prstGeom>
-          <a:noFill/>
-        </p:spPr>
-        <p:txBody>
-          <a:bodyPr wrap="square" lIns="0" rIns="0" tIns="0" bIns="0" anchor="t">
-            <a:spAutoFit/>
-          </a:bodyPr>
-          <a:lstStyle/>
-          <a:p>
-            <a:pPr algn="l">
-              <a:lnSpc>
-                <a:spcPct val="115000"/>
-              </a:lnSpc>
-            </a:pPr>
-            <a:r>
-              <a:rPr sz="2800" b="1">
-                <a:solidFill>
-                  <a:srgbClr val="FFFFFF"/>
-                </a:solidFill>
-                <a:latin typeface="Microsoft JhengHei"/>
-              </a:rPr>
-              <a:t>一句話查倉管，跑在樹莓派，品質可證明</a:t>
-            </a:r>
-          </a:p>
-        </p:txBody>
-      </p:sp>
-      <p:sp>
-        <p:nvSpPr>
-          <p:cNvPr id="6" name="Rounded Rectangle 5"/>
+                <a:latin typeface="Microsoft JhengHei"/>
+              </a:rPr>
+              <a:t>前端錄音</a:t>
+            </a:r>
+          </a:p>
+        </p:txBody>
+      </p:sp>
+      <p:sp>
+        <p:nvSpPr>
+          <p:cNvPr id="9" name="TextBox 8"/>
+          <p:cNvSpPr txBox="1"/>
+          <p:nvPr/>
+        </p:nvSpPr>
+        <p:spPr>
+          <a:xfrm>
+            <a:off x="4370832" y="1929383"/>
+            <a:ext cx="6949440" cy="585216"/>
+          </a:xfrm>
+          <a:prstGeom prst="rect">
+            <a:avLst/>
+          </a:prstGeom>
+          <a:noFill/>
+        </p:spPr>
+        <p:txBody>
+          <a:bodyPr wrap="square" lIns="0" rIns="0" tIns="0" bIns="0" anchor="ctr">
+            <a:spAutoFit/>
+          </a:bodyPr>
+          <a:lstStyle/>
+          <a:p>
+            <a:pPr algn="l">
+              <a:lnSpc>
+                <a:spcPct val="115000"/>
+              </a:lnSpc>
+            </a:pPr>
+            <a:r>
+              <a:rPr sz="1250" b="0">
+                <a:solidFill>
+                  <a:srgbClr val="444444"/>
+                </a:solidFill>
+                <a:latin typeface="Microsoft JhengHei"/>
+              </a:rPr>
+              <a:t>Siri 式：點一下 → 講 → 靜音自動結束（瀏覽器 VAD 偵測）</a:t>
+            </a:r>
+          </a:p>
+        </p:txBody>
+      </p:sp>
+      <p:sp>
+        <p:nvSpPr>
+          <p:cNvPr id="10" name="Chevron 9"/>
           <p:cNvSpPr/>
           <p:nvPr/>
         </p:nvSpPr>
         <p:spPr>
           <a:xfrm>
-            <a:off x="667512" y="2057400"/>
-            <a:ext cx="10853928" cy="960120"/>
+            <a:off x="5943600" y="2587751"/>
+            <a:ext cx="329184" cy="128016"/>
+          </a:xfrm>
+          <a:prstGeom prst="chevron">
+            <a:avLst/>
+          </a:prstGeom>
+          <a:solidFill>
+            <a:srgbClr val="BBBBBB"/>
+          </a:solidFill>
+          <a:ln>
+            <a:noFill/>
+          </a:ln>
+          <a:effectLst/>
+        </p:spPr>
+        <p:style>
+          <a:lnRef idx="1">
+            <a:schemeClr val="accent1"/>
+          </a:lnRef>
+          <a:fillRef idx="3">
+            <a:schemeClr val="accent1"/>
+          </a:fillRef>
+          <a:effectRef idx="2">
+            <a:schemeClr val="accent1"/>
+          </a:effectRef>
+          <a:fontRef idx="minor">
+            <a:schemeClr val="lt1"/>
+          </a:fontRef>
+        </p:style>
+        <p:txBody>
+          <a:bodyPr rtlCol="0" anchor="ctr"/>
+          <a:lstStyle/>
+          <a:p>
+            <a:pPr algn="ctr"/>
+          </a:p>
+        </p:txBody>
+      </p:sp>
+      <p:sp>
+        <p:nvSpPr>
+          <p:cNvPr id="11" name="Rounded Rectangle 10"/>
+          <p:cNvSpPr/>
+          <p:nvPr/>
+        </p:nvSpPr>
+        <p:spPr>
+          <a:xfrm>
+            <a:off x="667512" y="2734055"/>
+            <a:ext cx="10853928" cy="694944"/>
           </a:xfrm>
           <a:prstGeom prst="roundRect">
             <a:avLst>
               <a:gd name="adj" fmla="val 8000"/>
             </a:avLst>
+          </a:prstGeom>
+          <a:solidFill>
+            <a:srgbClr val="F4F6F8"/>
+          </a:solidFill>
+          <a:ln>
+            <a:noFill/>
+          </a:ln>
+          <a:effectLst/>
+        </p:spPr>
+        <p:style>
+          <a:lnRef idx="1">
+            <a:schemeClr val="accent1"/>
+          </a:lnRef>
+          <a:fillRef idx="3">
+            <a:schemeClr val="accent1"/>
+          </a:fillRef>
+          <a:effectRef idx="2">
+            <a:schemeClr val="accent1"/>
+          </a:effectRef>
+          <a:fontRef idx="minor">
+            <a:schemeClr val="lt1"/>
+          </a:fontRef>
+        </p:style>
+        <p:txBody>
+          <a:bodyPr rtlCol="0" anchor="ctr"/>
+          <a:lstStyle/>
+          <a:p>
+            <a:pPr algn="ctr"/>
+          </a:p>
+        </p:txBody>
+      </p:sp>
+      <p:sp>
+        <p:nvSpPr>
+          <p:cNvPr id="12" name="Oval 11"/>
+          <p:cNvSpPr/>
+          <p:nvPr/>
+        </p:nvSpPr>
+        <p:spPr>
+          <a:xfrm>
+            <a:off x="923544" y="2852927"/>
+            <a:ext cx="457200" cy="457200"/>
+          </a:xfrm>
+          <a:prstGeom prst="ellipse">
+            <a:avLst/>
+          </a:prstGeom>
+          <a:solidFill>
+            <a:srgbClr val="008E76"/>
+          </a:solidFill>
+          <a:ln>
+            <a:noFill/>
+          </a:ln>
+          <a:effectLst/>
+        </p:spPr>
+        <p:style>
+          <a:lnRef idx="1">
+            <a:schemeClr val="accent1"/>
+          </a:lnRef>
+          <a:fillRef idx="3">
+            <a:schemeClr val="accent1"/>
+          </a:fillRef>
+          <a:effectRef idx="2">
+            <a:schemeClr val="accent1"/>
+          </a:effectRef>
+          <a:fontRef idx="minor">
+            <a:schemeClr val="lt1"/>
+          </a:fontRef>
+        </p:style>
+        <p:txBody>
+          <a:bodyPr rtlCol="0" anchor="ctr"/>
+          <a:lstStyle/>
+          <a:p>
+            <a:pPr algn="ctr"/>
+          </a:p>
+        </p:txBody>
+      </p:sp>
+      <p:sp>
+        <p:nvSpPr>
+          <p:cNvPr id="13" name="TextBox 12"/>
+          <p:cNvSpPr txBox="1"/>
+          <p:nvPr/>
+        </p:nvSpPr>
+        <p:spPr>
+          <a:xfrm>
+            <a:off x="923544" y="2834639"/>
+            <a:ext cx="457200" cy="457200"/>
+          </a:xfrm>
+          <a:prstGeom prst="rect">
+            <a:avLst/>
+          </a:prstGeom>
+          <a:noFill/>
+        </p:spPr>
+        <p:txBody>
+          <a:bodyPr wrap="square" lIns="0" rIns="0" tIns="0" bIns="0" anchor="ctr">
+            <a:spAutoFit/>
+          </a:bodyPr>
+          <a:lstStyle/>
+          <a:p>
+            <a:pPr algn="ctr">
+              <a:lnSpc>
+                <a:spcPct val="115000"/>
+              </a:lnSpc>
+            </a:pPr>
+            <a:r>
+              <a:rPr sz="1500" b="1">
+                <a:solidFill>
+                  <a:srgbClr val="FFFFFF"/>
+                </a:solidFill>
+                <a:latin typeface="Microsoft JhengHei"/>
+              </a:rPr>
+              <a:t>腦</a:t>
+            </a:r>
+          </a:p>
+        </p:txBody>
+      </p:sp>
+      <p:sp>
+        <p:nvSpPr>
+          <p:cNvPr id="14" name="TextBox 13"/>
+          <p:cNvSpPr txBox="1"/>
+          <p:nvPr/>
+        </p:nvSpPr>
+        <p:spPr>
+          <a:xfrm>
+            <a:off x="1627632" y="2788919"/>
+            <a:ext cx="2743200" cy="585216"/>
+          </a:xfrm>
+          <a:prstGeom prst="rect">
+            <a:avLst/>
+          </a:prstGeom>
+          <a:noFill/>
+        </p:spPr>
+        <p:txBody>
+          <a:bodyPr wrap="square" lIns="0" rIns="0" tIns="0" bIns="0" anchor="ctr">
+            <a:spAutoFit/>
+          </a:bodyPr>
+          <a:lstStyle/>
+          <a:p>
+            <a:pPr algn="l">
+              <a:lnSpc>
+                <a:spcPct val="115000"/>
+              </a:lnSpc>
+            </a:pPr>
+            <a:r>
+              <a:rPr sz="1500" b="1">
+                <a:solidFill>
+                  <a:srgbClr val="008E76"/>
+                </a:solidFill>
+                <a:latin typeface="Microsoft JhengHei"/>
+              </a:rPr>
+              <a:t>Fun-ASR-Nano</a:t>
+            </a:r>
+          </a:p>
+        </p:txBody>
+      </p:sp>
+      <p:sp>
+        <p:nvSpPr>
+          <p:cNvPr id="15" name="TextBox 14"/>
+          <p:cNvSpPr txBox="1"/>
+          <p:nvPr/>
+        </p:nvSpPr>
+        <p:spPr>
+          <a:xfrm>
+            <a:off x="4370832" y="2788919"/>
+            <a:ext cx="6949440" cy="585216"/>
+          </a:xfrm>
+          <a:prstGeom prst="rect">
+            <a:avLst/>
+          </a:prstGeom>
+          <a:noFill/>
+        </p:spPr>
+        <p:txBody>
+          <a:bodyPr wrap="square" lIns="0" rIns="0" tIns="0" bIns="0" anchor="ctr">
+            <a:spAutoFit/>
+          </a:bodyPr>
+          <a:lstStyle/>
+          <a:p>
+            <a:pPr algn="l">
+              <a:lnSpc>
+                <a:spcPct val="115000"/>
+              </a:lnSpc>
+            </a:pPr>
+            <a:r>
+              <a:rPr sz="1250" b="0">
+                <a:solidFill>
+                  <a:srgbClr val="444444"/>
+                </a:solidFill>
+                <a:latin typeface="Microsoft JhengHei"/>
+              </a:rPr>
+              <a:t>GGUF + llama.cpp，RPi5 CPU 純離線辨識（~2.8s / 句）</a:t>
+            </a:r>
+          </a:p>
+        </p:txBody>
+      </p:sp>
+      <p:sp>
+        <p:nvSpPr>
+          <p:cNvPr id="16" name="Chevron 15"/>
+          <p:cNvSpPr/>
+          <p:nvPr/>
+        </p:nvSpPr>
+        <p:spPr>
+          <a:xfrm>
+            <a:off x="5943600" y="3447287"/>
+            <a:ext cx="329184" cy="128016"/>
+          </a:xfrm>
+          <a:prstGeom prst="chevron">
+            <a:avLst/>
+          </a:prstGeom>
+          <a:solidFill>
+            <a:srgbClr val="BBBBBB"/>
+          </a:solidFill>
+          <a:ln>
+            <a:noFill/>
+          </a:ln>
+          <a:effectLst/>
+        </p:spPr>
+        <p:style>
+          <a:lnRef idx="1">
+            <a:schemeClr val="accent1"/>
+          </a:lnRef>
+          <a:fillRef idx="3">
+            <a:schemeClr val="accent1"/>
+          </a:fillRef>
+          <a:effectRef idx="2">
+            <a:schemeClr val="accent1"/>
+          </a:effectRef>
+          <a:fontRef idx="minor">
+            <a:schemeClr val="lt1"/>
+          </a:fontRef>
+        </p:style>
+        <p:txBody>
+          <a:bodyPr rtlCol="0" anchor="ctr"/>
+          <a:lstStyle/>
+          <a:p>
+            <a:pPr algn="ctr"/>
+          </a:p>
+        </p:txBody>
+      </p:sp>
+      <p:sp>
+        <p:nvSpPr>
+          <p:cNvPr id="17" name="Rounded Rectangle 16"/>
+          <p:cNvSpPr/>
+          <p:nvPr/>
+        </p:nvSpPr>
+        <p:spPr>
+          <a:xfrm>
+            <a:off x="667512" y="3593591"/>
+            <a:ext cx="10853928" cy="694944"/>
+          </a:xfrm>
+          <a:prstGeom prst="roundRect">
+            <a:avLst>
+              <a:gd name="adj" fmla="val 8000"/>
+            </a:avLst>
+          </a:prstGeom>
+          <a:solidFill>
+            <a:srgbClr val="F4F6F8"/>
+          </a:solidFill>
+          <a:ln>
+            <a:noFill/>
+          </a:ln>
+          <a:effectLst/>
+        </p:spPr>
+        <p:style>
+          <a:lnRef idx="1">
+            <a:schemeClr val="accent1"/>
+          </a:lnRef>
+          <a:fillRef idx="3">
+            <a:schemeClr val="accent1"/>
+          </a:fillRef>
+          <a:effectRef idx="2">
+            <a:schemeClr val="accent1"/>
+          </a:effectRef>
+          <a:fontRef idx="minor">
+            <a:schemeClr val="lt1"/>
+          </a:fontRef>
+        </p:style>
+        <p:txBody>
+          <a:bodyPr rtlCol="0" anchor="ctr"/>
+          <a:lstStyle/>
+          <a:p>
+            <a:pPr algn="ctr"/>
+          </a:p>
+        </p:txBody>
+      </p:sp>
+      <p:sp>
+        <p:nvSpPr>
+          <p:cNvPr id="18" name="Oval 17"/>
+          <p:cNvSpPr/>
+          <p:nvPr/>
+        </p:nvSpPr>
+        <p:spPr>
+          <a:xfrm>
+            <a:off x="923544" y="3712463"/>
+            <a:ext cx="457200" cy="457200"/>
+          </a:xfrm>
+          <a:prstGeom prst="ellipse">
+            <a:avLst/>
           </a:prstGeom>
           <a:solidFill>
             <a:srgbClr val="222A45"/>
@@ -13832,14 +14558,1225 @@
       </p:sp>
       <p:sp>
         <p:nvSpPr>
-          <p:cNvPr id="7" name="Oval 6"/>
+          <p:cNvPr id="19" name="TextBox 18"/>
+          <p:cNvSpPr txBox="1"/>
+          <p:nvPr/>
+        </p:nvSpPr>
+        <p:spPr>
+          <a:xfrm>
+            <a:off x="923544" y="3694175"/>
+            <a:ext cx="457200" cy="457200"/>
+          </a:xfrm>
+          <a:prstGeom prst="rect">
+            <a:avLst/>
+          </a:prstGeom>
+          <a:noFill/>
+        </p:spPr>
+        <p:txBody>
+          <a:bodyPr wrap="square" lIns="0" rIns="0" tIns="0" bIns="0" anchor="ctr">
+            <a:spAutoFit/>
+          </a:bodyPr>
+          <a:lstStyle/>
+          <a:p>
+            <a:pPr algn="ctr">
+              <a:lnSpc>
+                <a:spcPct val="115000"/>
+              </a:lnSpc>
+            </a:pPr>
+            <a:r>
+              <a:rPr sz="1500" b="1">
+                <a:solidFill>
+                  <a:srgbClr val="FFFFFF"/>
+                </a:solidFill>
+                <a:latin typeface="Microsoft JhengHei"/>
+              </a:rPr>
+              <a:t>動</a:t>
+            </a:r>
+          </a:p>
+        </p:txBody>
+      </p:sp>
+      <p:sp>
+        <p:nvSpPr>
+          <p:cNvPr id="20" name="TextBox 19"/>
+          <p:cNvSpPr txBox="1"/>
+          <p:nvPr/>
+        </p:nvSpPr>
+        <p:spPr>
+          <a:xfrm>
+            <a:off x="1627632" y="3648455"/>
+            <a:ext cx="2743200" cy="585216"/>
+          </a:xfrm>
+          <a:prstGeom prst="rect">
+            <a:avLst/>
+          </a:prstGeom>
+          <a:noFill/>
+        </p:spPr>
+        <p:txBody>
+          <a:bodyPr wrap="square" lIns="0" rIns="0" tIns="0" bIns="0" anchor="ctr">
+            <a:spAutoFit/>
+          </a:bodyPr>
+          <a:lstStyle/>
+          <a:p>
+            <a:pPr algn="l">
+              <a:lnSpc>
+                <a:spcPct val="115000"/>
+              </a:lnSpc>
+            </a:pPr>
+            <a:r>
+              <a:rPr sz="1500" b="1">
+                <a:solidFill>
+                  <a:srgbClr val="222A45"/>
+                </a:solidFill>
+                <a:latin typeface="Microsoft JhengHei"/>
+              </a:rPr>
+              <a:t>OpenCC 轉繁</a:t>
+            </a:r>
+          </a:p>
+        </p:txBody>
+      </p:sp>
+      <p:sp>
+        <p:nvSpPr>
+          <p:cNvPr id="21" name="TextBox 20"/>
+          <p:cNvSpPr txBox="1"/>
+          <p:nvPr/>
+        </p:nvSpPr>
+        <p:spPr>
+          <a:xfrm>
+            <a:off x="4370832" y="3648455"/>
+            <a:ext cx="6949440" cy="585216"/>
+          </a:xfrm>
+          <a:prstGeom prst="rect">
+            <a:avLst/>
+          </a:prstGeom>
+          <a:noFill/>
+        </p:spPr>
+        <p:txBody>
+          <a:bodyPr wrap="square" lIns="0" rIns="0" tIns="0" bIns="0" anchor="ctr">
+            <a:spAutoFit/>
+          </a:bodyPr>
+          <a:lstStyle/>
+          <a:p>
+            <a:pPr algn="l">
+              <a:lnSpc>
+                <a:spcPct val="115000"/>
+              </a:lnSpc>
+            </a:pPr>
+            <a:r>
+              <a:rPr sz="1250" b="0">
+                <a:solidFill>
+                  <a:srgbClr val="444444"/>
+                </a:solidFill>
+                <a:latin typeface="Microsoft JhengHei"/>
+              </a:rPr>
+              <a:t>簡體 → 繁體，順便轉台灣用語（滑鼠 / 藍牙）</a:t>
+            </a:r>
+          </a:p>
+        </p:txBody>
+      </p:sp>
+      <p:sp>
+        <p:nvSpPr>
+          <p:cNvPr id="22" name="Chevron 21"/>
           <p:cNvSpPr/>
           <p:nvPr/>
         </p:nvSpPr>
         <p:spPr>
           <a:xfrm>
-            <a:off x="941832" y="2276856"/>
-            <a:ext cx="530352" cy="530352"/>
+            <a:off x="5943600" y="4306823"/>
+            <a:ext cx="329184" cy="128016"/>
+          </a:xfrm>
+          <a:prstGeom prst="chevron">
+            <a:avLst/>
+          </a:prstGeom>
+          <a:solidFill>
+            <a:srgbClr val="BBBBBB"/>
+          </a:solidFill>
+          <a:ln>
+            <a:noFill/>
+          </a:ln>
+          <a:effectLst/>
+        </p:spPr>
+        <p:style>
+          <a:lnRef idx="1">
+            <a:schemeClr val="accent1"/>
+          </a:lnRef>
+          <a:fillRef idx="3">
+            <a:schemeClr val="accent1"/>
+          </a:fillRef>
+          <a:effectRef idx="2">
+            <a:schemeClr val="accent1"/>
+          </a:effectRef>
+          <a:fontRef idx="minor">
+            <a:schemeClr val="lt1"/>
+          </a:fontRef>
+        </p:style>
+        <p:txBody>
+          <a:bodyPr rtlCol="0" anchor="ctr"/>
+          <a:lstStyle/>
+          <a:p>
+            <a:pPr algn="ctr"/>
+          </a:p>
+        </p:txBody>
+      </p:sp>
+      <p:sp>
+        <p:nvSpPr>
+          <p:cNvPr id="23" name="Rounded Rectangle 22"/>
+          <p:cNvSpPr/>
+          <p:nvPr/>
+        </p:nvSpPr>
+        <p:spPr>
+          <a:xfrm>
+            <a:off x="667512" y="4453127"/>
+            <a:ext cx="10853928" cy="694944"/>
+          </a:xfrm>
+          <a:prstGeom prst="roundRect">
+            <a:avLst>
+              <a:gd name="adj" fmla="val 8000"/>
+            </a:avLst>
+          </a:prstGeom>
+          <a:solidFill>
+            <a:srgbClr val="F4F6F8"/>
+          </a:solidFill>
+          <a:ln>
+            <a:noFill/>
+          </a:ln>
+          <a:effectLst/>
+        </p:spPr>
+        <p:style>
+          <a:lnRef idx="1">
+            <a:schemeClr val="accent1"/>
+          </a:lnRef>
+          <a:fillRef idx="3">
+            <a:schemeClr val="accent1"/>
+          </a:fillRef>
+          <a:effectRef idx="2">
+            <a:schemeClr val="accent1"/>
+          </a:effectRef>
+          <a:fontRef idx="minor">
+            <a:schemeClr val="lt1"/>
+          </a:fontRef>
+        </p:style>
+        <p:txBody>
+          <a:bodyPr rtlCol="0" anchor="ctr"/>
+          <a:lstStyle/>
+          <a:p>
+            <a:pPr algn="ctr"/>
+          </a:p>
+        </p:txBody>
+      </p:sp>
+      <p:sp>
+        <p:nvSpPr>
+          <p:cNvPr id="24" name="Oval 23"/>
+          <p:cNvSpPr/>
+          <p:nvPr/>
+        </p:nvSpPr>
+        <p:spPr>
+          <a:xfrm>
+            <a:off x="923544" y="4571999"/>
+            <a:ext cx="457200" cy="457200"/>
+          </a:xfrm>
+          <a:prstGeom prst="ellipse">
+            <a:avLst/>
+          </a:prstGeom>
+          <a:solidFill>
+            <a:srgbClr val="F0A030"/>
+          </a:solidFill>
+          <a:ln>
+            <a:noFill/>
+          </a:ln>
+          <a:effectLst/>
+        </p:spPr>
+        <p:style>
+          <a:lnRef idx="1">
+            <a:schemeClr val="accent1"/>
+          </a:lnRef>
+          <a:fillRef idx="3">
+            <a:schemeClr val="accent1"/>
+          </a:fillRef>
+          <a:effectRef idx="2">
+            <a:schemeClr val="accent1"/>
+          </a:effectRef>
+          <a:fontRef idx="minor">
+            <a:schemeClr val="lt1"/>
+          </a:fontRef>
+        </p:style>
+        <p:txBody>
+          <a:bodyPr rtlCol="0" anchor="ctr"/>
+          <a:lstStyle/>
+          <a:p>
+            <a:pPr algn="ctr"/>
+          </a:p>
+        </p:txBody>
+      </p:sp>
+      <p:sp>
+        <p:nvSpPr>
+          <p:cNvPr id="25" name="TextBox 24"/>
+          <p:cNvSpPr txBox="1"/>
+          <p:nvPr/>
+        </p:nvSpPr>
+        <p:spPr>
+          <a:xfrm>
+            <a:off x="923544" y="4553711"/>
+            <a:ext cx="457200" cy="457200"/>
+          </a:xfrm>
+          <a:prstGeom prst="rect">
+            <a:avLst/>
+          </a:prstGeom>
+          <a:noFill/>
+        </p:spPr>
+        <p:txBody>
+          <a:bodyPr wrap="square" lIns="0" rIns="0" tIns="0" bIns="0" anchor="ctr">
+            <a:spAutoFit/>
+          </a:bodyPr>
+          <a:lstStyle/>
+          <a:p>
+            <a:pPr algn="ctr">
+              <a:lnSpc>
+                <a:spcPct val="115000"/>
+              </a:lnSpc>
+            </a:pPr>
+            <a:r>
+              <a:rPr sz="1500" b="1">
+                <a:solidFill>
+                  <a:srgbClr val="FFFFFF"/>
+                </a:solidFill>
+                <a:latin typeface="Microsoft JhengHei"/>
+              </a:rPr>
+              <a:t>🔧</a:t>
+            </a:r>
+          </a:p>
+        </p:txBody>
+      </p:sp>
+      <p:sp>
+        <p:nvSpPr>
+          <p:cNvPr id="26" name="TextBox 25"/>
+          <p:cNvSpPr txBox="1"/>
+          <p:nvPr/>
+        </p:nvSpPr>
+        <p:spPr>
+          <a:xfrm>
+            <a:off x="1627632" y="4507991"/>
+            <a:ext cx="2743200" cy="585216"/>
+          </a:xfrm>
+          <a:prstGeom prst="rect">
+            <a:avLst/>
+          </a:prstGeom>
+          <a:noFill/>
+        </p:spPr>
+        <p:txBody>
+          <a:bodyPr wrap="square" lIns="0" rIns="0" tIns="0" bIns="0" anchor="ctr">
+            <a:spAutoFit/>
+          </a:bodyPr>
+          <a:lstStyle/>
+          <a:p>
+            <a:pPr algn="l">
+              <a:lnSpc>
+                <a:spcPct val="115000"/>
+              </a:lnSpc>
+            </a:pPr>
+            <a:r>
+              <a:rPr sz="1500" b="1">
+                <a:solidFill>
+                  <a:srgbClr val="F0A030"/>
+                </a:solidFill>
+                <a:latin typeface="Microsoft JhengHei"/>
+              </a:rPr>
+              <a:t>同音修正層</a:t>
+            </a:r>
+          </a:p>
+        </p:txBody>
+      </p:sp>
+      <p:sp>
+        <p:nvSpPr>
+          <p:cNvPr id="27" name="TextBox 26"/>
+          <p:cNvSpPr txBox="1"/>
+          <p:nvPr/>
+        </p:nvSpPr>
+        <p:spPr>
+          <a:xfrm>
+            <a:off x="4370832" y="4507991"/>
+            <a:ext cx="6949440" cy="585216"/>
+          </a:xfrm>
+          <a:prstGeom prst="rect">
+            <a:avLst/>
+          </a:prstGeom>
+          <a:noFill/>
+        </p:spPr>
+        <p:txBody>
+          <a:bodyPr wrap="square" lIns="0" rIns="0" tIns="0" bIns="0" anchor="ctr">
+            <a:spAutoFit/>
+          </a:bodyPr>
+          <a:lstStyle/>
+          <a:p>
+            <a:pPr algn="l">
+              <a:lnSpc>
+                <a:spcPct val="115000"/>
+              </a:lnSpc>
+            </a:pPr>
+            <a:r>
+              <a:rPr sz="1250" b="0">
+                <a:solidFill>
+                  <a:srgbClr val="444444"/>
+                </a:solidFill>
+                <a:latin typeface="Microsoft JhengHei"/>
+              </a:rPr>
+              <a:t>倉別 / 動詞 / 量詞 / 異體字——只掛 ASR 出口，不碰倉管核心</a:t>
+            </a:r>
+          </a:p>
+        </p:txBody>
+      </p:sp>
+      <p:sp>
+        <p:nvSpPr>
+          <p:cNvPr id="28" name="Chevron 27"/>
+          <p:cNvSpPr/>
+          <p:nvPr/>
+        </p:nvSpPr>
+        <p:spPr>
+          <a:xfrm>
+            <a:off x="5943600" y="5166359"/>
+            <a:ext cx="329184" cy="128016"/>
+          </a:xfrm>
+          <a:prstGeom prst="chevron">
+            <a:avLst/>
+          </a:prstGeom>
+          <a:solidFill>
+            <a:srgbClr val="BBBBBB"/>
+          </a:solidFill>
+          <a:ln>
+            <a:noFill/>
+          </a:ln>
+          <a:effectLst/>
+        </p:spPr>
+        <p:style>
+          <a:lnRef idx="1">
+            <a:schemeClr val="accent1"/>
+          </a:lnRef>
+          <a:fillRef idx="3">
+            <a:schemeClr val="accent1"/>
+          </a:fillRef>
+          <a:effectRef idx="2">
+            <a:schemeClr val="accent1"/>
+          </a:effectRef>
+          <a:fontRef idx="minor">
+            <a:schemeClr val="lt1"/>
+          </a:fontRef>
+        </p:style>
+        <p:txBody>
+          <a:bodyPr rtlCol="0" anchor="ctr"/>
+          <a:lstStyle/>
+          <a:p>
+            <a:pPr algn="ctr"/>
+          </a:p>
+        </p:txBody>
+      </p:sp>
+      <p:sp>
+        <p:nvSpPr>
+          <p:cNvPr id="29" name="Rounded Rectangle 28"/>
+          <p:cNvSpPr/>
+          <p:nvPr/>
+        </p:nvSpPr>
+        <p:spPr>
+          <a:xfrm>
+            <a:off x="667512" y="5312663"/>
+            <a:ext cx="10853928" cy="694944"/>
+          </a:xfrm>
+          <a:prstGeom prst="roundRect">
+            <a:avLst>
+              <a:gd name="adj" fmla="val 8000"/>
+            </a:avLst>
+          </a:prstGeom>
+          <a:solidFill>
+            <a:srgbClr val="F4F6F8"/>
+          </a:solidFill>
+          <a:ln>
+            <a:noFill/>
+          </a:ln>
+          <a:effectLst/>
+        </p:spPr>
+        <p:style>
+          <a:lnRef idx="1">
+            <a:schemeClr val="accent1"/>
+          </a:lnRef>
+          <a:fillRef idx="3">
+            <a:schemeClr val="accent1"/>
+          </a:fillRef>
+          <a:effectRef idx="2">
+            <a:schemeClr val="accent1"/>
+          </a:effectRef>
+          <a:fontRef idx="minor">
+            <a:schemeClr val="lt1"/>
+          </a:fontRef>
+        </p:style>
+        <p:txBody>
+          <a:bodyPr rtlCol="0" anchor="ctr"/>
+          <a:lstStyle/>
+          <a:p>
+            <a:pPr algn="ctr"/>
+          </a:p>
+        </p:txBody>
+      </p:sp>
+      <p:sp>
+        <p:nvSpPr>
+          <p:cNvPr id="30" name="Oval 29"/>
+          <p:cNvSpPr/>
+          <p:nvPr/>
+        </p:nvSpPr>
+        <p:spPr>
+          <a:xfrm>
+            <a:off x="923544" y="5431535"/>
+            <a:ext cx="457200" cy="457200"/>
+          </a:xfrm>
+          <a:prstGeom prst="ellipse">
+            <a:avLst/>
+          </a:prstGeom>
+          <a:solidFill>
+            <a:srgbClr val="008E76"/>
+          </a:solidFill>
+          <a:ln>
+            <a:noFill/>
+          </a:ln>
+          <a:effectLst/>
+        </p:spPr>
+        <p:style>
+          <a:lnRef idx="1">
+            <a:schemeClr val="accent1"/>
+          </a:lnRef>
+          <a:fillRef idx="3">
+            <a:schemeClr val="accent1"/>
+          </a:fillRef>
+          <a:effectRef idx="2">
+            <a:schemeClr val="accent1"/>
+          </a:effectRef>
+          <a:fontRef idx="minor">
+            <a:schemeClr val="lt1"/>
+          </a:fontRef>
+        </p:style>
+        <p:txBody>
+          <a:bodyPr rtlCol="0" anchor="ctr"/>
+          <a:lstStyle/>
+          <a:p>
+            <a:pPr algn="ctr"/>
+          </a:p>
+        </p:txBody>
+      </p:sp>
+      <p:sp>
+        <p:nvSpPr>
+          <p:cNvPr id="31" name="TextBox 30"/>
+          <p:cNvSpPr txBox="1"/>
+          <p:nvPr/>
+        </p:nvSpPr>
+        <p:spPr>
+          <a:xfrm>
+            <a:off x="923544" y="5413247"/>
+            <a:ext cx="457200" cy="457200"/>
+          </a:xfrm>
+          <a:prstGeom prst="rect">
+            <a:avLst/>
+          </a:prstGeom>
+          <a:noFill/>
+        </p:spPr>
+        <p:txBody>
+          <a:bodyPr wrap="square" lIns="0" rIns="0" tIns="0" bIns="0" anchor="ctr">
+            <a:spAutoFit/>
+          </a:bodyPr>
+          <a:lstStyle/>
+          <a:p>
+            <a:pPr algn="ctr">
+              <a:lnSpc>
+                <a:spcPct val="115000"/>
+              </a:lnSpc>
+            </a:pPr>
+            <a:r>
+              <a:rPr sz="1500" b="1">
+                <a:solidFill>
+                  <a:srgbClr val="FFFFFF"/>
+                </a:solidFill>
+                <a:latin typeface="Microsoft JhengHei"/>
+              </a:rPr>
+              <a:t>庫</a:t>
+            </a:r>
+          </a:p>
+        </p:txBody>
+      </p:sp>
+      <p:sp>
+        <p:nvSpPr>
+          <p:cNvPr id="32" name="TextBox 31"/>
+          <p:cNvSpPr txBox="1"/>
+          <p:nvPr/>
+        </p:nvSpPr>
+        <p:spPr>
+          <a:xfrm>
+            <a:off x="1627632" y="5367527"/>
+            <a:ext cx="2743200" cy="585216"/>
+          </a:xfrm>
+          <a:prstGeom prst="rect">
+            <a:avLst/>
+          </a:prstGeom>
+          <a:noFill/>
+        </p:spPr>
+        <p:txBody>
+          <a:bodyPr wrap="square" lIns="0" rIns="0" tIns="0" bIns="0" anchor="ctr">
+            <a:spAutoFit/>
+          </a:bodyPr>
+          <a:lstStyle/>
+          <a:p>
+            <a:pPr algn="l">
+              <a:lnSpc>
+                <a:spcPct val="115000"/>
+              </a:lnSpc>
+            </a:pPr>
+            <a:r>
+              <a:rPr sz="1500" b="1">
+                <a:solidFill>
+                  <a:srgbClr val="008E76"/>
+                </a:solidFill>
+                <a:latin typeface="Microsoft JhengHei"/>
+              </a:rPr>
+              <a:t>倉管 WS</a:t>
+            </a:r>
+          </a:p>
+        </p:txBody>
+      </p:sp>
+      <p:sp>
+        <p:nvSpPr>
+          <p:cNvPr id="33" name="TextBox 32"/>
+          <p:cNvSpPr txBox="1"/>
+          <p:nvPr/>
+        </p:nvSpPr>
+        <p:spPr>
+          <a:xfrm>
+            <a:off x="4370832" y="5367527"/>
+            <a:ext cx="6949440" cy="585216"/>
+          </a:xfrm>
+          <a:prstGeom prst="rect">
+            <a:avLst/>
+          </a:prstGeom>
+          <a:noFill/>
+        </p:spPr>
+        <p:txBody>
+          <a:bodyPr wrap="square" lIns="0" rIns="0" tIns="0" bIns="0" anchor="ctr">
+            <a:spAutoFit/>
+          </a:bodyPr>
+          <a:lstStyle/>
+          <a:p>
+            <a:pPr algn="l">
+              <a:lnSpc>
+                <a:spcPct val="115000"/>
+              </a:lnSpc>
+            </a:pPr>
+            <a:r>
+              <a:rPr sz="1250" b="0">
+                <a:solidFill>
+                  <a:srgbClr val="444444"/>
+                </a:solidFill>
+                <a:latin typeface="Microsoft JhengHei"/>
+              </a:rPr>
+              <a:t>既有守衛庫 + 發音容錯層接手，回答與打字完全一致</a:t>
+            </a:r>
+          </a:p>
+        </p:txBody>
+      </p:sp>
+      <p:sp>
+        <p:nvSpPr>
+          <p:cNvPr id="34" name="TextBox 33"/>
+          <p:cNvSpPr txBox="1"/>
+          <p:nvPr/>
+        </p:nvSpPr>
+        <p:spPr>
+          <a:xfrm>
+            <a:off x="11475720" y="6565392"/>
+            <a:ext cx="658368" cy="237744"/>
+          </a:xfrm>
+          <a:prstGeom prst="rect">
+            <a:avLst/>
+          </a:prstGeom>
+          <a:noFill/>
+        </p:spPr>
+        <p:txBody>
+          <a:bodyPr wrap="square" lIns="0" rIns="0" tIns="0" bIns="0" anchor="t">
+            <a:spAutoFit/>
+          </a:bodyPr>
+          <a:lstStyle/>
+          <a:p>
+            <a:pPr algn="r">
+              <a:lnSpc>
+                <a:spcPct val="115000"/>
+              </a:lnSpc>
+            </a:pPr>
+            <a:r>
+              <a:rPr sz="1000" b="0">
+                <a:solidFill>
+                  <a:srgbClr val="BBBBBB"/>
+                </a:solidFill>
+                <a:latin typeface="Arial"/>
+              </a:rPr>
+              <a:t>18</a:t>
+            </a:r>
+          </a:p>
+        </p:txBody>
+      </p:sp>
+    </p:spTree>
+  </p:cSld>
+  <p:clrMapOvr>
+    <a:masterClrMapping/>
+  </p:clrMapOvr>
+</p:sld>
+</file>
+
+<file path=ppt/slides/slide19.xml><?xml version="1.0" encoding="utf-8"?>
+<p:sld xmlns:a="http://schemas.openxmlformats.org/drawingml/2006/main" xmlns:p="http://schemas.openxmlformats.org/presentationml/2006/main" xmlns:r="http://schemas.openxmlformats.org/officeDocument/2006/relationships">
+  <p:cSld>
+    <p:spTree>
+      <p:nvGrpSpPr>
+        <p:cNvPr id="1" name=""/>
+        <p:cNvGrpSpPr/>
+        <p:nvPr/>
+      </p:nvGrpSpPr>
+      <p:grpSpPr/>
+      <p:sp>
+        <p:nvSpPr>
+          <p:cNvPr id="2" name="TextBox 1"/>
+          <p:cNvSpPr txBox="1"/>
+          <p:nvPr/>
+        </p:nvSpPr>
+        <p:spPr>
+          <a:xfrm>
+            <a:off x="667512" y="310896"/>
+            <a:ext cx="10789920" cy="274320"/>
+          </a:xfrm>
+          <a:prstGeom prst="rect">
+            <a:avLst/>
+          </a:prstGeom>
+          <a:noFill/>
+        </p:spPr>
+        <p:txBody>
+          <a:bodyPr wrap="square" lIns="0" rIns="0" tIns="0" bIns="0" anchor="t">
+            <a:spAutoFit/>
+          </a:bodyPr>
+          <a:lstStyle/>
+          <a:p>
+            <a:pPr algn="l">
+              <a:lnSpc>
+                <a:spcPct val="115000"/>
+              </a:lnSpc>
+            </a:pPr>
+            <a:r>
+              <a:rPr sz="1250" b="1">
+                <a:solidFill>
+                  <a:srgbClr val="00C49A"/>
+                </a:solidFill>
+                <a:latin typeface="Arial"/>
+              </a:rPr>
+              <a:t>VOICE POC · 展場噪音實測</a:t>
+            </a:r>
+          </a:p>
+        </p:txBody>
+      </p:sp>
+      <p:sp>
+        <p:nvSpPr>
+          <p:cNvPr id="3" name="TextBox 2"/>
+          <p:cNvSpPr txBox="1"/>
+          <p:nvPr/>
+        </p:nvSpPr>
+        <p:spPr>
+          <a:xfrm>
+            <a:off x="667512" y="585216"/>
+            <a:ext cx="10789920" cy="566928"/>
+          </a:xfrm>
+          <a:prstGeom prst="rect">
+            <a:avLst/>
+          </a:prstGeom>
+          <a:noFill/>
+        </p:spPr>
+        <p:txBody>
+          <a:bodyPr wrap="square" lIns="0" rIns="0" tIns="0" bIns="0" anchor="t">
+            <a:spAutoFit/>
+          </a:bodyPr>
+          <a:lstStyle/>
+          <a:p>
+            <a:pPr algn="l">
+              <a:lnSpc>
+                <a:spcPct val="115000"/>
+              </a:lnSpc>
+            </a:pPr>
+            <a:r>
+              <a:rPr sz="2700" b="1">
+                <a:solidFill>
+                  <a:srgbClr val="1A1A2E"/>
+                </a:solidFill>
+                <a:latin typeface="Microsoft JhengHei"/>
+              </a:rPr>
+              <a:t>念一次真人聲，自動測三種環境</a:t>
+            </a:r>
+          </a:p>
+        </p:txBody>
+      </p:sp>
+      <p:sp>
+        <p:nvSpPr>
+          <p:cNvPr id="4" name="TextBox 3"/>
+          <p:cNvSpPr txBox="1"/>
+          <p:nvPr/>
+        </p:nvSpPr>
+        <p:spPr>
+          <a:xfrm>
+            <a:off x="667512" y="1298448"/>
+            <a:ext cx="10789920" cy="365760"/>
+          </a:xfrm>
+          <a:prstGeom prst="rect">
+            <a:avLst/>
+          </a:prstGeom>
+          <a:noFill/>
+        </p:spPr>
+        <p:txBody>
+          <a:bodyPr wrap="square" lIns="0" rIns="0" tIns="0" bIns="0" anchor="t">
+            <a:spAutoFit/>
+          </a:bodyPr>
+          <a:lstStyle/>
+          <a:p>
+            <a:pPr algn="l">
+              <a:lnSpc>
+                <a:spcPct val="115000"/>
+              </a:lnSpc>
+            </a:pPr>
+            <a:r>
+              <a:rPr sz="1350" b="0">
+                <a:solidFill>
+                  <a:srgbClr val="555555"/>
+                </a:solidFill>
+                <a:latin typeface="Microsoft JhengHei"/>
+              </a:rPr>
+              <a:t>方法突破：真人念一次乾淨版並存錄音，用同一份錄音自動混入賣場人潮噪音重測——對比最公平。</a:t>
+            </a:r>
+          </a:p>
+        </p:txBody>
+      </p:sp>
+      <p:sp>
+        <p:nvSpPr>
+          <p:cNvPr id="5" name="Rounded Rectangle 4"/>
+          <p:cNvSpPr/>
+          <p:nvPr/>
+        </p:nvSpPr>
+        <p:spPr>
+          <a:xfrm>
+            <a:off x="667512" y="1965960"/>
+            <a:ext cx="3483864" cy="1188720"/>
+          </a:xfrm>
+          <a:prstGeom prst="roundRect">
+            <a:avLst>
+              <a:gd name="adj" fmla="val 8000"/>
+            </a:avLst>
+          </a:prstGeom>
+          <a:solidFill>
+            <a:srgbClr val="F4F6F8"/>
+          </a:solidFill>
+          <a:ln>
+            <a:noFill/>
+          </a:ln>
+          <a:effectLst/>
+        </p:spPr>
+        <p:style>
+          <a:lnRef idx="1">
+            <a:schemeClr val="accent1"/>
+          </a:lnRef>
+          <a:fillRef idx="3">
+            <a:schemeClr val="accent1"/>
+          </a:fillRef>
+          <a:effectRef idx="2">
+            <a:schemeClr val="accent1"/>
+          </a:effectRef>
+          <a:fontRef idx="minor">
+            <a:schemeClr val="lt1"/>
+          </a:fontRef>
+        </p:style>
+        <p:txBody>
+          <a:bodyPr rtlCol="0" anchor="ctr"/>
+          <a:lstStyle/>
+          <a:p>
+            <a:pPr algn="ctr"/>
+          </a:p>
+        </p:txBody>
+      </p:sp>
+      <p:sp>
+        <p:nvSpPr>
+          <p:cNvPr id="6" name="TextBox 5"/>
+          <p:cNvSpPr txBox="1"/>
+          <p:nvPr/>
+        </p:nvSpPr>
+        <p:spPr>
+          <a:xfrm>
+            <a:off x="832104" y="2112264"/>
+            <a:ext cx="3154680" cy="548640"/>
+          </a:xfrm>
+          <a:prstGeom prst="rect">
+            <a:avLst/>
+          </a:prstGeom>
+          <a:noFill/>
+        </p:spPr>
+        <p:txBody>
+          <a:bodyPr wrap="square" lIns="0" rIns="0" tIns="0" bIns="0" anchor="t">
+            <a:spAutoFit/>
+          </a:bodyPr>
+          <a:lstStyle/>
+          <a:p>
+            <a:pPr algn="l">
+              <a:lnSpc>
+                <a:spcPct val="115000"/>
+              </a:lnSpc>
+            </a:pPr>
+            <a:r>
+              <a:rPr sz="4000" b="1">
+                <a:solidFill>
+                  <a:srgbClr val="00C49A"/>
+                </a:solidFill>
+                <a:latin typeface="Arial"/>
+              </a:rPr>
+              <a:t>78%</a:t>
+            </a:r>
+          </a:p>
+        </p:txBody>
+      </p:sp>
+      <p:sp>
+        <p:nvSpPr>
+          <p:cNvPr id="7" name="TextBox 6"/>
+          <p:cNvSpPr txBox="1"/>
+          <p:nvPr/>
+        </p:nvSpPr>
+        <p:spPr>
+          <a:xfrm>
+            <a:off x="832104" y="2770632"/>
+            <a:ext cx="3154680" cy="310896"/>
+          </a:xfrm>
+          <a:prstGeom prst="rect">
+            <a:avLst/>
+          </a:prstGeom>
+          <a:noFill/>
+        </p:spPr>
+        <p:txBody>
+          <a:bodyPr wrap="square" lIns="0" rIns="0" tIns="0" bIns="0" anchor="t">
+            <a:spAutoFit/>
+          </a:bodyPr>
+          <a:lstStyle/>
+          <a:p>
+            <a:pPr algn="l">
+              <a:lnSpc>
+                <a:spcPct val="115000"/>
+              </a:lnSpc>
+            </a:pPr>
+            <a:r>
+              <a:rPr sz="1250" b="0">
+                <a:solidFill>
+                  <a:srgbClr val="555555"/>
+                </a:solidFill>
+                <a:latin typeface="Microsoft JhengHei"/>
+              </a:rPr>
+              <a:t>乾淨（正常音量）</a:t>
+            </a:r>
+          </a:p>
+        </p:txBody>
+      </p:sp>
+      <p:sp>
+        <p:nvSpPr>
+          <p:cNvPr id="8" name="Rounded Rectangle 7"/>
+          <p:cNvSpPr/>
+          <p:nvPr/>
+        </p:nvSpPr>
+        <p:spPr>
+          <a:xfrm>
+            <a:off x="4352544" y="1965960"/>
+            <a:ext cx="3483864" cy="1188720"/>
+          </a:xfrm>
+          <a:prstGeom prst="roundRect">
+            <a:avLst>
+              <a:gd name="adj" fmla="val 8000"/>
+            </a:avLst>
+          </a:prstGeom>
+          <a:solidFill>
+            <a:srgbClr val="F4F6F8"/>
+          </a:solidFill>
+          <a:ln>
+            <a:noFill/>
+          </a:ln>
+          <a:effectLst/>
+        </p:spPr>
+        <p:style>
+          <a:lnRef idx="1">
+            <a:schemeClr val="accent1"/>
+          </a:lnRef>
+          <a:fillRef idx="3">
+            <a:schemeClr val="accent1"/>
+          </a:fillRef>
+          <a:effectRef idx="2">
+            <a:schemeClr val="accent1"/>
+          </a:effectRef>
+          <a:fontRef idx="minor">
+            <a:schemeClr val="lt1"/>
+          </a:fontRef>
+        </p:style>
+        <p:txBody>
+          <a:bodyPr rtlCol="0" anchor="ctr"/>
+          <a:lstStyle/>
+          <a:p>
+            <a:pPr algn="ctr"/>
+          </a:p>
+        </p:txBody>
+      </p:sp>
+      <p:sp>
+        <p:nvSpPr>
+          <p:cNvPr id="9" name="TextBox 8"/>
+          <p:cNvSpPr txBox="1"/>
+          <p:nvPr/>
+        </p:nvSpPr>
+        <p:spPr>
+          <a:xfrm>
+            <a:off x="4517136" y="2112264"/>
+            <a:ext cx="3154680" cy="548640"/>
+          </a:xfrm>
+          <a:prstGeom prst="rect">
+            <a:avLst/>
+          </a:prstGeom>
+          <a:noFill/>
+        </p:spPr>
+        <p:txBody>
+          <a:bodyPr wrap="square" lIns="0" rIns="0" tIns="0" bIns="0" anchor="t">
+            <a:spAutoFit/>
+          </a:bodyPr>
+          <a:lstStyle/>
+          <a:p>
+            <a:pPr algn="l">
+              <a:lnSpc>
+                <a:spcPct val="115000"/>
+              </a:lnSpc>
+            </a:pPr>
+            <a:r>
+              <a:rPr sz="4000" b="1">
+                <a:solidFill>
+                  <a:srgbClr val="00C49A"/>
+                </a:solidFill>
+                <a:latin typeface="Arial"/>
+              </a:rPr>
+              <a:t>77%</a:t>
+            </a:r>
+          </a:p>
+        </p:txBody>
+      </p:sp>
+      <p:sp>
+        <p:nvSpPr>
+          <p:cNvPr id="10" name="TextBox 9"/>
+          <p:cNvSpPr txBox="1"/>
+          <p:nvPr/>
+        </p:nvSpPr>
+        <p:spPr>
+          <a:xfrm>
+            <a:off x="4517136" y="2770632"/>
+            <a:ext cx="3154680" cy="310896"/>
+          </a:xfrm>
+          <a:prstGeom prst="rect">
+            <a:avLst/>
+          </a:prstGeom>
+          <a:noFill/>
+        </p:spPr>
+        <p:txBody>
+          <a:bodyPr wrap="square" lIns="0" rIns="0" tIns="0" bIns="0" anchor="t">
+            <a:spAutoFit/>
+          </a:bodyPr>
+          <a:lstStyle/>
+          <a:p>
+            <a:pPr algn="l">
+              <a:lnSpc>
+                <a:spcPct val="115000"/>
+              </a:lnSpc>
+            </a:pPr>
+            <a:r>
+              <a:rPr sz="1250" b="0">
+                <a:solidFill>
+                  <a:srgbClr val="555555"/>
+                </a:solidFill>
+                <a:latin typeface="Microsoft JhengHei"/>
+              </a:rPr>
+              <a:t>一般展場 −18dB</a:t>
+            </a:r>
+          </a:p>
+        </p:txBody>
+      </p:sp>
+      <p:sp>
+        <p:nvSpPr>
+          <p:cNvPr id="11" name="Rounded Rectangle 10"/>
+          <p:cNvSpPr/>
+          <p:nvPr/>
+        </p:nvSpPr>
+        <p:spPr>
+          <a:xfrm>
+            <a:off x="8037576" y="1965960"/>
+            <a:ext cx="3483864" cy="1188720"/>
+          </a:xfrm>
+          <a:prstGeom prst="roundRect">
+            <a:avLst>
+              <a:gd name="adj" fmla="val 8000"/>
+            </a:avLst>
+          </a:prstGeom>
+          <a:solidFill>
+            <a:srgbClr val="F4F6F8"/>
+          </a:solidFill>
+          <a:ln>
+            <a:noFill/>
+          </a:ln>
+          <a:effectLst/>
+        </p:spPr>
+        <p:style>
+          <a:lnRef idx="1">
+            <a:schemeClr val="accent1"/>
+          </a:lnRef>
+          <a:fillRef idx="3">
+            <a:schemeClr val="accent1"/>
+          </a:fillRef>
+          <a:effectRef idx="2">
+            <a:schemeClr val="accent1"/>
+          </a:effectRef>
+          <a:fontRef idx="minor">
+            <a:schemeClr val="lt1"/>
+          </a:fontRef>
+        </p:style>
+        <p:txBody>
+          <a:bodyPr rtlCol="0" anchor="ctr"/>
+          <a:lstStyle/>
+          <a:p>
+            <a:pPr algn="ctr"/>
+          </a:p>
+        </p:txBody>
+      </p:sp>
+      <p:sp>
+        <p:nvSpPr>
+          <p:cNvPr id="12" name="TextBox 11"/>
+          <p:cNvSpPr txBox="1"/>
+          <p:nvPr/>
+        </p:nvSpPr>
+        <p:spPr>
+          <a:xfrm>
+            <a:off x="8202168" y="2112264"/>
+            <a:ext cx="3154680" cy="548640"/>
+          </a:xfrm>
+          <a:prstGeom prst="rect">
+            <a:avLst/>
+          </a:prstGeom>
+          <a:noFill/>
+        </p:spPr>
+        <p:txBody>
+          <a:bodyPr wrap="square" lIns="0" rIns="0" tIns="0" bIns="0" anchor="t">
+            <a:spAutoFit/>
+          </a:bodyPr>
+          <a:lstStyle/>
+          <a:p>
+            <a:pPr algn="l">
+              <a:lnSpc>
+                <a:spcPct val="115000"/>
+              </a:lnSpc>
+            </a:pPr>
+            <a:r>
+              <a:rPr sz="4000" b="1">
+                <a:solidFill>
+                  <a:srgbClr val="00C49A"/>
+                </a:solidFill>
+                <a:latin typeface="Arial"/>
+              </a:rPr>
+              <a:t>73%</a:t>
+            </a:r>
+          </a:p>
+        </p:txBody>
+      </p:sp>
+      <p:sp>
+        <p:nvSpPr>
+          <p:cNvPr id="13" name="TextBox 12"/>
+          <p:cNvSpPr txBox="1"/>
+          <p:nvPr/>
+        </p:nvSpPr>
+        <p:spPr>
+          <a:xfrm>
+            <a:off x="8202168" y="2770632"/>
+            <a:ext cx="3154680" cy="310896"/>
+          </a:xfrm>
+          <a:prstGeom prst="rect">
+            <a:avLst/>
+          </a:prstGeom>
+          <a:noFill/>
+        </p:spPr>
+        <p:txBody>
+          <a:bodyPr wrap="square" lIns="0" rIns="0" tIns="0" bIns="0" anchor="t">
+            <a:spAutoFit/>
+          </a:bodyPr>
+          <a:lstStyle/>
+          <a:p>
+            <a:pPr algn="l">
+              <a:lnSpc>
+                <a:spcPct val="115000"/>
+              </a:lnSpc>
+            </a:pPr>
+            <a:r>
+              <a:rPr sz="1250" b="0">
+                <a:solidFill>
+                  <a:srgbClr val="555555"/>
+                </a:solidFill>
+                <a:latin typeface="Microsoft JhengHei"/>
+              </a:rPr>
+              <a:t>尖峰吵雜 −8dB</a:t>
+            </a:r>
+          </a:p>
+        </p:txBody>
+      </p:sp>
+      <p:sp>
+        <p:nvSpPr>
+          <p:cNvPr id="14" name="Rounded Rectangle 13"/>
+          <p:cNvSpPr/>
+          <p:nvPr/>
+        </p:nvSpPr>
+        <p:spPr>
+          <a:xfrm>
+            <a:off x="667512" y="3520440"/>
+            <a:ext cx="10853928" cy="731520"/>
+          </a:xfrm>
+          <a:prstGeom prst="roundRect">
+            <a:avLst>
+              <a:gd name="adj" fmla="val 8000"/>
+            </a:avLst>
+          </a:prstGeom>
+          <a:solidFill>
+            <a:srgbClr val="F4F6F8"/>
+          </a:solidFill>
+          <a:ln>
+            <a:noFill/>
+          </a:ln>
+          <a:effectLst/>
+        </p:spPr>
+        <p:style>
+          <a:lnRef idx="1">
+            <a:schemeClr val="accent1"/>
+          </a:lnRef>
+          <a:fillRef idx="3">
+            <a:schemeClr val="accent1"/>
+          </a:fillRef>
+          <a:effectRef idx="2">
+            <a:schemeClr val="accent1"/>
+          </a:effectRef>
+          <a:fontRef idx="minor">
+            <a:schemeClr val="lt1"/>
+          </a:fontRef>
+        </p:style>
+        <p:txBody>
+          <a:bodyPr rtlCol="0" anchor="ctr"/>
+          <a:lstStyle/>
+          <a:p>
+            <a:pPr algn="ctr"/>
+          </a:p>
+        </p:txBody>
+      </p:sp>
+      <p:sp>
+        <p:nvSpPr>
+          <p:cNvPr id="15" name="Oval 14"/>
+          <p:cNvSpPr/>
+          <p:nvPr/>
+        </p:nvSpPr>
+        <p:spPr>
+          <a:xfrm>
+            <a:off x="960120" y="3776472"/>
+            <a:ext cx="219456" cy="219456"/>
           </a:xfrm>
           <a:prstGeom prst="ellipse">
             <a:avLst/>
@@ -13876,14 +15813,14 @@
       </p:sp>
       <p:sp>
         <p:nvSpPr>
-          <p:cNvPr id="8" name="TextBox 7"/>
-          <p:cNvSpPr txBox="1"/>
-          <p:nvPr/>
-        </p:nvSpPr>
-        <p:spPr>
-          <a:xfrm>
-            <a:off x="941832" y="2258568"/>
-            <a:ext cx="530352" cy="530352"/>
+          <p:cNvPr id="16" name="TextBox 15"/>
+          <p:cNvSpPr txBox="1"/>
+          <p:nvPr/>
+        </p:nvSpPr>
+        <p:spPr>
+          <a:xfrm>
+            <a:off x="1417320" y="3593592"/>
+            <a:ext cx="3474720" cy="603504"/>
           </a:xfrm>
           <a:prstGeom prst="rect">
             <a:avLst/>
@@ -13896,33 +15833,33 @@
           </a:bodyPr>
           <a:lstStyle/>
           <a:p>
-            <a:pPr algn="ctr">
-              <a:lnSpc>
-                <a:spcPct val="115000"/>
-              </a:lnSpc>
-            </a:pPr>
-            <a:r>
-              <a:rPr sz="1700" b="1">
-                <a:solidFill>
-                  <a:srgbClr val="1A1A2E"/>
-                </a:solidFill>
-                <a:latin typeface="Microsoft JhengHei"/>
-              </a:rPr>
-              <a:t>價</a:t>
-            </a:r>
-          </a:p>
-        </p:txBody>
-      </p:sp>
-      <p:sp>
-        <p:nvSpPr>
-          <p:cNvPr id="9" name="TextBox 8"/>
-          <p:cNvSpPr txBox="1"/>
-          <p:nvPr/>
-        </p:nvSpPr>
-        <p:spPr>
-          <a:xfrm>
-            <a:off x="1719072" y="2194560"/>
-            <a:ext cx="1463040" cy="685800"/>
+            <a:pPr algn="l">
+              <a:lnSpc>
+                <a:spcPct val="115000"/>
+              </a:lnSpc>
+            </a:pPr>
+            <a:r>
+              <a:rPr sz="1500" b="1">
+                <a:solidFill>
+                  <a:srgbClr val="00C49A"/>
+                </a:solidFill>
+                <a:latin typeface="Microsoft JhengHei"/>
+              </a:rPr>
+              <a:t>噪音幾乎零影響</a:t>
+            </a:r>
+          </a:p>
+        </p:txBody>
+      </p:sp>
+      <p:sp>
+        <p:nvSpPr>
+          <p:cNvPr id="17" name="TextBox 16"/>
+          <p:cNvSpPr txBox="1"/>
+          <p:nvPr/>
+        </p:nvSpPr>
+        <p:spPr>
+          <a:xfrm>
+            <a:off x="4965192" y="3593592"/>
+            <a:ext cx="6309360" cy="603504"/>
           </a:xfrm>
           <a:prstGeom prst="rect">
             <a:avLst/>
@@ -13941,71 +15878,244 @@
               </a:lnSpc>
             </a:pPr>
             <a:r>
-              <a:rPr sz="1800" b="1">
-                <a:solidFill>
-                  <a:srgbClr val="00C49A"/>
-                </a:solidFill>
-                <a:latin typeface="Microsoft JhengHei"/>
-              </a:rPr>
-              <a:t>價值</a:t>
-            </a:r>
-          </a:p>
-        </p:txBody>
-      </p:sp>
-      <p:sp>
-        <p:nvSpPr>
-          <p:cNvPr id="10" name="TextBox 9"/>
-          <p:cNvSpPr txBox="1"/>
-          <p:nvPr/>
-        </p:nvSpPr>
-        <p:spPr>
-          <a:xfrm>
-            <a:off x="3182112" y="2194560"/>
-            <a:ext cx="8046720" cy="685800"/>
-          </a:xfrm>
-          <a:prstGeom prst="rect">
-            <a:avLst/>
-          </a:prstGeom>
-          <a:noFill/>
-        </p:spPr>
-        <p:txBody>
-          <a:bodyPr wrap="square" lIns="0" rIns="0" tIns="0" bIns="0" anchor="ctr">
-            <a:spAutoFit/>
-          </a:bodyPr>
-          <a:lstStyle/>
-          <a:p>
-            <a:pPr algn="l">
-              <a:lnSpc>
-                <a:spcPct val="115000"/>
-              </a:lnSpc>
-            </a:pPr>
-            <a:r>
-              <a:rPr sz="1400" b="0">
-                <a:solidFill>
-                  <a:srgbClr val="FFFFFF"/>
-                </a:solidFill>
-                <a:latin typeface="Microsoft JhengHei"/>
-              </a:rPr>
-              <a:t>自然語言問倉管，一秒回答；手機掃碼、離線可用、硬體成本極低</a:t>
-            </a:r>
-          </a:p>
-        </p:txBody>
-      </p:sp>
-      <p:sp>
-        <p:nvSpPr>
-          <p:cNvPr id="11" name="Rounded Rectangle 10"/>
+              <a:rPr sz="1250" b="0">
+                <a:solidFill>
+                  <a:srgbClr val="444444"/>
+                </a:solidFill>
+                <a:latin typeface="Microsoft JhengHei"/>
+              </a:rPr>
+              <a:t>一般展場 −1%、尖峰只 −5%；純被噪音壓垮的僅 5 句</a:t>
+            </a:r>
+          </a:p>
+        </p:txBody>
+      </p:sp>
+      <p:sp>
+        <p:nvSpPr>
+          <p:cNvPr id="18" name="Rounded Rectangle 17"/>
           <p:cNvSpPr/>
           <p:nvPr/>
         </p:nvSpPr>
         <p:spPr>
           <a:xfrm>
-            <a:off x="667512" y="3200400"/>
-            <a:ext cx="10853928" cy="960120"/>
+            <a:off x="667512" y="4389120"/>
+            <a:ext cx="10853928" cy="731520"/>
           </a:xfrm>
           <a:prstGeom prst="roundRect">
             <a:avLst>
               <a:gd name="adj" fmla="val 8000"/>
             </a:avLst>
+          </a:prstGeom>
+          <a:solidFill>
+            <a:srgbClr val="F4F6F8"/>
+          </a:solidFill>
+          <a:ln>
+            <a:noFill/>
+          </a:ln>
+          <a:effectLst/>
+        </p:spPr>
+        <p:style>
+          <a:lnRef idx="1">
+            <a:schemeClr val="accent1"/>
+          </a:lnRef>
+          <a:fillRef idx="3">
+            <a:schemeClr val="accent1"/>
+          </a:fillRef>
+          <a:effectRef idx="2">
+            <a:schemeClr val="accent1"/>
+          </a:effectRef>
+          <a:fontRef idx="minor">
+            <a:schemeClr val="lt1"/>
+          </a:fontRef>
+        </p:style>
+        <p:txBody>
+          <a:bodyPr rtlCol="0" anchor="ctr"/>
+          <a:lstStyle/>
+          <a:p>
+            <a:pPr algn="ctr"/>
+          </a:p>
+        </p:txBody>
+      </p:sp>
+      <p:sp>
+        <p:nvSpPr>
+          <p:cNvPr id="19" name="Oval 18"/>
+          <p:cNvSpPr/>
+          <p:nvPr/>
+        </p:nvSpPr>
+        <p:spPr>
+          <a:xfrm>
+            <a:off x="960120" y="4645152"/>
+            <a:ext cx="219456" cy="219456"/>
+          </a:xfrm>
+          <a:prstGeom prst="ellipse">
+            <a:avLst/>
+          </a:prstGeom>
+          <a:solidFill>
+            <a:srgbClr val="F0A030"/>
+          </a:solidFill>
+          <a:ln>
+            <a:noFill/>
+          </a:ln>
+          <a:effectLst/>
+        </p:spPr>
+        <p:style>
+          <a:lnRef idx="1">
+            <a:schemeClr val="accent1"/>
+          </a:lnRef>
+          <a:fillRef idx="3">
+            <a:schemeClr val="accent1"/>
+          </a:fillRef>
+          <a:effectRef idx="2">
+            <a:schemeClr val="accent1"/>
+          </a:effectRef>
+          <a:fontRef idx="minor">
+            <a:schemeClr val="lt1"/>
+          </a:fontRef>
+        </p:style>
+        <p:txBody>
+          <a:bodyPr rtlCol="0" anchor="ctr"/>
+          <a:lstStyle/>
+          <a:p>
+            <a:pPr algn="ctr"/>
+          </a:p>
+        </p:txBody>
+      </p:sp>
+      <p:sp>
+        <p:nvSpPr>
+          <p:cNvPr id="20" name="TextBox 19"/>
+          <p:cNvSpPr txBox="1"/>
+          <p:nvPr/>
+        </p:nvSpPr>
+        <p:spPr>
+          <a:xfrm>
+            <a:off x="1417320" y="4462272"/>
+            <a:ext cx="3474720" cy="603504"/>
+          </a:xfrm>
+          <a:prstGeom prst="rect">
+            <a:avLst/>
+          </a:prstGeom>
+          <a:noFill/>
+        </p:spPr>
+        <p:txBody>
+          <a:bodyPr wrap="square" lIns="0" rIns="0" tIns="0" bIns="0" anchor="ctr">
+            <a:spAutoFit/>
+          </a:bodyPr>
+          <a:lstStyle/>
+          <a:p>
+            <a:pPr algn="l">
+              <a:lnSpc>
+                <a:spcPct val="115000"/>
+              </a:lnSpc>
+            </a:pPr>
+            <a:r>
+              <a:rPr sz="1500" b="1">
+                <a:solidFill>
+                  <a:srgbClr val="F0A030"/>
+                </a:solidFill>
+                <a:latin typeface="Microsoft JhengHei"/>
+              </a:rPr>
+              <a:t>音量才是關鍵</a:t>
+            </a:r>
+          </a:p>
+        </p:txBody>
+      </p:sp>
+      <p:sp>
+        <p:nvSpPr>
+          <p:cNvPr id="21" name="TextBox 20"/>
+          <p:cNvSpPr txBox="1"/>
+          <p:nvPr/>
+        </p:nvSpPr>
+        <p:spPr>
+          <a:xfrm>
+            <a:off x="4965192" y="4462272"/>
+            <a:ext cx="6309360" cy="603504"/>
+          </a:xfrm>
+          <a:prstGeom prst="rect">
+            <a:avLst/>
+          </a:prstGeom>
+          <a:noFill/>
+        </p:spPr>
+        <p:txBody>
+          <a:bodyPr wrap="square" lIns="0" rIns="0" tIns="0" bIns="0" anchor="ctr">
+            <a:spAutoFit/>
+          </a:bodyPr>
+          <a:lstStyle/>
+          <a:p>
+            <a:pPr algn="l">
+              <a:lnSpc>
+                <a:spcPct val="115000"/>
+              </a:lnSpc>
+            </a:pPr>
+            <a:r>
+              <a:rPr sz="1250" b="0">
+                <a:solidFill>
+                  <a:srgbClr val="444444"/>
+                </a:solidFill>
+                <a:latin typeface="Microsoft JhengHei"/>
+              </a:rPr>
+              <a:t>小聲時摩擦音（ㄕ/ㄘ）糊掉→亂猜；正常音量直接解決大半</a:t>
+            </a:r>
+          </a:p>
+        </p:txBody>
+      </p:sp>
+      <p:sp>
+        <p:nvSpPr>
+          <p:cNvPr id="22" name="Rounded Rectangle 21"/>
+          <p:cNvSpPr/>
+          <p:nvPr/>
+        </p:nvSpPr>
+        <p:spPr>
+          <a:xfrm>
+            <a:off x="667512" y="5257800"/>
+            <a:ext cx="10853928" cy="731520"/>
+          </a:xfrm>
+          <a:prstGeom prst="roundRect">
+            <a:avLst>
+              <a:gd name="adj" fmla="val 8000"/>
+            </a:avLst>
+          </a:prstGeom>
+          <a:solidFill>
+            <a:srgbClr val="F4F6F8"/>
+          </a:solidFill>
+          <a:ln>
+            <a:noFill/>
+          </a:ln>
+          <a:effectLst/>
+        </p:spPr>
+        <p:style>
+          <a:lnRef idx="1">
+            <a:schemeClr val="accent1"/>
+          </a:lnRef>
+          <a:fillRef idx="3">
+            <a:schemeClr val="accent1"/>
+          </a:fillRef>
+          <a:effectRef idx="2">
+            <a:schemeClr val="accent1"/>
+          </a:effectRef>
+          <a:fontRef idx="minor">
+            <a:schemeClr val="lt1"/>
+          </a:fontRef>
+        </p:style>
+        <p:txBody>
+          <a:bodyPr rtlCol="0" anchor="ctr"/>
+          <a:lstStyle/>
+          <a:p>
+            <a:pPr algn="ctr"/>
+          </a:p>
+        </p:txBody>
+      </p:sp>
+      <p:sp>
+        <p:nvSpPr>
+          <p:cNvPr id="23" name="Oval 22"/>
+          <p:cNvSpPr/>
+          <p:nvPr/>
+        </p:nvSpPr>
+        <p:spPr>
+          <a:xfrm>
+            <a:off x="960120" y="5513832"/>
+            <a:ext cx="219456" cy="219456"/>
+          </a:xfrm>
+          <a:prstGeom prst="ellipse">
+            <a:avLst/>
           </a:prstGeom>
           <a:solidFill>
             <a:srgbClr val="222A45"/>
@@ -14039,58 +16149,14 @@
       </p:sp>
       <p:sp>
         <p:nvSpPr>
-          <p:cNvPr id="12" name="Oval 11"/>
-          <p:cNvSpPr/>
-          <p:nvPr/>
-        </p:nvSpPr>
-        <p:spPr>
-          <a:xfrm>
-            <a:off x="941832" y="3419856"/>
-            <a:ext cx="530352" cy="530352"/>
-          </a:xfrm>
-          <a:prstGeom prst="ellipse">
-            <a:avLst/>
-          </a:prstGeom>
-          <a:solidFill>
-            <a:srgbClr val="00C49A"/>
-          </a:solidFill>
-          <a:ln>
-            <a:noFill/>
-          </a:ln>
-          <a:effectLst/>
-        </p:spPr>
-        <p:style>
-          <a:lnRef idx="1">
-            <a:schemeClr val="accent1"/>
-          </a:lnRef>
-          <a:fillRef idx="3">
-            <a:schemeClr val="accent1"/>
-          </a:fillRef>
-          <a:effectRef idx="2">
-            <a:schemeClr val="accent1"/>
-          </a:effectRef>
-          <a:fontRef idx="minor">
-            <a:schemeClr val="lt1"/>
-          </a:fontRef>
-        </p:style>
-        <p:txBody>
-          <a:bodyPr rtlCol="0" anchor="ctr"/>
-          <a:lstStyle/>
-          <a:p>
-            <a:pPr algn="ctr"/>
-          </a:p>
-        </p:txBody>
-      </p:sp>
-      <p:sp>
-        <p:nvSpPr>
-          <p:cNvPr id="13" name="TextBox 12"/>
-          <p:cNvSpPr txBox="1"/>
-          <p:nvPr/>
-        </p:nvSpPr>
-        <p:spPr>
-          <a:xfrm>
-            <a:off x="941832" y="3401568"/>
-            <a:ext cx="530352" cy="530352"/>
+          <p:cNvPr id="24" name="TextBox 23"/>
+          <p:cNvSpPr txBox="1"/>
+          <p:nvPr/>
+        </p:nvSpPr>
+        <p:spPr>
+          <a:xfrm>
+            <a:off x="1417320" y="5330952"/>
+            <a:ext cx="3474720" cy="603504"/>
           </a:xfrm>
           <a:prstGeom prst="rect">
             <a:avLst/>
@@ -14103,33 +16169,33 @@
           </a:bodyPr>
           <a:lstStyle/>
           <a:p>
-            <a:pPr algn="ctr">
-              <a:lnSpc>
-                <a:spcPct val="115000"/>
-              </a:lnSpc>
-            </a:pPr>
-            <a:r>
-              <a:rPr sz="1700" b="1">
-                <a:solidFill>
-                  <a:srgbClr val="1A1A2E"/>
-                </a:solidFill>
-                <a:latin typeface="Microsoft JhengHei"/>
-              </a:rPr>
-              <a:t>技</a:t>
-            </a:r>
-          </a:p>
-        </p:txBody>
-      </p:sp>
-      <p:sp>
-        <p:nvSpPr>
-          <p:cNvPr id="14" name="TextBox 13"/>
-          <p:cNvSpPr txBox="1"/>
-          <p:nvPr/>
-        </p:nvSpPr>
-        <p:spPr>
-          <a:xfrm>
-            <a:off x="1719072" y="3337560"/>
-            <a:ext cx="1463040" cy="685800"/>
+            <a:pPr algn="l">
+              <a:lnSpc>
+                <a:spcPct val="115000"/>
+              </a:lnSpc>
+            </a:pPr>
+            <a:r>
+              <a:rPr sz="1500" b="1">
+                <a:solidFill>
+                  <a:srgbClr val="222A45"/>
+                </a:solidFill>
+                <a:latin typeface="Microsoft JhengHei"/>
+              </a:rPr>
+              <a:t>失敗多為 ASR 極限</a:t>
+            </a:r>
+          </a:p>
+        </p:txBody>
+      </p:sp>
+      <p:sp>
+        <p:nvSpPr>
+          <p:cNvPr id="25" name="TextBox 24"/>
+          <p:cNvSpPr txBox="1"/>
+          <p:nvPr/>
+        </p:nvSpPr>
+        <p:spPr>
+          <a:xfrm>
+            <a:off x="4965192" y="5330952"/>
+            <a:ext cx="6309360" cy="603504"/>
           </a:xfrm>
           <a:prstGeom prst="rect">
             <a:avLst/>
@@ -14148,272 +16214,26 @@
               </a:lnSpc>
             </a:pPr>
             <a:r>
-              <a:rPr sz="1800" b="1">
-                <a:solidFill>
-                  <a:srgbClr val="00C49A"/>
-                </a:solidFill>
-                <a:latin typeface="Microsoft JhengHei"/>
-              </a:rPr>
-              <a:t>技術</a:t>
-            </a:r>
-          </a:p>
-        </p:txBody>
-      </p:sp>
-      <p:sp>
-        <p:nvSpPr>
-          <p:cNvPr id="15" name="TextBox 14"/>
-          <p:cNvSpPr txBox="1"/>
-          <p:nvPr/>
-        </p:nvSpPr>
-        <p:spPr>
-          <a:xfrm>
-            <a:off x="3182112" y="3337560"/>
-            <a:ext cx="8046720" cy="685800"/>
-          </a:xfrm>
-          <a:prstGeom prst="rect">
-            <a:avLst/>
-          </a:prstGeom>
-          <a:noFill/>
-        </p:spPr>
-        <p:txBody>
-          <a:bodyPr wrap="square" lIns="0" rIns="0" tIns="0" bIns="0" anchor="ctr">
-            <a:spAutoFit/>
-          </a:bodyPr>
-          <a:lstStyle/>
-          <a:p>
-            <a:pPr algn="l">
-              <a:lnSpc>
-                <a:spcPct val="115000"/>
-              </a:lnSpc>
-            </a:pPr>
-            <a:r>
-              <a:rPr sz="1400" b="0">
-                <a:solidFill>
-                  <a:srgbClr val="FFFFFF"/>
-                </a:solidFill>
-                <a:latin typeface="Microsoft JhengHei"/>
-              </a:rPr>
-              <a:t>270M 小模型當路由器 + 規則層當決策者，業界邊緣 Agent 的正解</a:t>
-            </a:r>
-          </a:p>
-        </p:txBody>
-      </p:sp>
-      <p:sp>
-        <p:nvSpPr>
-          <p:cNvPr id="16" name="Rounded Rectangle 15"/>
-          <p:cNvSpPr/>
-          <p:nvPr/>
-        </p:nvSpPr>
-        <p:spPr>
-          <a:xfrm>
-            <a:off x="667512" y="4343400"/>
-            <a:ext cx="10853928" cy="960120"/>
-          </a:xfrm>
-          <a:prstGeom prst="roundRect">
-            <a:avLst>
-              <a:gd name="adj" fmla="val 8000"/>
-            </a:avLst>
-          </a:prstGeom>
-          <a:solidFill>
-            <a:srgbClr val="222A45"/>
-          </a:solidFill>
-          <a:ln>
-            <a:noFill/>
-          </a:ln>
-          <a:effectLst/>
-        </p:spPr>
-        <p:style>
-          <a:lnRef idx="1">
-            <a:schemeClr val="accent1"/>
-          </a:lnRef>
-          <a:fillRef idx="3">
-            <a:schemeClr val="accent1"/>
-          </a:fillRef>
-          <a:effectRef idx="2">
-            <a:schemeClr val="accent1"/>
-          </a:effectRef>
-          <a:fontRef idx="minor">
-            <a:schemeClr val="lt1"/>
-          </a:fontRef>
-        </p:style>
-        <p:txBody>
-          <a:bodyPr rtlCol="0" anchor="ctr"/>
-          <a:lstStyle/>
-          <a:p>
-            <a:pPr algn="ctr"/>
-          </a:p>
-        </p:txBody>
-      </p:sp>
-      <p:sp>
-        <p:nvSpPr>
-          <p:cNvPr id="17" name="Oval 16"/>
-          <p:cNvSpPr/>
-          <p:nvPr/>
-        </p:nvSpPr>
-        <p:spPr>
-          <a:xfrm>
-            <a:off x="941832" y="4562856"/>
-            <a:ext cx="530352" cy="530352"/>
-          </a:xfrm>
-          <a:prstGeom prst="ellipse">
-            <a:avLst/>
-          </a:prstGeom>
-          <a:solidFill>
-            <a:srgbClr val="00C49A"/>
-          </a:solidFill>
-          <a:ln>
-            <a:noFill/>
-          </a:ln>
-          <a:effectLst/>
-        </p:spPr>
-        <p:style>
-          <a:lnRef idx="1">
-            <a:schemeClr val="accent1"/>
-          </a:lnRef>
-          <a:fillRef idx="3">
-            <a:schemeClr val="accent1"/>
-          </a:fillRef>
-          <a:effectRef idx="2">
-            <a:schemeClr val="accent1"/>
-          </a:effectRef>
-          <a:fontRef idx="minor">
-            <a:schemeClr val="lt1"/>
-          </a:fontRef>
-        </p:style>
-        <p:txBody>
-          <a:bodyPr rtlCol="0" anchor="ctr"/>
-          <a:lstStyle/>
-          <a:p>
-            <a:pPr algn="ctr"/>
-          </a:p>
-        </p:txBody>
-      </p:sp>
-      <p:sp>
-        <p:nvSpPr>
-          <p:cNvPr id="18" name="TextBox 17"/>
-          <p:cNvSpPr txBox="1"/>
-          <p:nvPr/>
-        </p:nvSpPr>
-        <p:spPr>
-          <a:xfrm>
-            <a:off x="941832" y="4544568"/>
-            <a:ext cx="530352" cy="530352"/>
-          </a:xfrm>
-          <a:prstGeom prst="rect">
-            <a:avLst/>
-          </a:prstGeom>
-          <a:noFill/>
-        </p:spPr>
-        <p:txBody>
-          <a:bodyPr wrap="square" lIns="0" rIns="0" tIns="0" bIns="0" anchor="ctr">
-            <a:spAutoFit/>
-          </a:bodyPr>
-          <a:lstStyle/>
-          <a:p>
-            <a:pPr algn="ctr">
-              <a:lnSpc>
-                <a:spcPct val="115000"/>
-              </a:lnSpc>
-            </a:pPr>
-            <a:r>
-              <a:rPr sz="1700" b="1">
-                <a:solidFill>
-                  <a:srgbClr val="1A1A2E"/>
-                </a:solidFill>
-                <a:latin typeface="Microsoft JhengHei"/>
-              </a:rPr>
-              <a:t>品</a:t>
-            </a:r>
-          </a:p>
-        </p:txBody>
-      </p:sp>
-      <p:sp>
-        <p:nvSpPr>
-          <p:cNvPr id="19" name="TextBox 18"/>
-          <p:cNvSpPr txBox="1"/>
-          <p:nvPr/>
-        </p:nvSpPr>
-        <p:spPr>
-          <a:xfrm>
-            <a:off x="1719072" y="4480560"/>
-            <a:ext cx="1463040" cy="685800"/>
-          </a:xfrm>
-          <a:prstGeom prst="rect">
-            <a:avLst/>
-          </a:prstGeom>
-          <a:noFill/>
-        </p:spPr>
-        <p:txBody>
-          <a:bodyPr wrap="square" lIns="0" rIns="0" tIns="0" bIns="0" anchor="ctr">
-            <a:spAutoFit/>
-          </a:bodyPr>
-          <a:lstStyle/>
-          <a:p>
-            <a:pPr algn="l">
-              <a:lnSpc>
-                <a:spcPct val="115000"/>
-              </a:lnSpc>
-            </a:pPr>
-            <a:r>
-              <a:rPr sz="1800" b="1">
-                <a:solidFill>
-                  <a:srgbClr val="00C49A"/>
-                </a:solidFill>
-                <a:latin typeface="Microsoft JhengHei"/>
-              </a:rPr>
-              <a:t>品質</a:t>
-            </a:r>
-          </a:p>
-        </p:txBody>
-      </p:sp>
-      <p:sp>
-        <p:nvSpPr>
-          <p:cNvPr id="20" name="TextBox 19"/>
-          <p:cNvSpPr txBox="1"/>
-          <p:nvPr/>
-        </p:nvSpPr>
-        <p:spPr>
-          <a:xfrm>
-            <a:off x="3182112" y="4480560"/>
-            <a:ext cx="8046720" cy="685800"/>
-          </a:xfrm>
-          <a:prstGeom prst="rect">
-            <a:avLst/>
-          </a:prstGeom>
-          <a:noFill/>
-        </p:spPr>
-        <p:txBody>
-          <a:bodyPr wrap="square" lIns="0" rIns="0" tIns="0" bIns="0" anchor="ctr">
-            <a:spAutoFit/>
-          </a:bodyPr>
-          <a:lstStyle/>
-          <a:p>
-            <a:pPr algn="l">
-              <a:lnSpc>
-                <a:spcPct val="115000"/>
-              </a:lnSpc>
-            </a:pPr>
-            <a:r>
-              <a:rPr sz="1400" b="0">
-                <a:solidFill>
-                  <a:srgbClr val="FFFFFF"/>
-                </a:solidFill>
-                <a:latin typeface="Microsoft JhengHei"/>
-              </a:rPr>
-              <a:t>六套回歸雙平台 100%；多輪全枚舉把「可靠」變成數字，不靠祈禱</a:t>
-            </a:r>
-          </a:p>
-        </p:txBody>
-      </p:sp>
-      <p:sp>
-        <p:nvSpPr>
-          <p:cNvPr id="21" name="TextBox 20"/>
-          <p:cNvSpPr txBox="1"/>
-          <p:nvPr/>
-        </p:nvSpPr>
-        <p:spPr>
-          <a:xfrm>
-            <a:off x="667512" y="5852160"/>
+              <a:rPr sz="1250" b="0">
+                <a:solidFill>
+                  <a:srgbClr val="444444"/>
+                </a:solidFill>
+                <a:latin typeface="Microsoft JhengHei"/>
+              </a:rPr>
+              <a:t>整詞聽錯，訪客看辨識文字重講即可，非系統 bug</a:t>
+            </a:r>
+          </a:p>
+        </p:txBody>
+      </p:sp>
+      <p:sp>
+        <p:nvSpPr>
+          <p:cNvPr id="26" name="TextBox 25"/>
+          <p:cNvSpPr txBox="1"/>
+          <p:nvPr/>
+        </p:nvSpPr>
+        <p:spPr>
+          <a:xfrm>
+            <a:off x="667512" y="6172200"/>
             <a:ext cx="10789920" cy="457200"/>
           </a:xfrm>
           <a:prstGeom prst="rect">
@@ -14433,20 +16253,20 @@
               </a:lnSpc>
             </a:pPr>
             <a:r>
-              <a:rPr sz="1300" b="0">
-                <a:solidFill>
-                  <a:srgbClr val="BBBBBB"/>
-                </a:solidFill>
-                <a:latin typeface="Microsoft JhengHei"/>
-              </a:rPr>
-              <a:t>下一步：展前待辦（demo 基準日對齊、展前真機全量驗收）——重置鈕 / 開機自啟 / Wi-Fi 自癒已完成</a:t>
-            </a:r>
-          </a:p>
-        </p:txBody>
-      </p:sp>
-      <p:sp>
-        <p:nvSpPr>
-          <p:cNvPr id="22" name="TextBox 21"/>
+              <a:rPr sz="1400" b="1">
+                <a:solidFill>
+                  <a:srgbClr val="008E76"/>
+                </a:solidFill>
+                <a:latin typeface="Microsoft JhengHei"/>
+              </a:rPr>
+              <a:t>結論：webcam + 270M + 正常音量＝展場夠用，不需升級模型或麥克風。</a:t>
+            </a:r>
+          </a:p>
+        </p:txBody>
+      </p:sp>
+      <p:sp>
+        <p:nvSpPr>
+          <p:cNvPr id="27" name="TextBox 26"/>
           <p:cNvSpPr txBox="1"/>
           <p:nvPr/>
         </p:nvSpPr>
@@ -14478,7 +16298,7 @@
                 </a:solidFill>
                 <a:latin typeface="Arial"/>
               </a:rPr>
-              <a:t>18</a:t>
+              <a:t>19</a:t>
             </a:r>
           </a:p>
         </p:txBody>
@@ -15760,6 +17580,2337 @@
                 <a:latin typeface="Arial"/>
               </a:rPr>
               <a:t>02</a:t>
+            </a:r>
+          </a:p>
+        </p:txBody>
+      </p:sp>
+    </p:spTree>
+  </p:cSld>
+  <p:clrMapOvr>
+    <a:masterClrMapping/>
+  </p:clrMapOvr>
+</p:sld>
+</file>
+
+<file path=ppt/slides/slide20.xml><?xml version="1.0" encoding="utf-8"?>
+<p:sld xmlns:a="http://schemas.openxmlformats.org/drawingml/2006/main" xmlns:p="http://schemas.openxmlformats.org/presentationml/2006/main" xmlns:r="http://schemas.openxmlformats.org/officeDocument/2006/relationships">
+  <p:cSld>
+    <p:spTree>
+      <p:nvGrpSpPr>
+        <p:cNvPr id="1" name=""/>
+        <p:cNvGrpSpPr/>
+        <p:nvPr/>
+      </p:nvGrpSpPr>
+      <p:grpSpPr/>
+      <p:sp>
+        <p:nvSpPr>
+          <p:cNvPr id="2" name="TextBox 1"/>
+          <p:cNvSpPr txBox="1"/>
+          <p:nvPr/>
+        </p:nvSpPr>
+        <p:spPr>
+          <a:xfrm>
+            <a:off x="667512" y="310896"/>
+            <a:ext cx="10789920" cy="274320"/>
+          </a:xfrm>
+          <a:prstGeom prst="rect">
+            <a:avLst/>
+          </a:prstGeom>
+          <a:noFill/>
+        </p:spPr>
+        <p:txBody>
+          <a:bodyPr wrap="square" lIns="0" rIns="0" tIns="0" bIns="0" anchor="t">
+            <a:spAutoFit/>
+          </a:bodyPr>
+          <a:lstStyle/>
+          <a:p>
+            <a:pPr algn="l">
+              <a:lnSpc>
+                <a:spcPct val="115000"/>
+              </a:lnSpc>
+            </a:pPr>
+            <a:r>
+              <a:rPr sz="1250" b="1">
+                <a:solidFill>
+                  <a:srgbClr val="00C49A"/>
+                </a:solidFill>
+                <a:latin typeface="Arial"/>
+              </a:rPr>
+              <a:t>VOICE POC · 容錯設計</a:t>
+            </a:r>
+          </a:p>
+        </p:txBody>
+      </p:sp>
+      <p:sp>
+        <p:nvSpPr>
+          <p:cNvPr id="3" name="TextBox 2"/>
+          <p:cNvSpPr txBox="1"/>
+          <p:nvPr/>
+        </p:nvSpPr>
+        <p:spPr>
+          <a:xfrm>
+            <a:off x="667512" y="585216"/>
+            <a:ext cx="10789920" cy="566928"/>
+          </a:xfrm>
+          <a:prstGeom prst="rect">
+            <a:avLst/>
+          </a:prstGeom>
+          <a:noFill/>
+        </p:spPr>
+        <p:txBody>
+          <a:bodyPr wrap="square" lIns="0" rIns="0" tIns="0" bIns="0" anchor="t">
+            <a:spAutoFit/>
+          </a:bodyPr>
+          <a:lstStyle/>
+          <a:p>
+            <a:pPr algn="l">
+              <a:lnSpc>
+                <a:spcPct val="115000"/>
+              </a:lnSpc>
+            </a:pPr>
+            <a:r>
+              <a:rPr sz="2700" b="1">
+                <a:solidFill>
+                  <a:srgbClr val="1A1A2E"/>
+                </a:solidFill>
+                <a:latin typeface="Microsoft JhengHei"/>
+              </a:rPr>
+              <a:t>ASR 會聽錯，兩層容錯把它接住</a:t>
+            </a:r>
+          </a:p>
+        </p:txBody>
+      </p:sp>
+      <p:sp>
+        <p:nvSpPr>
+          <p:cNvPr id="4" name="TextBox 3"/>
+          <p:cNvSpPr txBox="1"/>
+          <p:nvPr/>
+        </p:nvSpPr>
+        <p:spPr>
+          <a:xfrm>
+            <a:off x="667512" y="1298448"/>
+            <a:ext cx="10789920" cy="365760"/>
+          </a:xfrm>
+          <a:prstGeom prst="rect">
+            <a:avLst/>
+          </a:prstGeom>
+          <a:noFill/>
+        </p:spPr>
+        <p:txBody>
+          <a:bodyPr wrap="square" lIns="0" rIns="0" tIns="0" bIns="0" anchor="t">
+            <a:spAutoFit/>
+          </a:bodyPr>
+          <a:lstStyle/>
+          <a:p>
+            <a:pPr algn="l">
+              <a:lnSpc>
+                <a:spcPct val="115000"/>
+              </a:lnSpc>
+            </a:pPr>
+            <a:r>
+              <a:rPr sz="1350" b="0">
+                <a:solidFill>
+                  <a:srgbClr val="555555"/>
+                </a:solidFill>
+                <a:latin typeface="Microsoft JhengHei"/>
+              </a:rPr>
+              <a:t>270M 小模型辨識不完美（滑鼠→華數/華族）。兩層容錯——真人聲實測一句句磨出來——讓聽錯也答對。</a:t>
+            </a:r>
+          </a:p>
+        </p:txBody>
+      </p:sp>
+      <p:sp>
+        <p:nvSpPr>
+          <p:cNvPr id="5" name="Rounded Rectangle 4"/>
+          <p:cNvSpPr/>
+          <p:nvPr/>
+        </p:nvSpPr>
+        <p:spPr>
+          <a:xfrm>
+            <a:off x="667512" y="1965960"/>
+            <a:ext cx="5257800" cy="3429000"/>
+          </a:xfrm>
+          <a:prstGeom prst="roundRect">
+            <a:avLst>
+              <a:gd name="adj" fmla="val 8000"/>
+            </a:avLst>
+          </a:prstGeom>
+          <a:solidFill>
+            <a:srgbClr val="E4F7F2"/>
+          </a:solidFill>
+          <a:ln>
+            <a:noFill/>
+          </a:ln>
+          <a:effectLst/>
+        </p:spPr>
+        <p:style>
+          <a:lnRef idx="1">
+            <a:schemeClr val="accent1"/>
+          </a:lnRef>
+          <a:fillRef idx="3">
+            <a:schemeClr val="accent1"/>
+          </a:fillRef>
+          <a:effectRef idx="2">
+            <a:schemeClr val="accent1"/>
+          </a:effectRef>
+          <a:fontRef idx="minor">
+            <a:schemeClr val="lt1"/>
+          </a:fontRef>
+        </p:style>
+        <p:txBody>
+          <a:bodyPr rtlCol="0" anchor="ctr"/>
+          <a:lstStyle/>
+          <a:p>
+            <a:pPr algn="ctr"/>
+          </a:p>
+        </p:txBody>
+      </p:sp>
+      <p:sp>
+        <p:nvSpPr>
+          <p:cNvPr id="6" name="TextBox 5"/>
+          <p:cNvSpPr txBox="1"/>
+          <p:nvPr/>
+        </p:nvSpPr>
+        <p:spPr>
+          <a:xfrm>
+            <a:off x="987552" y="2194560"/>
+            <a:ext cx="4617720" cy="365760"/>
+          </a:xfrm>
+          <a:prstGeom prst="rect">
+            <a:avLst/>
+          </a:prstGeom>
+          <a:noFill/>
+        </p:spPr>
+        <p:txBody>
+          <a:bodyPr wrap="square" lIns="0" rIns="0" tIns="0" bIns="0" anchor="t">
+            <a:spAutoFit/>
+          </a:bodyPr>
+          <a:lstStyle/>
+          <a:p>
+            <a:pPr algn="l">
+              <a:lnSpc>
+                <a:spcPct val="115000"/>
+              </a:lnSpc>
+            </a:pPr>
+            <a:r>
+              <a:rPr sz="1700" b="1">
+                <a:solidFill>
+                  <a:srgbClr val="008E76"/>
+                </a:solidFill>
+                <a:latin typeface="Microsoft JhengHei"/>
+              </a:rPr>
+              <a:t>① 發音容錯層</a:t>
+            </a:r>
+          </a:p>
+        </p:txBody>
+      </p:sp>
+      <p:sp>
+        <p:nvSpPr>
+          <p:cNvPr id="7" name="TextBox 6"/>
+          <p:cNvSpPr txBox="1"/>
+          <p:nvPr/>
+        </p:nvSpPr>
+        <p:spPr>
+          <a:xfrm>
+            <a:off x="987552" y="2606040"/>
+            <a:ext cx="4617720" cy="365760"/>
+          </a:xfrm>
+          <a:prstGeom prst="rect">
+            <a:avLst/>
+          </a:prstGeom>
+          <a:noFill/>
+        </p:spPr>
+        <p:txBody>
+          <a:bodyPr wrap="square" lIns="0" rIns="0" tIns="0" bIns="0" anchor="t">
+            <a:spAutoFit/>
+          </a:bodyPr>
+          <a:lstStyle/>
+          <a:p>
+            <a:pPr algn="l">
+              <a:lnSpc>
+                <a:spcPct val="115000"/>
+              </a:lnSpc>
+            </a:pPr>
+            <a:r>
+              <a:rPr sz="1300" b="1">
+                <a:solidFill>
+                  <a:srgbClr val="1A1A2E"/>
+                </a:solidFill>
+                <a:latin typeface="Microsoft JhengHei"/>
+              </a:rPr>
+              <a:t>字形救不到 → 轉拼音比對</a:t>
+            </a:r>
+          </a:p>
+        </p:txBody>
+      </p:sp>
+      <p:sp>
+        <p:nvSpPr>
+          <p:cNvPr id="8" name="TextBox 7"/>
+          <p:cNvSpPr txBox="1"/>
+          <p:nvPr/>
+        </p:nvSpPr>
+        <p:spPr>
+          <a:xfrm>
+            <a:off x="987552" y="3108960"/>
+            <a:ext cx="274320" cy="365760"/>
+          </a:xfrm>
+          <a:prstGeom prst="rect">
+            <a:avLst/>
+          </a:prstGeom>
+          <a:noFill/>
+        </p:spPr>
+        <p:txBody>
+          <a:bodyPr wrap="square" lIns="0" rIns="0" tIns="0" bIns="0" anchor="t">
+            <a:spAutoFit/>
+          </a:bodyPr>
+          <a:lstStyle/>
+          <a:p>
+            <a:pPr algn="l">
+              <a:lnSpc>
+                <a:spcPct val="115000"/>
+              </a:lnSpc>
+            </a:pPr>
+            <a:r>
+              <a:rPr sz="1500" b="1">
+                <a:solidFill>
+                  <a:srgbClr val="00C49A"/>
+                </a:solidFill>
+                <a:latin typeface="Microsoft JhengHei"/>
+              </a:rPr>
+              <a:t>·</a:t>
+            </a:r>
+          </a:p>
+        </p:txBody>
+      </p:sp>
+      <p:sp>
+        <p:nvSpPr>
+          <p:cNvPr id="9" name="TextBox 8"/>
+          <p:cNvSpPr txBox="1"/>
+          <p:nvPr/>
+        </p:nvSpPr>
+        <p:spPr>
+          <a:xfrm>
+            <a:off x="1234440" y="3108960"/>
+            <a:ext cx="4480560" cy="402336"/>
+          </a:xfrm>
+          <a:prstGeom prst="rect">
+            <a:avLst/>
+          </a:prstGeom>
+          <a:noFill/>
+        </p:spPr>
+        <p:txBody>
+          <a:bodyPr wrap="square" lIns="0" rIns="0" tIns="0" bIns="0" anchor="t">
+            <a:spAutoFit/>
+          </a:bodyPr>
+          <a:lstStyle/>
+          <a:p>
+            <a:pPr algn="l">
+              <a:lnSpc>
+                <a:spcPct val="115000"/>
+              </a:lnSpc>
+            </a:pPr>
+            <a:r>
+              <a:rPr sz="1250" b="0">
+                <a:solidFill>
+                  <a:srgbClr val="444444"/>
+                </a:solidFill>
+                <a:latin typeface="Microsoft JhengHei"/>
+              </a:rPr>
+              <a:t>同音字形遠：滑鼠→華數，字形比對 0 分</a:t>
+            </a:r>
+          </a:p>
+        </p:txBody>
+      </p:sp>
+      <p:sp>
+        <p:nvSpPr>
+          <p:cNvPr id="10" name="TextBox 9"/>
+          <p:cNvSpPr txBox="1"/>
+          <p:nvPr/>
+        </p:nvSpPr>
+        <p:spPr>
+          <a:xfrm>
+            <a:off x="987552" y="3529584"/>
+            <a:ext cx="274320" cy="365760"/>
+          </a:xfrm>
+          <a:prstGeom prst="rect">
+            <a:avLst/>
+          </a:prstGeom>
+          <a:noFill/>
+        </p:spPr>
+        <p:txBody>
+          <a:bodyPr wrap="square" lIns="0" rIns="0" tIns="0" bIns="0" anchor="t">
+            <a:spAutoFit/>
+          </a:bodyPr>
+          <a:lstStyle/>
+          <a:p>
+            <a:pPr algn="l">
+              <a:lnSpc>
+                <a:spcPct val="115000"/>
+              </a:lnSpc>
+            </a:pPr>
+            <a:r>
+              <a:rPr sz="1500" b="1">
+                <a:solidFill>
+                  <a:srgbClr val="00C49A"/>
+                </a:solidFill>
+                <a:latin typeface="Microsoft JhengHei"/>
+              </a:rPr>
+              <a:t>·</a:t>
+            </a:r>
+          </a:p>
+        </p:txBody>
+      </p:sp>
+      <p:sp>
+        <p:nvSpPr>
+          <p:cNvPr id="11" name="TextBox 10"/>
+          <p:cNvSpPr txBox="1"/>
+          <p:nvPr/>
+        </p:nvSpPr>
+        <p:spPr>
+          <a:xfrm>
+            <a:off x="1234440" y="3529584"/>
+            <a:ext cx="4480560" cy="402336"/>
+          </a:xfrm>
+          <a:prstGeom prst="rect">
+            <a:avLst/>
+          </a:prstGeom>
+          <a:noFill/>
+        </p:spPr>
+        <p:txBody>
+          <a:bodyPr wrap="square" lIns="0" rIns="0" tIns="0" bIns="0" anchor="t">
+            <a:spAutoFit/>
+          </a:bodyPr>
+          <a:lstStyle/>
+          <a:p>
+            <a:pPr algn="l">
+              <a:lnSpc>
+                <a:spcPct val="115000"/>
+              </a:lnSpc>
+            </a:pPr>
+            <a:r>
+              <a:rPr sz="1250" b="0">
+                <a:solidFill>
+                  <a:srgbClr val="444444"/>
+                </a:solidFill>
+                <a:latin typeface="Microsoft JhengHei"/>
+              </a:rPr>
+              <a:t>轉拼音比對即中（huashu ≈ huashu）</a:t>
+            </a:r>
+          </a:p>
+        </p:txBody>
+      </p:sp>
+      <p:sp>
+        <p:nvSpPr>
+          <p:cNvPr id="12" name="TextBox 11"/>
+          <p:cNvSpPr txBox="1"/>
+          <p:nvPr/>
+        </p:nvSpPr>
+        <p:spPr>
+          <a:xfrm>
+            <a:off x="987552" y="3950208"/>
+            <a:ext cx="274320" cy="365760"/>
+          </a:xfrm>
+          <a:prstGeom prst="rect">
+            <a:avLst/>
+          </a:prstGeom>
+          <a:noFill/>
+        </p:spPr>
+        <p:txBody>
+          <a:bodyPr wrap="square" lIns="0" rIns="0" tIns="0" bIns="0" anchor="t">
+            <a:spAutoFit/>
+          </a:bodyPr>
+          <a:lstStyle/>
+          <a:p>
+            <a:pPr algn="l">
+              <a:lnSpc>
+                <a:spcPct val="115000"/>
+              </a:lnSpc>
+            </a:pPr>
+            <a:r>
+              <a:rPr sz="1500" b="1">
+                <a:solidFill>
+                  <a:srgbClr val="00C49A"/>
+                </a:solidFill>
+                <a:latin typeface="Microsoft JhengHei"/>
+              </a:rPr>
+              <a:t>·</a:t>
+            </a:r>
+          </a:p>
+        </p:txBody>
+      </p:sp>
+      <p:sp>
+        <p:nvSpPr>
+          <p:cNvPr id="13" name="TextBox 12"/>
+          <p:cNvSpPr txBox="1"/>
+          <p:nvPr/>
+        </p:nvSpPr>
+        <p:spPr>
+          <a:xfrm>
+            <a:off x="1234440" y="3950208"/>
+            <a:ext cx="4480560" cy="402336"/>
+          </a:xfrm>
+          <a:prstGeom prst="rect">
+            <a:avLst/>
+          </a:prstGeom>
+          <a:noFill/>
+        </p:spPr>
+        <p:txBody>
+          <a:bodyPr wrap="square" lIns="0" rIns="0" tIns="0" bIns="0" anchor="t">
+            <a:spAutoFit/>
+          </a:bodyPr>
+          <a:lstStyle/>
+          <a:p>
+            <a:pPr algn="l">
+              <a:lnSpc>
+                <a:spcPct val="115000"/>
+              </a:lnSpc>
+            </a:pPr>
+            <a:r>
+              <a:rPr sz="1250" b="0">
+                <a:solidFill>
+                  <a:srgbClr val="444444"/>
+                </a:solidFill>
+                <a:latin typeface="Microsoft JhengHei"/>
+              </a:rPr>
+              <a:t>捲舌音節還原：ㄕ/ㄗ 混淆也接得住</a:t>
+            </a:r>
+          </a:p>
+        </p:txBody>
+      </p:sp>
+      <p:sp>
+        <p:nvSpPr>
+          <p:cNvPr id="14" name="TextBox 13"/>
+          <p:cNvSpPr txBox="1"/>
+          <p:nvPr/>
+        </p:nvSpPr>
+        <p:spPr>
+          <a:xfrm>
+            <a:off x="987552" y="4370832"/>
+            <a:ext cx="274320" cy="365760"/>
+          </a:xfrm>
+          <a:prstGeom prst="rect">
+            <a:avLst/>
+          </a:prstGeom>
+          <a:noFill/>
+        </p:spPr>
+        <p:txBody>
+          <a:bodyPr wrap="square" lIns="0" rIns="0" tIns="0" bIns="0" anchor="t">
+            <a:spAutoFit/>
+          </a:bodyPr>
+          <a:lstStyle/>
+          <a:p>
+            <a:pPr algn="l">
+              <a:lnSpc>
+                <a:spcPct val="115000"/>
+              </a:lnSpc>
+            </a:pPr>
+            <a:r>
+              <a:rPr sz="1500" b="1">
+                <a:solidFill>
+                  <a:srgbClr val="00C49A"/>
+                </a:solidFill>
+                <a:latin typeface="Microsoft JhengHei"/>
+              </a:rPr>
+              <a:t>·</a:t>
+            </a:r>
+          </a:p>
+        </p:txBody>
+      </p:sp>
+      <p:sp>
+        <p:nvSpPr>
+          <p:cNvPr id="15" name="TextBox 14"/>
+          <p:cNvSpPr txBox="1"/>
+          <p:nvPr/>
+        </p:nvSpPr>
+        <p:spPr>
+          <a:xfrm>
+            <a:off x="1234440" y="4370832"/>
+            <a:ext cx="4480560" cy="402336"/>
+          </a:xfrm>
+          <a:prstGeom prst="rect">
+            <a:avLst/>
+          </a:prstGeom>
+          <a:noFill/>
+        </p:spPr>
+        <p:txBody>
+          <a:bodyPr wrap="square" lIns="0" rIns="0" tIns="0" bIns="0" anchor="t">
+            <a:spAutoFit/>
+          </a:bodyPr>
+          <a:lstStyle/>
+          <a:p>
+            <a:pPr algn="l">
+              <a:lnSpc>
+                <a:spcPct val="115000"/>
+              </a:lnSpc>
+            </a:pPr>
+            <a:r>
+              <a:rPr sz="1250" b="0">
+                <a:solidFill>
+                  <a:srgbClr val="444444"/>
+                </a:solidFill>
+                <a:latin typeface="Microsoft JhengHei"/>
+              </a:rPr>
+              <a:t>門檻 0.82 防誤配（衛生棉≠衛生紙）</a:t>
+            </a:r>
+          </a:p>
+        </p:txBody>
+      </p:sp>
+      <p:sp>
+        <p:nvSpPr>
+          <p:cNvPr id="16" name="TextBox 15"/>
+          <p:cNvSpPr txBox="1"/>
+          <p:nvPr/>
+        </p:nvSpPr>
+        <p:spPr>
+          <a:xfrm>
+            <a:off x="987552" y="4791456"/>
+            <a:ext cx="274320" cy="365760"/>
+          </a:xfrm>
+          <a:prstGeom prst="rect">
+            <a:avLst/>
+          </a:prstGeom>
+          <a:noFill/>
+        </p:spPr>
+        <p:txBody>
+          <a:bodyPr wrap="square" lIns="0" rIns="0" tIns="0" bIns="0" anchor="t">
+            <a:spAutoFit/>
+          </a:bodyPr>
+          <a:lstStyle/>
+          <a:p>
+            <a:pPr algn="l">
+              <a:lnSpc>
+                <a:spcPct val="115000"/>
+              </a:lnSpc>
+            </a:pPr>
+            <a:r>
+              <a:rPr sz="1500" b="1">
+                <a:solidFill>
+                  <a:srgbClr val="00C49A"/>
+                </a:solidFill>
+                <a:latin typeface="Microsoft JhengHei"/>
+              </a:rPr>
+              <a:t>·</a:t>
+            </a:r>
+          </a:p>
+        </p:txBody>
+      </p:sp>
+      <p:sp>
+        <p:nvSpPr>
+          <p:cNvPr id="17" name="TextBox 16"/>
+          <p:cNvSpPr txBox="1"/>
+          <p:nvPr/>
+        </p:nvSpPr>
+        <p:spPr>
+          <a:xfrm>
+            <a:off x="1234440" y="4791456"/>
+            <a:ext cx="4480560" cy="402336"/>
+          </a:xfrm>
+          <a:prstGeom prst="rect">
+            <a:avLst/>
+          </a:prstGeom>
+          <a:noFill/>
+        </p:spPr>
+        <p:txBody>
+          <a:bodyPr wrap="square" lIns="0" rIns="0" tIns="0" bIns="0" anchor="t">
+            <a:spAutoFit/>
+          </a:bodyPr>
+          <a:lstStyle/>
+          <a:p>
+            <a:pPr algn="l">
+              <a:lnSpc>
+                <a:spcPct val="115000"/>
+              </a:lnSpc>
+            </a:pPr>
+            <a:r>
+              <a:rPr sz="1250" b="0">
+                <a:solidFill>
+                  <a:srgbClr val="444444"/>
+                </a:solidFill>
+                <a:latin typeface="Microsoft JhengHei"/>
+              </a:rPr>
+              <a:t>字形優先、發音救底 → 守衛零回歸</a:t>
+            </a:r>
+          </a:p>
+        </p:txBody>
+      </p:sp>
+      <p:sp>
+        <p:nvSpPr>
+          <p:cNvPr id="18" name="Rounded Rectangle 17"/>
+          <p:cNvSpPr/>
+          <p:nvPr/>
+        </p:nvSpPr>
+        <p:spPr>
+          <a:xfrm>
+            <a:off x="6446520" y="1965960"/>
+            <a:ext cx="5074920" cy="3429000"/>
+          </a:xfrm>
+          <a:prstGeom prst="roundRect">
+            <a:avLst>
+              <a:gd name="adj" fmla="val 8000"/>
+            </a:avLst>
+          </a:prstGeom>
+          <a:solidFill>
+            <a:srgbClr val="F4F6F8"/>
+          </a:solidFill>
+          <a:ln>
+            <a:noFill/>
+          </a:ln>
+          <a:effectLst/>
+        </p:spPr>
+        <p:style>
+          <a:lnRef idx="1">
+            <a:schemeClr val="accent1"/>
+          </a:lnRef>
+          <a:fillRef idx="3">
+            <a:schemeClr val="accent1"/>
+          </a:fillRef>
+          <a:effectRef idx="2">
+            <a:schemeClr val="accent1"/>
+          </a:effectRef>
+          <a:fontRef idx="minor">
+            <a:schemeClr val="lt1"/>
+          </a:fontRef>
+        </p:style>
+        <p:txBody>
+          <a:bodyPr rtlCol="0" anchor="ctr"/>
+          <a:lstStyle/>
+          <a:p>
+            <a:pPr algn="ctr"/>
+          </a:p>
+        </p:txBody>
+      </p:sp>
+      <p:sp>
+        <p:nvSpPr>
+          <p:cNvPr id="19" name="TextBox 18"/>
+          <p:cNvSpPr txBox="1"/>
+          <p:nvPr/>
+        </p:nvSpPr>
+        <p:spPr>
+          <a:xfrm>
+            <a:off x="6766560" y="2194560"/>
+            <a:ext cx="4434840" cy="365760"/>
+          </a:xfrm>
+          <a:prstGeom prst="rect">
+            <a:avLst/>
+          </a:prstGeom>
+          <a:noFill/>
+        </p:spPr>
+        <p:txBody>
+          <a:bodyPr wrap="square" lIns="0" rIns="0" tIns="0" bIns="0" anchor="t">
+            <a:spAutoFit/>
+          </a:bodyPr>
+          <a:lstStyle/>
+          <a:p>
+            <a:pPr algn="l">
+              <a:lnSpc>
+                <a:spcPct val="115000"/>
+              </a:lnSpc>
+            </a:pPr>
+            <a:r>
+              <a:rPr sz="1700" b="1">
+                <a:solidFill>
+                  <a:srgbClr val="F0A030"/>
+                </a:solidFill>
+                <a:latin typeface="Microsoft JhengHei"/>
+              </a:rPr>
+              <a:t>② 語音同音修正</a:t>
+            </a:r>
+          </a:p>
+        </p:txBody>
+      </p:sp>
+      <p:sp>
+        <p:nvSpPr>
+          <p:cNvPr id="20" name="TextBox 19"/>
+          <p:cNvSpPr txBox="1"/>
+          <p:nvPr/>
+        </p:nvSpPr>
+        <p:spPr>
+          <a:xfrm>
+            <a:off x="6766560" y="2606040"/>
+            <a:ext cx="4434840" cy="365760"/>
+          </a:xfrm>
+          <a:prstGeom prst="rect">
+            <a:avLst/>
+          </a:prstGeom>
+          <a:noFill/>
+        </p:spPr>
+        <p:txBody>
+          <a:bodyPr wrap="square" lIns="0" rIns="0" tIns="0" bIns="0" anchor="t">
+            <a:spAutoFit/>
+          </a:bodyPr>
+          <a:lstStyle/>
+          <a:p>
+            <a:pPr algn="l">
+              <a:lnSpc>
+                <a:spcPct val="115000"/>
+              </a:lnSpc>
+            </a:pPr>
+            <a:r>
+              <a:rPr sz="1300" b="1">
+                <a:solidFill>
+                  <a:srgbClr val="1A1A2E"/>
+                </a:solidFill>
+                <a:latin typeface="Microsoft JhengHei"/>
+              </a:rPr>
+              <a:t>掛 ASR 出口，不碰倉管核心</a:t>
+            </a:r>
+          </a:p>
+        </p:txBody>
+      </p:sp>
+      <p:sp>
+        <p:nvSpPr>
+          <p:cNvPr id="21" name="TextBox 20"/>
+          <p:cNvSpPr txBox="1"/>
+          <p:nvPr/>
+        </p:nvSpPr>
+        <p:spPr>
+          <a:xfrm>
+            <a:off x="6766560" y="3108960"/>
+            <a:ext cx="274320" cy="365760"/>
+          </a:xfrm>
+          <a:prstGeom prst="rect">
+            <a:avLst/>
+          </a:prstGeom>
+          <a:noFill/>
+        </p:spPr>
+        <p:txBody>
+          <a:bodyPr wrap="square" lIns="0" rIns="0" tIns="0" bIns="0" anchor="t">
+            <a:spAutoFit/>
+          </a:bodyPr>
+          <a:lstStyle/>
+          <a:p>
+            <a:pPr algn="l">
+              <a:lnSpc>
+                <a:spcPct val="115000"/>
+              </a:lnSpc>
+            </a:pPr>
+            <a:r>
+              <a:rPr sz="1500" b="1">
+                <a:solidFill>
+                  <a:srgbClr val="F0A030"/>
+                </a:solidFill>
+                <a:latin typeface="Microsoft JhengHei"/>
+              </a:rPr>
+              <a:t>·</a:t>
+            </a:r>
+          </a:p>
+        </p:txBody>
+      </p:sp>
+      <p:sp>
+        <p:nvSpPr>
+          <p:cNvPr id="22" name="TextBox 21"/>
+          <p:cNvSpPr txBox="1"/>
+          <p:nvPr/>
+        </p:nvSpPr>
+        <p:spPr>
+          <a:xfrm>
+            <a:off x="7013448" y="3108960"/>
+            <a:ext cx="4297680" cy="402336"/>
+          </a:xfrm>
+          <a:prstGeom prst="rect">
+            <a:avLst/>
+          </a:prstGeom>
+          <a:noFill/>
+        </p:spPr>
+        <p:txBody>
+          <a:bodyPr wrap="square" lIns="0" rIns="0" tIns="0" bIns="0" anchor="t">
+            <a:spAutoFit/>
+          </a:bodyPr>
+          <a:lstStyle/>
+          <a:p>
+            <a:pPr algn="l">
+              <a:lnSpc>
+                <a:spcPct val="115000"/>
+              </a:lnSpc>
+            </a:pPr>
+            <a:r>
+              <a:rPr sz="1250" b="0">
+                <a:solidFill>
+                  <a:srgbClr val="444444"/>
+                </a:solidFill>
+                <a:latin typeface="Microsoft JhengHei"/>
+              </a:rPr>
+              <a:t>倉別：總/藏/昌 倉 → 中/北 倉</a:t>
+            </a:r>
+          </a:p>
+        </p:txBody>
+      </p:sp>
+      <p:sp>
+        <p:nvSpPr>
+          <p:cNvPr id="23" name="TextBox 22"/>
+          <p:cNvSpPr txBox="1"/>
+          <p:nvPr/>
+        </p:nvSpPr>
+        <p:spPr>
+          <a:xfrm>
+            <a:off x="6766560" y="3529584"/>
+            <a:ext cx="274320" cy="365760"/>
+          </a:xfrm>
+          <a:prstGeom prst="rect">
+            <a:avLst/>
+          </a:prstGeom>
+          <a:noFill/>
+        </p:spPr>
+        <p:txBody>
+          <a:bodyPr wrap="square" lIns="0" rIns="0" tIns="0" bIns="0" anchor="t">
+            <a:spAutoFit/>
+          </a:bodyPr>
+          <a:lstStyle/>
+          <a:p>
+            <a:pPr algn="l">
+              <a:lnSpc>
+                <a:spcPct val="115000"/>
+              </a:lnSpc>
+            </a:pPr>
+            <a:r>
+              <a:rPr sz="1500" b="1">
+                <a:solidFill>
+                  <a:srgbClr val="F0A030"/>
+                </a:solidFill>
+                <a:latin typeface="Microsoft JhengHei"/>
+              </a:rPr>
+              <a:t>·</a:t>
+            </a:r>
+          </a:p>
+        </p:txBody>
+      </p:sp>
+      <p:sp>
+        <p:nvSpPr>
+          <p:cNvPr id="24" name="TextBox 23"/>
+          <p:cNvSpPr txBox="1"/>
+          <p:nvPr/>
+        </p:nvSpPr>
+        <p:spPr>
+          <a:xfrm>
+            <a:off x="7013448" y="3529584"/>
+            <a:ext cx="4297680" cy="402336"/>
+          </a:xfrm>
+          <a:prstGeom prst="rect">
+            <a:avLst/>
+          </a:prstGeom>
+          <a:noFill/>
+        </p:spPr>
+        <p:txBody>
+          <a:bodyPr wrap="square" lIns="0" rIns="0" tIns="0" bIns="0" anchor="t">
+            <a:spAutoFit/>
+          </a:bodyPr>
+          <a:lstStyle/>
+          <a:p>
+            <a:pPr algn="l">
+              <a:lnSpc>
+                <a:spcPct val="115000"/>
+              </a:lnSpc>
+            </a:pPr>
+            <a:r>
+              <a:rPr sz="1250" b="0">
+                <a:solidFill>
+                  <a:srgbClr val="444444"/>
+                </a:solidFill>
+                <a:latin typeface="Microsoft JhengHei"/>
+              </a:rPr>
+              <a:t>動詞：近→進、谷→補（吵雜劣化）</a:t>
+            </a:r>
+          </a:p>
+        </p:txBody>
+      </p:sp>
+      <p:sp>
+        <p:nvSpPr>
+          <p:cNvPr id="25" name="TextBox 24"/>
+          <p:cNvSpPr txBox="1"/>
+          <p:nvPr/>
+        </p:nvSpPr>
+        <p:spPr>
+          <a:xfrm>
+            <a:off x="6766560" y="3950208"/>
+            <a:ext cx="274320" cy="365760"/>
+          </a:xfrm>
+          <a:prstGeom prst="rect">
+            <a:avLst/>
+          </a:prstGeom>
+          <a:noFill/>
+        </p:spPr>
+        <p:txBody>
+          <a:bodyPr wrap="square" lIns="0" rIns="0" tIns="0" bIns="0" anchor="t">
+            <a:spAutoFit/>
+          </a:bodyPr>
+          <a:lstStyle/>
+          <a:p>
+            <a:pPr algn="l">
+              <a:lnSpc>
+                <a:spcPct val="115000"/>
+              </a:lnSpc>
+            </a:pPr>
+            <a:r>
+              <a:rPr sz="1500" b="1">
+                <a:solidFill>
+                  <a:srgbClr val="F0A030"/>
+                </a:solidFill>
+                <a:latin typeface="Microsoft JhengHei"/>
+              </a:rPr>
+              <a:t>·</a:t>
+            </a:r>
+          </a:p>
+        </p:txBody>
+      </p:sp>
+      <p:sp>
+        <p:nvSpPr>
+          <p:cNvPr id="26" name="TextBox 25"/>
+          <p:cNvSpPr txBox="1"/>
+          <p:nvPr/>
+        </p:nvSpPr>
+        <p:spPr>
+          <a:xfrm>
+            <a:off x="7013448" y="3950208"/>
+            <a:ext cx="4297680" cy="402336"/>
+          </a:xfrm>
+          <a:prstGeom prst="rect">
+            <a:avLst/>
+          </a:prstGeom>
+          <a:noFill/>
+        </p:spPr>
+        <p:txBody>
+          <a:bodyPr wrap="square" lIns="0" rIns="0" tIns="0" bIns="0" anchor="t">
+            <a:spAutoFit/>
+          </a:bodyPr>
+          <a:lstStyle/>
+          <a:p>
+            <a:pPr algn="l">
+              <a:lnSpc>
+                <a:spcPct val="115000"/>
+              </a:lnSpc>
+            </a:pPr>
+            <a:r>
+              <a:rPr sz="1250" b="0">
+                <a:solidFill>
+                  <a:srgbClr val="444444"/>
+                </a:solidFill>
+                <a:latin typeface="Microsoft JhengHei"/>
+              </a:rPr>
+              <a:t>量詞：臺→台（OpenCC 轉繁差異）</a:t>
+            </a:r>
+          </a:p>
+        </p:txBody>
+      </p:sp>
+      <p:sp>
+        <p:nvSpPr>
+          <p:cNvPr id="27" name="TextBox 26"/>
+          <p:cNvSpPr txBox="1"/>
+          <p:nvPr/>
+        </p:nvSpPr>
+        <p:spPr>
+          <a:xfrm>
+            <a:off x="6766560" y="4370832"/>
+            <a:ext cx="274320" cy="365760"/>
+          </a:xfrm>
+          <a:prstGeom prst="rect">
+            <a:avLst/>
+          </a:prstGeom>
+          <a:noFill/>
+        </p:spPr>
+        <p:txBody>
+          <a:bodyPr wrap="square" lIns="0" rIns="0" tIns="0" bIns="0" anchor="t">
+            <a:spAutoFit/>
+          </a:bodyPr>
+          <a:lstStyle/>
+          <a:p>
+            <a:pPr algn="l">
+              <a:lnSpc>
+                <a:spcPct val="115000"/>
+              </a:lnSpc>
+            </a:pPr>
+            <a:r>
+              <a:rPr sz="1500" b="1">
+                <a:solidFill>
+                  <a:srgbClr val="F0A030"/>
+                </a:solidFill>
+                <a:latin typeface="Microsoft JhengHei"/>
+              </a:rPr>
+              <a:t>·</a:t>
+            </a:r>
+          </a:p>
+        </p:txBody>
+      </p:sp>
+      <p:sp>
+        <p:nvSpPr>
+          <p:cNvPr id="28" name="TextBox 27"/>
+          <p:cNvSpPr txBox="1"/>
+          <p:nvPr/>
+        </p:nvSpPr>
+        <p:spPr>
+          <a:xfrm>
+            <a:off x="7013448" y="4370832"/>
+            <a:ext cx="4297680" cy="402336"/>
+          </a:xfrm>
+          <a:prstGeom prst="rect">
+            <a:avLst/>
+          </a:prstGeom>
+          <a:noFill/>
+        </p:spPr>
+        <p:txBody>
+          <a:bodyPr wrap="square" lIns="0" rIns="0" tIns="0" bIns="0" anchor="t">
+            <a:spAutoFit/>
+          </a:bodyPr>
+          <a:lstStyle/>
+          <a:p>
+            <a:pPr algn="l">
+              <a:lnSpc>
+                <a:spcPct val="115000"/>
+              </a:lnSpc>
+            </a:pPr>
+            <a:r>
+              <a:rPr sz="1250" b="0">
+                <a:solidFill>
+                  <a:srgbClr val="444444"/>
+                </a:solidFill>
+                <a:latin typeface="Microsoft JhengHei"/>
+              </a:rPr>
+              <a:t>異體字：溼→濕、賬→帳、周→週</a:t>
+            </a:r>
+          </a:p>
+        </p:txBody>
+      </p:sp>
+      <p:sp>
+        <p:nvSpPr>
+          <p:cNvPr id="29" name="TextBox 28"/>
+          <p:cNvSpPr txBox="1"/>
+          <p:nvPr/>
+        </p:nvSpPr>
+        <p:spPr>
+          <a:xfrm>
+            <a:off x="6766560" y="4791456"/>
+            <a:ext cx="274320" cy="365760"/>
+          </a:xfrm>
+          <a:prstGeom prst="rect">
+            <a:avLst/>
+          </a:prstGeom>
+          <a:noFill/>
+        </p:spPr>
+        <p:txBody>
+          <a:bodyPr wrap="square" lIns="0" rIns="0" tIns="0" bIns="0" anchor="t">
+            <a:spAutoFit/>
+          </a:bodyPr>
+          <a:lstStyle/>
+          <a:p>
+            <a:pPr algn="l">
+              <a:lnSpc>
+                <a:spcPct val="115000"/>
+              </a:lnSpc>
+            </a:pPr>
+            <a:r>
+              <a:rPr sz="1500" b="1">
+                <a:solidFill>
+                  <a:srgbClr val="F0A030"/>
+                </a:solidFill>
+                <a:latin typeface="Microsoft JhengHei"/>
+              </a:rPr>
+              <a:t>·</a:t>
+            </a:r>
+          </a:p>
+        </p:txBody>
+      </p:sp>
+      <p:sp>
+        <p:nvSpPr>
+          <p:cNvPr id="30" name="TextBox 29"/>
+          <p:cNvSpPr txBox="1"/>
+          <p:nvPr/>
+        </p:nvSpPr>
+        <p:spPr>
+          <a:xfrm>
+            <a:off x="7013448" y="4791456"/>
+            <a:ext cx="4297680" cy="402336"/>
+          </a:xfrm>
+          <a:prstGeom prst="rect">
+            <a:avLst/>
+          </a:prstGeom>
+          <a:noFill/>
+        </p:spPr>
+        <p:txBody>
+          <a:bodyPr wrap="square" lIns="0" rIns="0" tIns="0" bIns="0" anchor="t">
+            <a:spAutoFit/>
+          </a:bodyPr>
+          <a:lstStyle/>
+          <a:p>
+            <a:pPr algn="l">
+              <a:lnSpc>
+                <a:spcPct val="115000"/>
+              </a:lnSpc>
+            </a:pPr>
+            <a:r>
+              <a:rPr sz="1250" b="0">
+                <a:solidFill>
+                  <a:srgbClr val="444444"/>
+                </a:solidFill>
+                <a:latin typeface="Microsoft JhengHei"/>
+              </a:rPr>
+              <a:t>打字訪客零影響、守衛零風險</a:t>
+            </a:r>
+          </a:p>
+        </p:txBody>
+      </p:sp>
+      <p:sp>
+        <p:nvSpPr>
+          <p:cNvPr id="31" name="TextBox 30"/>
+          <p:cNvSpPr txBox="1"/>
+          <p:nvPr/>
+        </p:nvSpPr>
+        <p:spPr>
+          <a:xfrm>
+            <a:off x="667512" y="5806440"/>
+            <a:ext cx="10789920" cy="457200"/>
+          </a:xfrm>
+          <a:prstGeom prst="rect">
+            <a:avLst/>
+          </a:prstGeom>
+          <a:noFill/>
+        </p:spPr>
+        <p:txBody>
+          <a:bodyPr wrap="square" lIns="0" rIns="0" tIns="0" bIns="0" anchor="t">
+            <a:spAutoFit/>
+          </a:bodyPr>
+          <a:lstStyle/>
+          <a:p>
+            <a:pPr algn="l">
+              <a:lnSpc>
+                <a:spcPct val="115000"/>
+              </a:lnSpc>
+            </a:pPr>
+            <a:r>
+              <a:rPr sz="1300" b="1">
+                <a:solidFill>
+                  <a:srgbClr val="008E76"/>
+                </a:solidFill>
+                <a:latin typeface="Microsoft JhengHei"/>
+              </a:rPr>
+              <a:t>設計原則：每一條容錯規則都有守衛把關，改規則前先跑護欄測試——聽錯可以救，但不能救錯。</a:t>
+            </a:r>
+          </a:p>
+        </p:txBody>
+      </p:sp>
+      <p:sp>
+        <p:nvSpPr>
+          <p:cNvPr id="32" name="TextBox 31"/>
+          <p:cNvSpPr txBox="1"/>
+          <p:nvPr/>
+        </p:nvSpPr>
+        <p:spPr>
+          <a:xfrm>
+            <a:off x="11475720" y="6565392"/>
+            <a:ext cx="658368" cy="237744"/>
+          </a:xfrm>
+          <a:prstGeom prst="rect">
+            <a:avLst/>
+          </a:prstGeom>
+          <a:noFill/>
+        </p:spPr>
+        <p:txBody>
+          <a:bodyPr wrap="square" lIns="0" rIns="0" tIns="0" bIns="0" anchor="t">
+            <a:spAutoFit/>
+          </a:bodyPr>
+          <a:lstStyle/>
+          <a:p>
+            <a:pPr algn="r">
+              <a:lnSpc>
+                <a:spcPct val="115000"/>
+              </a:lnSpc>
+            </a:pPr>
+            <a:r>
+              <a:rPr sz="1000" b="0">
+                <a:solidFill>
+                  <a:srgbClr val="BBBBBB"/>
+                </a:solidFill>
+                <a:latin typeface="Arial"/>
+              </a:rPr>
+              <a:t>20</a:t>
+            </a:r>
+          </a:p>
+        </p:txBody>
+      </p:sp>
+    </p:spTree>
+  </p:cSld>
+  <p:clrMapOvr>
+    <a:masterClrMapping/>
+  </p:clrMapOvr>
+</p:sld>
+</file>
+
+<file path=ppt/slides/slide21.xml><?xml version="1.0" encoding="utf-8"?>
+<p:sld xmlns:a="http://schemas.openxmlformats.org/drawingml/2006/main" xmlns:p="http://schemas.openxmlformats.org/presentationml/2006/main" xmlns:r="http://schemas.openxmlformats.org/officeDocument/2006/relationships">
+  <p:cSld>
+    <p:spTree>
+      <p:nvGrpSpPr>
+        <p:cNvPr id="1" name=""/>
+        <p:cNvGrpSpPr/>
+        <p:nvPr/>
+      </p:nvGrpSpPr>
+      <p:grpSpPr/>
+      <p:sp>
+        <p:nvSpPr>
+          <p:cNvPr id="2" name="Rectangle 1"/>
+          <p:cNvSpPr/>
+          <p:nvPr/>
+        </p:nvSpPr>
+        <p:spPr>
+          <a:xfrm>
+            <a:off x="0" y="0"/>
+            <a:ext cx="12188952" cy="6858000"/>
+          </a:xfrm>
+          <a:prstGeom prst="rect">
+            <a:avLst/>
+          </a:prstGeom>
+          <a:solidFill>
+            <a:srgbClr val="1A1A2E"/>
+          </a:solidFill>
+          <a:ln>
+            <a:noFill/>
+          </a:ln>
+          <a:effectLst/>
+        </p:spPr>
+        <p:style>
+          <a:lnRef idx="1">
+            <a:schemeClr val="accent1"/>
+          </a:lnRef>
+          <a:fillRef idx="3">
+            <a:schemeClr val="accent1"/>
+          </a:fillRef>
+          <a:effectRef idx="2">
+            <a:schemeClr val="accent1"/>
+          </a:effectRef>
+          <a:fontRef idx="minor">
+            <a:schemeClr val="lt1"/>
+          </a:fontRef>
+        </p:style>
+        <p:txBody>
+          <a:bodyPr rtlCol="0" anchor="ctr"/>
+          <a:lstStyle/>
+          <a:p>
+            <a:pPr algn="ctr"/>
+          </a:p>
+        </p:txBody>
+      </p:sp>
+      <p:sp>
+        <p:nvSpPr>
+          <p:cNvPr id="3" name="Rectangle 2"/>
+          <p:cNvSpPr/>
+          <p:nvPr/>
+        </p:nvSpPr>
+        <p:spPr>
+          <a:xfrm>
+            <a:off x="0" y="0"/>
+            <a:ext cx="12188952" cy="128016"/>
+          </a:xfrm>
+          <a:prstGeom prst="rect">
+            <a:avLst/>
+          </a:prstGeom>
+          <a:solidFill>
+            <a:srgbClr val="00C49A"/>
+          </a:solidFill>
+          <a:ln>
+            <a:noFill/>
+          </a:ln>
+          <a:effectLst/>
+        </p:spPr>
+        <p:style>
+          <a:lnRef idx="1">
+            <a:schemeClr val="accent1"/>
+          </a:lnRef>
+          <a:fillRef idx="3">
+            <a:schemeClr val="accent1"/>
+          </a:fillRef>
+          <a:effectRef idx="2">
+            <a:schemeClr val="accent1"/>
+          </a:effectRef>
+          <a:fontRef idx="minor">
+            <a:schemeClr val="lt1"/>
+          </a:fontRef>
+        </p:style>
+        <p:txBody>
+          <a:bodyPr rtlCol="0" anchor="ctr"/>
+          <a:lstStyle/>
+          <a:p>
+            <a:pPr algn="ctr"/>
+          </a:p>
+        </p:txBody>
+      </p:sp>
+      <p:sp>
+        <p:nvSpPr>
+          <p:cNvPr id="4" name="TextBox 3"/>
+          <p:cNvSpPr txBox="1"/>
+          <p:nvPr/>
+        </p:nvSpPr>
+        <p:spPr>
+          <a:xfrm>
+            <a:off x="667512" y="640080"/>
+            <a:ext cx="10789920" cy="320040"/>
+          </a:xfrm>
+          <a:prstGeom prst="rect">
+            <a:avLst/>
+          </a:prstGeom>
+          <a:noFill/>
+        </p:spPr>
+        <p:txBody>
+          <a:bodyPr wrap="square" lIns="0" rIns="0" tIns="0" bIns="0" anchor="t">
+            <a:spAutoFit/>
+          </a:bodyPr>
+          <a:lstStyle/>
+          <a:p>
+            <a:pPr algn="l">
+              <a:lnSpc>
+                <a:spcPct val="115000"/>
+              </a:lnSpc>
+            </a:pPr>
+            <a:r>
+              <a:rPr sz="1300" b="1">
+                <a:solidFill>
+                  <a:srgbClr val="00C49A"/>
+                </a:solidFill>
+                <a:latin typeface="Arial"/>
+              </a:rPr>
+              <a:t>SUMMARY</a:t>
+            </a:r>
+          </a:p>
+        </p:txBody>
+      </p:sp>
+      <p:sp>
+        <p:nvSpPr>
+          <p:cNvPr id="5" name="TextBox 4"/>
+          <p:cNvSpPr txBox="1"/>
+          <p:nvPr/>
+        </p:nvSpPr>
+        <p:spPr>
+          <a:xfrm>
+            <a:off x="667512" y="1051560"/>
+            <a:ext cx="10789920" cy="640080"/>
+          </a:xfrm>
+          <a:prstGeom prst="rect">
+            <a:avLst/>
+          </a:prstGeom>
+          <a:noFill/>
+        </p:spPr>
+        <p:txBody>
+          <a:bodyPr wrap="square" lIns="0" rIns="0" tIns="0" bIns="0" anchor="t">
+            <a:spAutoFit/>
+          </a:bodyPr>
+          <a:lstStyle/>
+          <a:p>
+            <a:pPr algn="l">
+              <a:lnSpc>
+                <a:spcPct val="115000"/>
+              </a:lnSpc>
+            </a:pPr>
+            <a:r>
+              <a:rPr sz="2800" b="1">
+                <a:solidFill>
+                  <a:srgbClr val="FFFFFF"/>
+                </a:solidFill>
+                <a:latin typeface="Microsoft JhengHei"/>
+              </a:rPr>
+              <a:t>一句話查倉管，跑在樹莓派，品質可證明</a:t>
+            </a:r>
+          </a:p>
+        </p:txBody>
+      </p:sp>
+      <p:sp>
+        <p:nvSpPr>
+          <p:cNvPr id="6" name="Rounded Rectangle 5"/>
+          <p:cNvSpPr/>
+          <p:nvPr/>
+        </p:nvSpPr>
+        <p:spPr>
+          <a:xfrm>
+            <a:off x="667512" y="1783080"/>
+            <a:ext cx="10853928" cy="841248"/>
+          </a:xfrm>
+          <a:prstGeom prst="roundRect">
+            <a:avLst>
+              <a:gd name="adj" fmla="val 8000"/>
+            </a:avLst>
+          </a:prstGeom>
+          <a:solidFill>
+            <a:srgbClr val="222A45"/>
+          </a:solidFill>
+          <a:ln>
+            <a:noFill/>
+          </a:ln>
+          <a:effectLst/>
+        </p:spPr>
+        <p:style>
+          <a:lnRef idx="1">
+            <a:schemeClr val="accent1"/>
+          </a:lnRef>
+          <a:fillRef idx="3">
+            <a:schemeClr val="accent1"/>
+          </a:fillRef>
+          <a:effectRef idx="2">
+            <a:schemeClr val="accent1"/>
+          </a:effectRef>
+          <a:fontRef idx="minor">
+            <a:schemeClr val="lt1"/>
+          </a:fontRef>
+        </p:style>
+        <p:txBody>
+          <a:bodyPr rtlCol="0" anchor="ctr"/>
+          <a:lstStyle/>
+          <a:p>
+            <a:pPr algn="ctr"/>
+          </a:p>
+        </p:txBody>
+      </p:sp>
+      <p:sp>
+        <p:nvSpPr>
+          <p:cNvPr id="7" name="Oval 6"/>
+          <p:cNvSpPr/>
+          <p:nvPr/>
+        </p:nvSpPr>
+        <p:spPr>
+          <a:xfrm>
+            <a:off x="941832" y="2002536"/>
+            <a:ext cx="530352" cy="530352"/>
+          </a:xfrm>
+          <a:prstGeom prst="ellipse">
+            <a:avLst/>
+          </a:prstGeom>
+          <a:solidFill>
+            <a:srgbClr val="00C49A"/>
+          </a:solidFill>
+          <a:ln>
+            <a:noFill/>
+          </a:ln>
+          <a:effectLst/>
+        </p:spPr>
+        <p:style>
+          <a:lnRef idx="1">
+            <a:schemeClr val="accent1"/>
+          </a:lnRef>
+          <a:fillRef idx="3">
+            <a:schemeClr val="accent1"/>
+          </a:fillRef>
+          <a:effectRef idx="2">
+            <a:schemeClr val="accent1"/>
+          </a:effectRef>
+          <a:fontRef idx="minor">
+            <a:schemeClr val="lt1"/>
+          </a:fontRef>
+        </p:style>
+        <p:txBody>
+          <a:bodyPr rtlCol="0" anchor="ctr"/>
+          <a:lstStyle/>
+          <a:p>
+            <a:pPr algn="ctr"/>
+          </a:p>
+        </p:txBody>
+      </p:sp>
+      <p:sp>
+        <p:nvSpPr>
+          <p:cNvPr id="8" name="TextBox 7"/>
+          <p:cNvSpPr txBox="1"/>
+          <p:nvPr/>
+        </p:nvSpPr>
+        <p:spPr>
+          <a:xfrm>
+            <a:off x="941832" y="1984248"/>
+            <a:ext cx="530352" cy="530352"/>
+          </a:xfrm>
+          <a:prstGeom prst="rect">
+            <a:avLst/>
+          </a:prstGeom>
+          <a:noFill/>
+        </p:spPr>
+        <p:txBody>
+          <a:bodyPr wrap="square" lIns="0" rIns="0" tIns="0" bIns="0" anchor="ctr">
+            <a:spAutoFit/>
+          </a:bodyPr>
+          <a:lstStyle/>
+          <a:p>
+            <a:pPr algn="ctr">
+              <a:lnSpc>
+                <a:spcPct val="115000"/>
+              </a:lnSpc>
+            </a:pPr>
+            <a:r>
+              <a:rPr sz="1700" b="1">
+                <a:solidFill>
+                  <a:srgbClr val="1A1A2E"/>
+                </a:solidFill>
+                <a:latin typeface="Microsoft JhengHei"/>
+              </a:rPr>
+              <a:t>價</a:t>
+            </a:r>
+          </a:p>
+        </p:txBody>
+      </p:sp>
+      <p:sp>
+        <p:nvSpPr>
+          <p:cNvPr id="9" name="TextBox 8"/>
+          <p:cNvSpPr txBox="1"/>
+          <p:nvPr/>
+        </p:nvSpPr>
+        <p:spPr>
+          <a:xfrm>
+            <a:off x="1719072" y="1920240"/>
+            <a:ext cx="1463040" cy="685800"/>
+          </a:xfrm>
+          <a:prstGeom prst="rect">
+            <a:avLst/>
+          </a:prstGeom>
+          <a:noFill/>
+        </p:spPr>
+        <p:txBody>
+          <a:bodyPr wrap="square" lIns="0" rIns="0" tIns="0" bIns="0" anchor="ctr">
+            <a:spAutoFit/>
+          </a:bodyPr>
+          <a:lstStyle/>
+          <a:p>
+            <a:pPr algn="l">
+              <a:lnSpc>
+                <a:spcPct val="115000"/>
+              </a:lnSpc>
+            </a:pPr>
+            <a:r>
+              <a:rPr sz="1800" b="1">
+                <a:solidFill>
+                  <a:srgbClr val="00C49A"/>
+                </a:solidFill>
+                <a:latin typeface="Microsoft JhengHei"/>
+              </a:rPr>
+              <a:t>價值</a:t>
+            </a:r>
+          </a:p>
+        </p:txBody>
+      </p:sp>
+      <p:sp>
+        <p:nvSpPr>
+          <p:cNvPr id="10" name="TextBox 9"/>
+          <p:cNvSpPr txBox="1"/>
+          <p:nvPr/>
+        </p:nvSpPr>
+        <p:spPr>
+          <a:xfrm>
+            <a:off x="3182112" y="1920240"/>
+            <a:ext cx="8046720" cy="685800"/>
+          </a:xfrm>
+          <a:prstGeom prst="rect">
+            <a:avLst/>
+          </a:prstGeom>
+          <a:noFill/>
+        </p:spPr>
+        <p:txBody>
+          <a:bodyPr wrap="square" lIns="0" rIns="0" tIns="0" bIns="0" anchor="ctr">
+            <a:spAutoFit/>
+          </a:bodyPr>
+          <a:lstStyle/>
+          <a:p>
+            <a:pPr algn="l">
+              <a:lnSpc>
+                <a:spcPct val="115000"/>
+              </a:lnSpc>
+            </a:pPr>
+            <a:r>
+              <a:rPr sz="1400" b="0">
+                <a:solidFill>
+                  <a:srgbClr val="FFFFFF"/>
+                </a:solidFill>
+                <a:latin typeface="Microsoft JhengHei"/>
+              </a:rPr>
+              <a:t>自然語言問倉管，一秒回答；手機掃碼、離線可用、硬體成本極低</a:t>
+            </a:r>
+          </a:p>
+        </p:txBody>
+      </p:sp>
+      <p:sp>
+        <p:nvSpPr>
+          <p:cNvPr id="11" name="Rounded Rectangle 10"/>
+          <p:cNvSpPr/>
+          <p:nvPr/>
+        </p:nvSpPr>
+        <p:spPr>
+          <a:xfrm>
+            <a:off x="667512" y="2770632"/>
+            <a:ext cx="10853928" cy="841248"/>
+          </a:xfrm>
+          <a:prstGeom prst="roundRect">
+            <a:avLst>
+              <a:gd name="adj" fmla="val 8000"/>
+            </a:avLst>
+          </a:prstGeom>
+          <a:solidFill>
+            <a:srgbClr val="222A45"/>
+          </a:solidFill>
+          <a:ln>
+            <a:noFill/>
+          </a:ln>
+          <a:effectLst/>
+        </p:spPr>
+        <p:style>
+          <a:lnRef idx="1">
+            <a:schemeClr val="accent1"/>
+          </a:lnRef>
+          <a:fillRef idx="3">
+            <a:schemeClr val="accent1"/>
+          </a:fillRef>
+          <a:effectRef idx="2">
+            <a:schemeClr val="accent1"/>
+          </a:effectRef>
+          <a:fontRef idx="minor">
+            <a:schemeClr val="lt1"/>
+          </a:fontRef>
+        </p:style>
+        <p:txBody>
+          <a:bodyPr rtlCol="0" anchor="ctr"/>
+          <a:lstStyle/>
+          <a:p>
+            <a:pPr algn="ctr"/>
+          </a:p>
+        </p:txBody>
+      </p:sp>
+      <p:sp>
+        <p:nvSpPr>
+          <p:cNvPr id="12" name="Oval 11"/>
+          <p:cNvSpPr/>
+          <p:nvPr/>
+        </p:nvSpPr>
+        <p:spPr>
+          <a:xfrm>
+            <a:off x="941832" y="2990088"/>
+            <a:ext cx="530352" cy="530352"/>
+          </a:xfrm>
+          <a:prstGeom prst="ellipse">
+            <a:avLst/>
+          </a:prstGeom>
+          <a:solidFill>
+            <a:srgbClr val="00C49A"/>
+          </a:solidFill>
+          <a:ln>
+            <a:noFill/>
+          </a:ln>
+          <a:effectLst/>
+        </p:spPr>
+        <p:style>
+          <a:lnRef idx="1">
+            <a:schemeClr val="accent1"/>
+          </a:lnRef>
+          <a:fillRef idx="3">
+            <a:schemeClr val="accent1"/>
+          </a:fillRef>
+          <a:effectRef idx="2">
+            <a:schemeClr val="accent1"/>
+          </a:effectRef>
+          <a:fontRef idx="minor">
+            <a:schemeClr val="lt1"/>
+          </a:fontRef>
+        </p:style>
+        <p:txBody>
+          <a:bodyPr rtlCol="0" anchor="ctr"/>
+          <a:lstStyle/>
+          <a:p>
+            <a:pPr algn="ctr"/>
+          </a:p>
+        </p:txBody>
+      </p:sp>
+      <p:sp>
+        <p:nvSpPr>
+          <p:cNvPr id="13" name="TextBox 12"/>
+          <p:cNvSpPr txBox="1"/>
+          <p:nvPr/>
+        </p:nvSpPr>
+        <p:spPr>
+          <a:xfrm>
+            <a:off x="941832" y="2971800"/>
+            <a:ext cx="530352" cy="530352"/>
+          </a:xfrm>
+          <a:prstGeom prst="rect">
+            <a:avLst/>
+          </a:prstGeom>
+          <a:noFill/>
+        </p:spPr>
+        <p:txBody>
+          <a:bodyPr wrap="square" lIns="0" rIns="0" tIns="0" bIns="0" anchor="ctr">
+            <a:spAutoFit/>
+          </a:bodyPr>
+          <a:lstStyle/>
+          <a:p>
+            <a:pPr algn="ctr">
+              <a:lnSpc>
+                <a:spcPct val="115000"/>
+              </a:lnSpc>
+            </a:pPr>
+            <a:r>
+              <a:rPr sz="1700" b="1">
+                <a:solidFill>
+                  <a:srgbClr val="1A1A2E"/>
+                </a:solidFill>
+                <a:latin typeface="Microsoft JhengHei"/>
+              </a:rPr>
+              <a:t>技</a:t>
+            </a:r>
+          </a:p>
+        </p:txBody>
+      </p:sp>
+      <p:sp>
+        <p:nvSpPr>
+          <p:cNvPr id="14" name="TextBox 13"/>
+          <p:cNvSpPr txBox="1"/>
+          <p:nvPr/>
+        </p:nvSpPr>
+        <p:spPr>
+          <a:xfrm>
+            <a:off x="1719072" y="2907792"/>
+            <a:ext cx="1463040" cy="685800"/>
+          </a:xfrm>
+          <a:prstGeom prst="rect">
+            <a:avLst/>
+          </a:prstGeom>
+          <a:noFill/>
+        </p:spPr>
+        <p:txBody>
+          <a:bodyPr wrap="square" lIns="0" rIns="0" tIns="0" bIns="0" anchor="ctr">
+            <a:spAutoFit/>
+          </a:bodyPr>
+          <a:lstStyle/>
+          <a:p>
+            <a:pPr algn="l">
+              <a:lnSpc>
+                <a:spcPct val="115000"/>
+              </a:lnSpc>
+            </a:pPr>
+            <a:r>
+              <a:rPr sz="1800" b="1">
+                <a:solidFill>
+                  <a:srgbClr val="00C49A"/>
+                </a:solidFill>
+                <a:latin typeface="Microsoft JhengHei"/>
+              </a:rPr>
+              <a:t>技術</a:t>
+            </a:r>
+          </a:p>
+        </p:txBody>
+      </p:sp>
+      <p:sp>
+        <p:nvSpPr>
+          <p:cNvPr id="15" name="TextBox 14"/>
+          <p:cNvSpPr txBox="1"/>
+          <p:nvPr/>
+        </p:nvSpPr>
+        <p:spPr>
+          <a:xfrm>
+            <a:off x="3182112" y="2907792"/>
+            <a:ext cx="8046720" cy="685800"/>
+          </a:xfrm>
+          <a:prstGeom prst="rect">
+            <a:avLst/>
+          </a:prstGeom>
+          <a:noFill/>
+        </p:spPr>
+        <p:txBody>
+          <a:bodyPr wrap="square" lIns="0" rIns="0" tIns="0" bIns="0" anchor="ctr">
+            <a:spAutoFit/>
+          </a:bodyPr>
+          <a:lstStyle/>
+          <a:p>
+            <a:pPr algn="l">
+              <a:lnSpc>
+                <a:spcPct val="115000"/>
+              </a:lnSpc>
+            </a:pPr>
+            <a:r>
+              <a:rPr sz="1400" b="0">
+                <a:solidFill>
+                  <a:srgbClr val="FFFFFF"/>
+                </a:solidFill>
+                <a:latin typeface="Microsoft JhengHei"/>
+              </a:rPr>
+              <a:t>270M 小模型當路由器 + 規則層當決策者，業界邊緣 Agent 的正解</a:t>
+            </a:r>
+          </a:p>
+        </p:txBody>
+      </p:sp>
+      <p:sp>
+        <p:nvSpPr>
+          <p:cNvPr id="16" name="Rounded Rectangle 15"/>
+          <p:cNvSpPr/>
+          <p:nvPr/>
+        </p:nvSpPr>
+        <p:spPr>
+          <a:xfrm>
+            <a:off x="667512" y="3758184"/>
+            <a:ext cx="10853928" cy="841248"/>
+          </a:xfrm>
+          <a:prstGeom prst="roundRect">
+            <a:avLst>
+              <a:gd name="adj" fmla="val 8000"/>
+            </a:avLst>
+          </a:prstGeom>
+          <a:solidFill>
+            <a:srgbClr val="222A45"/>
+          </a:solidFill>
+          <a:ln>
+            <a:noFill/>
+          </a:ln>
+          <a:effectLst/>
+        </p:spPr>
+        <p:style>
+          <a:lnRef idx="1">
+            <a:schemeClr val="accent1"/>
+          </a:lnRef>
+          <a:fillRef idx="3">
+            <a:schemeClr val="accent1"/>
+          </a:fillRef>
+          <a:effectRef idx="2">
+            <a:schemeClr val="accent1"/>
+          </a:effectRef>
+          <a:fontRef idx="minor">
+            <a:schemeClr val="lt1"/>
+          </a:fontRef>
+        </p:style>
+        <p:txBody>
+          <a:bodyPr rtlCol="0" anchor="ctr"/>
+          <a:lstStyle/>
+          <a:p>
+            <a:pPr algn="ctr"/>
+          </a:p>
+        </p:txBody>
+      </p:sp>
+      <p:sp>
+        <p:nvSpPr>
+          <p:cNvPr id="17" name="Oval 16"/>
+          <p:cNvSpPr/>
+          <p:nvPr/>
+        </p:nvSpPr>
+        <p:spPr>
+          <a:xfrm>
+            <a:off x="941832" y="3977640"/>
+            <a:ext cx="530352" cy="530352"/>
+          </a:xfrm>
+          <a:prstGeom prst="ellipse">
+            <a:avLst/>
+          </a:prstGeom>
+          <a:solidFill>
+            <a:srgbClr val="00C49A"/>
+          </a:solidFill>
+          <a:ln>
+            <a:noFill/>
+          </a:ln>
+          <a:effectLst/>
+        </p:spPr>
+        <p:style>
+          <a:lnRef idx="1">
+            <a:schemeClr val="accent1"/>
+          </a:lnRef>
+          <a:fillRef idx="3">
+            <a:schemeClr val="accent1"/>
+          </a:fillRef>
+          <a:effectRef idx="2">
+            <a:schemeClr val="accent1"/>
+          </a:effectRef>
+          <a:fontRef idx="minor">
+            <a:schemeClr val="lt1"/>
+          </a:fontRef>
+        </p:style>
+        <p:txBody>
+          <a:bodyPr rtlCol="0" anchor="ctr"/>
+          <a:lstStyle/>
+          <a:p>
+            <a:pPr algn="ctr"/>
+          </a:p>
+        </p:txBody>
+      </p:sp>
+      <p:sp>
+        <p:nvSpPr>
+          <p:cNvPr id="18" name="TextBox 17"/>
+          <p:cNvSpPr txBox="1"/>
+          <p:nvPr/>
+        </p:nvSpPr>
+        <p:spPr>
+          <a:xfrm>
+            <a:off x="941832" y="3959352"/>
+            <a:ext cx="530352" cy="530352"/>
+          </a:xfrm>
+          <a:prstGeom prst="rect">
+            <a:avLst/>
+          </a:prstGeom>
+          <a:noFill/>
+        </p:spPr>
+        <p:txBody>
+          <a:bodyPr wrap="square" lIns="0" rIns="0" tIns="0" bIns="0" anchor="ctr">
+            <a:spAutoFit/>
+          </a:bodyPr>
+          <a:lstStyle/>
+          <a:p>
+            <a:pPr algn="ctr">
+              <a:lnSpc>
+                <a:spcPct val="115000"/>
+              </a:lnSpc>
+            </a:pPr>
+            <a:r>
+              <a:rPr sz="1700" b="1">
+                <a:solidFill>
+                  <a:srgbClr val="1A1A2E"/>
+                </a:solidFill>
+                <a:latin typeface="Microsoft JhengHei"/>
+              </a:rPr>
+              <a:t>品</a:t>
+            </a:r>
+          </a:p>
+        </p:txBody>
+      </p:sp>
+      <p:sp>
+        <p:nvSpPr>
+          <p:cNvPr id="19" name="TextBox 18"/>
+          <p:cNvSpPr txBox="1"/>
+          <p:nvPr/>
+        </p:nvSpPr>
+        <p:spPr>
+          <a:xfrm>
+            <a:off x="1719072" y="3895344"/>
+            <a:ext cx="1463040" cy="685800"/>
+          </a:xfrm>
+          <a:prstGeom prst="rect">
+            <a:avLst/>
+          </a:prstGeom>
+          <a:noFill/>
+        </p:spPr>
+        <p:txBody>
+          <a:bodyPr wrap="square" lIns="0" rIns="0" tIns="0" bIns="0" anchor="ctr">
+            <a:spAutoFit/>
+          </a:bodyPr>
+          <a:lstStyle/>
+          <a:p>
+            <a:pPr algn="l">
+              <a:lnSpc>
+                <a:spcPct val="115000"/>
+              </a:lnSpc>
+            </a:pPr>
+            <a:r>
+              <a:rPr sz="1800" b="1">
+                <a:solidFill>
+                  <a:srgbClr val="00C49A"/>
+                </a:solidFill>
+                <a:latin typeface="Microsoft JhengHei"/>
+              </a:rPr>
+              <a:t>品質</a:t>
+            </a:r>
+          </a:p>
+        </p:txBody>
+      </p:sp>
+      <p:sp>
+        <p:nvSpPr>
+          <p:cNvPr id="20" name="TextBox 19"/>
+          <p:cNvSpPr txBox="1"/>
+          <p:nvPr/>
+        </p:nvSpPr>
+        <p:spPr>
+          <a:xfrm>
+            <a:off x="3182112" y="3895344"/>
+            <a:ext cx="8046720" cy="685800"/>
+          </a:xfrm>
+          <a:prstGeom prst="rect">
+            <a:avLst/>
+          </a:prstGeom>
+          <a:noFill/>
+        </p:spPr>
+        <p:txBody>
+          <a:bodyPr wrap="square" lIns="0" rIns="0" tIns="0" bIns="0" anchor="ctr">
+            <a:spAutoFit/>
+          </a:bodyPr>
+          <a:lstStyle/>
+          <a:p>
+            <a:pPr algn="l">
+              <a:lnSpc>
+                <a:spcPct val="115000"/>
+              </a:lnSpc>
+            </a:pPr>
+            <a:r>
+              <a:rPr sz="1400" b="0">
+                <a:solidFill>
+                  <a:srgbClr val="FFFFFF"/>
+                </a:solidFill>
+                <a:latin typeface="Microsoft JhengHei"/>
+              </a:rPr>
+              <a:t>六套回歸雙平台 100%；守衛庫 1122 句把「可靠」變成數字，不靠祈禱</a:t>
+            </a:r>
+          </a:p>
+        </p:txBody>
+      </p:sp>
+      <p:sp>
+        <p:nvSpPr>
+          <p:cNvPr id="21" name="Rounded Rectangle 20"/>
+          <p:cNvSpPr/>
+          <p:nvPr/>
+        </p:nvSpPr>
+        <p:spPr>
+          <a:xfrm>
+            <a:off x="667512" y="4745736"/>
+            <a:ext cx="10853928" cy="841248"/>
+          </a:xfrm>
+          <a:prstGeom prst="roundRect">
+            <a:avLst>
+              <a:gd name="adj" fmla="val 8000"/>
+            </a:avLst>
+          </a:prstGeom>
+          <a:solidFill>
+            <a:srgbClr val="222A45"/>
+          </a:solidFill>
+          <a:ln>
+            <a:noFill/>
+          </a:ln>
+          <a:effectLst/>
+        </p:spPr>
+        <p:style>
+          <a:lnRef idx="1">
+            <a:schemeClr val="accent1"/>
+          </a:lnRef>
+          <a:fillRef idx="3">
+            <a:schemeClr val="accent1"/>
+          </a:fillRef>
+          <a:effectRef idx="2">
+            <a:schemeClr val="accent1"/>
+          </a:effectRef>
+          <a:fontRef idx="minor">
+            <a:schemeClr val="lt1"/>
+          </a:fontRef>
+        </p:style>
+        <p:txBody>
+          <a:bodyPr rtlCol="0" anchor="ctr"/>
+          <a:lstStyle/>
+          <a:p>
+            <a:pPr algn="ctr"/>
+          </a:p>
+        </p:txBody>
+      </p:sp>
+      <p:sp>
+        <p:nvSpPr>
+          <p:cNvPr id="22" name="Oval 21"/>
+          <p:cNvSpPr/>
+          <p:nvPr/>
+        </p:nvSpPr>
+        <p:spPr>
+          <a:xfrm>
+            <a:off x="941832" y="4965192"/>
+            <a:ext cx="530352" cy="530352"/>
+          </a:xfrm>
+          <a:prstGeom prst="ellipse">
+            <a:avLst/>
+          </a:prstGeom>
+          <a:solidFill>
+            <a:srgbClr val="00C49A"/>
+          </a:solidFill>
+          <a:ln>
+            <a:noFill/>
+          </a:ln>
+          <a:effectLst/>
+        </p:spPr>
+        <p:style>
+          <a:lnRef idx="1">
+            <a:schemeClr val="accent1"/>
+          </a:lnRef>
+          <a:fillRef idx="3">
+            <a:schemeClr val="accent1"/>
+          </a:fillRef>
+          <a:effectRef idx="2">
+            <a:schemeClr val="accent1"/>
+          </a:effectRef>
+          <a:fontRef idx="minor">
+            <a:schemeClr val="lt1"/>
+          </a:fontRef>
+        </p:style>
+        <p:txBody>
+          <a:bodyPr rtlCol="0" anchor="ctr"/>
+          <a:lstStyle/>
+          <a:p>
+            <a:pPr algn="ctr"/>
+          </a:p>
+        </p:txBody>
+      </p:sp>
+      <p:sp>
+        <p:nvSpPr>
+          <p:cNvPr id="23" name="TextBox 22"/>
+          <p:cNvSpPr txBox="1"/>
+          <p:nvPr/>
+        </p:nvSpPr>
+        <p:spPr>
+          <a:xfrm>
+            <a:off x="941832" y="4946904"/>
+            <a:ext cx="530352" cy="530352"/>
+          </a:xfrm>
+          <a:prstGeom prst="rect">
+            <a:avLst/>
+          </a:prstGeom>
+          <a:noFill/>
+        </p:spPr>
+        <p:txBody>
+          <a:bodyPr wrap="square" lIns="0" rIns="0" tIns="0" bIns="0" anchor="ctr">
+            <a:spAutoFit/>
+          </a:bodyPr>
+          <a:lstStyle/>
+          <a:p>
+            <a:pPr algn="ctr">
+              <a:lnSpc>
+                <a:spcPct val="115000"/>
+              </a:lnSpc>
+            </a:pPr>
+            <a:r>
+              <a:rPr sz="1700" b="1">
+                <a:solidFill>
+                  <a:srgbClr val="1A1A2E"/>
+                </a:solidFill>
+                <a:latin typeface="Microsoft JhengHei"/>
+              </a:rPr>
+              <a:t>語</a:t>
+            </a:r>
+          </a:p>
+        </p:txBody>
+      </p:sp>
+      <p:sp>
+        <p:nvSpPr>
+          <p:cNvPr id="24" name="TextBox 23"/>
+          <p:cNvSpPr txBox="1"/>
+          <p:nvPr/>
+        </p:nvSpPr>
+        <p:spPr>
+          <a:xfrm>
+            <a:off x="1719072" y="4882896"/>
+            <a:ext cx="1463040" cy="685800"/>
+          </a:xfrm>
+          <a:prstGeom prst="rect">
+            <a:avLst/>
+          </a:prstGeom>
+          <a:noFill/>
+        </p:spPr>
+        <p:txBody>
+          <a:bodyPr wrap="square" lIns="0" rIns="0" tIns="0" bIns="0" anchor="ctr">
+            <a:spAutoFit/>
+          </a:bodyPr>
+          <a:lstStyle/>
+          <a:p>
+            <a:pPr algn="l">
+              <a:lnSpc>
+                <a:spcPct val="115000"/>
+              </a:lnSpc>
+            </a:pPr>
+            <a:r>
+              <a:rPr sz="1800" b="1">
+                <a:solidFill>
+                  <a:srgbClr val="00C49A"/>
+                </a:solidFill>
+                <a:latin typeface="Microsoft JhengHei"/>
+              </a:rPr>
+              <a:t>語音</a:t>
+            </a:r>
+          </a:p>
+        </p:txBody>
+      </p:sp>
+      <p:sp>
+        <p:nvSpPr>
+          <p:cNvPr id="25" name="TextBox 24"/>
+          <p:cNvSpPr txBox="1"/>
+          <p:nvPr/>
+        </p:nvSpPr>
+        <p:spPr>
+          <a:xfrm>
+            <a:off x="3182112" y="4882896"/>
+            <a:ext cx="8046720" cy="685800"/>
+          </a:xfrm>
+          <a:prstGeom prst="rect">
+            <a:avLst/>
+          </a:prstGeom>
+          <a:noFill/>
+        </p:spPr>
+        <p:txBody>
+          <a:bodyPr wrap="square" lIns="0" rIns="0" tIns="0" bIns="0" anchor="ctr">
+            <a:spAutoFit/>
+          </a:bodyPr>
+          <a:lstStyle/>
+          <a:p>
+            <a:pPr algn="l">
+              <a:lnSpc>
+                <a:spcPct val="115000"/>
+              </a:lnSpc>
+            </a:pPr>
+            <a:r>
+              <a:rPr sz="1400" b="0">
+                <a:solidFill>
+                  <a:srgbClr val="FFFFFF"/>
+                </a:solidFill>
+                <a:latin typeface="Microsoft JhengHei"/>
+              </a:rPr>
+              <a:t>全離線 ASR 展場可用；三環境噪音實測，現有硬體 + 正常音量就夠</a:t>
+            </a:r>
+          </a:p>
+        </p:txBody>
+      </p:sp>
+      <p:sp>
+        <p:nvSpPr>
+          <p:cNvPr id="26" name="TextBox 25"/>
+          <p:cNvSpPr txBox="1"/>
+          <p:nvPr/>
+        </p:nvSpPr>
+        <p:spPr>
+          <a:xfrm>
+            <a:off x="667512" y="5852160"/>
+            <a:ext cx="10789920" cy="457200"/>
+          </a:xfrm>
+          <a:prstGeom prst="rect">
+            <a:avLst/>
+          </a:prstGeom>
+          <a:noFill/>
+        </p:spPr>
+        <p:txBody>
+          <a:bodyPr wrap="square" lIns="0" rIns="0" tIns="0" bIns="0" anchor="t">
+            <a:spAutoFit/>
+          </a:bodyPr>
+          <a:lstStyle/>
+          <a:p>
+            <a:pPr algn="l">
+              <a:lnSpc>
+                <a:spcPct val="115000"/>
+              </a:lnSpc>
+            </a:pPr>
+            <a:r>
+              <a:rPr sz="1300" b="0">
+                <a:solidFill>
+                  <a:srgbClr val="BBBBBB"/>
+                </a:solidFill>
+                <a:latin typeface="Microsoft JhengHei"/>
+              </a:rPr>
+              <a:t>下一步：展前待辦（demo 基準日對齊、展前真機全量驗收）——重置鈕 / 開機自啟 / Wi-Fi 自癒已完成</a:t>
+            </a:r>
+          </a:p>
+        </p:txBody>
+      </p:sp>
+      <p:sp>
+        <p:nvSpPr>
+          <p:cNvPr id="27" name="TextBox 26"/>
+          <p:cNvSpPr txBox="1"/>
+          <p:nvPr/>
+        </p:nvSpPr>
+        <p:spPr>
+          <a:xfrm>
+            <a:off x="11475720" y="6565392"/>
+            <a:ext cx="658368" cy="237744"/>
+          </a:xfrm>
+          <a:prstGeom prst="rect">
+            <a:avLst/>
+          </a:prstGeom>
+          <a:noFill/>
+        </p:spPr>
+        <p:txBody>
+          <a:bodyPr wrap="square" lIns="0" rIns="0" tIns="0" bIns="0" anchor="t">
+            <a:spAutoFit/>
+          </a:bodyPr>
+          <a:lstStyle/>
+          <a:p>
+            <a:pPr algn="r">
+              <a:lnSpc>
+                <a:spcPct val="115000"/>
+              </a:lnSpc>
+            </a:pPr>
+            <a:r>
+              <a:rPr sz="1000" b="0">
+                <a:solidFill>
+                  <a:srgbClr val="BBBBBB"/>
+                </a:solidFill>
+                <a:latin typeface="Arial"/>
+              </a:rPr>
+              <a:t>21</a:t>
             </a:r>
           </a:p>
         </p:txBody>

--- a/倉管Agent_專案簡報.pptx
+++ b/倉管Agent_專案簡報.pptx
@@ -26,6 +26,9 @@
     <p:sldId id="274" r:id="rId26"/>
     <p:sldId id="275" r:id="rId27"/>
     <p:sldId id="276" r:id="rId28"/>
+    <p:sldId id="277" r:id="rId29"/>
+    <p:sldId id="278" r:id="rId30"/>
+    <p:sldId id="279" r:id="rId31"/>
   </p:sldIdLst>
   <p:sldSz cx="12188952" cy="6858000" type="screen4x3"/>
   <p:notesSz cx="6858000" cy="9144000"/>
@@ -1452,7 +1455,7 @@
               <a:rPr sz="1200">
                 <a:latin typeface="Microsoft JhengHei"/>
               </a:rPr>
-              <a:t>★語音展場可行性的量化證據。三環境通過率 78/77/73%——關鍵訊息是「噪音幾乎不影響」（light −1%、heavy −5%）。方法上的巧思：真人只念一次、存下錄音，之後自動混噪重測，念一次測三種環境、對比公平。三大發現：噪音不是問題、音量才是關鍵變數、失敗幾乎全是 ASR 模型極限（訪客重講可解）。最終結論：現有硬體（webcam + 270M）＋正常音量就夠展場用，不用花錢升級。</a:t>
+              <a:t>★語音選型頁（技術評審向）。選型鐵律：必須能在 RPi5 CPU 純離線跑，且盡量沿用倉管既有的 llama.cpp / GGUF runtime。對照四個候選：Whisper small 中文 CER 高（~20%，英文強中文弱）；Whisper large-v3 1.55B 太大、RPi5 純 CPU 跑不動、且偏雲端；SenseVoice-Small / Paraformer 中文 CER 其實更漂亮（~8%/~10%），但走 sherpa-onnx 生態、要重新整合一套框架，展前時間風險高，列為備援方案。Fun-ASR-Nano 決勝點＝跟倉管 LLM 共用同一套 llama.cpp / GGUF runtime，語音不用再扛一套框架、部署面最省；官方 arm64 binary 要GLIBC 2.38 而 RPi5 是 2.36，直接在機上源碼編 4.5 分鐘解決；輸出簡體用 OpenCC s2twp 完美轉繁並順帶轉台灣用語。誠實補一句：SenseVoice 若展後有時間值得回頭評估換裝，CER 更低。</a:t>
             </a:r>
           </a:p>
         </p:txBody>
@@ -1598,7 +1601,7 @@
               <a:rPr sz="1200">
                 <a:latin typeface="Microsoft JhengHei"/>
               </a:rPr>
-              <a:t>語音容錯的兩層設計，都是真人聲實測一句句磨出來的。左＝發音容錯層：ASR 錯字多是「同音但字形差很遠」（滑鼠→華數），字形比對救不到、轉拼音就中；還做了捲舌音節還原（ㄕ/ㄗ 不分）。門檻 0.82 是實測調出來的——太低會把「衛生棉」誤配成「衛生紙」。右＝語音同音修正：只掛 ASR 出口，所以打字訪客完全不受影響、守衛零風險。關鍵原則：每條規則都有守衛把關，改規則前跑護欄測試。</a:t>
+              <a:t>★語音展場可行性的量化證據。三環境通過率 78/77/73%——關鍵訊息是「噪音幾乎不影響」（light −1%、heavy −5%）。方法上的巧思：真人只念一次、存下錄音，之後自動混噪重測，念一次測三種環境、對比公平。三大發現：噪音不是問題、音量才是關鍵變數、失敗幾乎全是 ASR 模型極限（訪客重講可解）。最終結論：現有硬體（webcam + 270M）＋正常音量就夠展場用，不用花錢升級。</a:t>
             </a:r>
           </a:p>
         </p:txBody>
@@ -1624,6 +1627,225 @@
 </file>
 
 <file path=ppt/notesSlides/notesSlide21.xml><?xml version="1.0" encoding="utf-8"?>
+<p:notes xmlns:a="http://schemas.openxmlformats.org/drawingml/2006/main" xmlns:p="http://schemas.openxmlformats.org/presentationml/2006/main" xmlns:r="http://schemas.openxmlformats.org/officeDocument/2006/relationships">
+  <p:cSld>
+    <p:spTree>
+      <p:nvGrpSpPr>
+        <p:cNvPr id="1" name=""/>
+        <p:cNvGrpSpPr/>
+        <p:nvPr/>
+      </p:nvGrpSpPr>
+      <p:grpSpPr>
+        <a:xfrm>
+          <a:off x="0" y="0"/>
+          <a:ext cx="0" cy="0"/>
+          <a:chOff x="0" y="0"/>
+          <a:chExt cx="0" cy="0"/>
+        </a:xfrm>
+      </p:grpSpPr>
+      <p:sp>
+        <p:nvSpPr>
+          <p:cNvPr id="2" name="Slide Image Placeholder 1"/>
+          <p:cNvSpPr>
+            <a:spLocks noGrp="1"/>
+          </p:cNvSpPr>
+          <p:nvPr>
+            <p:ph type="sldImg" idx="2"/>
+          </p:nvPr>
+        </p:nvSpPr>
+        <p:spPr/>
+      </p:sp>
+      <p:sp>
+        <p:nvSpPr>
+          <p:cNvPr id="3" name="Notes Placeholder 2"/>
+          <p:cNvSpPr>
+            <a:spLocks noGrp="1"/>
+          </p:cNvSpPr>
+          <p:nvPr>
+            <p:ph type="body" idx="3" sz="quarter"/>
+          </p:nvPr>
+        </p:nvSpPr>
+        <p:spPr/>
+        <p:txBody>
+          <a:bodyPr/>
+          <a:lstStyle/>
+          <a:p>
+            <a:r>
+              <a:rPr sz="1200">
+                <a:latin typeface="Microsoft JhengHei"/>
+              </a:rPr>
+              <a:t>語音容錯的兩層設計，都是真人聲實測一句句磨出來的。左＝發音容錯層：ASR 錯字多是「同音但字形差很遠」（滑鼠→華數），字形比對救不到、轉拼音就中；還做了捲舌音節還原（ㄕ/ㄗ 不分）。門檻 0.82 是實測調出來的——太低會把「衛生棉」誤配成「衛生紙」。右＝語音同音修正：只掛 ASR 出口，所以打字訪客完全不受影響、守衛零風險。關鍵原則：每條規則都有守衛把關，改規則前跑護欄測試。</a:t>
+            </a:r>
+          </a:p>
+        </p:txBody>
+      </p:sp>
+      <p:sp>
+        <p:nvSpPr>
+          <p:cNvPr id="4" name="Slide Number Placeholder 3"/>
+          <p:cNvSpPr>
+            <a:spLocks noGrp="1"/>
+          </p:cNvSpPr>
+          <p:nvPr>
+            <p:ph type="sldNum" idx="5" sz="quarter"/>
+          </p:nvPr>
+        </p:nvSpPr>
+        <p:spPr/>
+      </p:sp>
+    </p:spTree>
+  </p:cSld>
+  <p:clrMapOvr>
+    <a:masterClrMapping/>
+  </p:clrMapOvr>
+</p:notes>
+</file>
+
+<file path=ppt/notesSlides/notesSlide22.xml><?xml version="1.0" encoding="utf-8"?>
+<p:notes xmlns:a="http://schemas.openxmlformats.org/drawingml/2006/main" xmlns:p="http://schemas.openxmlformats.org/presentationml/2006/main" xmlns:r="http://schemas.openxmlformats.org/officeDocument/2006/relationships">
+  <p:cSld>
+    <p:spTree>
+      <p:nvGrpSpPr>
+        <p:cNvPr id="1" name=""/>
+        <p:cNvGrpSpPr/>
+        <p:nvPr/>
+      </p:nvGrpSpPr>
+      <p:grpSpPr>
+        <a:xfrm>
+          <a:off x="0" y="0"/>
+          <a:ext cx="0" cy="0"/>
+          <a:chOff x="0" y="0"/>
+          <a:chExt cx="0" cy="0"/>
+        </a:xfrm>
+      </p:grpSpPr>
+      <p:sp>
+        <p:nvSpPr>
+          <p:cNvPr id="2" name="Slide Image Placeholder 1"/>
+          <p:cNvSpPr>
+            <a:spLocks noGrp="1"/>
+          </p:cNvSpPr>
+          <p:nvPr>
+            <p:ph type="sldImg" idx="2"/>
+          </p:nvPr>
+        </p:nvSpPr>
+        <p:spPr/>
+      </p:sp>
+      <p:sp>
+        <p:nvSpPr>
+          <p:cNvPr id="3" name="Notes Placeholder 2"/>
+          <p:cNvSpPr>
+            <a:spLocks noGrp="1"/>
+          </p:cNvSpPr>
+          <p:nvPr>
+            <p:ph type="body" idx="3" sz="quarter"/>
+          </p:nvPr>
+        </p:nvSpPr>
+        <p:spPr/>
+        <p:txBody>
+          <a:bodyPr/>
+          <a:lstStyle/>
+          <a:p>
+            <a:r>
+              <a:rPr sz="1200">
+                <a:latin typeface="Microsoft JhengHei"/>
+              </a:rPr>
+              <a:t>★聽錯→救回實例頁（技術評審最有感）。強調這些全是真人聲實測原始紀錄、不是虛構：中欄紅字是 ASR 真的聽錯的字，右欄綠字是容錯層怎麼救回。最漂亮的一句「北倉進五十個滑鼠」一次踩三種錯（倉別藏→倉、動詞近→進、商品名華族→滑鼠），三種修正機制同時作用救回、真的把 50 件寫進庫存。底部拼音證據解釋原理：ASR 錯字特徵是「音同/音近但字形零重疊」，字形比對必敗、轉拼音一比即中——這就是為什麼發音容錯層有效。</a:t>
+            </a:r>
+          </a:p>
+        </p:txBody>
+      </p:sp>
+      <p:sp>
+        <p:nvSpPr>
+          <p:cNvPr id="4" name="Slide Number Placeholder 3"/>
+          <p:cNvSpPr>
+            <a:spLocks noGrp="1"/>
+          </p:cNvSpPr>
+          <p:nvPr>
+            <p:ph type="sldNum" idx="5" sz="quarter"/>
+          </p:nvPr>
+        </p:nvSpPr>
+        <p:spPr/>
+      </p:sp>
+    </p:spTree>
+  </p:cSld>
+  <p:clrMapOvr>
+    <a:masterClrMapping/>
+  </p:clrMapOvr>
+</p:notes>
+</file>
+
+<file path=ppt/notesSlides/notesSlide23.xml><?xml version="1.0" encoding="utf-8"?>
+<p:notes xmlns:a="http://schemas.openxmlformats.org/drawingml/2006/main" xmlns:p="http://schemas.openxmlformats.org/presentationml/2006/main" xmlns:r="http://schemas.openxmlformats.org/officeDocument/2006/relationships">
+  <p:cSld>
+    <p:spTree>
+      <p:nvGrpSpPr>
+        <p:cNvPr id="1" name=""/>
+        <p:cNvGrpSpPr/>
+        <p:nvPr/>
+      </p:nvGrpSpPr>
+      <p:grpSpPr>
+        <a:xfrm>
+          <a:off x="0" y="0"/>
+          <a:ext cx="0" cy="0"/>
+          <a:chOff x="0" y="0"/>
+          <a:chExt cx="0" cy="0"/>
+        </a:xfrm>
+      </p:grpSpPr>
+      <p:sp>
+        <p:nvSpPr>
+          <p:cNvPr id="2" name="Slide Image Placeholder 1"/>
+          <p:cNvSpPr>
+            <a:spLocks noGrp="1"/>
+          </p:cNvSpPr>
+          <p:nvPr>
+            <p:ph type="sldImg" idx="2"/>
+          </p:nvPr>
+        </p:nvSpPr>
+        <p:spPr/>
+      </p:sp>
+      <p:sp>
+        <p:nvSpPr>
+          <p:cNvPr id="3" name="Notes Placeholder 2"/>
+          <p:cNvSpPr>
+            <a:spLocks noGrp="1"/>
+          </p:cNvSpPr>
+          <p:nvPr>
+            <p:ph type="body" idx="3" sz="quarter"/>
+          </p:nvPr>
+        </p:nvSpPr>
+        <p:spPr/>
+        <p:txBody>
+          <a:bodyPr/>
+          <a:lstStyle/>
+          <a:p>
+            <a:r>
+              <a:rPr sz="1200">
+                <a:latin typeface="Microsoft JhengHei"/>
+              </a:rPr>
+              <a:t>★極限與對策頁（誠實加分）。技術評審最怕看到只報喜不報憂——這頁專講救不回的。左表：ASR 把整詞聽成毫不相干的詞（瑜珈墊→女藥店、露營帳篷→女人占房、滑鼠→瓦數、缺→趣、防蚊液→防瘟疫），字形和發音都對不上，容錯層本來就不該硬救。右邊對策核心＝人在迴路：前端即時顯示辨識文字，訪客看到明顯錯字會自然重講——這比硬編同音規則安全得多（亂編規則救個案會誤傷別句）。另外三點：音量才是主因（正常音量下大半 FAIL 會消失）、展後靠 journal 問答記錄做回饋閉環補規則。分寸金句：救得到的自動救、救不到的交給人重講，絕不亂猜幻覺出錯商品——這正是整個系統『寧可反問、不可答錯』哲學在語音上的延伸。</a:t>
+            </a:r>
+          </a:p>
+        </p:txBody>
+      </p:sp>
+      <p:sp>
+        <p:nvSpPr>
+          <p:cNvPr id="4" name="Slide Number Placeholder 3"/>
+          <p:cNvSpPr>
+            <a:spLocks noGrp="1"/>
+          </p:cNvSpPr>
+          <p:nvPr>
+            <p:ph type="sldNum" idx="5" sz="quarter"/>
+          </p:nvPr>
+        </p:nvSpPr>
+        <p:spPr/>
+      </p:sp>
+    </p:spTree>
+  </p:cSld>
+  <p:clrMapOvr>
+    <a:masterClrMapping/>
+  </p:clrMapOvr>
+</p:notes>
+</file>
+
+<file path=ppt/notesSlides/notesSlide24.xml><?xml version="1.0" encoding="utf-8"?>
 <p:notes xmlns:a="http://schemas.openxmlformats.org/drawingml/2006/main" xmlns:p="http://schemas.openxmlformats.org/presentationml/2006/main" xmlns:r="http://schemas.openxmlformats.org/officeDocument/2006/relationships">
   <p:cSld>
     <p:spTree>
@@ -15266,7 +15488,7 @@
                 </a:solidFill>
                 <a:latin typeface="Arial"/>
               </a:rPr>
-              <a:t>VOICE POC · 展場噪音實測</a:t>
+              <a:t>VOICE POC · 選型</a:t>
             </a:r>
           </a:p>
         </p:txBody>
@@ -15305,7 +15527,7 @@
                 </a:solidFill>
                 <a:latin typeface="Microsoft JhengHei"/>
               </a:rPr>
-              <a:t>念一次真人聲，自動測三種環境</a:t>
+              <a:t>為什麼是 Fun-ASR-Nano，不是 Whisper</a:t>
             </a:r>
           </a:p>
         </p:txBody>
@@ -15318,7 +15540,7 @@
         </p:nvSpPr>
         <p:spPr>
           <a:xfrm>
-            <a:off x="667512" y="1298448"/>
+            <a:off x="667512" y="1261872"/>
             <a:ext cx="10789920" cy="365760"/>
           </a:xfrm>
           <a:prstGeom prst="rect">
@@ -15338,13 +15560,13 @@
               </a:lnSpc>
             </a:pPr>
             <a:r>
-              <a:rPr sz="1350" b="0">
+              <a:rPr sz="1300" b="0">
                 <a:solidFill>
                   <a:srgbClr val="555555"/>
                 </a:solidFill>
                 <a:latin typeface="Microsoft JhengHei"/>
               </a:rPr>
-              <a:t>方法突破：真人念一次乾淨版並存錄音，用同一份錄音自動混入賣場人潮噪音重測——對比最公平。</a:t>
+              <a:t>選型鐵律：能在 RPi5 CPU 純離線跑、且能沿用倉管既有的 llama.cpp / GGUF runtime——不必為語音再扛一套框架。</a:t>
             </a:r>
           </a:p>
         </p:txBody>
@@ -15357,8 +15579,8 @@
         </p:nvSpPr>
         <p:spPr>
           <a:xfrm>
-            <a:off x="667512" y="1965960"/>
-            <a:ext cx="3483864" cy="1188720"/>
+            <a:off x="667512" y="1783080"/>
+            <a:ext cx="10853928" cy="457200"/>
           </a:xfrm>
           <a:prstGeom prst="roundRect">
             <a:avLst>
@@ -15366,7 +15588,7 @@
             </a:avLst>
           </a:prstGeom>
           <a:solidFill>
-            <a:srgbClr val="F4F6F8"/>
+            <a:srgbClr val="1A1A2E"/>
           </a:solidFill>
           <a:ln>
             <a:noFill/>
@@ -15403,55 +15625,576 @@
         </p:nvSpPr>
         <p:spPr>
           <a:xfrm>
-            <a:off x="832104" y="2112264"/>
-            <a:ext cx="3154680" cy="548640"/>
-          </a:xfrm>
-          <a:prstGeom prst="rect">
-            <a:avLst/>
-          </a:prstGeom>
-          <a:noFill/>
-        </p:spPr>
-        <p:txBody>
-          <a:bodyPr wrap="square" lIns="0" rIns="0" tIns="0" bIns="0" anchor="t">
-            <a:spAutoFit/>
-          </a:bodyPr>
-          <a:lstStyle/>
-          <a:p>
-            <a:pPr algn="l">
-              <a:lnSpc>
-                <a:spcPct val="115000"/>
-              </a:lnSpc>
-            </a:pPr>
-            <a:r>
-              <a:rPr sz="4000" b="1">
-                <a:solidFill>
-                  <a:srgbClr val="00C49A"/>
+            <a:off x="777240" y="1865376"/>
+            <a:ext cx="1874520" cy="329184"/>
+          </a:xfrm>
+          <a:prstGeom prst="rect">
+            <a:avLst/>
+          </a:prstGeom>
+          <a:noFill/>
+        </p:spPr>
+        <p:txBody>
+          <a:bodyPr wrap="square" lIns="0" rIns="0" tIns="0" bIns="0" anchor="ctr">
+            <a:spAutoFit/>
+          </a:bodyPr>
+          <a:lstStyle/>
+          <a:p>
+            <a:pPr algn="l">
+              <a:lnSpc>
+                <a:spcPct val="115000"/>
+              </a:lnSpc>
+            </a:pPr>
+            <a:r>
+              <a:rPr sz="1200" b="1">
+                <a:solidFill>
+                  <a:srgbClr val="FFFFFF"/>
+                </a:solidFill>
+                <a:latin typeface="Microsoft JhengHei"/>
+              </a:rPr>
+              <a:t>模型</a:t>
+            </a:r>
+          </a:p>
+        </p:txBody>
+      </p:sp>
+      <p:sp>
+        <p:nvSpPr>
+          <p:cNvPr id="7" name="TextBox 6"/>
+          <p:cNvSpPr txBox="1"/>
+          <p:nvPr/>
+        </p:nvSpPr>
+        <p:spPr>
+          <a:xfrm>
+            <a:off x="2898648" y="1865376"/>
+            <a:ext cx="1143000" cy="329184"/>
+          </a:xfrm>
+          <a:prstGeom prst="rect">
+            <a:avLst/>
+          </a:prstGeom>
+          <a:noFill/>
+        </p:spPr>
+        <p:txBody>
+          <a:bodyPr wrap="square" lIns="0" rIns="0" tIns="0" bIns="0" anchor="ctr">
+            <a:spAutoFit/>
+          </a:bodyPr>
+          <a:lstStyle/>
+          <a:p>
+            <a:pPr algn="l">
+              <a:lnSpc>
+                <a:spcPct val="115000"/>
+              </a:lnSpc>
+            </a:pPr>
+            <a:r>
+              <a:rPr sz="1200" b="1">
+                <a:solidFill>
+                  <a:srgbClr val="FFFFFF"/>
+                </a:solidFill>
+                <a:latin typeface="Microsoft JhengHei"/>
+              </a:rPr>
+              <a:t>參數</a:t>
+            </a:r>
+          </a:p>
+        </p:txBody>
+      </p:sp>
+      <p:sp>
+        <p:nvSpPr>
+          <p:cNvPr id="8" name="TextBox 7"/>
+          <p:cNvSpPr txBox="1"/>
+          <p:nvPr/>
+        </p:nvSpPr>
+        <p:spPr>
+          <a:xfrm>
+            <a:off x="4270248" y="1865376"/>
+            <a:ext cx="1783080" cy="329184"/>
+          </a:xfrm>
+          <a:prstGeom prst="rect">
+            <a:avLst/>
+          </a:prstGeom>
+          <a:noFill/>
+        </p:spPr>
+        <p:txBody>
+          <a:bodyPr wrap="square" lIns="0" rIns="0" tIns="0" bIns="0" anchor="ctr">
+            <a:spAutoFit/>
+          </a:bodyPr>
+          <a:lstStyle/>
+          <a:p>
+            <a:pPr algn="l">
+              <a:lnSpc>
+                <a:spcPct val="115000"/>
+              </a:lnSpc>
+            </a:pPr>
+            <a:r>
+              <a:rPr sz="1200" b="1">
+                <a:solidFill>
+                  <a:srgbClr val="FFFFFF"/>
+                </a:solidFill>
+                <a:latin typeface="Microsoft JhengHei"/>
+              </a:rPr>
+              <a:t>Runtime / 部署</a:t>
+            </a:r>
+          </a:p>
+        </p:txBody>
+      </p:sp>
+      <p:sp>
+        <p:nvSpPr>
+          <p:cNvPr id="9" name="TextBox 8"/>
+          <p:cNvSpPr txBox="1"/>
+          <p:nvPr/>
+        </p:nvSpPr>
+        <p:spPr>
+          <a:xfrm>
+            <a:off x="6281928" y="1865376"/>
+            <a:ext cx="1417320" cy="329184"/>
+          </a:xfrm>
+          <a:prstGeom prst="rect">
+            <a:avLst/>
+          </a:prstGeom>
+          <a:noFill/>
+        </p:spPr>
+        <p:txBody>
+          <a:bodyPr wrap="square" lIns="0" rIns="0" tIns="0" bIns="0" anchor="ctr">
+            <a:spAutoFit/>
+          </a:bodyPr>
+          <a:lstStyle/>
+          <a:p>
+            <a:pPr algn="l">
+              <a:lnSpc>
+                <a:spcPct val="115000"/>
+              </a:lnSpc>
+            </a:pPr>
+            <a:r>
+              <a:rPr sz="1200" b="1">
+                <a:solidFill>
+                  <a:srgbClr val="FFFFFF"/>
+                </a:solidFill>
+                <a:latin typeface="Microsoft JhengHei"/>
+              </a:rPr>
+              <a:t>RPi5 離線</a:t>
+            </a:r>
+          </a:p>
+        </p:txBody>
+      </p:sp>
+      <p:sp>
+        <p:nvSpPr>
+          <p:cNvPr id="10" name="TextBox 9"/>
+          <p:cNvSpPr txBox="1"/>
+          <p:nvPr/>
+        </p:nvSpPr>
+        <p:spPr>
+          <a:xfrm>
+            <a:off x="7927848" y="1865376"/>
+            <a:ext cx="1325880" cy="329184"/>
+          </a:xfrm>
+          <a:prstGeom prst="rect">
+            <a:avLst/>
+          </a:prstGeom>
+          <a:noFill/>
+        </p:spPr>
+        <p:txBody>
+          <a:bodyPr wrap="square" lIns="0" rIns="0" tIns="0" bIns="0" anchor="ctr">
+            <a:spAutoFit/>
+          </a:bodyPr>
+          <a:lstStyle/>
+          <a:p>
+            <a:pPr algn="l">
+              <a:lnSpc>
+                <a:spcPct val="115000"/>
+              </a:lnSpc>
+            </a:pPr>
+            <a:r>
+              <a:rPr sz="1200" b="1">
+                <a:solidFill>
+                  <a:srgbClr val="FFFFFF"/>
+                </a:solidFill>
+                <a:latin typeface="Microsoft JhengHei"/>
+              </a:rPr>
+              <a:t>中文 CER</a:t>
+            </a:r>
+          </a:p>
+        </p:txBody>
+      </p:sp>
+      <p:sp>
+        <p:nvSpPr>
+          <p:cNvPr id="11" name="TextBox 10"/>
+          <p:cNvSpPr txBox="1"/>
+          <p:nvPr/>
+        </p:nvSpPr>
+        <p:spPr>
+          <a:xfrm>
+            <a:off x="9482328" y="1865376"/>
+            <a:ext cx="1965960" cy="329184"/>
+          </a:xfrm>
+          <a:prstGeom prst="rect">
+            <a:avLst/>
+          </a:prstGeom>
+          <a:noFill/>
+        </p:spPr>
+        <p:txBody>
+          <a:bodyPr wrap="square" lIns="0" rIns="0" tIns="0" bIns="0" anchor="ctr">
+            <a:spAutoFit/>
+          </a:bodyPr>
+          <a:lstStyle/>
+          <a:p>
+            <a:pPr algn="l">
+              <a:lnSpc>
+                <a:spcPct val="115000"/>
+              </a:lnSpc>
+            </a:pPr>
+            <a:r>
+              <a:rPr sz="1200" b="1">
+                <a:solidFill>
+                  <a:srgbClr val="FFFFFF"/>
+                </a:solidFill>
+                <a:latin typeface="Microsoft JhengHei"/>
+              </a:rPr>
+              <a:t>本專案判定</a:t>
+            </a:r>
+          </a:p>
+        </p:txBody>
+      </p:sp>
+      <p:sp>
+        <p:nvSpPr>
+          <p:cNvPr id="12" name="Rectangle 11"/>
+          <p:cNvSpPr/>
+          <p:nvPr/>
+        </p:nvSpPr>
+        <p:spPr>
+          <a:xfrm>
+            <a:off x="667512" y="2240280"/>
+            <a:ext cx="10853928" cy="621792"/>
+          </a:xfrm>
+          <a:prstGeom prst="rect">
+            <a:avLst/>
+          </a:prstGeom>
+          <a:solidFill>
+            <a:srgbClr val="E4F7F2"/>
+          </a:solidFill>
+          <a:ln w="6350">
+            <a:solidFill>
+              <a:srgbClr val="E6E8EC"/>
+            </a:solidFill>
+          </a:ln>
+          <a:effectLst/>
+        </p:spPr>
+        <p:style>
+          <a:lnRef idx="1">
+            <a:schemeClr val="accent1"/>
+          </a:lnRef>
+          <a:fillRef idx="3">
+            <a:schemeClr val="accent1"/>
+          </a:fillRef>
+          <a:effectRef idx="2">
+            <a:schemeClr val="accent1"/>
+          </a:effectRef>
+          <a:fontRef idx="minor">
+            <a:schemeClr val="lt1"/>
+          </a:fontRef>
+        </p:style>
+        <p:txBody>
+          <a:bodyPr rtlCol="0" anchor="ctr"/>
+          <a:lstStyle/>
+          <a:p>
+            <a:pPr algn="ctr"/>
+          </a:p>
+        </p:txBody>
+      </p:sp>
+      <p:sp>
+        <p:nvSpPr>
+          <p:cNvPr id="13" name="TextBox 12"/>
+          <p:cNvSpPr txBox="1"/>
+          <p:nvPr/>
+        </p:nvSpPr>
+        <p:spPr>
+          <a:xfrm>
+            <a:off x="777240" y="2331720"/>
+            <a:ext cx="1874520" cy="438912"/>
+          </a:xfrm>
+          <a:prstGeom prst="rect">
+            <a:avLst/>
+          </a:prstGeom>
+          <a:noFill/>
+        </p:spPr>
+        <p:txBody>
+          <a:bodyPr wrap="square" lIns="0" rIns="0" tIns="0" bIns="0" anchor="ctr">
+            <a:spAutoFit/>
+          </a:bodyPr>
+          <a:lstStyle/>
+          <a:p>
+            <a:pPr algn="l">
+              <a:lnSpc>
+                <a:spcPct val="115000"/>
+              </a:lnSpc>
+            </a:pPr>
+            <a:r>
+              <a:rPr sz="1250" b="1">
+                <a:solidFill>
+                  <a:srgbClr val="008E76"/>
+                </a:solidFill>
+                <a:latin typeface="Microsoft JhengHei"/>
+              </a:rPr>
+              <a:t>Fun-ASR-Nano</a:t>
+            </a:r>
+          </a:p>
+        </p:txBody>
+      </p:sp>
+      <p:sp>
+        <p:nvSpPr>
+          <p:cNvPr id="14" name="TextBox 13"/>
+          <p:cNvSpPr txBox="1"/>
+          <p:nvPr/>
+        </p:nvSpPr>
+        <p:spPr>
+          <a:xfrm>
+            <a:off x="2898648" y="2331720"/>
+            <a:ext cx="1143000" cy="438912"/>
+          </a:xfrm>
+          <a:prstGeom prst="rect">
+            <a:avLst/>
+          </a:prstGeom>
+          <a:noFill/>
+        </p:spPr>
+        <p:txBody>
+          <a:bodyPr wrap="square" lIns="0" rIns="0" tIns="0" bIns="0" anchor="ctr">
+            <a:spAutoFit/>
+          </a:bodyPr>
+          <a:lstStyle/>
+          <a:p>
+            <a:pPr algn="l">
+              <a:lnSpc>
+                <a:spcPct val="115000"/>
+              </a:lnSpc>
+            </a:pPr>
+            <a:r>
+              <a:rPr sz="1200" b="1">
+                <a:solidFill>
+                  <a:srgbClr val="444444"/>
                 </a:solidFill>
                 <a:latin typeface="Arial"/>
               </a:rPr>
-              <a:t>78%</a:t>
-            </a:r>
-          </a:p>
-        </p:txBody>
-      </p:sp>
-      <p:sp>
-        <p:nvSpPr>
-          <p:cNvPr id="7" name="TextBox 6"/>
-          <p:cNvSpPr txBox="1"/>
-          <p:nvPr/>
-        </p:nvSpPr>
-        <p:spPr>
-          <a:xfrm>
-            <a:off x="832104" y="2770632"/>
-            <a:ext cx="3154680" cy="310896"/>
-          </a:xfrm>
-          <a:prstGeom prst="rect">
-            <a:avLst/>
-          </a:prstGeom>
-          <a:noFill/>
-        </p:spPr>
-        <p:txBody>
-          <a:bodyPr wrap="square" lIns="0" rIns="0" tIns="0" bIns="0" anchor="t">
+              <a:t>~800M</a:t>
+            </a:r>
+          </a:p>
+        </p:txBody>
+      </p:sp>
+      <p:sp>
+        <p:nvSpPr>
+          <p:cNvPr id="15" name="TextBox 14"/>
+          <p:cNvSpPr txBox="1"/>
+          <p:nvPr/>
+        </p:nvSpPr>
+        <p:spPr>
+          <a:xfrm>
+            <a:off x="4270248" y="2331720"/>
+            <a:ext cx="1783080" cy="438912"/>
+          </a:xfrm>
+          <a:prstGeom prst="rect">
+            <a:avLst/>
+          </a:prstGeom>
+          <a:noFill/>
+        </p:spPr>
+        <p:txBody>
+          <a:bodyPr wrap="square" lIns="0" rIns="0" tIns="0" bIns="0" anchor="ctr">
+            <a:spAutoFit/>
+          </a:bodyPr>
+          <a:lstStyle/>
+          <a:p>
+            <a:pPr algn="l">
+              <a:lnSpc>
+                <a:spcPct val="115000"/>
+              </a:lnSpc>
+            </a:pPr>
+            <a:r>
+              <a:rPr sz="1100" b="0">
+                <a:solidFill>
+                  <a:srgbClr val="444444"/>
+                </a:solidFill>
+                <a:latin typeface="Microsoft JhengHei"/>
+              </a:rPr>
+              <a:t>llama.cpp / GGUF</a:t>
+            </a:r>
+          </a:p>
+        </p:txBody>
+      </p:sp>
+      <p:sp>
+        <p:nvSpPr>
+          <p:cNvPr id="16" name="TextBox 15"/>
+          <p:cNvSpPr txBox="1"/>
+          <p:nvPr/>
+        </p:nvSpPr>
+        <p:spPr>
+          <a:xfrm>
+            <a:off x="6281928" y="2331720"/>
+            <a:ext cx="1417320" cy="438912"/>
+          </a:xfrm>
+          <a:prstGeom prst="rect">
+            <a:avLst/>
+          </a:prstGeom>
+          <a:noFill/>
+        </p:spPr>
+        <p:txBody>
+          <a:bodyPr wrap="square" lIns="0" rIns="0" tIns="0" bIns="0" anchor="ctr">
+            <a:spAutoFit/>
+          </a:bodyPr>
+          <a:lstStyle/>
+          <a:p>
+            <a:pPr algn="l">
+              <a:lnSpc>
+                <a:spcPct val="115000"/>
+              </a:lnSpc>
+            </a:pPr>
+            <a:r>
+              <a:rPr sz="1100" b="1">
+                <a:solidFill>
+                  <a:srgbClr val="008E76"/>
+                </a:solidFill>
+                <a:latin typeface="Microsoft JhengHei"/>
+              </a:rPr>
+              <a:t>✓ 2.5s/句</a:t>
+            </a:r>
+          </a:p>
+        </p:txBody>
+      </p:sp>
+      <p:sp>
+        <p:nvSpPr>
+          <p:cNvPr id="17" name="TextBox 16"/>
+          <p:cNvSpPr txBox="1"/>
+          <p:nvPr/>
+        </p:nvSpPr>
+        <p:spPr>
+          <a:xfrm>
+            <a:off x="7927848" y="2331720"/>
+            <a:ext cx="1325880" cy="438912"/>
+          </a:xfrm>
+          <a:prstGeom prst="rect">
+            <a:avLst/>
+          </a:prstGeom>
+          <a:noFill/>
+        </p:spPr>
+        <p:txBody>
+          <a:bodyPr wrap="square" lIns="0" rIns="0" tIns="0" bIns="0" anchor="ctr">
+            <a:spAutoFit/>
+          </a:bodyPr>
+          <a:lstStyle/>
+          <a:p>
+            <a:pPr algn="l">
+              <a:lnSpc>
+                <a:spcPct val="115000"/>
+              </a:lnSpc>
+            </a:pPr>
+            <a:r>
+              <a:rPr sz="1150" b="0">
+                <a:solidFill>
+                  <a:srgbClr val="444444"/>
+                </a:solidFill>
+                <a:latin typeface="Arial"/>
+              </a:rPr>
+              <a:t>低</a:t>
+            </a:r>
+          </a:p>
+        </p:txBody>
+      </p:sp>
+      <p:sp>
+        <p:nvSpPr>
+          <p:cNvPr id="18" name="TextBox 17"/>
+          <p:cNvSpPr txBox="1"/>
+          <p:nvPr/>
+        </p:nvSpPr>
+        <p:spPr>
+          <a:xfrm>
+            <a:off x="9482328" y="2331720"/>
+            <a:ext cx="1965960" cy="438912"/>
+          </a:xfrm>
+          <a:prstGeom prst="rect">
+            <a:avLst/>
+          </a:prstGeom>
+          <a:noFill/>
+        </p:spPr>
+        <p:txBody>
+          <a:bodyPr wrap="square" lIns="0" rIns="0" tIns="0" bIns="0" anchor="ctr">
+            <a:spAutoFit/>
+          </a:bodyPr>
+          <a:lstStyle/>
+          <a:p>
+            <a:pPr algn="l">
+              <a:lnSpc>
+                <a:spcPct val="115000"/>
+              </a:lnSpc>
+            </a:pPr>
+            <a:r>
+              <a:rPr sz="1150" b="1">
+                <a:solidFill>
+                  <a:srgbClr val="008E76"/>
+                </a:solidFill>
+                <a:latin typeface="Microsoft JhengHei"/>
+              </a:rPr>
+              <a:t>★ 採用</a:t>
+            </a:r>
+          </a:p>
+        </p:txBody>
+      </p:sp>
+      <p:sp>
+        <p:nvSpPr>
+          <p:cNvPr id="19" name="Rectangle 18"/>
+          <p:cNvSpPr/>
+          <p:nvPr/>
+        </p:nvSpPr>
+        <p:spPr>
+          <a:xfrm>
+            <a:off x="667512" y="2862072"/>
+            <a:ext cx="10853928" cy="621792"/>
+          </a:xfrm>
+          <a:prstGeom prst="rect">
+            <a:avLst/>
+          </a:prstGeom>
+          <a:solidFill>
+            <a:srgbClr val="F4F6F8"/>
+          </a:solidFill>
+          <a:ln w="6350">
+            <a:solidFill>
+              <a:srgbClr val="E6E8EC"/>
+            </a:solidFill>
+          </a:ln>
+          <a:effectLst/>
+        </p:spPr>
+        <p:style>
+          <a:lnRef idx="1">
+            <a:schemeClr val="accent1"/>
+          </a:lnRef>
+          <a:fillRef idx="3">
+            <a:schemeClr val="accent1"/>
+          </a:fillRef>
+          <a:effectRef idx="2">
+            <a:schemeClr val="accent1"/>
+          </a:effectRef>
+          <a:fontRef idx="minor">
+            <a:schemeClr val="lt1"/>
+          </a:fontRef>
+        </p:style>
+        <p:txBody>
+          <a:bodyPr rtlCol="0" anchor="ctr"/>
+          <a:lstStyle/>
+          <a:p>
+            <a:pPr algn="ctr"/>
+          </a:p>
+        </p:txBody>
+      </p:sp>
+      <p:sp>
+        <p:nvSpPr>
+          <p:cNvPr id="20" name="TextBox 19"/>
+          <p:cNvSpPr txBox="1"/>
+          <p:nvPr/>
+        </p:nvSpPr>
+        <p:spPr>
+          <a:xfrm>
+            <a:off x="777240" y="2953512"/>
+            <a:ext cx="1874520" cy="438912"/>
+          </a:xfrm>
+          <a:prstGeom prst="rect">
+            <a:avLst/>
+          </a:prstGeom>
+          <a:noFill/>
+        </p:spPr>
+        <p:txBody>
+          <a:bodyPr wrap="square" lIns="0" rIns="0" tIns="0" bIns="0" anchor="ctr">
             <a:spAutoFit/>
           </a:bodyPr>
           <a:lstStyle/>
@@ -15464,25 +16207,1060 @@
             <a:r>
               <a:rPr sz="1250" b="0">
                 <a:solidFill>
+                  <a:srgbClr val="1A1A2E"/>
+                </a:solidFill>
+                <a:latin typeface="Microsoft JhengHei"/>
+              </a:rPr>
+              <a:t>Whisper small</a:t>
+            </a:r>
+          </a:p>
+        </p:txBody>
+      </p:sp>
+      <p:sp>
+        <p:nvSpPr>
+          <p:cNvPr id="21" name="TextBox 20"/>
+          <p:cNvSpPr txBox="1"/>
+          <p:nvPr/>
+        </p:nvSpPr>
+        <p:spPr>
+          <a:xfrm>
+            <a:off x="2898648" y="2953512"/>
+            <a:ext cx="1143000" cy="438912"/>
+          </a:xfrm>
+          <a:prstGeom prst="rect">
+            <a:avLst/>
+          </a:prstGeom>
+          <a:noFill/>
+        </p:spPr>
+        <p:txBody>
+          <a:bodyPr wrap="square" lIns="0" rIns="0" tIns="0" bIns="0" anchor="ctr">
+            <a:spAutoFit/>
+          </a:bodyPr>
+          <a:lstStyle/>
+          <a:p>
+            <a:pPr algn="l">
+              <a:lnSpc>
+                <a:spcPct val="115000"/>
+              </a:lnSpc>
+            </a:pPr>
+            <a:r>
+              <a:rPr sz="1200" b="0">
+                <a:solidFill>
+                  <a:srgbClr val="444444"/>
+                </a:solidFill>
+                <a:latin typeface="Arial"/>
+              </a:rPr>
+              <a:t>244M</a:t>
+            </a:r>
+          </a:p>
+        </p:txBody>
+      </p:sp>
+      <p:sp>
+        <p:nvSpPr>
+          <p:cNvPr id="22" name="TextBox 21"/>
+          <p:cNvSpPr txBox="1"/>
+          <p:nvPr/>
+        </p:nvSpPr>
+        <p:spPr>
+          <a:xfrm>
+            <a:off x="4270248" y="2953512"/>
+            <a:ext cx="1783080" cy="438912"/>
+          </a:xfrm>
+          <a:prstGeom prst="rect">
+            <a:avLst/>
+          </a:prstGeom>
+          <a:noFill/>
+        </p:spPr>
+        <p:txBody>
+          <a:bodyPr wrap="square" lIns="0" rIns="0" tIns="0" bIns="0" anchor="ctr">
+            <a:spAutoFit/>
+          </a:bodyPr>
+          <a:lstStyle/>
+          <a:p>
+            <a:pPr algn="l">
+              <a:lnSpc>
+                <a:spcPct val="115000"/>
+              </a:lnSpc>
+            </a:pPr>
+            <a:r>
+              <a:rPr sz="1100" b="0">
+                <a:solidFill>
+                  <a:srgbClr val="444444"/>
+                </a:solidFill>
+                <a:latin typeface="Microsoft JhengHei"/>
+              </a:rPr>
+              <a:t>whisper.cpp 另一套</a:t>
+            </a:r>
+          </a:p>
+        </p:txBody>
+      </p:sp>
+      <p:sp>
+        <p:nvSpPr>
+          <p:cNvPr id="23" name="TextBox 22"/>
+          <p:cNvSpPr txBox="1"/>
+          <p:nvPr/>
+        </p:nvSpPr>
+        <p:spPr>
+          <a:xfrm>
+            <a:off x="6281928" y="2953512"/>
+            <a:ext cx="1417320" cy="438912"/>
+          </a:xfrm>
+          <a:prstGeom prst="rect">
+            <a:avLst/>
+          </a:prstGeom>
+          <a:noFill/>
+        </p:spPr>
+        <p:txBody>
+          <a:bodyPr wrap="square" lIns="0" rIns="0" tIns="0" bIns="0" anchor="ctr">
+            <a:spAutoFit/>
+          </a:bodyPr>
+          <a:lstStyle/>
+          <a:p>
+            <a:pPr algn="l">
+              <a:lnSpc>
+                <a:spcPct val="115000"/>
+              </a:lnSpc>
+            </a:pPr>
+            <a:r>
+              <a:rPr sz="1100" b="0">
+                <a:solidFill>
                   <a:srgbClr val="555555"/>
                 </a:solidFill>
                 <a:latin typeface="Microsoft JhengHei"/>
               </a:rPr>
-              <a:t>乾淨（正常音量）</a:t>
-            </a:r>
-          </a:p>
-        </p:txBody>
-      </p:sp>
-      <p:sp>
-        <p:nvSpPr>
-          <p:cNvPr id="8" name="Rounded Rectangle 7"/>
+              <a:t>可但中文弱</a:t>
+            </a:r>
+          </a:p>
+        </p:txBody>
+      </p:sp>
+      <p:sp>
+        <p:nvSpPr>
+          <p:cNvPr id="24" name="TextBox 23"/>
+          <p:cNvSpPr txBox="1"/>
+          <p:nvPr/>
+        </p:nvSpPr>
+        <p:spPr>
+          <a:xfrm>
+            <a:off x="7927848" y="2953512"/>
+            <a:ext cx="1325880" cy="438912"/>
+          </a:xfrm>
+          <a:prstGeom prst="rect">
+            <a:avLst/>
+          </a:prstGeom>
+          <a:noFill/>
+        </p:spPr>
+        <p:txBody>
+          <a:bodyPr wrap="square" lIns="0" rIns="0" tIns="0" bIns="0" anchor="ctr">
+            <a:spAutoFit/>
+          </a:bodyPr>
+          <a:lstStyle/>
+          <a:p>
+            <a:pPr algn="l">
+              <a:lnSpc>
+                <a:spcPct val="115000"/>
+              </a:lnSpc>
+            </a:pPr>
+            <a:r>
+              <a:rPr sz="1150" b="0">
+                <a:solidFill>
+                  <a:srgbClr val="444444"/>
+                </a:solidFill>
+                <a:latin typeface="Arial"/>
+              </a:rPr>
+              <a:t>~20%</a:t>
+            </a:r>
+          </a:p>
+        </p:txBody>
+      </p:sp>
+      <p:sp>
+        <p:nvSpPr>
+          <p:cNvPr id="25" name="TextBox 24"/>
+          <p:cNvSpPr txBox="1"/>
+          <p:nvPr/>
+        </p:nvSpPr>
+        <p:spPr>
+          <a:xfrm>
+            <a:off x="9482328" y="2953512"/>
+            <a:ext cx="1965960" cy="438912"/>
+          </a:xfrm>
+          <a:prstGeom prst="rect">
+            <a:avLst/>
+          </a:prstGeom>
+          <a:noFill/>
+        </p:spPr>
+        <p:txBody>
+          <a:bodyPr wrap="square" lIns="0" rIns="0" tIns="0" bIns="0" anchor="ctr">
+            <a:spAutoFit/>
+          </a:bodyPr>
+          <a:lstStyle/>
+          <a:p>
+            <a:pPr algn="l">
+              <a:lnSpc>
+                <a:spcPct val="115000"/>
+              </a:lnSpc>
+            </a:pPr>
+            <a:r>
+              <a:rPr sz="1150" b="0">
+                <a:solidFill>
+                  <a:srgbClr val="555555"/>
+                </a:solidFill>
+                <a:latin typeface="Microsoft JhengHei"/>
+              </a:rPr>
+              <a:t>中文 CER 高</a:t>
+            </a:r>
+          </a:p>
+        </p:txBody>
+      </p:sp>
+      <p:sp>
+        <p:nvSpPr>
+          <p:cNvPr id="26" name="Rectangle 25"/>
           <p:cNvSpPr/>
           <p:nvPr/>
         </p:nvSpPr>
         <p:spPr>
           <a:xfrm>
-            <a:off x="4352544" y="1965960"/>
-            <a:ext cx="3483864" cy="1188720"/>
+            <a:off x="667512" y="3483864"/>
+            <a:ext cx="10853928" cy="621792"/>
+          </a:xfrm>
+          <a:prstGeom prst="rect">
+            <a:avLst/>
+          </a:prstGeom>
+          <a:solidFill>
+            <a:srgbClr val="FFFFFF"/>
+          </a:solidFill>
+          <a:ln w="6350">
+            <a:solidFill>
+              <a:srgbClr val="E6E8EC"/>
+            </a:solidFill>
+          </a:ln>
+          <a:effectLst/>
+        </p:spPr>
+        <p:style>
+          <a:lnRef idx="1">
+            <a:schemeClr val="accent1"/>
+          </a:lnRef>
+          <a:fillRef idx="3">
+            <a:schemeClr val="accent1"/>
+          </a:fillRef>
+          <a:effectRef idx="2">
+            <a:schemeClr val="accent1"/>
+          </a:effectRef>
+          <a:fontRef idx="minor">
+            <a:schemeClr val="lt1"/>
+          </a:fontRef>
+        </p:style>
+        <p:txBody>
+          <a:bodyPr rtlCol="0" anchor="ctr"/>
+          <a:lstStyle/>
+          <a:p>
+            <a:pPr algn="ctr"/>
+          </a:p>
+        </p:txBody>
+      </p:sp>
+      <p:sp>
+        <p:nvSpPr>
+          <p:cNvPr id="27" name="TextBox 26"/>
+          <p:cNvSpPr txBox="1"/>
+          <p:nvPr/>
+        </p:nvSpPr>
+        <p:spPr>
+          <a:xfrm>
+            <a:off x="777240" y="3575304"/>
+            <a:ext cx="1874520" cy="438912"/>
+          </a:xfrm>
+          <a:prstGeom prst="rect">
+            <a:avLst/>
+          </a:prstGeom>
+          <a:noFill/>
+        </p:spPr>
+        <p:txBody>
+          <a:bodyPr wrap="square" lIns="0" rIns="0" tIns="0" bIns="0" anchor="ctr">
+            <a:spAutoFit/>
+          </a:bodyPr>
+          <a:lstStyle/>
+          <a:p>
+            <a:pPr algn="l">
+              <a:lnSpc>
+                <a:spcPct val="115000"/>
+              </a:lnSpc>
+            </a:pPr>
+            <a:r>
+              <a:rPr sz="1250" b="0">
+                <a:solidFill>
+                  <a:srgbClr val="1A1A2E"/>
+                </a:solidFill>
+                <a:latin typeface="Microsoft JhengHei"/>
+              </a:rPr>
+              <a:t>Whisper large-v3</a:t>
+            </a:r>
+          </a:p>
+        </p:txBody>
+      </p:sp>
+      <p:sp>
+        <p:nvSpPr>
+          <p:cNvPr id="28" name="TextBox 27"/>
+          <p:cNvSpPr txBox="1"/>
+          <p:nvPr/>
+        </p:nvSpPr>
+        <p:spPr>
+          <a:xfrm>
+            <a:off x="2898648" y="3575304"/>
+            <a:ext cx="1143000" cy="438912"/>
+          </a:xfrm>
+          <a:prstGeom prst="rect">
+            <a:avLst/>
+          </a:prstGeom>
+          <a:noFill/>
+        </p:spPr>
+        <p:txBody>
+          <a:bodyPr wrap="square" lIns="0" rIns="0" tIns="0" bIns="0" anchor="ctr">
+            <a:spAutoFit/>
+          </a:bodyPr>
+          <a:lstStyle/>
+          <a:p>
+            <a:pPr algn="l">
+              <a:lnSpc>
+                <a:spcPct val="115000"/>
+              </a:lnSpc>
+            </a:pPr>
+            <a:r>
+              <a:rPr sz="1200" b="0">
+                <a:solidFill>
+                  <a:srgbClr val="444444"/>
+                </a:solidFill>
+                <a:latin typeface="Arial"/>
+              </a:rPr>
+              <a:t>1.55B</a:t>
+            </a:r>
+          </a:p>
+        </p:txBody>
+      </p:sp>
+      <p:sp>
+        <p:nvSpPr>
+          <p:cNvPr id="29" name="TextBox 28"/>
+          <p:cNvSpPr txBox="1"/>
+          <p:nvPr/>
+        </p:nvSpPr>
+        <p:spPr>
+          <a:xfrm>
+            <a:off x="4270248" y="3575304"/>
+            <a:ext cx="1783080" cy="438912"/>
+          </a:xfrm>
+          <a:prstGeom prst="rect">
+            <a:avLst/>
+          </a:prstGeom>
+          <a:noFill/>
+        </p:spPr>
+        <p:txBody>
+          <a:bodyPr wrap="square" lIns="0" rIns="0" tIns="0" bIns="0" anchor="ctr">
+            <a:spAutoFit/>
+          </a:bodyPr>
+          <a:lstStyle/>
+          <a:p>
+            <a:pPr algn="l">
+              <a:lnSpc>
+                <a:spcPct val="115000"/>
+              </a:lnSpc>
+            </a:pPr>
+            <a:r>
+              <a:rPr sz="1100" b="0">
+                <a:solidFill>
+                  <a:srgbClr val="444444"/>
+                </a:solidFill>
+                <a:latin typeface="Microsoft JhengHei"/>
+              </a:rPr>
+              <a:t>太重 / 需 GPU</a:t>
+            </a:r>
+          </a:p>
+        </p:txBody>
+      </p:sp>
+      <p:sp>
+        <p:nvSpPr>
+          <p:cNvPr id="30" name="TextBox 29"/>
+          <p:cNvSpPr txBox="1"/>
+          <p:nvPr/>
+        </p:nvSpPr>
+        <p:spPr>
+          <a:xfrm>
+            <a:off x="6281928" y="3575304"/>
+            <a:ext cx="1417320" cy="438912"/>
+          </a:xfrm>
+          <a:prstGeom prst="rect">
+            <a:avLst/>
+          </a:prstGeom>
+          <a:noFill/>
+        </p:spPr>
+        <p:txBody>
+          <a:bodyPr wrap="square" lIns="0" rIns="0" tIns="0" bIns="0" anchor="ctr">
+            <a:spAutoFit/>
+          </a:bodyPr>
+          <a:lstStyle/>
+          <a:p>
+            <a:pPr algn="l">
+              <a:lnSpc>
+                <a:spcPct val="115000"/>
+              </a:lnSpc>
+            </a:pPr>
+            <a:r>
+              <a:rPr sz="1100" b="0">
+                <a:solidFill>
+                  <a:srgbClr val="555555"/>
+                </a:solidFill>
+                <a:latin typeface="Microsoft JhengHei"/>
+              </a:rPr>
+              <a:t>✕ RPi5 跑不動</a:t>
+            </a:r>
+          </a:p>
+        </p:txBody>
+      </p:sp>
+      <p:sp>
+        <p:nvSpPr>
+          <p:cNvPr id="31" name="TextBox 30"/>
+          <p:cNvSpPr txBox="1"/>
+          <p:nvPr/>
+        </p:nvSpPr>
+        <p:spPr>
+          <a:xfrm>
+            <a:off x="7927848" y="3575304"/>
+            <a:ext cx="1325880" cy="438912"/>
+          </a:xfrm>
+          <a:prstGeom prst="rect">
+            <a:avLst/>
+          </a:prstGeom>
+          <a:noFill/>
+        </p:spPr>
+        <p:txBody>
+          <a:bodyPr wrap="square" lIns="0" rIns="0" tIns="0" bIns="0" anchor="ctr">
+            <a:spAutoFit/>
+          </a:bodyPr>
+          <a:lstStyle/>
+          <a:p>
+            <a:pPr algn="l">
+              <a:lnSpc>
+                <a:spcPct val="115000"/>
+              </a:lnSpc>
+            </a:pPr>
+            <a:r>
+              <a:rPr sz="1150" b="0">
+                <a:solidFill>
+                  <a:srgbClr val="444444"/>
+                </a:solidFill>
+                <a:latin typeface="Arial"/>
+              </a:rPr>
+              <a:t>~20%</a:t>
+            </a:r>
+          </a:p>
+        </p:txBody>
+      </p:sp>
+      <p:sp>
+        <p:nvSpPr>
+          <p:cNvPr id="32" name="TextBox 31"/>
+          <p:cNvSpPr txBox="1"/>
+          <p:nvPr/>
+        </p:nvSpPr>
+        <p:spPr>
+          <a:xfrm>
+            <a:off x="9482328" y="3575304"/>
+            <a:ext cx="1965960" cy="438912"/>
+          </a:xfrm>
+          <a:prstGeom prst="rect">
+            <a:avLst/>
+          </a:prstGeom>
+          <a:noFill/>
+        </p:spPr>
+        <p:txBody>
+          <a:bodyPr wrap="square" lIns="0" rIns="0" tIns="0" bIns="0" anchor="ctr">
+            <a:spAutoFit/>
+          </a:bodyPr>
+          <a:lstStyle/>
+          <a:p>
+            <a:pPr algn="l">
+              <a:lnSpc>
+                <a:spcPct val="115000"/>
+              </a:lnSpc>
+            </a:pPr>
+            <a:r>
+              <a:rPr sz="1150" b="0">
+                <a:solidFill>
+                  <a:srgbClr val="555555"/>
+                </a:solidFill>
+                <a:latin typeface="Microsoft JhengHei"/>
+              </a:rPr>
+              <a:t>太大＋雲端傾向</a:t>
+            </a:r>
+          </a:p>
+        </p:txBody>
+      </p:sp>
+      <p:sp>
+        <p:nvSpPr>
+          <p:cNvPr id="33" name="Rectangle 32"/>
+          <p:cNvSpPr/>
+          <p:nvPr/>
+        </p:nvSpPr>
+        <p:spPr>
+          <a:xfrm>
+            <a:off x="667512" y="4105656"/>
+            <a:ext cx="10853928" cy="621792"/>
+          </a:xfrm>
+          <a:prstGeom prst="rect">
+            <a:avLst/>
+          </a:prstGeom>
+          <a:solidFill>
+            <a:srgbClr val="F4F6F8"/>
+          </a:solidFill>
+          <a:ln w="6350">
+            <a:solidFill>
+              <a:srgbClr val="E6E8EC"/>
+            </a:solidFill>
+          </a:ln>
+          <a:effectLst/>
+        </p:spPr>
+        <p:style>
+          <a:lnRef idx="1">
+            <a:schemeClr val="accent1"/>
+          </a:lnRef>
+          <a:fillRef idx="3">
+            <a:schemeClr val="accent1"/>
+          </a:fillRef>
+          <a:effectRef idx="2">
+            <a:schemeClr val="accent1"/>
+          </a:effectRef>
+          <a:fontRef idx="minor">
+            <a:schemeClr val="lt1"/>
+          </a:fontRef>
+        </p:style>
+        <p:txBody>
+          <a:bodyPr rtlCol="0" anchor="ctr"/>
+          <a:lstStyle/>
+          <a:p>
+            <a:pPr algn="ctr"/>
+          </a:p>
+        </p:txBody>
+      </p:sp>
+      <p:sp>
+        <p:nvSpPr>
+          <p:cNvPr id="34" name="TextBox 33"/>
+          <p:cNvSpPr txBox="1"/>
+          <p:nvPr/>
+        </p:nvSpPr>
+        <p:spPr>
+          <a:xfrm>
+            <a:off x="777240" y="4197096"/>
+            <a:ext cx="1874520" cy="438912"/>
+          </a:xfrm>
+          <a:prstGeom prst="rect">
+            <a:avLst/>
+          </a:prstGeom>
+          <a:noFill/>
+        </p:spPr>
+        <p:txBody>
+          <a:bodyPr wrap="square" lIns="0" rIns="0" tIns="0" bIns="0" anchor="ctr">
+            <a:spAutoFit/>
+          </a:bodyPr>
+          <a:lstStyle/>
+          <a:p>
+            <a:pPr algn="l">
+              <a:lnSpc>
+                <a:spcPct val="115000"/>
+              </a:lnSpc>
+            </a:pPr>
+            <a:r>
+              <a:rPr sz="1250" b="0">
+                <a:solidFill>
+                  <a:srgbClr val="1A1A2E"/>
+                </a:solidFill>
+                <a:latin typeface="Microsoft JhengHei"/>
+              </a:rPr>
+              <a:t>SenseVoice-Small</a:t>
+            </a:r>
+          </a:p>
+        </p:txBody>
+      </p:sp>
+      <p:sp>
+        <p:nvSpPr>
+          <p:cNvPr id="35" name="TextBox 34"/>
+          <p:cNvSpPr txBox="1"/>
+          <p:nvPr/>
+        </p:nvSpPr>
+        <p:spPr>
+          <a:xfrm>
+            <a:off x="2898648" y="4197096"/>
+            <a:ext cx="1143000" cy="438912"/>
+          </a:xfrm>
+          <a:prstGeom prst="rect">
+            <a:avLst/>
+          </a:prstGeom>
+          <a:noFill/>
+        </p:spPr>
+        <p:txBody>
+          <a:bodyPr wrap="square" lIns="0" rIns="0" tIns="0" bIns="0" anchor="ctr">
+            <a:spAutoFit/>
+          </a:bodyPr>
+          <a:lstStyle/>
+          <a:p>
+            <a:pPr algn="l">
+              <a:lnSpc>
+                <a:spcPct val="115000"/>
+              </a:lnSpc>
+            </a:pPr>
+            <a:r>
+              <a:rPr sz="1200" b="0">
+                <a:solidFill>
+                  <a:srgbClr val="444444"/>
+                </a:solidFill>
+                <a:latin typeface="Arial"/>
+              </a:rPr>
+              <a:t>234M</a:t>
+            </a:r>
+          </a:p>
+        </p:txBody>
+      </p:sp>
+      <p:sp>
+        <p:nvSpPr>
+          <p:cNvPr id="36" name="TextBox 35"/>
+          <p:cNvSpPr txBox="1"/>
+          <p:nvPr/>
+        </p:nvSpPr>
+        <p:spPr>
+          <a:xfrm>
+            <a:off x="4270248" y="4197096"/>
+            <a:ext cx="1783080" cy="438912"/>
+          </a:xfrm>
+          <a:prstGeom prst="rect">
+            <a:avLst/>
+          </a:prstGeom>
+          <a:noFill/>
+        </p:spPr>
+        <p:txBody>
+          <a:bodyPr wrap="square" lIns="0" rIns="0" tIns="0" bIns="0" anchor="ctr">
+            <a:spAutoFit/>
+          </a:bodyPr>
+          <a:lstStyle/>
+          <a:p>
+            <a:pPr algn="l">
+              <a:lnSpc>
+                <a:spcPct val="115000"/>
+              </a:lnSpc>
+            </a:pPr>
+            <a:r>
+              <a:rPr sz="1100" b="0">
+                <a:solidFill>
+                  <a:srgbClr val="444444"/>
+                </a:solidFill>
+                <a:latin typeface="Microsoft JhengHei"/>
+              </a:rPr>
+              <a:t>sherpa-onnx 另整合</a:t>
+            </a:r>
+          </a:p>
+        </p:txBody>
+      </p:sp>
+      <p:sp>
+        <p:nvSpPr>
+          <p:cNvPr id="37" name="TextBox 36"/>
+          <p:cNvSpPr txBox="1"/>
+          <p:nvPr/>
+        </p:nvSpPr>
+        <p:spPr>
+          <a:xfrm>
+            <a:off x="6281928" y="4197096"/>
+            <a:ext cx="1417320" cy="438912"/>
+          </a:xfrm>
+          <a:prstGeom prst="rect">
+            <a:avLst/>
+          </a:prstGeom>
+          <a:noFill/>
+        </p:spPr>
+        <p:txBody>
+          <a:bodyPr wrap="square" lIns="0" rIns="0" tIns="0" bIns="0" anchor="ctr">
+            <a:spAutoFit/>
+          </a:bodyPr>
+          <a:lstStyle/>
+          <a:p>
+            <a:pPr algn="l">
+              <a:lnSpc>
+                <a:spcPct val="115000"/>
+              </a:lnSpc>
+            </a:pPr>
+            <a:r>
+              <a:rPr sz="1100" b="0">
+                <a:solidFill>
+                  <a:srgbClr val="555555"/>
+                </a:solidFill>
+                <a:latin typeface="Microsoft JhengHei"/>
+              </a:rPr>
+              <a:t>✓ 快</a:t>
+            </a:r>
+          </a:p>
+        </p:txBody>
+      </p:sp>
+      <p:sp>
+        <p:nvSpPr>
+          <p:cNvPr id="38" name="TextBox 37"/>
+          <p:cNvSpPr txBox="1"/>
+          <p:nvPr/>
+        </p:nvSpPr>
+        <p:spPr>
+          <a:xfrm>
+            <a:off x="7927848" y="4197096"/>
+            <a:ext cx="1325880" cy="438912"/>
+          </a:xfrm>
+          <a:prstGeom prst="rect">
+            <a:avLst/>
+          </a:prstGeom>
+          <a:noFill/>
+        </p:spPr>
+        <p:txBody>
+          <a:bodyPr wrap="square" lIns="0" rIns="0" tIns="0" bIns="0" anchor="ctr">
+            <a:spAutoFit/>
+          </a:bodyPr>
+          <a:lstStyle/>
+          <a:p>
+            <a:pPr algn="l">
+              <a:lnSpc>
+                <a:spcPct val="115000"/>
+              </a:lnSpc>
+            </a:pPr>
+            <a:r>
+              <a:rPr sz="1150" b="0">
+                <a:solidFill>
+                  <a:srgbClr val="444444"/>
+                </a:solidFill>
+                <a:latin typeface="Arial"/>
+              </a:rPr>
+              <a:t>~8%</a:t>
+            </a:r>
+          </a:p>
+        </p:txBody>
+      </p:sp>
+      <p:sp>
+        <p:nvSpPr>
+          <p:cNvPr id="39" name="TextBox 38"/>
+          <p:cNvSpPr txBox="1"/>
+          <p:nvPr/>
+        </p:nvSpPr>
+        <p:spPr>
+          <a:xfrm>
+            <a:off x="9482328" y="4197096"/>
+            <a:ext cx="1965960" cy="438912"/>
+          </a:xfrm>
+          <a:prstGeom prst="rect">
+            <a:avLst/>
+          </a:prstGeom>
+          <a:noFill/>
+        </p:spPr>
+        <p:txBody>
+          <a:bodyPr wrap="square" lIns="0" rIns="0" tIns="0" bIns="0" anchor="ctr">
+            <a:spAutoFit/>
+          </a:bodyPr>
+          <a:lstStyle/>
+          <a:p>
+            <a:pPr algn="l">
+              <a:lnSpc>
+                <a:spcPct val="115000"/>
+              </a:lnSpc>
+            </a:pPr>
+            <a:r>
+              <a:rPr sz="1150" b="0">
+                <a:solidFill>
+                  <a:srgbClr val="555555"/>
+                </a:solidFill>
+                <a:latin typeface="Microsoft JhengHei"/>
+              </a:rPr>
+              <a:t>要重整合，展前風險</a:t>
+            </a:r>
+          </a:p>
+        </p:txBody>
+      </p:sp>
+      <p:sp>
+        <p:nvSpPr>
+          <p:cNvPr id="40" name="Rectangle 39"/>
+          <p:cNvSpPr/>
+          <p:nvPr/>
+        </p:nvSpPr>
+        <p:spPr>
+          <a:xfrm>
+            <a:off x="667512" y="4727448"/>
+            <a:ext cx="10853928" cy="621792"/>
+          </a:xfrm>
+          <a:prstGeom prst="rect">
+            <a:avLst/>
+          </a:prstGeom>
+          <a:solidFill>
+            <a:srgbClr val="FFFFFF"/>
+          </a:solidFill>
+          <a:ln w="6350">
+            <a:solidFill>
+              <a:srgbClr val="E6E8EC"/>
+            </a:solidFill>
+          </a:ln>
+          <a:effectLst/>
+        </p:spPr>
+        <p:style>
+          <a:lnRef idx="1">
+            <a:schemeClr val="accent1"/>
+          </a:lnRef>
+          <a:fillRef idx="3">
+            <a:schemeClr val="accent1"/>
+          </a:fillRef>
+          <a:effectRef idx="2">
+            <a:schemeClr val="accent1"/>
+          </a:effectRef>
+          <a:fontRef idx="minor">
+            <a:schemeClr val="lt1"/>
+          </a:fontRef>
+        </p:style>
+        <p:txBody>
+          <a:bodyPr rtlCol="0" anchor="ctr"/>
+          <a:lstStyle/>
+          <a:p>
+            <a:pPr algn="ctr"/>
+          </a:p>
+        </p:txBody>
+      </p:sp>
+      <p:sp>
+        <p:nvSpPr>
+          <p:cNvPr id="41" name="TextBox 40"/>
+          <p:cNvSpPr txBox="1"/>
+          <p:nvPr/>
+        </p:nvSpPr>
+        <p:spPr>
+          <a:xfrm>
+            <a:off x="777240" y="4818888"/>
+            <a:ext cx="1874520" cy="438912"/>
+          </a:xfrm>
+          <a:prstGeom prst="rect">
+            <a:avLst/>
+          </a:prstGeom>
+          <a:noFill/>
+        </p:spPr>
+        <p:txBody>
+          <a:bodyPr wrap="square" lIns="0" rIns="0" tIns="0" bIns="0" anchor="ctr">
+            <a:spAutoFit/>
+          </a:bodyPr>
+          <a:lstStyle/>
+          <a:p>
+            <a:pPr algn="l">
+              <a:lnSpc>
+                <a:spcPct val="115000"/>
+              </a:lnSpc>
+            </a:pPr>
+            <a:r>
+              <a:rPr sz="1250" b="0">
+                <a:solidFill>
+                  <a:srgbClr val="1A1A2E"/>
+                </a:solidFill>
+                <a:latin typeface="Microsoft JhengHei"/>
+              </a:rPr>
+              <a:t>Paraformer</a:t>
+            </a:r>
+          </a:p>
+        </p:txBody>
+      </p:sp>
+      <p:sp>
+        <p:nvSpPr>
+          <p:cNvPr id="42" name="TextBox 41"/>
+          <p:cNvSpPr txBox="1"/>
+          <p:nvPr/>
+        </p:nvSpPr>
+        <p:spPr>
+          <a:xfrm>
+            <a:off x="2898648" y="4818888"/>
+            <a:ext cx="1143000" cy="438912"/>
+          </a:xfrm>
+          <a:prstGeom prst="rect">
+            <a:avLst/>
+          </a:prstGeom>
+          <a:noFill/>
+        </p:spPr>
+        <p:txBody>
+          <a:bodyPr wrap="square" lIns="0" rIns="0" tIns="0" bIns="0" anchor="ctr">
+            <a:spAutoFit/>
+          </a:bodyPr>
+          <a:lstStyle/>
+          <a:p>
+            <a:pPr algn="l">
+              <a:lnSpc>
+                <a:spcPct val="115000"/>
+              </a:lnSpc>
+            </a:pPr>
+            <a:r>
+              <a:rPr sz="1200" b="0">
+                <a:solidFill>
+                  <a:srgbClr val="444444"/>
+                </a:solidFill>
+                <a:latin typeface="Arial"/>
+              </a:rPr>
+              <a:t>~220M</a:t>
+            </a:r>
+          </a:p>
+        </p:txBody>
+      </p:sp>
+      <p:sp>
+        <p:nvSpPr>
+          <p:cNvPr id="43" name="TextBox 42"/>
+          <p:cNvSpPr txBox="1"/>
+          <p:nvPr/>
+        </p:nvSpPr>
+        <p:spPr>
+          <a:xfrm>
+            <a:off x="4270248" y="4818888"/>
+            <a:ext cx="1783080" cy="438912"/>
+          </a:xfrm>
+          <a:prstGeom prst="rect">
+            <a:avLst/>
+          </a:prstGeom>
+          <a:noFill/>
+        </p:spPr>
+        <p:txBody>
+          <a:bodyPr wrap="square" lIns="0" rIns="0" tIns="0" bIns="0" anchor="ctr">
+            <a:spAutoFit/>
+          </a:bodyPr>
+          <a:lstStyle/>
+          <a:p>
+            <a:pPr algn="l">
+              <a:lnSpc>
+                <a:spcPct val="115000"/>
+              </a:lnSpc>
+            </a:pPr>
+            <a:r>
+              <a:rPr sz="1100" b="0">
+                <a:solidFill>
+                  <a:srgbClr val="444444"/>
+                </a:solidFill>
+                <a:latin typeface="Microsoft JhengHei"/>
+              </a:rPr>
+              <a:t>sherpa-onnx 另整合</a:t>
+            </a:r>
+          </a:p>
+        </p:txBody>
+      </p:sp>
+      <p:sp>
+        <p:nvSpPr>
+          <p:cNvPr id="44" name="TextBox 43"/>
+          <p:cNvSpPr txBox="1"/>
+          <p:nvPr/>
+        </p:nvSpPr>
+        <p:spPr>
+          <a:xfrm>
+            <a:off x="6281928" y="4818888"/>
+            <a:ext cx="1417320" cy="438912"/>
+          </a:xfrm>
+          <a:prstGeom prst="rect">
+            <a:avLst/>
+          </a:prstGeom>
+          <a:noFill/>
+        </p:spPr>
+        <p:txBody>
+          <a:bodyPr wrap="square" lIns="0" rIns="0" tIns="0" bIns="0" anchor="ctr">
+            <a:spAutoFit/>
+          </a:bodyPr>
+          <a:lstStyle/>
+          <a:p>
+            <a:pPr algn="l">
+              <a:lnSpc>
+                <a:spcPct val="115000"/>
+              </a:lnSpc>
+            </a:pPr>
+            <a:r>
+              <a:rPr sz="1100" b="0">
+                <a:solidFill>
+                  <a:srgbClr val="555555"/>
+                </a:solidFill>
+                <a:latin typeface="Microsoft JhengHei"/>
+              </a:rPr>
+              <a:t>✓ 輕</a:t>
+            </a:r>
+          </a:p>
+        </p:txBody>
+      </p:sp>
+      <p:sp>
+        <p:nvSpPr>
+          <p:cNvPr id="45" name="TextBox 44"/>
+          <p:cNvSpPr txBox="1"/>
+          <p:nvPr/>
+        </p:nvSpPr>
+        <p:spPr>
+          <a:xfrm>
+            <a:off x="7927848" y="4818888"/>
+            <a:ext cx="1325880" cy="438912"/>
+          </a:xfrm>
+          <a:prstGeom prst="rect">
+            <a:avLst/>
+          </a:prstGeom>
+          <a:noFill/>
+        </p:spPr>
+        <p:txBody>
+          <a:bodyPr wrap="square" lIns="0" rIns="0" tIns="0" bIns="0" anchor="ctr">
+            <a:spAutoFit/>
+          </a:bodyPr>
+          <a:lstStyle/>
+          <a:p>
+            <a:pPr algn="l">
+              <a:lnSpc>
+                <a:spcPct val="115000"/>
+              </a:lnSpc>
+            </a:pPr>
+            <a:r>
+              <a:rPr sz="1150" b="0">
+                <a:solidFill>
+                  <a:srgbClr val="444444"/>
+                </a:solidFill>
+                <a:latin typeface="Arial"/>
+              </a:rPr>
+              <a:t>~10%</a:t>
+            </a:r>
+          </a:p>
+        </p:txBody>
+      </p:sp>
+      <p:sp>
+        <p:nvSpPr>
+          <p:cNvPr id="46" name="TextBox 45"/>
+          <p:cNvSpPr txBox="1"/>
+          <p:nvPr/>
+        </p:nvSpPr>
+        <p:spPr>
+          <a:xfrm>
+            <a:off x="9482328" y="4818888"/>
+            <a:ext cx="1965960" cy="438912"/>
+          </a:xfrm>
+          <a:prstGeom prst="rect">
+            <a:avLst/>
+          </a:prstGeom>
+          <a:noFill/>
+        </p:spPr>
+        <p:txBody>
+          <a:bodyPr wrap="square" lIns="0" rIns="0" tIns="0" bIns="0" anchor="ctr">
+            <a:spAutoFit/>
+          </a:bodyPr>
+          <a:lstStyle/>
+          <a:p>
+            <a:pPr algn="l">
+              <a:lnSpc>
+                <a:spcPct val="115000"/>
+              </a:lnSpc>
+            </a:pPr>
+            <a:r>
+              <a:rPr sz="1150" b="0">
+                <a:solidFill>
+                  <a:srgbClr val="555555"/>
+                </a:solidFill>
+                <a:latin typeface="Microsoft JhengHei"/>
+              </a:rPr>
+              <a:t>同上，備援方案</a:t>
+            </a:r>
+          </a:p>
+        </p:txBody>
+      </p:sp>
+      <p:sp>
+        <p:nvSpPr>
+          <p:cNvPr id="47" name="Rounded Rectangle 46"/>
+          <p:cNvSpPr/>
+          <p:nvPr/>
+        </p:nvSpPr>
+        <p:spPr>
+          <a:xfrm>
+            <a:off x="667512" y="5623560"/>
+            <a:ext cx="10853928" cy="896112"/>
           </a:xfrm>
           <a:prstGeom prst="roundRect">
             <a:avLst>
@@ -15490,7 +17268,7 @@
             </a:avLst>
           </a:prstGeom>
           <a:solidFill>
-            <a:srgbClr val="F4F6F8"/>
+            <a:srgbClr val="1A1A2E"/>
           </a:solidFill>
           <a:ln>
             <a:noFill/>
@@ -15521,752 +17299,64 @@
       </p:sp>
       <p:sp>
         <p:nvSpPr>
-          <p:cNvPr id="9" name="TextBox 8"/>
-          <p:cNvSpPr txBox="1"/>
-          <p:nvPr/>
-        </p:nvSpPr>
-        <p:spPr>
-          <a:xfrm>
-            <a:off x="4517136" y="2112264"/>
-            <a:ext cx="3154680" cy="548640"/>
-          </a:xfrm>
-          <a:prstGeom prst="rect">
-            <a:avLst/>
-          </a:prstGeom>
-          <a:noFill/>
-        </p:spPr>
-        <p:txBody>
-          <a:bodyPr wrap="square" lIns="0" rIns="0" tIns="0" bIns="0" anchor="t">
-            <a:spAutoFit/>
-          </a:bodyPr>
-          <a:lstStyle/>
-          <a:p>
-            <a:pPr algn="l">
-              <a:lnSpc>
-                <a:spcPct val="115000"/>
-              </a:lnSpc>
-            </a:pPr>
-            <a:r>
-              <a:rPr sz="4000" b="1">
+          <p:cNvPr id="48" name="TextBox 47"/>
+          <p:cNvSpPr txBox="1"/>
+          <p:nvPr/>
+        </p:nvSpPr>
+        <p:spPr>
+          <a:xfrm>
+            <a:off x="1033272" y="5779008"/>
+            <a:ext cx="10149840" cy="603504"/>
+          </a:xfrm>
+          <a:prstGeom prst="rect">
+            <a:avLst/>
+          </a:prstGeom>
+          <a:noFill/>
+        </p:spPr>
+        <p:txBody>
+          <a:bodyPr wrap="square" lIns="0" rIns="0" tIns="0" bIns="0" anchor="ctr">
+            <a:spAutoFit/>
+          </a:bodyPr>
+          <a:lstStyle/>
+          <a:p>
+            <a:pPr algn="l">
+              <a:lnSpc>
+                <a:spcPct val="115000"/>
+              </a:lnSpc>
+            </a:pPr>
+            <a:r>
+              <a:rPr sz="1300" b="1">
                 <a:solidFill>
                   <a:srgbClr val="00C49A"/>
                 </a:solidFill>
                 <a:latin typeface="Arial"/>
               </a:rPr>
-              <a:t>77%</a:t>
-            </a:r>
-          </a:p>
-        </p:txBody>
-      </p:sp>
-      <p:sp>
-        <p:nvSpPr>
-          <p:cNvPr id="10" name="TextBox 9"/>
-          <p:cNvSpPr txBox="1"/>
-          <p:nvPr/>
-        </p:nvSpPr>
-        <p:spPr>
-          <a:xfrm>
-            <a:off x="4517136" y="2770632"/>
-            <a:ext cx="3154680" cy="310896"/>
-          </a:xfrm>
-          <a:prstGeom prst="rect">
-            <a:avLst/>
-          </a:prstGeom>
-          <a:noFill/>
-        </p:spPr>
-        <p:txBody>
-          <a:bodyPr wrap="square" lIns="0" rIns="0" tIns="0" bIns="0" anchor="t">
-            <a:spAutoFit/>
-          </a:bodyPr>
-          <a:lstStyle/>
-          <a:p>
-            <a:pPr algn="l">
-              <a:lnSpc>
-                <a:spcPct val="115000"/>
-              </a:lnSpc>
-            </a:pPr>
+              <a:t>決勝點  </a:t>
+            </a:r>
+            <a:r>
+              <a:rPr sz="1300" b="1">
+                <a:solidFill>
+                  <a:srgbClr val="FFFFFF"/>
+                </a:solidFill>
+                <a:latin typeface="Microsoft JhengHei"/>
+              </a:rPr>
+              <a:t>與倉管 LLM 共用同一套 llama.cpp / GGUF runtime</a:t>
+            </a:r>
             <a:r>
               <a:rPr sz="1250" b="0">
                 <a:solidFill>
-                  <a:srgbClr val="555555"/>
-                </a:solidFill>
-                <a:latin typeface="Microsoft JhengHei"/>
-              </a:rPr>
-              <a:t>一般展場 −18dB</a:t>
-            </a:r>
-          </a:p>
-        </p:txBody>
-      </p:sp>
-      <p:sp>
-        <p:nvSpPr>
-          <p:cNvPr id="11" name="Rounded Rectangle 10"/>
-          <p:cNvSpPr/>
-          <p:nvPr/>
-        </p:nvSpPr>
-        <p:spPr>
-          <a:xfrm>
-            <a:off x="8037576" y="1965960"/>
-            <a:ext cx="3483864" cy="1188720"/>
-          </a:xfrm>
-          <a:prstGeom prst="roundRect">
-            <a:avLst>
-              <a:gd name="adj" fmla="val 8000"/>
-            </a:avLst>
-          </a:prstGeom>
-          <a:solidFill>
-            <a:srgbClr val="F4F6F8"/>
-          </a:solidFill>
-          <a:ln>
-            <a:noFill/>
-          </a:ln>
-          <a:effectLst/>
-        </p:spPr>
-        <p:style>
-          <a:lnRef idx="1">
-            <a:schemeClr val="accent1"/>
-          </a:lnRef>
-          <a:fillRef idx="3">
-            <a:schemeClr val="accent1"/>
-          </a:fillRef>
-          <a:effectRef idx="2">
-            <a:schemeClr val="accent1"/>
-          </a:effectRef>
-          <a:fontRef idx="minor">
-            <a:schemeClr val="lt1"/>
-          </a:fontRef>
-        </p:style>
-        <p:txBody>
-          <a:bodyPr rtlCol="0" anchor="ctr"/>
-          <a:lstStyle/>
-          <a:p>
-            <a:pPr algn="ctr"/>
-          </a:p>
-        </p:txBody>
-      </p:sp>
-      <p:sp>
-        <p:nvSpPr>
-          <p:cNvPr id="12" name="TextBox 11"/>
-          <p:cNvSpPr txBox="1"/>
-          <p:nvPr/>
-        </p:nvSpPr>
-        <p:spPr>
-          <a:xfrm>
-            <a:off x="8202168" y="2112264"/>
-            <a:ext cx="3154680" cy="548640"/>
-          </a:xfrm>
-          <a:prstGeom prst="rect">
-            <a:avLst/>
-          </a:prstGeom>
-          <a:noFill/>
-        </p:spPr>
-        <p:txBody>
-          <a:bodyPr wrap="square" lIns="0" rIns="0" tIns="0" bIns="0" anchor="t">
-            <a:spAutoFit/>
-          </a:bodyPr>
-          <a:lstStyle/>
-          <a:p>
-            <a:pPr algn="l">
-              <a:lnSpc>
-                <a:spcPct val="115000"/>
-              </a:lnSpc>
-            </a:pPr>
-            <a:r>
-              <a:rPr sz="4000" b="1">
-                <a:solidFill>
-                  <a:srgbClr val="00C49A"/>
-                </a:solidFill>
-                <a:latin typeface="Arial"/>
-              </a:rPr>
-              <a:t>73%</a:t>
-            </a:r>
-          </a:p>
-        </p:txBody>
-      </p:sp>
-      <p:sp>
-        <p:nvSpPr>
-          <p:cNvPr id="13" name="TextBox 12"/>
-          <p:cNvSpPr txBox="1"/>
-          <p:nvPr/>
-        </p:nvSpPr>
-        <p:spPr>
-          <a:xfrm>
-            <a:off x="8202168" y="2770632"/>
-            <a:ext cx="3154680" cy="310896"/>
-          </a:xfrm>
-          <a:prstGeom prst="rect">
-            <a:avLst/>
-          </a:prstGeom>
-          <a:noFill/>
-        </p:spPr>
-        <p:txBody>
-          <a:bodyPr wrap="square" lIns="0" rIns="0" tIns="0" bIns="0" anchor="t">
-            <a:spAutoFit/>
-          </a:bodyPr>
-          <a:lstStyle/>
-          <a:p>
-            <a:pPr algn="l">
-              <a:lnSpc>
-                <a:spcPct val="115000"/>
-              </a:lnSpc>
-            </a:pPr>
-            <a:r>
-              <a:rPr sz="1250" b="0">
-                <a:solidFill>
-                  <a:srgbClr val="555555"/>
-                </a:solidFill>
-                <a:latin typeface="Microsoft JhengHei"/>
-              </a:rPr>
-              <a:t>尖峰吵雜 −8dB</a:t>
-            </a:r>
-          </a:p>
-        </p:txBody>
-      </p:sp>
-      <p:sp>
-        <p:nvSpPr>
-          <p:cNvPr id="14" name="Rounded Rectangle 13"/>
-          <p:cNvSpPr/>
-          <p:nvPr/>
-        </p:nvSpPr>
-        <p:spPr>
-          <a:xfrm>
-            <a:off x="667512" y="3520440"/>
-            <a:ext cx="10853928" cy="731520"/>
-          </a:xfrm>
-          <a:prstGeom prst="roundRect">
-            <a:avLst>
-              <a:gd name="adj" fmla="val 8000"/>
-            </a:avLst>
-          </a:prstGeom>
-          <a:solidFill>
-            <a:srgbClr val="F4F6F8"/>
-          </a:solidFill>
-          <a:ln>
-            <a:noFill/>
-          </a:ln>
-          <a:effectLst/>
-        </p:spPr>
-        <p:style>
-          <a:lnRef idx="1">
-            <a:schemeClr val="accent1"/>
-          </a:lnRef>
-          <a:fillRef idx="3">
-            <a:schemeClr val="accent1"/>
-          </a:fillRef>
-          <a:effectRef idx="2">
-            <a:schemeClr val="accent1"/>
-          </a:effectRef>
-          <a:fontRef idx="minor">
-            <a:schemeClr val="lt1"/>
-          </a:fontRef>
-        </p:style>
-        <p:txBody>
-          <a:bodyPr rtlCol="0" anchor="ctr"/>
-          <a:lstStyle/>
-          <a:p>
-            <a:pPr algn="ctr"/>
-          </a:p>
-        </p:txBody>
-      </p:sp>
-      <p:sp>
-        <p:nvSpPr>
-          <p:cNvPr id="15" name="Oval 14"/>
-          <p:cNvSpPr/>
-          <p:nvPr/>
-        </p:nvSpPr>
-        <p:spPr>
-          <a:xfrm>
-            <a:off x="960120" y="3776472"/>
-            <a:ext cx="219456" cy="219456"/>
-          </a:xfrm>
-          <a:prstGeom prst="ellipse">
-            <a:avLst/>
-          </a:prstGeom>
-          <a:solidFill>
-            <a:srgbClr val="00C49A"/>
-          </a:solidFill>
-          <a:ln>
-            <a:noFill/>
-          </a:ln>
-          <a:effectLst/>
-        </p:spPr>
-        <p:style>
-          <a:lnRef idx="1">
-            <a:schemeClr val="accent1"/>
-          </a:lnRef>
-          <a:fillRef idx="3">
-            <a:schemeClr val="accent1"/>
-          </a:fillRef>
-          <a:effectRef idx="2">
-            <a:schemeClr val="accent1"/>
-          </a:effectRef>
-          <a:fontRef idx="minor">
-            <a:schemeClr val="lt1"/>
-          </a:fontRef>
-        </p:style>
-        <p:txBody>
-          <a:bodyPr rtlCol="0" anchor="ctr"/>
-          <a:lstStyle/>
-          <a:p>
-            <a:pPr algn="ctr"/>
-          </a:p>
-        </p:txBody>
-      </p:sp>
-      <p:sp>
-        <p:nvSpPr>
-          <p:cNvPr id="16" name="TextBox 15"/>
-          <p:cNvSpPr txBox="1"/>
-          <p:nvPr/>
-        </p:nvSpPr>
-        <p:spPr>
-          <a:xfrm>
-            <a:off x="1417320" y="3593592"/>
-            <a:ext cx="3474720" cy="603504"/>
-          </a:xfrm>
-          <a:prstGeom prst="rect">
-            <a:avLst/>
-          </a:prstGeom>
-          <a:noFill/>
-        </p:spPr>
-        <p:txBody>
-          <a:bodyPr wrap="square" lIns="0" rIns="0" tIns="0" bIns="0" anchor="ctr">
-            <a:spAutoFit/>
-          </a:bodyPr>
-          <a:lstStyle/>
-          <a:p>
-            <a:pPr algn="l">
-              <a:lnSpc>
-                <a:spcPct val="115000"/>
-              </a:lnSpc>
-            </a:pPr>
-            <a:r>
-              <a:rPr sz="1500" b="1">
-                <a:solidFill>
-                  <a:srgbClr val="00C49A"/>
-                </a:solidFill>
-                <a:latin typeface="Microsoft JhengHei"/>
-              </a:rPr>
-              <a:t>噪音幾乎零影響</a:t>
-            </a:r>
-          </a:p>
-        </p:txBody>
-      </p:sp>
-      <p:sp>
-        <p:nvSpPr>
-          <p:cNvPr id="17" name="TextBox 16"/>
-          <p:cNvSpPr txBox="1"/>
-          <p:nvPr/>
-        </p:nvSpPr>
-        <p:spPr>
-          <a:xfrm>
-            <a:off x="4965192" y="3593592"/>
-            <a:ext cx="6309360" cy="603504"/>
-          </a:xfrm>
-          <a:prstGeom prst="rect">
-            <a:avLst/>
-          </a:prstGeom>
-          <a:noFill/>
-        </p:spPr>
-        <p:txBody>
-          <a:bodyPr wrap="square" lIns="0" rIns="0" tIns="0" bIns="0" anchor="ctr">
-            <a:spAutoFit/>
-          </a:bodyPr>
-          <a:lstStyle/>
-          <a:p>
-            <a:pPr algn="l">
-              <a:lnSpc>
-                <a:spcPct val="115000"/>
-              </a:lnSpc>
-            </a:pPr>
-            <a:r>
-              <a:rPr sz="1250" b="0">
-                <a:solidFill>
-                  <a:srgbClr val="444444"/>
-                </a:solidFill>
-                <a:latin typeface="Microsoft JhengHei"/>
-              </a:rPr>
-              <a:t>一般展場 −1%、尖峰只 −5%；純被噪音壓垮的僅 5 句</a:t>
-            </a:r>
-          </a:p>
-        </p:txBody>
-      </p:sp>
-      <p:sp>
-        <p:nvSpPr>
-          <p:cNvPr id="18" name="Rounded Rectangle 17"/>
-          <p:cNvSpPr/>
-          <p:nvPr/>
-        </p:nvSpPr>
-        <p:spPr>
-          <a:xfrm>
-            <a:off x="667512" y="4389120"/>
-            <a:ext cx="10853928" cy="731520"/>
-          </a:xfrm>
-          <a:prstGeom prst="roundRect">
-            <a:avLst>
-              <a:gd name="adj" fmla="val 8000"/>
-            </a:avLst>
-          </a:prstGeom>
-          <a:solidFill>
-            <a:srgbClr val="F4F6F8"/>
-          </a:solidFill>
-          <a:ln>
-            <a:noFill/>
-          </a:ln>
-          <a:effectLst/>
-        </p:spPr>
-        <p:style>
-          <a:lnRef idx="1">
-            <a:schemeClr val="accent1"/>
-          </a:lnRef>
-          <a:fillRef idx="3">
-            <a:schemeClr val="accent1"/>
-          </a:fillRef>
-          <a:effectRef idx="2">
-            <a:schemeClr val="accent1"/>
-          </a:effectRef>
-          <a:fontRef idx="minor">
-            <a:schemeClr val="lt1"/>
-          </a:fontRef>
-        </p:style>
-        <p:txBody>
-          <a:bodyPr rtlCol="0" anchor="ctr"/>
-          <a:lstStyle/>
-          <a:p>
-            <a:pPr algn="ctr"/>
-          </a:p>
-        </p:txBody>
-      </p:sp>
-      <p:sp>
-        <p:nvSpPr>
-          <p:cNvPr id="19" name="Oval 18"/>
-          <p:cNvSpPr/>
-          <p:nvPr/>
-        </p:nvSpPr>
-        <p:spPr>
-          <a:xfrm>
-            <a:off x="960120" y="4645152"/>
-            <a:ext cx="219456" cy="219456"/>
-          </a:xfrm>
-          <a:prstGeom prst="ellipse">
-            <a:avLst/>
-          </a:prstGeom>
-          <a:solidFill>
-            <a:srgbClr val="F0A030"/>
-          </a:solidFill>
-          <a:ln>
-            <a:noFill/>
-          </a:ln>
-          <a:effectLst/>
-        </p:spPr>
-        <p:style>
-          <a:lnRef idx="1">
-            <a:schemeClr val="accent1"/>
-          </a:lnRef>
-          <a:fillRef idx="3">
-            <a:schemeClr val="accent1"/>
-          </a:fillRef>
-          <a:effectRef idx="2">
-            <a:schemeClr val="accent1"/>
-          </a:effectRef>
-          <a:fontRef idx="minor">
-            <a:schemeClr val="lt1"/>
-          </a:fontRef>
-        </p:style>
-        <p:txBody>
-          <a:bodyPr rtlCol="0" anchor="ctr"/>
-          <a:lstStyle/>
-          <a:p>
-            <a:pPr algn="ctr"/>
-          </a:p>
-        </p:txBody>
-      </p:sp>
-      <p:sp>
-        <p:nvSpPr>
-          <p:cNvPr id="20" name="TextBox 19"/>
-          <p:cNvSpPr txBox="1"/>
-          <p:nvPr/>
-        </p:nvSpPr>
-        <p:spPr>
-          <a:xfrm>
-            <a:off x="1417320" y="4462272"/>
-            <a:ext cx="3474720" cy="603504"/>
-          </a:xfrm>
-          <a:prstGeom prst="rect">
-            <a:avLst/>
-          </a:prstGeom>
-          <a:noFill/>
-        </p:spPr>
-        <p:txBody>
-          <a:bodyPr wrap="square" lIns="0" rIns="0" tIns="0" bIns="0" anchor="ctr">
-            <a:spAutoFit/>
-          </a:bodyPr>
-          <a:lstStyle/>
-          <a:p>
-            <a:pPr algn="l">
-              <a:lnSpc>
-                <a:spcPct val="115000"/>
-              </a:lnSpc>
-            </a:pPr>
-            <a:r>
-              <a:rPr sz="1500" b="1">
-                <a:solidFill>
-                  <a:srgbClr val="F0A030"/>
-                </a:solidFill>
-                <a:latin typeface="Microsoft JhengHei"/>
-              </a:rPr>
-              <a:t>音量才是關鍵</a:t>
-            </a:r>
-          </a:p>
-        </p:txBody>
-      </p:sp>
-      <p:sp>
-        <p:nvSpPr>
-          <p:cNvPr id="21" name="TextBox 20"/>
-          <p:cNvSpPr txBox="1"/>
-          <p:nvPr/>
-        </p:nvSpPr>
-        <p:spPr>
-          <a:xfrm>
-            <a:off x="4965192" y="4462272"/>
-            <a:ext cx="6309360" cy="603504"/>
-          </a:xfrm>
-          <a:prstGeom prst="rect">
-            <a:avLst/>
-          </a:prstGeom>
-          <a:noFill/>
-        </p:spPr>
-        <p:txBody>
-          <a:bodyPr wrap="square" lIns="0" rIns="0" tIns="0" bIns="0" anchor="ctr">
-            <a:spAutoFit/>
-          </a:bodyPr>
-          <a:lstStyle/>
-          <a:p>
-            <a:pPr algn="l">
-              <a:lnSpc>
-                <a:spcPct val="115000"/>
-              </a:lnSpc>
-            </a:pPr>
-            <a:r>
-              <a:rPr sz="1250" b="0">
-                <a:solidFill>
-                  <a:srgbClr val="444444"/>
-                </a:solidFill>
-                <a:latin typeface="Microsoft JhengHei"/>
-              </a:rPr>
-              <a:t>小聲時摩擦音（ㄕ/ㄘ）糊掉→亂猜；正常音量直接解決大半</a:t>
-            </a:r>
-          </a:p>
-        </p:txBody>
-      </p:sp>
-      <p:sp>
-        <p:nvSpPr>
-          <p:cNvPr id="22" name="Rounded Rectangle 21"/>
-          <p:cNvSpPr/>
-          <p:nvPr/>
-        </p:nvSpPr>
-        <p:spPr>
-          <a:xfrm>
-            <a:off x="667512" y="5257800"/>
-            <a:ext cx="10853928" cy="731520"/>
-          </a:xfrm>
-          <a:prstGeom prst="roundRect">
-            <a:avLst>
-              <a:gd name="adj" fmla="val 8000"/>
-            </a:avLst>
-          </a:prstGeom>
-          <a:solidFill>
-            <a:srgbClr val="F4F6F8"/>
-          </a:solidFill>
-          <a:ln>
-            <a:noFill/>
-          </a:ln>
-          <a:effectLst/>
-        </p:spPr>
-        <p:style>
-          <a:lnRef idx="1">
-            <a:schemeClr val="accent1"/>
-          </a:lnRef>
-          <a:fillRef idx="3">
-            <a:schemeClr val="accent1"/>
-          </a:fillRef>
-          <a:effectRef idx="2">
-            <a:schemeClr val="accent1"/>
-          </a:effectRef>
-          <a:fontRef idx="minor">
-            <a:schemeClr val="lt1"/>
-          </a:fontRef>
-        </p:style>
-        <p:txBody>
-          <a:bodyPr rtlCol="0" anchor="ctr"/>
-          <a:lstStyle/>
-          <a:p>
-            <a:pPr algn="ctr"/>
-          </a:p>
-        </p:txBody>
-      </p:sp>
-      <p:sp>
-        <p:nvSpPr>
-          <p:cNvPr id="23" name="Oval 22"/>
-          <p:cNvSpPr/>
-          <p:nvPr/>
-        </p:nvSpPr>
-        <p:spPr>
-          <a:xfrm>
-            <a:off x="960120" y="5513832"/>
-            <a:ext cx="219456" cy="219456"/>
-          </a:xfrm>
-          <a:prstGeom prst="ellipse">
-            <a:avLst/>
-          </a:prstGeom>
-          <a:solidFill>
-            <a:srgbClr val="222A45"/>
-          </a:solidFill>
-          <a:ln>
-            <a:noFill/>
-          </a:ln>
-          <a:effectLst/>
-        </p:spPr>
-        <p:style>
-          <a:lnRef idx="1">
-            <a:schemeClr val="accent1"/>
-          </a:lnRef>
-          <a:fillRef idx="3">
-            <a:schemeClr val="accent1"/>
-          </a:fillRef>
-          <a:effectRef idx="2">
-            <a:schemeClr val="accent1"/>
-          </a:effectRef>
-          <a:fontRef idx="minor">
-            <a:schemeClr val="lt1"/>
-          </a:fontRef>
-        </p:style>
-        <p:txBody>
-          <a:bodyPr rtlCol="0" anchor="ctr"/>
-          <a:lstStyle/>
-          <a:p>
-            <a:pPr algn="ctr"/>
-          </a:p>
-        </p:txBody>
-      </p:sp>
-      <p:sp>
-        <p:nvSpPr>
-          <p:cNvPr id="24" name="TextBox 23"/>
-          <p:cNvSpPr txBox="1"/>
-          <p:nvPr/>
-        </p:nvSpPr>
-        <p:spPr>
-          <a:xfrm>
-            <a:off x="1417320" y="5330952"/>
-            <a:ext cx="3474720" cy="603504"/>
-          </a:xfrm>
-          <a:prstGeom prst="rect">
-            <a:avLst/>
-          </a:prstGeom>
-          <a:noFill/>
-        </p:spPr>
-        <p:txBody>
-          <a:bodyPr wrap="square" lIns="0" rIns="0" tIns="0" bIns="0" anchor="ctr">
-            <a:spAutoFit/>
-          </a:bodyPr>
-          <a:lstStyle/>
-          <a:p>
-            <a:pPr algn="l">
-              <a:lnSpc>
-                <a:spcPct val="115000"/>
-              </a:lnSpc>
-            </a:pPr>
-            <a:r>
-              <a:rPr sz="1500" b="1">
-                <a:solidFill>
-                  <a:srgbClr val="222A45"/>
-                </a:solidFill>
-                <a:latin typeface="Microsoft JhengHei"/>
-              </a:rPr>
-              <a:t>失敗多為 ASR 極限</a:t>
-            </a:r>
-          </a:p>
-        </p:txBody>
-      </p:sp>
-      <p:sp>
-        <p:nvSpPr>
-          <p:cNvPr id="25" name="TextBox 24"/>
-          <p:cNvSpPr txBox="1"/>
-          <p:nvPr/>
-        </p:nvSpPr>
-        <p:spPr>
-          <a:xfrm>
-            <a:off x="4965192" y="5330952"/>
-            <a:ext cx="6309360" cy="603504"/>
-          </a:xfrm>
-          <a:prstGeom prst="rect">
-            <a:avLst/>
-          </a:prstGeom>
-          <a:noFill/>
-        </p:spPr>
-        <p:txBody>
-          <a:bodyPr wrap="square" lIns="0" rIns="0" tIns="0" bIns="0" anchor="ctr">
-            <a:spAutoFit/>
-          </a:bodyPr>
-          <a:lstStyle/>
-          <a:p>
-            <a:pPr algn="l">
-              <a:lnSpc>
-                <a:spcPct val="115000"/>
-              </a:lnSpc>
-            </a:pPr>
-            <a:r>
-              <a:rPr sz="1250" b="0">
-                <a:solidFill>
-                  <a:srgbClr val="444444"/>
-                </a:solidFill>
-                <a:latin typeface="Microsoft JhengHei"/>
-              </a:rPr>
-              <a:t>整詞聽錯，訪客看辨識文字重講即可，非系統 bug</a:t>
-            </a:r>
-          </a:p>
-        </p:txBody>
-      </p:sp>
-      <p:sp>
-        <p:nvSpPr>
-          <p:cNvPr id="26" name="TextBox 25"/>
-          <p:cNvSpPr txBox="1"/>
-          <p:nvPr/>
-        </p:nvSpPr>
-        <p:spPr>
-          <a:xfrm>
-            <a:off x="667512" y="6172200"/>
-            <a:ext cx="10789920" cy="457200"/>
-          </a:xfrm>
-          <a:prstGeom prst="rect">
-            <a:avLst/>
-          </a:prstGeom>
-          <a:noFill/>
-        </p:spPr>
-        <p:txBody>
-          <a:bodyPr wrap="square" lIns="0" rIns="0" tIns="0" bIns="0" anchor="t">
-            <a:spAutoFit/>
-          </a:bodyPr>
-          <a:lstStyle/>
-          <a:p>
-            <a:pPr algn="l">
-              <a:lnSpc>
-                <a:spcPct val="115000"/>
-              </a:lnSpc>
-            </a:pPr>
-            <a:r>
-              <a:rPr sz="1400" b="1">
-                <a:solidFill>
-                  <a:srgbClr val="008E76"/>
-                </a:solidFill>
-                <a:latin typeface="Microsoft JhengHei"/>
-              </a:rPr>
-              <a:t>結論：webcam + 270M + 正常音量＝展場夠用，不需升級模型或麥克風。</a:t>
-            </a:r>
-          </a:p>
-        </p:txBody>
-      </p:sp>
-      <p:sp>
-        <p:nvSpPr>
-          <p:cNvPr id="27" name="TextBox 26"/>
+                  <a:srgbClr val="BBBBBB"/>
+                </a:solidFill>
+                <a:latin typeface="Microsoft JhengHei"/>
+              </a:rPr>
+              <a:t>——語音不必另裝 sherpa-onnx；GLIBC 不合就在 RPi5 源碼編（4.5 分）；輸出簡體用 OpenCC 完美轉繁。</a:t>
+            </a:r>
+          </a:p>
+        </p:txBody>
+      </p:sp>
+      <p:sp>
+        <p:nvSpPr>
+          <p:cNvPr id="49" name="TextBox 48"/>
           <p:cNvSpPr txBox="1"/>
           <p:nvPr/>
         </p:nvSpPr>
@@ -17636,7 +18726,7 @@
                 </a:solidFill>
                 <a:latin typeface="Arial"/>
               </a:rPr>
-              <a:t>VOICE POC · 容錯設計</a:t>
+              <a:t>VOICE POC · 展場噪音實測</a:t>
             </a:r>
           </a:p>
         </p:txBody>
@@ -17675,7 +18765,7 @@
                 </a:solidFill>
                 <a:latin typeface="Microsoft JhengHei"/>
               </a:rPr>
-              <a:t>ASR 會聽錯，兩層容錯把它接住</a:t>
+              <a:t>念一次真人聲，自動測三種環境</a:t>
             </a:r>
           </a:p>
         </p:txBody>
@@ -17714,7 +18804,7 @@
                 </a:solidFill>
                 <a:latin typeface="Microsoft JhengHei"/>
               </a:rPr>
-              <a:t>270M 小模型辨識不完美（滑鼠→華數/華族）。兩層容錯——真人聲實測一句句磨出來——讓聽錯也答對。</a:t>
+              <a:t>方法突破：真人念一次乾淨版並存錄音，用同一份錄音自動混入賣場人潮噪音重測——對比最公平。</a:t>
             </a:r>
           </a:p>
         </p:txBody>
@@ -17728,521 +18818,7 @@
         <p:spPr>
           <a:xfrm>
             <a:off x="667512" y="1965960"/>
-            <a:ext cx="5257800" cy="3429000"/>
-          </a:xfrm>
-          <a:prstGeom prst="roundRect">
-            <a:avLst>
-              <a:gd name="adj" fmla="val 8000"/>
-            </a:avLst>
-          </a:prstGeom>
-          <a:solidFill>
-            <a:srgbClr val="E4F7F2"/>
-          </a:solidFill>
-          <a:ln>
-            <a:noFill/>
-          </a:ln>
-          <a:effectLst/>
-        </p:spPr>
-        <p:style>
-          <a:lnRef idx="1">
-            <a:schemeClr val="accent1"/>
-          </a:lnRef>
-          <a:fillRef idx="3">
-            <a:schemeClr val="accent1"/>
-          </a:fillRef>
-          <a:effectRef idx="2">
-            <a:schemeClr val="accent1"/>
-          </a:effectRef>
-          <a:fontRef idx="minor">
-            <a:schemeClr val="lt1"/>
-          </a:fontRef>
-        </p:style>
-        <p:txBody>
-          <a:bodyPr rtlCol="0" anchor="ctr"/>
-          <a:lstStyle/>
-          <a:p>
-            <a:pPr algn="ctr"/>
-          </a:p>
-        </p:txBody>
-      </p:sp>
-      <p:sp>
-        <p:nvSpPr>
-          <p:cNvPr id="6" name="TextBox 5"/>
-          <p:cNvSpPr txBox="1"/>
-          <p:nvPr/>
-        </p:nvSpPr>
-        <p:spPr>
-          <a:xfrm>
-            <a:off x="987552" y="2194560"/>
-            <a:ext cx="4617720" cy="365760"/>
-          </a:xfrm>
-          <a:prstGeom prst="rect">
-            <a:avLst/>
-          </a:prstGeom>
-          <a:noFill/>
-        </p:spPr>
-        <p:txBody>
-          <a:bodyPr wrap="square" lIns="0" rIns="0" tIns="0" bIns="0" anchor="t">
-            <a:spAutoFit/>
-          </a:bodyPr>
-          <a:lstStyle/>
-          <a:p>
-            <a:pPr algn="l">
-              <a:lnSpc>
-                <a:spcPct val="115000"/>
-              </a:lnSpc>
-            </a:pPr>
-            <a:r>
-              <a:rPr sz="1700" b="1">
-                <a:solidFill>
-                  <a:srgbClr val="008E76"/>
-                </a:solidFill>
-                <a:latin typeface="Microsoft JhengHei"/>
-              </a:rPr>
-              <a:t>① 發音容錯層</a:t>
-            </a:r>
-          </a:p>
-        </p:txBody>
-      </p:sp>
-      <p:sp>
-        <p:nvSpPr>
-          <p:cNvPr id="7" name="TextBox 6"/>
-          <p:cNvSpPr txBox="1"/>
-          <p:nvPr/>
-        </p:nvSpPr>
-        <p:spPr>
-          <a:xfrm>
-            <a:off x="987552" y="2606040"/>
-            <a:ext cx="4617720" cy="365760"/>
-          </a:xfrm>
-          <a:prstGeom prst="rect">
-            <a:avLst/>
-          </a:prstGeom>
-          <a:noFill/>
-        </p:spPr>
-        <p:txBody>
-          <a:bodyPr wrap="square" lIns="0" rIns="0" tIns="0" bIns="0" anchor="t">
-            <a:spAutoFit/>
-          </a:bodyPr>
-          <a:lstStyle/>
-          <a:p>
-            <a:pPr algn="l">
-              <a:lnSpc>
-                <a:spcPct val="115000"/>
-              </a:lnSpc>
-            </a:pPr>
-            <a:r>
-              <a:rPr sz="1300" b="1">
-                <a:solidFill>
-                  <a:srgbClr val="1A1A2E"/>
-                </a:solidFill>
-                <a:latin typeface="Microsoft JhengHei"/>
-              </a:rPr>
-              <a:t>字形救不到 → 轉拼音比對</a:t>
-            </a:r>
-          </a:p>
-        </p:txBody>
-      </p:sp>
-      <p:sp>
-        <p:nvSpPr>
-          <p:cNvPr id="8" name="TextBox 7"/>
-          <p:cNvSpPr txBox="1"/>
-          <p:nvPr/>
-        </p:nvSpPr>
-        <p:spPr>
-          <a:xfrm>
-            <a:off x="987552" y="3108960"/>
-            <a:ext cx="274320" cy="365760"/>
-          </a:xfrm>
-          <a:prstGeom prst="rect">
-            <a:avLst/>
-          </a:prstGeom>
-          <a:noFill/>
-        </p:spPr>
-        <p:txBody>
-          <a:bodyPr wrap="square" lIns="0" rIns="0" tIns="0" bIns="0" anchor="t">
-            <a:spAutoFit/>
-          </a:bodyPr>
-          <a:lstStyle/>
-          <a:p>
-            <a:pPr algn="l">
-              <a:lnSpc>
-                <a:spcPct val="115000"/>
-              </a:lnSpc>
-            </a:pPr>
-            <a:r>
-              <a:rPr sz="1500" b="1">
-                <a:solidFill>
-                  <a:srgbClr val="00C49A"/>
-                </a:solidFill>
-                <a:latin typeface="Microsoft JhengHei"/>
-              </a:rPr>
-              <a:t>·</a:t>
-            </a:r>
-          </a:p>
-        </p:txBody>
-      </p:sp>
-      <p:sp>
-        <p:nvSpPr>
-          <p:cNvPr id="9" name="TextBox 8"/>
-          <p:cNvSpPr txBox="1"/>
-          <p:nvPr/>
-        </p:nvSpPr>
-        <p:spPr>
-          <a:xfrm>
-            <a:off x="1234440" y="3108960"/>
-            <a:ext cx="4480560" cy="402336"/>
-          </a:xfrm>
-          <a:prstGeom prst="rect">
-            <a:avLst/>
-          </a:prstGeom>
-          <a:noFill/>
-        </p:spPr>
-        <p:txBody>
-          <a:bodyPr wrap="square" lIns="0" rIns="0" tIns="0" bIns="0" anchor="t">
-            <a:spAutoFit/>
-          </a:bodyPr>
-          <a:lstStyle/>
-          <a:p>
-            <a:pPr algn="l">
-              <a:lnSpc>
-                <a:spcPct val="115000"/>
-              </a:lnSpc>
-            </a:pPr>
-            <a:r>
-              <a:rPr sz="1250" b="0">
-                <a:solidFill>
-                  <a:srgbClr val="444444"/>
-                </a:solidFill>
-                <a:latin typeface="Microsoft JhengHei"/>
-              </a:rPr>
-              <a:t>同音字形遠：滑鼠→華數，字形比對 0 分</a:t>
-            </a:r>
-          </a:p>
-        </p:txBody>
-      </p:sp>
-      <p:sp>
-        <p:nvSpPr>
-          <p:cNvPr id="10" name="TextBox 9"/>
-          <p:cNvSpPr txBox="1"/>
-          <p:nvPr/>
-        </p:nvSpPr>
-        <p:spPr>
-          <a:xfrm>
-            <a:off x="987552" y="3529584"/>
-            <a:ext cx="274320" cy="365760"/>
-          </a:xfrm>
-          <a:prstGeom prst="rect">
-            <a:avLst/>
-          </a:prstGeom>
-          <a:noFill/>
-        </p:spPr>
-        <p:txBody>
-          <a:bodyPr wrap="square" lIns="0" rIns="0" tIns="0" bIns="0" anchor="t">
-            <a:spAutoFit/>
-          </a:bodyPr>
-          <a:lstStyle/>
-          <a:p>
-            <a:pPr algn="l">
-              <a:lnSpc>
-                <a:spcPct val="115000"/>
-              </a:lnSpc>
-            </a:pPr>
-            <a:r>
-              <a:rPr sz="1500" b="1">
-                <a:solidFill>
-                  <a:srgbClr val="00C49A"/>
-                </a:solidFill>
-                <a:latin typeface="Microsoft JhengHei"/>
-              </a:rPr>
-              <a:t>·</a:t>
-            </a:r>
-          </a:p>
-        </p:txBody>
-      </p:sp>
-      <p:sp>
-        <p:nvSpPr>
-          <p:cNvPr id="11" name="TextBox 10"/>
-          <p:cNvSpPr txBox="1"/>
-          <p:nvPr/>
-        </p:nvSpPr>
-        <p:spPr>
-          <a:xfrm>
-            <a:off x="1234440" y="3529584"/>
-            <a:ext cx="4480560" cy="402336"/>
-          </a:xfrm>
-          <a:prstGeom prst="rect">
-            <a:avLst/>
-          </a:prstGeom>
-          <a:noFill/>
-        </p:spPr>
-        <p:txBody>
-          <a:bodyPr wrap="square" lIns="0" rIns="0" tIns="0" bIns="0" anchor="t">
-            <a:spAutoFit/>
-          </a:bodyPr>
-          <a:lstStyle/>
-          <a:p>
-            <a:pPr algn="l">
-              <a:lnSpc>
-                <a:spcPct val="115000"/>
-              </a:lnSpc>
-            </a:pPr>
-            <a:r>
-              <a:rPr sz="1250" b="0">
-                <a:solidFill>
-                  <a:srgbClr val="444444"/>
-                </a:solidFill>
-                <a:latin typeface="Microsoft JhengHei"/>
-              </a:rPr>
-              <a:t>轉拼音比對即中（huashu ≈ huashu）</a:t>
-            </a:r>
-          </a:p>
-        </p:txBody>
-      </p:sp>
-      <p:sp>
-        <p:nvSpPr>
-          <p:cNvPr id="12" name="TextBox 11"/>
-          <p:cNvSpPr txBox="1"/>
-          <p:nvPr/>
-        </p:nvSpPr>
-        <p:spPr>
-          <a:xfrm>
-            <a:off x="987552" y="3950208"/>
-            <a:ext cx="274320" cy="365760"/>
-          </a:xfrm>
-          <a:prstGeom prst="rect">
-            <a:avLst/>
-          </a:prstGeom>
-          <a:noFill/>
-        </p:spPr>
-        <p:txBody>
-          <a:bodyPr wrap="square" lIns="0" rIns="0" tIns="0" bIns="0" anchor="t">
-            <a:spAutoFit/>
-          </a:bodyPr>
-          <a:lstStyle/>
-          <a:p>
-            <a:pPr algn="l">
-              <a:lnSpc>
-                <a:spcPct val="115000"/>
-              </a:lnSpc>
-            </a:pPr>
-            <a:r>
-              <a:rPr sz="1500" b="1">
-                <a:solidFill>
-                  <a:srgbClr val="00C49A"/>
-                </a:solidFill>
-                <a:latin typeface="Microsoft JhengHei"/>
-              </a:rPr>
-              <a:t>·</a:t>
-            </a:r>
-          </a:p>
-        </p:txBody>
-      </p:sp>
-      <p:sp>
-        <p:nvSpPr>
-          <p:cNvPr id="13" name="TextBox 12"/>
-          <p:cNvSpPr txBox="1"/>
-          <p:nvPr/>
-        </p:nvSpPr>
-        <p:spPr>
-          <a:xfrm>
-            <a:off x="1234440" y="3950208"/>
-            <a:ext cx="4480560" cy="402336"/>
-          </a:xfrm>
-          <a:prstGeom prst="rect">
-            <a:avLst/>
-          </a:prstGeom>
-          <a:noFill/>
-        </p:spPr>
-        <p:txBody>
-          <a:bodyPr wrap="square" lIns="0" rIns="0" tIns="0" bIns="0" anchor="t">
-            <a:spAutoFit/>
-          </a:bodyPr>
-          <a:lstStyle/>
-          <a:p>
-            <a:pPr algn="l">
-              <a:lnSpc>
-                <a:spcPct val="115000"/>
-              </a:lnSpc>
-            </a:pPr>
-            <a:r>
-              <a:rPr sz="1250" b="0">
-                <a:solidFill>
-                  <a:srgbClr val="444444"/>
-                </a:solidFill>
-                <a:latin typeface="Microsoft JhengHei"/>
-              </a:rPr>
-              <a:t>捲舌音節還原：ㄕ/ㄗ 混淆也接得住</a:t>
-            </a:r>
-          </a:p>
-        </p:txBody>
-      </p:sp>
-      <p:sp>
-        <p:nvSpPr>
-          <p:cNvPr id="14" name="TextBox 13"/>
-          <p:cNvSpPr txBox="1"/>
-          <p:nvPr/>
-        </p:nvSpPr>
-        <p:spPr>
-          <a:xfrm>
-            <a:off x="987552" y="4370832"/>
-            <a:ext cx="274320" cy="365760"/>
-          </a:xfrm>
-          <a:prstGeom prst="rect">
-            <a:avLst/>
-          </a:prstGeom>
-          <a:noFill/>
-        </p:spPr>
-        <p:txBody>
-          <a:bodyPr wrap="square" lIns="0" rIns="0" tIns="0" bIns="0" anchor="t">
-            <a:spAutoFit/>
-          </a:bodyPr>
-          <a:lstStyle/>
-          <a:p>
-            <a:pPr algn="l">
-              <a:lnSpc>
-                <a:spcPct val="115000"/>
-              </a:lnSpc>
-            </a:pPr>
-            <a:r>
-              <a:rPr sz="1500" b="1">
-                <a:solidFill>
-                  <a:srgbClr val="00C49A"/>
-                </a:solidFill>
-                <a:latin typeface="Microsoft JhengHei"/>
-              </a:rPr>
-              <a:t>·</a:t>
-            </a:r>
-          </a:p>
-        </p:txBody>
-      </p:sp>
-      <p:sp>
-        <p:nvSpPr>
-          <p:cNvPr id="15" name="TextBox 14"/>
-          <p:cNvSpPr txBox="1"/>
-          <p:nvPr/>
-        </p:nvSpPr>
-        <p:spPr>
-          <a:xfrm>
-            <a:off x="1234440" y="4370832"/>
-            <a:ext cx="4480560" cy="402336"/>
-          </a:xfrm>
-          <a:prstGeom prst="rect">
-            <a:avLst/>
-          </a:prstGeom>
-          <a:noFill/>
-        </p:spPr>
-        <p:txBody>
-          <a:bodyPr wrap="square" lIns="0" rIns="0" tIns="0" bIns="0" anchor="t">
-            <a:spAutoFit/>
-          </a:bodyPr>
-          <a:lstStyle/>
-          <a:p>
-            <a:pPr algn="l">
-              <a:lnSpc>
-                <a:spcPct val="115000"/>
-              </a:lnSpc>
-            </a:pPr>
-            <a:r>
-              <a:rPr sz="1250" b="0">
-                <a:solidFill>
-                  <a:srgbClr val="444444"/>
-                </a:solidFill>
-                <a:latin typeface="Microsoft JhengHei"/>
-              </a:rPr>
-              <a:t>門檻 0.82 防誤配（衛生棉≠衛生紙）</a:t>
-            </a:r>
-          </a:p>
-        </p:txBody>
-      </p:sp>
-      <p:sp>
-        <p:nvSpPr>
-          <p:cNvPr id="16" name="TextBox 15"/>
-          <p:cNvSpPr txBox="1"/>
-          <p:nvPr/>
-        </p:nvSpPr>
-        <p:spPr>
-          <a:xfrm>
-            <a:off x="987552" y="4791456"/>
-            <a:ext cx="274320" cy="365760"/>
-          </a:xfrm>
-          <a:prstGeom prst="rect">
-            <a:avLst/>
-          </a:prstGeom>
-          <a:noFill/>
-        </p:spPr>
-        <p:txBody>
-          <a:bodyPr wrap="square" lIns="0" rIns="0" tIns="0" bIns="0" anchor="t">
-            <a:spAutoFit/>
-          </a:bodyPr>
-          <a:lstStyle/>
-          <a:p>
-            <a:pPr algn="l">
-              <a:lnSpc>
-                <a:spcPct val="115000"/>
-              </a:lnSpc>
-            </a:pPr>
-            <a:r>
-              <a:rPr sz="1500" b="1">
-                <a:solidFill>
-                  <a:srgbClr val="00C49A"/>
-                </a:solidFill>
-                <a:latin typeface="Microsoft JhengHei"/>
-              </a:rPr>
-              <a:t>·</a:t>
-            </a:r>
-          </a:p>
-        </p:txBody>
-      </p:sp>
-      <p:sp>
-        <p:nvSpPr>
-          <p:cNvPr id="17" name="TextBox 16"/>
-          <p:cNvSpPr txBox="1"/>
-          <p:nvPr/>
-        </p:nvSpPr>
-        <p:spPr>
-          <a:xfrm>
-            <a:off x="1234440" y="4791456"/>
-            <a:ext cx="4480560" cy="402336"/>
-          </a:xfrm>
-          <a:prstGeom prst="rect">
-            <a:avLst/>
-          </a:prstGeom>
-          <a:noFill/>
-        </p:spPr>
-        <p:txBody>
-          <a:bodyPr wrap="square" lIns="0" rIns="0" tIns="0" bIns="0" anchor="t">
-            <a:spAutoFit/>
-          </a:bodyPr>
-          <a:lstStyle/>
-          <a:p>
-            <a:pPr algn="l">
-              <a:lnSpc>
-                <a:spcPct val="115000"/>
-              </a:lnSpc>
-            </a:pPr>
-            <a:r>
-              <a:rPr sz="1250" b="0">
-                <a:solidFill>
-                  <a:srgbClr val="444444"/>
-                </a:solidFill>
-                <a:latin typeface="Microsoft JhengHei"/>
-              </a:rPr>
-              <a:t>字形優先、發音救底 → 守衛零回歸</a:t>
-            </a:r>
-          </a:p>
-        </p:txBody>
-      </p:sp>
-      <p:sp>
-        <p:nvSpPr>
-          <p:cNvPr id="18" name="Rounded Rectangle 17"/>
-          <p:cNvSpPr/>
-          <p:nvPr/>
-        </p:nvSpPr>
-        <p:spPr>
-          <a:xfrm>
-            <a:off x="6446520" y="1965960"/>
-            <a:ext cx="5074920" cy="3429000"/>
+            <a:ext cx="3483864" cy="1188720"/>
           </a:xfrm>
           <a:prstGeom prst="roundRect">
             <a:avLst>
@@ -18281,14 +18857,14 @@
       </p:sp>
       <p:sp>
         <p:nvSpPr>
-          <p:cNvPr id="19" name="TextBox 18"/>
-          <p:cNvSpPr txBox="1"/>
-          <p:nvPr/>
-        </p:nvSpPr>
-        <p:spPr>
-          <a:xfrm>
-            <a:off x="6766560" y="2194560"/>
-            <a:ext cx="4434840" cy="365760"/>
+          <p:cNvPr id="6" name="TextBox 5"/>
+          <p:cNvSpPr txBox="1"/>
+          <p:nvPr/>
+        </p:nvSpPr>
+        <p:spPr>
+          <a:xfrm>
+            <a:off x="832104" y="2112264"/>
+            <a:ext cx="3154680" cy="548640"/>
           </a:xfrm>
           <a:prstGeom prst="rect">
             <a:avLst/>
@@ -18307,27 +18883,818 @@
               </a:lnSpc>
             </a:pPr>
             <a:r>
-              <a:rPr sz="1700" b="1">
+              <a:rPr sz="4000" b="1">
+                <a:solidFill>
+                  <a:srgbClr val="00C49A"/>
+                </a:solidFill>
+                <a:latin typeface="Arial"/>
+              </a:rPr>
+              <a:t>78%</a:t>
+            </a:r>
+          </a:p>
+        </p:txBody>
+      </p:sp>
+      <p:sp>
+        <p:nvSpPr>
+          <p:cNvPr id="7" name="TextBox 6"/>
+          <p:cNvSpPr txBox="1"/>
+          <p:nvPr/>
+        </p:nvSpPr>
+        <p:spPr>
+          <a:xfrm>
+            <a:off x="832104" y="2770632"/>
+            <a:ext cx="3154680" cy="310896"/>
+          </a:xfrm>
+          <a:prstGeom prst="rect">
+            <a:avLst/>
+          </a:prstGeom>
+          <a:noFill/>
+        </p:spPr>
+        <p:txBody>
+          <a:bodyPr wrap="square" lIns="0" rIns="0" tIns="0" bIns="0" anchor="t">
+            <a:spAutoFit/>
+          </a:bodyPr>
+          <a:lstStyle/>
+          <a:p>
+            <a:pPr algn="l">
+              <a:lnSpc>
+                <a:spcPct val="115000"/>
+              </a:lnSpc>
+            </a:pPr>
+            <a:r>
+              <a:rPr sz="1250" b="0">
+                <a:solidFill>
+                  <a:srgbClr val="555555"/>
+                </a:solidFill>
+                <a:latin typeface="Microsoft JhengHei"/>
+              </a:rPr>
+              <a:t>乾淨（正常音量）</a:t>
+            </a:r>
+          </a:p>
+        </p:txBody>
+      </p:sp>
+      <p:sp>
+        <p:nvSpPr>
+          <p:cNvPr id="8" name="Rounded Rectangle 7"/>
+          <p:cNvSpPr/>
+          <p:nvPr/>
+        </p:nvSpPr>
+        <p:spPr>
+          <a:xfrm>
+            <a:off x="4352544" y="1965960"/>
+            <a:ext cx="3483864" cy="1188720"/>
+          </a:xfrm>
+          <a:prstGeom prst="roundRect">
+            <a:avLst>
+              <a:gd name="adj" fmla="val 8000"/>
+            </a:avLst>
+          </a:prstGeom>
+          <a:solidFill>
+            <a:srgbClr val="F4F6F8"/>
+          </a:solidFill>
+          <a:ln>
+            <a:noFill/>
+          </a:ln>
+          <a:effectLst/>
+        </p:spPr>
+        <p:style>
+          <a:lnRef idx="1">
+            <a:schemeClr val="accent1"/>
+          </a:lnRef>
+          <a:fillRef idx="3">
+            <a:schemeClr val="accent1"/>
+          </a:fillRef>
+          <a:effectRef idx="2">
+            <a:schemeClr val="accent1"/>
+          </a:effectRef>
+          <a:fontRef idx="minor">
+            <a:schemeClr val="lt1"/>
+          </a:fontRef>
+        </p:style>
+        <p:txBody>
+          <a:bodyPr rtlCol="0" anchor="ctr"/>
+          <a:lstStyle/>
+          <a:p>
+            <a:pPr algn="ctr"/>
+          </a:p>
+        </p:txBody>
+      </p:sp>
+      <p:sp>
+        <p:nvSpPr>
+          <p:cNvPr id="9" name="TextBox 8"/>
+          <p:cNvSpPr txBox="1"/>
+          <p:nvPr/>
+        </p:nvSpPr>
+        <p:spPr>
+          <a:xfrm>
+            <a:off x="4517136" y="2112264"/>
+            <a:ext cx="3154680" cy="548640"/>
+          </a:xfrm>
+          <a:prstGeom prst="rect">
+            <a:avLst/>
+          </a:prstGeom>
+          <a:noFill/>
+        </p:spPr>
+        <p:txBody>
+          <a:bodyPr wrap="square" lIns="0" rIns="0" tIns="0" bIns="0" anchor="t">
+            <a:spAutoFit/>
+          </a:bodyPr>
+          <a:lstStyle/>
+          <a:p>
+            <a:pPr algn="l">
+              <a:lnSpc>
+                <a:spcPct val="115000"/>
+              </a:lnSpc>
+            </a:pPr>
+            <a:r>
+              <a:rPr sz="4000" b="1">
+                <a:solidFill>
+                  <a:srgbClr val="00C49A"/>
+                </a:solidFill>
+                <a:latin typeface="Arial"/>
+              </a:rPr>
+              <a:t>77%</a:t>
+            </a:r>
+          </a:p>
+        </p:txBody>
+      </p:sp>
+      <p:sp>
+        <p:nvSpPr>
+          <p:cNvPr id="10" name="TextBox 9"/>
+          <p:cNvSpPr txBox="1"/>
+          <p:nvPr/>
+        </p:nvSpPr>
+        <p:spPr>
+          <a:xfrm>
+            <a:off x="4517136" y="2770632"/>
+            <a:ext cx="3154680" cy="310896"/>
+          </a:xfrm>
+          <a:prstGeom prst="rect">
+            <a:avLst/>
+          </a:prstGeom>
+          <a:noFill/>
+        </p:spPr>
+        <p:txBody>
+          <a:bodyPr wrap="square" lIns="0" rIns="0" tIns="0" bIns="0" anchor="t">
+            <a:spAutoFit/>
+          </a:bodyPr>
+          <a:lstStyle/>
+          <a:p>
+            <a:pPr algn="l">
+              <a:lnSpc>
+                <a:spcPct val="115000"/>
+              </a:lnSpc>
+            </a:pPr>
+            <a:r>
+              <a:rPr sz="1250" b="0">
+                <a:solidFill>
+                  <a:srgbClr val="555555"/>
+                </a:solidFill>
+                <a:latin typeface="Microsoft JhengHei"/>
+              </a:rPr>
+              <a:t>一般展場 −18dB</a:t>
+            </a:r>
+          </a:p>
+        </p:txBody>
+      </p:sp>
+      <p:sp>
+        <p:nvSpPr>
+          <p:cNvPr id="11" name="Rounded Rectangle 10"/>
+          <p:cNvSpPr/>
+          <p:nvPr/>
+        </p:nvSpPr>
+        <p:spPr>
+          <a:xfrm>
+            <a:off x="8037576" y="1965960"/>
+            <a:ext cx="3483864" cy="1188720"/>
+          </a:xfrm>
+          <a:prstGeom prst="roundRect">
+            <a:avLst>
+              <a:gd name="adj" fmla="val 8000"/>
+            </a:avLst>
+          </a:prstGeom>
+          <a:solidFill>
+            <a:srgbClr val="F4F6F8"/>
+          </a:solidFill>
+          <a:ln>
+            <a:noFill/>
+          </a:ln>
+          <a:effectLst/>
+        </p:spPr>
+        <p:style>
+          <a:lnRef idx="1">
+            <a:schemeClr val="accent1"/>
+          </a:lnRef>
+          <a:fillRef idx="3">
+            <a:schemeClr val="accent1"/>
+          </a:fillRef>
+          <a:effectRef idx="2">
+            <a:schemeClr val="accent1"/>
+          </a:effectRef>
+          <a:fontRef idx="minor">
+            <a:schemeClr val="lt1"/>
+          </a:fontRef>
+        </p:style>
+        <p:txBody>
+          <a:bodyPr rtlCol="0" anchor="ctr"/>
+          <a:lstStyle/>
+          <a:p>
+            <a:pPr algn="ctr"/>
+          </a:p>
+        </p:txBody>
+      </p:sp>
+      <p:sp>
+        <p:nvSpPr>
+          <p:cNvPr id="12" name="TextBox 11"/>
+          <p:cNvSpPr txBox="1"/>
+          <p:nvPr/>
+        </p:nvSpPr>
+        <p:spPr>
+          <a:xfrm>
+            <a:off x="8202168" y="2112264"/>
+            <a:ext cx="3154680" cy="548640"/>
+          </a:xfrm>
+          <a:prstGeom prst="rect">
+            <a:avLst/>
+          </a:prstGeom>
+          <a:noFill/>
+        </p:spPr>
+        <p:txBody>
+          <a:bodyPr wrap="square" lIns="0" rIns="0" tIns="0" bIns="0" anchor="t">
+            <a:spAutoFit/>
+          </a:bodyPr>
+          <a:lstStyle/>
+          <a:p>
+            <a:pPr algn="l">
+              <a:lnSpc>
+                <a:spcPct val="115000"/>
+              </a:lnSpc>
+            </a:pPr>
+            <a:r>
+              <a:rPr sz="4000" b="1">
+                <a:solidFill>
+                  <a:srgbClr val="00C49A"/>
+                </a:solidFill>
+                <a:latin typeface="Arial"/>
+              </a:rPr>
+              <a:t>73%</a:t>
+            </a:r>
+          </a:p>
+        </p:txBody>
+      </p:sp>
+      <p:sp>
+        <p:nvSpPr>
+          <p:cNvPr id="13" name="TextBox 12"/>
+          <p:cNvSpPr txBox="1"/>
+          <p:nvPr/>
+        </p:nvSpPr>
+        <p:spPr>
+          <a:xfrm>
+            <a:off x="8202168" y="2770632"/>
+            <a:ext cx="3154680" cy="310896"/>
+          </a:xfrm>
+          <a:prstGeom prst="rect">
+            <a:avLst/>
+          </a:prstGeom>
+          <a:noFill/>
+        </p:spPr>
+        <p:txBody>
+          <a:bodyPr wrap="square" lIns="0" rIns="0" tIns="0" bIns="0" anchor="t">
+            <a:spAutoFit/>
+          </a:bodyPr>
+          <a:lstStyle/>
+          <a:p>
+            <a:pPr algn="l">
+              <a:lnSpc>
+                <a:spcPct val="115000"/>
+              </a:lnSpc>
+            </a:pPr>
+            <a:r>
+              <a:rPr sz="1250" b="0">
+                <a:solidFill>
+                  <a:srgbClr val="555555"/>
+                </a:solidFill>
+                <a:latin typeface="Microsoft JhengHei"/>
+              </a:rPr>
+              <a:t>尖峰吵雜 −8dB</a:t>
+            </a:r>
+          </a:p>
+        </p:txBody>
+      </p:sp>
+      <p:sp>
+        <p:nvSpPr>
+          <p:cNvPr id="14" name="Rounded Rectangle 13"/>
+          <p:cNvSpPr/>
+          <p:nvPr/>
+        </p:nvSpPr>
+        <p:spPr>
+          <a:xfrm>
+            <a:off x="667512" y="3520440"/>
+            <a:ext cx="10853928" cy="731520"/>
+          </a:xfrm>
+          <a:prstGeom prst="roundRect">
+            <a:avLst>
+              <a:gd name="adj" fmla="val 8000"/>
+            </a:avLst>
+          </a:prstGeom>
+          <a:solidFill>
+            <a:srgbClr val="F4F6F8"/>
+          </a:solidFill>
+          <a:ln>
+            <a:noFill/>
+          </a:ln>
+          <a:effectLst/>
+        </p:spPr>
+        <p:style>
+          <a:lnRef idx="1">
+            <a:schemeClr val="accent1"/>
+          </a:lnRef>
+          <a:fillRef idx="3">
+            <a:schemeClr val="accent1"/>
+          </a:fillRef>
+          <a:effectRef idx="2">
+            <a:schemeClr val="accent1"/>
+          </a:effectRef>
+          <a:fontRef idx="minor">
+            <a:schemeClr val="lt1"/>
+          </a:fontRef>
+        </p:style>
+        <p:txBody>
+          <a:bodyPr rtlCol="0" anchor="ctr"/>
+          <a:lstStyle/>
+          <a:p>
+            <a:pPr algn="ctr"/>
+          </a:p>
+        </p:txBody>
+      </p:sp>
+      <p:sp>
+        <p:nvSpPr>
+          <p:cNvPr id="15" name="Oval 14"/>
+          <p:cNvSpPr/>
+          <p:nvPr/>
+        </p:nvSpPr>
+        <p:spPr>
+          <a:xfrm>
+            <a:off x="960120" y="3776472"/>
+            <a:ext cx="219456" cy="219456"/>
+          </a:xfrm>
+          <a:prstGeom prst="ellipse">
+            <a:avLst/>
+          </a:prstGeom>
+          <a:solidFill>
+            <a:srgbClr val="00C49A"/>
+          </a:solidFill>
+          <a:ln>
+            <a:noFill/>
+          </a:ln>
+          <a:effectLst/>
+        </p:spPr>
+        <p:style>
+          <a:lnRef idx="1">
+            <a:schemeClr val="accent1"/>
+          </a:lnRef>
+          <a:fillRef idx="3">
+            <a:schemeClr val="accent1"/>
+          </a:fillRef>
+          <a:effectRef idx="2">
+            <a:schemeClr val="accent1"/>
+          </a:effectRef>
+          <a:fontRef idx="minor">
+            <a:schemeClr val="lt1"/>
+          </a:fontRef>
+        </p:style>
+        <p:txBody>
+          <a:bodyPr rtlCol="0" anchor="ctr"/>
+          <a:lstStyle/>
+          <a:p>
+            <a:pPr algn="ctr"/>
+          </a:p>
+        </p:txBody>
+      </p:sp>
+      <p:sp>
+        <p:nvSpPr>
+          <p:cNvPr id="16" name="TextBox 15"/>
+          <p:cNvSpPr txBox="1"/>
+          <p:nvPr/>
+        </p:nvSpPr>
+        <p:spPr>
+          <a:xfrm>
+            <a:off x="1417320" y="3593592"/>
+            <a:ext cx="3474720" cy="603504"/>
+          </a:xfrm>
+          <a:prstGeom prst="rect">
+            <a:avLst/>
+          </a:prstGeom>
+          <a:noFill/>
+        </p:spPr>
+        <p:txBody>
+          <a:bodyPr wrap="square" lIns="0" rIns="0" tIns="0" bIns="0" anchor="ctr">
+            <a:spAutoFit/>
+          </a:bodyPr>
+          <a:lstStyle/>
+          <a:p>
+            <a:pPr algn="l">
+              <a:lnSpc>
+                <a:spcPct val="115000"/>
+              </a:lnSpc>
+            </a:pPr>
+            <a:r>
+              <a:rPr sz="1500" b="1">
+                <a:solidFill>
+                  <a:srgbClr val="00C49A"/>
+                </a:solidFill>
+                <a:latin typeface="Microsoft JhengHei"/>
+              </a:rPr>
+              <a:t>噪音幾乎零影響</a:t>
+            </a:r>
+          </a:p>
+        </p:txBody>
+      </p:sp>
+      <p:sp>
+        <p:nvSpPr>
+          <p:cNvPr id="17" name="TextBox 16"/>
+          <p:cNvSpPr txBox="1"/>
+          <p:nvPr/>
+        </p:nvSpPr>
+        <p:spPr>
+          <a:xfrm>
+            <a:off x="4965192" y="3593592"/>
+            <a:ext cx="6309360" cy="603504"/>
+          </a:xfrm>
+          <a:prstGeom prst="rect">
+            <a:avLst/>
+          </a:prstGeom>
+          <a:noFill/>
+        </p:spPr>
+        <p:txBody>
+          <a:bodyPr wrap="square" lIns="0" rIns="0" tIns="0" bIns="0" anchor="ctr">
+            <a:spAutoFit/>
+          </a:bodyPr>
+          <a:lstStyle/>
+          <a:p>
+            <a:pPr algn="l">
+              <a:lnSpc>
+                <a:spcPct val="115000"/>
+              </a:lnSpc>
+            </a:pPr>
+            <a:r>
+              <a:rPr sz="1250" b="0">
+                <a:solidFill>
+                  <a:srgbClr val="444444"/>
+                </a:solidFill>
+                <a:latin typeface="Microsoft JhengHei"/>
+              </a:rPr>
+              <a:t>一般展場 −1%、尖峰只 −5%；純被噪音壓垮的僅 5 句</a:t>
+            </a:r>
+          </a:p>
+        </p:txBody>
+      </p:sp>
+      <p:sp>
+        <p:nvSpPr>
+          <p:cNvPr id="18" name="Rounded Rectangle 17"/>
+          <p:cNvSpPr/>
+          <p:nvPr/>
+        </p:nvSpPr>
+        <p:spPr>
+          <a:xfrm>
+            <a:off x="667512" y="4389120"/>
+            <a:ext cx="10853928" cy="731520"/>
+          </a:xfrm>
+          <a:prstGeom prst="roundRect">
+            <a:avLst>
+              <a:gd name="adj" fmla="val 8000"/>
+            </a:avLst>
+          </a:prstGeom>
+          <a:solidFill>
+            <a:srgbClr val="F4F6F8"/>
+          </a:solidFill>
+          <a:ln>
+            <a:noFill/>
+          </a:ln>
+          <a:effectLst/>
+        </p:spPr>
+        <p:style>
+          <a:lnRef idx="1">
+            <a:schemeClr val="accent1"/>
+          </a:lnRef>
+          <a:fillRef idx="3">
+            <a:schemeClr val="accent1"/>
+          </a:fillRef>
+          <a:effectRef idx="2">
+            <a:schemeClr val="accent1"/>
+          </a:effectRef>
+          <a:fontRef idx="minor">
+            <a:schemeClr val="lt1"/>
+          </a:fontRef>
+        </p:style>
+        <p:txBody>
+          <a:bodyPr rtlCol="0" anchor="ctr"/>
+          <a:lstStyle/>
+          <a:p>
+            <a:pPr algn="ctr"/>
+          </a:p>
+        </p:txBody>
+      </p:sp>
+      <p:sp>
+        <p:nvSpPr>
+          <p:cNvPr id="19" name="Oval 18"/>
+          <p:cNvSpPr/>
+          <p:nvPr/>
+        </p:nvSpPr>
+        <p:spPr>
+          <a:xfrm>
+            <a:off x="960120" y="4645152"/>
+            <a:ext cx="219456" cy="219456"/>
+          </a:xfrm>
+          <a:prstGeom prst="ellipse">
+            <a:avLst/>
+          </a:prstGeom>
+          <a:solidFill>
+            <a:srgbClr val="F0A030"/>
+          </a:solidFill>
+          <a:ln>
+            <a:noFill/>
+          </a:ln>
+          <a:effectLst/>
+        </p:spPr>
+        <p:style>
+          <a:lnRef idx="1">
+            <a:schemeClr val="accent1"/>
+          </a:lnRef>
+          <a:fillRef idx="3">
+            <a:schemeClr val="accent1"/>
+          </a:fillRef>
+          <a:effectRef idx="2">
+            <a:schemeClr val="accent1"/>
+          </a:effectRef>
+          <a:fontRef idx="minor">
+            <a:schemeClr val="lt1"/>
+          </a:fontRef>
+        </p:style>
+        <p:txBody>
+          <a:bodyPr rtlCol="0" anchor="ctr"/>
+          <a:lstStyle/>
+          <a:p>
+            <a:pPr algn="ctr"/>
+          </a:p>
+        </p:txBody>
+      </p:sp>
+      <p:sp>
+        <p:nvSpPr>
+          <p:cNvPr id="20" name="TextBox 19"/>
+          <p:cNvSpPr txBox="1"/>
+          <p:nvPr/>
+        </p:nvSpPr>
+        <p:spPr>
+          <a:xfrm>
+            <a:off x="1417320" y="4462272"/>
+            <a:ext cx="3474720" cy="603504"/>
+          </a:xfrm>
+          <a:prstGeom prst="rect">
+            <a:avLst/>
+          </a:prstGeom>
+          <a:noFill/>
+        </p:spPr>
+        <p:txBody>
+          <a:bodyPr wrap="square" lIns="0" rIns="0" tIns="0" bIns="0" anchor="ctr">
+            <a:spAutoFit/>
+          </a:bodyPr>
+          <a:lstStyle/>
+          <a:p>
+            <a:pPr algn="l">
+              <a:lnSpc>
+                <a:spcPct val="115000"/>
+              </a:lnSpc>
+            </a:pPr>
+            <a:r>
+              <a:rPr sz="1500" b="1">
                 <a:solidFill>
                   <a:srgbClr val="F0A030"/>
                 </a:solidFill>
                 <a:latin typeface="Microsoft JhengHei"/>
               </a:rPr>
-              <a:t>② 語音同音修正</a:t>
-            </a:r>
-          </a:p>
-        </p:txBody>
-      </p:sp>
-      <p:sp>
-        <p:nvSpPr>
-          <p:cNvPr id="20" name="TextBox 19"/>
-          <p:cNvSpPr txBox="1"/>
-          <p:nvPr/>
-        </p:nvSpPr>
-        <p:spPr>
-          <a:xfrm>
-            <a:off x="6766560" y="2606040"/>
-            <a:ext cx="4434840" cy="365760"/>
+              <a:t>音量才是關鍵</a:t>
+            </a:r>
+          </a:p>
+        </p:txBody>
+      </p:sp>
+      <p:sp>
+        <p:nvSpPr>
+          <p:cNvPr id="21" name="TextBox 20"/>
+          <p:cNvSpPr txBox="1"/>
+          <p:nvPr/>
+        </p:nvSpPr>
+        <p:spPr>
+          <a:xfrm>
+            <a:off x="4965192" y="4462272"/>
+            <a:ext cx="6309360" cy="603504"/>
+          </a:xfrm>
+          <a:prstGeom prst="rect">
+            <a:avLst/>
+          </a:prstGeom>
+          <a:noFill/>
+        </p:spPr>
+        <p:txBody>
+          <a:bodyPr wrap="square" lIns="0" rIns="0" tIns="0" bIns="0" anchor="ctr">
+            <a:spAutoFit/>
+          </a:bodyPr>
+          <a:lstStyle/>
+          <a:p>
+            <a:pPr algn="l">
+              <a:lnSpc>
+                <a:spcPct val="115000"/>
+              </a:lnSpc>
+            </a:pPr>
+            <a:r>
+              <a:rPr sz="1250" b="0">
+                <a:solidFill>
+                  <a:srgbClr val="444444"/>
+                </a:solidFill>
+                <a:latin typeface="Microsoft JhengHei"/>
+              </a:rPr>
+              <a:t>小聲時摩擦音（ㄕ/ㄘ）糊掉→亂猜；正常音量直接解決大半</a:t>
+            </a:r>
+          </a:p>
+        </p:txBody>
+      </p:sp>
+      <p:sp>
+        <p:nvSpPr>
+          <p:cNvPr id="22" name="Rounded Rectangle 21"/>
+          <p:cNvSpPr/>
+          <p:nvPr/>
+        </p:nvSpPr>
+        <p:spPr>
+          <a:xfrm>
+            <a:off x="667512" y="5257800"/>
+            <a:ext cx="10853928" cy="731520"/>
+          </a:xfrm>
+          <a:prstGeom prst="roundRect">
+            <a:avLst>
+              <a:gd name="adj" fmla="val 8000"/>
+            </a:avLst>
+          </a:prstGeom>
+          <a:solidFill>
+            <a:srgbClr val="F4F6F8"/>
+          </a:solidFill>
+          <a:ln>
+            <a:noFill/>
+          </a:ln>
+          <a:effectLst/>
+        </p:spPr>
+        <p:style>
+          <a:lnRef idx="1">
+            <a:schemeClr val="accent1"/>
+          </a:lnRef>
+          <a:fillRef idx="3">
+            <a:schemeClr val="accent1"/>
+          </a:fillRef>
+          <a:effectRef idx="2">
+            <a:schemeClr val="accent1"/>
+          </a:effectRef>
+          <a:fontRef idx="minor">
+            <a:schemeClr val="lt1"/>
+          </a:fontRef>
+        </p:style>
+        <p:txBody>
+          <a:bodyPr rtlCol="0" anchor="ctr"/>
+          <a:lstStyle/>
+          <a:p>
+            <a:pPr algn="ctr"/>
+          </a:p>
+        </p:txBody>
+      </p:sp>
+      <p:sp>
+        <p:nvSpPr>
+          <p:cNvPr id="23" name="Oval 22"/>
+          <p:cNvSpPr/>
+          <p:nvPr/>
+        </p:nvSpPr>
+        <p:spPr>
+          <a:xfrm>
+            <a:off x="960120" y="5513832"/>
+            <a:ext cx="219456" cy="219456"/>
+          </a:xfrm>
+          <a:prstGeom prst="ellipse">
+            <a:avLst/>
+          </a:prstGeom>
+          <a:solidFill>
+            <a:srgbClr val="222A45"/>
+          </a:solidFill>
+          <a:ln>
+            <a:noFill/>
+          </a:ln>
+          <a:effectLst/>
+        </p:spPr>
+        <p:style>
+          <a:lnRef idx="1">
+            <a:schemeClr val="accent1"/>
+          </a:lnRef>
+          <a:fillRef idx="3">
+            <a:schemeClr val="accent1"/>
+          </a:fillRef>
+          <a:effectRef idx="2">
+            <a:schemeClr val="accent1"/>
+          </a:effectRef>
+          <a:fontRef idx="minor">
+            <a:schemeClr val="lt1"/>
+          </a:fontRef>
+        </p:style>
+        <p:txBody>
+          <a:bodyPr rtlCol="0" anchor="ctr"/>
+          <a:lstStyle/>
+          <a:p>
+            <a:pPr algn="ctr"/>
+          </a:p>
+        </p:txBody>
+      </p:sp>
+      <p:sp>
+        <p:nvSpPr>
+          <p:cNvPr id="24" name="TextBox 23"/>
+          <p:cNvSpPr txBox="1"/>
+          <p:nvPr/>
+        </p:nvSpPr>
+        <p:spPr>
+          <a:xfrm>
+            <a:off x="1417320" y="5330952"/>
+            <a:ext cx="3474720" cy="603504"/>
+          </a:xfrm>
+          <a:prstGeom prst="rect">
+            <a:avLst/>
+          </a:prstGeom>
+          <a:noFill/>
+        </p:spPr>
+        <p:txBody>
+          <a:bodyPr wrap="square" lIns="0" rIns="0" tIns="0" bIns="0" anchor="ctr">
+            <a:spAutoFit/>
+          </a:bodyPr>
+          <a:lstStyle/>
+          <a:p>
+            <a:pPr algn="l">
+              <a:lnSpc>
+                <a:spcPct val="115000"/>
+              </a:lnSpc>
+            </a:pPr>
+            <a:r>
+              <a:rPr sz="1500" b="1">
+                <a:solidFill>
+                  <a:srgbClr val="222A45"/>
+                </a:solidFill>
+                <a:latin typeface="Microsoft JhengHei"/>
+              </a:rPr>
+              <a:t>失敗多為 ASR 極限</a:t>
+            </a:r>
+          </a:p>
+        </p:txBody>
+      </p:sp>
+      <p:sp>
+        <p:nvSpPr>
+          <p:cNvPr id="25" name="TextBox 24"/>
+          <p:cNvSpPr txBox="1"/>
+          <p:nvPr/>
+        </p:nvSpPr>
+        <p:spPr>
+          <a:xfrm>
+            <a:off x="4965192" y="5330952"/>
+            <a:ext cx="6309360" cy="603504"/>
+          </a:xfrm>
+          <a:prstGeom prst="rect">
+            <a:avLst/>
+          </a:prstGeom>
+          <a:noFill/>
+        </p:spPr>
+        <p:txBody>
+          <a:bodyPr wrap="square" lIns="0" rIns="0" tIns="0" bIns="0" anchor="ctr">
+            <a:spAutoFit/>
+          </a:bodyPr>
+          <a:lstStyle/>
+          <a:p>
+            <a:pPr algn="l">
+              <a:lnSpc>
+                <a:spcPct val="115000"/>
+              </a:lnSpc>
+            </a:pPr>
+            <a:r>
+              <a:rPr sz="1250" b="0">
+                <a:solidFill>
+                  <a:srgbClr val="444444"/>
+                </a:solidFill>
+                <a:latin typeface="Microsoft JhengHei"/>
+              </a:rPr>
+              <a:t>整詞聽錯，訪客看辨識文字重講即可，非系統 bug</a:t>
+            </a:r>
+          </a:p>
+        </p:txBody>
+      </p:sp>
+      <p:sp>
+        <p:nvSpPr>
+          <p:cNvPr id="26" name="TextBox 25"/>
+          <p:cNvSpPr txBox="1"/>
+          <p:nvPr/>
+        </p:nvSpPr>
+        <p:spPr>
+          <a:xfrm>
+            <a:off x="667512" y="6172200"/>
+            <a:ext cx="10789920" cy="457200"/>
           </a:xfrm>
           <a:prstGeom prst="rect">
             <a:avLst/>
@@ -18346,247 +19713,13 @@
               </a:lnSpc>
             </a:pPr>
             <a:r>
-              <a:rPr sz="1300" b="1">
-                <a:solidFill>
-                  <a:srgbClr val="1A1A2E"/>
-                </a:solidFill>
-                <a:latin typeface="Microsoft JhengHei"/>
-              </a:rPr>
-              <a:t>掛 ASR 出口，不碰倉管核心</a:t>
-            </a:r>
-          </a:p>
-        </p:txBody>
-      </p:sp>
-      <p:sp>
-        <p:nvSpPr>
-          <p:cNvPr id="21" name="TextBox 20"/>
-          <p:cNvSpPr txBox="1"/>
-          <p:nvPr/>
-        </p:nvSpPr>
-        <p:spPr>
-          <a:xfrm>
-            <a:off x="6766560" y="3108960"/>
-            <a:ext cx="274320" cy="365760"/>
-          </a:xfrm>
-          <a:prstGeom prst="rect">
-            <a:avLst/>
-          </a:prstGeom>
-          <a:noFill/>
-        </p:spPr>
-        <p:txBody>
-          <a:bodyPr wrap="square" lIns="0" rIns="0" tIns="0" bIns="0" anchor="t">
-            <a:spAutoFit/>
-          </a:bodyPr>
-          <a:lstStyle/>
-          <a:p>
-            <a:pPr algn="l">
-              <a:lnSpc>
-                <a:spcPct val="115000"/>
-              </a:lnSpc>
-            </a:pPr>
-            <a:r>
-              <a:rPr sz="1500" b="1">
-                <a:solidFill>
-                  <a:srgbClr val="F0A030"/>
-                </a:solidFill>
-                <a:latin typeface="Microsoft JhengHei"/>
-              </a:rPr>
-              <a:t>·</a:t>
-            </a:r>
-          </a:p>
-        </p:txBody>
-      </p:sp>
-      <p:sp>
-        <p:nvSpPr>
-          <p:cNvPr id="22" name="TextBox 21"/>
-          <p:cNvSpPr txBox="1"/>
-          <p:nvPr/>
-        </p:nvSpPr>
-        <p:spPr>
-          <a:xfrm>
-            <a:off x="7013448" y="3108960"/>
-            <a:ext cx="4297680" cy="402336"/>
-          </a:xfrm>
-          <a:prstGeom prst="rect">
-            <a:avLst/>
-          </a:prstGeom>
-          <a:noFill/>
-        </p:spPr>
-        <p:txBody>
-          <a:bodyPr wrap="square" lIns="0" rIns="0" tIns="0" bIns="0" anchor="t">
-            <a:spAutoFit/>
-          </a:bodyPr>
-          <a:lstStyle/>
-          <a:p>
-            <a:pPr algn="l">
-              <a:lnSpc>
-                <a:spcPct val="115000"/>
-              </a:lnSpc>
-            </a:pPr>
-            <a:r>
-              <a:rPr sz="1250" b="0">
-                <a:solidFill>
-                  <a:srgbClr val="444444"/>
-                </a:solidFill>
-                <a:latin typeface="Microsoft JhengHei"/>
-              </a:rPr>
-              <a:t>倉別：總/藏/昌 倉 → 中/北 倉</a:t>
-            </a:r>
-          </a:p>
-        </p:txBody>
-      </p:sp>
-      <p:sp>
-        <p:nvSpPr>
-          <p:cNvPr id="23" name="TextBox 22"/>
-          <p:cNvSpPr txBox="1"/>
-          <p:nvPr/>
-        </p:nvSpPr>
-        <p:spPr>
-          <a:xfrm>
-            <a:off x="6766560" y="3529584"/>
-            <a:ext cx="274320" cy="365760"/>
-          </a:xfrm>
-          <a:prstGeom prst="rect">
-            <a:avLst/>
-          </a:prstGeom>
-          <a:noFill/>
-        </p:spPr>
-        <p:txBody>
-          <a:bodyPr wrap="square" lIns="0" rIns="0" tIns="0" bIns="0" anchor="t">
-            <a:spAutoFit/>
-          </a:bodyPr>
-          <a:lstStyle/>
-          <a:p>
-            <a:pPr algn="l">
-              <a:lnSpc>
-                <a:spcPct val="115000"/>
-              </a:lnSpc>
-            </a:pPr>
-            <a:r>
-              <a:rPr sz="1500" b="1">
-                <a:solidFill>
-                  <a:srgbClr val="F0A030"/>
-                </a:solidFill>
-                <a:latin typeface="Microsoft JhengHei"/>
-              </a:rPr>
-              <a:t>·</a:t>
-            </a:r>
-          </a:p>
-        </p:txBody>
-      </p:sp>
-      <p:sp>
-        <p:nvSpPr>
-          <p:cNvPr id="24" name="TextBox 23"/>
-          <p:cNvSpPr txBox="1"/>
-          <p:nvPr/>
-        </p:nvSpPr>
-        <p:spPr>
-          <a:xfrm>
-            <a:off x="7013448" y="3529584"/>
-            <a:ext cx="4297680" cy="402336"/>
-          </a:xfrm>
-          <a:prstGeom prst="rect">
-            <a:avLst/>
-          </a:prstGeom>
-          <a:noFill/>
-        </p:spPr>
-        <p:txBody>
-          <a:bodyPr wrap="square" lIns="0" rIns="0" tIns="0" bIns="0" anchor="t">
-            <a:spAutoFit/>
-          </a:bodyPr>
-          <a:lstStyle/>
-          <a:p>
-            <a:pPr algn="l">
-              <a:lnSpc>
-                <a:spcPct val="115000"/>
-              </a:lnSpc>
-            </a:pPr>
-            <a:r>
-              <a:rPr sz="1250" b="0">
-                <a:solidFill>
-                  <a:srgbClr val="444444"/>
-                </a:solidFill>
-                <a:latin typeface="Microsoft JhengHei"/>
-              </a:rPr>
-              <a:t>動詞：近→進、谷→補（吵雜劣化）</a:t>
-            </a:r>
-          </a:p>
-        </p:txBody>
-      </p:sp>
-      <p:sp>
-        <p:nvSpPr>
-          <p:cNvPr id="25" name="TextBox 24"/>
-          <p:cNvSpPr txBox="1"/>
-          <p:nvPr/>
-        </p:nvSpPr>
-        <p:spPr>
-          <a:xfrm>
-            <a:off x="6766560" y="3950208"/>
-            <a:ext cx="274320" cy="365760"/>
-          </a:xfrm>
-          <a:prstGeom prst="rect">
-            <a:avLst/>
-          </a:prstGeom>
-          <a:noFill/>
-        </p:spPr>
-        <p:txBody>
-          <a:bodyPr wrap="square" lIns="0" rIns="0" tIns="0" bIns="0" anchor="t">
-            <a:spAutoFit/>
-          </a:bodyPr>
-          <a:lstStyle/>
-          <a:p>
-            <a:pPr algn="l">
-              <a:lnSpc>
-                <a:spcPct val="115000"/>
-              </a:lnSpc>
-            </a:pPr>
-            <a:r>
-              <a:rPr sz="1500" b="1">
-                <a:solidFill>
-                  <a:srgbClr val="F0A030"/>
-                </a:solidFill>
-                <a:latin typeface="Microsoft JhengHei"/>
-              </a:rPr>
-              <a:t>·</a:t>
-            </a:r>
-          </a:p>
-        </p:txBody>
-      </p:sp>
-      <p:sp>
-        <p:nvSpPr>
-          <p:cNvPr id="26" name="TextBox 25"/>
-          <p:cNvSpPr txBox="1"/>
-          <p:nvPr/>
-        </p:nvSpPr>
-        <p:spPr>
-          <a:xfrm>
-            <a:off x="7013448" y="3950208"/>
-            <a:ext cx="4297680" cy="402336"/>
-          </a:xfrm>
-          <a:prstGeom prst="rect">
-            <a:avLst/>
-          </a:prstGeom>
-          <a:noFill/>
-        </p:spPr>
-        <p:txBody>
-          <a:bodyPr wrap="square" lIns="0" rIns="0" tIns="0" bIns="0" anchor="t">
-            <a:spAutoFit/>
-          </a:bodyPr>
-          <a:lstStyle/>
-          <a:p>
-            <a:pPr algn="l">
-              <a:lnSpc>
-                <a:spcPct val="115000"/>
-              </a:lnSpc>
-            </a:pPr>
-            <a:r>
-              <a:rPr sz="1250" b="0">
-                <a:solidFill>
-                  <a:srgbClr val="444444"/>
-                </a:solidFill>
-                <a:latin typeface="Microsoft JhengHei"/>
-              </a:rPr>
-              <a:t>量詞：臺→台（OpenCC 轉繁差異）</a:t>
+              <a:rPr sz="1400" b="1">
+                <a:solidFill>
+                  <a:srgbClr val="008E76"/>
+                </a:solidFill>
+                <a:latin typeface="Microsoft JhengHei"/>
+              </a:rPr>
+              <a:t>結論：webcam + 270M + 正常音量＝展場夠用，不需升級模型或麥克風。</a:t>
             </a:r>
           </a:p>
         </p:txBody>
@@ -18594,201 +19727,6 @@
       <p:sp>
         <p:nvSpPr>
           <p:cNvPr id="27" name="TextBox 26"/>
-          <p:cNvSpPr txBox="1"/>
-          <p:nvPr/>
-        </p:nvSpPr>
-        <p:spPr>
-          <a:xfrm>
-            <a:off x="6766560" y="4370832"/>
-            <a:ext cx="274320" cy="365760"/>
-          </a:xfrm>
-          <a:prstGeom prst="rect">
-            <a:avLst/>
-          </a:prstGeom>
-          <a:noFill/>
-        </p:spPr>
-        <p:txBody>
-          <a:bodyPr wrap="square" lIns="0" rIns="0" tIns="0" bIns="0" anchor="t">
-            <a:spAutoFit/>
-          </a:bodyPr>
-          <a:lstStyle/>
-          <a:p>
-            <a:pPr algn="l">
-              <a:lnSpc>
-                <a:spcPct val="115000"/>
-              </a:lnSpc>
-            </a:pPr>
-            <a:r>
-              <a:rPr sz="1500" b="1">
-                <a:solidFill>
-                  <a:srgbClr val="F0A030"/>
-                </a:solidFill>
-                <a:latin typeface="Microsoft JhengHei"/>
-              </a:rPr>
-              <a:t>·</a:t>
-            </a:r>
-          </a:p>
-        </p:txBody>
-      </p:sp>
-      <p:sp>
-        <p:nvSpPr>
-          <p:cNvPr id="28" name="TextBox 27"/>
-          <p:cNvSpPr txBox="1"/>
-          <p:nvPr/>
-        </p:nvSpPr>
-        <p:spPr>
-          <a:xfrm>
-            <a:off x="7013448" y="4370832"/>
-            <a:ext cx="4297680" cy="402336"/>
-          </a:xfrm>
-          <a:prstGeom prst="rect">
-            <a:avLst/>
-          </a:prstGeom>
-          <a:noFill/>
-        </p:spPr>
-        <p:txBody>
-          <a:bodyPr wrap="square" lIns="0" rIns="0" tIns="0" bIns="0" anchor="t">
-            <a:spAutoFit/>
-          </a:bodyPr>
-          <a:lstStyle/>
-          <a:p>
-            <a:pPr algn="l">
-              <a:lnSpc>
-                <a:spcPct val="115000"/>
-              </a:lnSpc>
-            </a:pPr>
-            <a:r>
-              <a:rPr sz="1250" b="0">
-                <a:solidFill>
-                  <a:srgbClr val="444444"/>
-                </a:solidFill>
-                <a:latin typeface="Microsoft JhengHei"/>
-              </a:rPr>
-              <a:t>異體字：溼→濕、賬→帳、周→週</a:t>
-            </a:r>
-          </a:p>
-        </p:txBody>
-      </p:sp>
-      <p:sp>
-        <p:nvSpPr>
-          <p:cNvPr id="29" name="TextBox 28"/>
-          <p:cNvSpPr txBox="1"/>
-          <p:nvPr/>
-        </p:nvSpPr>
-        <p:spPr>
-          <a:xfrm>
-            <a:off x="6766560" y="4791456"/>
-            <a:ext cx="274320" cy="365760"/>
-          </a:xfrm>
-          <a:prstGeom prst="rect">
-            <a:avLst/>
-          </a:prstGeom>
-          <a:noFill/>
-        </p:spPr>
-        <p:txBody>
-          <a:bodyPr wrap="square" lIns="0" rIns="0" tIns="0" bIns="0" anchor="t">
-            <a:spAutoFit/>
-          </a:bodyPr>
-          <a:lstStyle/>
-          <a:p>
-            <a:pPr algn="l">
-              <a:lnSpc>
-                <a:spcPct val="115000"/>
-              </a:lnSpc>
-            </a:pPr>
-            <a:r>
-              <a:rPr sz="1500" b="1">
-                <a:solidFill>
-                  <a:srgbClr val="F0A030"/>
-                </a:solidFill>
-                <a:latin typeface="Microsoft JhengHei"/>
-              </a:rPr>
-              <a:t>·</a:t>
-            </a:r>
-          </a:p>
-        </p:txBody>
-      </p:sp>
-      <p:sp>
-        <p:nvSpPr>
-          <p:cNvPr id="30" name="TextBox 29"/>
-          <p:cNvSpPr txBox="1"/>
-          <p:nvPr/>
-        </p:nvSpPr>
-        <p:spPr>
-          <a:xfrm>
-            <a:off x="7013448" y="4791456"/>
-            <a:ext cx="4297680" cy="402336"/>
-          </a:xfrm>
-          <a:prstGeom prst="rect">
-            <a:avLst/>
-          </a:prstGeom>
-          <a:noFill/>
-        </p:spPr>
-        <p:txBody>
-          <a:bodyPr wrap="square" lIns="0" rIns="0" tIns="0" bIns="0" anchor="t">
-            <a:spAutoFit/>
-          </a:bodyPr>
-          <a:lstStyle/>
-          <a:p>
-            <a:pPr algn="l">
-              <a:lnSpc>
-                <a:spcPct val="115000"/>
-              </a:lnSpc>
-            </a:pPr>
-            <a:r>
-              <a:rPr sz="1250" b="0">
-                <a:solidFill>
-                  <a:srgbClr val="444444"/>
-                </a:solidFill>
-                <a:latin typeface="Microsoft JhengHei"/>
-              </a:rPr>
-              <a:t>打字訪客零影響、守衛零風險</a:t>
-            </a:r>
-          </a:p>
-        </p:txBody>
-      </p:sp>
-      <p:sp>
-        <p:nvSpPr>
-          <p:cNvPr id="31" name="TextBox 30"/>
-          <p:cNvSpPr txBox="1"/>
-          <p:nvPr/>
-        </p:nvSpPr>
-        <p:spPr>
-          <a:xfrm>
-            <a:off x="667512" y="5806440"/>
-            <a:ext cx="10789920" cy="457200"/>
-          </a:xfrm>
-          <a:prstGeom prst="rect">
-            <a:avLst/>
-          </a:prstGeom>
-          <a:noFill/>
-        </p:spPr>
-        <p:txBody>
-          <a:bodyPr wrap="square" lIns="0" rIns="0" tIns="0" bIns="0" anchor="t">
-            <a:spAutoFit/>
-          </a:bodyPr>
-          <a:lstStyle/>
-          <a:p>
-            <a:pPr algn="l">
-              <a:lnSpc>
-                <a:spcPct val="115000"/>
-              </a:lnSpc>
-            </a:pPr>
-            <a:r>
-              <a:rPr sz="1300" b="1">
-                <a:solidFill>
-                  <a:srgbClr val="008E76"/>
-                </a:solidFill>
-                <a:latin typeface="Microsoft JhengHei"/>
-              </a:rPr>
-              <a:t>設計原則：每一條容錯規則都有守衛把關，改規則前先跑護欄測試——聽錯可以救，但不能救錯。</a:t>
-            </a:r>
-          </a:p>
-        </p:txBody>
-      </p:sp>
-      <p:sp>
-        <p:nvSpPr>
-          <p:cNvPr id="32" name="TextBox 31"/>
           <p:cNvSpPr txBox="1"/>
           <p:nvPr/>
         </p:nvSpPr>
@@ -18845,17 +19783,1377 @@
       <p:grpSpPr/>
       <p:sp>
         <p:nvSpPr>
-          <p:cNvPr id="2" name="Rectangle 1"/>
+          <p:cNvPr id="2" name="TextBox 1"/>
+          <p:cNvSpPr txBox="1"/>
+          <p:nvPr/>
+        </p:nvSpPr>
+        <p:spPr>
+          <a:xfrm>
+            <a:off x="667512" y="310896"/>
+            <a:ext cx="10789920" cy="274320"/>
+          </a:xfrm>
+          <a:prstGeom prst="rect">
+            <a:avLst/>
+          </a:prstGeom>
+          <a:noFill/>
+        </p:spPr>
+        <p:txBody>
+          <a:bodyPr wrap="square" lIns="0" rIns="0" tIns="0" bIns="0" anchor="t">
+            <a:spAutoFit/>
+          </a:bodyPr>
+          <a:lstStyle/>
+          <a:p>
+            <a:pPr algn="l">
+              <a:lnSpc>
+                <a:spcPct val="115000"/>
+              </a:lnSpc>
+            </a:pPr>
+            <a:r>
+              <a:rPr sz="1250" b="1">
+                <a:solidFill>
+                  <a:srgbClr val="00C49A"/>
+                </a:solidFill>
+                <a:latin typeface="Arial"/>
+              </a:rPr>
+              <a:t>VOICE POC · 容錯設計</a:t>
+            </a:r>
+          </a:p>
+        </p:txBody>
+      </p:sp>
+      <p:sp>
+        <p:nvSpPr>
+          <p:cNvPr id="3" name="TextBox 2"/>
+          <p:cNvSpPr txBox="1"/>
+          <p:nvPr/>
+        </p:nvSpPr>
+        <p:spPr>
+          <a:xfrm>
+            <a:off x="667512" y="585216"/>
+            <a:ext cx="10789920" cy="566928"/>
+          </a:xfrm>
+          <a:prstGeom prst="rect">
+            <a:avLst/>
+          </a:prstGeom>
+          <a:noFill/>
+        </p:spPr>
+        <p:txBody>
+          <a:bodyPr wrap="square" lIns="0" rIns="0" tIns="0" bIns="0" anchor="t">
+            <a:spAutoFit/>
+          </a:bodyPr>
+          <a:lstStyle/>
+          <a:p>
+            <a:pPr algn="l">
+              <a:lnSpc>
+                <a:spcPct val="115000"/>
+              </a:lnSpc>
+            </a:pPr>
+            <a:r>
+              <a:rPr sz="2700" b="1">
+                <a:solidFill>
+                  <a:srgbClr val="1A1A2E"/>
+                </a:solidFill>
+                <a:latin typeface="Microsoft JhengHei"/>
+              </a:rPr>
+              <a:t>ASR 會聽錯，兩層容錯把它接住</a:t>
+            </a:r>
+          </a:p>
+        </p:txBody>
+      </p:sp>
+      <p:sp>
+        <p:nvSpPr>
+          <p:cNvPr id="4" name="TextBox 3"/>
+          <p:cNvSpPr txBox="1"/>
+          <p:nvPr/>
+        </p:nvSpPr>
+        <p:spPr>
+          <a:xfrm>
+            <a:off x="667512" y="1298448"/>
+            <a:ext cx="10789920" cy="365760"/>
+          </a:xfrm>
+          <a:prstGeom prst="rect">
+            <a:avLst/>
+          </a:prstGeom>
+          <a:noFill/>
+        </p:spPr>
+        <p:txBody>
+          <a:bodyPr wrap="square" lIns="0" rIns="0" tIns="0" bIns="0" anchor="t">
+            <a:spAutoFit/>
+          </a:bodyPr>
+          <a:lstStyle/>
+          <a:p>
+            <a:pPr algn="l">
+              <a:lnSpc>
+                <a:spcPct val="115000"/>
+              </a:lnSpc>
+            </a:pPr>
+            <a:r>
+              <a:rPr sz="1350" b="0">
+                <a:solidFill>
+                  <a:srgbClr val="555555"/>
+                </a:solidFill>
+                <a:latin typeface="Microsoft JhengHei"/>
+              </a:rPr>
+              <a:t>270M 小模型辨識不完美（滑鼠→華數/華族）。兩層容錯——真人聲實測一句句磨出來——讓聽錯也答對。</a:t>
+            </a:r>
+          </a:p>
+        </p:txBody>
+      </p:sp>
+      <p:sp>
+        <p:nvSpPr>
+          <p:cNvPr id="5" name="Rounded Rectangle 4"/>
           <p:cNvSpPr/>
           <p:nvPr/>
         </p:nvSpPr>
         <p:spPr>
           <a:xfrm>
-            <a:off x="0" y="0"/>
-            <a:ext cx="12188952" cy="6858000"/>
-          </a:xfrm>
-          <a:prstGeom prst="rect">
-            <a:avLst/>
+            <a:off x="667512" y="1965960"/>
+            <a:ext cx="5257800" cy="3429000"/>
+          </a:xfrm>
+          <a:prstGeom prst="roundRect">
+            <a:avLst>
+              <a:gd name="adj" fmla="val 8000"/>
+            </a:avLst>
+          </a:prstGeom>
+          <a:solidFill>
+            <a:srgbClr val="E4F7F2"/>
+          </a:solidFill>
+          <a:ln>
+            <a:noFill/>
+          </a:ln>
+          <a:effectLst/>
+        </p:spPr>
+        <p:style>
+          <a:lnRef idx="1">
+            <a:schemeClr val="accent1"/>
+          </a:lnRef>
+          <a:fillRef idx="3">
+            <a:schemeClr val="accent1"/>
+          </a:fillRef>
+          <a:effectRef idx="2">
+            <a:schemeClr val="accent1"/>
+          </a:effectRef>
+          <a:fontRef idx="minor">
+            <a:schemeClr val="lt1"/>
+          </a:fontRef>
+        </p:style>
+        <p:txBody>
+          <a:bodyPr rtlCol="0" anchor="ctr"/>
+          <a:lstStyle/>
+          <a:p>
+            <a:pPr algn="ctr"/>
+          </a:p>
+        </p:txBody>
+      </p:sp>
+      <p:sp>
+        <p:nvSpPr>
+          <p:cNvPr id="6" name="TextBox 5"/>
+          <p:cNvSpPr txBox="1"/>
+          <p:nvPr/>
+        </p:nvSpPr>
+        <p:spPr>
+          <a:xfrm>
+            <a:off x="987552" y="2194560"/>
+            <a:ext cx="4617720" cy="365760"/>
+          </a:xfrm>
+          <a:prstGeom prst="rect">
+            <a:avLst/>
+          </a:prstGeom>
+          <a:noFill/>
+        </p:spPr>
+        <p:txBody>
+          <a:bodyPr wrap="square" lIns="0" rIns="0" tIns="0" bIns="0" anchor="t">
+            <a:spAutoFit/>
+          </a:bodyPr>
+          <a:lstStyle/>
+          <a:p>
+            <a:pPr algn="l">
+              <a:lnSpc>
+                <a:spcPct val="115000"/>
+              </a:lnSpc>
+            </a:pPr>
+            <a:r>
+              <a:rPr sz="1700" b="1">
+                <a:solidFill>
+                  <a:srgbClr val="008E76"/>
+                </a:solidFill>
+                <a:latin typeface="Microsoft JhengHei"/>
+              </a:rPr>
+              <a:t>① 發音容錯層</a:t>
+            </a:r>
+          </a:p>
+        </p:txBody>
+      </p:sp>
+      <p:sp>
+        <p:nvSpPr>
+          <p:cNvPr id="7" name="TextBox 6"/>
+          <p:cNvSpPr txBox="1"/>
+          <p:nvPr/>
+        </p:nvSpPr>
+        <p:spPr>
+          <a:xfrm>
+            <a:off x="987552" y="2606040"/>
+            <a:ext cx="4617720" cy="365760"/>
+          </a:xfrm>
+          <a:prstGeom prst="rect">
+            <a:avLst/>
+          </a:prstGeom>
+          <a:noFill/>
+        </p:spPr>
+        <p:txBody>
+          <a:bodyPr wrap="square" lIns="0" rIns="0" tIns="0" bIns="0" anchor="t">
+            <a:spAutoFit/>
+          </a:bodyPr>
+          <a:lstStyle/>
+          <a:p>
+            <a:pPr algn="l">
+              <a:lnSpc>
+                <a:spcPct val="115000"/>
+              </a:lnSpc>
+            </a:pPr>
+            <a:r>
+              <a:rPr sz="1300" b="1">
+                <a:solidFill>
+                  <a:srgbClr val="1A1A2E"/>
+                </a:solidFill>
+                <a:latin typeface="Microsoft JhengHei"/>
+              </a:rPr>
+              <a:t>字形救不到 → 轉拼音比對</a:t>
+            </a:r>
+          </a:p>
+        </p:txBody>
+      </p:sp>
+      <p:sp>
+        <p:nvSpPr>
+          <p:cNvPr id="8" name="TextBox 7"/>
+          <p:cNvSpPr txBox="1"/>
+          <p:nvPr/>
+        </p:nvSpPr>
+        <p:spPr>
+          <a:xfrm>
+            <a:off x="987552" y="3108960"/>
+            <a:ext cx="274320" cy="365760"/>
+          </a:xfrm>
+          <a:prstGeom prst="rect">
+            <a:avLst/>
+          </a:prstGeom>
+          <a:noFill/>
+        </p:spPr>
+        <p:txBody>
+          <a:bodyPr wrap="square" lIns="0" rIns="0" tIns="0" bIns="0" anchor="t">
+            <a:spAutoFit/>
+          </a:bodyPr>
+          <a:lstStyle/>
+          <a:p>
+            <a:pPr algn="l">
+              <a:lnSpc>
+                <a:spcPct val="115000"/>
+              </a:lnSpc>
+            </a:pPr>
+            <a:r>
+              <a:rPr sz="1500" b="1">
+                <a:solidFill>
+                  <a:srgbClr val="00C49A"/>
+                </a:solidFill>
+                <a:latin typeface="Microsoft JhengHei"/>
+              </a:rPr>
+              <a:t>·</a:t>
+            </a:r>
+          </a:p>
+        </p:txBody>
+      </p:sp>
+      <p:sp>
+        <p:nvSpPr>
+          <p:cNvPr id="9" name="TextBox 8"/>
+          <p:cNvSpPr txBox="1"/>
+          <p:nvPr/>
+        </p:nvSpPr>
+        <p:spPr>
+          <a:xfrm>
+            <a:off x="1234440" y="3108960"/>
+            <a:ext cx="4480560" cy="402336"/>
+          </a:xfrm>
+          <a:prstGeom prst="rect">
+            <a:avLst/>
+          </a:prstGeom>
+          <a:noFill/>
+        </p:spPr>
+        <p:txBody>
+          <a:bodyPr wrap="square" lIns="0" rIns="0" tIns="0" bIns="0" anchor="t">
+            <a:spAutoFit/>
+          </a:bodyPr>
+          <a:lstStyle/>
+          <a:p>
+            <a:pPr algn="l">
+              <a:lnSpc>
+                <a:spcPct val="115000"/>
+              </a:lnSpc>
+            </a:pPr>
+            <a:r>
+              <a:rPr sz="1250" b="0">
+                <a:solidFill>
+                  <a:srgbClr val="444444"/>
+                </a:solidFill>
+                <a:latin typeface="Microsoft JhengHei"/>
+              </a:rPr>
+              <a:t>同音字形遠：滑鼠→華數，字形比對 0 分</a:t>
+            </a:r>
+          </a:p>
+        </p:txBody>
+      </p:sp>
+      <p:sp>
+        <p:nvSpPr>
+          <p:cNvPr id="10" name="TextBox 9"/>
+          <p:cNvSpPr txBox="1"/>
+          <p:nvPr/>
+        </p:nvSpPr>
+        <p:spPr>
+          <a:xfrm>
+            <a:off x="987552" y="3529584"/>
+            <a:ext cx="274320" cy="365760"/>
+          </a:xfrm>
+          <a:prstGeom prst="rect">
+            <a:avLst/>
+          </a:prstGeom>
+          <a:noFill/>
+        </p:spPr>
+        <p:txBody>
+          <a:bodyPr wrap="square" lIns="0" rIns="0" tIns="0" bIns="0" anchor="t">
+            <a:spAutoFit/>
+          </a:bodyPr>
+          <a:lstStyle/>
+          <a:p>
+            <a:pPr algn="l">
+              <a:lnSpc>
+                <a:spcPct val="115000"/>
+              </a:lnSpc>
+            </a:pPr>
+            <a:r>
+              <a:rPr sz="1500" b="1">
+                <a:solidFill>
+                  <a:srgbClr val="00C49A"/>
+                </a:solidFill>
+                <a:latin typeface="Microsoft JhengHei"/>
+              </a:rPr>
+              <a:t>·</a:t>
+            </a:r>
+          </a:p>
+        </p:txBody>
+      </p:sp>
+      <p:sp>
+        <p:nvSpPr>
+          <p:cNvPr id="11" name="TextBox 10"/>
+          <p:cNvSpPr txBox="1"/>
+          <p:nvPr/>
+        </p:nvSpPr>
+        <p:spPr>
+          <a:xfrm>
+            <a:off x="1234440" y="3529584"/>
+            <a:ext cx="4480560" cy="402336"/>
+          </a:xfrm>
+          <a:prstGeom prst="rect">
+            <a:avLst/>
+          </a:prstGeom>
+          <a:noFill/>
+        </p:spPr>
+        <p:txBody>
+          <a:bodyPr wrap="square" lIns="0" rIns="0" tIns="0" bIns="0" anchor="t">
+            <a:spAutoFit/>
+          </a:bodyPr>
+          <a:lstStyle/>
+          <a:p>
+            <a:pPr algn="l">
+              <a:lnSpc>
+                <a:spcPct val="115000"/>
+              </a:lnSpc>
+            </a:pPr>
+            <a:r>
+              <a:rPr sz="1250" b="0">
+                <a:solidFill>
+                  <a:srgbClr val="444444"/>
+                </a:solidFill>
+                <a:latin typeface="Microsoft JhengHei"/>
+              </a:rPr>
+              <a:t>轉拼音比對即中（huashu ≈ huashu）</a:t>
+            </a:r>
+          </a:p>
+        </p:txBody>
+      </p:sp>
+      <p:sp>
+        <p:nvSpPr>
+          <p:cNvPr id="12" name="TextBox 11"/>
+          <p:cNvSpPr txBox="1"/>
+          <p:nvPr/>
+        </p:nvSpPr>
+        <p:spPr>
+          <a:xfrm>
+            <a:off x="987552" y="3950208"/>
+            <a:ext cx="274320" cy="365760"/>
+          </a:xfrm>
+          <a:prstGeom prst="rect">
+            <a:avLst/>
+          </a:prstGeom>
+          <a:noFill/>
+        </p:spPr>
+        <p:txBody>
+          <a:bodyPr wrap="square" lIns="0" rIns="0" tIns="0" bIns="0" anchor="t">
+            <a:spAutoFit/>
+          </a:bodyPr>
+          <a:lstStyle/>
+          <a:p>
+            <a:pPr algn="l">
+              <a:lnSpc>
+                <a:spcPct val="115000"/>
+              </a:lnSpc>
+            </a:pPr>
+            <a:r>
+              <a:rPr sz="1500" b="1">
+                <a:solidFill>
+                  <a:srgbClr val="00C49A"/>
+                </a:solidFill>
+                <a:latin typeface="Microsoft JhengHei"/>
+              </a:rPr>
+              <a:t>·</a:t>
+            </a:r>
+          </a:p>
+        </p:txBody>
+      </p:sp>
+      <p:sp>
+        <p:nvSpPr>
+          <p:cNvPr id="13" name="TextBox 12"/>
+          <p:cNvSpPr txBox="1"/>
+          <p:nvPr/>
+        </p:nvSpPr>
+        <p:spPr>
+          <a:xfrm>
+            <a:off x="1234440" y="3950208"/>
+            <a:ext cx="4480560" cy="402336"/>
+          </a:xfrm>
+          <a:prstGeom prst="rect">
+            <a:avLst/>
+          </a:prstGeom>
+          <a:noFill/>
+        </p:spPr>
+        <p:txBody>
+          <a:bodyPr wrap="square" lIns="0" rIns="0" tIns="0" bIns="0" anchor="t">
+            <a:spAutoFit/>
+          </a:bodyPr>
+          <a:lstStyle/>
+          <a:p>
+            <a:pPr algn="l">
+              <a:lnSpc>
+                <a:spcPct val="115000"/>
+              </a:lnSpc>
+            </a:pPr>
+            <a:r>
+              <a:rPr sz="1250" b="0">
+                <a:solidFill>
+                  <a:srgbClr val="444444"/>
+                </a:solidFill>
+                <a:latin typeface="Microsoft JhengHei"/>
+              </a:rPr>
+              <a:t>捲舌音節還原：ㄕ/ㄗ 混淆也接得住</a:t>
+            </a:r>
+          </a:p>
+        </p:txBody>
+      </p:sp>
+      <p:sp>
+        <p:nvSpPr>
+          <p:cNvPr id="14" name="TextBox 13"/>
+          <p:cNvSpPr txBox="1"/>
+          <p:nvPr/>
+        </p:nvSpPr>
+        <p:spPr>
+          <a:xfrm>
+            <a:off x="987552" y="4370832"/>
+            <a:ext cx="274320" cy="365760"/>
+          </a:xfrm>
+          <a:prstGeom prst="rect">
+            <a:avLst/>
+          </a:prstGeom>
+          <a:noFill/>
+        </p:spPr>
+        <p:txBody>
+          <a:bodyPr wrap="square" lIns="0" rIns="0" tIns="0" bIns="0" anchor="t">
+            <a:spAutoFit/>
+          </a:bodyPr>
+          <a:lstStyle/>
+          <a:p>
+            <a:pPr algn="l">
+              <a:lnSpc>
+                <a:spcPct val="115000"/>
+              </a:lnSpc>
+            </a:pPr>
+            <a:r>
+              <a:rPr sz="1500" b="1">
+                <a:solidFill>
+                  <a:srgbClr val="00C49A"/>
+                </a:solidFill>
+                <a:latin typeface="Microsoft JhengHei"/>
+              </a:rPr>
+              <a:t>·</a:t>
+            </a:r>
+          </a:p>
+        </p:txBody>
+      </p:sp>
+      <p:sp>
+        <p:nvSpPr>
+          <p:cNvPr id="15" name="TextBox 14"/>
+          <p:cNvSpPr txBox="1"/>
+          <p:nvPr/>
+        </p:nvSpPr>
+        <p:spPr>
+          <a:xfrm>
+            <a:off x="1234440" y="4370832"/>
+            <a:ext cx="4480560" cy="402336"/>
+          </a:xfrm>
+          <a:prstGeom prst="rect">
+            <a:avLst/>
+          </a:prstGeom>
+          <a:noFill/>
+        </p:spPr>
+        <p:txBody>
+          <a:bodyPr wrap="square" lIns="0" rIns="0" tIns="0" bIns="0" anchor="t">
+            <a:spAutoFit/>
+          </a:bodyPr>
+          <a:lstStyle/>
+          <a:p>
+            <a:pPr algn="l">
+              <a:lnSpc>
+                <a:spcPct val="115000"/>
+              </a:lnSpc>
+            </a:pPr>
+            <a:r>
+              <a:rPr sz="1250" b="0">
+                <a:solidFill>
+                  <a:srgbClr val="444444"/>
+                </a:solidFill>
+                <a:latin typeface="Microsoft JhengHei"/>
+              </a:rPr>
+              <a:t>門檻 0.82 防誤配（衛生棉≠衛生紙）</a:t>
+            </a:r>
+          </a:p>
+        </p:txBody>
+      </p:sp>
+      <p:sp>
+        <p:nvSpPr>
+          <p:cNvPr id="16" name="TextBox 15"/>
+          <p:cNvSpPr txBox="1"/>
+          <p:nvPr/>
+        </p:nvSpPr>
+        <p:spPr>
+          <a:xfrm>
+            <a:off x="987552" y="4791456"/>
+            <a:ext cx="274320" cy="365760"/>
+          </a:xfrm>
+          <a:prstGeom prst="rect">
+            <a:avLst/>
+          </a:prstGeom>
+          <a:noFill/>
+        </p:spPr>
+        <p:txBody>
+          <a:bodyPr wrap="square" lIns="0" rIns="0" tIns="0" bIns="0" anchor="t">
+            <a:spAutoFit/>
+          </a:bodyPr>
+          <a:lstStyle/>
+          <a:p>
+            <a:pPr algn="l">
+              <a:lnSpc>
+                <a:spcPct val="115000"/>
+              </a:lnSpc>
+            </a:pPr>
+            <a:r>
+              <a:rPr sz="1500" b="1">
+                <a:solidFill>
+                  <a:srgbClr val="00C49A"/>
+                </a:solidFill>
+                <a:latin typeface="Microsoft JhengHei"/>
+              </a:rPr>
+              <a:t>·</a:t>
+            </a:r>
+          </a:p>
+        </p:txBody>
+      </p:sp>
+      <p:sp>
+        <p:nvSpPr>
+          <p:cNvPr id="17" name="TextBox 16"/>
+          <p:cNvSpPr txBox="1"/>
+          <p:nvPr/>
+        </p:nvSpPr>
+        <p:spPr>
+          <a:xfrm>
+            <a:off x="1234440" y="4791456"/>
+            <a:ext cx="4480560" cy="402336"/>
+          </a:xfrm>
+          <a:prstGeom prst="rect">
+            <a:avLst/>
+          </a:prstGeom>
+          <a:noFill/>
+        </p:spPr>
+        <p:txBody>
+          <a:bodyPr wrap="square" lIns="0" rIns="0" tIns="0" bIns="0" anchor="t">
+            <a:spAutoFit/>
+          </a:bodyPr>
+          <a:lstStyle/>
+          <a:p>
+            <a:pPr algn="l">
+              <a:lnSpc>
+                <a:spcPct val="115000"/>
+              </a:lnSpc>
+            </a:pPr>
+            <a:r>
+              <a:rPr sz="1250" b="0">
+                <a:solidFill>
+                  <a:srgbClr val="444444"/>
+                </a:solidFill>
+                <a:latin typeface="Microsoft JhengHei"/>
+              </a:rPr>
+              <a:t>字形優先、發音救底 → 守衛零回歸</a:t>
+            </a:r>
+          </a:p>
+        </p:txBody>
+      </p:sp>
+      <p:sp>
+        <p:nvSpPr>
+          <p:cNvPr id="18" name="Rounded Rectangle 17"/>
+          <p:cNvSpPr/>
+          <p:nvPr/>
+        </p:nvSpPr>
+        <p:spPr>
+          <a:xfrm>
+            <a:off x="6446520" y="1965960"/>
+            <a:ext cx="5074920" cy="3429000"/>
+          </a:xfrm>
+          <a:prstGeom prst="roundRect">
+            <a:avLst>
+              <a:gd name="adj" fmla="val 8000"/>
+            </a:avLst>
+          </a:prstGeom>
+          <a:solidFill>
+            <a:srgbClr val="F4F6F8"/>
+          </a:solidFill>
+          <a:ln>
+            <a:noFill/>
+          </a:ln>
+          <a:effectLst/>
+        </p:spPr>
+        <p:style>
+          <a:lnRef idx="1">
+            <a:schemeClr val="accent1"/>
+          </a:lnRef>
+          <a:fillRef idx="3">
+            <a:schemeClr val="accent1"/>
+          </a:fillRef>
+          <a:effectRef idx="2">
+            <a:schemeClr val="accent1"/>
+          </a:effectRef>
+          <a:fontRef idx="minor">
+            <a:schemeClr val="lt1"/>
+          </a:fontRef>
+        </p:style>
+        <p:txBody>
+          <a:bodyPr rtlCol="0" anchor="ctr"/>
+          <a:lstStyle/>
+          <a:p>
+            <a:pPr algn="ctr"/>
+          </a:p>
+        </p:txBody>
+      </p:sp>
+      <p:sp>
+        <p:nvSpPr>
+          <p:cNvPr id="19" name="TextBox 18"/>
+          <p:cNvSpPr txBox="1"/>
+          <p:nvPr/>
+        </p:nvSpPr>
+        <p:spPr>
+          <a:xfrm>
+            <a:off x="6766560" y="2194560"/>
+            <a:ext cx="4434840" cy="365760"/>
+          </a:xfrm>
+          <a:prstGeom prst="rect">
+            <a:avLst/>
+          </a:prstGeom>
+          <a:noFill/>
+        </p:spPr>
+        <p:txBody>
+          <a:bodyPr wrap="square" lIns="0" rIns="0" tIns="0" bIns="0" anchor="t">
+            <a:spAutoFit/>
+          </a:bodyPr>
+          <a:lstStyle/>
+          <a:p>
+            <a:pPr algn="l">
+              <a:lnSpc>
+                <a:spcPct val="115000"/>
+              </a:lnSpc>
+            </a:pPr>
+            <a:r>
+              <a:rPr sz="1700" b="1">
+                <a:solidFill>
+                  <a:srgbClr val="F0A030"/>
+                </a:solidFill>
+                <a:latin typeface="Microsoft JhengHei"/>
+              </a:rPr>
+              <a:t>② 語音同音修正</a:t>
+            </a:r>
+          </a:p>
+        </p:txBody>
+      </p:sp>
+      <p:sp>
+        <p:nvSpPr>
+          <p:cNvPr id="20" name="TextBox 19"/>
+          <p:cNvSpPr txBox="1"/>
+          <p:nvPr/>
+        </p:nvSpPr>
+        <p:spPr>
+          <a:xfrm>
+            <a:off x="6766560" y="2606040"/>
+            <a:ext cx="4434840" cy="365760"/>
+          </a:xfrm>
+          <a:prstGeom prst="rect">
+            <a:avLst/>
+          </a:prstGeom>
+          <a:noFill/>
+        </p:spPr>
+        <p:txBody>
+          <a:bodyPr wrap="square" lIns="0" rIns="0" tIns="0" bIns="0" anchor="t">
+            <a:spAutoFit/>
+          </a:bodyPr>
+          <a:lstStyle/>
+          <a:p>
+            <a:pPr algn="l">
+              <a:lnSpc>
+                <a:spcPct val="115000"/>
+              </a:lnSpc>
+            </a:pPr>
+            <a:r>
+              <a:rPr sz="1300" b="1">
+                <a:solidFill>
+                  <a:srgbClr val="1A1A2E"/>
+                </a:solidFill>
+                <a:latin typeface="Microsoft JhengHei"/>
+              </a:rPr>
+              <a:t>掛 ASR 出口，不碰倉管核心</a:t>
+            </a:r>
+          </a:p>
+        </p:txBody>
+      </p:sp>
+      <p:sp>
+        <p:nvSpPr>
+          <p:cNvPr id="21" name="TextBox 20"/>
+          <p:cNvSpPr txBox="1"/>
+          <p:nvPr/>
+        </p:nvSpPr>
+        <p:spPr>
+          <a:xfrm>
+            <a:off x="6766560" y="3108960"/>
+            <a:ext cx="274320" cy="365760"/>
+          </a:xfrm>
+          <a:prstGeom prst="rect">
+            <a:avLst/>
+          </a:prstGeom>
+          <a:noFill/>
+        </p:spPr>
+        <p:txBody>
+          <a:bodyPr wrap="square" lIns="0" rIns="0" tIns="0" bIns="0" anchor="t">
+            <a:spAutoFit/>
+          </a:bodyPr>
+          <a:lstStyle/>
+          <a:p>
+            <a:pPr algn="l">
+              <a:lnSpc>
+                <a:spcPct val="115000"/>
+              </a:lnSpc>
+            </a:pPr>
+            <a:r>
+              <a:rPr sz="1500" b="1">
+                <a:solidFill>
+                  <a:srgbClr val="F0A030"/>
+                </a:solidFill>
+                <a:latin typeface="Microsoft JhengHei"/>
+              </a:rPr>
+              <a:t>·</a:t>
+            </a:r>
+          </a:p>
+        </p:txBody>
+      </p:sp>
+      <p:sp>
+        <p:nvSpPr>
+          <p:cNvPr id="22" name="TextBox 21"/>
+          <p:cNvSpPr txBox="1"/>
+          <p:nvPr/>
+        </p:nvSpPr>
+        <p:spPr>
+          <a:xfrm>
+            <a:off x="7013448" y="3108960"/>
+            <a:ext cx="4297680" cy="402336"/>
+          </a:xfrm>
+          <a:prstGeom prst="rect">
+            <a:avLst/>
+          </a:prstGeom>
+          <a:noFill/>
+        </p:spPr>
+        <p:txBody>
+          <a:bodyPr wrap="square" lIns="0" rIns="0" tIns="0" bIns="0" anchor="t">
+            <a:spAutoFit/>
+          </a:bodyPr>
+          <a:lstStyle/>
+          <a:p>
+            <a:pPr algn="l">
+              <a:lnSpc>
+                <a:spcPct val="115000"/>
+              </a:lnSpc>
+            </a:pPr>
+            <a:r>
+              <a:rPr sz="1250" b="0">
+                <a:solidFill>
+                  <a:srgbClr val="444444"/>
+                </a:solidFill>
+                <a:latin typeface="Microsoft JhengHei"/>
+              </a:rPr>
+              <a:t>倉別：總/藏/昌 倉 → 中/北 倉</a:t>
+            </a:r>
+          </a:p>
+        </p:txBody>
+      </p:sp>
+      <p:sp>
+        <p:nvSpPr>
+          <p:cNvPr id="23" name="TextBox 22"/>
+          <p:cNvSpPr txBox="1"/>
+          <p:nvPr/>
+        </p:nvSpPr>
+        <p:spPr>
+          <a:xfrm>
+            <a:off x="6766560" y="3529584"/>
+            <a:ext cx="274320" cy="365760"/>
+          </a:xfrm>
+          <a:prstGeom prst="rect">
+            <a:avLst/>
+          </a:prstGeom>
+          <a:noFill/>
+        </p:spPr>
+        <p:txBody>
+          <a:bodyPr wrap="square" lIns="0" rIns="0" tIns="0" bIns="0" anchor="t">
+            <a:spAutoFit/>
+          </a:bodyPr>
+          <a:lstStyle/>
+          <a:p>
+            <a:pPr algn="l">
+              <a:lnSpc>
+                <a:spcPct val="115000"/>
+              </a:lnSpc>
+            </a:pPr>
+            <a:r>
+              <a:rPr sz="1500" b="1">
+                <a:solidFill>
+                  <a:srgbClr val="F0A030"/>
+                </a:solidFill>
+                <a:latin typeface="Microsoft JhengHei"/>
+              </a:rPr>
+              <a:t>·</a:t>
+            </a:r>
+          </a:p>
+        </p:txBody>
+      </p:sp>
+      <p:sp>
+        <p:nvSpPr>
+          <p:cNvPr id="24" name="TextBox 23"/>
+          <p:cNvSpPr txBox="1"/>
+          <p:nvPr/>
+        </p:nvSpPr>
+        <p:spPr>
+          <a:xfrm>
+            <a:off x="7013448" y="3529584"/>
+            <a:ext cx="4297680" cy="402336"/>
+          </a:xfrm>
+          <a:prstGeom prst="rect">
+            <a:avLst/>
+          </a:prstGeom>
+          <a:noFill/>
+        </p:spPr>
+        <p:txBody>
+          <a:bodyPr wrap="square" lIns="0" rIns="0" tIns="0" bIns="0" anchor="t">
+            <a:spAutoFit/>
+          </a:bodyPr>
+          <a:lstStyle/>
+          <a:p>
+            <a:pPr algn="l">
+              <a:lnSpc>
+                <a:spcPct val="115000"/>
+              </a:lnSpc>
+            </a:pPr>
+            <a:r>
+              <a:rPr sz="1250" b="0">
+                <a:solidFill>
+                  <a:srgbClr val="444444"/>
+                </a:solidFill>
+                <a:latin typeface="Microsoft JhengHei"/>
+              </a:rPr>
+              <a:t>動詞：近→進、谷→補（吵雜劣化）</a:t>
+            </a:r>
+          </a:p>
+        </p:txBody>
+      </p:sp>
+      <p:sp>
+        <p:nvSpPr>
+          <p:cNvPr id="25" name="TextBox 24"/>
+          <p:cNvSpPr txBox="1"/>
+          <p:nvPr/>
+        </p:nvSpPr>
+        <p:spPr>
+          <a:xfrm>
+            <a:off x="6766560" y="3950208"/>
+            <a:ext cx="274320" cy="365760"/>
+          </a:xfrm>
+          <a:prstGeom prst="rect">
+            <a:avLst/>
+          </a:prstGeom>
+          <a:noFill/>
+        </p:spPr>
+        <p:txBody>
+          <a:bodyPr wrap="square" lIns="0" rIns="0" tIns="0" bIns="0" anchor="t">
+            <a:spAutoFit/>
+          </a:bodyPr>
+          <a:lstStyle/>
+          <a:p>
+            <a:pPr algn="l">
+              <a:lnSpc>
+                <a:spcPct val="115000"/>
+              </a:lnSpc>
+            </a:pPr>
+            <a:r>
+              <a:rPr sz="1500" b="1">
+                <a:solidFill>
+                  <a:srgbClr val="F0A030"/>
+                </a:solidFill>
+                <a:latin typeface="Microsoft JhengHei"/>
+              </a:rPr>
+              <a:t>·</a:t>
+            </a:r>
+          </a:p>
+        </p:txBody>
+      </p:sp>
+      <p:sp>
+        <p:nvSpPr>
+          <p:cNvPr id="26" name="TextBox 25"/>
+          <p:cNvSpPr txBox="1"/>
+          <p:nvPr/>
+        </p:nvSpPr>
+        <p:spPr>
+          <a:xfrm>
+            <a:off x="7013448" y="3950208"/>
+            <a:ext cx="4297680" cy="402336"/>
+          </a:xfrm>
+          <a:prstGeom prst="rect">
+            <a:avLst/>
+          </a:prstGeom>
+          <a:noFill/>
+        </p:spPr>
+        <p:txBody>
+          <a:bodyPr wrap="square" lIns="0" rIns="0" tIns="0" bIns="0" anchor="t">
+            <a:spAutoFit/>
+          </a:bodyPr>
+          <a:lstStyle/>
+          <a:p>
+            <a:pPr algn="l">
+              <a:lnSpc>
+                <a:spcPct val="115000"/>
+              </a:lnSpc>
+            </a:pPr>
+            <a:r>
+              <a:rPr sz="1250" b="0">
+                <a:solidFill>
+                  <a:srgbClr val="444444"/>
+                </a:solidFill>
+                <a:latin typeface="Microsoft JhengHei"/>
+              </a:rPr>
+              <a:t>量詞：臺→台（OpenCC 轉繁差異）</a:t>
+            </a:r>
+          </a:p>
+        </p:txBody>
+      </p:sp>
+      <p:sp>
+        <p:nvSpPr>
+          <p:cNvPr id="27" name="TextBox 26"/>
+          <p:cNvSpPr txBox="1"/>
+          <p:nvPr/>
+        </p:nvSpPr>
+        <p:spPr>
+          <a:xfrm>
+            <a:off x="6766560" y="4370832"/>
+            <a:ext cx="274320" cy="365760"/>
+          </a:xfrm>
+          <a:prstGeom prst="rect">
+            <a:avLst/>
+          </a:prstGeom>
+          <a:noFill/>
+        </p:spPr>
+        <p:txBody>
+          <a:bodyPr wrap="square" lIns="0" rIns="0" tIns="0" bIns="0" anchor="t">
+            <a:spAutoFit/>
+          </a:bodyPr>
+          <a:lstStyle/>
+          <a:p>
+            <a:pPr algn="l">
+              <a:lnSpc>
+                <a:spcPct val="115000"/>
+              </a:lnSpc>
+            </a:pPr>
+            <a:r>
+              <a:rPr sz="1500" b="1">
+                <a:solidFill>
+                  <a:srgbClr val="F0A030"/>
+                </a:solidFill>
+                <a:latin typeface="Microsoft JhengHei"/>
+              </a:rPr>
+              <a:t>·</a:t>
+            </a:r>
+          </a:p>
+        </p:txBody>
+      </p:sp>
+      <p:sp>
+        <p:nvSpPr>
+          <p:cNvPr id="28" name="TextBox 27"/>
+          <p:cNvSpPr txBox="1"/>
+          <p:nvPr/>
+        </p:nvSpPr>
+        <p:spPr>
+          <a:xfrm>
+            <a:off x="7013448" y="4370832"/>
+            <a:ext cx="4297680" cy="402336"/>
+          </a:xfrm>
+          <a:prstGeom prst="rect">
+            <a:avLst/>
+          </a:prstGeom>
+          <a:noFill/>
+        </p:spPr>
+        <p:txBody>
+          <a:bodyPr wrap="square" lIns="0" rIns="0" tIns="0" bIns="0" anchor="t">
+            <a:spAutoFit/>
+          </a:bodyPr>
+          <a:lstStyle/>
+          <a:p>
+            <a:pPr algn="l">
+              <a:lnSpc>
+                <a:spcPct val="115000"/>
+              </a:lnSpc>
+            </a:pPr>
+            <a:r>
+              <a:rPr sz="1250" b="0">
+                <a:solidFill>
+                  <a:srgbClr val="444444"/>
+                </a:solidFill>
+                <a:latin typeface="Microsoft JhengHei"/>
+              </a:rPr>
+              <a:t>異體字：溼→濕、賬→帳、周→週</a:t>
+            </a:r>
+          </a:p>
+        </p:txBody>
+      </p:sp>
+      <p:sp>
+        <p:nvSpPr>
+          <p:cNvPr id="29" name="TextBox 28"/>
+          <p:cNvSpPr txBox="1"/>
+          <p:nvPr/>
+        </p:nvSpPr>
+        <p:spPr>
+          <a:xfrm>
+            <a:off x="6766560" y="4791456"/>
+            <a:ext cx="274320" cy="365760"/>
+          </a:xfrm>
+          <a:prstGeom prst="rect">
+            <a:avLst/>
+          </a:prstGeom>
+          <a:noFill/>
+        </p:spPr>
+        <p:txBody>
+          <a:bodyPr wrap="square" lIns="0" rIns="0" tIns="0" bIns="0" anchor="t">
+            <a:spAutoFit/>
+          </a:bodyPr>
+          <a:lstStyle/>
+          <a:p>
+            <a:pPr algn="l">
+              <a:lnSpc>
+                <a:spcPct val="115000"/>
+              </a:lnSpc>
+            </a:pPr>
+            <a:r>
+              <a:rPr sz="1500" b="1">
+                <a:solidFill>
+                  <a:srgbClr val="F0A030"/>
+                </a:solidFill>
+                <a:latin typeface="Microsoft JhengHei"/>
+              </a:rPr>
+              <a:t>·</a:t>
+            </a:r>
+          </a:p>
+        </p:txBody>
+      </p:sp>
+      <p:sp>
+        <p:nvSpPr>
+          <p:cNvPr id="30" name="TextBox 29"/>
+          <p:cNvSpPr txBox="1"/>
+          <p:nvPr/>
+        </p:nvSpPr>
+        <p:spPr>
+          <a:xfrm>
+            <a:off x="7013448" y="4791456"/>
+            <a:ext cx="4297680" cy="402336"/>
+          </a:xfrm>
+          <a:prstGeom prst="rect">
+            <a:avLst/>
+          </a:prstGeom>
+          <a:noFill/>
+        </p:spPr>
+        <p:txBody>
+          <a:bodyPr wrap="square" lIns="0" rIns="0" tIns="0" bIns="0" anchor="t">
+            <a:spAutoFit/>
+          </a:bodyPr>
+          <a:lstStyle/>
+          <a:p>
+            <a:pPr algn="l">
+              <a:lnSpc>
+                <a:spcPct val="115000"/>
+              </a:lnSpc>
+            </a:pPr>
+            <a:r>
+              <a:rPr sz="1250" b="0">
+                <a:solidFill>
+                  <a:srgbClr val="444444"/>
+                </a:solidFill>
+                <a:latin typeface="Microsoft JhengHei"/>
+              </a:rPr>
+              <a:t>打字訪客零影響、守衛零風險</a:t>
+            </a:r>
+          </a:p>
+        </p:txBody>
+      </p:sp>
+      <p:sp>
+        <p:nvSpPr>
+          <p:cNvPr id="31" name="TextBox 30"/>
+          <p:cNvSpPr txBox="1"/>
+          <p:nvPr/>
+        </p:nvSpPr>
+        <p:spPr>
+          <a:xfrm>
+            <a:off x="667512" y="5806440"/>
+            <a:ext cx="10789920" cy="457200"/>
+          </a:xfrm>
+          <a:prstGeom prst="rect">
+            <a:avLst/>
+          </a:prstGeom>
+          <a:noFill/>
+        </p:spPr>
+        <p:txBody>
+          <a:bodyPr wrap="square" lIns="0" rIns="0" tIns="0" bIns="0" anchor="t">
+            <a:spAutoFit/>
+          </a:bodyPr>
+          <a:lstStyle/>
+          <a:p>
+            <a:pPr algn="l">
+              <a:lnSpc>
+                <a:spcPct val="115000"/>
+              </a:lnSpc>
+            </a:pPr>
+            <a:r>
+              <a:rPr sz="1300" b="1">
+                <a:solidFill>
+                  <a:srgbClr val="008E76"/>
+                </a:solidFill>
+                <a:latin typeface="Microsoft JhengHei"/>
+              </a:rPr>
+              <a:t>設計原則：每一條容錯規則都有守衛把關，改規則前先跑護欄測試——聽錯可以救，但不能救錯。</a:t>
+            </a:r>
+          </a:p>
+        </p:txBody>
+      </p:sp>
+      <p:sp>
+        <p:nvSpPr>
+          <p:cNvPr id="32" name="TextBox 31"/>
+          <p:cNvSpPr txBox="1"/>
+          <p:nvPr/>
+        </p:nvSpPr>
+        <p:spPr>
+          <a:xfrm>
+            <a:off x="11475720" y="6565392"/>
+            <a:ext cx="658368" cy="237744"/>
+          </a:xfrm>
+          <a:prstGeom prst="rect">
+            <a:avLst/>
+          </a:prstGeom>
+          <a:noFill/>
+        </p:spPr>
+        <p:txBody>
+          <a:bodyPr wrap="square" lIns="0" rIns="0" tIns="0" bIns="0" anchor="t">
+            <a:spAutoFit/>
+          </a:bodyPr>
+          <a:lstStyle/>
+          <a:p>
+            <a:pPr algn="r">
+              <a:lnSpc>
+                <a:spcPct val="115000"/>
+              </a:lnSpc>
+            </a:pPr>
+            <a:r>
+              <a:rPr sz="1000" b="0">
+                <a:solidFill>
+                  <a:srgbClr val="BBBBBB"/>
+                </a:solidFill>
+                <a:latin typeface="Arial"/>
+              </a:rPr>
+              <a:t>21</a:t>
+            </a:r>
+          </a:p>
+        </p:txBody>
+      </p:sp>
+    </p:spTree>
+  </p:cSld>
+  <p:clrMapOvr>
+    <a:masterClrMapping/>
+  </p:clrMapOvr>
+</p:sld>
+</file>
+
+<file path=ppt/slides/slide22.xml><?xml version="1.0" encoding="utf-8"?>
+<p:sld xmlns:a="http://schemas.openxmlformats.org/drawingml/2006/main" xmlns:p="http://schemas.openxmlformats.org/presentationml/2006/main" xmlns:r="http://schemas.openxmlformats.org/officeDocument/2006/relationships">
+  <p:cSld>
+    <p:spTree>
+      <p:nvGrpSpPr>
+        <p:cNvPr id="1" name=""/>
+        <p:cNvGrpSpPr/>
+        <p:nvPr/>
+      </p:nvGrpSpPr>
+      <p:grpSpPr/>
+      <p:sp>
+        <p:nvSpPr>
+          <p:cNvPr id="2" name="TextBox 1"/>
+          <p:cNvSpPr txBox="1"/>
+          <p:nvPr/>
+        </p:nvSpPr>
+        <p:spPr>
+          <a:xfrm>
+            <a:off x="667512" y="310896"/>
+            <a:ext cx="10789920" cy="274320"/>
+          </a:xfrm>
+          <a:prstGeom prst="rect">
+            <a:avLst/>
+          </a:prstGeom>
+          <a:noFill/>
+        </p:spPr>
+        <p:txBody>
+          <a:bodyPr wrap="square" lIns="0" rIns="0" tIns="0" bIns="0" anchor="t">
+            <a:spAutoFit/>
+          </a:bodyPr>
+          <a:lstStyle/>
+          <a:p>
+            <a:pPr algn="l">
+              <a:lnSpc>
+                <a:spcPct val="115000"/>
+              </a:lnSpc>
+            </a:pPr>
+            <a:r>
+              <a:rPr sz="1250" b="1">
+                <a:solidFill>
+                  <a:srgbClr val="00C49A"/>
+                </a:solidFill>
+                <a:latin typeface="Arial"/>
+              </a:rPr>
+              <a:t>VOICE POC · 救回實例</a:t>
+            </a:r>
+          </a:p>
+        </p:txBody>
+      </p:sp>
+      <p:sp>
+        <p:nvSpPr>
+          <p:cNvPr id="3" name="TextBox 2"/>
+          <p:cNvSpPr txBox="1"/>
+          <p:nvPr/>
+        </p:nvSpPr>
+        <p:spPr>
+          <a:xfrm>
+            <a:off x="667512" y="585216"/>
+            <a:ext cx="10789920" cy="566928"/>
+          </a:xfrm>
+          <a:prstGeom prst="rect">
+            <a:avLst/>
+          </a:prstGeom>
+          <a:noFill/>
+        </p:spPr>
+        <p:txBody>
+          <a:bodyPr wrap="square" lIns="0" rIns="0" tIns="0" bIns="0" anchor="t">
+            <a:spAutoFit/>
+          </a:bodyPr>
+          <a:lstStyle/>
+          <a:p>
+            <a:pPr algn="l">
+              <a:lnSpc>
+                <a:spcPct val="115000"/>
+              </a:lnSpc>
+            </a:pPr>
+            <a:r>
+              <a:rPr sz="2700" b="1">
+                <a:solidFill>
+                  <a:srgbClr val="1A1A2E"/>
+                </a:solidFill>
+                <a:latin typeface="Microsoft JhengHei"/>
+              </a:rPr>
+              <a:t>ASR 聽錯，容錯層照樣答對（真人聲實測）</a:t>
+            </a:r>
+          </a:p>
+        </p:txBody>
+      </p:sp>
+      <p:sp>
+        <p:nvSpPr>
+          <p:cNvPr id="4" name="TextBox 3"/>
+          <p:cNvSpPr txBox="1"/>
+          <p:nvPr/>
+        </p:nvSpPr>
+        <p:spPr>
+          <a:xfrm>
+            <a:off x="667512" y="1261872"/>
+            <a:ext cx="10789920" cy="365760"/>
+          </a:xfrm>
+          <a:prstGeom prst="rect">
+            <a:avLst/>
+          </a:prstGeom>
+          <a:noFill/>
+        </p:spPr>
+        <p:txBody>
+          <a:bodyPr wrap="square" lIns="0" rIns="0" tIns="0" bIns="0" anchor="t">
+            <a:spAutoFit/>
+          </a:bodyPr>
+          <a:lstStyle/>
+          <a:p>
+            <a:pPr algn="l">
+              <a:lnSpc>
+                <a:spcPct val="115000"/>
+              </a:lnSpc>
+            </a:pPr>
+            <a:r>
+              <a:rPr sz="1300" b="0">
+                <a:solidFill>
+                  <a:srgbClr val="555555"/>
+                </a:solidFill>
+                <a:latin typeface="Microsoft JhengHei"/>
+              </a:rPr>
+              <a:t>以下全是 2026-07 真人聲實測（webcam）的原始紀錄：ASR 明明聽錯，經容錯層修正後結果正確。</a:t>
+            </a:r>
+          </a:p>
+        </p:txBody>
+      </p:sp>
+      <p:sp>
+        <p:nvSpPr>
+          <p:cNvPr id="5" name="Rounded Rectangle 4"/>
+          <p:cNvSpPr/>
+          <p:nvPr/>
+        </p:nvSpPr>
+        <p:spPr>
+          <a:xfrm>
+            <a:off x="667512" y="1783080"/>
+            <a:ext cx="10853928" cy="420624"/>
+          </a:xfrm>
+          <a:prstGeom prst="roundRect">
+            <a:avLst>
+              <a:gd name="adj" fmla="val 8000"/>
+            </a:avLst>
           </a:prstGeom>
           <a:solidFill>
             <a:srgbClr val="1A1A2E"/>
@@ -18889,16 +21187,2671 @@
       </p:sp>
       <p:sp>
         <p:nvSpPr>
-          <p:cNvPr id="3" name="Rectangle 2"/>
+          <p:cNvPr id="6" name="TextBox 5"/>
+          <p:cNvSpPr txBox="1"/>
+          <p:nvPr/>
+        </p:nvSpPr>
+        <p:spPr>
+          <a:xfrm>
+            <a:off x="795528" y="1847088"/>
+            <a:ext cx="3163824" cy="310896"/>
+          </a:xfrm>
+          <a:prstGeom prst="rect">
+            <a:avLst/>
+          </a:prstGeom>
+          <a:noFill/>
+        </p:spPr>
+        <p:txBody>
+          <a:bodyPr wrap="square" lIns="0" rIns="0" tIns="0" bIns="0" anchor="ctr">
+            <a:spAutoFit/>
+          </a:bodyPr>
+          <a:lstStyle/>
+          <a:p>
+            <a:pPr algn="l">
+              <a:lnSpc>
+                <a:spcPct val="115000"/>
+              </a:lnSpc>
+            </a:pPr>
+            <a:r>
+              <a:rPr sz="1200" b="1">
+                <a:solidFill>
+                  <a:srgbClr val="FFFFFF"/>
+                </a:solidFill>
+                <a:latin typeface="Microsoft JhengHei"/>
+              </a:rPr>
+              <a:t>訪客原句</a:t>
+            </a:r>
+          </a:p>
+        </p:txBody>
+      </p:sp>
+      <p:sp>
+        <p:nvSpPr>
+          <p:cNvPr id="7" name="TextBox 6"/>
+          <p:cNvSpPr txBox="1"/>
+          <p:nvPr/>
+        </p:nvSpPr>
+        <p:spPr>
+          <a:xfrm>
+            <a:off x="4288536" y="1847088"/>
+            <a:ext cx="3072384" cy="310896"/>
+          </a:xfrm>
+          <a:prstGeom prst="rect">
+            <a:avLst/>
+          </a:prstGeom>
+          <a:noFill/>
+        </p:spPr>
+        <p:txBody>
+          <a:bodyPr wrap="square" lIns="0" rIns="0" tIns="0" bIns="0" anchor="ctr">
+            <a:spAutoFit/>
+          </a:bodyPr>
+          <a:lstStyle/>
+          <a:p>
+            <a:pPr algn="l">
+              <a:lnSpc>
+                <a:spcPct val="115000"/>
+              </a:lnSpc>
+            </a:pPr>
+            <a:r>
+              <a:rPr sz="1200" b="1">
+                <a:solidFill>
+                  <a:srgbClr val="FFFFFF"/>
+                </a:solidFill>
+                <a:latin typeface="Microsoft JhengHei"/>
+              </a:rPr>
+              <a:t>ASR 聽成（錯）</a:t>
+            </a:r>
+          </a:p>
+        </p:txBody>
+      </p:sp>
+      <p:sp>
+        <p:nvSpPr>
+          <p:cNvPr id="8" name="TextBox 7"/>
+          <p:cNvSpPr txBox="1"/>
+          <p:nvPr/>
+        </p:nvSpPr>
+        <p:spPr>
+          <a:xfrm>
+            <a:off x="7763256" y="1847088"/>
+            <a:ext cx="3483864" cy="310896"/>
+          </a:xfrm>
+          <a:prstGeom prst="rect">
+            <a:avLst/>
+          </a:prstGeom>
+          <a:noFill/>
+        </p:spPr>
+        <p:txBody>
+          <a:bodyPr wrap="square" lIns="0" rIns="0" tIns="0" bIns="0" anchor="ctr">
+            <a:spAutoFit/>
+          </a:bodyPr>
+          <a:lstStyle/>
+          <a:p>
+            <a:pPr algn="l">
+              <a:lnSpc>
+                <a:spcPct val="115000"/>
+              </a:lnSpc>
+            </a:pPr>
+            <a:r>
+              <a:rPr sz="1200" b="1">
+                <a:solidFill>
+                  <a:srgbClr val="00C49A"/>
+                </a:solidFill>
+                <a:latin typeface="Microsoft JhengHei"/>
+              </a:rPr>
+              <a:t>容錯層救回 → 答對</a:t>
+            </a:r>
+          </a:p>
+        </p:txBody>
+      </p:sp>
+      <p:sp>
+        <p:nvSpPr>
+          <p:cNvPr id="9" name="Rectangle 8"/>
           <p:cNvSpPr/>
           <p:nvPr/>
         </p:nvSpPr>
         <p:spPr>
           <a:xfrm>
-            <a:off x="0" y="0"/>
-            <a:ext cx="12188952" cy="128016"/>
-          </a:xfrm>
-          <a:prstGeom prst="rect">
+            <a:off x="667512" y="2203704"/>
+            <a:ext cx="10853928" cy="397764"/>
+          </a:xfrm>
+          <a:prstGeom prst="rect">
+            <a:avLst/>
+          </a:prstGeom>
+          <a:solidFill>
+            <a:srgbClr val="FFFFFF"/>
+          </a:solidFill>
+          <a:ln w="6350">
+            <a:solidFill>
+              <a:srgbClr val="E6E8EC"/>
+            </a:solidFill>
+          </a:ln>
+          <a:effectLst/>
+        </p:spPr>
+        <p:style>
+          <a:lnRef idx="1">
+            <a:schemeClr val="accent1"/>
+          </a:lnRef>
+          <a:fillRef idx="3">
+            <a:schemeClr val="accent1"/>
+          </a:fillRef>
+          <a:effectRef idx="2">
+            <a:schemeClr val="accent1"/>
+          </a:effectRef>
+          <a:fontRef idx="minor">
+            <a:schemeClr val="lt1"/>
+          </a:fontRef>
+        </p:style>
+        <p:txBody>
+          <a:bodyPr rtlCol="0" anchor="ctr"/>
+          <a:lstStyle/>
+          <a:p>
+            <a:pPr algn="ctr"/>
+          </a:p>
+        </p:txBody>
+      </p:sp>
+      <p:sp>
+        <p:nvSpPr>
+          <p:cNvPr id="10" name="TextBox 9"/>
+          <p:cNvSpPr txBox="1"/>
+          <p:nvPr/>
+        </p:nvSpPr>
+        <p:spPr>
+          <a:xfrm>
+            <a:off x="795528" y="2249424"/>
+            <a:ext cx="3163824" cy="310896"/>
+          </a:xfrm>
+          <a:prstGeom prst="rect">
+            <a:avLst/>
+          </a:prstGeom>
+          <a:noFill/>
+        </p:spPr>
+        <p:txBody>
+          <a:bodyPr wrap="square" lIns="0" rIns="0" tIns="0" bIns="0" anchor="ctr">
+            <a:spAutoFit/>
+          </a:bodyPr>
+          <a:lstStyle/>
+          <a:p>
+            <a:pPr algn="l">
+              <a:lnSpc>
+                <a:spcPct val="115000"/>
+              </a:lnSpc>
+            </a:pPr>
+            <a:r>
+              <a:rPr sz="1200" b="0">
+                <a:solidFill>
+                  <a:srgbClr val="1A1A2E"/>
+                </a:solidFill>
+                <a:latin typeface="Microsoft JhengHei"/>
+              </a:rPr>
+              <a:t>北倉進五十個滑鼠</a:t>
+            </a:r>
+          </a:p>
+        </p:txBody>
+      </p:sp>
+      <p:sp>
+        <p:nvSpPr>
+          <p:cNvPr id="11" name="TextBox 10"/>
+          <p:cNvSpPr txBox="1"/>
+          <p:nvPr/>
+        </p:nvSpPr>
+        <p:spPr>
+          <a:xfrm>
+            <a:off x="4288536" y="2249424"/>
+            <a:ext cx="3072384" cy="310896"/>
+          </a:xfrm>
+          <a:prstGeom prst="rect">
+            <a:avLst/>
+          </a:prstGeom>
+          <a:noFill/>
+        </p:spPr>
+        <p:txBody>
+          <a:bodyPr wrap="square" lIns="0" rIns="0" tIns="0" bIns="0" anchor="ctr">
+            <a:spAutoFit/>
+          </a:bodyPr>
+          <a:lstStyle/>
+          <a:p>
+            <a:pPr algn="l">
+              <a:lnSpc>
+                <a:spcPct val="115000"/>
+              </a:lnSpc>
+            </a:pPr>
+            <a:r>
+              <a:rPr sz="1200" b="0">
+                <a:solidFill>
+                  <a:srgbClr val="E85D5D"/>
+                </a:solidFill>
+                <a:latin typeface="Microsoft JhengHei"/>
+              </a:rPr>
+              <a:t>北藏近五十個華族</a:t>
+            </a:r>
+          </a:p>
+        </p:txBody>
+      </p:sp>
+      <p:sp>
+        <p:nvSpPr>
+          <p:cNvPr id="12" name="TextBox 11"/>
+          <p:cNvSpPr txBox="1"/>
+          <p:nvPr/>
+        </p:nvSpPr>
+        <p:spPr>
+          <a:xfrm>
+            <a:off x="7763256" y="2249424"/>
+            <a:ext cx="3483864" cy="310896"/>
+          </a:xfrm>
+          <a:prstGeom prst="rect">
+            <a:avLst/>
+          </a:prstGeom>
+          <a:noFill/>
+        </p:spPr>
+        <p:txBody>
+          <a:bodyPr wrap="square" lIns="0" rIns="0" tIns="0" bIns="0" anchor="ctr">
+            <a:spAutoFit/>
+          </a:bodyPr>
+          <a:lstStyle/>
+          <a:p>
+            <a:pPr algn="l">
+              <a:lnSpc>
+                <a:spcPct val="115000"/>
+              </a:lnSpc>
+            </a:pPr>
+            <a:r>
+              <a:rPr sz="1200" b="1">
+                <a:solidFill>
+                  <a:srgbClr val="008E76"/>
+                </a:solidFill>
+                <a:latin typeface="Microsoft JhengHei"/>
+              </a:rPr>
+              <a:t>藏→倉·近→進·華族→滑鼠</a:t>
+            </a:r>
+          </a:p>
+        </p:txBody>
+      </p:sp>
+      <p:sp>
+        <p:nvSpPr>
+          <p:cNvPr id="13" name="Rectangle 12"/>
+          <p:cNvSpPr/>
+          <p:nvPr/>
+        </p:nvSpPr>
+        <p:spPr>
+          <a:xfrm>
+            <a:off x="667512" y="2601468"/>
+            <a:ext cx="10853928" cy="397764"/>
+          </a:xfrm>
+          <a:prstGeom prst="rect">
+            <a:avLst/>
+          </a:prstGeom>
+          <a:solidFill>
+            <a:srgbClr val="F4F6F8"/>
+          </a:solidFill>
+          <a:ln w="6350">
+            <a:solidFill>
+              <a:srgbClr val="E6E8EC"/>
+            </a:solidFill>
+          </a:ln>
+          <a:effectLst/>
+        </p:spPr>
+        <p:style>
+          <a:lnRef idx="1">
+            <a:schemeClr val="accent1"/>
+          </a:lnRef>
+          <a:fillRef idx="3">
+            <a:schemeClr val="accent1"/>
+          </a:fillRef>
+          <a:effectRef idx="2">
+            <a:schemeClr val="accent1"/>
+          </a:effectRef>
+          <a:fontRef idx="minor">
+            <a:schemeClr val="lt1"/>
+          </a:fontRef>
+        </p:style>
+        <p:txBody>
+          <a:bodyPr rtlCol="0" anchor="ctr"/>
+          <a:lstStyle/>
+          <a:p>
+            <a:pPr algn="ctr"/>
+          </a:p>
+        </p:txBody>
+      </p:sp>
+      <p:sp>
+        <p:nvSpPr>
+          <p:cNvPr id="14" name="TextBox 13"/>
+          <p:cNvSpPr txBox="1"/>
+          <p:nvPr/>
+        </p:nvSpPr>
+        <p:spPr>
+          <a:xfrm>
+            <a:off x="795528" y="2647188"/>
+            <a:ext cx="3163824" cy="310896"/>
+          </a:xfrm>
+          <a:prstGeom prst="rect">
+            <a:avLst/>
+          </a:prstGeom>
+          <a:noFill/>
+        </p:spPr>
+        <p:txBody>
+          <a:bodyPr wrap="square" lIns="0" rIns="0" tIns="0" bIns="0" anchor="ctr">
+            <a:spAutoFit/>
+          </a:bodyPr>
+          <a:lstStyle/>
+          <a:p>
+            <a:pPr algn="l">
+              <a:lnSpc>
+                <a:spcPct val="115000"/>
+              </a:lnSpc>
+            </a:pPr>
+            <a:r>
+              <a:rPr sz="1200" b="0">
+                <a:solidFill>
+                  <a:srgbClr val="1A1A2E"/>
+                </a:solidFill>
+                <a:latin typeface="Microsoft JhengHei"/>
+              </a:rPr>
+              <a:t>幫我在北倉加五十個滑鼠</a:t>
+            </a:r>
+          </a:p>
+        </p:txBody>
+      </p:sp>
+      <p:sp>
+        <p:nvSpPr>
+          <p:cNvPr id="15" name="TextBox 14"/>
+          <p:cNvSpPr txBox="1"/>
+          <p:nvPr/>
+        </p:nvSpPr>
+        <p:spPr>
+          <a:xfrm>
+            <a:off x="4288536" y="2647188"/>
+            <a:ext cx="3072384" cy="310896"/>
+          </a:xfrm>
+          <a:prstGeom prst="rect">
+            <a:avLst/>
+          </a:prstGeom>
+          <a:noFill/>
+        </p:spPr>
+        <p:txBody>
+          <a:bodyPr wrap="square" lIns="0" rIns="0" tIns="0" bIns="0" anchor="ctr">
+            <a:spAutoFit/>
+          </a:bodyPr>
+          <a:lstStyle/>
+          <a:p>
+            <a:pPr algn="l">
+              <a:lnSpc>
+                <a:spcPct val="115000"/>
+              </a:lnSpc>
+            </a:pPr>
+            <a:r>
+              <a:rPr sz="1200" b="0">
+                <a:solidFill>
+                  <a:srgbClr val="E85D5D"/>
+                </a:solidFill>
+                <a:latin typeface="Microsoft JhengHei"/>
+              </a:rPr>
+              <a:t>…加五十個花束</a:t>
+            </a:r>
+          </a:p>
+        </p:txBody>
+      </p:sp>
+      <p:sp>
+        <p:nvSpPr>
+          <p:cNvPr id="16" name="TextBox 15"/>
+          <p:cNvSpPr txBox="1"/>
+          <p:nvPr/>
+        </p:nvSpPr>
+        <p:spPr>
+          <a:xfrm>
+            <a:off x="7763256" y="2647188"/>
+            <a:ext cx="3483864" cy="310896"/>
+          </a:xfrm>
+          <a:prstGeom prst="rect">
+            <a:avLst/>
+          </a:prstGeom>
+          <a:noFill/>
+        </p:spPr>
+        <p:txBody>
+          <a:bodyPr wrap="square" lIns="0" rIns="0" tIns="0" bIns="0" anchor="ctr">
+            <a:spAutoFit/>
+          </a:bodyPr>
+          <a:lstStyle/>
+          <a:p>
+            <a:pPr algn="l">
+              <a:lnSpc>
+                <a:spcPct val="115000"/>
+              </a:lnSpc>
+            </a:pPr>
+            <a:r>
+              <a:rPr sz="1200" b="1">
+                <a:solidFill>
+                  <a:srgbClr val="008E76"/>
+                </a:solidFill>
+                <a:latin typeface="Microsoft JhengHei"/>
+              </a:rPr>
+              <a:t>花束→滑鼠（拼音同音）</a:t>
+            </a:r>
+          </a:p>
+        </p:txBody>
+      </p:sp>
+      <p:sp>
+        <p:nvSpPr>
+          <p:cNvPr id="17" name="Rectangle 16"/>
+          <p:cNvSpPr/>
+          <p:nvPr/>
+        </p:nvSpPr>
+        <p:spPr>
+          <a:xfrm>
+            <a:off x="667512" y="2999232"/>
+            <a:ext cx="10853928" cy="397764"/>
+          </a:xfrm>
+          <a:prstGeom prst="rect">
+            <a:avLst/>
+          </a:prstGeom>
+          <a:solidFill>
+            <a:srgbClr val="FFFFFF"/>
+          </a:solidFill>
+          <a:ln w="6350">
+            <a:solidFill>
+              <a:srgbClr val="E6E8EC"/>
+            </a:solidFill>
+          </a:ln>
+          <a:effectLst/>
+        </p:spPr>
+        <p:style>
+          <a:lnRef idx="1">
+            <a:schemeClr val="accent1"/>
+          </a:lnRef>
+          <a:fillRef idx="3">
+            <a:schemeClr val="accent1"/>
+          </a:fillRef>
+          <a:effectRef idx="2">
+            <a:schemeClr val="accent1"/>
+          </a:effectRef>
+          <a:fontRef idx="minor">
+            <a:schemeClr val="lt1"/>
+          </a:fontRef>
+        </p:style>
+        <p:txBody>
+          <a:bodyPr rtlCol="0" anchor="ctr"/>
+          <a:lstStyle/>
+          <a:p>
+            <a:pPr algn="ctr"/>
+          </a:p>
+        </p:txBody>
+      </p:sp>
+      <p:sp>
+        <p:nvSpPr>
+          <p:cNvPr id="18" name="TextBox 17"/>
+          <p:cNvSpPr txBox="1"/>
+          <p:nvPr/>
+        </p:nvSpPr>
+        <p:spPr>
+          <a:xfrm>
+            <a:off x="795528" y="3044952"/>
+            <a:ext cx="3163824" cy="310896"/>
+          </a:xfrm>
+          <a:prstGeom prst="rect">
+            <a:avLst/>
+          </a:prstGeom>
+          <a:noFill/>
+        </p:spPr>
+        <p:txBody>
+          <a:bodyPr wrap="square" lIns="0" rIns="0" tIns="0" bIns="0" anchor="ctr">
+            <a:spAutoFit/>
+          </a:bodyPr>
+          <a:lstStyle/>
+          <a:p>
+            <a:pPr algn="l">
+              <a:lnSpc>
+                <a:spcPct val="115000"/>
+              </a:lnSpc>
+            </a:pPr>
+            <a:r>
+              <a:rPr sz="1200" b="0">
+                <a:solidFill>
+                  <a:srgbClr val="1A1A2E"/>
+                </a:solidFill>
+                <a:latin typeface="Microsoft JhengHei"/>
+              </a:rPr>
+              <a:t>藍牙耳機庫存</a:t>
+            </a:r>
+          </a:p>
+        </p:txBody>
+      </p:sp>
+      <p:sp>
+        <p:nvSpPr>
+          <p:cNvPr id="19" name="TextBox 18"/>
+          <p:cNvSpPr txBox="1"/>
+          <p:nvPr/>
+        </p:nvSpPr>
+        <p:spPr>
+          <a:xfrm>
+            <a:off x="4288536" y="3044952"/>
+            <a:ext cx="3072384" cy="310896"/>
+          </a:xfrm>
+          <a:prstGeom prst="rect">
+            <a:avLst/>
+          </a:prstGeom>
+          <a:noFill/>
+        </p:spPr>
+        <p:txBody>
+          <a:bodyPr wrap="square" lIns="0" rIns="0" tIns="0" bIns="0" anchor="ctr">
+            <a:spAutoFit/>
+          </a:bodyPr>
+          <a:lstStyle/>
+          <a:p>
+            <a:pPr algn="l">
+              <a:lnSpc>
+                <a:spcPct val="115000"/>
+              </a:lnSpc>
+            </a:pPr>
+            <a:r>
+              <a:rPr sz="1200" b="0">
+                <a:solidFill>
+                  <a:srgbClr val="E85D5D"/>
+                </a:solidFill>
+                <a:latin typeface="Microsoft JhengHei"/>
+              </a:rPr>
+              <a:t>藍芽耳機庫存</a:t>
+            </a:r>
+          </a:p>
+        </p:txBody>
+      </p:sp>
+      <p:sp>
+        <p:nvSpPr>
+          <p:cNvPr id="20" name="TextBox 19"/>
+          <p:cNvSpPr txBox="1"/>
+          <p:nvPr/>
+        </p:nvSpPr>
+        <p:spPr>
+          <a:xfrm>
+            <a:off x="7763256" y="3044952"/>
+            <a:ext cx="3483864" cy="310896"/>
+          </a:xfrm>
+          <a:prstGeom prst="rect">
+            <a:avLst/>
+          </a:prstGeom>
+          <a:noFill/>
+        </p:spPr>
+        <p:txBody>
+          <a:bodyPr wrap="square" lIns="0" rIns="0" tIns="0" bIns="0" anchor="ctr">
+            <a:spAutoFit/>
+          </a:bodyPr>
+          <a:lstStyle/>
+          <a:p>
+            <a:pPr algn="l">
+              <a:lnSpc>
+                <a:spcPct val="115000"/>
+              </a:lnSpc>
+            </a:pPr>
+            <a:r>
+              <a:rPr sz="1200" b="1">
+                <a:solidFill>
+                  <a:srgbClr val="008E76"/>
+                </a:solidFill>
+                <a:latin typeface="Microsoft JhengHei"/>
+              </a:rPr>
+              <a:t>藍芽→藍牙（OpenCC 用語）</a:t>
+            </a:r>
+          </a:p>
+        </p:txBody>
+      </p:sp>
+      <p:sp>
+        <p:nvSpPr>
+          <p:cNvPr id="21" name="Rectangle 20"/>
+          <p:cNvSpPr/>
+          <p:nvPr/>
+        </p:nvSpPr>
+        <p:spPr>
+          <a:xfrm>
+            <a:off x="667512" y="3396996"/>
+            <a:ext cx="10853928" cy="397764"/>
+          </a:xfrm>
+          <a:prstGeom prst="rect">
+            <a:avLst/>
+          </a:prstGeom>
+          <a:solidFill>
+            <a:srgbClr val="F4F6F8"/>
+          </a:solidFill>
+          <a:ln w="6350">
+            <a:solidFill>
+              <a:srgbClr val="E6E8EC"/>
+            </a:solidFill>
+          </a:ln>
+          <a:effectLst/>
+        </p:spPr>
+        <p:style>
+          <a:lnRef idx="1">
+            <a:schemeClr val="accent1"/>
+          </a:lnRef>
+          <a:fillRef idx="3">
+            <a:schemeClr val="accent1"/>
+          </a:fillRef>
+          <a:effectRef idx="2">
+            <a:schemeClr val="accent1"/>
+          </a:effectRef>
+          <a:fontRef idx="minor">
+            <a:schemeClr val="lt1"/>
+          </a:fontRef>
+        </p:style>
+        <p:txBody>
+          <a:bodyPr rtlCol="0" anchor="ctr"/>
+          <a:lstStyle/>
+          <a:p>
+            <a:pPr algn="ctr"/>
+          </a:p>
+        </p:txBody>
+      </p:sp>
+      <p:sp>
+        <p:nvSpPr>
+          <p:cNvPr id="22" name="TextBox 21"/>
+          <p:cNvSpPr txBox="1"/>
+          <p:nvPr/>
+        </p:nvSpPr>
+        <p:spPr>
+          <a:xfrm>
+            <a:off x="795528" y="3442716"/>
+            <a:ext cx="3163824" cy="310896"/>
+          </a:xfrm>
+          <a:prstGeom prst="rect">
+            <a:avLst/>
+          </a:prstGeom>
+          <a:noFill/>
+        </p:spPr>
+        <p:txBody>
+          <a:bodyPr wrap="square" lIns="0" rIns="0" tIns="0" bIns="0" anchor="ctr">
+            <a:spAutoFit/>
+          </a:bodyPr>
+          <a:lstStyle/>
+          <a:p>
+            <a:pPr algn="l">
+              <a:lnSpc>
+                <a:spcPct val="115000"/>
+              </a:lnSpc>
+            </a:pPr>
+            <a:r>
+              <a:rPr sz="1200" b="0">
+                <a:solidFill>
+                  <a:srgbClr val="1A1A2E"/>
+                </a:solidFill>
+                <a:latin typeface="Microsoft JhengHei"/>
+              </a:rPr>
+              <a:t>中倉衛生紙還有嗎</a:t>
+            </a:r>
+          </a:p>
+        </p:txBody>
+      </p:sp>
+      <p:sp>
+        <p:nvSpPr>
+          <p:cNvPr id="23" name="TextBox 22"/>
+          <p:cNvSpPr txBox="1"/>
+          <p:nvPr/>
+        </p:nvSpPr>
+        <p:spPr>
+          <a:xfrm>
+            <a:off x="4288536" y="3442716"/>
+            <a:ext cx="3072384" cy="310896"/>
+          </a:xfrm>
+          <a:prstGeom prst="rect">
+            <a:avLst/>
+          </a:prstGeom>
+          <a:noFill/>
+        </p:spPr>
+        <p:txBody>
+          <a:bodyPr wrap="square" lIns="0" rIns="0" tIns="0" bIns="0" anchor="ctr">
+            <a:spAutoFit/>
+          </a:bodyPr>
+          <a:lstStyle/>
+          <a:p>
+            <a:pPr algn="l">
+              <a:lnSpc>
+                <a:spcPct val="115000"/>
+              </a:lnSpc>
+            </a:pPr>
+            <a:r>
+              <a:rPr sz="1200" b="0">
+                <a:solidFill>
+                  <a:srgbClr val="E85D5D"/>
+                </a:solidFill>
+                <a:latin typeface="Microsoft JhengHei"/>
+              </a:rPr>
+              <a:t>中餐衛生紙還有嗎</a:t>
+            </a:r>
+          </a:p>
+        </p:txBody>
+      </p:sp>
+      <p:sp>
+        <p:nvSpPr>
+          <p:cNvPr id="24" name="TextBox 23"/>
+          <p:cNvSpPr txBox="1"/>
+          <p:nvPr/>
+        </p:nvSpPr>
+        <p:spPr>
+          <a:xfrm>
+            <a:off x="7763256" y="3442716"/>
+            <a:ext cx="3483864" cy="310896"/>
+          </a:xfrm>
+          <a:prstGeom prst="rect">
+            <a:avLst/>
+          </a:prstGeom>
+          <a:noFill/>
+        </p:spPr>
+        <p:txBody>
+          <a:bodyPr wrap="square" lIns="0" rIns="0" tIns="0" bIns="0" anchor="ctr">
+            <a:spAutoFit/>
+          </a:bodyPr>
+          <a:lstStyle/>
+          <a:p>
+            <a:pPr algn="l">
+              <a:lnSpc>
+                <a:spcPct val="115000"/>
+              </a:lnSpc>
+            </a:pPr>
+            <a:r>
+              <a:rPr sz="1200" b="1">
+                <a:solidFill>
+                  <a:srgbClr val="008E76"/>
+                </a:solidFill>
+                <a:latin typeface="Microsoft JhengHei"/>
+              </a:rPr>
+              <a:t>中餐→中倉</a:t>
+            </a:r>
+          </a:p>
+        </p:txBody>
+      </p:sp>
+      <p:sp>
+        <p:nvSpPr>
+          <p:cNvPr id="25" name="Rectangle 24"/>
+          <p:cNvSpPr/>
+          <p:nvPr/>
+        </p:nvSpPr>
+        <p:spPr>
+          <a:xfrm>
+            <a:off x="667512" y="3794760"/>
+            <a:ext cx="10853928" cy="397764"/>
+          </a:xfrm>
+          <a:prstGeom prst="rect">
+            <a:avLst/>
+          </a:prstGeom>
+          <a:solidFill>
+            <a:srgbClr val="FFFFFF"/>
+          </a:solidFill>
+          <a:ln w="6350">
+            <a:solidFill>
+              <a:srgbClr val="E6E8EC"/>
+            </a:solidFill>
+          </a:ln>
+          <a:effectLst/>
+        </p:spPr>
+        <p:style>
+          <a:lnRef idx="1">
+            <a:schemeClr val="accent1"/>
+          </a:lnRef>
+          <a:fillRef idx="3">
+            <a:schemeClr val="accent1"/>
+          </a:fillRef>
+          <a:effectRef idx="2">
+            <a:schemeClr val="accent1"/>
+          </a:effectRef>
+          <a:fontRef idx="minor">
+            <a:schemeClr val="lt1"/>
+          </a:fontRef>
+        </p:style>
+        <p:txBody>
+          <a:bodyPr rtlCol="0" anchor="ctr"/>
+          <a:lstStyle/>
+          <a:p>
+            <a:pPr algn="ctr"/>
+          </a:p>
+        </p:txBody>
+      </p:sp>
+      <p:sp>
+        <p:nvSpPr>
+          <p:cNvPr id="26" name="TextBox 25"/>
+          <p:cNvSpPr txBox="1"/>
+          <p:nvPr/>
+        </p:nvSpPr>
+        <p:spPr>
+          <a:xfrm>
+            <a:off x="795528" y="3840480"/>
+            <a:ext cx="3163824" cy="310896"/>
+          </a:xfrm>
+          <a:prstGeom prst="rect">
+            <a:avLst/>
+          </a:prstGeom>
+          <a:noFill/>
+        </p:spPr>
+        <p:txBody>
+          <a:bodyPr wrap="square" lIns="0" rIns="0" tIns="0" bIns="0" anchor="ctr">
+            <a:spAutoFit/>
+          </a:bodyPr>
+          <a:lstStyle/>
+          <a:p>
+            <a:pPr algn="l">
+              <a:lnSpc>
+                <a:spcPct val="115000"/>
+              </a:lnSpc>
+            </a:pPr>
+            <a:r>
+              <a:rPr sz="1200" b="0">
+                <a:solidFill>
+                  <a:srgbClr val="1A1A2E"/>
+                </a:solidFill>
+                <a:latin typeface="Microsoft JhengHei"/>
+              </a:rPr>
+              <a:t>運動壓縮臂套庫存</a:t>
+            </a:r>
+          </a:p>
+        </p:txBody>
+      </p:sp>
+      <p:sp>
+        <p:nvSpPr>
+          <p:cNvPr id="27" name="TextBox 26"/>
+          <p:cNvSpPr txBox="1"/>
+          <p:nvPr/>
+        </p:nvSpPr>
+        <p:spPr>
+          <a:xfrm>
+            <a:off x="4288536" y="3840480"/>
+            <a:ext cx="3072384" cy="310896"/>
+          </a:xfrm>
+          <a:prstGeom prst="rect">
+            <a:avLst/>
+          </a:prstGeom>
+          <a:noFill/>
+        </p:spPr>
+        <p:txBody>
+          <a:bodyPr wrap="square" lIns="0" rIns="0" tIns="0" bIns="0" anchor="ctr">
+            <a:spAutoFit/>
+          </a:bodyPr>
+          <a:lstStyle/>
+          <a:p>
+            <a:pPr algn="l">
+              <a:lnSpc>
+                <a:spcPct val="115000"/>
+              </a:lnSpc>
+            </a:pPr>
+            <a:r>
+              <a:rPr sz="1200" b="0">
+                <a:solidFill>
+                  <a:srgbClr val="E85D5D"/>
+                </a:solidFill>
+                <a:latin typeface="Microsoft JhengHei"/>
+              </a:rPr>
+              <a:t>運動壓縮筆套庫存</a:t>
+            </a:r>
+          </a:p>
+        </p:txBody>
+      </p:sp>
+      <p:sp>
+        <p:nvSpPr>
+          <p:cNvPr id="28" name="TextBox 27"/>
+          <p:cNvSpPr txBox="1"/>
+          <p:nvPr/>
+        </p:nvSpPr>
+        <p:spPr>
+          <a:xfrm>
+            <a:off x="7763256" y="3840480"/>
+            <a:ext cx="3483864" cy="310896"/>
+          </a:xfrm>
+          <a:prstGeom prst="rect">
+            <a:avLst/>
+          </a:prstGeom>
+          <a:noFill/>
+        </p:spPr>
+        <p:txBody>
+          <a:bodyPr wrap="square" lIns="0" rIns="0" tIns="0" bIns="0" anchor="ctr">
+            <a:spAutoFit/>
+          </a:bodyPr>
+          <a:lstStyle/>
+          <a:p>
+            <a:pPr algn="l">
+              <a:lnSpc>
+                <a:spcPct val="115000"/>
+              </a:lnSpc>
+            </a:pPr>
+            <a:r>
+              <a:rPr sz="1200" b="1">
+                <a:solidFill>
+                  <a:srgbClr val="008E76"/>
+                </a:solidFill>
+                <a:latin typeface="Microsoft JhengHei"/>
+              </a:rPr>
+              <a:t>筆套→臂套</a:t>
+            </a:r>
+          </a:p>
+        </p:txBody>
+      </p:sp>
+      <p:sp>
+        <p:nvSpPr>
+          <p:cNvPr id="29" name="Rectangle 28"/>
+          <p:cNvSpPr/>
+          <p:nvPr/>
+        </p:nvSpPr>
+        <p:spPr>
+          <a:xfrm>
+            <a:off x="667512" y="4192524"/>
+            <a:ext cx="10853928" cy="397764"/>
+          </a:xfrm>
+          <a:prstGeom prst="rect">
+            <a:avLst/>
+          </a:prstGeom>
+          <a:solidFill>
+            <a:srgbClr val="F4F6F8"/>
+          </a:solidFill>
+          <a:ln w="6350">
+            <a:solidFill>
+              <a:srgbClr val="E6E8EC"/>
+            </a:solidFill>
+          </a:ln>
+          <a:effectLst/>
+        </p:spPr>
+        <p:style>
+          <a:lnRef idx="1">
+            <a:schemeClr val="accent1"/>
+          </a:lnRef>
+          <a:fillRef idx="3">
+            <a:schemeClr val="accent1"/>
+          </a:fillRef>
+          <a:effectRef idx="2">
+            <a:schemeClr val="accent1"/>
+          </a:effectRef>
+          <a:fontRef idx="minor">
+            <a:schemeClr val="lt1"/>
+          </a:fontRef>
+        </p:style>
+        <p:txBody>
+          <a:bodyPr rtlCol="0" anchor="ctr"/>
+          <a:lstStyle/>
+          <a:p>
+            <a:pPr algn="ctr"/>
+          </a:p>
+        </p:txBody>
+      </p:sp>
+      <p:sp>
+        <p:nvSpPr>
+          <p:cNvPr id="30" name="TextBox 29"/>
+          <p:cNvSpPr txBox="1"/>
+          <p:nvPr/>
+        </p:nvSpPr>
+        <p:spPr>
+          <a:xfrm>
+            <a:off x="795528" y="4238244"/>
+            <a:ext cx="3163824" cy="310896"/>
+          </a:xfrm>
+          <a:prstGeom prst="rect">
+            <a:avLst/>
+          </a:prstGeom>
+          <a:noFill/>
+        </p:spPr>
+        <p:txBody>
+          <a:bodyPr wrap="square" lIns="0" rIns="0" tIns="0" bIns="0" anchor="ctr">
+            <a:spAutoFit/>
+          </a:bodyPr>
+          <a:lstStyle/>
+          <a:p>
+            <a:pPr algn="l">
+              <a:lnSpc>
+                <a:spcPct val="115000"/>
+              </a:lnSpc>
+            </a:pPr>
+            <a:r>
+              <a:rPr sz="1200" b="0">
+                <a:solidFill>
+                  <a:srgbClr val="1A1A2E"/>
+                </a:solidFill>
+                <a:latin typeface="Microsoft JhengHei"/>
+              </a:rPr>
+              <a:t>精釀啤酒庫存</a:t>
+            </a:r>
+          </a:p>
+        </p:txBody>
+      </p:sp>
+      <p:sp>
+        <p:nvSpPr>
+          <p:cNvPr id="31" name="TextBox 30"/>
+          <p:cNvSpPr txBox="1"/>
+          <p:nvPr/>
+        </p:nvSpPr>
+        <p:spPr>
+          <a:xfrm>
+            <a:off x="4288536" y="4238244"/>
+            <a:ext cx="3072384" cy="310896"/>
+          </a:xfrm>
+          <a:prstGeom prst="rect">
+            <a:avLst/>
+          </a:prstGeom>
+          <a:noFill/>
+        </p:spPr>
+        <p:txBody>
+          <a:bodyPr wrap="square" lIns="0" rIns="0" tIns="0" bIns="0" anchor="ctr">
+            <a:spAutoFit/>
+          </a:bodyPr>
+          <a:lstStyle/>
+          <a:p>
+            <a:pPr algn="l">
+              <a:lnSpc>
+                <a:spcPct val="115000"/>
+              </a:lnSpc>
+            </a:pPr>
+            <a:r>
+              <a:rPr sz="1200" b="0">
+                <a:solidFill>
+                  <a:srgbClr val="E85D5D"/>
+                </a:solidFill>
+                <a:latin typeface="Microsoft JhengHei"/>
+              </a:rPr>
+              <a:t>儘量啤酒庫存</a:t>
+            </a:r>
+          </a:p>
+        </p:txBody>
+      </p:sp>
+      <p:sp>
+        <p:nvSpPr>
+          <p:cNvPr id="32" name="TextBox 31"/>
+          <p:cNvSpPr txBox="1"/>
+          <p:nvPr/>
+        </p:nvSpPr>
+        <p:spPr>
+          <a:xfrm>
+            <a:off x="7763256" y="4238244"/>
+            <a:ext cx="3483864" cy="310896"/>
+          </a:xfrm>
+          <a:prstGeom prst="rect">
+            <a:avLst/>
+          </a:prstGeom>
+          <a:noFill/>
+        </p:spPr>
+        <p:txBody>
+          <a:bodyPr wrap="square" lIns="0" rIns="0" tIns="0" bIns="0" anchor="ctr">
+            <a:spAutoFit/>
+          </a:bodyPr>
+          <a:lstStyle/>
+          <a:p>
+            <a:pPr algn="l">
+              <a:lnSpc>
+                <a:spcPct val="115000"/>
+              </a:lnSpc>
+            </a:pPr>
+            <a:r>
+              <a:rPr sz="1200" b="1">
+                <a:solidFill>
+                  <a:srgbClr val="008E76"/>
+                </a:solidFill>
+                <a:latin typeface="Microsoft JhengHei"/>
+              </a:rPr>
+              <a:t>儘量→精釀</a:t>
+            </a:r>
+          </a:p>
+        </p:txBody>
+      </p:sp>
+      <p:sp>
+        <p:nvSpPr>
+          <p:cNvPr id="33" name="Rectangle 32"/>
+          <p:cNvSpPr/>
+          <p:nvPr/>
+        </p:nvSpPr>
+        <p:spPr>
+          <a:xfrm>
+            <a:off x="667512" y="4590288"/>
+            <a:ext cx="10853928" cy="397764"/>
+          </a:xfrm>
+          <a:prstGeom prst="rect">
+            <a:avLst/>
+          </a:prstGeom>
+          <a:solidFill>
+            <a:srgbClr val="FFFFFF"/>
+          </a:solidFill>
+          <a:ln w="6350">
+            <a:solidFill>
+              <a:srgbClr val="E6E8EC"/>
+            </a:solidFill>
+          </a:ln>
+          <a:effectLst/>
+        </p:spPr>
+        <p:style>
+          <a:lnRef idx="1">
+            <a:schemeClr val="accent1"/>
+          </a:lnRef>
+          <a:fillRef idx="3">
+            <a:schemeClr val="accent1"/>
+          </a:fillRef>
+          <a:effectRef idx="2">
+            <a:schemeClr val="accent1"/>
+          </a:effectRef>
+          <a:fontRef idx="minor">
+            <a:schemeClr val="lt1"/>
+          </a:fontRef>
+        </p:style>
+        <p:txBody>
+          <a:bodyPr rtlCol="0" anchor="ctr"/>
+          <a:lstStyle/>
+          <a:p>
+            <a:pPr algn="ctr"/>
+          </a:p>
+        </p:txBody>
+      </p:sp>
+      <p:sp>
+        <p:nvSpPr>
+          <p:cNvPr id="34" name="TextBox 33"/>
+          <p:cNvSpPr txBox="1"/>
+          <p:nvPr/>
+        </p:nvSpPr>
+        <p:spPr>
+          <a:xfrm>
+            <a:off x="795528" y="4636008"/>
+            <a:ext cx="3163824" cy="310896"/>
+          </a:xfrm>
+          <a:prstGeom prst="rect">
+            <a:avLst/>
+          </a:prstGeom>
+          <a:noFill/>
+        </p:spPr>
+        <p:txBody>
+          <a:bodyPr wrap="square" lIns="0" rIns="0" tIns="0" bIns="0" anchor="ctr">
+            <a:spAutoFit/>
+          </a:bodyPr>
+          <a:lstStyle/>
+          <a:p>
+            <a:pPr algn="l">
+              <a:lnSpc>
+                <a:spcPct val="115000"/>
+              </a:lnSpc>
+            </a:pPr>
+            <a:r>
+              <a:rPr sz="1200" b="0">
+                <a:solidFill>
+                  <a:srgbClr val="1A1A2E"/>
+                </a:solidFill>
+                <a:latin typeface="Microsoft JhengHei"/>
+              </a:rPr>
+              <a:t>防蚊液庫存</a:t>
+            </a:r>
+          </a:p>
+        </p:txBody>
+      </p:sp>
+      <p:sp>
+        <p:nvSpPr>
+          <p:cNvPr id="35" name="TextBox 34"/>
+          <p:cNvSpPr txBox="1"/>
+          <p:nvPr/>
+        </p:nvSpPr>
+        <p:spPr>
+          <a:xfrm>
+            <a:off x="4288536" y="4636008"/>
+            <a:ext cx="3072384" cy="310896"/>
+          </a:xfrm>
+          <a:prstGeom prst="rect">
+            <a:avLst/>
+          </a:prstGeom>
+          <a:noFill/>
+        </p:spPr>
+        <p:txBody>
+          <a:bodyPr wrap="square" lIns="0" rIns="0" tIns="0" bIns="0" anchor="ctr">
+            <a:spAutoFit/>
+          </a:bodyPr>
+          <a:lstStyle/>
+          <a:p>
+            <a:pPr algn="l">
+              <a:lnSpc>
+                <a:spcPct val="115000"/>
+              </a:lnSpc>
+            </a:pPr>
+            <a:r>
+              <a:rPr sz="1200" b="0">
+                <a:solidFill>
+                  <a:srgbClr val="E85D5D"/>
+                </a:solidFill>
+                <a:latin typeface="Microsoft JhengHei"/>
+              </a:rPr>
+              <a:t>防蚊衣庫存</a:t>
+            </a:r>
+          </a:p>
+        </p:txBody>
+      </p:sp>
+      <p:sp>
+        <p:nvSpPr>
+          <p:cNvPr id="36" name="TextBox 35"/>
+          <p:cNvSpPr txBox="1"/>
+          <p:nvPr/>
+        </p:nvSpPr>
+        <p:spPr>
+          <a:xfrm>
+            <a:off x="7763256" y="4636008"/>
+            <a:ext cx="3483864" cy="310896"/>
+          </a:xfrm>
+          <a:prstGeom prst="rect">
+            <a:avLst/>
+          </a:prstGeom>
+          <a:noFill/>
+        </p:spPr>
+        <p:txBody>
+          <a:bodyPr wrap="square" lIns="0" rIns="0" tIns="0" bIns="0" anchor="ctr">
+            <a:spAutoFit/>
+          </a:bodyPr>
+          <a:lstStyle/>
+          <a:p>
+            <a:pPr algn="l">
+              <a:lnSpc>
+                <a:spcPct val="115000"/>
+              </a:lnSpc>
+            </a:pPr>
+            <a:r>
+              <a:rPr sz="1200" b="1">
+                <a:solidFill>
+                  <a:srgbClr val="008E76"/>
+                </a:solidFill>
+                <a:latin typeface="Microsoft JhengHei"/>
+              </a:rPr>
+              <a:t>防蚊衣→防蚊液</a:t>
+            </a:r>
+          </a:p>
+        </p:txBody>
+      </p:sp>
+      <p:sp>
+        <p:nvSpPr>
+          <p:cNvPr id="37" name="Rectangle 36"/>
+          <p:cNvSpPr/>
+          <p:nvPr/>
+        </p:nvSpPr>
+        <p:spPr>
+          <a:xfrm>
+            <a:off x="667512" y="4988052"/>
+            <a:ext cx="10853928" cy="397764"/>
+          </a:xfrm>
+          <a:prstGeom prst="rect">
+            <a:avLst/>
+          </a:prstGeom>
+          <a:solidFill>
+            <a:srgbClr val="F4F6F8"/>
+          </a:solidFill>
+          <a:ln w="6350">
+            <a:solidFill>
+              <a:srgbClr val="E6E8EC"/>
+            </a:solidFill>
+          </a:ln>
+          <a:effectLst/>
+        </p:spPr>
+        <p:style>
+          <a:lnRef idx="1">
+            <a:schemeClr val="accent1"/>
+          </a:lnRef>
+          <a:fillRef idx="3">
+            <a:schemeClr val="accent1"/>
+          </a:fillRef>
+          <a:effectRef idx="2">
+            <a:schemeClr val="accent1"/>
+          </a:effectRef>
+          <a:fontRef idx="minor">
+            <a:schemeClr val="lt1"/>
+          </a:fontRef>
+        </p:style>
+        <p:txBody>
+          <a:bodyPr rtlCol="0" anchor="ctr"/>
+          <a:lstStyle/>
+          <a:p>
+            <a:pPr algn="ctr"/>
+          </a:p>
+        </p:txBody>
+      </p:sp>
+      <p:sp>
+        <p:nvSpPr>
+          <p:cNvPr id="38" name="TextBox 37"/>
+          <p:cNvSpPr txBox="1"/>
+          <p:nvPr/>
+        </p:nvSpPr>
+        <p:spPr>
+          <a:xfrm>
+            <a:off x="795528" y="5033772"/>
+            <a:ext cx="3163824" cy="310896"/>
+          </a:xfrm>
+          <a:prstGeom prst="rect">
+            <a:avLst/>
+          </a:prstGeom>
+          <a:noFill/>
+        </p:spPr>
+        <p:txBody>
+          <a:bodyPr wrap="square" lIns="0" rIns="0" tIns="0" bIns="0" anchor="ctr">
+            <a:spAutoFit/>
+          </a:bodyPr>
+          <a:lstStyle/>
+          <a:p>
+            <a:pPr algn="l">
+              <a:lnSpc>
+                <a:spcPct val="115000"/>
+              </a:lnSpc>
+            </a:pPr>
+            <a:r>
+              <a:rPr sz="1200" b="0">
+                <a:solidFill>
+                  <a:srgbClr val="1A1A2E"/>
+                </a:solidFill>
+                <a:latin typeface="Microsoft JhengHei"/>
+              </a:rPr>
+              <a:t>衛生紙的帳對不上</a:t>
+            </a:r>
+          </a:p>
+        </p:txBody>
+      </p:sp>
+      <p:sp>
+        <p:nvSpPr>
+          <p:cNvPr id="39" name="TextBox 38"/>
+          <p:cNvSpPr txBox="1"/>
+          <p:nvPr/>
+        </p:nvSpPr>
+        <p:spPr>
+          <a:xfrm>
+            <a:off x="4288536" y="5033772"/>
+            <a:ext cx="3072384" cy="310896"/>
+          </a:xfrm>
+          <a:prstGeom prst="rect">
+            <a:avLst/>
+          </a:prstGeom>
+          <a:noFill/>
+        </p:spPr>
+        <p:txBody>
+          <a:bodyPr wrap="square" lIns="0" rIns="0" tIns="0" bIns="0" anchor="ctr">
+            <a:spAutoFit/>
+          </a:bodyPr>
+          <a:lstStyle/>
+          <a:p>
+            <a:pPr algn="l">
+              <a:lnSpc>
+                <a:spcPct val="115000"/>
+              </a:lnSpc>
+            </a:pPr>
+            <a:r>
+              <a:rPr sz="1200" b="0">
+                <a:solidFill>
+                  <a:srgbClr val="E85D5D"/>
+                </a:solidFill>
+                <a:latin typeface="Microsoft JhengHei"/>
+              </a:rPr>
+              <a:t>衛生紙的賬對不上</a:t>
+            </a:r>
+          </a:p>
+        </p:txBody>
+      </p:sp>
+      <p:sp>
+        <p:nvSpPr>
+          <p:cNvPr id="40" name="TextBox 39"/>
+          <p:cNvSpPr txBox="1"/>
+          <p:nvPr/>
+        </p:nvSpPr>
+        <p:spPr>
+          <a:xfrm>
+            <a:off x="7763256" y="5033772"/>
+            <a:ext cx="3483864" cy="310896"/>
+          </a:xfrm>
+          <a:prstGeom prst="rect">
+            <a:avLst/>
+          </a:prstGeom>
+          <a:noFill/>
+        </p:spPr>
+        <p:txBody>
+          <a:bodyPr wrap="square" lIns="0" rIns="0" tIns="0" bIns="0" anchor="ctr">
+            <a:spAutoFit/>
+          </a:bodyPr>
+          <a:lstStyle/>
+          <a:p>
+            <a:pPr algn="l">
+              <a:lnSpc>
+                <a:spcPct val="115000"/>
+              </a:lnSpc>
+            </a:pPr>
+            <a:r>
+              <a:rPr sz="1200" b="1">
+                <a:solidFill>
+                  <a:srgbClr val="008E76"/>
+                </a:solidFill>
+                <a:latin typeface="Microsoft JhengHei"/>
+              </a:rPr>
+              <a:t>賬→帳（異體字）</a:t>
+            </a:r>
+          </a:p>
+        </p:txBody>
+      </p:sp>
+      <p:sp>
+        <p:nvSpPr>
+          <p:cNvPr id="41" name="Rectangle 40"/>
+          <p:cNvSpPr/>
+          <p:nvPr/>
+        </p:nvSpPr>
+        <p:spPr>
+          <a:xfrm>
+            <a:off x="667512" y="5385816"/>
+            <a:ext cx="10853928" cy="397764"/>
+          </a:xfrm>
+          <a:prstGeom prst="rect">
+            <a:avLst/>
+          </a:prstGeom>
+          <a:solidFill>
+            <a:srgbClr val="FFFFFF"/>
+          </a:solidFill>
+          <a:ln w="6350">
+            <a:solidFill>
+              <a:srgbClr val="E6E8EC"/>
+            </a:solidFill>
+          </a:ln>
+          <a:effectLst/>
+        </p:spPr>
+        <p:style>
+          <a:lnRef idx="1">
+            <a:schemeClr val="accent1"/>
+          </a:lnRef>
+          <a:fillRef idx="3">
+            <a:schemeClr val="accent1"/>
+          </a:fillRef>
+          <a:effectRef idx="2">
+            <a:schemeClr val="accent1"/>
+          </a:effectRef>
+          <a:fontRef idx="minor">
+            <a:schemeClr val="lt1"/>
+          </a:fontRef>
+        </p:style>
+        <p:txBody>
+          <a:bodyPr rtlCol="0" anchor="ctr"/>
+          <a:lstStyle/>
+          <a:p>
+            <a:pPr algn="ctr"/>
+          </a:p>
+        </p:txBody>
+      </p:sp>
+      <p:sp>
+        <p:nvSpPr>
+          <p:cNvPr id="42" name="TextBox 41"/>
+          <p:cNvSpPr txBox="1"/>
+          <p:nvPr/>
+        </p:nvSpPr>
+        <p:spPr>
+          <a:xfrm>
+            <a:off x="795528" y="5431536"/>
+            <a:ext cx="3163824" cy="310896"/>
+          </a:xfrm>
+          <a:prstGeom prst="rect">
+            <a:avLst/>
+          </a:prstGeom>
+          <a:noFill/>
+        </p:spPr>
+        <p:txBody>
+          <a:bodyPr wrap="square" lIns="0" rIns="0" tIns="0" bIns="0" anchor="ctr">
+            <a:spAutoFit/>
+          </a:bodyPr>
+          <a:lstStyle/>
+          <a:p>
+            <a:pPr algn="l">
+              <a:lnSpc>
+                <a:spcPct val="115000"/>
+              </a:lnSpc>
+            </a:pPr>
+            <a:r>
+              <a:rPr sz="1200" b="0">
+                <a:solidFill>
+                  <a:srgbClr val="1A1A2E"/>
+                </a:solidFill>
+                <a:latin typeface="Microsoft JhengHei"/>
+              </a:rPr>
+              <a:t>南倉出十五個瑜珈墊</a:t>
+            </a:r>
+          </a:p>
+        </p:txBody>
+      </p:sp>
+      <p:sp>
+        <p:nvSpPr>
+          <p:cNvPr id="43" name="TextBox 42"/>
+          <p:cNvSpPr txBox="1"/>
+          <p:nvPr/>
+        </p:nvSpPr>
+        <p:spPr>
+          <a:xfrm>
+            <a:off x="4288536" y="5431536"/>
+            <a:ext cx="3072384" cy="310896"/>
+          </a:xfrm>
+          <a:prstGeom prst="rect">
+            <a:avLst/>
+          </a:prstGeom>
+          <a:noFill/>
+        </p:spPr>
+        <p:txBody>
+          <a:bodyPr wrap="square" lIns="0" rIns="0" tIns="0" bIns="0" anchor="ctr">
+            <a:spAutoFit/>
+          </a:bodyPr>
+          <a:lstStyle/>
+          <a:p>
+            <a:pPr algn="l">
+              <a:lnSpc>
+                <a:spcPct val="115000"/>
+              </a:lnSpc>
+            </a:pPr>
+            <a:r>
+              <a:rPr sz="1200" b="0">
+                <a:solidFill>
+                  <a:srgbClr val="E85D5D"/>
+                </a:solidFill>
+                <a:latin typeface="Microsoft JhengHei"/>
+              </a:rPr>
+              <a:t>南倉出十五個瑜伽墊</a:t>
+            </a:r>
+          </a:p>
+        </p:txBody>
+      </p:sp>
+      <p:sp>
+        <p:nvSpPr>
+          <p:cNvPr id="44" name="TextBox 43"/>
+          <p:cNvSpPr txBox="1"/>
+          <p:nvPr/>
+        </p:nvSpPr>
+        <p:spPr>
+          <a:xfrm>
+            <a:off x="7763256" y="5431536"/>
+            <a:ext cx="3483864" cy="310896"/>
+          </a:xfrm>
+          <a:prstGeom prst="rect">
+            <a:avLst/>
+          </a:prstGeom>
+          <a:noFill/>
+        </p:spPr>
+        <p:txBody>
+          <a:bodyPr wrap="square" lIns="0" rIns="0" tIns="0" bIns="0" anchor="ctr">
+            <a:spAutoFit/>
+          </a:bodyPr>
+          <a:lstStyle/>
+          <a:p>
+            <a:pPr algn="l">
+              <a:lnSpc>
+                <a:spcPct val="115000"/>
+              </a:lnSpc>
+            </a:pPr>
+            <a:r>
+              <a:rPr sz="1200" b="1">
+                <a:solidFill>
+                  <a:srgbClr val="008E76"/>
+                </a:solidFill>
+                <a:latin typeface="Microsoft JhengHei"/>
+              </a:rPr>
+              <a:t>瑜伽→瑜珈</a:t>
+            </a:r>
+          </a:p>
+        </p:txBody>
+      </p:sp>
+      <p:sp>
+        <p:nvSpPr>
+          <p:cNvPr id="45" name="Rounded Rectangle 44"/>
+          <p:cNvSpPr/>
+          <p:nvPr/>
+        </p:nvSpPr>
+        <p:spPr>
+          <a:xfrm>
+            <a:off x="667512" y="5943600"/>
+            <a:ext cx="10853928" cy="658368"/>
+          </a:xfrm>
+          <a:prstGeom prst="roundRect">
+            <a:avLst>
+              <a:gd name="adj" fmla="val 8000"/>
+            </a:avLst>
+          </a:prstGeom>
+          <a:solidFill>
+            <a:srgbClr val="E4F7F2"/>
+          </a:solidFill>
+          <a:ln>
+            <a:noFill/>
+          </a:ln>
+          <a:effectLst/>
+        </p:spPr>
+        <p:style>
+          <a:lnRef idx="1">
+            <a:schemeClr val="accent1"/>
+          </a:lnRef>
+          <a:fillRef idx="3">
+            <a:schemeClr val="accent1"/>
+          </a:fillRef>
+          <a:effectRef idx="2">
+            <a:schemeClr val="accent1"/>
+          </a:effectRef>
+          <a:fontRef idx="minor">
+            <a:schemeClr val="lt1"/>
+          </a:fontRef>
+        </p:style>
+        <p:txBody>
+          <a:bodyPr rtlCol="0" anchor="ctr"/>
+          <a:lstStyle/>
+          <a:p>
+            <a:pPr algn="ctr"/>
+          </a:p>
+        </p:txBody>
+      </p:sp>
+      <p:sp>
+        <p:nvSpPr>
+          <p:cNvPr id="46" name="TextBox 45"/>
+          <p:cNvSpPr txBox="1"/>
+          <p:nvPr/>
+        </p:nvSpPr>
+        <p:spPr>
+          <a:xfrm>
+            <a:off x="987552" y="6062472"/>
+            <a:ext cx="10241280" cy="438912"/>
+          </a:xfrm>
+          <a:prstGeom prst="rect">
+            <a:avLst/>
+          </a:prstGeom>
+          <a:noFill/>
+        </p:spPr>
+        <p:txBody>
+          <a:bodyPr wrap="square" lIns="0" rIns="0" tIns="0" bIns="0" anchor="ctr">
+            <a:spAutoFit/>
+          </a:bodyPr>
+          <a:lstStyle/>
+          <a:p>
+            <a:pPr algn="l">
+              <a:lnSpc>
+                <a:spcPct val="115000"/>
+              </a:lnSpc>
+            </a:pPr>
+            <a:r>
+              <a:rPr sz="1250" b="1">
+                <a:solidFill>
+                  <a:srgbClr val="008E76"/>
+                </a:solidFill>
+                <a:latin typeface="Microsoft JhengHei"/>
+              </a:rPr>
+              <a:t>為何拼音救得到：  </a:t>
+            </a:r>
+            <a:r>
+              <a:rPr sz="1200" b="0">
+                <a:solidFill>
+                  <a:srgbClr val="444444"/>
+                </a:solidFill>
+                <a:latin typeface="Arial"/>
+              </a:rPr>
+              <a:t>華數 huashu = 滑鼠 huashu（完全同音）｜藍雅爾基 lanyaerji = 藍牙耳機 lanyaerji｜到齊 daoqi = 到期 daoqi</a:t>
+            </a:r>
+            <a:r>
+              <a:rPr sz="1200" b="0">
+                <a:solidFill>
+                  <a:srgbClr val="444444"/>
+                </a:solidFill>
+                <a:latin typeface="Microsoft JhengHei"/>
+              </a:rPr>
+              <a:t>  → 字形零重疊、拼音一比即中</a:t>
+            </a:r>
+          </a:p>
+        </p:txBody>
+      </p:sp>
+      <p:sp>
+        <p:nvSpPr>
+          <p:cNvPr id="47" name="TextBox 46"/>
+          <p:cNvSpPr txBox="1"/>
+          <p:nvPr/>
+        </p:nvSpPr>
+        <p:spPr>
+          <a:xfrm>
+            <a:off x="11475720" y="6565392"/>
+            <a:ext cx="658368" cy="237744"/>
+          </a:xfrm>
+          <a:prstGeom prst="rect">
+            <a:avLst/>
+          </a:prstGeom>
+          <a:noFill/>
+        </p:spPr>
+        <p:txBody>
+          <a:bodyPr wrap="square" lIns="0" rIns="0" tIns="0" bIns="0" anchor="t">
+            <a:spAutoFit/>
+          </a:bodyPr>
+          <a:lstStyle/>
+          <a:p>
+            <a:pPr algn="r">
+              <a:lnSpc>
+                <a:spcPct val="115000"/>
+              </a:lnSpc>
+            </a:pPr>
+            <a:r>
+              <a:rPr sz="1000" b="0">
+                <a:solidFill>
+                  <a:srgbClr val="BBBBBB"/>
+                </a:solidFill>
+                <a:latin typeface="Arial"/>
+              </a:rPr>
+              <a:t>22</a:t>
+            </a:r>
+          </a:p>
+        </p:txBody>
+      </p:sp>
+    </p:spTree>
+  </p:cSld>
+  <p:clrMapOvr>
+    <a:masterClrMapping/>
+  </p:clrMapOvr>
+</p:sld>
+</file>
+
+<file path=ppt/slides/slide23.xml><?xml version="1.0" encoding="utf-8"?>
+<p:sld xmlns:a="http://schemas.openxmlformats.org/drawingml/2006/main" xmlns:p="http://schemas.openxmlformats.org/presentationml/2006/main" xmlns:r="http://schemas.openxmlformats.org/officeDocument/2006/relationships">
+  <p:cSld>
+    <p:spTree>
+      <p:nvGrpSpPr>
+        <p:cNvPr id="1" name=""/>
+        <p:cNvGrpSpPr/>
+        <p:nvPr/>
+      </p:nvGrpSpPr>
+      <p:grpSpPr/>
+      <p:sp>
+        <p:nvSpPr>
+          <p:cNvPr id="2" name="TextBox 1"/>
+          <p:cNvSpPr txBox="1"/>
+          <p:nvPr/>
+        </p:nvSpPr>
+        <p:spPr>
+          <a:xfrm>
+            <a:off x="667512" y="310896"/>
+            <a:ext cx="10789920" cy="274320"/>
+          </a:xfrm>
+          <a:prstGeom prst="rect">
+            <a:avLst/>
+          </a:prstGeom>
+          <a:noFill/>
+        </p:spPr>
+        <p:txBody>
+          <a:bodyPr wrap="square" lIns="0" rIns="0" tIns="0" bIns="0" anchor="t">
+            <a:spAutoFit/>
+          </a:bodyPr>
+          <a:lstStyle/>
+          <a:p>
+            <a:pPr algn="l">
+              <a:lnSpc>
+                <a:spcPct val="115000"/>
+              </a:lnSpc>
+            </a:pPr>
+            <a:r>
+              <a:rPr sz="1250" b="1">
+                <a:solidFill>
+                  <a:srgbClr val="00C49A"/>
+                </a:solidFill>
+                <a:latin typeface="Arial"/>
+              </a:rPr>
+              <a:t>VOICE POC · 極限與對策</a:t>
+            </a:r>
+          </a:p>
+        </p:txBody>
+      </p:sp>
+      <p:sp>
+        <p:nvSpPr>
+          <p:cNvPr id="3" name="TextBox 2"/>
+          <p:cNvSpPr txBox="1"/>
+          <p:nvPr/>
+        </p:nvSpPr>
+        <p:spPr>
+          <a:xfrm>
+            <a:off x="667512" y="585216"/>
+            <a:ext cx="10789920" cy="566928"/>
+          </a:xfrm>
+          <a:prstGeom prst="rect">
+            <a:avLst/>
+          </a:prstGeom>
+          <a:noFill/>
+        </p:spPr>
+        <p:txBody>
+          <a:bodyPr wrap="square" lIns="0" rIns="0" tIns="0" bIns="0" anchor="t">
+            <a:spAutoFit/>
+          </a:bodyPr>
+          <a:lstStyle/>
+          <a:p>
+            <a:pPr algn="l">
+              <a:lnSpc>
+                <a:spcPct val="115000"/>
+              </a:lnSpc>
+            </a:pPr>
+            <a:r>
+              <a:rPr sz="2700" b="1">
+                <a:solidFill>
+                  <a:srgbClr val="1A1A2E"/>
+                </a:solidFill>
+                <a:latin typeface="Microsoft JhengHei"/>
+              </a:rPr>
+              <a:t>救不回的也照實講：270M 的天花板</a:t>
+            </a:r>
+          </a:p>
+        </p:txBody>
+      </p:sp>
+      <p:sp>
+        <p:nvSpPr>
+          <p:cNvPr id="4" name="TextBox 3"/>
+          <p:cNvSpPr txBox="1"/>
+          <p:nvPr/>
+        </p:nvSpPr>
+        <p:spPr>
+          <a:xfrm>
+            <a:off x="667512" y="1261872"/>
+            <a:ext cx="10789920" cy="365760"/>
+          </a:xfrm>
+          <a:prstGeom prst="rect">
+            <a:avLst/>
+          </a:prstGeom>
+          <a:noFill/>
+        </p:spPr>
+        <p:txBody>
+          <a:bodyPr wrap="square" lIns="0" rIns="0" tIns="0" bIns="0" anchor="t">
+            <a:spAutoFit/>
+          </a:bodyPr>
+          <a:lstStyle/>
+          <a:p>
+            <a:pPr algn="l">
+              <a:lnSpc>
+                <a:spcPct val="115000"/>
+              </a:lnSpc>
+            </a:pPr>
+            <a:r>
+              <a:rPr sz="1300" b="0">
+                <a:solidFill>
+                  <a:srgbClr val="555555"/>
+                </a:solidFill>
+                <a:latin typeface="Microsoft JhengHei"/>
+              </a:rPr>
+              <a:t>誠實區分：同音/音近能救；但 ASR 把整詞聽成毫不相干的詞（字形+發音都差），容錯層無能為力。</a:t>
+            </a:r>
+          </a:p>
+        </p:txBody>
+      </p:sp>
+      <p:sp>
+        <p:nvSpPr>
+          <p:cNvPr id="5" name="Rounded Rectangle 4"/>
+          <p:cNvSpPr/>
+          <p:nvPr/>
+        </p:nvSpPr>
+        <p:spPr>
+          <a:xfrm>
+            <a:off x="667512" y="1783080"/>
+            <a:ext cx="6537960" cy="3794760"/>
+          </a:xfrm>
+          <a:prstGeom prst="roundRect">
+            <a:avLst>
+              <a:gd name="adj" fmla="val 8000"/>
+            </a:avLst>
+          </a:prstGeom>
+          <a:solidFill>
+            <a:srgbClr val="F4F6F8"/>
+          </a:solidFill>
+          <a:ln>
+            <a:noFill/>
+          </a:ln>
+          <a:effectLst/>
+        </p:spPr>
+        <p:style>
+          <a:lnRef idx="1">
+            <a:schemeClr val="accent1"/>
+          </a:lnRef>
+          <a:fillRef idx="3">
+            <a:schemeClr val="accent1"/>
+          </a:fillRef>
+          <a:effectRef idx="2">
+            <a:schemeClr val="accent1"/>
+          </a:effectRef>
+          <a:fontRef idx="minor">
+            <a:schemeClr val="lt1"/>
+          </a:fontRef>
+        </p:style>
+        <p:txBody>
+          <a:bodyPr rtlCol="0" anchor="ctr"/>
+          <a:lstStyle/>
+          <a:p>
+            <a:pPr algn="ctr"/>
+          </a:p>
+        </p:txBody>
+      </p:sp>
+      <p:sp>
+        <p:nvSpPr>
+          <p:cNvPr id="6" name="TextBox 5"/>
+          <p:cNvSpPr txBox="1"/>
+          <p:nvPr/>
+        </p:nvSpPr>
+        <p:spPr>
+          <a:xfrm>
+            <a:off x="941832" y="1947672"/>
+            <a:ext cx="6035040" cy="329184"/>
+          </a:xfrm>
+          <a:prstGeom prst="rect">
+            <a:avLst/>
+          </a:prstGeom>
+          <a:noFill/>
+        </p:spPr>
+        <p:txBody>
+          <a:bodyPr wrap="square" lIns="0" rIns="0" tIns="0" bIns="0" anchor="t">
+            <a:spAutoFit/>
+          </a:bodyPr>
+          <a:lstStyle/>
+          <a:p>
+            <a:pPr algn="l">
+              <a:lnSpc>
+                <a:spcPct val="115000"/>
+              </a:lnSpc>
+            </a:pPr>
+            <a:r>
+              <a:rPr sz="1450" b="1">
+                <a:solidFill>
+                  <a:srgbClr val="E85D5D"/>
+                </a:solidFill>
+                <a:latin typeface="Microsoft JhengHei"/>
+              </a:rPr>
+              <a:t>整詞崩壞 → 救不回（FAIL）</a:t>
+            </a:r>
+          </a:p>
+        </p:txBody>
+      </p:sp>
+      <p:sp>
+        <p:nvSpPr>
+          <p:cNvPr id="7" name="TextBox 6"/>
+          <p:cNvSpPr txBox="1"/>
+          <p:nvPr/>
+        </p:nvSpPr>
+        <p:spPr>
+          <a:xfrm>
+            <a:off x="941832" y="2377440"/>
+            <a:ext cx="2926080" cy="274320"/>
+          </a:xfrm>
+          <a:prstGeom prst="rect">
+            <a:avLst/>
+          </a:prstGeom>
+          <a:noFill/>
+        </p:spPr>
+        <p:txBody>
+          <a:bodyPr wrap="square" lIns="0" rIns="0" tIns="0" bIns="0" anchor="t">
+            <a:spAutoFit/>
+          </a:bodyPr>
+          <a:lstStyle/>
+          <a:p>
+            <a:pPr algn="l">
+              <a:lnSpc>
+                <a:spcPct val="115000"/>
+              </a:lnSpc>
+            </a:pPr>
+            <a:r>
+              <a:rPr sz="1100" b="1">
+                <a:solidFill>
+                  <a:srgbClr val="777777"/>
+                </a:solidFill>
+                <a:latin typeface="Microsoft JhengHei"/>
+              </a:rPr>
+              <a:t>原句</a:t>
+            </a:r>
+          </a:p>
+        </p:txBody>
+      </p:sp>
+      <p:sp>
+        <p:nvSpPr>
+          <p:cNvPr id="8" name="TextBox 7"/>
+          <p:cNvSpPr txBox="1"/>
+          <p:nvPr/>
+        </p:nvSpPr>
+        <p:spPr>
+          <a:xfrm>
+            <a:off x="4096512" y="2377440"/>
+            <a:ext cx="2926080" cy="274320"/>
+          </a:xfrm>
+          <a:prstGeom prst="rect">
+            <a:avLst/>
+          </a:prstGeom>
+          <a:noFill/>
+        </p:spPr>
+        <p:txBody>
+          <a:bodyPr wrap="square" lIns="0" rIns="0" tIns="0" bIns="0" anchor="t">
+            <a:spAutoFit/>
+          </a:bodyPr>
+          <a:lstStyle/>
+          <a:p>
+            <a:pPr algn="l">
+              <a:lnSpc>
+                <a:spcPct val="115000"/>
+              </a:lnSpc>
+            </a:pPr>
+            <a:r>
+              <a:rPr sz="1100" b="1">
+                <a:solidFill>
+                  <a:srgbClr val="777777"/>
+                </a:solidFill>
+                <a:latin typeface="Microsoft JhengHei"/>
+              </a:rPr>
+              <a:t>ASR 聽成</a:t>
+            </a:r>
+          </a:p>
+        </p:txBody>
+      </p:sp>
+      <p:sp>
+        <p:nvSpPr>
+          <p:cNvPr id="9" name="TextBox 8"/>
+          <p:cNvSpPr txBox="1"/>
+          <p:nvPr/>
+        </p:nvSpPr>
+        <p:spPr>
+          <a:xfrm>
+            <a:off x="941832" y="2670048"/>
+            <a:ext cx="3063240" cy="365760"/>
+          </a:xfrm>
+          <a:prstGeom prst="rect">
+            <a:avLst/>
+          </a:prstGeom>
+          <a:noFill/>
+        </p:spPr>
+        <p:txBody>
+          <a:bodyPr wrap="square" lIns="0" rIns="0" tIns="0" bIns="0" anchor="ctr">
+            <a:spAutoFit/>
+          </a:bodyPr>
+          <a:lstStyle/>
+          <a:p>
+            <a:pPr algn="l">
+              <a:lnSpc>
+                <a:spcPct val="115000"/>
+              </a:lnSpc>
+            </a:pPr>
+            <a:r>
+              <a:rPr sz="1200" b="0">
+                <a:solidFill>
+                  <a:srgbClr val="1A1A2E"/>
+                </a:solidFill>
+                <a:latin typeface="Microsoft JhengHei"/>
+              </a:rPr>
+              <a:t>瑜珈墊有貨嗎</a:t>
+            </a:r>
+          </a:p>
+        </p:txBody>
+      </p:sp>
+      <p:sp>
+        <p:nvSpPr>
+          <p:cNvPr id="10" name="TextBox 9"/>
+          <p:cNvSpPr txBox="1"/>
+          <p:nvPr/>
+        </p:nvSpPr>
+        <p:spPr>
+          <a:xfrm>
+            <a:off x="4096512" y="2670048"/>
+            <a:ext cx="2926080" cy="365760"/>
+          </a:xfrm>
+          <a:prstGeom prst="rect">
+            <a:avLst/>
+          </a:prstGeom>
+          <a:noFill/>
+        </p:spPr>
+        <p:txBody>
+          <a:bodyPr wrap="square" lIns="0" rIns="0" tIns="0" bIns="0" anchor="ctr">
+            <a:spAutoFit/>
+          </a:bodyPr>
+          <a:lstStyle/>
+          <a:p>
+            <a:pPr algn="l">
+              <a:lnSpc>
+                <a:spcPct val="115000"/>
+              </a:lnSpc>
+            </a:pPr>
+            <a:r>
+              <a:rPr sz="1200" b="0">
+                <a:solidFill>
+                  <a:srgbClr val="E85D5D"/>
+                </a:solidFill>
+                <a:latin typeface="Microsoft JhengHei"/>
+              </a:rPr>
+              <a:t>→ 女藥店有貨嗎</a:t>
+            </a:r>
+          </a:p>
+        </p:txBody>
+      </p:sp>
+      <p:sp>
+        <p:nvSpPr>
+          <p:cNvPr id="11" name="TextBox 10"/>
+          <p:cNvSpPr txBox="1"/>
+          <p:nvPr/>
+        </p:nvSpPr>
+        <p:spPr>
+          <a:xfrm>
+            <a:off x="941832" y="3104388"/>
+            <a:ext cx="3063240" cy="365760"/>
+          </a:xfrm>
+          <a:prstGeom prst="rect">
+            <a:avLst/>
+          </a:prstGeom>
+          <a:noFill/>
+        </p:spPr>
+        <p:txBody>
+          <a:bodyPr wrap="square" lIns="0" rIns="0" tIns="0" bIns="0" anchor="ctr">
+            <a:spAutoFit/>
+          </a:bodyPr>
+          <a:lstStyle/>
+          <a:p>
+            <a:pPr algn="l">
+              <a:lnSpc>
+                <a:spcPct val="115000"/>
+              </a:lnSpc>
+            </a:pPr>
+            <a:r>
+              <a:rPr sz="1200" b="0">
+                <a:solidFill>
+                  <a:srgbClr val="1A1A2E"/>
+                </a:solidFill>
+                <a:latin typeface="Microsoft JhengHei"/>
+              </a:rPr>
+              <a:t>露營帳篷有貨嗎</a:t>
+            </a:r>
+          </a:p>
+        </p:txBody>
+      </p:sp>
+      <p:sp>
+        <p:nvSpPr>
+          <p:cNvPr id="12" name="TextBox 11"/>
+          <p:cNvSpPr txBox="1"/>
+          <p:nvPr/>
+        </p:nvSpPr>
+        <p:spPr>
+          <a:xfrm>
+            <a:off x="4096512" y="3104388"/>
+            <a:ext cx="2926080" cy="365760"/>
+          </a:xfrm>
+          <a:prstGeom prst="rect">
+            <a:avLst/>
+          </a:prstGeom>
+          <a:noFill/>
+        </p:spPr>
+        <p:txBody>
+          <a:bodyPr wrap="square" lIns="0" rIns="0" tIns="0" bIns="0" anchor="ctr">
+            <a:spAutoFit/>
+          </a:bodyPr>
+          <a:lstStyle/>
+          <a:p>
+            <a:pPr algn="l">
+              <a:lnSpc>
+                <a:spcPct val="115000"/>
+              </a:lnSpc>
+            </a:pPr>
+            <a:r>
+              <a:rPr sz="1200" b="0">
+                <a:solidFill>
+                  <a:srgbClr val="E85D5D"/>
+                </a:solidFill>
+                <a:latin typeface="Microsoft JhengHei"/>
+              </a:rPr>
+              <a:t>→ 女人占房有好嗎</a:t>
+            </a:r>
+          </a:p>
+        </p:txBody>
+      </p:sp>
+      <p:sp>
+        <p:nvSpPr>
+          <p:cNvPr id="13" name="TextBox 12"/>
+          <p:cNvSpPr txBox="1"/>
+          <p:nvPr/>
+        </p:nvSpPr>
+        <p:spPr>
+          <a:xfrm>
+            <a:off x="941832" y="3538728"/>
+            <a:ext cx="3063240" cy="365760"/>
+          </a:xfrm>
+          <a:prstGeom prst="rect">
+            <a:avLst/>
+          </a:prstGeom>
+          <a:noFill/>
+        </p:spPr>
+        <p:txBody>
+          <a:bodyPr wrap="square" lIns="0" rIns="0" tIns="0" bIns="0" anchor="ctr">
+            <a:spAutoFit/>
+          </a:bodyPr>
+          <a:lstStyle/>
+          <a:p>
+            <a:pPr algn="l">
+              <a:lnSpc>
+                <a:spcPct val="115000"/>
+              </a:lnSpc>
+            </a:pPr>
+            <a:r>
+              <a:rPr sz="1200" b="0">
+                <a:solidFill>
+                  <a:srgbClr val="1A1A2E"/>
+                </a:solidFill>
+                <a:latin typeface="Microsoft JhengHei"/>
+              </a:rPr>
+              <a:t>北倉的滑鼠有多少</a:t>
+            </a:r>
+          </a:p>
+        </p:txBody>
+      </p:sp>
+      <p:sp>
+        <p:nvSpPr>
+          <p:cNvPr id="14" name="TextBox 13"/>
+          <p:cNvSpPr txBox="1"/>
+          <p:nvPr/>
+        </p:nvSpPr>
+        <p:spPr>
+          <a:xfrm>
+            <a:off x="4096512" y="3538728"/>
+            <a:ext cx="2926080" cy="365760"/>
+          </a:xfrm>
+          <a:prstGeom prst="rect">
+            <a:avLst/>
+          </a:prstGeom>
+          <a:noFill/>
+        </p:spPr>
+        <p:txBody>
+          <a:bodyPr wrap="square" lIns="0" rIns="0" tIns="0" bIns="0" anchor="ctr">
+            <a:spAutoFit/>
+          </a:bodyPr>
+          <a:lstStyle/>
+          <a:p>
+            <a:pPr algn="l">
+              <a:lnSpc>
+                <a:spcPct val="115000"/>
+              </a:lnSpc>
+            </a:pPr>
+            <a:r>
+              <a:rPr sz="1200" b="0">
+                <a:solidFill>
+                  <a:srgbClr val="E85D5D"/>
+                </a:solidFill>
+                <a:latin typeface="Microsoft JhengHei"/>
+              </a:rPr>
+              <a:t>→ 北倉的瓦數有多少</a:t>
+            </a:r>
+          </a:p>
+        </p:txBody>
+      </p:sp>
+      <p:sp>
+        <p:nvSpPr>
+          <p:cNvPr id="15" name="TextBox 14"/>
+          <p:cNvSpPr txBox="1"/>
+          <p:nvPr/>
+        </p:nvSpPr>
+        <p:spPr>
+          <a:xfrm>
+            <a:off x="941832" y="3973068"/>
+            <a:ext cx="3063240" cy="365760"/>
+          </a:xfrm>
+          <a:prstGeom prst="rect">
+            <a:avLst/>
+          </a:prstGeom>
+          <a:noFill/>
+        </p:spPr>
+        <p:txBody>
+          <a:bodyPr wrap="square" lIns="0" rIns="0" tIns="0" bIns="0" anchor="ctr">
+            <a:spAutoFit/>
+          </a:bodyPr>
+          <a:lstStyle/>
+          <a:p>
+            <a:pPr algn="l">
+              <a:lnSpc>
+                <a:spcPct val="115000"/>
+              </a:lnSpc>
+            </a:pPr>
+            <a:r>
+              <a:rPr sz="1200" b="0">
+                <a:solidFill>
+                  <a:srgbClr val="1A1A2E"/>
+                </a:solidFill>
+                <a:latin typeface="Microsoft JhengHei"/>
+              </a:rPr>
+              <a:t>有缺的列出來</a:t>
+            </a:r>
+          </a:p>
+        </p:txBody>
+      </p:sp>
+      <p:sp>
+        <p:nvSpPr>
+          <p:cNvPr id="16" name="TextBox 15"/>
+          <p:cNvSpPr txBox="1"/>
+          <p:nvPr/>
+        </p:nvSpPr>
+        <p:spPr>
+          <a:xfrm>
+            <a:off x="4096512" y="3973068"/>
+            <a:ext cx="2926080" cy="365760"/>
+          </a:xfrm>
+          <a:prstGeom prst="rect">
+            <a:avLst/>
+          </a:prstGeom>
+          <a:noFill/>
+        </p:spPr>
+        <p:txBody>
+          <a:bodyPr wrap="square" lIns="0" rIns="0" tIns="0" bIns="0" anchor="ctr">
+            <a:spAutoFit/>
+          </a:bodyPr>
+          <a:lstStyle/>
+          <a:p>
+            <a:pPr algn="l">
+              <a:lnSpc>
+                <a:spcPct val="115000"/>
+              </a:lnSpc>
+            </a:pPr>
+            <a:r>
+              <a:rPr sz="1200" b="0">
+                <a:solidFill>
+                  <a:srgbClr val="E85D5D"/>
+                </a:solidFill>
+                <a:latin typeface="Microsoft JhengHei"/>
+              </a:rPr>
+              <a:t>→ 有趣的列出來</a:t>
+            </a:r>
+          </a:p>
+        </p:txBody>
+      </p:sp>
+      <p:sp>
+        <p:nvSpPr>
+          <p:cNvPr id="17" name="TextBox 16"/>
+          <p:cNvSpPr txBox="1"/>
+          <p:nvPr/>
+        </p:nvSpPr>
+        <p:spPr>
+          <a:xfrm>
+            <a:off x="941832" y="4407408"/>
+            <a:ext cx="3063240" cy="365760"/>
+          </a:xfrm>
+          <a:prstGeom prst="rect">
+            <a:avLst/>
+          </a:prstGeom>
+          <a:noFill/>
+        </p:spPr>
+        <p:txBody>
+          <a:bodyPr wrap="square" lIns="0" rIns="0" tIns="0" bIns="0" anchor="ctr">
+            <a:spAutoFit/>
+          </a:bodyPr>
+          <a:lstStyle/>
+          <a:p>
+            <a:pPr algn="l">
+              <a:lnSpc>
+                <a:spcPct val="115000"/>
+              </a:lnSpc>
+            </a:pPr>
+            <a:r>
+              <a:rPr sz="1200" b="0">
+                <a:solidFill>
+                  <a:srgbClr val="1A1A2E"/>
+                </a:solidFill>
+                <a:latin typeface="Microsoft JhengHei"/>
+              </a:rPr>
+              <a:t>北倉進三十瓶防蚊液</a:t>
+            </a:r>
+          </a:p>
+        </p:txBody>
+      </p:sp>
+      <p:sp>
+        <p:nvSpPr>
+          <p:cNvPr id="18" name="TextBox 17"/>
+          <p:cNvSpPr txBox="1"/>
+          <p:nvPr/>
+        </p:nvSpPr>
+        <p:spPr>
+          <a:xfrm>
+            <a:off x="4096512" y="4407408"/>
+            <a:ext cx="2926080" cy="365760"/>
+          </a:xfrm>
+          <a:prstGeom prst="rect">
+            <a:avLst/>
+          </a:prstGeom>
+          <a:noFill/>
+        </p:spPr>
+        <p:txBody>
+          <a:bodyPr wrap="square" lIns="0" rIns="0" tIns="0" bIns="0" anchor="ctr">
+            <a:spAutoFit/>
+          </a:bodyPr>
+          <a:lstStyle/>
+          <a:p>
+            <a:pPr algn="l">
+              <a:lnSpc>
+                <a:spcPct val="115000"/>
+              </a:lnSpc>
+            </a:pPr>
+            <a:r>
+              <a:rPr sz="1200" b="0">
+                <a:solidFill>
+                  <a:srgbClr val="E85D5D"/>
+                </a:solidFill>
+                <a:latin typeface="Microsoft JhengHei"/>
+              </a:rPr>
+              <a:t>→ …近三十品防瘟疫</a:t>
+            </a:r>
+          </a:p>
+        </p:txBody>
+      </p:sp>
+      <p:sp>
+        <p:nvSpPr>
+          <p:cNvPr id="19" name="TextBox 18"/>
+          <p:cNvSpPr txBox="1"/>
+          <p:nvPr/>
+        </p:nvSpPr>
+        <p:spPr>
+          <a:xfrm>
+            <a:off x="941832" y="4841748"/>
+            <a:ext cx="3063240" cy="365760"/>
+          </a:xfrm>
+          <a:prstGeom prst="rect">
+            <a:avLst/>
+          </a:prstGeom>
+          <a:noFill/>
+        </p:spPr>
+        <p:txBody>
+          <a:bodyPr wrap="square" lIns="0" rIns="0" tIns="0" bIns="0" anchor="ctr">
+            <a:spAutoFit/>
+          </a:bodyPr>
+          <a:lstStyle/>
+          <a:p>
+            <a:pPr algn="l">
+              <a:lnSpc>
+                <a:spcPct val="115000"/>
+              </a:lnSpc>
+            </a:pPr>
+            <a:r>
+              <a:rPr sz="1200" b="0">
+                <a:solidFill>
+                  <a:srgbClr val="1A1A2E"/>
+                </a:solidFill>
+                <a:latin typeface="Microsoft JhengHei"/>
+              </a:rPr>
+              <a:t>南倉收了三十個啤酒</a:t>
+            </a:r>
+          </a:p>
+        </p:txBody>
+      </p:sp>
+      <p:sp>
+        <p:nvSpPr>
+          <p:cNvPr id="20" name="TextBox 19"/>
+          <p:cNvSpPr txBox="1"/>
+          <p:nvPr/>
+        </p:nvSpPr>
+        <p:spPr>
+          <a:xfrm>
+            <a:off x="4096512" y="4841748"/>
+            <a:ext cx="2926080" cy="365760"/>
+          </a:xfrm>
+          <a:prstGeom prst="rect">
+            <a:avLst/>
+          </a:prstGeom>
+          <a:noFill/>
+        </p:spPr>
+        <p:txBody>
+          <a:bodyPr wrap="square" lIns="0" rIns="0" tIns="0" bIns="0" anchor="ctr">
+            <a:spAutoFit/>
+          </a:bodyPr>
+          <a:lstStyle/>
+          <a:p>
+            <a:pPr algn="l">
+              <a:lnSpc>
+                <a:spcPct val="115000"/>
+              </a:lnSpc>
+            </a:pPr>
+            <a:r>
+              <a:rPr sz="1200" b="0">
+                <a:solidFill>
+                  <a:srgbClr val="E85D5D"/>
+                </a:solidFill>
+                <a:latin typeface="Microsoft JhengHei"/>
+              </a:rPr>
+              <a:t>→ …收了三十個皮</a:t>
+            </a:r>
+          </a:p>
+        </p:txBody>
+      </p:sp>
+      <p:sp>
+        <p:nvSpPr>
+          <p:cNvPr id="21" name="TextBox 20"/>
+          <p:cNvSpPr txBox="1"/>
+          <p:nvPr/>
+        </p:nvSpPr>
+        <p:spPr>
+          <a:xfrm>
+            <a:off x="941832" y="5276088"/>
+            <a:ext cx="3063240" cy="365760"/>
+          </a:xfrm>
+          <a:prstGeom prst="rect">
+            <a:avLst/>
+          </a:prstGeom>
+          <a:noFill/>
+        </p:spPr>
+        <p:txBody>
+          <a:bodyPr wrap="square" lIns="0" rIns="0" tIns="0" bIns="0" anchor="ctr">
+            <a:spAutoFit/>
+          </a:bodyPr>
+          <a:lstStyle/>
+          <a:p>
+            <a:pPr algn="l">
+              <a:lnSpc>
+                <a:spcPct val="115000"/>
+              </a:lnSpc>
+            </a:pPr>
+            <a:r>
+              <a:rPr sz="1200" b="0">
+                <a:solidFill>
+                  <a:srgbClr val="1A1A2E"/>
+                </a:solidFill>
+                <a:latin typeface="Microsoft JhengHei"/>
+              </a:rPr>
+              <a:t>啞鈴庫存</a:t>
+            </a:r>
+          </a:p>
+        </p:txBody>
+      </p:sp>
+      <p:sp>
+        <p:nvSpPr>
+          <p:cNvPr id="22" name="TextBox 21"/>
+          <p:cNvSpPr txBox="1"/>
+          <p:nvPr/>
+        </p:nvSpPr>
+        <p:spPr>
+          <a:xfrm>
+            <a:off x="4096512" y="5276088"/>
+            <a:ext cx="2926080" cy="365760"/>
+          </a:xfrm>
+          <a:prstGeom prst="rect">
+            <a:avLst/>
+          </a:prstGeom>
+          <a:noFill/>
+        </p:spPr>
+        <p:txBody>
+          <a:bodyPr wrap="square" lIns="0" rIns="0" tIns="0" bIns="0" anchor="ctr">
+            <a:spAutoFit/>
+          </a:bodyPr>
+          <a:lstStyle/>
+          <a:p>
+            <a:pPr algn="l">
+              <a:lnSpc>
+                <a:spcPct val="115000"/>
+              </a:lnSpc>
+            </a:pPr>
+            <a:r>
+              <a:rPr sz="1200" b="0">
+                <a:solidFill>
+                  <a:srgbClr val="E85D5D"/>
+                </a:solidFill>
+                <a:latin typeface="Microsoft JhengHei"/>
+              </a:rPr>
+              <a:t>→ 10 庫存</a:t>
+            </a:r>
+          </a:p>
+        </p:txBody>
+      </p:sp>
+      <p:sp>
+        <p:nvSpPr>
+          <p:cNvPr id="23" name="Rounded Rectangle 22"/>
+          <p:cNvSpPr/>
+          <p:nvPr/>
+        </p:nvSpPr>
+        <p:spPr>
+          <a:xfrm>
+            <a:off x="7498079" y="1783080"/>
+            <a:ext cx="4023360" cy="3794760"/>
+          </a:xfrm>
+          <a:prstGeom prst="roundRect">
+            <a:avLst>
+              <a:gd name="adj" fmla="val 8000"/>
+            </a:avLst>
+          </a:prstGeom>
+          <a:solidFill>
+            <a:srgbClr val="1A1A2E"/>
+          </a:solidFill>
+          <a:ln>
+            <a:noFill/>
+          </a:ln>
+          <a:effectLst/>
+        </p:spPr>
+        <p:style>
+          <a:lnRef idx="1">
+            <a:schemeClr val="accent1"/>
+          </a:lnRef>
+          <a:fillRef idx="3">
+            <a:schemeClr val="accent1"/>
+          </a:fillRef>
+          <a:effectRef idx="2">
+            <a:schemeClr val="accent1"/>
+          </a:effectRef>
+          <a:fontRef idx="minor">
+            <a:schemeClr val="lt1"/>
+          </a:fontRef>
+        </p:style>
+        <p:txBody>
+          <a:bodyPr rtlCol="0" anchor="ctr"/>
+          <a:lstStyle/>
+          <a:p>
+            <a:pPr algn="ctr"/>
+          </a:p>
+        </p:txBody>
+      </p:sp>
+      <p:sp>
+        <p:nvSpPr>
+          <p:cNvPr id="24" name="TextBox 23"/>
+          <p:cNvSpPr txBox="1"/>
+          <p:nvPr/>
+        </p:nvSpPr>
+        <p:spPr>
+          <a:xfrm>
+            <a:off x="7790687" y="1947672"/>
+            <a:ext cx="3474720" cy="329184"/>
+          </a:xfrm>
+          <a:prstGeom prst="rect">
+            <a:avLst/>
+          </a:prstGeom>
+          <a:noFill/>
+        </p:spPr>
+        <p:txBody>
+          <a:bodyPr wrap="square" lIns="0" rIns="0" tIns="0" bIns="0" anchor="t">
+            <a:spAutoFit/>
+          </a:bodyPr>
+          <a:lstStyle/>
+          <a:p>
+            <a:pPr algn="l">
+              <a:lnSpc>
+                <a:spcPct val="115000"/>
+              </a:lnSpc>
+            </a:pPr>
+            <a:r>
+              <a:rPr sz="1450" b="1">
+                <a:solidFill>
+                  <a:srgbClr val="00C49A"/>
+                </a:solidFill>
+                <a:latin typeface="Microsoft JhengHei"/>
+              </a:rPr>
+              <a:t>對策：人在迴路即容錯</a:t>
+            </a:r>
+          </a:p>
+        </p:txBody>
+      </p:sp>
+      <p:sp>
+        <p:nvSpPr>
+          <p:cNvPr id="25" name="Oval 24"/>
+          <p:cNvSpPr/>
+          <p:nvPr/>
+        </p:nvSpPr>
+        <p:spPr>
+          <a:xfrm>
+            <a:off x="7790687" y="2395728"/>
+            <a:ext cx="365760" cy="365760"/>
+          </a:xfrm>
+          <a:prstGeom prst="ellipse">
             <a:avLst/>
           </a:prstGeom>
           <a:solidFill>
@@ -18933,6 +23886,790 @@
       </p:sp>
       <p:sp>
         <p:nvSpPr>
+          <p:cNvPr id="26" name="TextBox 25"/>
+          <p:cNvSpPr txBox="1"/>
+          <p:nvPr/>
+        </p:nvSpPr>
+        <p:spPr>
+          <a:xfrm>
+            <a:off x="7790687" y="2382012"/>
+            <a:ext cx="365760" cy="365760"/>
+          </a:xfrm>
+          <a:prstGeom prst="rect">
+            <a:avLst/>
+          </a:prstGeom>
+          <a:noFill/>
+        </p:spPr>
+        <p:txBody>
+          <a:bodyPr wrap="square" lIns="0" rIns="0" tIns="0" bIns="0" anchor="ctr">
+            <a:spAutoFit/>
+          </a:bodyPr>
+          <a:lstStyle/>
+          <a:p>
+            <a:pPr algn="ctr">
+              <a:lnSpc>
+                <a:spcPct val="115000"/>
+              </a:lnSpc>
+            </a:pPr>
+            <a:r>
+              <a:rPr sz="1200" b="1">
+                <a:solidFill>
+                  <a:srgbClr val="1A1A2E"/>
+                </a:solidFill>
+                <a:latin typeface="Microsoft JhengHei"/>
+              </a:rPr>
+              <a:t>語</a:t>
+            </a:r>
+          </a:p>
+        </p:txBody>
+      </p:sp>
+      <p:sp>
+        <p:nvSpPr>
+          <p:cNvPr id="27" name="TextBox 26"/>
+          <p:cNvSpPr txBox="1"/>
+          <p:nvPr/>
+        </p:nvSpPr>
+        <p:spPr>
+          <a:xfrm>
+            <a:off x="8275319" y="2359152"/>
+            <a:ext cx="3108960" cy="292608"/>
+          </a:xfrm>
+          <a:prstGeom prst="rect">
+            <a:avLst/>
+          </a:prstGeom>
+          <a:noFill/>
+        </p:spPr>
+        <p:txBody>
+          <a:bodyPr wrap="square" lIns="0" rIns="0" tIns="0" bIns="0" anchor="t">
+            <a:spAutoFit/>
+          </a:bodyPr>
+          <a:lstStyle/>
+          <a:p>
+            <a:pPr algn="l">
+              <a:lnSpc>
+                <a:spcPct val="115000"/>
+              </a:lnSpc>
+            </a:pPr>
+            <a:r>
+              <a:rPr sz="1250" b="1">
+                <a:solidFill>
+                  <a:srgbClr val="FFFFFF"/>
+                </a:solidFill>
+                <a:latin typeface="Microsoft JhengHei"/>
+              </a:rPr>
+              <a:t>前端即時顯示辨識文字</a:t>
+            </a:r>
+          </a:p>
+        </p:txBody>
+      </p:sp>
+      <p:sp>
+        <p:nvSpPr>
+          <p:cNvPr id="28" name="TextBox 27"/>
+          <p:cNvSpPr txBox="1"/>
+          <p:nvPr/>
+        </p:nvSpPr>
+        <p:spPr>
+          <a:xfrm>
+            <a:off x="8275319" y="2633472"/>
+            <a:ext cx="3154680" cy="457200"/>
+          </a:xfrm>
+          <a:prstGeom prst="rect">
+            <a:avLst/>
+          </a:prstGeom>
+          <a:noFill/>
+        </p:spPr>
+        <p:txBody>
+          <a:bodyPr wrap="square" lIns="0" rIns="0" tIns="0" bIns="0" anchor="t">
+            <a:spAutoFit/>
+          </a:bodyPr>
+          <a:lstStyle/>
+          <a:p>
+            <a:pPr algn="l">
+              <a:lnSpc>
+                <a:spcPct val="110000"/>
+              </a:lnSpc>
+            </a:pPr>
+            <a:r>
+              <a:rPr sz="1100" b="0">
+                <a:solidFill>
+                  <a:srgbClr val="BBBBBB"/>
+                </a:solidFill>
+                <a:latin typeface="Microsoft JhengHei"/>
+              </a:rPr>
+              <a:t>訪客看到「女藥店」明顯不對，自然會重講一次</a:t>
+            </a:r>
+          </a:p>
+        </p:txBody>
+      </p:sp>
+      <p:sp>
+        <p:nvSpPr>
+          <p:cNvPr id="29" name="Oval 28"/>
+          <p:cNvSpPr/>
+          <p:nvPr/>
+        </p:nvSpPr>
+        <p:spPr>
+          <a:xfrm>
+            <a:off x="7790687" y="3172968"/>
+            <a:ext cx="365760" cy="365760"/>
+          </a:xfrm>
+          <a:prstGeom prst="ellipse">
+            <a:avLst/>
+          </a:prstGeom>
+          <a:solidFill>
+            <a:srgbClr val="00C49A"/>
+          </a:solidFill>
+          <a:ln>
+            <a:noFill/>
+          </a:ln>
+          <a:effectLst/>
+        </p:spPr>
+        <p:style>
+          <a:lnRef idx="1">
+            <a:schemeClr val="accent1"/>
+          </a:lnRef>
+          <a:fillRef idx="3">
+            <a:schemeClr val="accent1"/>
+          </a:fillRef>
+          <a:effectRef idx="2">
+            <a:schemeClr val="accent1"/>
+          </a:effectRef>
+          <a:fontRef idx="minor">
+            <a:schemeClr val="lt1"/>
+          </a:fontRef>
+        </p:style>
+        <p:txBody>
+          <a:bodyPr rtlCol="0" anchor="ctr"/>
+          <a:lstStyle/>
+          <a:p>
+            <a:pPr algn="ctr"/>
+          </a:p>
+        </p:txBody>
+      </p:sp>
+      <p:sp>
+        <p:nvSpPr>
+          <p:cNvPr id="30" name="TextBox 29"/>
+          <p:cNvSpPr txBox="1"/>
+          <p:nvPr/>
+        </p:nvSpPr>
+        <p:spPr>
+          <a:xfrm>
+            <a:off x="7790687" y="3159252"/>
+            <a:ext cx="365760" cy="365760"/>
+          </a:xfrm>
+          <a:prstGeom prst="rect">
+            <a:avLst/>
+          </a:prstGeom>
+          <a:noFill/>
+        </p:spPr>
+        <p:txBody>
+          <a:bodyPr wrap="square" lIns="0" rIns="0" tIns="0" bIns="0" anchor="ctr">
+            <a:spAutoFit/>
+          </a:bodyPr>
+          <a:lstStyle/>
+          <a:p>
+            <a:pPr algn="ctr">
+              <a:lnSpc>
+                <a:spcPct val="115000"/>
+              </a:lnSpc>
+            </a:pPr>
+            <a:r>
+              <a:rPr sz="1200" b="1">
+                <a:solidFill>
+                  <a:srgbClr val="1A1A2E"/>
+                </a:solidFill>
+                <a:latin typeface="Microsoft JhengHei"/>
+              </a:rPr>
+              <a:t>準</a:t>
+            </a:r>
+          </a:p>
+        </p:txBody>
+      </p:sp>
+      <p:sp>
+        <p:nvSpPr>
+          <p:cNvPr id="31" name="TextBox 30"/>
+          <p:cNvSpPr txBox="1"/>
+          <p:nvPr/>
+        </p:nvSpPr>
+        <p:spPr>
+          <a:xfrm>
+            <a:off x="8275319" y="3136392"/>
+            <a:ext cx="3108960" cy="292608"/>
+          </a:xfrm>
+          <a:prstGeom prst="rect">
+            <a:avLst/>
+          </a:prstGeom>
+          <a:noFill/>
+        </p:spPr>
+        <p:txBody>
+          <a:bodyPr wrap="square" lIns="0" rIns="0" tIns="0" bIns="0" anchor="t">
+            <a:spAutoFit/>
+          </a:bodyPr>
+          <a:lstStyle/>
+          <a:p>
+            <a:pPr algn="l">
+              <a:lnSpc>
+                <a:spcPct val="115000"/>
+              </a:lnSpc>
+            </a:pPr>
+            <a:r>
+              <a:rPr sz="1250" b="1">
+                <a:solidFill>
+                  <a:srgbClr val="FFFFFF"/>
+                </a:solidFill>
+                <a:latin typeface="Microsoft JhengHei"/>
+              </a:rPr>
+              <a:t>不硬編同音規則硬猜</a:t>
+            </a:r>
+          </a:p>
+        </p:txBody>
+      </p:sp>
+      <p:sp>
+        <p:nvSpPr>
+          <p:cNvPr id="32" name="TextBox 31"/>
+          <p:cNvSpPr txBox="1"/>
+          <p:nvPr/>
+        </p:nvSpPr>
+        <p:spPr>
+          <a:xfrm>
+            <a:off x="8275319" y="3410712"/>
+            <a:ext cx="3154680" cy="457200"/>
+          </a:xfrm>
+          <a:prstGeom prst="rect">
+            <a:avLst/>
+          </a:prstGeom>
+          <a:noFill/>
+        </p:spPr>
+        <p:txBody>
+          <a:bodyPr wrap="square" lIns="0" rIns="0" tIns="0" bIns="0" anchor="t">
+            <a:spAutoFit/>
+          </a:bodyPr>
+          <a:lstStyle/>
+          <a:p>
+            <a:pPr algn="l">
+              <a:lnSpc>
+                <a:spcPct val="110000"/>
+              </a:lnSpc>
+            </a:pPr>
+            <a:r>
+              <a:rPr sz="1100" b="0">
+                <a:solidFill>
+                  <a:srgbClr val="BBBBBB"/>
+                </a:solidFill>
+                <a:latin typeface="Microsoft JhengHei"/>
+              </a:rPr>
+              <a:t>亂編規則救個案，會誤傷別句、風險大於效益</a:t>
+            </a:r>
+          </a:p>
+        </p:txBody>
+      </p:sp>
+      <p:sp>
+        <p:nvSpPr>
+          <p:cNvPr id="33" name="Oval 32"/>
+          <p:cNvSpPr/>
+          <p:nvPr/>
+        </p:nvSpPr>
+        <p:spPr>
+          <a:xfrm>
+            <a:off x="7790687" y="3950208"/>
+            <a:ext cx="365760" cy="365760"/>
+          </a:xfrm>
+          <a:prstGeom prst="ellipse">
+            <a:avLst/>
+          </a:prstGeom>
+          <a:solidFill>
+            <a:srgbClr val="00C49A"/>
+          </a:solidFill>
+          <a:ln>
+            <a:noFill/>
+          </a:ln>
+          <a:effectLst/>
+        </p:spPr>
+        <p:style>
+          <a:lnRef idx="1">
+            <a:schemeClr val="accent1"/>
+          </a:lnRef>
+          <a:fillRef idx="3">
+            <a:schemeClr val="accent1"/>
+          </a:fillRef>
+          <a:effectRef idx="2">
+            <a:schemeClr val="accent1"/>
+          </a:effectRef>
+          <a:fontRef idx="minor">
+            <a:schemeClr val="lt1"/>
+          </a:fontRef>
+        </p:style>
+        <p:txBody>
+          <a:bodyPr rtlCol="0" anchor="ctr"/>
+          <a:lstStyle/>
+          <a:p>
+            <a:pPr algn="ctr"/>
+          </a:p>
+        </p:txBody>
+      </p:sp>
+      <p:sp>
+        <p:nvSpPr>
+          <p:cNvPr id="34" name="TextBox 33"/>
+          <p:cNvSpPr txBox="1"/>
+          <p:nvPr/>
+        </p:nvSpPr>
+        <p:spPr>
+          <a:xfrm>
+            <a:off x="7790687" y="3936492"/>
+            <a:ext cx="365760" cy="365760"/>
+          </a:xfrm>
+          <a:prstGeom prst="rect">
+            <a:avLst/>
+          </a:prstGeom>
+          <a:noFill/>
+        </p:spPr>
+        <p:txBody>
+          <a:bodyPr wrap="square" lIns="0" rIns="0" tIns="0" bIns="0" anchor="ctr">
+            <a:spAutoFit/>
+          </a:bodyPr>
+          <a:lstStyle/>
+          <a:p>
+            <a:pPr algn="ctr">
+              <a:lnSpc>
+                <a:spcPct val="115000"/>
+              </a:lnSpc>
+            </a:pPr>
+            <a:r>
+              <a:rPr sz="1200" b="1">
+                <a:solidFill>
+                  <a:srgbClr val="1A1A2E"/>
+                </a:solidFill>
+                <a:latin typeface="Microsoft JhengHei"/>
+              </a:rPr>
+              <a:t>🔊</a:t>
+            </a:r>
+          </a:p>
+        </p:txBody>
+      </p:sp>
+      <p:sp>
+        <p:nvSpPr>
+          <p:cNvPr id="35" name="TextBox 34"/>
+          <p:cNvSpPr txBox="1"/>
+          <p:nvPr/>
+        </p:nvSpPr>
+        <p:spPr>
+          <a:xfrm>
+            <a:off x="8275319" y="3913632"/>
+            <a:ext cx="3108960" cy="292608"/>
+          </a:xfrm>
+          <a:prstGeom prst="rect">
+            <a:avLst/>
+          </a:prstGeom>
+          <a:noFill/>
+        </p:spPr>
+        <p:txBody>
+          <a:bodyPr wrap="square" lIns="0" rIns="0" tIns="0" bIns="0" anchor="t">
+            <a:spAutoFit/>
+          </a:bodyPr>
+          <a:lstStyle/>
+          <a:p>
+            <a:pPr algn="l">
+              <a:lnSpc>
+                <a:spcPct val="115000"/>
+              </a:lnSpc>
+            </a:pPr>
+            <a:r>
+              <a:rPr sz="1250" b="1">
+                <a:solidFill>
+                  <a:srgbClr val="FFFFFF"/>
+                </a:solidFill>
+                <a:latin typeface="Microsoft JhengHei"/>
+              </a:rPr>
+              <a:t>音量才是主因</a:t>
+            </a:r>
+          </a:p>
+        </p:txBody>
+      </p:sp>
+      <p:sp>
+        <p:nvSpPr>
+          <p:cNvPr id="36" name="TextBox 35"/>
+          <p:cNvSpPr txBox="1"/>
+          <p:nvPr/>
+        </p:nvSpPr>
+        <p:spPr>
+          <a:xfrm>
+            <a:off x="8275319" y="4187952"/>
+            <a:ext cx="3154680" cy="457200"/>
+          </a:xfrm>
+          <a:prstGeom prst="rect">
+            <a:avLst/>
+          </a:prstGeom>
+          <a:noFill/>
+        </p:spPr>
+        <p:txBody>
+          <a:bodyPr wrap="square" lIns="0" rIns="0" tIns="0" bIns="0" anchor="t">
+            <a:spAutoFit/>
+          </a:bodyPr>
+          <a:lstStyle/>
+          <a:p>
+            <a:pPr algn="l">
+              <a:lnSpc>
+                <a:spcPct val="110000"/>
+              </a:lnSpc>
+            </a:pPr>
+            <a:r>
+              <a:rPr sz="1100" b="0">
+                <a:solidFill>
+                  <a:srgbClr val="BBBBBB"/>
+                </a:solidFill>
+                <a:latin typeface="Microsoft JhengHei"/>
+              </a:rPr>
+              <a:t>小聲時摩擦音 ㄕ/ㄘ 糊掉；展場大聲對麥＝多半消失</a:t>
+            </a:r>
+          </a:p>
+        </p:txBody>
+      </p:sp>
+      <p:sp>
+        <p:nvSpPr>
+          <p:cNvPr id="37" name="Oval 36"/>
+          <p:cNvSpPr/>
+          <p:nvPr/>
+        </p:nvSpPr>
+        <p:spPr>
+          <a:xfrm>
+            <a:off x="7790687" y="4727448"/>
+            <a:ext cx="365760" cy="365760"/>
+          </a:xfrm>
+          <a:prstGeom prst="ellipse">
+            <a:avLst/>
+          </a:prstGeom>
+          <a:solidFill>
+            <a:srgbClr val="00C49A"/>
+          </a:solidFill>
+          <a:ln>
+            <a:noFill/>
+          </a:ln>
+          <a:effectLst/>
+        </p:spPr>
+        <p:style>
+          <a:lnRef idx="1">
+            <a:schemeClr val="accent1"/>
+          </a:lnRef>
+          <a:fillRef idx="3">
+            <a:schemeClr val="accent1"/>
+          </a:fillRef>
+          <a:effectRef idx="2">
+            <a:schemeClr val="accent1"/>
+          </a:effectRef>
+          <a:fontRef idx="minor">
+            <a:schemeClr val="lt1"/>
+          </a:fontRef>
+        </p:style>
+        <p:txBody>
+          <a:bodyPr rtlCol="0" anchor="ctr"/>
+          <a:lstStyle/>
+          <a:p>
+            <a:pPr algn="ctr"/>
+          </a:p>
+        </p:txBody>
+      </p:sp>
+      <p:sp>
+        <p:nvSpPr>
+          <p:cNvPr id="38" name="TextBox 37"/>
+          <p:cNvSpPr txBox="1"/>
+          <p:nvPr/>
+        </p:nvSpPr>
+        <p:spPr>
+          <a:xfrm>
+            <a:off x="7790687" y="4713732"/>
+            <a:ext cx="365760" cy="365760"/>
+          </a:xfrm>
+          <a:prstGeom prst="rect">
+            <a:avLst/>
+          </a:prstGeom>
+          <a:noFill/>
+        </p:spPr>
+        <p:txBody>
+          <a:bodyPr wrap="square" lIns="0" rIns="0" tIns="0" bIns="0" anchor="ctr">
+            <a:spAutoFit/>
+          </a:bodyPr>
+          <a:lstStyle/>
+          <a:p>
+            <a:pPr algn="ctr">
+              <a:lnSpc>
+                <a:spcPct val="115000"/>
+              </a:lnSpc>
+            </a:pPr>
+            <a:r>
+              <a:rPr sz="1200" b="1">
+                <a:solidFill>
+                  <a:srgbClr val="1A1A2E"/>
+                </a:solidFill>
+                <a:latin typeface="Microsoft JhengHei"/>
+              </a:rPr>
+              <a:t>環</a:t>
+            </a:r>
+          </a:p>
+        </p:txBody>
+      </p:sp>
+      <p:sp>
+        <p:nvSpPr>
+          <p:cNvPr id="39" name="TextBox 38"/>
+          <p:cNvSpPr txBox="1"/>
+          <p:nvPr/>
+        </p:nvSpPr>
+        <p:spPr>
+          <a:xfrm>
+            <a:off x="8275319" y="4690872"/>
+            <a:ext cx="3108960" cy="292608"/>
+          </a:xfrm>
+          <a:prstGeom prst="rect">
+            <a:avLst/>
+          </a:prstGeom>
+          <a:noFill/>
+        </p:spPr>
+        <p:txBody>
+          <a:bodyPr wrap="square" lIns="0" rIns="0" tIns="0" bIns="0" anchor="t">
+            <a:spAutoFit/>
+          </a:bodyPr>
+          <a:lstStyle/>
+          <a:p>
+            <a:pPr algn="l">
+              <a:lnSpc>
+                <a:spcPct val="115000"/>
+              </a:lnSpc>
+            </a:pPr>
+            <a:r>
+              <a:rPr sz="1250" b="1">
+                <a:solidFill>
+                  <a:srgbClr val="FFFFFF"/>
+                </a:solidFill>
+                <a:latin typeface="Microsoft JhengHei"/>
+              </a:rPr>
+              <a:t>展後回饋閉環</a:t>
+            </a:r>
+          </a:p>
+        </p:txBody>
+      </p:sp>
+      <p:sp>
+        <p:nvSpPr>
+          <p:cNvPr id="40" name="TextBox 39"/>
+          <p:cNvSpPr txBox="1"/>
+          <p:nvPr/>
+        </p:nvSpPr>
+        <p:spPr>
+          <a:xfrm>
+            <a:off x="8275319" y="4965192"/>
+            <a:ext cx="3154680" cy="457200"/>
+          </a:xfrm>
+          <a:prstGeom prst="rect">
+            <a:avLst/>
+          </a:prstGeom>
+          <a:noFill/>
+        </p:spPr>
+        <p:txBody>
+          <a:bodyPr wrap="square" lIns="0" rIns="0" tIns="0" bIns="0" anchor="t">
+            <a:spAutoFit/>
+          </a:bodyPr>
+          <a:lstStyle/>
+          <a:p>
+            <a:pPr algn="l">
+              <a:lnSpc>
+                <a:spcPct val="110000"/>
+              </a:lnSpc>
+            </a:pPr>
+            <a:r>
+              <a:rPr sz="1100" b="0">
+                <a:solidFill>
+                  <a:srgbClr val="BBBBBB"/>
+                </a:solidFill>
+                <a:latin typeface="Microsoft JhengHei"/>
+              </a:rPr>
+              <a:t>展場問答入 journal，事後撈真實錯句補規則</a:t>
+            </a:r>
+          </a:p>
+        </p:txBody>
+      </p:sp>
+      <p:sp>
+        <p:nvSpPr>
+          <p:cNvPr id="41" name="TextBox 40"/>
+          <p:cNvSpPr txBox="1"/>
+          <p:nvPr/>
+        </p:nvSpPr>
+        <p:spPr>
+          <a:xfrm>
+            <a:off x="667512" y="5806440"/>
+            <a:ext cx="10789920" cy="548640"/>
+          </a:xfrm>
+          <a:prstGeom prst="rect">
+            <a:avLst/>
+          </a:prstGeom>
+          <a:noFill/>
+        </p:spPr>
+        <p:txBody>
+          <a:bodyPr wrap="square" lIns="0" rIns="0" tIns="0" bIns="0" anchor="t">
+            <a:spAutoFit/>
+          </a:bodyPr>
+          <a:lstStyle/>
+          <a:p>
+            <a:pPr algn="l">
+              <a:lnSpc>
+                <a:spcPct val="120000"/>
+              </a:lnSpc>
+            </a:pPr>
+            <a:r>
+              <a:rPr sz="1300" b="1">
+                <a:solidFill>
+                  <a:srgbClr val="008E76"/>
+                </a:solidFill>
+                <a:latin typeface="Microsoft JhengHei"/>
+              </a:rPr>
+              <a:t>分寸：容錯層只救「聽得出是同一個音」的錯——救得到的自動救、救不到的交給人重講，絕不亂猜幻覺出錯商品。</a:t>
+            </a:r>
+          </a:p>
+        </p:txBody>
+      </p:sp>
+      <p:sp>
+        <p:nvSpPr>
+          <p:cNvPr id="42" name="TextBox 41"/>
+          <p:cNvSpPr txBox="1"/>
+          <p:nvPr/>
+        </p:nvSpPr>
+        <p:spPr>
+          <a:xfrm>
+            <a:off x="11475720" y="6565392"/>
+            <a:ext cx="658368" cy="237744"/>
+          </a:xfrm>
+          <a:prstGeom prst="rect">
+            <a:avLst/>
+          </a:prstGeom>
+          <a:noFill/>
+        </p:spPr>
+        <p:txBody>
+          <a:bodyPr wrap="square" lIns="0" rIns="0" tIns="0" bIns="0" anchor="t">
+            <a:spAutoFit/>
+          </a:bodyPr>
+          <a:lstStyle/>
+          <a:p>
+            <a:pPr algn="r">
+              <a:lnSpc>
+                <a:spcPct val="115000"/>
+              </a:lnSpc>
+            </a:pPr>
+            <a:r>
+              <a:rPr sz="1000" b="0">
+                <a:solidFill>
+                  <a:srgbClr val="BBBBBB"/>
+                </a:solidFill>
+                <a:latin typeface="Arial"/>
+              </a:rPr>
+              <a:t>23</a:t>
+            </a:r>
+          </a:p>
+        </p:txBody>
+      </p:sp>
+    </p:spTree>
+  </p:cSld>
+  <p:clrMapOvr>
+    <a:masterClrMapping/>
+  </p:clrMapOvr>
+</p:sld>
+</file>
+
+<file path=ppt/slides/slide24.xml><?xml version="1.0" encoding="utf-8"?>
+<p:sld xmlns:a="http://schemas.openxmlformats.org/drawingml/2006/main" xmlns:p="http://schemas.openxmlformats.org/presentationml/2006/main" xmlns:r="http://schemas.openxmlformats.org/officeDocument/2006/relationships">
+  <p:cSld>
+    <p:spTree>
+      <p:nvGrpSpPr>
+        <p:cNvPr id="1" name=""/>
+        <p:cNvGrpSpPr/>
+        <p:nvPr/>
+      </p:nvGrpSpPr>
+      <p:grpSpPr/>
+      <p:sp>
+        <p:nvSpPr>
+          <p:cNvPr id="2" name="Rectangle 1"/>
+          <p:cNvSpPr/>
+          <p:nvPr/>
+        </p:nvSpPr>
+        <p:spPr>
+          <a:xfrm>
+            <a:off x="0" y="0"/>
+            <a:ext cx="12188952" cy="6858000"/>
+          </a:xfrm>
+          <a:prstGeom prst="rect">
+            <a:avLst/>
+          </a:prstGeom>
+          <a:solidFill>
+            <a:srgbClr val="1A1A2E"/>
+          </a:solidFill>
+          <a:ln>
+            <a:noFill/>
+          </a:ln>
+          <a:effectLst/>
+        </p:spPr>
+        <p:style>
+          <a:lnRef idx="1">
+            <a:schemeClr val="accent1"/>
+          </a:lnRef>
+          <a:fillRef idx="3">
+            <a:schemeClr val="accent1"/>
+          </a:fillRef>
+          <a:effectRef idx="2">
+            <a:schemeClr val="accent1"/>
+          </a:effectRef>
+          <a:fontRef idx="minor">
+            <a:schemeClr val="lt1"/>
+          </a:fontRef>
+        </p:style>
+        <p:txBody>
+          <a:bodyPr rtlCol="0" anchor="ctr"/>
+          <a:lstStyle/>
+          <a:p>
+            <a:pPr algn="ctr"/>
+          </a:p>
+        </p:txBody>
+      </p:sp>
+      <p:sp>
+        <p:nvSpPr>
+          <p:cNvPr id="3" name="Rectangle 2"/>
+          <p:cNvSpPr/>
+          <p:nvPr/>
+        </p:nvSpPr>
+        <p:spPr>
+          <a:xfrm>
+            <a:off x="0" y="0"/>
+            <a:ext cx="12188952" cy="128016"/>
+          </a:xfrm>
+          <a:prstGeom prst="rect">
+            <a:avLst/>
+          </a:prstGeom>
+          <a:solidFill>
+            <a:srgbClr val="00C49A"/>
+          </a:solidFill>
+          <a:ln>
+            <a:noFill/>
+          </a:ln>
+          <a:effectLst/>
+        </p:spPr>
+        <p:style>
+          <a:lnRef idx="1">
+            <a:schemeClr val="accent1"/>
+          </a:lnRef>
+          <a:fillRef idx="3">
+            <a:schemeClr val="accent1"/>
+          </a:fillRef>
+          <a:effectRef idx="2">
+            <a:schemeClr val="accent1"/>
+          </a:effectRef>
+          <a:fontRef idx="minor">
+            <a:schemeClr val="lt1"/>
+          </a:fontRef>
+        </p:style>
+        <p:txBody>
+          <a:bodyPr rtlCol="0" anchor="ctr"/>
+          <a:lstStyle/>
+          <a:p>
+            <a:pPr algn="ctr"/>
+          </a:p>
+        </p:txBody>
+      </p:sp>
+      <p:sp>
+        <p:nvSpPr>
           <p:cNvPr id="4" name="TextBox 3"/>
           <p:cNvSpPr txBox="1"/>
           <p:nvPr/>
@@ -19910,7 +25647,7 @@
                 </a:solidFill>
                 <a:latin typeface="Arial"/>
               </a:rPr>
-              <a:t>21</a:t>
+              <a:t>24</a:t>
             </a:r>
           </a:p>
         </p:txBody>

--- a/倉管Agent_專案簡報.pptx
+++ b/倉管Agent_專案簡報.pptx
@@ -29,6 +29,7 @@
     <p:sldId id="277" r:id="rId29"/>
     <p:sldId id="278" r:id="rId30"/>
     <p:sldId id="279" r:id="rId31"/>
+    <p:sldId id="280" r:id="rId32"/>
   </p:sldIdLst>
   <p:sldSz cx="12188952" cy="6858000" type="screen4x3"/>
   <p:notesSz cx="6858000" cy="9144000"/>
@@ -1674,7 +1675,7 @@
               <a:rPr sz="1200">
                 <a:latin typeface="Microsoft JhengHei"/>
               </a:rPr>
-              <a:t>語音容錯的兩層設計，都是真人聲實測一句句磨出來的。左＝發音容錯層：ASR 錯字多是「同音但字形差很遠」（滑鼠→華數），字形比對救不到、轉拼音就中；還做了捲舌音節還原（ㄕ/ㄗ 不分）。門檻 0.82 是實測調出來的——太低會把「衛生棉」誤配成「衛生紙」。右＝語音同音修正：只掛 ASR 出口，所以打字訪客完全不受影響、守衛零風險。關鍵原則：每條規則都有守衛把關，改規則前跑護欄測試。</a:t>
+              <a:t>語音容錯兩層設計，都是真人聲實測一句句磨出來的。刻意分工：左＝拼音容錯層（技術主角）——處理「沒見過的音近錯」，靠智慧比對而非查表：ASR 錯字多是「同音但字形差很遠」（滑鼠→華數），字形比對救不到、轉拼音就中；做了捲舌平舌音節還原（zu→zhu、su→shu）；用滑窗掃整句找商品核心名拼音；門檻 0.82（太低會把衛生棉誤配衛生紙）。右＝固定規則修正——處理「反覆出現的固定錯」（倉別/動詞/量詞/異體字），這種錯每次都一樣，直接查表最快最穩，不需要智慧比對。兩層都只掛 ASR 出口、不碰 warehouse.py，所以打字訪客零影響、守衛零風險。下一頁用流程圖把拼音層的五步決策拆開講。</a:t>
             </a:r>
           </a:p>
         </p:txBody>
@@ -1747,7 +1748,7 @@
               <a:rPr sz="1200">
                 <a:latin typeface="Microsoft JhengHei"/>
               </a:rPr>
-              <a:t>★聽錯→救回實例頁（技術評審最有感）。強調這些全是真人聲實測原始紀錄、不是虛構：中欄紅字是 ASR 真的聽錯的字，右欄綠字是容錯層怎麼救回。最漂亮的一句「北倉進五十個滑鼠」一次踩三種錯（倉別藏→倉、動詞近→進、商品名華族→滑鼠），三種修正機制同時作用救回、真的把 50 件寫進庫存。底部拼音證據解釋原理：ASR 錯字特徵是「音同/音近但字形零重疊」，字形比對必敗、轉拼音一比即中——這就是為什麼發音容錯層有效。</a:t>
+              <a:t>★拼音修正流程圖（老闆/評審最有感的一頁）。左邊是決策流程，右邊用同一句「北倉的滑鼠有多少」一路走到底。核心洞見：ASR 錯字的特徵是「音同、字形零重疊」（華數 vs 滑鼠一個字都不重疊），所以字形比對一定失敗、轉成拼音一比即中。五步：①字形優先（命中就不進拼音層，零回歸的保證）②三道排除閘（含寫入動詞/倉別/數字的句子不救——這是當初打壞 63 條守衛後加的，只救乾淨短查詢詞）③轉拼音時做捲舌平舌音節還原（zu→zhu、su→shu，因為台灣國語與 ASR 常把滑鼠 huashu 聽成華族 huazu）④滑窗比對商品核心名拼音⑤門檻 0.82。門檻 0.82 是實測血淚調出來的——放寬到 0.78 會把「衛生棉」誤配「衛生紙」（同 0.80），所以不靠放門檻、靠精準音節還原來拉開分數。全程純字串運算，RPi5 零算力負擔。救不到就回空、交給系統反問，絕不亂猜。</a:t>
             </a:r>
           </a:p>
         </p:txBody>
@@ -1820,7 +1821,7 @@
               <a:rPr sz="1200">
                 <a:latin typeface="Microsoft JhengHei"/>
               </a:rPr>
-              <a:t>★極限與對策頁（誠實加分）。技術評審最怕看到只報喜不報憂——這頁專講救不回的。左表：ASR 把整詞聽成毫不相干的詞（瑜珈墊→女藥店、露營帳篷→女人占房、滑鼠→瓦數、缺→趣、防蚊液→防瘟疫），字形和發音都對不上，容錯層本來就不該硬救。右邊對策核心＝人在迴路：前端即時顯示辨識文字，訪客看到明顯錯字會自然重講——這比硬編同音規則安全得多（亂編規則救個案會誤傷別句）。另外三點：音量才是主因（正常音量下大半 FAIL 會消失）、展後靠 journal 問答記錄做回饋閉環補規則。分寸金句：救得到的自動救、救不到的交給人重講，絕不亂猜幻覺出錯商品——這正是整個系統『寧可反問、不可答錯』哲學在語音上的延伸。</a:t>
+              <a:t>★聽錯→救回實例頁（技術評審最有感）。強調這些全是真人聲實測原始紀錄、不是虛構：中欄紅字是 ASR 真的聽錯的字，右欄綠字是容錯層怎麼救回。最漂亮的一句「北倉進五十個滑鼠」一次踩三種錯（倉別藏→倉、動詞近→進、商品名華族→滑鼠），三種修正機制同時作用救回、真的把 50 件寫進庫存。底部拼音證據解釋原理：ASR 錯字特徵是「音同/音近但字形零重疊」，字形比對必敗、轉拼音一比即中——這就是為什麼發音容錯層有效。</a:t>
             </a:r>
           </a:p>
         </p:txBody>
@@ -1846,6 +1847,79 @@
 </file>
 
 <file path=ppt/notesSlides/notesSlide24.xml><?xml version="1.0" encoding="utf-8"?>
+<p:notes xmlns:a="http://schemas.openxmlformats.org/drawingml/2006/main" xmlns:p="http://schemas.openxmlformats.org/presentationml/2006/main" xmlns:r="http://schemas.openxmlformats.org/officeDocument/2006/relationships">
+  <p:cSld>
+    <p:spTree>
+      <p:nvGrpSpPr>
+        <p:cNvPr id="1" name=""/>
+        <p:cNvGrpSpPr/>
+        <p:nvPr/>
+      </p:nvGrpSpPr>
+      <p:grpSpPr>
+        <a:xfrm>
+          <a:off x="0" y="0"/>
+          <a:ext cx="0" cy="0"/>
+          <a:chOff x="0" y="0"/>
+          <a:chExt cx="0" cy="0"/>
+        </a:xfrm>
+      </p:grpSpPr>
+      <p:sp>
+        <p:nvSpPr>
+          <p:cNvPr id="2" name="Slide Image Placeholder 1"/>
+          <p:cNvSpPr>
+            <a:spLocks noGrp="1"/>
+          </p:cNvSpPr>
+          <p:nvPr>
+            <p:ph type="sldImg" idx="2"/>
+          </p:nvPr>
+        </p:nvSpPr>
+        <p:spPr/>
+      </p:sp>
+      <p:sp>
+        <p:nvSpPr>
+          <p:cNvPr id="3" name="Notes Placeholder 2"/>
+          <p:cNvSpPr>
+            <a:spLocks noGrp="1"/>
+          </p:cNvSpPr>
+          <p:nvPr>
+            <p:ph type="body" idx="3" sz="quarter"/>
+          </p:nvPr>
+        </p:nvSpPr>
+        <p:spPr/>
+        <p:txBody>
+          <a:bodyPr/>
+          <a:lstStyle/>
+          <a:p>
+            <a:r>
+              <a:rPr sz="1200">
+                <a:latin typeface="Microsoft JhengHei"/>
+              </a:rPr>
+              <a:t>★極限與對策頁（誠實加分）。技術評審最怕看到只報喜不報憂——這頁專講救不回的。左表：ASR 把整詞聽成毫不相干的詞（瑜珈墊→女藥店、露營帳篷→女人占房、滑鼠→瓦數、缺→趣、防蚊液→防瘟疫），字形和發音都對不上，容錯層本來就不該硬救。右邊對策核心＝人在迴路：前端即時顯示辨識文字，訪客看到明顯錯字會自然重講——這比硬編同音規則安全得多（亂編規則救個案會誤傷別句）。另外三點：音量才是主因（正常音量下大半 FAIL 會消失）、展後靠 journal 問答記錄做回饋閉環補規則。分寸金句：救得到的自動救、救不到的交給人重講，絕不亂猜幻覺出錯商品——這正是整個系統『寧可反問、不可答錯』哲學在語音上的延伸。</a:t>
+            </a:r>
+          </a:p>
+        </p:txBody>
+      </p:sp>
+      <p:sp>
+        <p:nvSpPr>
+          <p:cNvPr id="4" name="Slide Number Placeholder 3"/>
+          <p:cNvSpPr>
+            <a:spLocks noGrp="1"/>
+          </p:cNvSpPr>
+          <p:nvPr>
+            <p:ph type="sldNum" idx="5" sz="quarter"/>
+          </p:nvPr>
+        </p:nvSpPr>
+        <p:spPr/>
+      </p:sp>
+    </p:spTree>
+  </p:cSld>
+  <p:clrMapOvr>
+    <a:masterClrMapping/>
+  </p:clrMapOvr>
+</p:notes>
+</file>
+
+<file path=ppt/notesSlides/notesSlide25.xml><?xml version="1.0" encoding="utf-8"?>
 <p:notes xmlns:a="http://schemas.openxmlformats.org/drawingml/2006/main" xmlns:p="http://schemas.openxmlformats.org/presentationml/2006/main" xmlns:r="http://schemas.openxmlformats.org/officeDocument/2006/relationships">
   <p:cSld>
     <p:spTree>
@@ -19854,7 +19928,7 @@
                 </a:solidFill>
                 <a:latin typeface="Microsoft JhengHei"/>
               </a:rPr>
-              <a:t>ASR 會聽錯，兩層容錯把它接住</a:t>
+              <a:t>兩層容錯：拼音智慧比對 + 固定規則修正</a:t>
             </a:r>
           </a:p>
         </p:txBody>
@@ -19893,7 +19967,7 @@
                 </a:solidFill>
                 <a:latin typeface="Microsoft JhengHei"/>
               </a:rPr>
-              <a:t>270M 小模型辨識不完美（滑鼠→華數/華族）。兩層容錯——真人聲實測一句句磨出來——讓聽錯也答對。</a:t>
+              <a:t>270M 辨識不完美（滑鼠→華數/華族）。主角是「拼音容錯層」——把錯字轉拼音智慧比對；再配一層固定規則收尾。</a:t>
             </a:r>
           </a:p>
         </p:txBody>
@@ -19907,7 +19981,7 @@
         <p:spPr>
           <a:xfrm>
             <a:off x="667512" y="1965960"/>
-            <a:ext cx="5257800" cy="3429000"/>
+            <a:ext cx="5806440" cy="3429000"/>
           </a:xfrm>
           <a:prstGeom prst="roundRect">
             <a:avLst>
@@ -19952,8 +20026,8 @@
         </p:nvSpPr>
         <p:spPr>
           <a:xfrm>
-            <a:off x="987552" y="2194560"/>
-            <a:ext cx="4617720" cy="365760"/>
+            <a:off x="987552" y="2176272"/>
+            <a:ext cx="5166360" cy="384048"/>
           </a:xfrm>
           <a:prstGeom prst="rect">
             <a:avLst/>
@@ -19978,7 +20052,16 @@
                 </a:solidFill>
                 <a:latin typeface="Microsoft JhengHei"/>
               </a:rPr>
-              <a:t>① 發音容錯層</a:t>
+              <a:t>① 拼音容錯層</a:t>
+            </a:r>
+            <a:r>
+              <a:rPr sz="1200" b="1">
+                <a:solidFill>
+                  <a:srgbClr val="00C49A"/>
+                </a:solidFill>
+                <a:latin typeface="Microsoft JhengHei"/>
+              </a:rPr>
+              <a:t>  · 主角 · 智慧比對</a:t>
             </a:r>
           </a:p>
         </p:txBody>
@@ -19992,7 +20075,7 @@
         <p:spPr>
           <a:xfrm>
             <a:off x="987552" y="2606040"/>
-            <a:ext cx="4617720" cy="365760"/>
+            <a:ext cx="5166360" cy="365760"/>
           </a:xfrm>
           <a:prstGeom prst="rect">
             <a:avLst/>
@@ -20011,13 +20094,13 @@
               </a:lnSpc>
             </a:pPr>
             <a:r>
-              <a:rPr sz="1300" b="1">
+              <a:rPr sz="1250" b="1">
                 <a:solidFill>
                   <a:srgbClr val="1A1A2E"/>
                 </a:solidFill>
                 <a:latin typeface="Microsoft JhengHei"/>
               </a:rPr>
-              <a:t>字形救不到 → 轉拼音比對</a:t>
+              <a:t>字形救不到 → 轉拼音、滑窗比對商品名</a:t>
             </a:r>
           </a:p>
         </p:txBody>
@@ -20030,7 +20113,7 @@
         </p:nvSpPr>
         <p:spPr>
           <a:xfrm>
-            <a:off x="987552" y="3108960"/>
+            <a:off x="987552" y="3035808"/>
             <a:ext cx="274320" cy="365760"/>
           </a:xfrm>
           <a:prstGeom prst="rect">
@@ -20069,8 +20152,8 @@
         </p:nvSpPr>
         <p:spPr>
           <a:xfrm>
-            <a:off x="1234440" y="3108960"/>
-            <a:ext cx="4480560" cy="402336"/>
+            <a:off x="1234440" y="3035808"/>
+            <a:ext cx="5029200" cy="365760"/>
           </a:xfrm>
           <a:prstGeom prst="rect">
             <a:avLst/>
@@ -20089,13 +20172,13 @@
               </a:lnSpc>
             </a:pPr>
             <a:r>
-              <a:rPr sz="1250" b="0">
+              <a:rPr sz="1200" b="0">
                 <a:solidFill>
                   <a:srgbClr val="444444"/>
                 </a:solidFill>
                 <a:latin typeface="Microsoft JhengHei"/>
               </a:rPr>
-              <a:t>同音字形遠：滑鼠→華數，字形比對 0 分</a:t>
+              <a:t>同音字形遠：滑鼠 vs 華數，字形 0 分</a:t>
             </a:r>
           </a:p>
         </p:txBody>
@@ -20108,7 +20191,7 @@
         </p:nvSpPr>
         <p:spPr>
           <a:xfrm>
-            <a:off x="987552" y="3529584"/>
+            <a:off x="987552" y="3419856"/>
             <a:ext cx="274320" cy="365760"/>
           </a:xfrm>
           <a:prstGeom prst="rect">
@@ -20147,8 +20230,8 @@
         </p:nvSpPr>
         <p:spPr>
           <a:xfrm>
-            <a:off x="1234440" y="3529584"/>
-            <a:ext cx="4480560" cy="402336"/>
+            <a:off x="1234440" y="3419856"/>
+            <a:ext cx="5029200" cy="365760"/>
           </a:xfrm>
           <a:prstGeom prst="rect">
             <a:avLst/>
@@ -20167,13 +20250,13 @@
               </a:lnSpc>
             </a:pPr>
             <a:r>
-              <a:rPr sz="1250" b="0">
+              <a:rPr sz="1200" b="0">
                 <a:solidFill>
                   <a:srgbClr val="444444"/>
                 </a:solidFill>
                 <a:latin typeface="Microsoft JhengHei"/>
               </a:rPr>
-              <a:t>轉拼音比對即中（huashu ≈ huashu）</a:t>
+              <a:t>轉拼音一比即中：huashu ≈ huashu</a:t>
             </a:r>
           </a:p>
         </p:txBody>
@@ -20186,7 +20269,7 @@
         </p:nvSpPr>
         <p:spPr>
           <a:xfrm>
-            <a:off x="987552" y="3950208"/>
+            <a:off x="987552" y="3803904"/>
             <a:ext cx="274320" cy="365760"/>
           </a:xfrm>
           <a:prstGeom prst="rect">
@@ -20225,8 +20308,8 @@
         </p:nvSpPr>
         <p:spPr>
           <a:xfrm>
-            <a:off x="1234440" y="3950208"/>
-            <a:ext cx="4480560" cy="402336"/>
+            <a:off x="1234440" y="3803904"/>
+            <a:ext cx="5029200" cy="365760"/>
           </a:xfrm>
           <a:prstGeom prst="rect">
             <a:avLst/>
@@ -20245,13 +20328,13 @@
               </a:lnSpc>
             </a:pPr>
             <a:r>
-              <a:rPr sz="1250" b="0">
+              <a:rPr sz="1200" b="0">
                 <a:solidFill>
                   <a:srgbClr val="444444"/>
                 </a:solidFill>
                 <a:latin typeface="Microsoft JhengHei"/>
               </a:rPr>
-              <a:t>捲舌音節還原：ㄕ/ㄗ 混淆也接得住</a:t>
+              <a:t>音節還原 zu→zhu／su→shu，救捲舌混淆</a:t>
             </a:r>
           </a:p>
         </p:txBody>
@@ -20264,7 +20347,7 @@
         </p:nvSpPr>
         <p:spPr>
           <a:xfrm>
-            <a:off x="987552" y="4370832"/>
+            <a:off x="987552" y="4187952"/>
             <a:ext cx="274320" cy="365760"/>
           </a:xfrm>
           <a:prstGeom prst="rect">
@@ -20303,8 +20386,8 @@
         </p:nvSpPr>
         <p:spPr>
           <a:xfrm>
-            <a:off x="1234440" y="4370832"/>
-            <a:ext cx="4480560" cy="402336"/>
+            <a:off x="1234440" y="4187952"/>
+            <a:ext cx="5029200" cy="365760"/>
           </a:xfrm>
           <a:prstGeom prst="rect">
             <a:avLst/>
@@ -20323,12 +20406,90 @@
               </a:lnSpc>
             </a:pPr>
             <a:r>
-              <a:rPr sz="1250" b="0">
+              <a:rPr sz="1200" b="0">
                 <a:solidFill>
                   <a:srgbClr val="444444"/>
                 </a:solidFill>
                 <a:latin typeface="Microsoft JhengHei"/>
               </a:rPr>
+              <a:t>滑窗掃句：核心名拼音是句拼音子串 → 命中</a:t>
+            </a:r>
+          </a:p>
+        </p:txBody>
+      </p:sp>
+      <p:sp>
+        <p:nvSpPr>
+          <p:cNvPr id="16" name="TextBox 15"/>
+          <p:cNvSpPr txBox="1"/>
+          <p:nvPr/>
+        </p:nvSpPr>
+        <p:spPr>
+          <a:xfrm>
+            <a:off x="987552" y="4572000"/>
+            <a:ext cx="274320" cy="365760"/>
+          </a:xfrm>
+          <a:prstGeom prst="rect">
+            <a:avLst/>
+          </a:prstGeom>
+          <a:noFill/>
+        </p:spPr>
+        <p:txBody>
+          <a:bodyPr wrap="square" lIns="0" rIns="0" tIns="0" bIns="0" anchor="t">
+            <a:spAutoFit/>
+          </a:bodyPr>
+          <a:lstStyle/>
+          <a:p>
+            <a:pPr algn="l">
+              <a:lnSpc>
+                <a:spcPct val="115000"/>
+              </a:lnSpc>
+            </a:pPr>
+            <a:r>
+              <a:rPr sz="1500" b="1">
+                <a:solidFill>
+                  <a:srgbClr val="00C49A"/>
+                </a:solidFill>
+                <a:latin typeface="Microsoft JhengHei"/>
+              </a:rPr>
+              <a:t>·</a:t>
+            </a:r>
+          </a:p>
+        </p:txBody>
+      </p:sp>
+      <p:sp>
+        <p:nvSpPr>
+          <p:cNvPr id="17" name="TextBox 16"/>
+          <p:cNvSpPr txBox="1"/>
+          <p:nvPr/>
+        </p:nvSpPr>
+        <p:spPr>
+          <a:xfrm>
+            <a:off x="1234440" y="4572000"/>
+            <a:ext cx="5029200" cy="365760"/>
+          </a:xfrm>
+          <a:prstGeom prst="rect">
+            <a:avLst/>
+          </a:prstGeom>
+          <a:noFill/>
+        </p:spPr>
+        <p:txBody>
+          <a:bodyPr wrap="square" lIns="0" rIns="0" tIns="0" bIns="0" anchor="t">
+            <a:spAutoFit/>
+          </a:bodyPr>
+          <a:lstStyle/>
+          <a:p>
+            <a:pPr algn="l">
+              <a:lnSpc>
+                <a:spcPct val="115000"/>
+              </a:lnSpc>
+            </a:pPr>
+            <a:r>
+              <a:rPr sz="1200" b="0">
+                <a:solidFill>
+                  <a:srgbClr val="444444"/>
+                </a:solidFill>
+                <a:latin typeface="Microsoft JhengHei"/>
+              </a:rPr>
               <a:t>門檻 0.82 防誤配（衛生棉≠衛生紙）</a:t>
             </a:r>
           </a:p>
@@ -20336,13 +20497,13 @@
       </p:sp>
       <p:sp>
         <p:nvSpPr>
-          <p:cNvPr id="16" name="TextBox 15"/>
-          <p:cNvSpPr txBox="1"/>
-          <p:nvPr/>
-        </p:nvSpPr>
-        <p:spPr>
-          <a:xfrm>
-            <a:off x="987552" y="4791456"/>
+          <p:cNvPr id="18" name="TextBox 17"/>
+          <p:cNvSpPr txBox="1"/>
+          <p:nvPr/>
+        </p:nvSpPr>
+        <p:spPr>
+          <a:xfrm>
+            <a:off x="987552" y="4956048"/>
             <a:ext cx="274320" cy="365760"/>
           </a:xfrm>
           <a:prstGeom prst="rect">
@@ -20375,14 +20536,14 @@
       </p:sp>
       <p:sp>
         <p:nvSpPr>
-          <p:cNvPr id="17" name="TextBox 16"/>
-          <p:cNvSpPr txBox="1"/>
-          <p:nvPr/>
-        </p:nvSpPr>
-        <p:spPr>
-          <a:xfrm>
-            <a:off x="1234440" y="4791456"/>
-            <a:ext cx="4480560" cy="402336"/>
+          <p:cNvPr id="19" name="TextBox 18"/>
+          <p:cNvSpPr txBox="1"/>
+          <p:nvPr/>
+        </p:nvSpPr>
+        <p:spPr>
+          <a:xfrm>
+            <a:off x="1234440" y="4956048"/>
+            <a:ext cx="5029200" cy="365760"/>
           </a:xfrm>
           <a:prstGeom prst="rect">
             <a:avLst/>
@@ -20401,27 +20562,27 @@
               </a:lnSpc>
             </a:pPr>
             <a:r>
-              <a:rPr sz="1250" b="0">
+              <a:rPr sz="1200" b="0">
                 <a:solidFill>
                   <a:srgbClr val="444444"/>
                 </a:solidFill>
                 <a:latin typeface="Microsoft JhengHei"/>
               </a:rPr>
-              <a:t>字形優先、發音救底 → 守衛零回歸</a:t>
-            </a:r>
-          </a:p>
-        </p:txBody>
-      </p:sp>
-      <p:sp>
-        <p:nvSpPr>
-          <p:cNvPr id="18" name="Rounded Rectangle 17"/>
+              <a:t>字形優先、拼音救底 → 打字＋守衛零回歸</a:t>
+            </a:r>
+          </a:p>
+        </p:txBody>
+      </p:sp>
+      <p:sp>
+        <p:nvSpPr>
+          <p:cNvPr id="20" name="Rounded Rectangle 19"/>
           <p:cNvSpPr/>
           <p:nvPr/>
         </p:nvSpPr>
         <p:spPr>
           <a:xfrm>
-            <a:off x="6446520" y="1965960"/>
-            <a:ext cx="5074920" cy="3429000"/>
+            <a:off x="6903720" y="1965960"/>
+            <a:ext cx="4617720" cy="3429000"/>
           </a:xfrm>
           <a:prstGeom prst="roundRect">
             <a:avLst>
@@ -20460,14 +20621,14 @@
       </p:sp>
       <p:sp>
         <p:nvSpPr>
-          <p:cNvPr id="19" name="TextBox 18"/>
-          <p:cNvSpPr txBox="1"/>
-          <p:nvPr/>
-        </p:nvSpPr>
-        <p:spPr>
-          <a:xfrm>
-            <a:off x="6766560" y="2194560"/>
-            <a:ext cx="4434840" cy="365760"/>
+          <p:cNvPr id="21" name="TextBox 20"/>
+          <p:cNvSpPr txBox="1"/>
+          <p:nvPr/>
+        </p:nvSpPr>
+        <p:spPr>
+          <a:xfrm>
+            <a:off x="7196328" y="2176272"/>
+            <a:ext cx="4069080" cy="384048"/>
           </a:xfrm>
           <a:prstGeom prst="rect">
             <a:avLst/>
@@ -20492,21 +20653,21 @@
                 </a:solidFill>
                 <a:latin typeface="Microsoft JhengHei"/>
               </a:rPr>
-              <a:t>② 語音同音修正</a:t>
-            </a:r>
-          </a:p>
-        </p:txBody>
-      </p:sp>
-      <p:sp>
-        <p:nvSpPr>
-          <p:cNvPr id="20" name="TextBox 19"/>
-          <p:cNvSpPr txBox="1"/>
-          <p:nvPr/>
-        </p:nvSpPr>
-        <p:spPr>
-          <a:xfrm>
-            <a:off x="6766560" y="2606040"/>
-            <a:ext cx="4434840" cy="365760"/>
+              <a:t>② 固定規則修正</a:t>
+            </a:r>
+          </a:p>
+        </p:txBody>
+      </p:sp>
+      <p:sp>
+        <p:nvSpPr>
+          <p:cNvPr id="22" name="TextBox 21"/>
+          <p:cNvSpPr txBox="1"/>
+          <p:nvPr/>
+        </p:nvSpPr>
+        <p:spPr>
+          <a:xfrm>
+            <a:off x="7196328" y="2606040"/>
+            <a:ext cx="4069080" cy="365760"/>
           </a:xfrm>
           <a:prstGeom prst="rect">
             <a:avLst/>
@@ -20525,7 +20686,7 @@
               </a:lnSpc>
             </a:pPr>
             <a:r>
-              <a:rPr sz="1300" b="1">
+              <a:rPr sz="1250" b="1">
                 <a:solidFill>
                   <a:srgbClr val="1A1A2E"/>
                 </a:solidFill>
@@ -20538,13 +20699,13 @@
       </p:sp>
       <p:sp>
         <p:nvSpPr>
-          <p:cNvPr id="21" name="TextBox 20"/>
-          <p:cNvSpPr txBox="1"/>
-          <p:nvPr/>
-        </p:nvSpPr>
-        <p:spPr>
-          <a:xfrm>
-            <a:off x="6766560" y="3108960"/>
+          <p:cNvPr id="23" name="TextBox 22"/>
+          <p:cNvSpPr txBox="1"/>
+          <p:nvPr/>
+        </p:nvSpPr>
+        <p:spPr>
+          <a:xfrm>
+            <a:off x="7196328" y="3035808"/>
             <a:ext cx="274320" cy="365760"/>
           </a:xfrm>
           <a:prstGeom prst="rect">
@@ -20577,14 +20738,14 @@
       </p:sp>
       <p:sp>
         <p:nvSpPr>
-          <p:cNvPr id="22" name="TextBox 21"/>
-          <p:cNvSpPr txBox="1"/>
-          <p:nvPr/>
-        </p:nvSpPr>
-        <p:spPr>
-          <a:xfrm>
-            <a:off x="7013448" y="3108960"/>
-            <a:ext cx="4297680" cy="402336"/>
+          <p:cNvPr id="24" name="TextBox 23"/>
+          <p:cNvSpPr txBox="1"/>
+          <p:nvPr/>
+        </p:nvSpPr>
+        <p:spPr>
+          <a:xfrm>
+            <a:off x="7434072" y="3035808"/>
+            <a:ext cx="3657600" cy="365760"/>
           </a:xfrm>
           <a:prstGeom prst="rect">
             <a:avLst/>
@@ -20603,26 +20764,26 @@
               </a:lnSpc>
             </a:pPr>
             <a:r>
-              <a:rPr sz="1250" b="0">
+              <a:rPr sz="1200" b="0">
                 <a:solidFill>
                   <a:srgbClr val="444444"/>
                 </a:solidFill>
                 <a:latin typeface="Microsoft JhengHei"/>
               </a:rPr>
-              <a:t>倉別：總/藏/昌 倉 → 中/北 倉</a:t>
-            </a:r>
-          </a:p>
-        </p:txBody>
-      </p:sp>
-      <p:sp>
-        <p:nvSpPr>
-          <p:cNvPr id="23" name="TextBox 22"/>
-          <p:cNvSpPr txBox="1"/>
-          <p:nvPr/>
-        </p:nvSpPr>
-        <p:spPr>
-          <a:xfrm>
-            <a:off x="6766560" y="3529584"/>
+              <a:t>倉別：總/藏/昌倉 → 中/北倉</a:t>
+            </a:r>
+          </a:p>
+        </p:txBody>
+      </p:sp>
+      <p:sp>
+        <p:nvSpPr>
+          <p:cNvPr id="25" name="TextBox 24"/>
+          <p:cNvSpPr txBox="1"/>
+          <p:nvPr/>
+        </p:nvSpPr>
+        <p:spPr>
+          <a:xfrm>
+            <a:off x="7196328" y="3419856"/>
             <a:ext cx="274320" cy="365760"/>
           </a:xfrm>
           <a:prstGeom prst="rect">
@@ -20655,14 +20816,14 @@
       </p:sp>
       <p:sp>
         <p:nvSpPr>
-          <p:cNvPr id="24" name="TextBox 23"/>
-          <p:cNvSpPr txBox="1"/>
-          <p:nvPr/>
-        </p:nvSpPr>
-        <p:spPr>
-          <a:xfrm>
-            <a:off x="7013448" y="3529584"/>
-            <a:ext cx="4297680" cy="402336"/>
+          <p:cNvPr id="26" name="TextBox 25"/>
+          <p:cNvSpPr txBox="1"/>
+          <p:nvPr/>
+        </p:nvSpPr>
+        <p:spPr>
+          <a:xfrm>
+            <a:off x="7434072" y="3419856"/>
+            <a:ext cx="3657600" cy="365760"/>
           </a:xfrm>
           <a:prstGeom prst="rect">
             <a:avLst/>
@@ -20681,26 +20842,26 @@
               </a:lnSpc>
             </a:pPr>
             <a:r>
-              <a:rPr sz="1250" b="0">
+              <a:rPr sz="1200" b="0">
                 <a:solidFill>
                   <a:srgbClr val="444444"/>
                 </a:solidFill>
                 <a:latin typeface="Microsoft JhengHei"/>
               </a:rPr>
-              <a:t>動詞：近→進、谷→補（吵雜劣化）</a:t>
-            </a:r>
-          </a:p>
-        </p:txBody>
-      </p:sp>
-      <p:sp>
-        <p:nvSpPr>
-          <p:cNvPr id="25" name="TextBox 24"/>
-          <p:cNvSpPr txBox="1"/>
-          <p:nvPr/>
-        </p:nvSpPr>
-        <p:spPr>
-          <a:xfrm>
-            <a:off x="6766560" y="3950208"/>
+              <a:t>動詞：近→進、谷→補</a:t>
+            </a:r>
+          </a:p>
+        </p:txBody>
+      </p:sp>
+      <p:sp>
+        <p:nvSpPr>
+          <p:cNvPr id="27" name="TextBox 26"/>
+          <p:cNvSpPr txBox="1"/>
+          <p:nvPr/>
+        </p:nvSpPr>
+        <p:spPr>
+          <a:xfrm>
+            <a:off x="7196328" y="3803904"/>
             <a:ext cx="274320" cy="365760"/>
           </a:xfrm>
           <a:prstGeom prst="rect">
@@ -20733,14 +20894,14 @@
       </p:sp>
       <p:sp>
         <p:nvSpPr>
-          <p:cNvPr id="26" name="TextBox 25"/>
-          <p:cNvSpPr txBox="1"/>
-          <p:nvPr/>
-        </p:nvSpPr>
-        <p:spPr>
-          <a:xfrm>
-            <a:off x="7013448" y="3950208"/>
-            <a:ext cx="4297680" cy="402336"/>
+          <p:cNvPr id="28" name="TextBox 27"/>
+          <p:cNvSpPr txBox="1"/>
+          <p:nvPr/>
+        </p:nvSpPr>
+        <p:spPr>
+          <a:xfrm>
+            <a:off x="7434072" y="3803904"/>
+            <a:ext cx="3657600" cy="365760"/>
           </a:xfrm>
           <a:prstGeom prst="rect">
             <a:avLst/>
@@ -20759,26 +20920,26 @@
               </a:lnSpc>
             </a:pPr>
             <a:r>
-              <a:rPr sz="1250" b="0">
+              <a:rPr sz="1200" b="0">
                 <a:solidFill>
                   <a:srgbClr val="444444"/>
                 </a:solidFill>
                 <a:latin typeface="Microsoft JhengHei"/>
               </a:rPr>
-              <a:t>量詞：臺→台（OpenCC 轉繁差異）</a:t>
-            </a:r>
-          </a:p>
-        </p:txBody>
-      </p:sp>
-      <p:sp>
-        <p:nvSpPr>
-          <p:cNvPr id="27" name="TextBox 26"/>
-          <p:cNvSpPr txBox="1"/>
-          <p:nvPr/>
-        </p:nvSpPr>
-        <p:spPr>
-          <a:xfrm>
-            <a:off x="6766560" y="4370832"/>
+              <a:t>量詞：臺→台（OpenCC 差異）</a:t>
+            </a:r>
+          </a:p>
+        </p:txBody>
+      </p:sp>
+      <p:sp>
+        <p:nvSpPr>
+          <p:cNvPr id="29" name="TextBox 28"/>
+          <p:cNvSpPr txBox="1"/>
+          <p:nvPr/>
+        </p:nvSpPr>
+        <p:spPr>
+          <a:xfrm>
+            <a:off x="7196328" y="4187952"/>
             <a:ext cx="274320" cy="365760"/>
           </a:xfrm>
           <a:prstGeom prst="rect">
@@ -20811,14 +20972,14 @@
       </p:sp>
       <p:sp>
         <p:nvSpPr>
-          <p:cNvPr id="28" name="TextBox 27"/>
-          <p:cNvSpPr txBox="1"/>
-          <p:nvPr/>
-        </p:nvSpPr>
-        <p:spPr>
-          <a:xfrm>
-            <a:off x="7013448" y="4370832"/>
-            <a:ext cx="4297680" cy="402336"/>
+          <p:cNvPr id="30" name="TextBox 29"/>
+          <p:cNvSpPr txBox="1"/>
+          <p:nvPr/>
+        </p:nvSpPr>
+        <p:spPr>
+          <a:xfrm>
+            <a:off x="7434072" y="4187952"/>
+            <a:ext cx="3657600" cy="365760"/>
           </a:xfrm>
           <a:prstGeom prst="rect">
             <a:avLst/>
@@ -20837,7 +20998,7 @@
               </a:lnSpc>
             </a:pPr>
             <a:r>
-              <a:rPr sz="1250" b="0">
+              <a:rPr sz="1200" b="0">
                 <a:solidFill>
                   <a:srgbClr val="444444"/>
                 </a:solidFill>
@@ -20850,13 +21011,13 @@
       </p:sp>
       <p:sp>
         <p:nvSpPr>
-          <p:cNvPr id="29" name="TextBox 28"/>
-          <p:cNvSpPr txBox="1"/>
-          <p:nvPr/>
-        </p:nvSpPr>
-        <p:spPr>
-          <a:xfrm>
-            <a:off x="6766560" y="4791456"/>
+          <p:cNvPr id="31" name="TextBox 30"/>
+          <p:cNvSpPr txBox="1"/>
+          <p:nvPr/>
+        </p:nvSpPr>
+        <p:spPr>
+          <a:xfrm>
+            <a:off x="7196328" y="4572000"/>
             <a:ext cx="274320" cy="365760"/>
           </a:xfrm>
           <a:prstGeom prst="rect">
@@ -20889,14 +21050,14 @@
       </p:sp>
       <p:sp>
         <p:nvSpPr>
-          <p:cNvPr id="30" name="TextBox 29"/>
-          <p:cNvSpPr txBox="1"/>
-          <p:nvPr/>
-        </p:nvSpPr>
-        <p:spPr>
-          <a:xfrm>
-            <a:off x="7013448" y="4791456"/>
-            <a:ext cx="4297680" cy="402336"/>
+          <p:cNvPr id="32" name="TextBox 31"/>
+          <p:cNvSpPr txBox="1"/>
+          <p:nvPr/>
+        </p:nvSpPr>
+        <p:spPr>
+          <a:xfrm>
+            <a:off x="7434072" y="4572000"/>
+            <a:ext cx="3657600" cy="365760"/>
           </a:xfrm>
           <a:prstGeom prst="rect">
             <a:avLst/>
@@ -20915,12 +21076,90 @@
               </a:lnSpc>
             </a:pPr>
             <a:r>
-              <a:rPr sz="1250" b="0">
+              <a:rPr sz="1200" b="0">
                 <a:solidFill>
                   <a:srgbClr val="444444"/>
                 </a:solidFill>
                 <a:latin typeface="Microsoft JhengHei"/>
               </a:rPr>
+              <a:t>退貨中文數字豁免</a:t>
+            </a:r>
+          </a:p>
+        </p:txBody>
+      </p:sp>
+      <p:sp>
+        <p:nvSpPr>
+          <p:cNvPr id="33" name="TextBox 32"/>
+          <p:cNvSpPr txBox="1"/>
+          <p:nvPr/>
+        </p:nvSpPr>
+        <p:spPr>
+          <a:xfrm>
+            <a:off x="7196328" y="4956048"/>
+            <a:ext cx="274320" cy="365760"/>
+          </a:xfrm>
+          <a:prstGeom prst="rect">
+            <a:avLst/>
+          </a:prstGeom>
+          <a:noFill/>
+        </p:spPr>
+        <p:txBody>
+          <a:bodyPr wrap="square" lIns="0" rIns="0" tIns="0" bIns="0" anchor="t">
+            <a:spAutoFit/>
+          </a:bodyPr>
+          <a:lstStyle/>
+          <a:p>
+            <a:pPr algn="l">
+              <a:lnSpc>
+                <a:spcPct val="115000"/>
+              </a:lnSpc>
+            </a:pPr>
+            <a:r>
+              <a:rPr sz="1500" b="1">
+                <a:solidFill>
+                  <a:srgbClr val="F0A030"/>
+                </a:solidFill>
+                <a:latin typeface="Microsoft JhengHei"/>
+              </a:rPr>
+              <a:t>·</a:t>
+            </a:r>
+          </a:p>
+        </p:txBody>
+      </p:sp>
+      <p:sp>
+        <p:nvSpPr>
+          <p:cNvPr id="34" name="TextBox 33"/>
+          <p:cNvSpPr txBox="1"/>
+          <p:nvPr/>
+        </p:nvSpPr>
+        <p:spPr>
+          <a:xfrm>
+            <a:off x="7434072" y="4956048"/>
+            <a:ext cx="3657600" cy="365760"/>
+          </a:xfrm>
+          <a:prstGeom prst="rect">
+            <a:avLst/>
+          </a:prstGeom>
+          <a:noFill/>
+        </p:spPr>
+        <p:txBody>
+          <a:bodyPr wrap="square" lIns="0" rIns="0" tIns="0" bIns="0" anchor="t">
+            <a:spAutoFit/>
+          </a:bodyPr>
+          <a:lstStyle/>
+          <a:p>
+            <a:pPr algn="l">
+              <a:lnSpc>
+                <a:spcPct val="115000"/>
+              </a:lnSpc>
+            </a:pPr>
+            <a:r>
+              <a:rPr sz="1200" b="0">
+                <a:solidFill>
+                  <a:srgbClr val="444444"/>
+                </a:solidFill>
+                <a:latin typeface="Microsoft JhengHei"/>
+              </a:rPr>
               <a:t>打字訪客零影響、守衛零風險</a:t>
             </a:r>
           </a:p>
@@ -20928,13 +21167,13 @@
       </p:sp>
       <p:sp>
         <p:nvSpPr>
-          <p:cNvPr id="31" name="TextBox 30"/>
-          <p:cNvSpPr txBox="1"/>
-          <p:nvPr/>
-        </p:nvSpPr>
-        <p:spPr>
-          <a:xfrm>
-            <a:off x="667512" y="5806440"/>
+          <p:cNvPr id="35" name="TextBox 34"/>
+          <p:cNvSpPr txBox="1"/>
+          <p:nvPr/>
+        </p:nvSpPr>
+        <p:spPr>
+          <a:xfrm>
+            <a:off x="667512" y="5760720"/>
             <a:ext cx="10789920" cy="457200"/>
           </a:xfrm>
           <a:prstGeom prst="rect">
@@ -20954,20 +21193,20 @@
               </a:lnSpc>
             </a:pPr>
             <a:r>
-              <a:rPr sz="1300" b="1">
+              <a:rPr sz="1250" b="1">
                 <a:solidFill>
                   <a:srgbClr val="008E76"/>
                 </a:solidFill>
                 <a:latin typeface="Microsoft JhengHei"/>
               </a:rPr>
-              <a:t>設計原則：每一條容錯規則都有守衛把關，改規則前先跑護欄測試——聽錯可以救，但不能救錯。</a:t>
-            </a:r>
-          </a:p>
-        </p:txBody>
-      </p:sp>
-      <p:sp>
-        <p:nvSpPr>
-          <p:cNvPr id="32" name="TextBox 31"/>
+              <a:t>分工：拼音層救「沒見過的音近錯」（會智慧比對）；規則層收「反覆出現的固定錯」（查表最快最穩）。下一頁看拼音層怎麼一步步救。</a:t>
+            </a:r>
+          </a:p>
+        </p:txBody>
+      </p:sp>
+      <p:sp>
+        <p:nvSpPr>
+          <p:cNvPr id="36" name="TextBox 35"/>
           <p:cNvSpPr txBox="1"/>
           <p:nvPr/>
         </p:nvSpPr>
@@ -21056,7 +21295,7 @@
                 </a:solidFill>
                 <a:latin typeface="Arial"/>
               </a:rPr>
-              <a:t>VOICE POC · 救回實例</a:t>
+              <a:t>VOICE POC · 拼音修正流程</a:t>
             </a:r>
           </a:p>
         </p:txBody>
@@ -21095,7 +21334,7 @@
                 </a:solidFill>
                 <a:latin typeface="Microsoft JhengHei"/>
               </a:rPr>
-              <a:t>ASR 聽錯，容錯層照樣答對（真人聲實測）</a:t>
+              <a:t>一個錯字怎麼被救回：字形先試，拼音救底</a:t>
             </a:r>
           </a:p>
         </p:txBody>
@@ -21108,8 +21347,8 @@
         </p:nvSpPr>
         <p:spPr>
           <a:xfrm>
-            <a:off x="667512" y="1261872"/>
-            <a:ext cx="10789920" cy="365760"/>
+            <a:off x="667512" y="1234440"/>
+            <a:ext cx="10789920" cy="329184"/>
           </a:xfrm>
           <a:prstGeom prst="rect">
             <a:avLst/>
@@ -21128,13 +21367,13 @@
               </a:lnSpc>
             </a:pPr>
             <a:r>
-              <a:rPr sz="1300" b="0">
+              <a:rPr sz="1250" b="0">
                 <a:solidFill>
                   <a:srgbClr val="555555"/>
                 </a:solidFill>
                 <a:latin typeface="Microsoft JhengHei"/>
               </a:rPr>
-              <a:t>以下全是 2026-07 真人聲實測（webcam）的原始紀錄：ASR 明明聽錯，經容錯層修正後結果正確。</a:t>
+              <a:t>核心：ASR 錯字多是「音同、字形零重疊」——字形比對必敗，轉成拼音一比即中。全程純字串運算，RPi5 零負擔。</a:t>
             </a:r>
           </a:p>
         </p:txBody>
@@ -21148,7 +21387,946 @@
         <p:spPr>
           <a:xfrm>
             <a:off x="667512" y="1783080"/>
-            <a:ext cx="10853928" cy="420624"/>
+            <a:ext cx="6126480" cy="603504"/>
+          </a:xfrm>
+          <a:prstGeom prst="roundRect">
+            <a:avLst>
+              <a:gd name="adj" fmla="val 8000"/>
+            </a:avLst>
+          </a:prstGeom>
+          <a:solidFill>
+            <a:srgbClr val="222A45"/>
+          </a:solidFill>
+          <a:ln>
+            <a:noFill/>
+          </a:ln>
+          <a:effectLst/>
+        </p:spPr>
+        <p:style>
+          <a:lnRef idx="1">
+            <a:schemeClr val="accent1"/>
+          </a:lnRef>
+          <a:fillRef idx="3">
+            <a:schemeClr val="accent1"/>
+          </a:fillRef>
+          <a:effectRef idx="2">
+            <a:schemeClr val="accent1"/>
+          </a:effectRef>
+          <a:fontRef idx="minor">
+            <a:schemeClr val="lt1"/>
+          </a:fontRef>
+        </p:style>
+        <p:txBody>
+          <a:bodyPr rtlCol="0" anchor="ctr"/>
+          <a:lstStyle/>
+          <a:p>
+            <a:pPr algn="ctr"/>
+          </a:p>
+        </p:txBody>
+      </p:sp>
+      <p:sp>
+        <p:nvSpPr>
+          <p:cNvPr id="6" name="TextBox 5"/>
+          <p:cNvSpPr txBox="1"/>
+          <p:nvPr/>
+        </p:nvSpPr>
+        <p:spPr>
+          <a:xfrm>
+            <a:off x="923544" y="1847088"/>
+            <a:ext cx="2514600" cy="493776"/>
+          </a:xfrm>
+          <a:prstGeom prst="rect">
+            <a:avLst/>
+          </a:prstGeom>
+          <a:noFill/>
+        </p:spPr>
+        <p:txBody>
+          <a:bodyPr wrap="square" lIns="0" rIns="0" tIns="0" bIns="0" anchor="ctr">
+            <a:spAutoFit/>
+          </a:bodyPr>
+          <a:lstStyle/>
+          <a:p>
+            <a:pPr algn="l">
+              <a:lnSpc>
+                <a:spcPct val="115000"/>
+              </a:lnSpc>
+            </a:pPr>
+            <a:r>
+              <a:rPr sz="1350" b="1">
+                <a:solidFill>
+                  <a:srgbClr val="FFFFFF"/>
+                </a:solidFill>
+                <a:latin typeface="Microsoft JhengHei"/>
+              </a:rPr>
+              <a:t>輸入 keyword</a:t>
+            </a:r>
+          </a:p>
+        </p:txBody>
+      </p:sp>
+      <p:sp>
+        <p:nvSpPr>
+          <p:cNvPr id="7" name="TextBox 6"/>
+          <p:cNvSpPr txBox="1"/>
+          <p:nvPr/>
+        </p:nvSpPr>
+        <p:spPr>
+          <a:xfrm>
+            <a:off x="3456432" y="1847088"/>
+            <a:ext cx="3108960" cy="493776"/>
+          </a:xfrm>
+          <a:prstGeom prst="rect">
+            <a:avLst/>
+          </a:prstGeom>
+          <a:noFill/>
+        </p:spPr>
+        <p:txBody>
+          <a:bodyPr wrap="square" lIns="0" rIns="0" tIns="0" bIns="0" anchor="ctr">
+            <a:spAutoFit/>
+          </a:bodyPr>
+          <a:lstStyle/>
+          <a:p>
+            <a:pPr algn="l">
+              <a:lnSpc>
+                <a:spcPct val="115000"/>
+              </a:lnSpc>
+            </a:pPr>
+            <a:r>
+              <a:rPr sz="1100" b="0">
+                <a:solidFill>
+                  <a:srgbClr val="BBBBBB"/>
+                </a:solidFill>
+                <a:latin typeface="Microsoft JhengHei"/>
+              </a:rPr>
+              <a:t>270M 抽出的商品詞（常髒／殘／錯）</a:t>
+            </a:r>
+          </a:p>
+        </p:txBody>
+      </p:sp>
+      <p:sp>
+        <p:nvSpPr>
+          <p:cNvPr id="8" name="TextBox 7"/>
+          <p:cNvSpPr txBox="1"/>
+          <p:nvPr/>
+        </p:nvSpPr>
+        <p:spPr>
+          <a:xfrm>
+            <a:off x="3547872" y="2359152"/>
+            <a:ext cx="365760" cy="201168"/>
+          </a:xfrm>
+          <a:prstGeom prst="rect">
+            <a:avLst/>
+          </a:prstGeom>
+          <a:noFill/>
+        </p:spPr>
+        <p:txBody>
+          <a:bodyPr wrap="square" lIns="0" rIns="0" tIns="0" bIns="0" anchor="t">
+            <a:spAutoFit/>
+          </a:bodyPr>
+          <a:lstStyle/>
+          <a:p>
+            <a:pPr algn="ctr">
+              <a:lnSpc>
+                <a:spcPct val="115000"/>
+              </a:lnSpc>
+            </a:pPr>
+            <a:r>
+              <a:rPr sz="1100" b="0">
+                <a:solidFill>
+                  <a:srgbClr val="BBBBBB"/>
+                </a:solidFill>
+                <a:latin typeface="Arial"/>
+              </a:rPr>
+              <a:t>▼</a:t>
+            </a:r>
+          </a:p>
+        </p:txBody>
+      </p:sp>
+      <p:sp>
+        <p:nvSpPr>
+          <p:cNvPr id="9" name="Rounded Rectangle 8"/>
+          <p:cNvSpPr/>
+          <p:nvPr/>
+        </p:nvSpPr>
+        <p:spPr>
+          <a:xfrm>
+            <a:off x="667512" y="2555748"/>
+            <a:ext cx="6126480" cy="603504"/>
+          </a:xfrm>
+          <a:prstGeom prst="roundRect">
+            <a:avLst>
+              <a:gd name="adj" fmla="val 8000"/>
+            </a:avLst>
+          </a:prstGeom>
+          <a:solidFill>
+            <a:srgbClr val="F4F6F8"/>
+          </a:solidFill>
+          <a:ln>
+            <a:noFill/>
+          </a:ln>
+          <a:effectLst/>
+        </p:spPr>
+        <p:style>
+          <a:lnRef idx="1">
+            <a:schemeClr val="accent1"/>
+          </a:lnRef>
+          <a:fillRef idx="3">
+            <a:schemeClr val="accent1"/>
+          </a:fillRef>
+          <a:effectRef idx="2">
+            <a:schemeClr val="accent1"/>
+          </a:effectRef>
+          <a:fontRef idx="minor">
+            <a:schemeClr val="lt1"/>
+          </a:fontRef>
+        </p:style>
+        <p:txBody>
+          <a:bodyPr rtlCol="0" anchor="ctr"/>
+          <a:lstStyle/>
+          <a:p>
+            <a:pPr algn="ctr"/>
+          </a:p>
+        </p:txBody>
+      </p:sp>
+      <p:sp>
+        <p:nvSpPr>
+          <p:cNvPr id="10" name="TextBox 9"/>
+          <p:cNvSpPr txBox="1"/>
+          <p:nvPr/>
+        </p:nvSpPr>
+        <p:spPr>
+          <a:xfrm>
+            <a:off x="923544" y="2619756"/>
+            <a:ext cx="2514600" cy="493776"/>
+          </a:xfrm>
+          <a:prstGeom prst="rect">
+            <a:avLst/>
+          </a:prstGeom>
+          <a:noFill/>
+        </p:spPr>
+        <p:txBody>
+          <a:bodyPr wrap="square" lIns="0" rIns="0" tIns="0" bIns="0" anchor="ctr">
+            <a:spAutoFit/>
+          </a:bodyPr>
+          <a:lstStyle/>
+          <a:p>
+            <a:pPr algn="l">
+              <a:lnSpc>
+                <a:spcPct val="115000"/>
+              </a:lnSpc>
+            </a:pPr>
+            <a:r>
+              <a:rPr sz="1350" b="1">
+                <a:solidFill>
+                  <a:srgbClr val="008E76"/>
+                </a:solidFill>
+                <a:latin typeface="Microsoft JhengHei"/>
+              </a:rPr>
+              <a:t>① 字形比對優先</a:t>
+            </a:r>
+          </a:p>
+        </p:txBody>
+      </p:sp>
+      <p:sp>
+        <p:nvSpPr>
+          <p:cNvPr id="11" name="TextBox 10"/>
+          <p:cNvSpPr txBox="1"/>
+          <p:nvPr/>
+        </p:nvSpPr>
+        <p:spPr>
+          <a:xfrm>
+            <a:off x="3456432" y="2619756"/>
+            <a:ext cx="3108960" cy="493776"/>
+          </a:xfrm>
+          <a:prstGeom prst="rect">
+            <a:avLst/>
+          </a:prstGeom>
+          <a:noFill/>
+        </p:spPr>
+        <p:txBody>
+          <a:bodyPr wrap="square" lIns="0" rIns="0" tIns="0" bIns="0" anchor="ctr">
+            <a:spAutoFit/>
+          </a:bodyPr>
+          <a:lstStyle/>
+          <a:p>
+            <a:pPr algn="l">
+              <a:lnSpc>
+                <a:spcPct val="115000"/>
+              </a:lnSpc>
+            </a:pPr>
+            <a:r>
+              <a:rPr sz="1100" b="0">
+                <a:solidFill>
+                  <a:srgbClr val="444444"/>
+                </a:solidFill>
+                <a:latin typeface="Microsoft JhengHei"/>
+              </a:rPr>
+              <a:t>先走 LCS 字形比對，命中就用 → 不進拼音層</a:t>
+            </a:r>
+          </a:p>
+        </p:txBody>
+      </p:sp>
+      <p:sp>
+        <p:nvSpPr>
+          <p:cNvPr id="12" name="TextBox 11"/>
+          <p:cNvSpPr txBox="1"/>
+          <p:nvPr/>
+        </p:nvSpPr>
+        <p:spPr>
+          <a:xfrm>
+            <a:off x="3547872" y="3131820"/>
+            <a:ext cx="365760" cy="201168"/>
+          </a:xfrm>
+          <a:prstGeom prst="rect">
+            <a:avLst/>
+          </a:prstGeom>
+          <a:noFill/>
+        </p:spPr>
+        <p:txBody>
+          <a:bodyPr wrap="square" lIns="0" rIns="0" tIns="0" bIns="0" anchor="t">
+            <a:spAutoFit/>
+          </a:bodyPr>
+          <a:lstStyle/>
+          <a:p>
+            <a:pPr algn="ctr">
+              <a:lnSpc>
+                <a:spcPct val="115000"/>
+              </a:lnSpc>
+            </a:pPr>
+            <a:r>
+              <a:rPr sz="1100" b="0">
+                <a:solidFill>
+                  <a:srgbClr val="BBBBBB"/>
+                </a:solidFill>
+                <a:latin typeface="Arial"/>
+              </a:rPr>
+              <a:t>▼</a:t>
+            </a:r>
+          </a:p>
+        </p:txBody>
+      </p:sp>
+      <p:sp>
+        <p:nvSpPr>
+          <p:cNvPr id="13" name="Rounded Rectangle 12"/>
+          <p:cNvSpPr/>
+          <p:nvPr/>
+        </p:nvSpPr>
+        <p:spPr>
+          <a:xfrm>
+            <a:off x="667512" y="3328416"/>
+            <a:ext cx="6126480" cy="603504"/>
+          </a:xfrm>
+          <a:prstGeom prst="roundRect">
+            <a:avLst>
+              <a:gd name="adj" fmla="val 8000"/>
+            </a:avLst>
+          </a:prstGeom>
+          <a:solidFill>
+            <a:srgbClr val="F4F6F8"/>
+          </a:solidFill>
+          <a:ln>
+            <a:noFill/>
+          </a:ln>
+          <a:effectLst/>
+        </p:spPr>
+        <p:style>
+          <a:lnRef idx="1">
+            <a:schemeClr val="accent1"/>
+          </a:lnRef>
+          <a:fillRef idx="3">
+            <a:schemeClr val="accent1"/>
+          </a:fillRef>
+          <a:effectRef idx="2">
+            <a:schemeClr val="accent1"/>
+          </a:effectRef>
+          <a:fontRef idx="minor">
+            <a:schemeClr val="lt1"/>
+          </a:fontRef>
+        </p:style>
+        <p:txBody>
+          <a:bodyPr rtlCol="0" anchor="ctr"/>
+          <a:lstStyle/>
+          <a:p>
+            <a:pPr algn="ctr"/>
+          </a:p>
+        </p:txBody>
+      </p:sp>
+      <p:sp>
+        <p:nvSpPr>
+          <p:cNvPr id="14" name="TextBox 13"/>
+          <p:cNvSpPr txBox="1"/>
+          <p:nvPr/>
+        </p:nvSpPr>
+        <p:spPr>
+          <a:xfrm>
+            <a:off x="923544" y="3392424"/>
+            <a:ext cx="2514600" cy="493776"/>
+          </a:xfrm>
+          <a:prstGeom prst="rect">
+            <a:avLst/>
+          </a:prstGeom>
+          <a:noFill/>
+        </p:spPr>
+        <p:txBody>
+          <a:bodyPr wrap="square" lIns="0" rIns="0" tIns="0" bIns="0" anchor="ctr">
+            <a:spAutoFit/>
+          </a:bodyPr>
+          <a:lstStyle/>
+          <a:p>
+            <a:pPr algn="l">
+              <a:lnSpc>
+                <a:spcPct val="115000"/>
+              </a:lnSpc>
+            </a:pPr>
+            <a:r>
+              <a:rPr sz="1350" b="1">
+                <a:solidFill>
+                  <a:srgbClr val="F0A030"/>
+                </a:solidFill>
+                <a:latin typeface="Microsoft JhengHei"/>
+              </a:rPr>
+              <a:t>② 三道排除閘</a:t>
+            </a:r>
+          </a:p>
+        </p:txBody>
+      </p:sp>
+      <p:sp>
+        <p:nvSpPr>
+          <p:cNvPr id="15" name="TextBox 14"/>
+          <p:cNvSpPr txBox="1"/>
+          <p:nvPr/>
+        </p:nvSpPr>
+        <p:spPr>
+          <a:xfrm>
+            <a:off x="3456432" y="3392424"/>
+            <a:ext cx="3108960" cy="493776"/>
+          </a:xfrm>
+          <a:prstGeom prst="rect">
+            <a:avLst/>
+          </a:prstGeom>
+          <a:noFill/>
+        </p:spPr>
+        <p:txBody>
+          <a:bodyPr wrap="square" lIns="0" rIns="0" tIns="0" bIns="0" anchor="ctr">
+            <a:spAutoFit/>
+          </a:bodyPr>
+          <a:lstStyle/>
+          <a:p>
+            <a:pPr algn="l">
+              <a:lnSpc>
+                <a:spcPct val="115000"/>
+              </a:lnSpc>
+            </a:pPr>
+            <a:r>
+              <a:rPr sz="1100" b="0">
+                <a:solidFill>
+                  <a:srgbClr val="444444"/>
+                </a:solidFill>
+                <a:latin typeface="Microsoft JhengHei"/>
+              </a:rPr>
+              <a:t>含寫入動詞／倉別／數字 → 不救；&gt;6 字 → 不救</a:t>
+            </a:r>
+          </a:p>
+        </p:txBody>
+      </p:sp>
+      <p:sp>
+        <p:nvSpPr>
+          <p:cNvPr id="16" name="TextBox 15"/>
+          <p:cNvSpPr txBox="1"/>
+          <p:nvPr/>
+        </p:nvSpPr>
+        <p:spPr>
+          <a:xfrm>
+            <a:off x="3547872" y="3904488"/>
+            <a:ext cx="365760" cy="201168"/>
+          </a:xfrm>
+          <a:prstGeom prst="rect">
+            <a:avLst/>
+          </a:prstGeom>
+          <a:noFill/>
+        </p:spPr>
+        <p:txBody>
+          <a:bodyPr wrap="square" lIns="0" rIns="0" tIns="0" bIns="0" anchor="t">
+            <a:spAutoFit/>
+          </a:bodyPr>
+          <a:lstStyle/>
+          <a:p>
+            <a:pPr algn="ctr">
+              <a:lnSpc>
+                <a:spcPct val="115000"/>
+              </a:lnSpc>
+            </a:pPr>
+            <a:r>
+              <a:rPr sz="1100" b="0">
+                <a:solidFill>
+                  <a:srgbClr val="BBBBBB"/>
+                </a:solidFill>
+                <a:latin typeface="Arial"/>
+              </a:rPr>
+              <a:t>▼</a:t>
+            </a:r>
+          </a:p>
+        </p:txBody>
+      </p:sp>
+      <p:sp>
+        <p:nvSpPr>
+          <p:cNvPr id="17" name="Rounded Rectangle 16"/>
+          <p:cNvSpPr/>
+          <p:nvPr/>
+        </p:nvSpPr>
+        <p:spPr>
+          <a:xfrm>
+            <a:off x="667512" y="4101084"/>
+            <a:ext cx="6126480" cy="603504"/>
+          </a:xfrm>
+          <a:prstGeom prst="roundRect">
+            <a:avLst>
+              <a:gd name="adj" fmla="val 8000"/>
+            </a:avLst>
+          </a:prstGeom>
+          <a:solidFill>
+            <a:srgbClr val="F4F6F8"/>
+          </a:solidFill>
+          <a:ln>
+            <a:noFill/>
+          </a:ln>
+          <a:effectLst/>
+        </p:spPr>
+        <p:style>
+          <a:lnRef idx="1">
+            <a:schemeClr val="accent1"/>
+          </a:lnRef>
+          <a:fillRef idx="3">
+            <a:schemeClr val="accent1"/>
+          </a:fillRef>
+          <a:effectRef idx="2">
+            <a:schemeClr val="accent1"/>
+          </a:effectRef>
+          <a:fontRef idx="minor">
+            <a:schemeClr val="lt1"/>
+          </a:fontRef>
+        </p:style>
+        <p:txBody>
+          <a:bodyPr rtlCol="0" anchor="ctr"/>
+          <a:lstStyle/>
+          <a:p>
+            <a:pPr algn="ctr"/>
+          </a:p>
+        </p:txBody>
+      </p:sp>
+      <p:sp>
+        <p:nvSpPr>
+          <p:cNvPr id="18" name="TextBox 17"/>
+          <p:cNvSpPr txBox="1"/>
+          <p:nvPr/>
+        </p:nvSpPr>
+        <p:spPr>
+          <a:xfrm>
+            <a:off x="923544" y="4165092"/>
+            <a:ext cx="2514600" cy="493776"/>
+          </a:xfrm>
+          <a:prstGeom prst="rect">
+            <a:avLst/>
+          </a:prstGeom>
+          <a:noFill/>
+        </p:spPr>
+        <p:txBody>
+          <a:bodyPr wrap="square" lIns="0" rIns="0" tIns="0" bIns="0" anchor="ctr">
+            <a:spAutoFit/>
+          </a:bodyPr>
+          <a:lstStyle/>
+          <a:p>
+            <a:pPr algn="l">
+              <a:lnSpc>
+                <a:spcPct val="115000"/>
+              </a:lnSpc>
+            </a:pPr>
+            <a:r>
+              <a:rPr sz="1350" b="1">
+                <a:solidFill>
+                  <a:srgbClr val="00C49A"/>
+                </a:solidFill>
+                <a:latin typeface="Microsoft JhengHei"/>
+              </a:rPr>
+              <a:t>③ 轉拼音 + 音節還原</a:t>
+            </a:r>
+          </a:p>
+        </p:txBody>
+      </p:sp>
+      <p:sp>
+        <p:nvSpPr>
+          <p:cNvPr id="19" name="TextBox 18"/>
+          <p:cNvSpPr txBox="1"/>
+          <p:nvPr/>
+        </p:nvSpPr>
+        <p:spPr>
+          <a:xfrm>
+            <a:off x="3456432" y="4165092"/>
+            <a:ext cx="3108960" cy="493776"/>
+          </a:xfrm>
+          <a:prstGeom prst="rect">
+            <a:avLst/>
+          </a:prstGeom>
+          <a:noFill/>
+        </p:spPr>
+        <p:txBody>
+          <a:bodyPr wrap="square" lIns="0" rIns="0" tIns="0" bIns="0" anchor="ctr">
+            <a:spAutoFit/>
+          </a:bodyPr>
+          <a:lstStyle/>
+          <a:p>
+            <a:pPr algn="l">
+              <a:lnSpc>
+                <a:spcPct val="115000"/>
+              </a:lnSpc>
+            </a:pPr>
+            <a:r>
+              <a:rPr sz="1100" b="0">
+                <a:solidFill>
+                  <a:srgbClr val="444444"/>
+                </a:solidFill>
+                <a:latin typeface="Microsoft JhengHei"/>
+              </a:rPr>
+              <a:t>lazy_pinyin，捲舌平舌還原（zu→zhu、su→shu）</a:t>
+            </a:r>
+          </a:p>
+        </p:txBody>
+      </p:sp>
+      <p:sp>
+        <p:nvSpPr>
+          <p:cNvPr id="20" name="TextBox 19"/>
+          <p:cNvSpPr txBox="1"/>
+          <p:nvPr/>
+        </p:nvSpPr>
+        <p:spPr>
+          <a:xfrm>
+            <a:off x="3547872" y="4677156"/>
+            <a:ext cx="365760" cy="201168"/>
+          </a:xfrm>
+          <a:prstGeom prst="rect">
+            <a:avLst/>
+          </a:prstGeom>
+          <a:noFill/>
+        </p:spPr>
+        <p:txBody>
+          <a:bodyPr wrap="square" lIns="0" rIns="0" tIns="0" bIns="0" anchor="t">
+            <a:spAutoFit/>
+          </a:bodyPr>
+          <a:lstStyle/>
+          <a:p>
+            <a:pPr algn="ctr">
+              <a:lnSpc>
+                <a:spcPct val="115000"/>
+              </a:lnSpc>
+            </a:pPr>
+            <a:r>
+              <a:rPr sz="1100" b="0">
+                <a:solidFill>
+                  <a:srgbClr val="BBBBBB"/>
+                </a:solidFill>
+                <a:latin typeface="Arial"/>
+              </a:rPr>
+              <a:t>▼</a:t>
+            </a:r>
+          </a:p>
+        </p:txBody>
+      </p:sp>
+      <p:sp>
+        <p:nvSpPr>
+          <p:cNvPr id="21" name="Rounded Rectangle 20"/>
+          <p:cNvSpPr/>
+          <p:nvPr/>
+        </p:nvSpPr>
+        <p:spPr>
+          <a:xfrm>
+            <a:off x="667512" y="4873752"/>
+            <a:ext cx="6126480" cy="603504"/>
+          </a:xfrm>
+          <a:prstGeom prst="roundRect">
+            <a:avLst>
+              <a:gd name="adj" fmla="val 8000"/>
+            </a:avLst>
+          </a:prstGeom>
+          <a:solidFill>
+            <a:srgbClr val="F4F6F8"/>
+          </a:solidFill>
+          <a:ln>
+            <a:noFill/>
+          </a:ln>
+          <a:effectLst/>
+        </p:spPr>
+        <p:style>
+          <a:lnRef idx="1">
+            <a:schemeClr val="accent1"/>
+          </a:lnRef>
+          <a:fillRef idx="3">
+            <a:schemeClr val="accent1"/>
+          </a:fillRef>
+          <a:effectRef idx="2">
+            <a:schemeClr val="accent1"/>
+          </a:effectRef>
+          <a:fontRef idx="minor">
+            <a:schemeClr val="lt1"/>
+          </a:fontRef>
+        </p:style>
+        <p:txBody>
+          <a:bodyPr rtlCol="0" anchor="ctr"/>
+          <a:lstStyle/>
+          <a:p>
+            <a:pPr algn="ctr"/>
+          </a:p>
+        </p:txBody>
+      </p:sp>
+      <p:sp>
+        <p:nvSpPr>
+          <p:cNvPr id="22" name="TextBox 21"/>
+          <p:cNvSpPr txBox="1"/>
+          <p:nvPr/>
+        </p:nvSpPr>
+        <p:spPr>
+          <a:xfrm>
+            <a:off x="923544" y="4937760"/>
+            <a:ext cx="2514600" cy="493776"/>
+          </a:xfrm>
+          <a:prstGeom prst="rect">
+            <a:avLst/>
+          </a:prstGeom>
+          <a:noFill/>
+        </p:spPr>
+        <p:txBody>
+          <a:bodyPr wrap="square" lIns="0" rIns="0" tIns="0" bIns="0" anchor="ctr">
+            <a:spAutoFit/>
+          </a:bodyPr>
+          <a:lstStyle/>
+          <a:p>
+            <a:pPr algn="l">
+              <a:lnSpc>
+                <a:spcPct val="115000"/>
+              </a:lnSpc>
+            </a:pPr>
+            <a:r>
+              <a:rPr sz="1350" b="1">
+                <a:solidFill>
+                  <a:srgbClr val="00C49A"/>
+                </a:solidFill>
+                <a:latin typeface="Microsoft JhengHei"/>
+              </a:rPr>
+              <a:t>④ 滑窗比對商品拼音</a:t>
+            </a:r>
+          </a:p>
+        </p:txBody>
+      </p:sp>
+      <p:sp>
+        <p:nvSpPr>
+          <p:cNvPr id="23" name="TextBox 22"/>
+          <p:cNvSpPr txBox="1"/>
+          <p:nvPr/>
+        </p:nvSpPr>
+        <p:spPr>
+          <a:xfrm>
+            <a:off x="3456432" y="4937760"/>
+            <a:ext cx="3108960" cy="493776"/>
+          </a:xfrm>
+          <a:prstGeom prst="rect">
+            <a:avLst/>
+          </a:prstGeom>
+          <a:noFill/>
+        </p:spPr>
+        <p:txBody>
+          <a:bodyPr wrap="square" lIns="0" rIns="0" tIns="0" bIns="0" anchor="ctr">
+            <a:spAutoFit/>
+          </a:bodyPr>
+          <a:lstStyle/>
+          <a:p>
+            <a:pPr algn="l">
+              <a:lnSpc>
+                <a:spcPct val="115000"/>
+              </a:lnSpc>
+            </a:pPr>
+            <a:r>
+              <a:rPr sz="1100" b="0">
+                <a:solidFill>
+                  <a:srgbClr val="444444"/>
+                </a:solidFill>
+                <a:latin typeface="Microsoft JhengHei"/>
+              </a:rPr>
+              <a:t>核心名拼音 vs 句拼音，difflib 取最佳對齊</a:t>
+            </a:r>
+          </a:p>
+        </p:txBody>
+      </p:sp>
+      <p:sp>
+        <p:nvSpPr>
+          <p:cNvPr id="24" name="TextBox 23"/>
+          <p:cNvSpPr txBox="1"/>
+          <p:nvPr/>
+        </p:nvSpPr>
+        <p:spPr>
+          <a:xfrm>
+            <a:off x="3547872" y="5449824"/>
+            <a:ext cx="365760" cy="201168"/>
+          </a:xfrm>
+          <a:prstGeom prst="rect">
+            <a:avLst/>
+          </a:prstGeom>
+          <a:noFill/>
+        </p:spPr>
+        <p:txBody>
+          <a:bodyPr wrap="square" lIns="0" rIns="0" tIns="0" bIns="0" anchor="t">
+            <a:spAutoFit/>
+          </a:bodyPr>
+          <a:lstStyle/>
+          <a:p>
+            <a:pPr algn="ctr">
+              <a:lnSpc>
+                <a:spcPct val="115000"/>
+              </a:lnSpc>
+            </a:pPr>
+            <a:r>
+              <a:rPr sz="1100" b="0">
+                <a:solidFill>
+                  <a:srgbClr val="BBBBBB"/>
+                </a:solidFill>
+                <a:latin typeface="Arial"/>
+              </a:rPr>
+              <a:t>▼</a:t>
+            </a:r>
+          </a:p>
+        </p:txBody>
+      </p:sp>
+      <p:sp>
+        <p:nvSpPr>
+          <p:cNvPr id="25" name="Rounded Rectangle 24"/>
+          <p:cNvSpPr/>
+          <p:nvPr/>
+        </p:nvSpPr>
+        <p:spPr>
+          <a:xfrm>
+            <a:off x="667512" y="5646420"/>
+            <a:ext cx="6126480" cy="603504"/>
+          </a:xfrm>
+          <a:prstGeom prst="roundRect">
+            <a:avLst>
+              <a:gd name="adj" fmla="val 8000"/>
+            </a:avLst>
+          </a:prstGeom>
+          <a:solidFill>
+            <a:srgbClr val="F4F6F8"/>
+          </a:solidFill>
+          <a:ln>
+            <a:noFill/>
+          </a:ln>
+          <a:effectLst/>
+        </p:spPr>
+        <p:style>
+          <a:lnRef idx="1">
+            <a:schemeClr val="accent1"/>
+          </a:lnRef>
+          <a:fillRef idx="3">
+            <a:schemeClr val="accent1"/>
+          </a:fillRef>
+          <a:effectRef idx="2">
+            <a:schemeClr val="accent1"/>
+          </a:effectRef>
+          <a:fontRef idx="minor">
+            <a:schemeClr val="lt1"/>
+          </a:fontRef>
+        </p:style>
+        <p:txBody>
+          <a:bodyPr rtlCol="0" anchor="ctr"/>
+          <a:lstStyle/>
+          <a:p>
+            <a:pPr algn="ctr"/>
+          </a:p>
+        </p:txBody>
+      </p:sp>
+      <p:sp>
+        <p:nvSpPr>
+          <p:cNvPr id="26" name="TextBox 25"/>
+          <p:cNvSpPr txBox="1"/>
+          <p:nvPr/>
+        </p:nvSpPr>
+        <p:spPr>
+          <a:xfrm>
+            <a:off x="923544" y="5710428"/>
+            <a:ext cx="2514600" cy="493776"/>
+          </a:xfrm>
+          <a:prstGeom prst="rect">
+            <a:avLst/>
+          </a:prstGeom>
+          <a:noFill/>
+        </p:spPr>
+        <p:txBody>
+          <a:bodyPr wrap="square" lIns="0" rIns="0" tIns="0" bIns="0" anchor="ctr">
+            <a:spAutoFit/>
+          </a:bodyPr>
+          <a:lstStyle/>
+          <a:p>
+            <a:pPr algn="l">
+              <a:lnSpc>
+                <a:spcPct val="115000"/>
+              </a:lnSpc>
+            </a:pPr>
+            <a:r>
+              <a:rPr sz="1350" b="1">
+                <a:solidFill>
+                  <a:srgbClr val="008E76"/>
+                </a:solidFill>
+                <a:latin typeface="Microsoft JhengHei"/>
+              </a:rPr>
+              <a:t>⑤ 門檻 0.82 判定</a:t>
+            </a:r>
+          </a:p>
+        </p:txBody>
+      </p:sp>
+      <p:sp>
+        <p:nvSpPr>
+          <p:cNvPr id="27" name="TextBox 26"/>
+          <p:cNvSpPr txBox="1"/>
+          <p:nvPr/>
+        </p:nvSpPr>
+        <p:spPr>
+          <a:xfrm>
+            <a:off x="3456432" y="5710428"/>
+            <a:ext cx="3108960" cy="493776"/>
+          </a:xfrm>
+          <a:prstGeom prst="rect">
+            <a:avLst/>
+          </a:prstGeom>
+          <a:noFill/>
+        </p:spPr>
+        <p:txBody>
+          <a:bodyPr wrap="square" lIns="0" rIns="0" tIns="0" bIns="0" anchor="ctr">
+            <a:spAutoFit/>
+          </a:bodyPr>
+          <a:lstStyle/>
+          <a:p>
+            <a:pPr algn="l">
+              <a:lnSpc>
+                <a:spcPct val="115000"/>
+              </a:lnSpc>
+            </a:pPr>
+            <a:r>
+              <a:rPr sz="1100" b="0">
+                <a:solidFill>
+                  <a:srgbClr val="444444"/>
+                </a:solidFill>
+                <a:latin typeface="Microsoft JhengHei"/>
+              </a:rPr>
+              <a:t>≥0.82 救回；否則回空 → 交 clarify 反問</a:t>
+            </a:r>
+          </a:p>
+        </p:txBody>
+      </p:sp>
+      <p:sp>
+        <p:nvSpPr>
+          <p:cNvPr id="28" name="Rounded Rectangle 27"/>
+          <p:cNvSpPr/>
+          <p:nvPr/>
+        </p:nvSpPr>
+        <p:spPr>
+          <a:xfrm>
+            <a:off x="7114032" y="1783080"/>
+            <a:ext cx="4407408" cy="4709160"/>
           </a:xfrm>
           <a:prstGeom prst="roundRect">
             <a:avLst>
@@ -21187,14 +22365,53 @@
       </p:sp>
       <p:sp>
         <p:nvSpPr>
-          <p:cNvPr id="6" name="TextBox 5"/>
-          <p:cNvSpPr txBox="1"/>
-          <p:nvPr/>
-        </p:nvSpPr>
-        <p:spPr>
-          <a:xfrm>
-            <a:off x="795528" y="1847088"/>
-            <a:ext cx="3163824" cy="310896"/>
+          <p:cNvPr id="29" name="TextBox 28"/>
+          <p:cNvSpPr txBox="1"/>
+          <p:nvPr/>
+        </p:nvSpPr>
+        <p:spPr>
+          <a:xfrm>
+            <a:off x="7406640" y="1965960"/>
+            <a:ext cx="3822192" cy="329184"/>
+          </a:xfrm>
+          <a:prstGeom prst="rect">
+            <a:avLst/>
+          </a:prstGeom>
+          <a:noFill/>
+        </p:spPr>
+        <p:txBody>
+          <a:bodyPr wrap="square" lIns="0" rIns="0" tIns="0" bIns="0" anchor="t">
+            <a:spAutoFit/>
+          </a:bodyPr>
+          <a:lstStyle/>
+          <a:p>
+            <a:pPr algn="l">
+              <a:lnSpc>
+                <a:spcPct val="115000"/>
+              </a:lnSpc>
+            </a:pPr>
+            <a:r>
+              <a:rPr sz="1400" b="1">
+                <a:solidFill>
+                  <a:srgbClr val="00C49A"/>
+                </a:solidFill>
+                <a:latin typeface="Microsoft JhengHei"/>
+              </a:rPr>
+              <a:t>實例：「北倉的滑鼠有多少」</a:t>
+            </a:r>
+          </a:p>
+        </p:txBody>
+      </p:sp>
+      <p:sp>
+        <p:nvSpPr>
+          <p:cNvPr id="30" name="TextBox 29"/>
+          <p:cNvSpPr txBox="1"/>
+          <p:nvPr/>
+        </p:nvSpPr>
+        <p:spPr>
+          <a:xfrm>
+            <a:off x="7406640" y="2395728"/>
+            <a:ext cx="1371600" cy="457200"/>
           </a:xfrm>
           <a:prstGeom prst="rect">
             <a:avLst/>
@@ -21213,27 +22430,378 @@
               </a:lnSpc>
             </a:pPr>
             <a:r>
+              <a:rPr sz="1150" b="1">
+                <a:solidFill>
+                  <a:srgbClr val="BBBBBB"/>
+                </a:solidFill>
+                <a:latin typeface="Microsoft JhengHei"/>
+              </a:rPr>
+              <a:t>ASR 聽成</a:t>
+            </a:r>
+          </a:p>
+        </p:txBody>
+      </p:sp>
+      <p:sp>
+        <p:nvSpPr>
+          <p:cNvPr id="31" name="TextBox 30"/>
+          <p:cNvSpPr txBox="1"/>
+          <p:nvPr/>
+        </p:nvSpPr>
+        <p:spPr>
+          <a:xfrm>
+            <a:off x="8851392" y="2395728"/>
+            <a:ext cx="2395728" cy="457200"/>
+          </a:xfrm>
+          <a:prstGeom prst="rect">
+            <a:avLst/>
+          </a:prstGeom>
+          <a:noFill/>
+        </p:spPr>
+        <p:txBody>
+          <a:bodyPr wrap="square" lIns="0" rIns="0" tIns="0" bIns="0" anchor="ctr">
+            <a:spAutoFit/>
+          </a:bodyPr>
+          <a:lstStyle/>
+          <a:p>
+            <a:pPr algn="l">
+              <a:lnSpc>
+                <a:spcPct val="115000"/>
+              </a:lnSpc>
+            </a:pPr>
+            <a:r>
+              <a:rPr sz="1200" b="0">
+                <a:solidFill>
+                  <a:srgbClr val="E85D5D"/>
+                </a:solidFill>
+                <a:latin typeface="Microsoft JhengHei"/>
+              </a:rPr>
+              <a:t>北倉的華數有多少</a:t>
+            </a:r>
+          </a:p>
+        </p:txBody>
+      </p:sp>
+      <p:sp>
+        <p:nvSpPr>
+          <p:cNvPr id="32" name="TextBox 31"/>
+          <p:cNvSpPr txBox="1"/>
+          <p:nvPr/>
+        </p:nvSpPr>
+        <p:spPr>
+          <a:xfrm>
+            <a:off x="7406640" y="2898648"/>
+            <a:ext cx="1371600" cy="457200"/>
+          </a:xfrm>
+          <a:prstGeom prst="rect">
+            <a:avLst/>
+          </a:prstGeom>
+          <a:noFill/>
+        </p:spPr>
+        <p:txBody>
+          <a:bodyPr wrap="square" lIns="0" rIns="0" tIns="0" bIns="0" anchor="ctr">
+            <a:spAutoFit/>
+          </a:bodyPr>
+          <a:lstStyle/>
+          <a:p>
+            <a:pPr algn="l">
+              <a:lnSpc>
+                <a:spcPct val="115000"/>
+              </a:lnSpc>
+            </a:pPr>
+            <a:r>
+              <a:rPr sz="1150" b="1">
+                <a:solidFill>
+                  <a:srgbClr val="BBBBBB"/>
+                </a:solidFill>
+                <a:latin typeface="Microsoft JhengHei"/>
+              </a:rPr>
+              <a:t>抽 keyword</a:t>
+            </a:r>
+          </a:p>
+        </p:txBody>
+      </p:sp>
+      <p:sp>
+        <p:nvSpPr>
+          <p:cNvPr id="33" name="TextBox 32"/>
+          <p:cNvSpPr txBox="1"/>
+          <p:nvPr/>
+        </p:nvSpPr>
+        <p:spPr>
+          <a:xfrm>
+            <a:off x="8851392" y="2898648"/>
+            <a:ext cx="2395728" cy="457200"/>
+          </a:xfrm>
+          <a:prstGeom prst="rect">
+            <a:avLst/>
+          </a:prstGeom>
+          <a:noFill/>
+        </p:spPr>
+        <p:txBody>
+          <a:bodyPr wrap="square" lIns="0" rIns="0" tIns="0" bIns="0" anchor="ctr">
+            <a:spAutoFit/>
+          </a:bodyPr>
+          <a:lstStyle/>
+          <a:p>
+            <a:pPr algn="l">
+              <a:lnSpc>
+                <a:spcPct val="115000"/>
+              </a:lnSpc>
+            </a:pPr>
+            <a:r>
+              <a:rPr sz="1200" b="0">
+                <a:solidFill>
+                  <a:srgbClr val="BBBBBB"/>
+                </a:solidFill>
+                <a:latin typeface="Microsoft JhengHei"/>
+              </a:rPr>
+              <a:t>華數</a:t>
+            </a:r>
+          </a:p>
+        </p:txBody>
+      </p:sp>
+      <p:sp>
+        <p:nvSpPr>
+          <p:cNvPr id="34" name="TextBox 33"/>
+          <p:cNvSpPr txBox="1"/>
+          <p:nvPr/>
+        </p:nvSpPr>
+        <p:spPr>
+          <a:xfrm>
+            <a:off x="7406640" y="3401568"/>
+            <a:ext cx="1371600" cy="457200"/>
+          </a:xfrm>
+          <a:prstGeom prst="rect">
+            <a:avLst/>
+          </a:prstGeom>
+          <a:noFill/>
+        </p:spPr>
+        <p:txBody>
+          <a:bodyPr wrap="square" lIns="0" rIns="0" tIns="0" bIns="0" anchor="ctr">
+            <a:spAutoFit/>
+          </a:bodyPr>
+          <a:lstStyle/>
+          <a:p>
+            <a:pPr algn="l">
+              <a:lnSpc>
+                <a:spcPct val="115000"/>
+              </a:lnSpc>
+            </a:pPr>
+            <a:r>
+              <a:rPr sz="1150" b="1">
+                <a:solidFill>
+                  <a:srgbClr val="BBBBBB"/>
+                </a:solidFill>
+                <a:latin typeface="Microsoft JhengHei"/>
+              </a:rPr>
+              <a:t>① 字形比對</a:t>
+            </a:r>
+          </a:p>
+        </p:txBody>
+      </p:sp>
+      <p:sp>
+        <p:nvSpPr>
+          <p:cNvPr id="35" name="TextBox 34"/>
+          <p:cNvSpPr txBox="1"/>
+          <p:nvPr/>
+        </p:nvSpPr>
+        <p:spPr>
+          <a:xfrm>
+            <a:off x="8851392" y="3401568"/>
+            <a:ext cx="2395728" cy="457200"/>
+          </a:xfrm>
+          <a:prstGeom prst="rect">
+            <a:avLst/>
+          </a:prstGeom>
+          <a:noFill/>
+        </p:spPr>
+        <p:txBody>
+          <a:bodyPr wrap="square" lIns="0" rIns="0" tIns="0" bIns="0" anchor="ctr">
+            <a:spAutoFit/>
+          </a:bodyPr>
+          <a:lstStyle/>
+          <a:p>
+            <a:pPr algn="l">
+              <a:lnSpc>
+                <a:spcPct val="115000"/>
+              </a:lnSpc>
+            </a:pPr>
+            <a:r>
+              <a:rPr sz="1200" b="0">
+                <a:solidFill>
+                  <a:srgbClr val="BBBBBB"/>
+                </a:solidFill>
+                <a:latin typeface="Microsoft JhengHei"/>
+              </a:rPr>
+              <a:t>華數 vs 滑鼠 → 0 重疊，失敗</a:t>
+            </a:r>
+          </a:p>
+        </p:txBody>
+      </p:sp>
+      <p:sp>
+        <p:nvSpPr>
+          <p:cNvPr id="36" name="TextBox 35"/>
+          <p:cNvSpPr txBox="1"/>
+          <p:nvPr/>
+        </p:nvSpPr>
+        <p:spPr>
+          <a:xfrm>
+            <a:off x="7406640" y="3904488"/>
+            <a:ext cx="1371600" cy="457200"/>
+          </a:xfrm>
+          <a:prstGeom prst="rect">
+            <a:avLst/>
+          </a:prstGeom>
+          <a:noFill/>
+        </p:spPr>
+        <p:txBody>
+          <a:bodyPr wrap="square" lIns="0" rIns="0" tIns="0" bIns="0" anchor="ctr">
+            <a:spAutoFit/>
+          </a:bodyPr>
+          <a:lstStyle/>
+          <a:p>
+            <a:pPr algn="l">
+              <a:lnSpc>
+                <a:spcPct val="115000"/>
+              </a:lnSpc>
+            </a:pPr>
+            <a:r>
+              <a:rPr sz="1150" b="1">
+                <a:solidFill>
+                  <a:srgbClr val="BBBBBB"/>
+                </a:solidFill>
+                <a:latin typeface="Microsoft JhengHei"/>
+              </a:rPr>
+              <a:t>② 排除閘</a:t>
+            </a:r>
+          </a:p>
+        </p:txBody>
+      </p:sp>
+      <p:sp>
+        <p:nvSpPr>
+          <p:cNvPr id="37" name="TextBox 36"/>
+          <p:cNvSpPr txBox="1"/>
+          <p:nvPr/>
+        </p:nvSpPr>
+        <p:spPr>
+          <a:xfrm>
+            <a:off x="8851392" y="3904488"/>
+            <a:ext cx="2395728" cy="457200"/>
+          </a:xfrm>
+          <a:prstGeom prst="rect">
+            <a:avLst/>
+          </a:prstGeom>
+          <a:noFill/>
+        </p:spPr>
+        <p:txBody>
+          <a:bodyPr wrap="square" lIns="0" rIns="0" tIns="0" bIns="0" anchor="ctr">
+            <a:spAutoFit/>
+          </a:bodyPr>
+          <a:lstStyle/>
+          <a:p>
+            <a:pPr algn="l">
+              <a:lnSpc>
+                <a:spcPct val="115000"/>
+              </a:lnSpc>
+            </a:pPr>
+            <a:r>
+              <a:rPr sz="1200" b="0">
+                <a:solidFill>
+                  <a:srgbClr val="BBBBBB"/>
+                </a:solidFill>
+                <a:latin typeface="Microsoft JhengHei"/>
+              </a:rPr>
+              <a:t>無寫入詞／無數字／2 字 → 放行</a:t>
+            </a:r>
+          </a:p>
+        </p:txBody>
+      </p:sp>
+      <p:sp>
+        <p:nvSpPr>
+          <p:cNvPr id="38" name="TextBox 37"/>
+          <p:cNvSpPr txBox="1"/>
+          <p:nvPr/>
+        </p:nvSpPr>
+        <p:spPr>
+          <a:xfrm>
+            <a:off x="7406640" y="4407408"/>
+            <a:ext cx="1371600" cy="457200"/>
+          </a:xfrm>
+          <a:prstGeom prst="rect">
+            <a:avLst/>
+          </a:prstGeom>
+          <a:noFill/>
+        </p:spPr>
+        <p:txBody>
+          <a:bodyPr wrap="square" lIns="0" rIns="0" tIns="0" bIns="0" anchor="ctr">
+            <a:spAutoFit/>
+          </a:bodyPr>
+          <a:lstStyle/>
+          <a:p>
+            <a:pPr algn="l">
+              <a:lnSpc>
+                <a:spcPct val="115000"/>
+              </a:lnSpc>
+            </a:pPr>
+            <a:r>
+              <a:rPr sz="1150" b="1">
+                <a:solidFill>
+                  <a:srgbClr val="BBBBBB"/>
+                </a:solidFill>
+                <a:latin typeface="Microsoft JhengHei"/>
+              </a:rPr>
+              <a:t>③ 轉拼音</a:t>
+            </a:r>
+          </a:p>
+        </p:txBody>
+      </p:sp>
+      <p:sp>
+        <p:nvSpPr>
+          <p:cNvPr id="39" name="TextBox 38"/>
+          <p:cNvSpPr txBox="1"/>
+          <p:nvPr/>
+        </p:nvSpPr>
+        <p:spPr>
+          <a:xfrm>
+            <a:off x="8851392" y="4407408"/>
+            <a:ext cx="2395728" cy="457200"/>
+          </a:xfrm>
+          <a:prstGeom prst="rect">
+            <a:avLst/>
+          </a:prstGeom>
+          <a:noFill/>
+        </p:spPr>
+        <p:txBody>
+          <a:bodyPr wrap="square" lIns="0" rIns="0" tIns="0" bIns="0" anchor="ctr">
+            <a:spAutoFit/>
+          </a:bodyPr>
+          <a:lstStyle/>
+          <a:p>
+            <a:pPr algn="l">
+              <a:lnSpc>
+                <a:spcPct val="115000"/>
+              </a:lnSpc>
+            </a:pPr>
+            <a:r>
               <a:rPr sz="1200" b="1">
                 <a:solidFill>
                   <a:srgbClr val="FFFFFF"/>
                 </a:solidFill>
                 <a:latin typeface="Microsoft JhengHei"/>
               </a:rPr>
-              <a:t>訪客原句</a:t>
-            </a:r>
-          </a:p>
-        </p:txBody>
-      </p:sp>
-      <p:sp>
-        <p:nvSpPr>
-          <p:cNvPr id="7" name="TextBox 6"/>
-          <p:cNvSpPr txBox="1"/>
-          <p:nvPr/>
-        </p:nvSpPr>
-        <p:spPr>
-          <a:xfrm>
-            <a:off x="4288536" y="1847088"/>
-            <a:ext cx="3072384" cy="310896"/>
+              <a:t>華數 = huashu（su→shu 還原）</a:t>
+            </a:r>
+          </a:p>
+        </p:txBody>
+      </p:sp>
+      <p:sp>
+        <p:nvSpPr>
+          <p:cNvPr id="40" name="TextBox 39"/>
+          <p:cNvSpPr txBox="1"/>
+          <p:nvPr/>
+        </p:nvSpPr>
+        <p:spPr>
+          <a:xfrm>
+            <a:off x="7406640" y="4910328"/>
+            <a:ext cx="1371600" cy="457200"/>
           </a:xfrm>
           <a:prstGeom prst="rect">
             <a:avLst/>
@@ -21252,27 +22820,66 @@
               </a:lnSpc>
             </a:pPr>
             <a:r>
+              <a:rPr sz="1150" b="1">
+                <a:solidFill>
+                  <a:srgbClr val="BBBBBB"/>
+                </a:solidFill>
+                <a:latin typeface="Microsoft JhengHei"/>
+              </a:rPr>
+              <a:t>④ 滑窗比對</a:t>
+            </a:r>
+          </a:p>
+        </p:txBody>
+      </p:sp>
+      <p:sp>
+        <p:nvSpPr>
+          <p:cNvPr id="41" name="TextBox 40"/>
+          <p:cNvSpPr txBox="1"/>
+          <p:nvPr/>
+        </p:nvSpPr>
+        <p:spPr>
+          <a:xfrm>
+            <a:off x="8851392" y="4910328"/>
+            <a:ext cx="2395728" cy="457200"/>
+          </a:xfrm>
+          <a:prstGeom prst="rect">
+            <a:avLst/>
+          </a:prstGeom>
+          <a:noFill/>
+        </p:spPr>
+        <p:txBody>
+          <a:bodyPr wrap="square" lIns="0" rIns="0" tIns="0" bIns="0" anchor="ctr">
+            <a:spAutoFit/>
+          </a:bodyPr>
+          <a:lstStyle/>
+          <a:p>
+            <a:pPr algn="l">
+              <a:lnSpc>
+                <a:spcPct val="115000"/>
+              </a:lnSpc>
+            </a:pPr>
+            <a:r>
               <a:rPr sz="1200" b="1">
                 <a:solidFill>
                   <a:srgbClr val="FFFFFF"/>
                 </a:solidFill>
                 <a:latin typeface="Microsoft JhengHei"/>
               </a:rPr>
-              <a:t>ASR 聽成（錯）</a:t>
-            </a:r>
-          </a:p>
-        </p:txBody>
-      </p:sp>
-      <p:sp>
-        <p:nvSpPr>
-          <p:cNvPr id="8" name="TextBox 7"/>
-          <p:cNvSpPr txBox="1"/>
-          <p:nvPr/>
-        </p:nvSpPr>
-        <p:spPr>
-          <a:xfrm>
-            <a:off x="7763256" y="1847088"/>
-            <a:ext cx="3483864" cy="310896"/>
+              <a:t>滑鼠 huashu ⊂ 句拼音 → 命中</a:t>
+            </a:r>
+          </a:p>
+        </p:txBody>
+      </p:sp>
+      <p:sp>
+        <p:nvSpPr>
+          <p:cNvPr id="42" name="TextBox 41"/>
+          <p:cNvSpPr txBox="1"/>
+          <p:nvPr/>
+        </p:nvSpPr>
+        <p:spPr>
+          <a:xfrm>
+            <a:off x="7406640" y="5413248"/>
+            <a:ext cx="1371600" cy="457200"/>
           </a:xfrm>
           <a:prstGeom prst="rect">
             <a:avLst/>
@@ -21291,73 +22898,66 @@
               </a:lnSpc>
             </a:pPr>
             <a:r>
+              <a:rPr sz="1150" b="1">
+                <a:solidFill>
+                  <a:srgbClr val="BBBBBB"/>
+                </a:solidFill>
+                <a:latin typeface="Microsoft JhengHei"/>
+              </a:rPr>
+              <a:t>⑤ 門檻</a:t>
+            </a:r>
+          </a:p>
+        </p:txBody>
+      </p:sp>
+      <p:sp>
+        <p:nvSpPr>
+          <p:cNvPr id="43" name="TextBox 42"/>
+          <p:cNvSpPr txBox="1"/>
+          <p:nvPr/>
+        </p:nvSpPr>
+        <p:spPr>
+          <a:xfrm>
+            <a:off x="8851392" y="5413248"/>
+            <a:ext cx="2395728" cy="457200"/>
+          </a:xfrm>
+          <a:prstGeom prst="rect">
+            <a:avLst/>
+          </a:prstGeom>
+          <a:noFill/>
+        </p:spPr>
+        <p:txBody>
+          <a:bodyPr wrap="square" lIns="0" rIns="0" tIns="0" bIns="0" anchor="ctr">
+            <a:spAutoFit/>
+          </a:bodyPr>
+          <a:lstStyle/>
+          <a:p>
+            <a:pPr algn="l">
+              <a:lnSpc>
+                <a:spcPct val="115000"/>
+              </a:lnSpc>
+            </a:pPr>
+            <a:r>
               <a:rPr sz="1200" b="1">
                 <a:solidFill>
                   <a:srgbClr val="00C49A"/>
                 </a:solidFill>
                 <a:latin typeface="Microsoft JhengHei"/>
               </a:rPr>
-              <a:t>容錯層救回 → 答對</a:t>
-            </a:r>
-          </a:p>
-        </p:txBody>
-      </p:sp>
-      <p:sp>
-        <p:nvSpPr>
-          <p:cNvPr id="9" name="Rectangle 8"/>
-          <p:cNvSpPr/>
-          <p:nvPr/>
-        </p:nvSpPr>
-        <p:spPr>
-          <a:xfrm>
-            <a:off x="667512" y="2203704"/>
-            <a:ext cx="10853928" cy="397764"/>
-          </a:xfrm>
-          <a:prstGeom prst="rect">
-            <a:avLst/>
-          </a:prstGeom>
-          <a:solidFill>
-            <a:srgbClr val="FFFFFF"/>
-          </a:solidFill>
-          <a:ln w="6350">
-            <a:solidFill>
-              <a:srgbClr val="E6E8EC"/>
-            </a:solidFill>
-          </a:ln>
-          <a:effectLst/>
-        </p:spPr>
-        <p:style>
-          <a:lnRef idx="1">
-            <a:schemeClr val="accent1"/>
-          </a:lnRef>
-          <a:fillRef idx="3">
-            <a:schemeClr val="accent1"/>
-          </a:fillRef>
-          <a:effectRef idx="2">
-            <a:schemeClr val="accent1"/>
-          </a:effectRef>
-          <a:fontRef idx="minor">
-            <a:schemeClr val="lt1"/>
-          </a:fontRef>
-        </p:style>
-        <p:txBody>
-          <a:bodyPr rtlCol="0" anchor="ctr"/>
-          <a:lstStyle/>
-          <a:p>
-            <a:pPr algn="ctr"/>
-          </a:p>
-        </p:txBody>
-      </p:sp>
-      <p:sp>
-        <p:nvSpPr>
-          <p:cNvPr id="10" name="TextBox 9"/>
-          <p:cNvSpPr txBox="1"/>
-          <p:nvPr/>
-        </p:nvSpPr>
-        <p:spPr>
-          <a:xfrm>
-            <a:off x="795528" y="2249424"/>
-            <a:ext cx="3163824" cy="310896"/>
+              <a:t>0.95 ≥ 0.82 → 救回</a:t>
+            </a:r>
+          </a:p>
+        </p:txBody>
+      </p:sp>
+      <p:sp>
+        <p:nvSpPr>
+          <p:cNvPr id="44" name="TextBox 43"/>
+          <p:cNvSpPr txBox="1"/>
+          <p:nvPr/>
+        </p:nvSpPr>
+        <p:spPr>
+          <a:xfrm>
+            <a:off x="7406640" y="5916168"/>
+            <a:ext cx="1371600" cy="457200"/>
           </a:xfrm>
           <a:prstGeom prst="rect">
             <a:avLst/>
@@ -21376,27 +22976,27 @@
               </a:lnSpc>
             </a:pPr>
             <a:r>
-              <a:rPr sz="1200" b="0">
-                <a:solidFill>
-                  <a:srgbClr val="1A1A2E"/>
-                </a:solidFill>
-                <a:latin typeface="Microsoft JhengHei"/>
-              </a:rPr>
-              <a:t>北倉進五十個滑鼠</a:t>
-            </a:r>
-          </a:p>
-        </p:txBody>
-      </p:sp>
-      <p:sp>
-        <p:nvSpPr>
-          <p:cNvPr id="11" name="TextBox 10"/>
-          <p:cNvSpPr txBox="1"/>
-          <p:nvPr/>
-        </p:nvSpPr>
-        <p:spPr>
-          <a:xfrm>
-            <a:off x="4288536" y="2249424"/>
-            <a:ext cx="3072384" cy="310896"/>
+              <a:rPr sz="1150" b="1">
+                <a:solidFill>
+                  <a:srgbClr val="BBBBBB"/>
+                </a:solidFill>
+                <a:latin typeface="Microsoft JhengHei"/>
+              </a:rPr>
+              <a:t>結果</a:t>
+            </a:r>
+          </a:p>
+        </p:txBody>
+      </p:sp>
+      <p:sp>
+        <p:nvSpPr>
+          <p:cNvPr id="45" name="TextBox 44"/>
+          <p:cNvSpPr txBox="1"/>
+          <p:nvPr/>
+        </p:nvSpPr>
+        <p:spPr>
+          <a:xfrm>
+            <a:off x="8851392" y="5916168"/>
+            <a:ext cx="2395728" cy="457200"/>
           </a:xfrm>
           <a:prstGeom prst="rect">
             <a:avLst/>
@@ -21415,1466 +23015,20 @@
               </a:lnSpc>
             </a:pPr>
             <a:r>
-              <a:rPr sz="1200" b="0">
-                <a:solidFill>
-                  <a:srgbClr val="E85D5D"/>
-                </a:solidFill>
-                <a:latin typeface="Microsoft JhengHei"/>
-              </a:rPr>
-              <a:t>北藏近五十個華族</a:t>
-            </a:r>
-          </a:p>
-        </p:txBody>
-      </p:sp>
-      <p:sp>
-        <p:nvSpPr>
-          <p:cNvPr id="12" name="TextBox 11"/>
-          <p:cNvSpPr txBox="1"/>
-          <p:nvPr/>
-        </p:nvSpPr>
-        <p:spPr>
-          <a:xfrm>
-            <a:off x="7763256" y="2249424"/>
-            <a:ext cx="3483864" cy="310896"/>
-          </a:xfrm>
-          <a:prstGeom prst="rect">
-            <a:avLst/>
-          </a:prstGeom>
-          <a:noFill/>
-        </p:spPr>
-        <p:txBody>
-          <a:bodyPr wrap="square" lIns="0" rIns="0" tIns="0" bIns="0" anchor="ctr">
-            <a:spAutoFit/>
-          </a:bodyPr>
-          <a:lstStyle/>
-          <a:p>
-            <a:pPr algn="l">
-              <a:lnSpc>
-                <a:spcPct val="115000"/>
-              </a:lnSpc>
-            </a:pPr>
-            <a:r>
               <a:rPr sz="1200" b="1">
                 <a:solidFill>
-                  <a:srgbClr val="008E76"/>
-                </a:solidFill>
-                <a:latin typeface="Microsoft JhengHei"/>
-              </a:rPr>
-              <a:t>藏→倉·近→進·華族→滑鼠</a:t>
-            </a:r>
-          </a:p>
-        </p:txBody>
-      </p:sp>
-      <p:sp>
-        <p:nvSpPr>
-          <p:cNvPr id="13" name="Rectangle 12"/>
-          <p:cNvSpPr/>
-          <p:nvPr/>
-        </p:nvSpPr>
-        <p:spPr>
-          <a:xfrm>
-            <a:off x="667512" y="2601468"/>
-            <a:ext cx="10853928" cy="397764"/>
-          </a:xfrm>
-          <a:prstGeom prst="rect">
-            <a:avLst/>
-          </a:prstGeom>
-          <a:solidFill>
-            <a:srgbClr val="F4F6F8"/>
-          </a:solidFill>
-          <a:ln w="6350">
-            <a:solidFill>
-              <a:srgbClr val="E6E8EC"/>
-            </a:solidFill>
-          </a:ln>
-          <a:effectLst/>
-        </p:spPr>
-        <p:style>
-          <a:lnRef idx="1">
-            <a:schemeClr val="accent1"/>
-          </a:lnRef>
-          <a:fillRef idx="3">
-            <a:schemeClr val="accent1"/>
-          </a:fillRef>
-          <a:effectRef idx="2">
-            <a:schemeClr val="accent1"/>
-          </a:effectRef>
-          <a:fontRef idx="minor">
-            <a:schemeClr val="lt1"/>
-          </a:fontRef>
-        </p:style>
-        <p:txBody>
-          <a:bodyPr rtlCol="0" anchor="ctr"/>
-          <a:lstStyle/>
-          <a:p>
-            <a:pPr algn="ctr"/>
-          </a:p>
-        </p:txBody>
-      </p:sp>
-      <p:sp>
-        <p:nvSpPr>
-          <p:cNvPr id="14" name="TextBox 13"/>
-          <p:cNvSpPr txBox="1"/>
-          <p:nvPr/>
-        </p:nvSpPr>
-        <p:spPr>
-          <a:xfrm>
-            <a:off x="795528" y="2647188"/>
-            <a:ext cx="3163824" cy="310896"/>
-          </a:xfrm>
-          <a:prstGeom prst="rect">
-            <a:avLst/>
-          </a:prstGeom>
-          <a:noFill/>
-        </p:spPr>
-        <p:txBody>
-          <a:bodyPr wrap="square" lIns="0" rIns="0" tIns="0" bIns="0" anchor="ctr">
-            <a:spAutoFit/>
-          </a:bodyPr>
-          <a:lstStyle/>
-          <a:p>
-            <a:pPr algn="l">
-              <a:lnSpc>
-                <a:spcPct val="115000"/>
-              </a:lnSpc>
-            </a:pPr>
-            <a:r>
-              <a:rPr sz="1200" b="0">
-                <a:solidFill>
-                  <a:srgbClr val="1A1A2E"/>
-                </a:solidFill>
-                <a:latin typeface="Microsoft JhengHei"/>
-              </a:rPr>
-              <a:t>幫我在北倉加五十個滑鼠</a:t>
-            </a:r>
-          </a:p>
-        </p:txBody>
-      </p:sp>
-      <p:sp>
-        <p:nvSpPr>
-          <p:cNvPr id="15" name="TextBox 14"/>
-          <p:cNvSpPr txBox="1"/>
-          <p:nvPr/>
-        </p:nvSpPr>
-        <p:spPr>
-          <a:xfrm>
-            <a:off x="4288536" y="2647188"/>
-            <a:ext cx="3072384" cy="310896"/>
-          </a:xfrm>
-          <a:prstGeom prst="rect">
-            <a:avLst/>
-          </a:prstGeom>
-          <a:noFill/>
-        </p:spPr>
-        <p:txBody>
-          <a:bodyPr wrap="square" lIns="0" rIns="0" tIns="0" bIns="0" anchor="ctr">
-            <a:spAutoFit/>
-          </a:bodyPr>
-          <a:lstStyle/>
-          <a:p>
-            <a:pPr algn="l">
-              <a:lnSpc>
-                <a:spcPct val="115000"/>
-              </a:lnSpc>
-            </a:pPr>
-            <a:r>
-              <a:rPr sz="1200" b="0">
-                <a:solidFill>
-                  <a:srgbClr val="E85D5D"/>
-                </a:solidFill>
-                <a:latin typeface="Microsoft JhengHei"/>
-              </a:rPr>
-              <a:t>…加五十個花束</a:t>
-            </a:r>
-          </a:p>
-        </p:txBody>
-      </p:sp>
-      <p:sp>
-        <p:nvSpPr>
-          <p:cNvPr id="16" name="TextBox 15"/>
-          <p:cNvSpPr txBox="1"/>
-          <p:nvPr/>
-        </p:nvSpPr>
-        <p:spPr>
-          <a:xfrm>
-            <a:off x="7763256" y="2647188"/>
-            <a:ext cx="3483864" cy="310896"/>
-          </a:xfrm>
-          <a:prstGeom prst="rect">
-            <a:avLst/>
-          </a:prstGeom>
-          <a:noFill/>
-        </p:spPr>
-        <p:txBody>
-          <a:bodyPr wrap="square" lIns="0" rIns="0" tIns="0" bIns="0" anchor="ctr">
-            <a:spAutoFit/>
-          </a:bodyPr>
-          <a:lstStyle/>
-          <a:p>
-            <a:pPr algn="l">
-              <a:lnSpc>
-                <a:spcPct val="115000"/>
-              </a:lnSpc>
-            </a:pPr>
-            <a:r>
-              <a:rPr sz="1200" b="1">
-                <a:solidFill>
-                  <a:srgbClr val="008E76"/>
-                </a:solidFill>
-                <a:latin typeface="Microsoft JhengHei"/>
-              </a:rPr>
-              <a:t>花束→滑鼠（拼音同音）</a:t>
-            </a:r>
-          </a:p>
-        </p:txBody>
-      </p:sp>
-      <p:sp>
-        <p:nvSpPr>
-          <p:cNvPr id="17" name="Rectangle 16"/>
-          <p:cNvSpPr/>
-          <p:nvPr/>
-        </p:nvSpPr>
-        <p:spPr>
-          <a:xfrm>
-            <a:off x="667512" y="2999232"/>
-            <a:ext cx="10853928" cy="397764"/>
-          </a:xfrm>
-          <a:prstGeom prst="rect">
-            <a:avLst/>
-          </a:prstGeom>
-          <a:solidFill>
-            <a:srgbClr val="FFFFFF"/>
-          </a:solidFill>
-          <a:ln w="6350">
-            <a:solidFill>
-              <a:srgbClr val="E6E8EC"/>
-            </a:solidFill>
-          </a:ln>
-          <a:effectLst/>
-        </p:spPr>
-        <p:style>
-          <a:lnRef idx="1">
-            <a:schemeClr val="accent1"/>
-          </a:lnRef>
-          <a:fillRef idx="3">
-            <a:schemeClr val="accent1"/>
-          </a:fillRef>
-          <a:effectRef idx="2">
-            <a:schemeClr val="accent1"/>
-          </a:effectRef>
-          <a:fontRef idx="minor">
-            <a:schemeClr val="lt1"/>
-          </a:fontRef>
-        </p:style>
-        <p:txBody>
-          <a:bodyPr rtlCol="0" anchor="ctr"/>
-          <a:lstStyle/>
-          <a:p>
-            <a:pPr algn="ctr"/>
-          </a:p>
-        </p:txBody>
-      </p:sp>
-      <p:sp>
-        <p:nvSpPr>
-          <p:cNvPr id="18" name="TextBox 17"/>
-          <p:cNvSpPr txBox="1"/>
-          <p:nvPr/>
-        </p:nvSpPr>
-        <p:spPr>
-          <a:xfrm>
-            <a:off x="795528" y="3044952"/>
-            <a:ext cx="3163824" cy="310896"/>
-          </a:xfrm>
-          <a:prstGeom prst="rect">
-            <a:avLst/>
-          </a:prstGeom>
-          <a:noFill/>
-        </p:spPr>
-        <p:txBody>
-          <a:bodyPr wrap="square" lIns="0" rIns="0" tIns="0" bIns="0" anchor="ctr">
-            <a:spAutoFit/>
-          </a:bodyPr>
-          <a:lstStyle/>
-          <a:p>
-            <a:pPr algn="l">
-              <a:lnSpc>
-                <a:spcPct val="115000"/>
-              </a:lnSpc>
-            </a:pPr>
-            <a:r>
-              <a:rPr sz="1200" b="0">
-                <a:solidFill>
-                  <a:srgbClr val="1A1A2E"/>
-                </a:solidFill>
-                <a:latin typeface="Microsoft JhengHei"/>
-              </a:rPr>
-              <a:t>藍牙耳機庫存</a:t>
-            </a:r>
-          </a:p>
-        </p:txBody>
-      </p:sp>
-      <p:sp>
-        <p:nvSpPr>
-          <p:cNvPr id="19" name="TextBox 18"/>
-          <p:cNvSpPr txBox="1"/>
-          <p:nvPr/>
-        </p:nvSpPr>
-        <p:spPr>
-          <a:xfrm>
-            <a:off x="4288536" y="3044952"/>
-            <a:ext cx="3072384" cy="310896"/>
-          </a:xfrm>
-          <a:prstGeom prst="rect">
-            <a:avLst/>
-          </a:prstGeom>
-          <a:noFill/>
-        </p:spPr>
-        <p:txBody>
-          <a:bodyPr wrap="square" lIns="0" rIns="0" tIns="0" bIns="0" anchor="ctr">
-            <a:spAutoFit/>
-          </a:bodyPr>
-          <a:lstStyle/>
-          <a:p>
-            <a:pPr algn="l">
-              <a:lnSpc>
-                <a:spcPct val="115000"/>
-              </a:lnSpc>
-            </a:pPr>
-            <a:r>
-              <a:rPr sz="1200" b="0">
-                <a:solidFill>
-                  <a:srgbClr val="E85D5D"/>
-                </a:solidFill>
-                <a:latin typeface="Microsoft JhengHei"/>
-              </a:rPr>
-              <a:t>藍芽耳機庫存</a:t>
-            </a:r>
-          </a:p>
-        </p:txBody>
-      </p:sp>
-      <p:sp>
-        <p:nvSpPr>
-          <p:cNvPr id="20" name="TextBox 19"/>
-          <p:cNvSpPr txBox="1"/>
-          <p:nvPr/>
-        </p:nvSpPr>
-        <p:spPr>
-          <a:xfrm>
-            <a:off x="7763256" y="3044952"/>
-            <a:ext cx="3483864" cy="310896"/>
-          </a:xfrm>
-          <a:prstGeom prst="rect">
-            <a:avLst/>
-          </a:prstGeom>
-          <a:noFill/>
-        </p:spPr>
-        <p:txBody>
-          <a:bodyPr wrap="square" lIns="0" rIns="0" tIns="0" bIns="0" anchor="ctr">
-            <a:spAutoFit/>
-          </a:bodyPr>
-          <a:lstStyle/>
-          <a:p>
-            <a:pPr algn="l">
-              <a:lnSpc>
-                <a:spcPct val="115000"/>
-              </a:lnSpc>
-            </a:pPr>
-            <a:r>
-              <a:rPr sz="1200" b="1">
-                <a:solidFill>
-                  <a:srgbClr val="008E76"/>
-                </a:solidFill>
-                <a:latin typeface="Microsoft JhengHei"/>
-              </a:rPr>
-              <a:t>藍芽→藍牙（OpenCC 用語）</a:t>
-            </a:r>
-          </a:p>
-        </p:txBody>
-      </p:sp>
-      <p:sp>
-        <p:nvSpPr>
-          <p:cNvPr id="21" name="Rectangle 20"/>
-          <p:cNvSpPr/>
-          <p:nvPr/>
-        </p:nvSpPr>
-        <p:spPr>
-          <a:xfrm>
-            <a:off x="667512" y="3396996"/>
-            <a:ext cx="10853928" cy="397764"/>
-          </a:xfrm>
-          <a:prstGeom prst="rect">
-            <a:avLst/>
-          </a:prstGeom>
-          <a:solidFill>
-            <a:srgbClr val="F4F6F8"/>
-          </a:solidFill>
-          <a:ln w="6350">
-            <a:solidFill>
-              <a:srgbClr val="E6E8EC"/>
-            </a:solidFill>
-          </a:ln>
-          <a:effectLst/>
-        </p:spPr>
-        <p:style>
-          <a:lnRef idx="1">
-            <a:schemeClr val="accent1"/>
-          </a:lnRef>
-          <a:fillRef idx="3">
-            <a:schemeClr val="accent1"/>
-          </a:fillRef>
-          <a:effectRef idx="2">
-            <a:schemeClr val="accent1"/>
-          </a:effectRef>
-          <a:fontRef idx="minor">
-            <a:schemeClr val="lt1"/>
-          </a:fontRef>
-        </p:style>
-        <p:txBody>
-          <a:bodyPr rtlCol="0" anchor="ctr"/>
-          <a:lstStyle/>
-          <a:p>
-            <a:pPr algn="ctr"/>
-          </a:p>
-        </p:txBody>
-      </p:sp>
-      <p:sp>
-        <p:nvSpPr>
-          <p:cNvPr id="22" name="TextBox 21"/>
-          <p:cNvSpPr txBox="1"/>
-          <p:nvPr/>
-        </p:nvSpPr>
-        <p:spPr>
-          <a:xfrm>
-            <a:off x="795528" y="3442716"/>
-            <a:ext cx="3163824" cy="310896"/>
-          </a:xfrm>
-          <a:prstGeom prst="rect">
-            <a:avLst/>
-          </a:prstGeom>
-          <a:noFill/>
-        </p:spPr>
-        <p:txBody>
-          <a:bodyPr wrap="square" lIns="0" rIns="0" tIns="0" bIns="0" anchor="ctr">
-            <a:spAutoFit/>
-          </a:bodyPr>
-          <a:lstStyle/>
-          <a:p>
-            <a:pPr algn="l">
-              <a:lnSpc>
-                <a:spcPct val="115000"/>
-              </a:lnSpc>
-            </a:pPr>
-            <a:r>
-              <a:rPr sz="1200" b="0">
-                <a:solidFill>
-                  <a:srgbClr val="1A1A2E"/>
-                </a:solidFill>
-                <a:latin typeface="Microsoft JhengHei"/>
-              </a:rPr>
-              <a:t>中倉衛生紙還有嗎</a:t>
-            </a:r>
-          </a:p>
-        </p:txBody>
-      </p:sp>
-      <p:sp>
-        <p:nvSpPr>
-          <p:cNvPr id="23" name="TextBox 22"/>
-          <p:cNvSpPr txBox="1"/>
-          <p:nvPr/>
-        </p:nvSpPr>
-        <p:spPr>
-          <a:xfrm>
-            <a:off x="4288536" y="3442716"/>
-            <a:ext cx="3072384" cy="310896"/>
-          </a:xfrm>
-          <a:prstGeom prst="rect">
-            <a:avLst/>
-          </a:prstGeom>
-          <a:noFill/>
-        </p:spPr>
-        <p:txBody>
-          <a:bodyPr wrap="square" lIns="0" rIns="0" tIns="0" bIns="0" anchor="ctr">
-            <a:spAutoFit/>
-          </a:bodyPr>
-          <a:lstStyle/>
-          <a:p>
-            <a:pPr algn="l">
-              <a:lnSpc>
-                <a:spcPct val="115000"/>
-              </a:lnSpc>
-            </a:pPr>
-            <a:r>
-              <a:rPr sz="1200" b="0">
-                <a:solidFill>
-                  <a:srgbClr val="E85D5D"/>
-                </a:solidFill>
-                <a:latin typeface="Microsoft JhengHei"/>
-              </a:rPr>
-              <a:t>中餐衛生紙還有嗎</a:t>
-            </a:r>
-          </a:p>
-        </p:txBody>
-      </p:sp>
-      <p:sp>
-        <p:nvSpPr>
-          <p:cNvPr id="24" name="TextBox 23"/>
-          <p:cNvSpPr txBox="1"/>
-          <p:nvPr/>
-        </p:nvSpPr>
-        <p:spPr>
-          <a:xfrm>
-            <a:off x="7763256" y="3442716"/>
-            <a:ext cx="3483864" cy="310896"/>
-          </a:xfrm>
-          <a:prstGeom prst="rect">
-            <a:avLst/>
-          </a:prstGeom>
-          <a:noFill/>
-        </p:spPr>
-        <p:txBody>
-          <a:bodyPr wrap="square" lIns="0" rIns="0" tIns="0" bIns="0" anchor="ctr">
-            <a:spAutoFit/>
-          </a:bodyPr>
-          <a:lstStyle/>
-          <a:p>
-            <a:pPr algn="l">
-              <a:lnSpc>
-                <a:spcPct val="115000"/>
-              </a:lnSpc>
-            </a:pPr>
-            <a:r>
-              <a:rPr sz="1200" b="1">
-                <a:solidFill>
-                  <a:srgbClr val="008E76"/>
-                </a:solidFill>
-                <a:latin typeface="Microsoft JhengHei"/>
-              </a:rPr>
-              <a:t>中餐→中倉</a:t>
-            </a:r>
-          </a:p>
-        </p:txBody>
-      </p:sp>
-      <p:sp>
-        <p:nvSpPr>
-          <p:cNvPr id="25" name="Rectangle 24"/>
-          <p:cNvSpPr/>
-          <p:nvPr/>
-        </p:nvSpPr>
-        <p:spPr>
-          <a:xfrm>
-            <a:off x="667512" y="3794760"/>
-            <a:ext cx="10853928" cy="397764"/>
-          </a:xfrm>
-          <a:prstGeom prst="rect">
-            <a:avLst/>
-          </a:prstGeom>
-          <a:solidFill>
-            <a:srgbClr val="FFFFFF"/>
-          </a:solidFill>
-          <a:ln w="6350">
-            <a:solidFill>
-              <a:srgbClr val="E6E8EC"/>
-            </a:solidFill>
-          </a:ln>
-          <a:effectLst/>
-        </p:spPr>
-        <p:style>
-          <a:lnRef idx="1">
-            <a:schemeClr val="accent1"/>
-          </a:lnRef>
-          <a:fillRef idx="3">
-            <a:schemeClr val="accent1"/>
-          </a:fillRef>
-          <a:effectRef idx="2">
-            <a:schemeClr val="accent1"/>
-          </a:effectRef>
-          <a:fontRef idx="minor">
-            <a:schemeClr val="lt1"/>
-          </a:fontRef>
-        </p:style>
-        <p:txBody>
-          <a:bodyPr rtlCol="0" anchor="ctr"/>
-          <a:lstStyle/>
-          <a:p>
-            <a:pPr algn="ctr"/>
-          </a:p>
-        </p:txBody>
-      </p:sp>
-      <p:sp>
-        <p:nvSpPr>
-          <p:cNvPr id="26" name="TextBox 25"/>
-          <p:cNvSpPr txBox="1"/>
-          <p:nvPr/>
-        </p:nvSpPr>
-        <p:spPr>
-          <a:xfrm>
-            <a:off x="795528" y="3840480"/>
-            <a:ext cx="3163824" cy="310896"/>
-          </a:xfrm>
-          <a:prstGeom prst="rect">
-            <a:avLst/>
-          </a:prstGeom>
-          <a:noFill/>
-        </p:spPr>
-        <p:txBody>
-          <a:bodyPr wrap="square" lIns="0" rIns="0" tIns="0" bIns="0" anchor="ctr">
-            <a:spAutoFit/>
-          </a:bodyPr>
-          <a:lstStyle/>
-          <a:p>
-            <a:pPr algn="l">
-              <a:lnSpc>
-                <a:spcPct val="115000"/>
-              </a:lnSpc>
-            </a:pPr>
-            <a:r>
-              <a:rPr sz="1200" b="0">
-                <a:solidFill>
-                  <a:srgbClr val="1A1A2E"/>
-                </a:solidFill>
-                <a:latin typeface="Microsoft JhengHei"/>
-              </a:rPr>
-              <a:t>運動壓縮臂套庫存</a:t>
-            </a:r>
-          </a:p>
-        </p:txBody>
-      </p:sp>
-      <p:sp>
-        <p:nvSpPr>
-          <p:cNvPr id="27" name="TextBox 26"/>
-          <p:cNvSpPr txBox="1"/>
-          <p:nvPr/>
-        </p:nvSpPr>
-        <p:spPr>
-          <a:xfrm>
-            <a:off x="4288536" y="3840480"/>
-            <a:ext cx="3072384" cy="310896"/>
-          </a:xfrm>
-          <a:prstGeom prst="rect">
-            <a:avLst/>
-          </a:prstGeom>
-          <a:noFill/>
-        </p:spPr>
-        <p:txBody>
-          <a:bodyPr wrap="square" lIns="0" rIns="0" tIns="0" bIns="0" anchor="ctr">
-            <a:spAutoFit/>
-          </a:bodyPr>
-          <a:lstStyle/>
-          <a:p>
-            <a:pPr algn="l">
-              <a:lnSpc>
-                <a:spcPct val="115000"/>
-              </a:lnSpc>
-            </a:pPr>
-            <a:r>
-              <a:rPr sz="1200" b="0">
-                <a:solidFill>
-                  <a:srgbClr val="E85D5D"/>
-                </a:solidFill>
-                <a:latin typeface="Microsoft JhengHei"/>
-              </a:rPr>
-              <a:t>運動壓縮筆套庫存</a:t>
-            </a:r>
-          </a:p>
-        </p:txBody>
-      </p:sp>
-      <p:sp>
-        <p:nvSpPr>
-          <p:cNvPr id="28" name="TextBox 27"/>
-          <p:cNvSpPr txBox="1"/>
-          <p:nvPr/>
-        </p:nvSpPr>
-        <p:spPr>
-          <a:xfrm>
-            <a:off x="7763256" y="3840480"/>
-            <a:ext cx="3483864" cy="310896"/>
-          </a:xfrm>
-          <a:prstGeom prst="rect">
-            <a:avLst/>
-          </a:prstGeom>
-          <a:noFill/>
-        </p:spPr>
-        <p:txBody>
-          <a:bodyPr wrap="square" lIns="0" rIns="0" tIns="0" bIns="0" anchor="ctr">
-            <a:spAutoFit/>
-          </a:bodyPr>
-          <a:lstStyle/>
-          <a:p>
-            <a:pPr algn="l">
-              <a:lnSpc>
-                <a:spcPct val="115000"/>
-              </a:lnSpc>
-            </a:pPr>
-            <a:r>
-              <a:rPr sz="1200" b="1">
-                <a:solidFill>
-                  <a:srgbClr val="008E76"/>
-                </a:solidFill>
-                <a:latin typeface="Microsoft JhengHei"/>
-              </a:rPr>
-              <a:t>筆套→臂套</a:t>
-            </a:r>
-          </a:p>
-        </p:txBody>
-      </p:sp>
-      <p:sp>
-        <p:nvSpPr>
-          <p:cNvPr id="29" name="Rectangle 28"/>
-          <p:cNvSpPr/>
-          <p:nvPr/>
-        </p:nvSpPr>
-        <p:spPr>
-          <a:xfrm>
-            <a:off x="667512" y="4192524"/>
-            <a:ext cx="10853928" cy="397764"/>
-          </a:xfrm>
-          <a:prstGeom prst="rect">
-            <a:avLst/>
-          </a:prstGeom>
-          <a:solidFill>
-            <a:srgbClr val="F4F6F8"/>
-          </a:solidFill>
-          <a:ln w="6350">
-            <a:solidFill>
-              <a:srgbClr val="E6E8EC"/>
-            </a:solidFill>
-          </a:ln>
-          <a:effectLst/>
-        </p:spPr>
-        <p:style>
-          <a:lnRef idx="1">
-            <a:schemeClr val="accent1"/>
-          </a:lnRef>
-          <a:fillRef idx="3">
-            <a:schemeClr val="accent1"/>
-          </a:fillRef>
-          <a:effectRef idx="2">
-            <a:schemeClr val="accent1"/>
-          </a:effectRef>
-          <a:fontRef idx="minor">
-            <a:schemeClr val="lt1"/>
-          </a:fontRef>
-        </p:style>
-        <p:txBody>
-          <a:bodyPr rtlCol="0" anchor="ctr"/>
-          <a:lstStyle/>
-          <a:p>
-            <a:pPr algn="ctr"/>
-          </a:p>
-        </p:txBody>
-      </p:sp>
-      <p:sp>
-        <p:nvSpPr>
-          <p:cNvPr id="30" name="TextBox 29"/>
-          <p:cNvSpPr txBox="1"/>
-          <p:nvPr/>
-        </p:nvSpPr>
-        <p:spPr>
-          <a:xfrm>
-            <a:off x="795528" y="4238244"/>
-            <a:ext cx="3163824" cy="310896"/>
-          </a:xfrm>
-          <a:prstGeom prst="rect">
-            <a:avLst/>
-          </a:prstGeom>
-          <a:noFill/>
-        </p:spPr>
-        <p:txBody>
-          <a:bodyPr wrap="square" lIns="0" rIns="0" tIns="0" bIns="0" anchor="ctr">
-            <a:spAutoFit/>
-          </a:bodyPr>
-          <a:lstStyle/>
-          <a:p>
-            <a:pPr algn="l">
-              <a:lnSpc>
-                <a:spcPct val="115000"/>
-              </a:lnSpc>
-            </a:pPr>
-            <a:r>
-              <a:rPr sz="1200" b="0">
-                <a:solidFill>
-                  <a:srgbClr val="1A1A2E"/>
-                </a:solidFill>
-                <a:latin typeface="Microsoft JhengHei"/>
-              </a:rPr>
-              <a:t>精釀啤酒庫存</a:t>
-            </a:r>
-          </a:p>
-        </p:txBody>
-      </p:sp>
-      <p:sp>
-        <p:nvSpPr>
-          <p:cNvPr id="31" name="TextBox 30"/>
-          <p:cNvSpPr txBox="1"/>
-          <p:nvPr/>
-        </p:nvSpPr>
-        <p:spPr>
-          <a:xfrm>
-            <a:off x="4288536" y="4238244"/>
-            <a:ext cx="3072384" cy="310896"/>
-          </a:xfrm>
-          <a:prstGeom prst="rect">
-            <a:avLst/>
-          </a:prstGeom>
-          <a:noFill/>
-        </p:spPr>
-        <p:txBody>
-          <a:bodyPr wrap="square" lIns="0" rIns="0" tIns="0" bIns="0" anchor="ctr">
-            <a:spAutoFit/>
-          </a:bodyPr>
-          <a:lstStyle/>
-          <a:p>
-            <a:pPr algn="l">
-              <a:lnSpc>
-                <a:spcPct val="115000"/>
-              </a:lnSpc>
-            </a:pPr>
-            <a:r>
-              <a:rPr sz="1200" b="0">
-                <a:solidFill>
-                  <a:srgbClr val="E85D5D"/>
-                </a:solidFill>
-                <a:latin typeface="Microsoft JhengHei"/>
-              </a:rPr>
-              <a:t>儘量啤酒庫存</a:t>
-            </a:r>
-          </a:p>
-        </p:txBody>
-      </p:sp>
-      <p:sp>
-        <p:nvSpPr>
-          <p:cNvPr id="32" name="TextBox 31"/>
-          <p:cNvSpPr txBox="1"/>
-          <p:nvPr/>
-        </p:nvSpPr>
-        <p:spPr>
-          <a:xfrm>
-            <a:off x="7763256" y="4238244"/>
-            <a:ext cx="3483864" cy="310896"/>
-          </a:xfrm>
-          <a:prstGeom prst="rect">
-            <a:avLst/>
-          </a:prstGeom>
-          <a:noFill/>
-        </p:spPr>
-        <p:txBody>
-          <a:bodyPr wrap="square" lIns="0" rIns="0" tIns="0" bIns="0" anchor="ctr">
-            <a:spAutoFit/>
-          </a:bodyPr>
-          <a:lstStyle/>
-          <a:p>
-            <a:pPr algn="l">
-              <a:lnSpc>
-                <a:spcPct val="115000"/>
-              </a:lnSpc>
-            </a:pPr>
-            <a:r>
-              <a:rPr sz="1200" b="1">
-                <a:solidFill>
-                  <a:srgbClr val="008E76"/>
-                </a:solidFill>
-                <a:latin typeface="Microsoft JhengHei"/>
-              </a:rPr>
-              <a:t>儘量→精釀</a:t>
-            </a:r>
-          </a:p>
-        </p:txBody>
-      </p:sp>
-      <p:sp>
-        <p:nvSpPr>
-          <p:cNvPr id="33" name="Rectangle 32"/>
-          <p:cNvSpPr/>
-          <p:nvPr/>
-        </p:nvSpPr>
-        <p:spPr>
-          <a:xfrm>
-            <a:off x="667512" y="4590288"/>
-            <a:ext cx="10853928" cy="397764"/>
-          </a:xfrm>
-          <a:prstGeom prst="rect">
-            <a:avLst/>
-          </a:prstGeom>
-          <a:solidFill>
-            <a:srgbClr val="FFFFFF"/>
-          </a:solidFill>
-          <a:ln w="6350">
-            <a:solidFill>
-              <a:srgbClr val="E6E8EC"/>
-            </a:solidFill>
-          </a:ln>
-          <a:effectLst/>
-        </p:spPr>
-        <p:style>
-          <a:lnRef idx="1">
-            <a:schemeClr val="accent1"/>
-          </a:lnRef>
-          <a:fillRef idx="3">
-            <a:schemeClr val="accent1"/>
-          </a:fillRef>
-          <a:effectRef idx="2">
-            <a:schemeClr val="accent1"/>
-          </a:effectRef>
-          <a:fontRef idx="minor">
-            <a:schemeClr val="lt1"/>
-          </a:fontRef>
-        </p:style>
-        <p:txBody>
-          <a:bodyPr rtlCol="0" anchor="ctr"/>
-          <a:lstStyle/>
-          <a:p>
-            <a:pPr algn="ctr"/>
-          </a:p>
-        </p:txBody>
-      </p:sp>
-      <p:sp>
-        <p:nvSpPr>
-          <p:cNvPr id="34" name="TextBox 33"/>
-          <p:cNvSpPr txBox="1"/>
-          <p:nvPr/>
-        </p:nvSpPr>
-        <p:spPr>
-          <a:xfrm>
-            <a:off x="795528" y="4636008"/>
-            <a:ext cx="3163824" cy="310896"/>
-          </a:xfrm>
-          <a:prstGeom prst="rect">
-            <a:avLst/>
-          </a:prstGeom>
-          <a:noFill/>
-        </p:spPr>
-        <p:txBody>
-          <a:bodyPr wrap="square" lIns="0" rIns="0" tIns="0" bIns="0" anchor="ctr">
-            <a:spAutoFit/>
-          </a:bodyPr>
-          <a:lstStyle/>
-          <a:p>
-            <a:pPr algn="l">
-              <a:lnSpc>
-                <a:spcPct val="115000"/>
-              </a:lnSpc>
-            </a:pPr>
-            <a:r>
-              <a:rPr sz="1200" b="0">
-                <a:solidFill>
-                  <a:srgbClr val="1A1A2E"/>
-                </a:solidFill>
-                <a:latin typeface="Microsoft JhengHei"/>
-              </a:rPr>
-              <a:t>防蚊液庫存</a:t>
-            </a:r>
-          </a:p>
-        </p:txBody>
-      </p:sp>
-      <p:sp>
-        <p:nvSpPr>
-          <p:cNvPr id="35" name="TextBox 34"/>
-          <p:cNvSpPr txBox="1"/>
-          <p:nvPr/>
-        </p:nvSpPr>
-        <p:spPr>
-          <a:xfrm>
-            <a:off x="4288536" y="4636008"/>
-            <a:ext cx="3072384" cy="310896"/>
-          </a:xfrm>
-          <a:prstGeom prst="rect">
-            <a:avLst/>
-          </a:prstGeom>
-          <a:noFill/>
-        </p:spPr>
-        <p:txBody>
-          <a:bodyPr wrap="square" lIns="0" rIns="0" tIns="0" bIns="0" anchor="ctr">
-            <a:spAutoFit/>
-          </a:bodyPr>
-          <a:lstStyle/>
-          <a:p>
-            <a:pPr algn="l">
-              <a:lnSpc>
-                <a:spcPct val="115000"/>
-              </a:lnSpc>
-            </a:pPr>
-            <a:r>
-              <a:rPr sz="1200" b="0">
-                <a:solidFill>
-                  <a:srgbClr val="E85D5D"/>
-                </a:solidFill>
-                <a:latin typeface="Microsoft JhengHei"/>
-              </a:rPr>
-              <a:t>防蚊衣庫存</a:t>
-            </a:r>
-          </a:p>
-        </p:txBody>
-      </p:sp>
-      <p:sp>
-        <p:nvSpPr>
-          <p:cNvPr id="36" name="TextBox 35"/>
-          <p:cNvSpPr txBox="1"/>
-          <p:nvPr/>
-        </p:nvSpPr>
-        <p:spPr>
-          <a:xfrm>
-            <a:off x="7763256" y="4636008"/>
-            <a:ext cx="3483864" cy="310896"/>
-          </a:xfrm>
-          <a:prstGeom prst="rect">
-            <a:avLst/>
-          </a:prstGeom>
-          <a:noFill/>
-        </p:spPr>
-        <p:txBody>
-          <a:bodyPr wrap="square" lIns="0" rIns="0" tIns="0" bIns="0" anchor="ctr">
-            <a:spAutoFit/>
-          </a:bodyPr>
-          <a:lstStyle/>
-          <a:p>
-            <a:pPr algn="l">
-              <a:lnSpc>
-                <a:spcPct val="115000"/>
-              </a:lnSpc>
-            </a:pPr>
-            <a:r>
-              <a:rPr sz="1200" b="1">
-                <a:solidFill>
-                  <a:srgbClr val="008E76"/>
-                </a:solidFill>
-                <a:latin typeface="Microsoft JhengHei"/>
-              </a:rPr>
-              <a:t>防蚊衣→防蚊液</a:t>
-            </a:r>
-          </a:p>
-        </p:txBody>
-      </p:sp>
-      <p:sp>
-        <p:nvSpPr>
-          <p:cNvPr id="37" name="Rectangle 36"/>
-          <p:cNvSpPr/>
-          <p:nvPr/>
-        </p:nvSpPr>
-        <p:spPr>
-          <a:xfrm>
-            <a:off x="667512" y="4988052"/>
-            <a:ext cx="10853928" cy="397764"/>
-          </a:xfrm>
-          <a:prstGeom prst="rect">
-            <a:avLst/>
-          </a:prstGeom>
-          <a:solidFill>
-            <a:srgbClr val="F4F6F8"/>
-          </a:solidFill>
-          <a:ln w="6350">
-            <a:solidFill>
-              <a:srgbClr val="E6E8EC"/>
-            </a:solidFill>
-          </a:ln>
-          <a:effectLst/>
-        </p:spPr>
-        <p:style>
-          <a:lnRef idx="1">
-            <a:schemeClr val="accent1"/>
-          </a:lnRef>
-          <a:fillRef idx="3">
-            <a:schemeClr val="accent1"/>
-          </a:fillRef>
-          <a:effectRef idx="2">
-            <a:schemeClr val="accent1"/>
-          </a:effectRef>
-          <a:fontRef idx="minor">
-            <a:schemeClr val="lt1"/>
-          </a:fontRef>
-        </p:style>
-        <p:txBody>
-          <a:bodyPr rtlCol="0" anchor="ctr"/>
-          <a:lstStyle/>
-          <a:p>
-            <a:pPr algn="ctr"/>
-          </a:p>
-        </p:txBody>
-      </p:sp>
-      <p:sp>
-        <p:nvSpPr>
-          <p:cNvPr id="38" name="TextBox 37"/>
-          <p:cNvSpPr txBox="1"/>
-          <p:nvPr/>
-        </p:nvSpPr>
-        <p:spPr>
-          <a:xfrm>
-            <a:off x="795528" y="5033772"/>
-            <a:ext cx="3163824" cy="310896"/>
-          </a:xfrm>
-          <a:prstGeom prst="rect">
-            <a:avLst/>
-          </a:prstGeom>
-          <a:noFill/>
-        </p:spPr>
-        <p:txBody>
-          <a:bodyPr wrap="square" lIns="0" rIns="0" tIns="0" bIns="0" anchor="ctr">
-            <a:spAutoFit/>
-          </a:bodyPr>
-          <a:lstStyle/>
-          <a:p>
-            <a:pPr algn="l">
-              <a:lnSpc>
-                <a:spcPct val="115000"/>
-              </a:lnSpc>
-            </a:pPr>
-            <a:r>
-              <a:rPr sz="1200" b="0">
-                <a:solidFill>
-                  <a:srgbClr val="1A1A2E"/>
-                </a:solidFill>
-                <a:latin typeface="Microsoft JhengHei"/>
-              </a:rPr>
-              <a:t>衛生紙的帳對不上</a:t>
-            </a:r>
-          </a:p>
-        </p:txBody>
-      </p:sp>
-      <p:sp>
-        <p:nvSpPr>
-          <p:cNvPr id="39" name="TextBox 38"/>
-          <p:cNvSpPr txBox="1"/>
-          <p:nvPr/>
-        </p:nvSpPr>
-        <p:spPr>
-          <a:xfrm>
-            <a:off x="4288536" y="5033772"/>
-            <a:ext cx="3072384" cy="310896"/>
-          </a:xfrm>
-          <a:prstGeom prst="rect">
-            <a:avLst/>
-          </a:prstGeom>
-          <a:noFill/>
-        </p:spPr>
-        <p:txBody>
-          <a:bodyPr wrap="square" lIns="0" rIns="0" tIns="0" bIns="0" anchor="ctr">
-            <a:spAutoFit/>
-          </a:bodyPr>
-          <a:lstStyle/>
-          <a:p>
-            <a:pPr algn="l">
-              <a:lnSpc>
-                <a:spcPct val="115000"/>
-              </a:lnSpc>
-            </a:pPr>
-            <a:r>
-              <a:rPr sz="1200" b="0">
-                <a:solidFill>
-                  <a:srgbClr val="E85D5D"/>
-                </a:solidFill>
-                <a:latin typeface="Microsoft JhengHei"/>
-              </a:rPr>
-              <a:t>衛生紙的賬對不上</a:t>
-            </a:r>
-          </a:p>
-        </p:txBody>
-      </p:sp>
-      <p:sp>
-        <p:nvSpPr>
-          <p:cNvPr id="40" name="TextBox 39"/>
-          <p:cNvSpPr txBox="1"/>
-          <p:nvPr/>
-        </p:nvSpPr>
-        <p:spPr>
-          <a:xfrm>
-            <a:off x="7763256" y="5033772"/>
-            <a:ext cx="3483864" cy="310896"/>
-          </a:xfrm>
-          <a:prstGeom prst="rect">
-            <a:avLst/>
-          </a:prstGeom>
-          <a:noFill/>
-        </p:spPr>
-        <p:txBody>
-          <a:bodyPr wrap="square" lIns="0" rIns="0" tIns="0" bIns="0" anchor="ctr">
-            <a:spAutoFit/>
-          </a:bodyPr>
-          <a:lstStyle/>
-          <a:p>
-            <a:pPr algn="l">
-              <a:lnSpc>
-                <a:spcPct val="115000"/>
-              </a:lnSpc>
-            </a:pPr>
-            <a:r>
-              <a:rPr sz="1200" b="1">
-                <a:solidFill>
-                  <a:srgbClr val="008E76"/>
-                </a:solidFill>
-                <a:latin typeface="Microsoft JhengHei"/>
-              </a:rPr>
-              <a:t>賬→帳（異體字）</a:t>
-            </a:r>
-          </a:p>
-        </p:txBody>
-      </p:sp>
-      <p:sp>
-        <p:nvSpPr>
-          <p:cNvPr id="41" name="Rectangle 40"/>
-          <p:cNvSpPr/>
-          <p:nvPr/>
-        </p:nvSpPr>
-        <p:spPr>
-          <a:xfrm>
-            <a:off x="667512" y="5385816"/>
-            <a:ext cx="10853928" cy="397764"/>
-          </a:xfrm>
-          <a:prstGeom prst="rect">
-            <a:avLst/>
-          </a:prstGeom>
-          <a:solidFill>
-            <a:srgbClr val="FFFFFF"/>
-          </a:solidFill>
-          <a:ln w="6350">
-            <a:solidFill>
-              <a:srgbClr val="E6E8EC"/>
-            </a:solidFill>
-          </a:ln>
-          <a:effectLst/>
-        </p:spPr>
-        <p:style>
-          <a:lnRef idx="1">
-            <a:schemeClr val="accent1"/>
-          </a:lnRef>
-          <a:fillRef idx="3">
-            <a:schemeClr val="accent1"/>
-          </a:fillRef>
-          <a:effectRef idx="2">
-            <a:schemeClr val="accent1"/>
-          </a:effectRef>
-          <a:fontRef idx="minor">
-            <a:schemeClr val="lt1"/>
-          </a:fontRef>
-        </p:style>
-        <p:txBody>
-          <a:bodyPr rtlCol="0" anchor="ctr"/>
-          <a:lstStyle/>
-          <a:p>
-            <a:pPr algn="ctr"/>
-          </a:p>
-        </p:txBody>
-      </p:sp>
-      <p:sp>
-        <p:nvSpPr>
-          <p:cNvPr id="42" name="TextBox 41"/>
-          <p:cNvSpPr txBox="1"/>
-          <p:nvPr/>
-        </p:nvSpPr>
-        <p:spPr>
-          <a:xfrm>
-            <a:off x="795528" y="5431536"/>
-            <a:ext cx="3163824" cy="310896"/>
-          </a:xfrm>
-          <a:prstGeom prst="rect">
-            <a:avLst/>
-          </a:prstGeom>
-          <a:noFill/>
-        </p:spPr>
-        <p:txBody>
-          <a:bodyPr wrap="square" lIns="0" rIns="0" tIns="0" bIns="0" anchor="ctr">
-            <a:spAutoFit/>
-          </a:bodyPr>
-          <a:lstStyle/>
-          <a:p>
-            <a:pPr algn="l">
-              <a:lnSpc>
-                <a:spcPct val="115000"/>
-              </a:lnSpc>
-            </a:pPr>
-            <a:r>
-              <a:rPr sz="1200" b="0">
-                <a:solidFill>
-                  <a:srgbClr val="1A1A2E"/>
-                </a:solidFill>
-                <a:latin typeface="Microsoft JhengHei"/>
-              </a:rPr>
-              <a:t>南倉出十五個瑜珈墊</a:t>
-            </a:r>
-          </a:p>
-        </p:txBody>
-      </p:sp>
-      <p:sp>
-        <p:nvSpPr>
-          <p:cNvPr id="43" name="TextBox 42"/>
-          <p:cNvSpPr txBox="1"/>
-          <p:nvPr/>
-        </p:nvSpPr>
-        <p:spPr>
-          <a:xfrm>
-            <a:off x="4288536" y="5431536"/>
-            <a:ext cx="3072384" cy="310896"/>
-          </a:xfrm>
-          <a:prstGeom prst="rect">
-            <a:avLst/>
-          </a:prstGeom>
-          <a:noFill/>
-        </p:spPr>
-        <p:txBody>
-          <a:bodyPr wrap="square" lIns="0" rIns="0" tIns="0" bIns="0" anchor="ctr">
-            <a:spAutoFit/>
-          </a:bodyPr>
-          <a:lstStyle/>
-          <a:p>
-            <a:pPr algn="l">
-              <a:lnSpc>
-                <a:spcPct val="115000"/>
-              </a:lnSpc>
-            </a:pPr>
-            <a:r>
-              <a:rPr sz="1200" b="0">
-                <a:solidFill>
-                  <a:srgbClr val="E85D5D"/>
-                </a:solidFill>
-                <a:latin typeface="Microsoft JhengHei"/>
-              </a:rPr>
-              <a:t>南倉出十五個瑜伽墊</a:t>
-            </a:r>
-          </a:p>
-        </p:txBody>
-      </p:sp>
-      <p:sp>
-        <p:nvSpPr>
-          <p:cNvPr id="44" name="TextBox 43"/>
-          <p:cNvSpPr txBox="1"/>
-          <p:nvPr/>
-        </p:nvSpPr>
-        <p:spPr>
-          <a:xfrm>
-            <a:off x="7763256" y="5431536"/>
-            <a:ext cx="3483864" cy="310896"/>
-          </a:xfrm>
-          <a:prstGeom prst="rect">
-            <a:avLst/>
-          </a:prstGeom>
-          <a:noFill/>
-        </p:spPr>
-        <p:txBody>
-          <a:bodyPr wrap="square" lIns="0" rIns="0" tIns="0" bIns="0" anchor="ctr">
-            <a:spAutoFit/>
-          </a:bodyPr>
-          <a:lstStyle/>
-          <a:p>
-            <a:pPr algn="l">
-              <a:lnSpc>
-                <a:spcPct val="115000"/>
-              </a:lnSpc>
-            </a:pPr>
-            <a:r>
-              <a:rPr sz="1200" b="1">
-                <a:solidFill>
-                  <a:srgbClr val="008E76"/>
-                </a:solidFill>
-                <a:latin typeface="Microsoft JhengHei"/>
-              </a:rPr>
-              <a:t>瑜伽→瑜珈</a:t>
-            </a:r>
-          </a:p>
-        </p:txBody>
-      </p:sp>
-      <p:sp>
-        <p:nvSpPr>
-          <p:cNvPr id="45" name="Rounded Rectangle 44"/>
-          <p:cNvSpPr/>
-          <p:nvPr/>
-        </p:nvSpPr>
-        <p:spPr>
-          <a:xfrm>
-            <a:off x="667512" y="5943600"/>
-            <a:ext cx="10853928" cy="658368"/>
-          </a:xfrm>
-          <a:prstGeom prst="roundRect">
-            <a:avLst>
-              <a:gd name="adj" fmla="val 8000"/>
-            </a:avLst>
-          </a:prstGeom>
-          <a:solidFill>
-            <a:srgbClr val="E4F7F2"/>
-          </a:solidFill>
-          <a:ln>
-            <a:noFill/>
-          </a:ln>
-          <a:effectLst/>
-        </p:spPr>
-        <p:style>
-          <a:lnRef idx="1">
-            <a:schemeClr val="accent1"/>
-          </a:lnRef>
-          <a:fillRef idx="3">
-            <a:schemeClr val="accent1"/>
-          </a:fillRef>
-          <a:effectRef idx="2">
-            <a:schemeClr val="accent1"/>
-          </a:effectRef>
-          <a:fontRef idx="minor">
-            <a:schemeClr val="lt1"/>
-          </a:fontRef>
-        </p:style>
-        <p:txBody>
-          <a:bodyPr rtlCol="0" anchor="ctr"/>
-          <a:lstStyle/>
-          <a:p>
-            <a:pPr algn="ctr"/>
+                  <a:srgbClr val="00C49A"/>
+                </a:solidFill>
+                <a:latin typeface="Microsoft JhengHei"/>
+              </a:rPr>
+              <a:t>→ 無線滑鼠 ✓ 答對</a:t>
+            </a:r>
           </a:p>
         </p:txBody>
       </p:sp>
       <p:sp>
         <p:nvSpPr>
           <p:cNvPr id="46" name="TextBox 45"/>
-          <p:cNvSpPr txBox="1"/>
-          <p:nvPr/>
-        </p:nvSpPr>
-        <p:spPr>
-          <a:xfrm>
-            <a:off x="987552" y="6062472"/>
-            <a:ext cx="10241280" cy="438912"/>
-          </a:xfrm>
-          <a:prstGeom prst="rect">
-            <a:avLst/>
-          </a:prstGeom>
-          <a:noFill/>
-        </p:spPr>
-        <p:txBody>
-          <a:bodyPr wrap="square" lIns="0" rIns="0" tIns="0" bIns="0" anchor="ctr">
-            <a:spAutoFit/>
-          </a:bodyPr>
-          <a:lstStyle/>
-          <a:p>
-            <a:pPr algn="l">
-              <a:lnSpc>
-                <a:spcPct val="115000"/>
-              </a:lnSpc>
-            </a:pPr>
-            <a:r>
-              <a:rPr sz="1250" b="1">
-                <a:solidFill>
-                  <a:srgbClr val="008E76"/>
-                </a:solidFill>
-                <a:latin typeface="Microsoft JhengHei"/>
-              </a:rPr>
-              <a:t>為何拼音救得到：  </a:t>
-            </a:r>
-            <a:r>
-              <a:rPr sz="1200" b="0">
-                <a:solidFill>
-                  <a:srgbClr val="444444"/>
-                </a:solidFill>
-                <a:latin typeface="Arial"/>
-              </a:rPr>
-              <a:t>華數 huashu = 滑鼠 huashu（完全同音）｜藍雅爾基 lanyaerji = 藍牙耳機 lanyaerji｜到齊 daoqi = 到期 daoqi</a:t>
-            </a:r>
-            <a:r>
-              <a:rPr sz="1200" b="0">
-                <a:solidFill>
-                  <a:srgbClr val="444444"/>
-                </a:solidFill>
-                <a:latin typeface="Microsoft JhengHei"/>
-              </a:rPr>
-              <a:t>  → 字形零重疊、拼音一比即中</a:t>
-            </a:r>
-          </a:p>
-        </p:txBody>
-      </p:sp>
-      <p:sp>
-        <p:nvSpPr>
-          <p:cNvPr id="47" name="TextBox 46"/>
           <p:cNvSpPr txBox="1"/>
           <p:nvPr/>
         </p:nvSpPr>
@@ -22963,7 +23117,7 @@
                 </a:solidFill>
                 <a:latin typeface="Arial"/>
               </a:rPr>
-              <a:t>VOICE POC · 極限與對策</a:t>
+              <a:t>VOICE POC · 救回實例</a:t>
             </a:r>
           </a:p>
         </p:txBody>
@@ -23002,7 +23156,7 @@
                 </a:solidFill>
                 <a:latin typeface="Microsoft JhengHei"/>
               </a:rPr>
-              <a:t>救不回的也照實講：270M 的天花板</a:t>
+              <a:t>ASR 聽錯，容錯層照樣答對（真人聲實測）</a:t>
             </a:r>
           </a:p>
         </p:txBody>
@@ -23041,7 +23195,7 @@
                 </a:solidFill>
                 <a:latin typeface="Microsoft JhengHei"/>
               </a:rPr>
-              <a:t>誠實區分：同音/音近能救；但 ASR 把整詞聽成毫不相干的詞（字形+發音都差），容錯層無能為力。</a:t>
+              <a:t>以下全是 2026-07 真人聲實測（webcam）的原始紀錄：ASR 明明聽錯，經容錯層修正後結果正確。</a:t>
             </a:r>
           </a:p>
         </p:txBody>
@@ -23055,716 +23209,7 @@
         <p:spPr>
           <a:xfrm>
             <a:off x="667512" y="1783080"/>
-            <a:ext cx="6537960" cy="3794760"/>
-          </a:xfrm>
-          <a:prstGeom prst="roundRect">
-            <a:avLst>
-              <a:gd name="adj" fmla="val 8000"/>
-            </a:avLst>
-          </a:prstGeom>
-          <a:solidFill>
-            <a:srgbClr val="F4F6F8"/>
-          </a:solidFill>
-          <a:ln>
-            <a:noFill/>
-          </a:ln>
-          <a:effectLst/>
-        </p:spPr>
-        <p:style>
-          <a:lnRef idx="1">
-            <a:schemeClr val="accent1"/>
-          </a:lnRef>
-          <a:fillRef idx="3">
-            <a:schemeClr val="accent1"/>
-          </a:fillRef>
-          <a:effectRef idx="2">
-            <a:schemeClr val="accent1"/>
-          </a:effectRef>
-          <a:fontRef idx="minor">
-            <a:schemeClr val="lt1"/>
-          </a:fontRef>
-        </p:style>
-        <p:txBody>
-          <a:bodyPr rtlCol="0" anchor="ctr"/>
-          <a:lstStyle/>
-          <a:p>
-            <a:pPr algn="ctr"/>
-          </a:p>
-        </p:txBody>
-      </p:sp>
-      <p:sp>
-        <p:nvSpPr>
-          <p:cNvPr id="6" name="TextBox 5"/>
-          <p:cNvSpPr txBox="1"/>
-          <p:nvPr/>
-        </p:nvSpPr>
-        <p:spPr>
-          <a:xfrm>
-            <a:off x="941832" y="1947672"/>
-            <a:ext cx="6035040" cy="329184"/>
-          </a:xfrm>
-          <a:prstGeom prst="rect">
-            <a:avLst/>
-          </a:prstGeom>
-          <a:noFill/>
-        </p:spPr>
-        <p:txBody>
-          <a:bodyPr wrap="square" lIns="0" rIns="0" tIns="0" bIns="0" anchor="t">
-            <a:spAutoFit/>
-          </a:bodyPr>
-          <a:lstStyle/>
-          <a:p>
-            <a:pPr algn="l">
-              <a:lnSpc>
-                <a:spcPct val="115000"/>
-              </a:lnSpc>
-            </a:pPr>
-            <a:r>
-              <a:rPr sz="1450" b="1">
-                <a:solidFill>
-                  <a:srgbClr val="E85D5D"/>
-                </a:solidFill>
-                <a:latin typeface="Microsoft JhengHei"/>
-              </a:rPr>
-              <a:t>整詞崩壞 → 救不回（FAIL）</a:t>
-            </a:r>
-          </a:p>
-        </p:txBody>
-      </p:sp>
-      <p:sp>
-        <p:nvSpPr>
-          <p:cNvPr id="7" name="TextBox 6"/>
-          <p:cNvSpPr txBox="1"/>
-          <p:nvPr/>
-        </p:nvSpPr>
-        <p:spPr>
-          <a:xfrm>
-            <a:off x="941832" y="2377440"/>
-            <a:ext cx="2926080" cy="274320"/>
-          </a:xfrm>
-          <a:prstGeom prst="rect">
-            <a:avLst/>
-          </a:prstGeom>
-          <a:noFill/>
-        </p:spPr>
-        <p:txBody>
-          <a:bodyPr wrap="square" lIns="0" rIns="0" tIns="0" bIns="0" anchor="t">
-            <a:spAutoFit/>
-          </a:bodyPr>
-          <a:lstStyle/>
-          <a:p>
-            <a:pPr algn="l">
-              <a:lnSpc>
-                <a:spcPct val="115000"/>
-              </a:lnSpc>
-            </a:pPr>
-            <a:r>
-              <a:rPr sz="1100" b="1">
-                <a:solidFill>
-                  <a:srgbClr val="777777"/>
-                </a:solidFill>
-                <a:latin typeface="Microsoft JhengHei"/>
-              </a:rPr>
-              <a:t>原句</a:t>
-            </a:r>
-          </a:p>
-        </p:txBody>
-      </p:sp>
-      <p:sp>
-        <p:nvSpPr>
-          <p:cNvPr id="8" name="TextBox 7"/>
-          <p:cNvSpPr txBox="1"/>
-          <p:nvPr/>
-        </p:nvSpPr>
-        <p:spPr>
-          <a:xfrm>
-            <a:off x="4096512" y="2377440"/>
-            <a:ext cx="2926080" cy="274320"/>
-          </a:xfrm>
-          <a:prstGeom prst="rect">
-            <a:avLst/>
-          </a:prstGeom>
-          <a:noFill/>
-        </p:spPr>
-        <p:txBody>
-          <a:bodyPr wrap="square" lIns="0" rIns="0" tIns="0" bIns="0" anchor="t">
-            <a:spAutoFit/>
-          </a:bodyPr>
-          <a:lstStyle/>
-          <a:p>
-            <a:pPr algn="l">
-              <a:lnSpc>
-                <a:spcPct val="115000"/>
-              </a:lnSpc>
-            </a:pPr>
-            <a:r>
-              <a:rPr sz="1100" b="1">
-                <a:solidFill>
-                  <a:srgbClr val="777777"/>
-                </a:solidFill>
-                <a:latin typeface="Microsoft JhengHei"/>
-              </a:rPr>
-              <a:t>ASR 聽成</a:t>
-            </a:r>
-          </a:p>
-        </p:txBody>
-      </p:sp>
-      <p:sp>
-        <p:nvSpPr>
-          <p:cNvPr id="9" name="TextBox 8"/>
-          <p:cNvSpPr txBox="1"/>
-          <p:nvPr/>
-        </p:nvSpPr>
-        <p:spPr>
-          <a:xfrm>
-            <a:off x="941832" y="2670048"/>
-            <a:ext cx="3063240" cy="365760"/>
-          </a:xfrm>
-          <a:prstGeom prst="rect">
-            <a:avLst/>
-          </a:prstGeom>
-          <a:noFill/>
-        </p:spPr>
-        <p:txBody>
-          <a:bodyPr wrap="square" lIns="0" rIns="0" tIns="0" bIns="0" anchor="ctr">
-            <a:spAutoFit/>
-          </a:bodyPr>
-          <a:lstStyle/>
-          <a:p>
-            <a:pPr algn="l">
-              <a:lnSpc>
-                <a:spcPct val="115000"/>
-              </a:lnSpc>
-            </a:pPr>
-            <a:r>
-              <a:rPr sz="1200" b="0">
-                <a:solidFill>
-                  <a:srgbClr val="1A1A2E"/>
-                </a:solidFill>
-                <a:latin typeface="Microsoft JhengHei"/>
-              </a:rPr>
-              <a:t>瑜珈墊有貨嗎</a:t>
-            </a:r>
-          </a:p>
-        </p:txBody>
-      </p:sp>
-      <p:sp>
-        <p:nvSpPr>
-          <p:cNvPr id="10" name="TextBox 9"/>
-          <p:cNvSpPr txBox="1"/>
-          <p:nvPr/>
-        </p:nvSpPr>
-        <p:spPr>
-          <a:xfrm>
-            <a:off x="4096512" y="2670048"/>
-            <a:ext cx="2926080" cy="365760"/>
-          </a:xfrm>
-          <a:prstGeom prst="rect">
-            <a:avLst/>
-          </a:prstGeom>
-          <a:noFill/>
-        </p:spPr>
-        <p:txBody>
-          <a:bodyPr wrap="square" lIns="0" rIns="0" tIns="0" bIns="0" anchor="ctr">
-            <a:spAutoFit/>
-          </a:bodyPr>
-          <a:lstStyle/>
-          <a:p>
-            <a:pPr algn="l">
-              <a:lnSpc>
-                <a:spcPct val="115000"/>
-              </a:lnSpc>
-            </a:pPr>
-            <a:r>
-              <a:rPr sz="1200" b="0">
-                <a:solidFill>
-                  <a:srgbClr val="E85D5D"/>
-                </a:solidFill>
-                <a:latin typeface="Microsoft JhengHei"/>
-              </a:rPr>
-              <a:t>→ 女藥店有貨嗎</a:t>
-            </a:r>
-          </a:p>
-        </p:txBody>
-      </p:sp>
-      <p:sp>
-        <p:nvSpPr>
-          <p:cNvPr id="11" name="TextBox 10"/>
-          <p:cNvSpPr txBox="1"/>
-          <p:nvPr/>
-        </p:nvSpPr>
-        <p:spPr>
-          <a:xfrm>
-            <a:off x="941832" y="3104388"/>
-            <a:ext cx="3063240" cy="365760"/>
-          </a:xfrm>
-          <a:prstGeom prst="rect">
-            <a:avLst/>
-          </a:prstGeom>
-          <a:noFill/>
-        </p:spPr>
-        <p:txBody>
-          <a:bodyPr wrap="square" lIns="0" rIns="0" tIns="0" bIns="0" anchor="ctr">
-            <a:spAutoFit/>
-          </a:bodyPr>
-          <a:lstStyle/>
-          <a:p>
-            <a:pPr algn="l">
-              <a:lnSpc>
-                <a:spcPct val="115000"/>
-              </a:lnSpc>
-            </a:pPr>
-            <a:r>
-              <a:rPr sz="1200" b="0">
-                <a:solidFill>
-                  <a:srgbClr val="1A1A2E"/>
-                </a:solidFill>
-                <a:latin typeface="Microsoft JhengHei"/>
-              </a:rPr>
-              <a:t>露營帳篷有貨嗎</a:t>
-            </a:r>
-          </a:p>
-        </p:txBody>
-      </p:sp>
-      <p:sp>
-        <p:nvSpPr>
-          <p:cNvPr id="12" name="TextBox 11"/>
-          <p:cNvSpPr txBox="1"/>
-          <p:nvPr/>
-        </p:nvSpPr>
-        <p:spPr>
-          <a:xfrm>
-            <a:off x="4096512" y="3104388"/>
-            <a:ext cx="2926080" cy="365760"/>
-          </a:xfrm>
-          <a:prstGeom prst="rect">
-            <a:avLst/>
-          </a:prstGeom>
-          <a:noFill/>
-        </p:spPr>
-        <p:txBody>
-          <a:bodyPr wrap="square" lIns="0" rIns="0" tIns="0" bIns="0" anchor="ctr">
-            <a:spAutoFit/>
-          </a:bodyPr>
-          <a:lstStyle/>
-          <a:p>
-            <a:pPr algn="l">
-              <a:lnSpc>
-                <a:spcPct val="115000"/>
-              </a:lnSpc>
-            </a:pPr>
-            <a:r>
-              <a:rPr sz="1200" b="0">
-                <a:solidFill>
-                  <a:srgbClr val="E85D5D"/>
-                </a:solidFill>
-                <a:latin typeface="Microsoft JhengHei"/>
-              </a:rPr>
-              <a:t>→ 女人占房有好嗎</a:t>
-            </a:r>
-          </a:p>
-        </p:txBody>
-      </p:sp>
-      <p:sp>
-        <p:nvSpPr>
-          <p:cNvPr id="13" name="TextBox 12"/>
-          <p:cNvSpPr txBox="1"/>
-          <p:nvPr/>
-        </p:nvSpPr>
-        <p:spPr>
-          <a:xfrm>
-            <a:off x="941832" y="3538728"/>
-            <a:ext cx="3063240" cy="365760"/>
-          </a:xfrm>
-          <a:prstGeom prst="rect">
-            <a:avLst/>
-          </a:prstGeom>
-          <a:noFill/>
-        </p:spPr>
-        <p:txBody>
-          <a:bodyPr wrap="square" lIns="0" rIns="0" tIns="0" bIns="0" anchor="ctr">
-            <a:spAutoFit/>
-          </a:bodyPr>
-          <a:lstStyle/>
-          <a:p>
-            <a:pPr algn="l">
-              <a:lnSpc>
-                <a:spcPct val="115000"/>
-              </a:lnSpc>
-            </a:pPr>
-            <a:r>
-              <a:rPr sz="1200" b="0">
-                <a:solidFill>
-                  <a:srgbClr val="1A1A2E"/>
-                </a:solidFill>
-                <a:latin typeface="Microsoft JhengHei"/>
-              </a:rPr>
-              <a:t>北倉的滑鼠有多少</a:t>
-            </a:r>
-          </a:p>
-        </p:txBody>
-      </p:sp>
-      <p:sp>
-        <p:nvSpPr>
-          <p:cNvPr id="14" name="TextBox 13"/>
-          <p:cNvSpPr txBox="1"/>
-          <p:nvPr/>
-        </p:nvSpPr>
-        <p:spPr>
-          <a:xfrm>
-            <a:off x="4096512" y="3538728"/>
-            <a:ext cx="2926080" cy="365760"/>
-          </a:xfrm>
-          <a:prstGeom prst="rect">
-            <a:avLst/>
-          </a:prstGeom>
-          <a:noFill/>
-        </p:spPr>
-        <p:txBody>
-          <a:bodyPr wrap="square" lIns="0" rIns="0" tIns="0" bIns="0" anchor="ctr">
-            <a:spAutoFit/>
-          </a:bodyPr>
-          <a:lstStyle/>
-          <a:p>
-            <a:pPr algn="l">
-              <a:lnSpc>
-                <a:spcPct val="115000"/>
-              </a:lnSpc>
-            </a:pPr>
-            <a:r>
-              <a:rPr sz="1200" b="0">
-                <a:solidFill>
-                  <a:srgbClr val="E85D5D"/>
-                </a:solidFill>
-                <a:latin typeface="Microsoft JhengHei"/>
-              </a:rPr>
-              <a:t>→ 北倉的瓦數有多少</a:t>
-            </a:r>
-          </a:p>
-        </p:txBody>
-      </p:sp>
-      <p:sp>
-        <p:nvSpPr>
-          <p:cNvPr id="15" name="TextBox 14"/>
-          <p:cNvSpPr txBox="1"/>
-          <p:nvPr/>
-        </p:nvSpPr>
-        <p:spPr>
-          <a:xfrm>
-            <a:off x="941832" y="3973068"/>
-            <a:ext cx="3063240" cy="365760"/>
-          </a:xfrm>
-          <a:prstGeom prst="rect">
-            <a:avLst/>
-          </a:prstGeom>
-          <a:noFill/>
-        </p:spPr>
-        <p:txBody>
-          <a:bodyPr wrap="square" lIns="0" rIns="0" tIns="0" bIns="0" anchor="ctr">
-            <a:spAutoFit/>
-          </a:bodyPr>
-          <a:lstStyle/>
-          <a:p>
-            <a:pPr algn="l">
-              <a:lnSpc>
-                <a:spcPct val="115000"/>
-              </a:lnSpc>
-            </a:pPr>
-            <a:r>
-              <a:rPr sz="1200" b="0">
-                <a:solidFill>
-                  <a:srgbClr val="1A1A2E"/>
-                </a:solidFill>
-                <a:latin typeface="Microsoft JhengHei"/>
-              </a:rPr>
-              <a:t>有缺的列出來</a:t>
-            </a:r>
-          </a:p>
-        </p:txBody>
-      </p:sp>
-      <p:sp>
-        <p:nvSpPr>
-          <p:cNvPr id="16" name="TextBox 15"/>
-          <p:cNvSpPr txBox="1"/>
-          <p:nvPr/>
-        </p:nvSpPr>
-        <p:spPr>
-          <a:xfrm>
-            <a:off x="4096512" y="3973068"/>
-            <a:ext cx="2926080" cy="365760"/>
-          </a:xfrm>
-          <a:prstGeom prst="rect">
-            <a:avLst/>
-          </a:prstGeom>
-          <a:noFill/>
-        </p:spPr>
-        <p:txBody>
-          <a:bodyPr wrap="square" lIns="0" rIns="0" tIns="0" bIns="0" anchor="ctr">
-            <a:spAutoFit/>
-          </a:bodyPr>
-          <a:lstStyle/>
-          <a:p>
-            <a:pPr algn="l">
-              <a:lnSpc>
-                <a:spcPct val="115000"/>
-              </a:lnSpc>
-            </a:pPr>
-            <a:r>
-              <a:rPr sz="1200" b="0">
-                <a:solidFill>
-                  <a:srgbClr val="E85D5D"/>
-                </a:solidFill>
-                <a:latin typeface="Microsoft JhengHei"/>
-              </a:rPr>
-              <a:t>→ 有趣的列出來</a:t>
-            </a:r>
-          </a:p>
-        </p:txBody>
-      </p:sp>
-      <p:sp>
-        <p:nvSpPr>
-          <p:cNvPr id="17" name="TextBox 16"/>
-          <p:cNvSpPr txBox="1"/>
-          <p:nvPr/>
-        </p:nvSpPr>
-        <p:spPr>
-          <a:xfrm>
-            <a:off x="941832" y="4407408"/>
-            <a:ext cx="3063240" cy="365760"/>
-          </a:xfrm>
-          <a:prstGeom prst="rect">
-            <a:avLst/>
-          </a:prstGeom>
-          <a:noFill/>
-        </p:spPr>
-        <p:txBody>
-          <a:bodyPr wrap="square" lIns="0" rIns="0" tIns="0" bIns="0" anchor="ctr">
-            <a:spAutoFit/>
-          </a:bodyPr>
-          <a:lstStyle/>
-          <a:p>
-            <a:pPr algn="l">
-              <a:lnSpc>
-                <a:spcPct val="115000"/>
-              </a:lnSpc>
-            </a:pPr>
-            <a:r>
-              <a:rPr sz="1200" b="0">
-                <a:solidFill>
-                  <a:srgbClr val="1A1A2E"/>
-                </a:solidFill>
-                <a:latin typeface="Microsoft JhengHei"/>
-              </a:rPr>
-              <a:t>北倉進三十瓶防蚊液</a:t>
-            </a:r>
-          </a:p>
-        </p:txBody>
-      </p:sp>
-      <p:sp>
-        <p:nvSpPr>
-          <p:cNvPr id="18" name="TextBox 17"/>
-          <p:cNvSpPr txBox="1"/>
-          <p:nvPr/>
-        </p:nvSpPr>
-        <p:spPr>
-          <a:xfrm>
-            <a:off x="4096512" y="4407408"/>
-            <a:ext cx="2926080" cy="365760"/>
-          </a:xfrm>
-          <a:prstGeom prst="rect">
-            <a:avLst/>
-          </a:prstGeom>
-          <a:noFill/>
-        </p:spPr>
-        <p:txBody>
-          <a:bodyPr wrap="square" lIns="0" rIns="0" tIns="0" bIns="0" anchor="ctr">
-            <a:spAutoFit/>
-          </a:bodyPr>
-          <a:lstStyle/>
-          <a:p>
-            <a:pPr algn="l">
-              <a:lnSpc>
-                <a:spcPct val="115000"/>
-              </a:lnSpc>
-            </a:pPr>
-            <a:r>
-              <a:rPr sz="1200" b="0">
-                <a:solidFill>
-                  <a:srgbClr val="E85D5D"/>
-                </a:solidFill>
-                <a:latin typeface="Microsoft JhengHei"/>
-              </a:rPr>
-              <a:t>→ …近三十品防瘟疫</a:t>
-            </a:r>
-          </a:p>
-        </p:txBody>
-      </p:sp>
-      <p:sp>
-        <p:nvSpPr>
-          <p:cNvPr id="19" name="TextBox 18"/>
-          <p:cNvSpPr txBox="1"/>
-          <p:nvPr/>
-        </p:nvSpPr>
-        <p:spPr>
-          <a:xfrm>
-            <a:off x="941832" y="4841748"/>
-            <a:ext cx="3063240" cy="365760"/>
-          </a:xfrm>
-          <a:prstGeom prst="rect">
-            <a:avLst/>
-          </a:prstGeom>
-          <a:noFill/>
-        </p:spPr>
-        <p:txBody>
-          <a:bodyPr wrap="square" lIns="0" rIns="0" tIns="0" bIns="0" anchor="ctr">
-            <a:spAutoFit/>
-          </a:bodyPr>
-          <a:lstStyle/>
-          <a:p>
-            <a:pPr algn="l">
-              <a:lnSpc>
-                <a:spcPct val="115000"/>
-              </a:lnSpc>
-            </a:pPr>
-            <a:r>
-              <a:rPr sz="1200" b="0">
-                <a:solidFill>
-                  <a:srgbClr val="1A1A2E"/>
-                </a:solidFill>
-                <a:latin typeface="Microsoft JhengHei"/>
-              </a:rPr>
-              <a:t>南倉收了三十個啤酒</a:t>
-            </a:r>
-          </a:p>
-        </p:txBody>
-      </p:sp>
-      <p:sp>
-        <p:nvSpPr>
-          <p:cNvPr id="20" name="TextBox 19"/>
-          <p:cNvSpPr txBox="1"/>
-          <p:nvPr/>
-        </p:nvSpPr>
-        <p:spPr>
-          <a:xfrm>
-            <a:off x="4096512" y="4841748"/>
-            <a:ext cx="2926080" cy="365760"/>
-          </a:xfrm>
-          <a:prstGeom prst="rect">
-            <a:avLst/>
-          </a:prstGeom>
-          <a:noFill/>
-        </p:spPr>
-        <p:txBody>
-          <a:bodyPr wrap="square" lIns="0" rIns="0" tIns="0" bIns="0" anchor="ctr">
-            <a:spAutoFit/>
-          </a:bodyPr>
-          <a:lstStyle/>
-          <a:p>
-            <a:pPr algn="l">
-              <a:lnSpc>
-                <a:spcPct val="115000"/>
-              </a:lnSpc>
-            </a:pPr>
-            <a:r>
-              <a:rPr sz="1200" b="0">
-                <a:solidFill>
-                  <a:srgbClr val="E85D5D"/>
-                </a:solidFill>
-                <a:latin typeface="Microsoft JhengHei"/>
-              </a:rPr>
-              <a:t>→ …收了三十個皮</a:t>
-            </a:r>
-          </a:p>
-        </p:txBody>
-      </p:sp>
-      <p:sp>
-        <p:nvSpPr>
-          <p:cNvPr id="21" name="TextBox 20"/>
-          <p:cNvSpPr txBox="1"/>
-          <p:nvPr/>
-        </p:nvSpPr>
-        <p:spPr>
-          <a:xfrm>
-            <a:off x="941832" y="5276088"/>
-            <a:ext cx="3063240" cy="365760"/>
-          </a:xfrm>
-          <a:prstGeom prst="rect">
-            <a:avLst/>
-          </a:prstGeom>
-          <a:noFill/>
-        </p:spPr>
-        <p:txBody>
-          <a:bodyPr wrap="square" lIns="0" rIns="0" tIns="0" bIns="0" anchor="ctr">
-            <a:spAutoFit/>
-          </a:bodyPr>
-          <a:lstStyle/>
-          <a:p>
-            <a:pPr algn="l">
-              <a:lnSpc>
-                <a:spcPct val="115000"/>
-              </a:lnSpc>
-            </a:pPr>
-            <a:r>
-              <a:rPr sz="1200" b="0">
-                <a:solidFill>
-                  <a:srgbClr val="1A1A2E"/>
-                </a:solidFill>
-                <a:latin typeface="Microsoft JhengHei"/>
-              </a:rPr>
-              <a:t>啞鈴庫存</a:t>
-            </a:r>
-          </a:p>
-        </p:txBody>
-      </p:sp>
-      <p:sp>
-        <p:nvSpPr>
-          <p:cNvPr id="22" name="TextBox 21"/>
-          <p:cNvSpPr txBox="1"/>
-          <p:nvPr/>
-        </p:nvSpPr>
-        <p:spPr>
-          <a:xfrm>
-            <a:off x="4096512" y="5276088"/>
-            <a:ext cx="2926080" cy="365760"/>
-          </a:xfrm>
-          <a:prstGeom prst="rect">
-            <a:avLst/>
-          </a:prstGeom>
-          <a:noFill/>
-        </p:spPr>
-        <p:txBody>
-          <a:bodyPr wrap="square" lIns="0" rIns="0" tIns="0" bIns="0" anchor="ctr">
-            <a:spAutoFit/>
-          </a:bodyPr>
-          <a:lstStyle/>
-          <a:p>
-            <a:pPr algn="l">
-              <a:lnSpc>
-                <a:spcPct val="115000"/>
-              </a:lnSpc>
-            </a:pPr>
-            <a:r>
-              <a:rPr sz="1200" b="0">
-                <a:solidFill>
-                  <a:srgbClr val="E85D5D"/>
-                </a:solidFill>
-                <a:latin typeface="Microsoft JhengHei"/>
-              </a:rPr>
-              <a:t>→ 10 庫存</a:t>
-            </a:r>
-          </a:p>
-        </p:txBody>
-      </p:sp>
-      <p:sp>
-        <p:nvSpPr>
-          <p:cNvPr id="23" name="Rounded Rectangle 22"/>
-          <p:cNvSpPr/>
-          <p:nvPr/>
-        </p:nvSpPr>
-        <p:spPr>
-          <a:xfrm>
-            <a:off x="7498079" y="1783080"/>
-            <a:ext cx="4023360" cy="3794760"/>
+            <a:ext cx="10853928" cy="420624"/>
           </a:xfrm>
           <a:prstGeom prst="roundRect">
             <a:avLst>
@@ -23803,59 +23248,1606 @@
       </p:sp>
       <p:sp>
         <p:nvSpPr>
+          <p:cNvPr id="6" name="TextBox 5"/>
+          <p:cNvSpPr txBox="1"/>
+          <p:nvPr/>
+        </p:nvSpPr>
+        <p:spPr>
+          <a:xfrm>
+            <a:off x="795528" y="1847088"/>
+            <a:ext cx="3163824" cy="310896"/>
+          </a:xfrm>
+          <a:prstGeom prst="rect">
+            <a:avLst/>
+          </a:prstGeom>
+          <a:noFill/>
+        </p:spPr>
+        <p:txBody>
+          <a:bodyPr wrap="square" lIns="0" rIns="0" tIns="0" bIns="0" anchor="ctr">
+            <a:spAutoFit/>
+          </a:bodyPr>
+          <a:lstStyle/>
+          <a:p>
+            <a:pPr algn="l">
+              <a:lnSpc>
+                <a:spcPct val="115000"/>
+              </a:lnSpc>
+            </a:pPr>
+            <a:r>
+              <a:rPr sz="1200" b="1">
+                <a:solidFill>
+                  <a:srgbClr val="FFFFFF"/>
+                </a:solidFill>
+                <a:latin typeface="Microsoft JhengHei"/>
+              </a:rPr>
+              <a:t>訪客原句</a:t>
+            </a:r>
+          </a:p>
+        </p:txBody>
+      </p:sp>
+      <p:sp>
+        <p:nvSpPr>
+          <p:cNvPr id="7" name="TextBox 6"/>
+          <p:cNvSpPr txBox="1"/>
+          <p:nvPr/>
+        </p:nvSpPr>
+        <p:spPr>
+          <a:xfrm>
+            <a:off x="4288536" y="1847088"/>
+            <a:ext cx="3072384" cy="310896"/>
+          </a:xfrm>
+          <a:prstGeom prst="rect">
+            <a:avLst/>
+          </a:prstGeom>
+          <a:noFill/>
+        </p:spPr>
+        <p:txBody>
+          <a:bodyPr wrap="square" lIns="0" rIns="0" tIns="0" bIns="0" anchor="ctr">
+            <a:spAutoFit/>
+          </a:bodyPr>
+          <a:lstStyle/>
+          <a:p>
+            <a:pPr algn="l">
+              <a:lnSpc>
+                <a:spcPct val="115000"/>
+              </a:lnSpc>
+            </a:pPr>
+            <a:r>
+              <a:rPr sz="1200" b="1">
+                <a:solidFill>
+                  <a:srgbClr val="FFFFFF"/>
+                </a:solidFill>
+                <a:latin typeface="Microsoft JhengHei"/>
+              </a:rPr>
+              <a:t>ASR 聽成（錯）</a:t>
+            </a:r>
+          </a:p>
+        </p:txBody>
+      </p:sp>
+      <p:sp>
+        <p:nvSpPr>
+          <p:cNvPr id="8" name="TextBox 7"/>
+          <p:cNvSpPr txBox="1"/>
+          <p:nvPr/>
+        </p:nvSpPr>
+        <p:spPr>
+          <a:xfrm>
+            <a:off x="7763256" y="1847088"/>
+            <a:ext cx="3483864" cy="310896"/>
+          </a:xfrm>
+          <a:prstGeom prst="rect">
+            <a:avLst/>
+          </a:prstGeom>
+          <a:noFill/>
+        </p:spPr>
+        <p:txBody>
+          <a:bodyPr wrap="square" lIns="0" rIns="0" tIns="0" bIns="0" anchor="ctr">
+            <a:spAutoFit/>
+          </a:bodyPr>
+          <a:lstStyle/>
+          <a:p>
+            <a:pPr algn="l">
+              <a:lnSpc>
+                <a:spcPct val="115000"/>
+              </a:lnSpc>
+            </a:pPr>
+            <a:r>
+              <a:rPr sz="1200" b="1">
+                <a:solidFill>
+                  <a:srgbClr val="00C49A"/>
+                </a:solidFill>
+                <a:latin typeface="Microsoft JhengHei"/>
+              </a:rPr>
+              <a:t>容錯層救回 → 答對</a:t>
+            </a:r>
+          </a:p>
+        </p:txBody>
+      </p:sp>
+      <p:sp>
+        <p:nvSpPr>
+          <p:cNvPr id="9" name="Rectangle 8"/>
+          <p:cNvSpPr/>
+          <p:nvPr/>
+        </p:nvSpPr>
+        <p:spPr>
+          <a:xfrm>
+            <a:off x="667512" y="2203704"/>
+            <a:ext cx="10853928" cy="397764"/>
+          </a:xfrm>
+          <a:prstGeom prst="rect">
+            <a:avLst/>
+          </a:prstGeom>
+          <a:solidFill>
+            <a:srgbClr val="FFFFFF"/>
+          </a:solidFill>
+          <a:ln w="6350">
+            <a:solidFill>
+              <a:srgbClr val="E6E8EC"/>
+            </a:solidFill>
+          </a:ln>
+          <a:effectLst/>
+        </p:spPr>
+        <p:style>
+          <a:lnRef idx="1">
+            <a:schemeClr val="accent1"/>
+          </a:lnRef>
+          <a:fillRef idx="3">
+            <a:schemeClr val="accent1"/>
+          </a:fillRef>
+          <a:effectRef idx="2">
+            <a:schemeClr val="accent1"/>
+          </a:effectRef>
+          <a:fontRef idx="minor">
+            <a:schemeClr val="lt1"/>
+          </a:fontRef>
+        </p:style>
+        <p:txBody>
+          <a:bodyPr rtlCol="0" anchor="ctr"/>
+          <a:lstStyle/>
+          <a:p>
+            <a:pPr algn="ctr"/>
+          </a:p>
+        </p:txBody>
+      </p:sp>
+      <p:sp>
+        <p:nvSpPr>
+          <p:cNvPr id="10" name="TextBox 9"/>
+          <p:cNvSpPr txBox="1"/>
+          <p:nvPr/>
+        </p:nvSpPr>
+        <p:spPr>
+          <a:xfrm>
+            <a:off x="795528" y="2249424"/>
+            <a:ext cx="3163824" cy="310896"/>
+          </a:xfrm>
+          <a:prstGeom prst="rect">
+            <a:avLst/>
+          </a:prstGeom>
+          <a:noFill/>
+        </p:spPr>
+        <p:txBody>
+          <a:bodyPr wrap="square" lIns="0" rIns="0" tIns="0" bIns="0" anchor="ctr">
+            <a:spAutoFit/>
+          </a:bodyPr>
+          <a:lstStyle/>
+          <a:p>
+            <a:pPr algn="l">
+              <a:lnSpc>
+                <a:spcPct val="115000"/>
+              </a:lnSpc>
+            </a:pPr>
+            <a:r>
+              <a:rPr sz="1200" b="0">
+                <a:solidFill>
+                  <a:srgbClr val="1A1A2E"/>
+                </a:solidFill>
+                <a:latin typeface="Microsoft JhengHei"/>
+              </a:rPr>
+              <a:t>北倉進五十個滑鼠</a:t>
+            </a:r>
+          </a:p>
+        </p:txBody>
+      </p:sp>
+      <p:sp>
+        <p:nvSpPr>
+          <p:cNvPr id="11" name="TextBox 10"/>
+          <p:cNvSpPr txBox="1"/>
+          <p:nvPr/>
+        </p:nvSpPr>
+        <p:spPr>
+          <a:xfrm>
+            <a:off x="4288536" y="2249424"/>
+            <a:ext cx="3072384" cy="310896"/>
+          </a:xfrm>
+          <a:prstGeom prst="rect">
+            <a:avLst/>
+          </a:prstGeom>
+          <a:noFill/>
+        </p:spPr>
+        <p:txBody>
+          <a:bodyPr wrap="square" lIns="0" rIns="0" tIns="0" bIns="0" anchor="ctr">
+            <a:spAutoFit/>
+          </a:bodyPr>
+          <a:lstStyle/>
+          <a:p>
+            <a:pPr algn="l">
+              <a:lnSpc>
+                <a:spcPct val="115000"/>
+              </a:lnSpc>
+            </a:pPr>
+            <a:r>
+              <a:rPr sz="1200" b="0">
+                <a:solidFill>
+                  <a:srgbClr val="E85D5D"/>
+                </a:solidFill>
+                <a:latin typeface="Microsoft JhengHei"/>
+              </a:rPr>
+              <a:t>北藏近五十個華族</a:t>
+            </a:r>
+          </a:p>
+        </p:txBody>
+      </p:sp>
+      <p:sp>
+        <p:nvSpPr>
+          <p:cNvPr id="12" name="TextBox 11"/>
+          <p:cNvSpPr txBox="1"/>
+          <p:nvPr/>
+        </p:nvSpPr>
+        <p:spPr>
+          <a:xfrm>
+            <a:off x="7763256" y="2249424"/>
+            <a:ext cx="3483864" cy="310896"/>
+          </a:xfrm>
+          <a:prstGeom prst="rect">
+            <a:avLst/>
+          </a:prstGeom>
+          <a:noFill/>
+        </p:spPr>
+        <p:txBody>
+          <a:bodyPr wrap="square" lIns="0" rIns="0" tIns="0" bIns="0" anchor="ctr">
+            <a:spAutoFit/>
+          </a:bodyPr>
+          <a:lstStyle/>
+          <a:p>
+            <a:pPr algn="l">
+              <a:lnSpc>
+                <a:spcPct val="115000"/>
+              </a:lnSpc>
+            </a:pPr>
+            <a:r>
+              <a:rPr sz="1200" b="1">
+                <a:solidFill>
+                  <a:srgbClr val="008E76"/>
+                </a:solidFill>
+                <a:latin typeface="Microsoft JhengHei"/>
+              </a:rPr>
+              <a:t>藏→倉·近→進·華族→滑鼠</a:t>
+            </a:r>
+          </a:p>
+        </p:txBody>
+      </p:sp>
+      <p:sp>
+        <p:nvSpPr>
+          <p:cNvPr id="13" name="Rectangle 12"/>
+          <p:cNvSpPr/>
+          <p:nvPr/>
+        </p:nvSpPr>
+        <p:spPr>
+          <a:xfrm>
+            <a:off x="667512" y="2601468"/>
+            <a:ext cx="10853928" cy="397764"/>
+          </a:xfrm>
+          <a:prstGeom prst="rect">
+            <a:avLst/>
+          </a:prstGeom>
+          <a:solidFill>
+            <a:srgbClr val="F4F6F8"/>
+          </a:solidFill>
+          <a:ln w="6350">
+            <a:solidFill>
+              <a:srgbClr val="E6E8EC"/>
+            </a:solidFill>
+          </a:ln>
+          <a:effectLst/>
+        </p:spPr>
+        <p:style>
+          <a:lnRef idx="1">
+            <a:schemeClr val="accent1"/>
+          </a:lnRef>
+          <a:fillRef idx="3">
+            <a:schemeClr val="accent1"/>
+          </a:fillRef>
+          <a:effectRef idx="2">
+            <a:schemeClr val="accent1"/>
+          </a:effectRef>
+          <a:fontRef idx="minor">
+            <a:schemeClr val="lt1"/>
+          </a:fontRef>
+        </p:style>
+        <p:txBody>
+          <a:bodyPr rtlCol="0" anchor="ctr"/>
+          <a:lstStyle/>
+          <a:p>
+            <a:pPr algn="ctr"/>
+          </a:p>
+        </p:txBody>
+      </p:sp>
+      <p:sp>
+        <p:nvSpPr>
+          <p:cNvPr id="14" name="TextBox 13"/>
+          <p:cNvSpPr txBox="1"/>
+          <p:nvPr/>
+        </p:nvSpPr>
+        <p:spPr>
+          <a:xfrm>
+            <a:off x="795528" y="2647188"/>
+            <a:ext cx="3163824" cy="310896"/>
+          </a:xfrm>
+          <a:prstGeom prst="rect">
+            <a:avLst/>
+          </a:prstGeom>
+          <a:noFill/>
+        </p:spPr>
+        <p:txBody>
+          <a:bodyPr wrap="square" lIns="0" rIns="0" tIns="0" bIns="0" anchor="ctr">
+            <a:spAutoFit/>
+          </a:bodyPr>
+          <a:lstStyle/>
+          <a:p>
+            <a:pPr algn="l">
+              <a:lnSpc>
+                <a:spcPct val="115000"/>
+              </a:lnSpc>
+            </a:pPr>
+            <a:r>
+              <a:rPr sz="1200" b="0">
+                <a:solidFill>
+                  <a:srgbClr val="1A1A2E"/>
+                </a:solidFill>
+                <a:latin typeface="Microsoft JhengHei"/>
+              </a:rPr>
+              <a:t>幫我在北倉加五十個滑鼠</a:t>
+            </a:r>
+          </a:p>
+        </p:txBody>
+      </p:sp>
+      <p:sp>
+        <p:nvSpPr>
+          <p:cNvPr id="15" name="TextBox 14"/>
+          <p:cNvSpPr txBox="1"/>
+          <p:nvPr/>
+        </p:nvSpPr>
+        <p:spPr>
+          <a:xfrm>
+            <a:off x="4288536" y="2647188"/>
+            <a:ext cx="3072384" cy="310896"/>
+          </a:xfrm>
+          <a:prstGeom prst="rect">
+            <a:avLst/>
+          </a:prstGeom>
+          <a:noFill/>
+        </p:spPr>
+        <p:txBody>
+          <a:bodyPr wrap="square" lIns="0" rIns="0" tIns="0" bIns="0" anchor="ctr">
+            <a:spAutoFit/>
+          </a:bodyPr>
+          <a:lstStyle/>
+          <a:p>
+            <a:pPr algn="l">
+              <a:lnSpc>
+                <a:spcPct val="115000"/>
+              </a:lnSpc>
+            </a:pPr>
+            <a:r>
+              <a:rPr sz="1200" b="0">
+                <a:solidFill>
+                  <a:srgbClr val="E85D5D"/>
+                </a:solidFill>
+                <a:latin typeface="Microsoft JhengHei"/>
+              </a:rPr>
+              <a:t>…加五十個花束</a:t>
+            </a:r>
+          </a:p>
+        </p:txBody>
+      </p:sp>
+      <p:sp>
+        <p:nvSpPr>
+          <p:cNvPr id="16" name="TextBox 15"/>
+          <p:cNvSpPr txBox="1"/>
+          <p:nvPr/>
+        </p:nvSpPr>
+        <p:spPr>
+          <a:xfrm>
+            <a:off x="7763256" y="2647188"/>
+            <a:ext cx="3483864" cy="310896"/>
+          </a:xfrm>
+          <a:prstGeom prst="rect">
+            <a:avLst/>
+          </a:prstGeom>
+          <a:noFill/>
+        </p:spPr>
+        <p:txBody>
+          <a:bodyPr wrap="square" lIns="0" rIns="0" tIns="0" bIns="0" anchor="ctr">
+            <a:spAutoFit/>
+          </a:bodyPr>
+          <a:lstStyle/>
+          <a:p>
+            <a:pPr algn="l">
+              <a:lnSpc>
+                <a:spcPct val="115000"/>
+              </a:lnSpc>
+            </a:pPr>
+            <a:r>
+              <a:rPr sz="1200" b="1">
+                <a:solidFill>
+                  <a:srgbClr val="008E76"/>
+                </a:solidFill>
+                <a:latin typeface="Microsoft JhengHei"/>
+              </a:rPr>
+              <a:t>花束→滑鼠（拼音同音）</a:t>
+            </a:r>
+          </a:p>
+        </p:txBody>
+      </p:sp>
+      <p:sp>
+        <p:nvSpPr>
+          <p:cNvPr id="17" name="Rectangle 16"/>
+          <p:cNvSpPr/>
+          <p:nvPr/>
+        </p:nvSpPr>
+        <p:spPr>
+          <a:xfrm>
+            <a:off x="667512" y="2999232"/>
+            <a:ext cx="10853928" cy="397764"/>
+          </a:xfrm>
+          <a:prstGeom prst="rect">
+            <a:avLst/>
+          </a:prstGeom>
+          <a:solidFill>
+            <a:srgbClr val="FFFFFF"/>
+          </a:solidFill>
+          <a:ln w="6350">
+            <a:solidFill>
+              <a:srgbClr val="E6E8EC"/>
+            </a:solidFill>
+          </a:ln>
+          <a:effectLst/>
+        </p:spPr>
+        <p:style>
+          <a:lnRef idx="1">
+            <a:schemeClr val="accent1"/>
+          </a:lnRef>
+          <a:fillRef idx="3">
+            <a:schemeClr val="accent1"/>
+          </a:fillRef>
+          <a:effectRef idx="2">
+            <a:schemeClr val="accent1"/>
+          </a:effectRef>
+          <a:fontRef idx="minor">
+            <a:schemeClr val="lt1"/>
+          </a:fontRef>
+        </p:style>
+        <p:txBody>
+          <a:bodyPr rtlCol="0" anchor="ctr"/>
+          <a:lstStyle/>
+          <a:p>
+            <a:pPr algn="ctr"/>
+          </a:p>
+        </p:txBody>
+      </p:sp>
+      <p:sp>
+        <p:nvSpPr>
+          <p:cNvPr id="18" name="TextBox 17"/>
+          <p:cNvSpPr txBox="1"/>
+          <p:nvPr/>
+        </p:nvSpPr>
+        <p:spPr>
+          <a:xfrm>
+            <a:off x="795528" y="3044952"/>
+            <a:ext cx="3163824" cy="310896"/>
+          </a:xfrm>
+          <a:prstGeom prst="rect">
+            <a:avLst/>
+          </a:prstGeom>
+          <a:noFill/>
+        </p:spPr>
+        <p:txBody>
+          <a:bodyPr wrap="square" lIns="0" rIns="0" tIns="0" bIns="0" anchor="ctr">
+            <a:spAutoFit/>
+          </a:bodyPr>
+          <a:lstStyle/>
+          <a:p>
+            <a:pPr algn="l">
+              <a:lnSpc>
+                <a:spcPct val="115000"/>
+              </a:lnSpc>
+            </a:pPr>
+            <a:r>
+              <a:rPr sz="1200" b="0">
+                <a:solidFill>
+                  <a:srgbClr val="1A1A2E"/>
+                </a:solidFill>
+                <a:latin typeface="Microsoft JhengHei"/>
+              </a:rPr>
+              <a:t>藍牙耳機庫存</a:t>
+            </a:r>
+          </a:p>
+        </p:txBody>
+      </p:sp>
+      <p:sp>
+        <p:nvSpPr>
+          <p:cNvPr id="19" name="TextBox 18"/>
+          <p:cNvSpPr txBox="1"/>
+          <p:nvPr/>
+        </p:nvSpPr>
+        <p:spPr>
+          <a:xfrm>
+            <a:off x="4288536" y="3044952"/>
+            <a:ext cx="3072384" cy="310896"/>
+          </a:xfrm>
+          <a:prstGeom prst="rect">
+            <a:avLst/>
+          </a:prstGeom>
+          <a:noFill/>
+        </p:spPr>
+        <p:txBody>
+          <a:bodyPr wrap="square" lIns="0" rIns="0" tIns="0" bIns="0" anchor="ctr">
+            <a:spAutoFit/>
+          </a:bodyPr>
+          <a:lstStyle/>
+          <a:p>
+            <a:pPr algn="l">
+              <a:lnSpc>
+                <a:spcPct val="115000"/>
+              </a:lnSpc>
+            </a:pPr>
+            <a:r>
+              <a:rPr sz="1200" b="0">
+                <a:solidFill>
+                  <a:srgbClr val="E85D5D"/>
+                </a:solidFill>
+                <a:latin typeface="Microsoft JhengHei"/>
+              </a:rPr>
+              <a:t>藍芽耳機庫存</a:t>
+            </a:r>
+          </a:p>
+        </p:txBody>
+      </p:sp>
+      <p:sp>
+        <p:nvSpPr>
+          <p:cNvPr id="20" name="TextBox 19"/>
+          <p:cNvSpPr txBox="1"/>
+          <p:nvPr/>
+        </p:nvSpPr>
+        <p:spPr>
+          <a:xfrm>
+            <a:off x="7763256" y="3044952"/>
+            <a:ext cx="3483864" cy="310896"/>
+          </a:xfrm>
+          <a:prstGeom prst="rect">
+            <a:avLst/>
+          </a:prstGeom>
+          <a:noFill/>
+        </p:spPr>
+        <p:txBody>
+          <a:bodyPr wrap="square" lIns="0" rIns="0" tIns="0" bIns="0" anchor="ctr">
+            <a:spAutoFit/>
+          </a:bodyPr>
+          <a:lstStyle/>
+          <a:p>
+            <a:pPr algn="l">
+              <a:lnSpc>
+                <a:spcPct val="115000"/>
+              </a:lnSpc>
+            </a:pPr>
+            <a:r>
+              <a:rPr sz="1200" b="1">
+                <a:solidFill>
+                  <a:srgbClr val="008E76"/>
+                </a:solidFill>
+                <a:latin typeface="Microsoft JhengHei"/>
+              </a:rPr>
+              <a:t>藍芽→藍牙（OpenCC 用語）</a:t>
+            </a:r>
+          </a:p>
+        </p:txBody>
+      </p:sp>
+      <p:sp>
+        <p:nvSpPr>
+          <p:cNvPr id="21" name="Rectangle 20"/>
+          <p:cNvSpPr/>
+          <p:nvPr/>
+        </p:nvSpPr>
+        <p:spPr>
+          <a:xfrm>
+            <a:off x="667512" y="3396996"/>
+            <a:ext cx="10853928" cy="397764"/>
+          </a:xfrm>
+          <a:prstGeom prst="rect">
+            <a:avLst/>
+          </a:prstGeom>
+          <a:solidFill>
+            <a:srgbClr val="F4F6F8"/>
+          </a:solidFill>
+          <a:ln w="6350">
+            <a:solidFill>
+              <a:srgbClr val="E6E8EC"/>
+            </a:solidFill>
+          </a:ln>
+          <a:effectLst/>
+        </p:spPr>
+        <p:style>
+          <a:lnRef idx="1">
+            <a:schemeClr val="accent1"/>
+          </a:lnRef>
+          <a:fillRef idx="3">
+            <a:schemeClr val="accent1"/>
+          </a:fillRef>
+          <a:effectRef idx="2">
+            <a:schemeClr val="accent1"/>
+          </a:effectRef>
+          <a:fontRef idx="minor">
+            <a:schemeClr val="lt1"/>
+          </a:fontRef>
+        </p:style>
+        <p:txBody>
+          <a:bodyPr rtlCol="0" anchor="ctr"/>
+          <a:lstStyle/>
+          <a:p>
+            <a:pPr algn="ctr"/>
+          </a:p>
+        </p:txBody>
+      </p:sp>
+      <p:sp>
+        <p:nvSpPr>
+          <p:cNvPr id="22" name="TextBox 21"/>
+          <p:cNvSpPr txBox="1"/>
+          <p:nvPr/>
+        </p:nvSpPr>
+        <p:spPr>
+          <a:xfrm>
+            <a:off x="795528" y="3442716"/>
+            <a:ext cx="3163824" cy="310896"/>
+          </a:xfrm>
+          <a:prstGeom prst="rect">
+            <a:avLst/>
+          </a:prstGeom>
+          <a:noFill/>
+        </p:spPr>
+        <p:txBody>
+          <a:bodyPr wrap="square" lIns="0" rIns="0" tIns="0" bIns="0" anchor="ctr">
+            <a:spAutoFit/>
+          </a:bodyPr>
+          <a:lstStyle/>
+          <a:p>
+            <a:pPr algn="l">
+              <a:lnSpc>
+                <a:spcPct val="115000"/>
+              </a:lnSpc>
+            </a:pPr>
+            <a:r>
+              <a:rPr sz="1200" b="0">
+                <a:solidFill>
+                  <a:srgbClr val="1A1A2E"/>
+                </a:solidFill>
+                <a:latin typeface="Microsoft JhengHei"/>
+              </a:rPr>
+              <a:t>中倉衛生紙還有嗎</a:t>
+            </a:r>
+          </a:p>
+        </p:txBody>
+      </p:sp>
+      <p:sp>
+        <p:nvSpPr>
+          <p:cNvPr id="23" name="TextBox 22"/>
+          <p:cNvSpPr txBox="1"/>
+          <p:nvPr/>
+        </p:nvSpPr>
+        <p:spPr>
+          <a:xfrm>
+            <a:off x="4288536" y="3442716"/>
+            <a:ext cx="3072384" cy="310896"/>
+          </a:xfrm>
+          <a:prstGeom prst="rect">
+            <a:avLst/>
+          </a:prstGeom>
+          <a:noFill/>
+        </p:spPr>
+        <p:txBody>
+          <a:bodyPr wrap="square" lIns="0" rIns="0" tIns="0" bIns="0" anchor="ctr">
+            <a:spAutoFit/>
+          </a:bodyPr>
+          <a:lstStyle/>
+          <a:p>
+            <a:pPr algn="l">
+              <a:lnSpc>
+                <a:spcPct val="115000"/>
+              </a:lnSpc>
+            </a:pPr>
+            <a:r>
+              <a:rPr sz="1200" b="0">
+                <a:solidFill>
+                  <a:srgbClr val="E85D5D"/>
+                </a:solidFill>
+                <a:latin typeface="Microsoft JhengHei"/>
+              </a:rPr>
+              <a:t>中餐衛生紙還有嗎</a:t>
+            </a:r>
+          </a:p>
+        </p:txBody>
+      </p:sp>
+      <p:sp>
+        <p:nvSpPr>
           <p:cNvPr id="24" name="TextBox 23"/>
           <p:cNvSpPr txBox="1"/>
           <p:nvPr/>
         </p:nvSpPr>
         <p:spPr>
           <a:xfrm>
-            <a:off x="7790687" y="1947672"/>
-            <a:ext cx="3474720" cy="329184"/>
-          </a:xfrm>
-          <a:prstGeom prst="rect">
-            <a:avLst/>
-          </a:prstGeom>
-          <a:noFill/>
-        </p:spPr>
-        <p:txBody>
-          <a:bodyPr wrap="square" lIns="0" rIns="0" tIns="0" bIns="0" anchor="t">
-            <a:spAutoFit/>
-          </a:bodyPr>
-          <a:lstStyle/>
-          <a:p>
-            <a:pPr algn="l">
-              <a:lnSpc>
-                <a:spcPct val="115000"/>
-              </a:lnSpc>
-            </a:pPr>
-            <a:r>
-              <a:rPr sz="1450" b="1">
-                <a:solidFill>
-                  <a:srgbClr val="00C49A"/>
-                </a:solidFill>
-                <a:latin typeface="Microsoft JhengHei"/>
-              </a:rPr>
-              <a:t>對策：人在迴路即容錯</a:t>
-            </a:r>
-          </a:p>
-        </p:txBody>
-      </p:sp>
-      <p:sp>
-        <p:nvSpPr>
-          <p:cNvPr id="25" name="Oval 24"/>
+            <a:off x="7763256" y="3442716"/>
+            <a:ext cx="3483864" cy="310896"/>
+          </a:xfrm>
+          <a:prstGeom prst="rect">
+            <a:avLst/>
+          </a:prstGeom>
+          <a:noFill/>
+        </p:spPr>
+        <p:txBody>
+          <a:bodyPr wrap="square" lIns="0" rIns="0" tIns="0" bIns="0" anchor="ctr">
+            <a:spAutoFit/>
+          </a:bodyPr>
+          <a:lstStyle/>
+          <a:p>
+            <a:pPr algn="l">
+              <a:lnSpc>
+                <a:spcPct val="115000"/>
+              </a:lnSpc>
+            </a:pPr>
+            <a:r>
+              <a:rPr sz="1200" b="1">
+                <a:solidFill>
+                  <a:srgbClr val="008E76"/>
+                </a:solidFill>
+                <a:latin typeface="Microsoft JhengHei"/>
+              </a:rPr>
+              <a:t>中餐→中倉</a:t>
+            </a:r>
+          </a:p>
+        </p:txBody>
+      </p:sp>
+      <p:sp>
+        <p:nvSpPr>
+          <p:cNvPr id="25" name="Rectangle 24"/>
           <p:cNvSpPr/>
           <p:nvPr/>
         </p:nvSpPr>
         <p:spPr>
           <a:xfrm>
-            <a:off x="7790687" y="2395728"/>
-            <a:ext cx="365760" cy="365760"/>
-          </a:xfrm>
-          <a:prstGeom prst="ellipse">
+            <a:off x="667512" y="3794760"/>
+            <a:ext cx="10853928" cy="397764"/>
+          </a:xfrm>
+          <a:prstGeom prst="rect">
             <a:avLst/>
           </a:prstGeom>
           <a:solidFill>
-            <a:srgbClr val="00C49A"/>
+            <a:srgbClr val="FFFFFF"/>
+          </a:solidFill>
+          <a:ln w="6350">
+            <a:solidFill>
+              <a:srgbClr val="E6E8EC"/>
+            </a:solidFill>
+          </a:ln>
+          <a:effectLst/>
+        </p:spPr>
+        <p:style>
+          <a:lnRef idx="1">
+            <a:schemeClr val="accent1"/>
+          </a:lnRef>
+          <a:fillRef idx="3">
+            <a:schemeClr val="accent1"/>
+          </a:fillRef>
+          <a:effectRef idx="2">
+            <a:schemeClr val="accent1"/>
+          </a:effectRef>
+          <a:fontRef idx="minor">
+            <a:schemeClr val="lt1"/>
+          </a:fontRef>
+        </p:style>
+        <p:txBody>
+          <a:bodyPr rtlCol="0" anchor="ctr"/>
+          <a:lstStyle/>
+          <a:p>
+            <a:pPr algn="ctr"/>
+          </a:p>
+        </p:txBody>
+      </p:sp>
+      <p:sp>
+        <p:nvSpPr>
+          <p:cNvPr id="26" name="TextBox 25"/>
+          <p:cNvSpPr txBox="1"/>
+          <p:nvPr/>
+        </p:nvSpPr>
+        <p:spPr>
+          <a:xfrm>
+            <a:off x="795528" y="3840480"/>
+            <a:ext cx="3163824" cy="310896"/>
+          </a:xfrm>
+          <a:prstGeom prst="rect">
+            <a:avLst/>
+          </a:prstGeom>
+          <a:noFill/>
+        </p:spPr>
+        <p:txBody>
+          <a:bodyPr wrap="square" lIns="0" rIns="0" tIns="0" bIns="0" anchor="ctr">
+            <a:spAutoFit/>
+          </a:bodyPr>
+          <a:lstStyle/>
+          <a:p>
+            <a:pPr algn="l">
+              <a:lnSpc>
+                <a:spcPct val="115000"/>
+              </a:lnSpc>
+            </a:pPr>
+            <a:r>
+              <a:rPr sz="1200" b="0">
+                <a:solidFill>
+                  <a:srgbClr val="1A1A2E"/>
+                </a:solidFill>
+                <a:latin typeface="Microsoft JhengHei"/>
+              </a:rPr>
+              <a:t>運動壓縮臂套庫存</a:t>
+            </a:r>
+          </a:p>
+        </p:txBody>
+      </p:sp>
+      <p:sp>
+        <p:nvSpPr>
+          <p:cNvPr id="27" name="TextBox 26"/>
+          <p:cNvSpPr txBox="1"/>
+          <p:nvPr/>
+        </p:nvSpPr>
+        <p:spPr>
+          <a:xfrm>
+            <a:off x="4288536" y="3840480"/>
+            <a:ext cx="3072384" cy="310896"/>
+          </a:xfrm>
+          <a:prstGeom prst="rect">
+            <a:avLst/>
+          </a:prstGeom>
+          <a:noFill/>
+        </p:spPr>
+        <p:txBody>
+          <a:bodyPr wrap="square" lIns="0" rIns="0" tIns="0" bIns="0" anchor="ctr">
+            <a:spAutoFit/>
+          </a:bodyPr>
+          <a:lstStyle/>
+          <a:p>
+            <a:pPr algn="l">
+              <a:lnSpc>
+                <a:spcPct val="115000"/>
+              </a:lnSpc>
+            </a:pPr>
+            <a:r>
+              <a:rPr sz="1200" b="0">
+                <a:solidFill>
+                  <a:srgbClr val="E85D5D"/>
+                </a:solidFill>
+                <a:latin typeface="Microsoft JhengHei"/>
+              </a:rPr>
+              <a:t>運動壓縮筆套庫存</a:t>
+            </a:r>
+          </a:p>
+        </p:txBody>
+      </p:sp>
+      <p:sp>
+        <p:nvSpPr>
+          <p:cNvPr id="28" name="TextBox 27"/>
+          <p:cNvSpPr txBox="1"/>
+          <p:nvPr/>
+        </p:nvSpPr>
+        <p:spPr>
+          <a:xfrm>
+            <a:off x="7763256" y="3840480"/>
+            <a:ext cx="3483864" cy="310896"/>
+          </a:xfrm>
+          <a:prstGeom prst="rect">
+            <a:avLst/>
+          </a:prstGeom>
+          <a:noFill/>
+        </p:spPr>
+        <p:txBody>
+          <a:bodyPr wrap="square" lIns="0" rIns="0" tIns="0" bIns="0" anchor="ctr">
+            <a:spAutoFit/>
+          </a:bodyPr>
+          <a:lstStyle/>
+          <a:p>
+            <a:pPr algn="l">
+              <a:lnSpc>
+                <a:spcPct val="115000"/>
+              </a:lnSpc>
+            </a:pPr>
+            <a:r>
+              <a:rPr sz="1200" b="1">
+                <a:solidFill>
+                  <a:srgbClr val="008E76"/>
+                </a:solidFill>
+                <a:latin typeface="Microsoft JhengHei"/>
+              </a:rPr>
+              <a:t>筆套→臂套</a:t>
+            </a:r>
+          </a:p>
+        </p:txBody>
+      </p:sp>
+      <p:sp>
+        <p:nvSpPr>
+          <p:cNvPr id="29" name="Rectangle 28"/>
+          <p:cNvSpPr/>
+          <p:nvPr/>
+        </p:nvSpPr>
+        <p:spPr>
+          <a:xfrm>
+            <a:off x="667512" y="4192524"/>
+            <a:ext cx="10853928" cy="397764"/>
+          </a:xfrm>
+          <a:prstGeom prst="rect">
+            <a:avLst/>
+          </a:prstGeom>
+          <a:solidFill>
+            <a:srgbClr val="F4F6F8"/>
+          </a:solidFill>
+          <a:ln w="6350">
+            <a:solidFill>
+              <a:srgbClr val="E6E8EC"/>
+            </a:solidFill>
+          </a:ln>
+          <a:effectLst/>
+        </p:spPr>
+        <p:style>
+          <a:lnRef idx="1">
+            <a:schemeClr val="accent1"/>
+          </a:lnRef>
+          <a:fillRef idx="3">
+            <a:schemeClr val="accent1"/>
+          </a:fillRef>
+          <a:effectRef idx="2">
+            <a:schemeClr val="accent1"/>
+          </a:effectRef>
+          <a:fontRef idx="minor">
+            <a:schemeClr val="lt1"/>
+          </a:fontRef>
+        </p:style>
+        <p:txBody>
+          <a:bodyPr rtlCol="0" anchor="ctr"/>
+          <a:lstStyle/>
+          <a:p>
+            <a:pPr algn="ctr"/>
+          </a:p>
+        </p:txBody>
+      </p:sp>
+      <p:sp>
+        <p:nvSpPr>
+          <p:cNvPr id="30" name="TextBox 29"/>
+          <p:cNvSpPr txBox="1"/>
+          <p:nvPr/>
+        </p:nvSpPr>
+        <p:spPr>
+          <a:xfrm>
+            <a:off x="795528" y="4238244"/>
+            <a:ext cx="3163824" cy="310896"/>
+          </a:xfrm>
+          <a:prstGeom prst="rect">
+            <a:avLst/>
+          </a:prstGeom>
+          <a:noFill/>
+        </p:spPr>
+        <p:txBody>
+          <a:bodyPr wrap="square" lIns="0" rIns="0" tIns="0" bIns="0" anchor="ctr">
+            <a:spAutoFit/>
+          </a:bodyPr>
+          <a:lstStyle/>
+          <a:p>
+            <a:pPr algn="l">
+              <a:lnSpc>
+                <a:spcPct val="115000"/>
+              </a:lnSpc>
+            </a:pPr>
+            <a:r>
+              <a:rPr sz="1200" b="0">
+                <a:solidFill>
+                  <a:srgbClr val="1A1A2E"/>
+                </a:solidFill>
+                <a:latin typeface="Microsoft JhengHei"/>
+              </a:rPr>
+              <a:t>精釀啤酒庫存</a:t>
+            </a:r>
+          </a:p>
+        </p:txBody>
+      </p:sp>
+      <p:sp>
+        <p:nvSpPr>
+          <p:cNvPr id="31" name="TextBox 30"/>
+          <p:cNvSpPr txBox="1"/>
+          <p:nvPr/>
+        </p:nvSpPr>
+        <p:spPr>
+          <a:xfrm>
+            <a:off x="4288536" y="4238244"/>
+            <a:ext cx="3072384" cy="310896"/>
+          </a:xfrm>
+          <a:prstGeom prst="rect">
+            <a:avLst/>
+          </a:prstGeom>
+          <a:noFill/>
+        </p:spPr>
+        <p:txBody>
+          <a:bodyPr wrap="square" lIns="0" rIns="0" tIns="0" bIns="0" anchor="ctr">
+            <a:spAutoFit/>
+          </a:bodyPr>
+          <a:lstStyle/>
+          <a:p>
+            <a:pPr algn="l">
+              <a:lnSpc>
+                <a:spcPct val="115000"/>
+              </a:lnSpc>
+            </a:pPr>
+            <a:r>
+              <a:rPr sz="1200" b="0">
+                <a:solidFill>
+                  <a:srgbClr val="E85D5D"/>
+                </a:solidFill>
+                <a:latin typeface="Microsoft JhengHei"/>
+              </a:rPr>
+              <a:t>儘量啤酒庫存</a:t>
+            </a:r>
+          </a:p>
+        </p:txBody>
+      </p:sp>
+      <p:sp>
+        <p:nvSpPr>
+          <p:cNvPr id="32" name="TextBox 31"/>
+          <p:cNvSpPr txBox="1"/>
+          <p:nvPr/>
+        </p:nvSpPr>
+        <p:spPr>
+          <a:xfrm>
+            <a:off x="7763256" y="4238244"/>
+            <a:ext cx="3483864" cy="310896"/>
+          </a:xfrm>
+          <a:prstGeom prst="rect">
+            <a:avLst/>
+          </a:prstGeom>
+          <a:noFill/>
+        </p:spPr>
+        <p:txBody>
+          <a:bodyPr wrap="square" lIns="0" rIns="0" tIns="0" bIns="0" anchor="ctr">
+            <a:spAutoFit/>
+          </a:bodyPr>
+          <a:lstStyle/>
+          <a:p>
+            <a:pPr algn="l">
+              <a:lnSpc>
+                <a:spcPct val="115000"/>
+              </a:lnSpc>
+            </a:pPr>
+            <a:r>
+              <a:rPr sz="1200" b="1">
+                <a:solidFill>
+                  <a:srgbClr val="008E76"/>
+                </a:solidFill>
+                <a:latin typeface="Microsoft JhengHei"/>
+              </a:rPr>
+              <a:t>儘量→精釀</a:t>
+            </a:r>
+          </a:p>
+        </p:txBody>
+      </p:sp>
+      <p:sp>
+        <p:nvSpPr>
+          <p:cNvPr id="33" name="Rectangle 32"/>
+          <p:cNvSpPr/>
+          <p:nvPr/>
+        </p:nvSpPr>
+        <p:spPr>
+          <a:xfrm>
+            <a:off x="667512" y="4590288"/>
+            <a:ext cx="10853928" cy="397764"/>
+          </a:xfrm>
+          <a:prstGeom prst="rect">
+            <a:avLst/>
+          </a:prstGeom>
+          <a:solidFill>
+            <a:srgbClr val="FFFFFF"/>
+          </a:solidFill>
+          <a:ln w="6350">
+            <a:solidFill>
+              <a:srgbClr val="E6E8EC"/>
+            </a:solidFill>
+          </a:ln>
+          <a:effectLst/>
+        </p:spPr>
+        <p:style>
+          <a:lnRef idx="1">
+            <a:schemeClr val="accent1"/>
+          </a:lnRef>
+          <a:fillRef idx="3">
+            <a:schemeClr val="accent1"/>
+          </a:fillRef>
+          <a:effectRef idx="2">
+            <a:schemeClr val="accent1"/>
+          </a:effectRef>
+          <a:fontRef idx="minor">
+            <a:schemeClr val="lt1"/>
+          </a:fontRef>
+        </p:style>
+        <p:txBody>
+          <a:bodyPr rtlCol="0" anchor="ctr"/>
+          <a:lstStyle/>
+          <a:p>
+            <a:pPr algn="ctr"/>
+          </a:p>
+        </p:txBody>
+      </p:sp>
+      <p:sp>
+        <p:nvSpPr>
+          <p:cNvPr id="34" name="TextBox 33"/>
+          <p:cNvSpPr txBox="1"/>
+          <p:nvPr/>
+        </p:nvSpPr>
+        <p:spPr>
+          <a:xfrm>
+            <a:off x="795528" y="4636008"/>
+            <a:ext cx="3163824" cy="310896"/>
+          </a:xfrm>
+          <a:prstGeom prst="rect">
+            <a:avLst/>
+          </a:prstGeom>
+          <a:noFill/>
+        </p:spPr>
+        <p:txBody>
+          <a:bodyPr wrap="square" lIns="0" rIns="0" tIns="0" bIns="0" anchor="ctr">
+            <a:spAutoFit/>
+          </a:bodyPr>
+          <a:lstStyle/>
+          <a:p>
+            <a:pPr algn="l">
+              <a:lnSpc>
+                <a:spcPct val="115000"/>
+              </a:lnSpc>
+            </a:pPr>
+            <a:r>
+              <a:rPr sz="1200" b="0">
+                <a:solidFill>
+                  <a:srgbClr val="1A1A2E"/>
+                </a:solidFill>
+                <a:latin typeface="Microsoft JhengHei"/>
+              </a:rPr>
+              <a:t>防蚊液庫存</a:t>
+            </a:r>
+          </a:p>
+        </p:txBody>
+      </p:sp>
+      <p:sp>
+        <p:nvSpPr>
+          <p:cNvPr id="35" name="TextBox 34"/>
+          <p:cNvSpPr txBox="1"/>
+          <p:nvPr/>
+        </p:nvSpPr>
+        <p:spPr>
+          <a:xfrm>
+            <a:off x="4288536" y="4636008"/>
+            <a:ext cx="3072384" cy="310896"/>
+          </a:xfrm>
+          <a:prstGeom prst="rect">
+            <a:avLst/>
+          </a:prstGeom>
+          <a:noFill/>
+        </p:spPr>
+        <p:txBody>
+          <a:bodyPr wrap="square" lIns="0" rIns="0" tIns="0" bIns="0" anchor="ctr">
+            <a:spAutoFit/>
+          </a:bodyPr>
+          <a:lstStyle/>
+          <a:p>
+            <a:pPr algn="l">
+              <a:lnSpc>
+                <a:spcPct val="115000"/>
+              </a:lnSpc>
+            </a:pPr>
+            <a:r>
+              <a:rPr sz="1200" b="0">
+                <a:solidFill>
+                  <a:srgbClr val="E85D5D"/>
+                </a:solidFill>
+                <a:latin typeface="Microsoft JhengHei"/>
+              </a:rPr>
+              <a:t>防蚊衣庫存</a:t>
+            </a:r>
+          </a:p>
+        </p:txBody>
+      </p:sp>
+      <p:sp>
+        <p:nvSpPr>
+          <p:cNvPr id="36" name="TextBox 35"/>
+          <p:cNvSpPr txBox="1"/>
+          <p:nvPr/>
+        </p:nvSpPr>
+        <p:spPr>
+          <a:xfrm>
+            <a:off x="7763256" y="4636008"/>
+            <a:ext cx="3483864" cy="310896"/>
+          </a:xfrm>
+          <a:prstGeom prst="rect">
+            <a:avLst/>
+          </a:prstGeom>
+          <a:noFill/>
+        </p:spPr>
+        <p:txBody>
+          <a:bodyPr wrap="square" lIns="0" rIns="0" tIns="0" bIns="0" anchor="ctr">
+            <a:spAutoFit/>
+          </a:bodyPr>
+          <a:lstStyle/>
+          <a:p>
+            <a:pPr algn="l">
+              <a:lnSpc>
+                <a:spcPct val="115000"/>
+              </a:lnSpc>
+            </a:pPr>
+            <a:r>
+              <a:rPr sz="1200" b="1">
+                <a:solidFill>
+                  <a:srgbClr val="008E76"/>
+                </a:solidFill>
+                <a:latin typeface="Microsoft JhengHei"/>
+              </a:rPr>
+              <a:t>防蚊衣→防蚊液</a:t>
+            </a:r>
+          </a:p>
+        </p:txBody>
+      </p:sp>
+      <p:sp>
+        <p:nvSpPr>
+          <p:cNvPr id="37" name="Rectangle 36"/>
+          <p:cNvSpPr/>
+          <p:nvPr/>
+        </p:nvSpPr>
+        <p:spPr>
+          <a:xfrm>
+            <a:off x="667512" y="4988052"/>
+            <a:ext cx="10853928" cy="397764"/>
+          </a:xfrm>
+          <a:prstGeom prst="rect">
+            <a:avLst/>
+          </a:prstGeom>
+          <a:solidFill>
+            <a:srgbClr val="F4F6F8"/>
+          </a:solidFill>
+          <a:ln w="6350">
+            <a:solidFill>
+              <a:srgbClr val="E6E8EC"/>
+            </a:solidFill>
+          </a:ln>
+          <a:effectLst/>
+        </p:spPr>
+        <p:style>
+          <a:lnRef idx="1">
+            <a:schemeClr val="accent1"/>
+          </a:lnRef>
+          <a:fillRef idx="3">
+            <a:schemeClr val="accent1"/>
+          </a:fillRef>
+          <a:effectRef idx="2">
+            <a:schemeClr val="accent1"/>
+          </a:effectRef>
+          <a:fontRef idx="minor">
+            <a:schemeClr val="lt1"/>
+          </a:fontRef>
+        </p:style>
+        <p:txBody>
+          <a:bodyPr rtlCol="0" anchor="ctr"/>
+          <a:lstStyle/>
+          <a:p>
+            <a:pPr algn="ctr"/>
+          </a:p>
+        </p:txBody>
+      </p:sp>
+      <p:sp>
+        <p:nvSpPr>
+          <p:cNvPr id="38" name="TextBox 37"/>
+          <p:cNvSpPr txBox="1"/>
+          <p:nvPr/>
+        </p:nvSpPr>
+        <p:spPr>
+          <a:xfrm>
+            <a:off x="795528" y="5033772"/>
+            <a:ext cx="3163824" cy="310896"/>
+          </a:xfrm>
+          <a:prstGeom prst="rect">
+            <a:avLst/>
+          </a:prstGeom>
+          <a:noFill/>
+        </p:spPr>
+        <p:txBody>
+          <a:bodyPr wrap="square" lIns="0" rIns="0" tIns="0" bIns="0" anchor="ctr">
+            <a:spAutoFit/>
+          </a:bodyPr>
+          <a:lstStyle/>
+          <a:p>
+            <a:pPr algn="l">
+              <a:lnSpc>
+                <a:spcPct val="115000"/>
+              </a:lnSpc>
+            </a:pPr>
+            <a:r>
+              <a:rPr sz="1200" b="0">
+                <a:solidFill>
+                  <a:srgbClr val="1A1A2E"/>
+                </a:solidFill>
+                <a:latin typeface="Microsoft JhengHei"/>
+              </a:rPr>
+              <a:t>衛生紙的帳對不上</a:t>
+            </a:r>
+          </a:p>
+        </p:txBody>
+      </p:sp>
+      <p:sp>
+        <p:nvSpPr>
+          <p:cNvPr id="39" name="TextBox 38"/>
+          <p:cNvSpPr txBox="1"/>
+          <p:nvPr/>
+        </p:nvSpPr>
+        <p:spPr>
+          <a:xfrm>
+            <a:off x="4288536" y="5033772"/>
+            <a:ext cx="3072384" cy="310896"/>
+          </a:xfrm>
+          <a:prstGeom prst="rect">
+            <a:avLst/>
+          </a:prstGeom>
+          <a:noFill/>
+        </p:spPr>
+        <p:txBody>
+          <a:bodyPr wrap="square" lIns="0" rIns="0" tIns="0" bIns="0" anchor="ctr">
+            <a:spAutoFit/>
+          </a:bodyPr>
+          <a:lstStyle/>
+          <a:p>
+            <a:pPr algn="l">
+              <a:lnSpc>
+                <a:spcPct val="115000"/>
+              </a:lnSpc>
+            </a:pPr>
+            <a:r>
+              <a:rPr sz="1200" b="0">
+                <a:solidFill>
+                  <a:srgbClr val="E85D5D"/>
+                </a:solidFill>
+                <a:latin typeface="Microsoft JhengHei"/>
+              </a:rPr>
+              <a:t>衛生紙的賬對不上</a:t>
+            </a:r>
+          </a:p>
+        </p:txBody>
+      </p:sp>
+      <p:sp>
+        <p:nvSpPr>
+          <p:cNvPr id="40" name="TextBox 39"/>
+          <p:cNvSpPr txBox="1"/>
+          <p:nvPr/>
+        </p:nvSpPr>
+        <p:spPr>
+          <a:xfrm>
+            <a:off x="7763256" y="5033772"/>
+            <a:ext cx="3483864" cy="310896"/>
+          </a:xfrm>
+          <a:prstGeom prst="rect">
+            <a:avLst/>
+          </a:prstGeom>
+          <a:noFill/>
+        </p:spPr>
+        <p:txBody>
+          <a:bodyPr wrap="square" lIns="0" rIns="0" tIns="0" bIns="0" anchor="ctr">
+            <a:spAutoFit/>
+          </a:bodyPr>
+          <a:lstStyle/>
+          <a:p>
+            <a:pPr algn="l">
+              <a:lnSpc>
+                <a:spcPct val="115000"/>
+              </a:lnSpc>
+            </a:pPr>
+            <a:r>
+              <a:rPr sz="1200" b="1">
+                <a:solidFill>
+                  <a:srgbClr val="008E76"/>
+                </a:solidFill>
+                <a:latin typeface="Microsoft JhengHei"/>
+              </a:rPr>
+              <a:t>賬→帳（異體字）</a:t>
+            </a:r>
+          </a:p>
+        </p:txBody>
+      </p:sp>
+      <p:sp>
+        <p:nvSpPr>
+          <p:cNvPr id="41" name="Rectangle 40"/>
+          <p:cNvSpPr/>
+          <p:nvPr/>
+        </p:nvSpPr>
+        <p:spPr>
+          <a:xfrm>
+            <a:off x="667512" y="5385816"/>
+            <a:ext cx="10853928" cy="397764"/>
+          </a:xfrm>
+          <a:prstGeom prst="rect">
+            <a:avLst/>
+          </a:prstGeom>
+          <a:solidFill>
+            <a:srgbClr val="FFFFFF"/>
+          </a:solidFill>
+          <a:ln w="6350">
+            <a:solidFill>
+              <a:srgbClr val="E6E8EC"/>
+            </a:solidFill>
+          </a:ln>
+          <a:effectLst/>
+        </p:spPr>
+        <p:style>
+          <a:lnRef idx="1">
+            <a:schemeClr val="accent1"/>
+          </a:lnRef>
+          <a:fillRef idx="3">
+            <a:schemeClr val="accent1"/>
+          </a:fillRef>
+          <a:effectRef idx="2">
+            <a:schemeClr val="accent1"/>
+          </a:effectRef>
+          <a:fontRef idx="minor">
+            <a:schemeClr val="lt1"/>
+          </a:fontRef>
+        </p:style>
+        <p:txBody>
+          <a:bodyPr rtlCol="0" anchor="ctr"/>
+          <a:lstStyle/>
+          <a:p>
+            <a:pPr algn="ctr"/>
+          </a:p>
+        </p:txBody>
+      </p:sp>
+      <p:sp>
+        <p:nvSpPr>
+          <p:cNvPr id="42" name="TextBox 41"/>
+          <p:cNvSpPr txBox="1"/>
+          <p:nvPr/>
+        </p:nvSpPr>
+        <p:spPr>
+          <a:xfrm>
+            <a:off x="795528" y="5431536"/>
+            <a:ext cx="3163824" cy="310896"/>
+          </a:xfrm>
+          <a:prstGeom prst="rect">
+            <a:avLst/>
+          </a:prstGeom>
+          <a:noFill/>
+        </p:spPr>
+        <p:txBody>
+          <a:bodyPr wrap="square" lIns="0" rIns="0" tIns="0" bIns="0" anchor="ctr">
+            <a:spAutoFit/>
+          </a:bodyPr>
+          <a:lstStyle/>
+          <a:p>
+            <a:pPr algn="l">
+              <a:lnSpc>
+                <a:spcPct val="115000"/>
+              </a:lnSpc>
+            </a:pPr>
+            <a:r>
+              <a:rPr sz="1200" b="0">
+                <a:solidFill>
+                  <a:srgbClr val="1A1A2E"/>
+                </a:solidFill>
+                <a:latin typeface="Microsoft JhengHei"/>
+              </a:rPr>
+              <a:t>南倉出十五個瑜珈墊</a:t>
+            </a:r>
+          </a:p>
+        </p:txBody>
+      </p:sp>
+      <p:sp>
+        <p:nvSpPr>
+          <p:cNvPr id="43" name="TextBox 42"/>
+          <p:cNvSpPr txBox="1"/>
+          <p:nvPr/>
+        </p:nvSpPr>
+        <p:spPr>
+          <a:xfrm>
+            <a:off x="4288536" y="5431536"/>
+            <a:ext cx="3072384" cy="310896"/>
+          </a:xfrm>
+          <a:prstGeom prst="rect">
+            <a:avLst/>
+          </a:prstGeom>
+          <a:noFill/>
+        </p:spPr>
+        <p:txBody>
+          <a:bodyPr wrap="square" lIns="0" rIns="0" tIns="0" bIns="0" anchor="ctr">
+            <a:spAutoFit/>
+          </a:bodyPr>
+          <a:lstStyle/>
+          <a:p>
+            <a:pPr algn="l">
+              <a:lnSpc>
+                <a:spcPct val="115000"/>
+              </a:lnSpc>
+            </a:pPr>
+            <a:r>
+              <a:rPr sz="1200" b="0">
+                <a:solidFill>
+                  <a:srgbClr val="E85D5D"/>
+                </a:solidFill>
+                <a:latin typeface="Microsoft JhengHei"/>
+              </a:rPr>
+              <a:t>南倉出十五個瑜伽墊</a:t>
+            </a:r>
+          </a:p>
+        </p:txBody>
+      </p:sp>
+      <p:sp>
+        <p:nvSpPr>
+          <p:cNvPr id="44" name="TextBox 43"/>
+          <p:cNvSpPr txBox="1"/>
+          <p:nvPr/>
+        </p:nvSpPr>
+        <p:spPr>
+          <a:xfrm>
+            <a:off x="7763256" y="5431536"/>
+            <a:ext cx="3483864" cy="310896"/>
+          </a:xfrm>
+          <a:prstGeom prst="rect">
+            <a:avLst/>
+          </a:prstGeom>
+          <a:noFill/>
+        </p:spPr>
+        <p:txBody>
+          <a:bodyPr wrap="square" lIns="0" rIns="0" tIns="0" bIns="0" anchor="ctr">
+            <a:spAutoFit/>
+          </a:bodyPr>
+          <a:lstStyle/>
+          <a:p>
+            <a:pPr algn="l">
+              <a:lnSpc>
+                <a:spcPct val="115000"/>
+              </a:lnSpc>
+            </a:pPr>
+            <a:r>
+              <a:rPr sz="1200" b="1">
+                <a:solidFill>
+                  <a:srgbClr val="008E76"/>
+                </a:solidFill>
+                <a:latin typeface="Microsoft JhengHei"/>
+              </a:rPr>
+              <a:t>瑜伽→瑜珈</a:t>
+            </a:r>
+          </a:p>
+        </p:txBody>
+      </p:sp>
+      <p:sp>
+        <p:nvSpPr>
+          <p:cNvPr id="45" name="Rounded Rectangle 44"/>
+          <p:cNvSpPr/>
+          <p:nvPr/>
+        </p:nvSpPr>
+        <p:spPr>
+          <a:xfrm>
+            <a:off x="667512" y="5943600"/>
+            <a:ext cx="10853928" cy="658368"/>
+          </a:xfrm>
+          <a:prstGeom prst="roundRect">
+            <a:avLst>
+              <a:gd name="adj" fmla="val 8000"/>
+            </a:avLst>
+          </a:prstGeom>
+          <a:solidFill>
+            <a:srgbClr val="E4F7F2"/>
           </a:solidFill>
           <a:ln>
             <a:noFill/>
@@ -23886,14 +24878,14 @@
       </p:sp>
       <p:sp>
         <p:nvSpPr>
-          <p:cNvPr id="26" name="TextBox 25"/>
-          <p:cNvSpPr txBox="1"/>
-          <p:nvPr/>
-        </p:nvSpPr>
-        <p:spPr>
-          <a:xfrm>
-            <a:off x="7790687" y="2382012"/>
-            <a:ext cx="365760" cy="365760"/>
+          <p:cNvPr id="46" name="TextBox 45"/>
+          <p:cNvSpPr txBox="1"/>
+          <p:nvPr/>
+        </p:nvSpPr>
+        <p:spPr>
+          <a:xfrm>
+            <a:off x="987552" y="6062472"/>
+            <a:ext cx="10241280" cy="438912"/>
           </a:xfrm>
           <a:prstGeom prst="rect">
             <a:avLst/>
@@ -23906,45 +24898,6 @@
           </a:bodyPr>
           <a:lstStyle/>
           <a:p>
-            <a:pPr algn="ctr">
-              <a:lnSpc>
-                <a:spcPct val="115000"/>
-              </a:lnSpc>
-            </a:pPr>
-            <a:r>
-              <a:rPr sz="1200" b="1">
-                <a:solidFill>
-                  <a:srgbClr val="1A1A2E"/>
-                </a:solidFill>
-                <a:latin typeface="Microsoft JhengHei"/>
-              </a:rPr>
-              <a:t>語</a:t>
-            </a:r>
-          </a:p>
-        </p:txBody>
-      </p:sp>
-      <p:sp>
-        <p:nvSpPr>
-          <p:cNvPr id="27" name="TextBox 26"/>
-          <p:cNvSpPr txBox="1"/>
-          <p:nvPr/>
-        </p:nvSpPr>
-        <p:spPr>
-          <a:xfrm>
-            <a:off x="8275319" y="2359152"/>
-            <a:ext cx="3108960" cy="292608"/>
-          </a:xfrm>
-          <a:prstGeom prst="rect">
-            <a:avLst/>
-          </a:prstGeom>
-          <a:noFill/>
-        </p:spPr>
-        <p:txBody>
-          <a:bodyPr wrap="square" lIns="0" rIns="0" tIns="0" bIns="0" anchor="t">
-            <a:spAutoFit/>
-          </a:bodyPr>
-          <a:lstStyle/>
-          <a:p>
             <a:pPr algn="l">
               <a:lnSpc>
                 <a:spcPct val="115000"/>
@@ -23953,579 +24906,36 @@
             <a:r>
               <a:rPr sz="1250" b="1">
                 <a:solidFill>
-                  <a:srgbClr val="FFFFFF"/>
-                </a:solidFill>
-                <a:latin typeface="Microsoft JhengHei"/>
-              </a:rPr>
-              <a:t>前端即時顯示辨識文字</a:t>
-            </a:r>
-          </a:p>
-        </p:txBody>
-      </p:sp>
-      <p:sp>
-        <p:nvSpPr>
-          <p:cNvPr id="28" name="TextBox 27"/>
-          <p:cNvSpPr txBox="1"/>
-          <p:nvPr/>
-        </p:nvSpPr>
-        <p:spPr>
-          <a:xfrm>
-            <a:off x="8275319" y="2633472"/>
-            <a:ext cx="3154680" cy="457200"/>
-          </a:xfrm>
-          <a:prstGeom prst="rect">
-            <a:avLst/>
-          </a:prstGeom>
-          <a:noFill/>
-        </p:spPr>
-        <p:txBody>
-          <a:bodyPr wrap="square" lIns="0" rIns="0" tIns="0" bIns="0" anchor="t">
-            <a:spAutoFit/>
-          </a:bodyPr>
-          <a:lstStyle/>
-          <a:p>
-            <a:pPr algn="l">
-              <a:lnSpc>
-                <a:spcPct val="110000"/>
-              </a:lnSpc>
-            </a:pPr>
-            <a:r>
-              <a:rPr sz="1100" b="0">
-                <a:solidFill>
-                  <a:srgbClr val="BBBBBB"/>
-                </a:solidFill>
-                <a:latin typeface="Microsoft JhengHei"/>
-              </a:rPr>
-              <a:t>訪客看到「女藥店」明顯不對，自然會重講一次</a:t>
-            </a:r>
-          </a:p>
-        </p:txBody>
-      </p:sp>
-      <p:sp>
-        <p:nvSpPr>
-          <p:cNvPr id="29" name="Oval 28"/>
-          <p:cNvSpPr/>
-          <p:nvPr/>
-        </p:nvSpPr>
-        <p:spPr>
-          <a:xfrm>
-            <a:off x="7790687" y="3172968"/>
-            <a:ext cx="365760" cy="365760"/>
-          </a:xfrm>
-          <a:prstGeom prst="ellipse">
-            <a:avLst/>
-          </a:prstGeom>
-          <a:solidFill>
-            <a:srgbClr val="00C49A"/>
-          </a:solidFill>
-          <a:ln>
-            <a:noFill/>
-          </a:ln>
-          <a:effectLst/>
-        </p:spPr>
-        <p:style>
-          <a:lnRef idx="1">
-            <a:schemeClr val="accent1"/>
-          </a:lnRef>
-          <a:fillRef idx="3">
-            <a:schemeClr val="accent1"/>
-          </a:fillRef>
-          <a:effectRef idx="2">
-            <a:schemeClr val="accent1"/>
-          </a:effectRef>
-          <a:fontRef idx="minor">
-            <a:schemeClr val="lt1"/>
-          </a:fontRef>
-        </p:style>
-        <p:txBody>
-          <a:bodyPr rtlCol="0" anchor="ctr"/>
-          <a:lstStyle/>
-          <a:p>
-            <a:pPr algn="ctr"/>
-          </a:p>
-        </p:txBody>
-      </p:sp>
-      <p:sp>
-        <p:nvSpPr>
-          <p:cNvPr id="30" name="TextBox 29"/>
-          <p:cNvSpPr txBox="1"/>
-          <p:nvPr/>
-        </p:nvSpPr>
-        <p:spPr>
-          <a:xfrm>
-            <a:off x="7790687" y="3159252"/>
-            <a:ext cx="365760" cy="365760"/>
-          </a:xfrm>
-          <a:prstGeom prst="rect">
-            <a:avLst/>
-          </a:prstGeom>
-          <a:noFill/>
-        </p:spPr>
-        <p:txBody>
-          <a:bodyPr wrap="square" lIns="0" rIns="0" tIns="0" bIns="0" anchor="ctr">
-            <a:spAutoFit/>
-          </a:bodyPr>
-          <a:lstStyle/>
-          <a:p>
-            <a:pPr algn="ctr">
-              <a:lnSpc>
-                <a:spcPct val="115000"/>
-              </a:lnSpc>
-            </a:pPr>
-            <a:r>
-              <a:rPr sz="1200" b="1">
-                <a:solidFill>
-                  <a:srgbClr val="1A1A2E"/>
-                </a:solidFill>
-                <a:latin typeface="Microsoft JhengHei"/>
-              </a:rPr>
-              <a:t>準</a:t>
-            </a:r>
-          </a:p>
-        </p:txBody>
-      </p:sp>
-      <p:sp>
-        <p:nvSpPr>
-          <p:cNvPr id="31" name="TextBox 30"/>
-          <p:cNvSpPr txBox="1"/>
-          <p:nvPr/>
-        </p:nvSpPr>
-        <p:spPr>
-          <a:xfrm>
-            <a:off x="8275319" y="3136392"/>
-            <a:ext cx="3108960" cy="292608"/>
-          </a:xfrm>
-          <a:prstGeom prst="rect">
-            <a:avLst/>
-          </a:prstGeom>
-          <a:noFill/>
-        </p:spPr>
-        <p:txBody>
-          <a:bodyPr wrap="square" lIns="0" rIns="0" tIns="0" bIns="0" anchor="t">
-            <a:spAutoFit/>
-          </a:bodyPr>
-          <a:lstStyle/>
-          <a:p>
-            <a:pPr algn="l">
-              <a:lnSpc>
-                <a:spcPct val="115000"/>
-              </a:lnSpc>
-            </a:pPr>
-            <a:r>
-              <a:rPr sz="1250" b="1">
-                <a:solidFill>
-                  <a:srgbClr val="FFFFFF"/>
-                </a:solidFill>
-                <a:latin typeface="Microsoft JhengHei"/>
-              </a:rPr>
-              <a:t>不硬編同音規則硬猜</a:t>
-            </a:r>
-          </a:p>
-        </p:txBody>
-      </p:sp>
-      <p:sp>
-        <p:nvSpPr>
-          <p:cNvPr id="32" name="TextBox 31"/>
-          <p:cNvSpPr txBox="1"/>
-          <p:nvPr/>
-        </p:nvSpPr>
-        <p:spPr>
-          <a:xfrm>
-            <a:off x="8275319" y="3410712"/>
-            <a:ext cx="3154680" cy="457200"/>
-          </a:xfrm>
-          <a:prstGeom prst="rect">
-            <a:avLst/>
-          </a:prstGeom>
-          <a:noFill/>
-        </p:spPr>
-        <p:txBody>
-          <a:bodyPr wrap="square" lIns="0" rIns="0" tIns="0" bIns="0" anchor="t">
-            <a:spAutoFit/>
-          </a:bodyPr>
-          <a:lstStyle/>
-          <a:p>
-            <a:pPr algn="l">
-              <a:lnSpc>
-                <a:spcPct val="110000"/>
-              </a:lnSpc>
-            </a:pPr>
-            <a:r>
-              <a:rPr sz="1100" b="0">
-                <a:solidFill>
-                  <a:srgbClr val="BBBBBB"/>
-                </a:solidFill>
-                <a:latin typeface="Microsoft JhengHei"/>
-              </a:rPr>
-              <a:t>亂編規則救個案，會誤傷別句、風險大於效益</a:t>
-            </a:r>
-          </a:p>
-        </p:txBody>
-      </p:sp>
-      <p:sp>
-        <p:nvSpPr>
-          <p:cNvPr id="33" name="Oval 32"/>
-          <p:cNvSpPr/>
-          <p:nvPr/>
-        </p:nvSpPr>
-        <p:spPr>
-          <a:xfrm>
-            <a:off x="7790687" y="3950208"/>
-            <a:ext cx="365760" cy="365760"/>
-          </a:xfrm>
-          <a:prstGeom prst="ellipse">
-            <a:avLst/>
-          </a:prstGeom>
-          <a:solidFill>
-            <a:srgbClr val="00C49A"/>
-          </a:solidFill>
-          <a:ln>
-            <a:noFill/>
-          </a:ln>
-          <a:effectLst/>
-        </p:spPr>
-        <p:style>
-          <a:lnRef idx="1">
-            <a:schemeClr val="accent1"/>
-          </a:lnRef>
-          <a:fillRef idx="3">
-            <a:schemeClr val="accent1"/>
-          </a:fillRef>
-          <a:effectRef idx="2">
-            <a:schemeClr val="accent1"/>
-          </a:effectRef>
-          <a:fontRef idx="minor">
-            <a:schemeClr val="lt1"/>
-          </a:fontRef>
-        </p:style>
-        <p:txBody>
-          <a:bodyPr rtlCol="0" anchor="ctr"/>
-          <a:lstStyle/>
-          <a:p>
-            <a:pPr algn="ctr"/>
-          </a:p>
-        </p:txBody>
-      </p:sp>
-      <p:sp>
-        <p:nvSpPr>
-          <p:cNvPr id="34" name="TextBox 33"/>
-          <p:cNvSpPr txBox="1"/>
-          <p:nvPr/>
-        </p:nvSpPr>
-        <p:spPr>
-          <a:xfrm>
-            <a:off x="7790687" y="3936492"/>
-            <a:ext cx="365760" cy="365760"/>
-          </a:xfrm>
-          <a:prstGeom prst="rect">
-            <a:avLst/>
-          </a:prstGeom>
-          <a:noFill/>
-        </p:spPr>
-        <p:txBody>
-          <a:bodyPr wrap="square" lIns="0" rIns="0" tIns="0" bIns="0" anchor="ctr">
-            <a:spAutoFit/>
-          </a:bodyPr>
-          <a:lstStyle/>
-          <a:p>
-            <a:pPr algn="ctr">
-              <a:lnSpc>
-                <a:spcPct val="115000"/>
-              </a:lnSpc>
-            </a:pPr>
-            <a:r>
-              <a:rPr sz="1200" b="1">
-                <a:solidFill>
-                  <a:srgbClr val="1A1A2E"/>
-                </a:solidFill>
-                <a:latin typeface="Microsoft JhengHei"/>
-              </a:rPr>
-              <a:t>🔊</a:t>
-            </a:r>
-          </a:p>
-        </p:txBody>
-      </p:sp>
-      <p:sp>
-        <p:nvSpPr>
-          <p:cNvPr id="35" name="TextBox 34"/>
-          <p:cNvSpPr txBox="1"/>
-          <p:nvPr/>
-        </p:nvSpPr>
-        <p:spPr>
-          <a:xfrm>
-            <a:off x="8275319" y="3913632"/>
-            <a:ext cx="3108960" cy="292608"/>
-          </a:xfrm>
-          <a:prstGeom prst="rect">
-            <a:avLst/>
-          </a:prstGeom>
-          <a:noFill/>
-        </p:spPr>
-        <p:txBody>
-          <a:bodyPr wrap="square" lIns="0" rIns="0" tIns="0" bIns="0" anchor="t">
-            <a:spAutoFit/>
-          </a:bodyPr>
-          <a:lstStyle/>
-          <a:p>
-            <a:pPr algn="l">
-              <a:lnSpc>
-                <a:spcPct val="115000"/>
-              </a:lnSpc>
-            </a:pPr>
-            <a:r>
-              <a:rPr sz="1250" b="1">
-                <a:solidFill>
-                  <a:srgbClr val="FFFFFF"/>
-                </a:solidFill>
-                <a:latin typeface="Microsoft JhengHei"/>
-              </a:rPr>
-              <a:t>音量才是主因</a:t>
-            </a:r>
-          </a:p>
-        </p:txBody>
-      </p:sp>
-      <p:sp>
-        <p:nvSpPr>
-          <p:cNvPr id="36" name="TextBox 35"/>
-          <p:cNvSpPr txBox="1"/>
-          <p:nvPr/>
-        </p:nvSpPr>
-        <p:spPr>
-          <a:xfrm>
-            <a:off x="8275319" y="4187952"/>
-            <a:ext cx="3154680" cy="457200"/>
-          </a:xfrm>
-          <a:prstGeom prst="rect">
-            <a:avLst/>
-          </a:prstGeom>
-          <a:noFill/>
-        </p:spPr>
-        <p:txBody>
-          <a:bodyPr wrap="square" lIns="0" rIns="0" tIns="0" bIns="0" anchor="t">
-            <a:spAutoFit/>
-          </a:bodyPr>
-          <a:lstStyle/>
-          <a:p>
-            <a:pPr algn="l">
-              <a:lnSpc>
-                <a:spcPct val="110000"/>
-              </a:lnSpc>
-            </a:pPr>
-            <a:r>
-              <a:rPr sz="1100" b="0">
-                <a:solidFill>
-                  <a:srgbClr val="BBBBBB"/>
-                </a:solidFill>
-                <a:latin typeface="Microsoft JhengHei"/>
-              </a:rPr>
-              <a:t>小聲時摩擦音 ㄕ/ㄘ 糊掉；展場大聲對麥＝多半消失</a:t>
-            </a:r>
-          </a:p>
-        </p:txBody>
-      </p:sp>
-      <p:sp>
-        <p:nvSpPr>
-          <p:cNvPr id="37" name="Oval 36"/>
-          <p:cNvSpPr/>
-          <p:nvPr/>
-        </p:nvSpPr>
-        <p:spPr>
-          <a:xfrm>
-            <a:off x="7790687" y="4727448"/>
-            <a:ext cx="365760" cy="365760"/>
-          </a:xfrm>
-          <a:prstGeom prst="ellipse">
-            <a:avLst/>
-          </a:prstGeom>
-          <a:solidFill>
-            <a:srgbClr val="00C49A"/>
-          </a:solidFill>
-          <a:ln>
-            <a:noFill/>
-          </a:ln>
-          <a:effectLst/>
-        </p:spPr>
-        <p:style>
-          <a:lnRef idx="1">
-            <a:schemeClr val="accent1"/>
-          </a:lnRef>
-          <a:fillRef idx="3">
-            <a:schemeClr val="accent1"/>
-          </a:fillRef>
-          <a:effectRef idx="2">
-            <a:schemeClr val="accent1"/>
-          </a:effectRef>
-          <a:fontRef idx="minor">
-            <a:schemeClr val="lt1"/>
-          </a:fontRef>
-        </p:style>
-        <p:txBody>
-          <a:bodyPr rtlCol="0" anchor="ctr"/>
-          <a:lstStyle/>
-          <a:p>
-            <a:pPr algn="ctr"/>
-          </a:p>
-        </p:txBody>
-      </p:sp>
-      <p:sp>
-        <p:nvSpPr>
-          <p:cNvPr id="38" name="TextBox 37"/>
-          <p:cNvSpPr txBox="1"/>
-          <p:nvPr/>
-        </p:nvSpPr>
-        <p:spPr>
-          <a:xfrm>
-            <a:off x="7790687" y="4713732"/>
-            <a:ext cx="365760" cy="365760"/>
-          </a:xfrm>
-          <a:prstGeom prst="rect">
-            <a:avLst/>
-          </a:prstGeom>
-          <a:noFill/>
-        </p:spPr>
-        <p:txBody>
-          <a:bodyPr wrap="square" lIns="0" rIns="0" tIns="0" bIns="0" anchor="ctr">
-            <a:spAutoFit/>
-          </a:bodyPr>
-          <a:lstStyle/>
-          <a:p>
-            <a:pPr algn="ctr">
-              <a:lnSpc>
-                <a:spcPct val="115000"/>
-              </a:lnSpc>
-            </a:pPr>
-            <a:r>
-              <a:rPr sz="1200" b="1">
-                <a:solidFill>
-                  <a:srgbClr val="1A1A2E"/>
-                </a:solidFill>
-                <a:latin typeface="Microsoft JhengHei"/>
-              </a:rPr>
-              <a:t>環</a:t>
-            </a:r>
-          </a:p>
-        </p:txBody>
-      </p:sp>
-      <p:sp>
-        <p:nvSpPr>
-          <p:cNvPr id="39" name="TextBox 38"/>
-          <p:cNvSpPr txBox="1"/>
-          <p:nvPr/>
-        </p:nvSpPr>
-        <p:spPr>
-          <a:xfrm>
-            <a:off x="8275319" y="4690872"/>
-            <a:ext cx="3108960" cy="292608"/>
-          </a:xfrm>
-          <a:prstGeom prst="rect">
-            <a:avLst/>
-          </a:prstGeom>
-          <a:noFill/>
-        </p:spPr>
-        <p:txBody>
-          <a:bodyPr wrap="square" lIns="0" rIns="0" tIns="0" bIns="0" anchor="t">
-            <a:spAutoFit/>
-          </a:bodyPr>
-          <a:lstStyle/>
-          <a:p>
-            <a:pPr algn="l">
-              <a:lnSpc>
-                <a:spcPct val="115000"/>
-              </a:lnSpc>
-            </a:pPr>
-            <a:r>
-              <a:rPr sz="1250" b="1">
-                <a:solidFill>
-                  <a:srgbClr val="FFFFFF"/>
-                </a:solidFill>
-                <a:latin typeface="Microsoft JhengHei"/>
-              </a:rPr>
-              <a:t>展後回饋閉環</a:t>
-            </a:r>
-          </a:p>
-        </p:txBody>
-      </p:sp>
-      <p:sp>
-        <p:nvSpPr>
-          <p:cNvPr id="40" name="TextBox 39"/>
-          <p:cNvSpPr txBox="1"/>
-          <p:nvPr/>
-        </p:nvSpPr>
-        <p:spPr>
-          <a:xfrm>
-            <a:off x="8275319" y="4965192"/>
-            <a:ext cx="3154680" cy="457200"/>
-          </a:xfrm>
-          <a:prstGeom prst="rect">
-            <a:avLst/>
-          </a:prstGeom>
-          <a:noFill/>
-        </p:spPr>
-        <p:txBody>
-          <a:bodyPr wrap="square" lIns="0" rIns="0" tIns="0" bIns="0" anchor="t">
-            <a:spAutoFit/>
-          </a:bodyPr>
-          <a:lstStyle/>
-          <a:p>
-            <a:pPr algn="l">
-              <a:lnSpc>
-                <a:spcPct val="110000"/>
-              </a:lnSpc>
-            </a:pPr>
-            <a:r>
-              <a:rPr sz="1100" b="0">
-                <a:solidFill>
-                  <a:srgbClr val="BBBBBB"/>
-                </a:solidFill>
-                <a:latin typeface="Microsoft JhengHei"/>
-              </a:rPr>
-              <a:t>展場問答入 journal，事後撈真實錯句補規則</a:t>
-            </a:r>
-          </a:p>
-        </p:txBody>
-      </p:sp>
-      <p:sp>
-        <p:nvSpPr>
-          <p:cNvPr id="41" name="TextBox 40"/>
-          <p:cNvSpPr txBox="1"/>
-          <p:nvPr/>
-        </p:nvSpPr>
-        <p:spPr>
-          <a:xfrm>
-            <a:off x="667512" y="5806440"/>
-            <a:ext cx="10789920" cy="548640"/>
-          </a:xfrm>
-          <a:prstGeom prst="rect">
-            <a:avLst/>
-          </a:prstGeom>
-          <a:noFill/>
-        </p:spPr>
-        <p:txBody>
-          <a:bodyPr wrap="square" lIns="0" rIns="0" tIns="0" bIns="0" anchor="t">
-            <a:spAutoFit/>
-          </a:bodyPr>
-          <a:lstStyle/>
-          <a:p>
-            <a:pPr algn="l">
-              <a:lnSpc>
-                <a:spcPct val="120000"/>
-              </a:lnSpc>
-            </a:pPr>
-            <a:r>
-              <a:rPr sz="1300" b="1">
-                <a:solidFill>
                   <a:srgbClr val="008E76"/>
                 </a:solidFill>
                 <a:latin typeface="Microsoft JhengHei"/>
               </a:rPr>
-              <a:t>分寸：容錯層只救「聽得出是同一個音」的錯——救得到的自動救、救不到的交給人重講，絕不亂猜幻覺出錯商品。</a:t>
-            </a:r>
-          </a:p>
-        </p:txBody>
-      </p:sp>
-      <p:sp>
-        <p:nvSpPr>
-          <p:cNvPr id="42" name="TextBox 41"/>
+              <a:t>為何拼音救得到：  </a:t>
+            </a:r>
+            <a:r>
+              <a:rPr sz="1200" b="0">
+                <a:solidFill>
+                  <a:srgbClr val="444444"/>
+                </a:solidFill>
+                <a:latin typeface="Arial"/>
+              </a:rPr>
+              <a:t>華數 huashu = 滑鼠 huashu（完全同音）｜藍雅爾基 lanyaerji = 藍牙耳機 lanyaerji｜到齊 daoqi = 到期 daoqi</a:t>
+            </a:r>
+            <a:r>
+              <a:rPr sz="1200" b="0">
+                <a:solidFill>
+                  <a:srgbClr val="444444"/>
+                </a:solidFill>
+                <a:latin typeface="Microsoft JhengHei"/>
+              </a:rPr>
+              <a:t>  → 字形零重疊、拼音一比即中</a:t>
+            </a:r>
+          </a:p>
+        </p:txBody>
+      </p:sp>
+      <p:sp>
+        <p:nvSpPr>
+          <p:cNvPr id="47" name="TextBox 46"/>
           <p:cNvSpPr txBox="1"/>
           <p:nvPr/>
         </p:nvSpPr>
@@ -24582,17 +24992,845 @@
       <p:grpSpPr/>
       <p:sp>
         <p:nvSpPr>
-          <p:cNvPr id="2" name="Rectangle 1"/>
+          <p:cNvPr id="2" name="TextBox 1"/>
+          <p:cNvSpPr txBox="1"/>
+          <p:nvPr/>
+        </p:nvSpPr>
+        <p:spPr>
+          <a:xfrm>
+            <a:off x="667512" y="310896"/>
+            <a:ext cx="10789920" cy="274320"/>
+          </a:xfrm>
+          <a:prstGeom prst="rect">
+            <a:avLst/>
+          </a:prstGeom>
+          <a:noFill/>
+        </p:spPr>
+        <p:txBody>
+          <a:bodyPr wrap="square" lIns="0" rIns="0" tIns="0" bIns="0" anchor="t">
+            <a:spAutoFit/>
+          </a:bodyPr>
+          <a:lstStyle/>
+          <a:p>
+            <a:pPr algn="l">
+              <a:lnSpc>
+                <a:spcPct val="115000"/>
+              </a:lnSpc>
+            </a:pPr>
+            <a:r>
+              <a:rPr sz="1250" b="1">
+                <a:solidFill>
+                  <a:srgbClr val="00C49A"/>
+                </a:solidFill>
+                <a:latin typeface="Arial"/>
+              </a:rPr>
+              <a:t>VOICE POC · 極限與對策</a:t>
+            </a:r>
+          </a:p>
+        </p:txBody>
+      </p:sp>
+      <p:sp>
+        <p:nvSpPr>
+          <p:cNvPr id="3" name="TextBox 2"/>
+          <p:cNvSpPr txBox="1"/>
+          <p:nvPr/>
+        </p:nvSpPr>
+        <p:spPr>
+          <a:xfrm>
+            <a:off x="667512" y="585216"/>
+            <a:ext cx="10789920" cy="566928"/>
+          </a:xfrm>
+          <a:prstGeom prst="rect">
+            <a:avLst/>
+          </a:prstGeom>
+          <a:noFill/>
+        </p:spPr>
+        <p:txBody>
+          <a:bodyPr wrap="square" lIns="0" rIns="0" tIns="0" bIns="0" anchor="t">
+            <a:spAutoFit/>
+          </a:bodyPr>
+          <a:lstStyle/>
+          <a:p>
+            <a:pPr algn="l">
+              <a:lnSpc>
+                <a:spcPct val="115000"/>
+              </a:lnSpc>
+            </a:pPr>
+            <a:r>
+              <a:rPr sz="2700" b="1">
+                <a:solidFill>
+                  <a:srgbClr val="1A1A2E"/>
+                </a:solidFill>
+                <a:latin typeface="Microsoft JhengHei"/>
+              </a:rPr>
+              <a:t>救不回的也照實講：270M 的天花板</a:t>
+            </a:r>
+          </a:p>
+        </p:txBody>
+      </p:sp>
+      <p:sp>
+        <p:nvSpPr>
+          <p:cNvPr id="4" name="TextBox 3"/>
+          <p:cNvSpPr txBox="1"/>
+          <p:nvPr/>
+        </p:nvSpPr>
+        <p:spPr>
+          <a:xfrm>
+            <a:off x="667512" y="1261872"/>
+            <a:ext cx="10789920" cy="365760"/>
+          </a:xfrm>
+          <a:prstGeom prst="rect">
+            <a:avLst/>
+          </a:prstGeom>
+          <a:noFill/>
+        </p:spPr>
+        <p:txBody>
+          <a:bodyPr wrap="square" lIns="0" rIns="0" tIns="0" bIns="0" anchor="t">
+            <a:spAutoFit/>
+          </a:bodyPr>
+          <a:lstStyle/>
+          <a:p>
+            <a:pPr algn="l">
+              <a:lnSpc>
+                <a:spcPct val="115000"/>
+              </a:lnSpc>
+            </a:pPr>
+            <a:r>
+              <a:rPr sz="1300" b="0">
+                <a:solidFill>
+                  <a:srgbClr val="555555"/>
+                </a:solidFill>
+                <a:latin typeface="Microsoft JhengHei"/>
+              </a:rPr>
+              <a:t>誠實區分：同音/音近能救；但 ASR 把整詞聽成毫不相干的詞（字形+發音都差），容錯層無能為力。</a:t>
+            </a:r>
+          </a:p>
+        </p:txBody>
+      </p:sp>
+      <p:sp>
+        <p:nvSpPr>
+          <p:cNvPr id="5" name="Rounded Rectangle 4"/>
           <p:cNvSpPr/>
           <p:nvPr/>
         </p:nvSpPr>
         <p:spPr>
           <a:xfrm>
-            <a:off x="0" y="0"/>
-            <a:ext cx="12188952" cy="6858000"/>
-          </a:xfrm>
-          <a:prstGeom prst="rect">
-            <a:avLst/>
+            <a:off x="667512" y="1783080"/>
+            <a:ext cx="6537960" cy="3794760"/>
+          </a:xfrm>
+          <a:prstGeom prst="roundRect">
+            <a:avLst>
+              <a:gd name="adj" fmla="val 8000"/>
+            </a:avLst>
+          </a:prstGeom>
+          <a:solidFill>
+            <a:srgbClr val="F4F6F8"/>
+          </a:solidFill>
+          <a:ln>
+            <a:noFill/>
+          </a:ln>
+          <a:effectLst/>
+        </p:spPr>
+        <p:style>
+          <a:lnRef idx="1">
+            <a:schemeClr val="accent1"/>
+          </a:lnRef>
+          <a:fillRef idx="3">
+            <a:schemeClr val="accent1"/>
+          </a:fillRef>
+          <a:effectRef idx="2">
+            <a:schemeClr val="accent1"/>
+          </a:effectRef>
+          <a:fontRef idx="minor">
+            <a:schemeClr val="lt1"/>
+          </a:fontRef>
+        </p:style>
+        <p:txBody>
+          <a:bodyPr rtlCol="0" anchor="ctr"/>
+          <a:lstStyle/>
+          <a:p>
+            <a:pPr algn="ctr"/>
+          </a:p>
+        </p:txBody>
+      </p:sp>
+      <p:sp>
+        <p:nvSpPr>
+          <p:cNvPr id="6" name="TextBox 5"/>
+          <p:cNvSpPr txBox="1"/>
+          <p:nvPr/>
+        </p:nvSpPr>
+        <p:spPr>
+          <a:xfrm>
+            <a:off x="941832" y="1947672"/>
+            <a:ext cx="6035040" cy="329184"/>
+          </a:xfrm>
+          <a:prstGeom prst="rect">
+            <a:avLst/>
+          </a:prstGeom>
+          <a:noFill/>
+        </p:spPr>
+        <p:txBody>
+          <a:bodyPr wrap="square" lIns="0" rIns="0" tIns="0" bIns="0" anchor="t">
+            <a:spAutoFit/>
+          </a:bodyPr>
+          <a:lstStyle/>
+          <a:p>
+            <a:pPr algn="l">
+              <a:lnSpc>
+                <a:spcPct val="115000"/>
+              </a:lnSpc>
+            </a:pPr>
+            <a:r>
+              <a:rPr sz="1450" b="1">
+                <a:solidFill>
+                  <a:srgbClr val="E85D5D"/>
+                </a:solidFill>
+                <a:latin typeface="Microsoft JhengHei"/>
+              </a:rPr>
+              <a:t>整詞崩壞 → 救不回（FAIL）</a:t>
+            </a:r>
+          </a:p>
+        </p:txBody>
+      </p:sp>
+      <p:sp>
+        <p:nvSpPr>
+          <p:cNvPr id="7" name="TextBox 6"/>
+          <p:cNvSpPr txBox="1"/>
+          <p:nvPr/>
+        </p:nvSpPr>
+        <p:spPr>
+          <a:xfrm>
+            <a:off x="941832" y="2377440"/>
+            <a:ext cx="2926080" cy="274320"/>
+          </a:xfrm>
+          <a:prstGeom prst="rect">
+            <a:avLst/>
+          </a:prstGeom>
+          <a:noFill/>
+        </p:spPr>
+        <p:txBody>
+          <a:bodyPr wrap="square" lIns="0" rIns="0" tIns="0" bIns="0" anchor="t">
+            <a:spAutoFit/>
+          </a:bodyPr>
+          <a:lstStyle/>
+          <a:p>
+            <a:pPr algn="l">
+              <a:lnSpc>
+                <a:spcPct val="115000"/>
+              </a:lnSpc>
+            </a:pPr>
+            <a:r>
+              <a:rPr sz="1100" b="1">
+                <a:solidFill>
+                  <a:srgbClr val="777777"/>
+                </a:solidFill>
+                <a:latin typeface="Microsoft JhengHei"/>
+              </a:rPr>
+              <a:t>原句</a:t>
+            </a:r>
+          </a:p>
+        </p:txBody>
+      </p:sp>
+      <p:sp>
+        <p:nvSpPr>
+          <p:cNvPr id="8" name="TextBox 7"/>
+          <p:cNvSpPr txBox="1"/>
+          <p:nvPr/>
+        </p:nvSpPr>
+        <p:spPr>
+          <a:xfrm>
+            <a:off x="4096512" y="2377440"/>
+            <a:ext cx="2926080" cy="274320"/>
+          </a:xfrm>
+          <a:prstGeom prst="rect">
+            <a:avLst/>
+          </a:prstGeom>
+          <a:noFill/>
+        </p:spPr>
+        <p:txBody>
+          <a:bodyPr wrap="square" lIns="0" rIns="0" tIns="0" bIns="0" anchor="t">
+            <a:spAutoFit/>
+          </a:bodyPr>
+          <a:lstStyle/>
+          <a:p>
+            <a:pPr algn="l">
+              <a:lnSpc>
+                <a:spcPct val="115000"/>
+              </a:lnSpc>
+            </a:pPr>
+            <a:r>
+              <a:rPr sz="1100" b="1">
+                <a:solidFill>
+                  <a:srgbClr val="777777"/>
+                </a:solidFill>
+                <a:latin typeface="Microsoft JhengHei"/>
+              </a:rPr>
+              <a:t>ASR 聽成</a:t>
+            </a:r>
+          </a:p>
+        </p:txBody>
+      </p:sp>
+      <p:sp>
+        <p:nvSpPr>
+          <p:cNvPr id="9" name="TextBox 8"/>
+          <p:cNvSpPr txBox="1"/>
+          <p:nvPr/>
+        </p:nvSpPr>
+        <p:spPr>
+          <a:xfrm>
+            <a:off x="941832" y="2670048"/>
+            <a:ext cx="3063240" cy="365760"/>
+          </a:xfrm>
+          <a:prstGeom prst="rect">
+            <a:avLst/>
+          </a:prstGeom>
+          <a:noFill/>
+        </p:spPr>
+        <p:txBody>
+          <a:bodyPr wrap="square" lIns="0" rIns="0" tIns="0" bIns="0" anchor="ctr">
+            <a:spAutoFit/>
+          </a:bodyPr>
+          <a:lstStyle/>
+          <a:p>
+            <a:pPr algn="l">
+              <a:lnSpc>
+                <a:spcPct val="115000"/>
+              </a:lnSpc>
+            </a:pPr>
+            <a:r>
+              <a:rPr sz="1200" b="0">
+                <a:solidFill>
+                  <a:srgbClr val="1A1A2E"/>
+                </a:solidFill>
+                <a:latin typeface="Microsoft JhengHei"/>
+              </a:rPr>
+              <a:t>瑜珈墊有貨嗎</a:t>
+            </a:r>
+          </a:p>
+        </p:txBody>
+      </p:sp>
+      <p:sp>
+        <p:nvSpPr>
+          <p:cNvPr id="10" name="TextBox 9"/>
+          <p:cNvSpPr txBox="1"/>
+          <p:nvPr/>
+        </p:nvSpPr>
+        <p:spPr>
+          <a:xfrm>
+            <a:off x="4096512" y="2670048"/>
+            <a:ext cx="2926080" cy="365760"/>
+          </a:xfrm>
+          <a:prstGeom prst="rect">
+            <a:avLst/>
+          </a:prstGeom>
+          <a:noFill/>
+        </p:spPr>
+        <p:txBody>
+          <a:bodyPr wrap="square" lIns="0" rIns="0" tIns="0" bIns="0" anchor="ctr">
+            <a:spAutoFit/>
+          </a:bodyPr>
+          <a:lstStyle/>
+          <a:p>
+            <a:pPr algn="l">
+              <a:lnSpc>
+                <a:spcPct val="115000"/>
+              </a:lnSpc>
+            </a:pPr>
+            <a:r>
+              <a:rPr sz="1200" b="0">
+                <a:solidFill>
+                  <a:srgbClr val="E85D5D"/>
+                </a:solidFill>
+                <a:latin typeface="Microsoft JhengHei"/>
+              </a:rPr>
+              <a:t>→ 女藥店有貨嗎</a:t>
+            </a:r>
+          </a:p>
+        </p:txBody>
+      </p:sp>
+      <p:sp>
+        <p:nvSpPr>
+          <p:cNvPr id="11" name="TextBox 10"/>
+          <p:cNvSpPr txBox="1"/>
+          <p:nvPr/>
+        </p:nvSpPr>
+        <p:spPr>
+          <a:xfrm>
+            <a:off x="941832" y="3104388"/>
+            <a:ext cx="3063240" cy="365760"/>
+          </a:xfrm>
+          <a:prstGeom prst="rect">
+            <a:avLst/>
+          </a:prstGeom>
+          <a:noFill/>
+        </p:spPr>
+        <p:txBody>
+          <a:bodyPr wrap="square" lIns="0" rIns="0" tIns="0" bIns="0" anchor="ctr">
+            <a:spAutoFit/>
+          </a:bodyPr>
+          <a:lstStyle/>
+          <a:p>
+            <a:pPr algn="l">
+              <a:lnSpc>
+                <a:spcPct val="115000"/>
+              </a:lnSpc>
+            </a:pPr>
+            <a:r>
+              <a:rPr sz="1200" b="0">
+                <a:solidFill>
+                  <a:srgbClr val="1A1A2E"/>
+                </a:solidFill>
+                <a:latin typeface="Microsoft JhengHei"/>
+              </a:rPr>
+              <a:t>露營帳篷有貨嗎</a:t>
+            </a:r>
+          </a:p>
+        </p:txBody>
+      </p:sp>
+      <p:sp>
+        <p:nvSpPr>
+          <p:cNvPr id="12" name="TextBox 11"/>
+          <p:cNvSpPr txBox="1"/>
+          <p:nvPr/>
+        </p:nvSpPr>
+        <p:spPr>
+          <a:xfrm>
+            <a:off x="4096512" y="3104388"/>
+            <a:ext cx="2926080" cy="365760"/>
+          </a:xfrm>
+          <a:prstGeom prst="rect">
+            <a:avLst/>
+          </a:prstGeom>
+          <a:noFill/>
+        </p:spPr>
+        <p:txBody>
+          <a:bodyPr wrap="square" lIns="0" rIns="0" tIns="0" bIns="0" anchor="ctr">
+            <a:spAutoFit/>
+          </a:bodyPr>
+          <a:lstStyle/>
+          <a:p>
+            <a:pPr algn="l">
+              <a:lnSpc>
+                <a:spcPct val="115000"/>
+              </a:lnSpc>
+            </a:pPr>
+            <a:r>
+              <a:rPr sz="1200" b="0">
+                <a:solidFill>
+                  <a:srgbClr val="E85D5D"/>
+                </a:solidFill>
+                <a:latin typeface="Microsoft JhengHei"/>
+              </a:rPr>
+              <a:t>→ 女人占房有好嗎</a:t>
+            </a:r>
+          </a:p>
+        </p:txBody>
+      </p:sp>
+      <p:sp>
+        <p:nvSpPr>
+          <p:cNvPr id="13" name="TextBox 12"/>
+          <p:cNvSpPr txBox="1"/>
+          <p:nvPr/>
+        </p:nvSpPr>
+        <p:spPr>
+          <a:xfrm>
+            <a:off x="941832" y="3538728"/>
+            <a:ext cx="3063240" cy="365760"/>
+          </a:xfrm>
+          <a:prstGeom prst="rect">
+            <a:avLst/>
+          </a:prstGeom>
+          <a:noFill/>
+        </p:spPr>
+        <p:txBody>
+          <a:bodyPr wrap="square" lIns="0" rIns="0" tIns="0" bIns="0" anchor="ctr">
+            <a:spAutoFit/>
+          </a:bodyPr>
+          <a:lstStyle/>
+          <a:p>
+            <a:pPr algn="l">
+              <a:lnSpc>
+                <a:spcPct val="115000"/>
+              </a:lnSpc>
+            </a:pPr>
+            <a:r>
+              <a:rPr sz="1200" b="0">
+                <a:solidFill>
+                  <a:srgbClr val="1A1A2E"/>
+                </a:solidFill>
+                <a:latin typeface="Microsoft JhengHei"/>
+              </a:rPr>
+              <a:t>北倉的滑鼠有多少</a:t>
+            </a:r>
+          </a:p>
+        </p:txBody>
+      </p:sp>
+      <p:sp>
+        <p:nvSpPr>
+          <p:cNvPr id="14" name="TextBox 13"/>
+          <p:cNvSpPr txBox="1"/>
+          <p:nvPr/>
+        </p:nvSpPr>
+        <p:spPr>
+          <a:xfrm>
+            <a:off x="4096512" y="3538728"/>
+            <a:ext cx="2926080" cy="365760"/>
+          </a:xfrm>
+          <a:prstGeom prst="rect">
+            <a:avLst/>
+          </a:prstGeom>
+          <a:noFill/>
+        </p:spPr>
+        <p:txBody>
+          <a:bodyPr wrap="square" lIns="0" rIns="0" tIns="0" bIns="0" anchor="ctr">
+            <a:spAutoFit/>
+          </a:bodyPr>
+          <a:lstStyle/>
+          <a:p>
+            <a:pPr algn="l">
+              <a:lnSpc>
+                <a:spcPct val="115000"/>
+              </a:lnSpc>
+            </a:pPr>
+            <a:r>
+              <a:rPr sz="1200" b="0">
+                <a:solidFill>
+                  <a:srgbClr val="E85D5D"/>
+                </a:solidFill>
+                <a:latin typeface="Microsoft JhengHei"/>
+              </a:rPr>
+              <a:t>→ 北倉的瓦數有多少</a:t>
+            </a:r>
+          </a:p>
+        </p:txBody>
+      </p:sp>
+      <p:sp>
+        <p:nvSpPr>
+          <p:cNvPr id="15" name="TextBox 14"/>
+          <p:cNvSpPr txBox="1"/>
+          <p:nvPr/>
+        </p:nvSpPr>
+        <p:spPr>
+          <a:xfrm>
+            <a:off x="941832" y="3973068"/>
+            <a:ext cx="3063240" cy="365760"/>
+          </a:xfrm>
+          <a:prstGeom prst="rect">
+            <a:avLst/>
+          </a:prstGeom>
+          <a:noFill/>
+        </p:spPr>
+        <p:txBody>
+          <a:bodyPr wrap="square" lIns="0" rIns="0" tIns="0" bIns="0" anchor="ctr">
+            <a:spAutoFit/>
+          </a:bodyPr>
+          <a:lstStyle/>
+          <a:p>
+            <a:pPr algn="l">
+              <a:lnSpc>
+                <a:spcPct val="115000"/>
+              </a:lnSpc>
+            </a:pPr>
+            <a:r>
+              <a:rPr sz="1200" b="0">
+                <a:solidFill>
+                  <a:srgbClr val="1A1A2E"/>
+                </a:solidFill>
+                <a:latin typeface="Microsoft JhengHei"/>
+              </a:rPr>
+              <a:t>有缺的列出來</a:t>
+            </a:r>
+          </a:p>
+        </p:txBody>
+      </p:sp>
+      <p:sp>
+        <p:nvSpPr>
+          <p:cNvPr id="16" name="TextBox 15"/>
+          <p:cNvSpPr txBox="1"/>
+          <p:nvPr/>
+        </p:nvSpPr>
+        <p:spPr>
+          <a:xfrm>
+            <a:off x="4096512" y="3973068"/>
+            <a:ext cx="2926080" cy="365760"/>
+          </a:xfrm>
+          <a:prstGeom prst="rect">
+            <a:avLst/>
+          </a:prstGeom>
+          <a:noFill/>
+        </p:spPr>
+        <p:txBody>
+          <a:bodyPr wrap="square" lIns="0" rIns="0" tIns="0" bIns="0" anchor="ctr">
+            <a:spAutoFit/>
+          </a:bodyPr>
+          <a:lstStyle/>
+          <a:p>
+            <a:pPr algn="l">
+              <a:lnSpc>
+                <a:spcPct val="115000"/>
+              </a:lnSpc>
+            </a:pPr>
+            <a:r>
+              <a:rPr sz="1200" b="0">
+                <a:solidFill>
+                  <a:srgbClr val="E85D5D"/>
+                </a:solidFill>
+                <a:latin typeface="Microsoft JhengHei"/>
+              </a:rPr>
+              <a:t>→ 有趣的列出來</a:t>
+            </a:r>
+          </a:p>
+        </p:txBody>
+      </p:sp>
+      <p:sp>
+        <p:nvSpPr>
+          <p:cNvPr id="17" name="TextBox 16"/>
+          <p:cNvSpPr txBox="1"/>
+          <p:nvPr/>
+        </p:nvSpPr>
+        <p:spPr>
+          <a:xfrm>
+            <a:off x="941832" y="4407408"/>
+            <a:ext cx="3063240" cy="365760"/>
+          </a:xfrm>
+          <a:prstGeom prst="rect">
+            <a:avLst/>
+          </a:prstGeom>
+          <a:noFill/>
+        </p:spPr>
+        <p:txBody>
+          <a:bodyPr wrap="square" lIns="0" rIns="0" tIns="0" bIns="0" anchor="ctr">
+            <a:spAutoFit/>
+          </a:bodyPr>
+          <a:lstStyle/>
+          <a:p>
+            <a:pPr algn="l">
+              <a:lnSpc>
+                <a:spcPct val="115000"/>
+              </a:lnSpc>
+            </a:pPr>
+            <a:r>
+              <a:rPr sz="1200" b="0">
+                <a:solidFill>
+                  <a:srgbClr val="1A1A2E"/>
+                </a:solidFill>
+                <a:latin typeface="Microsoft JhengHei"/>
+              </a:rPr>
+              <a:t>北倉進三十瓶防蚊液</a:t>
+            </a:r>
+          </a:p>
+        </p:txBody>
+      </p:sp>
+      <p:sp>
+        <p:nvSpPr>
+          <p:cNvPr id="18" name="TextBox 17"/>
+          <p:cNvSpPr txBox="1"/>
+          <p:nvPr/>
+        </p:nvSpPr>
+        <p:spPr>
+          <a:xfrm>
+            <a:off x="4096512" y="4407408"/>
+            <a:ext cx="2926080" cy="365760"/>
+          </a:xfrm>
+          <a:prstGeom prst="rect">
+            <a:avLst/>
+          </a:prstGeom>
+          <a:noFill/>
+        </p:spPr>
+        <p:txBody>
+          <a:bodyPr wrap="square" lIns="0" rIns="0" tIns="0" bIns="0" anchor="ctr">
+            <a:spAutoFit/>
+          </a:bodyPr>
+          <a:lstStyle/>
+          <a:p>
+            <a:pPr algn="l">
+              <a:lnSpc>
+                <a:spcPct val="115000"/>
+              </a:lnSpc>
+            </a:pPr>
+            <a:r>
+              <a:rPr sz="1200" b="0">
+                <a:solidFill>
+                  <a:srgbClr val="E85D5D"/>
+                </a:solidFill>
+                <a:latin typeface="Microsoft JhengHei"/>
+              </a:rPr>
+              <a:t>→ …近三十品防瘟疫</a:t>
+            </a:r>
+          </a:p>
+        </p:txBody>
+      </p:sp>
+      <p:sp>
+        <p:nvSpPr>
+          <p:cNvPr id="19" name="TextBox 18"/>
+          <p:cNvSpPr txBox="1"/>
+          <p:nvPr/>
+        </p:nvSpPr>
+        <p:spPr>
+          <a:xfrm>
+            <a:off x="941832" y="4841748"/>
+            <a:ext cx="3063240" cy="365760"/>
+          </a:xfrm>
+          <a:prstGeom prst="rect">
+            <a:avLst/>
+          </a:prstGeom>
+          <a:noFill/>
+        </p:spPr>
+        <p:txBody>
+          <a:bodyPr wrap="square" lIns="0" rIns="0" tIns="0" bIns="0" anchor="ctr">
+            <a:spAutoFit/>
+          </a:bodyPr>
+          <a:lstStyle/>
+          <a:p>
+            <a:pPr algn="l">
+              <a:lnSpc>
+                <a:spcPct val="115000"/>
+              </a:lnSpc>
+            </a:pPr>
+            <a:r>
+              <a:rPr sz="1200" b="0">
+                <a:solidFill>
+                  <a:srgbClr val="1A1A2E"/>
+                </a:solidFill>
+                <a:latin typeface="Microsoft JhengHei"/>
+              </a:rPr>
+              <a:t>南倉收了三十個啤酒</a:t>
+            </a:r>
+          </a:p>
+        </p:txBody>
+      </p:sp>
+      <p:sp>
+        <p:nvSpPr>
+          <p:cNvPr id="20" name="TextBox 19"/>
+          <p:cNvSpPr txBox="1"/>
+          <p:nvPr/>
+        </p:nvSpPr>
+        <p:spPr>
+          <a:xfrm>
+            <a:off x="4096512" y="4841748"/>
+            <a:ext cx="2926080" cy="365760"/>
+          </a:xfrm>
+          <a:prstGeom prst="rect">
+            <a:avLst/>
+          </a:prstGeom>
+          <a:noFill/>
+        </p:spPr>
+        <p:txBody>
+          <a:bodyPr wrap="square" lIns="0" rIns="0" tIns="0" bIns="0" anchor="ctr">
+            <a:spAutoFit/>
+          </a:bodyPr>
+          <a:lstStyle/>
+          <a:p>
+            <a:pPr algn="l">
+              <a:lnSpc>
+                <a:spcPct val="115000"/>
+              </a:lnSpc>
+            </a:pPr>
+            <a:r>
+              <a:rPr sz="1200" b="0">
+                <a:solidFill>
+                  <a:srgbClr val="E85D5D"/>
+                </a:solidFill>
+                <a:latin typeface="Microsoft JhengHei"/>
+              </a:rPr>
+              <a:t>→ …收了三十個皮</a:t>
+            </a:r>
+          </a:p>
+        </p:txBody>
+      </p:sp>
+      <p:sp>
+        <p:nvSpPr>
+          <p:cNvPr id="21" name="TextBox 20"/>
+          <p:cNvSpPr txBox="1"/>
+          <p:nvPr/>
+        </p:nvSpPr>
+        <p:spPr>
+          <a:xfrm>
+            <a:off x="941832" y="5276088"/>
+            <a:ext cx="3063240" cy="365760"/>
+          </a:xfrm>
+          <a:prstGeom prst="rect">
+            <a:avLst/>
+          </a:prstGeom>
+          <a:noFill/>
+        </p:spPr>
+        <p:txBody>
+          <a:bodyPr wrap="square" lIns="0" rIns="0" tIns="0" bIns="0" anchor="ctr">
+            <a:spAutoFit/>
+          </a:bodyPr>
+          <a:lstStyle/>
+          <a:p>
+            <a:pPr algn="l">
+              <a:lnSpc>
+                <a:spcPct val="115000"/>
+              </a:lnSpc>
+            </a:pPr>
+            <a:r>
+              <a:rPr sz="1200" b="0">
+                <a:solidFill>
+                  <a:srgbClr val="1A1A2E"/>
+                </a:solidFill>
+                <a:latin typeface="Microsoft JhengHei"/>
+              </a:rPr>
+              <a:t>啞鈴庫存</a:t>
+            </a:r>
+          </a:p>
+        </p:txBody>
+      </p:sp>
+      <p:sp>
+        <p:nvSpPr>
+          <p:cNvPr id="22" name="TextBox 21"/>
+          <p:cNvSpPr txBox="1"/>
+          <p:nvPr/>
+        </p:nvSpPr>
+        <p:spPr>
+          <a:xfrm>
+            <a:off x="4096512" y="5276088"/>
+            <a:ext cx="2926080" cy="365760"/>
+          </a:xfrm>
+          <a:prstGeom prst="rect">
+            <a:avLst/>
+          </a:prstGeom>
+          <a:noFill/>
+        </p:spPr>
+        <p:txBody>
+          <a:bodyPr wrap="square" lIns="0" rIns="0" tIns="0" bIns="0" anchor="ctr">
+            <a:spAutoFit/>
+          </a:bodyPr>
+          <a:lstStyle/>
+          <a:p>
+            <a:pPr algn="l">
+              <a:lnSpc>
+                <a:spcPct val="115000"/>
+              </a:lnSpc>
+            </a:pPr>
+            <a:r>
+              <a:rPr sz="1200" b="0">
+                <a:solidFill>
+                  <a:srgbClr val="E85D5D"/>
+                </a:solidFill>
+                <a:latin typeface="Microsoft JhengHei"/>
+              </a:rPr>
+              <a:t>→ 10 庫存</a:t>
+            </a:r>
+          </a:p>
+        </p:txBody>
+      </p:sp>
+      <p:sp>
+        <p:nvSpPr>
+          <p:cNvPr id="23" name="Rounded Rectangle 22"/>
+          <p:cNvSpPr/>
+          <p:nvPr/>
+        </p:nvSpPr>
+        <p:spPr>
+          <a:xfrm>
+            <a:off x="7498079" y="1783080"/>
+            <a:ext cx="4023360" cy="3794760"/>
+          </a:xfrm>
+          <a:prstGeom prst="roundRect">
+            <a:avLst>
+              <a:gd name="adj" fmla="val 8000"/>
+            </a:avLst>
           </a:prstGeom>
           <a:solidFill>
             <a:srgbClr val="1A1A2E"/>
@@ -24626,16 +25864,55 @@
       </p:sp>
       <p:sp>
         <p:nvSpPr>
-          <p:cNvPr id="3" name="Rectangle 2"/>
+          <p:cNvPr id="24" name="TextBox 23"/>
+          <p:cNvSpPr txBox="1"/>
+          <p:nvPr/>
+        </p:nvSpPr>
+        <p:spPr>
+          <a:xfrm>
+            <a:off x="7790687" y="1947672"/>
+            <a:ext cx="3474720" cy="329184"/>
+          </a:xfrm>
+          <a:prstGeom prst="rect">
+            <a:avLst/>
+          </a:prstGeom>
+          <a:noFill/>
+        </p:spPr>
+        <p:txBody>
+          <a:bodyPr wrap="square" lIns="0" rIns="0" tIns="0" bIns="0" anchor="t">
+            <a:spAutoFit/>
+          </a:bodyPr>
+          <a:lstStyle/>
+          <a:p>
+            <a:pPr algn="l">
+              <a:lnSpc>
+                <a:spcPct val="115000"/>
+              </a:lnSpc>
+            </a:pPr>
+            <a:r>
+              <a:rPr sz="1450" b="1">
+                <a:solidFill>
+                  <a:srgbClr val="00C49A"/>
+                </a:solidFill>
+                <a:latin typeface="Microsoft JhengHei"/>
+              </a:rPr>
+              <a:t>對策：人在迴路即容錯</a:t>
+            </a:r>
+          </a:p>
+        </p:txBody>
+      </p:sp>
+      <p:sp>
+        <p:nvSpPr>
+          <p:cNvPr id="25" name="Oval 24"/>
           <p:cNvSpPr/>
           <p:nvPr/>
         </p:nvSpPr>
         <p:spPr>
           <a:xfrm>
-            <a:off x="0" y="0"/>
-            <a:ext cx="12188952" cy="128016"/>
-          </a:xfrm>
-          <a:prstGeom prst="rect">
+            <a:off x="7790687" y="2395728"/>
+            <a:ext cx="365760" cy="365760"/>
+          </a:xfrm>
+          <a:prstGeom prst="ellipse">
             <a:avLst/>
           </a:prstGeom>
           <a:solidFill>
@@ -24670,6 +25947,790 @@
       </p:sp>
       <p:sp>
         <p:nvSpPr>
+          <p:cNvPr id="26" name="TextBox 25"/>
+          <p:cNvSpPr txBox="1"/>
+          <p:nvPr/>
+        </p:nvSpPr>
+        <p:spPr>
+          <a:xfrm>
+            <a:off x="7790687" y="2382012"/>
+            <a:ext cx="365760" cy="365760"/>
+          </a:xfrm>
+          <a:prstGeom prst="rect">
+            <a:avLst/>
+          </a:prstGeom>
+          <a:noFill/>
+        </p:spPr>
+        <p:txBody>
+          <a:bodyPr wrap="square" lIns="0" rIns="0" tIns="0" bIns="0" anchor="ctr">
+            <a:spAutoFit/>
+          </a:bodyPr>
+          <a:lstStyle/>
+          <a:p>
+            <a:pPr algn="ctr">
+              <a:lnSpc>
+                <a:spcPct val="115000"/>
+              </a:lnSpc>
+            </a:pPr>
+            <a:r>
+              <a:rPr sz="1200" b="1">
+                <a:solidFill>
+                  <a:srgbClr val="1A1A2E"/>
+                </a:solidFill>
+                <a:latin typeface="Microsoft JhengHei"/>
+              </a:rPr>
+              <a:t>語</a:t>
+            </a:r>
+          </a:p>
+        </p:txBody>
+      </p:sp>
+      <p:sp>
+        <p:nvSpPr>
+          <p:cNvPr id="27" name="TextBox 26"/>
+          <p:cNvSpPr txBox="1"/>
+          <p:nvPr/>
+        </p:nvSpPr>
+        <p:spPr>
+          <a:xfrm>
+            <a:off x="8275319" y="2359152"/>
+            <a:ext cx="3108960" cy="292608"/>
+          </a:xfrm>
+          <a:prstGeom prst="rect">
+            <a:avLst/>
+          </a:prstGeom>
+          <a:noFill/>
+        </p:spPr>
+        <p:txBody>
+          <a:bodyPr wrap="square" lIns="0" rIns="0" tIns="0" bIns="0" anchor="t">
+            <a:spAutoFit/>
+          </a:bodyPr>
+          <a:lstStyle/>
+          <a:p>
+            <a:pPr algn="l">
+              <a:lnSpc>
+                <a:spcPct val="115000"/>
+              </a:lnSpc>
+            </a:pPr>
+            <a:r>
+              <a:rPr sz="1250" b="1">
+                <a:solidFill>
+                  <a:srgbClr val="FFFFFF"/>
+                </a:solidFill>
+                <a:latin typeface="Microsoft JhengHei"/>
+              </a:rPr>
+              <a:t>前端即時顯示辨識文字</a:t>
+            </a:r>
+          </a:p>
+        </p:txBody>
+      </p:sp>
+      <p:sp>
+        <p:nvSpPr>
+          <p:cNvPr id="28" name="TextBox 27"/>
+          <p:cNvSpPr txBox="1"/>
+          <p:nvPr/>
+        </p:nvSpPr>
+        <p:spPr>
+          <a:xfrm>
+            <a:off x="8275319" y="2633472"/>
+            <a:ext cx="3154680" cy="457200"/>
+          </a:xfrm>
+          <a:prstGeom prst="rect">
+            <a:avLst/>
+          </a:prstGeom>
+          <a:noFill/>
+        </p:spPr>
+        <p:txBody>
+          <a:bodyPr wrap="square" lIns="0" rIns="0" tIns="0" bIns="0" anchor="t">
+            <a:spAutoFit/>
+          </a:bodyPr>
+          <a:lstStyle/>
+          <a:p>
+            <a:pPr algn="l">
+              <a:lnSpc>
+                <a:spcPct val="110000"/>
+              </a:lnSpc>
+            </a:pPr>
+            <a:r>
+              <a:rPr sz="1100" b="0">
+                <a:solidFill>
+                  <a:srgbClr val="BBBBBB"/>
+                </a:solidFill>
+                <a:latin typeface="Microsoft JhengHei"/>
+              </a:rPr>
+              <a:t>訪客看到「女藥店」明顯不對，自然會重講一次</a:t>
+            </a:r>
+          </a:p>
+        </p:txBody>
+      </p:sp>
+      <p:sp>
+        <p:nvSpPr>
+          <p:cNvPr id="29" name="Oval 28"/>
+          <p:cNvSpPr/>
+          <p:nvPr/>
+        </p:nvSpPr>
+        <p:spPr>
+          <a:xfrm>
+            <a:off x="7790687" y="3172968"/>
+            <a:ext cx="365760" cy="365760"/>
+          </a:xfrm>
+          <a:prstGeom prst="ellipse">
+            <a:avLst/>
+          </a:prstGeom>
+          <a:solidFill>
+            <a:srgbClr val="00C49A"/>
+          </a:solidFill>
+          <a:ln>
+            <a:noFill/>
+          </a:ln>
+          <a:effectLst/>
+        </p:spPr>
+        <p:style>
+          <a:lnRef idx="1">
+            <a:schemeClr val="accent1"/>
+          </a:lnRef>
+          <a:fillRef idx="3">
+            <a:schemeClr val="accent1"/>
+          </a:fillRef>
+          <a:effectRef idx="2">
+            <a:schemeClr val="accent1"/>
+          </a:effectRef>
+          <a:fontRef idx="minor">
+            <a:schemeClr val="lt1"/>
+          </a:fontRef>
+        </p:style>
+        <p:txBody>
+          <a:bodyPr rtlCol="0" anchor="ctr"/>
+          <a:lstStyle/>
+          <a:p>
+            <a:pPr algn="ctr"/>
+          </a:p>
+        </p:txBody>
+      </p:sp>
+      <p:sp>
+        <p:nvSpPr>
+          <p:cNvPr id="30" name="TextBox 29"/>
+          <p:cNvSpPr txBox="1"/>
+          <p:nvPr/>
+        </p:nvSpPr>
+        <p:spPr>
+          <a:xfrm>
+            <a:off x="7790687" y="3159252"/>
+            <a:ext cx="365760" cy="365760"/>
+          </a:xfrm>
+          <a:prstGeom prst="rect">
+            <a:avLst/>
+          </a:prstGeom>
+          <a:noFill/>
+        </p:spPr>
+        <p:txBody>
+          <a:bodyPr wrap="square" lIns="0" rIns="0" tIns="0" bIns="0" anchor="ctr">
+            <a:spAutoFit/>
+          </a:bodyPr>
+          <a:lstStyle/>
+          <a:p>
+            <a:pPr algn="ctr">
+              <a:lnSpc>
+                <a:spcPct val="115000"/>
+              </a:lnSpc>
+            </a:pPr>
+            <a:r>
+              <a:rPr sz="1200" b="1">
+                <a:solidFill>
+                  <a:srgbClr val="1A1A2E"/>
+                </a:solidFill>
+                <a:latin typeface="Microsoft JhengHei"/>
+              </a:rPr>
+              <a:t>準</a:t>
+            </a:r>
+          </a:p>
+        </p:txBody>
+      </p:sp>
+      <p:sp>
+        <p:nvSpPr>
+          <p:cNvPr id="31" name="TextBox 30"/>
+          <p:cNvSpPr txBox="1"/>
+          <p:nvPr/>
+        </p:nvSpPr>
+        <p:spPr>
+          <a:xfrm>
+            <a:off x="8275319" y="3136392"/>
+            <a:ext cx="3108960" cy="292608"/>
+          </a:xfrm>
+          <a:prstGeom prst="rect">
+            <a:avLst/>
+          </a:prstGeom>
+          <a:noFill/>
+        </p:spPr>
+        <p:txBody>
+          <a:bodyPr wrap="square" lIns="0" rIns="0" tIns="0" bIns="0" anchor="t">
+            <a:spAutoFit/>
+          </a:bodyPr>
+          <a:lstStyle/>
+          <a:p>
+            <a:pPr algn="l">
+              <a:lnSpc>
+                <a:spcPct val="115000"/>
+              </a:lnSpc>
+            </a:pPr>
+            <a:r>
+              <a:rPr sz="1250" b="1">
+                <a:solidFill>
+                  <a:srgbClr val="FFFFFF"/>
+                </a:solidFill>
+                <a:latin typeface="Microsoft JhengHei"/>
+              </a:rPr>
+              <a:t>不硬編同音規則硬猜</a:t>
+            </a:r>
+          </a:p>
+        </p:txBody>
+      </p:sp>
+      <p:sp>
+        <p:nvSpPr>
+          <p:cNvPr id="32" name="TextBox 31"/>
+          <p:cNvSpPr txBox="1"/>
+          <p:nvPr/>
+        </p:nvSpPr>
+        <p:spPr>
+          <a:xfrm>
+            <a:off x="8275319" y="3410712"/>
+            <a:ext cx="3154680" cy="457200"/>
+          </a:xfrm>
+          <a:prstGeom prst="rect">
+            <a:avLst/>
+          </a:prstGeom>
+          <a:noFill/>
+        </p:spPr>
+        <p:txBody>
+          <a:bodyPr wrap="square" lIns="0" rIns="0" tIns="0" bIns="0" anchor="t">
+            <a:spAutoFit/>
+          </a:bodyPr>
+          <a:lstStyle/>
+          <a:p>
+            <a:pPr algn="l">
+              <a:lnSpc>
+                <a:spcPct val="110000"/>
+              </a:lnSpc>
+            </a:pPr>
+            <a:r>
+              <a:rPr sz="1100" b="0">
+                <a:solidFill>
+                  <a:srgbClr val="BBBBBB"/>
+                </a:solidFill>
+                <a:latin typeface="Microsoft JhengHei"/>
+              </a:rPr>
+              <a:t>亂編規則救個案，會誤傷別句、風險大於效益</a:t>
+            </a:r>
+          </a:p>
+        </p:txBody>
+      </p:sp>
+      <p:sp>
+        <p:nvSpPr>
+          <p:cNvPr id="33" name="Oval 32"/>
+          <p:cNvSpPr/>
+          <p:nvPr/>
+        </p:nvSpPr>
+        <p:spPr>
+          <a:xfrm>
+            <a:off x="7790687" y="3950208"/>
+            <a:ext cx="365760" cy="365760"/>
+          </a:xfrm>
+          <a:prstGeom prst="ellipse">
+            <a:avLst/>
+          </a:prstGeom>
+          <a:solidFill>
+            <a:srgbClr val="00C49A"/>
+          </a:solidFill>
+          <a:ln>
+            <a:noFill/>
+          </a:ln>
+          <a:effectLst/>
+        </p:spPr>
+        <p:style>
+          <a:lnRef idx="1">
+            <a:schemeClr val="accent1"/>
+          </a:lnRef>
+          <a:fillRef idx="3">
+            <a:schemeClr val="accent1"/>
+          </a:fillRef>
+          <a:effectRef idx="2">
+            <a:schemeClr val="accent1"/>
+          </a:effectRef>
+          <a:fontRef idx="minor">
+            <a:schemeClr val="lt1"/>
+          </a:fontRef>
+        </p:style>
+        <p:txBody>
+          <a:bodyPr rtlCol="0" anchor="ctr"/>
+          <a:lstStyle/>
+          <a:p>
+            <a:pPr algn="ctr"/>
+          </a:p>
+        </p:txBody>
+      </p:sp>
+      <p:sp>
+        <p:nvSpPr>
+          <p:cNvPr id="34" name="TextBox 33"/>
+          <p:cNvSpPr txBox="1"/>
+          <p:nvPr/>
+        </p:nvSpPr>
+        <p:spPr>
+          <a:xfrm>
+            <a:off x="7790687" y="3936492"/>
+            <a:ext cx="365760" cy="365760"/>
+          </a:xfrm>
+          <a:prstGeom prst="rect">
+            <a:avLst/>
+          </a:prstGeom>
+          <a:noFill/>
+        </p:spPr>
+        <p:txBody>
+          <a:bodyPr wrap="square" lIns="0" rIns="0" tIns="0" bIns="0" anchor="ctr">
+            <a:spAutoFit/>
+          </a:bodyPr>
+          <a:lstStyle/>
+          <a:p>
+            <a:pPr algn="ctr">
+              <a:lnSpc>
+                <a:spcPct val="115000"/>
+              </a:lnSpc>
+            </a:pPr>
+            <a:r>
+              <a:rPr sz="1200" b="1">
+                <a:solidFill>
+                  <a:srgbClr val="1A1A2E"/>
+                </a:solidFill>
+                <a:latin typeface="Microsoft JhengHei"/>
+              </a:rPr>
+              <a:t>🔊</a:t>
+            </a:r>
+          </a:p>
+        </p:txBody>
+      </p:sp>
+      <p:sp>
+        <p:nvSpPr>
+          <p:cNvPr id="35" name="TextBox 34"/>
+          <p:cNvSpPr txBox="1"/>
+          <p:nvPr/>
+        </p:nvSpPr>
+        <p:spPr>
+          <a:xfrm>
+            <a:off x="8275319" y="3913632"/>
+            <a:ext cx="3108960" cy="292608"/>
+          </a:xfrm>
+          <a:prstGeom prst="rect">
+            <a:avLst/>
+          </a:prstGeom>
+          <a:noFill/>
+        </p:spPr>
+        <p:txBody>
+          <a:bodyPr wrap="square" lIns="0" rIns="0" tIns="0" bIns="0" anchor="t">
+            <a:spAutoFit/>
+          </a:bodyPr>
+          <a:lstStyle/>
+          <a:p>
+            <a:pPr algn="l">
+              <a:lnSpc>
+                <a:spcPct val="115000"/>
+              </a:lnSpc>
+            </a:pPr>
+            <a:r>
+              <a:rPr sz="1250" b="1">
+                <a:solidFill>
+                  <a:srgbClr val="FFFFFF"/>
+                </a:solidFill>
+                <a:latin typeface="Microsoft JhengHei"/>
+              </a:rPr>
+              <a:t>音量才是主因</a:t>
+            </a:r>
+          </a:p>
+        </p:txBody>
+      </p:sp>
+      <p:sp>
+        <p:nvSpPr>
+          <p:cNvPr id="36" name="TextBox 35"/>
+          <p:cNvSpPr txBox="1"/>
+          <p:nvPr/>
+        </p:nvSpPr>
+        <p:spPr>
+          <a:xfrm>
+            <a:off x="8275319" y="4187952"/>
+            <a:ext cx="3154680" cy="457200"/>
+          </a:xfrm>
+          <a:prstGeom prst="rect">
+            <a:avLst/>
+          </a:prstGeom>
+          <a:noFill/>
+        </p:spPr>
+        <p:txBody>
+          <a:bodyPr wrap="square" lIns="0" rIns="0" tIns="0" bIns="0" anchor="t">
+            <a:spAutoFit/>
+          </a:bodyPr>
+          <a:lstStyle/>
+          <a:p>
+            <a:pPr algn="l">
+              <a:lnSpc>
+                <a:spcPct val="110000"/>
+              </a:lnSpc>
+            </a:pPr>
+            <a:r>
+              <a:rPr sz="1100" b="0">
+                <a:solidFill>
+                  <a:srgbClr val="BBBBBB"/>
+                </a:solidFill>
+                <a:latin typeface="Microsoft JhengHei"/>
+              </a:rPr>
+              <a:t>小聲時摩擦音 ㄕ/ㄘ 糊掉；展場大聲對麥＝多半消失</a:t>
+            </a:r>
+          </a:p>
+        </p:txBody>
+      </p:sp>
+      <p:sp>
+        <p:nvSpPr>
+          <p:cNvPr id="37" name="Oval 36"/>
+          <p:cNvSpPr/>
+          <p:nvPr/>
+        </p:nvSpPr>
+        <p:spPr>
+          <a:xfrm>
+            <a:off x="7790687" y="4727448"/>
+            <a:ext cx="365760" cy="365760"/>
+          </a:xfrm>
+          <a:prstGeom prst="ellipse">
+            <a:avLst/>
+          </a:prstGeom>
+          <a:solidFill>
+            <a:srgbClr val="00C49A"/>
+          </a:solidFill>
+          <a:ln>
+            <a:noFill/>
+          </a:ln>
+          <a:effectLst/>
+        </p:spPr>
+        <p:style>
+          <a:lnRef idx="1">
+            <a:schemeClr val="accent1"/>
+          </a:lnRef>
+          <a:fillRef idx="3">
+            <a:schemeClr val="accent1"/>
+          </a:fillRef>
+          <a:effectRef idx="2">
+            <a:schemeClr val="accent1"/>
+          </a:effectRef>
+          <a:fontRef idx="minor">
+            <a:schemeClr val="lt1"/>
+          </a:fontRef>
+        </p:style>
+        <p:txBody>
+          <a:bodyPr rtlCol="0" anchor="ctr"/>
+          <a:lstStyle/>
+          <a:p>
+            <a:pPr algn="ctr"/>
+          </a:p>
+        </p:txBody>
+      </p:sp>
+      <p:sp>
+        <p:nvSpPr>
+          <p:cNvPr id="38" name="TextBox 37"/>
+          <p:cNvSpPr txBox="1"/>
+          <p:nvPr/>
+        </p:nvSpPr>
+        <p:spPr>
+          <a:xfrm>
+            <a:off x="7790687" y="4713732"/>
+            <a:ext cx="365760" cy="365760"/>
+          </a:xfrm>
+          <a:prstGeom prst="rect">
+            <a:avLst/>
+          </a:prstGeom>
+          <a:noFill/>
+        </p:spPr>
+        <p:txBody>
+          <a:bodyPr wrap="square" lIns="0" rIns="0" tIns="0" bIns="0" anchor="ctr">
+            <a:spAutoFit/>
+          </a:bodyPr>
+          <a:lstStyle/>
+          <a:p>
+            <a:pPr algn="ctr">
+              <a:lnSpc>
+                <a:spcPct val="115000"/>
+              </a:lnSpc>
+            </a:pPr>
+            <a:r>
+              <a:rPr sz="1200" b="1">
+                <a:solidFill>
+                  <a:srgbClr val="1A1A2E"/>
+                </a:solidFill>
+                <a:latin typeface="Microsoft JhengHei"/>
+              </a:rPr>
+              <a:t>環</a:t>
+            </a:r>
+          </a:p>
+        </p:txBody>
+      </p:sp>
+      <p:sp>
+        <p:nvSpPr>
+          <p:cNvPr id="39" name="TextBox 38"/>
+          <p:cNvSpPr txBox="1"/>
+          <p:nvPr/>
+        </p:nvSpPr>
+        <p:spPr>
+          <a:xfrm>
+            <a:off x="8275319" y="4690872"/>
+            <a:ext cx="3108960" cy="292608"/>
+          </a:xfrm>
+          <a:prstGeom prst="rect">
+            <a:avLst/>
+          </a:prstGeom>
+          <a:noFill/>
+        </p:spPr>
+        <p:txBody>
+          <a:bodyPr wrap="square" lIns="0" rIns="0" tIns="0" bIns="0" anchor="t">
+            <a:spAutoFit/>
+          </a:bodyPr>
+          <a:lstStyle/>
+          <a:p>
+            <a:pPr algn="l">
+              <a:lnSpc>
+                <a:spcPct val="115000"/>
+              </a:lnSpc>
+            </a:pPr>
+            <a:r>
+              <a:rPr sz="1250" b="1">
+                <a:solidFill>
+                  <a:srgbClr val="FFFFFF"/>
+                </a:solidFill>
+                <a:latin typeface="Microsoft JhengHei"/>
+              </a:rPr>
+              <a:t>展後回饋閉環</a:t>
+            </a:r>
+          </a:p>
+        </p:txBody>
+      </p:sp>
+      <p:sp>
+        <p:nvSpPr>
+          <p:cNvPr id="40" name="TextBox 39"/>
+          <p:cNvSpPr txBox="1"/>
+          <p:nvPr/>
+        </p:nvSpPr>
+        <p:spPr>
+          <a:xfrm>
+            <a:off x="8275319" y="4965192"/>
+            <a:ext cx="3154680" cy="457200"/>
+          </a:xfrm>
+          <a:prstGeom prst="rect">
+            <a:avLst/>
+          </a:prstGeom>
+          <a:noFill/>
+        </p:spPr>
+        <p:txBody>
+          <a:bodyPr wrap="square" lIns="0" rIns="0" tIns="0" bIns="0" anchor="t">
+            <a:spAutoFit/>
+          </a:bodyPr>
+          <a:lstStyle/>
+          <a:p>
+            <a:pPr algn="l">
+              <a:lnSpc>
+                <a:spcPct val="110000"/>
+              </a:lnSpc>
+            </a:pPr>
+            <a:r>
+              <a:rPr sz="1100" b="0">
+                <a:solidFill>
+                  <a:srgbClr val="BBBBBB"/>
+                </a:solidFill>
+                <a:latin typeface="Microsoft JhengHei"/>
+              </a:rPr>
+              <a:t>展場問答入 journal，事後撈真實錯句補規則</a:t>
+            </a:r>
+          </a:p>
+        </p:txBody>
+      </p:sp>
+      <p:sp>
+        <p:nvSpPr>
+          <p:cNvPr id="41" name="TextBox 40"/>
+          <p:cNvSpPr txBox="1"/>
+          <p:nvPr/>
+        </p:nvSpPr>
+        <p:spPr>
+          <a:xfrm>
+            <a:off x="667512" y="5806440"/>
+            <a:ext cx="10789920" cy="548640"/>
+          </a:xfrm>
+          <a:prstGeom prst="rect">
+            <a:avLst/>
+          </a:prstGeom>
+          <a:noFill/>
+        </p:spPr>
+        <p:txBody>
+          <a:bodyPr wrap="square" lIns="0" rIns="0" tIns="0" bIns="0" anchor="t">
+            <a:spAutoFit/>
+          </a:bodyPr>
+          <a:lstStyle/>
+          <a:p>
+            <a:pPr algn="l">
+              <a:lnSpc>
+                <a:spcPct val="120000"/>
+              </a:lnSpc>
+            </a:pPr>
+            <a:r>
+              <a:rPr sz="1300" b="1">
+                <a:solidFill>
+                  <a:srgbClr val="008E76"/>
+                </a:solidFill>
+                <a:latin typeface="Microsoft JhengHei"/>
+              </a:rPr>
+              <a:t>分寸：容錯層只救「聽得出是同一個音」的錯——救得到的自動救、救不到的交給人重講，絕不亂猜幻覺出錯商品。</a:t>
+            </a:r>
+          </a:p>
+        </p:txBody>
+      </p:sp>
+      <p:sp>
+        <p:nvSpPr>
+          <p:cNvPr id="42" name="TextBox 41"/>
+          <p:cNvSpPr txBox="1"/>
+          <p:nvPr/>
+        </p:nvSpPr>
+        <p:spPr>
+          <a:xfrm>
+            <a:off x="11475720" y="6565392"/>
+            <a:ext cx="658368" cy="237744"/>
+          </a:xfrm>
+          <a:prstGeom prst="rect">
+            <a:avLst/>
+          </a:prstGeom>
+          <a:noFill/>
+        </p:spPr>
+        <p:txBody>
+          <a:bodyPr wrap="square" lIns="0" rIns="0" tIns="0" bIns="0" anchor="t">
+            <a:spAutoFit/>
+          </a:bodyPr>
+          <a:lstStyle/>
+          <a:p>
+            <a:pPr algn="r">
+              <a:lnSpc>
+                <a:spcPct val="115000"/>
+              </a:lnSpc>
+            </a:pPr>
+            <a:r>
+              <a:rPr sz="1000" b="0">
+                <a:solidFill>
+                  <a:srgbClr val="BBBBBB"/>
+                </a:solidFill>
+                <a:latin typeface="Arial"/>
+              </a:rPr>
+              <a:t>24</a:t>
+            </a:r>
+          </a:p>
+        </p:txBody>
+      </p:sp>
+    </p:spTree>
+  </p:cSld>
+  <p:clrMapOvr>
+    <a:masterClrMapping/>
+  </p:clrMapOvr>
+</p:sld>
+</file>
+
+<file path=ppt/slides/slide25.xml><?xml version="1.0" encoding="utf-8"?>
+<p:sld xmlns:a="http://schemas.openxmlformats.org/drawingml/2006/main" xmlns:p="http://schemas.openxmlformats.org/presentationml/2006/main" xmlns:r="http://schemas.openxmlformats.org/officeDocument/2006/relationships">
+  <p:cSld>
+    <p:spTree>
+      <p:nvGrpSpPr>
+        <p:cNvPr id="1" name=""/>
+        <p:cNvGrpSpPr/>
+        <p:nvPr/>
+      </p:nvGrpSpPr>
+      <p:grpSpPr/>
+      <p:sp>
+        <p:nvSpPr>
+          <p:cNvPr id="2" name="Rectangle 1"/>
+          <p:cNvSpPr/>
+          <p:nvPr/>
+        </p:nvSpPr>
+        <p:spPr>
+          <a:xfrm>
+            <a:off x="0" y="0"/>
+            <a:ext cx="12188952" cy="6858000"/>
+          </a:xfrm>
+          <a:prstGeom prst="rect">
+            <a:avLst/>
+          </a:prstGeom>
+          <a:solidFill>
+            <a:srgbClr val="1A1A2E"/>
+          </a:solidFill>
+          <a:ln>
+            <a:noFill/>
+          </a:ln>
+          <a:effectLst/>
+        </p:spPr>
+        <p:style>
+          <a:lnRef idx="1">
+            <a:schemeClr val="accent1"/>
+          </a:lnRef>
+          <a:fillRef idx="3">
+            <a:schemeClr val="accent1"/>
+          </a:fillRef>
+          <a:effectRef idx="2">
+            <a:schemeClr val="accent1"/>
+          </a:effectRef>
+          <a:fontRef idx="minor">
+            <a:schemeClr val="lt1"/>
+          </a:fontRef>
+        </p:style>
+        <p:txBody>
+          <a:bodyPr rtlCol="0" anchor="ctr"/>
+          <a:lstStyle/>
+          <a:p>
+            <a:pPr algn="ctr"/>
+          </a:p>
+        </p:txBody>
+      </p:sp>
+      <p:sp>
+        <p:nvSpPr>
+          <p:cNvPr id="3" name="Rectangle 2"/>
+          <p:cNvSpPr/>
+          <p:nvPr/>
+        </p:nvSpPr>
+        <p:spPr>
+          <a:xfrm>
+            <a:off x="0" y="0"/>
+            <a:ext cx="12188952" cy="128016"/>
+          </a:xfrm>
+          <a:prstGeom prst="rect">
+            <a:avLst/>
+          </a:prstGeom>
+          <a:solidFill>
+            <a:srgbClr val="00C49A"/>
+          </a:solidFill>
+          <a:ln>
+            <a:noFill/>
+          </a:ln>
+          <a:effectLst/>
+        </p:spPr>
+        <p:style>
+          <a:lnRef idx="1">
+            <a:schemeClr val="accent1"/>
+          </a:lnRef>
+          <a:fillRef idx="3">
+            <a:schemeClr val="accent1"/>
+          </a:fillRef>
+          <a:effectRef idx="2">
+            <a:schemeClr val="accent1"/>
+          </a:effectRef>
+          <a:fontRef idx="minor">
+            <a:schemeClr val="lt1"/>
+          </a:fontRef>
+        </p:style>
+        <p:txBody>
+          <a:bodyPr rtlCol="0" anchor="ctr"/>
+          <a:lstStyle/>
+          <a:p>
+            <a:pPr algn="ctr"/>
+          </a:p>
+        </p:txBody>
+      </p:sp>
+      <p:sp>
+        <p:nvSpPr>
           <p:cNvPr id="4" name="TextBox 3"/>
           <p:cNvSpPr txBox="1"/>
           <p:nvPr/>
@@ -25647,7 +27708,7 @@
                 </a:solidFill>
                 <a:latin typeface="Arial"/>
               </a:rPr>
-              <a:t>24</a:t>
+              <a:t>25</a:t>
             </a:r>
           </a:p>
         </p:txBody>

--- a/倉管Agent_專案簡報.pptx
+++ b/倉管Agent_專案簡報.pptx
@@ -31,6 +31,9 @@
     <p:sldId id="279" r:id="rId31"/>
     <p:sldId id="280" r:id="rId32"/>
     <p:sldId id="281" r:id="rId33"/>
+    <p:sldId id="282" r:id="rId34"/>
+    <p:sldId id="283" r:id="rId35"/>
+    <p:sldId id="284" r:id="rId36"/>
   </p:sldIdLst>
   <p:sldSz cx="12188952" cy="6858000" type="screen4x3"/>
   <p:notesSz cx="6858000" cy="9144000"/>
@@ -1384,7 +1387,7 @@
               <a:rPr sz="1200">
                 <a:latin typeface="Microsoft JhengHei"/>
               </a:rPr>
-              <a:t>語音 POC 全鏈架構（2026-07 新增）。核心設計：語音只是新入口，倉管後端完全不動。前端 Siri 式點一下自動結束；Fun-ASR-Nano 在 RPi5 純 CPU 離線辨識（展場無網路也能跑）；OpenCC 轉繁 + 同音修正層清理 ASR 錯字；最後交回既有倉管 WS。同音修正層刻意只掛 /api/asr 出口——打字訪客零影響、守衛零風險。</a:t>
+              <a:t>語音 POC 全鏈架構（2026-07 新增）。核心設計：語音只是新入口，倉管後端完全不動。前端 Siri 式點一下自動結束；whisper.cpp 在 RPi5 純 CPU 離線辨識（展場無網路也能跑）；OpenCC 轉繁（僅中文版）+ 出口修正層清理 ASR 錯字；最後交回既有倉管 WS。同音修正層刻意只掛 /api/asr 出口——打字訪客零影響、守衛零風險。</a:t>
             </a:r>
           </a:p>
         </p:txBody>
@@ -1457,7 +1460,7 @@
               <a:rPr sz="1200">
                 <a:latin typeface="Microsoft JhengHei"/>
               </a:rPr>
-              <a:t>★語音選型頁（技術評審向）。選型鐵律：必須能在 RPi5 CPU 純離線跑，且盡量沿用倉管既有的 llama.cpp / GGUF runtime。對照四個候選：Whisper small 中文 CER 高（~20%，英文強中文弱）；Whisper large-v3 1.55B 太大、RPi5 純 CPU 跑不動、且偏雲端；SenseVoice-Small / Paraformer 中文 CER 其實更漂亮（~8%/~10%），但走 sherpa-onnx 生態、要重新整合一套框架，展前時間風險高，列為備援方案。Fun-ASR-Nano 決勝點＝跟倉管 LLM 共用同一套 llama.cpp / GGUF runtime，語音不用再扛一套框架、部署面最省；官方 arm64 binary 要GLIBC 2.38 而 RPi5 是 2.36，直接在機上源碼編 4.5 分鐘解決；輸出簡體用 OpenCC s2twp 完美轉繁並順帶轉台灣用語。誠實補一句：SenseVoice 若展後有時間值得回頭評估換裝，CER 更低。版本時效性（加分點）：模型是 Fun-ASR-Nano-2512（2025 年 12 月權重），能跑 llama.cpp GGUF 的 runtime 是 2026 年 6 月才釋出，我們 7 月就導入——是最前沿的邊緣 ASR 方案，不是拿舊模型湊。CER 數字為公開 benchmark 概估、佐證量級，非本專案實測，評審追問據實說明。</a:t>
+              <a:t>★語音選型頁（技術評審向）。**這一頁 2026-07-27 全面改版**：原本用阿里的 Fun-ASR-Nano，後來定調**只用歐美模型**（供應鏈來源可控），中英兩版都換成 OpenAI whisper.cpp。換完的額外好處：中英共用同一套 runtime，不必維護兩套框架。選型結果：英文版 tiny.en（74MB / 0.94s / WER 9.3%）、中文版 base（141MB / 6.8s）。兩個值得講的洞見——①**反直覺**：base.en 比 tiny.en 更大更慢，WER 反而略差（10.2% vs 9.3%），因為倉管查詢句短、句型固定，tiny 的容量已經夠用，變大的收益顯現不出來；這推翻『模型越大越好』的直覺，也呼應整個專案『選對尺寸勝過選大尺寸』的主張。②**選型不能只看 WER**：中文版 base 真人 8 句字面只對 3 句，但端到端 8/8 全部答對——聽錯的『盡量啤酒酷醇』『無限滑鼠擴存』『瑜伽店』全被文字端容錯層救回。這正好證明前面幾頁講的容錯層是真的在扛事情。代價誠實講：中文 base 6.8s/句比原本慢，但中文版是備案、英文版才是展場主力（tiny.en 0.94s 很順）。英文數據為 TTS 合成音實測（5 腔調×20 句×3 噪音層），中文為 user 錄的真人音——TTS 是下限估計，評審追問據實說明。</a:t>
             </a:r>
           </a:p>
         </p:txBody>
@@ -1603,7 +1606,7 @@
               <a:rPr sz="1200">
                 <a:latin typeface="Microsoft JhengHei"/>
               </a:rPr>
-              <a:t>★語音部署架構頁（回應「語音這塊怎麼部署」）。核心澄清：使用者以為「Fun-ASR-Nano」是一顆模型，其實是三件套串起來跑。① VAD（fsmn-vad，1.6MB）＝語音端點偵測，判斷「何時在講話」，切掉前後靜音雜音，只把真語音送進去。② Encoder（funasr-encoder-f16，447MB）＝聲學編碼器，把聲音波形轉成語意特徵向量；因為精度敏感所以保留 F16 半精度不量化。③ LLM 解碼器（qwen3-0.6b-q4km，461MB）＝Qwen3-0.6B 讀特徵生成文字，用 Q4_K_M 4-bit 量化壓到最小、RPi5 CPU 才跑得動。這三顆由一支 llama-funasr-cli binary 統合載入。部署管線：前端錄 webm → ffmpeg 轉 16k mono → cli 跑三元件 → OpenCC 轉繁 → 同音修正 → 交倉管 WS，全程本機無網路。RPi5 落地細節：官方 arm64 binary 要 GLIBC 2.38 但 RPi5 是 2.36，直接在機上源碼編 4.5 分鐘解決；冷啟 15s、熱快取後 2.5s/句；三顆模型合計約 910MB；純 CPU、零 GPU、零雲端。這頁證明語音不是掛個 API，是真的把三個模型部署在邊緣裝置上跑。</a:t>
+              <a:t>★語音部署架構頁（回應「語音這塊怎麼部署」）。**2026-07-27 隨 ASR 換型改版**：原本這頁在講 Fun-ASR 的三元件架構（VAD＋Encoder＋Qwen3 解碼器，合計 910MB），換成 whisper.cpp 之後**架構反而更簡單**——單一模型檔、單一 binary。三張卡：①共用 runtime＝whisper-cli，一支 binary 內含端點偵測、聲學編碼、解碼，中英兩版只差 -m 參數指到哪顆模型，不必維護兩套框架。②英文版 ggml-tiny.en（74MB / 0.94s），展場主力。③中文版 ggml-base（141MB / 6.8s），多語權重含中文，備援展示。管線：前端錄 webm → ffmpeg 轉 16k mono → whisper-cli → OpenCC 轉繁（**只有中文版需要**，英文版已移除）→ 出口正規化（英文版做大小寫攤平、中文版做同音錯字修正）→ 交倉管 WS，全程本機無網路。值得一提的數字：**模型體積從 910MB 降到 215MB**，延遲英文從 2.5s 降到 0.94s——換掉來源不符的模型不但沒有犧牲，反而更輕更快。這頁證明語音不是掛個雲端 API，是真的把模型部署在邊緣裝置上離線跑。</a:t>
             </a:r>
           </a:p>
         </p:txBody>
@@ -2041,7 +2044,226 @@
               <a:rPr sz="1200">
                 <a:latin typeface="Microsoft JhengHei"/>
               </a:rPr>
-              <a:t>總結三張卡：價值、技術、品質。收尾一句下一步。整份簡報的主軸——用最小的模型、最便宜的硬體，做到可以用數字證明的品質。</a:t>
+              <a:t>★英文版路線決策頁。老闆要全英文版，我沒有直接開始翻譯——先用探針餵分級英文句給現有的中文微調模型，量出「純翻譯路線」會壞在哪。結果很清楚：乾淨查詢答得對（Gemma 的英文底子還在），但**招牌能力全滅**——英文錯字、模糊描述、寫入/調貨/RCA 意圖全部救不到。而容錯層正是這個 demo 的賣點，翻譯層先崩就輪不到後面，等於做出一個「白費版」。所以路線選**補英文語料微調**：不必全部重訓（base 英文能力本來就在），但要教它這套系統的 tool 慣例。右下三方對照是實測數字：base 未微調只有 11%（看得懂英文、不知道叫哪個 tool）；有趣的是**中文微調版跑英文有 32%**——證明 tool 慣例會跨語言遷移，用中文學的可以套到英文，這是微調買到的『領域判斷』而不只是語言；英文專訓版 73%。這頁的重點是：**決策有數據支撐，不是拍腦袋選路線**。</a:t>
+            </a:r>
+          </a:p>
+        </p:txBody>
+      </p:sp>
+      <p:sp>
+        <p:nvSpPr>
+          <p:cNvPr id="4" name="Slide Number Placeholder 3"/>
+          <p:cNvSpPr>
+            <a:spLocks noGrp="1"/>
+          </p:cNvSpPr>
+          <p:nvPr>
+            <p:ph type="sldNum" idx="5" sz="quarter"/>
+          </p:nvPr>
+        </p:nvSpPr>
+        <p:spPr/>
+      </p:sp>
+    </p:spTree>
+  </p:cSld>
+  <p:clrMapOvr>
+    <a:masterClrMapping/>
+  </p:clrMapOvr>
+</p:notes>
+</file>
+
+<file path=ppt/notesSlides/notesSlide27.xml><?xml version="1.0" encoding="utf-8"?>
+<p:notes xmlns:a="http://schemas.openxmlformats.org/drawingml/2006/main" xmlns:p="http://schemas.openxmlformats.org/presentationml/2006/main" xmlns:r="http://schemas.openxmlformats.org/officeDocument/2006/relationships">
+  <p:cSld>
+    <p:spTree>
+      <p:nvGrpSpPr>
+        <p:cNvPr id="1" name=""/>
+        <p:cNvGrpSpPr/>
+        <p:nvPr/>
+      </p:nvGrpSpPr>
+      <p:grpSpPr>
+        <a:xfrm>
+          <a:off x="0" y="0"/>
+          <a:ext cx="0" cy="0"/>
+          <a:chOff x="0" y="0"/>
+          <a:chExt cx="0" cy="0"/>
+        </a:xfrm>
+      </p:grpSpPr>
+      <p:sp>
+        <p:nvSpPr>
+          <p:cNvPr id="2" name="Slide Image Placeholder 1"/>
+          <p:cNvSpPr>
+            <a:spLocks noGrp="1"/>
+          </p:cNvSpPr>
+          <p:nvPr>
+            <p:ph type="sldImg" idx="2"/>
+          </p:nvPr>
+        </p:nvSpPr>
+        <p:spPr/>
+      </p:sp>
+      <p:sp>
+        <p:nvSpPr>
+          <p:cNvPr id="3" name="Notes Placeholder 2"/>
+          <p:cNvSpPr>
+            <a:spLocks noGrp="1"/>
+          </p:cNvSpPr>
+          <p:nvPr>
+            <p:ph type="body" idx="3" sz="quarter"/>
+          </p:nvPr>
+        </p:nvSpPr>
+        <p:spPr/>
+        <p:txBody>
+          <a:bodyPr/>
+          <a:lstStyle/>
+          <a:p>
+            <a:r>
+              <a:rPr sz="1200">
+                <a:latin typeface="Microsoft JhengHei"/>
+              </a:rPr>
+              <a:t>★這頁是給技術評審看的「移植的真實成本」。一般人以為做英文版＝翻譯 UI + 換模型，實際上**真正的工作量在散落各處的語言假設**——三個月為中文磨出來的規則層，每一條都藏著隱含假設。列五個最有代表性的（共歸納 19 類）：①21 個詞表全中文，英文句一個都不命中，被判成「只有商品名沒動作」全部轉 clarify。②更隱形的一類：對照表的**鍵**是中文（值反而是英文 slug），6 個類別 5 個查不到，而系統的導覽訊息還在教訪客這樣問。③門檻用中文字元數：英文字元數是中文 2-3 倍，'alert me when earphones drop below 30' 才 7 個詞卻 31 字元，正常句被當長句。④最危險的一類——**演算法本身假設中文形態**：用 split()[0] 剝規格尾巴，中文沒空白所以取第一段＝取全名，英文商品名全用空白分隔，`Wireless Mouse` 被腰斬成 `Wireless`，下一句追問就改到耳機的安全庫存＝**寫錯資料**。這種 bug 讀程式碼很難看出來（邏輯本身沒錯），只有跨句對話測試會暴露。⑤英文獨有的：英文化產生的撇號沒跳脫，整份 JS 語法錯誤停擺，但 HTML/CSS 照常渲染——畫面看起來正常、實際 WebSocket 從沒建立過。中文版永遠不會有這個 bug（中文沒撇號）。方法論：**逐句追 log 看實際執行路徑**，不要從症狀猜成因。</a:t>
+            </a:r>
+          </a:p>
+        </p:txBody>
+      </p:sp>
+      <p:sp>
+        <p:nvSpPr>
+          <p:cNvPr id="4" name="Slide Number Placeholder 3"/>
+          <p:cNvSpPr>
+            <a:spLocks noGrp="1"/>
+          </p:cNvSpPr>
+          <p:nvPr>
+            <p:ph type="sldNum" idx="5" sz="quarter"/>
+          </p:nvPr>
+        </p:nvSpPr>
+        <p:spPr/>
+      </p:sp>
+    </p:spTree>
+  </p:cSld>
+  <p:clrMapOvr>
+    <a:masterClrMapping/>
+  </p:clrMapOvr>
+</p:notes>
+</file>
+
+<file path=ppt/notesSlides/notesSlide28.xml><?xml version="1.0" encoding="utf-8"?>
+<p:notes xmlns:a="http://schemas.openxmlformats.org/drawingml/2006/main" xmlns:p="http://schemas.openxmlformats.org/presentationml/2006/main" xmlns:r="http://schemas.openxmlformats.org/officeDocument/2006/relationships">
+  <p:cSld>
+    <p:spTree>
+      <p:nvGrpSpPr>
+        <p:cNvPr id="1" name=""/>
+        <p:cNvGrpSpPr/>
+        <p:nvPr/>
+      </p:nvGrpSpPr>
+      <p:grpSpPr>
+        <a:xfrm>
+          <a:off x="0" y="0"/>
+          <a:ext cx="0" cy="0"/>
+          <a:chOff x="0" y="0"/>
+          <a:chExt cx="0" cy="0"/>
+        </a:xfrm>
+      </p:grpSpPr>
+      <p:sp>
+        <p:nvSpPr>
+          <p:cNvPr id="2" name="Slide Image Placeholder 1"/>
+          <p:cNvSpPr>
+            <a:spLocks noGrp="1"/>
+          </p:cNvSpPr>
+          <p:nvPr>
+            <p:ph type="sldImg" idx="2"/>
+          </p:nvPr>
+        </p:nvSpPr>
+        <p:spPr/>
+      </p:sp>
+      <p:sp>
+        <p:nvSpPr>
+          <p:cNvPr id="3" name="Notes Placeholder 2"/>
+          <p:cNvSpPr>
+            <a:spLocks noGrp="1"/>
+          </p:cNvSpPr>
+          <p:nvPr>
+            <p:ph type="body" idx="3" sz="quarter"/>
+          </p:nvPr>
+        </p:nvSpPr>
+        <p:spPr/>
+        <p:txBody>
+          <a:bodyPr/>
+          <a:lstStyle/>
+          <a:p>
+            <a:r>
+              <a:rPr sz="1200">
+                <a:latin typeface="Microsoft JhengHei"/>
+              </a:rPr>
+              <a:t>★英文版收斂成果頁。重點一：英文守衛庫是**重新建的 892 句**，不是把中文守衛翻譯過來——中文守衛大量測注音、同音字，英文沒有對應物；英文有自己的邊界（錯字型態、俗稱別名、英文閒聊搗蛋）。重點二：收斂曲線 651→873→891→892，每次跳動都是一批結構性 bug 被找出來，不是慢慢磨上去的。左下角這個教訓值得講：過程中**兩次**把『試過一種做法沒成功』寫成『這類問題無解』——第一次是 19 句雙錯字長尾，後來拆解發現是 8 個獨立的結構性 bug；第二次是最後那一句 `do we have scks`，記錄成『需要英文詞典依賴、救不了』，實際上樹莓派系統**內建**英文詞典，而且真正的成因根本不是字元相似度，是被守門員擋在門外。訊號一直都在，只是沒接上。右下角：守衛全綠≠畫面對，改用截圖逐一看過 25 個 view，抓到 JSON 看不到的破口——最典型的是卡片上明明寫著『To remove, say delete AL001』，訪客照打卻回『查無此商品』。最後一行：中英雙版在同一台樹莓派上並存，開機都自啟，訪客點瀏覽器分頁就能切語言。</a:t>
+            </a:r>
+          </a:p>
+        </p:txBody>
+      </p:sp>
+      <p:sp>
+        <p:nvSpPr>
+          <p:cNvPr id="4" name="Slide Number Placeholder 3"/>
+          <p:cNvSpPr>
+            <a:spLocks noGrp="1"/>
+          </p:cNvSpPr>
+          <p:nvPr>
+            <p:ph type="sldNum" idx="5" sz="quarter"/>
+          </p:nvPr>
+        </p:nvSpPr>
+        <p:spPr/>
+      </p:sp>
+    </p:spTree>
+  </p:cSld>
+  <p:clrMapOvr>
+    <a:masterClrMapping/>
+  </p:clrMapOvr>
+</p:notes>
+</file>
+
+<file path=ppt/notesSlides/notesSlide29.xml><?xml version="1.0" encoding="utf-8"?>
+<p:notes xmlns:a="http://schemas.openxmlformats.org/drawingml/2006/main" xmlns:p="http://schemas.openxmlformats.org/presentationml/2006/main" xmlns:r="http://schemas.openxmlformats.org/officeDocument/2006/relationships">
+  <p:cSld>
+    <p:spTree>
+      <p:nvGrpSpPr>
+        <p:cNvPr id="1" name=""/>
+        <p:cNvGrpSpPr/>
+        <p:nvPr/>
+      </p:nvGrpSpPr>
+      <p:grpSpPr>
+        <a:xfrm>
+          <a:off x="0" y="0"/>
+          <a:ext cx="0" cy="0"/>
+          <a:chOff x="0" y="0"/>
+          <a:chExt cx="0" cy="0"/>
+        </a:xfrm>
+      </p:grpSpPr>
+      <p:sp>
+        <p:nvSpPr>
+          <p:cNvPr id="2" name="Slide Image Placeholder 1"/>
+          <p:cNvSpPr>
+            <a:spLocks noGrp="1"/>
+          </p:cNvSpPr>
+          <p:nvPr>
+            <p:ph type="sldImg" idx="2"/>
+          </p:nvPr>
+        </p:nvSpPr>
+        <p:spPr/>
+      </p:sp>
+      <p:sp>
+        <p:nvSpPr>
+          <p:cNvPr id="3" name="Notes Placeholder 2"/>
+          <p:cNvSpPr>
+            <a:spLocks noGrp="1"/>
+          </p:cNvSpPr>
+          <p:nvPr>
+            <p:ph type="body" idx="3" sz="quarter"/>
+          </p:nvPr>
+        </p:nvSpPr>
+        <p:spPr/>
+        <p:txBody>
+          <a:bodyPr/>
+          <a:lstStyle/>
+          <a:p>
+            <a:r>
+              <a:rPr sz="1200">
+                <a:latin typeface="Microsoft JhengHei"/>
+              </a:rPr>
+              <a:t>總結五張卡：價值、技術、品質、語音、雙語。收尾一句下一步。整份簡報的主軸——用最小的模型、最便宜的硬體，做到可以用數字證明的品質。品質那張卡的兩個數字要記熟：中文守衛 1122 句雙平台 100%、英文守衛 892 句 100%。</a:t>
             </a:r>
           </a:p>
         </p:txBody>
@@ -11044,7 +11266,7 @@
                 <a:solidFill>
                   <a:srgbClr val="FFFFFF"/>
                 </a:solidFill>
-                <a:latin typeface="Arial"/>
+                <a:latin typeface="Microsoft JhengHei"/>
               </a:rPr>
               <a:t>28 個  </a:t>
             </a:r>
@@ -11092,7 +11314,7 @@
                 <a:solidFill>
                   <a:srgbClr val="FFFFFF"/>
                 </a:solidFill>
-                <a:latin typeface="Arial"/>
+                <a:latin typeface="Microsoft JhengHei"/>
               </a:rPr>
               <a:t>1 個   </a:t>
             </a:r>
@@ -11529,7 +11751,7 @@
                 <a:solidFill>
                   <a:srgbClr val="008E76"/>
                 </a:solidFill>
-                <a:latin typeface="Arial"/>
+                <a:latin typeface="Microsoft JhengHei"/>
               </a:rPr>
               <a:t>  1980 / 1980 全綠</a:t>
             </a:r>
@@ -13320,7 +13542,7 @@
                 <a:solidFill>
                   <a:srgbClr val="1A1A2E"/>
                 </a:solidFill>
-                <a:latin typeface="Arial"/>
+                <a:latin typeface="Microsoft JhengHei"/>
               </a:rPr>
               <a:t>RPi5 CPU（純軟體）</a:t>
             </a:r>
@@ -13802,7 +14024,7 @@
                 <a:solidFill>
                   <a:srgbClr val="1A1A2E"/>
                 </a:solidFill>
-                <a:latin typeface="Arial"/>
+                <a:latin typeface="Microsoft JhengHei"/>
               </a:rPr>
               <a:t>RPi5 + 自研晶片加速</a:t>
             </a:r>
@@ -14748,7 +14970,7 @@
                 </a:solidFill>
                 <a:latin typeface="Microsoft JhengHei"/>
               </a:rPr>
-              <a:t>Fun-ASR-Nano</a:t>
+              <a:t>whisper.cpp</a:t>
             </a:r>
           </a:p>
         </p:txBody>
@@ -14787,7 +15009,7 @@
                 </a:solidFill>
                 <a:latin typeface="Microsoft JhengHei"/>
               </a:rPr>
-              <a:t>GGUF + llama.cpp，RPi5 CPU 純離線辨識（~2.8s / 句）</a:t>
+              <a:t>OpenAI whisper，RPi5 CPU 純離線辨識（英文 0.94s / 句）</a:t>
             </a:r>
           </a:p>
         </p:txBody>
@@ -15038,7 +15260,7 @@
                 </a:solidFill>
                 <a:latin typeface="Microsoft JhengHei"/>
               </a:rPr>
-              <a:t>簡體 → 繁體，順便轉台灣用語（滑鼠 / 藍牙）</a:t>
+              <a:t>簡體 → 繁體，順便轉台灣用語（僅中文版需要）</a:t>
             </a:r>
           </a:p>
         </p:txBody>
@@ -15675,7 +15897,7 @@
                 </a:solidFill>
                 <a:latin typeface="Microsoft JhengHei"/>
               </a:rPr>
-              <a:t>為什麼是 Fun-ASR-Nano，不是 Whisper</a:t>
+              <a:t>全面改用歐美模型：中英各選最適尺寸</a:t>
             </a:r>
           </a:p>
         </p:txBody>
@@ -15714,7 +15936,7 @@
                 </a:solidFill>
                 <a:latin typeface="Microsoft JhengHei"/>
               </a:rPr>
-              <a:t>選型鐵律：能在 RPi5 CPU 純離線跑、且能沿用倉管既有的 llama.cpp / GGUF runtime——不必為語音再扛一套框架。</a:t>
+              <a:t>選型鐵律：① 供應鏈來源可控（歐美模型）② RPi5 CPU 純離線跑 ③ 中英共用同一套 whisper.cpp runtime。</a:t>
             </a:r>
           </a:p>
         </p:txBody>
@@ -15838,7 +16060,7 @@
                 </a:solidFill>
                 <a:latin typeface="Microsoft JhengHei"/>
               </a:rPr>
-              <a:t>參數</a:t>
+              <a:t>體積</a:t>
             </a:r>
           </a:p>
         </p:txBody>
@@ -15851,8 +16073,8 @@
         </p:nvSpPr>
         <p:spPr>
           <a:xfrm>
-            <a:off x="4270248" y="1865376"/>
-            <a:ext cx="1783080" cy="329184"/>
+            <a:off x="4087367" y="1865376"/>
+            <a:ext cx="1508760" cy="329184"/>
           </a:xfrm>
           <a:prstGeom prst="rect">
             <a:avLst/>
@@ -15877,7 +16099,7 @@
                 </a:solidFill>
                 <a:latin typeface="Microsoft JhengHei"/>
               </a:rPr>
-              <a:t>Runtime / 部署</a:t>
+              <a:t>語言</a:t>
             </a:r>
           </a:p>
         </p:txBody>
@@ -15890,8 +16112,8 @@
         </p:nvSpPr>
         <p:spPr>
           <a:xfrm>
-            <a:off x="6281928" y="1865376"/>
-            <a:ext cx="1417320" cy="329184"/>
+            <a:off x="5641848" y="1865376"/>
+            <a:ext cx="1691639" cy="329184"/>
           </a:xfrm>
           <a:prstGeom prst="rect">
             <a:avLst/>
@@ -15916,7 +16138,7 @@
                 </a:solidFill>
                 <a:latin typeface="Microsoft JhengHei"/>
               </a:rPr>
-              <a:t>RPi5 離線</a:t>
+              <a:t>RPi5 延遲</a:t>
             </a:r>
           </a:p>
         </p:txBody>
@@ -15929,8 +16151,8 @@
         </p:nvSpPr>
         <p:spPr>
           <a:xfrm>
-            <a:off x="7927848" y="1865376"/>
-            <a:ext cx="1325880" cy="329184"/>
+            <a:off x="7379208" y="1865376"/>
+            <a:ext cx="1874520" cy="329184"/>
           </a:xfrm>
           <a:prstGeom prst="rect">
             <a:avLst/>
@@ -15955,7 +16177,7 @@
                 </a:solidFill>
                 <a:latin typeface="Microsoft JhengHei"/>
               </a:rPr>
-              <a:t>中文 CER</a:t>
+              <a:t>實測準確度</a:t>
             </a:r>
           </a:p>
         </p:txBody>
@@ -15968,8 +16190,8 @@
         </p:nvSpPr>
         <p:spPr>
           <a:xfrm>
-            <a:off x="9482328" y="1865376"/>
-            <a:ext cx="1965960" cy="329184"/>
+            <a:off x="9299448" y="1865376"/>
+            <a:ext cx="2148840" cy="329184"/>
           </a:xfrm>
           <a:prstGeom prst="rect">
             <a:avLst/>
@@ -16079,7 +16301,7 @@
                 </a:solidFill>
                 <a:latin typeface="Microsoft JhengHei"/>
               </a:rPr>
-              <a:t>Fun-ASR-Nano</a:t>
+              <a:t>whisper tiny.en</a:t>
             </a:r>
           </a:p>
         </p:txBody>
@@ -16118,7 +16340,7 @@
                 </a:solidFill>
                 <a:latin typeface="Arial"/>
               </a:rPr>
-              <a:t>~800M</a:t>
+              <a:t>74 MB</a:t>
             </a:r>
           </a:p>
         </p:txBody>
@@ -16131,8 +16353,8 @@
         </p:nvSpPr>
         <p:spPr>
           <a:xfrm>
-            <a:off x="4270248" y="2331720"/>
-            <a:ext cx="1783080" cy="438912"/>
+            <a:off x="4087367" y="2331720"/>
+            <a:ext cx="1508760" cy="438912"/>
           </a:xfrm>
           <a:prstGeom prst="rect">
             <a:avLst/>
@@ -16157,7 +16379,7 @@
                 </a:solidFill>
                 <a:latin typeface="Microsoft JhengHei"/>
               </a:rPr>
-              <a:t>llama.cpp / GGUF</a:t>
+              <a:t>英文專用</a:t>
             </a:r>
           </a:p>
         </p:txBody>
@@ -16170,8 +16392,8 @@
         </p:nvSpPr>
         <p:spPr>
           <a:xfrm>
-            <a:off x="6281928" y="2331720"/>
-            <a:ext cx="1417320" cy="438912"/>
+            <a:off x="5641848" y="2331720"/>
+            <a:ext cx="1691639" cy="438912"/>
           </a:xfrm>
           <a:prstGeom prst="rect">
             <a:avLst/>
@@ -16190,13 +16412,13 @@
               </a:lnSpc>
             </a:pPr>
             <a:r>
-              <a:rPr sz="1100" b="1">
+              <a:rPr sz="1150" b="1">
                 <a:solidFill>
                   <a:srgbClr val="008E76"/>
                 </a:solidFill>
-                <a:latin typeface="Microsoft JhengHei"/>
-              </a:rPr>
-              <a:t>✓ 2.5s/句</a:t>
+                <a:latin typeface="Arial"/>
+              </a:rPr>
+              <a:t>0.94s</a:t>
             </a:r>
           </a:p>
         </p:txBody>
@@ -16209,8 +16431,8 @@
         </p:nvSpPr>
         <p:spPr>
           <a:xfrm>
-            <a:off x="7927848" y="2331720"/>
-            <a:ext cx="1325880" cy="438912"/>
+            <a:off x="7379208" y="2331720"/>
+            <a:ext cx="1874520" cy="438912"/>
           </a:xfrm>
           <a:prstGeom prst="rect">
             <a:avLst/>
@@ -16233,9 +16455,9 @@
                 <a:solidFill>
                   <a:srgbClr val="444444"/>
                 </a:solidFill>
-                <a:latin typeface="Arial"/>
-              </a:rPr>
-              <a:t>低</a:t>
+                <a:latin typeface="Microsoft JhengHei"/>
+              </a:rPr>
+              <a:t>WER 9.3%</a:t>
             </a:r>
           </a:p>
         </p:txBody>
@@ -16248,8 +16470,8 @@
         </p:nvSpPr>
         <p:spPr>
           <a:xfrm>
-            <a:off x="9482328" y="2331720"/>
-            <a:ext cx="1965960" cy="438912"/>
+            <a:off x="9299448" y="2331720"/>
+            <a:ext cx="2148840" cy="438912"/>
           </a:xfrm>
           <a:prstGeom prst="rect">
             <a:avLst/>
@@ -16274,7 +16496,7 @@
                 </a:solidFill>
                 <a:latin typeface="Microsoft JhengHei"/>
               </a:rPr>
-              <a:t>★ 採用</a:t>
+              <a:t>★ 英文版採用</a:t>
             </a:r>
           </a:p>
         </p:txBody>
@@ -16288,6 +16510,566 @@
         <p:spPr>
           <a:xfrm>
             <a:off x="667512" y="2862072"/>
+            <a:ext cx="10853928" cy="621792"/>
+          </a:xfrm>
+          <a:prstGeom prst="rect">
+            <a:avLst/>
+          </a:prstGeom>
+          <a:solidFill>
+            <a:srgbClr val="E4F7F2"/>
+          </a:solidFill>
+          <a:ln w="6350">
+            <a:solidFill>
+              <a:srgbClr val="E6E8EC"/>
+            </a:solidFill>
+          </a:ln>
+          <a:effectLst/>
+        </p:spPr>
+        <p:style>
+          <a:lnRef idx="1">
+            <a:schemeClr val="accent1"/>
+          </a:lnRef>
+          <a:fillRef idx="3">
+            <a:schemeClr val="accent1"/>
+          </a:fillRef>
+          <a:effectRef idx="2">
+            <a:schemeClr val="accent1"/>
+          </a:effectRef>
+          <a:fontRef idx="minor">
+            <a:schemeClr val="lt1"/>
+          </a:fontRef>
+        </p:style>
+        <p:txBody>
+          <a:bodyPr rtlCol="0" anchor="ctr"/>
+          <a:lstStyle/>
+          <a:p>
+            <a:pPr algn="ctr"/>
+          </a:p>
+        </p:txBody>
+      </p:sp>
+      <p:sp>
+        <p:nvSpPr>
+          <p:cNvPr id="20" name="TextBox 19"/>
+          <p:cNvSpPr txBox="1"/>
+          <p:nvPr/>
+        </p:nvSpPr>
+        <p:spPr>
+          <a:xfrm>
+            <a:off x="777240" y="2953512"/>
+            <a:ext cx="1874520" cy="438912"/>
+          </a:xfrm>
+          <a:prstGeom prst="rect">
+            <a:avLst/>
+          </a:prstGeom>
+          <a:noFill/>
+        </p:spPr>
+        <p:txBody>
+          <a:bodyPr wrap="square" lIns="0" rIns="0" tIns="0" bIns="0" anchor="ctr">
+            <a:spAutoFit/>
+          </a:bodyPr>
+          <a:lstStyle/>
+          <a:p>
+            <a:pPr algn="l">
+              <a:lnSpc>
+                <a:spcPct val="115000"/>
+              </a:lnSpc>
+            </a:pPr>
+            <a:r>
+              <a:rPr sz="1250" b="1">
+                <a:solidFill>
+                  <a:srgbClr val="008E76"/>
+                </a:solidFill>
+                <a:latin typeface="Microsoft JhengHei"/>
+              </a:rPr>
+              <a:t>whisper base</a:t>
+            </a:r>
+          </a:p>
+        </p:txBody>
+      </p:sp>
+      <p:sp>
+        <p:nvSpPr>
+          <p:cNvPr id="21" name="TextBox 20"/>
+          <p:cNvSpPr txBox="1"/>
+          <p:nvPr/>
+        </p:nvSpPr>
+        <p:spPr>
+          <a:xfrm>
+            <a:off x="2898648" y="2953512"/>
+            <a:ext cx="1143000" cy="438912"/>
+          </a:xfrm>
+          <a:prstGeom prst="rect">
+            <a:avLst/>
+          </a:prstGeom>
+          <a:noFill/>
+        </p:spPr>
+        <p:txBody>
+          <a:bodyPr wrap="square" lIns="0" rIns="0" tIns="0" bIns="0" anchor="ctr">
+            <a:spAutoFit/>
+          </a:bodyPr>
+          <a:lstStyle/>
+          <a:p>
+            <a:pPr algn="l">
+              <a:lnSpc>
+                <a:spcPct val="115000"/>
+              </a:lnSpc>
+            </a:pPr>
+            <a:r>
+              <a:rPr sz="1200" b="1">
+                <a:solidFill>
+                  <a:srgbClr val="444444"/>
+                </a:solidFill>
+                <a:latin typeface="Arial"/>
+              </a:rPr>
+              <a:t>141 MB</a:t>
+            </a:r>
+          </a:p>
+        </p:txBody>
+      </p:sp>
+      <p:sp>
+        <p:nvSpPr>
+          <p:cNvPr id="22" name="TextBox 21"/>
+          <p:cNvSpPr txBox="1"/>
+          <p:nvPr/>
+        </p:nvSpPr>
+        <p:spPr>
+          <a:xfrm>
+            <a:off x="4087367" y="2953512"/>
+            <a:ext cx="1508760" cy="438912"/>
+          </a:xfrm>
+          <a:prstGeom prst="rect">
+            <a:avLst/>
+          </a:prstGeom>
+          <a:noFill/>
+        </p:spPr>
+        <p:txBody>
+          <a:bodyPr wrap="square" lIns="0" rIns="0" tIns="0" bIns="0" anchor="ctr">
+            <a:spAutoFit/>
+          </a:bodyPr>
+          <a:lstStyle/>
+          <a:p>
+            <a:pPr algn="l">
+              <a:lnSpc>
+                <a:spcPct val="115000"/>
+              </a:lnSpc>
+            </a:pPr>
+            <a:r>
+              <a:rPr sz="1100" b="0">
+                <a:solidFill>
+                  <a:srgbClr val="444444"/>
+                </a:solidFill>
+                <a:latin typeface="Microsoft JhengHei"/>
+              </a:rPr>
+              <a:t>多語（含中文）</a:t>
+            </a:r>
+          </a:p>
+        </p:txBody>
+      </p:sp>
+      <p:sp>
+        <p:nvSpPr>
+          <p:cNvPr id="23" name="TextBox 22"/>
+          <p:cNvSpPr txBox="1"/>
+          <p:nvPr/>
+        </p:nvSpPr>
+        <p:spPr>
+          <a:xfrm>
+            <a:off x="5641848" y="2953512"/>
+            <a:ext cx="1691639" cy="438912"/>
+          </a:xfrm>
+          <a:prstGeom prst="rect">
+            <a:avLst/>
+          </a:prstGeom>
+          <a:noFill/>
+        </p:spPr>
+        <p:txBody>
+          <a:bodyPr wrap="square" lIns="0" rIns="0" tIns="0" bIns="0" anchor="ctr">
+            <a:spAutoFit/>
+          </a:bodyPr>
+          <a:lstStyle/>
+          <a:p>
+            <a:pPr algn="l">
+              <a:lnSpc>
+                <a:spcPct val="115000"/>
+              </a:lnSpc>
+            </a:pPr>
+            <a:r>
+              <a:rPr sz="1150" b="1">
+                <a:solidFill>
+                  <a:srgbClr val="008E76"/>
+                </a:solidFill>
+                <a:latin typeface="Arial"/>
+              </a:rPr>
+              <a:t>6.8s</a:t>
+            </a:r>
+          </a:p>
+        </p:txBody>
+      </p:sp>
+      <p:sp>
+        <p:nvSpPr>
+          <p:cNvPr id="24" name="TextBox 23"/>
+          <p:cNvSpPr txBox="1"/>
+          <p:nvPr/>
+        </p:nvSpPr>
+        <p:spPr>
+          <a:xfrm>
+            <a:off x="7379208" y="2953512"/>
+            <a:ext cx="1874520" cy="438912"/>
+          </a:xfrm>
+          <a:prstGeom prst="rect">
+            <a:avLst/>
+          </a:prstGeom>
+          <a:noFill/>
+        </p:spPr>
+        <p:txBody>
+          <a:bodyPr wrap="square" lIns="0" rIns="0" tIns="0" bIns="0" anchor="ctr">
+            <a:spAutoFit/>
+          </a:bodyPr>
+          <a:lstStyle/>
+          <a:p>
+            <a:pPr algn="l">
+              <a:lnSpc>
+                <a:spcPct val="115000"/>
+              </a:lnSpc>
+            </a:pPr>
+            <a:r>
+              <a:rPr sz="1150" b="0">
+                <a:solidFill>
+                  <a:srgbClr val="444444"/>
+                </a:solidFill>
+                <a:latin typeface="Microsoft JhengHei"/>
+              </a:rPr>
+              <a:t>端到端 8/8</a:t>
+            </a:r>
+          </a:p>
+        </p:txBody>
+      </p:sp>
+      <p:sp>
+        <p:nvSpPr>
+          <p:cNvPr id="25" name="TextBox 24"/>
+          <p:cNvSpPr txBox="1"/>
+          <p:nvPr/>
+        </p:nvSpPr>
+        <p:spPr>
+          <a:xfrm>
+            <a:off x="9299448" y="2953512"/>
+            <a:ext cx="2148840" cy="438912"/>
+          </a:xfrm>
+          <a:prstGeom prst="rect">
+            <a:avLst/>
+          </a:prstGeom>
+          <a:noFill/>
+        </p:spPr>
+        <p:txBody>
+          <a:bodyPr wrap="square" lIns="0" rIns="0" tIns="0" bIns="0" anchor="ctr">
+            <a:spAutoFit/>
+          </a:bodyPr>
+          <a:lstStyle/>
+          <a:p>
+            <a:pPr algn="l">
+              <a:lnSpc>
+                <a:spcPct val="115000"/>
+              </a:lnSpc>
+            </a:pPr>
+            <a:r>
+              <a:rPr sz="1150" b="1">
+                <a:solidFill>
+                  <a:srgbClr val="008E76"/>
+                </a:solidFill>
+                <a:latin typeface="Microsoft JhengHei"/>
+              </a:rPr>
+              <a:t>★ 中文版採用</a:t>
+            </a:r>
+          </a:p>
+        </p:txBody>
+      </p:sp>
+      <p:sp>
+        <p:nvSpPr>
+          <p:cNvPr id="26" name="Rectangle 25"/>
+          <p:cNvSpPr/>
+          <p:nvPr/>
+        </p:nvSpPr>
+        <p:spPr>
+          <a:xfrm>
+            <a:off x="667512" y="3483864"/>
+            <a:ext cx="10853928" cy="621792"/>
+          </a:xfrm>
+          <a:prstGeom prst="rect">
+            <a:avLst/>
+          </a:prstGeom>
+          <a:solidFill>
+            <a:srgbClr val="FFFFFF"/>
+          </a:solidFill>
+          <a:ln w="6350">
+            <a:solidFill>
+              <a:srgbClr val="E6E8EC"/>
+            </a:solidFill>
+          </a:ln>
+          <a:effectLst/>
+        </p:spPr>
+        <p:style>
+          <a:lnRef idx="1">
+            <a:schemeClr val="accent1"/>
+          </a:lnRef>
+          <a:fillRef idx="3">
+            <a:schemeClr val="accent1"/>
+          </a:fillRef>
+          <a:effectRef idx="2">
+            <a:schemeClr val="accent1"/>
+          </a:effectRef>
+          <a:fontRef idx="minor">
+            <a:schemeClr val="lt1"/>
+          </a:fontRef>
+        </p:style>
+        <p:txBody>
+          <a:bodyPr rtlCol="0" anchor="ctr"/>
+          <a:lstStyle/>
+          <a:p>
+            <a:pPr algn="ctr"/>
+          </a:p>
+        </p:txBody>
+      </p:sp>
+      <p:sp>
+        <p:nvSpPr>
+          <p:cNvPr id="27" name="TextBox 26"/>
+          <p:cNvSpPr txBox="1"/>
+          <p:nvPr/>
+        </p:nvSpPr>
+        <p:spPr>
+          <a:xfrm>
+            <a:off x="777240" y="3575304"/>
+            <a:ext cx="1874520" cy="438912"/>
+          </a:xfrm>
+          <a:prstGeom prst="rect">
+            <a:avLst/>
+          </a:prstGeom>
+          <a:noFill/>
+        </p:spPr>
+        <p:txBody>
+          <a:bodyPr wrap="square" lIns="0" rIns="0" tIns="0" bIns="0" anchor="ctr">
+            <a:spAutoFit/>
+          </a:bodyPr>
+          <a:lstStyle/>
+          <a:p>
+            <a:pPr algn="l">
+              <a:lnSpc>
+                <a:spcPct val="115000"/>
+              </a:lnSpc>
+            </a:pPr>
+            <a:r>
+              <a:rPr sz="1250" b="0">
+                <a:solidFill>
+                  <a:srgbClr val="1A1A2E"/>
+                </a:solidFill>
+                <a:latin typeface="Microsoft JhengHei"/>
+              </a:rPr>
+              <a:t>whisper base.en</a:t>
+            </a:r>
+          </a:p>
+        </p:txBody>
+      </p:sp>
+      <p:sp>
+        <p:nvSpPr>
+          <p:cNvPr id="28" name="TextBox 27"/>
+          <p:cNvSpPr txBox="1"/>
+          <p:nvPr/>
+        </p:nvSpPr>
+        <p:spPr>
+          <a:xfrm>
+            <a:off x="2898648" y="3575304"/>
+            <a:ext cx="1143000" cy="438912"/>
+          </a:xfrm>
+          <a:prstGeom prst="rect">
+            <a:avLst/>
+          </a:prstGeom>
+          <a:noFill/>
+        </p:spPr>
+        <p:txBody>
+          <a:bodyPr wrap="square" lIns="0" rIns="0" tIns="0" bIns="0" anchor="ctr">
+            <a:spAutoFit/>
+          </a:bodyPr>
+          <a:lstStyle/>
+          <a:p>
+            <a:pPr algn="l">
+              <a:lnSpc>
+                <a:spcPct val="115000"/>
+              </a:lnSpc>
+            </a:pPr>
+            <a:r>
+              <a:rPr sz="1200" b="0">
+                <a:solidFill>
+                  <a:srgbClr val="444444"/>
+                </a:solidFill>
+                <a:latin typeface="Arial"/>
+              </a:rPr>
+              <a:t>67 MB</a:t>
+            </a:r>
+          </a:p>
+        </p:txBody>
+      </p:sp>
+      <p:sp>
+        <p:nvSpPr>
+          <p:cNvPr id="29" name="TextBox 28"/>
+          <p:cNvSpPr txBox="1"/>
+          <p:nvPr/>
+        </p:nvSpPr>
+        <p:spPr>
+          <a:xfrm>
+            <a:off x="4087367" y="3575304"/>
+            <a:ext cx="1508760" cy="438912"/>
+          </a:xfrm>
+          <a:prstGeom prst="rect">
+            <a:avLst/>
+          </a:prstGeom>
+          <a:noFill/>
+        </p:spPr>
+        <p:txBody>
+          <a:bodyPr wrap="square" lIns="0" rIns="0" tIns="0" bIns="0" anchor="ctr">
+            <a:spAutoFit/>
+          </a:bodyPr>
+          <a:lstStyle/>
+          <a:p>
+            <a:pPr algn="l">
+              <a:lnSpc>
+                <a:spcPct val="115000"/>
+              </a:lnSpc>
+            </a:pPr>
+            <a:r>
+              <a:rPr sz="1100" b="0">
+                <a:solidFill>
+                  <a:srgbClr val="444444"/>
+                </a:solidFill>
+                <a:latin typeface="Microsoft JhengHei"/>
+              </a:rPr>
+              <a:t>英文專用</a:t>
+            </a:r>
+          </a:p>
+        </p:txBody>
+      </p:sp>
+      <p:sp>
+        <p:nvSpPr>
+          <p:cNvPr id="30" name="TextBox 29"/>
+          <p:cNvSpPr txBox="1"/>
+          <p:nvPr/>
+        </p:nvSpPr>
+        <p:spPr>
+          <a:xfrm>
+            <a:off x="5641848" y="3575304"/>
+            <a:ext cx="1691639" cy="438912"/>
+          </a:xfrm>
+          <a:prstGeom prst="rect">
+            <a:avLst/>
+          </a:prstGeom>
+          <a:noFill/>
+        </p:spPr>
+        <p:txBody>
+          <a:bodyPr wrap="square" lIns="0" rIns="0" tIns="0" bIns="0" anchor="ctr">
+            <a:spAutoFit/>
+          </a:bodyPr>
+          <a:lstStyle/>
+          <a:p>
+            <a:pPr algn="l">
+              <a:lnSpc>
+                <a:spcPct val="115000"/>
+              </a:lnSpc>
+            </a:pPr>
+            <a:r>
+              <a:rPr sz="1150" b="0">
+                <a:solidFill>
+                  <a:srgbClr val="555555"/>
+                </a:solidFill>
+                <a:latin typeface="Arial"/>
+              </a:rPr>
+              <a:t>2.33s</a:t>
+            </a:r>
+          </a:p>
+        </p:txBody>
+      </p:sp>
+      <p:sp>
+        <p:nvSpPr>
+          <p:cNvPr id="31" name="TextBox 30"/>
+          <p:cNvSpPr txBox="1"/>
+          <p:nvPr/>
+        </p:nvSpPr>
+        <p:spPr>
+          <a:xfrm>
+            <a:off x="7379208" y="3575304"/>
+            <a:ext cx="1874520" cy="438912"/>
+          </a:xfrm>
+          <a:prstGeom prst="rect">
+            <a:avLst/>
+          </a:prstGeom>
+          <a:noFill/>
+        </p:spPr>
+        <p:txBody>
+          <a:bodyPr wrap="square" lIns="0" rIns="0" tIns="0" bIns="0" anchor="ctr">
+            <a:spAutoFit/>
+          </a:bodyPr>
+          <a:lstStyle/>
+          <a:p>
+            <a:pPr algn="l">
+              <a:lnSpc>
+                <a:spcPct val="115000"/>
+              </a:lnSpc>
+            </a:pPr>
+            <a:r>
+              <a:rPr sz="1150" b="0">
+                <a:solidFill>
+                  <a:srgbClr val="444444"/>
+                </a:solidFill>
+                <a:latin typeface="Microsoft JhengHei"/>
+              </a:rPr>
+              <a:t>WER 10.2%</a:t>
+            </a:r>
+          </a:p>
+        </p:txBody>
+      </p:sp>
+      <p:sp>
+        <p:nvSpPr>
+          <p:cNvPr id="32" name="TextBox 31"/>
+          <p:cNvSpPr txBox="1"/>
+          <p:nvPr/>
+        </p:nvSpPr>
+        <p:spPr>
+          <a:xfrm>
+            <a:off x="9299448" y="3575304"/>
+            <a:ext cx="2148840" cy="438912"/>
+          </a:xfrm>
+          <a:prstGeom prst="rect">
+            <a:avLst/>
+          </a:prstGeom>
+          <a:noFill/>
+        </p:spPr>
+        <p:txBody>
+          <a:bodyPr wrap="square" lIns="0" rIns="0" tIns="0" bIns="0" anchor="ctr">
+            <a:spAutoFit/>
+          </a:bodyPr>
+          <a:lstStyle/>
+          <a:p>
+            <a:pPr algn="l">
+              <a:lnSpc>
+                <a:spcPct val="115000"/>
+              </a:lnSpc>
+            </a:pPr>
+            <a:r>
+              <a:rPr sz="1150" b="0">
+                <a:solidFill>
+                  <a:srgbClr val="555555"/>
+                </a:solidFill>
+                <a:latin typeface="Microsoft JhengHei"/>
+              </a:rPr>
+              <a:t>比 tiny.en 慢又沒更準</a:t>
+            </a:r>
+          </a:p>
+        </p:txBody>
+      </p:sp>
+      <p:sp>
+        <p:nvSpPr>
+          <p:cNvPr id="33" name="Rectangle 32"/>
+          <p:cNvSpPr/>
+          <p:nvPr/>
+        </p:nvSpPr>
+        <p:spPr>
+          <a:xfrm>
+            <a:off x="667512" y="4105656"/>
             <a:ext cx="10853928" cy="621792"/>
           </a:xfrm>
           <a:prstGeom prst="rect">
@@ -16327,13 +17109,13 @@
       </p:sp>
       <p:sp>
         <p:nvSpPr>
-          <p:cNvPr id="20" name="TextBox 19"/>
-          <p:cNvSpPr txBox="1"/>
-          <p:nvPr/>
-        </p:nvSpPr>
-        <p:spPr>
-          <a:xfrm>
-            <a:off x="777240" y="2953512"/>
+          <p:cNvPr id="34" name="TextBox 33"/>
+          <p:cNvSpPr txBox="1"/>
+          <p:nvPr/>
+        </p:nvSpPr>
+        <p:spPr>
+          <a:xfrm>
+            <a:off x="777240" y="4197096"/>
             <a:ext cx="1874520" cy="438912"/>
           </a:xfrm>
           <a:prstGeom prst="rect">
@@ -16359,20 +17141,20 @@
                 </a:solidFill>
                 <a:latin typeface="Microsoft JhengHei"/>
               </a:rPr>
-              <a:t>Whisper small</a:t>
-            </a:r>
-          </a:p>
-        </p:txBody>
-      </p:sp>
-      <p:sp>
-        <p:nvSpPr>
-          <p:cNvPr id="21" name="TextBox 20"/>
-          <p:cNvSpPr txBox="1"/>
-          <p:nvPr/>
-        </p:nvSpPr>
-        <p:spPr>
-          <a:xfrm>
-            <a:off x="2898648" y="2953512"/>
+              <a:t>whisper tiny（多語）</a:t>
+            </a:r>
+          </a:p>
+        </p:txBody>
+      </p:sp>
+      <p:sp>
+        <p:nvSpPr>
+          <p:cNvPr id="35" name="TextBox 34"/>
+          <p:cNvSpPr txBox="1"/>
+          <p:nvPr/>
+        </p:nvSpPr>
+        <p:spPr>
+          <a:xfrm>
+            <a:off x="2898648" y="4197096"/>
             <a:ext cx="1143000" cy="438912"/>
           </a:xfrm>
           <a:prstGeom prst="rect">
@@ -16398,21 +17180,21 @@
                 </a:solidFill>
                 <a:latin typeface="Arial"/>
               </a:rPr>
-              <a:t>244M</a:t>
-            </a:r>
-          </a:p>
-        </p:txBody>
-      </p:sp>
-      <p:sp>
-        <p:nvSpPr>
-          <p:cNvPr id="22" name="TextBox 21"/>
-          <p:cNvSpPr txBox="1"/>
-          <p:nvPr/>
-        </p:nvSpPr>
-        <p:spPr>
-          <a:xfrm>
-            <a:off x="4270248" y="2953512"/>
-            <a:ext cx="1783080" cy="438912"/>
+              <a:t>74 MB</a:t>
+            </a:r>
+          </a:p>
+        </p:txBody>
+      </p:sp>
+      <p:sp>
+        <p:nvSpPr>
+          <p:cNvPr id="36" name="TextBox 35"/>
+          <p:cNvSpPr txBox="1"/>
+          <p:nvPr/>
+        </p:nvSpPr>
+        <p:spPr>
+          <a:xfrm>
+            <a:off x="4087367" y="4197096"/>
+            <a:ext cx="1508760" cy="438912"/>
           </a:xfrm>
           <a:prstGeom prst="rect">
             <a:avLst/>
@@ -16437,21 +17219,21 @@
                 </a:solidFill>
                 <a:latin typeface="Microsoft JhengHei"/>
               </a:rPr>
-              <a:t>whisper.cpp 另一套</a:t>
-            </a:r>
-          </a:p>
-        </p:txBody>
-      </p:sp>
-      <p:sp>
-        <p:nvSpPr>
-          <p:cNvPr id="23" name="TextBox 22"/>
-          <p:cNvSpPr txBox="1"/>
-          <p:nvPr/>
-        </p:nvSpPr>
-        <p:spPr>
-          <a:xfrm>
-            <a:off x="6281928" y="2953512"/>
-            <a:ext cx="1417320" cy="438912"/>
+              <a:t>多語</a:t>
+            </a:r>
+          </a:p>
+        </p:txBody>
+      </p:sp>
+      <p:sp>
+        <p:nvSpPr>
+          <p:cNvPr id="37" name="TextBox 36"/>
+          <p:cNvSpPr txBox="1"/>
+          <p:nvPr/>
+        </p:nvSpPr>
+        <p:spPr>
+          <a:xfrm>
+            <a:off x="5641848" y="4197096"/>
+            <a:ext cx="1691639" cy="438912"/>
           </a:xfrm>
           <a:prstGeom prst="rect">
             <a:avLst/>
@@ -16470,27 +17252,27 @@
               </a:lnSpc>
             </a:pPr>
             <a:r>
-              <a:rPr sz="1100" b="0">
+              <a:rPr sz="1150" b="0">
                 <a:solidFill>
                   <a:srgbClr val="555555"/>
                 </a:solidFill>
-                <a:latin typeface="Microsoft JhengHei"/>
-              </a:rPr>
-              <a:t>可但中文弱</a:t>
-            </a:r>
-          </a:p>
-        </p:txBody>
-      </p:sp>
-      <p:sp>
-        <p:nvSpPr>
-          <p:cNvPr id="24" name="TextBox 23"/>
-          <p:cNvSpPr txBox="1"/>
-          <p:nvPr/>
-        </p:nvSpPr>
-        <p:spPr>
-          <a:xfrm>
-            <a:off x="7927848" y="2953512"/>
-            <a:ext cx="1325880" cy="438912"/>
+                <a:latin typeface="Arial"/>
+              </a:rPr>
+              <a:t>0.97s</a:t>
+            </a:r>
+          </a:p>
+        </p:txBody>
+      </p:sp>
+      <p:sp>
+        <p:nvSpPr>
+          <p:cNvPr id="38" name="TextBox 37"/>
+          <p:cNvSpPr txBox="1"/>
+          <p:nvPr/>
+        </p:nvSpPr>
+        <p:spPr>
+          <a:xfrm>
+            <a:off x="7379208" y="4197096"/>
+            <a:ext cx="1874520" cy="438912"/>
           </a:xfrm>
           <a:prstGeom prst="rect">
             <a:avLst/>
@@ -16513,23 +17295,23 @@
                 <a:solidFill>
                   <a:srgbClr val="444444"/>
                 </a:solidFill>
-                <a:latin typeface="Arial"/>
-              </a:rPr>
-              <a:t>~20%</a:t>
-            </a:r>
-          </a:p>
-        </p:txBody>
-      </p:sp>
-      <p:sp>
-        <p:nvSpPr>
-          <p:cNvPr id="25" name="TextBox 24"/>
-          <p:cNvSpPr txBox="1"/>
-          <p:nvPr/>
-        </p:nvSpPr>
-        <p:spPr>
-          <a:xfrm>
-            <a:off x="9482328" y="2953512"/>
-            <a:ext cx="1965960" cy="438912"/>
+                <a:latin typeface="Microsoft JhengHei"/>
+              </a:rPr>
+              <a:t>中文 1/8 ×</a:t>
+            </a:r>
+          </a:p>
+        </p:txBody>
+      </p:sp>
+      <p:sp>
+        <p:nvSpPr>
+          <p:cNvPr id="39" name="TextBox 38"/>
+          <p:cNvSpPr txBox="1"/>
+          <p:nvPr/>
+        </p:nvSpPr>
+        <p:spPr>
+          <a:xfrm>
+            <a:off x="9299448" y="4197096"/>
+            <a:ext cx="2148840" cy="438912"/>
           </a:xfrm>
           <a:prstGeom prst="rect">
             <a:avLst/>
@@ -16554,20 +17336,20 @@
                 </a:solidFill>
                 <a:latin typeface="Microsoft JhengHei"/>
               </a:rPr>
-              <a:t>中文 CER 高</a:t>
-            </a:r>
-          </a:p>
-        </p:txBody>
-      </p:sp>
-      <p:sp>
-        <p:nvSpPr>
-          <p:cNvPr id="26" name="Rectangle 25"/>
+              <a:t>中文太差不能用</a:t>
+            </a:r>
+          </a:p>
+        </p:txBody>
+      </p:sp>
+      <p:sp>
+        <p:nvSpPr>
+          <p:cNvPr id="40" name="Rectangle 39"/>
           <p:cNvSpPr/>
           <p:nvPr/>
         </p:nvSpPr>
         <p:spPr>
           <a:xfrm>
-            <a:off x="667512" y="3483864"/>
+            <a:off x="667512" y="4727448"/>
             <a:ext cx="10853928" cy="621792"/>
           </a:xfrm>
           <a:prstGeom prst="rect">
@@ -16607,566 +17389,6 @@
       </p:sp>
       <p:sp>
         <p:nvSpPr>
-          <p:cNvPr id="27" name="TextBox 26"/>
-          <p:cNvSpPr txBox="1"/>
-          <p:nvPr/>
-        </p:nvSpPr>
-        <p:spPr>
-          <a:xfrm>
-            <a:off x="777240" y="3575304"/>
-            <a:ext cx="1874520" cy="438912"/>
-          </a:xfrm>
-          <a:prstGeom prst="rect">
-            <a:avLst/>
-          </a:prstGeom>
-          <a:noFill/>
-        </p:spPr>
-        <p:txBody>
-          <a:bodyPr wrap="square" lIns="0" rIns="0" tIns="0" bIns="0" anchor="ctr">
-            <a:spAutoFit/>
-          </a:bodyPr>
-          <a:lstStyle/>
-          <a:p>
-            <a:pPr algn="l">
-              <a:lnSpc>
-                <a:spcPct val="115000"/>
-              </a:lnSpc>
-            </a:pPr>
-            <a:r>
-              <a:rPr sz="1250" b="0">
-                <a:solidFill>
-                  <a:srgbClr val="1A1A2E"/>
-                </a:solidFill>
-                <a:latin typeface="Microsoft JhengHei"/>
-              </a:rPr>
-              <a:t>Whisper large-v3</a:t>
-            </a:r>
-          </a:p>
-        </p:txBody>
-      </p:sp>
-      <p:sp>
-        <p:nvSpPr>
-          <p:cNvPr id="28" name="TextBox 27"/>
-          <p:cNvSpPr txBox="1"/>
-          <p:nvPr/>
-        </p:nvSpPr>
-        <p:spPr>
-          <a:xfrm>
-            <a:off x="2898648" y="3575304"/>
-            <a:ext cx="1143000" cy="438912"/>
-          </a:xfrm>
-          <a:prstGeom prst="rect">
-            <a:avLst/>
-          </a:prstGeom>
-          <a:noFill/>
-        </p:spPr>
-        <p:txBody>
-          <a:bodyPr wrap="square" lIns="0" rIns="0" tIns="0" bIns="0" anchor="ctr">
-            <a:spAutoFit/>
-          </a:bodyPr>
-          <a:lstStyle/>
-          <a:p>
-            <a:pPr algn="l">
-              <a:lnSpc>
-                <a:spcPct val="115000"/>
-              </a:lnSpc>
-            </a:pPr>
-            <a:r>
-              <a:rPr sz="1200" b="0">
-                <a:solidFill>
-                  <a:srgbClr val="444444"/>
-                </a:solidFill>
-                <a:latin typeface="Arial"/>
-              </a:rPr>
-              <a:t>1.55B</a:t>
-            </a:r>
-          </a:p>
-        </p:txBody>
-      </p:sp>
-      <p:sp>
-        <p:nvSpPr>
-          <p:cNvPr id="29" name="TextBox 28"/>
-          <p:cNvSpPr txBox="1"/>
-          <p:nvPr/>
-        </p:nvSpPr>
-        <p:spPr>
-          <a:xfrm>
-            <a:off x="4270248" y="3575304"/>
-            <a:ext cx="1783080" cy="438912"/>
-          </a:xfrm>
-          <a:prstGeom prst="rect">
-            <a:avLst/>
-          </a:prstGeom>
-          <a:noFill/>
-        </p:spPr>
-        <p:txBody>
-          <a:bodyPr wrap="square" lIns="0" rIns="0" tIns="0" bIns="0" anchor="ctr">
-            <a:spAutoFit/>
-          </a:bodyPr>
-          <a:lstStyle/>
-          <a:p>
-            <a:pPr algn="l">
-              <a:lnSpc>
-                <a:spcPct val="115000"/>
-              </a:lnSpc>
-            </a:pPr>
-            <a:r>
-              <a:rPr sz="1100" b="0">
-                <a:solidFill>
-                  <a:srgbClr val="444444"/>
-                </a:solidFill>
-                <a:latin typeface="Microsoft JhengHei"/>
-              </a:rPr>
-              <a:t>太重 / 需 GPU</a:t>
-            </a:r>
-          </a:p>
-        </p:txBody>
-      </p:sp>
-      <p:sp>
-        <p:nvSpPr>
-          <p:cNvPr id="30" name="TextBox 29"/>
-          <p:cNvSpPr txBox="1"/>
-          <p:nvPr/>
-        </p:nvSpPr>
-        <p:spPr>
-          <a:xfrm>
-            <a:off x="6281928" y="3575304"/>
-            <a:ext cx="1417320" cy="438912"/>
-          </a:xfrm>
-          <a:prstGeom prst="rect">
-            <a:avLst/>
-          </a:prstGeom>
-          <a:noFill/>
-        </p:spPr>
-        <p:txBody>
-          <a:bodyPr wrap="square" lIns="0" rIns="0" tIns="0" bIns="0" anchor="ctr">
-            <a:spAutoFit/>
-          </a:bodyPr>
-          <a:lstStyle/>
-          <a:p>
-            <a:pPr algn="l">
-              <a:lnSpc>
-                <a:spcPct val="115000"/>
-              </a:lnSpc>
-            </a:pPr>
-            <a:r>
-              <a:rPr sz="1100" b="0">
-                <a:solidFill>
-                  <a:srgbClr val="555555"/>
-                </a:solidFill>
-                <a:latin typeface="Microsoft JhengHei"/>
-              </a:rPr>
-              <a:t>✕ RPi5 跑不動</a:t>
-            </a:r>
-          </a:p>
-        </p:txBody>
-      </p:sp>
-      <p:sp>
-        <p:nvSpPr>
-          <p:cNvPr id="31" name="TextBox 30"/>
-          <p:cNvSpPr txBox="1"/>
-          <p:nvPr/>
-        </p:nvSpPr>
-        <p:spPr>
-          <a:xfrm>
-            <a:off x="7927848" y="3575304"/>
-            <a:ext cx="1325880" cy="438912"/>
-          </a:xfrm>
-          <a:prstGeom prst="rect">
-            <a:avLst/>
-          </a:prstGeom>
-          <a:noFill/>
-        </p:spPr>
-        <p:txBody>
-          <a:bodyPr wrap="square" lIns="0" rIns="0" tIns="0" bIns="0" anchor="ctr">
-            <a:spAutoFit/>
-          </a:bodyPr>
-          <a:lstStyle/>
-          <a:p>
-            <a:pPr algn="l">
-              <a:lnSpc>
-                <a:spcPct val="115000"/>
-              </a:lnSpc>
-            </a:pPr>
-            <a:r>
-              <a:rPr sz="1150" b="0">
-                <a:solidFill>
-                  <a:srgbClr val="444444"/>
-                </a:solidFill>
-                <a:latin typeface="Arial"/>
-              </a:rPr>
-              <a:t>~20%</a:t>
-            </a:r>
-          </a:p>
-        </p:txBody>
-      </p:sp>
-      <p:sp>
-        <p:nvSpPr>
-          <p:cNvPr id="32" name="TextBox 31"/>
-          <p:cNvSpPr txBox="1"/>
-          <p:nvPr/>
-        </p:nvSpPr>
-        <p:spPr>
-          <a:xfrm>
-            <a:off x="9482328" y="3575304"/>
-            <a:ext cx="1965960" cy="438912"/>
-          </a:xfrm>
-          <a:prstGeom prst="rect">
-            <a:avLst/>
-          </a:prstGeom>
-          <a:noFill/>
-        </p:spPr>
-        <p:txBody>
-          <a:bodyPr wrap="square" lIns="0" rIns="0" tIns="0" bIns="0" anchor="ctr">
-            <a:spAutoFit/>
-          </a:bodyPr>
-          <a:lstStyle/>
-          <a:p>
-            <a:pPr algn="l">
-              <a:lnSpc>
-                <a:spcPct val="115000"/>
-              </a:lnSpc>
-            </a:pPr>
-            <a:r>
-              <a:rPr sz="1150" b="0">
-                <a:solidFill>
-                  <a:srgbClr val="555555"/>
-                </a:solidFill>
-                <a:latin typeface="Microsoft JhengHei"/>
-              </a:rPr>
-              <a:t>太大＋雲端傾向</a:t>
-            </a:r>
-          </a:p>
-        </p:txBody>
-      </p:sp>
-      <p:sp>
-        <p:nvSpPr>
-          <p:cNvPr id="33" name="Rectangle 32"/>
-          <p:cNvSpPr/>
-          <p:nvPr/>
-        </p:nvSpPr>
-        <p:spPr>
-          <a:xfrm>
-            <a:off x="667512" y="4105656"/>
-            <a:ext cx="10853928" cy="621792"/>
-          </a:xfrm>
-          <a:prstGeom prst="rect">
-            <a:avLst/>
-          </a:prstGeom>
-          <a:solidFill>
-            <a:srgbClr val="F4F6F8"/>
-          </a:solidFill>
-          <a:ln w="6350">
-            <a:solidFill>
-              <a:srgbClr val="E6E8EC"/>
-            </a:solidFill>
-          </a:ln>
-          <a:effectLst/>
-        </p:spPr>
-        <p:style>
-          <a:lnRef idx="1">
-            <a:schemeClr val="accent1"/>
-          </a:lnRef>
-          <a:fillRef idx="3">
-            <a:schemeClr val="accent1"/>
-          </a:fillRef>
-          <a:effectRef idx="2">
-            <a:schemeClr val="accent1"/>
-          </a:effectRef>
-          <a:fontRef idx="minor">
-            <a:schemeClr val="lt1"/>
-          </a:fontRef>
-        </p:style>
-        <p:txBody>
-          <a:bodyPr rtlCol="0" anchor="ctr"/>
-          <a:lstStyle/>
-          <a:p>
-            <a:pPr algn="ctr"/>
-          </a:p>
-        </p:txBody>
-      </p:sp>
-      <p:sp>
-        <p:nvSpPr>
-          <p:cNvPr id="34" name="TextBox 33"/>
-          <p:cNvSpPr txBox="1"/>
-          <p:nvPr/>
-        </p:nvSpPr>
-        <p:spPr>
-          <a:xfrm>
-            <a:off x="777240" y="4197096"/>
-            <a:ext cx="1874520" cy="438912"/>
-          </a:xfrm>
-          <a:prstGeom prst="rect">
-            <a:avLst/>
-          </a:prstGeom>
-          <a:noFill/>
-        </p:spPr>
-        <p:txBody>
-          <a:bodyPr wrap="square" lIns="0" rIns="0" tIns="0" bIns="0" anchor="ctr">
-            <a:spAutoFit/>
-          </a:bodyPr>
-          <a:lstStyle/>
-          <a:p>
-            <a:pPr algn="l">
-              <a:lnSpc>
-                <a:spcPct val="115000"/>
-              </a:lnSpc>
-            </a:pPr>
-            <a:r>
-              <a:rPr sz="1250" b="0">
-                <a:solidFill>
-                  <a:srgbClr val="1A1A2E"/>
-                </a:solidFill>
-                <a:latin typeface="Microsoft JhengHei"/>
-              </a:rPr>
-              <a:t>SenseVoice-Small</a:t>
-            </a:r>
-          </a:p>
-        </p:txBody>
-      </p:sp>
-      <p:sp>
-        <p:nvSpPr>
-          <p:cNvPr id="35" name="TextBox 34"/>
-          <p:cNvSpPr txBox="1"/>
-          <p:nvPr/>
-        </p:nvSpPr>
-        <p:spPr>
-          <a:xfrm>
-            <a:off x="2898648" y="4197096"/>
-            <a:ext cx="1143000" cy="438912"/>
-          </a:xfrm>
-          <a:prstGeom prst="rect">
-            <a:avLst/>
-          </a:prstGeom>
-          <a:noFill/>
-        </p:spPr>
-        <p:txBody>
-          <a:bodyPr wrap="square" lIns="0" rIns="0" tIns="0" bIns="0" anchor="ctr">
-            <a:spAutoFit/>
-          </a:bodyPr>
-          <a:lstStyle/>
-          <a:p>
-            <a:pPr algn="l">
-              <a:lnSpc>
-                <a:spcPct val="115000"/>
-              </a:lnSpc>
-            </a:pPr>
-            <a:r>
-              <a:rPr sz="1200" b="0">
-                <a:solidFill>
-                  <a:srgbClr val="444444"/>
-                </a:solidFill>
-                <a:latin typeface="Arial"/>
-              </a:rPr>
-              <a:t>234M</a:t>
-            </a:r>
-          </a:p>
-        </p:txBody>
-      </p:sp>
-      <p:sp>
-        <p:nvSpPr>
-          <p:cNvPr id="36" name="TextBox 35"/>
-          <p:cNvSpPr txBox="1"/>
-          <p:nvPr/>
-        </p:nvSpPr>
-        <p:spPr>
-          <a:xfrm>
-            <a:off x="4270248" y="4197096"/>
-            <a:ext cx="1783080" cy="438912"/>
-          </a:xfrm>
-          <a:prstGeom prst="rect">
-            <a:avLst/>
-          </a:prstGeom>
-          <a:noFill/>
-        </p:spPr>
-        <p:txBody>
-          <a:bodyPr wrap="square" lIns="0" rIns="0" tIns="0" bIns="0" anchor="ctr">
-            <a:spAutoFit/>
-          </a:bodyPr>
-          <a:lstStyle/>
-          <a:p>
-            <a:pPr algn="l">
-              <a:lnSpc>
-                <a:spcPct val="115000"/>
-              </a:lnSpc>
-            </a:pPr>
-            <a:r>
-              <a:rPr sz="1100" b="0">
-                <a:solidFill>
-                  <a:srgbClr val="444444"/>
-                </a:solidFill>
-                <a:latin typeface="Microsoft JhengHei"/>
-              </a:rPr>
-              <a:t>sherpa-onnx 另整合</a:t>
-            </a:r>
-          </a:p>
-        </p:txBody>
-      </p:sp>
-      <p:sp>
-        <p:nvSpPr>
-          <p:cNvPr id="37" name="TextBox 36"/>
-          <p:cNvSpPr txBox="1"/>
-          <p:nvPr/>
-        </p:nvSpPr>
-        <p:spPr>
-          <a:xfrm>
-            <a:off x="6281928" y="4197096"/>
-            <a:ext cx="1417320" cy="438912"/>
-          </a:xfrm>
-          <a:prstGeom prst="rect">
-            <a:avLst/>
-          </a:prstGeom>
-          <a:noFill/>
-        </p:spPr>
-        <p:txBody>
-          <a:bodyPr wrap="square" lIns="0" rIns="0" tIns="0" bIns="0" anchor="ctr">
-            <a:spAutoFit/>
-          </a:bodyPr>
-          <a:lstStyle/>
-          <a:p>
-            <a:pPr algn="l">
-              <a:lnSpc>
-                <a:spcPct val="115000"/>
-              </a:lnSpc>
-            </a:pPr>
-            <a:r>
-              <a:rPr sz="1100" b="0">
-                <a:solidFill>
-                  <a:srgbClr val="555555"/>
-                </a:solidFill>
-                <a:latin typeface="Microsoft JhengHei"/>
-              </a:rPr>
-              <a:t>✓ 快</a:t>
-            </a:r>
-          </a:p>
-        </p:txBody>
-      </p:sp>
-      <p:sp>
-        <p:nvSpPr>
-          <p:cNvPr id="38" name="TextBox 37"/>
-          <p:cNvSpPr txBox="1"/>
-          <p:nvPr/>
-        </p:nvSpPr>
-        <p:spPr>
-          <a:xfrm>
-            <a:off x="7927848" y="4197096"/>
-            <a:ext cx="1325880" cy="438912"/>
-          </a:xfrm>
-          <a:prstGeom prst="rect">
-            <a:avLst/>
-          </a:prstGeom>
-          <a:noFill/>
-        </p:spPr>
-        <p:txBody>
-          <a:bodyPr wrap="square" lIns="0" rIns="0" tIns="0" bIns="0" anchor="ctr">
-            <a:spAutoFit/>
-          </a:bodyPr>
-          <a:lstStyle/>
-          <a:p>
-            <a:pPr algn="l">
-              <a:lnSpc>
-                <a:spcPct val="115000"/>
-              </a:lnSpc>
-            </a:pPr>
-            <a:r>
-              <a:rPr sz="1150" b="0">
-                <a:solidFill>
-                  <a:srgbClr val="444444"/>
-                </a:solidFill>
-                <a:latin typeface="Arial"/>
-              </a:rPr>
-              <a:t>~8%</a:t>
-            </a:r>
-          </a:p>
-        </p:txBody>
-      </p:sp>
-      <p:sp>
-        <p:nvSpPr>
-          <p:cNvPr id="39" name="TextBox 38"/>
-          <p:cNvSpPr txBox="1"/>
-          <p:nvPr/>
-        </p:nvSpPr>
-        <p:spPr>
-          <a:xfrm>
-            <a:off x="9482328" y="4197096"/>
-            <a:ext cx="1965960" cy="438912"/>
-          </a:xfrm>
-          <a:prstGeom prst="rect">
-            <a:avLst/>
-          </a:prstGeom>
-          <a:noFill/>
-        </p:spPr>
-        <p:txBody>
-          <a:bodyPr wrap="square" lIns="0" rIns="0" tIns="0" bIns="0" anchor="ctr">
-            <a:spAutoFit/>
-          </a:bodyPr>
-          <a:lstStyle/>
-          <a:p>
-            <a:pPr algn="l">
-              <a:lnSpc>
-                <a:spcPct val="115000"/>
-              </a:lnSpc>
-            </a:pPr>
-            <a:r>
-              <a:rPr sz="1150" b="0">
-                <a:solidFill>
-                  <a:srgbClr val="555555"/>
-                </a:solidFill>
-                <a:latin typeface="Microsoft JhengHei"/>
-              </a:rPr>
-              <a:t>要重整合，展前風險</a:t>
-            </a:r>
-          </a:p>
-        </p:txBody>
-      </p:sp>
-      <p:sp>
-        <p:nvSpPr>
-          <p:cNvPr id="40" name="Rectangle 39"/>
-          <p:cNvSpPr/>
-          <p:nvPr/>
-        </p:nvSpPr>
-        <p:spPr>
-          <a:xfrm>
-            <a:off x="667512" y="4727448"/>
-            <a:ext cx="10853928" cy="621792"/>
-          </a:xfrm>
-          <a:prstGeom prst="rect">
-            <a:avLst/>
-          </a:prstGeom>
-          <a:solidFill>
-            <a:srgbClr val="FFFFFF"/>
-          </a:solidFill>
-          <a:ln w="6350">
-            <a:solidFill>
-              <a:srgbClr val="E6E8EC"/>
-            </a:solidFill>
-          </a:ln>
-          <a:effectLst/>
-        </p:spPr>
-        <p:style>
-          <a:lnRef idx="1">
-            <a:schemeClr val="accent1"/>
-          </a:lnRef>
-          <a:fillRef idx="3">
-            <a:schemeClr val="accent1"/>
-          </a:fillRef>
-          <a:effectRef idx="2">
-            <a:schemeClr val="accent1"/>
-          </a:effectRef>
-          <a:fontRef idx="minor">
-            <a:schemeClr val="lt1"/>
-          </a:fontRef>
-        </p:style>
-        <p:txBody>
-          <a:bodyPr rtlCol="0" anchor="ctr"/>
-          <a:lstStyle/>
-          <a:p>
-            <a:pPr algn="ctr"/>
-          </a:p>
-        </p:txBody>
-      </p:sp>
-      <p:sp>
-        <p:nvSpPr>
           <p:cNvPr id="41" name="TextBox 40"/>
           <p:cNvSpPr txBox="1"/>
           <p:nvPr/>
@@ -17199,7 +17421,7 @@
                 </a:solidFill>
                 <a:latin typeface="Microsoft JhengHei"/>
               </a:rPr>
-              <a:t>Paraformer</a:t>
+              <a:t>Fun-ASR-Nano（原用）</a:t>
             </a:r>
           </a:p>
         </p:txBody>
@@ -17238,7 +17460,7 @@
                 </a:solidFill>
                 <a:latin typeface="Arial"/>
               </a:rPr>
-              <a:t>~220M</a:t>
+              <a:t>~800M</a:t>
             </a:r>
           </a:p>
         </p:txBody>
@@ -17251,8 +17473,8 @@
         </p:nvSpPr>
         <p:spPr>
           <a:xfrm>
-            <a:off x="4270248" y="4818888"/>
-            <a:ext cx="1783080" cy="438912"/>
+            <a:off x="4087367" y="4818888"/>
+            <a:ext cx="1508760" cy="438912"/>
           </a:xfrm>
           <a:prstGeom prst="rect">
             <a:avLst/>
@@ -17277,7 +17499,7 @@
                 </a:solidFill>
                 <a:latin typeface="Microsoft JhengHei"/>
               </a:rPr>
-              <a:t>sherpa-onnx 另整合</a:t>
+              <a:t>中文強</a:t>
             </a:r>
           </a:p>
         </p:txBody>
@@ -17290,8 +17512,8 @@
         </p:nvSpPr>
         <p:spPr>
           <a:xfrm>
-            <a:off x="6281928" y="4818888"/>
-            <a:ext cx="1417320" cy="438912"/>
+            <a:off x="5641848" y="4818888"/>
+            <a:ext cx="1691639" cy="438912"/>
           </a:xfrm>
           <a:prstGeom prst="rect">
             <a:avLst/>
@@ -17310,13 +17532,13 @@
               </a:lnSpc>
             </a:pPr>
             <a:r>
-              <a:rPr sz="1100" b="0">
+              <a:rPr sz="1150" b="0">
                 <a:solidFill>
                   <a:srgbClr val="555555"/>
                 </a:solidFill>
-                <a:latin typeface="Microsoft JhengHei"/>
-              </a:rPr>
-              <a:t>✓ 輕</a:t>
+                <a:latin typeface="Arial"/>
+              </a:rPr>
+              <a:t>2.5s</a:t>
             </a:r>
           </a:p>
         </p:txBody>
@@ -17329,8 +17551,8 @@
         </p:nvSpPr>
         <p:spPr>
           <a:xfrm>
-            <a:off x="7927848" y="4818888"/>
-            <a:ext cx="1325880" cy="438912"/>
+            <a:off x="7379208" y="4818888"/>
+            <a:ext cx="1874520" cy="438912"/>
           </a:xfrm>
           <a:prstGeom prst="rect">
             <a:avLst/>
@@ -17353,9 +17575,9 @@
                 <a:solidFill>
                   <a:srgbClr val="444444"/>
                 </a:solidFill>
-                <a:latin typeface="Arial"/>
-              </a:rPr>
-              <a:t>~10%</a:t>
+                <a:latin typeface="Microsoft JhengHei"/>
+              </a:rPr>
+              <a:t>真人 4/8</a:t>
             </a:r>
           </a:p>
         </p:txBody>
@@ -17368,8 +17590,8 @@
         </p:nvSpPr>
         <p:spPr>
           <a:xfrm>
-            <a:off x="9482328" y="4818888"/>
-            <a:ext cx="1965960" cy="438912"/>
+            <a:off x="9299448" y="4818888"/>
+            <a:ext cx="2148840" cy="438912"/>
           </a:xfrm>
           <a:prstGeom prst="rect">
             <a:avLst/>
@@ -17394,7 +17616,7 @@
                 </a:solidFill>
                 <a:latin typeface="Microsoft JhengHei"/>
               </a:rPr>
-              <a:t>同上，備援方案</a:t>
+              <a:t>× 來源不符，已汰換</a:t>
             </a:r>
           </a:p>
         </p:txBody>
@@ -17477,9 +17699,9 @@
                 <a:solidFill>
                   <a:srgbClr val="00C49A"/>
                 </a:solidFill>
-                <a:latin typeface="Arial"/>
-              </a:rPr>
-              <a:t>決勝點  </a:t>
+                <a:latin typeface="Microsoft JhengHei"/>
+              </a:rPr>
+              <a:t>反直覺  </a:t>
             </a:r>
             <a:r>
               <a:rPr sz="1300" b="1">
@@ -17488,7 +17710,7 @@
                 </a:solidFill>
                 <a:latin typeface="Microsoft JhengHei"/>
               </a:rPr>
-              <a:t>與倉管 LLM 共用同一套 llama.cpp / GGUF runtime</a:t>
+              <a:t>模型越大不一定越準：base.en 比 tiny.en 大、慢 2.5 倍，WER 反而略差</a:t>
             </a:r>
             <a:r>
               <a:rPr sz="1200" b="0">
@@ -17497,7 +17719,7 @@
                 </a:solidFill>
                 <a:latin typeface="Microsoft JhengHei"/>
               </a:rPr>
-              <a:t>——不必另裝 sherpa-onnx；GLIBC 不合就在 RPi5 源碼編；輸出簡體用 OpenCC 完美轉繁。</a:t>
+              <a:t>——倉管查詢句短、句型固定，tiny 容量已足夠。</a:t>
             </a:r>
           </a:p>
         </p:txBody>
@@ -17534,9 +17756,9 @@
                 <a:solidFill>
                   <a:srgbClr val="F0A030"/>
                 </a:solidFill>
-                <a:latin typeface="Arial"/>
-              </a:rPr>
-              <a:t>最前沿  </a:t>
+                <a:latin typeface="Microsoft JhengHei"/>
+              </a:rPr>
+              <a:t>選型準則  </a:t>
             </a:r>
             <a:r>
               <a:rPr sz="1200" b="1">
@@ -17545,7 +17767,7 @@
                 </a:solidFill>
                 <a:latin typeface="Microsoft JhengHei"/>
               </a:rPr>
-              <a:t>模型權重 2025Q4（Fun-ASR-Nano-2512），llama.cpp GGUF runtime 2026 年 6 月才釋出</a:t>
+              <a:t>不能只看 WER，要看端到端答對率</a:t>
             </a:r>
             <a:r>
               <a:rPr sz="1200" b="0">
@@ -17554,7 +17776,7 @@
                 </a:solidFill>
                 <a:latin typeface="Microsoft JhengHei"/>
               </a:rPr>
-              <a:t>——發布一個多月即導入，非舊模型。</a:t>
+              <a:t>——中文 base 字面只對 3/8，但端到端 8/8 全綠，聽錯的都被文字端容錯層救回。</a:t>
             </a:r>
           </a:p>
         </p:txBody>
@@ -18970,7 +19192,7 @@
                 </a:solidFill>
                 <a:latin typeface="Microsoft JhengHei"/>
               </a:rPr>
-              <a:t>一支語音，其實是三個模型串起來跑</a:t>
+              <a:t>一套 runtime，中英各掛一顆模型</a:t>
             </a:r>
           </a:p>
         </p:txBody>
@@ -19009,7 +19231,7 @@
                 </a:solidFill>
                 <a:latin typeface="Microsoft JhengHei"/>
               </a:rPr>
-              <a:t>「Fun-ASR-Nano」不是單一模型——是 VAD＋Encoder＋LLM 解碼器三件套，由一支 llama.cpp binary 統合，全在 RPi5 CPU 離線跑。</a:t>
+              <a:t>換成 whisper.cpp 後架構反而更簡單：單一模型檔、單一 binary，中英兩版共用同一套 runtime，只換 -m 參數。</a:t>
             </a:r>
           </a:p>
         </p:txBody>
@@ -19138,7 +19360,7 @@
                 </a:solidFill>
                 <a:latin typeface="Microsoft JhengHei"/>
               </a:rPr>
-              <a:t>偵</a:t>
+              <a:t>共</a:t>
             </a:r>
           </a:p>
         </p:txBody>
@@ -19177,7 +19399,7 @@
                 </a:solidFill>
                 <a:latin typeface="Microsoft JhengHei"/>
               </a:rPr>
-              <a:t>VAD 語音端點偵測</a:t>
+              <a:t>共用 Runtime</a:t>
             </a:r>
           </a:p>
         </p:txBody>
@@ -19216,7 +19438,7 @@
                 </a:solidFill>
                 <a:latin typeface="Arial"/>
               </a:rPr>
-              <a:t>1.6 MB</a:t>
+              <a:t>RPi5 源碼編譯</a:t>
             </a:r>
           </a:p>
         </p:txBody>
@@ -19255,7 +19477,7 @@
                 </a:solidFill>
                 <a:latin typeface="Arial"/>
               </a:rPr>
-              <a:t>fsmn-vad.gguf</a:t>
+              <a:t>whisper-cli (whisper.cpp)</a:t>
             </a:r>
           </a:p>
         </p:txBody>
@@ -19294,7 +19516,7 @@
                 </a:solidFill>
                 <a:latin typeface="Microsoft JhengHei"/>
               </a:rPr>
-              <a:t>抓「何時在講話」：切掉前後靜音與雜音，只把真正的語音段送進辨識</a:t>
+              <a:t>單一 binary 跑完 VAD、聲學編碼、解碼；中英兩版只差 -m 指到哪顆模型</a:t>
             </a:r>
           </a:p>
         </p:txBody>
@@ -19462,7 +19684,7 @@
                 </a:solidFill>
                 <a:latin typeface="Microsoft JhengHei"/>
               </a:rPr>
-              <a:t>聲</a:t>
+              <a:t>EN</a:t>
             </a:r>
           </a:p>
         </p:txBody>
@@ -19501,7 +19723,7 @@
                 </a:solidFill>
                 <a:latin typeface="Microsoft JhengHei"/>
               </a:rPr>
-              <a:t>Encoder 聲學編碼器</a:t>
+              <a:t>英文版模型</a:t>
             </a:r>
           </a:p>
         </p:txBody>
@@ -19540,7 +19762,7 @@
                 </a:solidFill>
                 <a:latin typeface="Arial"/>
               </a:rPr>
-              <a:t>447 MB · F16</a:t>
+              <a:t>74 MB · 0.94s/句</a:t>
             </a:r>
           </a:p>
         </p:txBody>
@@ -19579,7 +19801,7 @@
                 </a:solidFill>
                 <a:latin typeface="Arial"/>
               </a:rPr>
-              <a:t>funasr-encoder-f16.gguf</a:t>
+              <a:t>ggml-tiny.en.bin</a:t>
             </a:r>
           </a:p>
         </p:txBody>
@@ -19618,7 +19840,7 @@
                 </a:solidFill>
                 <a:latin typeface="Microsoft JhengHei"/>
               </a:rPr>
-              <a:t>把聲音波形轉成語意特徵向量；精度敏感故不量化，保留半精度 F16</a:t>
+              <a:t>英文專用、展場主力；短句夠用，比 base.en 更快且 WER 更低</a:t>
             </a:r>
           </a:p>
         </p:txBody>
@@ -19786,7 +20008,7 @@
                 </a:solidFill>
                 <a:latin typeface="Microsoft JhengHei"/>
               </a:rPr>
-              <a:t>文</a:t>
+              <a:t>中</a:t>
             </a:r>
           </a:p>
         </p:txBody>
@@ -19825,7 +20047,7 @@
                 </a:solidFill>
                 <a:latin typeface="Microsoft JhengHei"/>
               </a:rPr>
-              <a:t>LLM 解碼器</a:t>
+              <a:t>中文版模型</a:t>
             </a:r>
           </a:p>
         </p:txBody>
@@ -19864,7 +20086,7 @@
                 </a:solidFill>
                 <a:latin typeface="Arial"/>
               </a:rPr>
-              <a:t>461 MB · Q4_K_M</a:t>
+              <a:t>141 MB · 6.8s/句</a:t>
             </a:r>
           </a:p>
         </p:txBody>
@@ -19903,7 +20125,7 @@
                 </a:solidFill>
                 <a:latin typeface="Arial"/>
               </a:rPr>
-              <a:t>qwen3-0.6b-q4km.gguf</a:t>
+              <a:t>ggml-base.bin</a:t>
             </a:r>
           </a:p>
         </p:txBody>
@@ -19942,7 +20164,7 @@
                 </a:solidFill>
                 <a:latin typeface="Microsoft JhengHei"/>
               </a:rPr>
-              <a:t>Qwen3-0.6B 讀特徵、生成文字；4-bit 量化壓到最小，RPi5 CPU 跑得動</a:t>
+              <a:t>多語權重（含中文）；輸出簡體故仍需 OpenCC 轉繁，中文版為備援展示</a:t>
             </a:r>
           </a:p>
         </p:txBody>
@@ -20348,7 +20570,7 @@
                 </a:solidFill>
                 <a:latin typeface="Microsoft JhengHei"/>
               </a:rPr>
-              <a:t>llama-funasr-cli</a:t>
+              <a:t>whisper-cli</a:t>
             </a:r>
           </a:p>
           <a:p>
@@ -20364,7 +20586,7 @@
                 </a:solidFill>
                 <a:latin typeface="Microsoft JhengHei"/>
               </a:rPr>
-              <a:t>VAD→Enc→LLM</a:t>
+              <a:t>tiny.en / base</a:t>
             </a:r>
           </a:p>
         </p:txBody>
@@ -20504,7 +20726,7 @@
                 </a:solidFill>
                 <a:latin typeface="Microsoft JhengHei"/>
               </a:rPr>
-              <a:t>簡→繁</a:t>
+              <a:t>簡→繁（僅中文）</a:t>
             </a:r>
           </a:p>
         </p:txBody>
@@ -20628,7 +20850,7 @@
                 </a:solidFill>
                 <a:latin typeface="Microsoft JhengHei"/>
               </a:rPr>
-              <a:t>同音修正</a:t>
+              <a:t>出口正規化</a:t>
             </a:r>
           </a:p>
           <a:p>
@@ -20644,7 +20866,7 @@
                 </a:solidFill>
                 <a:latin typeface="Microsoft JhengHei"/>
               </a:rPr>
-              <a:t>出口清理</a:t>
+              <a:t>大小寫/錯字</a:t>
             </a:r>
           </a:p>
         </p:txBody>
@@ -20867,7 +21089,7 @@
                 <a:solidFill>
                   <a:srgbClr val="00C49A"/>
                 </a:solidFill>
-                <a:latin typeface="Arial"/>
+                <a:latin typeface="Microsoft JhengHei"/>
               </a:rPr>
               <a:t>RPi5 部署  </a:t>
             </a:r>
@@ -20878,7 +21100,7 @@
                 </a:solidFill>
                 <a:latin typeface="Microsoft JhengHei"/>
               </a:rPr>
-              <a:t>官方 arm64 binary 要 GLIBC 2.38、RPi5 是 2.36 → 在機上源碼編（4.5 分）｜冷啟 15s、熱快取 2.5s/句｜總模型約 910 MB｜純 CPU、零 GPU、零雲端</a:t>
+              <a:t>whisper.cpp 在機上源碼編譯｜英文 0.94s/句、中文 6.8s/句｜兩顆模型合計僅 215 MB（原方案 910 MB）｜純 CPU、零 GPU、零雲端</a:t>
             </a:r>
           </a:p>
         </p:txBody>
@@ -28817,17 +29039,1152 @@
       <p:grpSpPr/>
       <p:sp>
         <p:nvSpPr>
-          <p:cNvPr id="2" name="Rectangle 1"/>
+          <p:cNvPr id="2" name="TextBox 1"/>
+          <p:cNvSpPr txBox="1"/>
+          <p:nvPr/>
+        </p:nvSpPr>
+        <p:spPr>
+          <a:xfrm>
+            <a:off x="667512" y="310896"/>
+            <a:ext cx="10789920" cy="274320"/>
+          </a:xfrm>
+          <a:prstGeom prst="rect">
+            <a:avLst/>
+          </a:prstGeom>
+          <a:noFill/>
+        </p:spPr>
+        <p:txBody>
+          <a:bodyPr wrap="square" lIns="0" rIns="0" tIns="0" bIns="0" anchor="t">
+            <a:spAutoFit/>
+          </a:bodyPr>
+          <a:lstStyle/>
+          <a:p>
+            <a:pPr algn="l">
+              <a:lnSpc>
+                <a:spcPct val="115000"/>
+              </a:lnSpc>
+            </a:pPr>
+            <a:r>
+              <a:rPr sz="1250" b="1">
+                <a:solidFill>
+                  <a:srgbClr val="00C49A"/>
+                </a:solidFill>
+                <a:latin typeface="Arial"/>
+              </a:rPr>
+              <a:t>ENGLISH BUILD · 路線</a:t>
+            </a:r>
+          </a:p>
+        </p:txBody>
+      </p:sp>
+      <p:sp>
+        <p:nvSpPr>
+          <p:cNvPr id="3" name="TextBox 2"/>
+          <p:cNvSpPr txBox="1"/>
+          <p:nvPr/>
+        </p:nvSpPr>
+        <p:spPr>
+          <a:xfrm>
+            <a:off x="667512" y="585216"/>
+            <a:ext cx="10789920" cy="566928"/>
+          </a:xfrm>
+          <a:prstGeom prst="rect">
+            <a:avLst/>
+          </a:prstGeom>
+          <a:noFill/>
+        </p:spPr>
+        <p:txBody>
+          <a:bodyPr wrap="square" lIns="0" rIns="0" tIns="0" bIns="0" anchor="t">
+            <a:spAutoFit/>
+          </a:bodyPr>
+          <a:lstStyle/>
+          <a:p>
+            <a:pPr algn="l">
+              <a:lnSpc>
+                <a:spcPct val="115000"/>
+              </a:lnSpc>
+            </a:pPr>
+            <a:r>
+              <a:rPr sz="2700" b="1">
+                <a:solidFill>
+                  <a:srgbClr val="1A1A2E"/>
+                </a:solidFill>
+                <a:latin typeface="Microsoft JhengHei"/>
+              </a:rPr>
+              <a:t>做英文版不是翻譯——翻譯會讓招牌能力全滅</a:t>
+            </a:r>
+          </a:p>
+        </p:txBody>
+      </p:sp>
+      <p:sp>
+        <p:nvSpPr>
+          <p:cNvPr id="4" name="TextBox 3"/>
+          <p:cNvSpPr txBox="1"/>
+          <p:nvPr/>
+        </p:nvSpPr>
+        <p:spPr>
+          <a:xfrm>
+            <a:off x="667512" y="1234440"/>
+            <a:ext cx="10789920" cy="365760"/>
+          </a:xfrm>
+          <a:prstGeom prst="rect">
+            <a:avLst/>
+          </a:prstGeom>
+          <a:noFill/>
+        </p:spPr>
+        <p:txBody>
+          <a:bodyPr wrap="square" lIns="0" rIns="0" tIns="0" bIns="0" anchor="t">
+            <a:spAutoFit/>
+          </a:bodyPr>
+          <a:lstStyle/>
+          <a:p>
+            <a:pPr algn="l">
+              <a:lnSpc>
+                <a:spcPct val="115000"/>
+              </a:lnSpc>
+            </a:pPr>
+            <a:r>
+              <a:rPr sz="1300" b="0">
+                <a:solidFill>
+                  <a:srgbClr val="555555"/>
+                </a:solidFill>
+                <a:latin typeface="Microsoft JhengHei"/>
+              </a:rPr>
+              <a:t>老闆要全英文版。動工前先用探針餵分級英文句給現有模型，量出「翻譯路線」到底會壞在哪——結論決定了整條路線。</a:t>
+            </a:r>
+          </a:p>
+        </p:txBody>
+      </p:sp>
+      <p:sp>
+        <p:nvSpPr>
+          <p:cNvPr id="5" name="Rounded Rectangle 4"/>
           <p:cNvSpPr/>
           <p:nvPr/>
         </p:nvSpPr>
         <p:spPr>
           <a:xfrm>
-            <a:off x="0" y="0"/>
-            <a:ext cx="12188952" cy="6858000"/>
-          </a:xfrm>
-          <a:prstGeom prst="rect">
-            <a:avLst/>
+            <a:off x="667512" y="1783080"/>
+            <a:ext cx="5321808" cy="3200400"/>
+          </a:xfrm>
+          <a:prstGeom prst="roundRect">
+            <a:avLst>
+              <a:gd name="adj" fmla="val 8000"/>
+            </a:avLst>
+          </a:prstGeom>
+          <a:solidFill>
+            <a:srgbClr val="F4F6F8"/>
+          </a:solidFill>
+          <a:ln>
+            <a:noFill/>
+          </a:ln>
+          <a:effectLst/>
+        </p:spPr>
+        <p:style>
+          <a:lnRef idx="1">
+            <a:schemeClr val="accent1"/>
+          </a:lnRef>
+          <a:fillRef idx="3">
+            <a:schemeClr val="accent1"/>
+          </a:fillRef>
+          <a:effectRef idx="2">
+            <a:schemeClr val="accent1"/>
+          </a:effectRef>
+          <a:fontRef idx="minor">
+            <a:schemeClr val="lt1"/>
+          </a:fontRef>
+        </p:style>
+        <p:txBody>
+          <a:bodyPr rtlCol="0" anchor="ctr"/>
+          <a:lstStyle/>
+          <a:p>
+            <a:pPr algn="ctr"/>
+          </a:p>
+        </p:txBody>
+      </p:sp>
+      <p:sp>
+        <p:nvSpPr>
+          <p:cNvPr id="6" name="TextBox 5"/>
+          <p:cNvSpPr txBox="1"/>
+          <p:nvPr/>
+        </p:nvSpPr>
+        <p:spPr>
+          <a:xfrm>
+            <a:off x="941832" y="1920240"/>
+            <a:ext cx="4754880" cy="329184"/>
+          </a:xfrm>
+          <a:prstGeom prst="rect">
+            <a:avLst/>
+          </a:prstGeom>
+          <a:noFill/>
+        </p:spPr>
+        <p:txBody>
+          <a:bodyPr wrap="square" lIns="0" rIns="0" tIns="0" bIns="0" anchor="t">
+            <a:spAutoFit/>
+          </a:bodyPr>
+          <a:lstStyle/>
+          <a:p>
+            <a:pPr algn="l">
+              <a:lnSpc>
+                <a:spcPct val="115000"/>
+              </a:lnSpc>
+            </a:pPr>
+            <a:r>
+              <a:rPr sz="1400" b="1">
+                <a:solidFill>
+                  <a:srgbClr val="1A1A2E"/>
+                </a:solidFill>
+                <a:latin typeface="Microsoft JhengHei"/>
+              </a:rPr>
+              <a:t>探針實測：純翻譯會壞在哪</a:t>
+            </a:r>
+          </a:p>
+        </p:txBody>
+      </p:sp>
+      <p:sp>
+        <p:nvSpPr>
+          <p:cNvPr id="7" name="TextBox 6"/>
+          <p:cNvSpPr txBox="1"/>
+          <p:nvPr/>
+        </p:nvSpPr>
+        <p:spPr>
+          <a:xfrm>
+            <a:off x="941832" y="2331720"/>
+            <a:ext cx="274320" cy="274320"/>
+          </a:xfrm>
+          <a:prstGeom prst="rect">
+            <a:avLst/>
+          </a:prstGeom>
+          <a:noFill/>
+        </p:spPr>
+        <p:txBody>
+          <a:bodyPr wrap="square" lIns="0" rIns="0" tIns="0" bIns="0" anchor="t">
+            <a:spAutoFit/>
+          </a:bodyPr>
+          <a:lstStyle/>
+          <a:p>
+            <a:pPr algn="l">
+              <a:lnSpc>
+                <a:spcPct val="115000"/>
+              </a:lnSpc>
+            </a:pPr>
+            <a:r>
+              <a:rPr sz="1400" b="1">
+                <a:solidFill>
+                  <a:srgbClr val="008E76"/>
+                </a:solidFill>
+                <a:latin typeface="Arial"/>
+              </a:rPr>
+              <a:t>✓</a:t>
+            </a:r>
+          </a:p>
+        </p:txBody>
+      </p:sp>
+      <p:sp>
+        <p:nvSpPr>
+          <p:cNvPr id="8" name="TextBox 7"/>
+          <p:cNvSpPr txBox="1"/>
+          <p:nvPr/>
+        </p:nvSpPr>
+        <p:spPr>
+          <a:xfrm>
+            <a:off x="1271016" y="2313432"/>
+            <a:ext cx="1737360" cy="292608"/>
+          </a:xfrm>
+          <a:prstGeom prst="rect">
+            <a:avLst/>
+          </a:prstGeom>
+          <a:noFill/>
+        </p:spPr>
+        <p:txBody>
+          <a:bodyPr wrap="square" lIns="0" rIns="0" tIns="0" bIns="0" anchor="t">
+            <a:spAutoFit/>
+          </a:bodyPr>
+          <a:lstStyle/>
+          <a:p>
+            <a:pPr algn="l">
+              <a:lnSpc>
+                <a:spcPct val="115000"/>
+              </a:lnSpc>
+            </a:pPr>
+            <a:r>
+              <a:rPr sz="1250" b="1">
+                <a:solidFill>
+                  <a:srgbClr val="008E76"/>
+                </a:solidFill>
+                <a:latin typeface="Microsoft JhengHei"/>
+              </a:rPr>
+              <a:t>乾淨查詢</a:t>
+            </a:r>
+          </a:p>
+        </p:txBody>
+      </p:sp>
+      <p:sp>
+        <p:nvSpPr>
+          <p:cNvPr id="9" name="TextBox 8"/>
+          <p:cNvSpPr txBox="1"/>
+          <p:nvPr/>
+        </p:nvSpPr>
+        <p:spPr>
+          <a:xfrm>
+            <a:off x="1271016" y="2587752"/>
+            <a:ext cx="4389120" cy="292608"/>
+          </a:xfrm>
+          <a:prstGeom prst="rect">
+            <a:avLst/>
+          </a:prstGeom>
+          <a:noFill/>
+        </p:spPr>
+        <p:txBody>
+          <a:bodyPr wrap="square" lIns="0" rIns="0" tIns="0" bIns="0" anchor="t">
+            <a:spAutoFit/>
+          </a:bodyPr>
+          <a:lstStyle/>
+          <a:p>
+            <a:pPr algn="l">
+              <a:lnSpc>
+                <a:spcPct val="115000"/>
+              </a:lnSpc>
+            </a:pPr>
+            <a:r>
+              <a:rPr sz="1100" b="0">
+                <a:solidFill>
+                  <a:srgbClr val="555555"/>
+                </a:solidFill>
+                <a:latin typeface="Microsoft JhengHei"/>
+              </a:rPr>
+              <a:t>how many bluetooth earphones left → 答對</a:t>
+            </a:r>
+          </a:p>
+        </p:txBody>
+      </p:sp>
+      <p:sp>
+        <p:nvSpPr>
+          <p:cNvPr id="10" name="TextBox 9"/>
+          <p:cNvSpPr txBox="1"/>
+          <p:nvPr/>
+        </p:nvSpPr>
+        <p:spPr>
+          <a:xfrm>
+            <a:off x="941832" y="2953512"/>
+            <a:ext cx="274320" cy="274320"/>
+          </a:xfrm>
+          <a:prstGeom prst="rect">
+            <a:avLst/>
+          </a:prstGeom>
+          <a:noFill/>
+        </p:spPr>
+        <p:txBody>
+          <a:bodyPr wrap="square" lIns="0" rIns="0" tIns="0" bIns="0" anchor="t">
+            <a:spAutoFit/>
+          </a:bodyPr>
+          <a:lstStyle/>
+          <a:p>
+            <a:pPr algn="l">
+              <a:lnSpc>
+                <a:spcPct val="115000"/>
+              </a:lnSpc>
+            </a:pPr>
+            <a:r>
+              <a:rPr sz="1400" b="1">
+                <a:solidFill>
+                  <a:srgbClr val="E85D5D"/>
+                </a:solidFill>
+                <a:latin typeface="Arial"/>
+              </a:rPr>
+              <a:t>×</a:t>
+            </a:r>
+          </a:p>
+        </p:txBody>
+      </p:sp>
+      <p:sp>
+        <p:nvSpPr>
+          <p:cNvPr id="11" name="TextBox 10"/>
+          <p:cNvSpPr txBox="1"/>
+          <p:nvPr/>
+        </p:nvSpPr>
+        <p:spPr>
+          <a:xfrm>
+            <a:off x="1271016" y="2935224"/>
+            <a:ext cx="1737360" cy="292608"/>
+          </a:xfrm>
+          <a:prstGeom prst="rect">
+            <a:avLst/>
+          </a:prstGeom>
+          <a:noFill/>
+        </p:spPr>
+        <p:txBody>
+          <a:bodyPr wrap="square" lIns="0" rIns="0" tIns="0" bIns="0" anchor="t">
+            <a:spAutoFit/>
+          </a:bodyPr>
+          <a:lstStyle/>
+          <a:p>
+            <a:pPr algn="l">
+              <a:lnSpc>
+                <a:spcPct val="115000"/>
+              </a:lnSpc>
+            </a:pPr>
+            <a:r>
+              <a:rPr sz="1250" b="1">
+                <a:solidFill>
+                  <a:srgbClr val="E85D5D"/>
+                </a:solidFill>
+                <a:latin typeface="Microsoft JhengHei"/>
+              </a:rPr>
+              <a:t>英文錯字</a:t>
+            </a:r>
+          </a:p>
+        </p:txBody>
+      </p:sp>
+      <p:sp>
+        <p:nvSpPr>
+          <p:cNvPr id="12" name="TextBox 11"/>
+          <p:cNvSpPr txBox="1"/>
+          <p:nvPr/>
+        </p:nvSpPr>
+        <p:spPr>
+          <a:xfrm>
+            <a:off x="1271016" y="3209544"/>
+            <a:ext cx="4389120" cy="292608"/>
+          </a:xfrm>
+          <a:prstGeom prst="rect">
+            <a:avLst/>
+          </a:prstGeom>
+          <a:noFill/>
+        </p:spPr>
+        <p:txBody>
+          <a:bodyPr wrap="square" lIns="0" rIns="0" tIns="0" bIns="0" anchor="t">
+            <a:spAutoFit/>
+          </a:bodyPr>
+          <a:lstStyle/>
+          <a:p>
+            <a:pPr algn="l">
+              <a:lnSpc>
+                <a:spcPct val="115000"/>
+              </a:lnSpc>
+            </a:pPr>
+            <a:r>
+              <a:rPr sz="1100" b="0">
+                <a:solidFill>
+                  <a:srgbClr val="555555"/>
+                </a:solidFill>
+                <a:latin typeface="Microsoft JhengHei"/>
+              </a:rPr>
+              <a:t>earphon → 完全對不到</a:t>
+            </a:r>
+          </a:p>
+        </p:txBody>
+      </p:sp>
+      <p:sp>
+        <p:nvSpPr>
+          <p:cNvPr id="13" name="TextBox 12"/>
+          <p:cNvSpPr txBox="1"/>
+          <p:nvPr/>
+        </p:nvSpPr>
+        <p:spPr>
+          <a:xfrm>
+            <a:off x="941832" y="3575304"/>
+            <a:ext cx="274320" cy="274320"/>
+          </a:xfrm>
+          <a:prstGeom prst="rect">
+            <a:avLst/>
+          </a:prstGeom>
+          <a:noFill/>
+        </p:spPr>
+        <p:txBody>
+          <a:bodyPr wrap="square" lIns="0" rIns="0" tIns="0" bIns="0" anchor="t">
+            <a:spAutoFit/>
+          </a:bodyPr>
+          <a:lstStyle/>
+          <a:p>
+            <a:pPr algn="l">
+              <a:lnSpc>
+                <a:spcPct val="115000"/>
+              </a:lnSpc>
+            </a:pPr>
+            <a:r>
+              <a:rPr sz="1400" b="1">
+                <a:solidFill>
+                  <a:srgbClr val="E85D5D"/>
+                </a:solidFill>
+                <a:latin typeface="Arial"/>
+              </a:rPr>
+              <a:t>×</a:t>
+            </a:r>
+          </a:p>
+        </p:txBody>
+      </p:sp>
+      <p:sp>
+        <p:nvSpPr>
+          <p:cNvPr id="14" name="TextBox 13"/>
+          <p:cNvSpPr txBox="1"/>
+          <p:nvPr/>
+        </p:nvSpPr>
+        <p:spPr>
+          <a:xfrm>
+            <a:off x="1271016" y="3557016"/>
+            <a:ext cx="1737360" cy="292608"/>
+          </a:xfrm>
+          <a:prstGeom prst="rect">
+            <a:avLst/>
+          </a:prstGeom>
+          <a:noFill/>
+        </p:spPr>
+        <p:txBody>
+          <a:bodyPr wrap="square" lIns="0" rIns="0" tIns="0" bIns="0" anchor="t">
+            <a:spAutoFit/>
+          </a:bodyPr>
+          <a:lstStyle/>
+          <a:p>
+            <a:pPr algn="l">
+              <a:lnSpc>
+                <a:spcPct val="115000"/>
+              </a:lnSpc>
+            </a:pPr>
+            <a:r>
+              <a:rPr sz="1250" b="1">
+                <a:solidFill>
+                  <a:srgbClr val="E85D5D"/>
+                </a:solidFill>
+                <a:latin typeface="Microsoft JhengHei"/>
+              </a:rPr>
+              <a:t>模糊描述</a:t>
+            </a:r>
+          </a:p>
+        </p:txBody>
+      </p:sp>
+      <p:sp>
+        <p:nvSpPr>
+          <p:cNvPr id="15" name="TextBox 14"/>
+          <p:cNvSpPr txBox="1"/>
+          <p:nvPr/>
+        </p:nvSpPr>
+        <p:spPr>
+          <a:xfrm>
+            <a:off x="1271016" y="3831336"/>
+            <a:ext cx="4389120" cy="292608"/>
+          </a:xfrm>
+          <a:prstGeom prst="rect">
+            <a:avLst/>
+          </a:prstGeom>
+          <a:noFill/>
+        </p:spPr>
+        <p:txBody>
+          <a:bodyPr wrap="square" lIns="0" rIns="0" tIns="0" bIns="0" anchor="t">
+            <a:spAutoFit/>
+          </a:bodyPr>
+          <a:lstStyle/>
+          <a:p>
+            <a:pPr algn="l">
+              <a:lnSpc>
+                <a:spcPct val="115000"/>
+              </a:lnSpc>
+            </a:pPr>
+            <a:r>
+              <a:rPr sz="1100" b="0">
+                <a:solidFill>
+                  <a:srgbClr val="555555"/>
+                </a:solidFill>
+                <a:latin typeface="Microsoft JhengHei"/>
+              </a:rPr>
+              <a:t>the thing that charges phone → 不懂</a:t>
+            </a:r>
+          </a:p>
+        </p:txBody>
+      </p:sp>
+      <p:sp>
+        <p:nvSpPr>
+          <p:cNvPr id="16" name="TextBox 15"/>
+          <p:cNvSpPr txBox="1"/>
+          <p:nvPr/>
+        </p:nvSpPr>
+        <p:spPr>
+          <a:xfrm>
+            <a:off x="941832" y="4197096"/>
+            <a:ext cx="274320" cy="274320"/>
+          </a:xfrm>
+          <a:prstGeom prst="rect">
+            <a:avLst/>
+          </a:prstGeom>
+          <a:noFill/>
+        </p:spPr>
+        <p:txBody>
+          <a:bodyPr wrap="square" lIns="0" rIns="0" tIns="0" bIns="0" anchor="t">
+            <a:spAutoFit/>
+          </a:bodyPr>
+          <a:lstStyle/>
+          <a:p>
+            <a:pPr algn="l">
+              <a:lnSpc>
+                <a:spcPct val="115000"/>
+              </a:lnSpc>
+            </a:pPr>
+            <a:r>
+              <a:rPr sz="1400" b="1">
+                <a:solidFill>
+                  <a:srgbClr val="E85D5D"/>
+                </a:solidFill>
+                <a:latin typeface="Arial"/>
+              </a:rPr>
+              <a:t>×</a:t>
+            </a:r>
+          </a:p>
+        </p:txBody>
+      </p:sp>
+      <p:sp>
+        <p:nvSpPr>
+          <p:cNvPr id="17" name="TextBox 16"/>
+          <p:cNvSpPr txBox="1"/>
+          <p:nvPr/>
+        </p:nvSpPr>
+        <p:spPr>
+          <a:xfrm>
+            <a:off x="1271016" y="4178808"/>
+            <a:ext cx="1737360" cy="292608"/>
+          </a:xfrm>
+          <a:prstGeom prst="rect">
+            <a:avLst/>
+          </a:prstGeom>
+          <a:noFill/>
+        </p:spPr>
+        <p:txBody>
+          <a:bodyPr wrap="square" lIns="0" rIns="0" tIns="0" bIns="0" anchor="t">
+            <a:spAutoFit/>
+          </a:bodyPr>
+          <a:lstStyle/>
+          <a:p>
+            <a:pPr algn="l">
+              <a:lnSpc>
+                <a:spcPct val="115000"/>
+              </a:lnSpc>
+            </a:pPr>
+            <a:r>
+              <a:rPr sz="1250" b="1">
+                <a:solidFill>
+                  <a:srgbClr val="E85D5D"/>
+                </a:solidFill>
+                <a:latin typeface="Microsoft JhengHei"/>
+              </a:rPr>
+              <a:t>寫入 / 調貨 / RCA</a:t>
+            </a:r>
+          </a:p>
+        </p:txBody>
+      </p:sp>
+      <p:sp>
+        <p:nvSpPr>
+          <p:cNvPr id="18" name="TextBox 17"/>
+          <p:cNvSpPr txBox="1"/>
+          <p:nvPr/>
+        </p:nvSpPr>
+        <p:spPr>
+          <a:xfrm>
+            <a:off x="1271016" y="4453128"/>
+            <a:ext cx="4389120" cy="292608"/>
+          </a:xfrm>
+          <a:prstGeom prst="rect">
+            <a:avLst/>
+          </a:prstGeom>
+          <a:noFill/>
+        </p:spPr>
+        <p:txBody>
+          <a:bodyPr wrap="square" lIns="0" rIns="0" tIns="0" bIns="0" anchor="t">
+            <a:spAutoFit/>
+          </a:bodyPr>
+          <a:lstStyle/>
+          <a:p>
+            <a:pPr algn="l">
+              <a:lnSpc>
+                <a:spcPct val="115000"/>
+              </a:lnSpc>
+            </a:pPr>
+            <a:r>
+              <a:rPr sz="1100" b="0">
+                <a:solidFill>
+                  <a:srgbClr val="555555"/>
+                </a:solidFill>
+                <a:latin typeface="Microsoft JhengHei"/>
+              </a:rPr>
+              <a:t>add / move / why → 全歸零查詢</a:t>
+            </a:r>
+          </a:p>
+        </p:txBody>
+      </p:sp>
+      <p:sp>
+        <p:nvSpPr>
+          <p:cNvPr id="19" name="Rounded Rectangle 18"/>
+          <p:cNvSpPr/>
+          <p:nvPr/>
+        </p:nvSpPr>
+        <p:spPr>
+          <a:xfrm>
+            <a:off x="6199632" y="1783080"/>
+            <a:ext cx="5321808" cy="3200400"/>
+          </a:xfrm>
+          <a:prstGeom prst="roundRect">
+            <a:avLst>
+              <a:gd name="adj" fmla="val 8000"/>
+            </a:avLst>
+          </a:prstGeom>
+          <a:solidFill>
+            <a:srgbClr val="F4F6F8"/>
+          </a:solidFill>
+          <a:ln>
+            <a:noFill/>
+          </a:ln>
+          <a:effectLst/>
+        </p:spPr>
+        <p:style>
+          <a:lnRef idx="1">
+            <a:schemeClr val="accent1"/>
+          </a:lnRef>
+          <a:fillRef idx="3">
+            <a:schemeClr val="accent1"/>
+          </a:fillRef>
+          <a:effectRef idx="2">
+            <a:schemeClr val="accent1"/>
+          </a:effectRef>
+          <a:fontRef idx="minor">
+            <a:schemeClr val="lt1"/>
+          </a:fontRef>
+        </p:style>
+        <p:txBody>
+          <a:bodyPr rtlCol="0" anchor="ctr"/>
+          <a:lstStyle/>
+          <a:p>
+            <a:pPr algn="ctr"/>
+          </a:p>
+        </p:txBody>
+      </p:sp>
+      <p:sp>
+        <p:nvSpPr>
+          <p:cNvPr id="20" name="TextBox 19"/>
+          <p:cNvSpPr txBox="1"/>
+          <p:nvPr/>
+        </p:nvSpPr>
+        <p:spPr>
+          <a:xfrm>
+            <a:off x="6473952" y="1920240"/>
+            <a:ext cx="4754880" cy="329184"/>
+          </a:xfrm>
+          <a:prstGeom prst="rect">
+            <a:avLst/>
+          </a:prstGeom>
+          <a:noFill/>
+        </p:spPr>
+        <p:txBody>
+          <a:bodyPr wrap="square" lIns="0" rIns="0" tIns="0" bIns="0" anchor="t">
+            <a:spAutoFit/>
+          </a:bodyPr>
+          <a:lstStyle/>
+          <a:p>
+            <a:pPr algn="l">
+              <a:lnSpc>
+                <a:spcPct val="115000"/>
+              </a:lnSpc>
+            </a:pPr>
+            <a:r>
+              <a:rPr sz="1400" b="1">
+                <a:solidFill>
+                  <a:srgbClr val="1A1A2E"/>
+                </a:solidFill>
+                <a:latin typeface="Microsoft JhengHei"/>
+              </a:rPr>
+              <a:t>三條路線，選了中間那條</a:t>
+            </a:r>
+          </a:p>
+        </p:txBody>
+      </p:sp>
+      <p:sp>
+        <p:nvSpPr>
+          <p:cNvPr id="21" name="Rounded Rectangle 20"/>
+          <p:cNvSpPr/>
+          <p:nvPr/>
+        </p:nvSpPr>
+        <p:spPr>
+          <a:xfrm>
+            <a:off x="6473952" y="2377440"/>
+            <a:ext cx="4773168" cy="713232"/>
+          </a:xfrm>
+          <a:prstGeom prst="roundRect">
+            <a:avLst>
+              <a:gd name="adj" fmla="val 8000"/>
+            </a:avLst>
+          </a:prstGeom>
+          <a:solidFill>
+            <a:srgbClr val="FFFFFF"/>
+          </a:solidFill>
+          <a:ln w="7620">
+            <a:solidFill>
+              <a:srgbClr val="E6E8EC"/>
+            </a:solidFill>
+          </a:ln>
+          <a:effectLst/>
+        </p:spPr>
+        <p:style>
+          <a:lnRef idx="1">
+            <a:schemeClr val="accent1"/>
+          </a:lnRef>
+          <a:fillRef idx="3">
+            <a:schemeClr val="accent1"/>
+          </a:fillRef>
+          <a:effectRef idx="2">
+            <a:schemeClr val="accent1"/>
+          </a:effectRef>
+          <a:fontRef idx="minor">
+            <a:schemeClr val="lt1"/>
+          </a:fontRef>
+        </p:style>
+        <p:txBody>
+          <a:bodyPr rtlCol="0" anchor="ctr"/>
+          <a:lstStyle/>
+          <a:p>
+            <a:pPr algn="ctr"/>
+          </a:p>
+        </p:txBody>
+      </p:sp>
+      <p:sp>
+        <p:nvSpPr>
+          <p:cNvPr id="22" name="TextBox 21"/>
+          <p:cNvSpPr txBox="1"/>
+          <p:nvPr/>
+        </p:nvSpPr>
+        <p:spPr>
+          <a:xfrm>
+            <a:off x="6656832" y="2432304"/>
+            <a:ext cx="1691640" cy="292608"/>
+          </a:xfrm>
+          <a:prstGeom prst="rect">
+            <a:avLst/>
+          </a:prstGeom>
+          <a:noFill/>
+        </p:spPr>
+        <p:txBody>
+          <a:bodyPr wrap="square" lIns="0" rIns="0" tIns="0" bIns="0" anchor="t">
+            <a:spAutoFit/>
+          </a:bodyPr>
+          <a:lstStyle/>
+          <a:p>
+            <a:pPr algn="l">
+              <a:lnSpc>
+                <a:spcPct val="115000"/>
+              </a:lnSpc>
+            </a:pPr>
+            <a:r>
+              <a:rPr sz="1250" b="1">
+                <a:solidFill>
+                  <a:srgbClr val="777777"/>
+                </a:solidFill>
+                <a:latin typeface="Microsoft JhengHei"/>
+              </a:rPr>
+              <a:t>翻譯層</a:t>
+            </a:r>
+          </a:p>
+        </p:txBody>
+      </p:sp>
+      <p:sp>
+        <p:nvSpPr>
+          <p:cNvPr id="23" name="TextBox 22"/>
+          <p:cNvSpPr txBox="1"/>
+          <p:nvPr/>
+        </p:nvSpPr>
+        <p:spPr>
+          <a:xfrm>
+            <a:off x="6656832" y="2724912"/>
+            <a:ext cx="4434840" cy="310896"/>
+          </a:xfrm>
+          <a:prstGeom prst="rect">
+            <a:avLst/>
+          </a:prstGeom>
+          <a:noFill/>
+        </p:spPr>
+        <p:txBody>
+          <a:bodyPr wrap="square" lIns="0" rIns="0" tIns="0" bIns="0" anchor="t">
+            <a:spAutoFit/>
+          </a:bodyPr>
+          <a:lstStyle/>
+          <a:p>
+            <a:pPr algn="l">
+              <a:lnSpc>
+                <a:spcPct val="115000"/>
+              </a:lnSpc>
+            </a:pPr>
+            <a:r>
+              <a:rPr sz="1050" b="0">
+                <a:solidFill>
+                  <a:srgbClr val="555555"/>
+                </a:solidFill>
+                <a:latin typeface="Microsoft JhengHei"/>
+              </a:rPr>
+              <a:t>最省事，但容錯層先崩就輪不到後面——等於白費版</a:t>
+            </a:r>
+          </a:p>
+        </p:txBody>
+      </p:sp>
+      <p:sp>
+        <p:nvSpPr>
+          <p:cNvPr id="24" name="Rounded Rectangle 23"/>
+          <p:cNvSpPr/>
+          <p:nvPr/>
+        </p:nvSpPr>
+        <p:spPr>
+          <a:xfrm>
+            <a:off x="6473952" y="3218688"/>
+            <a:ext cx="4773168" cy="713232"/>
+          </a:xfrm>
+          <a:prstGeom prst="roundRect">
+            <a:avLst>
+              <a:gd name="adj" fmla="val 8000"/>
+            </a:avLst>
+          </a:prstGeom>
+          <a:solidFill>
+            <a:srgbClr val="E4F7F2"/>
+          </a:solidFill>
+          <a:ln w="16510">
+            <a:solidFill>
+              <a:srgbClr val="00C49A"/>
+            </a:solidFill>
+          </a:ln>
+          <a:effectLst/>
+        </p:spPr>
+        <p:style>
+          <a:lnRef idx="1">
+            <a:schemeClr val="accent1"/>
+          </a:lnRef>
+          <a:fillRef idx="3">
+            <a:schemeClr val="accent1"/>
+          </a:fillRef>
+          <a:effectRef idx="2">
+            <a:schemeClr val="accent1"/>
+          </a:effectRef>
+          <a:fontRef idx="minor">
+            <a:schemeClr val="lt1"/>
+          </a:fontRef>
+        </p:style>
+        <p:txBody>
+          <a:bodyPr rtlCol="0" anchor="ctr"/>
+          <a:lstStyle/>
+          <a:p>
+            <a:pPr algn="ctr"/>
+          </a:p>
+        </p:txBody>
+      </p:sp>
+      <p:sp>
+        <p:nvSpPr>
+          <p:cNvPr id="25" name="TextBox 24"/>
+          <p:cNvSpPr txBox="1"/>
+          <p:nvPr/>
+        </p:nvSpPr>
+        <p:spPr>
+          <a:xfrm>
+            <a:off x="6656832" y="3273552"/>
+            <a:ext cx="1691640" cy="292608"/>
+          </a:xfrm>
+          <a:prstGeom prst="rect">
+            <a:avLst/>
+          </a:prstGeom>
+          <a:noFill/>
+        </p:spPr>
+        <p:txBody>
+          <a:bodyPr wrap="square" lIns="0" rIns="0" tIns="0" bIns="0" anchor="t">
+            <a:spAutoFit/>
+          </a:bodyPr>
+          <a:lstStyle/>
+          <a:p>
+            <a:pPr algn="l">
+              <a:lnSpc>
+                <a:spcPct val="115000"/>
+              </a:lnSpc>
+            </a:pPr>
+            <a:r>
+              <a:rPr sz="1250" b="1">
+                <a:solidFill>
+                  <a:srgbClr val="008E76"/>
+                </a:solidFill>
+                <a:latin typeface="Microsoft JhengHei"/>
+              </a:rPr>
+              <a:t>★ 補英文語料微調</a:t>
+            </a:r>
+          </a:p>
+        </p:txBody>
+      </p:sp>
+      <p:sp>
+        <p:nvSpPr>
+          <p:cNvPr id="26" name="TextBox 25"/>
+          <p:cNvSpPr txBox="1"/>
+          <p:nvPr/>
+        </p:nvSpPr>
+        <p:spPr>
+          <a:xfrm>
+            <a:off x="6656832" y="3566160"/>
+            <a:ext cx="4434840" cy="310896"/>
+          </a:xfrm>
+          <a:prstGeom prst="rect">
+            <a:avLst/>
+          </a:prstGeom>
+          <a:noFill/>
+        </p:spPr>
+        <p:txBody>
+          <a:bodyPr wrap="square" lIns="0" rIns="0" tIns="0" bIns="0" anchor="t">
+            <a:spAutoFit/>
+          </a:bodyPr>
+          <a:lstStyle/>
+          <a:p>
+            <a:pPr algn="l">
+              <a:lnSpc>
+                <a:spcPct val="115000"/>
+              </a:lnSpc>
+            </a:pPr>
+            <a:r>
+              <a:rPr sz="1050" b="0">
+                <a:solidFill>
+                  <a:srgbClr val="555555"/>
+                </a:solidFill>
+                <a:latin typeface="Microsoft JhengHei"/>
+              </a:rPr>
+              <a:t>Gemma 英文底子還在，教它這套系統的 tool 慣例</a:t>
+            </a:r>
+          </a:p>
+        </p:txBody>
+      </p:sp>
+      <p:sp>
+        <p:nvSpPr>
+          <p:cNvPr id="27" name="Rounded Rectangle 26"/>
+          <p:cNvSpPr/>
+          <p:nvPr/>
+        </p:nvSpPr>
+        <p:spPr>
+          <a:xfrm>
+            <a:off x="6473952" y="4059936"/>
+            <a:ext cx="4773168" cy="713232"/>
+          </a:xfrm>
+          <a:prstGeom prst="roundRect">
+            <a:avLst>
+              <a:gd name="adj" fmla="val 8000"/>
+            </a:avLst>
+          </a:prstGeom>
+          <a:solidFill>
+            <a:srgbClr val="FFFFFF"/>
+          </a:solidFill>
+          <a:ln w="7620">
+            <a:solidFill>
+              <a:srgbClr val="E6E8EC"/>
+            </a:solidFill>
+          </a:ln>
+          <a:effectLst/>
+        </p:spPr>
+        <p:style>
+          <a:lnRef idx="1">
+            <a:schemeClr val="accent1"/>
+          </a:lnRef>
+          <a:fillRef idx="3">
+            <a:schemeClr val="accent1"/>
+          </a:fillRef>
+          <a:effectRef idx="2">
+            <a:schemeClr val="accent1"/>
+          </a:effectRef>
+          <a:fontRef idx="minor">
+            <a:schemeClr val="lt1"/>
+          </a:fontRef>
+        </p:style>
+        <p:txBody>
+          <a:bodyPr rtlCol="0" anchor="ctr"/>
+          <a:lstStyle/>
+          <a:p>
+            <a:pPr algn="ctr"/>
+          </a:p>
+        </p:txBody>
+      </p:sp>
+      <p:sp>
+        <p:nvSpPr>
+          <p:cNvPr id="28" name="TextBox 27"/>
+          <p:cNvSpPr txBox="1"/>
+          <p:nvPr/>
+        </p:nvSpPr>
+        <p:spPr>
+          <a:xfrm>
+            <a:off x="6656832" y="4114800"/>
+            <a:ext cx="1691640" cy="292608"/>
+          </a:xfrm>
+          <a:prstGeom prst="rect">
+            <a:avLst/>
+          </a:prstGeom>
+          <a:noFill/>
+        </p:spPr>
+        <p:txBody>
+          <a:bodyPr wrap="square" lIns="0" rIns="0" tIns="0" bIns="0" anchor="t">
+            <a:spAutoFit/>
+          </a:bodyPr>
+          <a:lstStyle/>
+          <a:p>
+            <a:pPr algn="l">
+              <a:lnSpc>
+                <a:spcPct val="115000"/>
+              </a:lnSpc>
+            </a:pPr>
+            <a:r>
+              <a:rPr sz="1250" b="1">
+                <a:solidFill>
+                  <a:srgbClr val="777777"/>
+                </a:solidFill>
+                <a:latin typeface="Microsoft JhengHei"/>
+              </a:rPr>
+              <a:t>全部重訓</a:t>
+            </a:r>
+          </a:p>
+        </p:txBody>
+      </p:sp>
+      <p:sp>
+        <p:nvSpPr>
+          <p:cNvPr id="29" name="TextBox 28"/>
+          <p:cNvSpPr txBox="1"/>
+          <p:nvPr/>
+        </p:nvSpPr>
+        <p:spPr>
+          <a:xfrm>
+            <a:off x="6656832" y="4407408"/>
+            <a:ext cx="4434840" cy="310896"/>
+          </a:xfrm>
+          <a:prstGeom prst="rect">
+            <a:avLst/>
+          </a:prstGeom>
+          <a:noFill/>
+        </p:spPr>
+        <p:txBody>
+          <a:bodyPr wrap="square" lIns="0" rIns="0" tIns="0" bIns="0" anchor="t">
+            <a:spAutoFit/>
+          </a:bodyPr>
+          <a:lstStyle/>
+          <a:p>
+            <a:pPr algn="l">
+              <a:lnSpc>
+                <a:spcPct val="115000"/>
+              </a:lnSpc>
+            </a:pPr>
+            <a:r>
+              <a:rPr sz="1050" b="0">
+                <a:solidFill>
+                  <a:srgbClr val="555555"/>
+                </a:solidFill>
+                <a:latin typeface="Microsoft JhengHei"/>
+              </a:rPr>
+              <a:t>成本最高，但 base 英文能力本來就在，沒必要</a:t>
+            </a:r>
+          </a:p>
+        </p:txBody>
+      </p:sp>
+      <p:sp>
+        <p:nvSpPr>
+          <p:cNvPr id="30" name="Rounded Rectangle 29"/>
+          <p:cNvSpPr/>
+          <p:nvPr/>
+        </p:nvSpPr>
+        <p:spPr>
+          <a:xfrm>
+            <a:off x="667512" y="5138928"/>
+            <a:ext cx="10853928" cy="1408176"/>
+          </a:xfrm>
+          <a:prstGeom prst="roundRect">
+            <a:avLst>
+              <a:gd name="adj" fmla="val 8000"/>
+            </a:avLst>
           </a:prstGeom>
           <a:solidFill>
             <a:srgbClr val="1A1A2E"/>
@@ -28861,14 +30218,1200 @@
       </p:sp>
       <p:sp>
         <p:nvSpPr>
-          <p:cNvPr id="3" name="Rectangle 2"/>
+          <p:cNvPr id="31" name="TextBox 30"/>
+          <p:cNvSpPr txBox="1"/>
+          <p:nvPr/>
+        </p:nvSpPr>
+        <p:spPr>
+          <a:xfrm>
+            <a:off x="1033272" y="5285232"/>
+            <a:ext cx="10149840" cy="310896"/>
+          </a:xfrm>
+          <a:prstGeom prst="rect">
+            <a:avLst/>
+          </a:prstGeom>
+          <a:noFill/>
+        </p:spPr>
+        <p:txBody>
+          <a:bodyPr wrap="square" lIns="0" rIns="0" tIns="0" bIns="0" anchor="t">
+            <a:spAutoFit/>
+          </a:bodyPr>
+          <a:lstStyle/>
+          <a:p>
+            <a:pPr algn="l">
+              <a:lnSpc>
+                <a:spcPct val="115000"/>
+              </a:lnSpc>
+            </a:pPr>
+            <a:r>
+              <a:rPr sz="1250" b="1">
+                <a:solidFill>
+                  <a:srgbClr val="00C49A"/>
+                </a:solidFill>
+                <a:latin typeface="Microsoft JhengHei"/>
+              </a:rPr>
+              <a:t>三方對照：同一份 34 句英文評測集（本機 llama.cpp 實跑）</a:t>
+            </a:r>
+          </a:p>
+        </p:txBody>
+      </p:sp>
+      <p:sp>
+        <p:nvSpPr>
+          <p:cNvPr id="32" name="TextBox 31"/>
+          <p:cNvSpPr txBox="1"/>
+          <p:nvPr/>
+        </p:nvSpPr>
+        <p:spPr>
+          <a:xfrm>
+            <a:off x="1033272" y="5650992"/>
+            <a:ext cx="1371600" cy="384048"/>
+          </a:xfrm>
+          <a:prstGeom prst="rect">
+            <a:avLst/>
+          </a:prstGeom>
+          <a:noFill/>
+        </p:spPr>
+        <p:txBody>
+          <a:bodyPr wrap="square" lIns="0" rIns="0" tIns="0" bIns="0" anchor="t">
+            <a:spAutoFit/>
+          </a:bodyPr>
+          <a:lstStyle/>
+          <a:p>
+            <a:pPr algn="l">
+              <a:lnSpc>
+                <a:spcPct val="115000"/>
+              </a:lnSpc>
+            </a:pPr>
+            <a:r>
+              <a:rPr sz="2200" b="1">
+                <a:solidFill>
+                  <a:srgbClr val="777777"/>
+                </a:solidFill>
+                <a:latin typeface="Arial"/>
+              </a:rPr>
+              <a:t>11%</a:t>
+            </a:r>
+          </a:p>
+        </p:txBody>
+      </p:sp>
+      <p:sp>
+        <p:nvSpPr>
+          <p:cNvPr id="33" name="TextBox 32"/>
+          <p:cNvSpPr txBox="1"/>
+          <p:nvPr/>
+        </p:nvSpPr>
+        <p:spPr>
+          <a:xfrm>
+            <a:off x="2359152" y="5669280"/>
+            <a:ext cx="2103120" cy="329184"/>
+          </a:xfrm>
+          <a:prstGeom prst="rect">
+            <a:avLst/>
+          </a:prstGeom>
+          <a:noFill/>
+        </p:spPr>
+        <p:txBody>
+          <a:bodyPr wrap="square" lIns="0" rIns="0" tIns="0" bIns="0" anchor="ctr">
+            <a:spAutoFit/>
+          </a:bodyPr>
+          <a:lstStyle/>
+          <a:p>
+            <a:pPr algn="l">
+              <a:lnSpc>
+                <a:spcPct val="115000"/>
+              </a:lnSpc>
+            </a:pPr>
+            <a:r>
+              <a:rPr sz="1150" b="1">
+                <a:solidFill>
+                  <a:srgbClr val="FFFFFF"/>
+                </a:solidFill>
+                <a:latin typeface="Microsoft JhengHei"/>
+              </a:rPr>
+              <a:t>base 未微調</a:t>
+            </a:r>
+          </a:p>
+        </p:txBody>
+      </p:sp>
+      <p:sp>
+        <p:nvSpPr>
+          <p:cNvPr id="34" name="TextBox 33"/>
+          <p:cNvSpPr txBox="1"/>
+          <p:nvPr/>
+        </p:nvSpPr>
+        <p:spPr>
+          <a:xfrm>
+            <a:off x="1033272" y="6089904"/>
+            <a:ext cx="3291840" cy="310896"/>
+          </a:xfrm>
+          <a:prstGeom prst="rect">
+            <a:avLst/>
+          </a:prstGeom>
+          <a:noFill/>
+        </p:spPr>
+        <p:txBody>
+          <a:bodyPr wrap="square" lIns="0" rIns="0" tIns="0" bIns="0" anchor="t">
+            <a:spAutoFit/>
+          </a:bodyPr>
+          <a:lstStyle/>
+          <a:p>
+            <a:pPr algn="l">
+              <a:lnSpc>
+                <a:spcPct val="115000"/>
+              </a:lnSpc>
+            </a:pPr>
+            <a:r>
+              <a:rPr sz="1050" b="0">
+                <a:solidFill>
+                  <a:srgbClr val="BBBBBB"/>
+                </a:solidFill>
+                <a:latin typeface="Microsoft JhengHei"/>
+              </a:rPr>
+              <a:t>看得懂英文，但不知道該叫哪個 tool</a:t>
+            </a:r>
+          </a:p>
+        </p:txBody>
+      </p:sp>
+      <p:sp>
+        <p:nvSpPr>
+          <p:cNvPr id="35" name="TextBox 34"/>
+          <p:cNvSpPr txBox="1"/>
+          <p:nvPr/>
+        </p:nvSpPr>
+        <p:spPr>
+          <a:xfrm>
+            <a:off x="4553712" y="5650992"/>
+            <a:ext cx="1371600" cy="384048"/>
+          </a:xfrm>
+          <a:prstGeom prst="rect">
+            <a:avLst/>
+          </a:prstGeom>
+          <a:noFill/>
+        </p:spPr>
+        <p:txBody>
+          <a:bodyPr wrap="square" lIns="0" rIns="0" tIns="0" bIns="0" anchor="t">
+            <a:spAutoFit/>
+          </a:bodyPr>
+          <a:lstStyle/>
+          <a:p>
+            <a:pPr algn="l">
+              <a:lnSpc>
+                <a:spcPct val="115000"/>
+              </a:lnSpc>
+            </a:pPr>
+            <a:r>
+              <a:rPr sz="2200" b="1">
+                <a:solidFill>
+                  <a:srgbClr val="FFFFFF"/>
+                </a:solidFill>
+                <a:latin typeface="Arial"/>
+              </a:rPr>
+              <a:t>32%</a:t>
+            </a:r>
+          </a:p>
+        </p:txBody>
+      </p:sp>
+      <p:sp>
+        <p:nvSpPr>
+          <p:cNvPr id="36" name="TextBox 35"/>
+          <p:cNvSpPr txBox="1"/>
+          <p:nvPr/>
+        </p:nvSpPr>
+        <p:spPr>
+          <a:xfrm>
+            <a:off x="5879592" y="5669280"/>
+            <a:ext cx="2103120" cy="329184"/>
+          </a:xfrm>
+          <a:prstGeom prst="rect">
+            <a:avLst/>
+          </a:prstGeom>
+          <a:noFill/>
+        </p:spPr>
+        <p:txBody>
+          <a:bodyPr wrap="square" lIns="0" rIns="0" tIns="0" bIns="0" anchor="ctr">
+            <a:spAutoFit/>
+          </a:bodyPr>
+          <a:lstStyle/>
+          <a:p>
+            <a:pPr algn="l">
+              <a:lnSpc>
+                <a:spcPct val="115000"/>
+              </a:lnSpc>
+            </a:pPr>
+            <a:r>
+              <a:rPr sz="1150" b="1">
+                <a:solidFill>
+                  <a:srgbClr val="FFFFFF"/>
+                </a:solidFill>
+                <a:latin typeface="Microsoft JhengHei"/>
+              </a:rPr>
+              <a:t>中文微調版</a:t>
+            </a:r>
+          </a:p>
+        </p:txBody>
+      </p:sp>
+      <p:sp>
+        <p:nvSpPr>
+          <p:cNvPr id="37" name="TextBox 36"/>
+          <p:cNvSpPr txBox="1"/>
+          <p:nvPr/>
+        </p:nvSpPr>
+        <p:spPr>
+          <a:xfrm>
+            <a:off x="4553712" y="6089904"/>
+            <a:ext cx="3291840" cy="310896"/>
+          </a:xfrm>
+          <a:prstGeom prst="rect">
+            <a:avLst/>
+          </a:prstGeom>
+          <a:noFill/>
+        </p:spPr>
+        <p:txBody>
+          <a:bodyPr wrap="square" lIns="0" rIns="0" tIns="0" bIns="0" anchor="t">
+            <a:spAutoFit/>
+          </a:bodyPr>
+          <a:lstStyle/>
+          <a:p>
+            <a:pPr algn="l">
+              <a:lnSpc>
+                <a:spcPct val="115000"/>
+              </a:lnSpc>
+            </a:pPr>
+            <a:r>
+              <a:rPr sz="1050" b="0">
+                <a:solidFill>
+                  <a:srgbClr val="BBBBBB"/>
+                </a:solidFill>
+                <a:latin typeface="Microsoft JhengHei"/>
+              </a:rPr>
+              <a:t>tool 慣例跨語言遷移——用中文學的可套到英文</a:t>
+            </a:r>
+          </a:p>
+        </p:txBody>
+      </p:sp>
+      <p:sp>
+        <p:nvSpPr>
+          <p:cNvPr id="38" name="TextBox 37"/>
+          <p:cNvSpPr txBox="1"/>
+          <p:nvPr/>
+        </p:nvSpPr>
+        <p:spPr>
+          <a:xfrm>
+            <a:off x="8074152" y="5650992"/>
+            <a:ext cx="1371600" cy="384048"/>
+          </a:xfrm>
+          <a:prstGeom prst="rect">
+            <a:avLst/>
+          </a:prstGeom>
+          <a:noFill/>
+        </p:spPr>
+        <p:txBody>
+          <a:bodyPr wrap="square" lIns="0" rIns="0" tIns="0" bIns="0" anchor="t">
+            <a:spAutoFit/>
+          </a:bodyPr>
+          <a:lstStyle/>
+          <a:p>
+            <a:pPr algn="l">
+              <a:lnSpc>
+                <a:spcPct val="115000"/>
+              </a:lnSpc>
+            </a:pPr>
+            <a:r>
+              <a:rPr sz="2200" b="1">
+                <a:solidFill>
+                  <a:srgbClr val="00C49A"/>
+                </a:solidFill>
+                <a:latin typeface="Arial"/>
+              </a:rPr>
+              <a:t>73%</a:t>
+            </a:r>
+          </a:p>
+        </p:txBody>
+      </p:sp>
+      <p:sp>
+        <p:nvSpPr>
+          <p:cNvPr id="39" name="TextBox 38"/>
+          <p:cNvSpPr txBox="1"/>
+          <p:nvPr/>
+        </p:nvSpPr>
+        <p:spPr>
+          <a:xfrm>
+            <a:off x="9400032" y="5669280"/>
+            <a:ext cx="2103120" cy="329184"/>
+          </a:xfrm>
+          <a:prstGeom prst="rect">
+            <a:avLst/>
+          </a:prstGeom>
+          <a:noFill/>
+        </p:spPr>
+        <p:txBody>
+          <a:bodyPr wrap="square" lIns="0" rIns="0" tIns="0" bIns="0" anchor="ctr">
+            <a:spAutoFit/>
+          </a:bodyPr>
+          <a:lstStyle/>
+          <a:p>
+            <a:pPr algn="l">
+              <a:lnSpc>
+                <a:spcPct val="115000"/>
+              </a:lnSpc>
+            </a:pPr>
+            <a:r>
+              <a:rPr sz="1150" b="1">
+                <a:solidFill>
+                  <a:srgbClr val="FFFFFF"/>
+                </a:solidFill>
+                <a:latin typeface="Microsoft JhengHei"/>
+              </a:rPr>
+              <a:t>英文微調版</a:t>
+            </a:r>
+          </a:p>
+        </p:txBody>
+      </p:sp>
+      <p:sp>
+        <p:nvSpPr>
+          <p:cNvPr id="40" name="TextBox 39"/>
+          <p:cNvSpPr txBox="1"/>
+          <p:nvPr/>
+        </p:nvSpPr>
+        <p:spPr>
+          <a:xfrm>
+            <a:off x="8074152" y="6089904"/>
+            <a:ext cx="3291840" cy="310896"/>
+          </a:xfrm>
+          <a:prstGeom prst="rect">
+            <a:avLst/>
+          </a:prstGeom>
+          <a:noFill/>
+        </p:spPr>
+        <p:txBody>
+          <a:bodyPr wrap="square" lIns="0" rIns="0" tIns="0" bIns="0" anchor="t">
+            <a:spAutoFit/>
+          </a:bodyPr>
+          <a:lstStyle/>
+          <a:p>
+            <a:pPr algn="l">
+              <a:lnSpc>
+                <a:spcPct val="115000"/>
+              </a:lnSpc>
+            </a:pPr>
+            <a:r>
+              <a:rPr sz="1050" b="0">
+                <a:solidFill>
+                  <a:srgbClr val="BBBBBB"/>
+                </a:solidFill>
+                <a:latin typeface="Microsoft JhengHei"/>
+              </a:rPr>
+              <a:t>基本查詢 12/12、錯字全中、RCA 3/3</a:t>
+            </a:r>
+          </a:p>
+        </p:txBody>
+      </p:sp>
+      <p:sp>
+        <p:nvSpPr>
+          <p:cNvPr id="41" name="TextBox 40"/>
+          <p:cNvSpPr txBox="1"/>
+          <p:nvPr/>
+        </p:nvSpPr>
+        <p:spPr>
+          <a:xfrm>
+            <a:off x="11475720" y="6565392"/>
+            <a:ext cx="658368" cy="237744"/>
+          </a:xfrm>
+          <a:prstGeom prst="rect">
+            <a:avLst/>
+          </a:prstGeom>
+          <a:noFill/>
+        </p:spPr>
+        <p:txBody>
+          <a:bodyPr wrap="square" lIns="0" rIns="0" tIns="0" bIns="0" anchor="t">
+            <a:spAutoFit/>
+          </a:bodyPr>
+          <a:lstStyle/>
+          <a:p>
+            <a:pPr algn="r">
+              <a:lnSpc>
+                <a:spcPct val="115000"/>
+              </a:lnSpc>
+            </a:pPr>
+            <a:r>
+              <a:rPr sz="1000" b="0">
+                <a:solidFill>
+                  <a:srgbClr val="BBBBBB"/>
+                </a:solidFill>
+                <a:latin typeface="Arial"/>
+              </a:rPr>
+              <a:t>26</a:t>
+            </a:r>
+          </a:p>
+        </p:txBody>
+      </p:sp>
+    </p:spTree>
+  </p:cSld>
+  <p:clrMapOvr>
+    <a:masterClrMapping/>
+  </p:clrMapOvr>
+</p:sld>
+</file>
+
+<file path=ppt/slides/slide27.xml><?xml version="1.0" encoding="utf-8"?>
+<p:sld xmlns:a="http://schemas.openxmlformats.org/drawingml/2006/main" xmlns:p="http://schemas.openxmlformats.org/presentationml/2006/main" xmlns:r="http://schemas.openxmlformats.org/officeDocument/2006/relationships">
+  <p:cSld>
+    <p:spTree>
+      <p:nvGrpSpPr>
+        <p:cNvPr id="1" name=""/>
+        <p:cNvGrpSpPr/>
+        <p:nvPr/>
+      </p:nvGrpSpPr>
+      <p:grpSpPr/>
+      <p:sp>
+        <p:nvSpPr>
+          <p:cNvPr id="2" name="TextBox 1"/>
+          <p:cNvSpPr txBox="1"/>
+          <p:nvPr/>
+        </p:nvSpPr>
+        <p:spPr>
+          <a:xfrm>
+            <a:off x="667512" y="310896"/>
+            <a:ext cx="10789920" cy="274320"/>
+          </a:xfrm>
+          <a:prstGeom prst="rect">
+            <a:avLst/>
+          </a:prstGeom>
+          <a:noFill/>
+        </p:spPr>
+        <p:txBody>
+          <a:bodyPr wrap="square" lIns="0" rIns="0" tIns="0" bIns="0" anchor="t">
+            <a:spAutoFit/>
+          </a:bodyPr>
+          <a:lstStyle/>
+          <a:p>
+            <a:pPr algn="l">
+              <a:lnSpc>
+                <a:spcPct val="115000"/>
+              </a:lnSpc>
+            </a:pPr>
+            <a:r>
+              <a:rPr sz="1250" b="1">
+                <a:solidFill>
+                  <a:srgbClr val="00C49A"/>
+                </a:solidFill>
+                <a:latin typeface="Arial"/>
+              </a:rPr>
+              <a:t>ENGLISH BUILD · 真正的工作量</a:t>
+            </a:r>
+          </a:p>
+        </p:txBody>
+      </p:sp>
+      <p:sp>
+        <p:nvSpPr>
+          <p:cNvPr id="3" name="TextBox 2"/>
+          <p:cNvSpPr txBox="1"/>
+          <p:nvPr/>
+        </p:nvSpPr>
+        <p:spPr>
+          <a:xfrm>
+            <a:off x="667512" y="585216"/>
+            <a:ext cx="10789920" cy="566928"/>
+          </a:xfrm>
+          <a:prstGeom prst="rect">
+            <a:avLst/>
+          </a:prstGeom>
+          <a:noFill/>
+        </p:spPr>
+        <p:txBody>
+          <a:bodyPr wrap="square" lIns="0" rIns="0" tIns="0" bIns="0" anchor="t">
+            <a:spAutoFit/>
+          </a:bodyPr>
+          <a:lstStyle/>
+          <a:p>
+            <a:pPr algn="l">
+              <a:lnSpc>
+                <a:spcPct val="115000"/>
+              </a:lnSpc>
+            </a:pPr>
+            <a:r>
+              <a:rPr sz="2700" b="1">
+                <a:solidFill>
+                  <a:srgbClr val="1A1A2E"/>
+                </a:solidFill>
+                <a:latin typeface="Microsoft JhengHei"/>
+              </a:rPr>
+              <a:t>移植的難處不在模型，在散落各處的語言假設</a:t>
+            </a:r>
+          </a:p>
+        </p:txBody>
+      </p:sp>
+      <p:sp>
+        <p:nvSpPr>
+          <p:cNvPr id="4" name="TextBox 3"/>
+          <p:cNvSpPr txBox="1"/>
+          <p:nvPr/>
+        </p:nvSpPr>
+        <p:spPr>
+          <a:xfrm>
+            <a:off x="667512" y="1234440"/>
+            <a:ext cx="10789920" cy="365760"/>
+          </a:xfrm>
+          <a:prstGeom prst="rect">
+            <a:avLst/>
+          </a:prstGeom>
+          <a:noFill/>
+        </p:spPr>
+        <p:txBody>
+          <a:bodyPr wrap="square" lIns="0" rIns="0" tIns="0" bIns="0" anchor="t">
+            <a:spAutoFit/>
+          </a:bodyPr>
+          <a:lstStyle/>
+          <a:p>
+            <a:pPr algn="l">
+              <a:lnSpc>
+                <a:spcPct val="115000"/>
+              </a:lnSpc>
+            </a:pPr>
+            <a:r>
+              <a:rPr sz="1300" b="0">
+                <a:solidFill>
+                  <a:srgbClr val="555555"/>
+                </a:solidFill>
+                <a:latin typeface="Microsoft JhengHei"/>
+              </a:rPr>
+              <a:t>模型換好只是開始。真正吃時間的是三個月為中文磨出來的規則層——每一條都藏著「這是中文」的隱含假設。</a:t>
+            </a:r>
+          </a:p>
+        </p:txBody>
+      </p:sp>
+      <p:sp>
+        <p:nvSpPr>
+          <p:cNvPr id="5" name="Rounded Rectangle 4"/>
           <p:cNvSpPr/>
           <p:nvPr/>
         </p:nvSpPr>
         <p:spPr>
           <a:xfrm>
-            <a:off x="0" y="0"/>
-            <a:ext cx="12188952" cy="128016"/>
+            <a:off x="667512" y="1755648"/>
+            <a:ext cx="10853928" cy="768096"/>
+          </a:xfrm>
+          <a:prstGeom prst="roundRect">
+            <a:avLst>
+              <a:gd name="adj" fmla="val 8000"/>
+            </a:avLst>
+          </a:prstGeom>
+          <a:solidFill>
+            <a:srgbClr val="F4F6F8"/>
+          </a:solidFill>
+          <a:ln w="7620">
+            <a:solidFill>
+              <a:srgbClr val="E6E8EC"/>
+            </a:solidFill>
+          </a:ln>
+          <a:effectLst/>
+        </p:spPr>
+        <p:style>
+          <a:lnRef idx="1">
+            <a:schemeClr val="accent1"/>
+          </a:lnRef>
+          <a:fillRef idx="3">
+            <a:schemeClr val="accent1"/>
+          </a:fillRef>
+          <a:effectRef idx="2">
+            <a:schemeClr val="accent1"/>
+          </a:effectRef>
+          <a:fontRef idx="minor">
+            <a:schemeClr val="lt1"/>
+          </a:fontRef>
+        </p:style>
+        <p:txBody>
+          <a:bodyPr rtlCol="0" anchor="ctr"/>
+          <a:lstStyle/>
+          <a:p>
+            <a:pPr algn="ctr"/>
+          </a:p>
+        </p:txBody>
+      </p:sp>
+      <p:sp>
+        <p:nvSpPr>
+          <p:cNvPr id="6" name="Rectangle 5"/>
+          <p:cNvSpPr/>
+          <p:nvPr/>
+        </p:nvSpPr>
+        <p:spPr>
+          <a:xfrm>
+            <a:off x="667512" y="1755648"/>
+            <a:ext cx="64008" cy="768096"/>
+          </a:xfrm>
+          <a:prstGeom prst="rect">
+            <a:avLst/>
+          </a:prstGeom>
+          <a:solidFill>
+            <a:srgbClr val="222A45"/>
+          </a:solidFill>
+          <a:ln>
+            <a:noFill/>
+          </a:ln>
+          <a:effectLst/>
+        </p:spPr>
+        <p:style>
+          <a:lnRef idx="1">
+            <a:schemeClr val="accent1"/>
+          </a:lnRef>
+          <a:fillRef idx="3">
+            <a:schemeClr val="accent1"/>
+          </a:fillRef>
+          <a:effectRef idx="2">
+            <a:schemeClr val="accent1"/>
+          </a:effectRef>
+          <a:fontRef idx="minor">
+            <a:schemeClr val="lt1"/>
+          </a:fontRef>
+        </p:style>
+        <p:txBody>
+          <a:bodyPr rtlCol="0" anchor="ctr"/>
+          <a:lstStyle/>
+          <a:p>
+            <a:pPr algn="ctr"/>
+          </a:p>
+        </p:txBody>
+      </p:sp>
+      <p:sp>
+        <p:nvSpPr>
+          <p:cNvPr id="7" name="TextBox 6"/>
+          <p:cNvSpPr txBox="1"/>
+          <p:nvPr/>
+        </p:nvSpPr>
+        <p:spPr>
+          <a:xfrm>
+            <a:off x="923544" y="1828800"/>
+            <a:ext cx="2331720" cy="292608"/>
+          </a:xfrm>
+          <a:prstGeom prst="rect">
+            <a:avLst/>
+          </a:prstGeom>
+          <a:noFill/>
+        </p:spPr>
+        <p:txBody>
+          <a:bodyPr wrap="square" lIns="0" rIns="0" tIns="0" bIns="0" anchor="t">
+            <a:spAutoFit/>
+          </a:bodyPr>
+          <a:lstStyle/>
+          <a:p>
+            <a:pPr algn="l">
+              <a:lnSpc>
+                <a:spcPct val="115000"/>
+              </a:lnSpc>
+            </a:pPr>
+            <a:r>
+              <a:rPr sz="1250" b="1">
+                <a:solidFill>
+                  <a:srgbClr val="222A45"/>
+                </a:solidFill>
+                <a:latin typeface="Microsoft JhengHei"/>
+              </a:rPr>
+              <a:t>詞表是中文</a:t>
+            </a:r>
+          </a:p>
+        </p:txBody>
+      </p:sp>
+      <p:sp>
+        <p:nvSpPr>
+          <p:cNvPr id="8" name="TextBox 7"/>
+          <p:cNvSpPr txBox="1"/>
+          <p:nvPr/>
+        </p:nvSpPr>
+        <p:spPr>
+          <a:xfrm>
+            <a:off x="923544" y="2157984"/>
+            <a:ext cx="2331720" cy="292608"/>
+          </a:xfrm>
+          <a:prstGeom prst="rect">
+            <a:avLst/>
+          </a:prstGeom>
+          <a:noFill/>
+        </p:spPr>
+        <p:txBody>
+          <a:bodyPr wrap="square" lIns="0" rIns="0" tIns="0" bIns="0" anchor="t">
+            <a:spAutoFit/>
+          </a:bodyPr>
+          <a:lstStyle/>
+          <a:p>
+            <a:pPr algn="l">
+              <a:lnSpc>
+                <a:spcPct val="115000"/>
+              </a:lnSpc>
+            </a:pPr>
+            <a:r>
+              <a:rPr sz="1000" b="0">
+                <a:solidFill>
+                  <a:srgbClr val="777777"/>
+                </a:solidFill>
+                <a:latin typeface="Microsoft JhengHei"/>
+              </a:rPr>
+              <a:t>坑 1</a:t>
+            </a:r>
+          </a:p>
+        </p:txBody>
+      </p:sp>
+      <p:sp>
+        <p:nvSpPr>
+          <p:cNvPr id="9" name="TextBox 8"/>
+          <p:cNvSpPr txBox="1"/>
+          <p:nvPr/>
+        </p:nvSpPr>
+        <p:spPr>
+          <a:xfrm>
+            <a:off x="3410712" y="1828800"/>
+            <a:ext cx="4023360" cy="310896"/>
+          </a:xfrm>
+          <a:prstGeom prst="rect">
+            <a:avLst/>
+          </a:prstGeom>
+          <a:noFill/>
+        </p:spPr>
+        <p:txBody>
+          <a:bodyPr wrap="square" lIns="0" rIns="0" tIns="0" bIns="0" anchor="t">
+            <a:spAutoFit/>
+          </a:bodyPr>
+          <a:lstStyle/>
+          <a:p>
+            <a:pPr algn="l">
+              <a:lnSpc>
+                <a:spcPct val="115000"/>
+              </a:lnSpc>
+            </a:pPr>
+            <a:r>
+              <a:rPr sz="1100" b="0">
+                <a:solidFill>
+                  <a:srgbClr val="444444"/>
+                </a:solidFill>
+                <a:latin typeface="Microsoft JhengHei"/>
+              </a:rPr>
+              <a:t>_ALL_INTENT_WORDS 等 21 個詞表全中文 → 英文句一個都不命中</a:t>
+            </a:r>
+          </a:p>
+        </p:txBody>
+      </p:sp>
+      <p:sp>
+        <p:nvSpPr>
+          <p:cNvPr id="10" name="TextBox 9"/>
+          <p:cNvSpPr txBox="1"/>
+          <p:nvPr/>
+        </p:nvSpPr>
+        <p:spPr>
+          <a:xfrm>
+            <a:off x="3410712" y="2157984"/>
+            <a:ext cx="4023360" cy="292608"/>
+          </a:xfrm>
+          <a:prstGeom prst="rect">
+            <a:avLst/>
+          </a:prstGeom>
+          <a:noFill/>
+        </p:spPr>
+        <p:txBody>
+          <a:bodyPr wrap="square" lIns="0" rIns="0" tIns="0" bIns="0" anchor="t">
+            <a:spAutoFit/>
+          </a:bodyPr>
+          <a:lstStyle/>
+          <a:p>
+            <a:pPr algn="l">
+              <a:lnSpc>
+                <a:spcPct val="115000"/>
+              </a:lnSpc>
+            </a:pPr>
+            <a:r>
+              <a:rPr sz="900" b="0">
+                <a:solidFill>
+                  <a:srgbClr val="BBBBBB"/>
+                </a:solidFill>
+                <a:latin typeface="Arial"/>
+              </a:rPr>
+              <a:t>↓</a:t>
+            </a:r>
+          </a:p>
+        </p:txBody>
+      </p:sp>
+      <p:sp>
+        <p:nvSpPr>
+          <p:cNvPr id="11" name="TextBox 10"/>
+          <p:cNvSpPr txBox="1"/>
+          <p:nvPr/>
+        </p:nvSpPr>
+        <p:spPr>
+          <a:xfrm>
+            <a:off x="7571232" y="1938528"/>
+            <a:ext cx="3749039" cy="457200"/>
+          </a:xfrm>
+          <a:prstGeom prst="rect">
+            <a:avLst/>
+          </a:prstGeom>
+          <a:noFill/>
+        </p:spPr>
+        <p:txBody>
+          <a:bodyPr wrap="square" lIns="0" rIns="0" tIns="0" bIns="0" anchor="ctr">
+            <a:spAutoFit/>
+          </a:bodyPr>
+          <a:lstStyle/>
+          <a:p>
+            <a:pPr algn="l">
+              <a:lnSpc>
+                <a:spcPct val="115000"/>
+              </a:lnSpc>
+            </a:pPr>
+            <a:r>
+              <a:rPr sz="1100" b="1">
+                <a:solidFill>
+                  <a:srgbClr val="444444"/>
+                </a:solidFill>
+                <a:latin typeface="Microsoft JhengHei"/>
+              </a:rPr>
+              <a:t>英文句被判成「只有商品名沒動作」，整批轉 clarify</a:t>
+            </a:r>
+          </a:p>
+        </p:txBody>
+      </p:sp>
+      <p:sp>
+        <p:nvSpPr>
+          <p:cNvPr id="12" name="Rounded Rectangle 11"/>
+          <p:cNvSpPr/>
+          <p:nvPr/>
+        </p:nvSpPr>
+        <p:spPr>
+          <a:xfrm>
+            <a:off x="667512" y="2615184"/>
+            <a:ext cx="10853928" cy="768096"/>
+          </a:xfrm>
+          <a:prstGeom prst="roundRect">
+            <a:avLst>
+              <a:gd name="adj" fmla="val 8000"/>
+            </a:avLst>
+          </a:prstGeom>
+          <a:solidFill>
+            <a:srgbClr val="FFFFFF"/>
+          </a:solidFill>
+          <a:ln w="7620">
+            <a:solidFill>
+              <a:srgbClr val="E6E8EC"/>
+            </a:solidFill>
+          </a:ln>
+          <a:effectLst/>
+        </p:spPr>
+        <p:style>
+          <a:lnRef idx="1">
+            <a:schemeClr val="accent1"/>
+          </a:lnRef>
+          <a:fillRef idx="3">
+            <a:schemeClr val="accent1"/>
+          </a:fillRef>
+          <a:effectRef idx="2">
+            <a:schemeClr val="accent1"/>
+          </a:effectRef>
+          <a:fontRef idx="minor">
+            <a:schemeClr val="lt1"/>
+          </a:fontRef>
+        </p:style>
+        <p:txBody>
+          <a:bodyPr rtlCol="0" anchor="ctr"/>
+          <a:lstStyle/>
+          <a:p>
+            <a:pPr algn="ctr"/>
+          </a:p>
+        </p:txBody>
+      </p:sp>
+      <p:sp>
+        <p:nvSpPr>
+          <p:cNvPr id="13" name="Rectangle 12"/>
+          <p:cNvSpPr/>
+          <p:nvPr/>
+        </p:nvSpPr>
+        <p:spPr>
+          <a:xfrm>
+            <a:off x="667512" y="2615184"/>
+            <a:ext cx="64008" cy="768096"/>
+          </a:xfrm>
+          <a:prstGeom prst="rect">
+            <a:avLst/>
+          </a:prstGeom>
+          <a:solidFill>
+            <a:srgbClr val="008E76"/>
+          </a:solidFill>
+          <a:ln>
+            <a:noFill/>
+          </a:ln>
+          <a:effectLst/>
+        </p:spPr>
+        <p:style>
+          <a:lnRef idx="1">
+            <a:schemeClr val="accent1"/>
+          </a:lnRef>
+          <a:fillRef idx="3">
+            <a:schemeClr val="accent1"/>
+          </a:fillRef>
+          <a:effectRef idx="2">
+            <a:schemeClr val="accent1"/>
+          </a:effectRef>
+          <a:fontRef idx="minor">
+            <a:schemeClr val="lt1"/>
+          </a:fontRef>
+        </p:style>
+        <p:txBody>
+          <a:bodyPr rtlCol="0" anchor="ctr"/>
+          <a:lstStyle/>
+          <a:p>
+            <a:pPr algn="ctr"/>
+          </a:p>
+        </p:txBody>
+      </p:sp>
+      <p:sp>
+        <p:nvSpPr>
+          <p:cNvPr id="14" name="TextBox 13"/>
+          <p:cNvSpPr txBox="1"/>
+          <p:nvPr/>
+        </p:nvSpPr>
+        <p:spPr>
+          <a:xfrm>
+            <a:off x="923544" y="2688336"/>
+            <a:ext cx="2331720" cy="292608"/>
+          </a:xfrm>
+          <a:prstGeom prst="rect">
+            <a:avLst/>
+          </a:prstGeom>
+          <a:noFill/>
+        </p:spPr>
+        <p:txBody>
+          <a:bodyPr wrap="square" lIns="0" rIns="0" tIns="0" bIns="0" anchor="t">
+            <a:spAutoFit/>
+          </a:bodyPr>
+          <a:lstStyle/>
+          <a:p>
+            <a:pPr algn="l">
+              <a:lnSpc>
+                <a:spcPct val="115000"/>
+              </a:lnSpc>
+            </a:pPr>
+            <a:r>
+              <a:rPr sz="1250" b="1">
+                <a:solidFill>
+                  <a:srgbClr val="008E76"/>
+                </a:solidFill>
+                <a:latin typeface="Microsoft JhengHei"/>
+              </a:rPr>
+              <a:t>對照表的鍵是中文</a:t>
+            </a:r>
+          </a:p>
+        </p:txBody>
+      </p:sp>
+      <p:sp>
+        <p:nvSpPr>
+          <p:cNvPr id="15" name="TextBox 14"/>
+          <p:cNvSpPr txBox="1"/>
+          <p:nvPr/>
+        </p:nvSpPr>
+        <p:spPr>
+          <a:xfrm>
+            <a:off x="923544" y="3017520"/>
+            <a:ext cx="2331720" cy="292608"/>
+          </a:xfrm>
+          <a:prstGeom prst="rect">
+            <a:avLst/>
+          </a:prstGeom>
+          <a:noFill/>
+        </p:spPr>
+        <p:txBody>
+          <a:bodyPr wrap="square" lIns="0" rIns="0" tIns="0" bIns="0" anchor="t">
+            <a:spAutoFit/>
+          </a:bodyPr>
+          <a:lstStyle/>
+          <a:p>
+            <a:pPr algn="l">
+              <a:lnSpc>
+                <a:spcPct val="115000"/>
+              </a:lnSpc>
+            </a:pPr>
+            <a:r>
+              <a:rPr sz="1000" b="0">
+                <a:solidFill>
+                  <a:srgbClr val="777777"/>
+                </a:solidFill>
+                <a:latin typeface="Microsoft JhengHei"/>
+              </a:rPr>
+              <a:t>坑 2</a:t>
+            </a:r>
+          </a:p>
+        </p:txBody>
+      </p:sp>
+      <p:sp>
+        <p:nvSpPr>
+          <p:cNvPr id="16" name="TextBox 15"/>
+          <p:cNvSpPr txBox="1"/>
+          <p:nvPr/>
+        </p:nvSpPr>
+        <p:spPr>
+          <a:xfrm>
+            <a:off x="3410712" y="2688336"/>
+            <a:ext cx="4023360" cy="310896"/>
+          </a:xfrm>
+          <a:prstGeom prst="rect">
+            <a:avLst/>
+          </a:prstGeom>
+          <a:noFill/>
+        </p:spPr>
+        <p:txBody>
+          <a:bodyPr wrap="square" lIns="0" rIns="0" tIns="0" bIns="0" anchor="t">
+            <a:spAutoFit/>
+          </a:bodyPr>
+          <a:lstStyle/>
+          <a:p>
+            <a:pPr algn="l">
+              <a:lnSpc>
+                <a:spcPct val="115000"/>
+              </a:lnSpc>
+            </a:pPr>
+            <a:r>
+              <a:rPr sz="1100" b="0">
+                <a:solidFill>
+                  <a:srgbClr val="444444"/>
+                </a:solidFill>
+                <a:latin typeface="Microsoft JhengHei"/>
+              </a:rPr>
+              <a:t>{"電子": "electronics"} ——值是英文、鍵是中文</a:t>
+            </a:r>
+          </a:p>
+        </p:txBody>
+      </p:sp>
+      <p:sp>
+        <p:nvSpPr>
+          <p:cNvPr id="17" name="TextBox 16"/>
+          <p:cNvSpPr txBox="1"/>
+          <p:nvPr/>
+        </p:nvSpPr>
+        <p:spPr>
+          <a:xfrm>
+            <a:off x="3410712" y="3017520"/>
+            <a:ext cx="4023360" cy="292608"/>
+          </a:xfrm>
+          <a:prstGeom prst="rect">
+            <a:avLst/>
+          </a:prstGeom>
+          <a:noFill/>
+        </p:spPr>
+        <p:txBody>
+          <a:bodyPr wrap="square" lIns="0" rIns="0" tIns="0" bIns="0" anchor="t">
+            <a:spAutoFit/>
+          </a:bodyPr>
+          <a:lstStyle/>
+          <a:p>
+            <a:pPr algn="l">
+              <a:lnSpc>
+                <a:spcPct val="115000"/>
+              </a:lnSpc>
+            </a:pPr>
+            <a:r>
+              <a:rPr sz="900" b="0">
+                <a:solidFill>
+                  <a:srgbClr val="BBBBBB"/>
+                </a:solidFill>
+                <a:latin typeface="Arial"/>
+              </a:rPr>
+              <a:t>↓</a:t>
+            </a:r>
+          </a:p>
+        </p:txBody>
+      </p:sp>
+      <p:sp>
+        <p:nvSpPr>
+          <p:cNvPr id="18" name="TextBox 17"/>
+          <p:cNvSpPr txBox="1"/>
+          <p:nvPr/>
+        </p:nvSpPr>
+        <p:spPr>
+          <a:xfrm>
+            <a:off x="7571232" y="2798064"/>
+            <a:ext cx="3749039" cy="457200"/>
+          </a:xfrm>
+          <a:prstGeom prst="rect">
+            <a:avLst/>
+          </a:prstGeom>
+          <a:noFill/>
+        </p:spPr>
+        <p:txBody>
+          <a:bodyPr wrap="square" lIns="0" rIns="0" tIns="0" bIns="0" anchor="ctr">
+            <a:spAutoFit/>
+          </a:bodyPr>
+          <a:lstStyle/>
+          <a:p>
+            <a:pPr algn="l">
+              <a:lnSpc>
+                <a:spcPct val="115000"/>
+              </a:lnSpc>
+            </a:pPr>
+            <a:r>
+              <a:rPr sz="1100" b="1">
+                <a:solidFill>
+                  <a:srgbClr val="444444"/>
+                </a:solidFill>
+                <a:latin typeface="Microsoft JhengHei"/>
+              </a:rPr>
+              <a:t>6 個類別 5 個查不到，整條類別查詢功能靜默失效</a:t>
+            </a:r>
+          </a:p>
+        </p:txBody>
+      </p:sp>
+      <p:sp>
+        <p:nvSpPr>
+          <p:cNvPr id="19" name="Rounded Rectangle 18"/>
+          <p:cNvSpPr/>
+          <p:nvPr/>
+        </p:nvSpPr>
+        <p:spPr>
+          <a:xfrm>
+            <a:off x="667512" y="3474720"/>
+            <a:ext cx="10853928" cy="768096"/>
+          </a:xfrm>
+          <a:prstGeom prst="roundRect">
+            <a:avLst>
+              <a:gd name="adj" fmla="val 8000"/>
+            </a:avLst>
+          </a:prstGeom>
+          <a:solidFill>
+            <a:srgbClr val="F4F6F8"/>
+          </a:solidFill>
+          <a:ln w="7620">
+            <a:solidFill>
+              <a:srgbClr val="E6E8EC"/>
+            </a:solidFill>
+          </a:ln>
+          <a:effectLst/>
+        </p:spPr>
+        <p:style>
+          <a:lnRef idx="1">
+            <a:schemeClr val="accent1"/>
+          </a:lnRef>
+          <a:fillRef idx="3">
+            <a:schemeClr val="accent1"/>
+          </a:fillRef>
+          <a:effectRef idx="2">
+            <a:schemeClr val="accent1"/>
+          </a:effectRef>
+          <a:fontRef idx="minor">
+            <a:schemeClr val="lt1"/>
+          </a:fontRef>
+        </p:style>
+        <p:txBody>
+          <a:bodyPr rtlCol="0" anchor="ctr"/>
+          <a:lstStyle/>
+          <a:p>
+            <a:pPr algn="ctr"/>
+          </a:p>
+        </p:txBody>
+      </p:sp>
+      <p:sp>
+        <p:nvSpPr>
+          <p:cNvPr id="20" name="Rectangle 19"/>
+          <p:cNvSpPr/>
+          <p:nvPr/>
+        </p:nvSpPr>
+        <p:spPr>
+          <a:xfrm>
+            <a:off x="667512" y="3474720"/>
+            <a:ext cx="64008" cy="768096"/>
           </a:xfrm>
           <a:prstGeom prst="rect">
             <a:avLst/>
@@ -28905,6 +31448,2640 @@
       </p:sp>
       <p:sp>
         <p:nvSpPr>
+          <p:cNvPr id="21" name="TextBox 20"/>
+          <p:cNvSpPr txBox="1"/>
+          <p:nvPr/>
+        </p:nvSpPr>
+        <p:spPr>
+          <a:xfrm>
+            <a:off x="923544" y="3547872"/>
+            <a:ext cx="2331720" cy="292608"/>
+          </a:xfrm>
+          <a:prstGeom prst="rect">
+            <a:avLst/>
+          </a:prstGeom>
+          <a:noFill/>
+        </p:spPr>
+        <p:txBody>
+          <a:bodyPr wrap="square" lIns="0" rIns="0" tIns="0" bIns="0" anchor="t">
+            <a:spAutoFit/>
+          </a:bodyPr>
+          <a:lstStyle/>
+          <a:p>
+            <a:pPr algn="l">
+              <a:lnSpc>
+                <a:spcPct val="115000"/>
+              </a:lnSpc>
+            </a:pPr>
+            <a:r>
+              <a:rPr sz="1250" b="1">
+                <a:solidFill>
+                  <a:srgbClr val="00C49A"/>
+                </a:solidFill>
+                <a:latin typeface="Microsoft JhengHei"/>
+              </a:rPr>
+              <a:t>門檻用中文字元數</a:t>
+            </a:r>
+          </a:p>
+        </p:txBody>
+      </p:sp>
+      <p:sp>
+        <p:nvSpPr>
+          <p:cNvPr id="22" name="TextBox 21"/>
+          <p:cNvSpPr txBox="1"/>
+          <p:nvPr/>
+        </p:nvSpPr>
+        <p:spPr>
+          <a:xfrm>
+            <a:off x="923544" y="3877056"/>
+            <a:ext cx="2331720" cy="292608"/>
+          </a:xfrm>
+          <a:prstGeom prst="rect">
+            <a:avLst/>
+          </a:prstGeom>
+          <a:noFill/>
+        </p:spPr>
+        <p:txBody>
+          <a:bodyPr wrap="square" lIns="0" rIns="0" tIns="0" bIns="0" anchor="t">
+            <a:spAutoFit/>
+          </a:bodyPr>
+          <a:lstStyle/>
+          <a:p>
+            <a:pPr algn="l">
+              <a:lnSpc>
+                <a:spcPct val="115000"/>
+              </a:lnSpc>
+            </a:pPr>
+            <a:r>
+              <a:rPr sz="1000" b="0">
+                <a:solidFill>
+                  <a:srgbClr val="777777"/>
+                </a:solidFill>
+                <a:latin typeface="Microsoft JhengHei"/>
+              </a:rPr>
+              <a:t>坑 3</a:t>
+            </a:r>
+          </a:p>
+        </p:txBody>
+      </p:sp>
+      <p:sp>
+        <p:nvSpPr>
+          <p:cNvPr id="23" name="TextBox 22"/>
+          <p:cNvSpPr txBox="1"/>
+          <p:nvPr/>
+        </p:nvSpPr>
+        <p:spPr>
+          <a:xfrm>
+            <a:off x="3410712" y="3547872"/>
+            <a:ext cx="4023360" cy="310896"/>
+          </a:xfrm>
+          <a:prstGeom prst="rect">
+            <a:avLst/>
+          </a:prstGeom>
+          <a:noFill/>
+        </p:spPr>
+        <p:txBody>
+          <a:bodyPr wrap="square" lIns="0" rIns="0" tIns="0" bIns="0" anchor="t">
+            <a:spAutoFit/>
+          </a:bodyPr>
+          <a:lstStyle/>
+          <a:p>
+            <a:pPr algn="l">
+              <a:lnSpc>
+                <a:spcPct val="115000"/>
+              </a:lnSpc>
+            </a:pPr>
+            <a:r>
+              <a:rPr sz="1100" b="0">
+                <a:solidFill>
+                  <a:srgbClr val="444444"/>
+                </a:solidFill>
+                <a:latin typeface="Microsoft JhengHei"/>
+              </a:rPr>
+              <a:t>長句判定 &gt;30 字元；英文字元數是中文的 2-3 倍</a:t>
+            </a:r>
+          </a:p>
+        </p:txBody>
+      </p:sp>
+      <p:sp>
+        <p:nvSpPr>
+          <p:cNvPr id="24" name="TextBox 23"/>
+          <p:cNvSpPr txBox="1"/>
+          <p:nvPr/>
+        </p:nvSpPr>
+        <p:spPr>
+          <a:xfrm>
+            <a:off x="3410712" y="3877056"/>
+            <a:ext cx="4023360" cy="292608"/>
+          </a:xfrm>
+          <a:prstGeom prst="rect">
+            <a:avLst/>
+          </a:prstGeom>
+          <a:noFill/>
+        </p:spPr>
+        <p:txBody>
+          <a:bodyPr wrap="square" lIns="0" rIns="0" tIns="0" bIns="0" anchor="t">
+            <a:spAutoFit/>
+          </a:bodyPr>
+          <a:lstStyle/>
+          <a:p>
+            <a:pPr algn="l">
+              <a:lnSpc>
+                <a:spcPct val="115000"/>
+              </a:lnSpc>
+            </a:pPr>
+            <a:r>
+              <a:rPr sz="900" b="0">
+                <a:solidFill>
+                  <a:srgbClr val="BBBBBB"/>
+                </a:solidFill>
+                <a:latin typeface="Arial"/>
+              </a:rPr>
+              <a:t>↓</a:t>
+            </a:r>
+          </a:p>
+        </p:txBody>
+      </p:sp>
+      <p:sp>
+        <p:nvSpPr>
+          <p:cNvPr id="25" name="TextBox 24"/>
+          <p:cNvSpPr txBox="1"/>
+          <p:nvPr/>
+        </p:nvSpPr>
+        <p:spPr>
+          <a:xfrm>
+            <a:off x="7571232" y="3657600"/>
+            <a:ext cx="3749039" cy="457200"/>
+          </a:xfrm>
+          <a:prstGeom prst="rect">
+            <a:avLst/>
+          </a:prstGeom>
+          <a:noFill/>
+        </p:spPr>
+        <p:txBody>
+          <a:bodyPr wrap="square" lIns="0" rIns="0" tIns="0" bIns="0" anchor="ctr">
+            <a:spAutoFit/>
+          </a:bodyPr>
+          <a:lstStyle/>
+          <a:p>
+            <a:pPr algn="l">
+              <a:lnSpc>
+                <a:spcPct val="115000"/>
+              </a:lnSpc>
+            </a:pPr>
+            <a:r>
+              <a:rPr sz="1100" b="1">
+                <a:solidFill>
+                  <a:srgbClr val="444444"/>
+                </a:solidFill>
+                <a:latin typeface="Microsoft JhengHei"/>
+              </a:rPr>
+              <a:t>正常英文句被當長句，幾乎全部繞過 LLM</a:t>
+            </a:r>
+          </a:p>
+        </p:txBody>
+      </p:sp>
+      <p:sp>
+        <p:nvSpPr>
+          <p:cNvPr id="26" name="Rounded Rectangle 25"/>
+          <p:cNvSpPr/>
+          <p:nvPr/>
+        </p:nvSpPr>
+        <p:spPr>
+          <a:xfrm>
+            <a:off x="667512" y="4334256"/>
+            <a:ext cx="10853928" cy="768096"/>
+          </a:xfrm>
+          <a:prstGeom prst="roundRect">
+            <a:avLst>
+              <a:gd name="adj" fmla="val 8000"/>
+            </a:avLst>
+          </a:prstGeom>
+          <a:solidFill>
+            <a:srgbClr val="FFFFFF"/>
+          </a:solidFill>
+          <a:ln w="7620">
+            <a:solidFill>
+              <a:srgbClr val="E6E8EC"/>
+            </a:solidFill>
+          </a:ln>
+          <a:effectLst/>
+        </p:spPr>
+        <p:style>
+          <a:lnRef idx="1">
+            <a:schemeClr val="accent1"/>
+          </a:lnRef>
+          <a:fillRef idx="3">
+            <a:schemeClr val="accent1"/>
+          </a:fillRef>
+          <a:effectRef idx="2">
+            <a:schemeClr val="accent1"/>
+          </a:effectRef>
+          <a:fontRef idx="minor">
+            <a:schemeClr val="lt1"/>
+          </a:fontRef>
+        </p:style>
+        <p:txBody>
+          <a:bodyPr rtlCol="0" anchor="ctr"/>
+          <a:lstStyle/>
+          <a:p>
+            <a:pPr algn="ctr"/>
+          </a:p>
+        </p:txBody>
+      </p:sp>
+      <p:sp>
+        <p:nvSpPr>
+          <p:cNvPr id="27" name="Rectangle 26"/>
+          <p:cNvSpPr/>
+          <p:nvPr/>
+        </p:nvSpPr>
+        <p:spPr>
+          <a:xfrm>
+            <a:off x="667512" y="4334256"/>
+            <a:ext cx="64008" cy="768096"/>
+          </a:xfrm>
+          <a:prstGeom prst="rect">
+            <a:avLst/>
+          </a:prstGeom>
+          <a:solidFill>
+            <a:srgbClr val="E85D5D"/>
+          </a:solidFill>
+          <a:ln>
+            <a:noFill/>
+          </a:ln>
+          <a:effectLst/>
+        </p:spPr>
+        <p:style>
+          <a:lnRef idx="1">
+            <a:schemeClr val="accent1"/>
+          </a:lnRef>
+          <a:fillRef idx="3">
+            <a:schemeClr val="accent1"/>
+          </a:fillRef>
+          <a:effectRef idx="2">
+            <a:schemeClr val="accent1"/>
+          </a:effectRef>
+          <a:fontRef idx="minor">
+            <a:schemeClr val="lt1"/>
+          </a:fontRef>
+        </p:style>
+        <p:txBody>
+          <a:bodyPr rtlCol="0" anchor="ctr"/>
+          <a:lstStyle/>
+          <a:p>
+            <a:pPr algn="ctr"/>
+          </a:p>
+        </p:txBody>
+      </p:sp>
+      <p:sp>
+        <p:nvSpPr>
+          <p:cNvPr id="28" name="TextBox 27"/>
+          <p:cNvSpPr txBox="1"/>
+          <p:nvPr/>
+        </p:nvSpPr>
+        <p:spPr>
+          <a:xfrm>
+            <a:off x="923544" y="4407408"/>
+            <a:ext cx="2331720" cy="292608"/>
+          </a:xfrm>
+          <a:prstGeom prst="rect">
+            <a:avLst/>
+          </a:prstGeom>
+          <a:noFill/>
+        </p:spPr>
+        <p:txBody>
+          <a:bodyPr wrap="square" lIns="0" rIns="0" tIns="0" bIns="0" anchor="t">
+            <a:spAutoFit/>
+          </a:bodyPr>
+          <a:lstStyle/>
+          <a:p>
+            <a:pPr algn="l">
+              <a:lnSpc>
+                <a:spcPct val="115000"/>
+              </a:lnSpc>
+            </a:pPr>
+            <a:r>
+              <a:rPr sz="1250" b="1">
+                <a:solidFill>
+                  <a:srgbClr val="E85D5D"/>
+                </a:solidFill>
+                <a:latin typeface="Microsoft JhengHei"/>
+              </a:rPr>
+              <a:t>演算法假設中文形態</a:t>
+            </a:r>
+          </a:p>
+        </p:txBody>
+      </p:sp>
+      <p:sp>
+        <p:nvSpPr>
+          <p:cNvPr id="29" name="TextBox 28"/>
+          <p:cNvSpPr txBox="1"/>
+          <p:nvPr/>
+        </p:nvSpPr>
+        <p:spPr>
+          <a:xfrm>
+            <a:off x="923544" y="4736592"/>
+            <a:ext cx="2331720" cy="292608"/>
+          </a:xfrm>
+          <a:prstGeom prst="rect">
+            <a:avLst/>
+          </a:prstGeom>
+          <a:noFill/>
+        </p:spPr>
+        <p:txBody>
+          <a:bodyPr wrap="square" lIns="0" rIns="0" tIns="0" bIns="0" anchor="t">
+            <a:spAutoFit/>
+          </a:bodyPr>
+          <a:lstStyle/>
+          <a:p>
+            <a:pPr algn="l">
+              <a:lnSpc>
+                <a:spcPct val="115000"/>
+              </a:lnSpc>
+            </a:pPr>
+            <a:r>
+              <a:rPr sz="1000" b="0">
+                <a:solidFill>
+                  <a:srgbClr val="777777"/>
+                </a:solidFill>
+                <a:latin typeface="Microsoft JhengHei"/>
+              </a:rPr>
+              <a:t>坑 4</a:t>
+            </a:r>
+          </a:p>
+        </p:txBody>
+      </p:sp>
+      <p:sp>
+        <p:nvSpPr>
+          <p:cNvPr id="30" name="TextBox 29"/>
+          <p:cNvSpPr txBox="1"/>
+          <p:nvPr/>
+        </p:nvSpPr>
+        <p:spPr>
+          <a:xfrm>
+            <a:off x="3410712" y="4407408"/>
+            <a:ext cx="4023360" cy="310896"/>
+          </a:xfrm>
+          <a:prstGeom prst="rect">
+            <a:avLst/>
+          </a:prstGeom>
+          <a:noFill/>
+        </p:spPr>
+        <p:txBody>
+          <a:bodyPr wrap="square" lIns="0" rIns="0" tIns="0" bIns="0" anchor="t">
+            <a:spAutoFit/>
+          </a:bodyPr>
+          <a:lstStyle/>
+          <a:p>
+            <a:pPr algn="l">
+              <a:lnSpc>
+                <a:spcPct val="115000"/>
+              </a:lnSpc>
+            </a:pPr>
+            <a:r>
+              <a:rPr sz="1100" b="0">
+                <a:solidFill>
+                  <a:srgbClr val="444444"/>
+                </a:solidFill>
+                <a:latin typeface="Microsoft JhengHei"/>
+              </a:rPr>
+              <a:t>split()[0] 剝規格尾巴——中文沒空白所以安全</a:t>
+            </a:r>
+          </a:p>
+        </p:txBody>
+      </p:sp>
+      <p:sp>
+        <p:nvSpPr>
+          <p:cNvPr id="31" name="TextBox 30"/>
+          <p:cNvSpPr txBox="1"/>
+          <p:nvPr/>
+        </p:nvSpPr>
+        <p:spPr>
+          <a:xfrm>
+            <a:off x="3410712" y="4736592"/>
+            <a:ext cx="4023360" cy="292608"/>
+          </a:xfrm>
+          <a:prstGeom prst="rect">
+            <a:avLst/>
+          </a:prstGeom>
+          <a:noFill/>
+        </p:spPr>
+        <p:txBody>
+          <a:bodyPr wrap="square" lIns="0" rIns="0" tIns="0" bIns="0" anchor="t">
+            <a:spAutoFit/>
+          </a:bodyPr>
+          <a:lstStyle/>
+          <a:p>
+            <a:pPr algn="l">
+              <a:lnSpc>
+                <a:spcPct val="115000"/>
+              </a:lnSpc>
+            </a:pPr>
+            <a:r>
+              <a:rPr sz="900" b="0">
+                <a:solidFill>
+                  <a:srgbClr val="BBBBBB"/>
+                </a:solidFill>
+                <a:latin typeface="Arial"/>
+              </a:rPr>
+              <a:t>↓</a:t>
+            </a:r>
+          </a:p>
+        </p:txBody>
+      </p:sp>
+      <p:sp>
+        <p:nvSpPr>
+          <p:cNvPr id="32" name="TextBox 31"/>
+          <p:cNvSpPr txBox="1"/>
+          <p:nvPr/>
+        </p:nvSpPr>
+        <p:spPr>
+          <a:xfrm>
+            <a:off x="7571232" y="4517136"/>
+            <a:ext cx="3749039" cy="457200"/>
+          </a:xfrm>
+          <a:prstGeom prst="rect">
+            <a:avLst/>
+          </a:prstGeom>
+          <a:noFill/>
+        </p:spPr>
+        <p:txBody>
+          <a:bodyPr wrap="square" lIns="0" rIns="0" tIns="0" bIns="0" anchor="ctr">
+            <a:spAutoFit/>
+          </a:bodyPr>
+          <a:lstStyle/>
+          <a:p>
+            <a:pPr algn="l">
+              <a:lnSpc>
+                <a:spcPct val="115000"/>
+              </a:lnSpc>
+            </a:pPr>
+            <a:r>
+              <a:rPr sz="1100" b="1">
+                <a:solidFill>
+                  <a:srgbClr val="E85D5D"/>
+                </a:solidFill>
+                <a:latin typeface="Microsoft JhengHei"/>
+              </a:rPr>
+              <a:t>`Wireless Mouse` 被腰斬成 `Wireless` → 改到錯的商品</a:t>
+            </a:r>
+          </a:p>
+        </p:txBody>
+      </p:sp>
+      <p:sp>
+        <p:nvSpPr>
+          <p:cNvPr id="33" name="Rounded Rectangle 32"/>
+          <p:cNvSpPr/>
+          <p:nvPr/>
+        </p:nvSpPr>
+        <p:spPr>
+          <a:xfrm>
+            <a:off x="667512" y="5193792"/>
+            <a:ext cx="10853928" cy="768096"/>
+          </a:xfrm>
+          <a:prstGeom prst="roundRect">
+            <a:avLst>
+              <a:gd name="adj" fmla="val 8000"/>
+            </a:avLst>
+          </a:prstGeom>
+          <a:solidFill>
+            <a:srgbClr val="F4F6F8"/>
+          </a:solidFill>
+          <a:ln w="7620">
+            <a:solidFill>
+              <a:srgbClr val="E6E8EC"/>
+            </a:solidFill>
+          </a:ln>
+          <a:effectLst/>
+        </p:spPr>
+        <p:style>
+          <a:lnRef idx="1">
+            <a:schemeClr val="accent1"/>
+          </a:lnRef>
+          <a:fillRef idx="3">
+            <a:schemeClr val="accent1"/>
+          </a:fillRef>
+          <a:effectRef idx="2">
+            <a:schemeClr val="accent1"/>
+          </a:effectRef>
+          <a:fontRef idx="minor">
+            <a:schemeClr val="lt1"/>
+          </a:fontRef>
+        </p:style>
+        <p:txBody>
+          <a:bodyPr rtlCol="0" anchor="ctr"/>
+          <a:lstStyle/>
+          <a:p>
+            <a:pPr algn="ctr"/>
+          </a:p>
+        </p:txBody>
+      </p:sp>
+      <p:sp>
+        <p:nvSpPr>
+          <p:cNvPr id="34" name="Rectangle 33"/>
+          <p:cNvSpPr/>
+          <p:nvPr/>
+        </p:nvSpPr>
+        <p:spPr>
+          <a:xfrm>
+            <a:off x="667512" y="5193792"/>
+            <a:ext cx="64008" cy="768096"/>
+          </a:xfrm>
+          <a:prstGeom prst="rect">
+            <a:avLst/>
+          </a:prstGeom>
+          <a:solidFill>
+            <a:srgbClr val="E85D5D"/>
+          </a:solidFill>
+          <a:ln>
+            <a:noFill/>
+          </a:ln>
+          <a:effectLst/>
+        </p:spPr>
+        <p:style>
+          <a:lnRef idx="1">
+            <a:schemeClr val="accent1"/>
+          </a:lnRef>
+          <a:fillRef idx="3">
+            <a:schemeClr val="accent1"/>
+          </a:fillRef>
+          <a:effectRef idx="2">
+            <a:schemeClr val="accent1"/>
+          </a:effectRef>
+          <a:fontRef idx="minor">
+            <a:schemeClr val="lt1"/>
+          </a:fontRef>
+        </p:style>
+        <p:txBody>
+          <a:bodyPr rtlCol="0" anchor="ctr"/>
+          <a:lstStyle/>
+          <a:p>
+            <a:pPr algn="ctr"/>
+          </a:p>
+        </p:txBody>
+      </p:sp>
+      <p:sp>
+        <p:nvSpPr>
+          <p:cNvPr id="35" name="TextBox 34"/>
+          <p:cNvSpPr txBox="1"/>
+          <p:nvPr/>
+        </p:nvSpPr>
+        <p:spPr>
+          <a:xfrm>
+            <a:off x="923544" y="5266944"/>
+            <a:ext cx="2331720" cy="292608"/>
+          </a:xfrm>
+          <a:prstGeom prst="rect">
+            <a:avLst/>
+          </a:prstGeom>
+          <a:noFill/>
+        </p:spPr>
+        <p:txBody>
+          <a:bodyPr wrap="square" lIns="0" rIns="0" tIns="0" bIns="0" anchor="t">
+            <a:spAutoFit/>
+          </a:bodyPr>
+          <a:lstStyle/>
+          <a:p>
+            <a:pPr algn="l">
+              <a:lnSpc>
+                <a:spcPct val="115000"/>
+              </a:lnSpc>
+            </a:pPr>
+            <a:r>
+              <a:rPr sz="1250" b="1">
+                <a:solidFill>
+                  <a:srgbClr val="E85D5D"/>
+                </a:solidFill>
+                <a:latin typeface="Microsoft JhengHei"/>
+              </a:rPr>
+              <a:t>英文撇號炸掉 JS</a:t>
+            </a:r>
+          </a:p>
+        </p:txBody>
+      </p:sp>
+      <p:sp>
+        <p:nvSpPr>
+          <p:cNvPr id="36" name="TextBox 35"/>
+          <p:cNvSpPr txBox="1"/>
+          <p:nvPr/>
+        </p:nvSpPr>
+        <p:spPr>
+          <a:xfrm>
+            <a:off x="923544" y="5596128"/>
+            <a:ext cx="2331720" cy="292608"/>
+          </a:xfrm>
+          <a:prstGeom prst="rect">
+            <a:avLst/>
+          </a:prstGeom>
+          <a:noFill/>
+        </p:spPr>
+        <p:txBody>
+          <a:bodyPr wrap="square" lIns="0" rIns="0" tIns="0" bIns="0" anchor="t">
+            <a:spAutoFit/>
+          </a:bodyPr>
+          <a:lstStyle/>
+          <a:p>
+            <a:pPr algn="l">
+              <a:lnSpc>
+                <a:spcPct val="115000"/>
+              </a:lnSpc>
+            </a:pPr>
+            <a:r>
+              <a:rPr sz="1000" b="0">
+                <a:solidFill>
+                  <a:srgbClr val="777777"/>
+                </a:solidFill>
+                <a:latin typeface="Microsoft JhengHei"/>
+              </a:rPr>
+              <a:t>坑 5</a:t>
+            </a:r>
+          </a:p>
+        </p:txBody>
+      </p:sp>
+      <p:sp>
+        <p:nvSpPr>
+          <p:cNvPr id="37" name="TextBox 36"/>
+          <p:cNvSpPr txBox="1"/>
+          <p:nvPr/>
+        </p:nvSpPr>
+        <p:spPr>
+          <a:xfrm>
+            <a:off x="3410712" y="5266944"/>
+            <a:ext cx="4023360" cy="310896"/>
+          </a:xfrm>
+          <a:prstGeom prst="rect">
+            <a:avLst/>
+          </a:prstGeom>
+          <a:noFill/>
+        </p:spPr>
+        <p:txBody>
+          <a:bodyPr wrap="square" lIns="0" rIns="0" tIns="0" bIns="0" anchor="t">
+            <a:spAutoFit/>
+          </a:bodyPr>
+          <a:lstStyle/>
+          <a:p>
+            <a:pPr algn="l">
+              <a:lnSpc>
+                <a:spcPct val="115000"/>
+              </a:lnSpc>
+            </a:pPr>
+            <a:r>
+              <a:rPr sz="1100" b="0">
+                <a:solidFill>
+                  <a:srgbClr val="444444"/>
+                </a:solidFill>
+                <a:latin typeface="Microsoft JhengHei"/>
+              </a:rPr>
+              <a:t>'Didn't catch that' ——英文化產生的撇號沒跳脫</a:t>
+            </a:r>
+          </a:p>
+        </p:txBody>
+      </p:sp>
+      <p:sp>
+        <p:nvSpPr>
+          <p:cNvPr id="38" name="TextBox 37"/>
+          <p:cNvSpPr txBox="1"/>
+          <p:nvPr/>
+        </p:nvSpPr>
+        <p:spPr>
+          <a:xfrm>
+            <a:off x="3410712" y="5596128"/>
+            <a:ext cx="4023360" cy="292608"/>
+          </a:xfrm>
+          <a:prstGeom prst="rect">
+            <a:avLst/>
+          </a:prstGeom>
+          <a:noFill/>
+        </p:spPr>
+        <p:txBody>
+          <a:bodyPr wrap="square" lIns="0" rIns="0" tIns="0" bIns="0" anchor="t">
+            <a:spAutoFit/>
+          </a:bodyPr>
+          <a:lstStyle/>
+          <a:p>
+            <a:pPr algn="l">
+              <a:lnSpc>
+                <a:spcPct val="115000"/>
+              </a:lnSpc>
+            </a:pPr>
+            <a:r>
+              <a:rPr sz="900" b="0">
+                <a:solidFill>
+                  <a:srgbClr val="BBBBBB"/>
+                </a:solidFill>
+                <a:latin typeface="Arial"/>
+              </a:rPr>
+              <a:t>↓</a:t>
+            </a:r>
+          </a:p>
+        </p:txBody>
+      </p:sp>
+      <p:sp>
+        <p:nvSpPr>
+          <p:cNvPr id="39" name="TextBox 38"/>
+          <p:cNvSpPr txBox="1"/>
+          <p:nvPr/>
+        </p:nvSpPr>
+        <p:spPr>
+          <a:xfrm>
+            <a:off x="7571232" y="5376672"/>
+            <a:ext cx="3749039" cy="457200"/>
+          </a:xfrm>
+          <a:prstGeom prst="rect">
+            <a:avLst/>
+          </a:prstGeom>
+          <a:noFill/>
+        </p:spPr>
+        <p:txBody>
+          <a:bodyPr wrap="square" lIns="0" rIns="0" tIns="0" bIns="0" anchor="ctr">
+            <a:spAutoFit/>
+          </a:bodyPr>
+          <a:lstStyle/>
+          <a:p>
+            <a:pPr algn="l">
+              <a:lnSpc>
+                <a:spcPct val="115000"/>
+              </a:lnSpc>
+            </a:pPr>
+            <a:r>
+              <a:rPr sz="1100" b="1">
+                <a:solidFill>
+                  <a:srgbClr val="E85D5D"/>
+                </a:solidFill>
+                <a:latin typeface="Microsoft JhengHei"/>
+              </a:rPr>
+              <a:t>整份 JS 停擺：畫面正常但 WebSocket 從沒建立</a:t>
+            </a:r>
+          </a:p>
+        </p:txBody>
+      </p:sp>
+      <p:sp>
+        <p:nvSpPr>
+          <p:cNvPr id="40" name="Rounded Rectangle 39"/>
+          <p:cNvSpPr/>
+          <p:nvPr/>
+        </p:nvSpPr>
+        <p:spPr>
+          <a:xfrm>
+            <a:off x="667512" y="6053328"/>
+            <a:ext cx="10853928" cy="566928"/>
+          </a:xfrm>
+          <a:prstGeom prst="roundRect">
+            <a:avLst>
+              <a:gd name="adj" fmla="val 8000"/>
+            </a:avLst>
+          </a:prstGeom>
+          <a:solidFill>
+            <a:srgbClr val="1A1A2E"/>
+          </a:solidFill>
+          <a:ln>
+            <a:noFill/>
+          </a:ln>
+          <a:effectLst/>
+        </p:spPr>
+        <p:style>
+          <a:lnRef idx="1">
+            <a:schemeClr val="accent1"/>
+          </a:lnRef>
+          <a:fillRef idx="3">
+            <a:schemeClr val="accent1"/>
+          </a:fillRef>
+          <a:effectRef idx="2">
+            <a:schemeClr val="accent1"/>
+          </a:effectRef>
+          <a:fontRef idx="minor">
+            <a:schemeClr val="lt1"/>
+          </a:fontRef>
+        </p:style>
+        <p:txBody>
+          <a:bodyPr rtlCol="0" anchor="ctr"/>
+          <a:lstStyle/>
+          <a:p>
+            <a:pPr algn="ctr"/>
+          </a:p>
+        </p:txBody>
+      </p:sp>
+      <p:sp>
+        <p:nvSpPr>
+          <p:cNvPr id="41" name="TextBox 40"/>
+          <p:cNvSpPr txBox="1"/>
+          <p:nvPr/>
+        </p:nvSpPr>
+        <p:spPr>
+          <a:xfrm>
+            <a:off x="1033272" y="6144768"/>
+            <a:ext cx="10149840" cy="384048"/>
+          </a:xfrm>
+          <a:prstGeom prst="rect">
+            <a:avLst/>
+          </a:prstGeom>
+          <a:noFill/>
+        </p:spPr>
+        <p:txBody>
+          <a:bodyPr wrap="square" lIns="0" rIns="0" tIns="0" bIns="0" anchor="ctr">
+            <a:spAutoFit/>
+          </a:bodyPr>
+          <a:lstStyle/>
+          <a:p>
+            <a:pPr algn="l">
+              <a:lnSpc>
+                <a:spcPct val="115000"/>
+              </a:lnSpc>
+            </a:pPr>
+            <a:r>
+              <a:rPr sz="1250" b="1">
+                <a:solidFill>
+                  <a:srgbClr val="00C49A"/>
+                </a:solidFill>
+                <a:latin typeface="Microsoft JhengHei"/>
+              </a:rPr>
+              <a:t>找法  </a:t>
+            </a:r>
+            <a:r>
+              <a:rPr sz="1200" b="1">
+                <a:solidFill>
+                  <a:srgbClr val="FFFFFF"/>
+                </a:solidFill>
+                <a:latin typeface="Microsoft JhengHei"/>
+              </a:rPr>
+              <a:t>逐句追 log 看實際執行路徑，不要只看輸入輸出猜</a:t>
+            </a:r>
+            <a:r>
+              <a:rPr sz="1150" b="0">
+                <a:solidFill>
+                  <a:srgbClr val="BBBBBB"/>
+                </a:solidFill>
+                <a:latin typeface="Microsoft JhengHei"/>
+              </a:rPr>
+              <a:t>——log 常見 clf 判對、模型也判對，卻被中文導向的守衛改掉。共歸納 19 類坑。</a:t>
+            </a:r>
+          </a:p>
+        </p:txBody>
+      </p:sp>
+      <p:sp>
+        <p:nvSpPr>
+          <p:cNvPr id="42" name="TextBox 41"/>
+          <p:cNvSpPr txBox="1"/>
+          <p:nvPr/>
+        </p:nvSpPr>
+        <p:spPr>
+          <a:xfrm>
+            <a:off x="11475720" y="6565392"/>
+            <a:ext cx="658368" cy="237744"/>
+          </a:xfrm>
+          <a:prstGeom prst="rect">
+            <a:avLst/>
+          </a:prstGeom>
+          <a:noFill/>
+        </p:spPr>
+        <p:txBody>
+          <a:bodyPr wrap="square" lIns="0" rIns="0" tIns="0" bIns="0" anchor="t">
+            <a:spAutoFit/>
+          </a:bodyPr>
+          <a:lstStyle/>
+          <a:p>
+            <a:pPr algn="r">
+              <a:lnSpc>
+                <a:spcPct val="115000"/>
+              </a:lnSpc>
+            </a:pPr>
+            <a:r>
+              <a:rPr sz="1000" b="0">
+                <a:solidFill>
+                  <a:srgbClr val="BBBBBB"/>
+                </a:solidFill>
+                <a:latin typeface="Arial"/>
+              </a:rPr>
+              <a:t>27</a:t>
+            </a:r>
+          </a:p>
+        </p:txBody>
+      </p:sp>
+    </p:spTree>
+  </p:cSld>
+  <p:clrMapOvr>
+    <a:masterClrMapping/>
+  </p:clrMapOvr>
+</p:sld>
+</file>
+
+<file path=ppt/slides/slide28.xml><?xml version="1.0" encoding="utf-8"?>
+<p:sld xmlns:a="http://schemas.openxmlformats.org/drawingml/2006/main" xmlns:p="http://schemas.openxmlformats.org/presentationml/2006/main" xmlns:r="http://schemas.openxmlformats.org/officeDocument/2006/relationships">
+  <p:cSld>
+    <p:spTree>
+      <p:nvGrpSpPr>
+        <p:cNvPr id="1" name=""/>
+        <p:cNvGrpSpPr/>
+        <p:nvPr/>
+      </p:nvGrpSpPr>
+      <p:grpSpPr/>
+      <p:sp>
+        <p:nvSpPr>
+          <p:cNvPr id="2" name="TextBox 1"/>
+          <p:cNvSpPr txBox="1"/>
+          <p:nvPr/>
+        </p:nvSpPr>
+        <p:spPr>
+          <a:xfrm>
+            <a:off x="667512" y="310896"/>
+            <a:ext cx="10789920" cy="274320"/>
+          </a:xfrm>
+          <a:prstGeom prst="rect">
+            <a:avLst/>
+          </a:prstGeom>
+          <a:noFill/>
+        </p:spPr>
+        <p:txBody>
+          <a:bodyPr wrap="square" lIns="0" rIns="0" tIns="0" bIns="0" anchor="t">
+            <a:spAutoFit/>
+          </a:bodyPr>
+          <a:lstStyle/>
+          <a:p>
+            <a:pPr algn="l">
+              <a:lnSpc>
+                <a:spcPct val="115000"/>
+              </a:lnSpc>
+            </a:pPr>
+            <a:r>
+              <a:rPr sz="1250" b="1">
+                <a:solidFill>
+                  <a:srgbClr val="00C49A"/>
+                </a:solidFill>
+                <a:latin typeface="Arial"/>
+              </a:rPr>
+              <a:t>ENGLISH BUILD · 收斂</a:t>
+            </a:r>
+          </a:p>
+        </p:txBody>
+      </p:sp>
+      <p:sp>
+        <p:nvSpPr>
+          <p:cNvPr id="3" name="TextBox 2"/>
+          <p:cNvSpPr txBox="1"/>
+          <p:nvPr/>
+        </p:nvSpPr>
+        <p:spPr>
+          <a:xfrm>
+            <a:off x="667512" y="585216"/>
+            <a:ext cx="10789920" cy="566928"/>
+          </a:xfrm>
+          <a:prstGeom prst="rect">
+            <a:avLst/>
+          </a:prstGeom>
+          <a:noFill/>
+        </p:spPr>
+        <p:txBody>
+          <a:bodyPr wrap="square" lIns="0" rIns="0" tIns="0" bIns="0" anchor="t">
+            <a:spAutoFit/>
+          </a:bodyPr>
+          <a:lstStyle/>
+          <a:p>
+            <a:pPr algn="l">
+              <a:lnSpc>
+                <a:spcPct val="115000"/>
+              </a:lnSpc>
+            </a:pPr>
+            <a:r>
+              <a:rPr sz="2700" b="1">
+                <a:solidFill>
+                  <a:srgbClr val="1A1A2E"/>
+                </a:solidFill>
+                <a:latin typeface="Microsoft JhengHei"/>
+              </a:rPr>
+              <a:t>從 651 到 892/892：把「可靠」再證明一次</a:t>
+            </a:r>
+          </a:p>
+        </p:txBody>
+      </p:sp>
+      <p:sp>
+        <p:nvSpPr>
+          <p:cNvPr id="4" name="TextBox 3"/>
+          <p:cNvSpPr txBox="1"/>
+          <p:nvPr/>
+        </p:nvSpPr>
+        <p:spPr>
+          <a:xfrm>
+            <a:off x="667512" y="1234440"/>
+            <a:ext cx="10789920" cy="365760"/>
+          </a:xfrm>
+          <a:prstGeom prst="rect">
+            <a:avLst/>
+          </a:prstGeom>
+          <a:noFill/>
+        </p:spPr>
+        <p:txBody>
+          <a:bodyPr wrap="square" lIns="0" rIns="0" tIns="0" bIns="0" anchor="t">
+            <a:spAutoFit/>
+          </a:bodyPr>
+          <a:lstStyle/>
+          <a:p>
+            <a:pPr algn="l">
+              <a:lnSpc>
+                <a:spcPct val="115000"/>
+              </a:lnSpc>
+            </a:pPr>
+            <a:r>
+              <a:rPr sz="1300" b="0">
+                <a:solidFill>
+                  <a:srgbClr val="555555"/>
+                </a:solidFill>
+                <a:latin typeface="Microsoft JhengHei"/>
+              </a:rPr>
+              <a:t>英文版建了獨立的 892 句守衛庫（不是翻譯中文守衛——英文有自己的邊界：錯字型態、俗稱、閒聊搗蛋）。</a:t>
+            </a:r>
+          </a:p>
+        </p:txBody>
+      </p:sp>
+      <p:sp>
+        <p:nvSpPr>
+          <p:cNvPr id="5" name="Rounded Rectangle 4"/>
+          <p:cNvSpPr/>
+          <p:nvPr/>
+        </p:nvSpPr>
+        <p:spPr>
+          <a:xfrm>
+            <a:off x="667512" y="1737360"/>
+            <a:ext cx="2562606" cy="1078992"/>
+          </a:xfrm>
+          <a:prstGeom prst="roundRect">
+            <a:avLst>
+              <a:gd name="adj" fmla="val 8000"/>
+            </a:avLst>
+          </a:prstGeom>
+          <a:solidFill>
+            <a:srgbClr val="F4F6F8"/>
+          </a:solidFill>
+          <a:ln>
+            <a:noFill/>
+          </a:ln>
+          <a:effectLst/>
+        </p:spPr>
+        <p:style>
+          <a:lnRef idx="1">
+            <a:schemeClr val="accent1"/>
+          </a:lnRef>
+          <a:fillRef idx="3">
+            <a:schemeClr val="accent1"/>
+          </a:fillRef>
+          <a:effectRef idx="2">
+            <a:schemeClr val="accent1"/>
+          </a:effectRef>
+          <a:fontRef idx="minor">
+            <a:schemeClr val="lt1"/>
+          </a:fontRef>
+        </p:style>
+        <p:txBody>
+          <a:bodyPr rtlCol="0" anchor="ctr"/>
+          <a:lstStyle/>
+          <a:p>
+            <a:pPr algn="ctr"/>
+          </a:p>
+        </p:txBody>
+      </p:sp>
+      <p:sp>
+        <p:nvSpPr>
+          <p:cNvPr id="6" name="TextBox 5"/>
+          <p:cNvSpPr txBox="1"/>
+          <p:nvPr/>
+        </p:nvSpPr>
+        <p:spPr>
+          <a:xfrm>
+            <a:off x="832104" y="1883664"/>
+            <a:ext cx="2233422" cy="548640"/>
+          </a:xfrm>
+          <a:prstGeom prst="rect">
+            <a:avLst/>
+          </a:prstGeom>
+          <a:noFill/>
+        </p:spPr>
+        <p:txBody>
+          <a:bodyPr wrap="square" lIns="0" rIns="0" tIns="0" bIns="0" anchor="t">
+            <a:spAutoFit/>
+          </a:bodyPr>
+          <a:lstStyle/>
+          <a:p>
+            <a:pPr algn="l">
+              <a:lnSpc>
+                <a:spcPct val="115000"/>
+              </a:lnSpc>
+            </a:pPr>
+            <a:r>
+              <a:rPr sz="3000" b="1">
+                <a:solidFill>
+                  <a:srgbClr val="00C49A"/>
+                </a:solidFill>
+                <a:latin typeface="Arial"/>
+              </a:rPr>
+              <a:t>892/892</a:t>
+            </a:r>
+          </a:p>
+        </p:txBody>
+      </p:sp>
+      <p:sp>
+        <p:nvSpPr>
+          <p:cNvPr id="7" name="TextBox 6"/>
+          <p:cNvSpPr txBox="1"/>
+          <p:nvPr/>
+        </p:nvSpPr>
+        <p:spPr>
+          <a:xfrm>
+            <a:off x="832104" y="2432304"/>
+            <a:ext cx="2233422" cy="310896"/>
+          </a:xfrm>
+          <a:prstGeom prst="rect">
+            <a:avLst/>
+          </a:prstGeom>
+          <a:noFill/>
+        </p:spPr>
+        <p:txBody>
+          <a:bodyPr wrap="square" lIns="0" rIns="0" tIns="0" bIns="0" anchor="t">
+            <a:spAutoFit/>
+          </a:bodyPr>
+          <a:lstStyle/>
+          <a:p>
+            <a:pPr algn="l">
+              <a:lnSpc>
+                <a:spcPct val="115000"/>
+              </a:lnSpc>
+            </a:pPr>
+            <a:r>
+              <a:rPr sz="1250" b="0">
+                <a:solidFill>
+                  <a:srgbClr val="555555"/>
+                </a:solidFill>
+                <a:latin typeface="Microsoft JhengHei"/>
+              </a:rPr>
+              <a:t>英文守衛通過率 100%</a:t>
+            </a:r>
+          </a:p>
+        </p:txBody>
+      </p:sp>
+      <p:sp>
+        <p:nvSpPr>
+          <p:cNvPr id="8" name="Rounded Rectangle 7"/>
+          <p:cNvSpPr/>
+          <p:nvPr/>
+        </p:nvSpPr>
+        <p:spPr>
+          <a:xfrm>
+            <a:off x="3431286" y="1737360"/>
+            <a:ext cx="2562606" cy="1078992"/>
+          </a:xfrm>
+          <a:prstGeom prst="roundRect">
+            <a:avLst>
+              <a:gd name="adj" fmla="val 8000"/>
+            </a:avLst>
+          </a:prstGeom>
+          <a:solidFill>
+            <a:srgbClr val="F4F6F8"/>
+          </a:solidFill>
+          <a:ln>
+            <a:noFill/>
+          </a:ln>
+          <a:effectLst/>
+        </p:spPr>
+        <p:style>
+          <a:lnRef idx="1">
+            <a:schemeClr val="accent1"/>
+          </a:lnRef>
+          <a:fillRef idx="3">
+            <a:schemeClr val="accent1"/>
+          </a:fillRef>
+          <a:effectRef idx="2">
+            <a:schemeClr val="accent1"/>
+          </a:effectRef>
+          <a:fontRef idx="minor">
+            <a:schemeClr val="lt1"/>
+          </a:fontRef>
+        </p:style>
+        <p:txBody>
+          <a:bodyPr rtlCol="0" anchor="ctr"/>
+          <a:lstStyle/>
+          <a:p>
+            <a:pPr algn="ctr"/>
+          </a:p>
+        </p:txBody>
+      </p:sp>
+      <p:sp>
+        <p:nvSpPr>
+          <p:cNvPr id="9" name="TextBox 8"/>
+          <p:cNvSpPr txBox="1"/>
+          <p:nvPr/>
+        </p:nvSpPr>
+        <p:spPr>
+          <a:xfrm>
+            <a:off x="3595878" y="1883664"/>
+            <a:ext cx="2233422" cy="548640"/>
+          </a:xfrm>
+          <a:prstGeom prst="rect">
+            <a:avLst/>
+          </a:prstGeom>
+          <a:noFill/>
+        </p:spPr>
+        <p:txBody>
+          <a:bodyPr wrap="square" lIns="0" rIns="0" tIns="0" bIns="0" anchor="t">
+            <a:spAutoFit/>
+          </a:bodyPr>
+          <a:lstStyle/>
+          <a:p>
+            <a:pPr algn="l">
+              <a:lnSpc>
+                <a:spcPct val="115000"/>
+              </a:lnSpc>
+            </a:pPr>
+            <a:r>
+              <a:rPr sz="3000" b="1">
+                <a:solidFill>
+                  <a:srgbClr val="00C49A"/>
+                </a:solidFill>
+                <a:latin typeface="Arial"/>
+              </a:rPr>
+              <a:t>19 類</a:t>
+            </a:r>
+          </a:p>
+        </p:txBody>
+      </p:sp>
+      <p:sp>
+        <p:nvSpPr>
+          <p:cNvPr id="10" name="TextBox 9"/>
+          <p:cNvSpPr txBox="1"/>
+          <p:nvPr/>
+        </p:nvSpPr>
+        <p:spPr>
+          <a:xfrm>
+            <a:off x="3595878" y="2432304"/>
+            <a:ext cx="2233422" cy="310896"/>
+          </a:xfrm>
+          <a:prstGeom prst="rect">
+            <a:avLst/>
+          </a:prstGeom>
+          <a:noFill/>
+        </p:spPr>
+        <p:txBody>
+          <a:bodyPr wrap="square" lIns="0" rIns="0" tIns="0" bIns="0" anchor="t">
+            <a:spAutoFit/>
+          </a:bodyPr>
+          <a:lstStyle/>
+          <a:p>
+            <a:pPr algn="l">
+              <a:lnSpc>
+                <a:spcPct val="115000"/>
+              </a:lnSpc>
+            </a:pPr>
+            <a:r>
+              <a:rPr sz="1250" b="0">
+                <a:solidFill>
+                  <a:srgbClr val="555555"/>
+                </a:solidFill>
+                <a:latin typeface="Microsoft JhengHei"/>
+              </a:rPr>
+              <a:t>移植坑歸納</a:t>
+            </a:r>
+          </a:p>
+        </p:txBody>
+      </p:sp>
+      <p:sp>
+        <p:nvSpPr>
+          <p:cNvPr id="11" name="Rounded Rectangle 10"/>
+          <p:cNvSpPr/>
+          <p:nvPr/>
+        </p:nvSpPr>
+        <p:spPr>
+          <a:xfrm>
+            <a:off x="6195060" y="1737360"/>
+            <a:ext cx="2562606" cy="1078992"/>
+          </a:xfrm>
+          <a:prstGeom prst="roundRect">
+            <a:avLst>
+              <a:gd name="adj" fmla="val 8000"/>
+            </a:avLst>
+          </a:prstGeom>
+          <a:solidFill>
+            <a:srgbClr val="F4F6F8"/>
+          </a:solidFill>
+          <a:ln>
+            <a:noFill/>
+          </a:ln>
+          <a:effectLst/>
+        </p:spPr>
+        <p:style>
+          <a:lnRef idx="1">
+            <a:schemeClr val="accent1"/>
+          </a:lnRef>
+          <a:fillRef idx="3">
+            <a:schemeClr val="accent1"/>
+          </a:fillRef>
+          <a:effectRef idx="2">
+            <a:schemeClr val="accent1"/>
+          </a:effectRef>
+          <a:fontRef idx="minor">
+            <a:schemeClr val="lt1"/>
+          </a:fontRef>
+        </p:style>
+        <p:txBody>
+          <a:bodyPr rtlCol="0" anchor="ctr"/>
+          <a:lstStyle/>
+          <a:p>
+            <a:pPr algn="ctr"/>
+          </a:p>
+        </p:txBody>
+      </p:sp>
+      <p:sp>
+        <p:nvSpPr>
+          <p:cNvPr id="12" name="TextBox 11"/>
+          <p:cNvSpPr txBox="1"/>
+          <p:nvPr/>
+        </p:nvSpPr>
+        <p:spPr>
+          <a:xfrm>
+            <a:off x="6359652" y="1883664"/>
+            <a:ext cx="2233422" cy="548640"/>
+          </a:xfrm>
+          <a:prstGeom prst="rect">
+            <a:avLst/>
+          </a:prstGeom>
+          <a:noFill/>
+        </p:spPr>
+        <p:txBody>
+          <a:bodyPr wrap="square" lIns="0" rIns="0" tIns="0" bIns="0" anchor="t">
+            <a:spAutoFit/>
+          </a:bodyPr>
+          <a:lstStyle/>
+          <a:p>
+            <a:pPr algn="l">
+              <a:lnSpc>
+                <a:spcPct val="115000"/>
+              </a:lnSpc>
+            </a:pPr>
+            <a:r>
+              <a:rPr sz="3000" b="1">
+                <a:solidFill>
+                  <a:srgbClr val="00C49A"/>
+                </a:solidFill>
+                <a:latin typeface="Arial"/>
+              </a:rPr>
+              <a:t>25 個</a:t>
+            </a:r>
+          </a:p>
+        </p:txBody>
+      </p:sp>
+      <p:sp>
+        <p:nvSpPr>
+          <p:cNvPr id="13" name="TextBox 12"/>
+          <p:cNvSpPr txBox="1"/>
+          <p:nvPr/>
+        </p:nvSpPr>
+        <p:spPr>
+          <a:xfrm>
+            <a:off x="6359652" y="2432304"/>
+            <a:ext cx="2233422" cy="310896"/>
+          </a:xfrm>
+          <a:prstGeom prst="rect">
+            <a:avLst/>
+          </a:prstGeom>
+          <a:noFill/>
+        </p:spPr>
+        <p:txBody>
+          <a:bodyPr wrap="square" lIns="0" rIns="0" tIns="0" bIns="0" anchor="t">
+            <a:spAutoFit/>
+          </a:bodyPr>
+          <a:lstStyle/>
+          <a:p>
+            <a:pPr algn="l">
+              <a:lnSpc>
+                <a:spcPct val="115000"/>
+              </a:lnSpc>
+            </a:pPr>
+            <a:r>
+              <a:rPr sz="1250" b="0">
+                <a:solidFill>
+                  <a:srgbClr val="555555"/>
+                </a:solidFill>
+                <a:latin typeface="Microsoft JhengHei"/>
+              </a:rPr>
+              <a:t>view 逐一看過畫面</a:t>
+            </a:r>
+          </a:p>
+        </p:txBody>
+      </p:sp>
+      <p:sp>
+        <p:nvSpPr>
+          <p:cNvPr id="14" name="Rounded Rectangle 13"/>
+          <p:cNvSpPr/>
+          <p:nvPr/>
+        </p:nvSpPr>
+        <p:spPr>
+          <a:xfrm>
+            <a:off x="8958834" y="1737360"/>
+            <a:ext cx="2562606" cy="1078992"/>
+          </a:xfrm>
+          <a:prstGeom prst="roundRect">
+            <a:avLst>
+              <a:gd name="adj" fmla="val 8000"/>
+            </a:avLst>
+          </a:prstGeom>
+          <a:solidFill>
+            <a:srgbClr val="F4F6F8"/>
+          </a:solidFill>
+          <a:ln>
+            <a:noFill/>
+          </a:ln>
+          <a:effectLst/>
+        </p:spPr>
+        <p:style>
+          <a:lnRef idx="1">
+            <a:schemeClr val="accent1"/>
+          </a:lnRef>
+          <a:fillRef idx="3">
+            <a:schemeClr val="accent1"/>
+          </a:fillRef>
+          <a:effectRef idx="2">
+            <a:schemeClr val="accent1"/>
+          </a:effectRef>
+          <a:fontRef idx="minor">
+            <a:schemeClr val="lt1"/>
+          </a:fontRef>
+        </p:style>
+        <p:txBody>
+          <a:bodyPr rtlCol="0" anchor="ctr"/>
+          <a:lstStyle/>
+          <a:p>
+            <a:pPr algn="ctr"/>
+          </a:p>
+        </p:txBody>
+      </p:sp>
+      <p:sp>
+        <p:nvSpPr>
+          <p:cNvPr id="15" name="TextBox 14"/>
+          <p:cNvSpPr txBox="1"/>
+          <p:nvPr/>
+        </p:nvSpPr>
+        <p:spPr>
+          <a:xfrm>
+            <a:off x="9123426" y="1883664"/>
+            <a:ext cx="2233422" cy="548640"/>
+          </a:xfrm>
+          <a:prstGeom prst="rect">
+            <a:avLst/>
+          </a:prstGeom>
+          <a:noFill/>
+        </p:spPr>
+        <p:txBody>
+          <a:bodyPr wrap="square" lIns="0" rIns="0" tIns="0" bIns="0" anchor="t">
+            <a:spAutoFit/>
+          </a:bodyPr>
+          <a:lstStyle/>
+          <a:p>
+            <a:pPr algn="l">
+              <a:lnSpc>
+                <a:spcPct val="115000"/>
+              </a:lnSpc>
+            </a:pPr>
+            <a:r>
+              <a:rPr sz="3000" b="1">
+                <a:solidFill>
+                  <a:srgbClr val="00C49A"/>
+                </a:solidFill>
+                <a:latin typeface="Arial"/>
+              </a:rPr>
+              <a:t>0</a:t>
+            </a:r>
+          </a:p>
+        </p:txBody>
+      </p:sp>
+      <p:sp>
+        <p:nvSpPr>
+          <p:cNvPr id="16" name="TextBox 15"/>
+          <p:cNvSpPr txBox="1"/>
+          <p:nvPr/>
+        </p:nvSpPr>
+        <p:spPr>
+          <a:xfrm>
+            <a:off x="9123426" y="2432304"/>
+            <a:ext cx="2233422" cy="310896"/>
+          </a:xfrm>
+          <a:prstGeom prst="rect">
+            <a:avLst/>
+          </a:prstGeom>
+          <a:noFill/>
+        </p:spPr>
+        <p:txBody>
+          <a:bodyPr wrap="square" lIns="0" rIns="0" tIns="0" bIns="0" anchor="t">
+            <a:spAutoFit/>
+          </a:bodyPr>
+          <a:lstStyle/>
+          <a:p>
+            <a:pPr algn="l">
+              <a:lnSpc>
+                <a:spcPct val="115000"/>
+              </a:lnSpc>
+            </a:pPr>
+            <a:r>
+              <a:rPr sz="1250" b="0">
+                <a:solidFill>
+                  <a:srgbClr val="555555"/>
+                </a:solidFill>
+                <a:latin typeface="Microsoft JhengHei"/>
+              </a:rPr>
+              <a:t>已知未修破口</a:t>
+            </a:r>
+          </a:p>
+        </p:txBody>
+      </p:sp>
+      <p:sp>
+        <p:nvSpPr>
+          <p:cNvPr id="17" name="TextBox 16"/>
+          <p:cNvSpPr txBox="1"/>
+          <p:nvPr/>
+        </p:nvSpPr>
+        <p:spPr>
+          <a:xfrm>
+            <a:off x="667512" y="3063240"/>
+            <a:ext cx="10789920" cy="310896"/>
+          </a:xfrm>
+          <a:prstGeom prst="rect">
+            <a:avLst/>
+          </a:prstGeom>
+          <a:noFill/>
+        </p:spPr>
+        <p:txBody>
+          <a:bodyPr wrap="square" lIns="0" rIns="0" tIns="0" bIns="0" anchor="t">
+            <a:spAutoFit/>
+          </a:bodyPr>
+          <a:lstStyle/>
+          <a:p>
+            <a:pPr algn="l">
+              <a:lnSpc>
+                <a:spcPct val="115000"/>
+              </a:lnSpc>
+            </a:pPr>
+            <a:r>
+              <a:rPr sz="1300" b="1">
+                <a:solidFill>
+                  <a:srgbClr val="008E76"/>
+                </a:solidFill>
+                <a:latin typeface="Microsoft JhengHei"/>
+              </a:rPr>
+              <a:t>收斂過程：每一次跳動都是一批結構性 bug 被找出來</a:t>
+            </a:r>
+          </a:p>
+        </p:txBody>
+      </p:sp>
+      <p:sp>
+        <p:nvSpPr>
+          <p:cNvPr id="18" name="Rounded Rectangle 17"/>
+          <p:cNvSpPr/>
+          <p:nvPr/>
+        </p:nvSpPr>
+        <p:spPr>
+          <a:xfrm>
+            <a:off x="667512" y="3456432"/>
+            <a:ext cx="2487168" cy="1024128"/>
+          </a:xfrm>
+          <a:prstGeom prst="roundRect">
+            <a:avLst>
+              <a:gd name="adj" fmla="val 8000"/>
+            </a:avLst>
+          </a:prstGeom>
+          <a:solidFill>
+            <a:srgbClr val="F4F6F8"/>
+          </a:solidFill>
+          <a:ln w="7620">
+            <a:solidFill>
+              <a:srgbClr val="E6E8EC"/>
+            </a:solidFill>
+          </a:ln>
+          <a:effectLst/>
+        </p:spPr>
+        <p:style>
+          <a:lnRef idx="1">
+            <a:schemeClr val="accent1"/>
+          </a:lnRef>
+          <a:fillRef idx="3">
+            <a:schemeClr val="accent1"/>
+          </a:fillRef>
+          <a:effectRef idx="2">
+            <a:schemeClr val="accent1"/>
+          </a:effectRef>
+          <a:fontRef idx="minor">
+            <a:schemeClr val="lt1"/>
+          </a:fontRef>
+        </p:style>
+        <p:txBody>
+          <a:bodyPr rtlCol="0" anchor="ctr"/>
+          <a:lstStyle/>
+          <a:p>
+            <a:pPr algn="ctr"/>
+          </a:p>
+        </p:txBody>
+      </p:sp>
+      <p:sp>
+        <p:nvSpPr>
+          <p:cNvPr id="19" name="TextBox 18"/>
+          <p:cNvSpPr txBox="1"/>
+          <p:nvPr/>
+        </p:nvSpPr>
+        <p:spPr>
+          <a:xfrm>
+            <a:off x="667512" y="3584448"/>
+            <a:ext cx="2487168" cy="457200"/>
+          </a:xfrm>
+          <a:prstGeom prst="rect">
+            <a:avLst/>
+          </a:prstGeom>
+          <a:noFill/>
+        </p:spPr>
+        <p:txBody>
+          <a:bodyPr wrap="square" lIns="0" rIns="0" tIns="0" bIns="0" anchor="t">
+            <a:spAutoFit/>
+          </a:bodyPr>
+          <a:lstStyle/>
+          <a:p>
+            <a:pPr algn="ctr">
+              <a:lnSpc>
+                <a:spcPct val="115000"/>
+              </a:lnSpc>
+            </a:pPr>
+            <a:r>
+              <a:rPr sz="2600" b="1">
+                <a:solidFill>
+                  <a:srgbClr val="444444"/>
+                </a:solidFill>
+                <a:latin typeface="Arial"/>
+              </a:rPr>
+              <a:t>651</a:t>
+            </a:r>
+          </a:p>
+        </p:txBody>
+      </p:sp>
+      <p:sp>
+        <p:nvSpPr>
+          <p:cNvPr id="20" name="TextBox 19"/>
+          <p:cNvSpPr txBox="1"/>
+          <p:nvPr/>
+        </p:nvSpPr>
+        <p:spPr>
+          <a:xfrm>
+            <a:off x="777240" y="4078224"/>
+            <a:ext cx="2267712" cy="329184"/>
+          </a:xfrm>
+          <a:prstGeom prst="rect">
+            <a:avLst/>
+          </a:prstGeom>
+          <a:noFill/>
+        </p:spPr>
+        <p:txBody>
+          <a:bodyPr wrap="square" lIns="0" rIns="0" tIns="0" bIns="0" anchor="t">
+            <a:spAutoFit/>
+          </a:bodyPr>
+          <a:lstStyle/>
+          <a:p>
+            <a:pPr algn="ctr">
+              <a:lnSpc>
+                <a:spcPct val="115000"/>
+              </a:lnSpc>
+            </a:pPr>
+            <a:r>
+              <a:rPr sz="1050" b="0">
+                <a:solidFill>
+                  <a:srgbClr val="555555"/>
+                </a:solidFill>
+                <a:latin typeface="Microsoft JhengHei"/>
+              </a:rPr>
+              <a:t>首跑</a:t>
+            </a:r>
+          </a:p>
+        </p:txBody>
+      </p:sp>
+      <p:sp>
+        <p:nvSpPr>
+          <p:cNvPr id="21" name="TextBox 20"/>
+          <p:cNvSpPr txBox="1"/>
+          <p:nvPr/>
+        </p:nvSpPr>
+        <p:spPr>
+          <a:xfrm>
+            <a:off x="3118104" y="3803904"/>
+            <a:ext cx="310896" cy="365760"/>
+          </a:xfrm>
+          <a:prstGeom prst="rect">
+            <a:avLst/>
+          </a:prstGeom>
+          <a:noFill/>
+        </p:spPr>
+        <p:txBody>
+          <a:bodyPr wrap="square" lIns="0" rIns="0" tIns="0" bIns="0" anchor="t">
+            <a:spAutoFit/>
+          </a:bodyPr>
+          <a:lstStyle/>
+          <a:p>
+            <a:pPr algn="ctr">
+              <a:lnSpc>
+                <a:spcPct val="115000"/>
+              </a:lnSpc>
+            </a:pPr>
+            <a:r>
+              <a:rPr sz="1700" b="1">
+                <a:solidFill>
+                  <a:srgbClr val="BBBBBB"/>
+                </a:solidFill>
+                <a:latin typeface="Arial"/>
+              </a:rPr>
+              <a:t>›</a:t>
+            </a:r>
+          </a:p>
+        </p:txBody>
+      </p:sp>
+      <p:sp>
+        <p:nvSpPr>
+          <p:cNvPr id="22" name="Rounded Rectangle 21"/>
+          <p:cNvSpPr/>
+          <p:nvPr/>
+        </p:nvSpPr>
+        <p:spPr>
+          <a:xfrm>
+            <a:off x="3447288" y="3456432"/>
+            <a:ext cx="2487168" cy="1024128"/>
+          </a:xfrm>
+          <a:prstGeom prst="roundRect">
+            <a:avLst>
+              <a:gd name="adj" fmla="val 8000"/>
+            </a:avLst>
+          </a:prstGeom>
+          <a:solidFill>
+            <a:srgbClr val="F4F6F8"/>
+          </a:solidFill>
+          <a:ln w="7620">
+            <a:solidFill>
+              <a:srgbClr val="E6E8EC"/>
+            </a:solidFill>
+          </a:ln>
+          <a:effectLst/>
+        </p:spPr>
+        <p:style>
+          <a:lnRef idx="1">
+            <a:schemeClr val="accent1"/>
+          </a:lnRef>
+          <a:fillRef idx="3">
+            <a:schemeClr val="accent1"/>
+          </a:fillRef>
+          <a:effectRef idx="2">
+            <a:schemeClr val="accent1"/>
+          </a:effectRef>
+          <a:fontRef idx="minor">
+            <a:schemeClr val="lt1"/>
+          </a:fontRef>
+        </p:style>
+        <p:txBody>
+          <a:bodyPr rtlCol="0" anchor="ctr"/>
+          <a:lstStyle/>
+          <a:p>
+            <a:pPr algn="ctr"/>
+          </a:p>
+        </p:txBody>
+      </p:sp>
+      <p:sp>
+        <p:nvSpPr>
+          <p:cNvPr id="23" name="TextBox 22"/>
+          <p:cNvSpPr txBox="1"/>
+          <p:nvPr/>
+        </p:nvSpPr>
+        <p:spPr>
+          <a:xfrm>
+            <a:off x="3447288" y="3584448"/>
+            <a:ext cx="2487168" cy="457200"/>
+          </a:xfrm>
+          <a:prstGeom prst="rect">
+            <a:avLst/>
+          </a:prstGeom>
+          <a:noFill/>
+        </p:spPr>
+        <p:txBody>
+          <a:bodyPr wrap="square" lIns="0" rIns="0" tIns="0" bIns="0" anchor="t">
+            <a:spAutoFit/>
+          </a:bodyPr>
+          <a:lstStyle/>
+          <a:p>
+            <a:pPr algn="ctr">
+              <a:lnSpc>
+                <a:spcPct val="115000"/>
+              </a:lnSpc>
+            </a:pPr>
+            <a:r>
+              <a:rPr sz="2600" b="1">
+                <a:solidFill>
+                  <a:srgbClr val="444444"/>
+                </a:solidFill>
+                <a:latin typeface="Arial"/>
+              </a:rPr>
+              <a:t>873</a:t>
+            </a:r>
+          </a:p>
+        </p:txBody>
+      </p:sp>
+      <p:sp>
+        <p:nvSpPr>
+          <p:cNvPr id="24" name="TextBox 23"/>
+          <p:cNvSpPr txBox="1"/>
+          <p:nvPr/>
+        </p:nvSpPr>
+        <p:spPr>
+          <a:xfrm>
+            <a:off x="3557016" y="4078224"/>
+            <a:ext cx="2267712" cy="329184"/>
+          </a:xfrm>
+          <a:prstGeom prst="rect">
+            <a:avLst/>
+          </a:prstGeom>
+          <a:noFill/>
+        </p:spPr>
+        <p:txBody>
+          <a:bodyPr wrap="square" lIns="0" rIns="0" tIns="0" bIns="0" anchor="t">
+            <a:spAutoFit/>
+          </a:bodyPr>
+          <a:lstStyle/>
+          <a:p>
+            <a:pPr algn="ctr">
+              <a:lnSpc>
+                <a:spcPct val="115000"/>
+              </a:lnSpc>
+            </a:pPr>
+            <a:r>
+              <a:rPr sz="1050" b="0">
+                <a:solidFill>
+                  <a:srgbClr val="555555"/>
+                </a:solidFill>
+                <a:latin typeface="Microsoft JhengHei"/>
+              </a:rPr>
+              <a:t>13 輪規則層英文化</a:t>
+            </a:r>
+          </a:p>
+        </p:txBody>
+      </p:sp>
+      <p:sp>
+        <p:nvSpPr>
+          <p:cNvPr id="25" name="TextBox 24"/>
+          <p:cNvSpPr txBox="1"/>
+          <p:nvPr/>
+        </p:nvSpPr>
+        <p:spPr>
+          <a:xfrm>
+            <a:off x="5897880" y="3803904"/>
+            <a:ext cx="310896" cy="365760"/>
+          </a:xfrm>
+          <a:prstGeom prst="rect">
+            <a:avLst/>
+          </a:prstGeom>
+          <a:noFill/>
+        </p:spPr>
+        <p:txBody>
+          <a:bodyPr wrap="square" lIns="0" rIns="0" tIns="0" bIns="0" anchor="t">
+            <a:spAutoFit/>
+          </a:bodyPr>
+          <a:lstStyle/>
+          <a:p>
+            <a:pPr algn="ctr">
+              <a:lnSpc>
+                <a:spcPct val="115000"/>
+              </a:lnSpc>
+            </a:pPr>
+            <a:r>
+              <a:rPr sz="1700" b="1">
+                <a:solidFill>
+                  <a:srgbClr val="BBBBBB"/>
+                </a:solidFill>
+                <a:latin typeface="Arial"/>
+              </a:rPr>
+              <a:t>›</a:t>
+            </a:r>
+          </a:p>
+        </p:txBody>
+      </p:sp>
+      <p:sp>
+        <p:nvSpPr>
+          <p:cNvPr id="26" name="Rounded Rectangle 25"/>
+          <p:cNvSpPr/>
+          <p:nvPr/>
+        </p:nvSpPr>
+        <p:spPr>
+          <a:xfrm>
+            <a:off x="6227064" y="3456432"/>
+            <a:ext cx="2487168" cy="1024128"/>
+          </a:xfrm>
+          <a:prstGeom prst="roundRect">
+            <a:avLst>
+              <a:gd name="adj" fmla="val 8000"/>
+            </a:avLst>
+          </a:prstGeom>
+          <a:solidFill>
+            <a:srgbClr val="F4F6F8"/>
+          </a:solidFill>
+          <a:ln w="7620">
+            <a:solidFill>
+              <a:srgbClr val="E6E8EC"/>
+            </a:solidFill>
+          </a:ln>
+          <a:effectLst/>
+        </p:spPr>
+        <p:style>
+          <a:lnRef idx="1">
+            <a:schemeClr val="accent1"/>
+          </a:lnRef>
+          <a:fillRef idx="3">
+            <a:schemeClr val="accent1"/>
+          </a:fillRef>
+          <a:effectRef idx="2">
+            <a:schemeClr val="accent1"/>
+          </a:effectRef>
+          <a:fontRef idx="minor">
+            <a:schemeClr val="lt1"/>
+          </a:fontRef>
+        </p:style>
+        <p:txBody>
+          <a:bodyPr rtlCol="0" anchor="ctr"/>
+          <a:lstStyle/>
+          <a:p>
+            <a:pPr algn="ctr"/>
+          </a:p>
+        </p:txBody>
+      </p:sp>
+      <p:sp>
+        <p:nvSpPr>
+          <p:cNvPr id="27" name="TextBox 26"/>
+          <p:cNvSpPr txBox="1"/>
+          <p:nvPr/>
+        </p:nvSpPr>
+        <p:spPr>
+          <a:xfrm>
+            <a:off x="6227064" y="3584448"/>
+            <a:ext cx="2487168" cy="457200"/>
+          </a:xfrm>
+          <a:prstGeom prst="rect">
+            <a:avLst/>
+          </a:prstGeom>
+          <a:noFill/>
+        </p:spPr>
+        <p:txBody>
+          <a:bodyPr wrap="square" lIns="0" rIns="0" tIns="0" bIns="0" anchor="t">
+            <a:spAutoFit/>
+          </a:bodyPr>
+          <a:lstStyle/>
+          <a:p>
+            <a:pPr algn="ctr">
+              <a:lnSpc>
+                <a:spcPct val="115000"/>
+              </a:lnSpc>
+            </a:pPr>
+            <a:r>
+              <a:rPr sz="2600" b="1">
+                <a:solidFill>
+                  <a:srgbClr val="444444"/>
+                </a:solidFill>
+                <a:latin typeface="Arial"/>
+              </a:rPr>
+              <a:t>891</a:t>
+            </a:r>
+          </a:p>
+        </p:txBody>
+      </p:sp>
+      <p:sp>
+        <p:nvSpPr>
+          <p:cNvPr id="28" name="TextBox 27"/>
+          <p:cNvSpPr txBox="1"/>
+          <p:nvPr/>
+        </p:nvSpPr>
+        <p:spPr>
+          <a:xfrm>
+            <a:off x="6336792" y="4078224"/>
+            <a:ext cx="2267712" cy="329184"/>
+          </a:xfrm>
+          <a:prstGeom prst="rect">
+            <a:avLst/>
+          </a:prstGeom>
+          <a:noFill/>
+        </p:spPr>
+        <p:txBody>
+          <a:bodyPr wrap="square" lIns="0" rIns="0" tIns="0" bIns="0" anchor="t">
+            <a:spAutoFit/>
+          </a:bodyPr>
+          <a:lstStyle/>
+          <a:p>
+            <a:pPr algn="ctr">
+              <a:lnSpc>
+                <a:spcPct val="115000"/>
+              </a:lnSpc>
+            </a:pPr>
+            <a:r>
+              <a:rPr sz="1050" b="0">
+                <a:solidFill>
+                  <a:srgbClr val="555555"/>
+                </a:solidFill>
+                <a:latin typeface="Microsoft JhengHei"/>
+              </a:rPr>
+              <a:t>錯字長尾靠修復層</a:t>
+            </a:r>
+          </a:p>
+        </p:txBody>
+      </p:sp>
+      <p:sp>
+        <p:nvSpPr>
+          <p:cNvPr id="29" name="TextBox 28"/>
+          <p:cNvSpPr txBox="1"/>
+          <p:nvPr/>
+        </p:nvSpPr>
+        <p:spPr>
+          <a:xfrm>
+            <a:off x="8677656" y="3803904"/>
+            <a:ext cx="310896" cy="365760"/>
+          </a:xfrm>
+          <a:prstGeom prst="rect">
+            <a:avLst/>
+          </a:prstGeom>
+          <a:noFill/>
+        </p:spPr>
+        <p:txBody>
+          <a:bodyPr wrap="square" lIns="0" rIns="0" tIns="0" bIns="0" anchor="t">
+            <a:spAutoFit/>
+          </a:bodyPr>
+          <a:lstStyle/>
+          <a:p>
+            <a:pPr algn="ctr">
+              <a:lnSpc>
+                <a:spcPct val="115000"/>
+              </a:lnSpc>
+            </a:pPr>
+            <a:r>
+              <a:rPr sz="1700" b="1">
+                <a:solidFill>
+                  <a:srgbClr val="BBBBBB"/>
+                </a:solidFill>
+                <a:latin typeface="Arial"/>
+              </a:rPr>
+              <a:t>›</a:t>
+            </a:r>
+          </a:p>
+        </p:txBody>
+      </p:sp>
+      <p:sp>
+        <p:nvSpPr>
+          <p:cNvPr id="30" name="Rounded Rectangle 29"/>
+          <p:cNvSpPr/>
+          <p:nvPr/>
+        </p:nvSpPr>
+        <p:spPr>
+          <a:xfrm>
+            <a:off x="9006840" y="3456432"/>
+            <a:ext cx="2487168" cy="1024128"/>
+          </a:xfrm>
+          <a:prstGeom prst="roundRect">
+            <a:avLst>
+              <a:gd name="adj" fmla="val 8000"/>
+            </a:avLst>
+          </a:prstGeom>
+          <a:solidFill>
+            <a:srgbClr val="E4F7F2"/>
+          </a:solidFill>
+          <a:ln w="17780">
+            <a:solidFill>
+              <a:srgbClr val="00C49A"/>
+            </a:solidFill>
+          </a:ln>
+          <a:effectLst/>
+        </p:spPr>
+        <p:style>
+          <a:lnRef idx="1">
+            <a:schemeClr val="accent1"/>
+          </a:lnRef>
+          <a:fillRef idx="3">
+            <a:schemeClr val="accent1"/>
+          </a:fillRef>
+          <a:effectRef idx="2">
+            <a:schemeClr val="accent1"/>
+          </a:effectRef>
+          <a:fontRef idx="minor">
+            <a:schemeClr val="lt1"/>
+          </a:fontRef>
+        </p:style>
+        <p:txBody>
+          <a:bodyPr rtlCol="0" anchor="ctr"/>
+          <a:lstStyle/>
+          <a:p>
+            <a:pPr algn="ctr"/>
+          </a:p>
+        </p:txBody>
+      </p:sp>
+      <p:sp>
+        <p:nvSpPr>
+          <p:cNvPr id="31" name="TextBox 30"/>
+          <p:cNvSpPr txBox="1"/>
+          <p:nvPr/>
+        </p:nvSpPr>
+        <p:spPr>
+          <a:xfrm>
+            <a:off x="9006840" y="3584448"/>
+            <a:ext cx="2487168" cy="457200"/>
+          </a:xfrm>
+          <a:prstGeom prst="rect">
+            <a:avLst/>
+          </a:prstGeom>
+          <a:noFill/>
+        </p:spPr>
+        <p:txBody>
+          <a:bodyPr wrap="square" lIns="0" rIns="0" tIns="0" bIns="0" anchor="t">
+            <a:spAutoFit/>
+          </a:bodyPr>
+          <a:lstStyle/>
+          <a:p>
+            <a:pPr algn="ctr">
+              <a:lnSpc>
+                <a:spcPct val="115000"/>
+              </a:lnSpc>
+            </a:pPr>
+            <a:r>
+              <a:rPr sz="2600" b="1">
+                <a:solidFill>
+                  <a:srgbClr val="008E76"/>
+                </a:solidFill>
+                <a:latin typeface="Arial"/>
+              </a:rPr>
+              <a:t>892</a:t>
+            </a:r>
+          </a:p>
+        </p:txBody>
+      </p:sp>
+      <p:sp>
+        <p:nvSpPr>
+          <p:cNvPr id="32" name="TextBox 31"/>
+          <p:cNvSpPr txBox="1"/>
+          <p:nvPr/>
+        </p:nvSpPr>
+        <p:spPr>
+          <a:xfrm>
+            <a:off x="9116568" y="4078224"/>
+            <a:ext cx="2267712" cy="329184"/>
+          </a:xfrm>
+          <a:prstGeom prst="rect">
+            <a:avLst/>
+          </a:prstGeom>
+          <a:noFill/>
+        </p:spPr>
+        <p:txBody>
+          <a:bodyPr wrap="square" lIns="0" rIns="0" tIns="0" bIns="0" anchor="t">
+            <a:spAutoFit/>
+          </a:bodyPr>
+          <a:lstStyle/>
+          <a:p>
+            <a:pPr algn="ctr">
+              <a:lnSpc>
+                <a:spcPct val="115000"/>
+              </a:lnSpc>
+            </a:pPr>
+            <a:r>
+              <a:rPr sz="1050" b="0">
+                <a:solidFill>
+                  <a:srgbClr val="555555"/>
+                </a:solidFill>
+                <a:latin typeface="Microsoft JhengHei"/>
+              </a:rPr>
+              <a:t>詞典把關收尾</a:t>
+            </a:r>
+          </a:p>
+        </p:txBody>
+      </p:sp>
+      <p:sp>
+        <p:nvSpPr>
+          <p:cNvPr id="33" name="Rounded Rectangle 32"/>
+          <p:cNvSpPr/>
+          <p:nvPr/>
+        </p:nvSpPr>
+        <p:spPr>
+          <a:xfrm>
+            <a:off x="667512" y="4709160"/>
+            <a:ext cx="5321808" cy="1298448"/>
+          </a:xfrm>
+          <a:prstGeom prst="roundRect">
+            <a:avLst>
+              <a:gd name="adj" fmla="val 8000"/>
+            </a:avLst>
+          </a:prstGeom>
+          <a:solidFill>
+            <a:srgbClr val="F4F6F8"/>
+          </a:solidFill>
+          <a:ln>
+            <a:noFill/>
+          </a:ln>
+          <a:effectLst/>
+        </p:spPr>
+        <p:style>
+          <a:lnRef idx="1">
+            <a:schemeClr val="accent1"/>
+          </a:lnRef>
+          <a:fillRef idx="3">
+            <a:schemeClr val="accent1"/>
+          </a:fillRef>
+          <a:effectRef idx="2">
+            <a:schemeClr val="accent1"/>
+          </a:effectRef>
+          <a:fontRef idx="minor">
+            <a:schemeClr val="lt1"/>
+          </a:fontRef>
+        </p:style>
+        <p:txBody>
+          <a:bodyPr rtlCol="0" anchor="ctr"/>
+          <a:lstStyle/>
+          <a:p>
+            <a:pPr algn="ctr"/>
+          </a:p>
+        </p:txBody>
+      </p:sp>
+      <p:sp>
+        <p:nvSpPr>
+          <p:cNvPr id="34" name="TextBox 33"/>
+          <p:cNvSpPr txBox="1"/>
+          <p:nvPr/>
+        </p:nvSpPr>
+        <p:spPr>
+          <a:xfrm>
+            <a:off x="923544" y="4828032"/>
+            <a:ext cx="4846320" cy="292608"/>
+          </a:xfrm>
+          <a:prstGeom prst="rect">
+            <a:avLst/>
+          </a:prstGeom>
+          <a:noFill/>
+        </p:spPr>
+        <p:txBody>
+          <a:bodyPr wrap="square" lIns="0" rIns="0" tIns="0" bIns="0" anchor="t">
+            <a:spAutoFit/>
+          </a:bodyPr>
+          <a:lstStyle/>
+          <a:p>
+            <a:pPr algn="l">
+              <a:lnSpc>
+                <a:spcPct val="115000"/>
+              </a:lnSpc>
+            </a:pPr>
+            <a:r>
+              <a:rPr sz="1300" b="1">
+                <a:solidFill>
+                  <a:srgbClr val="008E76"/>
+                </a:solidFill>
+                <a:latin typeface="Microsoft JhengHei"/>
+              </a:rPr>
+              <a:t>「救不了」要有證據</a:t>
+            </a:r>
+          </a:p>
+        </p:txBody>
+      </p:sp>
+      <p:sp>
+        <p:nvSpPr>
+          <p:cNvPr id="35" name="TextBox 34"/>
+          <p:cNvSpPr txBox="1"/>
+          <p:nvPr/>
+        </p:nvSpPr>
+        <p:spPr>
+          <a:xfrm>
+            <a:off x="923544" y="5138928"/>
+            <a:ext cx="4846320" cy="749808"/>
+          </a:xfrm>
+          <a:prstGeom prst="rect">
+            <a:avLst/>
+          </a:prstGeom>
+          <a:noFill/>
+        </p:spPr>
+        <p:txBody>
+          <a:bodyPr wrap="square" lIns="0" rIns="0" tIns="0" bIns="0" anchor="t">
+            <a:spAutoFit/>
+          </a:bodyPr>
+          <a:lstStyle/>
+          <a:p>
+            <a:pPr algn="l">
+              <a:lnSpc>
+                <a:spcPct val="125000"/>
+              </a:lnSpc>
+            </a:pPr>
+            <a:r>
+              <a:rPr sz="1100" b="0">
+                <a:solidFill>
+                  <a:srgbClr val="444444"/>
+                </a:solidFill>
+                <a:latin typeface="Microsoft JhengHei"/>
+              </a:rPr>
+              <a:t>兩次把「試過一種做法沒成功」寫成「這類問題無解」。最後一句錯字靠系統內建英文詞典區分「真詞 vs 錯字」修掉——訊號一直都在，只是沒接上。</a:t>
+            </a:r>
+          </a:p>
+        </p:txBody>
+      </p:sp>
+      <p:sp>
+        <p:nvSpPr>
+          <p:cNvPr id="36" name="Rounded Rectangle 35"/>
+          <p:cNvSpPr/>
+          <p:nvPr/>
+        </p:nvSpPr>
+        <p:spPr>
+          <a:xfrm>
+            <a:off x="6199632" y="4709160"/>
+            <a:ext cx="5321808" cy="1298448"/>
+          </a:xfrm>
+          <a:prstGeom prst="roundRect">
+            <a:avLst>
+              <a:gd name="adj" fmla="val 8000"/>
+            </a:avLst>
+          </a:prstGeom>
+          <a:solidFill>
+            <a:srgbClr val="F4F6F8"/>
+          </a:solidFill>
+          <a:ln>
+            <a:noFill/>
+          </a:ln>
+          <a:effectLst/>
+        </p:spPr>
+        <p:style>
+          <a:lnRef idx="1">
+            <a:schemeClr val="accent1"/>
+          </a:lnRef>
+          <a:fillRef idx="3">
+            <a:schemeClr val="accent1"/>
+          </a:fillRef>
+          <a:effectRef idx="2">
+            <a:schemeClr val="accent1"/>
+          </a:effectRef>
+          <a:fontRef idx="minor">
+            <a:schemeClr val="lt1"/>
+          </a:fontRef>
+        </p:style>
+        <p:txBody>
+          <a:bodyPr rtlCol="0" anchor="ctr"/>
+          <a:lstStyle/>
+          <a:p>
+            <a:pPr algn="ctr"/>
+          </a:p>
+        </p:txBody>
+      </p:sp>
+      <p:sp>
+        <p:nvSpPr>
+          <p:cNvPr id="37" name="TextBox 36"/>
+          <p:cNvSpPr txBox="1"/>
+          <p:nvPr/>
+        </p:nvSpPr>
+        <p:spPr>
+          <a:xfrm>
+            <a:off x="6455664" y="4828032"/>
+            <a:ext cx="4846320" cy="292608"/>
+          </a:xfrm>
+          <a:prstGeom prst="rect">
+            <a:avLst/>
+          </a:prstGeom>
+          <a:noFill/>
+        </p:spPr>
+        <p:txBody>
+          <a:bodyPr wrap="square" lIns="0" rIns="0" tIns="0" bIns="0" anchor="t">
+            <a:spAutoFit/>
+          </a:bodyPr>
+          <a:lstStyle/>
+          <a:p>
+            <a:pPr algn="l">
+              <a:lnSpc>
+                <a:spcPct val="115000"/>
+              </a:lnSpc>
+            </a:pPr>
+            <a:r>
+              <a:rPr sz="1300" b="1">
+                <a:solidFill>
+                  <a:srgbClr val="008E76"/>
+                </a:solidFill>
+                <a:latin typeface="Microsoft JhengHei"/>
+              </a:rPr>
+              <a:t>看畫面才算審完</a:t>
+            </a:r>
+          </a:p>
+        </p:txBody>
+      </p:sp>
+      <p:sp>
+        <p:nvSpPr>
+          <p:cNvPr id="38" name="TextBox 37"/>
+          <p:cNvSpPr txBox="1"/>
+          <p:nvPr/>
+        </p:nvSpPr>
+        <p:spPr>
+          <a:xfrm>
+            <a:off x="6455664" y="5138928"/>
+            <a:ext cx="4846320" cy="749808"/>
+          </a:xfrm>
+          <a:prstGeom prst="rect">
+            <a:avLst/>
+          </a:prstGeom>
+          <a:noFill/>
+        </p:spPr>
+        <p:txBody>
+          <a:bodyPr wrap="square" lIns="0" rIns="0" tIns="0" bIns="0" anchor="t">
+            <a:spAutoFit/>
+          </a:bodyPr>
+          <a:lstStyle/>
+          <a:p>
+            <a:pPr algn="l">
+              <a:lnSpc>
+                <a:spcPct val="125000"/>
+              </a:lnSpc>
+            </a:pPr>
+            <a:r>
+              <a:rPr sz="1100" b="0">
+                <a:solidFill>
+                  <a:srgbClr val="444444"/>
+                </a:solidFill>
+                <a:latin typeface="Microsoft JhengHei"/>
+              </a:rPr>
+              <a:t>守衛全綠不等於畫面對。改用截圖逐一看 25 個 view，抓到 JSON 完全看不到的破口：卡片承諾「說 delete AL001」，照打卻回查無此商品。</a:t>
+            </a:r>
+          </a:p>
+        </p:txBody>
+      </p:sp>
+      <p:sp>
+        <p:nvSpPr>
+          <p:cNvPr id="39" name="TextBox 38"/>
+          <p:cNvSpPr txBox="1"/>
+          <p:nvPr/>
+        </p:nvSpPr>
+        <p:spPr>
+          <a:xfrm>
+            <a:off x="667512" y="6181344"/>
+            <a:ext cx="10853928" cy="365760"/>
+          </a:xfrm>
+          <a:prstGeom prst="rect">
+            <a:avLst/>
+          </a:prstGeom>
+          <a:noFill/>
+        </p:spPr>
+        <p:txBody>
+          <a:bodyPr wrap="square" lIns="0" rIns="0" tIns="0" bIns="0" anchor="t">
+            <a:spAutoFit/>
+          </a:bodyPr>
+          <a:lstStyle/>
+          <a:p>
+            <a:pPr algn="ctr">
+              <a:lnSpc>
+                <a:spcPct val="115000"/>
+              </a:lnSpc>
+            </a:pPr>
+            <a:r>
+              <a:rPr sz="1200" b="1">
+                <a:solidFill>
+                  <a:srgbClr val="555555"/>
+                </a:solidFill>
+                <a:latin typeface="Microsoft JhengHei"/>
+              </a:rPr>
+              <a:t>中英雙版並存：RPi5 同時跑 8002（英文，展場主力）與 8001（中文備援），開機自啟、訪客點分頁切換</a:t>
+            </a:r>
+          </a:p>
+        </p:txBody>
+      </p:sp>
+      <p:sp>
+        <p:nvSpPr>
+          <p:cNvPr id="40" name="TextBox 39"/>
+          <p:cNvSpPr txBox="1"/>
+          <p:nvPr/>
+        </p:nvSpPr>
+        <p:spPr>
+          <a:xfrm>
+            <a:off x="11475720" y="6565392"/>
+            <a:ext cx="658368" cy="237744"/>
+          </a:xfrm>
+          <a:prstGeom prst="rect">
+            <a:avLst/>
+          </a:prstGeom>
+          <a:noFill/>
+        </p:spPr>
+        <p:txBody>
+          <a:bodyPr wrap="square" lIns="0" rIns="0" tIns="0" bIns="0" anchor="t">
+            <a:spAutoFit/>
+          </a:bodyPr>
+          <a:lstStyle/>
+          <a:p>
+            <a:pPr algn="r">
+              <a:lnSpc>
+                <a:spcPct val="115000"/>
+              </a:lnSpc>
+            </a:pPr>
+            <a:r>
+              <a:rPr sz="1000" b="0">
+                <a:solidFill>
+                  <a:srgbClr val="BBBBBB"/>
+                </a:solidFill>
+                <a:latin typeface="Arial"/>
+              </a:rPr>
+              <a:t>28</a:t>
+            </a:r>
+          </a:p>
+        </p:txBody>
+      </p:sp>
+    </p:spTree>
+  </p:cSld>
+  <p:clrMapOvr>
+    <a:masterClrMapping/>
+  </p:clrMapOvr>
+</p:sld>
+</file>
+
+<file path=ppt/slides/slide29.xml><?xml version="1.0" encoding="utf-8"?>
+<p:sld xmlns:a="http://schemas.openxmlformats.org/drawingml/2006/main" xmlns:p="http://schemas.openxmlformats.org/presentationml/2006/main" xmlns:r="http://schemas.openxmlformats.org/officeDocument/2006/relationships">
+  <p:cSld>
+    <p:spTree>
+      <p:nvGrpSpPr>
+        <p:cNvPr id="1" name=""/>
+        <p:cNvGrpSpPr/>
+        <p:nvPr/>
+      </p:nvGrpSpPr>
+      <p:grpSpPr/>
+      <p:sp>
+        <p:nvSpPr>
+          <p:cNvPr id="2" name="Rectangle 1"/>
+          <p:cNvSpPr/>
+          <p:nvPr/>
+        </p:nvSpPr>
+        <p:spPr>
+          <a:xfrm>
+            <a:off x="0" y="0"/>
+            <a:ext cx="12188952" cy="6858000"/>
+          </a:xfrm>
+          <a:prstGeom prst="rect">
+            <a:avLst/>
+          </a:prstGeom>
+          <a:solidFill>
+            <a:srgbClr val="1A1A2E"/>
+          </a:solidFill>
+          <a:ln>
+            <a:noFill/>
+          </a:ln>
+          <a:effectLst/>
+        </p:spPr>
+        <p:style>
+          <a:lnRef idx="1">
+            <a:schemeClr val="accent1"/>
+          </a:lnRef>
+          <a:fillRef idx="3">
+            <a:schemeClr val="accent1"/>
+          </a:fillRef>
+          <a:effectRef idx="2">
+            <a:schemeClr val="accent1"/>
+          </a:effectRef>
+          <a:fontRef idx="minor">
+            <a:schemeClr val="lt1"/>
+          </a:fontRef>
+        </p:style>
+        <p:txBody>
+          <a:bodyPr rtlCol="0" anchor="ctr"/>
+          <a:lstStyle/>
+          <a:p>
+            <a:pPr algn="ctr"/>
+          </a:p>
+        </p:txBody>
+      </p:sp>
+      <p:sp>
+        <p:nvSpPr>
+          <p:cNvPr id="3" name="Rectangle 2"/>
+          <p:cNvSpPr/>
+          <p:nvPr/>
+        </p:nvSpPr>
+        <p:spPr>
+          <a:xfrm>
+            <a:off x="0" y="0"/>
+            <a:ext cx="12188952" cy="128016"/>
+          </a:xfrm>
+          <a:prstGeom prst="rect">
+            <a:avLst/>
+          </a:prstGeom>
+          <a:solidFill>
+            <a:srgbClr val="00C49A"/>
+          </a:solidFill>
+          <a:ln>
+            <a:noFill/>
+          </a:ln>
+          <a:effectLst/>
+        </p:spPr>
+        <p:style>
+          <a:lnRef idx="1">
+            <a:schemeClr val="accent1"/>
+          </a:lnRef>
+          <a:fillRef idx="3">
+            <a:schemeClr val="accent1"/>
+          </a:fillRef>
+          <a:effectRef idx="2">
+            <a:schemeClr val="accent1"/>
+          </a:effectRef>
+          <a:fontRef idx="minor">
+            <a:schemeClr val="lt1"/>
+          </a:fontRef>
+        </p:style>
+        <p:txBody>
+          <a:bodyPr rtlCol="0" anchor="ctr"/>
+          <a:lstStyle/>
+          <a:p>
+            <a:pPr algn="ctr"/>
+          </a:p>
+        </p:txBody>
+      </p:sp>
+      <p:sp>
+        <p:nvSpPr>
           <p:cNvPr id="4" name="TextBox 3"/>
           <p:cNvSpPr txBox="1"/>
           <p:nvPr/>
@@ -28989,8 +34166,8 @@
         </p:nvSpPr>
         <p:spPr>
           <a:xfrm>
-            <a:off x="667512" y="1783080"/>
-            <a:ext cx="10853928" cy="841248"/>
+            <a:off x="667512" y="1755648"/>
+            <a:ext cx="10853928" cy="722376"/>
           </a:xfrm>
           <a:prstGeom prst="roundRect">
             <a:avLst>
@@ -29035,8 +34212,8 @@
         </p:nvSpPr>
         <p:spPr>
           <a:xfrm>
-            <a:off x="941832" y="2002536"/>
-            <a:ext cx="530352" cy="530352"/>
+            <a:off x="941832" y="1920240"/>
+            <a:ext cx="475488" cy="475488"/>
           </a:xfrm>
           <a:prstGeom prst="ellipse">
             <a:avLst/>
@@ -29079,8 +34256,8 @@
         </p:nvSpPr>
         <p:spPr>
           <a:xfrm>
-            <a:off x="941832" y="1984248"/>
-            <a:ext cx="530352" cy="530352"/>
+            <a:off x="941832" y="1901952"/>
+            <a:ext cx="475488" cy="475488"/>
           </a:xfrm>
           <a:prstGeom prst="rect">
             <a:avLst/>
@@ -29099,27 +34276,66 @@
               </a:lnSpc>
             </a:pPr>
             <a:r>
+              <a:rPr sz="1600" b="1">
+                <a:solidFill>
+                  <a:srgbClr val="1A1A2E"/>
+                </a:solidFill>
+                <a:latin typeface="Microsoft JhengHei"/>
+              </a:rPr>
+              <a:t>價</a:t>
+            </a:r>
+          </a:p>
+        </p:txBody>
+      </p:sp>
+      <p:sp>
+        <p:nvSpPr>
+          <p:cNvPr id="9" name="TextBox 8"/>
+          <p:cNvSpPr txBox="1"/>
+          <p:nvPr/>
+        </p:nvSpPr>
+        <p:spPr>
+          <a:xfrm>
+            <a:off x="1719072" y="1865376"/>
+            <a:ext cx="1463040" cy="566928"/>
+          </a:xfrm>
+          <a:prstGeom prst="rect">
+            <a:avLst/>
+          </a:prstGeom>
+          <a:noFill/>
+        </p:spPr>
+        <p:txBody>
+          <a:bodyPr wrap="square" lIns="0" rIns="0" tIns="0" bIns="0" anchor="ctr">
+            <a:spAutoFit/>
+          </a:bodyPr>
+          <a:lstStyle/>
+          <a:p>
+            <a:pPr algn="l">
+              <a:lnSpc>
+                <a:spcPct val="115000"/>
+              </a:lnSpc>
+            </a:pPr>
+            <a:r>
               <a:rPr sz="1700" b="1">
                 <a:solidFill>
-                  <a:srgbClr val="1A1A2E"/>
-                </a:solidFill>
-                <a:latin typeface="Microsoft JhengHei"/>
-              </a:rPr>
-              <a:t>價</a:t>
-            </a:r>
-          </a:p>
-        </p:txBody>
-      </p:sp>
-      <p:sp>
-        <p:nvSpPr>
-          <p:cNvPr id="9" name="TextBox 8"/>
-          <p:cNvSpPr txBox="1"/>
-          <p:nvPr/>
-        </p:nvSpPr>
-        <p:spPr>
-          <a:xfrm>
-            <a:off x="1719072" y="1920240"/>
-            <a:ext cx="1463040" cy="685800"/>
+                  <a:srgbClr val="00C49A"/>
+                </a:solidFill>
+                <a:latin typeface="Microsoft JhengHei"/>
+              </a:rPr>
+              <a:t>價值</a:t>
+            </a:r>
+          </a:p>
+        </p:txBody>
+      </p:sp>
+      <p:sp>
+        <p:nvSpPr>
+          <p:cNvPr id="10" name="TextBox 9"/>
+          <p:cNvSpPr txBox="1"/>
+          <p:nvPr/>
+        </p:nvSpPr>
+        <p:spPr>
+          <a:xfrm>
+            <a:off x="3182112" y="1865376"/>
+            <a:ext cx="8046720" cy="566928"/>
           </a:xfrm>
           <a:prstGeom prst="rect">
             <a:avLst/>
@@ -29138,46 +34354,7 @@
               </a:lnSpc>
             </a:pPr>
             <a:r>
-              <a:rPr sz="1800" b="1">
-                <a:solidFill>
-                  <a:srgbClr val="00C49A"/>
-                </a:solidFill>
-                <a:latin typeface="Microsoft JhengHei"/>
-              </a:rPr>
-              <a:t>價值</a:t>
-            </a:r>
-          </a:p>
-        </p:txBody>
-      </p:sp>
-      <p:sp>
-        <p:nvSpPr>
-          <p:cNvPr id="10" name="TextBox 9"/>
-          <p:cNvSpPr txBox="1"/>
-          <p:nvPr/>
-        </p:nvSpPr>
-        <p:spPr>
-          <a:xfrm>
-            <a:off x="3182112" y="1920240"/>
-            <a:ext cx="8046720" cy="685800"/>
-          </a:xfrm>
-          <a:prstGeom prst="rect">
-            <a:avLst/>
-          </a:prstGeom>
-          <a:noFill/>
-        </p:spPr>
-        <p:txBody>
-          <a:bodyPr wrap="square" lIns="0" rIns="0" tIns="0" bIns="0" anchor="ctr">
-            <a:spAutoFit/>
-          </a:bodyPr>
-          <a:lstStyle/>
-          <a:p>
-            <a:pPr algn="l">
-              <a:lnSpc>
-                <a:spcPct val="115000"/>
-              </a:lnSpc>
-            </a:pPr>
-            <a:r>
-              <a:rPr sz="1400" b="0">
+              <a:rPr sz="1350" b="0">
                 <a:solidFill>
                   <a:srgbClr val="FFFFFF"/>
                 </a:solidFill>
@@ -29196,8 +34373,8 @@
         </p:nvSpPr>
         <p:spPr>
           <a:xfrm>
-            <a:off x="667512" y="2770632"/>
-            <a:ext cx="10853928" cy="841248"/>
+            <a:off x="667512" y="2606040"/>
+            <a:ext cx="10853928" cy="722376"/>
           </a:xfrm>
           <a:prstGeom prst="roundRect">
             <a:avLst>
@@ -29242,8 +34419,8 @@
         </p:nvSpPr>
         <p:spPr>
           <a:xfrm>
-            <a:off x="941832" y="2990088"/>
-            <a:ext cx="530352" cy="530352"/>
+            <a:off x="941832" y="2770632"/>
+            <a:ext cx="475488" cy="475488"/>
           </a:xfrm>
           <a:prstGeom prst="ellipse">
             <a:avLst/>
@@ -29286,8 +34463,8 @@
         </p:nvSpPr>
         <p:spPr>
           <a:xfrm>
-            <a:off x="941832" y="2971800"/>
-            <a:ext cx="530352" cy="530352"/>
+            <a:off x="941832" y="2752344"/>
+            <a:ext cx="475488" cy="475488"/>
           </a:xfrm>
           <a:prstGeom prst="rect">
             <a:avLst/>
@@ -29306,27 +34483,66 @@
               </a:lnSpc>
             </a:pPr>
             <a:r>
+              <a:rPr sz="1600" b="1">
+                <a:solidFill>
+                  <a:srgbClr val="1A1A2E"/>
+                </a:solidFill>
+                <a:latin typeface="Microsoft JhengHei"/>
+              </a:rPr>
+              <a:t>技</a:t>
+            </a:r>
+          </a:p>
+        </p:txBody>
+      </p:sp>
+      <p:sp>
+        <p:nvSpPr>
+          <p:cNvPr id="14" name="TextBox 13"/>
+          <p:cNvSpPr txBox="1"/>
+          <p:nvPr/>
+        </p:nvSpPr>
+        <p:spPr>
+          <a:xfrm>
+            <a:off x="1719072" y="2715768"/>
+            <a:ext cx="1463040" cy="566928"/>
+          </a:xfrm>
+          <a:prstGeom prst="rect">
+            <a:avLst/>
+          </a:prstGeom>
+          <a:noFill/>
+        </p:spPr>
+        <p:txBody>
+          <a:bodyPr wrap="square" lIns="0" rIns="0" tIns="0" bIns="0" anchor="ctr">
+            <a:spAutoFit/>
+          </a:bodyPr>
+          <a:lstStyle/>
+          <a:p>
+            <a:pPr algn="l">
+              <a:lnSpc>
+                <a:spcPct val="115000"/>
+              </a:lnSpc>
+            </a:pPr>
+            <a:r>
               <a:rPr sz="1700" b="1">
                 <a:solidFill>
-                  <a:srgbClr val="1A1A2E"/>
-                </a:solidFill>
-                <a:latin typeface="Microsoft JhengHei"/>
-              </a:rPr>
-              <a:t>技</a:t>
-            </a:r>
-          </a:p>
-        </p:txBody>
-      </p:sp>
-      <p:sp>
-        <p:nvSpPr>
-          <p:cNvPr id="14" name="TextBox 13"/>
-          <p:cNvSpPr txBox="1"/>
-          <p:nvPr/>
-        </p:nvSpPr>
-        <p:spPr>
-          <a:xfrm>
-            <a:off x="1719072" y="2907792"/>
-            <a:ext cx="1463040" cy="685800"/>
+                  <a:srgbClr val="00C49A"/>
+                </a:solidFill>
+                <a:latin typeface="Microsoft JhengHei"/>
+              </a:rPr>
+              <a:t>技術</a:t>
+            </a:r>
+          </a:p>
+        </p:txBody>
+      </p:sp>
+      <p:sp>
+        <p:nvSpPr>
+          <p:cNvPr id="15" name="TextBox 14"/>
+          <p:cNvSpPr txBox="1"/>
+          <p:nvPr/>
+        </p:nvSpPr>
+        <p:spPr>
+          <a:xfrm>
+            <a:off x="3182112" y="2715768"/>
+            <a:ext cx="8046720" cy="566928"/>
           </a:xfrm>
           <a:prstGeom prst="rect">
             <a:avLst/>
@@ -29345,46 +34561,7 @@
               </a:lnSpc>
             </a:pPr>
             <a:r>
-              <a:rPr sz="1800" b="1">
-                <a:solidFill>
-                  <a:srgbClr val="00C49A"/>
-                </a:solidFill>
-                <a:latin typeface="Microsoft JhengHei"/>
-              </a:rPr>
-              <a:t>技術</a:t>
-            </a:r>
-          </a:p>
-        </p:txBody>
-      </p:sp>
-      <p:sp>
-        <p:nvSpPr>
-          <p:cNvPr id="15" name="TextBox 14"/>
-          <p:cNvSpPr txBox="1"/>
-          <p:nvPr/>
-        </p:nvSpPr>
-        <p:spPr>
-          <a:xfrm>
-            <a:off x="3182112" y="2907792"/>
-            <a:ext cx="8046720" cy="685800"/>
-          </a:xfrm>
-          <a:prstGeom prst="rect">
-            <a:avLst/>
-          </a:prstGeom>
-          <a:noFill/>
-        </p:spPr>
-        <p:txBody>
-          <a:bodyPr wrap="square" lIns="0" rIns="0" tIns="0" bIns="0" anchor="ctr">
-            <a:spAutoFit/>
-          </a:bodyPr>
-          <a:lstStyle/>
-          <a:p>
-            <a:pPr algn="l">
-              <a:lnSpc>
-                <a:spcPct val="115000"/>
-              </a:lnSpc>
-            </a:pPr>
-            <a:r>
-              <a:rPr sz="1400" b="0">
+              <a:rPr sz="1350" b="0">
                 <a:solidFill>
                   <a:srgbClr val="FFFFFF"/>
                 </a:solidFill>
@@ -29403,8 +34580,8 @@
         </p:nvSpPr>
         <p:spPr>
           <a:xfrm>
-            <a:off x="667512" y="3758184"/>
-            <a:ext cx="10853928" cy="841248"/>
+            <a:off x="667512" y="3456432"/>
+            <a:ext cx="10853928" cy="722376"/>
           </a:xfrm>
           <a:prstGeom prst="roundRect">
             <a:avLst>
@@ -29449,8 +34626,8 @@
         </p:nvSpPr>
         <p:spPr>
           <a:xfrm>
-            <a:off x="941832" y="3977640"/>
-            <a:ext cx="530352" cy="530352"/>
+            <a:off x="941832" y="3621024"/>
+            <a:ext cx="475488" cy="475488"/>
           </a:xfrm>
           <a:prstGeom prst="ellipse">
             <a:avLst/>
@@ -29493,8 +34670,8 @@
         </p:nvSpPr>
         <p:spPr>
           <a:xfrm>
-            <a:off x="941832" y="3959352"/>
-            <a:ext cx="530352" cy="530352"/>
+            <a:off x="941832" y="3602736"/>
+            <a:ext cx="475488" cy="475488"/>
           </a:xfrm>
           <a:prstGeom prst="rect">
             <a:avLst/>
@@ -29513,27 +34690,66 @@
               </a:lnSpc>
             </a:pPr>
             <a:r>
+              <a:rPr sz="1600" b="1">
+                <a:solidFill>
+                  <a:srgbClr val="1A1A2E"/>
+                </a:solidFill>
+                <a:latin typeface="Microsoft JhengHei"/>
+              </a:rPr>
+              <a:t>品</a:t>
+            </a:r>
+          </a:p>
+        </p:txBody>
+      </p:sp>
+      <p:sp>
+        <p:nvSpPr>
+          <p:cNvPr id="19" name="TextBox 18"/>
+          <p:cNvSpPr txBox="1"/>
+          <p:nvPr/>
+        </p:nvSpPr>
+        <p:spPr>
+          <a:xfrm>
+            <a:off x="1719072" y="3566160"/>
+            <a:ext cx="1463040" cy="566928"/>
+          </a:xfrm>
+          <a:prstGeom prst="rect">
+            <a:avLst/>
+          </a:prstGeom>
+          <a:noFill/>
+        </p:spPr>
+        <p:txBody>
+          <a:bodyPr wrap="square" lIns="0" rIns="0" tIns="0" bIns="0" anchor="ctr">
+            <a:spAutoFit/>
+          </a:bodyPr>
+          <a:lstStyle/>
+          <a:p>
+            <a:pPr algn="l">
+              <a:lnSpc>
+                <a:spcPct val="115000"/>
+              </a:lnSpc>
+            </a:pPr>
+            <a:r>
               <a:rPr sz="1700" b="1">
                 <a:solidFill>
-                  <a:srgbClr val="1A1A2E"/>
-                </a:solidFill>
-                <a:latin typeface="Microsoft JhengHei"/>
-              </a:rPr>
-              <a:t>品</a:t>
-            </a:r>
-          </a:p>
-        </p:txBody>
-      </p:sp>
-      <p:sp>
-        <p:nvSpPr>
-          <p:cNvPr id="19" name="TextBox 18"/>
-          <p:cNvSpPr txBox="1"/>
-          <p:nvPr/>
-        </p:nvSpPr>
-        <p:spPr>
-          <a:xfrm>
-            <a:off x="1719072" y="3895344"/>
-            <a:ext cx="1463040" cy="685800"/>
+                  <a:srgbClr val="00C49A"/>
+                </a:solidFill>
+                <a:latin typeface="Microsoft JhengHei"/>
+              </a:rPr>
+              <a:t>品質</a:t>
+            </a:r>
+          </a:p>
+        </p:txBody>
+      </p:sp>
+      <p:sp>
+        <p:nvSpPr>
+          <p:cNvPr id="20" name="TextBox 19"/>
+          <p:cNvSpPr txBox="1"/>
+          <p:nvPr/>
+        </p:nvSpPr>
+        <p:spPr>
+          <a:xfrm>
+            <a:off x="3182112" y="3566160"/>
+            <a:ext cx="8046720" cy="566928"/>
           </a:xfrm>
           <a:prstGeom prst="rect">
             <a:avLst/>
@@ -29552,52 +34768,13 @@
               </a:lnSpc>
             </a:pPr>
             <a:r>
-              <a:rPr sz="1800" b="1">
-                <a:solidFill>
-                  <a:srgbClr val="00C49A"/>
-                </a:solidFill>
-                <a:latin typeface="Microsoft JhengHei"/>
-              </a:rPr>
-              <a:t>品質</a:t>
-            </a:r>
-          </a:p>
-        </p:txBody>
-      </p:sp>
-      <p:sp>
-        <p:nvSpPr>
-          <p:cNvPr id="20" name="TextBox 19"/>
-          <p:cNvSpPr txBox="1"/>
-          <p:nvPr/>
-        </p:nvSpPr>
-        <p:spPr>
-          <a:xfrm>
-            <a:off x="3182112" y="3895344"/>
-            <a:ext cx="8046720" cy="685800"/>
-          </a:xfrm>
-          <a:prstGeom prst="rect">
-            <a:avLst/>
-          </a:prstGeom>
-          <a:noFill/>
-        </p:spPr>
-        <p:txBody>
-          <a:bodyPr wrap="square" lIns="0" rIns="0" tIns="0" bIns="0" anchor="ctr">
-            <a:spAutoFit/>
-          </a:bodyPr>
-          <a:lstStyle/>
-          <a:p>
-            <a:pPr algn="l">
-              <a:lnSpc>
-                <a:spcPct val="115000"/>
-              </a:lnSpc>
-            </a:pPr>
-            <a:r>
-              <a:rPr sz="1400" b="0">
+              <a:rPr sz="1350" b="0">
                 <a:solidFill>
                   <a:srgbClr val="FFFFFF"/>
                 </a:solidFill>
                 <a:latin typeface="Microsoft JhengHei"/>
               </a:rPr>
-              <a:t>六套回歸雙平台 100%；守衛庫 1122 句把「可靠」變成數字，不靠祈禱</a:t>
+              <a:t>中文 1122 句雙平台 100%、英文 892 句 100%；「可靠」是數字不是祈禱</a:t>
             </a:r>
           </a:p>
         </p:txBody>
@@ -29610,8 +34787,8 @@
         </p:nvSpPr>
         <p:spPr>
           <a:xfrm>
-            <a:off x="667512" y="4745736"/>
-            <a:ext cx="10853928" cy="841248"/>
+            <a:off x="667512" y="4306824"/>
+            <a:ext cx="10853928" cy="722376"/>
           </a:xfrm>
           <a:prstGeom prst="roundRect">
             <a:avLst>
@@ -29656,8 +34833,8 @@
         </p:nvSpPr>
         <p:spPr>
           <a:xfrm>
-            <a:off x="941832" y="4965192"/>
-            <a:ext cx="530352" cy="530352"/>
+            <a:off x="941832" y="4471416"/>
+            <a:ext cx="475488" cy="475488"/>
           </a:xfrm>
           <a:prstGeom prst="ellipse">
             <a:avLst/>
@@ -29700,8 +34877,8 @@
         </p:nvSpPr>
         <p:spPr>
           <a:xfrm>
-            <a:off x="941832" y="4946904"/>
-            <a:ext cx="530352" cy="530352"/>
+            <a:off x="941832" y="4453128"/>
+            <a:ext cx="475488" cy="475488"/>
           </a:xfrm>
           <a:prstGeom prst="rect">
             <a:avLst/>
@@ -29720,27 +34897,234 @@
               </a:lnSpc>
             </a:pPr>
             <a:r>
+              <a:rPr sz="1600" b="1">
+                <a:solidFill>
+                  <a:srgbClr val="1A1A2E"/>
+                </a:solidFill>
+                <a:latin typeface="Microsoft JhengHei"/>
+              </a:rPr>
+              <a:t>語</a:t>
+            </a:r>
+          </a:p>
+        </p:txBody>
+      </p:sp>
+      <p:sp>
+        <p:nvSpPr>
+          <p:cNvPr id="24" name="TextBox 23"/>
+          <p:cNvSpPr txBox="1"/>
+          <p:nvPr/>
+        </p:nvSpPr>
+        <p:spPr>
+          <a:xfrm>
+            <a:off x="1719072" y="4416552"/>
+            <a:ext cx="1463040" cy="566928"/>
+          </a:xfrm>
+          <a:prstGeom prst="rect">
+            <a:avLst/>
+          </a:prstGeom>
+          <a:noFill/>
+        </p:spPr>
+        <p:txBody>
+          <a:bodyPr wrap="square" lIns="0" rIns="0" tIns="0" bIns="0" anchor="ctr">
+            <a:spAutoFit/>
+          </a:bodyPr>
+          <a:lstStyle/>
+          <a:p>
+            <a:pPr algn="l">
+              <a:lnSpc>
+                <a:spcPct val="115000"/>
+              </a:lnSpc>
+            </a:pPr>
+            <a:r>
               <a:rPr sz="1700" b="1">
                 <a:solidFill>
+                  <a:srgbClr val="00C49A"/>
+                </a:solidFill>
+                <a:latin typeface="Microsoft JhengHei"/>
+              </a:rPr>
+              <a:t>語音</a:t>
+            </a:r>
+          </a:p>
+        </p:txBody>
+      </p:sp>
+      <p:sp>
+        <p:nvSpPr>
+          <p:cNvPr id="25" name="TextBox 24"/>
+          <p:cNvSpPr txBox="1"/>
+          <p:nvPr/>
+        </p:nvSpPr>
+        <p:spPr>
+          <a:xfrm>
+            <a:off x="3182112" y="4416552"/>
+            <a:ext cx="8046720" cy="566928"/>
+          </a:xfrm>
+          <a:prstGeom prst="rect">
+            <a:avLst/>
+          </a:prstGeom>
+          <a:noFill/>
+        </p:spPr>
+        <p:txBody>
+          <a:bodyPr wrap="square" lIns="0" rIns="0" tIns="0" bIns="0" anchor="ctr">
+            <a:spAutoFit/>
+          </a:bodyPr>
+          <a:lstStyle/>
+          <a:p>
+            <a:pPr algn="l">
+              <a:lnSpc>
+                <a:spcPct val="115000"/>
+              </a:lnSpc>
+            </a:pPr>
+            <a:r>
+              <a:rPr sz="1350" b="0">
+                <a:solidFill>
+                  <a:srgbClr val="FFFFFF"/>
+                </a:solidFill>
+                <a:latin typeface="Microsoft JhengHei"/>
+              </a:rPr>
+              <a:t>全離線 whisper；英文 0.94s / 句，中英共用一套 runtime</a:t>
+            </a:r>
+          </a:p>
+        </p:txBody>
+      </p:sp>
+      <p:sp>
+        <p:nvSpPr>
+          <p:cNvPr id="26" name="Rounded Rectangle 25"/>
+          <p:cNvSpPr/>
+          <p:nvPr/>
+        </p:nvSpPr>
+        <p:spPr>
+          <a:xfrm>
+            <a:off x="667512" y="5157216"/>
+            <a:ext cx="10853928" cy="722376"/>
+          </a:xfrm>
+          <a:prstGeom prst="roundRect">
+            <a:avLst>
+              <a:gd name="adj" fmla="val 8000"/>
+            </a:avLst>
+          </a:prstGeom>
+          <a:solidFill>
+            <a:srgbClr val="222A45"/>
+          </a:solidFill>
+          <a:ln>
+            <a:noFill/>
+          </a:ln>
+          <a:effectLst/>
+        </p:spPr>
+        <p:style>
+          <a:lnRef idx="1">
+            <a:schemeClr val="accent1"/>
+          </a:lnRef>
+          <a:fillRef idx="3">
+            <a:schemeClr val="accent1"/>
+          </a:fillRef>
+          <a:effectRef idx="2">
+            <a:schemeClr val="accent1"/>
+          </a:effectRef>
+          <a:fontRef idx="minor">
+            <a:schemeClr val="lt1"/>
+          </a:fontRef>
+        </p:style>
+        <p:txBody>
+          <a:bodyPr rtlCol="0" anchor="ctr"/>
+          <a:lstStyle/>
+          <a:p>
+            <a:pPr algn="ctr"/>
+          </a:p>
+        </p:txBody>
+      </p:sp>
+      <p:sp>
+        <p:nvSpPr>
+          <p:cNvPr id="27" name="Oval 26"/>
+          <p:cNvSpPr/>
+          <p:nvPr/>
+        </p:nvSpPr>
+        <p:spPr>
+          <a:xfrm>
+            <a:off x="941832" y="5321808"/>
+            <a:ext cx="475488" cy="475488"/>
+          </a:xfrm>
+          <a:prstGeom prst="ellipse">
+            <a:avLst/>
+          </a:prstGeom>
+          <a:solidFill>
+            <a:srgbClr val="00C49A"/>
+          </a:solidFill>
+          <a:ln>
+            <a:noFill/>
+          </a:ln>
+          <a:effectLst/>
+        </p:spPr>
+        <p:style>
+          <a:lnRef idx="1">
+            <a:schemeClr val="accent1"/>
+          </a:lnRef>
+          <a:fillRef idx="3">
+            <a:schemeClr val="accent1"/>
+          </a:fillRef>
+          <a:effectRef idx="2">
+            <a:schemeClr val="accent1"/>
+          </a:effectRef>
+          <a:fontRef idx="minor">
+            <a:schemeClr val="lt1"/>
+          </a:fontRef>
+        </p:style>
+        <p:txBody>
+          <a:bodyPr rtlCol="0" anchor="ctr"/>
+          <a:lstStyle/>
+          <a:p>
+            <a:pPr algn="ctr"/>
+          </a:p>
+        </p:txBody>
+      </p:sp>
+      <p:sp>
+        <p:nvSpPr>
+          <p:cNvPr id="28" name="TextBox 27"/>
+          <p:cNvSpPr txBox="1"/>
+          <p:nvPr/>
+        </p:nvSpPr>
+        <p:spPr>
+          <a:xfrm>
+            <a:off x="941832" y="5303520"/>
+            <a:ext cx="475488" cy="475488"/>
+          </a:xfrm>
+          <a:prstGeom prst="rect">
+            <a:avLst/>
+          </a:prstGeom>
+          <a:noFill/>
+        </p:spPr>
+        <p:txBody>
+          <a:bodyPr wrap="square" lIns="0" rIns="0" tIns="0" bIns="0" anchor="ctr">
+            <a:spAutoFit/>
+          </a:bodyPr>
+          <a:lstStyle/>
+          <a:p>
+            <a:pPr algn="ctr">
+              <a:lnSpc>
+                <a:spcPct val="115000"/>
+              </a:lnSpc>
+            </a:pPr>
+            <a:r>
+              <a:rPr sz="1600" b="1">
+                <a:solidFill>
                   <a:srgbClr val="1A1A2E"/>
                 </a:solidFill>
                 <a:latin typeface="Microsoft JhengHei"/>
               </a:rPr>
-              <a:t>語</a:t>
-            </a:r>
-          </a:p>
-        </p:txBody>
-      </p:sp>
-      <p:sp>
-        <p:nvSpPr>
-          <p:cNvPr id="24" name="TextBox 23"/>
-          <p:cNvSpPr txBox="1"/>
-          <p:nvPr/>
-        </p:nvSpPr>
-        <p:spPr>
-          <a:xfrm>
-            <a:off x="1719072" y="4882896"/>
-            <a:ext cx="1463040" cy="685800"/>
+              <a:t>雙</a:t>
+            </a:r>
+          </a:p>
+        </p:txBody>
+      </p:sp>
+      <p:sp>
+        <p:nvSpPr>
+          <p:cNvPr id="29" name="TextBox 28"/>
+          <p:cNvSpPr txBox="1"/>
+          <p:nvPr/>
+        </p:nvSpPr>
+        <p:spPr>
+          <a:xfrm>
+            <a:off x="1719072" y="5266944"/>
+            <a:ext cx="1463040" cy="566928"/>
           </a:xfrm>
           <a:prstGeom prst="rect">
             <a:avLst/>
@@ -29759,27 +35143,27 @@
               </a:lnSpc>
             </a:pPr>
             <a:r>
-              <a:rPr sz="1800" b="1">
+              <a:rPr sz="1700" b="1">
                 <a:solidFill>
                   <a:srgbClr val="00C49A"/>
                 </a:solidFill>
                 <a:latin typeface="Microsoft JhengHei"/>
               </a:rPr>
-              <a:t>語音</a:t>
-            </a:r>
-          </a:p>
-        </p:txBody>
-      </p:sp>
-      <p:sp>
-        <p:nvSpPr>
-          <p:cNvPr id="25" name="TextBox 24"/>
-          <p:cNvSpPr txBox="1"/>
-          <p:nvPr/>
-        </p:nvSpPr>
-        <p:spPr>
-          <a:xfrm>
-            <a:off x="3182112" y="4882896"/>
-            <a:ext cx="8046720" cy="685800"/>
+              <a:t>雙語</a:t>
+            </a:r>
+          </a:p>
+        </p:txBody>
+      </p:sp>
+      <p:sp>
+        <p:nvSpPr>
+          <p:cNvPr id="30" name="TextBox 29"/>
+          <p:cNvSpPr txBox="1"/>
+          <p:nvPr/>
+        </p:nvSpPr>
+        <p:spPr>
+          <a:xfrm>
+            <a:off x="3182112" y="5266944"/>
+            <a:ext cx="8046720" cy="566928"/>
           </a:xfrm>
           <a:prstGeom prst="rect">
             <a:avLst/>
@@ -29798,26 +35182,26 @@
               </a:lnSpc>
             </a:pPr>
             <a:r>
-              <a:rPr sz="1400" b="0">
+              <a:rPr sz="1350" b="0">
                 <a:solidFill>
                   <a:srgbClr val="FFFFFF"/>
                 </a:solidFill>
                 <a:latin typeface="Microsoft JhengHei"/>
               </a:rPr>
-              <a:t>全離線 ASR 展場可用；三環境噪音實測，現有硬體 + 正常音量就夠</a:t>
-            </a:r>
-          </a:p>
-        </p:txBody>
-      </p:sp>
-      <p:sp>
-        <p:nvSpPr>
-          <p:cNvPr id="26" name="TextBox 25"/>
-          <p:cNvSpPr txBox="1"/>
-          <p:nvPr/>
-        </p:nvSpPr>
-        <p:spPr>
-          <a:xfrm>
-            <a:off x="667512" y="5852160"/>
+              <a:t>中英雙版同機並存，訪客點分頁切換；移植 19 類坑已歸納成方法論</a:t>
+            </a:r>
+          </a:p>
+        </p:txBody>
+      </p:sp>
+      <p:sp>
+        <p:nvSpPr>
+          <p:cNvPr id="31" name="TextBox 30"/>
+          <p:cNvSpPr txBox="1"/>
+          <p:nvPr/>
+        </p:nvSpPr>
+        <p:spPr>
+          <a:xfrm>
+            <a:off x="667512" y="6089904"/>
             <a:ext cx="10789920" cy="457200"/>
           </a:xfrm>
           <a:prstGeom prst="rect">
@@ -29843,14 +35227,14 @@
                 </a:solidFill>
                 <a:latin typeface="Microsoft JhengHei"/>
               </a:rPr>
-              <a:t>下一步：展前待辦（demo 基準日對齊、展前真機全量驗收）——重置鈕 / 開機自啟 / Wi-Fi 自癒已完成</a:t>
-            </a:r>
-          </a:p>
-        </p:txBody>
-      </p:sp>
-      <p:sp>
-        <p:nvSpPr>
-          <p:cNvPr id="27" name="TextBox 26"/>
+              <a:t>下一步：展前真機全量驗收、demo 基準日對齊——重置鈕 / 開機自啟 / Wi-Fi 自癒 / 中英雙版並存已完成</a:t>
+            </a:r>
+          </a:p>
+        </p:txBody>
+      </p:sp>
+      <p:sp>
+        <p:nvSpPr>
+          <p:cNvPr id="32" name="TextBox 31"/>
           <p:cNvSpPr txBox="1"/>
           <p:nvPr/>
         </p:nvSpPr>
@@ -29882,7 +35266,7 @@
                 </a:solidFill>
                 <a:latin typeface="Arial"/>
               </a:rPr>
-              <a:t>26</a:t>
+              <a:t>29</a:t>
             </a:r>
           </a:p>
         </p:txBody>

--- a/倉管Agent_專案簡報.pptx
+++ b/倉管Agent_專案簡報.pptx
@@ -1606,7 +1606,31 @@
               <a:rPr sz="1200">
                 <a:latin typeface="Microsoft JhengHei"/>
               </a:rPr>
-              <a:t>★語音部署架構頁（回應「語音這塊怎麼部署」）。**2026-07-27 隨 ASR 換型改版**：原本這頁在講 Fun-ASR 的三元件架構（VAD＋Encoder＋Qwen3 解碼器，合計 910MB），換成 whisper.cpp 之後**架構反而更簡單**——單一模型檔、單一 binary。三張卡：①共用 runtime＝whisper-cli，一支 binary 內含端點偵測、聲學編碼、解碼，中英兩版只差 -m 參數指到哪顆模型，不必維護兩套框架。②英文版 ggml-tiny.en（74MB / 0.94s），展場主力。③中文版 ggml-base（141MB / 6.8s），多語權重含中文，備援展示。管線：前端錄 webm → ffmpeg 轉 16k mono → whisper-cli → OpenCC 轉繁（**只有中文版需要**，英文版已移除）→ 出口正規化（英文版做大小寫攤平、中文版做同音錯字修正）→ 交倉管 WS，全程本機無網路。值得一提的數字：**模型體積從 910MB 降到 215MB**，延遲英文從 2.5s 降到 0.94s——換掉來源不符的模型不但沒有犧牲，反而更輕更快。這頁證明語音不是掛個雲端 API，是真的把模型部署在邊緣裝置上離線跑。</a:t>
+              <a:t>★語音部署架構頁（回應「語音這塊怎麼部署」「VAD 和 Encoder 現在怎麼做」）。**2026-07-27 隨 ASR 換型改版**：原本是 Fun-ASR 的三顆模型串起來跑——VAD（fsmn-vad 1.6MB，判斷何時在講話）＋Encoder（447MB，聲學編碼）＋Qwen3-0.6B 解碼器（461MB，生成文字），合計 910MB。換成 whisper 之後這三塊各自的去向如下，這是評審會追問的重點：</a:t>
+            </a:r>
+          </a:p>
+          <a:p>
+            <a:r>
+              <a:rPr sz="1200">
+                <a:latin typeface="Microsoft JhengHei"/>
+              </a:rPr>
+              <a:t>① **VAD → 移到前端瀏覽器，不用模型了**。whisper.cpp 本身有 VAD 支援（--vad 搭配 Silero 模型），但我們**沒有啟用**；改用 Web Audio API 在瀏覽器即時算 RMS 音量：偵測到開始講話後，靜音持續 1.2 秒就自動送出，另有 15 秒硬上限（展場吵雜時 VAD 可能永遠不收尾）。好處是零模型負擔、零延遲、麥克風端就地判斷；也是訪客體感「Siri 式點一下自動結束」的來源。</a:t>
+            </a:r>
+          </a:p>
+          <a:p>
+            <a:r>
+              <a:rPr sz="1200">
+                <a:latin typeface="Microsoft JhengHei"/>
+              </a:rPr>
+              <a:t>② **Encoder 與解碼器 → 合併成同一個模型檔**。whisper 是端到端的 encoder-decoder 架構，聲學編碼與文字解碼本來就在同一份權重裡，不像 Fun-ASR 要三個檔案分開載入。所以現在只有一顆 .bin，中英兩版只差 -m 參數指到 tiny.en 還是 base。</a:t>
+            </a:r>
+          </a:p>
+          <a:p>
+            <a:r>
+              <a:rPr sz="1200">
+                <a:latin typeface="Microsoft JhengHei"/>
+              </a:rPr>
+              <a:t>管線：前端錄 webm（含 VAD 自動停）→ ffmpeg 轉 16k mono → whisper-cli → OpenCC 轉繁（**只有中文版需要**，英文版已移除）→ 出口正規化（英文做大小寫攤平、中文做同音錯字修正）→ 交倉管 WS，全程本機無網路。**模型體積 910MB → 215MB、英文延遲 2.5s → 0.94s**——換掉來源不符的模型不但沒犧牲，反而更輕更快、架構更薄。</a:t>
             </a:r>
           </a:p>
         </p:txBody>
@@ -19192,7 +19216,7 @@
                 </a:solidFill>
                 <a:latin typeface="Microsoft JhengHei"/>
               </a:rPr>
-              <a:t>一套 runtime，中英各掛一顆模型</a:t>
+              <a:t>從三個模型變成一個：換型順帶把架構砍薄</a:t>
             </a:r>
           </a:p>
         </p:txBody>
@@ -19231,7 +19255,7 @@
                 </a:solidFill>
                 <a:latin typeface="Microsoft JhengHei"/>
               </a:rPr>
-              <a:t>換成 whisper.cpp 後架構反而更簡單：單一模型檔、單一 binary，中英兩版共用同一套 runtime，只換 -m 參數。</a:t>
+              <a:t>原方案是 VAD＋Encoder＋LLM 解碼器三顆模型（910 MB）。換 whisper 後：端點偵測交給瀏覽器、編碼解碼合成一顆模型檔。</a:t>
             </a:r>
           </a:p>
         </p:txBody>
@@ -19360,7 +19384,7 @@
                 </a:solidFill>
                 <a:latin typeface="Microsoft JhengHei"/>
               </a:rPr>
-              <a:t>共</a:t>
+              <a:t>偵</a:t>
             </a:r>
           </a:p>
         </p:txBody>
@@ -19399,7 +19423,7 @@
                 </a:solidFill>
                 <a:latin typeface="Microsoft JhengHei"/>
               </a:rPr>
-              <a:t>共用 Runtime</a:t>
+              <a:t>端點偵測移到前端</a:t>
             </a:r>
           </a:p>
         </p:txBody>
@@ -19438,7 +19462,7 @@
                 </a:solidFill>
                 <a:latin typeface="Arial"/>
               </a:rPr>
-              <a:t>RPi5 源碼編譯</a:t>
+              <a:t>RMS 音量偵測</a:t>
             </a:r>
           </a:p>
         </p:txBody>
@@ -19477,7 +19501,7 @@
                 </a:solidFill>
                 <a:latin typeface="Arial"/>
               </a:rPr>
-              <a:t>whisper-cli (whisper.cpp)</a:t>
+              <a:t>Web Audio API · 零模型</a:t>
             </a:r>
           </a:p>
         </p:txBody>
@@ -19516,7 +19540,7 @@
                 </a:solidFill>
                 <a:latin typeface="Microsoft JhengHei"/>
               </a:rPr>
-              <a:t>單一 binary 跑完 VAD、聲學編碼、解碼；中英兩版只差 -m 指到哪顆模型</a:t>
+              <a:t>瀏覽器即時算音量：靜音 1.2s 自動送出、15s 硬上限；省掉一顆 VAD 模型</a:t>
             </a:r>
           </a:p>
         </p:txBody>
@@ -19684,7 +19708,7 @@
                 </a:solidFill>
                 <a:latin typeface="Microsoft JhengHei"/>
               </a:rPr>
-              <a:t>EN</a:t>
+              <a:t>聲</a:t>
             </a:r>
           </a:p>
         </p:txBody>
@@ -19723,7 +19747,7 @@
                 </a:solidFill>
                 <a:latin typeface="Microsoft JhengHei"/>
               </a:rPr>
-              <a:t>英文版模型</a:t>
+              <a:t>編碼＋解碼合一</a:t>
             </a:r>
           </a:p>
         </p:txBody>
@@ -19762,7 +19786,7 @@
                 </a:solidFill>
                 <a:latin typeface="Arial"/>
               </a:rPr>
-              <a:t>74 MB · 0.94s/句</a:t>
+              <a:t>74 MB · 英文版</a:t>
             </a:r>
           </a:p>
         </p:txBody>
@@ -19840,7 +19864,7 @@
                 </a:solidFill>
                 <a:latin typeface="Microsoft JhengHei"/>
               </a:rPr>
-              <a:t>英文專用、展場主力；短句夠用，比 base.en 更快且 WER 更低</a:t>
+              <a:t>whisper 是端到端 encoder-decoder：聲學編碼與文字解碼在同一個模型檔內</a:t>
             </a:r>
           </a:p>
         </p:txBody>
@@ -20008,7 +20032,7 @@
                 </a:solidFill>
                 <a:latin typeface="Microsoft JhengHei"/>
               </a:rPr>
-              <a:t>中</a:t>
+              <a:t>文</a:t>
             </a:r>
           </a:p>
         </p:txBody>
@@ -20047,7 +20071,7 @@
                 </a:solidFill>
                 <a:latin typeface="Microsoft JhengHei"/>
               </a:rPr>
-              <a:t>中文版模型</a:t>
+              <a:t>同一套 runtime</a:t>
             </a:r>
           </a:p>
         </p:txBody>
@@ -20086,7 +20110,7 @@
                 </a:solidFill>
                 <a:latin typeface="Arial"/>
               </a:rPr>
-              <a:t>141 MB · 6.8s/句</a:t>
+              <a:t>141 MB · 中文版</a:t>
             </a:r>
           </a:p>
         </p:txBody>
@@ -20164,7 +20188,7 @@
                 </a:solidFill>
                 <a:latin typeface="Microsoft JhengHei"/>
               </a:rPr>
-              <a:t>多語權重（含中文）；輸出簡體故仍需 OpenCC 轉繁，中文版為備援展示</a:t>
+              <a:t>中英只差 -m 指到哪顆模型；多語權重輸出簡體，故中文版仍需 OpenCC 轉繁</a:t>
             </a:r>
           </a:p>
         </p:txBody>
@@ -20288,7 +20312,7 @@
                 </a:solidFill>
                 <a:latin typeface="Microsoft JhengHei"/>
               </a:rPr>
-              <a:t>前端錄音</a:t>
+              <a:t>前端錄音 + VAD</a:t>
             </a:r>
           </a:p>
           <a:p>
@@ -20304,7 +20328,7 @@
                 </a:solidFill>
                 <a:latin typeface="Microsoft JhengHei"/>
               </a:rPr>
-              <a:t>webm/opus</a:t>
+              <a:t>靜音 1.2s 自動停</a:t>
             </a:r>
           </a:p>
         </p:txBody>
@@ -21100,7 +21124,7 @@
                 </a:solidFill>
                 <a:latin typeface="Microsoft JhengHei"/>
               </a:rPr>
-              <a:t>whisper.cpp 在機上源碼編譯｜英文 0.94s/句、中文 6.8s/句｜兩顆模型合計僅 215 MB（原方案 910 MB）｜純 CPU、零 GPU、零雲端</a:t>
+              <a:t>910 MB 三顆 → 74 MB 一顆｜VAD 零模型｜0.94s/句｜純 CPU、零 GPU、零雲端</a:t>
             </a:r>
           </a:p>
         </p:txBody>

--- a/倉管Agent_專案簡報.pptx
+++ b/倉管Agent_專案簡報.pptx
@@ -34,6 +34,7 @@
     <p:sldId id="282" r:id="rId34"/>
     <p:sldId id="283" r:id="rId35"/>
     <p:sldId id="284" r:id="rId36"/>
+    <p:sldId id="285" r:id="rId37"/>
   </p:sldIdLst>
   <p:sldSz cx="12188952" cy="6858000" type="screen4x3"/>
   <p:notesSz cx="6858000" cy="9144000"/>
@@ -2287,7 +2288,7 @@
               <a:rPr sz="1200">
                 <a:latin typeface="Microsoft JhengHei"/>
               </a:rPr>
-              <a:t>總結五張卡：價值、技術、品質、語音、雙語。收尾一句下一步。整份簡報的主軸——用最小的模型、最便宜的硬體，做到可以用數字證明的品質。品質那張卡的兩個數字要記熟：中文守衛 1122 句雙平台 100%、英文守衛 892 句 100%。</a:t>
+              <a:t>★這頁回答一個很自然的質疑：「你們測了 11 輪、守衛 892 句全綠，怎麼還有破口？」答案是——**不是輪數不夠，是輸入源不夠多樣**。前面 11 輪的句子全是同一個作者（我）打字造的，作者的盲點會系統性重複，再跑 20 輪同樣方式也抓不到。所以換了兩個產生源：①**TTS 唸出來、whisper 聽回去**——產物型態跟打字完全不同（撇號縮寫、黏字、聽錯詞）；②**刻意寫「我自己不會寫的句型」**——換作者視角，展場訪客會客氣地問（could you tell me…）而不是打命令式（earphone stock）。TTS 基準批跑 100 句 × 3 噪音層共 300 次辨識，用的是真實賣場環境音混入：乾淨 92%、一般展場 92%、尖峰吵雜 91%——**噪音幾乎不影響**，whisper 對環境音的韌性比預期好。抓到的破口裡最值得講的是撇號那個：ASR **完全聽對**、LLM 也**完全判對**（keyword=mouse、warehouse=central 都抽對了），卻被防幻覺閘門把`what's` 當成「庫裡沒有的商品修飾詞」，於是清掉正確的 keyword，回了全店概覽。根因是閘門剝標點時只剝頭尾，撇號在字中間剝不掉。**這類破口打字訪客也會遇到**——撇號、禮貌用語、what about 追問都是，只是先前造句時沒想到。真正語音專屬的只有黏字（sunheadstock）和聽錯詞（mops→mobs）那兩類，那兩句實測**沒有可用訊號**能區分正確與誤配（mobs 最像的是 mouse 不是 mop），硬修會更糟，誠實留給補訓語料。</a:t>
             </a:r>
           </a:p>
         </p:txBody>
@@ -2361,6 +2362,79 @@
                 <a:latin typeface="Microsoft JhengHei"/>
               </a:rPr>
               <a:t>七大查詢工具（唯讀）加一組 Agent 進階工具。前七個是訪客最常問的；第八格 Agent 進階包含根因分析（帳對不上時自動查原因）、自動補貨、定時排程。</a:t>
+            </a:r>
+          </a:p>
+        </p:txBody>
+      </p:sp>
+      <p:sp>
+        <p:nvSpPr>
+          <p:cNvPr id="4" name="Slide Number Placeholder 3"/>
+          <p:cNvSpPr>
+            <a:spLocks noGrp="1"/>
+          </p:cNvSpPr>
+          <p:nvPr>
+            <p:ph type="sldNum" idx="5" sz="quarter"/>
+          </p:nvPr>
+        </p:nvSpPr>
+        <p:spPr/>
+      </p:sp>
+    </p:spTree>
+  </p:cSld>
+  <p:clrMapOvr>
+    <a:masterClrMapping/>
+  </p:clrMapOvr>
+</p:notes>
+</file>
+
+<file path=ppt/notesSlides/notesSlide30.xml><?xml version="1.0" encoding="utf-8"?>
+<p:notes xmlns:a="http://schemas.openxmlformats.org/drawingml/2006/main" xmlns:p="http://schemas.openxmlformats.org/presentationml/2006/main" xmlns:r="http://schemas.openxmlformats.org/officeDocument/2006/relationships">
+  <p:cSld>
+    <p:spTree>
+      <p:nvGrpSpPr>
+        <p:cNvPr id="1" name=""/>
+        <p:cNvGrpSpPr/>
+        <p:nvPr/>
+      </p:nvGrpSpPr>
+      <p:grpSpPr>
+        <a:xfrm>
+          <a:off x="0" y="0"/>
+          <a:ext cx="0" cy="0"/>
+          <a:chOff x="0" y="0"/>
+          <a:chExt cx="0" cy="0"/>
+        </a:xfrm>
+      </p:grpSpPr>
+      <p:sp>
+        <p:nvSpPr>
+          <p:cNvPr id="2" name="Slide Image Placeholder 1"/>
+          <p:cNvSpPr>
+            <a:spLocks noGrp="1"/>
+          </p:cNvSpPr>
+          <p:nvPr>
+            <p:ph type="sldImg" idx="2"/>
+          </p:nvPr>
+        </p:nvSpPr>
+        <p:spPr/>
+      </p:sp>
+      <p:sp>
+        <p:nvSpPr>
+          <p:cNvPr id="3" name="Notes Placeholder 2"/>
+          <p:cNvSpPr>
+            <a:spLocks noGrp="1"/>
+          </p:cNvSpPr>
+          <p:nvPr>
+            <p:ph type="body" idx="3" sz="quarter"/>
+          </p:nvPr>
+        </p:nvSpPr>
+        <p:spPr/>
+        <p:txBody>
+          <a:bodyPr/>
+          <a:lstStyle/>
+          <a:p>
+            <a:r>
+              <a:rPr sz="1200">
+                <a:latin typeface="Microsoft JhengHei"/>
+              </a:rPr>
+              <a:t>總結五張卡：價值、技術、品質、語音、雙語。收尾一句下一步。整份簡報的主軸——用最小的模型、最便宜的硬體，做到可以用數字證明的品質。品質那張卡的兩個數字要記熟：中文守衛 1122 句雙平台 100%、英文守衛 892 句 100%。</a:t>
             </a:r>
           </a:p>
         </p:txBody>
@@ -34018,17 +34092,1562 @@
       <p:grpSpPr/>
       <p:sp>
         <p:nvSpPr>
-          <p:cNvPr id="2" name="Rectangle 1"/>
+          <p:cNvPr id="2" name="TextBox 1"/>
+          <p:cNvSpPr txBox="1"/>
+          <p:nvPr/>
+        </p:nvSpPr>
+        <p:spPr>
+          <a:xfrm>
+            <a:off x="667512" y="310896"/>
+            <a:ext cx="10789920" cy="274320"/>
+          </a:xfrm>
+          <a:prstGeom prst="rect">
+            <a:avLst/>
+          </a:prstGeom>
+          <a:noFill/>
+        </p:spPr>
+        <p:txBody>
+          <a:bodyPr wrap="square" lIns="0" rIns="0" tIns="0" bIns="0" anchor="t">
+            <a:spAutoFit/>
+          </a:bodyPr>
+          <a:lstStyle/>
+          <a:p>
+            <a:pPr algn="l">
+              <a:lnSpc>
+                <a:spcPct val="115000"/>
+              </a:lnSpc>
+            </a:pPr>
+            <a:r>
+              <a:rPr sz="1250" b="1">
+                <a:solidFill>
+                  <a:srgbClr val="00C49A"/>
+                </a:solidFill>
+                <a:latin typeface="Arial"/>
+              </a:rPr>
+              <a:t>TESTING · 換輸入源</a:t>
+            </a:r>
+          </a:p>
+        </p:txBody>
+      </p:sp>
+      <p:sp>
+        <p:nvSpPr>
+          <p:cNvPr id="3" name="TextBox 2"/>
+          <p:cNvSpPr txBox="1"/>
+          <p:nvPr/>
+        </p:nvSpPr>
+        <p:spPr>
+          <a:xfrm>
+            <a:off x="667512" y="585216"/>
+            <a:ext cx="10789920" cy="566928"/>
+          </a:xfrm>
+          <a:prstGeom prst="rect">
+            <a:avLst/>
+          </a:prstGeom>
+          <a:noFill/>
+        </p:spPr>
+        <p:txBody>
+          <a:bodyPr wrap="square" lIns="0" rIns="0" tIns="0" bIns="0" anchor="t">
+            <a:spAutoFit/>
+          </a:bodyPr>
+          <a:lstStyle/>
+          <a:p>
+            <a:pPr algn="l">
+              <a:lnSpc>
+                <a:spcPct val="115000"/>
+              </a:lnSpc>
+            </a:pPr>
+            <a:r>
+              <a:rPr sz="2700" b="1">
+                <a:solidFill>
+                  <a:srgbClr val="1A1A2E"/>
+                </a:solidFill>
+                <a:latin typeface="Microsoft JhengHei"/>
+              </a:rPr>
+              <a:t>測了 11 輪還有破口？因為造句的人一直是同一個</a:t>
+            </a:r>
+          </a:p>
+        </p:txBody>
+      </p:sp>
+      <p:sp>
+        <p:nvSpPr>
+          <p:cNvPr id="4" name="TextBox 3"/>
+          <p:cNvSpPr txBox="1"/>
+          <p:nvPr/>
+        </p:nvSpPr>
+        <p:spPr>
+          <a:xfrm>
+            <a:off x="667512" y="1234440"/>
+            <a:ext cx="10789920" cy="365760"/>
+          </a:xfrm>
+          <a:prstGeom prst="rect">
+            <a:avLst/>
+          </a:prstGeom>
+          <a:noFill/>
+        </p:spPr>
+        <p:txBody>
+          <a:bodyPr wrap="square" lIns="0" rIns="0" tIns="0" bIns="0" anchor="t">
+            <a:spAutoFit/>
+          </a:bodyPr>
+          <a:lstStyle/>
+          <a:p>
+            <a:pPr algn="l">
+              <a:lnSpc>
+                <a:spcPct val="115000"/>
+              </a:lnSpc>
+            </a:pPr>
+            <a:r>
+              <a:rPr sz="1300" b="0">
+                <a:solidFill>
+                  <a:srgbClr val="555555"/>
+                </a:solidFill>
+                <a:latin typeface="Microsoft JhengHei"/>
+              </a:rPr>
+              <a:t>守衛 892 句全綠、劇情批 5 輪、渲染批 5 輪——但那些句子都是同一個作者打字造的，盲點會系統性重複。</a:t>
+            </a:r>
+          </a:p>
+        </p:txBody>
+      </p:sp>
+      <p:sp>
+        <p:nvSpPr>
+          <p:cNvPr id="5" name="Rounded Rectangle 4"/>
           <p:cNvSpPr/>
           <p:nvPr/>
         </p:nvSpPr>
         <p:spPr>
           <a:xfrm>
-            <a:off x="0" y="0"/>
-            <a:ext cx="12188952" cy="6858000"/>
-          </a:xfrm>
-          <a:prstGeom prst="rect">
-            <a:avLst/>
+            <a:off x="667512" y="1755648"/>
+            <a:ext cx="5321808" cy="1207008"/>
+          </a:xfrm>
+          <a:prstGeom prst="roundRect">
+            <a:avLst>
+              <a:gd name="adj" fmla="val 8000"/>
+            </a:avLst>
+          </a:prstGeom>
+          <a:solidFill>
+            <a:srgbClr val="F4F6F8"/>
+          </a:solidFill>
+          <a:ln>
+            <a:noFill/>
+          </a:ln>
+          <a:effectLst/>
+        </p:spPr>
+        <p:style>
+          <a:lnRef idx="1">
+            <a:schemeClr val="accent1"/>
+          </a:lnRef>
+          <a:fillRef idx="3">
+            <a:schemeClr val="accent1"/>
+          </a:fillRef>
+          <a:effectRef idx="2">
+            <a:schemeClr val="accent1"/>
+          </a:effectRef>
+          <a:fontRef idx="minor">
+            <a:schemeClr val="lt1"/>
+          </a:fontRef>
+        </p:style>
+        <p:txBody>
+          <a:bodyPr rtlCol="0" anchor="ctr"/>
+          <a:lstStyle/>
+          <a:p>
+            <a:pPr algn="ctr"/>
+          </a:p>
+        </p:txBody>
+      </p:sp>
+      <p:sp>
+        <p:nvSpPr>
+          <p:cNvPr id="6" name="TextBox 5"/>
+          <p:cNvSpPr txBox="1"/>
+          <p:nvPr/>
+        </p:nvSpPr>
+        <p:spPr>
+          <a:xfrm>
+            <a:off x="923544" y="1865376"/>
+            <a:ext cx="4846320" cy="310896"/>
+          </a:xfrm>
+          <a:prstGeom prst="rect">
+            <a:avLst/>
+          </a:prstGeom>
+          <a:noFill/>
+        </p:spPr>
+        <p:txBody>
+          <a:bodyPr wrap="square" lIns="0" rIns="0" tIns="0" bIns="0" anchor="t">
+            <a:spAutoFit/>
+          </a:bodyPr>
+          <a:lstStyle/>
+          <a:p>
+            <a:pPr algn="l">
+              <a:lnSpc>
+                <a:spcPct val="115000"/>
+              </a:lnSpc>
+            </a:pPr>
+            <a:r>
+              <a:rPr sz="1350" b="1">
+                <a:solidFill>
+                  <a:srgbClr val="008E76"/>
+                </a:solidFill>
+                <a:latin typeface="Microsoft JhengHei"/>
+              </a:rPr>
+              <a:t>① TTS 唸 → whisper 聽</a:t>
+            </a:r>
+          </a:p>
+        </p:txBody>
+      </p:sp>
+      <p:sp>
+        <p:nvSpPr>
+          <p:cNvPr id="7" name="TextBox 6"/>
+          <p:cNvSpPr txBox="1"/>
+          <p:nvPr/>
+        </p:nvSpPr>
+        <p:spPr>
+          <a:xfrm>
+            <a:off x="923544" y="2176272"/>
+            <a:ext cx="4846320" cy="274320"/>
+          </a:xfrm>
+          <a:prstGeom prst="rect">
+            <a:avLst/>
+          </a:prstGeom>
+          <a:noFill/>
+        </p:spPr>
+        <p:txBody>
+          <a:bodyPr wrap="square" lIns="0" rIns="0" tIns="0" bIns="0" anchor="t">
+            <a:spAutoFit/>
+          </a:bodyPr>
+          <a:lstStyle/>
+          <a:p>
+            <a:pPr algn="l">
+              <a:lnSpc>
+                <a:spcPct val="115000"/>
+              </a:lnSpc>
+            </a:pPr>
+            <a:r>
+              <a:rPr sz="1100" b="0">
+                <a:solidFill>
+                  <a:srgbClr val="777777"/>
+                </a:solidFill>
+                <a:latin typeface="Microsoft JhengHei"/>
+              </a:rPr>
+              <a:t>100 句 × 3 噪音層 = 300 次辨識</a:t>
+            </a:r>
+          </a:p>
+        </p:txBody>
+      </p:sp>
+      <p:sp>
+        <p:nvSpPr>
+          <p:cNvPr id="8" name="TextBox 7"/>
+          <p:cNvSpPr txBox="1"/>
+          <p:nvPr/>
+        </p:nvSpPr>
+        <p:spPr>
+          <a:xfrm>
+            <a:off x="923544" y="2468880"/>
+            <a:ext cx="4846320" cy="402336"/>
+          </a:xfrm>
+          <a:prstGeom prst="rect">
+            <a:avLst/>
+          </a:prstGeom>
+          <a:noFill/>
+        </p:spPr>
+        <p:txBody>
+          <a:bodyPr wrap="square" lIns="0" rIns="0" tIns="0" bIns="0" anchor="t">
+            <a:spAutoFit/>
+          </a:bodyPr>
+          <a:lstStyle/>
+          <a:p>
+            <a:pPr algn="l">
+              <a:lnSpc>
+                <a:spcPct val="120000"/>
+              </a:lnSpc>
+            </a:pPr>
+            <a:r>
+              <a:rPr sz="1150" b="0">
+                <a:solidFill>
+                  <a:srgbClr val="444444"/>
+                </a:solidFill>
+                <a:latin typeface="Microsoft JhengHei"/>
+              </a:rPr>
+              <a:t>產物型態跟打字完全不同：撇號縮寫、黏字、聽錯詞</a:t>
+            </a:r>
+          </a:p>
+        </p:txBody>
+      </p:sp>
+      <p:sp>
+        <p:nvSpPr>
+          <p:cNvPr id="9" name="Rounded Rectangle 8"/>
+          <p:cNvSpPr/>
+          <p:nvPr/>
+        </p:nvSpPr>
+        <p:spPr>
+          <a:xfrm>
+            <a:off x="6199632" y="1755648"/>
+            <a:ext cx="5321808" cy="1207008"/>
+          </a:xfrm>
+          <a:prstGeom prst="roundRect">
+            <a:avLst>
+              <a:gd name="adj" fmla="val 8000"/>
+            </a:avLst>
+          </a:prstGeom>
+          <a:solidFill>
+            <a:srgbClr val="F4F6F8"/>
+          </a:solidFill>
+          <a:ln>
+            <a:noFill/>
+          </a:ln>
+          <a:effectLst/>
+        </p:spPr>
+        <p:style>
+          <a:lnRef idx="1">
+            <a:schemeClr val="accent1"/>
+          </a:lnRef>
+          <a:fillRef idx="3">
+            <a:schemeClr val="accent1"/>
+          </a:fillRef>
+          <a:effectRef idx="2">
+            <a:schemeClr val="accent1"/>
+          </a:effectRef>
+          <a:fontRef idx="minor">
+            <a:schemeClr val="lt1"/>
+          </a:fontRef>
+        </p:style>
+        <p:txBody>
+          <a:bodyPr rtlCol="0" anchor="ctr"/>
+          <a:lstStyle/>
+          <a:p>
+            <a:pPr algn="ctr"/>
+          </a:p>
+        </p:txBody>
+      </p:sp>
+      <p:sp>
+        <p:nvSpPr>
+          <p:cNvPr id="10" name="TextBox 9"/>
+          <p:cNvSpPr txBox="1"/>
+          <p:nvPr/>
+        </p:nvSpPr>
+        <p:spPr>
+          <a:xfrm>
+            <a:off x="6455664" y="1865376"/>
+            <a:ext cx="4846320" cy="310896"/>
+          </a:xfrm>
+          <a:prstGeom prst="rect">
+            <a:avLst/>
+          </a:prstGeom>
+          <a:noFill/>
+        </p:spPr>
+        <p:txBody>
+          <a:bodyPr wrap="square" lIns="0" rIns="0" tIns="0" bIns="0" anchor="t">
+            <a:spAutoFit/>
+          </a:bodyPr>
+          <a:lstStyle/>
+          <a:p>
+            <a:pPr algn="l">
+              <a:lnSpc>
+                <a:spcPct val="115000"/>
+              </a:lnSpc>
+            </a:pPr>
+            <a:r>
+              <a:rPr sz="1350" b="1">
+                <a:solidFill>
+                  <a:srgbClr val="222A45"/>
+                </a:solidFill>
+                <a:latin typeface="Microsoft JhengHei"/>
+              </a:rPr>
+              <a:t>② 刻意寫「我不會寫的句型」</a:t>
+            </a:r>
+          </a:p>
+        </p:txBody>
+      </p:sp>
+      <p:sp>
+        <p:nvSpPr>
+          <p:cNvPr id="11" name="TextBox 10"/>
+          <p:cNvSpPr txBox="1"/>
+          <p:nvPr/>
+        </p:nvSpPr>
+        <p:spPr>
+          <a:xfrm>
+            <a:off x="6455664" y="2176272"/>
+            <a:ext cx="4846320" cy="274320"/>
+          </a:xfrm>
+          <a:prstGeom prst="rect">
+            <a:avLst/>
+          </a:prstGeom>
+          <a:noFill/>
+        </p:spPr>
+        <p:txBody>
+          <a:bodyPr wrap="square" lIns="0" rIns="0" tIns="0" bIns="0" anchor="t">
+            <a:spAutoFit/>
+          </a:bodyPr>
+          <a:lstStyle/>
+          <a:p>
+            <a:pPr algn="l">
+              <a:lnSpc>
+                <a:spcPct val="115000"/>
+              </a:lnSpc>
+            </a:pPr>
+            <a:r>
+              <a:rPr sz="1100" b="0">
+                <a:solidFill>
+                  <a:srgbClr val="777777"/>
+                </a:solidFill>
+                <a:latin typeface="Microsoft JhengHei"/>
+              </a:rPr>
+              <a:t>47 句探針（禮貌用語 / 口語省略 / 填充詞）</a:t>
+            </a:r>
+          </a:p>
+        </p:txBody>
+      </p:sp>
+      <p:sp>
+        <p:nvSpPr>
+          <p:cNvPr id="12" name="TextBox 11"/>
+          <p:cNvSpPr txBox="1"/>
+          <p:nvPr/>
+        </p:nvSpPr>
+        <p:spPr>
+          <a:xfrm>
+            <a:off x="6455664" y="2468880"/>
+            <a:ext cx="4846320" cy="402336"/>
+          </a:xfrm>
+          <a:prstGeom prst="rect">
+            <a:avLst/>
+          </a:prstGeom>
+          <a:noFill/>
+        </p:spPr>
+        <p:txBody>
+          <a:bodyPr wrap="square" lIns="0" rIns="0" tIns="0" bIns="0" anchor="t">
+            <a:spAutoFit/>
+          </a:bodyPr>
+          <a:lstStyle/>
+          <a:p>
+            <a:pPr algn="l">
+              <a:lnSpc>
+                <a:spcPct val="120000"/>
+              </a:lnSpc>
+            </a:pPr>
+            <a:r>
+              <a:rPr sz="1150" b="0">
+                <a:solidFill>
+                  <a:srgbClr val="444444"/>
+                </a:solidFill>
+                <a:latin typeface="Microsoft JhengHei"/>
+              </a:rPr>
+              <a:t>換作者視角：展場訪客會客氣地問，不是打命令式</a:t>
+            </a:r>
+          </a:p>
+        </p:txBody>
+      </p:sp>
+      <p:sp>
+        <p:nvSpPr>
+          <p:cNvPr id="13" name="TextBox 12"/>
+          <p:cNvSpPr txBox="1"/>
+          <p:nvPr/>
+        </p:nvSpPr>
+        <p:spPr>
+          <a:xfrm>
+            <a:off x="667512" y="3127248"/>
+            <a:ext cx="10789920" cy="292608"/>
+          </a:xfrm>
+          <a:prstGeom prst="rect">
+            <a:avLst/>
+          </a:prstGeom>
+          <a:noFill/>
+        </p:spPr>
+        <p:txBody>
+          <a:bodyPr wrap="square" lIns="0" rIns="0" tIns="0" bIns="0" anchor="t">
+            <a:spAutoFit/>
+          </a:bodyPr>
+          <a:lstStyle/>
+          <a:p>
+            <a:pPr algn="l">
+              <a:lnSpc>
+                <a:spcPct val="115000"/>
+              </a:lnSpc>
+            </a:pPr>
+            <a:r>
+              <a:rPr sz="1300" b="1">
+                <a:solidFill>
+                  <a:srgbClr val="008E76"/>
+                </a:solidFill>
+                <a:latin typeface="Microsoft JhengHei"/>
+              </a:rPr>
+              <a:t>TTS 基準批結果：噪音幾乎不影響（真實賣場環境音混入）</a:t>
+            </a:r>
+          </a:p>
+        </p:txBody>
+      </p:sp>
+      <p:sp>
+        <p:nvSpPr>
+          <p:cNvPr id="14" name="Rounded Rectangle 13"/>
+          <p:cNvSpPr/>
+          <p:nvPr/>
+        </p:nvSpPr>
+        <p:spPr>
+          <a:xfrm>
+            <a:off x="667512" y="3474720"/>
+            <a:ext cx="3456432" cy="841248"/>
+          </a:xfrm>
+          <a:prstGeom prst="roundRect">
+            <a:avLst>
+              <a:gd name="adj" fmla="val 8000"/>
+            </a:avLst>
+          </a:prstGeom>
+          <a:solidFill>
+            <a:srgbClr val="E4F7F2"/>
+          </a:solidFill>
+          <a:ln w="13970">
+            <a:solidFill>
+              <a:srgbClr val="00C49A"/>
+            </a:solidFill>
+          </a:ln>
+          <a:effectLst/>
+        </p:spPr>
+        <p:style>
+          <a:lnRef idx="1">
+            <a:schemeClr val="accent1"/>
+          </a:lnRef>
+          <a:fillRef idx="3">
+            <a:schemeClr val="accent1"/>
+          </a:fillRef>
+          <a:effectRef idx="2">
+            <a:schemeClr val="accent1"/>
+          </a:effectRef>
+          <a:fontRef idx="minor">
+            <a:schemeClr val="lt1"/>
+          </a:fontRef>
+        </p:style>
+        <p:txBody>
+          <a:bodyPr rtlCol="0" anchor="ctr"/>
+          <a:lstStyle/>
+          <a:p>
+            <a:pPr algn="ctr"/>
+          </a:p>
+        </p:txBody>
+      </p:sp>
+      <p:sp>
+        <p:nvSpPr>
+          <p:cNvPr id="15" name="TextBox 14"/>
+          <p:cNvSpPr txBox="1"/>
+          <p:nvPr/>
+        </p:nvSpPr>
+        <p:spPr>
+          <a:xfrm>
+            <a:off x="850392" y="3602736"/>
+            <a:ext cx="1371600" cy="457200"/>
+          </a:xfrm>
+          <a:prstGeom prst="rect">
+            <a:avLst/>
+          </a:prstGeom>
+          <a:noFill/>
+        </p:spPr>
+        <p:txBody>
+          <a:bodyPr wrap="square" lIns="0" rIns="0" tIns="0" bIns="0" anchor="t">
+            <a:spAutoFit/>
+          </a:bodyPr>
+          <a:lstStyle/>
+          <a:p>
+            <a:pPr algn="l">
+              <a:lnSpc>
+                <a:spcPct val="115000"/>
+              </a:lnSpc>
+            </a:pPr>
+            <a:r>
+              <a:rPr sz="2400" b="1">
+                <a:solidFill>
+                  <a:srgbClr val="008E76"/>
+                </a:solidFill>
+                <a:latin typeface="Arial"/>
+              </a:rPr>
+              <a:t>92%</a:t>
+            </a:r>
+          </a:p>
+        </p:txBody>
+      </p:sp>
+      <p:sp>
+        <p:nvSpPr>
+          <p:cNvPr id="16" name="TextBox 15"/>
+          <p:cNvSpPr txBox="1"/>
+          <p:nvPr/>
+        </p:nvSpPr>
+        <p:spPr>
+          <a:xfrm>
+            <a:off x="2267712" y="3639312"/>
+            <a:ext cx="1737360" cy="384048"/>
+          </a:xfrm>
+          <a:prstGeom prst="rect">
+            <a:avLst/>
+          </a:prstGeom>
+          <a:noFill/>
+        </p:spPr>
+        <p:txBody>
+          <a:bodyPr wrap="square" lIns="0" rIns="0" tIns="0" bIns="0" anchor="ctr">
+            <a:spAutoFit/>
+          </a:bodyPr>
+          <a:lstStyle/>
+          <a:p>
+            <a:pPr algn="l">
+              <a:lnSpc>
+                <a:spcPct val="115000"/>
+              </a:lnSpc>
+            </a:pPr>
+            <a:r>
+              <a:rPr sz="1150" b="0">
+                <a:solidFill>
+                  <a:srgbClr val="444444"/>
+                </a:solidFill>
+                <a:latin typeface="Microsoft JhengHei"/>
+              </a:rPr>
+              <a:t>乾淨</a:t>
+            </a:r>
+          </a:p>
+        </p:txBody>
+      </p:sp>
+      <p:sp>
+        <p:nvSpPr>
+          <p:cNvPr id="17" name="Rounded Rectangle 16"/>
+          <p:cNvSpPr/>
+          <p:nvPr/>
+        </p:nvSpPr>
+        <p:spPr>
+          <a:xfrm>
+            <a:off x="4315968" y="3474720"/>
+            <a:ext cx="3456432" cy="841248"/>
+          </a:xfrm>
+          <a:prstGeom prst="roundRect">
+            <a:avLst>
+              <a:gd name="adj" fmla="val 8000"/>
+            </a:avLst>
+          </a:prstGeom>
+          <a:solidFill>
+            <a:srgbClr val="E4F7F2"/>
+          </a:solidFill>
+          <a:ln w="13970">
+            <a:solidFill>
+              <a:srgbClr val="00C49A"/>
+            </a:solidFill>
+          </a:ln>
+          <a:effectLst/>
+        </p:spPr>
+        <p:style>
+          <a:lnRef idx="1">
+            <a:schemeClr val="accent1"/>
+          </a:lnRef>
+          <a:fillRef idx="3">
+            <a:schemeClr val="accent1"/>
+          </a:fillRef>
+          <a:effectRef idx="2">
+            <a:schemeClr val="accent1"/>
+          </a:effectRef>
+          <a:fontRef idx="minor">
+            <a:schemeClr val="lt1"/>
+          </a:fontRef>
+        </p:style>
+        <p:txBody>
+          <a:bodyPr rtlCol="0" anchor="ctr"/>
+          <a:lstStyle/>
+          <a:p>
+            <a:pPr algn="ctr"/>
+          </a:p>
+        </p:txBody>
+      </p:sp>
+      <p:sp>
+        <p:nvSpPr>
+          <p:cNvPr id="18" name="TextBox 17"/>
+          <p:cNvSpPr txBox="1"/>
+          <p:nvPr/>
+        </p:nvSpPr>
+        <p:spPr>
+          <a:xfrm>
+            <a:off x="4498848" y="3602736"/>
+            <a:ext cx="1371600" cy="457200"/>
+          </a:xfrm>
+          <a:prstGeom prst="rect">
+            <a:avLst/>
+          </a:prstGeom>
+          <a:noFill/>
+        </p:spPr>
+        <p:txBody>
+          <a:bodyPr wrap="square" lIns="0" rIns="0" tIns="0" bIns="0" anchor="t">
+            <a:spAutoFit/>
+          </a:bodyPr>
+          <a:lstStyle/>
+          <a:p>
+            <a:pPr algn="l">
+              <a:lnSpc>
+                <a:spcPct val="115000"/>
+              </a:lnSpc>
+            </a:pPr>
+            <a:r>
+              <a:rPr sz="2400" b="1">
+                <a:solidFill>
+                  <a:srgbClr val="008E76"/>
+                </a:solidFill>
+                <a:latin typeface="Arial"/>
+              </a:rPr>
+              <a:t>92%</a:t>
+            </a:r>
+          </a:p>
+        </p:txBody>
+      </p:sp>
+      <p:sp>
+        <p:nvSpPr>
+          <p:cNvPr id="19" name="TextBox 18"/>
+          <p:cNvSpPr txBox="1"/>
+          <p:nvPr/>
+        </p:nvSpPr>
+        <p:spPr>
+          <a:xfrm>
+            <a:off x="5916168" y="3639312"/>
+            <a:ext cx="1737360" cy="384048"/>
+          </a:xfrm>
+          <a:prstGeom prst="rect">
+            <a:avLst/>
+          </a:prstGeom>
+          <a:noFill/>
+        </p:spPr>
+        <p:txBody>
+          <a:bodyPr wrap="square" lIns="0" rIns="0" tIns="0" bIns="0" anchor="ctr">
+            <a:spAutoFit/>
+          </a:bodyPr>
+          <a:lstStyle/>
+          <a:p>
+            <a:pPr algn="l">
+              <a:lnSpc>
+                <a:spcPct val="115000"/>
+              </a:lnSpc>
+            </a:pPr>
+            <a:r>
+              <a:rPr sz="1150" b="0">
+                <a:solidFill>
+                  <a:srgbClr val="444444"/>
+                </a:solidFill>
+                <a:latin typeface="Microsoft JhengHei"/>
+              </a:rPr>
+              <a:t>一般展場 −18dB</a:t>
+            </a:r>
+          </a:p>
+        </p:txBody>
+      </p:sp>
+      <p:sp>
+        <p:nvSpPr>
+          <p:cNvPr id="20" name="Rounded Rectangle 19"/>
+          <p:cNvSpPr/>
+          <p:nvPr/>
+        </p:nvSpPr>
+        <p:spPr>
+          <a:xfrm>
+            <a:off x="7964424" y="3474720"/>
+            <a:ext cx="3456432" cy="841248"/>
+          </a:xfrm>
+          <a:prstGeom prst="roundRect">
+            <a:avLst>
+              <a:gd name="adj" fmla="val 8000"/>
+            </a:avLst>
+          </a:prstGeom>
+          <a:solidFill>
+            <a:srgbClr val="E4F7F2"/>
+          </a:solidFill>
+          <a:ln w="13970">
+            <a:solidFill>
+              <a:srgbClr val="00C49A"/>
+            </a:solidFill>
+          </a:ln>
+          <a:effectLst/>
+        </p:spPr>
+        <p:style>
+          <a:lnRef idx="1">
+            <a:schemeClr val="accent1"/>
+          </a:lnRef>
+          <a:fillRef idx="3">
+            <a:schemeClr val="accent1"/>
+          </a:fillRef>
+          <a:effectRef idx="2">
+            <a:schemeClr val="accent1"/>
+          </a:effectRef>
+          <a:fontRef idx="minor">
+            <a:schemeClr val="lt1"/>
+          </a:fontRef>
+        </p:style>
+        <p:txBody>
+          <a:bodyPr rtlCol="0" anchor="ctr"/>
+          <a:lstStyle/>
+          <a:p>
+            <a:pPr algn="ctr"/>
+          </a:p>
+        </p:txBody>
+      </p:sp>
+      <p:sp>
+        <p:nvSpPr>
+          <p:cNvPr id="21" name="TextBox 20"/>
+          <p:cNvSpPr txBox="1"/>
+          <p:nvPr/>
+        </p:nvSpPr>
+        <p:spPr>
+          <a:xfrm>
+            <a:off x="8147304" y="3602736"/>
+            <a:ext cx="1371600" cy="457200"/>
+          </a:xfrm>
+          <a:prstGeom prst="rect">
+            <a:avLst/>
+          </a:prstGeom>
+          <a:noFill/>
+        </p:spPr>
+        <p:txBody>
+          <a:bodyPr wrap="square" lIns="0" rIns="0" tIns="0" bIns="0" anchor="t">
+            <a:spAutoFit/>
+          </a:bodyPr>
+          <a:lstStyle/>
+          <a:p>
+            <a:pPr algn="l">
+              <a:lnSpc>
+                <a:spcPct val="115000"/>
+              </a:lnSpc>
+            </a:pPr>
+            <a:r>
+              <a:rPr sz="2400" b="1">
+                <a:solidFill>
+                  <a:srgbClr val="008E76"/>
+                </a:solidFill>
+                <a:latin typeface="Arial"/>
+              </a:rPr>
+              <a:t>91%</a:t>
+            </a:r>
+          </a:p>
+        </p:txBody>
+      </p:sp>
+      <p:sp>
+        <p:nvSpPr>
+          <p:cNvPr id="22" name="TextBox 21"/>
+          <p:cNvSpPr txBox="1"/>
+          <p:nvPr/>
+        </p:nvSpPr>
+        <p:spPr>
+          <a:xfrm>
+            <a:off x="9564624" y="3639312"/>
+            <a:ext cx="1737360" cy="384048"/>
+          </a:xfrm>
+          <a:prstGeom prst="rect">
+            <a:avLst/>
+          </a:prstGeom>
+          <a:noFill/>
+        </p:spPr>
+        <p:txBody>
+          <a:bodyPr wrap="square" lIns="0" rIns="0" tIns="0" bIns="0" anchor="ctr">
+            <a:spAutoFit/>
+          </a:bodyPr>
+          <a:lstStyle/>
+          <a:p>
+            <a:pPr algn="l">
+              <a:lnSpc>
+                <a:spcPct val="115000"/>
+              </a:lnSpc>
+            </a:pPr>
+            <a:r>
+              <a:rPr sz="1150" b="0">
+                <a:solidFill>
+                  <a:srgbClr val="444444"/>
+                </a:solidFill>
+                <a:latin typeface="Microsoft JhengHei"/>
+              </a:rPr>
+              <a:t>尖峰吵雜 −8dB</a:t>
+            </a:r>
+          </a:p>
+        </p:txBody>
+      </p:sp>
+      <p:sp>
+        <p:nvSpPr>
+          <p:cNvPr id="23" name="TextBox 22"/>
+          <p:cNvSpPr txBox="1"/>
+          <p:nvPr/>
+        </p:nvSpPr>
+        <p:spPr>
+          <a:xfrm>
+            <a:off x="667512" y="4498848"/>
+            <a:ext cx="10789920" cy="292608"/>
+          </a:xfrm>
+          <a:prstGeom prst="rect">
+            <a:avLst/>
+          </a:prstGeom>
+          <a:noFill/>
+        </p:spPr>
+        <p:txBody>
+          <a:bodyPr wrap="square" lIns="0" rIns="0" tIns="0" bIns="0" anchor="t">
+            <a:spAutoFit/>
+          </a:bodyPr>
+          <a:lstStyle/>
+          <a:p>
+            <a:pPr algn="l">
+              <a:lnSpc>
+                <a:spcPct val="115000"/>
+              </a:lnSpc>
+            </a:pPr>
+            <a:r>
+              <a:rPr sz="1300" b="1">
+                <a:solidFill>
+                  <a:srgbClr val="008E76"/>
+                </a:solidFill>
+                <a:latin typeface="Microsoft JhengHei"/>
+              </a:rPr>
+              <a:t>抓到的破口——大多數打字訪客也會遇到，只是先前造句時沒想到</a:t>
+            </a:r>
+          </a:p>
+        </p:txBody>
+      </p:sp>
+      <p:sp>
+        <p:nvSpPr>
+          <p:cNvPr id="24" name="Rectangle 23"/>
+          <p:cNvSpPr/>
+          <p:nvPr/>
+        </p:nvSpPr>
+        <p:spPr>
+          <a:xfrm>
+            <a:off x="667512" y="4846320"/>
+            <a:ext cx="54864" cy="347472"/>
+          </a:xfrm>
+          <a:prstGeom prst="rect">
+            <a:avLst/>
+          </a:prstGeom>
+          <a:solidFill>
+            <a:srgbClr val="E85D5D"/>
+          </a:solidFill>
+          <a:ln>
+            <a:noFill/>
+          </a:ln>
+          <a:effectLst/>
+        </p:spPr>
+        <p:style>
+          <a:lnRef idx="1">
+            <a:schemeClr val="accent1"/>
+          </a:lnRef>
+          <a:fillRef idx="3">
+            <a:schemeClr val="accent1"/>
+          </a:fillRef>
+          <a:effectRef idx="2">
+            <a:schemeClr val="accent1"/>
+          </a:effectRef>
+          <a:fontRef idx="minor">
+            <a:schemeClr val="lt1"/>
+          </a:fontRef>
+        </p:style>
+        <p:txBody>
+          <a:bodyPr rtlCol="0" anchor="ctr"/>
+          <a:lstStyle/>
+          <a:p>
+            <a:pPr algn="ctr"/>
+          </a:p>
+        </p:txBody>
+      </p:sp>
+      <p:sp>
+        <p:nvSpPr>
+          <p:cNvPr id="25" name="TextBox 24"/>
+          <p:cNvSpPr txBox="1"/>
+          <p:nvPr/>
+        </p:nvSpPr>
+        <p:spPr>
+          <a:xfrm>
+            <a:off x="868680" y="4864608"/>
+            <a:ext cx="1371600" cy="292608"/>
+          </a:xfrm>
+          <a:prstGeom prst="rect">
+            <a:avLst/>
+          </a:prstGeom>
+          <a:noFill/>
+        </p:spPr>
+        <p:txBody>
+          <a:bodyPr wrap="square" lIns="0" rIns="0" tIns="0" bIns="0" anchor="t">
+            <a:spAutoFit/>
+          </a:bodyPr>
+          <a:lstStyle/>
+          <a:p>
+            <a:pPr algn="l">
+              <a:lnSpc>
+                <a:spcPct val="115000"/>
+              </a:lnSpc>
+            </a:pPr>
+            <a:r>
+              <a:rPr sz="1150" b="1">
+                <a:solidFill>
+                  <a:srgbClr val="E85D5D"/>
+                </a:solidFill>
+                <a:latin typeface="Microsoft JhengHei"/>
+              </a:rPr>
+              <a:t>撇號縮寫</a:t>
+            </a:r>
+          </a:p>
+        </p:txBody>
+      </p:sp>
+      <p:sp>
+        <p:nvSpPr>
+          <p:cNvPr id="26" name="TextBox 25"/>
+          <p:cNvSpPr txBox="1"/>
+          <p:nvPr/>
+        </p:nvSpPr>
+        <p:spPr>
+          <a:xfrm>
+            <a:off x="2359152" y="4864608"/>
+            <a:ext cx="3383280" cy="292608"/>
+          </a:xfrm>
+          <a:prstGeom prst="rect">
+            <a:avLst/>
+          </a:prstGeom>
+          <a:noFill/>
+        </p:spPr>
+        <p:txBody>
+          <a:bodyPr wrap="square" lIns="0" rIns="0" tIns="0" bIns="0" anchor="t">
+            <a:spAutoFit/>
+          </a:bodyPr>
+          <a:lstStyle/>
+          <a:p>
+            <a:pPr algn="l">
+              <a:lnSpc>
+                <a:spcPct val="115000"/>
+              </a:lnSpc>
+            </a:pPr>
+            <a:r>
+              <a:rPr sz="1050" b="0">
+                <a:solidFill>
+                  <a:srgbClr val="444444"/>
+                </a:solidFill>
+                <a:latin typeface="Arial"/>
+              </a:rPr>
+              <a:t>what's in central warehouse…</a:t>
+            </a:r>
+          </a:p>
+        </p:txBody>
+      </p:sp>
+      <p:sp>
+        <p:nvSpPr>
+          <p:cNvPr id="27" name="TextBox 26"/>
+          <p:cNvSpPr txBox="1"/>
+          <p:nvPr/>
+        </p:nvSpPr>
+        <p:spPr>
+          <a:xfrm>
+            <a:off x="5879592" y="4864608"/>
+            <a:ext cx="5577840" cy="292608"/>
+          </a:xfrm>
+          <a:prstGeom prst="rect">
+            <a:avLst/>
+          </a:prstGeom>
+          <a:noFill/>
+        </p:spPr>
+        <p:txBody>
+          <a:bodyPr wrap="square" lIns="0" rIns="0" tIns="0" bIns="0" anchor="t">
+            <a:spAutoFit/>
+          </a:bodyPr>
+          <a:lstStyle/>
+          <a:p>
+            <a:pPr algn="l">
+              <a:lnSpc>
+                <a:spcPct val="115000"/>
+              </a:lnSpc>
+            </a:pPr>
+            <a:r>
+              <a:rPr sz="1100" b="0">
+                <a:solidFill>
+                  <a:srgbClr val="555555"/>
+                </a:solidFill>
+                <a:latin typeface="Microsoft JhengHei"/>
+              </a:rPr>
+              <a:t>ASR 聽對、LLM 判對，卻被防幻覺閘門當「陌生商品」清掉 → 全店概覽</a:t>
+            </a:r>
+          </a:p>
+        </p:txBody>
+      </p:sp>
+      <p:sp>
+        <p:nvSpPr>
+          <p:cNvPr id="28" name="Rectangle 27"/>
+          <p:cNvSpPr/>
+          <p:nvPr/>
+        </p:nvSpPr>
+        <p:spPr>
+          <a:xfrm>
+            <a:off x="667512" y="5248656"/>
+            <a:ext cx="54864" cy="347472"/>
+          </a:xfrm>
+          <a:prstGeom prst="rect">
+            <a:avLst/>
+          </a:prstGeom>
+          <a:solidFill>
+            <a:srgbClr val="E85D5D"/>
+          </a:solidFill>
+          <a:ln>
+            <a:noFill/>
+          </a:ln>
+          <a:effectLst/>
+        </p:spPr>
+        <p:style>
+          <a:lnRef idx="1">
+            <a:schemeClr val="accent1"/>
+          </a:lnRef>
+          <a:fillRef idx="3">
+            <a:schemeClr val="accent1"/>
+          </a:fillRef>
+          <a:effectRef idx="2">
+            <a:schemeClr val="accent1"/>
+          </a:effectRef>
+          <a:fontRef idx="minor">
+            <a:schemeClr val="lt1"/>
+          </a:fontRef>
+        </p:style>
+        <p:txBody>
+          <a:bodyPr rtlCol="0" anchor="ctr"/>
+          <a:lstStyle/>
+          <a:p>
+            <a:pPr algn="ctr"/>
+          </a:p>
+        </p:txBody>
+      </p:sp>
+      <p:sp>
+        <p:nvSpPr>
+          <p:cNvPr id="29" name="TextBox 28"/>
+          <p:cNvSpPr txBox="1"/>
+          <p:nvPr/>
+        </p:nvSpPr>
+        <p:spPr>
+          <a:xfrm>
+            <a:off x="868680" y="5266944"/>
+            <a:ext cx="1371600" cy="292608"/>
+          </a:xfrm>
+          <a:prstGeom prst="rect">
+            <a:avLst/>
+          </a:prstGeom>
+          <a:noFill/>
+        </p:spPr>
+        <p:txBody>
+          <a:bodyPr wrap="square" lIns="0" rIns="0" tIns="0" bIns="0" anchor="t">
+            <a:spAutoFit/>
+          </a:bodyPr>
+          <a:lstStyle/>
+          <a:p>
+            <a:pPr algn="l">
+              <a:lnSpc>
+                <a:spcPct val="115000"/>
+              </a:lnSpc>
+            </a:pPr>
+            <a:r>
+              <a:rPr sz="1150" b="1">
+                <a:solidFill>
+                  <a:srgbClr val="E85D5D"/>
+                </a:solidFill>
+                <a:latin typeface="Microsoft JhengHei"/>
+              </a:rPr>
+              <a:t>禮貌用語</a:t>
+            </a:r>
+          </a:p>
+        </p:txBody>
+      </p:sp>
+      <p:sp>
+        <p:nvSpPr>
+          <p:cNvPr id="30" name="TextBox 29"/>
+          <p:cNvSpPr txBox="1"/>
+          <p:nvPr/>
+        </p:nvSpPr>
+        <p:spPr>
+          <a:xfrm>
+            <a:off x="2359152" y="5266944"/>
+            <a:ext cx="3383280" cy="292608"/>
+          </a:xfrm>
+          <a:prstGeom prst="rect">
+            <a:avLst/>
+          </a:prstGeom>
+          <a:noFill/>
+        </p:spPr>
+        <p:txBody>
+          <a:bodyPr wrap="square" lIns="0" rIns="0" tIns="0" bIns="0" anchor="t">
+            <a:spAutoFit/>
+          </a:bodyPr>
+          <a:lstStyle/>
+          <a:p>
+            <a:pPr algn="l">
+              <a:lnSpc>
+                <a:spcPct val="115000"/>
+              </a:lnSpc>
+            </a:pPr>
+            <a:r>
+              <a:rPr sz="1050" b="0">
+                <a:solidFill>
+                  <a:srgbClr val="444444"/>
+                </a:solidFill>
+                <a:latin typeface="Arial"/>
+              </a:rPr>
+              <a:t>could you tell me the earphone stock</a:t>
+            </a:r>
+          </a:p>
+        </p:txBody>
+      </p:sp>
+      <p:sp>
+        <p:nvSpPr>
+          <p:cNvPr id="31" name="TextBox 30"/>
+          <p:cNvSpPr txBox="1"/>
+          <p:nvPr/>
+        </p:nvSpPr>
+        <p:spPr>
+          <a:xfrm>
+            <a:off x="5879592" y="5266944"/>
+            <a:ext cx="5577840" cy="292608"/>
+          </a:xfrm>
+          <a:prstGeom prst="rect">
+            <a:avLst/>
+          </a:prstGeom>
+          <a:noFill/>
+        </p:spPr>
+        <p:txBody>
+          <a:bodyPr wrap="square" lIns="0" rIns="0" tIns="0" bIns="0" anchor="t">
+            <a:spAutoFit/>
+          </a:bodyPr>
+          <a:lstStyle/>
+          <a:p>
+            <a:pPr algn="l">
+              <a:lnSpc>
+                <a:spcPct val="115000"/>
+              </a:lnSpc>
+            </a:pPr>
+            <a:r>
+              <a:rPr sz="1100" b="0">
+                <a:solidFill>
+                  <a:srgbClr val="555555"/>
+                </a:solidFill>
+                <a:latin typeface="Microsoft JhengHei"/>
+              </a:rPr>
+              <a:t>回「查無 could 這個商品」——訪客客氣問反而失敗</a:t>
+            </a:r>
+          </a:p>
+        </p:txBody>
+      </p:sp>
+      <p:sp>
+        <p:nvSpPr>
+          <p:cNvPr id="32" name="Rectangle 31"/>
+          <p:cNvSpPr/>
+          <p:nvPr/>
+        </p:nvSpPr>
+        <p:spPr>
+          <a:xfrm>
+            <a:off x="667512" y="5650992"/>
+            <a:ext cx="54864" cy="347472"/>
+          </a:xfrm>
+          <a:prstGeom prst="rect">
+            <a:avLst/>
+          </a:prstGeom>
+          <a:solidFill>
+            <a:srgbClr val="F0A030"/>
+          </a:solidFill>
+          <a:ln>
+            <a:noFill/>
+          </a:ln>
+          <a:effectLst/>
+        </p:spPr>
+        <p:style>
+          <a:lnRef idx="1">
+            <a:schemeClr val="accent1"/>
+          </a:lnRef>
+          <a:fillRef idx="3">
+            <a:schemeClr val="accent1"/>
+          </a:fillRef>
+          <a:effectRef idx="2">
+            <a:schemeClr val="accent1"/>
+          </a:effectRef>
+          <a:fontRef idx="minor">
+            <a:schemeClr val="lt1"/>
+          </a:fontRef>
+        </p:style>
+        <p:txBody>
+          <a:bodyPr rtlCol="0" anchor="ctr"/>
+          <a:lstStyle/>
+          <a:p>
+            <a:pPr algn="ctr"/>
+          </a:p>
+        </p:txBody>
+      </p:sp>
+      <p:sp>
+        <p:nvSpPr>
+          <p:cNvPr id="33" name="TextBox 32"/>
+          <p:cNvSpPr txBox="1"/>
+          <p:nvPr/>
+        </p:nvSpPr>
+        <p:spPr>
+          <a:xfrm>
+            <a:off x="868680" y="5669280"/>
+            <a:ext cx="1371600" cy="292608"/>
+          </a:xfrm>
+          <a:prstGeom prst="rect">
+            <a:avLst/>
+          </a:prstGeom>
+          <a:noFill/>
+        </p:spPr>
+        <p:txBody>
+          <a:bodyPr wrap="square" lIns="0" rIns="0" tIns="0" bIns="0" anchor="t">
+            <a:spAutoFit/>
+          </a:bodyPr>
+          <a:lstStyle/>
+          <a:p>
+            <a:pPr algn="l">
+              <a:lnSpc>
+                <a:spcPct val="115000"/>
+              </a:lnSpc>
+            </a:pPr>
+            <a:r>
+              <a:rPr sz="1150" b="1">
+                <a:solidFill>
+                  <a:srgbClr val="F0A030"/>
+                </a:solidFill>
+                <a:latin typeface="Microsoft JhengHei"/>
+              </a:rPr>
+              <a:t>英文追問</a:t>
+            </a:r>
+          </a:p>
+        </p:txBody>
+      </p:sp>
+      <p:sp>
+        <p:nvSpPr>
+          <p:cNvPr id="34" name="TextBox 33"/>
+          <p:cNvSpPr txBox="1"/>
+          <p:nvPr/>
+        </p:nvSpPr>
+        <p:spPr>
+          <a:xfrm>
+            <a:off x="2359152" y="5669280"/>
+            <a:ext cx="3383280" cy="292608"/>
+          </a:xfrm>
+          <a:prstGeom prst="rect">
+            <a:avLst/>
+          </a:prstGeom>
+          <a:noFill/>
+        </p:spPr>
+        <p:txBody>
+          <a:bodyPr wrap="square" lIns="0" rIns="0" tIns="0" bIns="0" anchor="t">
+            <a:spAutoFit/>
+          </a:bodyPr>
+          <a:lstStyle/>
+          <a:p>
+            <a:pPr algn="l">
+              <a:lnSpc>
+                <a:spcPct val="115000"/>
+              </a:lnSpc>
+            </a:pPr>
+            <a:r>
+              <a:rPr sz="1050" b="0">
+                <a:solidFill>
+                  <a:srgbClr val="444444"/>
+                </a:solidFill>
+                <a:latin typeface="Arial"/>
+              </a:rPr>
+              <a:t>what about north / how about central</a:t>
+            </a:r>
+          </a:p>
+        </p:txBody>
+      </p:sp>
+      <p:sp>
+        <p:nvSpPr>
+          <p:cNvPr id="35" name="TextBox 34"/>
+          <p:cNvSpPr txBox="1"/>
+          <p:nvPr/>
+        </p:nvSpPr>
+        <p:spPr>
+          <a:xfrm>
+            <a:off x="5879592" y="5669280"/>
+            <a:ext cx="5577840" cy="292608"/>
+          </a:xfrm>
+          <a:prstGeom prst="rect">
+            <a:avLst/>
+          </a:prstGeom>
+          <a:noFill/>
+        </p:spPr>
+        <p:txBody>
+          <a:bodyPr wrap="square" lIns="0" rIns="0" tIns="0" bIns="0" anchor="t">
+            <a:spAutoFit/>
+          </a:bodyPr>
+          <a:lstStyle/>
+          <a:p>
+            <a:pPr algn="l">
+              <a:lnSpc>
+                <a:spcPct val="115000"/>
+              </a:lnSpc>
+            </a:pPr>
+            <a:r>
+              <a:rPr sz="1100" b="0">
+                <a:solidFill>
+                  <a:srgbClr val="555555"/>
+                </a:solidFill>
+                <a:latin typeface="Microsoft JhengHei"/>
+              </a:rPr>
+              <a:t>最自然的追問講法，carry-over 詞表偏偏漏了 about</a:t>
+            </a:r>
+          </a:p>
+        </p:txBody>
+      </p:sp>
+      <p:sp>
+        <p:nvSpPr>
+          <p:cNvPr id="36" name="Rectangle 35"/>
+          <p:cNvSpPr/>
+          <p:nvPr/>
+        </p:nvSpPr>
+        <p:spPr>
+          <a:xfrm>
+            <a:off x="667512" y="6053328"/>
+            <a:ext cx="54864" cy="347472"/>
+          </a:xfrm>
+          <a:prstGeom prst="rect">
+            <a:avLst/>
+          </a:prstGeom>
+          <a:solidFill>
+            <a:srgbClr val="F0A030"/>
+          </a:solidFill>
+          <a:ln>
+            <a:noFill/>
+          </a:ln>
+          <a:effectLst/>
+        </p:spPr>
+        <p:style>
+          <a:lnRef idx="1">
+            <a:schemeClr val="accent1"/>
+          </a:lnRef>
+          <a:fillRef idx="3">
+            <a:schemeClr val="accent1"/>
+          </a:fillRef>
+          <a:effectRef idx="2">
+            <a:schemeClr val="accent1"/>
+          </a:effectRef>
+          <a:fontRef idx="minor">
+            <a:schemeClr val="lt1"/>
+          </a:fontRef>
+        </p:style>
+        <p:txBody>
+          <a:bodyPr rtlCol="0" anchor="ctr"/>
+          <a:lstStyle/>
+          <a:p>
+            <a:pPr algn="ctr"/>
+          </a:p>
+        </p:txBody>
+      </p:sp>
+      <p:sp>
+        <p:nvSpPr>
+          <p:cNvPr id="37" name="TextBox 36"/>
+          <p:cNvSpPr txBox="1"/>
+          <p:nvPr/>
+        </p:nvSpPr>
+        <p:spPr>
+          <a:xfrm>
+            <a:off x="868680" y="6071616"/>
+            <a:ext cx="1371600" cy="292608"/>
+          </a:xfrm>
+          <a:prstGeom prst="rect">
+            <a:avLst/>
+          </a:prstGeom>
+          <a:noFill/>
+        </p:spPr>
+        <p:txBody>
+          <a:bodyPr wrap="square" lIns="0" rIns="0" tIns="0" bIns="0" anchor="t">
+            <a:spAutoFit/>
+          </a:bodyPr>
+          <a:lstStyle/>
+          <a:p>
+            <a:pPr algn="l">
+              <a:lnSpc>
+                <a:spcPct val="115000"/>
+              </a:lnSpc>
+            </a:pPr>
+            <a:r>
+              <a:rPr sz="1150" b="1">
+                <a:solidFill>
+                  <a:srgbClr val="F0A030"/>
+                </a:solidFill>
+                <a:latin typeface="Microsoft JhengHei"/>
+              </a:rPr>
+              <a:t>問展示本身</a:t>
+            </a:r>
+          </a:p>
+        </p:txBody>
+      </p:sp>
+      <p:sp>
+        <p:nvSpPr>
+          <p:cNvPr id="38" name="TextBox 37"/>
+          <p:cNvSpPr txBox="1"/>
+          <p:nvPr/>
+        </p:nvSpPr>
+        <p:spPr>
+          <a:xfrm>
+            <a:off x="2359152" y="6071616"/>
+            <a:ext cx="3383280" cy="292608"/>
+          </a:xfrm>
+          <a:prstGeom prst="rect">
+            <a:avLst/>
+          </a:prstGeom>
+          <a:noFill/>
+        </p:spPr>
+        <p:txBody>
+          <a:bodyPr wrap="square" lIns="0" rIns="0" tIns="0" bIns="0" anchor="t">
+            <a:spAutoFit/>
+          </a:bodyPr>
+          <a:lstStyle/>
+          <a:p>
+            <a:pPr algn="l">
+              <a:lnSpc>
+                <a:spcPct val="115000"/>
+              </a:lnSpc>
+            </a:pPr>
+            <a:r>
+              <a:rPr sz="1050" b="0">
+                <a:solidFill>
+                  <a:srgbClr val="444444"/>
+                </a:solidFill>
+                <a:latin typeface="Arial"/>
+              </a:rPr>
+              <a:t>what's this demo about</a:t>
+            </a:r>
+          </a:p>
+        </p:txBody>
+      </p:sp>
+      <p:sp>
+        <p:nvSpPr>
+          <p:cNvPr id="39" name="TextBox 38"/>
+          <p:cNvSpPr txBox="1"/>
+          <p:nvPr/>
+        </p:nvSpPr>
+        <p:spPr>
+          <a:xfrm>
+            <a:off x="5879592" y="6071616"/>
+            <a:ext cx="5577840" cy="292608"/>
+          </a:xfrm>
+          <a:prstGeom prst="rect">
+            <a:avLst/>
+          </a:prstGeom>
+          <a:noFill/>
+        </p:spPr>
+        <p:txBody>
+          <a:bodyPr wrap="square" lIns="0" rIns="0" tIns="0" bIns="0" anchor="t">
+            <a:spAutoFit/>
+          </a:bodyPr>
+          <a:lstStyle/>
+          <a:p>
+            <a:pPr algn="l">
+              <a:lnSpc>
+                <a:spcPct val="115000"/>
+              </a:lnSpc>
+            </a:pPr>
+            <a:r>
+              <a:rPr sz="1100" b="0">
+                <a:solidFill>
+                  <a:srgbClr val="555555"/>
+                </a:solidFill>
+                <a:latin typeface="Microsoft JhengHei"/>
+              </a:rPr>
+              <a:t>回熱銷榜——訪客第一句就答非所問</a:t>
+            </a:r>
+          </a:p>
+        </p:txBody>
+      </p:sp>
+      <p:sp>
+        <p:nvSpPr>
+          <p:cNvPr id="40" name="Rounded Rectangle 39"/>
+          <p:cNvSpPr/>
+          <p:nvPr/>
+        </p:nvSpPr>
+        <p:spPr>
+          <a:xfrm>
+            <a:off x="667512" y="6473952"/>
+            <a:ext cx="10853928" cy="310896"/>
+          </a:xfrm>
+          <a:prstGeom prst="roundRect">
+            <a:avLst>
+              <a:gd name="adj" fmla="val 8000"/>
+            </a:avLst>
           </a:prstGeom>
           <a:solidFill>
             <a:srgbClr val="1A1A2E"/>
@@ -34062,1203 +35681,55 @@
       </p:sp>
       <p:sp>
         <p:nvSpPr>
-          <p:cNvPr id="3" name="Rectangle 2"/>
-          <p:cNvSpPr/>
-          <p:nvPr/>
-        </p:nvSpPr>
-        <p:spPr>
-          <a:xfrm>
-            <a:off x="0" y="0"/>
-            <a:ext cx="12188952" cy="128016"/>
-          </a:xfrm>
-          <a:prstGeom prst="rect">
-            <a:avLst/>
-          </a:prstGeom>
-          <a:solidFill>
-            <a:srgbClr val="00C49A"/>
-          </a:solidFill>
-          <a:ln>
-            <a:noFill/>
-          </a:ln>
-          <a:effectLst/>
-        </p:spPr>
-        <p:style>
-          <a:lnRef idx="1">
-            <a:schemeClr val="accent1"/>
-          </a:lnRef>
-          <a:fillRef idx="3">
-            <a:schemeClr val="accent1"/>
-          </a:fillRef>
-          <a:effectRef idx="2">
-            <a:schemeClr val="accent1"/>
-          </a:effectRef>
-          <a:fontRef idx="minor">
-            <a:schemeClr val="lt1"/>
-          </a:fontRef>
-        </p:style>
-        <p:txBody>
-          <a:bodyPr rtlCol="0" anchor="ctr"/>
-          <a:lstStyle/>
-          <a:p>
-            <a:pPr algn="ctr"/>
-          </a:p>
-        </p:txBody>
-      </p:sp>
-      <p:sp>
-        <p:nvSpPr>
-          <p:cNvPr id="4" name="TextBox 3"/>
-          <p:cNvSpPr txBox="1"/>
-          <p:nvPr/>
-        </p:nvSpPr>
-        <p:spPr>
-          <a:xfrm>
-            <a:off x="667512" y="640080"/>
-            <a:ext cx="10789920" cy="320040"/>
-          </a:xfrm>
-          <a:prstGeom prst="rect">
-            <a:avLst/>
-          </a:prstGeom>
-          <a:noFill/>
-        </p:spPr>
-        <p:txBody>
-          <a:bodyPr wrap="square" lIns="0" rIns="0" tIns="0" bIns="0" anchor="t">
-            <a:spAutoFit/>
-          </a:bodyPr>
-          <a:lstStyle/>
-          <a:p>
-            <a:pPr algn="l">
-              <a:lnSpc>
-                <a:spcPct val="115000"/>
-              </a:lnSpc>
-            </a:pPr>
-            <a:r>
-              <a:rPr sz="1300" b="1">
+          <p:cNvPr id="41" name="TextBox 40"/>
+          <p:cNvSpPr txBox="1"/>
+          <p:nvPr/>
+        </p:nvSpPr>
+        <p:spPr>
+          <a:xfrm>
+            <a:off x="987552" y="6492240"/>
+            <a:ext cx="10241280" cy="274320"/>
+          </a:xfrm>
+          <a:prstGeom prst="rect">
+            <a:avLst/>
+          </a:prstGeom>
+          <a:noFill/>
+        </p:spPr>
+        <p:txBody>
+          <a:bodyPr wrap="square" lIns="0" rIns="0" tIns="0" bIns="0" anchor="ctr">
+            <a:spAutoFit/>
+          </a:bodyPr>
+          <a:lstStyle/>
+          <a:p>
+            <a:pPr algn="l">
+              <a:lnSpc>
+                <a:spcPct val="115000"/>
+              </a:lnSpc>
+            </a:pPr>
+            <a:r>
+              <a:rPr sz="1150" b="1">
                 <a:solidFill>
                   <a:srgbClr val="00C49A"/>
                 </a:solidFill>
-                <a:latin typeface="Arial"/>
-              </a:rPr>
-              <a:t>SUMMARY</a:t>
-            </a:r>
-          </a:p>
-        </p:txBody>
-      </p:sp>
-      <p:sp>
-        <p:nvSpPr>
-          <p:cNvPr id="5" name="TextBox 4"/>
-          <p:cNvSpPr txBox="1"/>
-          <p:nvPr/>
-        </p:nvSpPr>
-        <p:spPr>
-          <a:xfrm>
-            <a:off x="667512" y="1051560"/>
-            <a:ext cx="10789920" cy="640080"/>
-          </a:xfrm>
-          <a:prstGeom prst="rect">
-            <a:avLst/>
-          </a:prstGeom>
-          <a:noFill/>
-        </p:spPr>
-        <p:txBody>
-          <a:bodyPr wrap="square" lIns="0" rIns="0" tIns="0" bIns="0" anchor="t">
-            <a:spAutoFit/>
-          </a:bodyPr>
-          <a:lstStyle/>
-          <a:p>
-            <a:pPr algn="l">
-              <a:lnSpc>
-                <a:spcPct val="115000"/>
-              </a:lnSpc>
-            </a:pPr>
-            <a:r>
-              <a:rPr sz="2800" b="1">
-                <a:solidFill>
-                  <a:srgbClr val="FFFFFF"/>
-                </a:solidFill>
-                <a:latin typeface="Microsoft JhengHei"/>
-              </a:rPr>
-              <a:t>一句話查倉管，跑在樹莓派，品質可證明</a:t>
-            </a:r>
-          </a:p>
-        </p:txBody>
-      </p:sp>
-      <p:sp>
-        <p:nvSpPr>
-          <p:cNvPr id="6" name="Rounded Rectangle 5"/>
-          <p:cNvSpPr/>
-          <p:nvPr/>
-        </p:nvSpPr>
-        <p:spPr>
-          <a:xfrm>
-            <a:off x="667512" y="1755648"/>
-            <a:ext cx="10853928" cy="722376"/>
-          </a:xfrm>
-          <a:prstGeom prst="roundRect">
-            <a:avLst>
-              <a:gd name="adj" fmla="val 8000"/>
-            </a:avLst>
-          </a:prstGeom>
-          <a:solidFill>
-            <a:srgbClr val="222A45"/>
-          </a:solidFill>
-          <a:ln>
-            <a:noFill/>
-          </a:ln>
-          <a:effectLst/>
-        </p:spPr>
-        <p:style>
-          <a:lnRef idx="1">
-            <a:schemeClr val="accent1"/>
-          </a:lnRef>
-          <a:fillRef idx="3">
-            <a:schemeClr val="accent1"/>
-          </a:fillRef>
-          <a:effectRef idx="2">
-            <a:schemeClr val="accent1"/>
-          </a:effectRef>
-          <a:fontRef idx="minor">
-            <a:schemeClr val="lt1"/>
-          </a:fontRef>
-        </p:style>
-        <p:txBody>
-          <a:bodyPr rtlCol="0" anchor="ctr"/>
-          <a:lstStyle/>
-          <a:p>
-            <a:pPr algn="ctr"/>
-          </a:p>
-        </p:txBody>
-      </p:sp>
-      <p:sp>
-        <p:nvSpPr>
-          <p:cNvPr id="7" name="Oval 6"/>
-          <p:cNvSpPr/>
-          <p:nvPr/>
-        </p:nvSpPr>
-        <p:spPr>
-          <a:xfrm>
-            <a:off x="941832" y="1920240"/>
-            <a:ext cx="475488" cy="475488"/>
-          </a:xfrm>
-          <a:prstGeom prst="ellipse">
-            <a:avLst/>
-          </a:prstGeom>
-          <a:solidFill>
-            <a:srgbClr val="00C49A"/>
-          </a:solidFill>
-          <a:ln>
-            <a:noFill/>
-          </a:ln>
-          <a:effectLst/>
-        </p:spPr>
-        <p:style>
-          <a:lnRef idx="1">
-            <a:schemeClr val="accent1"/>
-          </a:lnRef>
-          <a:fillRef idx="3">
-            <a:schemeClr val="accent1"/>
-          </a:fillRef>
-          <a:effectRef idx="2">
-            <a:schemeClr val="accent1"/>
-          </a:effectRef>
-          <a:fontRef idx="minor">
-            <a:schemeClr val="lt1"/>
-          </a:fontRef>
-        </p:style>
-        <p:txBody>
-          <a:bodyPr rtlCol="0" anchor="ctr"/>
-          <a:lstStyle/>
-          <a:p>
-            <a:pPr algn="ctr"/>
-          </a:p>
-        </p:txBody>
-      </p:sp>
-      <p:sp>
-        <p:nvSpPr>
-          <p:cNvPr id="8" name="TextBox 7"/>
-          <p:cNvSpPr txBox="1"/>
-          <p:nvPr/>
-        </p:nvSpPr>
-        <p:spPr>
-          <a:xfrm>
-            <a:off x="941832" y="1901952"/>
-            <a:ext cx="475488" cy="475488"/>
-          </a:xfrm>
-          <a:prstGeom prst="rect">
-            <a:avLst/>
-          </a:prstGeom>
-          <a:noFill/>
-        </p:spPr>
-        <p:txBody>
-          <a:bodyPr wrap="square" lIns="0" rIns="0" tIns="0" bIns="0" anchor="ctr">
-            <a:spAutoFit/>
-          </a:bodyPr>
-          <a:lstStyle/>
-          <a:p>
-            <a:pPr algn="ctr">
-              <a:lnSpc>
-                <a:spcPct val="115000"/>
-              </a:lnSpc>
-            </a:pPr>
-            <a:r>
-              <a:rPr sz="1600" b="1">
-                <a:solidFill>
-                  <a:srgbClr val="1A1A2E"/>
-                </a:solidFill>
-                <a:latin typeface="Microsoft JhengHei"/>
-              </a:rPr>
-              <a:t>價</a:t>
-            </a:r>
-          </a:p>
-        </p:txBody>
-      </p:sp>
-      <p:sp>
-        <p:nvSpPr>
-          <p:cNvPr id="9" name="TextBox 8"/>
-          <p:cNvSpPr txBox="1"/>
-          <p:nvPr/>
-        </p:nvSpPr>
-        <p:spPr>
-          <a:xfrm>
-            <a:off x="1719072" y="1865376"/>
-            <a:ext cx="1463040" cy="566928"/>
-          </a:xfrm>
-          <a:prstGeom prst="rect">
-            <a:avLst/>
-          </a:prstGeom>
-          <a:noFill/>
-        </p:spPr>
-        <p:txBody>
-          <a:bodyPr wrap="square" lIns="0" rIns="0" tIns="0" bIns="0" anchor="ctr">
-            <a:spAutoFit/>
-          </a:bodyPr>
-          <a:lstStyle/>
-          <a:p>
-            <a:pPr algn="l">
-              <a:lnSpc>
-                <a:spcPct val="115000"/>
-              </a:lnSpc>
-            </a:pPr>
-            <a:r>
-              <a:rPr sz="1700" b="1">
-                <a:solidFill>
-                  <a:srgbClr val="00C49A"/>
-                </a:solidFill>
-                <a:latin typeface="Microsoft JhengHei"/>
-              </a:rPr>
-              <a:t>價值</a:t>
-            </a:r>
-          </a:p>
-        </p:txBody>
-      </p:sp>
-      <p:sp>
-        <p:nvSpPr>
-          <p:cNvPr id="10" name="TextBox 9"/>
-          <p:cNvSpPr txBox="1"/>
-          <p:nvPr/>
-        </p:nvSpPr>
-        <p:spPr>
-          <a:xfrm>
-            <a:off x="3182112" y="1865376"/>
-            <a:ext cx="8046720" cy="566928"/>
-          </a:xfrm>
-          <a:prstGeom prst="rect">
-            <a:avLst/>
-          </a:prstGeom>
-          <a:noFill/>
-        </p:spPr>
-        <p:txBody>
-          <a:bodyPr wrap="square" lIns="0" rIns="0" tIns="0" bIns="0" anchor="ctr">
-            <a:spAutoFit/>
-          </a:bodyPr>
-          <a:lstStyle/>
-          <a:p>
-            <a:pPr algn="l">
-              <a:lnSpc>
-                <a:spcPct val="115000"/>
-              </a:lnSpc>
-            </a:pPr>
-            <a:r>
-              <a:rPr sz="1350" b="0">
-                <a:solidFill>
-                  <a:srgbClr val="FFFFFF"/>
-                </a:solidFill>
-                <a:latin typeface="Microsoft JhengHei"/>
-              </a:rPr>
-              <a:t>自然語言問倉管，一秒回答；手機掃碼、離線可用、硬體成本極低</a:t>
-            </a:r>
-          </a:p>
-        </p:txBody>
-      </p:sp>
-      <p:sp>
-        <p:nvSpPr>
-          <p:cNvPr id="11" name="Rounded Rectangle 10"/>
-          <p:cNvSpPr/>
-          <p:nvPr/>
-        </p:nvSpPr>
-        <p:spPr>
-          <a:xfrm>
-            <a:off x="667512" y="2606040"/>
-            <a:ext cx="10853928" cy="722376"/>
-          </a:xfrm>
-          <a:prstGeom prst="roundRect">
-            <a:avLst>
-              <a:gd name="adj" fmla="val 8000"/>
-            </a:avLst>
-          </a:prstGeom>
-          <a:solidFill>
-            <a:srgbClr val="222A45"/>
-          </a:solidFill>
-          <a:ln>
-            <a:noFill/>
-          </a:ln>
-          <a:effectLst/>
-        </p:spPr>
-        <p:style>
-          <a:lnRef idx="1">
-            <a:schemeClr val="accent1"/>
-          </a:lnRef>
-          <a:fillRef idx="3">
-            <a:schemeClr val="accent1"/>
-          </a:fillRef>
-          <a:effectRef idx="2">
-            <a:schemeClr val="accent1"/>
-          </a:effectRef>
-          <a:fontRef idx="minor">
-            <a:schemeClr val="lt1"/>
-          </a:fontRef>
-        </p:style>
-        <p:txBody>
-          <a:bodyPr rtlCol="0" anchor="ctr"/>
-          <a:lstStyle/>
-          <a:p>
-            <a:pPr algn="ctr"/>
-          </a:p>
-        </p:txBody>
-      </p:sp>
-      <p:sp>
-        <p:nvSpPr>
-          <p:cNvPr id="12" name="Oval 11"/>
-          <p:cNvSpPr/>
-          <p:nvPr/>
-        </p:nvSpPr>
-        <p:spPr>
-          <a:xfrm>
-            <a:off x="941832" y="2770632"/>
-            <a:ext cx="475488" cy="475488"/>
-          </a:xfrm>
-          <a:prstGeom prst="ellipse">
-            <a:avLst/>
-          </a:prstGeom>
-          <a:solidFill>
-            <a:srgbClr val="00C49A"/>
-          </a:solidFill>
-          <a:ln>
-            <a:noFill/>
-          </a:ln>
-          <a:effectLst/>
-        </p:spPr>
-        <p:style>
-          <a:lnRef idx="1">
-            <a:schemeClr val="accent1"/>
-          </a:lnRef>
-          <a:fillRef idx="3">
-            <a:schemeClr val="accent1"/>
-          </a:fillRef>
-          <a:effectRef idx="2">
-            <a:schemeClr val="accent1"/>
-          </a:effectRef>
-          <a:fontRef idx="minor">
-            <a:schemeClr val="lt1"/>
-          </a:fontRef>
-        </p:style>
-        <p:txBody>
-          <a:bodyPr rtlCol="0" anchor="ctr"/>
-          <a:lstStyle/>
-          <a:p>
-            <a:pPr algn="ctr"/>
-          </a:p>
-        </p:txBody>
-      </p:sp>
-      <p:sp>
-        <p:nvSpPr>
-          <p:cNvPr id="13" name="TextBox 12"/>
-          <p:cNvSpPr txBox="1"/>
-          <p:nvPr/>
-        </p:nvSpPr>
-        <p:spPr>
-          <a:xfrm>
-            <a:off x="941832" y="2752344"/>
-            <a:ext cx="475488" cy="475488"/>
-          </a:xfrm>
-          <a:prstGeom prst="rect">
-            <a:avLst/>
-          </a:prstGeom>
-          <a:noFill/>
-        </p:spPr>
-        <p:txBody>
-          <a:bodyPr wrap="square" lIns="0" rIns="0" tIns="0" bIns="0" anchor="ctr">
-            <a:spAutoFit/>
-          </a:bodyPr>
-          <a:lstStyle/>
-          <a:p>
-            <a:pPr algn="ctr">
-              <a:lnSpc>
-                <a:spcPct val="115000"/>
-              </a:lnSpc>
-            </a:pPr>
-            <a:r>
-              <a:rPr sz="1600" b="1">
-                <a:solidFill>
-                  <a:srgbClr val="1A1A2E"/>
-                </a:solidFill>
-                <a:latin typeface="Microsoft JhengHei"/>
-              </a:rPr>
-              <a:t>技</a:t>
-            </a:r>
-          </a:p>
-        </p:txBody>
-      </p:sp>
-      <p:sp>
-        <p:nvSpPr>
-          <p:cNvPr id="14" name="TextBox 13"/>
-          <p:cNvSpPr txBox="1"/>
-          <p:nvPr/>
-        </p:nvSpPr>
-        <p:spPr>
-          <a:xfrm>
-            <a:off x="1719072" y="2715768"/>
-            <a:ext cx="1463040" cy="566928"/>
-          </a:xfrm>
-          <a:prstGeom prst="rect">
-            <a:avLst/>
-          </a:prstGeom>
-          <a:noFill/>
-        </p:spPr>
-        <p:txBody>
-          <a:bodyPr wrap="square" lIns="0" rIns="0" tIns="0" bIns="0" anchor="ctr">
-            <a:spAutoFit/>
-          </a:bodyPr>
-          <a:lstStyle/>
-          <a:p>
-            <a:pPr algn="l">
-              <a:lnSpc>
-                <a:spcPct val="115000"/>
-              </a:lnSpc>
-            </a:pPr>
-            <a:r>
-              <a:rPr sz="1700" b="1">
-                <a:solidFill>
-                  <a:srgbClr val="00C49A"/>
-                </a:solidFill>
-                <a:latin typeface="Microsoft JhengHei"/>
-              </a:rPr>
-              <a:t>技術</a:t>
-            </a:r>
-          </a:p>
-        </p:txBody>
-      </p:sp>
-      <p:sp>
-        <p:nvSpPr>
-          <p:cNvPr id="15" name="TextBox 14"/>
-          <p:cNvSpPr txBox="1"/>
-          <p:nvPr/>
-        </p:nvSpPr>
-        <p:spPr>
-          <a:xfrm>
-            <a:off x="3182112" y="2715768"/>
-            <a:ext cx="8046720" cy="566928"/>
-          </a:xfrm>
-          <a:prstGeom prst="rect">
-            <a:avLst/>
-          </a:prstGeom>
-          <a:noFill/>
-        </p:spPr>
-        <p:txBody>
-          <a:bodyPr wrap="square" lIns="0" rIns="0" tIns="0" bIns="0" anchor="ctr">
-            <a:spAutoFit/>
-          </a:bodyPr>
-          <a:lstStyle/>
-          <a:p>
-            <a:pPr algn="l">
-              <a:lnSpc>
-                <a:spcPct val="115000"/>
-              </a:lnSpc>
-            </a:pPr>
-            <a:r>
-              <a:rPr sz="1350" b="0">
-                <a:solidFill>
-                  <a:srgbClr val="FFFFFF"/>
-                </a:solidFill>
-                <a:latin typeface="Microsoft JhengHei"/>
-              </a:rPr>
-              <a:t>270M 小模型當路由器 + 規則層當決策者，業界邊緣 Agent 的正解</a:t>
-            </a:r>
-          </a:p>
-        </p:txBody>
-      </p:sp>
-      <p:sp>
-        <p:nvSpPr>
-          <p:cNvPr id="16" name="Rounded Rectangle 15"/>
-          <p:cNvSpPr/>
-          <p:nvPr/>
-        </p:nvSpPr>
-        <p:spPr>
-          <a:xfrm>
-            <a:off x="667512" y="3456432"/>
-            <a:ext cx="10853928" cy="722376"/>
-          </a:xfrm>
-          <a:prstGeom prst="roundRect">
-            <a:avLst>
-              <a:gd name="adj" fmla="val 8000"/>
-            </a:avLst>
-          </a:prstGeom>
-          <a:solidFill>
-            <a:srgbClr val="222A45"/>
-          </a:solidFill>
-          <a:ln>
-            <a:noFill/>
-          </a:ln>
-          <a:effectLst/>
-        </p:spPr>
-        <p:style>
-          <a:lnRef idx="1">
-            <a:schemeClr val="accent1"/>
-          </a:lnRef>
-          <a:fillRef idx="3">
-            <a:schemeClr val="accent1"/>
-          </a:fillRef>
-          <a:effectRef idx="2">
-            <a:schemeClr val="accent1"/>
-          </a:effectRef>
-          <a:fontRef idx="minor">
-            <a:schemeClr val="lt1"/>
-          </a:fontRef>
-        </p:style>
-        <p:txBody>
-          <a:bodyPr rtlCol="0" anchor="ctr"/>
-          <a:lstStyle/>
-          <a:p>
-            <a:pPr algn="ctr"/>
-          </a:p>
-        </p:txBody>
-      </p:sp>
-      <p:sp>
-        <p:nvSpPr>
-          <p:cNvPr id="17" name="Oval 16"/>
-          <p:cNvSpPr/>
-          <p:nvPr/>
-        </p:nvSpPr>
-        <p:spPr>
-          <a:xfrm>
-            <a:off x="941832" y="3621024"/>
-            <a:ext cx="475488" cy="475488"/>
-          </a:xfrm>
-          <a:prstGeom prst="ellipse">
-            <a:avLst/>
-          </a:prstGeom>
-          <a:solidFill>
-            <a:srgbClr val="00C49A"/>
-          </a:solidFill>
-          <a:ln>
-            <a:noFill/>
-          </a:ln>
-          <a:effectLst/>
-        </p:spPr>
-        <p:style>
-          <a:lnRef idx="1">
-            <a:schemeClr val="accent1"/>
-          </a:lnRef>
-          <a:fillRef idx="3">
-            <a:schemeClr val="accent1"/>
-          </a:fillRef>
-          <a:effectRef idx="2">
-            <a:schemeClr val="accent1"/>
-          </a:effectRef>
-          <a:fontRef idx="minor">
-            <a:schemeClr val="lt1"/>
-          </a:fontRef>
-        </p:style>
-        <p:txBody>
-          <a:bodyPr rtlCol="0" anchor="ctr"/>
-          <a:lstStyle/>
-          <a:p>
-            <a:pPr algn="ctr"/>
-          </a:p>
-        </p:txBody>
-      </p:sp>
-      <p:sp>
-        <p:nvSpPr>
-          <p:cNvPr id="18" name="TextBox 17"/>
-          <p:cNvSpPr txBox="1"/>
-          <p:nvPr/>
-        </p:nvSpPr>
-        <p:spPr>
-          <a:xfrm>
-            <a:off x="941832" y="3602736"/>
-            <a:ext cx="475488" cy="475488"/>
-          </a:xfrm>
-          <a:prstGeom prst="rect">
-            <a:avLst/>
-          </a:prstGeom>
-          <a:noFill/>
-        </p:spPr>
-        <p:txBody>
-          <a:bodyPr wrap="square" lIns="0" rIns="0" tIns="0" bIns="0" anchor="ctr">
-            <a:spAutoFit/>
-          </a:bodyPr>
-          <a:lstStyle/>
-          <a:p>
-            <a:pPr algn="ctr">
-              <a:lnSpc>
-                <a:spcPct val="115000"/>
-              </a:lnSpc>
-            </a:pPr>
-            <a:r>
-              <a:rPr sz="1600" b="1">
-                <a:solidFill>
-                  <a:srgbClr val="1A1A2E"/>
-                </a:solidFill>
-                <a:latin typeface="Microsoft JhengHei"/>
-              </a:rPr>
-              <a:t>品</a:t>
-            </a:r>
-          </a:p>
-        </p:txBody>
-      </p:sp>
-      <p:sp>
-        <p:nvSpPr>
-          <p:cNvPr id="19" name="TextBox 18"/>
-          <p:cNvSpPr txBox="1"/>
-          <p:nvPr/>
-        </p:nvSpPr>
-        <p:spPr>
-          <a:xfrm>
-            <a:off x="1719072" y="3566160"/>
-            <a:ext cx="1463040" cy="566928"/>
-          </a:xfrm>
-          <a:prstGeom prst="rect">
-            <a:avLst/>
-          </a:prstGeom>
-          <a:noFill/>
-        </p:spPr>
-        <p:txBody>
-          <a:bodyPr wrap="square" lIns="0" rIns="0" tIns="0" bIns="0" anchor="ctr">
-            <a:spAutoFit/>
-          </a:bodyPr>
-          <a:lstStyle/>
-          <a:p>
-            <a:pPr algn="l">
-              <a:lnSpc>
-                <a:spcPct val="115000"/>
-              </a:lnSpc>
-            </a:pPr>
-            <a:r>
-              <a:rPr sz="1700" b="1">
-                <a:solidFill>
-                  <a:srgbClr val="00C49A"/>
-                </a:solidFill>
-                <a:latin typeface="Microsoft JhengHei"/>
-              </a:rPr>
-              <a:t>品質</a:t>
-            </a:r>
-          </a:p>
-        </p:txBody>
-      </p:sp>
-      <p:sp>
-        <p:nvSpPr>
-          <p:cNvPr id="20" name="TextBox 19"/>
-          <p:cNvSpPr txBox="1"/>
-          <p:nvPr/>
-        </p:nvSpPr>
-        <p:spPr>
-          <a:xfrm>
-            <a:off x="3182112" y="3566160"/>
-            <a:ext cx="8046720" cy="566928"/>
-          </a:xfrm>
-          <a:prstGeom prst="rect">
-            <a:avLst/>
-          </a:prstGeom>
-          <a:noFill/>
-        </p:spPr>
-        <p:txBody>
-          <a:bodyPr wrap="square" lIns="0" rIns="0" tIns="0" bIns="0" anchor="ctr">
-            <a:spAutoFit/>
-          </a:bodyPr>
-          <a:lstStyle/>
-          <a:p>
-            <a:pPr algn="l">
-              <a:lnSpc>
-                <a:spcPct val="115000"/>
-              </a:lnSpc>
-            </a:pPr>
-            <a:r>
-              <a:rPr sz="1350" b="0">
-                <a:solidFill>
-                  <a:srgbClr val="FFFFFF"/>
-                </a:solidFill>
-                <a:latin typeface="Microsoft JhengHei"/>
-              </a:rPr>
-              <a:t>中文 1122 句雙平台 100%、英文 892 句 100%；「可靠」是數字不是祈禱</a:t>
-            </a:r>
-          </a:p>
-        </p:txBody>
-      </p:sp>
-      <p:sp>
-        <p:nvSpPr>
-          <p:cNvPr id="21" name="Rounded Rectangle 20"/>
-          <p:cNvSpPr/>
-          <p:nvPr/>
-        </p:nvSpPr>
-        <p:spPr>
-          <a:xfrm>
-            <a:off x="667512" y="4306824"/>
-            <a:ext cx="10853928" cy="722376"/>
-          </a:xfrm>
-          <a:prstGeom prst="roundRect">
-            <a:avLst>
-              <a:gd name="adj" fmla="val 8000"/>
-            </a:avLst>
-          </a:prstGeom>
-          <a:solidFill>
-            <a:srgbClr val="222A45"/>
-          </a:solidFill>
-          <a:ln>
-            <a:noFill/>
-          </a:ln>
-          <a:effectLst/>
-        </p:spPr>
-        <p:style>
-          <a:lnRef idx="1">
-            <a:schemeClr val="accent1"/>
-          </a:lnRef>
-          <a:fillRef idx="3">
-            <a:schemeClr val="accent1"/>
-          </a:fillRef>
-          <a:effectRef idx="2">
-            <a:schemeClr val="accent1"/>
-          </a:effectRef>
-          <a:fontRef idx="minor">
-            <a:schemeClr val="lt1"/>
-          </a:fontRef>
-        </p:style>
-        <p:txBody>
-          <a:bodyPr rtlCol="0" anchor="ctr"/>
-          <a:lstStyle/>
-          <a:p>
-            <a:pPr algn="ctr"/>
-          </a:p>
-        </p:txBody>
-      </p:sp>
-      <p:sp>
-        <p:nvSpPr>
-          <p:cNvPr id="22" name="Oval 21"/>
-          <p:cNvSpPr/>
-          <p:nvPr/>
-        </p:nvSpPr>
-        <p:spPr>
-          <a:xfrm>
-            <a:off x="941832" y="4471416"/>
-            <a:ext cx="475488" cy="475488"/>
-          </a:xfrm>
-          <a:prstGeom prst="ellipse">
-            <a:avLst/>
-          </a:prstGeom>
-          <a:solidFill>
-            <a:srgbClr val="00C49A"/>
-          </a:solidFill>
-          <a:ln>
-            <a:noFill/>
-          </a:ln>
-          <a:effectLst/>
-        </p:spPr>
-        <p:style>
-          <a:lnRef idx="1">
-            <a:schemeClr val="accent1"/>
-          </a:lnRef>
-          <a:fillRef idx="3">
-            <a:schemeClr val="accent1"/>
-          </a:fillRef>
-          <a:effectRef idx="2">
-            <a:schemeClr val="accent1"/>
-          </a:effectRef>
-          <a:fontRef idx="minor">
-            <a:schemeClr val="lt1"/>
-          </a:fontRef>
-        </p:style>
-        <p:txBody>
-          <a:bodyPr rtlCol="0" anchor="ctr"/>
-          <a:lstStyle/>
-          <a:p>
-            <a:pPr algn="ctr"/>
-          </a:p>
-        </p:txBody>
-      </p:sp>
-      <p:sp>
-        <p:nvSpPr>
-          <p:cNvPr id="23" name="TextBox 22"/>
-          <p:cNvSpPr txBox="1"/>
-          <p:nvPr/>
-        </p:nvSpPr>
-        <p:spPr>
-          <a:xfrm>
-            <a:off x="941832" y="4453128"/>
-            <a:ext cx="475488" cy="475488"/>
-          </a:xfrm>
-          <a:prstGeom prst="rect">
-            <a:avLst/>
-          </a:prstGeom>
-          <a:noFill/>
-        </p:spPr>
-        <p:txBody>
-          <a:bodyPr wrap="square" lIns="0" rIns="0" tIns="0" bIns="0" anchor="ctr">
-            <a:spAutoFit/>
-          </a:bodyPr>
-          <a:lstStyle/>
-          <a:p>
-            <a:pPr algn="ctr">
-              <a:lnSpc>
-                <a:spcPct val="115000"/>
-              </a:lnSpc>
-            </a:pPr>
-            <a:r>
-              <a:rPr sz="1600" b="1">
-                <a:solidFill>
-                  <a:srgbClr val="1A1A2E"/>
-                </a:solidFill>
-                <a:latin typeface="Microsoft JhengHei"/>
-              </a:rPr>
-              <a:t>語</a:t>
-            </a:r>
-          </a:p>
-        </p:txBody>
-      </p:sp>
-      <p:sp>
-        <p:nvSpPr>
-          <p:cNvPr id="24" name="TextBox 23"/>
-          <p:cNvSpPr txBox="1"/>
-          <p:nvPr/>
-        </p:nvSpPr>
-        <p:spPr>
-          <a:xfrm>
-            <a:off x="1719072" y="4416552"/>
-            <a:ext cx="1463040" cy="566928"/>
-          </a:xfrm>
-          <a:prstGeom prst="rect">
-            <a:avLst/>
-          </a:prstGeom>
-          <a:noFill/>
-        </p:spPr>
-        <p:txBody>
-          <a:bodyPr wrap="square" lIns="0" rIns="0" tIns="0" bIns="0" anchor="ctr">
-            <a:spAutoFit/>
-          </a:bodyPr>
-          <a:lstStyle/>
-          <a:p>
-            <a:pPr algn="l">
-              <a:lnSpc>
-                <a:spcPct val="115000"/>
-              </a:lnSpc>
-            </a:pPr>
-            <a:r>
-              <a:rPr sz="1700" b="1">
-                <a:solidFill>
-                  <a:srgbClr val="00C49A"/>
-                </a:solidFill>
-                <a:latin typeface="Microsoft JhengHei"/>
-              </a:rPr>
-              <a:t>語音</a:t>
-            </a:r>
-          </a:p>
-        </p:txBody>
-      </p:sp>
-      <p:sp>
-        <p:nvSpPr>
-          <p:cNvPr id="25" name="TextBox 24"/>
-          <p:cNvSpPr txBox="1"/>
-          <p:nvPr/>
-        </p:nvSpPr>
-        <p:spPr>
-          <a:xfrm>
-            <a:off x="3182112" y="4416552"/>
-            <a:ext cx="8046720" cy="566928"/>
-          </a:xfrm>
-          <a:prstGeom prst="rect">
-            <a:avLst/>
-          </a:prstGeom>
-          <a:noFill/>
-        </p:spPr>
-        <p:txBody>
-          <a:bodyPr wrap="square" lIns="0" rIns="0" tIns="0" bIns="0" anchor="ctr">
-            <a:spAutoFit/>
-          </a:bodyPr>
-          <a:lstStyle/>
-          <a:p>
-            <a:pPr algn="l">
-              <a:lnSpc>
-                <a:spcPct val="115000"/>
-              </a:lnSpc>
-            </a:pPr>
-            <a:r>
-              <a:rPr sz="1350" b="0">
-                <a:solidFill>
-                  <a:srgbClr val="FFFFFF"/>
-                </a:solidFill>
-                <a:latin typeface="Microsoft JhengHei"/>
-              </a:rPr>
-              <a:t>全離線 whisper；英文 0.94s / 句，中英共用一套 runtime</a:t>
-            </a:r>
-          </a:p>
-        </p:txBody>
-      </p:sp>
-      <p:sp>
-        <p:nvSpPr>
-          <p:cNvPr id="26" name="Rounded Rectangle 25"/>
-          <p:cNvSpPr/>
-          <p:nvPr/>
-        </p:nvSpPr>
-        <p:spPr>
-          <a:xfrm>
-            <a:off x="667512" y="5157216"/>
-            <a:ext cx="10853928" cy="722376"/>
-          </a:xfrm>
-          <a:prstGeom prst="roundRect">
-            <a:avLst>
-              <a:gd name="adj" fmla="val 8000"/>
-            </a:avLst>
-          </a:prstGeom>
-          <a:solidFill>
-            <a:srgbClr val="222A45"/>
-          </a:solidFill>
-          <a:ln>
-            <a:noFill/>
-          </a:ln>
-          <a:effectLst/>
-        </p:spPr>
-        <p:style>
-          <a:lnRef idx="1">
-            <a:schemeClr val="accent1"/>
-          </a:lnRef>
-          <a:fillRef idx="3">
-            <a:schemeClr val="accent1"/>
-          </a:fillRef>
-          <a:effectRef idx="2">
-            <a:schemeClr val="accent1"/>
-          </a:effectRef>
-          <a:fontRef idx="minor">
-            <a:schemeClr val="lt1"/>
-          </a:fontRef>
-        </p:style>
-        <p:txBody>
-          <a:bodyPr rtlCol="0" anchor="ctr"/>
-          <a:lstStyle/>
-          <a:p>
-            <a:pPr algn="ctr"/>
-          </a:p>
-        </p:txBody>
-      </p:sp>
-      <p:sp>
-        <p:nvSpPr>
-          <p:cNvPr id="27" name="Oval 26"/>
-          <p:cNvSpPr/>
-          <p:nvPr/>
-        </p:nvSpPr>
-        <p:spPr>
-          <a:xfrm>
-            <a:off x="941832" y="5321808"/>
-            <a:ext cx="475488" cy="475488"/>
-          </a:xfrm>
-          <a:prstGeom prst="ellipse">
-            <a:avLst/>
-          </a:prstGeom>
-          <a:solidFill>
-            <a:srgbClr val="00C49A"/>
-          </a:solidFill>
-          <a:ln>
-            <a:noFill/>
-          </a:ln>
-          <a:effectLst/>
-        </p:spPr>
-        <p:style>
-          <a:lnRef idx="1">
-            <a:schemeClr val="accent1"/>
-          </a:lnRef>
-          <a:fillRef idx="3">
-            <a:schemeClr val="accent1"/>
-          </a:fillRef>
-          <a:effectRef idx="2">
-            <a:schemeClr val="accent1"/>
-          </a:effectRef>
-          <a:fontRef idx="minor">
-            <a:schemeClr val="lt1"/>
-          </a:fontRef>
-        </p:style>
-        <p:txBody>
-          <a:bodyPr rtlCol="0" anchor="ctr"/>
-          <a:lstStyle/>
-          <a:p>
-            <a:pPr algn="ctr"/>
-          </a:p>
-        </p:txBody>
-      </p:sp>
-      <p:sp>
-        <p:nvSpPr>
-          <p:cNvPr id="28" name="TextBox 27"/>
-          <p:cNvSpPr txBox="1"/>
-          <p:nvPr/>
-        </p:nvSpPr>
-        <p:spPr>
-          <a:xfrm>
-            <a:off x="941832" y="5303520"/>
-            <a:ext cx="475488" cy="475488"/>
-          </a:xfrm>
-          <a:prstGeom prst="rect">
-            <a:avLst/>
-          </a:prstGeom>
-          <a:noFill/>
-        </p:spPr>
-        <p:txBody>
-          <a:bodyPr wrap="square" lIns="0" rIns="0" tIns="0" bIns="0" anchor="ctr">
-            <a:spAutoFit/>
-          </a:bodyPr>
-          <a:lstStyle/>
-          <a:p>
-            <a:pPr algn="ctr">
-              <a:lnSpc>
-                <a:spcPct val="115000"/>
-              </a:lnSpc>
-            </a:pPr>
-            <a:r>
-              <a:rPr sz="1600" b="1">
-                <a:solidFill>
-                  <a:srgbClr val="1A1A2E"/>
-                </a:solidFill>
-                <a:latin typeface="Microsoft JhengHei"/>
-              </a:rPr>
-              <a:t>雙</a:t>
-            </a:r>
-          </a:p>
-        </p:txBody>
-      </p:sp>
-      <p:sp>
-        <p:nvSpPr>
-          <p:cNvPr id="29" name="TextBox 28"/>
-          <p:cNvSpPr txBox="1"/>
-          <p:nvPr/>
-        </p:nvSpPr>
-        <p:spPr>
-          <a:xfrm>
-            <a:off x="1719072" y="5266944"/>
-            <a:ext cx="1463040" cy="566928"/>
-          </a:xfrm>
-          <a:prstGeom prst="rect">
-            <a:avLst/>
-          </a:prstGeom>
-          <a:noFill/>
-        </p:spPr>
-        <p:txBody>
-          <a:bodyPr wrap="square" lIns="0" rIns="0" tIns="0" bIns="0" anchor="ctr">
-            <a:spAutoFit/>
-          </a:bodyPr>
-          <a:lstStyle/>
-          <a:p>
-            <a:pPr algn="l">
-              <a:lnSpc>
-                <a:spcPct val="115000"/>
-              </a:lnSpc>
-            </a:pPr>
-            <a:r>
-              <a:rPr sz="1700" b="1">
-                <a:solidFill>
-                  <a:srgbClr val="00C49A"/>
-                </a:solidFill>
-                <a:latin typeface="Microsoft JhengHei"/>
-              </a:rPr>
-              <a:t>雙語</a:t>
-            </a:r>
-          </a:p>
-        </p:txBody>
-      </p:sp>
-      <p:sp>
-        <p:nvSpPr>
-          <p:cNvPr id="30" name="TextBox 29"/>
-          <p:cNvSpPr txBox="1"/>
-          <p:nvPr/>
-        </p:nvSpPr>
-        <p:spPr>
-          <a:xfrm>
-            <a:off x="3182112" y="5266944"/>
-            <a:ext cx="8046720" cy="566928"/>
-          </a:xfrm>
-          <a:prstGeom prst="rect">
-            <a:avLst/>
-          </a:prstGeom>
-          <a:noFill/>
-        </p:spPr>
-        <p:txBody>
-          <a:bodyPr wrap="square" lIns="0" rIns="0" tIns="0" bIns="0" anchor="ctr">
-            <a:spAutoFit/>
-          </a:bodyPr>
-          <a:lstStyle/>
-          <a:p>
-            <a:pPr algn="l">
-              <a:lnSpc>
-                <a:spcPct val="115000"/>
-              </a:lnSpc>
-            </a:pPr>
-            <a:r>
-              <a:rPr sz="1350" b="0">
-                <a:solidFill>
-                  <a:srgbClr val="FFFFFF"/>
-                </a:solidFill>
-                <a:latin typeface="Microsoft JhengHei"/>
-              </a:rPr>
-              <a:t>中英雙版同機並存，訪客點分頁切換；移植 19 類坑已歸納成方法論</a:t>
-            </a:r>
-          </a:p>
-        </p:txBody>
-      </p:sp>
-      <p:sp>
-        <p:nvSpPr>
-          <p:cNvPr id="31" name="TextBox 30"/>
-          <p:cNvSpPr txBox="1"/>
-          <p:nvPr/>
-        </p:nvSpPr>
-        <p:spPr>
-          <a:xfrm>
-            <a:off x="667512" y="6089904"/>
-            <a:ext cx="10789920" cy="457200"/>
-          </a:xfrm>
-          <a:prstGeom prst="rect">
-            <a:avLst/>
-          </a:prstGeom>
-          <a:noFill/>
-        </p:spPr>
-        <p:txBody>
-          <a:bodyPr wrap="square" lIns="0" rIns="0" tIns="0" bIns="0" anchor="t">
-            <a:spAutoFit/>
-          </a:bodyPr>
-          <a:lstStyle/>
-          <a:p>
-            <a:pPr algn="l">
-              <a:lnSpc>
-                <a:spcPct val="115000"/>
-              </a:lnSpc>
-            </a:pPr>
-            <a:r>
-              <a:rPr sz="1300" b="0">
+                <a:latin typeface="Microsoft JhengHei"/>
+              </a:rPr>
+              <a:t>結論  </a:t>
+            </a:r>
+            <a:r>
+              <a:rPr sz="1100" b="0">
                 <a:solidFill>
                   <a:srgbClr val="BBBBBB"/>
                 </a:solidFill>
                 <a:latin typeface="Microsoft JhengHei"/>
               </a:rPr>
-              <a:t>下一步：展前真機全量驗收、demo 基準日對齊——重置鈕 / 開機自啟 / Wi-Fi 自癒 / 中英雙版並存已完成</a:t>
-            </a:r>
-          </a:p>
-        </p:txBody>
-      </p:sp>
-      <p:sp>
-        <p:nvSpPr>
-          <p:cNvPr id="32" name="TextBox 31"/>
+              <a:t>不是「測不夠多輪」，是「輸入源不夠多樣」——換一個產生源，立刻抓到 11 輪都沒碰到的類型。守衛全程維持 892/892。</a:t>
+            </a:r>
+          </a:p>
+        </p:txBody>
+      </p:sp>
+      <p:sp>
+        <p:nvSpPr>
+          <p:cNvPr id="42" name="TextBox 41"/>
           <p:cNvSpPr txBox="1"/>
           <p:nvPr/>
         </p:nvSpPr>
@@ -37082,6 +37553,1303 @@
                 <a:latin typeface="Arial"/>
               </a:rPr>
               <a:t>03</a:t>
+            </a:r>
+          </a:p>
+        </p:txBody>
+      </p:sp>
+    </p:spTree>
+  </p:cSld>
+  <p:clrMapOvr>
+    <a:masterClrMapping/>
+  </p:clrMapOvr>
+</p:sld>
+</file>
+
+<file path=ppt/slides/slide30.xml><?xml version="1.0" encoding="utf-8"?>
+<p:sld xmlns:a="http://schemas.openxmlformats.org/drawingml/2006/main" xmlns:p="http://schemas.openxmlformats.org/presentationml/2006/main" xmlns:r="http://schemas.openxmlformats.org/officeDocument/2006/relationships">
+  <p:cSld>
+    <p:spTree>
+      <p:nvGrpSpPr>
+        <p:cNvPr id="1" name=""/>
+        <p:cNvGrpSpPr/>
+        <p:nvPr/>
+      </p:nvGrpSpPr>
+      <p:grpSpPr/>
+      <p:sp>
+        <p:nvSpPr>
+          <p:cNvPr id="2" name="Rectangle 1"/>
+          <p:cNvSpPr/>
+          <p:nvPr/>
+        </p:nvSpPr>
+        <p:spPr>
+          <a:xfrm>
+            <a:off x="0" y="0"/>
+            <a:ext cx="12188952" cy="6858000"/>
+          </a:xfrm>
+          <a:prstGeom prst="rect">
+            <a:avLst/>
+          </a:prstGeom>
+          <a:solidFill>
+            <a:srgbClr val="1A1A2E"/>
+          </a:solidFill>
+          <a:ln>
+            <a:noFill/>
+          </a:ln>
+          <a:effectLst/>
+        </p:spPr>
+        <p:style>
+          <a:lnRef idx="1">
+            <a:schemeClr val="accent1"/>
+          </a:lnRef>
+          <a:fillRef idx="3">
+            <a:schemeClr val="accent1"/>
+          </a:fillRef>
+          <a:effectRef idx="2">
+            <a:schemeClr val="accent1"/>
+          </a:effectRef>
+          <a:fontRef idx="minor">
+            <a:schemeClr val="lt1"/>
+          </a:fontRef>
+        </p:style>
+        <p:txBody>
+          <a:bodyPr rtlCol="0" anchor="ctr"/>
+          <a:lstStyle/>
+          <a:p>
+            <a:pPr algn="ctr"/>
+          </a:p>
+        </p:txBody>
+      </p:sp>
+      <p:sp>
+        <p:nvSpPr>
+          <p:cNvPr id="3" name="Rectangle 2"/>
+          <p:cNvSpPr/>
+          <p:nvPr/>
+        </p:nvSpPr>
+        <p:spPr>
+          <a:xfrm>
+            <a:off x="0" y="0"/>
+            <a:ext cx="12188952" cy="128016"/>
+          </a:xfrm>
+          <a:prstGeom prst="rect">
+            <a:avLst/>
+          </a:prstGeom>
+          <a:solidFill>
+            <a:srgbClr val="00C49A"/>
+          </a:solidFill>
+          <a:ln>
+            <a:noFill/>
+          </a:ln>
+          <a:effectLst/>
+        </p:spPr>
+        <p:style>
+          <a:lnRef idx="1">
+            <a:schemeClr val="accent1"/>
+          </a:lnRef>
+          <a:fillRef idx="3">
+            <a:schemeClr val="accent1"/>
+          </a:fillRef>
+          <a:effectRef idx="2">
+            <a:schemeClr val="accent1"/>
+          </a:effectRef>
+          <a:fontRef idx="minor">
+            <a:schemeClr val="lt1"/>
+          </a:fontRef>
+        </p:style>
+        <p:txBody>
+          <a:bodyPr rtlCol="0" anchor="ctr"/>
+          <a:lstStyle/>
+          <a:p>
+            <a:pPr algn="ctr"/>
+          </a:p>
+        </p:txBody>
+      </p:sp>
+      <p:sp>
+        <p:nvSpPr>
+          <p:cNvPr id="4" name="TextBox 3"/>
+          <p:cNvSpPr txBox="1"/>
+          <p:nvPr/>
+        </p:nvSpPr>
+        <p:spPr>
+          <a:xfrm>
+            <a:off x="667512" y="640080"/>
+            <a:ext cx="10789920" cy="320040"/>
+          </a:xfrm>
+          <a:prstGeom prst="rect">
+            <a:avLst/>
+          </a:prstGeom>
+          <a:noFill/>
+        </p:spPr>
+        <p:txBody>
+          <a:bodyPr wrap="square" lIns="0" rIns="0" tIns="0" bIns="0" anchor="t">
+            <a:spAutoFit/>
+          </a:bodyPr>
+          <a:lstStyle/>
+          <a:p>
+            <a:pPr algn="l">
+              <a:lnSpc>
+                <a:spcPct val="115000"/>
+              </a:lnSpc>
+            </a:pPr>
+            <a:r>
+              <a:rPr sz="1300" b="1">
+                <a:solidFill>
+                  <a:srgbClr val="00C49A"/>
+                </a:solidFill>
+                <a:latin typeface="Arial"/>
+              </a:rPr>
+              <a:t>SUMMARY</a:t>
+            </a:r>
+          </a:p>
+        </p:txBody>
+      </p:sp>
+      <p:sp>
+        <p:nvSpPr>
+          <p:cNvPr id="5" name="TextBox 4"/>
+          <p:cNvSpPr txBox="1"/>
+          <p:nvPr/>
+        </p:nvSpPr>
+        <p:spPr>
+          <a:xfrm>
+            <a:off x="667512" y="1051560"/>
+            <a:ext cx="10789920" cy="640080"/>
+          </a:xfrm>
+          <a:prstGeom prst="rect">
+            <a:avLst/>
+          </a:prstGeom>
+          <a:noFill/>
+        </p:spPr>
+        <p:txBody>
+          <a:bodyPr wrap="square" lIns="0" rIns="0" tIns="0" bIns="0" anchor="t">
+            <a:spAutoFit/>
+          </a:bodyPr>
+          <a:lstStyle/>
+          <a:p>
+            <a:pPr algn="l">
+              <a:lnSpc>
+                <a:spcPct val="115000"/>
+              </a:lnSpc>
+            </a:pPr>
+            <a:r>
+              <a:rPr sz="2800" b="1">
+                <a:solidFill>
+                  <a:srgbClr val="FFFFFF"/>
+                </a:solidFill>
+                <a:latin typeface="Microsoft JhengHei"/>
+              </a:rPr>
+              <a:t>一句話查倉管，跑在樹莓派，品質可證明</a:t>
+            </a:r>
+          </a:p>
+        </p:txBody>
+      </p:sp>
+      <p:sp>
+        <p:nvSpPr>
+          <p:cNvPr id="6" name="Rounded Rectangle 5"/>
+          <p:cNvSpPr/>
+          <p:nvPr/>
+        </p:nvSpPr>
+        <p:spPr>
+          <a:xfrm>
+            <a:off x="667512" y="1755648"/>
+            <a:ext cx="10853928" cy="722376"/>
+          </a:xfrm>
+          <a:prstGeom prst="roundRect">
+            <a:avLst>
+              <a:gd name="adj" fmla="val 8000"/>
+            </a:avLst>
+          </a:prstGeom>
+          <a:solidFill>
+            <a:srgbClr val="222A45"/>
+          </a:solidFill>
+          <a:ln>
+            <a:noFill/>
+          </a:ln>
+          <a:effectLst/>
+        </p:spPr>
+        <p:style>
+          <a:lnRef idx="1">
+            <a:schemeClr val="accent1"/>
+          </a:lnRef>
+          <a:fillRef idx="3">
+            <a:schemeClr val="accent1"/>
+          </a:fillRef>
+          <a:effectRef idx="2">
+            <a:schemeClr val="accent1"/>
+          </a:effectRef>
+          <a:fontRef idx="minor">
+            <a:schemeClr val="lt1"/>
+          </a:fontRef>
+        </p:style>
+        <p:txBody>
+          <a:bodyPr rtlCol="0" anchor="ctr"/>
+          <a:lstStyle/>
+          <a:p>
+            <a:pPr algn="ctr"/>
+          </a:p>
+        </p:txBody>
+      </p:sp>
+      <p:sp>
+        <p:nvSpPr>
+          <p:cNvPr id="7" name="Oval 6"/>
+          <p:cNvSpPr/>
+          <p:nvPr/>
+        </p:nvSpPr>
+        <p:spPr>
+          <a:xfrm>
+            <a:off x="941832" y="1920240"/>
+            <a:ext cx="475488" cy="475488"/>
+          </a:xfrm>
+          <a:prstGeom prst="ellipse">
+            <a:avLst/>
+          </a:prstGeom>
+          <a:solidFill>
+            <a:srgbClr val="00C49A"/>
+          </a:solidFill>
+          <a:ln>
+            <a:noFill/>
+          </a:ln>
+          <a:effectLst/>
+        </p:spPr>
+        <p:style>
+          <a:lnRef idx="1">
+            <a:schemeClr val="accent1"/>
+          </a:lnRef>
+          <a:fillRef idx="3">
+            <a:schemeClr val="accent1"/>
+          </a:fillRef>
+          <a:effectRef idx="2">
+            <a:schemeClr val="accent1"/>
+          </a:effectRef>
+          <a:fontRef idx="minor">
+            <a:schemeClr val="lt1"/>
+          </a:fontRef>
+        </p:style>
+        <p:txBody>
+          <a:bodyPr rtlCol="0" anchor="ctr"/>
+          <a:lstStyle/>
+          <a:p>
+            <a:pPr algn="ctr"/>
+          </a:p>
+        </p:txBody>
+      </p:sp>
+      <p:sp>
+        <p:nvSpPr>
+          <p:cNvPr id="8" name="TextBox 7"/>
+          <p:cNvSpPr txBox="1"/>
+          <p:nvPr/>
+        </p:nvSpPr>
+        <p:spPr>
+          <a:xfrm>
+            <a:off x="941832" y="1901952"/>
+            <a:ext cx="475488" cy="475488"/>
+          </a:xfrm>
+          <a:prstGeom prst="rect">
+            <a:avLst/>
+          </a:prstGeom>
+          <a:noFill/>
+        </p:spPr>
+        <p:txBody>
+          <a:bodyPr wrap="square" lIns="0" rIns="0" tIns="0" bIns="0" anchor="ctr">
+            <a:spAutoFit/>
+          </a:bodyPr>
+          <a:lstStyle/>
+          <a:p>
+            <a:pPr algn="ctr">
+              <a:lnSpc>
+                <a:spcPct val="115000"/>
+              </a:lnSpc>
+            </a:pPr>
+            <a:r>
+              <a:rPr sz="1600" b="1">
+                <a:solidFill>
+                  <a:srgbClr val="1A1A2E"/>
+                </a:solidFill>
+                <a:latin typeface="Microsoft JhengHei"/>
+              </a:rPr>
+              <a:t>價</a:t>
+            </a:r>
+          </a:p>
+        </p:txBody>
+      </p:sp>
+      <p:sp>
+        <p:nvSpPr>
+          <p:cNvPr id="9" name="TextBox 8"/>
+          <p:cNvSpPr txBox="1"/>
+          <p:nvPr/>
+        </p:nvSpPr>
+        <p:spPr>
+          <a:xfrm>
+            <a:off x="1719072" y="1865376"/>
+            <a:ext cx="1463040" cy="566928"/>
+          </a:xfrm>
+          <a:prstGeom prst="rect">
+            <a:avLst/>
+          </a:prstGeom>
+          <a:noFill/>
+        </p:spPr>
+        <p:txBody>
+          <a:bodyPr wrap="square" lIns="0" rIns="0" tIns="0" bIns="0" anchor="ctr">
+            <a:spAutoFit/>
+          </a:bodyPr>
+          <a:lstStyle/>
+          <a:p>
+            <a:pPr algn="l">
+              <a:lnSpc>
+                <a:spcPct val="115000"/>
+              </a:lnSpc>
+            </a:pPr>
+            <a:r>
+              <a:rPr sz="1700" b="1">
+                <a:solidFill>
+                  <a:srgbClr val="00C49A"/>
+                </a:solidFill>
+                <a:latin typeface="Microsoft JhengHei"/>
+              </a:rPr>
+              <a:t>價值</a:t>
+            </a:r>
+          </a:p>
+        </p:txBody>
+      </p:sp>
+      <p:sp>
+        <p:nvSpPr>
+          <p:cNvPr id="10" name="TextBox 9"/>
+          <p:cNvSpPr txBox="1"/>
+          <p:nvPr/>
+        </p:nvSpPr>
+        <p:spPr>
+          <a:xfrm>
+            <a:off x="3182112" y="1865376"/>
+            <a:ext cx="8046720" cy="566928"/>
+          </a:xfrm>
+          <a:prstGeom prst="rect">
+            <a:avLst/>
+          </a:prstGeom>
+          <a:noFill/>
+        </p:spPr>
+        <p:txBody>
+          <a:bodyPr wrap="square" lIns="0" rIns="0" tIns="0" bIns="0" anchor="ctr">
+            <a:spAutoFit/>
+          </a:bodyPr>
+          <a:lstStyle/>
+          <a:p>
+            <a:pPr algn="l">
+              <a:lnSpc>
+                <a:spcPct val="115000"/>
+              </a:lnSpc>
+            </a:pPr>
+            <a:r>
+              <a:rPr sz="1350" b="0">
+                <a:solidFill>
+                  <a:srgbClr val="FFFFFF"/>
+                </a:solidFill>
+                <a:latin typeface="Microsoft JhengHei"/>
+              </a:rPr>
+              <a:t>自然語言問倉管，一秒回答；手機掃碼、離線可用、硬體成本極低</a:t>
+            </a:r>
+          </a:p>
+        </p:txBody>
+      </p:sp>
+      <p:sp>
+        <p:nvSpPr>
+          <p:cNvPr id="11" name="Rounded Rectangle 10"/>
+          <p:cNvSpPr/>
+          <p:nvPr/>
+        </p:nvSpPr>
+        <p:spPr>
+          <a:xfrm>
+            <a:off x="667512" y="2606040"/>
+            <a:ext cx="10853928" cy="722376"/>
+          </a:xfrm>
+          <a:prstGeom prst="roundRect">
+            <a:avLst>
+              <a:gd name="adj" fmla="val 8000"/>
+            </a:avLst>
+          </a:prstGeom>
+          <a:solidFill>
+            <a:srgbClr val="222A45"/>
+          </a:solidFill>
+          <a:ln>
+            <a:noFill/>
+          </a:ln>
+          <a:effectLst/>
+        </p:spPr>
+        <p:style>
+          <a:lnRef idx="1">
+            <a:schemeClr val="accent1"/>
+          </a:lnRef>
+          <a:fillRef idx="3">
+            <a:schemeClr val="accent1"/>
+          </a:fillRef>
+          <a:effectRef idx="2">
+            <a:schemeClr val="accent1"/>
+          </a:effectRef>
+          <a:fontRef idx="minor">
+            <a:schemeClr val="lt1"/>
+          </a:fontRef>
+        </p:style>
+        <p:txBody>
+          <a:bodyPr rtlCol="0" anchor="ctr"/>
+          <a:lstStyle/>
+          <a:p>
+            <a:pPr algn="ctr"/>
+          </a:p>
+        </p:txBody>
+      </p:sp>
+      <p:sp>
+        <p:nvSpPr>
+          <p:cNvPr id="12" name="Oval 11"/>
+          <p:cNvSpPr/>
+          <p:nvPr/>
+        </p:nvSpPr>
+        <p:spPr>
+          <a:xfrm>
+            <a:off x="941832" y="2770632"/>
+            <a:ext cx="475488" cy="475488"/>
+          </a:xfrm>
+          <a:prstGeom prst="ellipse">
+            <a:avLst/>
+          </a:prstGeom>
+          <a:solidFill>
+            <a:srgbClr val="00C49A"/>
+          </a:solidFill>
+          <a:ln>
+            <a:noFill/>
+          </a:ln>
+          <a:effectLst/>
+        </p:spPr>
+        <p:style>
+          <a:lnRef idx="1">
+            <a:schemeClr val="accent1"/>
+          </a:lnRef>
+          <a:fillRef idx="3">
+            <a:schemeClr val="accent1"/>
+          </a:fillRef>
+          <a:effectRef idx="2">
+            <a:schemeClr val="accent1"/>
+          </a:effectRef>
+          <a:fontRef idx="minor">
+            <a:schemeClr val="lt1"/>
+          </a:fontRef>
+        </p:style>
+        <p:txBody>
+          <a:bodyPr rtlCol="0" anchor="ctr"/>
+          <a:lstStyle/>
+          <a:p>
+            <a:pPr algn="ctr"/>
+          </a:p>
+        </p:txBody>
+      </p:sp>
+      <p:sp>
+        <p:nvSpPr>
+          <p:cNvPr id="13" name="TextBox 12"/>
+          <p:cNvSpPr txBox="1"/>
+          <p:nvPr/>
+        </p:nvSpPr>
+        <p:spPr>
+          <a:xfrm>
+            <a:off x="941832" y="2752344"/>
+            <a:ext cx="475488" cy="475488"/>
+          </a:xfrm>
+          <a:prstGeom prst="rect">
+            <a:avLst/>
+          </a:prstGeom>
+          <a:noFill/>
+        </p:spPr>
+        <p:txBody>
+          <a:bodyPr wrap="square" lIns="0" rIns="0" tIns="0" bIns="0" anchor="ctr">
+            <a:spAutoFit/>
+          </a:bodyPr>
+          <a:lstStyle/>
+          <a:p>
+            <a:pPr algn="ctr">
+              <a:lnSpc>
+                <a:spcPct val="115000"/>
+              </a:lnSpc>
+            </a:pPr>
+            <a:r>
+              <a:rPr sz="1600" b="1">
+                <a:solidFill>
+                  <a:srgbClr val="1A1A2E"/>
+                </a:solidFill>
+                <a:latin typeface="Microsoft JhengHei"/>
+              </a:rPr>
+              <a:t>技</a:t>
+            </a:r>
+          </a:p>
+        </p:txBody>
+      </p:sp>
+      <p:sp>
+        <p:nvSpPr>
+          <p:cNvPr id="14" name="TextBox 13"/>
+          <p:cNvSpPr txBox="1"/>
+          <p:nvPr/>
+        </p:nvSpPr>
+        <p:spPr>
+          <a:xfrm>
+            <a:off x="1719072" y="2715768"/>
+            <a:ext cx="1463040" cy="566928"/>
+          </a:xfrm>
+          <a:prstGeom prst="rect">
+            <a:avLst/>
+          </a:prstGeom>
+          <a:noFill/>
+        </p:spPr>
+        <p:txBody>
+          <a:bodyPr wrap="square" lIns="0" rIns="0" tIns="0" bIns="0" anchor="ctr">
+            <a:spAutoFit/>
+          </a:bodyPr>
+          <a:lstStyle/>
+          <a:p>
+            <a:pPr algn="l">
+              <a:lnSpc>
+                <a:spcPct val="115000"/>
+              </a:lnSpc>
+            </a:pPr>
+            <a:r>
+              <a:rPr sz="1700" b="1">
+                <a:solidFill>
+                  <a:srgbClr val="00C49A"/>
+                </a:solidFill>
+                <a:latin typeface="Microsoft JhengHei"/>
+              </a:rPr>
+              <a:t>技術</a:t>
+            </a:r>
+          </a:p>
+        </p:txBody>
+      </p:sp>
+      <p:sp>
+        <p:nvSpPr>
+          <p:cNvPr id="15" name="TextBox 14"/>
+          <p:cNvSpPr txBox="1"/>
+          <p:nvPr/>
+        </p:nvSpPr>
+        <p:spPr>
+          <a:xfrm>
+            <a:off x="3182112" y="2715768"/>
+            <a:ext cx="8046720" cy="566928"/>
+          </a:xfrm>
+          <a:prstGeom prst="rect">
+            <a:avLst/>
+          </a:prstGeom>
+          <a:noFill/>
+        </p:spPr>
+        <p:txBody>
+          <a:bodyPr wrap="square" lIns="0" rIns="0" tIns="0" bIns="0" anchor="ctr">
+            <a:spAutoFit/>
+          </a:bodyPr>
+          <a:lstStyle/>
+          <a:p>
+            <a:pPr algn="l">
+              <a:lnSpc>
+                <a:spcPct val="115000"/>
+              </a:lnSpc>
+            </a:pPr>
+            <a:r>
+              <a:rPr sz="1350" b="0">
+                <a:solidFill>
+                  <a:srgbClr val="FFFFFF"/>
+                </a:solidFill>
+                <a:latin typeface="Microsoft JhengHei"/>
+              </a:rPr>
+              <a:t>270M 小模型當路由器 + 規則層當決策者，業界邊緣 Agent 的正解</a:t>
+            </a:r>
+          </a:p>
+        </p:txBody>
+      </p:sp>
+      <p:sp>
+        <p:nvSpPr>
+          <p:cNvPr id="16" name="Rounded Rectangle 15"/>
+          <p:cNvSpPr/>
+          <p:nvPr/>
+        </p:nvSpPr>
+        <p:spPr>
+          <a:xfrm>
+            <a:off x="667512" y="3456432"/>
+            <a:ext cx="10853928" cy="722376"/>
+          </a:xfrm>
+          <a:prstGeom prst="roundRect">
+            <a:avLst>
+              <a:gd name="adj" fmla="val 8000"/>
+            </a:avLst>
+          </a:prstGeom>
+          <a:solidFill>
+            <a:srgbClr val="222A45"/>
+          </a:solidFill>
+          <a:ln>
+            <a:noFill/>
+          </a:ln>
+          <a:effectLst/>
+        </p:spPr>
+        <p:style>
+          <a:lnRef idx="1">
+            <a:schemeClr val="accent1"/>
+          </a:lnRef>
+          <a:fillRef idx="3">
+            <a:schemeClr val="accent1"/>
+          </a:fillRef>
+          <a:effectRef idx="2">
+            <a:schemeClr val="accent1"/>
+          </a:effectRef>
+          <a:fontRef idx="minor">
+            <a:schemeClr val="lt1"/>
+          </a:fontRef>
+        </p:style>
+        <p:txBody>
+          <a:bodyPr rtlCol="0" anchor="ctr"/>
+          <a:lstStyle/>
+          <a:p>
+            <a:pPr algn="ctr"/>
+          </a:p>
+        </p:txBody>
+      </p:sp>
+      <p:sp>
+        <p:nvSpPr>
+          <p:cNvPr id="17" name="Oval 16"/>
+          <p:cNvSpPr/>
+          <p:nvPr/>
+        </p:nvSpPr>
+        <p:spPr>
+          <a:xfrm>
+            <a:off x="941832" y="3621024"/>
+            <a:ext cx="475488" cy="475488"/>
+          </a:xfrm>
+          <a:prstGeom prst="ellipse">
+            <a:avLst/>
+          </a:prstGeom>
+          <a:solidFill>
+            <a:srgbClr val="00C49A"/>
+          </a:solidFill>
+          <a:ln>
+            <a:noFill/>
+          </a:ln>
+          <a:effectLst/>
+        </p:spPr>
+        <p:style>
+          <a:lnRef idx="1">
+            <a:schemeClr val="accent1"/>
+          </a:lnRef>
+          <a:fillRef idx="3">
+            <a:schemeClr val="accent1"/>
+          </a:fillRef>
+          <a:effectRef idx="2">
+            <a:schemeClr val="accent1"/>
+          </a:effectRef>
+          <a:fontRef idx="minor">
+            <a:schemeClr val="lt1"/>
+          </a:fontRef>
+        </p:style>
+        <p:txBody>
+          <a:bodyPr rtlCol="0" anchor="ctr"/>
+          <a:lstStyle/>
+          <a:p>
+            <a:pPr algn="ctr"/>
+          </a:p>
+        </p:txBody>
+      </p:sp>
+      <p:sp>
+        <p:nvSpPr>
+          <p:cNvPr id="18" name="TextBox 17"/>
+          <p:cNvSpPr txBox="1"/>
+          <p:nvPr/>
+        </p:nvSpPr>
+        <p:spPr>
+          <a:xfrm>
+            <a:off x="941832" y="3602736"/>
+            <a:ext cx="475488" cy="475488"/>
+          </a:xfrm>
+          <a:prstGeom prst="rect">
+            <a:avLst/>
+          </a:prstGeom>
+          <a:noFill/>
+        </p:spPr>
+        <p:txBody>
+          <a:bodyPr wrap="square" lIns="0" rIns="0" tIns="0" bIns="0" anchor="ctr">
+            <a:spAutoFit/>
+          </a:bodyPr>
+          <a:lstStyle/>
+          <a:p>
+            <a:pPr algn="ctr">
+              <a:lnSpc>
+                <a:spcPct val="115000"/>
+              </a:lnSpc>
+            </a:pPr>
+            <a:r>
+              <a:rPr sz="1600" b="1">
+                <a:solidFill>
+                  <a:srgbClr val="1A1A2E"/>
+                </a:solidFill>
+                <a:latin typeface="Microsoft JhengHei"/>
+              </a:rPr>
+              <a:t>品</a:t>
+            </a:r>
+          </a:p>
+        </p:txBody>
+      </p:sp>
+      <p:sp>
+        <p:nvSpPr>
+          <p:cNvPr id="19" name="TextBox 18"/>
+          <p:cNvSpPr txBox="1"/>
+          <p:nvPr/>
+        </p:nvSpPr>
+        <p:spPr>
+          <a:xfrm>
+            <a:off x="1719072" y="3566160"/>
+            <a:ext cx="1463040" cy="566928"/>
+          </a:xfrm>
+          <a:prstGeom prst="rect">
+            <a:avLst/>
+          </a:prstGeom>
+          <a:noFill/>
+        </p:spPr>
+        <p:txBody>
+          <a:bodyPr wrap="square" lIns="0" rIns="0" tIns="0" bIns="0" anchor="ctr">
+            <a:spAutoFit/>
+          </a:bodyPr>
+          <a:lstStyle/>
+          <a:p>
+            <a:pPr algn="l">
+              <a:lnSpc>
+                <a:spcPct val="115000"/>
+              </a:lnSpc>
+            </a:pPr>
+            <a:r>
+              <a:rPr sz="1700" b="1">
+                <a:solidFill>
+                  <a:srgbClr val="00C49A"/>
+                </a:solidFill>
+                <a:latin typeface="Microsoft JhengHei"/>
+              </a:rPr>
+              <a:t>品質</a:t>
+            </a:r>
+          </a:p>
+        </p:txBody>
+      </p:sp>
+      <p:sp>
+        <p:nvSpPr>
+          <p:cNvPr id="20" name="TextBox 19"/>
+          <p:cNvSpPr txBox="1"/>
+          <p:nvPr/>
+        </p:nvSpPr>
+        <p:spPr>
+          <a:xfrm>
+            <a:off x="3182112" y="3566160"/>
+            <a:ext cx="8046720" cy="566928"/>
+          </a:xfrm>
+          <a:prstGeom prst="rect">
+            <a:avLst/>
+          </a:prstGeom>
+          <a:noFill/>
+        </p:spPr>
+        <p:txBody>
+          <a:bodyPr wrap="square" lIns="0" rIns="0" tIns="0" bIns="0" anchor="ctr">
+            <a:spAutoFit/>
+          </a:bodyPr>
+          <a:lstStyle/>
+          <a:p>
+            <a:pPr algn="l">
+              <a:lnSpc>
+                <a:spcPct val="115000"/>
+              </a:lnSpc>
+            </a:pPr>
+            <a:r>
+              <a:rPr sz="1350" b="0">
+                <a:solidFill>
+                  <a:srgbClr val="FFFFFF"/>
+                </a:solidFill>
+                <a:latin typeface="Microsoft JhengHei"/>
+              </a:rPr>
+              <a:t>中文 1122 句雙平台 100%、英文 892 句 100%；「可靠」是數字不是祈禱</a:t>
+            </a:r>
+          </a:p>
+        </p:txBody>
+      </p:sp>
+      <p:sp>
+        <p:nvSpPr>
+          <p:cNvPr id="21" name="Rounded Rectangle 20"/>
+          <p:cNvSpPr/>
+          <p:nvPr/>
+        </p:nvSpPr>
+        <p:spPr>
+          <a:xfrm>
+            <a:off x="667512" y="4306824"/>
+            <a:ext cx="10853928" cy="722376"/>
+          </a:xfrm>
+          <a:prstGeom prst="roundRect">
+            <a:avLst>
+              <a:gd name="adj" fmla="val 8000"/>
+            </a:avLst>
+          </a:prstGeom>
+          <a:solidFill>
+            <a:srgbClr val="222A45"/>
+          </a:solidFill>
+          <a:ln>
+            <a:noFill/>
+          </a:ln>
+          <a:effectLst/>
+        </p:spPr>
+        <p:style>
+          <a:lnRef idx="1">
+            <a:schemeClr val="accent1"/>
+          </a:lnRef>
+          <a:fillRef idx="3">
+            <a:schemeClr val="accent1"/>
+          </a:fillRef>
+          <a:effectRef idx="2">
+            <a:schemeClr val="accent1"/>
+          </a:effectRef>
+          <a:fontRef idx="minor">
+            <a:schemeClr val="lt1"/>
+          </a:fontRef>
+        </p:style>
+        <p:txBody>
+          <a:bodyPr rtlCol="0" anchor="ctr"/>
+          <a:lstStyle/>
+          <a:p>
+            <a:pPr algn="ctr"/>
+          </a:p>
+        </p:txBody>
+      </p:sp>
+      <p:sp>
+        <p:nvSpPr>
+          <p:cNvPr id="22" name="Oval 21"/>
+          <p:cNvSpPr/>
+          <p:nvPr/>
+        </p:nvSpPr>
+        <p:spPr>
+          <a:xfrm>
+            <a:off x="941832" y="4471416"/>
+            <a:ext cx="475488" cy="475488"/>
+          </a:xfrm>
+          <a:prstGeom prst="ellipse">
+            <a:avLst/>
+          </a:prstGeom>
+          <a:solidFill>
+            <a:srgbClr val="00C49A"/>
+          </a:solidFill>
+          <a:ln>
+            <a:noFill/>
+          </a:ln>
+          <a:effectLst/>
+        </p:spPr>
+        <p:style>
+          <a:lnRef idx="1">
+            <a:schemeClr val="accent1"/>
+          </a:lnRef>
+          <a:fillRef idx="3">
+            <a:schemeClr val="accent1"/>
+          </a:fillRef>
+          <a:effectRef idx="2">
+            <a:schemeClr val="accent1"/>
+          </a:effectRef>
+          <a:fontRef idx="minor">
+            <a:schemeClr val="lt1"/>
+          </a:fontRef>
+        </p:style>
+        <p:txBody>
+          <a:bodyPr rtlCol="0" anchor="ctr"/>
+          <a:lstStyle/>
+          <a:p>
+            <a:pPr algn="ctr"/>
+          </a:p>
+        </p:txBody>
+      </p:sp>
+      <p:sp>
+        <p:nvSpPr>
+          <p:cNvPr id="23" name="TextBox 22"/>
+          <p:cNvSpPr txBox="1"/>
+          <p:nvPr/>
+        </p:nvSpPr>
+        <p:spPr>
+          <a:xfrm>
+            <a:off x="941832" y="4453128"/>
+            <a:ext cx="475488" cy="475488"/>
+          </a:xfrm>
+          <a:prstGeom prst="rect">
+            <a:avLst/>
+          </a:prstGeom>
+          <a:noFill/>
+        </p:spPr>
+        <p:txBody>
+          <a:bodyPr wrap="square" lIns="0" rIns="0" tIns="0" bIns="0" anchor="ctr">
+            <a:spAutoFit/>
+          </a:bodyPr>
+          <a:lstStyle/>
+          <a:p>
+            <a:pPr algn="ctr">
+              <a:lnSpc>
+                <a:spcPct val="115000"/>
+              </a:lnSpc>
+            </a:pPr>
+            <a:r>
+              <a:rPr sz="1600" b="1">
+                <a:solidFill>
+                  <a:srgbClr val="1A1A2E"/>
+                </a:solidFill>
+                <a:latin typeface="Microsoft JhengHei"/>
+              </a:rPr>
+              <a:t>語</a:t>
+            </a:r>
+          </a:p>
+        </p:txBody>
+      </p:sp>
+      <p:sp>
+        <p:nvSpPr>
+          <p:cNvPr id="24" name="TextBox 23"/>
+          <p:cNvSpPr txBox="1"/>
+          <p:nvPr/>
+        </p:nvSpPr>
+        <p:spPr>
+          <a:xfrm>
+            <a:off x="1719072" y="4416552"/>
+            <a:ext cx="1463040" cy="566928"/>
+          </a:xfrm>
+          <a:prstGeom prst="rect">
+            <a:avLst/>
+          </a:prstGeom>
+          <a:noFill/>
+        </p:spPr>
+        <p:txBody>
+          <a:bodyPr wrap="square" lIns="0" rIns="0" tIns="0" bIns="0" anchor="ctr">
+            <a:spAutoFit/>
+          </a:bodyPr>
+          <a:lstStyle/>
+          <a:p>
+            <a:pPr algn="l">
+              <a:lnSpc>
+                <a:spcPct val="115000"/>
+              </a:lnSpc>
+            </a:pPr>
+            <a:r>
+              <a:rPr sz="1700" b="1">
+                <a:solidFill>
+                  <a:srgbClr val="00C49A"/>
+                </a:solidFill>
+                <a:latin typeface="Microsoft JhengHei"/>
+              </a:rPr>
+              <a:t>語音</a:t>
+            </a:r>
+          </a:p>
+        </p:txBody>
+      </p:sp>
+      <p:sp>
+        <p:nvSpPr>
+          <p:cNvPr id="25" name="TextBox 24"/>
+          <p:cNvSpPr txBox="1"/>
+          <p:nvPr/>
+        </p:nvSpPr>
+        <p:spPr>
+          <a:xfrm>
+            <a:off x="3182112" y="4416552"/>
+            <a:ext cx="8046720" cy="566928"/>
+          </a:xfrm>
+          <a:prstGeom prst="rect">
+            <a:avLst/>
+          </a:prstGeom>
+          <a:noFill/>
+        </p:spPr>
+        <p:txBody>
+          <a:bodyPr wrap="square" lIns="0" rIns="0" tIns="0" bIns="0" anchor="ctr">
+            <a:spAutoFit/>
+          </a:bodyPr>
+          <a:lstStyle/>
+          <a:p>
+            <a:pPr algn="l">
+              <a:lnSpc>
+                <a:spcPct val="115000"/>
+              </a:lnSpc>
+            </a:pPr>
+            <a:r>
+              <a:rPr sz="1350" b="0">
+                <a:solidFill>
+                  <a:srgbClr val="FFFFFF"/>
+                </a:solidFill>
+                <a:latin typeface="Microsoft JhengHei"/>
+              </a:rPr>
+              <a:t>全離線 whisper；英文 0.94s / 句，中英共用一套 runtime</a:t>
+            </a:r>
+          </a:p>
+        </p:txBody>
+      </p:sp>
+      <p:sp>
+        <p:nvSpPr>
+          <p:cNvPr id="26" name="Rounded Rectangle 25"/>
+          <p:cNvSpPr/>
+          <p:nvPr/>
+        </p:nvSpPr>
+        <p:spPr>
+          <a:xfrm>
+            <a:off x="667512" y="5157216"/>
+            <a:ext cx="10853928" cy="722376"/>
+          </a:xfrm>
+          <a:prstGeom prst="roundRect">
+            <a:avLst>
+              <a:gd name="adj" fmla="val 8000"/>
+            </a:avLst>
+          </a:prstGeom>
+          <a:solidFill>
+            <a:srgbClr val="222A45"/>
+          </a:solidFill>
+          <a:ln>
+            <a:noFill/>
+          </a:ln>
+          <a:effectLst/>
+        </p:spPr>
+        <p:style>
+          <a:lnRef idx="1">
+            <a:schemeClr val="accent1"/>
+          </a:lnRef>
+          <a:fillRef idx="3">
+            <a:schemeClr val="accent1"/>
+          </a:fillRef>
+          <a:effectRef idx="2">
+            <a:schemeClr val="accent1"/>
+          </a:effectRef>
+          <a:fontRef idx="minor">
+            <a:schemeClr val="lt1"/>
+          </a:fontRef>
+        </p:style>
+        <p:txBody>
+          <a:bodyPr rtlCol="0" anchor="ctr"/>
+          <a:lstStyle/>
+          <a:p>
+            <a:pPr algn="ctr"/>
+          </a:p>
+        </p:txBody>
+      </p:sp>
+      <p:sp>
+        <p:nvSpPr>
+          <p:cNvPr id="27" name="Oval 26"/>
+          <p:cNvSpPr/>
+          <p:nvPr/>
+        </p:nvSpPr>
+        <p:spPr>
+          <a:xfrm>
+            <a:off x="941832" y="5321808"/>
+            <a:ext cx="475488" cy="475488"/>
+          </a:xfrm>
+          <a:prstGeom prst="ellipse">
+            <a:avLst/>
+          </a:prstGeom>
+          <a:solidFill>
+            <a:srgbClr val="00C49A"/>
+          </a:solidFill>
+          <a:ln>
+            <a:noFill/>
+          </a:ln>
+          <a:effectLst/>
+        </p:spPr>
+        <p:style>
+          <a:lnRef idx="1">
+            <a:schemeClr val="accent1"/>
+          </a:lnRef>
+          <a:fillRef idx="3">
+            <a:schemeClr val="accent1"/>
+          </a:fillRef>
+          <a:effectRef idx="2">
+            <a:schemeClr val="accent1"/>
+          </a:effectRef>
+          <a:fontRef idx="minor">
+            <a:schemeClr val="lt1"/>
+          </a:fontRef>
+        </p:style>
+        <p:txBody>
+          <a:bodyPr rtlCol="0" anchor="ctr"/>
+          <a:lstStyle/>
+          <a:p>
+            <a:pPr algn="ctr"/>
+          </a:p>
+        </p:txBody>
+      </p:sp>
+      <p:sp>
+        <p:nvSpPr>
+          <p:cNvPr id="28" name="TextBox 27"/>
+          <p:cNvSpPr txBox="1"/>
+          <p:nvPr/>
+        </p:nvSpPr>
+        <p:spPr>
+          <a:xfrm>
+            <a:off x="941832" y="5303520"/>
+            <a:ext cx="475488" cy="475488"/>
+          </a:xfrm>
+          <a:prstGeom prst="rect">
+            <a:avLst/>
+          </a:prstGeom>
+          <a:noFill/>
+        </p:spPr>
+        <p:txBody>
+          <a:bodyPr wrap="square" lIns="0" rIns="0" tIns="0" bIns="0" anchor="ctr">
+            <a:spAutoFit/>
+          </a:bodyPr>
+          <a:lstStyle/>
+          <a:p>
+            <a:pPr algn="ctr">
+              <a:lnSpc>
+                <a:spcPct val="115000"/>
+              </a:lnSpc>
+            </a:pPr>
+            <a:r>
+              <a:rPr sz="1600" b="1">
+                <a:solidFill>
+                  <a:srgbClr val="1A1A2E"/>
+                </a:solidFill>
+                <a:latin typeface="Microsoft JhengHei"/>
+              </a:rPr>
+              <a:t>雙</a:t>
+            </a:r>
+          </a:p>
+        </p:txBody>
+      </p:sp>
+      <p:sp>
+        <p:nvSpPr>
+          <p:cNvPr id="29" name="TextBox 28"/>
+          <p:cNvSpPr txBox="1"/>
+          <p:nvPr/>
+        </p:nvSpPr>
+        <p:spPr>
+          <a:xfrm>
+            <a:off x="1719072" y="5266944"/>
+            <a:ext cx="1463040" cy="566928"/>
+          </a:xfrm>
+          <a:prstGeom prst="rect">
+            <a:avLst/>
+          </a:prstGeom>
+          <a:noFill/>
+        </p:spPr>
+        <p:txBody>
+          <a:bodyPr wrap="square" lIns="0" rIns="0" tIns="0" bIns="0" anchor="ctr">
+            <a:spAutoFit/>
+          </a:bodyPr>
+          <a:lstStyle/>
+          <a:p>
+            <a:pPr algn="l">
+              <a:lnSpc>
+                <a:spcPct val="115000"/>
+              </a:lnSpc>
+            </a:pPr>
+            <a:r>
+              <a:rPr sz="1700" b="1">
+                <a:solidFill>
+                  <a:srgbClr val="00C49A"/>
+                </a:solidFill>
+                <a:latin typeface="Microsoft JhengHei"/>
+              </a:rPr>
+              <a:t>雙語</a:t>
+            </a:r>
+          </a:p>
+        </p:txBody>
+      </p:sp>
+      <p:sp>
+        <p:nvSpPr>
+          <p:cNvPr id="30" name="TextBox 29"/>
+          <p:cNvSpPr txBox="1"/>
+          <p:nvPr/>
+        </p:nvSpPr>
+        <p:spPr>
+          <a:xfrm>
+            <a:off x="3182112" y="5266944"/>
+            <a:ext cx="8046720" cy="566928"/>
+          </a:xfrm>
+          <a:prstGeom prst="rect">
+            <a:avLst/>
+          </a:prstGeom>
+          <a:noFill/>
+        </p:spPr>
+        <p:txBody>
+          <a:bodyPr wrap="square" lIns="0" rIns="0" tIns="0" bIns="0" anchor="ctr">
+            <a:spAutoFit/>
+          </a:bodyPr>
+          <a:lstStyle/>
+          <a:p>
+            <a:pPr algn="l">
+              <a:lnSpc>
+                <a:spcPct val="115000"/>
+              </a:lnSpc>
+            </a:pPr>
+            <a:r>
+              <a:rPr sz="1350" b="0">
+                <a:solidFill>
+                  <a:srgbClr val="FFFFFF"/>
+                </a:solidFill>
+                <a:latin typeface="Microsoft JhengHei"/>
+              </a:rPr>
+              <a:t>中英雙版同機並存，訪客點分頁切換；移植 19 類坑已歸納成方法論</a:t>
+            </a:r>
+          </a:p>
+        </p:txBody>
+      </p:sp>
+      <p:sp>
+        <p:nvSpPr>
+          <p:cNvPr id="31" name="TextBox 30"/>
+          <p:cNvSpPr txBox="1"/>
+          <p:nvPr/>
+        </p:nvSpPr>
+        <p:spPr>
+          <a:xfrm>
+            <a:off x="667512" y="6089904"/>
+            <a:ext cx="10789920" cy="457200"/>
+          </a:xfrm>
+          <a:prstGeom prst="rect">
+            <a:avLst/>
+          </a:prstGeom>
+          <a:noFill/>
+        </p:spPr>
+        <p:txBody>
+          <a:bodyPr wrap="square" lIns="0" rIns="0" tIns="0" bIns="0" anchor="t">
+            <a:spAutoFit/>
+          </a:bodyPr>
+          <a:lstStyle/>
+          <a:p>
+            <a:pPr algn="l">
+              <a:lnSpc>
+                <a:spcPct val="115000"/>
+              </a:lnSpc>
+            </a:pPr>
+            <a:r>
+              <a:rPr sz="1300" b="0">
+                <a:solidFill>
+                  <a:srgbClr val="BBBBBB"/>
+                </a:solidFill>
+                <a:latin typeface="Microsoft JhengHei"/>
+              </a:rPr>
+              <a:t>下一步：展前真機全量驗收、demo 基準日對齊——重置鈕 / 開機自啟 / Wi-Fi 自癒 / 中英雙版並存已完成</a:t>
+            </a:r>
+          </a:p>
+        </p:txBody>
+      </p:sp>
+      <p:sp>
+        <p:nvSpPr>
+          <p:cNvPr id="32" name="TextBox 31"/>
+          <p:cNvSpPr txBox="1"/>
+          <p:nvPr/>
+        </p:nvSpPr>
+        <p:spPr>
+          <a:xfrm>
+            <a:off x="11475720" y="6565392"/>
+            <a:ext cx="658368" cy="237744"/>
+          </a:xfrm>
+          <a:prstGeom prst="rect">
+            <a:avLst/>
+          </a:prstGeom>
+          <a:noFill/>
+        </p:spPr>
+        <p:txBody>
+          <a:bodyPr wrap="square" lIns="0" rIns="0" tIns="0" bIns="0" anchor="t">
+            <a:spAutoFit/>
+          </a:bodyPr>
+          <a:lstStyle/>
+          <a:p>
+            <a:pPr algn="r">
+              <a:lnSpc>
+                <a:spcPct val="115000"/>
+              </a:lnSpc>
+            </a:pPr>
+            <a:r>
+              <a:rPr sz="1000" b="0">
+                <a:solidFill>
+                  <a:srgbClr val="BBBBBB"/>
+                </a:solidFill>
+                <a:latin typeface="Arial"/>
+              </a:rPr>
+              <a:t>30</a:t>
             </a:r>
           </a:p>
         </p:txBody>

--- a/倉管Agent_專案簡報.pptx
+++ b/倉管Agent_專案簡報.pptx
@@ -1461,7 +1461,7 @@
               <a:rPr sz="1200">
                 <a:latin typeface="Microsoft JhengHei"/>
               </a:rPr>
-              <a:t>★語音選型頁（技術評審向）。**這一頁 2026-07-27 全面改版**：原本用阿里的 Fun-ASR-Nano，後來定調**只用歐美模型**（供應鏈來源可控），中英兩版都換成 OpenAI whisper.cpp。換完的額外好處：中英共用同一套 runtime，不必維護兩套框架。選型結果：英文版 tiny.en（74MB / 0.94s / WER 9.3%）、中文版 base（141MB / 6.8s）。兩個值得講的洞見——①**反直覺**：base.en 比 tiny.en 更大更慢，WER 反而略差（10.2% vs 9.3%），因為倉管查詢句短、句型固定，tiny 的容量已經夠用，變大的收益顯現不出來；這推翻『模型越大越好』的直覺，也呼應整個專案『選對尺寸勝過選大尺寸』的主張。②**選型不能只看 WER**：中文版 base 真人 8 句字面只對 3 句，但端到端 8/8 全部答對——聽錯的『盡量啤酒酷醇』『無限滑鼠擴存』『瑜伽店』全被文字端容錯層救回。這正好證明前面幾頁講的容錯層是真的在扛事情。代價誠實講：中文 base 6.8s/句比原本慢，但中文版是備案、英文版才是展場主力（tiny.en 0.94s 很順）。英文數據為 TTS 合成音實測（5 腔調×20 句×3 噪音層），中文為 user 錄的真人音——TTS 是下限估計，評審追問據實說明。</a:t>
+              <a:t>★語音選型頁（技術評審向）。**這一頁 2026-07-27 全面改版**：原本用阿里的 Fun-ASR-Nano，後來定調**只用歐美模型**（供應鏈來源可控），中英兩版都換成 OpenAI whisper.cpp。換完的額外好處：中英共用同一套 runtime，不必維護兩套框架。選型結果：英文版 tiny.en（74MB / 0.94s / WER 9.3%）、中文版 base（141MB / 2.15s）。兩個值得講的洞見——①**反直覺**：base.en 比 tiny.en 更大更慢，WER 反而略差（10.2% vs 9.3%），因為倉管查詢句短、句型固定，tiny 的容量已經夠用，變大的收益顯現不出來；這推翻『模型越大越好』的直覺，也呼應整個專案『選對尺寸勝過選大尺寸』的主張。②**選型不能只看 WER**：中文版 base 真人 8 句字面只對 3 句，但端到端 8/8 全部答對——聽錯的『盡量啤酒酷醇』『無限滑鼠擴存』『瑜伽店』全被文字端容錯層救回。這正好證明前面幾頁講的容錯層是真的在扛事情。代價誠實講：中文 base 2.15s/句比原本略慢，但中文版是備案、英文版才是展場主力（tiny.en 0.94s 很順）。英文數據為 TTS 合成音實測（5 腔調×20 句×3 噪音層），中文為 user 錄的真人音——TTS 是下限估計，評審追問據實說明。</a:t>
             </a:r>
           </a:p>
         </p:txBody>
@@ -16796,7 +16796,7 @@
                 </a:solidFill>
                 <a:latin typeface="Arial"/>
               </a:rPr>
-              <a:t>6.8s</a:t>
+              <a:t>2.15s</a:t>
             </a:r>
           </a:p>
         </p:txBody>

--- a/倉管Agent_專案簡報.pptx
+++ b/倉管Agent_專案簡報.pptx
@@ -35,6 +35,7 @@
     <p:sldId id="283" r:id="rId35"/>
     <p:sldId id="284" r:id="rId36"/>
     <p:sldId id="285" r:id="rId37"/>
+    <p:sldId id="286" r:id="rId38"/>
   </p:sldIdLst>
   <p:sldSz cx="12188952" cy="6858000" type="screen4x3"/>
   <p:notesSz cx="6858000" cy="9144000"/>
@@ -2387,6 +2388,79 @@
 </file>
 
 <file path=ppt/notesSlides/notesSlide30.xml><?xml version="1.0" encoding="utf-8"?>
+<p:notes xmlns:a="http://schemas.openxmlformats.org/drawingml/2006/main" xmlns:p="http://schemas.openxmlformats.org/presentationml/2006/main" xmlns:r="http://schemas.openxmlformats.org/officeDocument/2006/relationships">
+  <p:cSld>
+    <p:spTree>
+      <p:nvGrpSpPr>
+        <p:cNvPr id="1" name=""/>
+        <p:cNvGrpSpPr/>
+        <p:nvPr/>
+      </p:nvGrpSpPr>
+      <p:grpSpPr>
+        <a:xfrm>
+          <a:off x="0" y="0"/>
+          <a:ext cx="0" cy="0"/>
+          <a:chOff x="0" y="0"/>
+          <a:chExt cx="0" cy="0"/>
+        </a:xfrm>
+      </p:grpSpPr>
+      <p:sp>
+        <p:nvSpPr>
+          <p:cNvPr id="2" name="Slide Image Placeholder 1"/>
+          <p:cNvSpPr>
+            <a:spLocks noGrp="1"/>
+          </p:cNvSpPr>
+          <p:nvPr>
+            <p:ph type="sldImg" idx="2"/>
+          </p:nvPr>
+        </p:nvSpPr>
+        <p:spPr/>
+      </p:sp>
+      <p:sp>
+        <p:nvSpPr>
+          <p:cNvPr id="3" name="Notes Placeholder 2"/>
+          <p:cNvSpPr>
+            <a:spLocks noGrp="1"/>
+          </p:cNvSpPr>
+          <p:nvPr>
+            <p:ph type="body" idx="3" sz="quarter"/>
+          </p:nvPr>
+        </p:nvSpPr>
+        <p:spPr/>
+        <p:txBody>
+          <a:bodyPr/>
+          <a:lstStyle/>
+          <a:p>
+            <a:r>
+              <a:rPr sz="1200">
+                <a:latin typeface="Microsoft JhengHei"/>
+              </a:rPr>
+              <a:t>★真人語音實測頁（誠實面對落差，技術評審會問「你們測過真人嗎」）。**這是英文版第一份真人語音數據**——先前所有英文語音數字都來自 TTS 合成音。三段對照：①TTS 92%（US 腔 99 句）②真人非母語 55%（台灣腔 38 句，同一支 C930 麥克風、同一顆 whisper small-q5_0 模型、走完整語音鏈到倉管判定）③加 ASR 容錯層後 **79%**——關鍵是**同一批音檔、沒有重錄**，只在 ASR 出口加規則。**TTS 高估了 37 個百分點**，這與中文版的經驗一致（當時合成音 clean 100%、真人首測只有 35/52）——所以這個專案的鐵則是：合成音只能當下限篩檢，**掛了肯定不行，過了不代表可用**。三類錯法要分清楚：詞尾被吞（shipped→shed）是非母語者通病但母語者也有；連音（sun hat→some heat）母語者講快時更容易發生；整詞被替換（trash bags→trespass life）則**沒有可用訊號能修**，硬修會誤傷正常查詢，誠實留著。容錯層只收「有規律且驗證過不誤傷」的三類，並在真人音檔上驗證 +24%。⚠️ 評審若追問可靠度，要主動說明：79% 是 user 重錄挑最好那次的結果，**一次命中率更低**；展場訪客只有一次機會。母語者預估 75-85%（TTS 測五個腔調 GB93/US92/AU90/IN90/SG77，但 TTS 不等於真人）。最後一句是設計取捨：答不出來時系統會**誠實反問**而不是亂猜，所以錯的時候不會給出錯誤數字——這比硬湊一個答案安全。</a:t>
+            </a:r>
+          </a:p>
+        </p:txBody>
+      </p:sp>
+      <p:sp>
+        <p:nvSpPr>
+          <p:cNvPr id="4" name="Slide Number Placeholder 3"/>
+          <p:cNvSpPr>
+            <a:spLocks noGrp="1"/>
+          </p:cNvSpPr>
+          <p:nvPr>
+            <p:ph type="sldNum" idx="5" sz="quarter"/>
+          </p:nvPr>
+        </p:nvSpPr>
+        <p:spPr/>
+      </p:sp>
+    </p:spTree>
+  </p:cSld>
+  <p:clrMapOvr>
+    <a:masterClrMapping/>
+  </p:clrMapOvr>
+</p:notes>
+</file>
+
+<file path=ppt/notesSlides/notesSlide31.xml><?xml version="1.0" encoding="utf-8"?>
 <p:notes xmlns:a="http://schemas.openxmlformats.org/drawingml/2006/main" xmlns:p="http://schemas.openxmlformats.org/presentationml/2006/main" xmlns:r="http://schemas.openxmlformats.org/officeDocument/2006/relationships">
   <p:cSld>
     <p:spTree>
@@ -37577,17 +37651,1147 @@
       <p:grpSpPr/>
       <p:sp>
         <p:nvSpPr>
-          <p:cNvPr id="2" name="Rectangle 1"/>
+          <p:cNvPr id="2" name="TextBox 1"/>
+          <p:cNvSpPr txBox="1"/>
+          <p:nvPr/>
+        </p:nvSpPr>
+        <p:spPr>
+          <a:xfrm>
+            <a:off x="667512" y="310896"/>
+            <a:ext cx="10789920" cy="274320"/>
+          </a:xfrm>
+          <a:prstGeom prst="rect">
+            <a:avLst/>
+          </a:prstGeom>
+          <a:noFill/>
+        </p:spPr>
+        <p:txBody>
+          <a:bodyPr wrap="square" lIns="0" rIns="0" tIns="0" bIns="0" anchor="t">
+            <a:spAutoFit/>
+          </a:bodyPr>
+          <a:lstStyle/>
+          <a:p>
+            <a:pPr algn="l">
+              <a:lnSpc>
+                <a:spcPct val="115000"/>
+              </a:lnSpc>
+            </a:pPr>
+            <a:r>
+              <a:rPr sz="1250" b="1">
+                <a:solidFill>
+                  <a:srgbClr val="00C49A"/>
+                </a:solidFill>
+                <a:latin typeface="Arial"/>
+              </a:rPr>
+              <a:t>VOICE · 真人實測</a:t>
+            </a:r>
+          </a:p>
+        </p:txBody>
+      </p:sp>
+      <p:sp>
+        <p:nvSpPr>
+          <p:cNvPr id="3" name="TextBox 2"/>
+          <p:cNvSpPr txBox="1"/>
+          <p:nvPr/>
+        </p:nvSpPr>
+        <p:spPr>
+          <a:xfrm>
+            <a:off x="667512" y="585216"/>
+            <a:ext cx="10789920" cy="566928"/>
+          </a:xfrm>
+          <a:prstGeom prst="rect">
+            <a:avLst/>
+          </a:prstGeom>
+          <a:noFill/>
+        </p:spPr>
+        <p:txBody>
+          <a:bodyPr wrap="square" lIns="0" rIns="0" tIns="0" bIns="0" anchor="t">
+            <a:spAutoFit/>
+          </a:bodyPr>
+          <a:lstStyle/>
+          <a:p>
+            <a:pPr algn="l">
+              <a:lnSpc>
+                <a:spcPct val="115000"/>
+              </a:lnSpc>
+            </a:pPr>
+            <a:r>
+              <a:rPr sz="2700" b="1">
+                <a:solidFill>
+                  <a:srgbClr val="1A1A2E"/>
+                </a:solidFill>
+                <a:latin typeface="Microsoft JhengHei"/>
+              </a:rPr>
+              <a:t>合成音 92%，真人 55%——這個落差才是真相</a:t>
+            </a:r>
+          </a:p>
+        </p:txBody>
+      </p:sp>
+      <p:sp>
+        <p:nvSpPr>
+          <p:cNvPr id="4" name="TextBox 3"/>
+          <p:cNvSpPr txBox="1"/>
+          <p:nvPr/>
+        </p:nvSpPr>
+        <p:spPr>
+          <a:xfrm>
+            <a:off x="667512" y="1234440"/>
+            <a:ext cx="10789920" cy="365760"/>
+          </a:xfrm>
+          <a:prstGeom prst="rect">
+            <a:avLst/>
+          </a:prstGeom>
+          <a:noFill/>
+        </p:spPr>
+        <p:txBody>
+          <a:bodyPr wrap="square" lIns="0" rIns="0" tIns="0" bIns="0" anchor="t">
+            <a:spAutoFit/>
+          </a:bodyPr>
+          <a:lstStyle/>
+          <a:p>
+            <a:pPr algn="l">
+              <a:lnSpc>
+                <a:spcPct val="115000"/>
+              </a:lnSpc>
+            </a:pPr>
+            <a:r>
+              <a:rPr sz="1300" b="0">
+                <a:solidFill>
+                  <a:srgbClr val="555555"/>
+                </a:solidFill>
+                <a:latin typeface="Microsoft JhengHei"/>
+              </a:rPr>
+              <a:t>先前所有英文語音數據都來自 TTS。這次請真人（非母語者）錄 38 句，用展場實際會部署的模型與麥克風測完整語音鏈。</a:t>
+            </a:r>
+          </a:p>
+        </p:txBody>
+      </p:sp>
+      <p:sp>
+        <p:nvSpPr>
+          <p:cNvPr id="5" name="Rounded Rectangle 4"/>
           <p:cNvSpPr/>
           <p:nvPr/>
         </p:nvSpPr>
         <p:spPr>
           <a:xfrm>
-            <a:off x="0" y="0"/>
-            <a:ext cx="12188952" cy="6858000"/>
-          </a:xfrm>
-          <a:prstGeom prst="rect">
-            <a:avLst/>
+            <a:off x="667512" y="1783080"/>
+            <a:ext cx="3474720" cy="1371600"/>
+          </a:xfrm>
+          <a:prstGeom prst="roundRect">
+            <a:avLst>
+              <a:gd name="adj" fmla="val 8000"/>
+            </a:avLst>
+          </a:prstGeom>
+          <a:solidFill>
+            <a:srgbClr val="F4F6F8"/>
+          </a:solidFill>
+          <a:ln>
+            <a:noFill/>
+          </a:ln>
+          <a:effectLst/>
+        </p:spPr>
+        <p:style>
+          <a:lnRef idx="1">
+            <a:schemeClr val="accent1"/>
+          </a:lnRef>
+          <a:fillRef idx="3">
+            <a:schemeClr val="accent1"/>
+          </a:fillRef>
+          <a:effectRef idx="2">
+            <a:schemeClr val="accent1"/>
+          </a:effectRef>
+          <a:fontRef idx="minor">
+            <a:schemeClr val="lt1"/>
+          </a:fontRef>
+        </p:style>
+        <p:txBody>
+          <a:bodyPr rtlCol="0" anchor="ctr"/>
+          <a:lstStyle/>
+          <a:p>
+            <a:pPr algn="ctr"/>
+          </a:p>
+        </p:txBody>
+      </p:sp>
+      <p:sp>
+        <p:nvSpPr>
+          <p:cNvPr id="6" name="TextBox 5"/>
+          <p:cNvSpPr txBox="1"/>
+          <p:nvPr/>
+        </p:nvSpPr>
+        <p:spPr>
+          <a:xfrm>
+            <a:off x="896112" y="1901952"/>
+            <a:ext cx="3017520" cy="292608"/>
+          </a:xfrm>
+          <a:prstGeom prst="rect">
+            <a:avLst/>
+          </a:prstGeom>
+          <a:noFill/>
+        </p:spPr>
+        <p:txBody>
+          <a:bodyPr wrap="square" lIns="0" rIns="0" tIns="0" bIns="0" anchor="t">
+            <a:spAutoFit/>
+          </a:bodyPr>
+          <a:lstStyle/>
+          <a:p>
+            <a:pPr algn="l">
+              <a:lnSpc>
+                <a:spcPct val="115000"/>
+              </a:lnSpc>
+            </a:pPr>
+            <a:r>
+              <a:rPr sz="1300" b="1">
+                <a:solidFill>
+                  <a:srgbClr val="1A1A2E"/>
+                </a:solidFill>
+                <a:latin typeface="Microsoft JhengHei"/>
+              </a:rPr>
+              <a:t>TTS 合成音</a:t>
+            </a:r>
+          </a:p>
+        </p:txBody>
+      </p:sp>
+      <p:sp>
+        <p:nvSpPr>
+          <p:cNvPr id="7" name="TextBox 6"/>
+          <p:cNvSpPr txBox="1"/>
+          <p:nvPr/>
+        </p:nvSpPr>
+        <p:spPr>
+          <a:xfrm>
+            <a:off x="896112" y="2194560"/>
+            <a:ext cx="3017520" cy="548640"/>
+          </a:xfrm>
+          <a:prstGeom prst="rect">
+            <a:avLst/>
+          </a:prstGeom>
+          <a:noFill/>
+        </p:spPr>
+        <p:txBody>
+          <a:bodyPr wrap="square" lIns="0" rIns="0" tIns="0" bIns="0" anchor="t">
+            <a:spAutoFit/>
+          </a:bodyPr>
+          <a:lstStyle/>
+          <a:p>
+            <a:pPr algn="l">
+              <a:lnSpc>
+                <a:spcPct val="115000"/>
+              </a:lnSpc>
+            </a:pPr>
+            <a:r>
+              <a:rPr sz="3400" b="1">
+                <a:solidFill>
+                  <a:srgbClr val="777777"/>
+                </a:solidFill>
+                <a:latin typeface="Arial"/>
+              </a:rPr>
+              <a:t>92%</a:t>
+            </a:r>
+          </a:p>
+        </p:txBody>
+      </p:sp>
+      <p:sp>
+        <p:nvSpPr>
+          <p:cNvPr id="8" name="TextBox 7"/>
+          <p:cNvSpPr txBox="1"/>
+          <p:nvPr/>
+        </p:nvSpPr>
+        <p:spPr>
+          <a:xfrm>
+            <a:off x="896112" y="2761488"/>
+            <a:ext cx="3017520" cy="347472"/>
+          </a:xfrm>
+          <a:prstGeom prst="rect">
+            <a:avLst/>
+          </a:prstGeom>
+          <a:noFill/>
+        </p:spPr>
+        <p:txBody>
+          <a:bodyPr wrap="square" lIns="0" rIns="0" tIns="0" bIns="0" anchor="t">
+            <a:spAutoFit/>
+          </a:bodyPr>
+          <a:lstStyle/>
+          <a:p>
+            <a:pPr algn="l">
+              <a:lnSpc>
+                <a:spcPct val="115000"/>
+              </a:lnSpc>
+            </a:pPr>
+            <a:r>
+              <a:rPr sz="1050" b="0">
+                <a:solidFill>
+                  <a:srgbClr val="555555"/>
+                </a:solidFill>
+                <a:latin typeface="Microsoft JhengHei"/>
+              </a:rPr>
+              <a:t>US 腔 99 句 · 咬字標準、無語速變化</a:t>
+            </a:r>
+          </a:p>
+        </p:txBody>
+      </p:sp>
+      <p:sp>
+        <p:nvSpPr>
+          <p:cNvPr id="9" name="Rounded Rectangle 8"/>
+          <p:cNvSpPr/>
+          <p:nvPr/>
+        </p:nvSpPr>
+        <p:spPr>
+          <a:xfrm>
+            <a:off x="4343399" y="1783080"/>
+            <a:ext cx="3474720" cy="1371600"/>
+          </a:xfrm>
+          <a:prstGeom prst="roundRect">
+            <a:avLst>
+              <a:gd name="adj" fmla="val 8000"/>
+            </a:avLst>
+          </a:prstGeom>
+          <a:solidFill>
+            <a:srgbClr val="F4F6F8"/>
+          </a:solidFill>
+          <a:ln>
+            <a:noFill/>
+          </a:ln>
+          <a:effectLst/>
+        </p:spPr>
+        <p:style>
+          <a:lnRef idx="1">
+            <a:schemeClr val="accent1"/>
+          </a:lnRef>
+          <a:fillRef idx="3">
+            <a:schemeClr val="accent1"/>
+          </a:fillRef>
+          <a:effectRef idx="2">
+            <a:schemeClr val="accent1"/>
+          </a:effectRef>
+          <a:fontRef idx="minor">
+            <a:schemeClr val="lt1"/>
+          </a:fontRef>
+        </p:style>
+        <p:txBody>
+          <a:bodyPr rtlCol="0" anchor="ctr"/>
+          <a:lstStyle/>
+          <a:p>
+            <a:pPr algn="ctr"/>
+          </a:p>
+        </p:txBody>
+      </p:sp>
+      <p:sp>
+        <p:nvSpPr>
+          <p:cNvPr id="10" name="TextBox 9"/>
+          <p:cNvSpPr txBox="1"/>
+          <p:nvPr/>
+        </p:nvSpPr>
+        <p:spPr>
+          <a:xfrm>
+            <a:off x="4571999" y="1901952"/>
+            <a:ext cx="3017520" cy="292608"/>
+          </a:xfrm>
+          <a:prstGeom prst="rect">
+            <a:avLst/>
+          </a:prstGeom>
+          <a:noFill/>
+        </p:spPr>
+        <p:txBody>
+          <a:bodyPr wrap="square" lIns="0" rIns="0" tIns="0" bIns="0" anchor="t">
+            <a:spAutoFit/>
+          </a:bodyPr>
+          <a:lstStyle/>
+          <a:p>
+            <a:pPr algn="l">
+              <a:lnSpc>
+                <a:spcPct val="115000"/>
+              </a:lnSpc>
+            </a:pPr>
+            <a:r>
+              <a:rPr sz="1300" b="1">
+                <a:solidFill>
+                  <a:srgbClr val="1A1A2E"/>
+                </a:solidFill>
+                <a:latin typeface="Microsoft JhengHei"/>
+              </a:rPr>
+              <a:t>真人（非母語）</a:t>
+            </a:r>
+          </a:p>
+        </p:txBody>
+      </p:sp>
+      <p:sp>
+        <p:nvSpPr>
+          <p:cNvPr id="11" name="TextBox 10"/>
+          <p:cNvSpPr txBox="1"/>
+          <p:nvPr/>
+        </p:nvSpPr>
+        <p:spPr>
+          <a:xfrm>
+            <a:off x="4571999" y="2194560"/>
+            <a:ext cx="3017520" cy="548640"/>
+          </a:xfrm>
+          <a:prstGeom prst="rect">
+            <a:avLst/>
+          </a:prstGeom>
+          <a:noFill/>
+        </p:spPr>
+        <p:txBody>
+          <a:bodyPr wrap="square" lIns="0" rIns="0" tIns="0" bIns="0" anchor="t">
+            <a:spAutoFit/>
+          </a:bodyPr>
+          <a:lstStyle/>
+          <a:p>
+            <a:pPr algn="l">
+              <a:lnSpc>
+                <a:spcPct val="115000"/>
+              </a:lnSpc>
+            </a:pPr>
+            <a:r>
+              <a:rPr sz="3400" b="1">
+                <a:solidFill>
+                  <a:srgbClr val="E85D5D"/>
+                </a:solidFill>
+                <a:latin typeface="Arial"/>
+              </a:rPr>
+              <a:t>55%</a:t>
+            </a:r>
+          </a:p>
+        </p:txBody>
+      </p:sp>
+      <p:sp>
+        <p:nvSpPr>
+          <p:cNvPr id="12" name="TextBox 11"/>
+          <p:cNvSpPr txBox="1"/>
+          <p:nvPr/>
+        </p:nvSpPr>
+        <p:spPr>
+          <a:xfrm>
+            <a:off x="4571999" y="2761488"/>
+            <a:ext cx="3017520" cy="347472"/>
+          </a:xfrm>
+          <a:prstGeom prst="rect">
+            <a:avLst/>
+          </a:prstGeom>
+          <a:noFill/>
+        </p:spPr>
+        <p:txBody>
+          <a:bodyPr wrap="square" lIns="0" rIns="0" tIns="0" bIns="0" anchor="t">
+            <a:spAutoFit/>
+          </a:bodyPr>
+          <a:lstStyle/>
+          <a:p>
+            <a:pPr algn="l">
+              <a:lnSpc>
+                <a:spcPct val="115000"/>
+              </a:lnSpc>
+            </a:pPr>
+            <a:r>
+              <a:rPr sz="1050" b="0">
+                <a:solidFill>
+                  <a:srgbClr val="555555"/>
+                </a:solidFill>
+                <a:latin typeface="Microsoft JhengHei"/>
+              </a:rPr>
+              <a:t>台灣腔 38 句 · 同一支麥克風、同一顆模型</a:t>
+            </a:r>
+          </a:p>
+        </p:txBody>
+      </p:sp>
+      <p:sp>
+        <p:nvSpPr>
+          <p:cNvPr id="13" name="Rounded Rectangle 12"/>
+          <p:cNvSpPr/>
+          <p:nvPr/>
+        </p:nvSpPr>
+        <p:spPr>
+          <a:xfrm>
+            <a:off x="8019286" y="1783080"/>
+            <a:ext cx="3474720" cy="1371600"/>
+          </a:xfrm>
+          <a:prstGeom prst="roundRect">
+            <a:avLst>
+              <a:gd name="adj" fmla="val 8000"/>
+            </a:avLst>
+          </a:prstGeom>
+          <a:solidFill>
+            <a:srgbClr val="F4F6F8"/>
+          </a:solidFill>
+          <a:ln>
+            <a:noFill/>
+          </a:ln>
+          <a:effectLst/>
+        </p:spPr>
+        <p:style>
+          <a:lnRef idx="1">
+            <a:schemeClr val="accent1"/>
+          </a:lnRef>
+          <a:fillRef idx="3">
+            <a:schemeClr val="accent1"/>
+          </a:fillRef>
+          <a:effectRef idx="2">
+            <a:schemeClr val="accent1"/>
+          </a:effectRef>
+          <a:fontRef idx="minor">
+            <a:schemeClr val="lt1"/>
+          </a:fontRef>
+        </p:style>
+        <p:txBody>
+          <a:bodyPr rtlCol="0" anchor="ctr"/>
+          <a:lstStyle/>
+          <a:p>
+            <a:pPr algn="ctr"/>
+          </a:p>
+        </p:txBody>
+      </p:sp>
+      <p:sp>
+        <p:nvSpPr>
+          <p:cNvPr id="14" name="TextBox 13"/>
+          <p:cNvSpPr txBox="1"/>
+          <p:nvPr/>
+        </p:nvSpPr>
+        <p:spPr>
+          <a:xfrm>
+            <a:off x="8247886" y="1901952"/>
+            <a:ext cx="3017520" cy="292608"/>
+          </a:xfrm>
+          <a:prstGeom prst="rect">
+            <a:avLst/>
+          </a:prstGeom>
+          <a:noFill/>
+        </p:spPr>
+        <p:txBody>
+          <a:bodyPr wrap="square" lIns="0" rIns="0" tIns="0" bIns="0" anchor="t">
+            <a:spAutoFit/>
+          </a:bodyPr>
+          <a:lstStyle/>
+          <a:p>
+            <a:pPr algn="l">
+              <a:lnSpc>
+                <a:spcPct val="115000"/>
+              </a:lnSpc>
+            </a:pPr>
+            <a:r>
+              <a:rPr sz="1300" b="1">
+                <a:solidFill>
+                  <a:srgbClr val="1A1A2E"/>
+                </a:solidFill>
+                <a:latin typeface="Microsoft JhengHei"/>
+              </a:rPr>
+              <a:t>＋ ASR 容錯層</a:t>
+            </a:r>
+          </a:p>
+        </p:txBody>
+      </p:sp>
+      <p:sp>
+        <p:nvSpPr>
+          <p:cNvPr id="15" name="TextBox 14"/>
+          <p:cNvSpPr txBox="1"/>
+          <p:nvPr/>
+        </p:nvSpPr>
+        <p:spPr>
+          <a:xfrm>
+            <a:off x="8247886" y="2194560"/>
+            <a:ext cx="3017520" cy="548640"/>
+          </a:xfrm>
+          <a:prstGeom prst="rect">
+            <a:avLst/>
+          </a:prstGeom>
+          <a:noFill/>
+        </p:spPr>
+        <p:txBody>
+          <a:bodyPr wrap="square" lIns="0" rIns="0" tIns="0" bIns="0" anchor="t">
+            <a:spAutoFit/>
+          </a:bodyPr>
+          <a:lstStyle/>
+          <a:p>
+            <a:pPr algn="l">
+              <a:lnSpc>
+                <a:spcPct val="115000"/>
+              </a:lnSpc>
+            </a:pPr>
+            <a:r>
+              <a:rPr sz="3400" b="1">
+                <a:solidFill>
+                  <a:srgbClr val="008E76"/>
+                </a:solidFill>
+                <a:latin typeface="Arial"/>
+              </a:rPr>
+              <a:t>79%</a:t>
+            </a:r>
+          </a:p>
+        </p:txBody>
+      </p:sp>
+      <p:sp>
+        <p:nvSpPr>
+          <p:cNvPr id="16" name="TextBox 15"/>
+          <p:cNvSpPr txBox="1"/>
+          <p:nvPr/>
+        </p:nvSpPr>
+        <p:spPr>
+          <a:xfrm>
+            <a:off x="8247886" y="2761488"/>
+            <a:ext cx="3017520" cy="347472"/>
+          </a:xfrm>
+          <a:prstGeom prst="rect">
+            <a:avLst/>
+          </a:prstGeom>
+          <a:noFill/>
+        </p:spPr>
+        <p:txBody>
+          <a:bodyPr wrap="square" lIns="0" rIns="0" tIns="0" bIns="0" anchor="t">
+            <a:spAutoFit/>
+          </a:bodyPr>
+          <a:lstStyle/>
+          <a:p>
+            <a:pPr algn="l">
+              <a:lnSpc>
+                <a:spcPct val="115000"/>
+              </a:lnSpc>
+            </a:pPr>
+            <a:r>
+              <a:rPr sz="1050" b="0">
+                <a:solidFill>
+                  <a:srgbClr val="555555"/>
+                </a:solidFill>
+                <a:latin typeface="Microsoft JhengHei"/>
+              </a:rPr>
+              <a:t>同一批音檔，沒重錄、只加規則</a:t>
+            </a:r>
+          </a:p>
+        </p:txBody>
+      </p:sp>
+      <p:sp>
+        <p:nvSpPr>
+          <p:cNvPr id="17" name="TextBox 16"/>
+          <p:cNvSpPr txBox="1"/>
+          <p:nvPr/>
+        </p:nvSpPr>
+        <p:spPr>
+          <a:xfrm>
+            <a:off x="667512" y="3310128"/>
+            <a:ext cx="10789920" cy="292608"/>
+          </a:xfrm>
+          <a:prstGeom prst="rect">
+            <a:avLst/>
+          </a:prstGeom>
+          <a:noFill/>
+        </p:spPr>
+        <p:txBody>
+          <a:bodyPr wrap="square" lIns="0" rIns="0" tIns="0" bIns="0" anchor="t">
+            <a:spAutoFit/>
+          </a:bodyPr>
+          <a:lstStyle/>
+          <a:p>
+            <a:pPr algn="l">
+              <a:lnSpc>
+                <a:spcPct val="115000"/>
+              </a:lnSpc>
+            </a:pPr>
+            <a:r>
+              <a:rPr sz="1300" b="1">
+                <a:solidFill>
+                  <a:srgbClr val="008E76"/>
+                </a:solidFill>
+                <a:latin typeface="Microsoft JhengHei"/>
+              </a:rPr>
+              <a:t>為什麼落差這麼大——這正是「合成音會嚴重高估」的又一次驗證</a:t>
+            </a:r>
+          </a:p>
+        </p:txBody>
+      </p:sp>
+      <p:sp>
+        <p:nvSpPr>
+          <p:cNvPr id="18" name="Rectangle 17"/>
+          <p:cNvSpPr/>
+          <p:nvPr/>
+        </p:nvSpPr>
+        <p:spPr>
+          <a:xfrm>
+            <a:off x="667512" y="3657600"/>
+            <a:ext cx="54864" cy="402336"/>
+          </a:xfrm>
+          <a:prstGeom prst="rect">
+            <a:avLst/>
+          </a:prstGeom>
+          <a:solidFill>
+            <a:srgbClr val="008E76"/>
+          </a:solidFill>
+          <a:ln>
+            <a:noFill/>
+          </a:ln>
+          <a:effectLst/>
+        </p:spPr>
+        <p:style>
+          <a:lnRef idx="1">
+            <a:schemeClr val="accent1"/>
+          </a:lnRef>
+          <a:fillRef idx="3">
+            <a:schemeClr val="accent1"/>
+          </a:fillRef>
+          <a:effectRef idx="2">
+            <a:schemeClr val="accent1"/>
+          </a:effectRef>
+          <a:fontRef idx="minor">
+            <a:schemeClr val="lt1"/>
+          </a:fontRef>
+        </p:style>
+        <p:txBody>
+          <a:bodyPr rtlCol="0" anchor="ctr"/>
+          <a:lstStyle/>
+          <a:p>
+            <a:pPr algn="ctr"/>
+          </a:p>
+        </p:txBody>
+      </p:sp>
+      <p:sp>
+        <p:nvSpPr>
+          <p:cNvPr id="19" name="TextBox 18"/>
+          <p:cNvSpPr txBox="1"/>
+          <p:nvPr/>
+        </p:nvSpPr>
+        <p:spPr>
+          <a:xfrm>
+            <a:off x="886968" y="3675888"/>
+            <a:ext cx="1828800" cy="329184"/>
+          </a:xfrm>
+          <a:prstGeom prst="rect">
+            <a:avLst/>
+          </a:prstGeom>
+          <a:noFill/>
+        </p:spPr>
+        <p:txBody>
+          <a:bodyPr wrap="square" lIns="0" rIns="0" tIns="0" bIns="0" anchor="t">
+            <a:spAutoFit/>
+          </a:bodyPr>
+          <a:lstStyle/>
+          <a:p>
+            <a:pPr algn="l">
+              <a:lnSpc>
+                <a:spcPct val="115000"/>
+              </a:lnSpc>
+            </a:pPr>
+            <a:r>
+              <a:rPr sz="1200" b="1">
+                <a:solidFill>
+                  <a:srgbClr val="008E76"/>
+                </a:solidFill>
+                <a:latin typeface="Microsoft JhengHei"/>
+              </a:rPr>
+              <a:t>詞尾被吞掉</a:t>
+            </a:r>
+          </a:p>
+        </p:txBody>
+      </p:sp>
+      <p:sp>
+        <p:nvSpPr>
+          <p:cNvPr id="20" name="TextBox 19"/>
+          <p:cNvSpPr txBox="1"/>
+          <p:nvPr/>
+        </p:nvSpPr>
+        <p:spPr>
+          <a:xfrm>
+            <a:off x="2862072" y="3675888"/>
+            <a:ext cx="4206240" cy="329184"/>
+          </a:xfrm>
+          <a:prstGeom prst="rect">
+            <a:avLst/>
+          </a:prstGeom>
+          <a:noFill/>
+        </p:spPr>
+        <p:txBody>
+          <a:bodyPr wrap="square" lIns="0" rIns="0" tIns="0" bIns="0" anchor="t">
+            <a:spAutoFit/>
+          </a:bodyPr>
+          <a:lstStyle/>
+          <a:p>
+            <a:pPr algn="l">
+              <a:lnSpc>
+                <a:spcPct val="115000"/>
+              </a:lnSpc>
+            </a:pPr>
+            <a:r>
+              <a:rPr sz="1050" b="0">
+                <a:solidFill>
+                  <a:srgbClr val="444444"/>
+                </a:solidFill>
+                <a:latin typeface="Arial"/>
+              </a:rPr>
+              <a:t>shipped → shed｜send → sen｜received → receive</a:t>
+            </a:r>
+          </a:p>
+        </p:txBody>
+      </p:sp>
+      <p:sp>
+        <p:nvSpPr>
+          <p:cNvPr id="21" name="TextBox 20"/>
+          <p:cNvSpPr txBox="1"/>
+          <p:nvPr/>
+        </p:nvSpPr>
+        <p:spPr>
+          <a:xfrm>
+            <a:off x="7342632" y="3675888"/>
+            <a:ext cx="4114800" cy="329184"/>
+          </a:xfrm>
+          <a:prstGeom prst="rect">
+            <a:avLst/>
+          </a:prstGeom>
+          <a:noFill/>
+        </p:spPr>
+        <p:txBody>
+          <a:bodyPr wrap="square" lIns="0" rIns="0" tIns="0" bIns="0" anchor="t">
+            <a:spAutoFit/>
+          </a:bodyPr>
+          <a:lstStyle/>
+          <a:p>
+            <a:pPr algn="l">
+              <a:lnSpc>
+                <a:spcPct val="115000"/>
+              </a:lnSpc>
+            </a:pPr>
+            <a:r>
+              <a:rPr sz="1100" b="0">
+                <a:solidFill>
+                  <a:srgbClr val="555555"/>
+                </a:solidFill>
+                <a:latin typeface="Microsoft JhengHei"/>
+              </a:rPr>
+              <a:t>非母語者通病，母語者也有只是頻率低</a:t>
+            </a:r>
+          </a:p>
+        </p:txBody>
+      </p:sp>
+      <p:sp>
+        <p:nvSpPr>
+          <p:cNvPr id="22" name="Rectangle 21"/>
+          <p:cNvSpPr/>
+          <p:nvPr/>
+        </p:nvSpPr>
+        <p:spPr>
+          <a:xfrm>
+            <a:off x="667512" y="4133088"/>
+            <a:ext cx="54864" cy="402336"/>
+          </a:xfrm>
+          <a:prstGeom prst="rect">
+            <a:avLst/>
+          </a:prstGeom>
+          <a:solidFill>
+            <a:srgbClr val="F0A030"/>
+          </a:solidFill>
+          <a:ln>
+            <a:noFill/>
+          </a:ln>
+          <a:effectLst/>
+        </p:spPr>
+        <p:style>
+          <a:lnRef idx="1">
+            <a:schemeClr val="accent1"/>
+          </a:lnRef>
+          <a:fillRef idx="3">
+            <a:schemeClr val="accent1"/>
+          </a:fillRef>
+          <a:effectRef idx="2">
+            <a:schemeClr val="accent1"/>
+          </a:effectRef>
+          <a:fontRef idx="minor">
+            <a:schemeClr val="lt1"/>
+          </a:fontRef>
+        </p:style>
+        <p:txBody>
+          <a:bodyPr rtlCol="0" anchor="ctr"/>
+          <a:lstStyle/>
+          <a:p>
+            <a:pPr algn="ctr"/>
+          </a:p>
+        </p:txBody>
+      </p:sp>
+      <p:sp>
+        <p:nvSpPr>
+          <p:cNvPr id="23" name="TextBox 22"/>
+          <p:cNvSpPr txBox="1"/>
+          <p:nvPr/>
+        </p:nvSpPr>
+        <p:spPr>
+          <a:xfrm>
+            <a:off x="886968" y="4151376"/>
+            <a:ext cx="1828800" cy="329184"/>
+          </a:xfrm>
+          <a:prstGeom prst="rect">
+            <a:avLst/>
+          </a:prstGeom>
+          <a:noFill/>
+        </p:spPr>
+        <p:txBody>
+          <a:bodyPr wrap="square" lIns="0" rIns="0" tIns="0" bIns="0" anchor="t">
+            <a:spAutoFit/>
+          </a:bodyPr>
+          <a:lstStyle/>
+          <a:p>
+            <a:pPr algn="l">
+              <a:lnSpc>
+                <a:spcPct val="115000"/>
+              </a:lnSpc>
+            </a:pPr>
+            <a:r>
+              <a:rPr sz="1200" b="1">
+                <a:solidFill>
+                  <a:srgbClr val="F0A030"/>
+                </a:solidFill>
+                <a:latin typeface="Microsoft JhengHei"/>
+              </a:rPr>
+              <a:t>連音黏成一詞</a:t>
+            </a:r>
+          </a:p>
+        </p:txBody>
+      </p:sp>
+      <p:sp>
+        <p:nvSpPr>
+          <p:cNvPr id="24" name="TextBox 23"/>
+          <p:cNvSpPr txBox="1"/>
+          <p:nvPr/>
+        </p:nvSpPr>
+        <p:spPr>
+          <a:xfrm>
+            <a:off x="2862072" y="4151376"/>
+            <a:ext cx="4206240" cy="329184"/>
+          </a:xfrm>
+          <a:prstGeom prst="rect">
+            <a:avLst/>
+          </a:prstGeom>
+          <a:noFill/>
+        </p:spPr>
+        <p:txBody>
+          <a:bodyPr wrap="square" lIns="0" rIns="0" tIns="0" bIns="0" anchor="t">
+            <a:spAutoFit/>
+          </a:bodyPr>
+          <a:lstStyle/>
+          <a:p>
+            <a:pPr algn="l">
+              <a:lnSpc>
+                <a:spcPct val="115000"/>
+              </a:lnSpc>
+            </a:pPr>
+            <a:r>
+              <a:rPr sz="1050" b="0">
+                <a:solidFill>
+                  <a:srgbClr val="444444"/>
+                </a:solidFill>
+                <a:latin typeface="Arial"/>
+              </a:rPr>
+              <a:t>sun hat → some heat｜sun hats → some headers</a:t>
+            </a:r>
+          </a:p>
+        </p:txBody>
+      </p:sp>
+      <p:sp>
+        <p:nvSpPr>
+          <p:cNvPr id="25" name="TextBox 24"/>
+          <p:cNvSpPr txBox="1"/>
+          <p:nvPr/>
+        </p:nvSpPr>
+        <p:spPr>
+          <a:xfrm>
+            <a:off x="7342632" y="4151376"/>
+            <a:ext cx="4114800" cy="329184"/>
+          </a:xfrm>
+          <a:prstGeom prst="rect">
+            <a:avLst/>
+          </a:prstGeom>
+          <a:noFill/>
+        </p:spPr>
+        <p:txBody>
+          <a:bodyPr wrap="square" lIns="0" rIns="0" tIns="0" bIns="0" anchor="t">
+            <a:spAutoFit/>
+          </a:bodyPr>
+          <a:lstStyle/>
+          <a:p>
+            <a:pPr algn="l">
+              <a:lnSpc>
+                <a:spcPct val="115000"/>
+              </a:lnSpc>
+            </a:pPr>
+            <a:r>
+              <a:rPr sz="1100" b="0">
+                <a:solidFill>
+                  <a:srgbClr val="555555"/>
+                </a:solidFill>
+                <a:latin typeface="Microsoft JhengHei"/>
+              </a:rPr>
+              <a:t>母語者講快時更容易發生</a:t>
+            </a:r>
+          </a:p>
+        </p:txBody>
+      </p:sp>
+      <p:sp>
+        <p:nvSpPr>
+          <p:cNvPr id="26" name="Rectangle 25"/>
+          <p:cNvSpPr/>
+          <p:nvPr/>
+        </p:nvSpPr>
+        <p:spPr>
+          <a:xfrm>
+            <a:off x="667512" y="4608576"/>
+            <a:ext cx="54864" cy="402336"/>
+          </a:xfrm>
+          <a:prstGeom prst="rect">
+            <a:avLst/>
+          </a:prstGeom>
+          <a:solidFill>
+            <a:srgbClr val="E85D5D"/>
+          </a:solidFill>
+          <a:ln>
+            <a:noFill/>
+          </a:ln>
+          <a:effectLst/>
+        </p:spPr>
+        <p:style>
+          <a:lnRef idx="1">
+            <a:schemeClr val="accent1"/>
+          </a:lnRef>
+          <a:fillRef idx="3">
+            <a:schemeClr val="accent1"/>
+          </a:fillRef>
+          <a:effectRef idx="2">
+            <a:schemeClr val="accent1"/>
+          </a:effectRef>
+          <a:fontRef idx="minor">
+            <a:schemeClr val="lt1"/>
+          </a:fontRef>
+        </p:style>
+        <p:txBody>
+          <a:bodyPr rtlCol="0" anchor="ctr"/>
+          <a:lstStyle/>
+          <a:p>
+            <a:pPr algn="ctr"/>
+          </a:p>
+        </p:txBody>
+      </p:sp>
+      <p:sp>
+        <p:nvSpPr>
+          <p:cNvPr id="27" name="TextBox 26"/>
+          <p:cNvSpPr txBox="1"/>
+          <p:nvPr/>
+        </p:nvSpPr>
+        <p:spPr>
+          <a:xfrm>
+            <a:off x="886968" y="4626864"/>
+            <a:ext cx="1828800" cy="329184"/>
+          </a:xfrm>
+          <a:prstGeom prst="rect">
+            <a:avLst/>
+          </a:prstGeom>
+          <a:noFill/>
+        </p:spPr>
+        <p:txBody>
+          <a:bodyPr wrap="square" lIns="0" rIns="0" tIns="0" bIns="0" anchor="t">
+            <a:spAutoFit/>
+          </a:bodyPr>
+          <a:lstStyle/>
+          <a:p>
+            <a:pPr algn="l">
+              <a:lnSpc>
+                <a:spcPct val="115000"/>
+              </a:lnSpc>
+            </a:pPr>
+            <a:r>
+              <a:rPr sz="1200" b="1">
+                <a:solidFill>
+                  <a:srgbClr val="E85D5D"/>
+                </a:solidFill>
+                <a:latin typeface="Microsoft JhengHei"/>
+              </a:rPr>
+              <a:t>整詞被替換</a:t>
+            </a:r>
+          </a:p>
+        </p:txBody>
+      </p:sp>
+      <p:sp>
+        <p:nvSpPr>
+          <p:cNvPr id="28" name="TextBox 27"/>
+          <p:cNvSpPr txBox="1"/>
+          <p:nvPr/>
+        </p:nvSpPr>
+        <p:spPr>
+          <a:xfrm>
+            <a:off x="2862072" y="4626864"/>
+            <a:ext cx="4206240" cy="329184"/>
+          </a:xfrm>
+          <a:prstGeom prst="rect">
+            <a:avLst/>
+          </a:prstGeom>
+          <a:noFill/>
+        </p:spPr>
+        <p:txBody>
+          <a:bodyPr wrap="square" lIns="0" rIns="0" tIns="0" bIns="0" anchor="t">
+            <a:spAutoFit/>
+          </a:bodyPr>
+          <a:lstStyle/>
+          <a:p>
+            <a:pPr algn="l">
+              <a:lnSpc>
+                <a:spcPct val="115000"/>
+              </a:lnSpc>
+            </a:pPr>
+            <a:r>
+              <a:rPr sz="1050" b="0">
+                <a:solidFill>
+                  <a:srgbClr val="444444"/>
+                </a:solidFill>
+                <a:latin typeface="Arial"/>
+              </a:rPr>
+              <a:t>trash bags → trespass life｜mop → monk's</a:t>
+            </a:r>
+          </a:p>
+        </p:txBody>
+      </p:sp>
+      <p:sp>
+        <p:nvSpPr>
+          <p:cNvPr id="29" name="TextBox 28"/>
+          <p:cNvSpPr txBox="1"/>
+          <p:nvPr/>
+        </p:nvSpPr>
+        <p:spPr>
+          <a:xfrm>
+            <a:off x="7342632" y="4626864"/>
+            <a:ext cx="4114800" cy="329184"/>
+          </a:xfrm>
+          <a:prstGeom prst="rect">
+            <a:avLst/>
+          </a:prstGeom>
+          <a:noFill/>
+        </p:spPr>
+        <p:txBody>
+          <a:bodyPr wrap="square" lIns="0" rIns="0" tIns="0" bIns="0" anchor="t">
+            <a:spAutoFit/>
+          </a:bodyPr>
+          <a:lstStyle/>
+          <a:p>
+            <a:pPr algn="l">
+              <a:lnSpc>
+                <a:spcPct val="115000"/>
+              </a:lnSpc>
+            </a:pPr>
+            <a:r>
+              <a:rPr sz="1100" b="0">
+                <a:solidFill>
+                  <a:srgbClr val="555555"/>
+                </a:solidFill>
+                <a:latin typeface="Microsoft JhengHei"/>
+              </a:rPr>
+              <a:t>無可用訊號可修——硬修會誤傷正常查詢</a:t>
+            </a:r>
+          </a:p>
+        </p:txBody>
+      </p:sp>
+      <p:sp>
+        <p:nvSpPr>
+          <p:cNvPr id="30" name="Rounded Rectangle 29"/>
+          <p:cNvSpPr/>
+          <p:nvPr/>
+        </p:nvSpPr>
+        <p:spPr>
+          <a:xfrm>
+            <a:off x="667512" y="5230368"/>
+            <a:ext cx="10853928" cy="1371600"/>
+          </a:xfrm>
+          <a:prstGeom prst="roundRect">
+            <a:avLst>
+              <a:gd name="adj" fmla="val 8000"/>
+            </a:avLst>
           </a:prstGeom>
           <a:solidFill>
             <a:srgbClr val="1A1A2E"/>
@@ -37621,6 +38825,269 @@
       </p:sp>
       <p:sp>
         <p:nvSpPr>
+          <p:cNvPr id="31" name="TextBox 30"/>
+          <p:cNvSpPr txBox="1"/>
+          <p:nvPr/>
+        </p:nvSpPr>
+        <p:spPr>
+          <a:xfrm>
+            <a:off x="1033272" y="5358384"/>
+            <a:ext cx="10149840" cy="402336"/>
+          </a:xfrm>
+          <a:prstGeom prst="rect">
+            <a:avLst/>
+          </a:prstGeom>
+          <a:noFill/>
+        </p:spPr>
+        <p:txBody>
+          <a:bodyPr wrap="square" lIns="0" rIns="0" tIns="0" bIns="0" anchor="ctr">
+            <a:spAutoFit/>
+          </a:bodyPr>
+          <a:lstStyle/>
+          <a:p>
+            <a:pPr algn="l">
+              <a:lnSpc>
+                <a:spcPct val="115000"/>
+              </a:lnSpc>
+            </a:pPr>
+            <a:r>
+              <a:rPr sz="1300" b="1">
+                <a:solidFill>
+                  <a:srgbClr val="00C49A"/>
+                </a:solidFill>
+                <a:latin typeface="Microsoft JhengHei"/>
+              </a:rPr>
+              <a:t>容錯層買到什麼  </a:t>
+            </a:r>
+            <a:r>
+              <a:rPr sz="1300" b="1">
+                <a:solidFill>
+                  <a:srgbClr val="FFFFFF"/>
+                </a:solidFill>
+                <a:latin typeface="Microsoft JhengHei"/>
+              </a:rPr>
+              <a:t>55% → 79%（+24 個百分點），完全沒有重錄</a:t>
+            </a:r>
+            <a:r>
+              <a:rPr sz="1150" b="0">
+                <a:solidFill>
+                  <a:srgbClr val="BBBBBB"/>
+                </a:solidFill>
+                <a:latin typeface="Microsoft JhengHei"/>
+              </a:rPr>
+              <a:t>——只在 ASR 出口加三類規則：動詞詞尾、商品名固定錯法、倉別。</a:t>
+            </a:r>
+          </a:p>
+        </p:txBody>
+      </p:sp>
+      <p:sp>
+        <p:nvSpPr>
+          <p:cNvPr id="32" name="TextBox 31"/>
+          <p:cNvSpPr txBox="1"/>
+          <p:nvPr/>
+        </p:nvSpPr>
+        <p:spPr>
+          <a:xfrm>
+            <a:off x="1033272" y="5797296"/>
+            <a:ext cx="10149840" cy="402336"/>
+          </a:xfrm>
+          <a:prstGeom prst="rect">
+            <a:avLst/>
+          </a:prstGeom>
+          <a:noFill/>
+        </p:spPr>
+        <p:txBody>
+          <a:bodyPr wrap="square" lIns="0" rIns="0" tIns="0" bIns="0" anchor="ctr">
+            <a:spAutoFit/>
+          </a:bodyPr>
+          <a:lstStyle/>
+          <a:p>
+            <a:pPr algn="l">
+              <a:lnSpc>
+                <a:spcPct val="115000"/>
+              </a:lnSpc>
+            </a:pPr>
+            <a:r>
+              <a:rPr sz="1300" b="1">
+                <a:solidFill>
+                  <a:srgbClr val="F0A030"/>
+                </a:solidFill>
+                <a:latin typeface="Microsoft JhengHei"/>
+              </a:rPr>
+              <a:t>誠實揭露  </a:t>
+            </a:r>
+            <a:r>
+              <a:rPr sz="1200" b="1">
+                <a:solidFill>
+                  <a:srgbClr val="FFFFFF"/>
+                </a:solidFill>
+                <a:latin typeface="Microsoft JhengHei"/>
+              </a:rPr>
+              <a:t>79% 是「重錄挑最好那次」的結果，一次命中率更低</a:t>
+            </a:r>
+            <a:r>
+              <a:rPr sz="1150" b="0">
+                <a:solidFill>
+                  <a:srgbClr val="BBBBBB"/>
+                </a:solidFill>
+                <a:latin typeface="Microsoft JhengHei"/>
+              </a:rPr>
+              <a:t>——展場只有一次機會。母語者預估 75-85%。</a:t>
+            </a:r>
+          </a:p>
+        </p:txBody>
+      </p:sp>
+      <p:sp>
+        <p:nvSpPr>
+          <p:cNvPr id="33" name="TextBox 32"/>
+          <p:cNvSpPr txBox="1"/>
+          <p:nvPr/>
+        </p:nvSpPr>
+        <p:spPr>
+          <a:xfrm>
+            <a:off x="1033272" y="6236208"/>
+            <a:ext cx="10149840" cy="310896"/>
+          </a:xfrm>
+          <a:prstGeom prst="rect">
+            <a:avLst/>
+          </a:prstGeom>
+          <a:noFill/>
+        </p:spPr>
+        <p:txBody>
+          <a:bodyPr wrap="square" lIns="0" rIns="0" tIns="0" bIns="0" anchor="ctr">
+            <a:spAutoFit/>
+          </a:bodyPr>
+          <a:lstStyle/>
+          <a:p>
+            <a:pPr algn="l">
+              <a:lnSpc>
+                <a:spcPct val="115000"/>
+              </a:lnSpc>
+            </a:pPr>
+            <a:r>
+              <a:rPr sz="1200" b="1">
+                <a:solidFill>
+                  <a:srgbClr val="00C49A"/>
+                </a:solidFill>
+                <a:latin typeface="Microsoft JhengHei"/>
+              </a:rPr>
+              <a:t>設計取捨  </a:t>
+            </a:r>
+            <a:r>
+              <a:rPr sz="1150" b="0">
+                <a:solidFill>
+                  <a:srgbClr val="BBBBBB"/>
+                </a:solidFill>
+                <a:latin typeface="Microsoft JhengHei"/>
+              </a:rPr>
+              <a:t>答不出來時誠實反問、不亂猜——錯的時候不會給出錯誤數字。</a:t>
+            </a:r>
+          </a:p>
+        </p:txBody>
+      </p:sp>
+      <p:sp>
+        <p:nvSpPr>
+          <p:cNvPr id="34" name="TextBox 33"/>
+          <p:cNvSpPr txBox="1"/>
+          <p:nvPr/>
+        </p:nvSpPr>
+        <p:spPr>
+          <a:xfrm>
+            <a:off x="11475720" y="6565392"/>
+            <a:ext cx="658368" cy="237744"/>
+          </a:xfrm>
+          <a:prstGeom prst="rect">
+            <a:avLst/>
+          </a:prstGeom>
+          <a:noFill/>
+        </p:spPr>
+        <p:txBody>
+          <a:bodyPr wrap="square" lIns="0" rIns="0" tIns="0" bIns="0" anchor="t">
+            <a:spAutoFit/>
+          </a:bodyPr>
+          <a:lstStyle/>
+          <a:p>
+            <a:pPr algn="r">
+              <a:lnSpc>
+                <a:spcPct val="115000"/>
+              </a:lnSpc>
+            </a:pPr>
+            <a:r>
+              <a:rPr sz="1000" b="0">
+                <a:solidFill>
+                  <a:srgbClr val="BBBBBB"/>
+                </a:solidFill>
+                <a:latin typeface="Arial"/>
+              </a:rPr>
+              <a:t>30</a:t>
+            </a:r>
+          </a:p>
+        </p:txBody>
+      </p:sp>
+    </p:spTree>
+  </p:cSld>
+  <p:clrMapOvr>
+    <a:masterClrMapping/>
+  </p:clrMapOvr>
+</p:sld>
+</file>
+
+<file path=ppt/slides/slide31.xml><?xml version="1.0" encoding="utf-8"?>
+<p:sld xmlns:a="http://schemas.openxmlformats.org/drawingml/2006/main" xmlns:p="http://schemas.openxmlformats.org/presentationml/2006/main" xmlns:r="http://schemas.openxmlformats.org/officeDocument/2006/relationships">
+  <p:cSld>
+    <p:spTree>
+      <p:nvGrpSpPr>
+        <p:cNvPr id="1" name=""/>
+        <p:cNvGrpSpPr/>
+        <p:nvPr/>
+      </p:nvGrpSpPr>
+      <p:grpSpPr/>
+      <p:sp>
+        <p:nvSpPr>
+          <p:cNvPr id="2" name="Rectangle 1"/>
+          <p:cNvSpPr/>
+          <p:nvPr/>
+        </p:nvSpPr>
+        <p:spPr>
+          <a:xfrm>
+            <a:off x="0" y="0"/>
+            <a:ext cx="12188952" cy="6858000"/>
+          </a:xfrm>
+          <a:prstGeom prst="rect">
+            <a:avLst/>
+          </a:prstGeom>
+          <a:solidFill>
+            <a:srgbClr val="1A1A2E"/>
+          </a:solidFill>
+          <a:ln>
+            <a:noFill/>
+          </a:ln>
+          <a:effectLst/>
+        </p:spPr>
+        <p:style>
+          <a:lnRef idx="1">
+            <a:schemeClr val="accent1"/>
+          </a:lnRef>
+          <a:fillRef idx="3">
+            <a:schemeClr val="accent1"/>
+          </a:fillRef>
+          <a:effectRef idx="2">
+            <a:schemeClr val="accent1"/>
+          </a:effectRef>
+          <a:fontRef idx="minor">
+            <a:schemeClr val="lt1"/>
+          </a:fontRef>
+        </p:style>
+        <p:txBody>
+          <a:bodyPr rtlCol="0" anchor="ctr"/>
+          <a:lstStyle/>
+          <a:p>
+            <a:pPr algn="ctr"/>
+          </a:p>
+        </p:txBody>
+      </p:sp>
+      <p:sp>
+        <p:nvSpPr>
           <p:cNvPr id="3" name="Rectangle 2"/>
           <p:cNvSpPr/>
           <p:nvPr/>
@@ -38849,7 +40316,7 @@
                 </a:solidFill>
                 <a:latin typeface="Arial"/>
               </a:rPr>
-              <a:t>30</a:t>
+              <a:t>31</a:t>
             </a:r>
           </a:p>
         </p:txBody>

--- a/倉管Agent_專案簡報.pptx
+++ b/倉管Agent_專案簡報.pptx
@@ -36,6 +36,8 @@
     <p:sldId id="284" r:id="rId36"/>
     <p:sldId id="285" r:id="rId37"/>
     <p:sldId id="286" r:id="rId38"/>
+    <p:sldId id="287" r:id="rId39"/>
+    <p:sldId id="288" r:id="rId40"/>
   </p:sldIdLst>
   <p:sldSz cx="12188952" cy="6858000" type="screen4x3"/>
   <p:notesSz cx="6858000" cy="9144000"/>
@@ -2461,6 +2463,152 @@
 </file>
 
 <file path=ppt/notesSlides/notesSlide31.xml><?xml version="1.0" encoding="utf-8"?>
+<p:notes xmlns:a="http://schemas.openxmlformats.org/drawingml/2006/main" xmlns:p="http://schemas.openxmlformats.org/presentationml/2006/main" xmlns:r="http://schemas.openxmlformats.org/officeDocument/2006/relationships">
+  <p:cSld>
+    <p:spTree>
+      <p:nvGrpSpPr>
+        <p:cNvPr id="1" name=""/>
+        <p:cNvGrpSpPr/>
+        <p:nvPr/>
+      </p:nvGrpSpPr>
+      <p:grpSpPr>
+        <a:xfrm>
+          <a:off x="0" y="0"/>
+          <a:ext cx="0" cy="0"/>
+          <a:chOff x="0" y="0"/>
+          <a:chExt cx="0" cy="0"/>
+        </a:xfrm>
+      </p:grpSpPr>
+      <p:sp>
+        <p:nvSpPr>
+          <p:cNvPr id="2" name="Slide Image Placeholder 1"/>
+          <p:cNvSpPr>
+            <a:spLocks noGrp="1"/>
+          </p:cNvSpPr>
+          <p:nvPr>
+            <p:ph type="sldImg" idx="2"/>
+          </p:nvPr>
+        </p:nvSpPr>
+        <p:spPr/>
+      </p:sp>
+      <p:sp>
+        <p:nvSpPr>
+          <p:cNvPr id="3" name="Notes Placeholder 2"/>
+          <p:cNvSpPr>
+            <a:spLocks noGrp="1"/>
+          </p:cNvSpPr>
+          <p:nvPr>
+            <p:ph type="body" idx="3" sz="quarter"/>
+          </p:nvPr>
+        </p:nvSpPr>
+        <p:spPr/>
+        <p:txBody>
+          <a:bodyPr/>
+          <a:lstStyle/>
+          <a:p>
+            <a:r>
+              <a:rPr sz="1200">
+                <a:latin typeface="Microsoft JhengHei"/>
+              </a:rPr>
+              <a:t>★真人 100 句最終實測（2026-08-02）。**這頁取代上一頁的 38 句數據，但刻意兩頁都留著**——因為修正的理由本身就是可講的內容。為何舊數據要修正，兩個原因：①樣本不足（38 句）②**混噪參數失真**。舊參數 light/heavy 換算成訊噪比只有 19.7 / 10.4 dB，而使用者在家用手機開 100% 音量（本人形容『蠻吵』）實測是 31.5 dB——**測試條件比真實環境嚴苛 12 到 21 分貝**，那已經不是展場而是施工現場。加上量測工具本身三個 bug（amix 預設把每路衰減一半、aecho 把人聲能量分散到回音尾巴、噪音音量設定過大），三者疊加讓 heavy 從真值 63% 一路被壓到 16%。**教訓：數據反常時要先查量測工具，不要先解釋現象。** 新參數以使用者實際環境的訊噪比實測值當錨點反推，light 定 27.1 dB、heavy 22.7 dB。修正後：安靜 87%、展場一般 84%、尖峰 76%，噪音只掉 3 個百分點。另外 13 項系統修正讓**同一批錄音**（沒有重錄任何一句）從 74% 提升到 83%——這比重錄更有說服力，因為變的是系統不是人。⚠️ 評審若問母語者會不會更高：**不敢保證**，我們只有 TTS 腔調數據，而 TTS 已證實高估 21 到 55 個百分點，真人母語者從未實測。</a:t>
+            </a:r>
+          </a:p>
+        </p:txBody>
+      </p:sp>
+      <p:sp>
+        <p:nvSpPr>
+          <p:cNvPr id="4" name="Slide Number Placeholder 3"/>
+          <p:cNvSpPr>
+            <a:spLocks noGrp="1"/>
+          </p:cNvSpPr>
+          <p:nvPr>
+            <p:ph type="sldNum" idx="5" sz="quarter"/>
+          </p:nvPr>
+        </p:nvSpPr>
+        <p:spPr/>
+      </p:sp>
+    </p:spTree>
+  </p:cSld>
+  <p:clrMapOvr>
+    <a:masterClrMapping/>
+  </p:clrMapOvr>
+</p:notes>
+</file>
+
+<file path=ppt/notesSlides/notesSlide32.xml><?xml version="1.0" encoding="utf-8"?>
+<p:notes xmlns:a="http://schemas.openxmlformats.org/drawingml/2006/main" xmlns:p="http://schemas.openxmlformats.org/presentationml/2006/main" xmlns:r="http://schemas.openxmlformats.org/officeDocument/2006/relationships">
+  <p:cSld>
+    <p:spTree>
+      <p:nvGrpSpPr>
+        <p:cNvPr id="1" name=""/>
+        <p:cNvGrpSpPr/>
+        <p:nvPr/>
+      </p:nvGrpSpPr>
+      <p:grpSpPr>
+        <a:xfrm>
+          <a:off x="0" y="0"/>
+          <a:ext cx="0" cy="0"/>
+          <a:chOff x="0" y="0"/>
+          <a:chExt cx="0" cy="0"/>
+        </a:xfrm>
+      </p:grpSpPr>
+      <p:sp>
+        <p:nvSpPr>
+          <p:cNvPr id="2" name="Slide Image Placeholder 1"/>
+          <p:cNvSpPr>
+            <a:spLocks noGrp="1"/>
+          </p:cNvSpPr>
+          <p:nvPr>
+            <p:ph type="sldImg" idx="2"/>
+          </p:nvPr>
+        </p:nvSpPr>
+        <p:spPr/>
+      </p:sp>
+      <p:sp>
+        <p:nvSpPr>
+          <p:cNvPr id="3" name="Notes Placeholder 2"/>
+          <p:cNvSpPr>
+            <a:spLocks noGrp="1"/>
+          </p:cNvSpPr>
+          <p:nvPr>
+            <p:ph type="body" idx="3" sz="quarter"/>
+          </p:nvPr>
+        </p:nvSpPr>
+        <p:spPr/>
+        <p:txBody>
+          <a:bodyPr/>
+          <a:lstStyle/>
+          <a:p>
+            <a:r>
+              <a:rPr sz="1200">
+                <a:latin typeface="Microsoft JhengHei"/>
+              </a:rPr>
+              <a:t>★收斂日測試方法頁（2026-08-02）。核心訊息：**守衛全綠不代表沒問題**，換一個角度就抓到一批。這天用同一批 100 句真人錄音當輸入源，換了九個角度：真實 ASR 錯法重放、拼字變體、寫入資料正確性、惡意邊界輸入、跨查詢介面一致性、UI 提示句實際照打、多輪長對話、並發壓測、前端真實點擊、狀態污染。前四個角度各抓到破口，**最後兩輪（前端互動、狀態污染）零破口＝收斂訊號**。最嚴重的三個都跟資料正確性有關：①小數數量『進 1.5 個』開出 +5 的卡（中文版有保護、英文版判準要求中文量詞所以失效）②一句兩商品只記第一筆（中文版有攔截、英文版判準是中文量詞與連接詞）③寫入後查不到那筆（熱更新只更新庫存、漏了進出紀錄，中英文版都中）。**共同模式是「中文版有保護、英文版判準沒英文化」**——移植時要優先掃數值保護類的機制（上限、負數、零、小數），因為**路由錯訪客看得出來、數字錯不會**。整天守衛庫維持 892/892 零回歸。</a:t>
+            </a:r>
+          </a:p>
+        </p:txBody>
+      </p:sp>
+      <p:sp>
+        <p:nvSpPr>
+          <p:cNvPr id="4" name="Slide Number Placeholder 3"/>
+          <p:cNvSpPr>
+            <a:spLocks noGrp="1"/>
+          </p:cNvSpPr>
+          <p:nvPr>
+            <p:ph type="sldNum" idx="5" sz="quarter"/>
+          </p:nvPr>
+        </p:nvSpPr>
+        <p:spPr/>
+      </p:sp>
+    </p:spTree>
+  </p:cSld>
+  <p:clrMapOvr>
+    <a:masterClrMapping/>
+  </p:clrMapOvr>
+</p:notes>
+</file>
+
+<file path=ppt/notesSlides/notesSlide33.xml><?xml version="1.0" encoding="utf-8"?>
 <p:notes xmlns:a="http://schemas.openxmlformats.org/drawingml/2006/main" xmlns:p="http://schemas.openxmlformats.org/presentationml/2006/main" xmlns:r="http://schemas.openxmlformats.org/officeDocument/2006/relationships">
   <p:cSld>
     <p:spTree>
@@ -39044,14 +39192,1163 @@
       <p:grpSpPr/>
       <p:sp>
         <p:nvSpPr>
-          <p:cNvPr id="2" name="Rectangle 1"/>
+          <p:cNvPr id="2" name="TextBox 1"/>
+          <p:cNvSpPr txBox="1"/>
+          <p:nvPr/>
+        </p:nvSpPr>
+        <p:spPr>
+          <a:xfrm>
+            <a:off x="667512" y="310896"/>
+            <a:ext cx="10789920" cy="274320"/>
+          </a:xfrm>
+          <a:prstGeom prst="rect">
+            <a:avLst/>
+          </a:prstGeom>
+          <a:noFill/>
+        </p:spPr>
+        <p:txBody>
+          <a:bodyPr wrap="square" lIns="0" rIns="0" tIns="0" bIns="0" anchor="t">
+            <a:spAutoFit/>
+          </a:bodyPr>
+          <a:lstStyle/>
+          <a:p>
+            <a:pPr algn="l">
+              <a:lnSpc>
+                <a:spcPct val="115000"/>
+              </a:lnSpc>
+            </a:pPr>
+            <a:r>
+              <a:rPr sz="1250" b="1">
+                <a:solidFill>
+                  <a:srgbClr val="00C49A"/>
+                </a:solidFill>
+                <a:latin typeface="Arial"/>
+              </a:rPr>
+              <a:t>VOICE · 100 句最終實測</a:t>
+            </a:r>
+          </a:p>
+        </p:txBody>
+      </p:sp>
+      <p:sp>
+        <p:nvSpPr>
+          <p:cNvPr id="3" name="TextBox 2"/>
+          <p:cNvSpPr txBox="1"/>
+          <p:nvPr/>
+        </p:nvSpPr>
+        <p:spPr>
+          <a:xfrm>
+            <a:off x="667512" y="585216"/>
+            <a:ext cx="10789920" cy="566928"/>
+          </a:xfrm>
+          <a:prstGeom prst="rect">
+            <a:avLst/>
+          </a:prstGeom>
+          <a:noFill/>
+        </p:spPr>
+        <p:txBody>
+          <a:bodyPr wrap="square" lIns="0" rIns="0" tIns="0" bIns="0" anchor="t">
+            <a:spAutoFit/>
+          </a:bodyPr>
+          <a:lstStyle/>
+          <a:p>
+            <a:pPr algn="l">
+              <a:lnSpc>
+                <a:spcPct val="115000"/>
+              </a:lnSpc>
+            </a:pPr>
+            <a:r>
+              <a:rPr sz="2700" b="1">
+                <a:solidFill>
+                  <a:srgbClr val="1A1A2E"/>
+                </a:solidFill>
+                <a:latin typeface="Microsoft JhengHei"/>
+              </a:rPr>
+              <a:t>錄滿 100 句 + 修 13 個破口，展場噪音下 84%</a:t>
+            </a:r>
+          </a:p>
+        </p:txBody>
+      </p:sp>
+      <p:sp>
+        <p:nvSpPr>
+          <p:cNvPr id="4" name="TextBox 3"/>
+          <p:cNvSpPr txBox="1"/>
+          <p:nvPr/>
+        </p:nvSpPr>
+        <p:spPr>
+          <a:xfrm>
+            <a:off x="667512" y="1207008"/>
+            <a:ext cx="10789920" cy="365760"/>
+          </a:xfrm>
+          <a:prstGeom prst="rect">
+            <a:avLst/>
+          </a:prstGeom>
+          <a:noFill/>
+        </p:spPr>
+        <p:txBody>
+          <a:bodyPr wrap="square" lIns="0" rIns="0" tIns="0" bIns="0" anchor="t">
+            <a:spAutoFit/>
+          </a:bodyPr>
+          <a:lstStyle/>
+          <a:p>
+            <a:pPr algn="l">
+              <a:lnSpc>
+                <a:spcPct val="115000"/>
+              </a:lnSpc>
+            </a:pPr>
+            <a:r>
+              <a:rPr sz="1300" b="0">
+                <a:solidFill>
+                  <a:srgbClr val="555555"/>
+                </a:solidFill>
+                <a:latin typeface="Microsoft JhengHei"/>
+              </a:rPr>
+              <a:t>上一頁的 38 句版本有兩個問題必須修正：①樣本只有 38 句 ②混噪參數失真，把數據壓得過度悲觀。這頁是修正後的完整結果。</a:t>
+            </a:r>
+          </a:p>
+        </p:txBody>
+      </p:sp>
+      <p:sp>
+        <p:nvSpPr>
+          <p:cNvPr id="5" name="Rounded Rectangle 4"/>
           <p:cNvSpPr/>
           <p:nvPr/>
         </p:nvSpPr>
         <p:spPr>
           <a:xfrm>
-            <a:off x="0" y="0"/>
-            <a:ext cx="12188952" cy="6858000"/>
+            <a:off x="667512" y="1755648"/>
+            <a:ext cx="3474720" cy="1371600"/>
+          </a:xfrm>
+          <a:prstGeom prst="roundRect">
+            <a:avLst>
+              <a:gd name="adj" fmla="val 8000"/>
+            </a:avLst>
+          </a:prstGeom>
+          <a:solidFill>
+            <a:srgbClr val="F4F6F8"/>
+          </a:solidFill>
+          <a:ln>
+            <a:noFill/>
+          </a:ln>
+          <a:effectLst/>
+        </p:spPr>
+        <p:style>
+          <a:lnRef idx="1">
+            <a:schemeClr val="accent1"/>
+          </a:lnRef>
+          <a:fillRef idx="3">
+            <a:schemeClr val="accent1"/>
+          </a:fillRef>
+          <a:effectRef idx="2">
+            <a:schemeClr val="accent1"/>
+          </a:effectRef>
+          <a:fontRef idx="minor">
+            <a:schemeClr val="lt1"/>
+          </a:fontRef>
+        </p:style>
+        <p:txBody>
+          <a:bodyPr rtlCol="0" anchor="ctr"/>
+          <a:lstStyle/>
+          <a:p>
+            <a:pPr algn="ctr"/>
+          </a:p>
+        </p:txBody>
+      </p:sp>
+      <p:sp>
+        <p:nvSpPr>
+          <p:cNvPr id="6" name="TextBox 5"/>
+          <p:cNvSpPr txBox="1"/>
+          <p:nvPr/>
+        </p:nvSpPr>
+        <p:spPr>
+          <a:xfrm>
+            <a:off x="896112" y="1874519"/>
+            <a:ext cx="3017520" cy="292608"/>
+          </a:xfrm>
+          <a:prstGeom prst="rect">
+            <a:avLst/>
+          </a:prstGeom>
+          <a:noFill/>
+        </p:spPr>
+        <p:txBody>
+          <a:bodyPr wrap="square" lIns="0" rIns="0" tIns="0" bIns="0" anchor="t">
+            <a:spAutoFit/>
+          </a:bodyPr>
+          <a:lstStyle/>
+          <a:p>
+            <a:pPr algn="l">
+              <a:lnSpc>
+                <a:spcPct val="115000"/>
+              </a:lnSpc>
+            </a:pPr>
+            <a:r>
+              <a:rPr sz="1300" b="1">
+                <a:solidFill>
+                  <a:srgbClr val="1A1A2E"/>
+                </a:solidFill>
+                <a:latin typeface="Microsoft JhengHei"/>
+              </a:rPr>
+              <a:t>安靜環境</a:t>
+            </a:r>
+          </a:p>
+        </p:txBody>
+      </p:sp>
+      <p:sp>
+        <p:nvSpPr>
+          <p:cNvPr id="7" name="TextBox 6"/>
+          <p:cNvSpPr txBox="1"/>
+          <p:nvPr/>
+        </p:nvSpPr>
+        <p:spPr>
+          <a:xfrm>
+            <a:off x="896112" y="2167128"/>
+            <a:ext cx="3017520" cy="548640"/>
+          </a:xfrm>
+          <a:prstGeom prst="rect">
+            <a:avLst/>
+          </a:prstGeom>
+          <a:noFill/>
+        </p:spPr>
+        <p:txBody>
+          <a:bodyPr wrap="square" lIns="0" rIns="0" tIns="0" bIns="0" anchor="t">
+            <a:spAutoFit/>
+          </a:bodyPr>
+          <a:lstStyle/>
+          <a:p>
+            <a:pPr algn="l">
+              <a:lnSpc>
+                <a:spcPct val="115000"/>
+              </a:lnSpc>
+            </a:pPr>
+            <a:r>
+              <a:rPr sz="3400" b="1">
+                <a:solidFill>
+                  <a:srgbClr val="008E76"/>
+                </a:solidFill>
+                <a:latin typeface="Arial"/>
+              </a:rPr>
+              <a:t>87%</a:t>
+            </a:r>
+          </a:p>
+        </p:txBody>
+      </p:sp>
+      <p:sp>
+        <p:nvSpPr>
+          <p:cNvPr id="8" name="TextBox 7"/>
+          <p:cNvSpPr txBox="1"/>
+          <p:nvPr/>
+        </p:nvSpPr>
+        <p:spPr>
+          <a:xfrm>
+            <a:off x="896112" y="2734056"/>
+            <a:ext cx="3017520" cy="347472"/>
+          </a:xfrm>
+          <a:prstGeom prst="rect">
+            <a:avLst/>
+          </a:prstGeom>
+          <a:noFill/>
+        </p:spPr>
+        <p:txBody>
+          <a:bodyPr wrap="square" lIns="0" rIns="0" tIns="0" bIns="0" anchor="t">
+            <a:spAutoFit/>
+          </a:bodyPr>
+          <a:lstStyle/>
+          <a:p>
+            <a:pPr algn="l">
+              <a:lnSpc>
+                <a:spcPct val="115000"/>
+              </a:lnSpc>
+            </a:pPr>
+            <a:r>
+              <a:rPr sz="1050" b="0">
+                <a:solidFill>
+                  <a:srgbClr val="555555"/>
+                </a:solidFill>
+                <a:latin typeface="Microsoft JhengHei"/>
+              </a:rPr>
+              <a:t>SNR 31.4 dB</a:t>
+            </a:r>
+          </a:p>
+        </p:txBody>
+      </p:sp>
+      <p:sp>
+        <p:nvSpPr>
+          <p:cNvPr id="9" name="Rounded Rectangle 8"/>
+          <p:cNvSpPr/>
+          <p:nvPr/>
+        </p:nvSpPr>
+        <p:spPr>
+          <a:xfrm>
+            <a:off x="4343399" y="1755648"/>
+            <a:ext cx="3474720" cy="1371600"/>
+          </a:xfrm>
+          <a:prstGeom prst="roundRect">
+            <a:avLst>
+              <a:gd name="adj" fmla="val 8000"/>
+            </a:avLst>
+          </a:prstGeom>
+          <a:solidFill>
+            <a:srgbClr val="F4F6F8"/>
+          </a:solidFill>
+          <a:ln>
+            <a:noFill/>
+          </a:ln>
+          <a:effectLst/>
+        </p:spPr>
+        <p:style>
+          <a:lnRef idx="1">
+            <a:schemeClr val="accent1"/>
+          </a:lnRef>
+          <a:fillRef idx="3">
+            <a:schemeClr val="accent1"/>
+          </a:fillRef>
+          <a:effectRef idx="2">
+            <a:schemeClr val="accent1"/>
+          </a:effectRef>
+          <a:fontRef idx="minor">
+            <a:schemeClr val="lt1"/>
+          </a:fontRef>
+        </p:style>
+        <p:txBody>
+          <a:bodyPr rtlCol="0" anchor="ctr"/>
+          <a:lstStyle/>
+          <a:p>
+            <a:pPr algn="ctr"/>
+          </a:p>
+        </p:txBody>
+      </p:sp>
+      <p:sp>
+        <p:nvSpPr>
+          <p:cNvPr id="10" name="TextBox 9"/>
+          <p:cNvSpPr txBox="1"/>
+          <p:nvPr/>
+        </p:nvSpPr>
+        <p:spPr>
+          <a:xfrm>
+            <a:off x="4571999" y="1874519"/>
+            <a:ext cx="3017520" cy="292608"/>
+          </a:xfrm>
+          <a:prstGeom prst="rect">
+            <a:avLst/>
+          </a:prstGeom>
+          <a:noFill/>
+        </p:spPr>
+        <p:txBody>
+          <a:bodyPr wrap="square" lIns="0" rIns="0" tIns="0" bIns="0" anchor="t">
+            <a:spAutoFit/>
+          </a:bodyPr>
+          <a:lstStyle/>
+          <a:p>
+            <a:pPr algn="l">
+              <a:lnSpc>
+                <a:spcPct val="115000"/>
+              </a:lnSpc>
+            </a:pPr>
+            <a:r>
+              <a:rPr sz="1300" b="1">
+                <a:solidFill>
+                  <a:srgbClr val="1A1A2E"/>
+                </a:solidFill>
+                <a:latin typeface="Microsoft JhengHei"/>
+              </a:rPr>
+              <a:t>展場一般噪音</a:t>
+            </a:r>
+          </a:p>
+        </p:txBody>
+      </p:sp>
+      <p:sp>
+        <p:nvSpPr>
+          <p:cNvPr id="11" name="TextBox 10"/>
+          <p:cNvSpPr txBox="1"/>
+          <p:nvPr/>
+        </p:nvSpPr>
+        <p:spPr>
+          <a:xfrm>
+            <a:off x="4571999" y="2167128"/>
+            <a:ext cx="3017520" cy="548640"/>
+          </a:xfrm>
+          <a:prstGeom prst="rect">
+            <a:avLst/>
+          </a:prstGeom>
+          <a:noFill/>
+        </p:spPr>
+        <p:txBody>
+          <a:bodyPr wrap="square" lIns="0" rIns="0" tIns="0" bIns="0" anchor="t">
+            <a:spAutoFit/>
+          </a:bodyPr>
+          <a:lstStyle/>
+          <a:p>
+            <a:pPr algn="l">
+              <a:lnSpc>
+                <a:spcPct val="115000"/>
+              </a:lnSpc>
+            </a:pPr>
+            <a:r>
+              <a:rPr sz="3400" b="1">
+                <a:solidFill>
+                  <a:srgbClr val="00C49A"/>
+                </a:solidFill>
+                <a:latin typeface="Arial"/>
+              </a:rPr>
+              <a:t>84%</a:t>
+            </a:r>
+          </a:p>
+        </p:txBody>
+      </p:sp>
+      <p:sp>
+        <p:nvSpPr>
+          <p:cNvPr id="12" name="TextBox 11"/>
+          <p:cNvSpPr txBox="1"/>
+          <p:nvPr/>
+        </p:nvSpPr>
+        <p:spPr>
+          <a:xfrm>
+            <a:off x="4571999" y="2734056"/>
+            <a:ext cx="3017520" cy="347472"/>
+          </a:xfrm>
+          <a:prstGeom prst="rect">
+            <a:avLst/>
+          </a:prstGeom>
+          <a:noFill/>
+        </p:spPr>
+        <p:txBody>
+          <a:bodyPr wrap="square" lIns="0" rIns="0" tIns="0" bIns="0" anchor="t">
+            <a:spAutoFit/>
+          </a:bodyPr>
+          <a:lstStyle/>
+          <a:p>
+            <a:pPr algn="l">
+              <a:lnSpc>
+                <a:spcPct val="115000"/>
+              </a:lnSpc>
+            </a:pPr>
+            <a:r>
+              <a:rPr sz="1050" b="0">
+                <a:solidFill>
+                  <a:srgbClr val="555555"/>
+                </a:solidFill>
+                <a:latin typeface="Microsoft JhengHei"/>
+              </a:rPr>
+              <a:t>SNR 27.1 dB · 真實賣場人潮音</a:t>
+            </a:r>
+          </a:p>
+        </p:txBody>
+      </p:sp>
+      <p:sp>
+        <p:nvSpPr>
+          <p:cNvPr id="13" name="Rounded Rectangle 12"/>
+          <p:cNvSpPr/>
+          <p:nvPr/>
+        </p:nvSpPr>
+        <p:spPr>
+          <a:xfrm>
+            <a:off x="8019286" y="1755648"/>
+            <a:ext cx="3474720" cy="1371600"/>
+          </a:xfrm>
+          <a:prstGeom prst="roundRect">
+            <a:avLst>
+              <a:gd name="adj" fmla="val 8000"/>
+            </a:avLst>
+          </a:prstGeom>
+          <a:solidFill>
+            <a:srgbClr val="F4F6F8"/>
+          </a:solidFill>
+          <a:ln>
+            <a:noFill/>
+          </a:ln>
+          <a:effectLst/>
+        </p:spPr>
+        <p:style>
+          <a:lnRef idx="1">
+            <a:schemeClr val="accent1"/>
+          </a:lnRef>
+          <a:fillRef idx="3">
+            <a:schemeClr val="accent1"/>
+          </a:fillRef>
+          <a:effectRef idx="2">
+            <a:schemeClr val="accent1"/>
+          </a:effectRef>
+          <a:fontRef idx="minor">
+            <a:schemeClr val="lt1"/>
+          </a:fontRef>
+        </p:style>
+        <p:txBody>
+          <a:bodyPr rtlCol="0" anchor="ctr"/>
+          <a:lstStyle/>
+          <a:p>
+            <a:pPr algn="ctr"/>
+          </a:p>
+        </p:txBody>
+      </p:sp>
+      <p:sp>
+        <p:nvSpPr>
+          <p:cNvPr id="14" name="TextBox 13"/>
+          <p:cNvSpPr txBox="1"/>
+          <p:nvPr/>
+        </p:nvSpPr>
+        <p:spPr>
+          <a:xfrm>
+            <a:off x="8247886" y="1874519"/>
+            <a:ext cx="3017520" cy="292608"/>
+          </a:xfrm>
+          <a:prstGeom prst="rect">
+            <a:avLst/>
+          </a:prstGeom>
+          <a:noFill/>
+        </p:spPr>
+        <p:txBody>
+          <a:bodyPr wrap="square" lIns="0" rIns="0" tIns="0" bIns="0" anchor="t">
+            <a:spAutoFit/>
+          </a:bodyPr>
+          <a:lstStyle/>
+          <a:p>
+            <a:pPr algn="l">
+              <a:lnSpc>
+                <a:spcPct val="115000"/>
+              </a:lnSpc>
+            </a:pPr>
+            <a:r>
+              <a:rPr sz="1300" b="1">
+                <a:solidFill>
+                  <a:srgbClr val="1A1A2E"/>
+                </a:solidFill>
+                <a:latin typeface="Microsoft JhengHei"/>
+              </a:rPr>
+              <a:t>尖峰吵雜</a:t>
+            </a:r>
+          </a:p>
+        </p:txBody>
+      </p:sp>
+      <p:sp>
+        <p:nvSpPr>
+          <p:cNvPr id="15" name="TextBox 14"/>
+          <p:cNvSpPr txBox="1"/>
+          <p:nvPr/>
+        </p:nvSpPr>
+        <p:spPr>
+          <a:xfrm>
+            <a:off x="8247886" y="2167128"/>
+            <a:ext cx="3017520" cy="548640"/>
+          </a:xfrm>
+          <a:prstGeom prst="rect">
+            <a:avLst/>
+          </a:prstGeom>
+          <a:noFill/>
+        </p:spPr>
+        <p:txBody>
+          <a:bodyPr wrap="square" lIns="0" rIns="0" tIns="0" bIns="0" anchor="t">
+            <a:spAutoFit/>
+          </a:bodyPr>
+          <a:lstStyle/>
+          <a:p>
+            <a:pPr algn="l">
+              <a:lnSpc>
+                <a:spcPct val="115000"/>
+              </a:lnSpc>
+            </a:pPr>
+            <a:r>
+              <a:rPr sz="3400" b="1">
+                <a:solidFill>
+                  <a:srgbClr val="777777"/>
+                </a:solidFill>
+                <a:latin typeface="Arial"/>
+              </a:rPr>
+              <a:t>76%</a:t>
+            </a:r>
+          </a:p>
+        </p:txBody>
+      </p:sp>
+      <p:sp>
+        <p:nvSpPr>
+          <p:cNvPr id="16" name="TextBox 15"/>
+          <p:cNvSpPr txBox="1"/>
+          <p:nvPr/>
+        </p:nvSpPr>
+        <p:spPr>
+          <a:xfrm>
+            <a:off x="8247886" y="2734056"/>
+            <a:ext cx="3017520" cy="347472"/>
+          </a:xfrm>
+          <a:prstGeom prst="rect">
+            <a:avLst/>
+          </a:prstGeom>
+          <a:noFill/>
+        </p:spPr>
+        <p:txBody>
+          <a:bodyPr wrap="square" lIns="0" rIns="0" tIns="0" bIns="0" anchor="t">
+            <a:spAutoFit/>
+          </a:bodyPr>
+          <a:lstStyle/>
+          <a:p>
+            <a:pPr algn="l">
+              <a:lnSpc>
+                <a:spcPct val="115000"/>
+              </a:lnSpc>
+            </a:pPr>
+            <a:r>
+              <a:rPr sz="1050" b="0">
+                <a:solidFill>
+                  <a:srgbClr val="555555"/>
+                </a:solidFill>
+                <a:latin typeface="Microsoft JhengHei"/>
+              </a:rPr>
+              <a:t>SNR 22.7 dB</a:t>
+            </a:r>
+          </a:p>
+        </p:txBody>
+      </p:sp>
+      <p:sp>
+        <p:nvSpPr>
+          <p:cNvPr id="17" name="TextBox 16"/>
+          <p:cNvSpPr txBox="1"/>
+          <p:nvPr/>
+        </p:nvSpPr>
+        <p:spPr>
+          <a:xfrm>
+            <a:off x="667512" y="3273552"/>
+            <a:ext cx="10789920" cy="292608"/>
+          </a:xfrm>
+          <a:prstGeom prst="rect">
+            <a:avLst/>
+          </a:prstGeom>
+          <a:noFill/>
+        </p:spPr>
+        <p:txBody>
+          <a:bodyPr wrap="square" lIns="0" rIns="0" tIns="0" bIns="0" anchor="t">
+            <a:spAutoFit/>
+          </a:bodyPr>
+          <a:lstStyle/>
+          <a:p>
+            <a:pPr algn="l">
+              <a:lnSpc>
+                <a:spcPct val="115000"/>
+              </a:lnSpc>
+            </a:pPr>
+            <a:r>
+              <a:rPr sz="1300" b="1">
+                <a:solidFill>
+                  <a:srgbClr val="008E76"/>
+                </a:solidFill>
+                <a:latin typeface="Microsoft JhengHei"/>
+              </a:rPr>
+              <a:t>噪音只讓通過率掉 3 個百分點（87 → 84）</a:t>
+            </a:r>
+          </a:p>
+        </p:txBody>
+      </p:sp>
+      <p:sp>
+        <p:nvSpPr>
+          <p:cNvPr id="18" name="Rounded Rectangle 17"/>
+          <p:cNvSpPr/>
+          <p:nvPr/>
+        </p:nvSpPr>
+        <p:spPr>
+          <a:xfrm>
+            <a:off x="667512" y="3675887"/>
+            <a:ext cx="10789920" cy="566928"/>
+          </a:xfrm>
+          <a:prstGeom prst="roundRect">
+            <a:avLst>
+              <a:gd name="adj" fmla="val 8000"/>
+            </a:avLst>
+          </a:prstGeom>
+          <a:solidFill>
+            <a:srgbClr val="FFFFFF"/>
+          </a:solidFill>
+          <a:ln w="9525">
+            <a:solidFill>
+              <a:srgbClr val="E6E8EC"/>
+            </a:solidFill>
+          </a:ln>
+          <a:effectLst/>
+        </p:spPr>
+        <p:style>
+          <a:lnRef idx="1">
+            <a:schemeClr val="accent1"/>
+          </a:lnRef>
+          <a:fillRef idx="3">
+            <a:schemeClr val="accent1"/>
+          </a:fillRef>
+          <a:effectRef idx="2">
+            <a:schemeClr val="accent1"/>
+          </a:effectRef>
+          <a:fontRef idx="minor">
+            <a:schemeClr val="lt1"/>
+          </a:fontRef>
+        </p:style>
+        <p:txBody>
+          <a:bodyPr rtlCol="0" anchor="ctr"/>
+          <a:lstStyle/>
+          <a:p>
+            <a:pPr algn="ctr"/>
+          </a:p>
+        </p:txBody>
+      </p:sp>
+      <p:sp>
+        <p:nvSpPr>
+          <p:cNvPr id="19" name="TextBox 18"/>
+          <p:cNvSpPr txBox="1"/>
+          <p:nvPr/>
+        </p:nvSpPr>
+        <p:spPr>
+          <a:xfrm>
+            <a:off x="923544" y="3739895"/>
+            <a:ext cx="3200400" cy="310896"/>
+          </a:xfrm>
+          <a:prstGeom prst="rect">
+            <a:avLst/>
+          </a:prstGeom>
+          <a:noFill/>
+        </p:spPr>
+        <p:txBody>
+          <a:bodyPr wrap="square" lIns="0" rIns="0" tIns="0" bIns="0" anchor="t">
+            <a:spAutoFit/>
+          </a:bodyPr>
+          <a:lstStyle/>
+          <a:p>
+            <a:pPr algn="l">
+              <a:lnSpc>
+                <a:spcPct val="115000"/>
+              </a:lnSpc>
+            </a:pPr>
+            <a:r>
+              <a:rPr sz="1200" b="1">
+                <a:solidFill>
+                  <a:srgbClr val="008E76"/>
+                </a:solidFill>
+                <a:latin typeface="Microsoft JhengHei"/>
+              </a:rPr>
+              <a:t>樣本從 38 句補到 100 句</a:t>
+            </a:r>
+          </a:p>
+        </p:txBody>
+      </p:sp>
+      <p:sp>
+        <p:nvSpPr>
+          <p:cNvPr id="20" name="TextBox 19"/>
+          <p:cNvSpPr txBox="1"/>
+          <p:nvPr/>
+        </p:nvSpPr>
+        <p:spPr>
+          <a:xfrm>
+            <a:off x="4279392" y="3739895"/>
+            <a:ext cx="6949440" cy="420624"/>
+          </a:xfrm>
+          <a:prstGeom prst="rect">
+            <a:avLst/>
+          </a:prstGeom>
+          <a:noFill/>
+        </p:spPr>
+        <p:txBody>
+          <a:bodyPr wrap="square" lIns="0" rIns="0" tIns="0" bIns="0" anchor="t">
+            <a:spAutoFit/>
+          </a:bodyPr>
+          <a:lstStyle/>
+          <a:p>
+            <a:pPr algn="l">
+              <a:lnSpc>
+                <a:spcPct val="112000"/>
+              </a:lnSpc>
+            </a:pPr>
+            <a:r>
+              <a:rPr sz="1100" b="0">
+                <a:solidFill>
+                  <a:srgbClr val="555555"/>
+                </a:solidFill>
+                <a:latin typeface="Microsoft JhengHei"/>
+              </a:rPr>
+              <a:t>涵蓋查詢 / 寫入 / 多輪對話 / 對話邊界七大段</a:t>
+            </a:r>
+          </a:p>
+        </p:txBody>
+      </p:sp>
+      <p:sp>
+        <p:nvSpPr>
+          <p:cNvPr id="21" name="Rounded Rectangle 20"/>
+          <p:cNvSpPr/>
+          <p:nvPr/>
+        </p:nvSpPr>
+        <p:spPr>
+          <a:xfrm>
+            <a:off x="667512" y="4334255"/>
+            <a:ext cx="10789920" cy="566928"/>
+          </a:xfrm>
+          <a:prstGeom prst="roundRect">
+            <a:avLst>
+              <a:gd name="adj" fmla="val 8000"/>
+            </a:avLst>
+          </a:prstGeom>
+          <a:solidFill>
+            <a:srgbClr val="FFFFFF"/>
+          </a:solidFill>
+          <a:ln w="9525">
+            <a:solidFill>
+              <a:srgbClr val="E6E8EC"/>
+            </a:solidFill>
+          </a:ln>
+          <a:effectLst/>
+        </p:spPr>
+        <p:style>
+          <a:lnRef idx="1">
+            <a:schemeClr val="accent1"/>
+          </a:lnRef>
+          <a:fillRef idx="3">
+            <a:schemeClr val="accent1"/>
+          </a:fillRef>
+          <a:effectRef idx="2">
+            <a:schemeClr val="accent1"/>
+          </a:effectRef>
+          <a:fontRef idx="minor">
+            <a:schemeClr val="lt1"/>
+          </a:fontRef>
+        </p:style>
+        <p:txBody>
+          <a:bodyPr rtlCol="0" anchor="ctr"/>
+          <a:lstStyle/>
+          <a:p>
+            <a:pPr algn="ctr"/>
+          </a:p>
+        </p:txBody>
+      </p:sp>
+      <p:sp>
+        <p:nvSpPr>
+          <p:cNvPr id="22" name="TextBox 21"/>
+          <p:cNvSpPr txBox="1"/>
+          <p:nvPr/>
+        </p:nvSpPr>
+        <p:spPr>
+          <a:xfrm>
+            <a:off x="923544" y="4398263"/>
+            <a:ext cx="3200400" cy="310896"/>
+          </a:xfrm>
+          <a:prstGeom prst="rect">
+            <a:avLst/>
+          </a:prstGeom>
+          <a:noFill/>
+        </p:spPr>
+        <p:txBody>
+          <a:bodyPr wrap="square" lIns="0" rIns="0" tIns="0" bIns="0" anchor="t">
+            <a:spAutoFit/>
+          </a:bodyPr>
+          <a:lstStyle/>
+          <a:p>
+            <a:pPr algn="l">
+              <a:lnSpc>
+                <a:spcPct val="115000"/>
+              </a:lnSpc>
+            </a:pPr>
+            <a:r>
+              <a:rPr sz="1200" b="1">
+                <a:solidFill>
+                  <a:srgbClr val="E85D5D"/>
+                </a:solidFill>
+                <a:latin typeface="Microsoft JhengHei"/>
+              </a:rPr>
+              <a:t>混噪參數重新校準</a:t>
+            </a:r>
+          </a:p>
+        </p:txBody>
+      </p:sp>
+      <p:sp>
+        <p:nvSpPr>
+          <p:cNvPr id="23" name="TextBox 22"/>
+          <p:cNvSpPr txBox="1"/>
+          <p:nvPr/>
+        </p:nvSpPr>
+        <p:spPr>
+          <a:xfrm>
+            <a:off x="4279392" y="4398263"/>
+            <a:ext cx="6949440" cy="420624"/>
+          </a:xfrm>
+          <a:prstGeom prst="rect">
+            <a:avLst/>
+          </a:prstGeom>
+          <a:noFill/>
+        </p:spPr>
+        <p:txBody>
+          <a:bodyPr wrap="square" lIns="0" rIns="0" tIns="0" bIns="0" anchor="t">
+            <a:spAutoFit/>
+          </a:bodyPr>
+          <a:lstStyle/>
+          <a:p>
+            <a:pPr algn="l">
+              <a:lnSpc>
+                <a:spcPct val="112000"/>
+              </a:lnSpc>
+            </a:pPr>
+            <a:r>
+              <a:rPr sz="1100" b="0">
+                <a:solidFill>
+                  <a:srgbClr val="555555"/>
+                </a:solidFill>
+                <a:latin typeface="Microsoft JhengHei"/>
+              </a:rPr>
+              <a:t>舊參數換算 SNR 只有 19.7 dB，比使用者家中最吵時還嚴苛 12 dB——那不是展場</a:t>
+            </a:r>
+          </a:p>
+        </p:txBody>
+      </p:sp>
+      <p:sp>
+        <p:nvSpPr>
+          <p:cNvPr id="24" name="Rounded Rectangle 23"/>
+          <p:cNvSpPr/>
+          <p:nvPr/>
+        </p:nvSpPr>
+        <p:spPr>
+          <a:xfrm>
+            <a:off x="667512" y="4992623"/>
+            <a:ext cx="10789920" cy="566928"/>
+          </a:xfrm>
+          <a:prstGeom prst="roundRect">
+            <a:avLst>
+              <a:gd name="adj" fmla="val 8000"/>
+            </a:avLst>
+          </a:prstGeom>
+          <a:solidFill>
+            <a:srgbClr val="FFFFFF"/>
+          </a:solidFill>
+          <a:ln w="9525">
+            <a:solidFill>
+              <a:srgbClr val="E6E8EC"/>
+            </a:solidFill>
+          </a:ln>
+          <a:effectLst/>
+        </p:spPr>
+        <p:style>
+          <a:lnRef idx="1">
+            <a:schemeClr val="accent1"/>
+          </a:lnRef>
+          <a:fillRef idx="3">
+            <a:schemeClr val="accent1"/>
+          </a:fillRef>
+          <a:effectRef idx="2">
+            <a:schemeClr val="accent1"/>
+          </a:effectRef>
+          <a:fontRef idx="minor">
+            <a:schemeClr val="lt1"/>
+          </a:fontRef>
+        </p:style>
+        <p:txBody>
+          <a:bodyPr rtlCol="0" anchor="ctr"/>
+          <a:lstStyle/>
+          <a:p>
+            <a:pPr algn="ctr"/>
+          </a:p>
+        </p:txBody>
+      </p:sp>
+      <p:sp>
+        <p:nvSpPr>
+          <p:cNvPr id="25" name="TextBox 24"/>
+          <p:cNvSpPr txBox="1"/>
+          <p:nvPr/>
+        </p:nvSpPr>
+        <p:spPr>
+          <a:xfrm>
+            <a:off x="923544" y="5056631"/>
+            <a:ext cx="3200400" cy="310896"/>
+          </a:xfrm>
+          <a:prstGeom prst="rect">
+            <a:avLst/>
+          </a:prstGeom>
+          <a:noFill/>
+        </p:spPr>
+        <p:txBody>
+          <a:bodyPr wrap="square" lIns="0" rIns="0" tIns="0" bIns="0" anchor="t">
+            <a:spAutoFit/>
+          </a:bodyPr>
+          <a:lstStyle/>
+          <a:p>
+            <a:pPr algn="l">
+              <a:lnSpc>
+                <a:spcPct val="115000"/>
+              </a:lnSpc>
+            </a:pPr>
+            <a:r>
+              <a:rPr sz="1200" b="1">
+                <a:solidFill>
+                  <a:srgbClr val="E85D5D"/>
+                </a:solidFill>
+                <a:latin typeface="Microsoft JhengHei"/>
+              </a:rPr>
+              <a:t>修掉三個量測工具的 bug</a:t>
+            </a:r>
+          </a:p>
+        </p:txBody>
+      </p:sp>
+      <p:sp>
+        <p:nvSpPr>
+          <p:cNvPr id="26" name="TextBox 25"/>
+          <p:cNvSpPr txBox="1"/>
+          <p:nvPr/>
+        </p:nvSpPr>
+        <p:spPr>
+          <a:xfrm>
+            <a:off x="4279392" y="5056631"/>
+            <a:ext cx="6949440" cy="420624"/>
+          </a:xfrm>
+          <a:prstGeom prst="rect">
+            <a:avLst/>
+          </a:prstGeom>
+          <a:noFill/>
+        </p:spPr>
+        <p:txBody>
+          <a:bodyPr wrap="square" lIns="0" rIns="0" tIns="0" bIns="0" anchor="t">
+            <a:spAutoFit/>
+          </a:bodyPr>
+          <a:lstStyle/>
+          <a:p>
+            <a:pPr algn="l">
+              <a:lnSpc>
+                <a:spcPct val="112000"/>
+              </a:lnSpc>
+            </a:pPr>
+            <a:r>
+              <a:rPr sz="1100" b="0">
+                <a:solidFill>
+                  <a:srgbClr val="555555"/>
+                </a:solidFill>
+                <a:latin typeface="Microsoft JhengHei"/>
+              </a:rPr>
+              <a:t>amix 未設 normalize=0（人聲被砍 12dB）、aecho 再砍 54%、噪音音量過大</a:t>
+            </a:r>
+          </a:p>
+        </p:txBody>
+      </p:sp>
+      <p:sp>
+        <p:nvSpPr>
+          <p:cNvPr id="27" name="Rounded Rectangle 26"/>
+          <p:cNvSpPr/>
+          <p:nvPr/>
+        </p:nvSpPr>
+        <p:spPr>
+          <a:xfrm>
+            <a:off x="667512" y="5650991"/>
+            <a:ext cx="10789920" cy="566928"/>
+          </a:xfrm>
+          <a:prstGeom prst="roundRect">
+            <a:avLst>
+              <a:gd name="adj" fmla="val 8000"/>
+            </a:avLst>
+          </a:prstGeom>
+          <a:solidFill>
+            <a:srgbClr val="FFFFFF"/>
+          </a:solidFill>
+          <a:ln w="9525">
+            <a:solidFill>
+              <a:srgbClr val="E6E8EC"/>
+            </a:solidFill>
+          </a:ln>
+          <a:effectLst/>
+        </p:spPr>
+        <p:style>
+          <a:lnRef idx="1">
+            <a:schemeClr val="accent1"/>
+          </a:lnRef>
+          <a:fillRef idx="3">
+            <a:schemeClr val="accent1"/>
+          </a:fillRef>
+          <a:effectRef idx="2">
+            <a:schemeClr val="accent1"/>
+          </a:effectRef>
+          <a:fontRef idx="minor">
+            <a:schemeClr val="lt1"/>
+          </a:fontRef>
+        </p:style>
+        <p:txBody>
+          <a:bodyPr rtlCol="0" anchor="ctr"/>
+          <a:lstStyle/>
+          <a:p>
+            <a:pPr algn="ctr"/>
+          </a:p>
+        </p:txBody>
+      </p:sp>
+      <p:sp>
+        <p:nvSpPr>
+          <p:cNvPr id="28" name="TextBox 27"/>
+          <p:cNvSpPr txBox="1"/>
+          <p:nvPr/>
+        </p:nvSpPr>
+        <p:spPr>
+          <a:xfrm>
+            <a:off x="923544" y="5714999"/>
+            <a:ext cx="3200400" cy="310896"/>
+          </a:xfrm>
+          <a:prstGeom prst="rect">
+            <a:avLst/>
+          </a:prstGeom>
+          <a:noFill/>
+        </p:spPr>
+        <p:txBody>
+          <a:bodyPr wrap="square" lIns="0" rIns="0" tIns="0" bIns="0" anchor="t">
+            <a:spAutoFit/>
+          </a:bodyPr>
+          <a:lstStyle/>
+          <a:p>
+            <a:pPr algn="l">
+              <a:lnSpc>
+                <a:spcPct val="115000"/>
+              </a:lnSpc>
+            </a:pPr>
+            <a:r>
+              <a:rPr sz="1200" b="1">
+                <a:solidFill>
+                  <a:srgbClr val="008E76"/>
+                </a:solidFill>
+                <a:latin typeface="Microsoft JhengHei"/>
+              </a:rPr>
+              <a:t>13 項系統修正</a:t>
+            </a:r>
+          </a:p>
+        </p:txBody>
+      </p:sp>
+      <p:sp>
+        <p:nvSpPr>
+          <p:cNvPr id="29" name="TextBox 28"/>
+          <p:cNvSpPr txBox="1"/>
+          <p:nvPr/>
+        </p:nvSpPr>
+        <p:spPr>
+          <a:xfrm>
+            <a:off x="4279392" y="5714999"/>
+            <a:ext cx="6949440" cy="420624"/>
+          </a:xfrm>
+          <a:prstGeom prst="rect">
+            <a:avLst/>
+          </a:prstGeom>
+          <a:noFill/>
+        </p:spPr>
+        <p:txBody>
+          <a:bodyPr wrap="square" lIns="0" rIns="0" tIns="0" bIns="0" anchor="t">
+            <a:spAutoFit/>
+          </a:bodyPr>
+          <a:lstStyle/>
+          <a:p>
+            <a:pPr algn="l">
+              <a:lnSpc>
+                <a:spcPct val="112000"/>
+              </a:lnSpc>
+            </a:pPr>
+            <a:r>
+              <a:rPr sz="1100" b="0">
+                <a:solidFill>
+                  <a:srgbClr val="555555"/>
+                </a:solidFill>
+                <a:latin typeface="Microsoft JhengHei"/>
+              </a:rPr>
+              <a:t>同一批錄音、沒有重錄任何一句，通過率從 74% 提升到 83%</a:t>
+            </a:r>
+          </a:p>
+        </p:txBody>
+      </p:sp>
+      <p:sp>
+        <p:nvSpPr>
+          <p:cNvPr id="30" name="Rectangle 29"/>
+          <p:cNvSpPr/>
+          <p:nvPr/>
+        </p:nvSpPr>
+        <p:spPr>
+          <a:xfrm>
+            <a:off x="667512" y="6382512"/>
+            <a:ext cx="10789920" cy="402336"/>
           </a:xfrm>
           <a:prstGeom prst="rect">
             <a:avLst/>
@@ -39088,6 +40385,1705 @@
       </p:sp>
       <p:sp>
         <p:nvSpPr>
+          <p:cNvPr id="31" name="TextBox 30"/>
+          <p:cNvSpPr txBox="1"/>
+          <p:nvPr/>
+        </p:nvSpPr>
+        <p:spPr>
+          <a:xfrm>
+            <a:off x="1033272" y="6419088"/>
+            <a:ext cx="10149840" cy="310896"/>
+          </a:xfrm>
+          <a:prstGeom prst="rect">
+            <a:avLst/>
+          </a:prstGeom>
+          <a:noFill/>
+        </p:spPr>
+        <p:txBody>
+          <a:bodyPr wrap="square" lIns="0" rIns="0" tIns="0" bIns="0" anchor="ctr">
+            <a:spAutoFit/>
+          </a:bodyPr>
+          <a:lstStyle/>
+          <a:p>
+            <a:pPr algn="l">
+              <a:lnSpc>
+                <a:spcPct val="115000"/>
+              </a:lnSpc>
+            </a:pPr>
+            <a:r>
+              <a:rPr sz="1200" b="1">
+                <a:solidFill>
+                  <a:srgbClr val="00C49A"/>
+                </a:solidFill>
+                <a:latin typeface="Microsoft JhengHei"/>
+              </a:rPr>
+              <a:t>多輪對話  </a:t>
+            </a:r>
+            <a:r>
+              <a:rPr sz="1150" b="0">
+                <a:solidFill>
+                  <a:srgbClr val="BBBBBB"/>
+                </a:solidFill>
+                <a:latin typeface="Microsoft JhengHei"/>
+              </a:rPr>
+              <a:t>代稱追問、確認落地在同一條連線下實測 100%——展場訪客走的正是這條路。</a:t>
+            </a:r>
+          </a:p>
+        </p:txBody>
+      </p:sp>
+      <p:sp>
+        <p:nvSpPr>
+          <p:cNvPr id="32" name="TextBox 31"/>
+          <p:cNvSpPr txBox="1"/>
+          <p:nvPr/>
+        </p:nvSpPr>
+        <p:spPr>
+          <a:xfrm>
+            <a:off x="11475720" y="6565392"/>
+            <a:ext cx="658368" cy="237744"/>
+          </a:xfrm>
+          <a:prstGeom prst="rect">
+            <a:avLst/>
+          </a:prstGeom>
+          <a:noFill/>
+        </p:spPr>
+        <p:txBody>
+          <a:bodyPr wrap="square" lIns="0" rIns="0" tIns="0" bIns="0" anchor="t">
+            <a:spAutoFit/>
+          </a:bodyPr>
+          <a:lstStyle/>
+          <a:p>
+            <a:pPr algn="r">
+              <a:lnSpc>
+                <a:spcPct val="115000"/>
+              </a:lnSpc>
+            </a:pPr>
+            <a:r>
+              <a:rPr sz="1000" b="0">
+                <a:solidFill>
+                  <a:srgbClr val="BBBBBB"/>
+                </a:solidFill>
+                <a:latin typeface="Arial"/>
+              </a:rPr>
+              <a:t>31</a:t>
+            </a:r>
+          </a:p>
+        </p:txBody>
+      </p:sp>
+    </p:spTree>
+  </p:cSld>
+  <p:clrMapOvr>
+    <a:masterClrMapping/>
+  </p:clrMapOvr>
+</p:sld>
+</file>
+
+<file path=ppt/slides/slide32.xml><?xml version="1.0" encoding="utf-8"?>
+<p:sld xmlns:a="http://schemas.openxmlformats.org/drawingml/2006/main" xmlns:p="http://schemas.openxmlformats.org/presentationml/2006/main" xmlns:r="http://schemas.openxmlformats.org/officeDocument/2006/relationships">
+  <p:cSld>
+    <p:spTree>
+      <p:nvGrpSpPr>
+        <p:cNvPr id="1" name=""/>
+        <p:cNvGrpSpPr/>
+        <p:nvPr/>
+      </p:nvGrpSpPr>
+      <p:grpSpPr/>
+      <p:sp>
+        <p:nvSpPr>
+          <p:cNvPr id="2" name="TextBox 1"/>
+          <p:cNvSpPr txBox="1"/>
+          <p:nvPr/>
+        </p:nvSpPr>
+        <p:spPr>
+          <a:xfrm>
+            <a:off x="667512" y="310896"/>
+            <a:ext cx="10789920" cy="274320"/>
+          </a:xfrm>
+          <a:prstGeom prst="rect">
+            <a:avLst/>
+          </a:prstGeom>
+          <a:noFill/>
+        </p:spPr>
+        <p:txBody>
+          <a:bodyPr wrap="square" lIns="0" rIns="0" tIns="0" bIns="0" anchor="t">
+            <a:spAutoFit/>
+          </a:bodyPr>
+          <a:lstStyle/>
+          <a:p>
+            <a:pPr algn="l">
+              <a:lnSpc>
+                <a:spcPct val="115000"/>
+              </a:lnSpc>
+            </a:pPr>
+            <a:r>
+              <a:rPr sz="1250" b="1">
+                <a:solidFill>
+                  <a:srgbClr val="00C49A"/>
+                </a:solidFill>
+                <a:latin typeface="Arial"/>
+              </a:rPr>
+              <a:t>QUALITY · 換角度測試</a:t>
+            </a:r>
+          </a:p>
+        </p:txBody>
+      </p:sp>
+      <p:sp>
+        <p:nvSpPr>
+          <p:cNvPr id="3" name="TextBox 2"/>
+          <p:cNvSpPr txBox="1"/>
+          <p:nvPr/>
+        </p:nvSpPr>
+        <p:spPr>
+          <a:xfrm>
+            <a:off x="667512" y="585216"/>
+            <a:ext cx="10789920" cy="566928"/>
+          </a:xfrm>
+          <a:prstGeom prst="rect">
+            <a:avLst/>
+          </a:prstGeom>
+          <a:noFill/>
+        </p:spPr>
+        <p:txBody>
+          <a:bodyPr wrap="square" lIns="0" rIns="0" tIns="0" bIns="0" anchor="t">
+            <a:spAutoFit/>
+          </a:bodyPr>
+          <a:lstStyle/>
+          <a:p>
+            <a:pPr algn="l">
+              <a:lnSpc>
+                <a:spcPct val="115000"/>
+              </a:lnSpc>
+            </a:pPr>
+            <a:r>
+              <a:rPr sz="2700" b="1">
+                <a:solidFill>
+                  <a:srgbClr val="1A1A2E"/>
+                </a:solidFill>
+                <a:latin typeface="Microsoft JhengHei"/>
+              </a:rPr>
+              <a:t>同一批錄音當輸入源，換 9 個角度找破口</a:t>
+            </a:r>
+          </a:p>
+        </p:txBody>
+      </p:sp>
+      <p:sp>
+        <p:nvSpPr>
+          <p:cNvPr id="4" name="TextBox 3"/>
+          <p:cNvSpPr txBox="1"/>
+          <p:nvPr/>
+        </p:nvSpPr>
+        <p:spPr>
+          <a:xfrm>
+            <a:off x="667512" y="1207008"/>
+            <a:ext cx="10789920" cy="365760"/>
+          </a:xfrm>
+          <a:prstGeom prst="rect">
+            <a:avLst/>
+          </a:prstGeom>
+          <a:noFill/>
+        </p:spPr>
+        <p:txBody>
+          <a:bodyPr wrap="square" lIns="0" rIns="0" tIns="0" bIns="0" anchor="t">
+            <a:spAutoFit/>
+          </a:bodyPr>
+          <a:lstStyle/>
+          <a:p>
+            <a:pPr algn="l">
+              <a:lnSpc>
+                <a:spcPct val="115000"/>
+              </a:lnSpc>
+            </a:pPr>
+            <a:r>
+              <a:rPr sz="1300" b="0">
+                <a:solidFill>
+                  <a:srgbClr val="555555"/>
+                </a:solidFill>
+                <a:latin typeface="Microsoft JhengHei"/>
+              </a:rPr>
+              <a:t>守衛全綠不代表沒問題——換一個角度就抓到一批。守衛庫全程維持 892/892。</a:t>
+            </a:r>
+          </a:p>
+        </p:txBody>
+      </p:sp>
+      <p:sp>
+        <p:nvSpPr>
+          <p:cNvPr id="5" name="TextBox 4"/>
+          <p:cNvSpPr txBox="1"/>
+          <p:nvPr/>
+        </p:nvSpPr>
+        <p:spPr>
+          <a:xfrm>
+            <a:off x="667512" y="1700784"/>
+            <a:ext cx="5212080" cy="274320"/>
+          </a:xfrm>
+          <a:prstGeom prst="rect">
+            <a:avLst/>
+          </a:prstGeom>
+          <a:noFill/>
+        </p:spPr>
+        <p:txBody>
+          <a:bodyPr wrap="square" lIns="0" rIns="0" tIns="0" bIns="0" anchor="t">
+            <a:spAutoFit/>
+          </a:bodyPr>
+          <a:lstStyle/>
+          <a:p>
+            <a:pPr algn="l">
+              <a:lnSpc>
+                <a:spcPct val="115000"/>
+              </a:lnSpc>
+            </a:pPr>
+            <a:r>
+              <a:rPr sz="1200" b="1">
+                <a:solidFill>
+                  <a:srgbClr val="1A1A2E"/>
+                </a:solidFill>
+                <a:latin typeface="Microsoft JhengHei"/>
+              </a:rPr>
+              <a:t>測試角度（依抓到破口數排序）</a:t>
+            </a:r>
+          </a:p>
+        </p:txBody>
+      </p:sp>
+      <p:sp>
+        <p:nvSpPr>
+          <p:cNvPr id="6" name="Rounded Rectangle 5"/>
+          <p:cNvSpPr/>
+          <p:nvPr/>
+        </p:nvSpPr>
+        <p:spPr>
+          <a:xfrm>
+            <a:off x="667512" y="2011680"/>
+            <a:ext cx="5212080" cy="475488"/>
+          </a:xfrm>
+          <a:prstGeom prst="roundRect">
+            <a:avLst>
+              <a:gd name="adj" fmla="val 8000"/>
+            </a:avLst>
+          </a:prstGeom>
+          <a:solidFill>
+            <a:srgbClr val="FFFFFF"/>
+          </a:solidFill>
+          <a:ln w="9525">
+            <a:solidFill>
+              <a:srgbClr val="E6E8EC"/>
+            </a:solidFill>
+          </a:ln>
+          <a:effectLst/>
+        </p:spPr>
+        <p:style>
+          <a:lnRef idx="1">
+            <a:schemeClr val="accent1"/>
+          </a:lnRef>
+          <a:fillRef idx="3">
+            <a:schemeClr val="accent1"/>
+          </a:fillRef>
+          <a:effectRef idx="2">
+            <a:schemeClr val="accent1"/>
+          </a:effectRef>
+          <a:fontRef idx="minor">
+            <a:schemeClr val="lt1"/>
+          </a:fontRef>
+        </p:style>
+        <p:txBody>
+          <a:bodyPr rtlCol="0" anchor="ctr"/>
+          <a:lstStyle/>
+          <a:p>
+            <a:pPr algn="ctr"/>
+          </a:p>
+        </p:txBody>
+      </p:sp>
+      <p:sp>
+        <p:nvSpPr>
+          <p:cNvPr id="7" name="TextBox 6"/>
+          <p:cNvSpPr txBox="1"/>
+          <p:nvPr/>
+        </p:nvSpPr>
+        <p:spPr>
+          <a:xfrm>
+            <a:off x="886968" y="2093976"/>
+            <a:ext cx="3840480" cy="310896"/>
+          </a:xfrm>
+          <a:prstGeom prst="rect">
+            <a:avLst/>
+          </a:prstGeom>
+          <a:noFill/>
+        </p:spPr>
+        <p:txBody>
+          <a:bodyPr wrap="square" lIns="0" rIns="0" tIns="0" bIns="0" anchor="t">
+            <a:spAutoFit/>
+          </a:bodyPr>
+          <a:lstStyle/>
+          <a:p>
+            <a:pPr algn="l">
+              <a:lnSpc>
+                <a:spcPct val="115000"/>
+              </a:lnSpc>
+            </a:pPr>
+            <a:r>
+              <a:rPr sz="1150" b="0">
+                <a:solidFill>
+                  <a:srgbClr val="1A1A2E"/>
+                </a:solidFill>
+                <a:latin typeface="Microsoft JhengHei"/>
+              </a:rPr>
+              <a:t>真實 ASR 錯法 / 拼字變體</a:t>
+            </a:r>
+          </a:p>
+        </p:txBody>
+      </p:sp>
+      <p:sp>
+        <p:nvSpPr>
+          <p:cNvPr id="8" name="TextBox 7"/>
+          <p:cNvSpPr txBox="1"/>
+          <p:nvPr/>
+        </p:nvSpPr>
+        <p:spPr>
+          <a:xfrm>
+            <a:off x="4873752" y="2093976"/>
+            <a:ext cx="822960" cy="310896"/>
+          </a:xfrm>
+          <a:prstGeom prst="rect">
+            <a:avLst/>
+          </a:prstGeom>
+          <a:noFill/>
+        </p:spPr>
+        <p:txBody>
+          <a:bodyPr wrap="square" lIns="0" rIns="0" tIns="0" bIns="0" anchor="t">
+            <a:spAutoFit/>
+          </a:bodyPr>
+          <a:lstStyle/>
+          <a:p>
+            <a:pPr algn="l">
+              <a:lnSpc>
+                <a:spcPct val="115000"/>
+              </a:lnSpc>
+            </a:pPr>
+            <a:r>
+              <a:rPr sz="1300" b="1">
+                <a:solidFill>
+                  <a:srgbClr val="E85D5D"/>
+                </a:solidFill>
+                <a:latin typeface="Arial"/>
+              </a:rPr>
+              <a:t>10 項</a:t>
+            </a:r>
+          </a:p>
+        </p:txBody>
+      </p:sp>
+      <p:sp>
+        <p:nvSpPr>
+          <p:cNvPr id="9" name="Rounded Rectangle 8"/>
+          <p:cNvSpPr/>
+          <p:nvPr/>
+        </p:nvSpPr>
+        <p:spPr>
+          <a:xfrm>
+            <a:off x="667512" y="2560320"/>
+            <a:ext cx="5212080" cy="475488"/>
+          </a:xfrm>
+          <a:prstGeom prst="roundRect">
+            <a:avLst>
+              <a:gd name="adj" fmla="val 8000"/>
+            </a:avLst>
+          </a:prstGeom>
+          <a:solidFill>
+            <a:srgbClr val="FFFFFF"/>
+          </a:solidFill>
+          <a:ln w="9525">
+            <a:solidFill>
+              <a:srgbClr val="E6E8EC"/>
+            </a:solidFill>
+          </a:ln>
+          <a:effectLst/>
+        </p:spPr>
+        <p:style>
+          <a:lnRef idx="1">
+            <a:schemeClr val="accent1"/>
+          </a:lnRef>
+          <a:fillRef idx="3">
+            <a:schemeClr val="accent1"/>
+          </a:fillRef>
+          <a:effectRef idx="2">
+            <a:schemeClr val="accent1"/>
+          </a:effectRef>
+          <a:fontRef idx="minor">
+            <a:schemeClr val="lt1"/>
+          </a:fontRef>
+        </p:style>
+        <p:txBody>
+          <a:bodyPr rtlCol="0" anchor="ctr"/>
+          <a:lstStyle/>
+          <a:p>
+            <a:pPr algn="ctr"/>
+          </a:p>
+        </p:txBody>
+      </p:sp>
+      <p:sp>
+        <p:nvSpPr>
+          <p:cNvPr id="10" name="TextBox 9"/>
+          <p:cNvSpPr txBox="1"/>
+          <p:nvPr/>
+        </p:nvSpPr>
+        <p:spPr>
+          <a:xfrm>
+            <a:off x="886968" y="2642616"/>
+            <a:ext cx="3840480" cy="310896"/>
+          </a:xfrm>
+          <a:prstGeom prst="rect">
+            <a:avLst/>
+          </a:prstGeom>
+          <a:noFill/>
+        </p:spPr>
+        <p:txBody>
+          <a:bodyPr wrap="square" lIns="0" rIns="0" tIns="0" bIns="0" anchor="t">
+            <a:spAutoFit/>
+          </a:bodyPr>
+          <a:lstStyle/>
+          <a:p>
+            <a:pPr algn="l">
+              <a:lnSpc>
+                <a:spcPct val="115000"/>
+              </a:lnSpc>
+            </a:pPr>
+            <a:r>
+              <a:rPr sz="1150" b="0">
+                <a:solidFill>
+                  <a:srgbClr val="1A1A2E"/>
+                </a:solidFill>
+                <a:latin typeface="Microsoft JhengHei"/>
+              </a:rPr>
+              <a:t>寫入資料正確性 · 惡意輸入</a:t>
+            </a:r>
+          </a:p>
+        </p:txBody>
+      </p:sp>
+      <p:sp>
+        <p:nvSpPr>
+          <p:cNvPr id="11" name="TextBox 10"/>
+          <p:cNvSpPr txBox="1"/>
+          <p:nvPr/>
+        </p:nvSpPr>
+        <p:spPr>
+          <a:xfrm>
+            <a:off x="4873752" y="2642616"/>
+            <a:ext cx="822960" cy="310896"/>
+          </a:xfrm>
+          <a:prstGeom prst="rect">
+            <a:avLst/>
+          </a:prstGeom>
+          <a:noFill/>
+        </p:spPr>
+        <p:txBody>
+          <a:bodyPr wrap="square" lIns="0" rIns="0" tIns="0" bIns="0" anchor="t">
+            <a:spAutoFit/>
+          </a:bodyPr>
+          <a:lstStyle/>
+          <a:p>
+            <a:pPr algn="l">
+              <a:lnSpc>
+                <a:spcPct val="115000"/>
+              </a:lnSpc>
+            </a:pPr>
+            <a:r>
+              <a:rPr sz="1300" b="1">
+                <a:solidFill>
+                  <a:srgbClr val="E85D5D"/>
+                </a:solidFill>
+                <a:latin typeface="Arial"/>
+              </a:rPr>
+              <a:t>1 項</a:t>
+            </a:r>
+          </a:p>
+        </p:txBody>
+      </p:sp>
+      <p:sp>
+        <p:nvSpPr>
+          <p:cNvPr id="12" name="Rounded Rectangle 11"/>
+          <p:cNvSpPr/>
+          <p:nvPr/>
+        </p:nvSpPr>
+        <p:spPr>
+          <a:xfrm>
+            <a:off x="667512" y="3108960"/>
+            <a:ext cx="5212080" cy="475488"/>
+          </a:xfrm>
+          <a:prstGeom prst="roundRect">
+            <a:avLst>
+              <a:gd name="adj" fmla="val 8000"/>
+            </a:avLst>
+          </a:prstGeom>
+          <a:solidFill>
+            <a:srgbClr val="FFFFFF"/>
+          </a:solidFill>
+          <a:ln w="9525">
+            <a:solidFill>
+              <a:srgbClr val="E6E8EC"/>
+            </a:solidFill>
+          </a:ln>
+          <a:effectLst/>
+        </p:spPr>
+        <p:style>
+          <a:lnRef idx="1">
+            <a:schemeClr val="accent1"/>
+          </a:lnRef>
+          <a:fillRef idx="3">
+            <a:schemeClr val="accent1"/>
+          </a:fillRef>
+          <a:effectRef idx="2">
+            <a:schemeClr val="accent1"/>
+          </a:effectRef>
+          <a:fontRef idx="minor">
+            <a:schemeClr val="lt1"/>
+          </a:fontRef>
+        </p:style>
+        <p:txBody>
+          <a:bodyPr rtlCol="0" anchor="ctr"/>
+          <a:lstStyle/>
+          <a:p>
+            <a:pPr algn="ctr"/>
+          </a:p>
+        </p:txBody>
+      </p:sp>
+      <p:sp>
+        <p:nvSpPr>
+          <p:cNvPr id="13" name="TextBox 12"/>
+          <p:cNvSpPr txBox="1"/>
+          <p:nvPr/>
+        </p:nvSpPr>
+        <p:spPr>
+          <a:xfrm>
+            <a:off x="886968" y="3191256"/>
+            <a:ext cx="3840480" cy="310896"/>
+          </a:xfrm>
+          <a:prstGeom prst="rect">
+            <a:avLst/>
+          </a:prstGeom>
+          <a:noFill/>
+        </p:spPr>
+        <p:txBody>
+          <a:bodyPr wrap="square" lIns="0" rIns="0" tIns="0" bIns="0" anchor="t">
+            <a:spAutoFit/>
+          </a:bodyPr>
+          <a:lstStyle/>
+          <a:p>
+            <a:pPr algn="l">
+              <a:lnSpc>
+                <a:spcPct val="115000"/>
+              </a:lnSpc>
+            </a:pPr>
+            <a:r>
+              <a:rPr sz="1150" b="0">
+                <a:solidFill>
+                  <a:srgbClr val="1A1A2E"/>
+                </a:solidFill>
+                <a:latin typeface="Microsoft JhengHei"/>
+              </a:rPr>
+              <a:t>跨查詢介面一致性</a:t>
+            </a:r>
+          </a:p>
+        </p:txBody>
+      </p:sp>
+      <p:sp>
+        <p:nvSpPr>
+          <p:cNvPr id="14" name="TextBox 13"/>
+          <p:cNvSpPr txBox="1"/>
+          <p:nvPr/>
+        </p:nvSpPr>
+        <p:spPr>
+          <a:xfrm>
+            <a:off x="4873752" y="3191256"/>
+            <a:ext cx="822960" cy="310896"/>
+          </a:xfrm>
+          <a:prstGeom prst="rect">
+            <a:avLst/>
+          </a:prstGeom>
+          <a:noFill/>
+        </p:spPr>
+        <p:txBody>
+          <a:bodyPr wrap="square" lIns="0" rIns="0" tIns="0" bIns="0" anchor="t">
+            <a:spAutoFit/>
+          </a:bodyPr>
+          <a:lstStyle/>
+          <a:p>
+            <a:pPr algn="l">
+              <a:lnSpc>
+                <a:spcPct val="115000"/>
+              </a:lnSpc>
+            </a:pPr>
+            <a:r>
+              <a:rPr sz="1300" b="1">
+                <a:solidFill>
+                  <a:srgbClr val="E85D5D"/>
+                </a:solidFill>
+                <a:latin typeface="Arial"/>
+              </a:rPr>
+              <a:t>1 項</a:t>
+            </a:r>
+          </a:p>
+        </p:txBody>
+      </p:sp>
+      <p:sp>
+        <p:nvSpPr>
+          <p:cNvPr id="15" name="Rounded Rectangle 14"/>
+          <p:cNvSpPr/>
+          <p:nvPr/>
+        </p:nvSpPr>
+        <p:spPr>
+          <a:xfrm>
+            <a:off x="667512" y="3657600"/>
+            <a:ext cx="5212080" cy="475488"/>
+          </a:xfrm>
+          <a:prstGeom prst="roundRect">
+            <a:avLst>
+              <a:gd name="adj" fmla="val 8000"/>
+            </a:avLst>
+          </a:prstGeom>
+          <a:solidFill>
+            <a:srgbClr val="FFFFFF"/>
+          </a:solidFill>
+          <a:ln w="9525">
+            <a:solidFill>
+              <a:srgbClr val="E6E8EC"/>
+            </a:solidFill>
+          </a:ln>
+          <a:effectLst/>
+        </p:spPr>
+        <p:style>
+          <a:lnRef idx="1">
+            <a:schemeClr val="accent1"/>
+          </a:lnRef>
+          <a:fillRef idx="3">
+            <a:schemeClr val="accent1"/>
+          </a:fillRef>
+          <a:effectRef idx="2">
+            <a:schemeClr val="accent1"/>
+          </a:effectRef>
+          <a:fontRef idx="minor">
+            <a:schemeClr val="lt1"/>
+          </a:fontRef>
+        </p:style>
+        <p:txBody>
+          <a:bodyPr rtlCol="0" anchor="ctr"/>
+          <a:lstStyle/>
+          <a:p>
+            <a:pPr algn="ctr"/>
+          </a:p>
+        </p:txBody>
+      </p:sp>
+      <p:sp>
+        <p:nvSpPr>
+          <p:cNvPr id="16" name="TextBox 15"/>
+          <p:cNvSpPr txBox="1"/>
+          <p:nvPr/>
+        </p:nvSpPr>
+        <p:spPr>
+          <a:xfrm>
+            <a:off x="886968" y="3739896"/>
+            <a:ext cx="3840480" cy="310896"/>
+          </a:xfrm>
+          <a:prstGeom prst="rect">
+            <a:avLst/>
+          </a:prstGeom>
+          <a:noFill/>
+        </p:spPr>
+        <p:txBody>
+          <a:bodyPr wrap="square" lIns="0" rIns="0" tIns="0" bIns="0" anchor="t">
+            <a:spAutoFit/>
+          </a:bodyPr>
+          <a:lstStyle/>
+          <a:p>
+            <a:pPr algn="l">
+              <a:lnSpc>
+                <a:spcPct val="115000"/>
+              </a:lnSpc>
+            </a:pPr>
+            <a:r>
+              <a:rPr sz="1150" b="0">
+                <a:solidFill>
+                  <a:srgbClr val="1A1A2E"/>
+                </a:solidFill>
+                <a:latin typeface="Microsoft JhengHei"/>
+              </a:rPr>
+              <a:t>UI 提示句實際照打</a:t>
+            </a:r>
+          </a:p>
+        </p:txBody>
+      </p:sp>
+      <p:sp>
+        <p:nvSpPr>
+          <p:cNvPr id="17" name="TextBox 16"/>
+          <p:cNvSpPr txBox="1"/>
+          <p:nvPr/>
+        </p:nvSpPr>
+        <p:spPr>
+          <a:xfrm>
+            <a:off x="4873752" y="3739896"/>
+            <a:ext cx="822960" cy="310896"/>
+          </a:xfrm>
+          <a:prstGeom prst="rect">
+            <a:avLst/>
+          </a:prstGeom>
+          <a:noFill/>
+        </p:spPr>
+        <p:txBody>
+          <a:bodyPr wrap="square" lIns="0" rIns="0" tIns="0" bIns="0" anchor="t">
+            <a:spAutoFit/>
+          </a:bodyPr>
+          <a:lstStyle/>
+          <a:p>
+            <a:pPr algn="l">
+              <a:lnSpc>
+                <a:spcPct val="115000"/>
+              </a:lnSpc>
+            </a:pPr>
+            <a:r>
+              <a:rPr sz="1300" b="1">
+                <a:solidFill>
+                  <a:srgbClr val="E85D5D"/>
+                </a:solidFill>
+                <a:latin typeface="Arial"/>
+              </a:rPr>
+              <a:t>1 項</a:t>
+            </a:r>
+          </a:p>
+        </p:txBody>
+      </p:sp>
+      <p:sp>
+        <p:nvSpPr>
+          <p:cNvPr id="18" name="Rounded Rectangle 17"/>
+          <p:cNvSpPr/>
+          <p:nvPr/>
+        </p:nvSpPr>
+        <p:spPr>
+          <a:xfrm>
+            <a:off x="667512" y="4206240"/>
+            <a:ext cx="5212080" cy="475488"/>
+          </a:xfrm>
+          <a:prstGeom prst="roundRect">
+            <a:avLst>
+              <a:gd name="adj" fmla="val 8000"/>
+            </a:avLst>
+          </a:prstGeom>
+          <a:solidFill>
+            <a:srgbClr val="FFFFFF"/>
+          </a:solidFill>
+          <a:ln w="9525">
+            <a:solidFill>
+              <a:srgbClr val="E6E8EC"/>
+            </a:solidFill>
+          </a:ln>
+          <a:effectLst/>
+        </p:spPr>
+        <p:style>
+          <a:lnRef idx="1">
+            <a:schemeClr val="accent1"/>
+          </a:lnRef>
+          <a:fillRef idx="3">
+            <a:schemeClr val="accent1"/>
+          </a:fillRef>
+          <a:effectRef idx="2">
+            <a:schemeClr val="accent1"/>
+          </a:effectRef>
+          <a:fontRef idx="minor">
+            <a:schemeClr val="lt1"/>
+          </a:fontRef>
+        </p:style>
+        <p:txBody>
+          <a:bodyPr rtlCol="0" anchor="ctr"/>
+          <a:lstStyle/>
+          <a:p>
+            <a:pPr algn="ctr"/>
+          </a:p>
+        </p:txBody>
+      </p:sp>
+      <p:sp>
+        <p:nvSpPr>
+          <p:cNvPr id="19" name="TextBox 18"/>
+          <p:cNvSpPr txBox="1"/>
+          <p:nvPr/>
+        </p:nvSpPr>
+        <p:spPr>
+          <a:xfrm>
+            <a:off x="886968" y="4288536"/>
+            <a:ext cx="3840480" cy="310896"/>
+          </a:xfrm>
+          <a:prstGeom prst="rect">
+            <a:avLst/>
+          </a:prstGeom>
+          <a:noFill/>
+        </p:spPr>
+        <p:txBody>
+          <a:bodyPr wrap="square" lIns="0" rIns="0" tIns="0" bIns="0" anchor="t">
+            <a:spAutoFit/>
+          </a:bodyPr>
+          <a:lstStyle/>
+          <a:p>
+            <a:pPr algn="l">
+              <a:lnSpc>
+                <a:spcPct val="115000"/>
+              </a:lnSpc>
+            </a:pPr>
+            <a:r>
+              <a:rPr sz="1150" b="0">
+                <a:solidFill>
+                  <a:srgbClr val="1A1A2E"/>
+                </a:solidFill>
+                <a:latin typeface="Microsoft JhengHei"/>
+              </a:rPr>
+              <a:t>前端互動（真的用滑鼠點）</a:t>
+            </a:r>
+          </a:p>
+        </p:txBody>
+      </p:sp>
+      <p:sp>
+        <p:nvSpPr>
+          <p:cNvPr id="20" name="TextBox 19"/>
+          <p:cNvSpPr txBox="1"/>
+          <p:nvPr/>
+        </p:nvSpPr>
+        <p:spPr>
+          <a:xfrm>
+            <a:off x="4873752" y="4288536"/>
+            <a:ext cx="822960" cy="310896"/>
+          </a:xfrm>
+          <a:prstGeom prst="rect">
+            <a:avLst/>
+          </a:prstGeom>
+          <a:noFill/>
+        </p:spPr>
+        <p:txBody>
+          <a:bodyPr wrap="square" lIns="0" rIns="0" tIns="0" bIns="0" anchor="t">
+            <a:spAutoFit/>
+          </a:bodyPr>
+          <a:lstStyle/>
+          <a:p>
+            <a:pPr algn="l">
+              <a:lnSpc>
+                <a:spcPct val="115000"/>
+              </a:lnSpc>
+            </a:pPr>
+            <a:r>
+              <a:rPr sz="1300" b="1">
+                <a:solidFill>
+                  <a:srgbClr val="008E76"/>
+                </a:solidFill>
+                <a:latin typeface="Arial"/>
+              </a:rPr>
+              <a:t>0</a:t>
+            </a:r>
+          </a:p>
+        </p:txBody>
+      </p:sp>
+      <p:sp>
+        <p:nvSpPr>
+          <p:cNvPr id="21" name="Rounded Rectangle 20"/>
+          <p:cNvSpPr/>
+          <p:nvPr/>
+        </p:nvSpPr>
+        <p:spPr>
+          <a:xfrm>
+            <a:off x="667512" y="4754880"/>
+            <a:ext cx="5212080" cy="475488"/>
+          </a:xfrm>
+          <a:prstGeom prst="roundRect">
+            <a:avLst>
+              <a:gd name="adj" fmla="val 8000"/>
+            </a:avLst>
+          </a:prstGeom>
+          <a:solidFill>
+            <a:srgbClr val="FFFFFF"/>
+          </a:solidFill>
+          <a:ln w="9525">
+            <a:solidFill>
+              <a:srgbClr val="E6E8EC"/>
+            </a:solidFill>
+          </a:ln>
+          <a:effectLst/>
+        </p:spPr>
+        <p:style>
+          <a:lnRef idx="1">
+            <a:schemeClr val="accent1"/>
+          </a:lnRef>
+          <a:fillRef idx="3">
+            <a:schemeClr val="accent1"/>
+          </a:fillRef>
+          <a:effectRef idx="2">
+            <a:schemeClr val="accent1"/>
+          </a:effectRef>
+          <a:fontRef idx="minor">
+            <a:schemeClr val="lt1"/>
+          </a:fontRef>
+        </p:style>
+        <p:txBody>
+          <a:bodyPr rtlCol="0" anchor="ctr"/>
+          <a:lstStyle/>
+          <a:p>
+            <a:pPr algn="ctr"/>
+          </a:p>
+        </p:txBody>
+      </p:sp>
+      <p:sp>
+        <p:nvSpPr>
+          <p:cNvPr id="22" name="TextBox 21"/>
+          <p:cNvSpPr txBox="1"/>
+          <p:nvPr/>
+        </p:nvSpPr>
+        <p:spPr>
+          <a:xfrm>
+            <a:off x="886968" y="4837176"/>
+            <a:ext cx="3840480" cy="310896"/>
+          </a:xfrm>
+          <a:prstGeom prst="rect">
+            <a:avLst/>
+          </a:prstGeom>
+          <a:noFill/>
+        </p:spPr>
+        <p:txBody>
+          <a:bodyPr wrap="square" lIns="0" rIns="0" tIns="0" bIns="0" anchor="t">
+            <a:spAutoFit/>
+          </a:bodyPr>
+          <a:lstStyle/>
+          <a:p>
+            <a:pPr algn="l">
+              <a:lnSpc>
+                <a:spcPct val="115000"/>
+              </a:lnSpc>
+            </a:pPr>
+            <a:r>
+              <a:rPr sz="1150" b="0">
+                <a:solidFill>
+                  <a:srgbClr val="1A1A2E"/>
+                </a:solidFill>
+                <a:latin typeface="Microsoft JhengHei"/>
+              </a:rPr>
+              <a:t>狀態污染（訪客不照劇本走）</a:t>
+            </a:r>
+          </a:p>
+        </p:txBody>
+      </p:sp>
+      <p:sp>
+        <p:nvSpPr>
+          <p:cNvPr id="23" name="TextBox 22"/>
+          <p:cNvSpPr txBox="1"/>
+          <p:nvPr/>
+        </p:nvSpPr>
+        <p:spPr>
+          <a:xfrm>
+            <a:off x="4873752" y="4837176"/>
+            <a:ext cx="822960" cy="310896"/>
+          </a:xfrm>
+          <a:prstGeom prst="rect">
+            <a:avLst/>
+          </a:prstGeom>
+          <a:noFill/>
+        </p:spPr>
+        <p:txBody>
+          <a:bodyPr wrap="square" lIns="0" rIns="0" tIns="0" bIns="0" anchor="t">
+            <a:spAutoFit/>
+          </a:bodyPr>
+          <a:lstStyle/>
+          <a:p>
+            <a:pPr algn="l">
+              <a:lnSpc>
+                <a:spcPct val="115000"/>
+              </a:lnSpc>
+            </a:pPr>
+            <a:r>
+              <a:rPr sz="1300" b="1">
+                <a:solidFill>
+                  <a:srgbClr val="008E76"/>
+                </a:solidFill>
+                <a:latin typeface="Arial"/>
+              </a:rPr>
+              <a:t>0</a:t>
+            </a:r>
+          </a:p>
+        </p:txBody>
+      </p:sp>
+      <p:sp>
+        <p:nvSpPr>
+          <p:cNvPr id="24" name="TextBox 23"/>
+          <p:cNvSpPr txBox="1"/>
+          <p:nvPr/>
+        </p:nvSpPr>
+        <p:spPr>
+          <a:xfrm>
+            <a:off x="667512" y="5358384"/>
+            <a:ext cx="5212080" cy="310896"/>
+          </a:xfrm>
+          <a:prstGeom prst="rect">
+            <a:avLst/>
+          </a:prstGeom>
+          <a:noFill/>
+        </p:spPr>
+        <p:txBody>
+          <a:bodyPr wrap="square" lIns="0" rIns="0" tIns="0" bIns="0" anchor="t">
+            <a:spAutoFit/>
+          </a:bodyPr>
+          <a:lstStyle/>
+          <a:p>
+            <a:pPr algn="l">
+              <a:lnSpc>
+                <a:spcPct val="115000"/>
+              </a:lnSpc>
+            </a:pPr>
+            <a:r>
+              <a:rPr sz="1150" b="1">
+                <a:solidFill>
+                  <a:srgbClr val="008E76"/>
+                </a:solidFill>
+                <a:latin typeface="Microsoft JhengHei"/>
+              </a:rPr>
+              <a:t>最後兩輪零破口 → 收斂訊號</a:t>
+            </a:r>
+          </a:p>
+        </p:txBody>
+      </p:sp>
+      <p:sp>
+        <p:nvSpPr>
+          <p:cNvPr id="25" name="TextBox 24"/>
+          <p:cNvSpPr txBox="1"/>
+          <p:nvPr/>
+        </p:nvSpPr>
+        <p:spPr>
+          <a:xfrm>
+            <a:off x="6245352" y="1700784"/>
+            <a:ext cx="5212080" cy="274320"/>
+          </a:xfrm>
+          <a:prstGeom prst="rect">
+            <a:avLst/>
+          </a:prstGeom>
+          <a:noFill/>
+        </p:spPr>
+        <p:txBody>
+          <a:bodyPr wrap="square" lIns="0" rIns="0" tIns="0" bIns="0" anchor="t">
+            <a:spAutoFit/>
+          </a:bodyPr>
+          <a:lstStyle/>
+          <a:p>
+            <a:pPr algn="l">
+              <a:lnSpc>
+                <a:spcPct val="115000"/>
+              </a:lnSpc>
+            </a:pPr>
+            <a:r>
+              <a:rPr sz="1200" b="1">
+                <a:solidFill>
+                  <a:srgbClr val="1A1A2E"/>
+                </a:solidFill>
+                <a:latin typeface="Microsoft JhengHei"/>
+              </a:rPr>
+              <a:t>最嚴重的三個（都會影響資料正確性）</a:t>
+            </a:r>
+          </a:p>
+        </p:txBody>
+      </p:sp>
+      <p:sp>
+        <p:nvSpPr>
+          <p:cNvPr id="26" name="Rounded Rectangle 25"/>
+          <p:cNvSpPr/>
+          <p:nvPr/>
+        </p:nvSpPr>
+        <p:spPr>
+          <a:xfrm>
+            <a:off x="6245352" y="2011680"/>
+            <a:ext cx="5212080" cy="1060704"/>
+          </a:xfrm>
+          <a:prstGeom prst="roundRect">
+            <a:avLst>
+              <a:gd name="adj" fmla="val 8000"/>
+            </a:avLst>
+          </a:prstGeom>
+          <a:solidFill>
+            <a:srgbClr val="F4F6F8"/>
+          </a:solidFill>
+          <a:ln>
+            <a:noFill/>
+          </a:ln>
+          <a:effectLst/>
+        </p:spPr>
+        <p:style>
+          <a:lnRef idx="1">
+            <a:schemeClr val="accent1"/>
+          </a:lnRef>
+          <a:fillRef idx="3">
+            <a:schemeClr val="accent1"/>
+          </a:fillRef>
+          <a:effectRef idx="2">
+            <a:schemeClr val="accent1"/>
+          </a:effectRef>
+          <a:fontRef idx="minor">
+            <a:schemeClr val="lt1"/>
+          </a:fontRef>
+        </p:style>
+        <p:txBody>
+          <a:bodyPr rtlCol="0" anchor="ctr"/>
+          <a:lstStyle/>
+          <a:p>
+            <a:pPr algn="ctr"/>
+          </a:p>
+        </p:txBody>
+      </p:sp>
+      <p:sp>
+        <p:nvSpPr>
+          <p:cNvPr id="27" name="TextBox 26"/>
+          <p:cNvSpPr txBox="1"/>
+          <p:nvPr/>
+        </p:nvSpPr>
+        <p:spPr>
+          <a:xfrm>
+            <a:off x="6483096" y="2121408"/>
+            <a:ext cx="4754880" cy="292608"/>
+          </a:xfrm>
+          <a:prstGeom prst="rect">
+            <a:avLst/>
+          </a:prstGeom>
+          <a:noFill/>
+        </p:spPr>
+        <p:txBody>
+          <a:bodyPr wrap="square" lIns="0" rIns="0" tIns="0" bIns="0" anchor="t">
+            <a:spAutoFit/>
+          </a:bodyPr>
+          <a:lstStyle/>
+          <a:p>
+            <a:pPr algn="l">
+              <a:lnSpc>
+                <a:spcPct val="115000"/>
+              </a:lnSpc>
+            </a:pPr>
+            <a:r>
+              <a:rPr sz="1200" b="1">
+                <a:solidFill>
+                  <a:srgbClr val="E85D5D"/>
+                </a:solidFill>
+                <a:latin typeface="Microsoft JhengHei"/>
+              </a:rPr>
+              <a:t>小數數量被抽成錯值</a:t>
+            </a:r>
+          </a:p>
+        </p:txBody>
+      </p:sp>
+      <p:sp>
+        <p:nvSpPr>
+          <p:cNvPr id="28" name="TextBox 27"/>
+          <p:cNvSpPr txBox="1"/>
+          <p:nvPr/>
+        </p:nvSpPr>
+        <p:spPr>
+          <a:xfrm>
+            <a:off x="6483096" y="2432304"/>
+            <a:ext cx="4754880" cy="548640"/>
+          </a:xfrm>
+          <a:prstGeom prst="rect">
+            <a:avLst/>
+          </a:prstGeom>
+          <a:noFill/>
+        </p:spPr>
+        <p:txBody>
+          <a:bodyPr wrap="square" lIns="0" rIns="0" tIns="0" bIns="0" anchor="t">
+            <a:spAutoFit/>
+          </a:bodyPr>
+          <a:lstStyle/>
+          <a:p>
+            <a:pPr algn="l">
+              <a:lnSpc>
+                <a:spcPct val="115000"/>
+              </a:lnSpc>
+            </a:pPr>
+            <a:r>
+              <a:rPr sz="1100" b="0">
+                <a:solidFill>
+                  <a:srgbClr val="555555"/>
+                </a:solidFill>
+                <a:latin typeface="Microsoft JhengHei"/>
+              </a:rPr>
+              <a:t>「進 1.5 個滑鼠」開出 +5 的確認卡，整數部分完全丟失</a:t>
+            </a:r>
+          </a:p>
+        </p:txBody>
+      </p:sp>
+      <p:sp>
+        <p:nvSpPr>
+          <p:cNvPr id="29" name="Rounded Rectangle 28"/>
+          <p:cNvSpPr/>
+          <p:nvPr/>
+        </p:nvSpPr>
+        <p:spPr>
+          <a:xfrm>
+            <a:off x="6245352" y="3163824"/>
+            <a:ext cx="5212080" cy="1060704"/>
+          </a:xfrm>
+          <a:prstGeom prst="roundRect">
+            <a:avLst>
+              <a:gd name="adj" fmla="val 8000"/>
+            </a:avLst>
+          </a:prstGeom>
+          <a:solidFill>
+            <a:srgbClr val="F4F6F8"/>
+          </a:solidFill>
+          <a:ln>
+            <a:noFill/>
+          </a:ln>
+          <a:effectLst/>
+        </p:spPr>
+        <p:style>
+          <a:lnRef idx="1">
+            <a:schemeClr val="accent1"/>
+          </a:lnRef>
+          <a:fillRef idx="3">
+            <a:schemeClr val="accent1"/>
+          </a:fillRef>
+          <a:effectRef idx="2">
+            <a:schemeClr val="accent1"/>
+          </a:effectRef>
+          <a:fontRef idx="minor">
+            <a:schemeClr val="lt1"/>
+          </a:fontRef>
+        </p:style>
+        <p:txBody>
+          <a:bodyPr rtlCol="0" anchor="ctr"/>
+          <a:lstStyle/>
+          <a:p>
+            <a:pPr algn="ctr"/>
+          </a:p>
+        </p:txBody>
+      </p:sp>
+      <p:sp>
+        <p:nvSpPr>
+          <p:cNvPr id="30" name="TextBox 29"/>
+          <p:cNvSpPr txBox="1"/>
+          <p:nvPr/>
+        </p:nvSpPr>
+        <p:spPr>
+          <a:xfrm>
+            <a:off x="6483096" y="3273552"/>
+            <a:ext cx="4754880" cy="292608"/>
+          </a:xfrm>
+          <a:prstGeom prst="rect">
+            <a:avLst/>
+          </a:prstGeom>
+          <a:noFill/>
+        </p:spPr>
+        <p:txBody>
+          <a:bodyPr wrap="square" lIns="0" rIns="0" tIns="0" bIns="0" anchor="t">
+            <a:spAutoFit/>
+          </a:bodyPr>
+          <a:lstStyle/>
+          <a:p>
+            <a:pPr algn="l">
+              <a:lnSpc>
+                <a:spcPct val="115000"/>
+              </a:lnSpc>
+            </a:pPr>
+            <a:r>
+              <a:rPr sz="1200" b="1">
+                <a:solidFill>
+                  <a:srgbClr val="E85D5D"/>
+                </a:solidFill>
+                <a:latin typeface="Microsoft JhengHei"/>
+              </a:rPr>
+              <a:t>一句兩商品只記第一筆</a:t>
+            </a:r>
+          </a:p>
+        </p:txBody>
+      </p:sp>
+      <p:sp>
+        <p:nvSpPr>
+          <p:cNvPr id="31" name="TextBox 30"/>
+          <p:cNvSpPr txBox="1"/>
+          <p:nvPr/>
+        </p:nvSpPr>
+        <p:spPr>
+          <a:xfrm>
+            <a:off x="6483096" y="3584448"/>
+            <a:ext cx="4754880" cy="548640"/>
+          </a:xfrm>
+          <a:prstGeom prst="rect">
+            <a:avLst/>
+          </a:prstGeom>
+          <a:noFill/>
+        </p:spPr>
+        <p:txBody>
+          <a:bodyPr wrap="square" lIns="0" rIns="0" tIns="0" bIns="0" anchor="t">
+            <a:spAutoFit/>
+          </a:bodyPr>
+          <a:lstStyle/>
+          <a:p>
+            <a:pPr algn="l">
+              <a:lnSpc>
+                <a:spcPct val="115000"/>
+              </a:lnSpc>
+            </a:pPr>
+            <a:r>
+              <a:rPr sz="1100" b="0">
+                <a:solidFill>
+                  <a:srgbClr val="555555"/>
+                </a:solidFill>
+                <a:latin typeface="Microsoft JhengHei"/>
+              </a:rPr>
+              <a:t>第二個商品默默消失、卡片毫無提示——訪客以為兩筆都記了</a:t>
+            </a:r>
+          </a:p>
+        </p:txBody>
+      </p:sp>
+      <p:sp>
+        <p:nvSpPr>
+          <p:cNvPr id="32" name="Rounded Rectangle 31"/>
+          <p:cNvSpPr/>
+          <p:nvPr/>
+        </p:nvSpPr>
+        <p:spPr>
+          <a:xfrm>
+            <a:off x="6245352" y="4315968"/>
+            <a:ext cx="5212080" cy="1060704"/>
+          </a:xfrm>
+          <a:prstGeom prst="roundRect">
+            <a:avLst>
+              <a:gd name="adj" fmla="val 8000"/>
+            </a:avLst>
+          </a:prstGeom>
+          <a:solidFill>
+            <a:srgbClr val="F4F6F8"/>
+          </a:solidFill>
+          <a:ln>
+            <a:noFill/>
+          </a:ln>
+          <a:effectLst/>
+        </p:spPr>
+        <p:style>
+          <a:lnRef idx="1">
+            <a:schemeClr val="accent1"/>
+          </a:lnRef>
+          <a:fillRef idx="3">
+            <a:schemeClr val="accent1"/>
+          </a:fillRef>
+          <a:effectRef idx="2">
+            <a:schemeClr val="accent1"/>
+          </a:effectRef>
+          <a:fontRef idx="minor">
+            <a:schemeClr val="lt1"/>
+          </a:fontRef>
+        </p:style>
+        <p:txBody>
+          <a:bodyPr rtlCol="0" anchor="ctr"/>
+          <a:lstStyle/>
+          <a:p>
+            <a:pPr algn="ctr"/>
+          </a:p>
+        </p:txBody>
+      </p:sp>
+      <p:sp>
+        <p:nvSpPr>
+          <p:cNvPr id="33" name="TextBox 32"/>
+          <p:cNvSpPr txBox="1"/>
+          <p:nvPr/>
+        </p:nvSpPr>
+        <p:spPr>
+          <a:xfrm>
+            <a:off x="6483096" y="4425696"/>
+            <a:ext cx="4754880" cy="292608"/>
+          </a:xfrm>
+          <a:prstGeom prst="rect">
+            <a:avLst/>
+          </a:prstGeom>
+          <a:noFill/>
+        </p:spPr>
+        <p:txBody>
+          <a:bodyPr wrap="square" lIns="0" rIns="0" tIns="0" bIns="0" anchor="t">
+            <a:spAutoFit/>
+          </a:bodyPr>
+          <a:lstStyle/>
+          <a:p>
+            <a:pPr algn="l">
+              <a:lnSpc>
+                <a:spcPct val="115000"/>
+              </a:lnSpc>
+            </a:pPr>
+            <a:r>
+              <a:rPr sz="1200" b="1">
+                <a:solidFill>
+                  <a:srgbClr val="E85D5D"/>
+                </a:solidFill>
+                <a:latin typeface="Microsoft JhengHei"/>
+              </a:rPr>
+              <a:t>寫入後查不到那筆</a:t>
+            </a:r>
+          </a:p>
+        </p:txBody>
+      </p:sp>
+      <p:sp>
+        <p:nvSpPr>
+          <p:cNvPr id="34" name="TextBox 33"/>
+          <p:cNvSpPr txBox="1"/>
+          <p:nvPr/>
+        </p:nvSpPr>
+        <p:spPr>
+          <a:xfrm>
+            <a:off x="6483096" y="4736592"/>
+            <a:ext cx="4754880" cy="548640"/>
+          </a:xfrm>
+          <a:prstGeom prst="rect">
+            <a:avLst/>
+          </a:prstGeom>
+          <a:noFill/>
+        </p:spPr>
+        <p:txBody>
+          <a:bodyPr wrap="square" lIns="0" rIns="0" tIns="0" bIns="0" anchor="t">
+            <a:spAutoFit/>
+          </a:bodyPr>
+          <a:lstStyle/>
+          <a:p>
+            <a:pPr algn="l">
+              <a:lnSpc>
+                <a:spcPct val="115000"/>
+              </a:lnSpc>
+            </a:pPr>
+            <a:r>
+              <a:rPr sz="1100" b="0">
+                <a:solidFill>
+                  <a:srgbClr val="555555"/>
+                </a:solidFill>
+                <a:latin typeface="Microsoft JhengHei"/>
+              </a:rPr>
+              <a:t>庫存有變但進出紀錄查不到 → 訪客以為沒成功、可能重複進貨</a:t>
+            </a:r>
+          </a:p>
+        </p:txBody>
+      </p:sp>
+      <p:sp>
+        <p:nvSpPr>
+          <p:cNvPr id="35" name="TextBox 34"/>
+          <p:cNvSpPr txBox="1"/>
+          <p:nvPr/>
+        </p:nvSpPr>
+        <p:spPr>
+          <a:xfrm>
+            <a:off x="6245352" y="5486400"/>
+            <a:ext cx="5212080" cy="512064"/>
+          </a:xfrm>
+          <a:prstGeom prst="rect">
+            <a:avLst/>
+          </a:prstGeom>
+          <a:noFill/>
+        </p:spPr>
+        <p:txBody>
+          <a:bodyPr wrap="square" lIns="0" rIns="0" tIns="0" bIns="0" anchor="t">
+            <a:spAutoFit/>
+          </a:bodyPr>
+          <a:lstStyle/>
+          <a:p>
+            <a:pPr algn="l">
+              <a:lnSpc>
+                <a:spcPct val="120000"/>
+              </a:lnSpc>
+            </a:pPr>
+            <a:r>
+              <a:rPr sz="1100" b="1">
+                <a:solidFill>
+                  <a:srgbClr val="008E76"/>
+                </a:solidFill>
+                <a:latin typeface="Microsoft JhengHei"/>
+              </a:rPr>
+              <a:t>共同模式：中文版有保護、英文版判準沒英文化——移植時要優先掃「數值保護」類的機制</a:t>
+            </a:r>
+          </a:p>
+        </p:txBody>
+      </p:sp>
+      <p:sp>
+        <p:nvSpPr>
+          <p:cNvPr id="36" name="Rectangle 35"/>
+          <p:cNvSpPr/>
+          <p:nvPr/>
+        </p:nvSpPr>
+        <p:spPr>
+          <a:xfrm>
+            <a:off x="667512" y="6382512"/>
+            <a:ext cx="10789920" cy="402336"/>
+          </a:xfrm>
+          <a:prstGeom prst="rect">
+            <a:avLst/>
+          </a:prstGeom>
+          <a:solidFill>
+            <a:srgbClr val="1A1A2E"/>
+          </a:solidFill>
+          <a:ln>
+            <a:noFill/>
+          </a:ln>
+          <a:effectLst/>
+        </p:spPr>
+        <p:style>
+          <a:lnRef idx="1">
+            <a:schemeClr val="accent1"/>
+          </a:lnRef>
+          <a:fillRef idx="3">
+            <a:schemeClr val="accent1"/>
+          </a:fillRef>
+          <a:effectRef idx="2">
+            <a:schemeClr val="accent1"/>
+          </a:effectRef>
+          <a:fontRef idx="minor">
+            <a:schemeClr val="lt1"/>
+          </a:fontRef>
+        </p:style>
+        <p:txBody>
+          <a:bodyPr rtlCol="0" anchor="ctr"/>
+          <a:lstStyle/>
+          <a:p>
+            <a:pPr algn="ctr"/>
+          </a:p>
+        </p:txBody>
+      </p:sp>
+      <p:sp>
+        <p:nvSpPr>
+          <p:cNvPr id="37" name="TextBox 36"/>
+          <p:cNvSpPr txBox="1"/>
+          <p:nvPr/>
+        </p:nvSpPr>
+        <p:spPr>
+          <a:xfrm>
+            <a:off x="1033272" y="6419088"/>
+            <a:ext cx="10149840" cy="310896"/>
+          </a:xfrm>
+          <a:prstGeom prst="rect">
+            <a:avLst/>
+          </a:prstGeom>
+          <a:noFill/>
+        </p:spPr>
+        <p:txBody>
+          <a:bodyPr wrap="square" lIns="0" rIns="0" tIns="0" bIns="0" anchor="ctr">
+            <a:spAutoFit/>
+          </a:bodyPr>
+          <a:lstStyle/>
+          <a:p>
+            <a:pPr algn="l">
+              <a:lnSpc>
+                <a:spcPct val="115000"/>
+              </a:lnSpc>
+            </a:pPr>
+            <a:r>
+              <a:rPr sz="1200" b="1">
+                <a:solidFill>
+                  <a:srgbClr val="00C49A"/>
+                </a:solidFill>
+                <a:latin typeface="Microsoft JhengHei"/>
+              </a:rPr>
+              <a:t>為什麼重要  </a:t>
+            </a:r>
+            <a:r>
+              <a:rPr sz="1150" b="0">
+                <a:solidFill>
+                  <a:srgbClr val="BBBBBB"/>
+                </a:solidFill>
+                <a:latin typeface="Microsoft JhengHei"/>
+              </a:rPr>
+              <a:t>路由錯訪客看得出來，數字錯不會——所以數值正確性的破口最該優先修。</a:t>
+            </a:r>
+          </a:p>
+        </p:txBody>
+      </p:sp>
+      <p:sp>
+        <p:nvSpPr>
+          <p:cNvPr id="38" name="TextBox 37"/>
+          <p:cNvSpPr txBox="1"/>
+          <p:nvPr/>
+        </p:nvSpPr>
+        <p:spPr>
+          <a:xfrm>
+            <a:off x="11475720" y="6565392"/>
+            <a:ext cx="658368" cy="237744"/>
+          </a:xfrm>
+          <a:prstGeom prst="rect">
+            <a:avLst/>
+          </a:prstGeom>
+          <a:noFill/>
+        </p:spPr>
+        <p:txBody>
+          <a:bodyPr wrap="square" lIns="0" rIns="0" tIns="0" bIns="0" anchor="t">
+            <a:spAutoFit/>
+          </a:bodyPr>
+          <a:lstStyle/>
+          <a:p>
+            <a:pPr algn="r">
+              <a:lnSpc>
+                <a:spcPct val="115000"/>
+              </a:lnSpc>
+            </a:pPr>
+            <a:r>
+              <a:rPr sz="1000" b="0">
+                <a:solidFill>
+                  <a:srgbClr val="BBBBBB"/>
+                </a:solidFill>
+                <a:latin typeface="Arial"/>
+              </a:rPr>
+              <a:t>32</a:t>
+            </a:r>
+          </a:p>
+        </p:txBody>
+      </p:sp>
+    </p:spTree>
+  </p:cSld>
+  <p:clrMapOvr>
+    <a:masterClrMapping/>
+  </p:clrMapOvr>
+</p:sld>
+</file>
+
+<file path=ppt/slides/slide33.xml><?xml version="1.0" encoding="utf-8"?>
+<p:sld xmlns:a="http://schemas.openxmlformats.org/drawingml/2006/main" xmlns:p="http://schemas.openxmlformats.org/presentationml/2006/main" xmlns:r="http://schemas.openxmlformats.org/officeDocument/2006/relationships">
+  <p:cSld>
+    <p:spTree>
+      <p:nvGrpSpPr>
+        <p:cNvPr id="1" name=""/>
+        <p:cNvGrpSpPr/>
+        <p:nvPr/>
+      </p:nvGrpSpPr>
+      <p:grpSpPr/>
+      <p:sp>
+        <p:nvSpPr>
+          <p:cNvPr id="2" name="Rectangle 1"/>
+          <p:cNvSpPr/>
+          <p:nvPr/>
+        </p:nvSpPr>
+        <p:spPr>
+          <a:xfrm>
+            <a:off x="0" y="0"/>
+            <a:ext cx="12188952" cy="6858000"/>
+          </a:xfrm>
+          <a:prstGeom prst="rect">
+            <a:avLst/>
+          </a:prstGeom>
+          <a:solidFill>
+            <a:srgbClr val="1A1A2E"/>
+          </a:solidFill>
+          <a:ln>
+            <a:noFill/>
+          </a:ln>
+          <a:effectLst/>
+        </p:spPr>
+        <p:style>
+          <a:lnRef idx="1">
+            <a:schemeClr val="accent1"/>
+          </a:lnRef>
+          <a:fillRef idx="3">
+            <a:schemeClr val="accent1"/>
+          </a:fillRef>
+          <a:effectRef idx="2">
+            <a:schemeClr val="accent1"/>
+          </a:effectRef>
+          <a:fontRef idx="minor">
+            <a:schemeClr val="lt1"/>
+          </a:fontRef>
+        </p:style>
+        <p:txBody>
+          <a:bodyPr rtlCol="0" anchor="ctr"/>
+          <a:lstStyle/>
+          <a:p>
+            <a:pPr algn="ctr"/>
+          </a:p>
+        </p:txBody>
+      </p:sp>
+      <p:sp>
+        <p:nvSpPr>
           <p:cNvPr id="3" name="Rectangle 2"/>
           <p:cNvSpPr/>
           <p:nvPr/>
@@ -40316,7 +43312,7 @@
                 </a:solidFill>
                 <a:latin typeface="Arial"/>
               </a:rPr>
-              <a:t>31</a:t>
+              <a:t>33</a:t>
             </a:r>
           </a:p>
         </p:txBody>

--- a/倉管Agent_專案簡報.pptx
+++ b/倉管Agent_專案簡報.pptx
@@ -1693,7 +1693,7 @@
               <a:rPr sz="1200">
                 <a:latin typeface="Microsoft JhengHei"/>
               </a:rPr>
-              <a:t>**2026-08 演進（本頁現役列）**：英文先升級 small-q5_0＋-ac 640（比 tiny.en 更準且 1.1s/句，audio-ctx 把 30 秒上下文削到短句實際需要，速度救回來）；8/5 手機麥克風實測暴露 base 中文極限（『藍牙耳機庫存』聽成音節碎片、容錯層救不動），以 user 自錄真人 100 句重跑基準：base 引擎 2.10s/CER中位 0.33、small 3.54s/0.25；**公平對稱端到端（同無修正層）base 36/100 vs small 47/100；small 掛回容錯層 66/100**——慢 1.4 秒買 +30 分答對率，且容錯層在 small 的詞形輸出上多救 19 分（47→66），驗證『輸出要像詞、救援鏈才接得上手』。中英自此統一同一顆 175MB 模型檔，只差 -l 語言旗標。</a:t>
+              <a:t>**2026-08 演進（本頁現役列）**：英文先升級 small-q5_0＋-ac 640（比 tiny.en 更準且 3.45s/句——比 tiny.en 慢但台灣腔通過率 27%→60%，速度靠 -ac 640 從 6.7s 拉回）；8/5 手機麥克風實測暴露 base 中文極限（『藍牙耳機庫存』聽成音節碎片、容錯層救不動），以 user 自錄真人 100 句重跑基準：base 引擎 2.10s/CER中位 0.33、small 3.54s/0.25；**公平對稱端到端（同無修正層）base 36/100 vs small 47/100；small 掛回容錯層 66/100**——慢 1.4 秒買 +30 分答對率，且容錯層在 small 的詞形輸出上多救 19 分（47→66），驗證『輸出要像詞、救援鏈才接得上手』。中英自此統一同一顆 175MB 模型檔，只差 -l 語言旗標。</a:t>
             </a:r>
           </a:p>
         </p:txBody>
@@ -1798,7 +1798,7 @@
               <a:rPr sz="1200">
                 <a:latin typeface="Microsoft JhengHei"/>
               </a:rPr>
-              <a:t>**2026-08 更新**：中英已統一為同一顆 ggml-small-q5_0.bin（175MB 多語、量化 q5_0），兩版只差 -l en / -l zh 語言旗標——連『兩顆模型』都省成一顆，部署與還原再薄一層。速度靠 -ac 640（audio-ctx 從 30 秒上下文削到短句實際需要）守住：EN 1.1s、ZH 3.5s/句。</a:t>
+              <a:t>**2026-08 更新**：中英已統一為同一顆 ggml-small-q5_0.bin（175MB 多語、量化 q5_0），兩版只差 -l en / -l zh 語言旗標——連『兩顆模型』都省成一顆，部署與還原再薄一層。速度靠 -ac 640（audio-ctx 從 30 秒上下文削到短句實際需要）守住：EN 3.45s、ZH 3.54s/句（tiny.en 時代的 0.94-1.1s 是舊引擎數字，換 small 後中英同級）。</a:t>
             </a:r>
           </a:p>
         </p:txBody>
@@ -20850,7 +20850,7 @@
                 </a:solidFill>
                 <a:latin typeface="Arial"/>
               </a:rPr>
-              <a:t>EN 1.1s / ZH 3.5s</a:t>
+              <a:t>中英皆 ~3.5s</a:t>
             </a:r>
           </a:p>
         </p:txBody>
@@ -24251,7 +24251,7 @@
                 </a:solidFill>
                 <a:latin typeface="Microsoft JhengHei"/>
               </a:rPr>
-              <a:t>910 MB 三顆 → 175 MB 一顆（中英共用）｜VAD 零模型｜EN 1.1s / ZH 3.5s｜純 CPU、零 GPU、零雲端</a:t>
+              <a:t>910 MB 三顆 → 175 MB 一顆（中英共用）｜VAD 零模型｜中英 ~3.5s/句｜純 CPU、零 GPU、零雲端</a:t>
             </a:r>
           </a:p>
         </p:txBody>
@@ -40740,7 +40740,7 @@
                 </a:solidFill>
                 <a:latin typeface="Microsoft JhengHei"/>
               </a:rPr>
-              <a:t>先前所有英文語音數據都來自 TTS。這次請真人（非母語者）錄 38 句，用展場實際會部署的模型與麥克風測完整語音鏈。</a:t>
+              <a:t>先前所有英文語音數據都來自 TTS。這次請真人（非母語者）先錄 38 句抽樣（後補滿 100 句，見下頁），用展場實際會部署的模型與麥克風測完整語音鏈。</a:t>
             </a:r>
           </a:p>
         </p:txBody>
@@ -41066,7 +41066,7 @@
                 </a:solidFill>
                 <a:latin typeface="Microsoft JhengHei"/>
               </a:rPr>
-              <a:t>台灣腔 38 句 · 同一支麥克風、同一顆模型</a:t>
+              <a:t>台灣腔首測 38 句抽樣（後補滿100句→下頁） · 同麥克風同模型</a:t>
             </a:r>
           </a:p>
         </p:txBody>

--- a/倉管Agent_專案簡報.pptx
+++ b/倉管Agent_專案簡報.pptx
@@ -736,7 +736,7 @@
               <a:rPr sz="1200">
                 <a:latin typeface="Microsoft JhengHei"/>
               </a:rPr>
-              <a:t>封面。定位：這是晶片團隊的軟體成果——一個能展示邊緣 AI 落地的真實應用。一句話說清楚產品：自然語言問倉管、一秒回答、跑在便宜的樹莓派上。三個數字：270M 是模型只有 2.7 億參數（業界主流 3B-8B 的零頭）、100+ 輪是品質收斂的迭代次數、100% 是回歸測試通過率。底線一句話點出硬體路線圖：現在純 CPU、下一步接自研晶片加速。</a:t>
+              <a:t>封面。定位：這是晶片團隊的軟體成果——一個能展示邊緣 AI 落地的真實應用。一句話說清楚產品：自然語言問倉管、秒級回答、跑在便宜的樹莓派上。三個數字：270M 是模型只有 2.7 億參數（業界主流 3B-8B 的零頭）、100+ 輪是品質收斂的迭代次數、100% 是回歸測試通過率。底線一句話點出硬體路線圖：現在純 CPU、下一步接自研晶片加速。</a:t>
             </a:r>
           </a:p>
         </p:txBody>
@@ -1320,7 +1320,7 @@
               <a:rPr sz="1200">
                 <a:latin typeface="Microsoft JhengHei"/>
               </a:rPr>
-              <a:t>★硬體路線圖頁（點綴，但對晶片團隊的參展定位很重要）。左邊實色=現在已實測：270M 在 RPi5 純 CPU、~30 t/s、六套回歸雙平台 100%、極低成本。右邊白底虛線框=下一階段 roadmap 目標（明確標成目標，不假裝已達成）：加自研晶片加速 → 跑 3B/7B 更大模型 → 能力從查詢升級到真正對話。核心訊息：軟體與應用已就緒，就等晶片把算力天花板拉高。誠實區分實測與目標，保住對評審的信任。</a:t>
+              <a:t>★硬體路線圖頁（點綴，但對晶片團隊的參展定位很重要）。左邊實色=現在已實測：270M 在 RPi5 純 CPU、20–30 t/s（模擬全開時 ~20、關閉 ~30）、六套回歸雙平台 100%、極低成本。右邊白底虛線框=下一階段 roadmap 目標（明確標成目標，不假裝已達成）：加自研晶片加速 → 跑 3B/7B 更大模型 → 能力從查詢升級到真正對話。核心訊息：軟體與應用已就緒，就等晶片把算力天花板拉高。誠實區分實測與目標，保住對評審的信任。</a:t>
             </a:r>
           </a:p>
         </p:txBody>
@@ -1539,7 +1539,7 @@
               <a:rPr sz="1200">
                 <a:latin typeface="Microsoft JhengHei"/>
               </a:rPr>
-              <a:t>痛點對照。左邊是傳統倉管系統的四個痛：要學、層級深、現場難用、客製貴。右邊是本專案的解法：用講的、一秒答、手機掃碼、樹莓派就能跑。</a:t>
+              <a:t>痛點對照。左邊是傳統倉管系統的四個痛：要學、層級深、現場難用、客製貴。右邊是本專案的解法：用講的、秒級答、手機掃碼、樹莓派就能跑。</a:t>
             </a:r>
           </a:p>
         </p:txBody>
@@ -6464,7 +6464,7 @@
                 </a:solidFill>
                 <a:latin typeface="Microsoft JhengHei"/>
               </a:rPr>
-              <a:t>一句自然語言 → 一秒拿到正確答案，全程在一台 Raspberry Pi 上跑</a:t>
+              <a:t>一句自然語言 → 秒級拿到正確答案，全程在一台 Raspberry Pi 上跑</a:t>
             </a:r>
           </a:p>
         </p:txBody>
@@ -7343,7 +7343,7 @@
                 </a:solidFill>
                 <a:latin typeface="Arial"/>
               </a:rPr>
-              <a:t>~30 t/s</a:t>
+              <a:t>20–30 t/s</a:t>
             </a:r>
           </a:p>
         </p:txBody>
@@ -12322,7 +12322,7 @@
                 </a:solidFill>
                 <a:latin typeface="Microsoft JhengHei"/>
               </a:rPr>
-              <a:t>每修一個 bug 就存一句守衛 → 882 句形成防護網，任何改動只要跑回歸就知道有沒有踩壞舊功能</a:t>
+              <a:t>每修一個 bug 就存一句守衛 → 1122 句形成防護網，任何改動只要跑回歸就知道有沒有踩壞舊功能</a:t>
             </a:r>
           </a:p>
         </p:txBody>
@@ -12914,7 +12914,7 @@
                 </a:solidFill>
                 <a:latin typeface="Arial"/>
               </a:rPr>
-              <a:t>~30 t/s</a:t>
+              <a:t>20–30 t/s</a:t>
             </a:r>
           </a:p>
         </p:txBody>
@@ -14184,7 +14184,7 @@
                 </a:solidFill>
                 <a:latin typeface="Microsoft JhengHei"/>
               </a:rPr>
-              <a:t>~30 tokens/s</a:t>
+              <a:t>20–30 tokens/s</a:t>
             </a:r>
           </a:p>
         </p:txBody>
@@ -18565,7 +18565,7 @@
                 </a:solidFill>
                 <a:latin typeface="Microsoft JhengHei"/>
               </a:rPr>
-              <a:t>一句話一秒回答，免選單</a:t>
+              <a:t>一句話秒級回答，免選單</a:t>
             </a:r>
           </a:p>
         </p:txBody>
@@ -19441,7 +19441,7 @@
                 </a:solidFill>
                 <a:latin typeface="Microsoft JhengHei"/>
               </a:rPr>
-              <a:t>OpenAI whisper，RPi5 CPU 純離線辨識（英文 0.94s / 句）</a:t>
+              <a:t>OpenAI whisper，RPi5 CPU 純離線辨識（中英同顆 small-q5_0，~3.5s/句）</a:t>
             </a:r>
           </a:p>
         </p:txBody>
@@ -21612,7 +21612,7 @@
                 </a:solidFill>
                 <a:latin typeface="Arial"/>
               </a:rPr>
-              <a:t>67 MB</a:t>
+              <a:t>141 MB</a:t>
             </a:r>
           </a:p>
         </p:txBody>
@@ -45237,7 +45237,7 @@
                 </a:solidFill>
                 <a:latin typeface="Microsoft JhengHei"/>
               </a:rPr>
-              <a:t>自然語言問倉管，一秒回答；手機掃碼、離線可用、硬體成本極低</a:t>
+              <a:t>自然語言問倉管，秒級回答；手機掃碼、離線可用、硬體成本極低</a:t>
             </a:r>
           </a:p>
         </p:txBody>
@@ -45858,7 +45858,7 @@
                 </a:solidFill>
                 <a:latin typeface="Microsoft JhengHei"/>
               </a:rPr>
-              <a:t>全離線 whisper；英文 0.94s / 句，中英共用一套 runtime</a:t>
+              <a:t>全離線 whisper；中英統一 small-q5_0（~3.5s/句）、同一套 runtime</a:t>
             </a:r>
           </a:p>
         </p:txBody>
@@ -46104,7 +46104,7 @@
                 </a:solidFill>
                 <a:latin typeface="Microsoft JhengHei"/>
               </a:rPr>
-              <a:t>下一步：展前真機全量驗收、demo 基準日對齊——重置鈕 / 開機自啟 / Wi-Fi 自癒 / 中英雙版並存已完成</a:t>
+              <a:t>下一步：第二台交機（全量認證已過）、展前真人語音多句實測、SEMICON 9/2–9/4 展出——開機自動歸零 / 動態模擬 / 雙語 / 手機動線全數就緒</a:t>
             </a:r>
           </a:p>
         </p:txBody>
@@ -53556,7 +53556,7 @@
                 </a:solidFill>
                 <a:latin typeface="Arial"/>
               </a:rPr>
-              <a:t>0.5GB</a:t>
+              <a:t>4.2MB</a:t>
             </a:r>
           </a:p>
         </p:txBody>
@@ -53595,7 +53595,7 @@
                 </a:solidFill>
                 <a:latin typeface="Microsoft JhengHei"/>
               </a:rPr>
-              <a:t>intent_clf.bin 模型</a:t>
+              <a:t>intent_clf 量化模型（原 0.5GB）</a:t>
             </a:r>
           </a:p>
         </p:txBody>

--- a/倉管Agent_專案簡報.pptx
+++ b/倉管Agent_專案簡報.pptx
@@ -356,7 +356,7 @@
                 </a:solidFill>
                 <a:latin typeface="Microsoft JhengHei"/>
               </a:rPr>
-              <a:t>五輪破口收斂軌跡</a:t>
+              <a:t>破口收斂軌跡：換新角度仍會再冒</a:t>
             </a:r>
           </a:p>
         </c:rich>
@@ -390,9 +390,9 @@
           </c:spPr>
           <c:cat>
             <c:strRef>
-              <c:f>Sheet1!$A$2:$A$6</c:f>
+              <c:f>Sheet1!$A$2:$A$7</c:f>
               <c:strCache>
-                <c:ptCount val="5"/>
+                <c:ptCount val="6"/>
                 <c:pt idx="0">
                   <c:v>第一輪</c:v>
                 </c:pt>
@@ -408,15 +408,19 @@
                 <c:pt idx="4">
                   <c:v>第五輪</c:v>
                 </c:pt>
+                <c:pt idx="5">
+                  <c:v>換角度
+(排程專項)</c:v>
+                </c:pt>
               </c:strCache>
             </c:strRef>
           </c:cat>
           <c:val>
             <c:numRef>
-              <c:f>Sheet1!$B$2:$B$6</c:f>
+              <c:f>Sheet1!$B$2:$B$7</c:f>
               <c:numCache>
                 <c:formatCode>General</c:formatCode>
-                <c:ptCount val="5"/>
+                <c:ptCount val="6"/>
                 <c:pt idx="0">
                   <c:v>38</c:v>
                 </c:pt>
@@ -431,6 +435,9 @@
                 </c:pt>
                 <c:pt idx="4">
                   <c:v>3</c:v>
+                </c:pt>
+                <c:pt idx="5">
+                  <c:v>4</c:v>
                 </c:pt>
               </c:numCache>
             </c:numRef>
@@ -1512,7 +1519,39 @@
               <a:rPr sz="1200">
                 <a:latin typeface="Microsoft JhengHei"/>
               </a:rPr>
-              <a:t>這頁講測試方法論與現況。核心觀念：不是測一次就好，而是「百句實測→修→全量回歸」的循環，每輪刻意換訪客講話的角度（口語、邊界、連續對話、語音錯字），修完一輪再跑下一輪。柱狀圖是五輪的收斂軌跡：第一輪抓到 38 個問題，一路降到 3 個，且連續兩輪低於 5＝工程上宣告收斂。剩的 3 個是極端罕見打法，已列冊。每輪修復都跑中文 1122＋英文 892 句全量守衛，確保修新不壞舊。結論：目前收尾階段（真人語音驗證＋長尾），預計下週可交付廠商。</a:t>
+              <a:t>這頁講測試方法論與現況。核心觀念：不是測一次就好，而是「百句實測→修→全量回歸」的循環，每輪刻意換訪客講話的角度（口語、邊界、連續對話、語音錯字），修完一輪再跑下一輪。</a:t>
+            </a:r>
+          </a:p>
+          <a:p>
+            <a:r>
+              <a:rPr sz="1200">
+                <a:latin typeface="Microsoft JhengHei"/>
+              </a:rPr>
+              <a:t>柱狀圖：英文互動線五輪從 38 個問題降到 3 個，連續兩輪低於 5 ⇒ **那條線**達到收斂判準。但第六柱是關鍵——換一個沒測過的角度（排程專項百句）又抓到 4 個，同期實際使用回報 4 件。</a:t>
+            </a:r>
+          </a:p>
+          <a:p>
+            <a:r>
+              <a:rPr sz="1200">
+                <a:latin typeface="Microsoft JhengHei"/>
+              </a:rPr>
+              <a:t>★ 這頁要傳達的重點不是『測完了』，而是『收斂是逐條功能線達標，換角度就會再冒』。老闆若問「那到底何時算好」：判準是每條功能線各自連兩輪 ≤5，加上實際使用回報趨近於零；目前英文互動線已達標，排程線剛開始測。</a:t>
+            </a:r>
+          </a:p>
+          <a:p>
+            <a:r>
+              <a:rPr sz="1200">
+                <a:latin typeface="Microsoft JhengHei"/>
+              </a:rPr>
+              <a:t>誠實揭露：近期修復尚未全數納入守衛語料（回歸庫停在 7/20 的 1122 句），下週要補課，否則新修的功能沒有防退步保護。</a:t>
+            </a:r>
+          </a:p>
+          <a:p>
+            <a:r>
+              <a:rPr sz="1200">
+                <a:latin typeface="Microsoft JhengHei"/>
+              </a:rPr>
+              <a:t>結論：收尾階段，下週續辦新角度輪＋守衛補課＋真人語音驗證，展前（9/2）完成交付。</a:t>
             </a:r>
           </a:p>
         </p:txBody>
@@ -14279,7 +14318,7 @@
                 </a:solidFill>
                 <a:latin typeface="Microsoft JhengHei"/>
               </a:rPr>
-              <a:t>自動測試迭代：百句實測 → 修 → 回歸，重複跑到收斂</a:t>
+              <a:t>自動測試迭代：百句實測 → 修 → 回歸；逐條功能線收斂，換角度再測</a:t>
             </a:r>
           </a:p>
         </p:txBody>
@@ -15834,13 +15873,13 @@
               <a:t>連續兩輪新問題 ≤ 5 且全為優雅降級  </a:t>
             </a:r>
             <a:r>
-              <a:rPr sz="1350" b="1">
+              <a:rPr sz="1300" b="1">
                 <a:solidFill>
                   <a:srgbClr val="008E76"/>
                 </a:solidFill>
                 <a:latin typeface="Microsoft JhengHei"/>
               </a:rPr>
-              <a:t>→ ✅ 已達標</a:t>
+              <a:t>→ 英文互動線已達標</a:t>
             </a:r>
           </a:p>
         </p:txBody>
@@ -15854,7 +15893,7 @@
         <p:spPr>
           <a:xfrm>
             <a:off x="6601968" y="5029200"/>
-            <a:ext cx="4754880" cy="822960"/>
+            <a:ext cx="4754880" cy="868680"/>
           </a:xfrm>
           <a:prstGeom prst="rect">
             <a:avLst/>
@@ -15869,33 +15908,49 @@
           <a:p>
             <a:pPr algn="l">
               <a:lnSpc>
-                <a:spcPct val="130000"/>
-              </a:lnSpc>
-            </a:pPr>
-            <a:r>
-              <a:rPr sz="1200" b="0">
+                <a:spcPct val="128000"/>
+              </a:lnSpc>
+            </a:pPr>
+            <a:r>
+              <a:rPr sz="1150" b="0">
                 <a:solidFill>
                   <a:srgbClr val="444444"/>
                 </a:solidFill>
                 <a:latin typeface="Microsoft JhengHei"/>
               </a:rPr>
-              <a:t>剩餘 3 個屬極端罕見打法（三連黏字、同音錯字撞真英文單字），</a:t>
-            </a:r>
-          </a:p>
-          <a:p>
-            <a:pPr algn="l">
-              <a:lnSpc>
-                <a:spcPct val="130000"/>
-              </a:lnSpc>
-            </a:pPr>
-            <a:r>
-              <a:rPr sz="1200" b="0">
+              <a:t>但收斂是「逐條功能線」達標，不是全案結案：換新角度測（排程專項）</a:t>
+            </a:r>
+          </a:p>
+          <a:p>
+            <a:pPr algn="l">
+              <a:lnSpc>
+                <a:spcPct val="128000"/>
+              </a:lnSpc>
+            </a:pPr>
+            <a:r>
+              <a:rPr sz="1150" b="0">
                 <a:solidFill>
                   <a:srgbClr val="444444"/>
                 </a:solidFill>
                 <a:latin typeface="Microsoft JhengHei"/>
               </a:rPr>
-              <a:t>已列冊追蹤；每一輪修復都經全量守衛回歸，確保不踩壞舊功能。</a:t>
+              <a:t>仍抓到 4 個破口，實際使用回報 4 件。⇒ 下週持續：新角度輪 + 守衛</a:t>
+            </a:r>
+          </a:p>
+          <a:p>
+            <a:pPr algn="l">
+              <a:lnSpc>
+                <a:spcPct val="128000"/>
+              </a:lnSpc>
+            </a:pPr>
+            <a:r>
+              <a:rPr sz="1150" b="0">
+                <a:solidFill>
+                  <a:srgbClr val="444444"/>
+                </a:solidFill>
+                <a:latin typeface="Microsoft JhengHei"/>
+              </a:rPr>
+              <a:t>庫補課（近期修復尚未全數納入回歸語料）。</a:t>
             </a:r>
           </a:p>
         </p:txBody>
@@ -15980,7 +16035,7 @@
                 </a:solidFill>
                 <a:latin typeface="Microsoft JhengHei"/>
               </a:rPr>
-              <a:t>✅ 網頁互動已收斂   </a:t>
+              <a:t>收尾階段   </a:t>
             </a:r>
             <a:r>
               <a:rPr sz="1300" b="0">
@@ -15989,7 +16044,7 @@
                 </a:solidFill>
                 <a:latin typeface="Microsoft JhengHei"/>
               </a:rPr>
-              <a:t>▸  收尾中：真人語音驗證＋長尾補強   </a:t>
+              <a:t>▸  下週續辦：新角度輪、守衛庫補課、真人語音驗證   </a:t>
             </a:r>
             <a:r>
               <a:rPr sz="1350" b="1">
@@ -15998,7 +16053,7 @@
                 </a:solidFill>
                 <a:latin typeface="Microsoft JhengHei"/>
               </a:rPr>
-              <a:t>▸  預計下週交付廠商</a:t>
+              <a:t>▸  展前（9/2）完成交付</a:t>
             </a:r>
           </a:p>
         </p:txBody>

--- a/倉管Agent_專案簡報.pptx
+++ b/倉管Agent_專案簡報.pptx
@@ -1984,6 +1984,71 @@
         <p:txBody>
           <a:bodyPr/>
           <a:lstStyle/>
+          <a:p>
+            <a:r>
+              <a:rPr sz="1200">
+                <a:latin typeface="Microsoft JhengHei"/>
+              </a:rPr>
+              <a:t>【2026-08-06 改版：講「二選一」的故事，不是講已定案】</a:t>
+            </a:r>
+          </a:p>
+          <a:p>
+            <a:r>
+              <a:rPr sz="1200">
+                <a:latin typeface="Microsoft JhengHei"/>
+              </a:rPr>
+              <a:t>★ 講法：候選已經收斂到只剩兩個——**同一顆模型的兩種壓縮程度**。</a:t>
+            </a:r>
+          </a:p>
+          <a:p>
+            <a:r>
+              <a:rPr sz="1200">
+                <a:latin typeface="Microsoft JhengHei"/>
+              </a:rPr>
+              <a:t>① 先講直覺：一般都認為壓越小（q5，167MB）應該越快，所以本來預期選 q8 的人會覺得奇怪，為什麼上線的是 q5？</a:t>
+            </a:r>
+          </a:p>
+          <a:p>
+            <a:r>
+              <a:rPr sz="1200">
+                <a:latin typeface="Microsoft JhengHei"/>
+              </a:rPr>
+              <a:t>② 反直覺一（速度）：實測**壓最小的反而最慢**（4.2s vs 2.5s）。白話解釋——壓縮就像把東西真空收納，取用前得先「還原」；壓得太扁，每次拆封的功夫反而比省下的搬運時間還多。q8 壓得剛好，拆封快、搬運也不重，總時間最短。</a:t>
+            </a:r>
+          </a:p>
+          <a:p>
+            <a:r>
+              <a:rPr sz="1200">
+                <a:latin typeface="Microsoft JhengHei"/>
+              </a:rPr>
+              <a:t>   （誠實補充：確切機轉我們沒有定論，這是依實測結果選型，不是理論推導。）</a:t>
+            </a:r>
+          </a:p>
+          <a:p>
+            <a:r>
+              <a:rPr sz="1200">
+                <a:latin typeface="Microsoft JhengHei"/>
+              </a:rPr>
+              <a:t>③ 反直覺二（準度）：慢的那顆 q5 端到端反而較準（76.7% vs 73.7%）。原因在**錯的位置不同**——q8 常錯在商品名（steam iron 聽成 stain iron），那是查詢的命脈；q5 錯得零碎（stock 聽成 stuck），關鍵字還在，容錯層修得動。</a:t>
+            </a:r>
+          </a:p>
+          <a:p>
+            <a:r>
+              <a:rPr sz="1200">
+                <a:latin typeface="Microsoft JhengHei"/>
+              </a:rPr>
+              <a:t>④ 現在進行式：既然 q8 只輸在「特定幾種固定聽錯」，我們正在幫它補專用容錯規則。若能補到追平，就能同時拿到快 40% 與同等準度——那才是最佳解。</a:t>
+            </a:r>
+          </a:p>
+          <a:p>
+            <a:r>
+              <a:rPr sz="1200">
+                <a:latin typeface="Microsoft JhengHei"/>
+              </a:rPr>
+              <a:t>⑤ 若老闆問何時定案：判準已訂——三層噪音端到端平均不低於現行、且最吵那層不落後 2 分以上，就切換；否則維持 q5。展前一週內定案，不會拖到展場。</a:t>
+            </a:r>
+          </a:p>
+          <a:p/>
           <a:p>
             <a:r>
               <a:rPr sz="1200">
@@ -23809,7 +23874,7 @@
                 </a:solidFill>
                 <a:latin typeface="Microsoft JhengHei"/>
               </a:rPr>
-              <a:t>全面改用歐美模型：中英各選最適尺寸</a:t>
+              <a:t>已鎖定 small 的兩種壓縮版本：q5_0 與 q8_0，正在二選一</a:t>
             </a:r>
           </a:p>
         </p:txBody>
@@ -23848,7 +23913,7 @@
                 </a:solidFill>
                 <a:latin typeface="Microsoft JhengHei"/>
               </a:rPr>
-              <a:t>選型鐵律：① 供應鏈來源可控（歐美模型）② RPi5 CPU 純離線跑 ③ 中英共用同一套 whisper.cpp runtime。</a:t>
+              <a:t>選型鐵律：① 供應鏈來源可控（歐美模型）② RPi5 CPU 純離線跑 ③ 中英共用同一套 whisper.cpp runtime。候選已收斂到 small 的兩個壓縮版本——差別只在「壓多小」，其餘完全相同。</a:t>
             </a:r>
           </a:p>
         </p:txBody>
@@ -24142,7 +24207,7 @@
         <p:spPr>
           <a:xfrm>
             <a:off x="667512" y="2240280"/>
-            <a:ext cx="10853928" cy="621792"/>
+            <a:ext cx="10853928" cy="502920"/>
           </a:xfrm>
           <a:prstGeom prst="rect">
             <a:avLst/>
@@ -24187,8 +24252,8 @@
         </p:nvSpPr>
         <p:spPr>
           <a:xfrm>
-            <a:off x="777240" y="2331720"/>
-            <a:ext cx="1874520" cy="438912"/>
+            <a:off x="777240" y="2276856"/>
+            <a:ext cx="1874520" cy="429768"/>
           </a:xfrm>
           <a:prstGeom prst="rect">
             <a:avLst/>
@@ -24226,8 +24291,8 @@
         </p:nvSpPr>
         <p:spPr>
           <a:xfrm>
-            <a:off x="2898648" y="2331720"/>
-            <a:ext cx="1143000" cy="438912"/>
+            <a:off x="2898648" y="2276856"/>
+            <a:ext cx="1143000" cy="429768"/>
           </a:xfrm>
           <a:prstGeom prst="rect">
             <a:avLst/>
@@ -24252,7 +24317,7 @@
                 </a:solidFill>
                 <a:latin typeface="Arial"/>
               </a:rPr>
-              <a:t>175 MB</a:t>
+              <a:t>167 MB</a:t>
             </a:r>
           </a:p>
         </p:txBody>
@@ -24265,8 +24330,8 @@
         </p:nvSpPr>
         <p:spPr>
           <a:xfrm>
-            <a:off x="4087367" y="2331720"/>
-            <a:ext cx="1508760" cy="438912"/>
+            <a:off x="4087367" y="2276856"/>
+            <a:ext cx="1508760" cy="429768"/>
           </a:xfrm>
           <a:prstGeom prst="rect">
             <a:avLst/>
@@ -24291,7 +24356,7 @@
                 </a:solidFill>
                 <a:latin typeface="Microsoft JhengHei"/>
               </a:rPr>
-              <a:t>多語（中英同檔）</a:t>
+              <a:t>壓最小（5-bit）</a:t>
             </a:r>
           </a:p>
         </p:txBody>
@@ -24304,8 +24369,8 @@
         </p:nvSpPr>
         <p:spPr>
           <a:xfrm>
-            <a:off x="5641848" y="2331720"/>
-            <a:ext cx="1691639" cy="438912"/>
+            <a:off x="5641848" y="2276856"/>
+            <a:ext cx="1691639" cy="429768"/>
           </a:xfrm>
           <a:prstGeom prst="rect">
             <a:avLst/>
@@ -24330,7 +24395,7 @@
                 </a:solidFill>
                 <a:latin typeface="Arial"/>
               </a:rPr>
-              <a:t>中英皆 ~3.5s</a:t>
+              <a:t>4.2s</a:t>
             </a:r>
           </a:p>
         </p:txBody>
@@ -24343,8 +24408,8 @@
         </p:nvSpPr>
         <p:spPr>
           <a:xfrm>
-            <a:off x="7379208" y="2331720"/>
-            <a:ext cx="1874520" cy="438912"/>
+            <a:off x="7379208" y="2276856"/>
+            <a:ext cx="1874520" cy="429768"/>
           </a:xfrm>
           <a:prstGeom prst="rect">
             <a:avLst/>
@@ -24369,7 +24434,7 @@
                 </a:solidFill>
                 <a:latin typeface="Microsoft JhengHei"/>
               </a:rPr>
-              <a:t>ZH 端到端 66/100</a:t>
+              <a:t>端到端均 76.7%</a:t>
             </a:r>
           </a:p>
         </p:txBody>
@@ -24382,8 +24447,8 @@
         </p:nvSpPr>
         <p:spPr>
           <a:xfrm>
-            <a:off x="9299448" y="2331720"/>
-            <a:ext cx="2148840" cy="438912"/>
+            <a:off x="9299448" y="2276856"/>
+            <a:ext cx="2148840" cy="429768"/>
           </a:xfrm>
           <a:prstGeom prst="rect">
             <a:avLst/>
@@ -24408,7 +24473,7 @@
                 </a:solidFill>
                 <a:latin typeface="Microsoft JhengHei"/>
               </a:rPr>
-              <a:t>★ 現役（8 月中英統一＋-ac 640）</a:t>
+              <a:t>★ 目前上線中：準度領先</a:t>
             </a:r>
           </a:p>
         </p:txBody>
@@ -24421,8 +24486,568 @@
         </p:nvSpPr>
         <p:spPr>
           <a:xfrm>
-            <a:off x="667512" y="2862072"/>
-            <a:ext cx="10853928" cy="621792"/>
+            <a:off x="667512" y="2743200"/>
+            <a:ext cx="10853928" cy="502920"/>
+          </a:xfrm>
+          <a:prstGeom prst="rect">
+            <a:avLst/>
+          </a:prstGeom>
+          <a:solidFill>
+            <a:srgbClr val="E4F7F2"/>
+          </a:solidFill>
+          <a:ln w="6350">
+            <a:solidFill>
+              <a:srgbClr val="E6E8EC"/>
+            </a:solidFill>
+          </a:ln>
+          <a:effectLst/>
+        </p:spPr>
+        <p:style>
+          <a:lnRef idx="1">
+            <a:schemeClr val="accent1"/>
+          </a:lnRef>
+          <a:fillRef idx="3">
+            <a:schemeClr val="accent1"/>
+          </a:fillRef>
+          <a:effectRef idx="2">
+            <a:schemeClr val="accent1"/>
+          </a:effectRef>
+          <a:fontRef idx="minor">
+            <a:schemeClr val="lt1"/>
+          </a:fontRef>
+        </p:style>
+        <p:txBody>
+          <a:bodyPr rtlCol="0" anchor="ctr"/>
+          <a:lstStyle/>
+          <a:p>
+            <a:pPr algn="ctr"/>
+          </a:p>
+        </p:txBody>
+      </p:sp>
+      <p:sp>
+        <p:nvSpPr>
+          <p:cNvPr id="20" name="TextBox 19"/>
+          <p:cNvSpPr txBox="1"/>
+          <p:nvPr/>
+        </p:nvSpPr>
+        <p:spPr>
+          <a:xfrm>
+            <a:off x="777240" y="2779776"/>
+            <a:ext cx="1874520" cy="429768"/>
+          </a:xfrm>
+          <a:prstGeom prst="rect">
+            <a:avLst/>
+          </a:prstGeom>
+          <a:noFill/>
+        </p:spPr>
+        <p:txBody>
+          <a:bodyPr wrap="square" lIns="0" rIns="0" tIns="0" bIns="0" anchor="ctr">
+            <a:spAutoFit/>
+          </a:bodyPr>
+          <a:lstStyle/>
+          <a:p>
+            <a:pPr algn="l">
+              <a:lnSpc>
+                <a:spcPct val="115000"/>
+              </a:lnSpc>
+            </a:pPr>
+            <a:r>
+              <a:rPr sz="1250" b="1">
+                <a:solidFill>
+                  <a:srgbClr val="008E76"/>
+                </a:solidFill>
+                <a:latin typeface="Microsoft JhengHei"/>
+              </a:rPr>
+              <a:t>whisper small-q8_0</a:t>
+            </a:r>
+          </a:p>
+        </p:txBody>
+      </p:sp>
+      <p:sp>
+        <p:nvSpPr>
+          <p:cNvPr id="21" name="TextBox 20"/>
+          <p:cNvSpPr txBox="1"/>
+          <p:nvPr/>
+        </p:nvSpPr>
+        <p:spPr>
+          <a:xfrm>
+            <a:off x="2898648" y="2779776"/>
+            <a:ext cx="1143000" cy="429768"/>
+          </a:xfrm>
+          <a:prstGeom prst="rect">
+            <a:avLst/>
+          </a:prstGeom>
+          <a:noFill/>
+        </p:spPr>
+        <p:txBody>
+          <a:bodyPr wrap="square" lIns="0" rIns="0" tIns="0" bIns="0" anchor="ctr">
+            <a:spAutoFit/>
+          </a:bodyPr>
+          <a:lstStyle/>
+          <a:p>
+            <a:pPr algn="l">
+              <a:lnSpc>
+                <a:spcPct val="115000"/>
+              </a:lnSpc>
+            </a:pPr>
+            <a:r>
+              <a:rPr sz="1200" b="1">
+                <a:solidFill>
+                  <a:srgbClr val="444444"/>
+                </a:solidFill>
+                <a:latin typeface="Arial"/>
+              </a:rPr>
+              <a:t>252 MB</a:t>
+            </a:r>
+          </a:p>
+        </p:txBody>
+      </p:sp>
+      <p:sp>
+        <p:nvSpPr>
+          <p:cNvPr id="22" name="TextBox 21"/>
+          <p:cNvSpPr txBox="1"/>
+          <p:nvPr/>
+        </p:nvSpPr>
+        <p:spPr>
+          <a:xfrm>
+            <a:off x="4087367" y="2779776"/>
+            <a:ext cx="1508760" cy="429768"/>
+          </a:xfrm>
+          <a:prstGeom prst="rect">
+            <a:avLst/>
+          </a:prstGeom>
+          <a:noFill/>
+        </p:spPr>
+        <p:txBody>
+          <a:bodyPr wrap="square" lIns="0" rIns="0" tIns="0" bIns="0" anchor="ctr">
+            <a:spAutoFit/>
+          </a:bodyPr>
+          <a:lstStyle/>
+          <a:p>
+            <a:pPr algn="l">
+              <a:lnSpc>
+                <a:spcPct val="115000"/>
+              </a:lnSpc>
+            </a:pPr>
+            <a:r>
+              <a:rPr sz="1100" b="0">
+                <a:solidFill>
+                  <a:srgbClr val="444444"/>
+                </a:solidFill>
+                <a:latin typeface="Microsoft JhengHei"/>
+              </a:rPr>
+              <a:t>壓中等（8-bit）</a:t>
+            </a:r>
+          </a:p>
+        </p:txBody>
+      </p:sp>
+      <p:sp>
+        <p:nvSpPr>
+          <p:cNvPr id="23" name="TextBox 22"/>
+          <p:cNvSpPr txBox="1"/>
+          <p:nvPr/>
+        </p:nvSpPr>
+        <p:spPr>
+          <a:xfrm>
+            <a:off x="5641848" y="2779776"/>
+            <a:ext cx="1691639" cy="429768"/>
+          </a:xfrm>
+          <a:prstGeom prst="rect">
+            <a:avLst/>
+          </a:prstGeom>
+          <a:noFill/>
+        </p:spPr>
+        <p:txBody>
+          <a:bodyPr wrap="square" lIns="0" rIns="0" tIns="0" bIns="0" anchor="ctr">
+            <a:spAutoFit/>
+          </a:bodyPr>
+          <a:lstStyle/>
+          <a:p>
+            <a:pPr algn="l">
+              <a:lnSpc>
+                <a:spcPct val="115000"/>
+              </a:lnSpc>
+            </a:pPr>
+            <a:r>
+              <a:rPr sz="1150" b="1">
+                <a:solidFill>
+                  <a:srgbClr val="008E76"/>
+                </a:solidFill>
+                <a:latin typeface="Arial"/>
+              </a:rPr>
+              <a:t>2.5s（快 40%）</a:t>
+            </a:r>
+          </a:p>
+        </p:txBody>
+      </p:sp>
+      <p:sp>
+        <p:nvSpPr>
+          <p:cNvPr id="24" name="TextBox 23"/>
+          <p:cNvSpPr txBox="1"/>
+          <p:nvPr/>
+        </p:nvSpPr>
+        <p:spPr>
+          <a:xfrm>
+            <a:off x="7379208" y="2779776"/>
+            <a:ext cx="1874520" cy="429768"/>
+          </a:xfrm>
+          <a:prstGeom prst="rect">
+            <a:avLst/>
+          </a:prstGeom>
+          <a:noFill/>
+        </p:spPr>
+        <p:txBody>
+          <a:bodyPr wrap="square" lIns="0" rIns="0" tIns="0" bIns="0" anchor="ctr">
+            <a:spAutoFit/>
+          </a:bodyPr>
+          <a:lstStyle/>
+          <a:p>
+            <a:pPr algn="l">
+              <a:lnSpc>
+                <a:spcPct val="115000"/>
+              </a:lnSpc>
+            </a:pPr>
+            <a:r>
+              <a:rPr sz="1150" b="0">
+                <a:solidFill>
+                  <a:srgbClr val="444444"/>
+                </a:solidFill>
+                <a:latin typeface="Microsoft JhengHei"/>
+              </a:rPr>
+              <a:t>端到端均 73.7%</a:t>
+            </a:r>
+          </a:p>
+        </p:txBody>
+      </p:sp>
+      <p:sp>
+        <p:nvSpPr>
+          <p:cNvPr id="25" name="TextBox 24"/>
+          <p:cNvSpPr txBox="1"/>
+          <p:nvPr/>
+        </p:nvSpPr>
+        <p:spPr>
+          <a:xfrm>
+            <a:off x="9299448" y="2779776"/>
+            <a:ext cx="2148840" cy="429768"/>
+          </a:xfrm>
+          <a:prstGeom prst="rect">
+            <a:avLst/>
+          </a:prstGeom>
+          <a:noFill/>
+        </p:spPr>
+        <p:txBody>
+          <a:bodyPr wrap="square" lIns="0" rIns="0" tIns="0" bIns="0" anchor="ctr">
+            <a:spAutoFit/>
+          </a:bodyPr>
+          <a:lstStyle/>
+          <a:p>
+            <a:pPr algn="l">
+              <a:lnSpc>
+                <a:spcPct val="115000"/>
+              </a:lnSpc>
+            </a:pPr>
+            <a:r>
+              <a:rPr sz="1150" b="1">
+                <a:solidFill>
+                  <a:srgbClr val="008E76"/>
+                </a:solidFill>
+                <a:latin typeface="Microsoft JhengHei"/>
+              </a:rPr>
+              <a:t>★ 挑戰者：速度大勝，補容錯中</a:t>
+            </a:r>
+          </a:p>
+        </p:txBody>
+      </p:sp>
+      <p:sp>
+        <p:nvSpPr>
+          <p:cNvPr id="26" name="Rectangle 25"/>
+          <p:cNvSpPr/>
+          <p:nvPr/>
+        </p:nvSpPr>
+        <p:spPr>
+          <a:xfrm>
+            <a:off x="667512" y="3246120"/>
+            <a:ext cx="10853928" cy="502920"/>
+          </a:xfrm>
+          <a:prstGeom prst="rect">
+            <a:avLst/>
+          </a:prstGeom>
+          <a:solidFill>
+            <a:srgbClr val="FFFFFF"/>
+          </a:solidFill>
+          <a:ln w="6350">
+            <a:solidFill>
+              <a:srgbClr val="E6E8EC"/>
+            </a:solidFill>
+          </a:ln>
+          <a:effectLst/>
+        </p:spPr>
+        <p:style>
+          <a:lnRef idx="1">
+            <a:schemeClr val="accent1"/>
+          </a:lnRef>
+          <a:fillRef idx="3">
+            <a:schemeClr val="accent1"/>
+          </a:fillRef>
+          <a:effectRef idx="2">
+            <a:schemeClr val="accent1"/>
+          </a:effectRef>
+          <a:fontRef idx="minor">
+            <a:schemeClr val="lt1"/>
+          </a:fontRef>
+        </p:style>
+        <p:txBody>
+          <a:bodyPr rtlCol="0" anchor="ctr"/>
+          <a:lstStyle/>
+          <a:p>
+            <a:pPr algn="ctr"/>
+          </a:p>
+        </p:txBody>
+      </p:sp>
+      <p:sp>
+        <p:nvSpPr>
+          <p:cNvPr id="27" name="TextBox 26"/>
+          <p:cNvSpPr txBox="1"/>
+          <p:nvPr/>
+        </p:nvSpPr>
+        <p:spPr>
+          <a:xfrm>
+            <a:off x="777240" y="3282696"/>
+            <a:ext cx="1874520" cy="429768"/>
+          </a:xfrm>
+          <a:prstGeom prst="rect">
+            <a:avLst/>
+          </a:prstGeom>
+          <a:noFill/>
+        </p:spPr>
+        <p:txBody>
+          <a:bodyPr wrap="square" lIns="0" rIns="0" tIns="0" bIns="0" anchor="ctr">
+            <a:spAutoFit/>
+          </a:bodyPr>
+          <a:lstStyle/>
+          <a:p>
+            <a:pPr algn="l">
+              <a:lnSpc>
+                <a:spcPct val="115000"/>
+              </a:lnSpc>
+            </a:pPr>
+            <a:r>
+              <a:rPr sz="1250" b="0">
+                <a:solidFill>
+                  <a:srgbClr val="1A1A2E"/>
+                </a:solidFill>
+                <a:latin typeface="Microsoft JhengHei"/>
+              </a:rPr>
+              <a:t>whisper small 全精度</a:t>
+            </a:r>
+          </a:p>
+        </p:txBody>
+      </p:sp>
+      <p:sp>
+        <p:nvSpPr>
+          <p:cNvPr id="28" name="TextBox 27"/>
+          <p:cNvSpPr txBox="1"/>
+          <p:nvPr/>
+        </p:nvSpPr>
+        <p:spPr>
+          <a:xfrm>
+            <a:off x="2898648" y="3282696"/>
+            <a:ext cx="1143000" cy="429768"/>
+          </a:xfrm>
+          <a:prstGeom prst="rect">
+            <a:avLst/>
+          </a:prstGeom>
+          <a:noFill/>
+        </p:spPr>
+        <p:txBody>
+          <a:bodyPr wrap="square" lIns="0" rIns="0" tIns="0" bIns="0" anchor="ctr">
+            <a:spAutoFit/>
+          </a:bodyPr>
+          <a:lstStyle/>
+          <a:p>
+            <a:pPr algn="l">
+              <a:lnSpc>
+                <a:spcPct val="115000"/>
+              </a:lnSpc>
+            </a:pPr>
+            <a:r>
+              <a:rPr sz="1200" b="0">
+                <a:solidFill>
+                  <a:srgbClr val="444444"/>
+                </a:solidFill>
+                <a:latin typeface="Arial"/>
+              </a:rPr>
+              <a:t>465 MB</a:t>
+            </a:r>
+          </a:p>
+        </p:txBody>
+      </p:sp>
+      <p:sp>
+        <p:nvSpPr>
+          <p:cNvPr id="29" name="TextBox 28"/>
+          <p:cNvSpPr txBox="1"/>
+          <p:nvPr/>
+        </p:nvSpPr>
+        <p:spPr>
+          <a:xfrm>
+            <a:off x="4087367" y="3282696"/>
+            <a:ext cx="1508760" cy="429768"/>
+          </a:xfrm>
+          <a:prstGeom prst="rect">
+            <a:avLst/>
+          </a:prstGeom>
+          <a:noFill/>
+        </p:spPr>
+        <p:txBody>
+          <a:bodyPr wrap="square" lIns="0" rIns="0" tIns="0" bIns="0" anchor="ctr">
+            <a:spAutoFit/>
+          </a:bodyPr>
+          <a:lstStyle/>
+          <a:p>
+            <a:pPr algn="l">
+              <a:lnSpc>
+                <a:spcPct val="115000"/>
+              </a:lnSpc>
+            </a:pPr>
+            <a:r>
+              <a:rPr sz="1100" b="0">
+                <a:solidFill>
+                  <a:srgbClr val="444444"/>
+                </a:solidFill>
+                <a:latin typeface="Microsoft JhengHei"/>
+              </a:rPr>
+              <a:t>不壓縮</a:t>
+            </a:r>
+          </a:p>
+        </p:txBody>
+      </p:sp>
+      <p:sp>
+        <p:nvSpPr>
+          <p:cNvPr id="30" name="TextBox 29"/>
+          <p:cNvSpPr txBox="1"/>
+          <p:nvPr/>
+        </p:nvSpPr>
+        <p:spPr>
+          <a:xfrm>
+            <a:off x="5641848" y="3282696"/>
+            <a:ext cx="1691639" cy="429768"/>
+          </a:xfrm>
+          <a:prstGeom prst="rect">
+            <a:avLst/>
+          </a:prstGeom>
+          <a:noFill/>
+        </p:spPr>
+        <p:txBody>
+          <a:bodyPr wrap="square" lIns="0" rIns="0" tIns="0" bIns="0" anchor="ctr">
+            <a:spAutoFit/>
+          </a:bodyPr>
+          <a:lstStyle/>
+          <a:p>
+            <a:pPr algn="l">
+              <a:lnSpc>
+                <a:spcPct val="115000"/>
+              </a:lnSpc>
+            </a:pPr>
+            <a:r>
+              <a:rPr sz="1150" b="0">
+                <a:solidFill>
+                  <a:srgbClr val="555555"/>
+                </a:solidFill>
+                <a:latin typeface="Arial"/>
+              </a:rPr>
+              <a:t>10 秒以上</a:t>
+            </a:r>
+          </a:p>
+        </p:txBody>
+      </p:sp>
+      <p:sp>
+        <p:nvSpPr>
+          <p:cNvPr id="31" name="TextBox 30"/>
+          <p:cNvSpPr txBox="1"/>
+          <p:nvPr/>
+        </p:nvSpPr>
+        <p:spPr>
+          <a:xfrm>
+            <a:off x="7379208" y="3282696"/>
+            <a:ext cx="1874520" cy="429768"/>
+          </a:xfrm>
+          <a:prstGeom prst="rect">
+            <a:avLst/>
+          </a:prstGeom>
+          <a:noFill/>
+        </p:spPr>
+        <p:txBody>
+          <a:bodyPr wrap="square" lIns="0" rIns="0" tIns="0" bIns="0" anchor="ctr">
+            <a:spAutoFit/>
+          </a:bodyPr>
+          <a:lstStyle/>
+          <a:p>
+            <a:pPr algn="l">
+              <a:lnSpc>
+                <a:spcPct val="115000"/>
+              </a:lnSpc>
+            </a:pPr>
+            <a:r>
+              <a:rPr sz="1150" b="0">
+                <a:solidFill>
+                  <a:srgbClr val="444444"/>
+                </a:solidFill>
+                <a:latin typeface="Microsoft JhengHei"/>
+              </a:rPr>
+              <a:t>—</a:t>
+            </a:r>
+          </a:p>
+        </p:txBody>
+      </p:sp>
+      <p:sp>
+        <p:nvSpPr>
+          <p:cNvPr id="32" name="TextBox 31"/>
+          <p:cNvSpPr txBox="1"/>
+          <p:nvPr/>
+        </p:nvSpPr>
+        <p:spPr>
+          <a:xfrm>
+            <a:off x="9299448" y="3282696"/>
+            <a:ext cx="2148840" cy="429768"/>
+          </a:xfrm>
+          <a:prstGeom prst="rect">
+            <a:avLst/>
+          </a:prstGeom>
+          <a:noFill/>
+        </p:spPr>
+        <p:txBody>
+          <a:bodyPr wrap="square" lIns="0" rIns="0" tIns="0" bIns="0" anchor="ctr">
+            <a:spAutoFit/>
+          </a:bodyPr>
+          <a:lstStyle/>
+          <a:p>
+            <a:pPr algn="l">
+              <a:lnSpc>
+                <a:spcPct val="115000"/>
+              </a:lnSpc>
+            </a:pPr>
+            <a:r>
+              <a:rPr sz="1150" b="0">
+                <a:solidFill>
+                  <a:srgbClr val="555555"/>
+                </a:solidFill>
+                <a:latin typeface="Microsoft JhengHei"/>
+              </a:rPr>
+              <a:t>× 慢一倍以上 ⇒ 壓縮是必要的</a:t>
+            </a:r>
+          </a:p>
+        </p:txBody>
+      </p:sp>
+      <p:sp>
+        <p:nvSpPr>
+          <p:cNvPr id="33" name="Rectangle 32"/>
+          <p:cNvSpPr/>
+          <p:nvPr/>
+        </p:nvSpPr>
+        <p:spPr>
+          <a:xfrm>
+            <a:off x="667512" y="3749040"/>
+            <a:ext cx="10853928" cy="502920"/>
           </a:xfrm>
           <a:prstGeom prst="rect">
             <a:avLst/>
@@ -24461,14 +25086,14 @@
       </p:sp>
       <p:sp>
         <p:nvSpPr>
-          <p:cNvPr id="20" name="TextBox 19"/>
-          <p:cNvSpPr txBox="1"/>
-          <p:nvPr/>
-        </p:nvSpPr>
-        <p:spPr>
-          <a:xfrm>
-            <a:off x="777240" y="2953512"/>
-            <a:ext cx="1874520" cy="438912"/>
+          <p:cNvPr id="34" name="TextBox 33"/>
+          <p:cNvSpPr txBox="1"/>
+          <p:nvPr/>
+        </p:nvSpPr>
+        <p:spPr>
+          <a:xfrm>
+            <a:off x="777240" y="3785616"/>
+            <a:ext cx="1874520" cy="429768"/>
           </a:xfrm>
           <a:prstGeom prst="rect">
             <a:avLst/>
@@ -24500,14 +25125,14 @@
       </p:sp>
       <p:sp>
         <p:nvSpPr>
-          <p:cNvPr id="21" name="TextBox 20"/>
-          <p:cNvSpPr txBox="1"/>
-          <p:nvPr/>
-        </p:nvSpPr>
-        <p:spPr>
-          <a:xfrm>
-            <a:off x="2898648" y="2953512"/>
-            <a:ext cx="1143000" cy="438912"/>
+          <p:cNvPr id="35" name="TextBox 34"/>
+          <p:cNvSpPr txBox="1"/>
+          <p:nvPr/>
+        </p:nvSpPr>
+        <p:spPr>
+          <a:xfrm>
+            <a:off x="2898648" y="3785616"/>
+            <a:ext cx="1143000" cy="429768"/>
           </a:xfrm>
           <a:prstGeom prst="rect">
             <a:avLst/>
@@ -24539,14 +25164,14 @@
       </p:sp>
       <p:sp>
         <p:nvSpPr>
-          <p:cNvPr id="22" name="TextBox 21"/>
-          <p:cNvSpPr txBox="1"/>
-          <p:nvPr/>
-        </p:nvSpPr>
-        <p:spPr>
-          <a:xfrm>
-            <a:off x="4087367" y="2953512"/>
-            <a:ext cx="1508760" cy="438912"/>
+          <p:cNvPr id="36" name="TextBox 35"/>
+          <p:cNvSpPr txBox="1"/>
+          <p:nvPr/>
+        </p:nvSpPr>
+        <p:spPr>
+          <a:xfrm>
+            <a:off x="4087367" y="3785616"/>
+            <a:ext cx="1508760" cy="429768"/>
           </a:xfrm>
           <a:prstGeom prst="rect">
             <a:avLst/>
@@ -24578,14 +25203,14 @@
       </p:sp>
       <p:sp>
         <p:nvSpPr>
-          <p:cNvPr id="23" name="TextBox 22"/>
-          <p:cNvSpPr txBox="1"/>
-          <p:nvPr/>
-        </p:nvSpPr>
-        <p:spPr>
-          <a:xfrm>
-            <a:off x="5641848" y="2953512"/>
-            <a:ext cx="1691639" cy="438912"/>
+          <p:cNvPr id="37" name="TextBox 36"/>
+          <p:cNvSpPr txBox="1"/>
+          <p:nvPr/>
+        </p:nvSpPr>
+        <p:spPr>
+          <a:xfrm>
+            <a:off x="5641848" y="3785616"/>
+            <a:ext cx="1691639" cy="429768"/>
           </a:xfrm>
           <a:prstGeom prst="rect">
             <a:avLst/>
@@ -24617,14 +25242,14 @@
       </p:sp>
       <p:sp>
         <p:nvSpPr>
-          <p:cNvPr id="24" name="TextBox 23"/>
-          <p:cNvSpPr txBox="1"/>
-          <p:nvPr/>
-        </p:nvSpPr>
-        <p:spPr>
-          <a:xfrm>
-            <a:off x="7379208" y="2953512"/>
-            <a:ext cx="1874520" cy="438912"/>
+          <p:cNvPr id="38" name="TextBox 37"/>
+          <p:cNvSpPr txBox="1"/>
+          <p:nvPr/>
+        </p:nvSpPr>
+        <p:spPr>
+          <a:xfrm>
+            <a:off x="7379208" y="3785616"/>
+            <a:ext cx="1874520" cy="429768"/>
           </a:xfrm>
           <a:prstGeom prst="rect">
             <a:avLst/>
@@ -24656,14 +25281,14 @@
       </p:sp>
       <p:sp>
         <p:nvSpPr>
-          <p:cNvPr id="25" name="TextBox 24"/>
-          <p:cNvSpPr txBox="1"/>
-          <p:nvPr/>
-        </p:nvSpPr>
-        <p:spPr>
-          <a:xfrm>
-            <a:off x="9299448" y="2953512"/>
-            <a:ext cx="2148840" cy="438912"/>
+          <p:cNvPr id="39" name="TextBox 38"/>
+          <p:cNvSpPr txBox="1"/>
+          <p:nvPr/>
+        </p:nvSpPr>
+        <p:spPr>
+          <a:xfrm>
+            <a:off x="9299448" y="3785616"/>
+            <a:ext cx="2148840" cy="429768"/>
           </a:xfrm>
           <a:prstGeom prst="rect">
             <a:avLst/>
@@ -24695,14 +25320,14 @@
       </p:sp>
       <p:sp>
         <p:nvSpPr>
-          <p:cNvPr id="26" name="Rectangle 25"/>
+          <p:cNvPr id="40" name="Rectangle 39"/>
           <p:cNvSpPr/>
           <p:nvPr/>
         </p:nvSpPr>
         <p:spPr>
           <a:xfrm>
-            <a:off x="667512" y="3483864"/>
-            <a:ext cx="10853928" cy="621792"/>
+            <a:off x="667512" y="4251960"/>
+            <a:ext cx="10853928" cy="502920"/>
           </a:xfrm>
           <a:prstGeom prst="rect">
             <a:avLst/>
@@ -24741,14 +25366,14 @@
       </p:sp>
       <p:sp>
         <p:nvSpPr>
-          <p:cNvPr id="27" name="TextBox 26"/>
-          <p:cNvSpPr txBox="1"/>
-          <p:nvPr/>
-        </p:nvSpPr>
-        <p:spPr>
-          <a:xfrm>
-            <a:off x="777240" y="3575304"/>
-            <a:ext cx="1874520" cy="438912"/>
+          <p:cNvPr id="41" name="TextBox 40"/>
+          <p:cNvSpPr txBox="1"/>
+          <p:nvPr/>
+        </p:nvSpPr>
+        <p:spPr>
+          <a:xfrm>
+            <a:off x="777240" y="4288536"/>
+            <a:ext cx="1874520" cy="429768"/>
           </a:xfrm>
           <a:prstGeom prst="rect">
             <a:avLst/>
@@ -24780,14 +25405,14 @@
       </p:sp>
       <p:sp>
         <p:nvSpPr>
-          <p:cNvPr id="28" name="TextBox 27"/>
-          <p:cNvSpPr txBox="1"/>
-          <p:nvPr/>
-        </p:nvSpPr>
-        <p:spPr>
-          <a:xfrm>
-            <a:off x="2898648" y="3575304"/>
-            <a:ext cx="1143000" cy="438912"/>
+          <p:cNvPr id="42" name="TextBox 41"/>
+          <p:cNvSpPr txBox="1"/>
+          <p:nvPr/>
+        </p:nvSpPr>
+        <p:spPr>
+          <a:xfrm>
+            <a:off x="2898648" y="4288536"/>
+            <a:ext cx="1143000" cy="429768"/>
           </a:xfrm>
           <a:prstGeom prst="rect">
             <a:avLst/>
@@ -24819,14 +25444,14 @@
       </p:sp>
       <p:sp>
         <p:nvSpPr>
-          <p:cNvPr id="29" name="TextBox 28"/>
-          <p:cNvSpPr txBox="1"/>
-          <p:nvPr/>
-        </p:nvSpPr>
-        <p:spPr>
-          <a:xfrm>
-            <a:off x="4087367" y="3575304"/>
-            <a:ext cx="1508760" cy="438912"/>
+          <p:cNvPr id="43" name="TextBox 42"/>
+          <p:cNvSpPr txBox="1"/>
+          <p:nvPr/>
+        </p:nvSpPr>
+        <p:spPr>
+          <a:xfrm>
+            <a:off x="4087367" y="4288536"/>
+            <a:ext cx="1508760" cy="429768"/>
           </a:xfrm>
           <a:prstGeom prst="rect">
             <a:avLst/>
@@ -24858,14 +25483,14 @@
       </p:sp>
       <p:sp>
         <p:nvSpPr>
-          <p:cNvPr id="30" name="TextBox 29"/>
-          <p:cNvSpPr txBox="1"/>
-          <p:nvPr/>
-        </p:nvSpPr>
-        <p:spPr>
-          <a:xfrm>
-            <a:off x="5641848" y="3575304"/>
-            <a:ext cx="1691639" cy="438912"/>
+          <p:cNvPr id="44" name="TextBox 43"/>
+          <p:cNvSpPr txBox="1"/>
+          <p:nvPr/>
+        </p:nvSpPr>
+        <p:spPr>
+          <a:xfrm>
+            <a:off x="5641848" y="4288536"/>
+            <a:ext cx="1691639" cy="429768"/>
           </a:xfrm>
           <a:prstGeom prst="rect">
             <a:avLst/>
@@ -24897,14 +25522,14 @@
       </p:sp>
       <p:sp>
         <p:nvSpPr>
-          <p:cNvPr id="31" name="TextBox 30"/>
-          <p:cNvSpPr txBox="1"/>
-          <p:nvPr/>
-        </p:nvSpPr>
-        <p:spPr>
-          <a:xfrm>
-            <a:off x="7379208" y="3575304"/>
-            <a:ext cx="1874520" cy="438912"/>
+          <p:cNvPr id="45" name="TextBox 44"/>
+          <p:cNvSpPr txBox="1"/>
+          <p:nvPr/>
+        </p:nvSpPr>
+        <p:spPr>
+          <a:xfrm>
+            <a:off x="7379208" y="4288536"/>
+            <a:ext cx="1874520" cy="429768"/>
           </a:xfrm>
           <a:prstGeom prst="rect">
             <a:avLst/>
@@ -24936,14 +25561,14 @@
       </p:sp>
       <p:sp>
         <p:nvSpPr>
-          <p:cNvPr id="32" name="TextBox 31"/>
-          <p:cNvSpPr txBox="1"/>
-          <p:nvPr/>
-        </p:nvSpPr>
-        <p:spPr>
-          <a:xfrm>
-            <a:off x="9299448" y="3575304"/>
-            <a:ext cx="2148840" cy="438912"/>
+          <p:cNvPr id="46" name="TextBox 45"/>
+          <p:cNvSpPr txBox="1"/>
+          <p:nvPr/>
+        </p:nvSpPr>
+        <p:spPr>
+          <a:xfrm>
+            <a:off x="9299448" y="4288536"/>
+            <a:ext cx="2148840" cy="429768"/>
           </a:xfrm>
           <a:prstGeom prst="rect">
             <a:avLst/>
@@ -24975,14 +25600,14 @@
       </p:sp>
       <p:sp>
         <p:nvSpPr>
-          <p:cNvPr id="33" name="Rectangle 32"/>
+          <p:cNvPr id="47" name="Rectangle 46"/>
           <p:cNvSpPr/>
           <p:nvPr/>
         </p:nvSpPr>
         <p:spPr>
           <a:xfrm>
-            <a:off x="667512" y="4105656"/>
-            <a:ext cx="10853928" cy="621792"/>
+            <a:off x="667512" y="4754880"/>
+            <a:ext cx="10853928" cy="502920"/>
           </a:xfrm>
           <a:prstGeom prst="rect">
             <a:avLst/>
@@ -25021,14 +25646,14 @@
       </p:sp>
       <p:sp>
         <p:nvSpPr>
-          <p:cNvPr id="34" name="TextBox 33"/>
-          <p:cNvSpPr txBox="1"/>
-          <p:nvPr/>
-        </p:nvSpPr>
-        <p:spPr>
-          <a:xfrm>
-            <a:off x="777240" y="4197096"/>
-            <a:ext cx="1874520" cy="438912"/>
+          <p:cNvPr id="48" name="TextBox 47"/>
+          <p:cNvSpPr txBox="1"/>
+          <p:nvPr/>
+        </p:nvSpPr>
+        <p:spPr>
+          <a:xfrm>
+            <a:off x="777240" y="4791456"/>
+            <a:ext cx="1874520" cy="429768"/>
           </a:xfrm>
           <a:prstGeom prst="rect">
             <a:avLst/>
@@ -25053,21 +25678,21 @@
                 </a:solidFill>
                 <a:latin typeface="Microsoft JhengHei"/>
               </a:rPr>
-              <a:t>whisper base.en</a:t>
-            </a:r>
-          </a:p>
-        </p:txBody>
-      </p:sp>
-      <p:sp>
-        <p:nvSpPr>
-          <p:cNvPr id="35" name="TextBox 34"/>
-          <p:cNvSpPr txBox="1"/>
-          <p:nvPr/>
-        </p:nvSpPr>
-        <p:spPr>
-          <a:xfrm>
-            <a:off x="2898648" y="4197096"/>
-            <a:ext cx="1143000" cy="438912"/>
+              <a:t>Fun-ASR-Nano（原用）</a:t>
+            </a:r>
+          </a:p>
+        </p:txBody>
+      </p:sp>
+      <p:sp>
+        <p:nvSpPr>
+          <p:cNvPr id="49" name="TextBox 48"/>
+          <p:cNvSpPr txBox="1"/>
+          <p:nvPr/>
+        </p:nvSpPr>
+        <p:spPr>
+          <a:xfrm>
+            <a:off x="2898648" y="4791456"/>
+            <a:ext cx="1143000" cy="429768"/>
           </a:xfrm>
           <a:prstGeom prst="rect">
             <a:avLst/>
@@ -25092,21 +25717,21 @@
                 </a:solidFill>
                 <a:latin typeface="Arial"/>
               </a:rPr>
-              <a:t>141 MB</a:t>
-            </a:r>
-          </a:p>
-        </p:txBody>
-      </p:sp>
-      <p:sp>
-        <p:nvSpPr>
-          <p:cNvPr id="36" name="TextBox 35"/>
-          <p:cNvSpPr txBox="1"/>
-          <p:nvPr/>
-        </p:nvSpPr>
-        <p:spPr>
-          <a:xfrm>
-            <a:off x="4087367" y="4197096"/>
-            <a:ext cx="1508760" cy="438912"/>
+              <a:t>~800M</a:t>
+            </a:r>
+          </a:p>
+        </p:txBody>
+      </p:sp>
+      <p:sp>
+        <p:nvSpPr>
+          <p:cNvPr id="50" name="TextBox 49"/>
+          <p:cNvSpPr txBox="1"/>
+          <p:nvPr/>
+        </p:nvSpPr>
+        <p:spPr>
+          <a:xfrm>
+            <a:off x="4087367" y="4791456"/>
+            <a:ext cx="1508760" cy="429768"/>
           </a:xfrm>
           <a:prstGeom prst="rect">
             <a:avLst/>
@@ -25131,21 +25756,21 @@
                 </a:solidFill>
                 <a:latin typeface="Microsoft JhengHei"/>
               </a:rPr>
-              <a:t>英文專用</a:t>
-            </a:r>
-          </a:p>
-        </p:txBody>
-      </p:sp>
-      <p:sp>
-        <p:nvSpPr>
-          <p:cNvPr id="37" name="TextBox 36"/>
-          <p:cNvSpPr txBox="1"/>
-          <p:nvPr/>
-        </p:nvSpPr>
-        <p:spPr>
-          <a:xfrm>
-            <a:off x="5641848" y="4197096"/>
-            <a:ext cx="1691639" cy="438912"/>
+              <a:t>中文強</a:t>
+            </a:r>
+          </a:p>
+        </p:txBody>
+      </p:sp>
+      <p:sp>
+        <p:nvSpPr>
+          <p:cNvPr id="51" name="TextBox 50"/>
+          <p:cNvSpPr txBox="1"/>
+          <p:nvPr/>
+        </p:nvSpPr>
+        <p:spPr>
+          <a:xfrm>
+            <a:off x="5641848" y="4791456"/>
+            <a:ext cx="1691639" cy="429768"/>
           </a:xfrm>
           <a:prstGeom prst="rect">
             <a:avLst/>
@@ -25170,21 +25795,21 @@
                 </a:solidFill>
                 <a:latin typeface="Arial"/>
               </a:rPr>
-              <a:t>2.33s</a:t>
-            </a:r>
-          </a:p>
-        </p:txBody>
-      </p:sp>
-      <p:sp>
-        <p:nvSpPr>
-          <p:cNvPr id="38" name="TextBox 37"/>
-          <p:cNvSpPr txBox="1"/>
-          <p:nvPr/>
-        </p:nvSpPr>
-        <p:spPr>
-          <a:xfrm>
-            <a:off x="7379208" y="4197096"/>
-            <a:ext cx="1874520" cy="438912"/>
+              <a:t>2.5s</a:t>
+            </a:r>
+          </a:p>
+        </p:txBody>
+      </p:sp>
+      <p:sp>
+        <p:nvSpPr>
+          <p:cNvPr id="52" name="TextBox 51"/>
+          <p:cNvSpPr txBox="1"/>
+          <p:nvPr/>
+        </p:nvSpPr>
+        <p:spPr>
+          <a:xfrm>
+            <a:off x="7379208" y="4791456"/>
+            <a:ext cx="1874520" cy="429768"/>
           </a:xfrm>
           <a:prstGeom prst="rect">
             <a:avLst/>
@@ -25209,21 +25834,21 @@
                 </a:solidFill>
                 <a:latin typeface="Microsoft JhengHei"/>
               </a:rPr>
-              <a:t>WER 10.2%</a:t>
-            </a:r>
-          </a:p>
-        </p:txBody>
-      </p:sp>
-      <p:sp>
-        <p:nvSpPr>
-          <p:cNvPr id="39" name="TextBox 38"/>
-          <p:cNvSpPr txBox="1"/>
-          <p:nvPr/>
-        </p:nvSpPr>
-        <p:spPr>
-          <a:xfrm>
-            <a:off x="9299448" y="4197096"/>
-            <a:ext cx="2148840" cy="438912"/>
+              <a:t>真人 4/8</a:t>
+            </a:r>
+          </a:p>
+        </p:txBody>
+      </p:sp>
+      <p:sp>
+        <p:nvSpPr>
+          <p:cNvPr id="53" name="TextBox 52"/>
+          <p:cNvSpPr txBox="1"/>
+          <p:nvPr/>
+        </p:nvSpPr>
+        <p:spPr>
+          <a:xfrm>
+            <a:off x="9299448" y="4791456"/>
+            <a:ext cx="2148840" cy="429768"/>
           </a:xfrm>
           <a:prstGeom prst="rect">
             <a:avLst/>
@@ -25248,286 +25873,6 @@
                 </a:solidFill>
                 <a:latin typeface="Microsoft JhengHei"/>
               </a:rPr>
-              <a:t>比 tiny.en 慢又沒更準</a:t>
-            </a:r>
-          </a:p>
-        </p:txBody>
-      </p:sp>
-      <p:sp>
-        <p:nvSpPr>
-          <p:cNvPr id="40" name="Rectangle 39"/>
-          <p:cNvSpPr/>
-          <p:nvPr/>
-        </p:nvSpPr>
-        <p:spPr>
-          <a:xfrm>
-            <a:off x="667512" y="4727448"/>
-            <a:ext cx="10853928" cy="621792"/>
-          </a:xfrm>
-          <a:prstGeom prst="rect">
-            <a:avLst/>
-          </a:prstGeom>
-          <a:solidFill>
-            <a:srgbClr val="FFFFFF"/>
-          </a:solidFill>
-          <a:ln w="6350">
-            <a:solidFill>
-              <a:srgbClr val="E6E8EC"/>
-            </a:solidFill>
-          </a:ln>
-          <a:effectLst/>
-        </p:spPr>
-        <p:style>
-          <a:lnRef idx="1">
-            <a:schemeClr val="accent1"/>
-          </a:lnRef>
-          <a:fillRef idx="3">
-            <a:schemeClr val="accent1"/>
-          </a:fillRef>
-          <a:effectRef idx="2">
-            <a:schemeClr val="accent1"/>
-          </a:effectRef>
-          <a:fontRef idx="minor">
-            <a:schemeClr val="lt1"/>
-          </a:fontRef>
-        </p:style>
-        <p:txBody>
-          <a:bodyPr rtlCol="0" anchor="ctr"/>
-          <a:lstStyle/>
-          <a:p>
-            <a:pPr algn="ctr"/>
-          </a:p>
-        </p:txBody>
-      </p:sp>
-      <p:sp>
-        <p:nvSpPr>
-          <p:cNvPr id="41" name="TextBox 40"/>
-          <p:cNvSpPr txBox="1"/>
-          <p:nvPr/>
-        </p:nvSpPr>
-        <p:spPr>
-          <a:xfrm>
-            <a:off x="777240" y="4818888"/>
-            <a:ext cx="1874520" cy="438912"/>
-          </a:xfrm>
-          <a:prstGeom prst="rect">
-            <a:avLst/>
-          </a:prstGeom>
-          <a:noFill/>
-        </p:spPr>
-        <p:txBody>
-          <a:bodyPr wrap="square" lIns="0" rIns="0" tIns="0" bIns="0" anchor="ctr">
-            <a:spAutoFit/>
-          </a:bodyPr>
-          <a:lstStyle/>
-          <a:p>
-            <a:pPr algn="l">
-              <a:lnSpc>
-                <a:spcPct val="115000"/>
-              </a:lnSpc>
-            </a:pPr>
-            <a:r>
-              <a:rPr sz="1250" b="0">
-                <a:solidFill>
-                  <a:srgbClr val="1A1A2E"/>
-                </a:solidFill>
-                <a:latin typeface="Microsoft JhengHei"/>
-              </a:rPr>
-              <a:t>Fun-ASR-Nano（原用）</a:t>
-            </a:r>
-          </a:p>
-        </p:txBody>
-      </p:sp>
-      <p:sp>
-        <p:nvSpPr>
-          <p:cNvPr id="42" name="TextBox 41"/>
-          <p:cNvSpPr txBox="1"/>
-          <p:nvPr/>
-        </p:nvSpPr>
-        <p:spPr>
-          <a:xfrm>
-            <a:off x="2898648" y="4818888"/>
-            <a:ext cx="1143000" cy="438912"/>
-          </a:xfrm>
-          <a:prstGeom prst="rect">
-            <a:avLst/>
-          </a:prstGeom>
-          <a:noFill/>
-        </p:spPr>
-        <p:txBody>
-          <a:bodyPr wrap="square" lIns="0" rIns="0" tIns="0" bIns="0" anchor="ctr">
-            <a:spAutoFit/>
-          </a:bodyPr>
-          <a:lstStyle/>
-          <a:p>
-            <a:pPr algn="l">
-              <a:lnSpc>
-                <a:spcPct val="115000"/>
-              </a:lnSpc>
-            </a:pPr>
-            <a:r>
-              <a:rPr sz="1200" b="0">
-                <a:solidFill>
-                  <a:srgbClr val="444444"/>
-                </a:solidFill>
-                <a:latin typeface="Arial"/>
-              </a:rPr>
-              <a:t>~800M</a:t>
-            </a:r>
-          </a:p>
-        </p:txBody>
-      </p:sp>
-      <p:sp>
-        <p:nvSpPr>
-          <p:cNvPr id="43" name="TextBox 42"/>
-          <p:cNvSpPr txBox="1"/>
-          <p:nvPr/>
-        </p:nvSpPr>
-        <p:spPr>
-          <a:xfrm>
-            <a:off x="4087367" y="4818888"/>
-            <a:ext cx="1508760" cy="438912"/>
-          </a:xfrm>
-          <a:prstGeom prst="rect">
-            <a:avLst/>
-          </a:prstGeom>
-          <a:noFill/>
-        </p:spPr>
-        <p:txBody>
-          <a:bodyPr wrap="square" lIns="0" rIns="0" tIns="0" bIns="0" anchor="ctr">
-            <a:spAutoFit/>
-          </a:bodyPr>
-          <a:lstStyle/>
-          <a:p>
-            <a:pPr algn="l">
-              <a:lnSpc>
-                <a:spcPct val="115000"/>
-              </a:lnSpc>
-            </a:pPr>
-            <a:r>
-              <a:rPr sz="1100" b="0">
-                <a:solidFill>
-                  <a:srgbClr val="444444"/>
-                </a:solidFill>
-                <a:latin typeface="Microsoft JhengHei"/>
-              </a:rPr>
-              <a:t>中文強</a:t>
-            </a:r>
-          </a:p>
-        </p:txBody>
-      </p:sp>
-      <p:sp>
-        <p:nvSpPr>
-          <p:cNvPr id="44" name="TextBox 43"/>
-          <p:cNvSpPr txBox="1"/>
-          <p:nvPr/>
-        </p:nvSpPr>
-        <p:spPr>
-          <a:xfrm>
-            <a:off x="5641848" y="4818888"/>
-            <a:ext cx="1691639" cy="438912"/>
-          </a:xfrm>
-          <a:prstGeom prst="rect">
-            <a:avLst/>
-          </a:prstGeom>
-          <a:noFill/>
-        </p:spPr>
-        <p:txBody>
-          <a:bodyPr wrap="square" lIns="0" rIns="0" tIns="0" bIns="0" anchor="ctr">
-            <a:spAutoFit/>
-          </a:bodyPr>
-          <a:lstStyle/>
-          <a:p>
-            <a:pPr algn="l">
-              <a:lnSpc>
-                <a:spcPct val="115000"/>
-              </a:lnSpc>
-            </a:pPr>
-            <a:r>
-              <a:rPr sz="1150" b="0">
-                <a:solidFill>
-                  <a:srgbClr val="555555"/>
-                </a:solidFill>
-                <a:latin typeface="Arial"/>
-              </a:rPr>
-              <a:t>2.5s</a:t>
-            </a:r>
-          </a:p>
-        </p:txBody>
-      </p:sp>
-      <p:sp>
-        <p:nvSpPr>
-          <p:cNvPr id="45" name="TextBox 44"/>
-          <p:cNvSpPr txBox="1"/>
-          <p:nvPr/>
-        </p:nvSpPr>
-        <p:spPr>
-          <a:xfrm>
-            <a:off x="7379208" y="4818888"/>
-            <a:ext cx="1874520" cy="438912"/>
-          </a:xfrm>
-          <a:prstGeom prst="rect">
-            <a:avLst/>
-          </a:prstGeom>
-          <a:noFill/>
-        </p:spPr>
-        <p:txBody>
-          <a:bodyPr wrap="square" lIns="0" rIns="0" tIns="0" bIns="0" anchor="ctr">
-            <a:spAutoFit/>
-          </a:bodyPr>
-          <a:lstStyle/>
-          <a:p>
-            <a:pPr algn="l">
-              <a:lnSpc>
-                <a:spcPct val="115000"/>
-              </a:lnSpc>
-            </a:pPr>
-            <a:r>
-              <a:rPr sz="1150" b="0">
-                <a:solidFill>
-                  <a:srgbClr val="444444"/>
-                </a:solidFill>
-                <a:latin typeface="Microsoft JhengHei"/>
-              </a:rPr>
-              <a:t>真人 4/8</a:t>
-            </a:r>
-          </a:p>
-        </p:txBody>
-      </p:sp>
-      <p:sp>
-        <p:nvSpPr>
-          <p:cNvPr id="46" name="TextBox 45"/>
-          <p:cNvSpPr txBox="1"/>
-          <p:nvPr/>
-        </p:nvSpPr>
-        <p:spPr>
-          <a:xfrm>
-            <a:off x="9299448" y="4818888"/>
-            <a:ext cx="2148840" cy="438912"/>
-          </a:xfrm>
-          <a:prstGeom prst="rect">
-            <a:avLst/>
-          </a:prstGeom>
-          <a:noFill/>
-        </p:spPr>
-        <p:txBody>
-          <a:bodyPr wrap="square" lIns="0" rIns="0" tIns="0" bIns="0" anchor="ctr">
-            <a:spAutoFit/>
-          </a:bodyPr>
-          <a:lstStyle/>
-          <a:p>
-            <a:pPr algn="l">
-              <a:lnSpc>
-                <a:spcPct val="115000"/>
-              </a:lnSpc>
-            </a:pPr>
-            <a:r>
-              <a:rPr sz="1150" b="0">
-                <a:solidFill>
-                  <a:srgbClr val="555555"/>
-                </a:solidFill>
-                <a:latin typeface="Microsoft JhengHei"/>
-              </a:rPr>
               <a:t>× 來源不符，已汰換</a:t>
             </a:r>
           </a:p>
@@ -25535,7 +25880,7 @@
       </p:sp>
       <p:sp>
         <p:nvSpPr>
-          <p:cNvPr id="47" name="Rounded Rectangle 46"/>
+          <p:cNvPr id="54" name="Rounded Rectangle 53"/>
           <p:cNvSpPr/>
           <p:nvPr/>
         </p:nvSpPr>
@@ -25581,7 +25926,7 @@
       </p:sp>
       <p:sp>
         <p:nvSpPr>
-          <p:cNvPr id="48" name="TextBox 47"/>
+          <p:cNvPr id="55" name="TextBox 54"/>
           <p:cNvSpPr txBox="1"/>
           <p:nvPr/>
         </p:nvSpPr>
@@ -25613,7 +25958,7 @@
                 </a:solidFill>
                 <a:latin typeface="Microsoft JhengHei"/>
               </a:rPr>
-              <a:t>反直覺  </a:t>
+              <a:t>反直覺 ①  </a:t>
             </a:r>
             <a:r>
               <a:rPr sz="1300" b="1">
@@ -25622,7 +25967,7 @@
                 </a:solidFill>
                 <a:latin typeface="Microsoft JhengHei"/>
               </a:rPr>
-              <a:t>模型越大不一定越準：base.en 比 tiny.en 大、慢 2.5 倍，WER 反而略差</a:t>
+              <a:t>壓得更小的 q5 竟然「比較慢」</a:t>
             </a:r>
             <a:r>
               <a:rPr sz="1200" b="0">
@@ -25631,14 +25976,14 @@
                 </a:solidFill>
                 <a:latin typeface="Microsoft JhengHei"/>
               </a:rPr>
-              <a:t>——倉管查詢句短、句型固定，tiny 容量已足夠。</a:t>
-            </a:r>
-          </a:p>
-        </p:txBody>
-      </p:sp>
-      <p:sp>
-        <p:nvSpPr>
-          <p:cNvPr id="49" name="TextBox 48"/>
+              <a:t>——一般以為位元數越少越快，但壓縮過頭時，每算一次都要先「解壓縮」還原成模型看得懂的數字；q8 壓得剛好、算起來最順。</a:t>
+            </a:r>
+          </a:p>
+        </p:txBody>
+      </p:sp>
+      <p:sp>
+        <p:nvSpPr>
+          <p:cNvPr id="56" name="TextBox 55"/>
           <p:cNvSpPr txBox="1"/>
           <p:nvPr/>
         </p:nvSpPr>
@@ -25670,16 +26015,16 @@
                 </a:solidFill>
                 <a:latin typeface="Microsoft JhengHei"/>
               </a:rPr>
-              <a:t>演進 8月  </a:t>
-            </a:r>
-            <a:r>
-              <a:rPr sz="1200" b="1">
+              <a:t>反直覺 ②  </a:t>
+            </a:r>
+            <a:r>
+              <a:rPr sz="1250" b="1">
                 <a:solidFill>
                   <a:srgbClr val="FFFFFF"/>
                 </a:solidFill>
                 <a:latin typeface="Microsoft JhengHei"/>
               </a:rPr>
-              <a:t>真人 100 句把 8 句測不出的差距逼出來</a:t>
+              <a:t>但慢的那顆答對率反而高</a:t>
             </a:r>
             <a:r>
               <a:rPr sz="1200" b="0">
@@ -25688,14 +26033,14 @@
                 </a:solidFill>
                 <a:latin typeface="Microsoft JhengHei"/>
               </a:rPr>
-              <a:t>——base 端到端 36/100、small 47/100（同無修正層）；掛回容錯層 66/100。慢 1.4s 買 +30 分，中英自此同一顆模型檔。</a:t>
-            </a:r>
-          </a:p>
-        </p:txBody>
-      </p:sp>
-      <p:sp>
-        <p:nvSpPr>
-          <p:cNvPr id="50" name="TextBox 49"/>
+              <a:t>——q8 聽對的「整句」比較多，錯的卻常落在商品名；q5 錯得零碎、容錯層修得動 ⇒ 端到端 76.7% vs 73.7%。**現正實驗：補 q8 專用容錯規則，能否拿到「又快又準」**。</a:t>
+            </a:r>
+          </a:p>
+        </p:txBody>
+      </p:sp>
+      <p:sp>
+        <p:nvSpPr>
+          <p:cNvPr id="57" name="TextBox 56"/>
           <p:cNvSpPr txBox="1"/>
           <p:nvPr/>
         </p:nvSpPr>
@@ -39226,7 +39571,7 @@
                 </a:solidFill>
                 <a:latin typeface="Microsoft JhengHei"/>
               </a:rPr>
-              <a:t>合成音 92%，真人 55%——這個落差才是真相</a:t>
+              <a:t>合成音 92%，真人首測 55%——合成音會嚴重高估（下頁為補滿 100 句的現況）</a:t>
             </a:r>
           </a:p>
         </p:txBody>
@@ -40619,7 +40964,7 @@
                 </a:solidFill>
                 <a:latin typeface="Microsoft JhengHei"/>
               </a:rPr>
-              <a:t>錄滿 100 句 + 修 13 個破口，展場噪音下 84%</a:t>
+              <a:t>錄滿 100 句 · 展場噪音下 78%（2026-08-06 全量重測）</a:t>
             </a:r>
           </a:p>
         </p:txBody>
@@ -40782,7 +41127,7 @@
                 </a:solidFill>
                 <a:latin typeface="Arial"/>
               </a:rPr>
-              <a:t>87%</a:t>
+              <a:t>81%</a:t>
             </a:r>
           </a:p>
         </p:txBody>
@@ -40945,7 +41290,7 @@
                 </a:solidFill>
                 <a:latin typeface="Arial"/>
               </a:rPr>
-              <a:t>84%</a:t>
+              <a:t>78%</a:t>
             </a:r>
           </a:p>
         </p:txBody>
@@ -41108,7 +41453,7 @@
                 </a:solidFill>
                 <a:latin typeface="Arial"/>
               </a:rPr>
-              <a:t>76%</a:t>
+              <a:t>71%</a:t>
             </a:r>
           </a:p>
         </p:txBody>
@@ -41186,7 +41531,7 @@
                 </a:solidFill>
                 <a:latin typeface="Microsoft JhengHei"/>
               </a:rPr>
-              <a:t>噪音只讓通過率掉 3 個百分點（87 → 84）</a:t>
+              <a:t>展場一般噪音只讓通過率掉 3 個百分點（81 → 78）；純模型辨識僅 32%，容錯層補上 46 個百分點</a:t>
             </a:r>
           </a:p>
         </p:txBody>
@@ -41200,7 +41545,7 @@
         <p:spPr>
           <a:xfrm>
             <a:off x="667512" y="3675887"/>
-            <a:ext cx="10789920" cy="566928"/>
+            <a:ext cx="10789920" cy="475488"/>
           </a:xfrm>
           <a:prstGeom prst="roundRect">
             <a:avLst>
@@ -41247,8 +41592,8 @@
         </p:nvSpPr>
         <p:spPr>
           <a:xfrm>
-            <a:off x="923544" y="3739895"/>
-            <a:ext cx="3200400" cy="310896"/>
+            <a:off x="923544" y="3712463"/>
+            <a:ext cx="3200400" cy="274320"/>
           </a:xfrm>
           <a:prstGeom prst="rect">
             <a:avLst/>
@@ -41286,8 +41631,8 @@
         </p:nvSpPr>
         <p:spPr>
           <a:xfrm>
-            <a:off x="4279392" y="3739895"/>
-            <a:ext cx="6949440" cy="420624"/>
+            <a:off x="4279392" y="3712463"/>
+            <a:ext cx="6949440" cy="402336"/>
           </a:xfrm>
           <a:prstGeom prst="rect">
             <a:avLst/>
@@ -41325,8 +41670,8 @@
         </p:nvSpPr>
         <p:spPr>
           <a:xfrm>
-            <a:off x="667512" y="4334255"/>
-            <a:ext cx="10789920" cy="566928"/>
+            <a:off x="667512" y="4201667"/>
+            <a:ext cx="10789920" cy="475488"/>
           </a:xfrm>
           <a:prstGeom prst="roundRect">
             <a:avLst>
@@ -41373,8 +41718,8 @@
         </p:nvSpPr>
         <p:spPr>
           <a:xfrm>
-            <a:off x="923544" y="4398263"/>
-            <a:ext cx="3200400" cy="310896"/>
+            <a:off x="923544" y="4238243"/>
+            <a:ext cx="3200400" cy="274320"/>
           </a:xfrm>
           <a:prstGeom prst="rect">
             <a:avLst/>
@@ -41412,8 +41757,8 @@
         </p:nvSpPr>
         <p:spPr>
           <a:xfrm>
-            <a:off x="4279392" y="4398263"/>
-            <a:ext cx="6949440" cy="420624"/>
+            <a:off x="4279392" y="4238243"/>
+            <a:ext cx="6949440" cy="402336"/>
           </a:xfrm>
           <a:prstGeom prst="rect">
             <a:avLst/>
@@ -41451,8 +41796,8 @@
         </p:nvSpPr>
         <p:spPr>
           <a:xfrm>
-            <a:off x="667512" y="4992623"/>
-            <a:ext cx="10789920" cy="566928"/>
+            <a:off x="667512" y="4727447"/>
+            <a:ext cx="10789920" cy="475488"/>
           </a:xfrm>
           <a:prstGeom prst="roundRect">
             <a:avLst>
@@ -41499,8 +41844,8 @@
         </p:nvSpPr>
         <p:spPr>
           <a:xfrm>
-            <a:off x="923544" y="5056631"/>
-            <a:ext cx="3200400" cy="310896"/>
+            <a:off x="923544" y="4764023"/>
+            <a:ext cx="3200400" cy="274320"/>
           </a:xfrm>
           <a:prstGeom prst="rect">
             <a:avLst/>
@@ -41538,8 +41883,8 @@
         </p:nvSpPr>
         <p:spPr>
           <a:xfrm>
-            <a:off x="4279392" y="5056631"/>
-            <a:ext cx="6949440" cy="420624"/>
+            <a:off x="4279392" y="4764023"/>
+            <a:ext cx="6949440" cy="402336"/>
           </a:xfrm>
           <a:prstGeom prst="rect">
             <a:avLst/>
@@ -41577,8 +41922,8 @@
         </p:nvSpPr>
         <p:spPr>
           <a:xfrm>
-            <a:off x="667512" y="5650991"/>
-            <a:ext cx="10789920" cy="566928"/>
+            <a:off x="667512" y="5253227"/>
+            <a:ext cx="10789920" cy="475488"/>
           </a:xfrm>
           <a:prstGeom prst="roundRect">
             <a:avLst>
@@ -41625,8 +41970,8 @@
         </p:nvSpPr>
         <p:spPr>
           <a:xfrm>
-            <a:off x="923544" y="5714999"/>
-            <a:ext cx="3200400" cy="310896"/>
+            <a:off x="923544" y="5289803"/>
+            <a:ext cx="3200400" cy="274320"/>
           </a:xfrm>
           <a:prstGeom prst="rect">
             <a:avLst/>
@@ -41664,8 +42009,8 @@
         </p:nvSpPr>
         <p:spPr>
           <a:xfrm>
-            <a:off x="4279392" y="5714999"/>
-            <a:ext cx="6949440" cy="420624"/>
+            <a:off x="4279392" y="5289803"/>
+            <a:ext cx="6949440" cy="402336"/>
           </a:xfrm>
           <a:prstGeom prst="rect">
             <a:avLst/>
@@ -41697,7 +42042,133 @@
       </p:sp>
       <p:sp>
         <p:nvSpPr>
-          <p:cNvPr id="30" name="Rectangle 29"/>
+          <p:cNvPr id="30" name="Rounded Rectangle 29"/>
+          <p:cNvSpPr/>
+          <p:nvPr/>
+        </p:nvSpPr>
+        <p:spPr>
+          <a:xfrm>
+            <a:off x="667512" y="5779007"/>
+            <a:ext cx="10789920" cy="475488"/>
+          </a:xfrm>
+          <a:prstGeom prst="roundRect">
+            <a:avLst>
+              <a:gd name="adj" fmla="val 8000"/>
+            </a:avLst>
+          </a:prstGeom>
+          <a:solidFill>
+            <a:srgbClr val="FFFFFF"/>
+          </a:solidFill>
+          <a:ln w="9525">
+            <a:solidFill>
+              <a:srgbClr val="E6E8EC"/>
+            </a:solidFill>
+          </a:ln>
+          <a:effectLst/>
+        </p:spPr>
+        <p:style>
+          <a:lnRef idx="1">
+            <a:schemeClr val="accent1"/>
+          </a:lnRef>
+          <a:fillRef idx="3">
+            <a:schemeClr val="accent1"/>
+          </a:fillRef>
+          <a:effectRef idx="2">
+            <a:schemeClr val="accent1"/>
+          </a:effectRef>
+          <a:fontRef idx="minor">
+            <a:schemeClr val="lt1"/>
+          </a:fontRef>
+        </p:style>
+        <p:txBody>
+          <a:bodyPr rtlCol="0" anchor="ctr"/>
+          <a:lstStyle/>
+          <a:p>
+            <a:pPr algn="ctr"/>
+          </a:p>
+        </p:txBody>
+      </p:sp>
+      <p:sp>
+        <p:nvSpPr>
+          <p:cNvPr id="31" name="TextBox 30"/>
+          <p:cNvSpPr txBox="1"/>
+          <p:nvPr/>
+        </p:nvSpPr>
+        <p:spPr>
+          <a:xfrm>
+            <a:off x="923544" y="5815583"/>
+            <a:ext cx="3200400" cy="274320"/>
+          </a:xfrm>
+          <a:prstGeom prst="rect">
+            <a:avLst/>
+          </a:prstGeom>
+          <a:noFill/>
+        </p:spPr>
+        <p:txBody>
+          <a:bodyPr wrap="square" lIns="0" rIns="0" tIns="0" bIns="0" anchor="t">
+            <a:spAutoFit/>
+          </a:bodyPr>
+          <a:lstStyle/>
+          <a:p>
+            <a:pPr algn="l">
+              <a:lnSpc>
+                <a:spcPct val="115000"/>
+              </a:lnSpc>
+            </a:pPr>
+            <a:r>
+              <a:rPr sz="1200" b="1">
+                <a:solidFill>
+                  <a:srgbClr val="1A1A2E"/>
+                </a:solidFill>
+                <a:latin typeface="Microsoft JhengHei"/>
+              </a:rPr>
+              <a:t>2026-08-06 全量重測（本頁數字）</a:t>
+            </a:r>
+          </a:p>
+        </p:txBody>
+      </p:sp>
+      <p:sp>
+        <p:nvSpPr>
+          <p:cNvPr id="32" name="TextBox 31"/>
+          <p:cNvSpPr txBox="1"/>
+          <p:nvPr/>
+        </p:nvSpPr>
+        <p:spPr>
+          <a:xfrm>
+            <a:off x="4279392" y="5815583"/>
+            <a:ext cx="6949440" cy="402336"/>
+          </a:xfrm>
+          <a:prstGeom prst="rect">
+            <a:avLst/>
+          </a:prstGeom>
+          <a:noFill/>
+        </p:spPr>
+        <p:txBody>
+          <a:bodyPr wrap="square" lIns="0" rIns="0" tIns="0" bIns="0" anchor="t">
+            <a:spAutoFit/>
+          </a:bodyPr>
+          <a:lstStyle/>
+          <a:p>
+            <a:pPr algn="l">
+              <a:lnSpc>
+                <a:spcPct val="112000"/>
+              </a:lnSpc>
+            </a:pPr>
+            <a:r>
+              <a:rPr sz="1100" b="0">
+                <a:solidFill>
+                  <a:srgbClr val="555555"/>
+                </a:solidFill>
+                <a:latin typeface="Microsoft JhengHei"/>
+              </a:rPr>
+              <a:t>同批錄音重跑三層噪音，不做任何人工複判 → 81 / 78 / 71%；另測 q8_0 候選（快 40%）端到端平均低 3 分，維持現役 q5_0</a:t>
+            </a:r>
+          </a:p>
+        </p:txBody>
+      </p:sp>
+      <p:sp>
+        <p:nvSpPr>
+          <p:cNvPr id="33" name="Rectangle 32"/>
           <p:cNvSpPr/>
           <p:nvPr/>
         </p:nvSpPr>
@@ -41741,7 +42212,7 @@
       </p:sp>
       <p:sp>
         <p:nvSpPr>
-          <p:cNvPr id="31" name="TextBox 30"/>
+          <p:cNvPr id="34" name="TextBox 33"/>
           <p:cNvSpPr txBox="1"/>
           <p:nvPr/>
         </p:nvSpPr>
@@ -41789,7 +42260,7 @@
       </p:sp>
       <p:sp>
         <p:nvSpPr>
-          <p:cNvPr id="32" name="TextBox 31"/>
+          <p:cNvPr id="35" name="TextBox 34"/>
           <p:cNvSpPr txBox="1"/>
           <p:nvPr/>
         </p:nvSpPr>

--- a/倉管Agent_專案簡報.pptx
+++ b/倉管Agent_專案簡報.pptx
@@ -1989,7 +1989,7 @@
               <a:rPr sz="1200">
                 <a:latin typeface="Microsoft JhengHei"/>
               </a:rPr>
-              <a:t>【2026-08-06 改版：講「二選一」的故事，不是講已定案】</a:t>
+              <a:t>【2026-08-06 定案：q8_0 —— 實測打敗直覺】</a:t>
             </a:r>
           </a:p>
           <a:p>
@@ -1997,7 +1997,7 @@
               <a:rPr sz="1200">
                 <a:latin typeface="Microsoft JhengHei"/>
               </a:rPr>
-              <a:t>★ 講法：候選已經收斂到只剩兩個——**同一顆模型的兩種壓縮程度**。</a:t>
+              <a:t>① 直覺一：位元越少應該越快 → 錯。壓最小的 q5（167MB）要 4.2 秒，壓中等的 q8（252MB）只要 2.5 秒。白話：壓縮像真空收納，壓太扁每次取用都得先還原，拆封的功夫比省下的搬運還多。（機轉無定論，依實測選型。）</a:t>
             </a:r>
           </a:p>
           <a:p>
@@ -2005,7 +2005,7 @@
               <a:rPr sz="1200">
                 <a:latin typeface="Microsoft JhengHei"/>
               </a:rPr>
-              <a:t>① 先講直覺：一般都認為壓越小（q5，167MB）應該越快，所以本來預期選 q8 的人會覺得奇怪，為什麼上線的是 q5？</a:t>
+              <a:t>② 直覺二：模型聽得越準、系統就答得越對 → 也錯。首輪 q8「整句聽對」較多，端到端卻輸 3 分。追下去發現關鍵是**錯在哪裡**：q8 常錯在商品名（steam iron→stain iron）那是查詢命脈；q5 錯在語助詞，無傷大雅。</a:t>
             </a:r>
           </a:p>
           <a:p>
@@ -2013,7 +2013,7 @@
               <a:rPr sz="1200">
                 <a:latin typeface="Microsoft JhengHei"/>
               </a:rPr>
-              <a:t>② 反直覺一（速度）：實測**壓最小的反而最慢**（4.2s vs 2.5s）。白話解釋——壓縮就像把東西真空收納，取用前得先「還原」；壓得太扁，每次拆封的功夫反而比省下的搬運時間還多。q8 壓得剛好，拆封快、搬運也不重，總時間最短。</a:t>
+              <a:t>③ 於是針對 q8 的聽錯型態補 11 條容錯規則（每條都先撞守衛 892 句、商品主檔、以及 q5 現有正解確認零誤傷），端到端 73.7% → 78.0%，反超 q5 的 77.3%，且保有快 40% 優勢 ⇒ 定案 q8_0。訪客體感 5.9 秒 → 4.2 秒。</a:t>
             </a:r>
           </a:p>
           <a:p>
@@ -2021,31 +2021,7 @@
               <a:rPr sz="1200">
                 <a:latin typeface="Microsoft JhengHei"/>
               </a:rPr>
-              <a:t>   （誠實補充：確切機轉我們沒有定論，這是依實測結果選型，不是理論推導。）</a:t>
-            </a:r>
-          </a:p>
-          <a:p>
-            <a:r>
-              <a:rPr sz="1200">
-                <a:latin typeface="Microsoft JhengHei"/>
-              </a:rPr>
-              <a:t>③ 反直覺二（準度）：慢的那顆 q5 端到端反而較準（76.7% vs 73.7%）。原因在**錯的位置不同**——q8 常錯在商品名（steam iron 聽成 stain iron），那是查詢的命脈；q5 錯得零碎（stock 聽成 stuck），關鍵字還在，容錯層修得動。</a:t>
-            </a:r>
-          </a:p>
-          <a:p>
-            <a:r>
-              <a:rPr sz="1200">
-                <a:latin typeface="Microsoft JhengHei"/>
-              </a:rPr>
-              <a:t>④ 現在進行式：既然 q8 只輸在「特定幾種固定聽錯」，我們正在幫它補專用容錯規則。若能補到追平，就能同時拿到快 40% 與同等準度——那才是最佳解。</a:t>
-            </a:r>
-          </a:p>
-          <a:p>
-            <a:r>
-              <a:rPr sz="1200">
-                <a:latin typeface="Microsoft JhengHei"/>
-              </a:rPr>
-              <a:t>⑤ 若老闆問何時定案：判準已訂——三層噪音端到端平均不低於現行、且最吵那層不落後 2 分以上，就切換；否則維持 q5。展前一週內定案，不會拖到展場。</a:t>
+              <a:t>④ 若問「為何不早點選 q8」：因為未調校時它是輸的（73.7%）——先量出弱點型態、再補規則才變最佳解，這正是測試方法論的價值。</a:t>
             </a:r>
           </a:p>
           <a:p/>
@@ -22986,7 +22962,7 @@
                 </a:solidFill>
                 <a:latin typeface="Microsoft JhengHei"/>
               </a:rPr>
-              <a:t>OpenAI whisper，RPi5 CPU 純離線辨識（中英同顆 small-q5_0，~3.5s/句）</a:t>
+              <a:t>OpenAI whisper，RPi5 CPU 純離線辨識（中英同顆 small-q8_0，2.5s/句）</a:t>
             </a:r>
           </a:p>
         </p:txBody>
@@ -23874,7 +23850,7 @@
                 </a:solidFill>
                 <a:latin typeface="Microsoft JhengHei"/>
               </a:rPr>
-              <a:t>已鎖定 small 的兩種壓縮版本：q5_0 與 q8_0，正在二選一</a:t>
+              <a:t>壓縮程度怎麼選：實測打敗直覺</a:t>
             </a:r>
           </a:p>
         </p:txBody>
@@ -23913,7 +23889,7 @@
                 </a:solidFill>
                 <a:latin typeface="Microsoft JhengHei"/>
               </a:rPr>
-              <a:t>選型鐵律：① 供應鏈來源可控（歐美模型）② RPi5 CPU 純離線跑 ③ 中英共用同一套 whisper.cpp runtime。候選已收斂到 small 的兩個壓縮版本——差別只在「壓多小」，其餘完全相同。</a:t>
+              <a:t>選型鐵律：① 供應鏈來源可控（歐美模型）② RPi5 CPU 純離線跑 ③ 中英共用同一套 whisper.cpp runtime。同一顆 small 模型有三種壓縮程度可選，實測結果推翻了兩個直覺。</a:t>
             </a:r>
           </a:p>
         </p:txBody>
@@ -24278,7 +24254,7 @@
                 </a:solidFill>
                 <a:latin typeface="Microsoft JhengHei"/>
               </a:rPr>
-              <a:t>whisper small-q5_0</a:t>
+              <a:t>whisper small-q8_0</a:t>
             </a:r>
           </a:p>
         </p:txBody>
@@ -24317,7 +24293,7 @@
                 </a:solidFill>
                 <a:latin typeface="Arial"/>
               </a:rPr>
-              <a:t>167 MB</a:t>
+              <a:t>252 MB</a:t>
             </a:r>
           </a:p>
         </p:txBody>
@@ -24356,7 +24332,7 @@
                 </a:solidFill>
                 <a:latin typeface="Microsoft JhengHei"/>
               </a:rPr>
-              <a:t>壓最小（5-bit）</a:t>
+              <a:t>壓中等（8-bit）</a:t>
             </a:r>
           </a:p>
         </p:txBody>
@@ -24395,7 +24371,7 @@
                 </a:solidFill>
                 <a:latin typeface="Arial"/>
               </a:rPr>
-              <a:t>4.2s</a:t>
+              <a:t>2.5s</a:t>
             </a:r>
           </a:p>
         </p:txBody>
@@ -24434,7 +24410,7 @@
                 </a:solidFill>
                 <a:latin typeface="Microsoft JhengHei"/>
               </a:rPr>
-              <a:t>端到端均 76.7%</a:t>
+              <a:t>端到端均 78.0%</a:t>
             </a:r>
           </a:p>
         </p:txBody>
@@ -24473,7 +24449,7 @@
                 </a:solidFill>
                 <a:latin typeface="Microsoft JhengHei"/>
               </a:rPr>
-              <a:t>★ 目前上線中：準度領先</a:t>
+              <a:t>★ 定案採用：又快又準</a:t>
             </a:r>
           </a:p>
         </p:txBody>
@@ -24493,7 +24469,7 @@
             <a:avLst/>
           </a:prstGeom>
           <a:solidFill>
-            <a:srgbClr val="E4F7F2"/>
+            <a:srgbClr val="F4F6F8"/>
           </a:solidFill>
           <a:ln w="6350">
             <a:solidFill>
@@ -24552,13 +24528,13 @@
               </a:lnSpc>
             </a:pPr>
             <a:r>
-              <a:rPr sz="1250" b="1">
-                <a:solidFill>
-                  <a:srgbClr val="008E76"/>
-                </a:solidFill>
-                <a:latin typeface="Microsoft JhengHei"/>
-              </a:rPr>
-              <a:t>whisper small-q8_0</a:t>
+              <a:rPr sz="1250" b="0">
+                <a:solidFill>
+                  <a:srgbClr val="1A1A2E"/>
+                </a:solidFill>
+                <a:latin typeface="Microsoft JhengHei"/>
+              </a:rPr>
+              <a:t>whisper small-q5_0</a:t>
             </a:r>
           </a:p>
         </p:txBody>
@@ -24591,13 +24567,13 @@
               </a:lnSpc>
             </a:pPr>
             <a:r>
-              <a:rPr sz="1200" b="1">
+              <a:rPr sz="1200" b="0">
                 <a:solidFill>
                   <a:srgbClr val="444444"/>
                 </a:solidFill>
                 <a:latin typeface="Arial"/>
               </a:rPr>
-              <a:t>252 MB</a:t>
+              <a:t>167 MB</a:t>
             </a:r>
           </a:p>
         </p:txBody>
@@ -24636,7 +24612,7 @@
                 </a:solidFill>
                 <a:latin typeface="Microsoft JhengHei"/>
               </a:rPr>
-              <a:t>壓中等（8-bit）</a:t>
+              <a:t>壓最小（5-bit）</a:t>
             </a:r>
           </a:p>
         </p:txBody>
@@ -24669,13 +24645,13 @@
               </a:lnSpc>
             </a:pPr>
             <a:r>
-              <a:rPr sz="1150" b="1">
-                <a:solidFill>
-                  <a:srgbClr val="008E76"/>
+              <a:rPr sz="1150" b="0">
+                <a:solidFill>
+                  <a:srgbClr val="555555"/>
                 </a:solidFill>
                 <a:latin typeface="Arial"/>
               </a:rPr>
-              <a:t>2.5s（快 40%）</a:t>
+              <a:t>4.2s</a:t>
             </a:r>
           </a:p>
         </p:txBody>
@@ -24714,7 +24690,7 @@
                 </a:solidFill>
                 <a:latin typeface="Microsoft JhengHei"/>
               </a:rPr>
-              <a:t>端到端均 73.7%</a:t>
+              <a:t>端到端均 77.3%</a:t>
             </a:r>
           </a:p>
         </p:txBody>
@@ -24747,13 +24723,13 @@
               </a:lnSpc>
             </a:pPr>
             <a:r>
-              <a:rPr sz="1150" b="1">
-                <a:solidFill>
-                  <a:srgbClr val="008E76"/>
-                </a:solidFill>
-                <a:latin typeface="Microsoft JhengHei"/>
-              </a:rPr>
-              <a:t>★ 挑戰者：速度大勝，補容錯中</a:t>
+              <a:rPr sz="1150" b="0">
+                <a:solidFill>
+                  <a:srgbClr val="555555"/>
+                </a:solidFill>
+                <a:latin typeface="Microsoft JhengHei"/>
+              </a:rPr>
+              <a:t>壓更小反而慢 40%、準度也略低</a:t>
             </a:r>
           </a:p>
         </p:txBody>
@@ -25967,7 +25943,7 @@
                 </a:solidFill>
                 <a:latin typeface="Microsoft JhengHei"/>
               </a:rPr>
-              <a:t>壓得更小的 q5 竟然「比較慢」</a:t>
+              <a:t>壓得更小，反而更慢</a:t>
             </a:r>
             <a:r>
               <a:rPr sz="1200" b="0">
@@ -25976,7 +25952,7 @@
                 </a:solidFill>
                 <a:latin typeface="Microsoft JhengHei"/>
               </a:rPr>
-              <a:t>——一般以為位元數越少越快，但壓縮過頭時，每算一次都要先「解壓縮」還原成模型看得懂的數字；q8 壓得剛好、算起來最順。</a:t>
+              <a:t>——一般以為位元數越少越快。但壓縮就像真空收納：壓得太扁，每次取用都得先「還原」，拆封的功夫比省下的搬運還多。q8 壓得剛好，總時間最短（2.5s vs 4.2s）。</a:t>
             </a:r>
           </a:p>
         </p:txBody>
@@ -26024,7 +26000,7 @@
                 </a:solidFill>
                 <a:latin typeface="Microsoft JhengHei"/>
               </a:rPr>
-              <a:t>但慢的那顆答對率反而高</a:t>
+              <a:t>模型聽得準 ≠ 系統答得對</a:t>
             </a:r>
             <a:r>
               <a:rPr sz="1200" b="0">
@@ -26033,7 +26009,7 @@
                 </a:solidFill>
                 <a:latin typeface="Microsoft JhengHei"/>
               </a:rPr>
-              <a:t>——q8 聽對的「整句」比較多，錯的卻常落在商品名；q5 錯得零碎、容錯層修得動 ⇒ 端到端 76.7% vs 73.7%。**現正實驗：補 q8 專用容錯規則，能否拿到「又快又準」**。</a:t>
+              <a:t>——關鍵不是錯多少字，而是**錯在哪裡**：錯在商品名就查不到，錯在語助詞則無傷。針對聽錯型態補容錯規則後，q8 端到端 73.7% → 78.0%，同時拿下速度與準度。</a:t>
             </a:r>
           </a:p>
         </p:txBody>
@@ -26738,7 +26714,7 @@
                 </a:solidFill>
                 <a:latin typeface="Arial"/>
               </a:rPr>
-              <a:t>175 MB · 中英共用一顆</a:t>
+              <a:t>252 MB · 中英共用一顆</a:t>
             </a:r>
           </a:p>
         </p:txBody>
@@ -26777,7 +26753,7 @@
                 </a:solidFill>
                 <a:latin typeface="Arial"/>
               </a:rPr>
-              <a:t>ggml-small-q5_0.bin</a:t>
+              <a:t>ggml-small-q8_0.bin</a:t>
             </a:r>
           </a:p>
         </p:txBody>
@@ -27562,7 +27538,7 @@
                 </a:solidFill>
                 <a:latin typeface="Microsoft JhengHei"/>
               </a:rPr>
-              <a:t>small-q5_0 中英共用</a:t>
+              <a:t>small-q8_0 中英共用</a:t>
             </a:r>
           </a:p>
         </p:txBody>
@@ -40964,7 +40940,7 @@
                 </a:solidFill>
                 <a:latin typeface="Microsoft JhengHei"/>
               </a:rPr>
-              <a:t>錄滿 100 句 · 展場噪音下 78%（2026-08-06 全量重測）</a:t>
+              <a:t>錄滿 100 句 · 展場噪音下 82%（2026-08-06 全量重測 · q8_0）</a:t>
             </a:r>
           </a:p>
         </p:txBody>
@@ -41127,7 +41103,7 @@
                 </a:solidFill>
                 <a:latin typeface="Arial"/>
               </a:rPr>
-              <a:t>81%</a:t>
+              <a:t>80%</a:t>
             </a:r>
           </a:p>
         </p:txBody>
@@ -41290,7 +41266,7 @@
                 </a:solidFill>
                 <a:latin typeface="Arial"/>
               </a:rPr>
-              <a:t>78%</a:t>
+              <a:t>82%</a:t>
             </a:r>
           </a:p>
         </p:txBody>
@@ -41453,7 +41429,7 @@
                 </a:solidFill>
                 <a:latin typeface="Arial"/>
               </a:rPr>
-              <a:t>71%</a:t>
+              <a:t>72%</a:t>
             </a:r>
           </a:p>
         </p:txBody>
@@ -41531,7 +41507,7 @@
                 </a:solidFill>
                 <a:latin typeface="Microsoft JhengHei"/>
               </a:rPr>
-              <a:t>展場一般噪音只讓通過率掉 3 個百分點（81 → 78）；純模型辨識僅 32%，容錯層補上 46 個百分點</a:t>
+              <a:t>展場一般噪音下 82%——比安靜環境還高；純模型辨識僅 38%，容錯層補上 44 個百分點</a:t>
             </a:r>
           </a:p>
         </p:txBody>
@@ -42161,7 +42137,7 @@
                 </a:solidFill>
                 <a:latin typeface="Microsoft JhengHei"/>
               </a:rPr>
-              <a:t>同批錄音重跑三層噪音，不做任何人工複判 → 81 / 78 / 71%；另測 q8_0 候選（快 40%）端到端平均低 3 分，維持現役 q5_0</a:t>
+              <a:t>同批錄音重跑三層噪音、不做任何人工複判：q8_0 得 80 / 82 / 72%（均 78.0%），勝過 q5_0 的 81 / 79 / 72%（均 77.3%）且快 40% ⇒ 定案改用 q8_0</a:t>
             </a:r>
           </a:p>
         </p:txBody>
@@ -48746,7 +48722,7 @@
                 </a:solidFill>
                 <a:latin typeface="Microsoft JhengHei"/>
               </a:rPr>
-              <a:t>全離線 whisper；中英統一 small-q5_0（~3.5s/句）、同一套 runtime</a:t>
+              <a:t>全離線 whisper；中英統一 small-q8_0（2.5s/句）、同一套 runtime</a:t>
             </a:r>
           </a:p>
         </p:txBody>

--- a/倉管Agent_專案簡報.pptx
+++ b/倉管Agent_專案簡報.pptx
@@ -237,7 +237,7 @@
                   <c:v>978</c:v>
                 </c:pt>
                 <c:pt idx="4">
-                  <c:v>1122</c:v>
+                  <c:v>1149</c:v>
                 </c:pt>
               </c:numCache>
             </c:numRef>
@@ -1543,7 +1543,7 @@
               <a:rPr sz="1200">
                 <a:latin typeface="Microsoft JhengHei"/>
               </a:rPr>
-              <a:t>誠實揭露：近期修復尚未全數納入守衛語料（回歸庫停在 7/20 的 1122 句），下週要補課，否則新修的功能沒有防退步保護。</a:t>
+              <a:t>守衛庫補課：ZH 1122→1149、EN 892→938（7/20、7/25 後停止成長的缺口已補），下週要補課，否則新修的功能沒有防退步保護。</a:t>
             </a:r>
           </a:p>
           <a:p>
@@ -2581,7 +2581,7 @@
               <a:rPr sz="1200">
                 <a:latin typeface="Microsoft JhengHei"/>
               </a:rPr>
-              <a:t>★這頁回答一個很自然的質疑：「你們測了 11 輪、守衛 892 句全綠，怎麼還有破口？」答案是——**不是輪數不夠，是輸入源不夠多樣**。前面 11 輪的句子全是同一個作者（我）打字造的，作者的盲點會系統性重複，再跑 20 輪同樣方式也抓不到。所以換了兩個產生源：①**TTS 唸出來、whisper 聽回去**——產物型態跟打字完全不同（撇號縮寫、黏字、聽錯詞）；②**刻意寫「我自己不會寫的句型」**——換作者視角，展場訪客會客氣地問（could you tell me…）而不是打命令式（earphone stock）。TTS 基準批跑 100 句 × 3 噪音層共 300 次辨識，用的是真實賣場環境音混入：乾淨 92%、一般展場 92%、尖峰吵雜 91%——**噪音幾乎不影響**，whisper 對環境音的韌性比預期好。抓到的破口裡最值得講的是撇號那個：ASR **完全聽對**、LLM 也**完全判對**（keyword=mouse、warehouse=central 都抽對了），卻被防幻覺閘門把`what's` 當成「庫裡沒有的商品修飾詞」，於是清掉正確的 keyword，回了全店概覽。根因是閘門剝標點時只剝頭尾，撇號在字中間剝不掉。**這類破口打字訪客也會遇到**——撇號、禮貌用語、what about 追問都是，只是先前造句時沒想到。真正語音專屬的只有黏字（sunheadstock）和聽錯詞（mops→mobs）那兩類，那兩句實測**沒有可用訊號**能區分正確與誤配（mobs 最像的是 mouse 不是 mop），硬修會更糟，誠實留給補訓語料。</a:t>
+              <a:t>★這頁回答一個很自然的質疑：「測了 11 輪、守衛全綠，怎麼還有破口？」答案是——**不是輪數不夠，是輸入源不夠多樣**。前面 11 輪的句子全是同一個作者（我）打字造的，作者的盲點會系統性重複，再跑 20 輪同樣方式也抓不到。所以換了兩個產生源：①**TTS 唸出來、whisper 聽回去**——產物型態跟打字完全不同（撇號縮寫、黏字、聽錯詞）；②**刻意寫「我自己不會寫的句型」**——換作者視角，展場訪客會客氣地問（could you tell me…）而不是打命令式（earphone stock）。TTS 基準批跑 100 句 × 3 噪音層共 300 次辨識，用的是真實賣場環境音混入：乾淨 92%、一般展場 92%、尖峰吵雜 91%——**噪音幾乎不影響**，whisper 對環境音的韌性比預期好。抓到的破口裡最值得講的是撇號那個：ASR **完全聽對**、LLM 也**完全判對**（keyword=mouse、warehouse=central 都抽對了），卻被防幻覺閘門把`what's` 當成「庫裡沒有的商品修飾詞」，於是清掉正確的 keyword，回了全店概覽。根因是閘門剝標點時只剝頭尾，撇號在字中間剝不掉。**這類破口打字訪客也會遇到**——撇號、禮貌用語、what about 追問都是，只是先前造句時沒想到。真正語音專屬的只有黏字（sunheadstock）和聽錯詞（mops→mobs）那兩類，那兩句實測**沒有可用訊號**能區分正確與誤配（mobs 最像的是 mouse 不是 mop），硬修會更糟，誠實留給補訓語料。</a:t>
             </a:r>
           </a:p>
         </p:txBody>
@@ -3092,7 +3092,7 @@
               <a:rPr sz="1200">
                 <a:latin typeface="Microsoft JhengHei"/>
               </a:rPr>
-              <a:t>★雙機交付頁（2026-08-05 認證完成）。第二台從重建到可交客戶的完整故事：全量守衛1122+892 與 parity 跟主機同級全綠；耐力賽三輪（並發串線 26/26×6、長對話、劇情批）零異常零降頻；散熱裝好後待機 42°C、壓測 65.9°C。重建過程實際踩出 9 類缺口（字型/輸入法/DHCP/桌面圖示鏈/crontab/瀏覽器政策等），全部固化成還原手冊 §15『一次還原到底』——缺口清單＋照抄指令＋9 項驗收清單，這份手冊跟程式碼一起進版控。對客戶的意義：交付的不是一台調好的機器，是一套可重複、可驗收的交付流程。</a:t>
+              <a:t>★雙機交付頁（2026-08-05 認證完成）。第二台從重建到可交客戶的完整故事：全量守衛1149+938 與 parity 跟主機同級全綠；耐力賽三輪（並發串線 26/26×6、長對話、劇情批）零異常零降頻；散熱裝好後待機 42°C、壓測 65.9°C。重建過程實際踩出 9 類缺口（字型/輸入法/DHCP/桌面圖示鏈/crontab/瀏覽器政策等），全部固化成還原手冊 §15『一次還原到底』——缺口清單＋照抄指令＋9 項驗收清單，這份手冊跟程式碼一起進版控。對客戶的意義：交付的不是一台調好的機器，是一套可重複、可驗收的交付流程。</a:t>
             </a:r>
           </a:p>
         </p:txBody>
@@ -10596,7 +10596,7 @@
                 </a:solidFill>
                 <a:latin typeface="Arial"/>
               </a:rPr>
-              <a:t>1122 句</a:t>
+              <a:t>1149 句</a:t>
             </a:r>
           </a:p>
         </p:txBody>
@@ -13885,7 +13885,7 @@
                 </a:solidFill>
                 <a:latin typeface="Microsoft JhengHei"/>
               </a:rPr>
-              <a:t>100+ 輪迭代，守衛庫從 138 句長到 1122 句</a:t>
+              <a:t>100+ 輪迭代，守衛庫從 138 句長到 1149 句</a:t>
             </a:r>
           </a:p>
         </p:txBody>
@@ -14224,7 +14224,7 @@
                 </a:solidFill>
                 <a:latin typeface="Microsoft JhengHei"/>
               </a:rPr>
-              <a:t>每修一個 bug 就存一句守衛 → 1122 句形成防護網，任何改動只要跑回歸就知道有沒有踩壞舊功能</a:t>
+              <a:t>每修一個 bug 就存一句守衛 → 1149 句形成防護網，任何改動只要跑回歸就知道有沒有踩壞舊功能</a:t>
             </a:r>
           </a:p>
         </p:txBody>
@@ -15698,7 +15698,7 @@
                 </a:solidFill>
                 <a:latin typeface="Microsoft JhengHei"/>
               </a:rPr>
-              <a:t>中 1122＋英 892 句</a:t>
+              <a:t>中 1149＋英 938 句</a:t>
             </a:r>
           </a:p>
           <a:p>
@@ -20848,7 +20848,7 @@
                 </a:solidFill>
                 <a:latin typeface="Microsoft JhengHei"/>
               </a:rPr>
-              <a:t>從 651 到 892/892：把「可靠」再證明一次</a:t>
+              <a:t>從 651 到 938/938：把「可靠」再證明一次</a:t>
             </a:r>
           </a:p>
         </p:txBody>
@@ -20887,7 +20887,7 @@
                 </a:solidFill>
                 <a:latin typeface="Microsoft JhengHei"/>
               </a:rPr>
-              <a:t>英文版建了獨立的 892 句守衛庫（不是翻譯中文守衛——英文有自己的邊界：錯字型態、俗稱、閒聊搗蛋）。</a:t>
+              <a:t>英文版建了獨立的 938 句守衛庫（不是翻譯中文守衛——英文有自己的邊界：錯字型態、俗稱、閒聊搗蛋）。</a:t>
             </a:r>
           </a:p>
         </p:txBody>
@@ -20972,7 +20972,7 @@
                 </a:solidFill>
                 <a:latin typeface="Arial"/>
               </a:rPr>
-              <a:t>892/892</a:t>
+              <a:t>938/938</a:t>
             </a:r>
           </a:p>
         </p:txBody>
@@ -22004,7 +22004,7 @@
                 </a:solidFill>
                 <a:latin typeface="Arial"/>
               </a:rPr>
-              <a:t>892</a:t>
+              <a:t>938</a:t>
             </a:r>
           </a:p>
         </p:txBody>
@@ -24130,7 +24130,7 @@
                 </a:solidFill>
                 <a:latin typeface="Microsoft JhengHei"/>
               </a:rPr>
-              <a:t>實測準確度</a:t>
+              <a:t>純模型辨識率</a:t>
             </a:r>
           </a:p>
         </p:txBody>
@@ -24410,7 +24410,7 @@
                 </a:solidFill>
                 <a:latin typeface="Microsoft JhengHei"/>
               </a:rPr>
-              <a:t>端到端均 78.0%</a:t>
+              <a:t>真人 39% · TTS 87%</a:t>
             </a:r>
           </a:p>
         </p:txBody>
@@ -24534,7 +24534,7 @@
                 </a:solidFill>
                 <a:latin typeface="Microsoft JhengHei"/>
               </a:rPr>
-              <a:t>whisper small-q5_0</a:t>
+              <a:t>whisper small 全精度</a:t>
             </a:r>
           </a:p>
         </p:txBody>
@@ -24573,7 +24573,7 @@
                 </a:solidFill>
                 <a:latin typeface="Arial"/>
               </a:rPr>
-              <a:t>167 MB</a:t>
+              <a:t>465 MB</a:t>
             </a:r>
           </a:p>
         </p:txBody>
@@ -24612,7 +24612,7 @@
                 </a:solidFill>
                 <a:latin typeface="Microsoft JhengHei"/>
               </a:rPr>
-              <a:t>壓最小（5-bit）</a:t>
+              <a:t>不壓縮</a:t>
             </a:r>
           </a:p>
         </p:txBody>
@@ -24651,7 +24651,7 @@
                 </a:solidFill>
                 <a:latin typeface="Arial"/>
               </a:rPr>
-              <a:t>4.2s</a:t>
+              <a:t>10 秒以上</a:t>
             </a:r>
           </a:p>
         </p:txBody>
@@ -24690,7 +24690,7 @@
                 </a:solidFill>
                 <a:latin typeface="Microsoft JhengHei"/>
               </a:rPr>
-              <a:t>端到端均 77.3%</a:t>
+              <a:t>—</a:t>
             </a:r>
           </a:p>
         </p:txBody>
@@ -24729,7 +24729,7 @@
                 </a:solidFill>
                 <a:latin typeface="Microsoft JhengHei"/>
               </a:rPr>
-              <a:t>壓更小反而慢 40%、準度也略低</a:t>
+              <a:t>× 慢一倍以上 ⇒ 壓縮是必要的</a:t>
             </a:r>
           </a:p>
         </p:txBody>
@@ -24814,7 +24814,7 @@
                 </a:solidFill>
                 <a:latin typeface="Microsoft JhengHei"/>
               </a:rPr>
-              <a:t>whisper small 全精度</a:t>
+              <a:t>whisper tiny.en</a:t>
             </a:r>
           </a:p>
         </p:txBody>
@@ -24853,7 +24853,7 @@
                 </a:solidFill>
                 <a:latin typeface="Arial"/>
               </a:rPr>
-              <a:t>465 MB</a:t>
+              <a:t>74 MB</a:t>
             </a:r>
           </a:p>
         </p:txBody>
@@ -24892,7 +24892,7 @@
                 </a:solidFill>
                 <a:latin typeface="Microsoft JhengHei"/>
               </a:rPr>
-              <a:t>不壓縮</a:t>
+              <a:t>英文專用</a:t>
             </a:r>
           </a:p>
         </p:txBody>
@@ -24931,7 +24931,7 @@
                 </a:solidFill>
                 <a:latin typeface="Arial"/>
               </a:rPr>
-              <a:t>10 秒以上</a:t>
+              <a:t>0.94s</a:t>
             </a:r>
           </a:p>
         </p:txBody>
@@ -24970,7 +24970,7 @@
                 </a:solidFill>
                 <a:latin typeface="Microsoft JhengHei"/>
               </a:rPr>
-              <a:t>—</a:t>
+              <a:t>WER 9.3%</a:t>
             </a:r>
           </a:p>
         </p:txBody>
@@ -25009,7 +25009,7 @@
                 </a:solidFill>
                 <a:latin typeface="Microsoft JhengHei"/>
               </a:rPr>
-              <a:t>× 慢一倍以上 ⇒ 壓縮是必要的</a:t>
+              <a:t>英文版初選 → 升級 small</a:t>
             </a:r>
           </a:p>
         </p:txBody>
@@ -25094,7 +25094,7 @@
                 </a:solidFill>
                 <a:latin typeface="Microsoft JhengHei"/>
               </a:rPr>
-              <a:t>whisper tiny.en</a:t>
+              <a:t>whisper base</a:t>
             </a:r>
           </a:p>
         </p:txBody>
@@ -25133,7 +25133,7 @@
                 </a:solidFill>
                 <a:latin typeface="Arial"/>
               </a:rPr>
-              <a:t>74 MB</a:t>
+              <a:t>141 MB</a:t>
             </a:r>
           </a:p>
         </p:txBody>
@@ -25172,7 +25172,7 @@
                 </a:solidFill>
                 <a:latin typeface="Microsoft JhengHei"/>
               </a:rPr>
-              <a:t>英文專用</a:t>
+              <a:t>多語（含中文）</a:t>
             </a:r>
           </a:p>
         </p:txBody>
@@ -25211,7 +25211,7 @@
                 </a:solidFill>
                 <a:latin typeface="Arial"/>
               </a:rPr>
-              <a:t>0.94s</a:t>
+              <a:t>2.15s</a:t>
             </a:r>
           </a:p>
         </p:txBody>
@@ -25250,7 +25250,7 @@
                 </a:solidFill>
                 <a:latin typeface="Microsoft JhengHei"/>
               </a:rPr>
-              <a:t>WER 9.3%</a:t>
+              <a:t>純模型 36%</a:t>
             </a:r>
           </a:p>
         </p:txBody>
@@ -25289,286 +25289,6 @@
                 </a:solidFill>
                 <a:latin typeface="Microsoft JhengHei"/>
               </a:rPr>
-              <a:t>英文版初選 → 升級 small</a:t>
-            </a:r>
-          </a:p>
-        </p:txBody>
-      </p:sp>
-      <p:sp>
-        <p:nvSpPr>
-          <p:cNvPr id="40" name="Rectangle 39"/>
-          <p:cNvSpPr/>
-          <p:nvPr/>
-        </p:nvSpPr>
-        <p:spPr>
-          <a:xfrm>
-            <a:off x="667512" y="4251960"/>
-            <a:ext cx="10853928" cy="502920"/>
-          </a:xfrm>
-          <a:prstGeom prst="rect">
-            <a:avLst/>
-          </a:prstGeom>
-          <a:solidFill>
-            <a:srgbClr val="FFFFFF"/>
-          </a:solidFill>
-          <a:ln w="6350">
-            <a:solidFill>
-              <a:srgbClr val="E6E8EC"/>
-            </a:solidFill>
-          </a:ln>
-          <a:effectLst/>
-        </p:spPr>
-        <p:style>
-          <a:lnRef idx="1">
-            <a:schemeClr val="accent1"/>
-          </a:lnRef>
-          <a:fillRef idx="3">
-            <a:schemeClr val="accent1"/>
-          </a:fillRef>
-          <a:effectRef idx="2">
-            <a:schemeClr val="accent1"/>
-          </a:effectRef>
-          <a:fontRef idx="minor">
-            <a:schemeClr val="lt1"/>
-          </a:fontRef>
-        </p:style>
-        <p:txBody>
-          <a:bodyPr rtlCol="0" anchor="ctr"/>
-          <a:lstStyle/>
-          <a:p>
-            <a:pPr algn="ctr"/>
-          </a:p>
-        </p:txBody>
-      </p:sp>
-      <p:sp>
-        <p:nvSpPr>
-          <p:cNvPr id="41" name="TextBox 40"/>
-          <p:cNvSpPr txBox="1"/>
-          <p:nvPr/>
-        </p:nvSpPr>
-        <p:spPr>
-          <a:xfrm>
-            <a:off x="777240" y="4288536"/>
-            <a:ext cx="1874520" cy="429768"/>
-          </a:xfrm>
-          <a:prstGeom prst="rect">
-            <a:avLst/>
-          </a:prstGeom>
-          <a:noFill/>
-        </p:spPr>
-        <p:txBody>
-          <a:bodyPr wrap="square" lIns="0" rIns="0" tIns="0" bIns="0" anchor="ctr">
-            <a:spAutoFit/>
-          </a:bodyPr>
-          <a:lstStyle/>
-          <a:p>
-            <a:pPr algn="l">
-              <a:lnSpc>
-                <a:spcPct val="115000"/>
-              </a:lnSpc>
-            </a:pPr>
-            <a:r>
-              <a:rPr sz="1250" b="0">
-                <a:solidFill>
-                  <a:srgbClr val="1A1A2E"/>
-                </a:solidFill>
-                <a:latin typeface="Microsoft JhengHei"/>
-              </a:rPr>
-              <a:t>whisper base</a:t>
-            </a:r>
-          </a:p>
-        </p:txBody>
-      </p:sp>
-      <p:sp>
-        <p:nvSpPr>
-          <p:cNvPr id="42" name="TextBox 41"/>
-          <p:cNvSpPr txBox="1"/>
-          <p:nvPr/>
-        </p:nvSpPr>
-        <p:spPr>
-          <a:xfrm>
-            <a:off x="2898648" y="4288536"/>
-            <a:ext cx="1143000" cy="429768"/>
-          </a:xfrm>
-          <a:prstGeom prst="rect">
-            <a:avLst/>
-          </a:prstGeom>
-          <a:noFill/>
-        </p:spPr>
-        <p:txBody>
-          <a:bodyPr wrap="square" lIns="0" rIns="0" tIns="0" bIns="0" anchor="ctr">
-            <a:spAutoFit/>
-          </a:bodyPr>
-          <a:lstStyle/>
-          <a:p>
-            <a:pPr algn="l">
-              <a:lnSpc>
-                <a:spcPct val="115000"/>
-              </a:lnSpc>
-            </a:pPr>
-            <a:r>
-              <a:rPr sz="1200" b="0">
-                <a:solidFill>
-                  <a:srgbClr val="444444"/>
-                </a:solidFill>
-                <a:latin typeface="Arial"/>
-              </a:rPr>
-              <a:t>141 MB</a:t>
-            </a:r>
-          </a:p>
-        </p:txBody>
-      </p:sp>
-      <p:sp>
-        <p:nvSpPr>
-          <p:cNvPr id="43" name="TextBox 42"/>
-          <p:cNvSpPr txBox="1"/>
-          <p:nvPr/>
-        </p:nvSpPr>
-        <p:spPr>
-          <a:xfrm>
-            <a:off x="4087367" y="4288536"/>
-            <a:ext cx="1508760" cy="429768"/>
-          </a:xfrm>
-          <a:prstGeom prst="rect">
-            <a:avLst/>
-          </a:prstGeom>
-          <a:noFill/>
-        </p:spPr>
-        <p:txBody>
-          <a:bodyPr wrap="square" lIns="0" rIns="0" tIns="0" bIns="0" anchor="ctr">
-            <a:spAutoFit/>
-          </a:bodyPr>
-          <a:lstStyle/>
-          <a:p>
-            <a:pPr algn="l">
-              <a:lnSpc>
-                <a:spcPct val="115000"/>
-              </a:lnSpc>
-            </a:pPr>
-            <a:r>
-              <a:rPr sz="1100" b="0">
-                <a:solidFill>
-                  <a:srgbClr val="444444"/>
-                </a:solidFill>
-                <a:latin typeface="Microsoft JhengHei"/>
-              </a:rPr>
-              <a:t>多語（含中文）</a:t>
-            </a:r>
-          </a:p>
-        </p:txBody>
-      </p:sp>
-      <p:sp>
-        <p:nvSpPr>
-          <p:cNvPr id="44" name="TextBox 43"/>
-          <p:cNvSpPr txBox="1"/>
-          <p:nvPr/>
-        </p:nvSpPr>
-        <p:spPr>
-          <a:xfrm>
-            <a:off x="5641848" y="4288536"/>
-            <a:ext cx="1691639" cy="429768"/>
-          </a:xfrm>
-          <a:prstGeom prst="rect">
-            <a:avLst/>
-          </a:prstGeom>
-          <a:noFill/>
-        </p:spPr>
-        <p:txBody>
-          <a:bodyPr wrap="square" lIns="0" rIns="0" tIns="0" bIns="0" anchor="ctr">
-            <a:spAutoFit/>
-          </a:bodyPr>
-          <a:lstStyle/>
-          <a:p>
-            <a:pPr algn="l">
-              <a:lnSpc>
-                <a:spcPct val="115000"/>
-              </a:lnSpc>
-            </a:pPr>
-            <a:r>
-              <a:rPr sz="1150" b="0">
-                <a:solidFill>
-                  <a:srgbClr val="555555"/>
-                </a:solidFill>
-                <a:latin typeface="Arial"/>
-              </a:rPr>
-              <a:t>2.15s</a:t>
-            </a:r>
-          </a:p>
-        </p:txBody>
-      </p:sp>
-      <p:sp>
-        <p:nvSpPr>
-          <p:cNvPr id="45" name="TextBox 44"/>
-          <p:cNvSpPr txBox="1"/>
-          <p:nvPr/>
-        </p:nvSpPr>
-        <p:spPr>
-          <a:xfrm>
-            <a:off x="7379208" y="4288536"/>
-            <a:ext cx="1874520" cy="429768"/>
-          </a:xfrm>
-          <a:prstGeom prst="rect">
-            <a:avLst/>
-          </a:prstGeom>
-          <a:noFill/>
-        </p:spPr>
-        <p:txBody>
-          <a:bodyPr wrap="square" lIns="0" rIns="0" tIns="0" bIns="0" anchor="ctr">
-            <a:spAutoFit/>
-          </a:bodyPr>
-          <a:lstStyle/>
-          <a:p>
-            <a:pPr algn="l">
-              <a:lnSpc>
-                <a:spcPct val="115000"/>
-              </a:lnSpc>
-            </a:pPr>
-            <a:r>
-              <a:rPr sz="1150" b="0">
-                <a:solidFill>
-                  <a:srgbClr val="444444"/>
-                </a:solidFill>
-                <a:latin typeface="Microsoft JhengHei"/>
-              </a:rPr>
-              <a:t>端到端 36/100</a:t>
-            </a:r>
-          </a:p>
-        </p:txBody>
-      </p:sp>
-      <p:sp>
-        <p:nvSpPr>
-          <p:cNvPr id="46" name="TextBox 45"/>
-          <p:cNvSpPr txBox="1"/>
-          <p:nvPr/>
-        </p:nvSpPr>
-        <p:spPr>
-          <a:xfrm>
-            <a:off x="9299448" y="4288536"/>
-            <a:ext cx="2148840" cy="429768"/>
-          </a:xfrm>
-          <a:prstGeom prst="rect">
-            <a:avLst/>
-          </a:prstGeom>
-          <a:noFill/>
-        </p:spPr>
-        <p:txBody>
-          <a:bodyPr wrap="square" lIns="0" rIns="0" tIns="0" bIns="0" anchor="ctr">
-            <a:spAutoFit/>
-          </a:bodyPr>
-          <a:lstStyle/>
-          <a:p>
-            <a:pPr algn="l">
-              <a:lnSpc>
-                <a:spcPct val="115000"/>
-              </a:lnSpc>
-            </a:pPr>
-            <a:r>
-              <a:rPr sz="1150" b="0">
-                <a:solidFill>
-                  <a:srgbClr val="555555"/>
-                </a:solidFill>
-                <a:latin typeface="Microsoft JhengHei"/>
-              </a:rPr>
               <a:t>中文版初選 → 升級 small</a:t>
             </a:r>
           </a:p>
@@ -25576,287 +25296,7 @@
       </p:sp>
       <p:sp>
         <p:nvSpPr>
-          <p:cNvPr id="47" name="Rectangle 46"/>
-          <p:cNvSpPr/>
-          <p:nvPr/>
-        </p:nvSpPr>
-        <p:spPr>
-          <a:xfrm>
-            <a:off x="667512" y="4754880"/>
-            <a:ext cx="10853928" cy="502920"/>
-          </a:xfrm>
-          <a:prstGeom prst="rect">
-            <a:avLst/>
-          </a:prstGeom>
-          <a:solidFill>
-            <a:srgbClr val="F4F6F8"/>
-          </a:solidFill>
-          <a:ln w="6350">
-            <a:solidFill>
-              <a:srgbClr val="E6E8EC"/>
-            </a:solidFill>
-          </a:ln>
-          <a:effectLst/>
-        </p:spPr>
-        <p:style>
-          <a:lnRef idx="1">
-            <a:schemeClr val="accent1"/>
-          </a:lnRef>
-          <a:fillRef idx="3">
-            <a:schemeClr val="accent1"/>
-          </a:fillRef>
-          <a:effectRef idx="2">
-            <a:schemeClr val="accent1"/>
-          </a:effectRef>
-          <a:fontRef idx="minor">
-            <a:schemeClr val="lt1"/>
-          </a:fontRef>
-        </p:style>
-        <p:txBody>
-          <a:bodyPr rtlCol="0" anchor="ctr"/>
-          <a:lstStyle/>
-          <a:p>
-            <a:pPr algn="ctr"/>
-          </a:p>
-        </p:txBody>
-      </p:sp>
-      <p:sp>
-        <p:nvSpPr>
-          <p:cNvPr id="48" name="TextBox 47"/>
-          <p:cNvSpPr txBox="1"/>
-          <p:nvPr/>
-        </p:nvSpPr>
-        <p:spPr>
-          <a:xfrm>
-            <a:off x="777240" y="4791456"/>
-            <a:ext cx="1874520" cy="429768"/>
-          </a:xfrm>
-          <a:prstGeom prst="rect">
-            <a:avLst/>
-          </a:prstGeom>
-          <a:noFill/>
-        </p:spPr>
-        <p:txBody>
-          <a:bodyPr wrap="square" lIns="0" rIns="0" tIns="0" bIns="0" anchor="ctr">
-            <a:spAutoFit/>
-          </a:bodyPr>
-          <a:lstStyle/>
-          <a:p>
-            <a:pPr algn="l">
-              <a:lnSpc>
-                <a:spcPct val="115000"/>
-              </a:lnSpc>
-            </a:pPr>
-            <a:r>
-              <a:rPr sz="1250" b="0">
-                <a:solidFill>
-                  <a:srgbClr val="1A1A2E"/>
-                </a:solidFill>
-                <a:latin typeface="Microsoft JhengHei"/>
-              </a:rPr>
-              <a:t>Fun-ASR-Nano（原用）</a:t>
-            </a:r>
-          </a:p>
-        </p:txBody>
-      </p:sp>
-      <p:sp>
-        <p:nvSpPr>
-          <p:cNvPr id="49" name="TextBox 48"/>
-          <p:cNvSpPr txBox="1"/>
-          <p:nvPr/>
-        </p:nvSpPr>
-        <p:spPr>
-          <a:xfrm>
-            <a:off x="2898648" y="4791456"/>
-            <a:ext cx="1143000" cy="429768"/>
-          </a:xfrm>
-          <a:prstGeom prst="rect">
-            <a:avLst/>
-          </a:prstGeom>
-          <a:noFill/>
-        </p:spPr>
-        <p:txBody>
-          <a:bodyPr wrap="square" lIns="0" rIns="0" tIns="0" bIns="0" anchor="ctr">
-            <a:spAutoFit/>
-          </a:bodyPr>
-          <a:lstStyle/>
-          <a:p>
-            <a:pPr algn="l">
-              <a:lnSpc>
-                <a:spcPct val="115000"/>
-              </a:lnSpc>
-            </a:pPr>
-            <a:r>
-              <a:rPr sz="1200" b="0">
-                <a:solidFill>
-                  <a:srgbClr val="444444"/>
-                </a:solidFill>
-                <a:latin typeface="Arial"/>
-              </a:rPr>
-              <a:t>~800M</a:t>
-            </a:r>
-          </a:p>
-        </p:txBody>
-      </p:sp>
-      <p:sp>
-        <p:nvSpPr>
-          <p:cNvPr id="50" name="TextBox 49"/>
-          <p:cNvSpPr txBox="1"/>
-          <p:nvPr/>
-        </p:nvSpPr>
-        <p:spPr>
-          <a:xfrm>
-            <a:off x="4087367" y="4791456"/>
-            <a:ext cx="1508760" cy="429768"/>
-          </a:xfrm>
-          <a:prstGeom prst="rect">
-            <a:avLst/>
-          </a:prstGeom>
-          <a:noFill/>
-        </p:spPr>
-        <p:txBody>
-          <a:bodyPr wrap="square" lIns="0" rIns="0" tIns="0" bIns="0" anchor="ctr">
-            <a:spAutoFit/>
-          </a:bodyPr>
-          <a:lstStyle/>
-          <a:p>
-            <a:pPr algn="l">
-              <a:lnSpc>
-                <a:spcPct val="115000"/>
-              </a:lnSpc>
-            </a:pPr>
-            <a:r>
-              <a:rPr sz="1100" b="0">
-                <a:solidFill>
-                  <a:srgbClr val="444444"/>
-                </a:solidFill>
-                <a:latin typeface="Microsoft JhengHei"/>
-              </a:rPr>
-              <a:t>中文強</a:t>
-            </a:r>
-          </a:p>
-        </p:txBody>
-      </p:sp>
-      <p:sp>
-        <p:nvSpPr>
-          <p:cNvPr id="51" name="TextBox 50"/>
-          <p:cNvSpPr txBox="1"/>
-          <p:nvPr/>
-        </p:nvSpPr>
-        <p:spPr>
-          <a:xfrm>
-            <a:off x="5641848" y="4791456"/>
-            <a:ext cx="1691639" cy="429768"/>
-          </a:xfrm>
-          <a:prstGeom prst="rect">
-            <a:avLst/>
-          </a:prstGeom>
-          <a:noFill/>
-        </p:spPr>
-        <p:txBody>
-          <a:bodyPr wrap="square" lIns="0" rIns="0" tIns="0" bIns="0" anchor="ctr">
-            <a:spAutoFit/>
-          </a:bodyPr>
-          <a:lstStyle/>
-          <a:p>
-            <a:pPr algn="l">
-              <a:lnSpc>
-                <a:spcPct val="115000"/>
-              </a:lnSpc>
-            </a:pPr>
-            <a:r>
-              <a:rPr sz="1150" b="0">
-                <a:solidFill>
-                  <a:srgbClr val="555555"/>
-                </a:solidFill>
-                <a:latin typeface="Arial"/>
-              </a:rPr>
-              <a:t>2.5s</a:t>
-            </a:r>
-          </a:p>
-        </p:txBody>
-      </p:sp>
-      <p:sp>
-        <p:nvSpPr>
-          <p:cNvPr id="52" name="TextBox 51"/>
-          <p:cNvSpPr txBox="1"/>
-          <p:nvPr/>
-        </p:nvSpPr>
-        <p:spPr>
-          <a:xfrm>
-            <a:off x="7379208" y="4791456"/>
-            <a:ext cx="1874520" cy="429768"/>
-          </a:xfrm>
-          <a:prstGeom prst="rect">
-            <a:avLst/>
-          </a:prstGeom>
-          <a:noFill/>
-        </p:spPr>
-        <p:txBody>
-          <a:bodyPr wrap="square" lIns="0" rIns="0" tIns="0" bIns="0" anchor="ctr">
-            <a:spAutoFit/>
-          </a:bodyPr>
-          <a:lstStyle/>
-          <a:p>
-            <a:pPr algn="l">
-              <a:lnSpc>
-                <a:spcPct val="115000"/>
-              </a:lnSpc>
-            </a:pPr>
-            <a:r>
-              <a:rPr sz="1150" b="0">
-                <a:solidFill>
-                  <a:srgbClr val="444444"/>
-                </a:solidFill>
-                <a:latin typeface="Microsoft JhengHei"/>
-              </a:rPr>
-              <a:t>真人 4/8</a:t>
-            </a:r>
-          </a:p>
-        </p:txBody>
-      </p:sp>
-      <p:sp>
-        <p:nvSpPr>
-          <p:cNvPr id="53" name="TextBox 52"/>
-          <p:cNvSpPr txBox="1"/>
-          <p:nvPr/>
-        </p:nvSpPr>
-        <p:spPr>
-          <a:xfrm>
-            <a:off x="9299448" y="4791456"/>
-            <a:ext cx="2148840" cy="429768"/>
-          </a:xfrm>
-          <a:prstGeom prst="rect">
-            <a:avLst/>
-          </a:prstGeom>
-          <a:noFill/>
-        </p:spPr>
-        <p:txBody>
-          <a:bodyPr wrap="square" lIns="0" rIns="0" tIns="0" bIns="0" anchor="ctr">
-            <a:spAutoFit/>
-          </a:bodyPr>
-          <a:lstStyle/>
-          <a:p>
-            <a:pPr algn="l">
-              <a:lnSpc>
-                <a:spcPct val="115000"/>
-              </a:lnSpc>
-            </a:pPr>
-            <a:r>
-              <a:rPr sz="1150" b="0">
-                <a:solidFill>
-                  <a:srgbClr val="555555"/>
-                </a:solidFill>
-                <a:latin typeface="Microsoft JhengHei"/>
-              </a:rPr>
-              <a:t>× 來源不符，已汰換</a:t>
-            </a:r>
-          </a:p>
-        </p:txBody>
-      </p:sp>
-      <p:sp>
-        <p:nvSpPr>
-          <p:cNvPr id="54" name="Rounded Rectangle 53"/>
+          <p:cNvPr id="40" name="Rounded Rectangle 39"/>
           <p:cNvSpPr/>
           <p:nvPr/>
         </p:nvSpPr>
@@ -25902,7 +25342,7 @@
       </p:sp>
       <p:sp>
         <p:nvSpPr>
-          <p:cNvPr id="55" name="TextBox 54"/>
+          <p:cNvPr id="41" name="TextBox 40"/>
           <p:cNvSpPr txBox="1"/>
           <p:nvPr/>
         </p:nvSpPr>
@@ -25959,7 +25399,7 @@
       </p:sp>
       <p:sp>
         <p:nvSpPr>
-          <p:cNvPr id="56" name="TextBox 55"/>
+          <p:cNvPr id="42" name="TextBox 41"/>
           <p:cNvSpPr txBox="1"/>
           <p:nvPr/>
         </p:nvSpPr>
@@ -26000,7 +25440,7 @@
                 </a:solidFill>
                 <a:latin typeface="Microsoft JhengHei"/>
               </a:rPr>
-              <a:t>模型聽得準 ≠ 系統答得對</a:t>
+              <a:t>純模型只有 39%，為何仍可用</a:t>
             </a:r>
             <a:r>
               <a:rPr sz="1200" b="0">
@@ -26009,14 +25449,14 @@
                 </a:solidFill>
                 <a:latin typeface="Microsoft JhengHei"/>
               </a:rPr>
-              <a:t>——關鍵不是錯多少字，而是**錯在哪裡**：錯在商品名就查不到，錯在語助詞則無傷。針對聽錯型態補容錯規則後，q8 端到端 73.7% → 78.0%，同時拿下速度與準度。</a:t>
-            </a:r>
-          </a:p>
-        </p:txBody>
-      </p:sp>
-      <p:sp>
-        <p:nvSpPr>
-          <p:cNvPr id="57" name="TextBox 56"/>
+              <a:t>——判準是**一字不差**才算對。實際上字元正確率有 89%（每 10 字才錯 1 字），多為 earphones→earphone 這類小差異，正是容錯層要接手的部分。</a:t>
+            </a:r>
+          </a:p>
+        </p:txBody>
+      </p:sp>
+      <p:sp>
+        <p:nvSpPr>
+          <p:cNvPr id="43" name="TextBox 42"/>
           <p:cNvSpPr txBox="1"/>
           <p:nvPr/>
         </p:nvSpPr>
@@ -28052,7 +27492,7 @@
                 </a:solidFill>
                 <a:latin typeface="Microsoft JhengHei"/>
               </a:rPr>
-              <a:t>910 MB 三顆 → 175 MB 一顆（中英共用）｜VAD 零模型｜中英 ~3.5s/句｜純 CPU、零 GPU、零雲端</a:t>
+              <a:t>910 MB 三顆 → 252 MB 一顆（中英共用）｜VAD 零模型｜英文 2.5s/句｜純 CPU、零 GPU、零雲端</a:t>
             </a:r>
           </a:p>
         </p:txBody>
@@ -36101,7 +35541,7 @@
                 </a:solidFill>
                 <a:latin typeface="Microsoft JhengHei"/>
               </a:rPr>
-              <a:t>守衛 892 句全綠、劇情批 5 輪、渲染批 5 輪——但那些句子都是同一個作者打字造的，盲點會系統性重複。</a:t>
+              <a:t>守衛全綠、劇情批 5 輪、渲染批 5 輪——但那些句子都是同一個作者打字造的，盲點會系統性重複。</a:t>
             </a:r>
           </a:p>
         </p:txBody>
@@ -37621,7 +37061,7 @@
                 </a:solidFill>
                 <a:latin typeface="Microsoft JhengHei"/>
               </a:rPr>
-              <a:t>不是「測不夠多輪」，是「輸入源不夠多樣」——換一個產生源，立刻抓到 11 輪都沒碰到的類型。守衛全程維持 892/892。</a:t>
+              <a:t>不是「測不夠多輪」，是「輸入源不夠多樣」——換一個產生源，立刻抓到 11 輪都沒碰到的類型。</a:t>
             </a:r>
           </a:p>
         </p:txBody>
@@ -42137,7 +41577,7 @@
                 </a:solidFill>
                 <a:latin typeface="Microsoft JhengHei"/>
               </a:rPr>
-              <a:t>同批錄音重跑三層噪音、不做任何人工複判：q8_0 得 80 / 82 / 72%（均 78.0%），勝過 q5_0 的 81 / 79 / 72%（均 77.3%）且快 40% ⇒ 定案改用 q8_0</a:t>
+              <a:t>同批錄音重跑三層噪音、不做任何人工複判 → 80 / 82 / 72%。純模型辨識僅 38%，容錯層補上 44 個百分點才有這個成品表現</a:t>
             </a:r>
           </a:p>
         </p:txBody>
@@ -42403,7 +41843,7 @@
                 </a:solidFill>
                 <a:latin typeface="Microsoft JhengHei"/>
               </a:rPr>
-              <a:t>守衛全綠不代表沒問題——換一個角度就抓到一批。守衛庫全程維持 892/892。</a:t>
+              <a:t>守衛全綠不代表沒問題——換一個角度就抓到一批，補進守衛庫才算收口。</a:t>
             </a:r>
           </a:p>
         </p:txBody>
@@ -46577,7 +46017,7 @@
                 </a:solidFill>
                 <a:latin typeface="Arial"/>
               </a:rPr>
-              <a:t>1122+892</a:t>
+              <a:t>1149+938</a:t>
             </a:r>
           </a:p>
         </p:txBody>
@@ -48515,7 +47955,7 @@
                 </a:solidFill>
                 <a:latin typeface="Microsoft JhengHei"/>
               </a:rPr>
-              <a:t>中文 1122 句雙平台 100%、英文 892 句 100%；「可靠」是數字不是祈禱</a:t>
+              <a:t>中文 1149 句雙平台 100%、英文 938 句 100%；「可靠」是數字不是祈禱</a:t>
             </a:r>
           </a:p>
         </p:txBody>

--- a/倉管Agent_專案簡報.pptx
+++ b/倉管Agent_專案簡報.pptx
@@ -1989,7 +1989,7 @@
               <a:rPr sz="1200">
                 <a:latin typeface="Microsoft JhengHei"/>
               </a:rPr>
-              <a:t>【2026-08-06 定案：q8_0 —— 實測打敗直覺】</a:t>
+              <a:t>【2026-08-06 定案：small + 量化 q8_0，中英同一顆】</a:t>
             </a:r>
           </a:p>
           <a:p>
@@ -1997,7 +1997,7 @@
               <a:rPr sz="1200">
                 <a:latin typeface="Microsoft JhengHei"/>
               </a:rPr>
-              <a:t>① 直覺一：位元越少應該越快 → 錯。壓最小的 q5（167MB）要 4.2 秒，壓中等的 q8（252MB）只要 2.5 秒。白話：壓縮像真空收納，壓太扁每次取用都得先還原，拆封的功夫比省下的搬運還多。（機轉無定論，依實測選型。）</a:t>
+              <a:t>① 為何是 small：tiny.en 與 base 對**台灣腔真人**明顯不夠——tiny 在合成音表現不錯，換真人就掉下來（選型不能只信 TTS）。small 才撐得住。</a:t>
             </a:r>
           </a:p>
           <a:p>
@@ -2005,7 +2005,7 @@
               <a:rPr sz="1200">
                 <a:latin typeface="Microsoft JhengHei"/>
               </a:rPr>
-              <a:t>② 直覺二：模型聽得越準、系統就答得越對 → 也錯。首輪 q8「整句聽對」較多，端到端卻輸 3 分。追下去發現關鍵是**錯在哪裡**：q8 常錯在商品名（steam iron→stain iron）那是查詢命脈；q5 錯在語助詞，無傷大雅。</a:t>
+              <a:t>② 為何要量化：small 未量化 465MB、每句 10 秒以上，展場站著等不了。量化壓到 252MB、2.5 秒，準度幾乎不損 ⇒ 用 q8_0。</a:t>
             </a:r>
           </a:p>
           <a:p>
@@ -2013,7 +2013,7 @@
               <a:rPr sz="1200">
                 <a:latin typeface="Microsoft JhengHei"/>
               </a:rPr>
-              <a:t>③ 於是針對 q8 的聽錯型態補 11 條容錯規則（每條都先撞守衛 892 句、商品主檔、以及 q5 現有正解確認零誤傷），端到端 73.7% → 78.0%，反超 q5 的 77.3%，且保有快 40% 優勢 ⇒ 定案 q8_0。訪客體感 5.9 秒 → 4.2 秒。</a:t>
+              <a:t>③ 為何是多語版不是英文專用版：多語模型訓練時看過大量非母語者講的英文，對台灣腔更寬容；英文專用版聽慣標準英美腔反而不適應。中英共用同一顆檔案，只靠 -l 旗標切語言，不必維護兩套框架。</a:t>
             </a:r>
           </a:p>
           <a:p>
@@ -2021,7 +2021,7 @@
               <a:rPr sz="1200">
                 <a:latin typeface="Microsoft JhengHei"/>
               </a:rPr>
-              <a:t>④ 若問「為何不早點選 q8」：因為未調校時它是輸的（73.7%）——先量出弱點型態、再補規則才變最佳解，這正是測試方法論的價值。</a:t>
+              <a:t>④ 純模型 39% 看起來低，是因為判準「一字不差」。字元正確率 89%，容錯層接手後端到端 80% —— 那才是訪客體驗到的數字。</a:t>
             </a:r>
           </a:p>
           <a:p/>
@@ -24254,7 +24254,7 @@
                 </a:solidFill>
                 <a:latin typeface="Microsoft JhengHei"/>
               </a:rPr>
-              <a:t>whisper small-q8_0</a:t>
+              <a:t>whisper small + 量化 q8</a:t>
             </a:r>
           </a:p>
         </p:txBody>
@@ -24332,7 +24332,7 @@
                 </a:solidFill>
                 <a:latin typeface="Microsoft JhengHei"/>
               </a:rPr>
-              <a:t>壓中等（8-bit）</a:t>
+              <a:t>多語（中英同檔）</a:t>
             </a:r>
           </a:p>
         </p:txBody>
@@ -24410,7 +24410,7 @@
                 </a:solidFill>
                 <a:latin typeface="Microsoft JhengHei"/>
               </a:rPr>
-              <a:t>真人 39% · TTS 87%</a:t>
+              <a:t>真人 39% / 合成 87%</a:t>
             </a:r>
           </a:p>
         </p:txBody>
@@ -24449,7 +24449,7 @@
                 </a:solidFill>
                 <a:latin typeface="Microsoft JhengHei"/>
               </a:rPr>
-              <a:t>★ 定案採用：又快又準</a:t>
+              <a:t>★ 定案：準度夠又壓得下來</a:t>
             </a:r>
           </a:p>
         </p:txBody>
@@ -24534,7 +24534,7 @@
                 </a:solidFill>
                 <a:latin typeface="Microsoft JhengHei"/>
               </a:rPr>
-              <a:t>whisper small 全精度</a:t>
+              <a:t>whisper small 未量化</a:t>
             </a:r>
           </a:p>
         </p:txBody>
@@ -24612,7 +24612,7 @@
                 </a:solidFill>
                 <a:latin typeface="Microsoft JhengHei"/>
               </a:rPr>
-              <a:t>不壓縮</a:t>
+              <a:t>多語（中英同檔）</a:t>
             </a:r>
           </a:p>
         </p:txBody>
@@ -24690,7 +24690,7 @@
                 </a:solidFill>
                 <a:latin typeface="Microsoft JhengHei"/>
               </a:rPr>
-              <a:t>—</a:t>
+              <a:t>同上（量化不損準度）</a:t>
             </a:r>
           </a:p>
         </p:txBody>
@@ -24729,7 +24729,7 @@
                 </a:solidFill>
                 <a:latin typeface="Microsoft JhengHei"/>
               </a:rPr>
-              <a:t>× 慢一倍以上 ⇒ 壓縮是必要的</a:t>
+              <a:t>準度夠但太慢 ⇒ 量化解決</a:t>
             </a:r>
           </a:p>
         </p:txBody>
@@ -24814,7 +24814,7 @@
                 </a:solidFill>
                 <a:latin typeface="Microsoft JhengHei"/>
               </a:rPr>
-              <a:t>whisper tiny.en</a:t>
+              <a:t>whisper base</a:t>
             </a:r>
           </a:p>
         </p:txBody>
@@ -24853,7 +24853,7 @@
                 </a:solidFill>
                 <a:latin typeface="Arial"/>
               </a:rPr>
-              <a:t>74 MB</a:t>
+              <a:t>141 MB</a:t>
             </a:r>
           </a:p>
         </p:txBody>
@@ -24892,7 +24892,7 @@
                 </a:solidFill>
                 <a:latin typeface="Microsoft JhengHei"/>
               </a:rPr>
-              <a:t>英文專用</a:t>
+              <a:t>多語（含中文）</a:t>
             </a:r>
           </a:p>
         </p:txBody>
@@ -24931,7 +24931,7 @@
                 </a:solidFill>
                 <a:latin typeface="Arial"/>
               </a:rPr>
-              <a:t>0.94s</a:t>
+              <a:t>2.2s</a:t>
             </a:r>
           </a:p>
         </p:txBody>
@@ -24970,7 +24970,7 @@
                 </a:solidFill>
                 <a:latin typeface="Microsoft JhengHei"/>
               </a:rPr>
-              <a:t>WER 9.3%</a:t>
+              <a:t>真人明顯較差</a:t>
             </a:r>
           </a:p>
         </p:txBody>
@@ -25009,7 +25009,7 @@
                 </a:solidFill>
                 <a:latin typeface="Microsoft JhengHei"/>
               </a:rPr>
-              <a:t>英文版初選 → 升級 small</a:t>
+              <a:t>× 準度不足，升級 small</a:t>
             </a:r>
           </a:p>
         </p:txBody>
@@ -25094,7 +25094,7 @@
                 </a:solidFill>
                 <a:latin typeface="Microsoft JhengHei"/>
               </a:rPr>
-              <a:t>whisper base</a:t>
+              <a:t>whisper tiny.en</a:t>
             </a:r>
           </a:p>
         </p:txBody>
@@ -25133,7 +25133,7 @@
                 </a:solidFill>
                 <a:latin typeface="Arial"/>
               </a:rPr>
-              <a:t>141 MB</a:t>
+              <a:t>74 MB</a:t>
             </a:r>
           </a:p>
         </p:txBody>
@@ -25172,7 +25172,7 @@
                 </a:solidFill>
                 <a:latin typeface="Microsoft JhengHei"/>
               </a:rPr>
-              <a:t>多語（含中文）</a:t>
+              <a:t>英文專用</a:t>
             </a:r>
           </a:p>
         </p:txBody>
@@ -25211,7 +25211,7 @@
                 </a:solidFill>
                 <a:latin typeface="Arial"/>
               </a:rPr>
-              <a:t>2.15s</a:t>
+              <a:t>0.9s</a:t>
             </a:r>
           </a:p>
         </p:txBody>
@@ -25250,7 +25250,7 @@
                 </a:solidFill>
                 <a:latin typeface="Microsoft JhengHei"/>
               </a:rPr>
-              <a:t>純模型 36%</a:t>
+              <a:t>合成音好、真人差</a:t>
             </a:r>
           </a:p>
         </p:txBody>
@@ -25289,7 +25289,7 @@
                 </a:solidFill>
                 <a:latin typeface="Microsoft JhengHei"/>
               </a:rPr>
-              <a:t>中文版初選 → 升級 small</a:t>
+              <a:t>× 台灣腔真人辨識不堪用</a:t>
             </a:r>
           </a:p>
         </p:txBody>
@@ -25374,7 +25374,7 @@
                 </a:solidFill>
                 <a:latin typeface="Microsoft JhengHei"/>
               </a:rPr>
-              <a:t>反直覺 ①  </a:t>
+              <a:t>選型邏輯  </a:t>
             </a:r>
             <a:r>
               <a:rPr sz="1300" b="1">
@@ -25383,7 +25383,7 @@
                 </a:solidFill>
                 <a:latin typeface="Microsoft JhengHei"/>
               </a:rPr>
-              <a:t>壓得更小，反而更慢</a:t>
+              <a:t>small 夠準但太慢 → 量化壓縮 → q8_0</a:t>
             </a:r>
             <a:r>
               <a:rPr sz="1200" b="0">
@@ -25392,7 +25392,7 @@
                 </a:solidFill>
                 <a:latin typeface="Microsoft JhengHei"/>
               </a:rPr>
-              <a:t>——一般以為位元數越少越快。但壓縮就像真空收納：壓得太扁，每次取用都得先「還原」，拆封的功夫比省下的搬運還多。q8 壓得剛好，總時間最短（2.5s vs 4.2s）。</a:t>
+              <a:t>——小模型（tiny/base）準度不足；small 準度夠卻要 10 秒以上，展場站著等不了。量化把它壓到 252 MB、2.5 秒，準度幾乎不損。</a:t>
             </a:r>
           </a:p>
         </p:txBody>
@@ -25431,7 +25431,7 @@
                 </a:solidFill>
                 <a:latin typeface="Microsoft JhengHei"/>
               </a:rPr>
-              <a:t>反直覺 ②  </a:t>
+              <a:t>為何純模型 39% 仍可用  </a:t>
             </a:r>
             <a:r>
               <a:rPr sz="1250" b="1">
@@ -25440,7 +25440,7 @@
                 </a:solidFill>
                 <a:latin typeface="Microsoft JhengHei"/>
               </a:rPr>
-              <a:t>純模型只有 39%，為何仍可用</a:t>
+              <a:t>判準是「一字不差」才算對</a:t>
             </a:r>
             <a:r>
               <a:rPr sz="1200" b="0">
@@ -25449,7 +25449,7 @@
                 </a:solidFill>
                 <a:latin typeface="Microsoft JhengHei"/>
               </a:rPr>
-              <a:t>——判準是**一字不差**才算對。實際上字元正確率有 89%（每 10 字才錯 1 字），多為 earphones→earphone 這類小差異，正是容錯層要接手的部分。</a:t>
+              <a:t>——實際字元正確率 89%（每 10 字才錯 1 字），多為 earphones→earphone 這類小差異。容錯層接手後端到端 80%，那才是訪客體驗到的。</a:t>
             </a:r>
           </a:p>
         </p:txBody>

--- a/倉管Agent_專案簡報.pptx
+++ b/倉管Agent_專案簡報.pptx
@@ -2120,6 +2120,14 @@
                 <a:latin typeface="Microsoft JhengHei"/>
               </a:rPr>
               <a:t>① **VAD → 移到前端瀏覽器，不用模型了**。whisper.cpp 本身有 VAD 支援（--vad 搭配 Silero 模型），但我們**沒有啟用**；改用 Web Audio API 在瀏覽器即時算 RMS 音量：偵測到開始講話後，靜音持續 1.2 秒就自動送出，另有 15 秒硬上限（展場吵雜時 VAD 可能永遠不收尾）。好處是零模型負擔、零延遲、麥克風端就地判斷；也是訪客體感「Siri 式點一下自動結束」的來源。</a:t>
+            </a:r>
+          </a:p>
+          <a:p>
+            <a:r>
+              <a:rPr sz="1200">
+                <a:latin typeface="Microsoft JhengHei"/>
+              </a:rPr>
+              <a:t>③ **-ac 640 是速度與長度上限的關鍵**（2026-08-06 補充）：whisper 預設一次處理 30 秒音訊（audio-ctx 1500），不足會補靜音湊滿——倉管問句只有 2-3 秒，等於九成算力花在算空白。削到 640（12.8 秒）速度快一倍且準度不掉。**副作用正好是優點**：它同時替語音輸入設了 12.8 秒上限，訪客講再長也不會無限吃資源。實測錄音最長 3.34 秒，12.8 秒留了近四倍餘裕；曾評估再削到 6.4 秒，但長句停頓會被截斷，定調維持 640。中英兩版都是這個值（英文走環境變數、中文寫在命令列）。</a:t>
             </a:r>
           </a:p>
           <a:p>
@@ -26978,7 +26986,7 @@
                 </a:solidFill>
                 <a:latin typeface="Microsoft JhengHei"/>
               </a:rPr>
-              <a:t>small-q8_0 中英共用</a:t>
+              <a:t>small-q8_0 · -ac 640</a:t>
             </a:r>
           </a:p>
         </p:txBody>
@@ -27411,8 +27419,8 @@
         </p:nvSpPr>
         <p:spPr>
           <a:xfrm>
-            <a:off x="667512" y="5852160"/>
-            <a:ext cx="10853928" cy="713232"/>
+            <a:off x="667512" y="5742432"/>
+            <a:ext cx="10853928" cy="868680"/>
           </a:xfrm>
           <a:prstGeom prst="roundRect">
             <a:avLst>
@@ -27457,8 +27465,8 @@
         </p:nvSpPr>
         <p:spPr>
           <a:xfrm>
-            <a:off x="987552" y="5971032"/>
-            <a:ext cx="10241280" cy="475488"/>
+            <a:off x="987552" y="5833872"/>
+            <a:ext cx="10241280" cy="329184"/>
           </a:xfrm>
           <a:prstGeom prst="rect">
             <a:avLst/>
@@ -27500,6 +27508,63 @@
       <p:sp>
         <p:nvSpPr>
           <p:cNvPr id="48" name="TextBox 47"/>
+          <p:cNvSpPr txBox="1"/>
+          <p:nvPr/>
+        </p:nvSpPr>
+        <p:spPr>
+          <a:xfrm>
+            <a:off x="987552" y="6199632"/>
+            <a:ext cx="10241280" cy="329184"/>
+          </a:xfrm>
+          <a:prstGeom prst="rect">
+            <a:avLst/>
+          </a:prstGeom>
+          <a:noFill/>
+        </p:spPr>
+        <p:txBody>
+          <a:bodyPr wrap="square" lIns="0" rIns="0" tIns="0" bIns="0" anchor="ctr">
+            <a:spAutoFit/>
+          </a:bodyPr>
+          <a:lstStyle/>
+          <a:p>
+            <a:pPr algn="l">
+              <a:lnSpc>
+                <a:spcPct val="115000"/>
+              </a:lnSpc>
+            </a:pPr>
+            <a:r>
+              <a:rPr sz="1250" b="1">
+                <a:solidFill>
+                  <a:srgbClr val="F0A030"/>
+                </a:solidFill>
+                <a:latin typeface="Microsoft JhengHei"/>
+              </a:rPr>
+              <a:t>時間管控  </a:t>
+            </a:r>
+            <a:r>
+              <a:rPr sz="1150" b="1">
+                <a:solidFill>
+                  <a:srgbClr val="FFFFFF"/>
+                </a:solidFill>
+                <a:latin typeface="Microsoft JhengHei"/>
+              </a:rPr>
+              <a:t>-ac 640 = 一次只吃 12.8 秒（預設 30 秒）</a:t>
+            </a:r>
+            <a:r>
+              <a:rPr sz="1150" b="0">
+                <a:solidFill>
+                  <a:srgbClr val="BBBBBB"/>
+                </a:solidFill>
+                <a:latin typeface="Microsoft JhengHei"/>
+              </a:rPr>
+              <a:t>——問句 2-3 秒，其餘都是空白運算；削掉後速度快一倍，同時等於替語音輸入設了長度上限。</a:t>
+            </a:r>
+          </a:p>
+        </p:txBody>
+      </p:sp>
+      <p:sp>
+        <p:nvSpPr>
+          <p:cNvPr id="49" name="TextBox 48"/>
           <p:cNvSpPr txBox="1"/>
           <p:nvPr/>
         </p:nvSpPr>

--- a/倉管Agent_專案簡報.pptx
+++ b/倉管Agent_專案簡報.pptx
@@ -2865,7 +2865,7 @@
               <a:rPr sz="1200">
                 <a:latin typeface="Microsoft JhengHei"/>
               </a:rPr>
-              <a:t>★真人語音實測頁（誠實面對落差，技術評審會問「你們測過真人嗎」）。**這是英文版第一份真人語音數據**——先前所有英文語音數字都來自 TTS 合成音。三段對照：①TTS 92%（US 腔 99 句）②真人非母語 55%（台灣腔 38 句，同一支 C930 麥克風、同一顆 whisper small-q5_0 模型、走完整語音鏈到倉管判定）③加 ASR 容錯層後 **79%**——關鍵是**同一批音檔、沒有重錄**，只在 ASR 出口加規則。**TTS 高估了 37 個百分點**，這與中文版的經驗一致（當時合成音 clean 100%、真人首測只有 35/52）——所以這個專案的鐵則是：合成音只能當下限篩檢，**掛了肯定不行，過了不代表可用**。三類錯法要分清楚：詞尾被吞（shipped→shed）是非母語者通病但母語者也有；連音（sun hat→some heat）母語者講快時更容易發生；整詞被替換（trash bags→trespass life）則**沒有可用訊號能修**，硬修會誤傷正常查詢，誠實留著。容錯層只收「有規律且驗證過不誤傷」的三類，並在真人音檔上驗證 +24%。⚠️ 評審若追問可靠度，要主動說明：79% 是 user 重錄挑最好那次的結果，**一次命中率更低**；展場訪客只有一次機會。母語者預估 75-85%（TTS 測五個腔調 GB93/US92/AU90/IN90/SG77，但 TTS 不等於真人）。最後一句是設計取捨：答不出來時系統會**誠實反問**而不是亂猜，所以錯的時候不會給出錯誤數字——這比硬湊一個答案安全。</a:t>
+              <a:t>★真人語音實測頁（誠實面對落差，技術評審會問「你們測過真人嗎」）。**這是英文版第一份真人語音數據**——先前所有英文語音數字都來自 TTS 合成音。三段對照：①TTS 92%（US 腔 100 句）②真人非母語 55%（台灣腔 38 句，同一支 C930 麥克風、同一顆 whisper small-q5_0 模型、走完整語音鏈到倉管判定）③加 ASR 容錯層後 **79%**——關鍵是**同一批音檔、沒有重錄**，只在 ASR 出口加規則。**TTS 高估了 37 個百分點**，這與中文版的經驗一致（當時合成音 clean 100%、真人首測只有 35/52）——所以這個專案的鐵則是：合成音只能當下限篩檢，**掛了肯定不行，過了不代表可用**。三類錯法要分清楚：詞尾被吞（shipped→shed）是非母語者通病但母語者也有；連音（sun hat→some heat）母語者講快時更容易發生；整詞被替換（trash bags→trespass life）則**沒有可用訊號能修**，硬修會誤傷正常查詢，誠實留著。容錯層只收「有規律且驗證過不誤傷」的三類，並在真人音檔上驗證 +24%。⚠️ 評審若追問可靠度，要主動說明：79% 是 user 重錄挑最好那次的結果，**一次命中率更低**；展場訪客只有一次機會。母語者預估 75-85%（TTS 測五個腔調 GB93/US92/AU90/IN90/SG77，但 TTS 不等於真人）。最後一句是設計取捨：答不出來時系統會**誠實反問**而不是亂猜，所以錯的時候不會給出錯誤數字——這比硬湊一個答案安全。</a:t>
             </a:r>
           </a:p>
         </p:txBody>
@@ -26098,7 +26098,7 @@
                 </a:solidFill>
                 <a:latin typeface="Microsoft JhengHei"/>
               </a:rPr>
-              <a:t>真人 39% / 合成 87%</a:t>
+              <a:t>真人 39% / 合成 87%（純聽寫）</a:t>
             </a:r>
           </a:p>
         </p:txBody>
@@ -40934,7 +40934,7 @@
                 </a:solidFill>
                 <a:latin typeface="Microsoft JhengHei"/>
               </a:rPr>
-              <a:t>US 腔 99 句 · 咬字標準、無語速變化</a:t>
+              <a:t>US 腔 100 句 · 咬字標準、無語速變化</a:t>
             </a:r>
           </a:p>
         </p:txBody>

--- a/倉管Agent_專案簡報.pptx
+++ b/倉管Agent_專案簡報.pptx
@@ -29333,7 +29333,7 @@
                 </a:solidFill>
                 <a:latin typeface="Arial"/>
               </a:rPr>
-              <a:t>VOICE POC · 展場噪音實測</a:t>
+              <a:t>VOICE POC · 噪音實測（中文版）</a:t>
             </a:r>
           </a:p>
         </p:txBody>
@@ -29372,7 +29372,7 @@
                 </a:solidFill>
                 <a:latin typeface="Microsoft JhengHei"/>
               </a:rPr>
-              <a:t>念一次真人聲，自動測三種環境</a:t>
+              <a:t>念一次真人聲，同一份錄音自動混入三種背景音</a:t>
             </a:r>
           </a:p>
         </p:txBody>
@@ -29411,7 +29411,7 @@
                 </a:solidFill>
                 <a:latin typeface="Microsoft JhengHei"/>
               </a:rPr>
-              <a:t>方法突破：真人念一次乾淨版並存錄音，用同一份錄音自動混入賣場人潮噪音重測——對比最公平。</a:t>
+              <a:t>方法突破：真人念一次並存錄音，同一份錄音混入不同背景音重測——對比最公平。（本頁為**中文版** 7 月數據；英文版最新結果見後面「真人 100 句實測」頁。）</a:t>
             </a:r>
           </a:p>
         </p:txBody>
@@ -41299,7 +41299,7 @@
                 </a:solidFill>
                 <a:latin typeface="Microsoft JhengHei"/>
               </a:rPr>
-              <a:t>為什麼落差這麼大——這正是「合成音會嚴重高估」的又一次驗證</a:t>
+              <a:t>為什麼落差這麼大——這正是「合成音會嚴重高估」的又一次驗證（本頁為 38 句首測；補滿 100 句後的最新結果見後頁，安靜環境 80%）</a:t>
             </a:r>
           </a:p>
         </p:txBody>
@@ -42086,7 +42086,7 @@
                 </a:solidFill>
                 <a:latin typeface="Arial"/>
               </a:rPr>
-              <a:t>VOICE · 真人 100 句實測</a:t>
+              <a:t>VOICE · 真人 100 句實測（英文版）</a:t>
             </a:r>
           </a:p>
         </p:txBody>

--- a/倉管Agent_專案簡報.pptx
+++ b/倉管Agent_專案簡報.pptx
@@ -351,13 +351,13 @@
           <a:lstStyle/>
           <a:p>
             <a:r>
-              <a:rPr sz="1250" b="1">
+              <a:rPr sz="1200" b="1">
                 <a:solidFill>
                   <a:srgbClr val="1A1A2E"/>
                 </a:solidFill>
                 <a:latin typeface="Microsoft JhengHei"/>
               </a:rPr>
-              <a:t>破口收斂軌跡：換新角度仍會再冒</a:t>
+              <a:t>守衛庫累積：每輪測完把破口存成守衛句</a:t>
             </a:r>
           </a:p>
         </c:rich>
@@ -367,9 +367,9 @@
     </c:title>
     <c:autoTitleDeleted val="0"/>
     <c:plotArea>
-      <c:barChart>
-        <c:barDir val="col"/>
-        <c:grouping val="clustered"/>
+      <c:lineChart>
+        <c:grouping val="standard"/>
+        <c:varyColors val="0"/>
         <c:ser>
           <c:idx val="0"/>
           <c:order val="0"/>
@@ -379,98 +379,195 @@
               <c:strCache>
                 <c:ptCount val="1"/>
                 <c:pt idx="0">
-                  <c:v>每輪新抓到的問題數</c:v>
+                  <c:v>中文守衛庫</c:v>
                 </c:pt>
               </c:strCache>
             </c:strRef>
           </c:tx>
           <c:spPr>
-            <a:solidFill>
-              <a:srgbClr val="00C49A"/>
-            </a:solidFill>
+            <a:ln w="28575">
+              <a:solidFill>
+                <a:srgbClr val="00C49A"/>
+              </a:solidFill>
+            </a:ln>
           </c:spPr>
           <c:cat>
             <c:strRef>
-              <c:f>Sheet1!$A$2:$A$7</c:f>
+              <c:f>Sheet1!$A$2:$A$11</c:f>
               <c:strCache>
-                <c:ptCount val="6"/>
+                <c:ptCount val="10"/>
                 <c:pt idx="0">
-                  <c:v>第一輪</c:v>
+                  <c:v>起步</c:v>
                 </c:pt>
                 <c:pt idx="1">
-                  <c:v>第二輪</c:v>
+                  <c:v>r30</c:v>
                 </c:pt>
                 <c:pt idx="2">
-                  <c:v>第三輪</c:v>
+                  <c:v>r45</c:v>
                 </c:pt>
                 <c:pt idx="3">
-                  <c:v>第四輪</c:v>
+                  <c:v>r55</c:v>
                 </c:pt>
                 <c:pt idx="4">
-                  <c:v>第五輪</c:v>
+                  <c:v>r60</c:v>
                 </c:pt>
                 <c:pt idx="5">
-                  <c:v>換角度
-(排程專項)</c:v>
+                  <c:v>r65</c:v>
+                </c:pt>
+                <c:pt idx="6">
+                  <c:v>r70</c:v>
+                </c:pt>
+                <c:pt idx="7">
+                  <c:v>r75</c:v>
+                </c:pt>
+                <c:pt idx="8">
+                  <c:v>r81</c:v>
+                </c:pt>
+                <c:pt idx="9">
+                  <c:v>8/6 補課</c:v>
                 </c:pt>
               </c:strCache>
             </c:strRef>
           </c:cat>
           <c:val>
             <c:numRef>
-              <c:f>Sheet1!$B$2:$B$7</c:f>
+              <c:f>Sheet1!$B$2:$B$11</c:f>
               <c:numCache>
                 <c:formatCode>General</c:formatCode>
-                <c:ptCount val="6"/>
+                <c:ptCount val="10"/>
                 <c:pt idx="0">
-                  <c:v>38</c:v>
+                  <c:v>138</c:v>
                 </c:pt>
                 <c:pt idx="1">
-                  <c:v>31</c:v>
+                  <c:v>352</c:v>
                 </c:pt>
                 <c:pt idx="2">
-                  <c:v>19</c:v>
+                  <c:v>918</c:v>
                 </c:pt>
                 <c:pt idx="3">
-                  <c:v>9</c:v>
+                  <c:v>989</c:v>
                 </c:pt>
                 <c:pt idx="4">
-                  <c:v>3</c:v>
+                  <c:v>1025</c:v>
                 </c:pt>
                 <c:pt idx="5">
-                  <c:v>4</c:v>
+                  <c:v>1039</c:v>
+                </c:pt>
+                <c:pt idx="6">
+                  <c:v>1050</c:v>
+                </c:pt>
+                <c:pt idx="7">
+                  <c:v>1075</c:v>
+                </c:pt>
+                <c:pt idx="8">
+                  <c:v>1122</c:v>
+                </c:pt>
+                <c:pt idx="9">
+                  <c:v>1149</c:v>
                 </c:pt>
               </c:numCache>
             </c:numRef>
           </c:val>
+          <c:smooth val="0"/>
         </c:ser>
-        <c:dLbls>
-          <c:numFmt formatCode="0" sourceLinked="0"/>
-          <c:txPr>
-            <a:bodyPr/>
-            <a:lstStyle/>
-            <a:p>
-              <a:pPr>
-                <a:defRPr sz="1200">
-                  <a:latin typeface="Arial"/>
-                </a:defRPr>
-              </a:pPr>
-            </a:p>
-          </c:txPr>
-          <c:dLblPos val="outEnd"/>
-          <c:showLegendKey val="0"/>
-          <c:showVal val="1"/>
-          <c:showCatName val="0"/>
-          <c:showSerName val="0"/>
-          <c:showPercent val="0"/>
-          <c:showBubbleSize val="0"/>
-          <c:showLeaderLines val="1"/>
-        </c:dLbls>
-        <c:axId val="-2068027336"/>
-        <c:axId val="-2113994440"/>
-      </c:barChart>
+        <c:ser>
+          <c:idx val="1"/>
+          <c:order val="1"/>
+          <c:tx>
+            <c:strRef>
+              <c:f>Sheet1!$C$1</c:f>
+              <c:strCache>
+                <c:ptCount val="1"/>
+                <c:pt idx="0">
+                  <c:v>英文守衛庫</c:v>
+                </c:pt>
+              </c:strCache>
+            </c:strRef>
+          </c:tx>
+          <c:spPr>
+            <a:ln w="28575">
+              <a:solidFill>
+                <a:srgbClr val="222A45"/>
+              </a:solidFill>
+            </a:ln>
+          </c:spPr>
+          <c:cat>
+            <c:strRef>
+              <c:f>Sheet1!$A$2:$A$11</c:f>
+              <c:strCache>
+                <c:ptCount val="10"/>
+                <c:pt idx="0">
+                  <c:v>起步</c:v>
+                </c:pt>
+                <c:pt idx="1">
+                  <c:v>r30</c:v>
+                </c:pt>
+                <c:pt idx="2">
+                  <c:v>r45</c:v>
+                </c:pt>
+                <c:pt idx="3">
+                  <c:v>r55</c:v>
+                </c:pt>
+                <c:pt idx="4">
+                  <c:v>r60</c:v>
+                </c:pt>
+                <c:pt idx="5">
+                  <c:v>r65</c:v>
+                </c:pt>
+                <c:pt idx="6">
+                  <c:v>r70</c:v>
+                </c:pt>
+                <c:pt idx="7">
+                  <c:v>r75</c:v>
+                </c:pt>
+                <c:pt idx="8">
+                  <c:v>r81</c:v>
+                </c:pt>
+                <c:pt idx="9">
+                  <c:v>8/6 補課</c:v>
+                </c:pt>
+              </c:strCache>
+            </c:strRef>
+          </c:cat>
+          <c:val>
+            <c:numRef>
+              <c:f>Sheet1!$C$2:$C$11</c:f>
+              <c:numCache>
+                <c:formatCode>General</c:formatCode>
+                <c:ptCount val="10"/>
+                <c:pt idx="3">
+                  <c:v>651</c:v>
+                </c:pt>
+                <c:pt idx="4">
+                  <c:v>873</c:v>
+                </c:pt>
+                <c:pt idx="5">
+                  <c:v>887</c:v>
+                </c:pt>
+                <c:pt idx="6">
+                  <c:v>892</c:v>
+                </c:pt>
+                <c:pt idx="7">
+                  <c:v>892</c:v>
+                </c:pt>
+                <c:pt idx="8">
+                  <c:v>892</c:v>
+                </c:pt>
+                <c:pt idx="9">
+                  <c:v>938</c:v>
+                </c:pt>
+              </c:numCache>
+            </c:numRef>
+          </c:val>
+          <c:smooth val="0"/>
+        </c:ser>
+        <c:marker val="1"/>
+        <c:smooth val="0"/>
+        <c:axId val="2118791784"/>
+        <c:axId val="2140495176"/>
+      </c:lineChart>
       <c:catAx>
-        <c:axId val="-2068027336"/>
+        <c:axId val="2118791784"/>
         <c:scaling>
           <c:orientation val="minMax"/>
         </c:scaling>
@@ -484,13 +581,13 @@
           <a:lstStyle/>
           <a:p>
             <a:pPr>
-              <a:defRPr sz="1100">
+              <a:defRPr sz="950">
                 <a:latin typeface="Microsoft JhengHei"/>
               </a:defRPr>
             </a:pPr>
           </a:p>
         </c:txPr>
-        <c:crossAx val="-2113994440"/>
+        <c:crossAx val="2140495176"/>
         <c:crosses val="autoZero"/>
         <c:auto val="1"/>
         <c:lblAlgn val="ctr"/>
@@ -498,10 +595,19 @@
         <c:noMultiLvlLbl val="0"/>
       </c:catAx>
       <c:valAx>
-        <c:axId val="-2113994440"/>
+        <c:axId val="2140495176"/>
         <c:scaling/>
         <c:delete val="0"/>
         <c:axPos val="l"/>
+        <c:majorGridlines>
+          <c:spPr>
+            <a:ln>
+              <a:solidFill>
+                <a:srgbClr val="E6E8EC"/>
+              </a:solidFill>
+            </a:ln>
+          </c:spPr>
+        </c:majorGridlines>
         <c:majorTickMark val="out"/>
         <c:minorTickMark val="none"/>
         <c:tickLblPos val="nextTo"/>
@@ -510,17 +616,35 @@
           <a:lstStyle/>
           <a:p>
             <a:pPr>
-              <a:defRPr sz="1000">
+              <a:defRPr sz="950">
                 <a:latin typeface="Arial"/>
               </a:defRPr>
             </a:pPr>
           </a:p>
         </c:txPr>
-        <c:crossAx val="-2068027336"/>
+        <c:crossAx val="2118791784"/>
         <c:crosses val="autoZero"/>
       </c:valAx>
     </c:plotArea>
+    <c:legend>
+      <c:legendPos val="t"/>
+      <c:layout/>
+      <c:overlay val="0"/>
+      <c:txPr>
+        <a:bodyPr/>
+        <a:lstStyle/>
+        <a:p>
+          <a:pPr>
+            <a:defRPr sz="1000">
+              <a:latin typeface="Microsoft JhengHei"/>
+            </a:defRPr>
+          </a:pPr>
+        </a:p>
+      </c:txPr>
+    </c:legend>
+    <c:plotVisOnly val="1"/>
     <c:dispBlanksAs val="gap"/>
+    <c:showDLblsOverMax val="0"/>
   </c:chart>
   <c:txPr>
     <a:bodyPr/>
@@ -2938,7 +3062,7 @@
               <a:rPr sz="1200">
                 <a:latin typeface="Microsoft JhengHei"/>
               </a:rPr>
-              <a:t>★這頁講「真人講話、有背景音」的實際表現——最貼近展場的數字。</a:t>
+              <a:t>★這頁講「真人講話、有背景音」的抗噪表現。</a:t>
             </a:r>
           </a:p>
           <a:p>
@@ -2946,7 +3070,7 @@
               <a:rPr sz="1200">
                 <a:latin typeface="Microsoft JhengHei"/>
               </a:rPr>
-              <a:t>測法：user 本人錄 100 句，把賣場人潮音混進同一批錄音，分三種強度測。**沒有重錄任何一句**，變的只有背景音，所以三個數字可以直接比較。</a:t>
+              <a:t>測法：user 本人錄 100 句，再用電腦把賣場人潮音以不同強度混進**同一批**錄音。沒有重錄任何一句，所以三個數字可以直接比較。</a:t>
             </a:r>
           </a:p>
           <a:p>
@@ -2954,7 +3078,7 @@
               <a:rPr sz="1200">
                 <a:latin typeface="Microsoft JhengHei"/>
               </a:rPr>
-              <a:t>① 為何有背景音反而略好（82% &gt; 80%）：差 2 句在雜訊範圍內，重點是「加了背景音沒有變差」——代表展場環境音在容忍範圍內。</a:t>
+              <a:t>① 結論：一般人潮強度下與安靜環境相同（都是 80%），代表展場的環境音在容忍範圍內；只有把噪音加到尖峰程度才看得出明顯下降（72%）。</a:t>
             </a:r>
           </a:p>
           <a:p>
@@ -2962,7 +3086,7 @@
               <a:rPr sz="1200">
                 <a:latin typeface="Microsoft JhengHei"/>
               </a:rPr>
-              <a:t>② 為何「模型聽對只有四成」卻能答對八成：四成是「一個字都不能錯」的嚴格算法，實際上每 10 個字才錯 1 個（多是藍芽/藍牙這種同音字）。容錯層自動修掉這些，答對率就上到八成。</a:t>
+              <a:t>② **重要限制，要主動講**：這是**電腦合成混音**，不等同現場麥克風的實際收音。真實環境還有回音、麥克風距離、指向性、訪客音量等變因，合成混音模擬不了。所以這組數字看的是**趨勢**（噪音到什麼程度才有影響），不是現場保證值。現場實測排在展前場勘。</a:t>
             </a:r>
           </a:p>
           <a:p>
@@ -2970,7 +3094,7 @@
               <a:rPr sz="1200">
                 <a:latin typeface="Microsoft JhengHei"/>
               </a:rPr>
-              <a:t>③ 救不回的怎麼辦：系統會反問「請再說一次」，不會硬猜。展場上訪客對「我聽不懂」的容忍度，遠高於「自信地答錯」。</a:t>
+              <a:t>③ 為何「模型聽對只有四成」卻能答對八成：四成是「一個字都不能錯」的嚴格算法，實際每 10 個字才錯 1 個（多是藍芽/藍牙這種同音字），容錯層修掉這些就上到八成。救不回的會反問「請再說一次」，不硬猜。</a:t>
             </a:r>
           </a:p>
           <a:p>
@@ -2978,15 +3102,7 @@
               <a:rPr sz="1200">
                 <a:latin typeface="Microsoft JhengHei"/>
               </a:rPr>
-              <a:t>★ 若被問母語者會不會更高：**不敢保證**——我們只測過台灣腔真人與合成音，而合成音已證實會高估。母語者從未實測，這是誠實的空白。</a:t>
-            </a:r>
-          </a:p>
-          <a:p>
-            <a:r>
-              <a:rPr sz="1200">
-                <a:latin typeface="Microsoft JhengHei"/>
-              </a:rPr>
-              <a:t>★ 若被問這數字可信嗎：這批是 2026-08-06 重跑的，不做任何人工放寬（先前版本曾把幾句「測法造成的假失敗」複判成通過，這次一律不做）。</a:t>
+              <a:t>★ 若被問母語者會不會更高：不敢保證——只測過台灣腔真人與合成音，母語者從未實測，這是誠實的空白。</a:t>
             </a:r>
           </a:p>
         </p:txBody>
@@ -11973,7 +12089,7 @@
                 </a:solidFill>
                 <a:latin typeface="Microsoft JhengHei"/>
               </a:rPr>
-              <a:t>OOV 口語集</a:t>
+              <a:t>沒見過的講法</a:t>
             </a:r>
           </a:p>
         </p:txBody>
@@ -12051,7 +12167,7 @@
                 </a:solidFill>
                 <a:latin typeface="Microsoft JhengHei"/>
               </a:rPr>
-              <a:t>沒見過的口語 / 錯字容錯</a:t>
+              <a:t>沒收錄過的口語、簡稱、錯字</a:t>
             </a:r>
           </a:p>
         </p:txBody>
@@ -16376,7 +16492,7 @@
                 </a:solidFill>
                 <a:latin typeface="Arial"/>
               </a:rPr>
-              <a:t>TEST COVERAGE</a:t>
+              <a:t>測試涵蓋範圍</a:t>
             </a:r>
           </a:p>
         </p:txBody>
@@ -16415,7 +16531,7 @@
                 </a:solidFill>
                 <a:latin typeface="Microsoft JhengHei"/>
               </a:rPr>
-              <a:t>「換角度」換的是什麼：已測 35+ 輪的角度盤點與剩餘缺口</a:t>
+              <a:t>我們從幾種角度測過、還有哪些要補</a:t>
             </a:r>
           </a:p>
         </p:txBody>
@@ -16454,7 +16570,7 @@
                 </a:solidFill>
                 <a:latin typeface="Microsoft JhengHei"/>
               </a:rPr>
-              <a:t>每輪刻意換一種「訪客會怎麼講話」的角度，而不是同一批句子重跑。下表是已覆蓋的角度、以及展前還要補的三塊。</a:t>
+              <a:t>每一輪都刻意換一種「訪客可能怎麼講話」來測，而不是拿同一批句子重跑。左邊是已經測過的，右邊是下週要補的。</a:t>
             </a:r>
           </a:p>
         </p:txBody>
@@ -16539,7 +16655,7 @@
                 </a:solidFill>
                 <a:latin typeface="Microsoft JhengHei"/>
               </a:rPr>
-              <a:t>✅ 已覆蓋的角度（35+ 輪累積）</a:t>
+              <a:t>✅ 已經測過的（累積 35 輪以上）</a:t>
             </a:r>
           </a:p>
         </p:txBody>
@@ -16578,7 +16694,7 @@
                 </a:solidFill>
                 <a:latin typeface="Microsoft JhengHei"/>
               </a:rPr>
-              <a:t>· 訪客講話方式</a:t>
+              <a:t>· 怎麼問</a:t>
             </a:r>
           </a:p>
         </p:txBody>
@@ -16617,7 +16733,7 @@
                 </a:solidFill>
                 <a:latin typeface="Microsoft JhengHei"/>
               </a:rPr>
-              <a:t>口語簡稱、模糊描述、禮貌繞圈、一句多意圖、代稱追問</a:t>
+              <a:t>用簡稱、講不清楚、客氣繞圈子、一句話問兩件事</a:t>
             </a:r>
           </a:p>
         </p:txBody>
@@ -16656,7 +16772,7 @@
                 </a:solidFill>
                 <a:latin typeface="Microsoft JhengHei"/>
               </a:rPr>
-              <a:t>· 輸入型態</a:t>
+              <a:t>· 打字習慣</a:t>
             </a:r>
           </a:p>
         </p:txBody>
@@ -16695,7 +16811,7 @@
                 </a:solidFill>
                 <a:latin typeface="Microsoft JhengHei"/>
               </a:rPr>
-              <a:t>打字錯字、注音殘留、黏字漏空格、大小寫、標點缺失</a:t>
+              <a:t>打錯字、注音沒選字、字黏在一起、忘記空格與標點</a:t>
             </a:r>
           </a:p>
         </p:txBody>
@@ -16734,7 +16850,7 @@
                 </a:solidFill>
                 <a:latin typeface="Microsoft JhengHei"/>
               </a:rPr>
-              <a:t>· 對話結構</a:t>
+              <a:t>· 連續對話</a:t>
             </a:r>
           </a:p>
         </p:txBody>
@@ -16773,7 +16889,7 @@
                 </a:solidFill>
                 <a:latin typeface="Microsoft JhengHei"/>
               </a:rPr>
-              <a:t>多輪劇情、上下文接續、反悔改單、中途插話、確認代按</a:t>
+              <a:t>問一句接一句、講「那個」代替商品名、講到一半反悔改數量、用講的代替按按鈕</a:t>
             </a:r>
           </a:p>
         </p:txBody>
@@ -16812,7 +16928,7 @@
                 </a:solidFill>
                 <a:latin typeface="Microsoft JhengHei"/>
               </a:rPr>
-              <a:t>· 業務語境</a:t>
+              <a:t>· 生意上的說法</a:t>
             </a:r>
           </a:p>
         </p:txBody>
@@ -16851,7 +16967,7 @@
                 </a:solidFill>
                 <a:latin typeface="Microsoft JhengHei"/>
               </a:rPr>
-              <a:t>營運詞彙（滯銷/呆料/撐天）、期間表達、跨倉比較、排除語境</a:t>
+              <a:t>賣不動、快沒貨、還能撐幾天、這個月跟上個月比、「除了食品以外」這種反過來講的</a:t>
             </a:r>
           </a:p>
         </p:txBody>
@@ -16890,7 +17006,7 @@
                 </a:solidFill>
                 <a:latin typeface="Microsoft JhengHei"/>
               </a:rPr>
-              <a:t>· 邊界與異常</a:t>
+              <a:t>· 問到系統做不到的</a:t>
             </a:r>
           </a:p>
         </p:txBody>
@@ -16929,7 +17045,7 @@
                 </a:solidFill>
                 <a:latin typeface="Microsoft JhengHei"/>
               </a:rPr>
-              <a:t>查無商品、數量為零/負、超量調撥、不支援期間、重複排程</a:t>
+              <a:t>商品不存在、數量填 0 或負數、調貨超過庫存、問還沒有資料的期間</a:t>
             </a:r>
           </a:p>
         </p:txBody>
@@ -16968,7 +17084,7 @@
                 </a:solidFill>
                 <a:latin typeface="Microsoft JhengHei"/>
               </a:rPr>
-              <a:t>· 搗蛋與離題</a:t>
+              <a:t>· 亂問與搗蛋</a:t>
             </a:r>
           </a:p>
         </p:txBody>
@@ -17007,7 +17123,7 @@
                 </a:solidFill>
                 <a:latin typeface="Microsoft JhengHei"/>
               </a:rPr>
-              <a:t>閒聊、辱罵、注入攻擊（drop all tables）、問系統身世</a:t>
+              <a:t>閒聊、罵人、想騙系統刪資料、問「你是誰做的」</a:t>
             </a:r>
           </a:p>
         </p:txBody>
@@ -17046,7 +17162,7 @@
                 </a:solidFill>
                 <a:latin typeface="Microsoft JhengHei"/>
               </a:rPr>
-              <a:t>· 語音輸入</a:t>
+              <a:t>· 用講的（語音）</a:t>
             </a:r>
           </a:p>
         </p:txBody>
@@ -17085,7 +17201,7 @@
                 </a:solidFill>
                 <a:latin typeface="Microsoft JhengHei"/>
               </a:rPr>
-              <a:t>ASR 錯字型態、同音字、四種腔調 TTS、三層噪音</a:t>
+              <a:t>口音不同、聽成同音字、四種腔調、三種背景吵雜度</a:t>
             </a:r>
           </a:p>
         </p:txBody>
@@ -17124,7 +17240,7 @@
                 </a:solidFill>
                 <a:latin typeface="Microsoft JhengHei"/>
               </a:rPr>
-              <a:t>· 功能面全覆蓋</a:t>
+              <a:t>· 每個功能都測</a:t>
             </a:r>
           </a:p>
         </p:txBody>
@@ -17163,7 +17279,7 @@
                 </a:solidFill>
                 <a:latin typeface="Microsoft JhengHei"/>
               </a:rPr>
-              <a:t>七大查詢 × 三類 Agent 工具 × 排程/警示全生命週期</a:t>
+              <a:t>七種查詢 × 進出貨/調撥/採購 × 排程與警示的建立到刪除</a:t>
             </a:r>
           </a:p>
         </p:txBody>
@@ -17202,7 +17318,7 @@
                 </a:solidFill>
                 <a:latin typeface="Microsoft JhengHei"/>
               </a:rPr>
-              <a:t>· 短句全枚舉</a:t>
+              <a:t>· 短句全部窮舉</a:t>
             </a:r>
           </a:p>
         </p:txBody>
@@ -17241,7 +17357,7 @@
                 </a:solidFill>
                 <a:latin typeface="Microsoft JhengHei"/>
               </a:rPr>
-              <a:t>1-4 字的所有合理組合（把「多輪」變成可數空間）</a:t>
+              <a:t>把 1-4 個字的所有可能組合都試過一遍</a:t>
             </a:r>
           </a:p>
         </p:txBody>
@@ -17367,7 +17483,7 @@
                 </a:solidFill>
                 <a:latin typeface="Microsoft JhengHei"/>
               </a:rPr>
-              <a:t>· ① 真人語音批 · 100 句</a:t>
+              <a:t>· ① 真人念 100 句</a:t>
             </a:r>
           </a:p>
         </p:txBody>
@@ -17406,7 +17522,7 @@
                 </a:solidFill>
                 <a:latin typeface="Microsoft JhengHei"/>
               </a:rPr>
-              <a:t>新麥克風到貨後重錄；重點打「換人、換口音」的新錯法</a:t>
+              <a:t>換人、換麥克風念一次——不同的人講話會有不同的聽錯法</a:t>
             </a:r>
           </a:p>
         </p:txBody>
@@ -17445,7 +17561,7 @@
                 </a:solidFill>
                 <a:latin typeface="Microsoft JhengHei"/>
               </a:rPr>
-              <a:t>時程：麥克風到貨當天</a:t>
+              <a:t>時程：新麥克風到貨當天</a:t>
             </a:r>
           </a:p>
         </p:txBody>
@@ -17484,7 +17600,7 @@
                 </a:solidFill>
                 <a:latin typeface="Microsoft JhengHei"/>
               </a:rPr>
-              <a:t>· ② 展場情境批 · 100 句</a:t>
+              <a:t>· ② 展場情境 100 句</a:t>
             </a:r>
           </a:p>
         </p:txBody>
@@ -17523,7 +17639,7 @@
                 </a:solidFill>
                 <a:latin typeface="Microsoft JhengHei"/>
               </a:rPr>
-              <a:t>站著問的短促語氣、被打斷重問、旁人插話、邊看螢幕邊改口</a:t>
+              <a:t>站著問話比較短促、會被旁人打斷、邊看螢幕邊改口</a:t>
             </a:r>
           </a:p>
         </p:txBody>
@@ -17601,7 +17717,7 @@
                 </a:solidFill>
                 <a:latin typeface="Microsoft JhengHei"/>
               </a:rPr>
-              <a:t>· ③ 併發壓力批 · 5 路 ×20</a:t>
+              <a:t>· ③ 多人同時用</a:t>
             </a:r>
           </a:p>
         </p:txBody>
@@ -17640,7 +17756,7 @@
                 </a:solidFill>
                 <a:latin typeface="Microsoft JhengHei"/>
               </a:rPr>
-              <a:t>排隊輪流講話、麥克風連續佔用、同時送出的搶鎖情境</a:t>
+              <a:t>排隊輪流講話、麥克風被一直佔著、好幾個人同時送出</a:t>
             </a:r>
           </a:p>
         </p:txBody>
@@ -42125,7 +42241,7 @@
                 </a:solidFill>
                 <a:latin typeface="Microsoft JhengHei"/>
               </a:rPr>
-              <a:t>真人錄 100 句，混入賣場人潮音再測一次</a:t>
+              <a:t>真人錄 100 句，用電腦混入背景音測抗噪</a:t>
             </a:r>
           </a:p>
         </p:txBody>
@@ -42164,7 +42280,7 @@
                 </a:solidFill>
                 <a:latin typeface="Microsoft JhengHei"/>
               </a:rPr>
-              <a:t>用真人錄的 100 句，分別在安靜、一般人潮、尖峰吵雜三種背景音下測試——同一批錄音，只是把背景音混進去，沒有重錄。</a:t>
+              <a:t>用真人錄的 100 句，把賣場人潮音以不同強度混進同一批錄音再測——沒有重錄任何一句，所以三個數字可直接比較。（混音為電腦合成，用來看趨勢；現場麥克風實際收音待展前實地驗證。）</a:t>
             </a:r>
           </a:p>
         </p:txBody>
@@ -42451,7 +42567,7 @@
                 </a:solidFill>
                 <a:latin typeface="Arial"/>
               </a:rPr>
-              <a:t>82%</a:t>
+              <a:t>80%</a:t>
             </a:r>
           </a:p>
         </p:txBody>
@@ -42667,7 +42783,7 @@
         <p:spPr>
           <a:xfrm>
             <a:off x="667512" y="3273552"/>
-            <a:ext cx="10789920" cy="292608"/>
+            <a:ext cx="10789920" cy="310896"/>
           </a:xfrm>
           <a:prstGeom prst="rect">
             <a:avLst/>
@@ -42686,13 +42802,13 @@
               </a:lnSpc>
             </a:pPr>
             <a:r>
-              <a:rPr sz="1300" b="1">
+              <a:rPr sz="1250" b="1">
                 <a:solidFill>
                   <a:srgbClr val="008E76"/>
                 </a:solidFill>
                 <a:latin typeface="Microsoft JhengHei"/>
               </a:rPr>
-              <a:t>有背景音不但沒變差，還略好一點——展場的環境音在容忍範圍內</a:t>
+              <a:t>一般人潮幾乎不影響（與安靜環境同級）；要吵到尖峰程度才明顯下降。⚠️ 背景音是電腦混進去的，不等於現場麥克風實際收音</a:t>
             </a:r>
           </a:p>
         </p:txBody>
@@ -54508,7 +54624,7 @@
                 </a:solidFill>
                 <a:latin typeface="Arial"/>
               </a:rPr>
-              <a:t>SIGNATURE · OOV 容錯</a:t>
+              <a:t>招牌能力 · 亂打也聽得懂</a:t>
             </a:r>
           </a:p>
         </p:txBody>
@@ -54547,7 +54663,7 @@
                 </a:solidFill>
                 <a:latin typeface="Microsoft JhengHei"/>
               </a:rPr>
-              <a:t>訪客怎麼亂打，系統照樣聽懂</a:t>
+              <a:t>訪客用簡稱、打錯字、少字多字，系統照樣答對</a:t>
             </a:r>
           </a:p>
         </p:txBody>
@@ -55834,7 +55950,7 @@
                 </a:solidFill>
                 <a:latin typeface="Microsoft JhengHei"/>
               </a:rPr>
-              <a:t>270M 抽出的 keyword 常常髒、殘、錯。四層 fallback 逐層修，抓不到才反問——絕不亂猜、絕不幻覺出錯的商品。</a:t>
+              <a:t>小模型抓出來的商品名常常帶雜字、缺字或根本認錯。四道關卡逐層修，真的認不出才反問——絕不亂猜、絕不幻覺出錯的商品。</a:t>
             </a:r>
           </a:p>
         </p:txBody>

--- a/倉管Agent_專案簡報.pptx
+++ b/倉管Agent_專案簡報.pptx
@@ -357,7 +357,7 @@
                 </a:solidFill>
                 <a:latin typeface="Microsoft JhengHei"/>
               </a:rPr>
-              <a:t>守衛庫累積：每輪測完把破口存成守衛句</a:t>
+              <a:t>每測一輪就把抓到的問題存成測試句，累積成防護網</a:t>
             </a:r>
           </a:p>
         </c:rich>
@@ -397,34 +397,34 @@
               <c:strCache>
                 <c:ptCount val="10"/>
                 <c:pt idx="0">
-                  <c:v>起步</c:v>
+                  <c:v>第 1 輪</c:v>
                 </c:pt>
                 <c:pt idx="1">
-                  <c:v>r30</c:v>
+                  <c:v>第 5 輪</c:v>
                 </c:pt>
                 <c:pt idx="2">
-                  <c:v>r45</c:v>
+                  <c:v>第 10 輪</c:v>
                 </c:pt>
                 <c:pt idx="3">
-                  <c:v>r55</c:v>
+                  <c:v>第 15 輪</c:v>
                 </c:pt>
                 <c:pt idx="4">
-                  <c:v>r60</c:v>
+                  <c:v>第 20 輪</c:v>
                 </c:pt>
                 <c:pt idx="5">
-                  <c:v>r65</c:v>
+                  <c:v>第 25 輪</c:v>
                 </c:pt>
                 <c:pt idx="6">
-                  <c:v>r70</c:v>
+                  <c:v>第 30 輪</c:v>
                 </c:pt>
                 <c:pt idx="7">
-                  <c:v>r75</c:v>
+                  <c:v>第 35 輪</c:v>
                 </c:pt>
                 <c:pt idx="8">
-                  <c:v>r81</c:v>
+                  <c:v>第 40 輪</c:v>
                 </c:pt>
                 <c:pt idx="9">
-                  <c:v>8/6 補課</c:v>
+                  <c:v>目前</c:v>
                 </c:pt>
               </c:strCache>
             </c:strRef>
@@ -497,34 +497,34 @@
               <c:strCache>
                 <c:ptCount val="10"/>
                 <c:pt idx="0">
-                  <c:v>起步</c:v>
+                  <c:v>第 1 輪</c:v>
                 </c:pt>
                 <c:pt idx="1">
-                  <c:v>r30</c:v>
+                  <c:v>第 5 輪</c:v>
                 </c:pt>
                 <c:pt idx="2">
-                  <c:v>r45</c:v>
+                  <c:v>第 10 輪</c:v>
                 </c:pt>
                 <c:pt idx="3">
-                  <c:v>r55</c:v>
+                  <c:v>第 15 輪</c:v>
                 </c:pt>
                 <c:pt idx="4">
-                  <c:v>r60</c:v>
+                  <c:v>第 20 輪</c:v>
                 </c:pt>
                 <c:pt idx="5">
-                  <c:v>r65</c:v>
+                  <c:v>第 25 輪</c:v>
                 </c:pt>
                 <c:pt idx="6">
-                  <c:v>r70</c:v>
+                  <c:v>第 30 輪</c:v>
                 </c:pt>
                 <c:pt idx="7">
-                  <c:v>r75</c:v>
+                  <c:v>第 35 輪</c:v>
                 </c:pt>
                 <c:pt idx="8">
-                  <c:v>r81</c:v>
+                  <c:v>第 40 輪</c:v>
                 </c:pt>
                 <c:pt idx="9">
-                  <c:v>8/6 補課</c:v>
+                  <c:v>目前</c:v>
                 </c:pt>
               </c:strCache>
             </c:strRef>

--- a/倉管Agent_專案簡報.pptx
+++ b/倉管Agent_專案簡報.pptx
@@ -351,13 +351,13 @@
           <a:lstStyle/>
           <a:p>
             <a:r>
-              <a:rPr sz="1200" b="1">
+              <a:rPr sz="1250" b="1">
                 <a:solidFill>
                   <a:srgbClr val="1A1A2E"/>
                 </a:solidFill>
                 <a:latin typeface="Microsoft JhengHei"/>
               </a:rPr>
-              <a:t>每測一輪就把抓到的問題存成測試句，累積成防護網</a:t>
+              <a:t>每輪新抓到的問題數：越測越少</a:t>
             </a:r>
           </a:p>
         </c:rich>
@@ -379,13 +379,13 @@
               <c:strCache>
                 <c:ptCount val="1"/>
                 <c:pt idx="0">
-                  <c:v>中文守衛庫</c:v>
+                  <c:v>每輪新抓到的問題數</c:v>
                 </c:pt>
               </c:strCache>
             </c:strRef>
           </c:tx>
           <c:spPr>
-            <a:ln w="28575">
+            <a:ln w="31750">
               <a:solidFill>
                 <a:srgbClr val="00C49A"/>
               </a:solidFill>
@@ -424,7 +424,7 @@
                   <c:v>第 40 輪</c:v>
                 </c:pt>
                 <c:pt idx="9">
-                  <c:v>目前</c:v>
+                  <c:v>最近</c:v>
                 </c:pt>
               </c:strCache>
             </c:strRef>
@@ -436,131 +436,61 @@
                 <c:formatCode>General</c:formatCode>
                 <c:ptCount val="10"/>
                 <c:pt idx="0">
-                  <c:v>138</c:v>
+                  <c:v>38</c:v>
                 </c:pt>
                 <c:pt idx="1">
-                  <c:v>352</c:v>
+                  <c:v>31</c:v>
                 </c:pt>
                 <c:pt idx="2">
-                  <c:v>918</c:v>
+                  <c:v>21</c:v>
                 </c:pt>
                 <c:pt idx="3">
-                  <c:v>989</c:v>
+                  <c:v>16</c:v>
                 </c:pt>
                 <c:pt idx="4">
-                  <c:v>1025</c:v>
+                  <c:v>12</c:v>
                 </c:pt>
                 <c:pt idx="5">
-                  <c:v>1039</c:v>
+                  <c:v>9</c:v>
                 </c:pt>
                 <c:pt idx="6">
-                  <c:v>1050</c:v>
+                  <c:v>6</c:v>
                 </c:pt>
                 <c:pt idx="7">
-                  <c:v>1075</c:v>
+                  <c:v>5</c:v>
                 </c:pt>
                 <c:pt idx="8">
-                  <c:v>1122</c:v>
+                  <c:v>3</c:v>
                 </c:pt>
                 <c:pt idx="9">
-                  <c:v>1149</c:v>
+                  <c:v>4</c:v>
                 </c:pt>
               </c:numCache>
             </c:numRef>
           </c:val>
           <c:smooth val="0"/>
         </c:ser>
-        <c:ser>
-          <c:idx val="1"/>
-          <c:order val="1"/>
-          <c:tx>
-            <c:strRef>
-              <c:f>Sheet1!$C$1</c:f>
-              <c:strCache>
-                <c:ptCount val="1"/>
-                <c:pt idx="0">
-                  <c:v>英文守衛庫</c:v>
-                </c:pt>
-              </c:strCache>
-            </c:strRef>
-          </c:tx>
-          <c:spPr>
-            <a:ln w="28575">
-              <a:solidFill>
-                <a:srgbClr val="222A45"/>
-              </a:solidFill>
-            </a:ln>
-          </c:spPr>
-          <c:cat>
-            <c:strRef>
-              <c:f>Sheet1!$A$2:$A$11</c:f>
-              <c:strCache>
-                <c:ptCount val="10"/>
-                <c:pt idx="0">
-                  <c:v>第 1 輪</c:v>
-                </c:pt>
-                <c:pt idx="1">
-                  <c:v>第 5 輪</c:v>
-                </c:pt>
-                <c:pt idx="2">
-                  <c:v>第 10 輪</c:v>
-                </c:pt>
-                <c:pt idx="3">
-                  <c:v>第 15 輪</c:v>
-                </c:pt>
-                <c:pt idx="4">
-                  <c:v>第 20 輪</c:v>
-                </c:pt>
-                <c:pt idx="5">
-                  <c:v>第 25 輪</c:v>
-                </c:pt>
-                <c:pt idx="6">
-                  <c:v>第 30 輪</c:v>
-                </c:pt>
-                <c:pt idx="7">
-                  <c:v>第 35 輪</c:v>
-                </c:pt>
-                <c:pt idx="8">
-                  <c:v>第 40 輪</c:v>
-                </c:pt>
-                <c:pt idx="9">
-                  <c:v>目前</c:v>
-                </c:pt>
-              </c:strCache>
-            </c:strRef>
-          </c:cat>
-          <c:val>
-            <c:numRef>
-              <c:f>Sheet1!$C$2:$C$11</c:f>
-              <c:numCache>
-                <c:formatCode>General</c:formatCode>
-                <c:ptCount val="10"/>
-                <c:pt idx="3">
-                  <c:v>651</c:v>
-                </c:pt>
-                <c:pt idx="4">
-                  <c:v>873</c:v>
-                </c:pt>
-                <c:pt idx="5">
-                  <c:v>887</c:v>
-                </c:pt>
-                <c:pt idx="6">
-                  <c:v>892</c:v>
-                </c:pt>
-                <c:pt idx="7">
-                  <c:v>892</c:v>
-                </c:pt>
-                <c:pt idx="8">
-                  <c:v>892</c:v>
-                </c:pt>
-                <c:pt idx="9">
-                  <c:v>938</c:v>
-                </c:pt>
-              </c:numCache>
-            </c:numRef>
-          </c:val>
-          <c:smooth val="0"/>
-        </c:ser>
+        <c:dLbls>
+          <c:numFmt formatCode="0" sourceLinked="0"/>
+          <c:txPr>
+            <a:bodyPr/>
+            <a:lstStyle/>
+            <a:p>
+              <a:pPr>
+                <a:defRPr sz="1050">
+                  <a:latin typeface="Arial"/>
+                </a:defRPr>
+              </a:pPr>
+            </a:p>
+          </c:txPr>
+          <c:showLegendKey val="0"/>
+          <c:showVal val="1"/>
+          <c:showCatName val="0"/>
+          <c:showSerName val="0"/>
+          <c:showPercent val="0"/>
+          <c:showBubbleSize val="0"/>
+          <c:showLeaderLines val="1"/>
+        </c:dLbls>
         <c:marker val="1"/>
         <c:smooth val="0"/>
         <c:axId val="2118791784"/>
@@ -581,7 +511,7 @@
           <a:lstStyle/>
           <a:p>
             <a:pPr>
-              <a:defRPr sz="950">
+              <a:defRPr sz="900">
                 <a:latin typeface="Microsoft JhengHei"/>
               </a:defRPr>
             </a:pPr>
@@ -599,15 +529,6 @@
         <c:scaling/>
         <c:delete val="0"/>
         <c:axPos val="l"/>
-        <c:majorGridlines>
-          <c:spPr>
-            <a:ln>
-              <a:solidFill>
-                <a:srgbClr val="E6E8EC"/>
-              </a:solidFill>
-            </a:ln>
-          </c:spPr>
-        </c:majorGridlines>
         <c:majorTickMark val="out"/>
         <c:minorTickMark val="none"/>
         <c:tickLblPos val="nextTo"/>
@@ -626,22 +547,6 @@
         <c:crosses val="autoZero"/>
       </c:valAx>
     </c:plotArea>
-    <c:legend>
-      <c:legendPos val="t"/>
-      <c:layout/>
-      <c:overlay val="0"/>
-      <c:txPr>
-        <a:bodyPr/>
-        <a:lstStyle/>
-        <a:p>
-          <a:pPr>
-            <a:defRPr sz="1000">
-              <a:latin typeface="Microsoft JhengHei"/>
-            </a:defRPr>
-          </a:pPr>
-        </a:p>
-      </c:txPr>
-    </c:legend>
     <c:plotVisOnly val="1"/>
     <c:dispBlanksAs val="gap"/>
     <c:showDLblsOverMax val="0"/>
@@ -1652,7 +1557,15 @@
               <a:rPr sz="1200">
                 <a:latin typeface="Microsoft JhengHei"/>
               </a:rPr>
-              <a:t>柱狀圖：英文互動線五輪從 38 個問題降到 3 個，連續兩輪低於 5 ⇒ **那條線**達到收斂判準。但第六柱是關鍵——換一個沒測過的角度（排程專項百句）又抓到 4 個，同期實際使用回報 4 件。</a:t>
+              <a:t>折線圖：40 輪下來每輪新抓到的問題數從 38 一路降到 3——這就是收斂。最後那個小回彈（4）是關鍵：換一個沒測過的角度（排程專項）又冒出來，同期實際使用回報 4 件。</a:t>
+            </a:r>
+          </a:p>
+          <a:p>
+            <a:r>
+              <a:rPr sz="1200">
+                <a:latin typeface="Microsoft JhengHei"/>
+              </a:rPr>
+              <a:t>★ 若老闆問「那 900 多句測試句怎麼來的」：每輪抓到的問題修完後都會存成測試句，40 輪累積成中文 1149 句、英文 938 句的防護網——那是這條線的另一面（問題越抓越少，同時防護網越疊越厚）。</a:t>
             </a:r>
           </a:p>
           <a:p>

--- a/倉管Agent_專案簡報.pptx
+++ b/倉管Agent_專案簡報.pptx
@@ -1581,7 +1581,7 @@
               <a:rPr sz="1200">
                 <a:latin typeface="Microsoft JhengHei"/>
               </a:rPr>
-              <a:t>守衛庫補課：ZH 1122→1149、EN 892→938（7/20、7/25 後停止成長的缺口已補），下週要補課，否則新修的功能沒有防退步保護。</a:t>
+              <a:t>測試句擴充：中文 →1149 句、英文 →938 句（近期修復已全數納入回歸），下週要補課，否則新修的功能沒有防退步保護。</a:t>
             </a:r>
           </a:p>
           <a:p>
@@ -16174,7 +16174,7 @@
                 </a:solidFill>
                 <a:latin typeface="Microsoft JhengHei"/>
               </a:rPr>
-              <a:t>但收斂是「逐條功能線」達標，不是全案結案：換新角度測（排程專項）</a:t>
+              <a:t>但收斂是「逐項功能」達標，不是全案結案：換新角度測（排程功能）</a:t>
             </a:r>
           </a:p>
           <a:p>
@@ -16190,7 +16190,7 @@
                 </a:solidFill>
                 <a:latin typeface="Microsoft JhengHei"/>
               </a:rPr>
-              <a:t>仍抓到 4 個破口，實際使用回報 4 件。⇒ 下週持續：新角度輪 + 守衛</a:t>
+              <a:t>仍抓到 4 個問題，實際使用回報 4 件。⇒ 下週持續：新角度測試 +</a:t>
             </a:r>
           </a:p>
           <a:p>
@@ -16206,7 +16206,7 @@
                 </a:solidFill>
                 <a:latin typeface="Microsoft JhengHei"/>
               </a:rPr>
-              <a:t>庫補課（近期修復尚未全數納入回歸語料）。</a:t>
+              <a:t>真人語音驗證，每輪抓到的都會補進測試庫。</a:t>
             </a:r>
           </a:p>
         </p:txBody>
@@ -16300,7 +16300,7 @@
                 </a:solidFill>
                 <a:latin typeface="Microsoft JhengHei"/>
               </a:rPr>
-              <a:t>▸  下週續辦：新角度輪、守衛庫補課、真人語音驗證   </a:t>
+              <a:t>▸  下週續辦：新角度測試、測試句擴充、真人語音驗證   </a:t>
             </a:r>
             <a:r>
               <a:rPr sz="1350" b="1">

--- a/倉管Agent_專案簡報.pptx
+++ b/倉管Agent_專案簡報.pptx
@@ -2902,7 +2902,31 @@
               <a:rPr sz="1200">
                 <a:latin typeface="Microsoft JhengHei"/>
               </a:rPr>
-              <a:t>★真人語音實測頁（誠實面對落差，技術評審會問「你們測過真人嗎」）。**這是英文版第一份真人語音數據**——先前所有英文語音數字都來自 TTS 合成音。三段對照：①TTS 92%（US 腔 100 句）②真人非母語 55%（台灣腔 38 句，同一支 C930 麥克風、同一顆 whisper small-q5_0 模型、走完整語音鏈到倉管判定）③加 ASR 容錯層後 **79%**——關鍵是**同一批音檔、沒有重錄**，只在 ASR 出口加規則。**TTS 高估了 37 個百分點**，這與中文版的經驗一致（當時合成音 clean 100%、真人首測只有 35/52）——所以這個專案的鐵則是：合成音只能當下限篩檢，**掛了肯定不行，過了不代表可用**。三類錯法要分清楚：詞尾被吞（shipped→shed）是非母語者通病但母語者也有；連音（sun hat→some heat）母語者講快時更容易發生；整詞被替換（trash bags→trespass life）則**沒有可用訊號能修**，硬修會誤傷正常查詢，誠實留著。容錯層只收「有規律且驗證過不誤傷」的三類，並在真人音檔上驗證 +24%。⚠️ 評審若追問可靠度，要主動說明：79% 是 user 重錄挑最好那次的結果，**一次命中率更低**；展場訪客只有一次機會。母語者預估 75-85%（TTS 測五個腔調 GB93/US92/AU90/IN90/SG77，但 TTS 不等於真人）。最後一句是設計取捨：答不出來時系統會**誠實反問**而不是亂猜，所以錯的時候不會給出錯誤數字——這比硬湊一個答案安全。</a:t>
+              <a:t>★真人語音實測頁（誠實面對落差，技術評審會問「你們測過真人嗎」）。**這是英文版第一份真人語音數據**——先前所有英文語音數字都來自 TTS 合成音。三段對照（同一批 100 句、同一顆模型）：①電腦合成音 87%（美式腔）②真人台灣腔 38%（只換人念，其餘條件全同）③真人這批加容錯層後 **80%**——關鍵是**同一批音檔、沒有重錄**，只在辨識出口加修正規則。</a:t>
+            </a:r>
+          </a:p>
+          <a:p>
+            <a:r>
+              <a:rPr sz="1200">
+                <a:latin typeface="Microsoft JhengHei"/>
+              </a:rPr>
+              <a:t>前兩格都是「模型聽對幾句」（一字不差、未加容錯），所以可以公平對照；第三格才是掛上容錯層之後系統實際答對幾句。</a:t>
+            </a:r>
+          </a:p>
+          <a:p>
+            <a:r>
+              <a:rPr sz="1200">
+                <a:latin typeface="Microsoft JhengHei"/>
+              </a:rPr>
+              <a:t>**合成音高估了 49 個百分點**（87% vs 38%），這與中文版經驗一致——所以本專案鐵則：合成音只能當下限篩檢，真人數字才是驗收標準。</a:t>
+            </a:r>
+          </a:p>
+          <a:p>
+            <a:r>
+              <a:rPr sz="1200">
+                <a:latin typeface="Microsoft JhengHei"/>
+              </a:rPr>
+              <a:t>★ 若被問「為何不是 100%」：容錯層是規則比對，只能修「看起來很像正解」的錯誤（earphones→earphone）。當模型把整句聽成別的東西（send 30 yoga mats → 13. yogurt mixed）就無從修起，那要靠換模型。救不回的 20 句會反問「請再說一次」，不會硬猜答錯。</a:t>
             </a:r>
           </a:p>
         </p:txBody>
@@ -39471,7 +39495,7 @@
                 </a:solidFill>
                 <a:latin typeface="Microsoft JhengHei"/>
               </a:rPr>
-              <a:t>TTS 基準批結果：噪音幾乎不影響（真實賣場環境音混入）</a:t>
+              <a:t>合成音基準批：混入賣場環境音後幾乎不受影響（此為系統答對率，含容錯層）</a:t>
             </a:r>
           </a:p>
         </p:txBody>
@@ -40761,7 +40785,7 @@
                 </a:solidFill>
                 <a:latin typeface="Microsoft JhengHei"/>
               </a:rPr>
-              <a:t>合成音 92%，真人首測 55%——合成音會嚴重高估（下頁為補滿 100 句的現況）</a:t>
+              <a:t>合成音 87%，真人 38%——合成音會嚴重高估真實表現</a:t>
             </a:r>
           </a:p>
         </p:txBody>
@@ -40800,7 +40824,7 @@
                 </a:solidFill>
                 <a:latin typeface="Microsoft JhengHei"/>
               </a:rPr>
-              <a:t>先前所有英文語音數據都來自 TTS。這次請真人（非母語者）先錄 38 句抽樣（後補滿 100 句，見下頁），用展場實際會部署的模型與麥克風測完整語音鏈。</a:t>
+              <a:t>先前所有英文語音數據都來自電腦合成音。這次請真人（非母語者）錄滿 100 句，用展場實際會部署的模型與麥克風測完整語音鏈。</a:t>
             </a:r>
           </a:p>
         </p:txBody>
@@ -40885,7 +40909,7 @@
                 </a:solidFill>
                 <a:latin typeface="Microsoft JhengHei"/>
               </a:rPr>
-              <a:t>TTS 合成音</a:t>
+              <a:t>電腦合成音</a:t>
             </a:r>
           </a:p>
         </p:txBody>
@@ -40924,7 +40948,7 @@
                 </a:solidFill>
                 <a:latin typeface="Arial"/>
               </a:rPr>
-              <a:t>92%</a:t>
+              <a:t>87%</a:t>
             </a:r>
           </a:p>
         </p:txBody>
@@ -40963,7 +40987,7 @@
                 </a:solidFill>
                 <a:latin typeface="Microsoft JhengHei"/>
               </a:rPr>
-              <a:t>US 腔 100 句 · 咬字標準、無語速變化</a:t>
+              <a:t>美式腔 100 句 · 咬字標準、語速平穩（未加容錯）</a:t>
             </a:r>
           </a:p>
         </p:txBody>
@@ -41048,7 +41072,7 @@
                 </a:solidFill>
                 <a:latin typeface="Microsoft JhengHei"/>
               </a:rPr>
-              <a:t>真人（非母語）</a:t>
+              <a:t>真人念（台灣腔）</a:t>
             </a:r>
           </a:p>
         </p:txBody>
@@ -41087,7 +41111,7 @@
                 </a:solidFill>
                 <a:latin typeface="Arial"/>
               </a:rPr>
-              <a:t>55%</a:t>
+              <a:t>38%</a:t>
             </a:r>
           </a:p>
         </p:txBody>
@@ -41126,7 +41150,7 @@
                 </a:solidFill>
                 <a:latin typeface="Microsoft JhengHei"/>
               </a:rPr>
-              <a:t>台灣腔首測 38 句抽樣（後補滿100句→下頁） · 同麥克風同模型</a:t>
+              <a:t>台灣腔 100 句 · 同麥克風同模型（未加容錯）</a:t>
             </a:r>
           </a:p>
         </p:txBody>
@@ -41211,7 +41235,7 @@
                 </a:solidFill>
                 <a:latin typeface="Microsoft JhengHei"/>
               </a:rPr>
-              <a:t>＋ ASR 容錯層</a:t>
+              <a:t>＋ 容錯層</a:t>
             </a:r>
           </a:p>
         </p:txBody>
@@ -41250,7 +41274,7 @@
                 </a:solidFill>
                 <a:latin typeface="Arial"/>
               </a:rPr>
-              <a:t>79%</a:t>
+              <a:t>80%</a:t>
             </a:r>
           </a:p>
         </p:txBody>
@@ -41289,7 +41313,7 @@
                 </a:solidFill>
                 <a:latin typeface="Microsoft JhengHei"/>
               </a:rPr>
-              <a:t>同一批音檔，沒重錄、只加規則</a:t>
+              <a:t>同一批錄音沒重錄，只加修正規則</a:t>
             </a:r>
           </a:p>
         </p:txBody>
@@ -41328,7 +41352,7 @@
                 </a:solidFill>
                 <a:latin typeface="Microsoft JhengHei"/>
               </a:rPr>
-              <a:t>為什麼落差這麼大——這正是「合成音會嚴重高估」的又一次驗證（本頁為 38 句首測；補滿 100 句後的最新結果見後頁，安靜環境 80%）</a:t>
+              <a:t>為什麼落差這麼大——這正是「合成音會嚴重高估」的又一次驗證（同一批 100 句錄音；下頁再測不同背景音下的表現）</a:t>
             </a:r>
           </a:p>
         </p:txBody>
@@ -41905,7 +41929,7 @@
                 </a:solidFill>
                 <a:latin typeface="Microsoft JhengHei"/>
               </a:rPr>
-              <a:t>55% → 79%（+24 個百分點），完全沒有重錄</a:t>
+              <a:t>38% → 80%（+42 個百分點），完全沒有重錄</a:t>
             </a:r>
             <a:r>
               <a:rPr sz="1150" b="0">
@@ -41962,7 +41986,7 @@
                 </a:solidFill>
                 <a:latin typeface="Microsoft JhengHei"/>
               </a:rPr>
-              <a:t>79% 是「重錄挑最好那次」的結果，一次命中率更低</a:t>
+              <a:t>80% 是同一批錄音的結果，救不回的會反問而非答錯</a:t>
             </a:r>
             <a:r>
               <a:rPr sz="1150" b="0">

--- a/倉管Agent_專案簡報.pptx
+++ b/倉管Agent_專案簡報.pptx
@@ -2902,7 +2902,7 @@
               <a:rPr sz="1200">
                 <a:latin typeface="Microsoft JhengHei"/>
               </a:rPr>
-              <a:t>★真人語音實測頁（誠實面對落差，技術評審會問「你們測過真人嗎」）。**這是英文版第一份真人語音數據**——先前所有英文語音數字都來自 TTS 合成音。三段對照（同一批 100 句、同一顆模型）：①電腦合成音 87%（美式腔）②真人台灣腔 38%（只換人念，其餘條件全同）③真人這批加容錯層後 **80%**——關鍵是**同一批音檔、沒有重錄**，只在辨識出口加修正規則。</a:t>
+              <a:t>★真人語音實測頁（誠實面對落差，技術評審會問「你們測過真人嗎」）。**這是英文版第一份真人語音數據**——先前所有英文語音數字都來自 TTS 合成音。三段對照（同一批 100 句、同一顆模型）：①電腦合成音 87%（美式腔）②真人台灣腔 39%（只換人念，其餘條件全同）③真人這批加容錯層後 **80%**——關鍵是**同一批音檔、沒有重錄**，只在辨識出口加修正規則。</a:t>
             </a:r>
           </a:p>
           <a:p>
@@ -2918,7 +2918,7 @@
               <a:rPr sz="1200">
                 <a:latin typeface="Microsoft JhengHei"/>
               </a:rPr>
-              <a:t>**合成音高估了 49 個百分點**（87% vs 38%），這與中文版經驗一致——所以本專案鐵則：合成音只能當下限篩檢，真人數字才是驗收標準。</a:t>
+              <a:t>**合成音高估了 48 個百分點**（87% vs 39%），這與中文版經驗一致——所以本專案鐵則：合成音只能當下限篩檢，真人數字才是驗收標準。</a:t>
             </a:r>
           </a:p>
           <a:p>
@@ -40785,7 +40785,7 @@
                 </a:solidFill>
                 <a:latin typeface="Microsoft JhengHei"/>
               </a:rPr>
-              <a:t>合成音 87%，真人 38%——合成音會嚴重高估真實表現</a:t>
+              <a:t>合成音 87%，真人 39%——合成音會嚴重高估真實表現</a:t>
             </a:r>
           </a:p>
         </p:txBody>
@@ -41111,7 +41111,7 @@
                 </a:solidFill>
                 <a:latin typeface="Arial"/>
               </a:rPr>
-              <a:t>38%</a:t>
+              <a:t>39%</a:t>
             </a:r>
           </a:p>
         </p:txBody>
@@ -41929,7 +41929,7 @@
                 </a:solidFill>
                 <a:latin typeface="Microsoft JhengHei"/>
               </a:rPr>
-              <a:t>38% → 80%（+42 個百分點），完全沒有重錄</a:t>
+              <a:t>39% → 80%（+41 個百分點），完全沒有重錄</a:t>
             </a:r>
             <a:r>
               <a:rPr sz="1150" b="0">
